--- a/poc/1_MeetingMinutes/0821_slide.pptx
+++ b/poc/1_MeetingMinutes/0821_slide.pptx
@@ -3457,8 +3457,8 @@
         </p:nvSpPr>
         <p:spPr>
           <a:xfrm>
-            <a:off x="566928" y="2112264"/>
-            <a:ext cx="11057839" cy="292608"/>
+            <a:off x="566928" y="2181606"/>
+            <a:ext cx="11057839" cy="285750"/>
           </a:xfrm>
           <a:prstGeom prst="rect">
             <a:avLst/>
@@ -3491,7 +3491,7 @@
         </p:nvSpPr>
         <p:spPr>
           <a:xfrm>
-            <a:off x="566928" y="2514600"/>
+            <a:off x="566928" y="2595372"/>
             <a:ext cx="11057839" cy="365760"/>
           </a:xfrm>
           <a:prstGeom prst="rect">
@@ -3539,8 +3539,8 @@
         </p:nvSpPr>
         <p:spPr>
           <a:xfrm>
-            <a:off x="566928" y="2916936"/>
-            <a:ext cx="11057839" cy="292608"/>
+            <a:off x="566928" y="3067050"/>
+            <a:ext cx="11057839" cy="285750"/>
           </a:xfrm>
           <a:prstGeom prst="rect">
             <a:avLst/>
@@ -3573,7 +3573,7 @@
         </p:nvSpPr>
         <p:spPr>
           <a:xfrm>
-            <a:off x="566928" y="3319272"/>
+            <a:off x="566928" y="3480816"/>
             <a:ext cx="11057839" cy="365760"/>
           </a:xfrm>
           <a:prstGeom prst="rect">
@@ -3621,8 +3621,8 @@
         </p:nvSpPr>
         <p:spPr>
           <a:xfrm>
-            <a:off x="566928" y="3721608"/>
-            <a:ext cx="11057839" cy="292608"/>
+            <a:off x="566928" y="3952494"/>
+            <a:ext cx="11057839" cy="571500"/>
           </a:xfrm>
           <a:prstGeom prst="rect">
             <a:avLst/>
@@ -3655,7 +3655,7 @@
         </p:nvSpPr>
         <p:spPr>
           <a:xfrm>
-            <a:off x="566928" y="4123944"/>
+            <a:off x="566928" y="4652010"/>
             <a:ext cx="11057839" cy="365760"/>
           </a:xfrm>
           <a:prstGeom prst="rect">
@@ -3703,8 +3703,8 @@
         </p:nvSpPr>
         <p:spPr>
           <a:xfrm>
-            <a:off x="566928" y="4526280"/>
-            <a:ext cx="11057839" cy="292608"/>
+            <a:off x="566928" y="5123688"/>
+            <a:ext cx="11057839" cy="285750"/>
           </a:xfrm>
           <a:prstGeom prst="rect">
             <a:avLst/>
@@ -3737,7 +3737,7 @@
         </p:nvSpPr>
         <p:spPr>
           <a:xfrm>
-            <a:off x="566928" y="4928616"/>
+            <a:off x="566928" y="5537454"/>
             <a:ext cx="11057839" cy="365760"/>
           </a:xfrm>
           <a:prstGeom prst="rect">
@@ -3785,8 +3785,8 @@
         </p:nvSpPr>
         <p:spPr>
           <a:xfrm>
-            <a:off x="566928" y="5330952"/>
-            <a:ext cx="11057839" cy="292608"/>
+            <a:off x="566928" y="6009132"/>
+            <a:ext cx="11057839" cy="285750"/>
           </a:xfrm>
           <a:prstGeom prst="rect">
             <a:avLst/>
@@ -3976,7 +3976,7 @@
         </p:nvGraphicFramePr>
         <p:xfrm>
           <a:off x="566928" y="1709928"/>
-          <a:ext cx="11057838" cy="2432304"/>
+          <a:ext cx="11057838" cy="2252726"/>
         </p:xfrm>
         <a:graphic>
           <a:graphicData uri="http://schemas.openxmlformats.org/drawingml/2006/table">
@@ -3985,10 +3985,10 @@
                 <a:tableStyleId>{5C22544A-7EE6-4342-B048-85BDC9FD1C3A}</a:tableStyleId>
               </a:tblPr>
               <a:tblGrid>
-                <a:gridCol w="5528919"/>
-                <a:gridCol w="5528919"/>
+                <a:gridCol w="5364545"/>
+                <a:gridCol w="5693293"/>
               </a:tblGrid>
-              <a:tr h="347472">
+              <a:tr h="321818">
                 <a:tc>
                   <a:txBody>
                     <a:bodyPr wrap="square"/>
@@ -4036,7 +4036,7 @@
                   </a:tcPr>
                 </a:tc>
               </a:tr>
-              <a:tr h="347472">
+              <a:tr h="321818">
                 <a:tc>
                   <a:txBody>
                     <a:bodyPr wrap="square"/>
@@ -4084,7 +4084,7 @@
                   </a:tcPr>
                 </a:tc>
               </a:tr>
-              <a:tr h="347472">
+              <a:tr h="321818">
                 <a:tc>
                   <a:txBody>
                     <a:bodyPr wrap="square"/>
@@ -4132,7 +4132,7 @@
                   </a:tcPr>
                 </a:tc>
               </a:tr>
-              <a:tr h="347472">
+              <a:tr h="321818">
                 <a:tc>
                   <a:txBody>
                     <a:bodyPr wrap="square"/>
@@ -4180,7 +4180,7 @@
                   </a:tcPr>
                 </a:tc>
               </a:tr>
-              <a:tr h="347472">
+              <a:tr h="321818">
                 <a:tc>
                   <a:txBody>
                     <a:bodyPr wrap="square"/>
@@ -4228,7 +4228,7 @@
                   </a:tcPr>
                 </a:tc>
               </a:tr>
-              <a:tr h="347472">
+              <a:tr h="321818">
                 <a:tc>
                   <a:txBody>
                     <a:bodyPr wrap="square"/>
@@ -4276,7 +4276,7 @@
                   </a:tcPr>
                 </a:tc>
               </a:tr>
-              <a:tr h="347472">
+              <a:tr h="321818">
                 <a:tc>
                   <a:txBody>
                     <a:bodyPr wrap="square"/>
@@ -4336,8 +4336,8 @@
         </p:nvSpPr>
         <p:spPr>
           <a:xfrm>
-            <a:off x="694944" y="4361688"/>
-            <a:ext cx="10929823" cy="274320"/>
+            <a:off x="694944" y="4182110"/>
+            <a:ext cx="10929823" cy="279400"/>
           </a:xfrm>
           <a:prstGeom prst="rect">
             <a:avLst/>
@@ -4370,8 +4370,8 @@
         </p:nvSpPr>
         <p:spPr>
           <a:xfrm>
-            <a:off x="566928" y="4361688"/>
-            <a:ext cx="26000" cy="274320"/>
+            <a:off x="566928" y="4182110"/>
+            <a:ext cx="26000" cy="279400"/>
           </a:xfrm>
           <a:prstGeom prst="rect">
             <a:avLst/>
@@ -4571,7 +4571,7 @@
         </p:nvGraphicFramePr>
         <p:xfrm>
           <a:off x="566928" y="1709928"/>
-          <a:ext cx="11057837" cy="2084832"/>
+          <a:ext cx="11057838" cy="3219958"/>
         </p:xfrm>
         <a:graphic>
           <a:graphicData uri="http://schemas.openxmlformats.org/drawingml/2006/table">
@@ -4580,12 +4580,12 @@
                 <a:tableStyleId>{5C22544A-7EE6-4342-B048-85BDC9FD1C3A}</a:tableStyleId>
               </a:tblPr>
               <a:tblGrid>
-                <a:gridCol w="1937139"/>
-                <a:gridCol w="4519992"/>
-                <a:gridCol w="2421424"/>
-                <a:gridCol w="2179282"/>
+                <a:gridCol w="2077726"/>
+                <a:gridCol w="4036483"/>
+                <a:gridCol w="2500495"/>
+                <a:gridCol w="2443134"/>
               </a:tblGrid>
-              <a:tr h="347472">
+              <a:tr h="321818">
                 <a:tc>
                   <a:txBody>
                     <a:bodyPr wrap="square"/>
@@ -4679,7 +4679,7 @@
                   </a:tcPr>
                 </a:tc>
               </a:tr>
-              <a:tr h="347472">
+              <a:tr h="579628">
                 <a:tc>
                   <a:txBody>
                     <a:bodyPr wrap="square"/>
@@ -4773,7 +4773,7 @@
                   </a:tcPr>
                 </a:tc>
               </a:tr>
-              <a:tr h="347472">
+              <a:tr h="579628">
                 <a:tc>
                   <a:txBody>
                     <a:bodyPr wrap="square"/>
@@ -4867,7 +4867,7 @@
                   </a:tcPr>
                 </a:tc>
               </a:tr>
-              <a:tr h="347472">
+              <a:tr h="579628">
                 <a:tc>
                   <a:txBody>
                     <a:bodyPr wrap="square"/>
@@ -4970,7 +4970,7 @@
                   </a:tcPr>
                 </a:tc>
               </a:tr>
-              <a:tr h="347472">
+              <a:tr h="579628">
                 <a:tc>
                   <a:txBody>
                     <a:bodyPr wrap="square"/>
@@ -5064,7 +5064,7 @@
                   </a:tcPr>
                 </a:tc>
               </a:tr>
-              <a:tr h="347472">
+              <a:tr h="579628">
                 <a:tc>
                   <a:txBody>
                     <a:bodyPr wrap="square"/>
@@ -5170,8 +5170,8 @@
         </p:nvSpPr>
         <p:spPr>
           <a:xfrm>
-            <a:off x="566928" y="3977640"/>
-            <a:ext cx="11057839" cy="585216"/>
+            <a:off x="566928" y="5112766"/>
+            <a:ext cx="11057839" cy="603250"/>
           </a:xfrm>
           <a:prstGeom prst="rect">
             <a:avLst/>
@@ -5662,7 +5662,7 @@
         <p:spPr>
           <a:xfrm>
             <a:off x="694944" y="5440680"/>
-            <a:ext cx="10929823" cy="274320"/>
+            <a:ext cx="10929823" cy="263525"/>
           </a:xfrm>
           <a:prstGeom prst="rect">
             <a:avLst/>
@@ -5696,7 +5696,7 @@
         <p:spPr>
           <a:xfrm>
             <a:off x="566928" y="5440680"/>
-            <a:ext cx="26000" cy="274320"/>
+            <a:ext cx="26000" cy="263525"/>
           </a:xfrm>
           <a:prstGeom prst="rect">
             <a:avLst/>
@@ -5914,7 +5914,7 @@
               </a:spcAft>
             </a:pPr>
             <a:r>
-              <a:rPr sz="1800">
+              <a:rPr sz="1900">
                 <a:solidFill>
                   <a:srgbClr val="8A96A3"/>
                 </a:solidFill>
@@ -5923,7 +5923,7 @@
               <a:t>1. </a:t>
             </a:r>
             <a:r>
-              <a:rPr sz="1800" b="1">
+              <a:rPr sz="1900" b="1">
                 <a:solidFill>
                   <a:srgbClr val="C0392B"/>
                 </a:solidFill>
@@ -5932,7 +5932,7 @@
               <a:t>是否採 Option B</a:t>
             </a:r>
             <a:r>
-              <a:rPr sz="1800" b="0">
+              <a:rPr sz="1900" b="0">
                 <a:solidFill>
                   <a:srgbClr val="22303F"/>
                 </a:solidFill>
@@ -5948,7 +5948,7 @@
               </a:spcAft>
             </a:pPr>
             <a:r>
-              <a:rPr sz="1800">
+              <a:rPr sz="1900">
                 <a:solidFill>
                   <a:srgbClr val="8A96A3"/>
                 </a:solidFill>
@@ -5957,7 +5957,7 @@
               <a:t>2. </a:t>
             </a:r>
             <a:r>
-              <a:rPr sz="1800" b="1">
+              <a:rPr sz="1900" b="1">
                 <a:solidFill>
                   <a:srgbClr val="C0392B"/>
                 </a:solidFill>
@@ -5966,7 +5966,7 @@
               <a:t>由 TSD 指派應用 owner</a:t>
             </a:r>
             <a:r>
-              <a:rPr sz="1800" b="0">
+              <a:rPr sz="1900" b="0">
                 <a:solidFill>
                   <a:srgbClr val="22303F"/>
                 </a:solidFill>
@@ -5982,7 +5982,7 @@
               </a:spcAft>
             </a:pPr>
             <a:r>
-              <a:rPr sz="1800">
+              <a:rPr sz="1900">
                 <a:solidFill>
                   <a:srgbClr val="8A96A3"/>
                 </a:solidFill>
@@ -5991,7 +5991,7 @@
               <a:t>3. </a:t>
             </a:r>
             <a:r>
-              <a:rPr sz="1800" b="1">
+              <a:rPr sz="1900" b="1">
                 <a:solidFill>
                   <a:srgbClr val="C0392B"/>
                 </a:solidFill>
@@ -6000,7 +6000,7 @@
               <a:t>確認 Pilot 情境</a:t>
             </a:r>
             <a:r>
-              <a:rPr sz="1800" b="0">
+              <a:rPr sz="1900" b="0">
                 <a:solidFill>
                   <a:srgbClr val="22303F"/>
                 </a:solidFill>
@@ -6016,7 +6016,7 @@
               </a:spcAft>
             </a:pPr>
             <a:r>
-              <a:rPr sz="1800">
+              <a:rPr sz="1900">
                 <a:solidFill>
                   <a:srgbClr val="8A96A3"/>
                 </a:solidFill>
@@ -6025,7 +6025,7 @@
               <a:t>4. </a:t>
             </a:r>
             <a:r>
-              <a:rPr sz="1800" b="1">
+              <a:rPr sz="1900" b="1">
                 <a:solidFill>
                   <a:srgbClr val="C0392B"/>
                 </a:solidFill>
@@ -6034,7 +6034,7 @@
               <a:t>定義服務驗收</a:t>
             </a:r>
             <a:r>
-              <a:rPr sz="1800" b="0">
+              <a:rPr sz="1900" b="0">
                 <a:solidFill>
                   <a:srgbClr val="22303F"/>
                 </a:solidFill>
@@ -6050,7 +6050,7 @@
               </a:spcAft>
             </a:pPr>
             <a:r>
-              <a:rPr sz="1800">
+              <a:rPr sz="1900">
                 <a:solidFill>
                   <a:srgbClr val="8A96A3"/>
                 </a:solidFill>
@@ -6059,7 +6059,7 @@
               <a:t>5. </a:t>
             </a:r>
             <a:r>
-              <a:rPr sz="1800" b="1">
+              <a:rPr sz="1900" b="1">
                 <a:solidFill>
                   <a:srgbClr val="C0392B"/>
                 </a:solidFill>
@@ -6068,7 +6068,7 @@
               <a:t>啟動原廠正式詢價與成本資料蒐集</a:t>
             </a:r>
             <a:r>
-              <a:rPr sz="1800" b="0">
+              <a:rPr sz="1900" b="0">
                 <a:solidFill>
                   <a:srgbClr val="22303F"/>
                 </a:solidFill>
@@ -6087,8 +6087,8 @@
         </p:nvSpPr>
         <p:spPr>
           <a:xfrm>
-            <a:off x="694944" y="4014216"/>
-            <a:ext cx="10929823" cy="274320"/>
+            <a:off x="694944" y="3745357"/>
+            <a:ext cx="10929823" cy="279400"/>
           </a:xfrm>
           <a:prstGeom prst="rect">
             <a:avLst/>
@@ -6102,7 +6102,7 @@
           <a:lstStyle/>
           <a:p>
             <a:r>
-              <a:rPr sz="1500" b="0">
+              <a:rPr sz="1600" b="0">
                 <a:solidFill>
                   <a:srgbClr val="8A96A3"/>
                 </a:solidFill>
@@ -6121,8 +6121,8 @@
         </p:nvSpPr>
         <p:spPr>
           <a:xfrm>
-            <a:off x="566928" y="4014216"/>
-            <a:ext cx="26000" cy="274320"/>
+            <a:off x="566928" y="3745357"/>
+            <a:ext cx="26000" cy="279400"/>
           </a:xfrm>
           <a:prstGeom prst="rect">
             <a:avLst/>
@@ -6478,7 +6478,7 @@
         </p:nvGraphicFramePr>
         <p:xfrm>
           <a:off x="566928" y="1709928"/>
-          <a:ext cx="11057838" cy="2084832"/>
+          <a:ext cx="11057838" cy="1865376"/>
         </p:xfrm>
         <a:graphic>
           <a:graphicData uri="http://schemas.openxmlformats.org/drawingml/2006/table">
@@ -6487,11 +6487,11 @@
                 <a:tableStyleId>{5C22544A-7EE6-4342-B048-85BDC9FD1C3A}</a:tableStyleId>
               </a:tblPr>
               <a:tblGrid>
-                <a:gridCol w="1460469"/>
-                <a:gridCol w="7302346"/>
-                <a:gridCol w="2295023"/>
+                <a:gridCol w="1888311"/>
+                <a:gridCol w="6971795"/>
+                <a:gridCol w="2197732"/>
               </a:tblGrid>
-              <a:tr h="347472">
+              <a:tr h="310896">
                 <a:tc>
                   <a:txBody>
                     <a:bodyPr wrap="square"/>
@@ -6562,7 +6562,7 @@
                   </a:tcPr>
                 </a:tc>
               </a:tr>
-              <a:tr h="347472">
+              <a:tr h="310896">
                 <a:tc>
                   <a:txBody>
                     <a:bodyPr wrap="square"/>
@@ -6633,7 +6633,7 @@
                   </a:tcPr>
                 </a:tc>
               </a:tr>
-              <a:tr h="347472">
+              <a:tr h="310896">
                 <a:tc>
                   <a:txBody>
                     <a:bodyPr wrap="square"/>
@@ -6704,7 +6704,7 @@
                   </a:tcPr>
                 </a:tc>
               </a:tr>
-              <a:tr h="347472">
+              <a:tr h="310896">
                 <a:tc>
                   <a:txBody>
                     <a:bodyPr wrap="square"/>
@@ -6775,7 +6775,7 @@
                   </a:tcPr>
                 </a:tc>
               </a:tr>
-              <a:tr h="347472">
+              <a:tr h="310896">
                 <a:tc>
                   <a:txBody>
                     <a:bodyPr wrap="square"/>
@@ -6846,7 +6846,7 @@
                   </a:tcPr>
                 </a:tc>
               </a:tr>
-              <a:tr h="347472">
+              <a:tr h="310896">
                 <a:tc>
                   <a:txBody>
                     <a:bodyPr wrap="square"/>
@@ -6929,8 +6929,8 @@
         </p:nvSpPr>
         <p:spPr>
           <a:xfrm>
-            <a:off x="566928" y="3977640"/>
-            <a:ext cx="11057839" cy="292608"/>
+            <a:off x="566928" y="3758184"/>
+            <a:ext cx="11057839" cy="285750"/>
           </a:xfrm>
           <a:prstGeom prst="rect">
             <a:avLst/>
@@ -6963,8 +6963,8 @@
         </p:nvSpPr>
         <p:spPr>
           <a:xfrm>
-            <a:off x="694944" y="4416552"/>
-            <a:ext cx="10929823" cy="274320"/>
+            <a:off x="694944" y="4208526"/>
+            <a:ext cx="10929823" cy="263525"/>
           </a:xfrm>
           <a:prstGeom prst="rect">
             <a:avLst/>
@@ -7016,8 +7016,8 @@
         </p:nvSpPr>
         <p:spPr>
           <a:xfrm>
-            <a:off x="566928" y="4416552"/>
-            <a:ext cx="26000" cy="274320"/>
+            <a:off x="566928" y="4208526"/>
+            <a:ext cx="26000" cy="263525"/>
           </a:xfrm>
           <a:prstGeom prst="rect">
             <a:avLst/>
@@ -7060,8 +7060,8 @@
         </p:nvSpPr>
         <p:spPr>
           <a:xfrm>
-            <a:off x="566928" y="4818888"/>
-            <a:ext cx="11057839" cy="585216"/>
+            <a:off x="566928" y="4600067"/>
+            <a:ext cx="11057839" cy="571500"/>
           </a:xfrm>
           <a:prstGeom prst="rect">
             <a:avLst/>
@@ -7103,8 +7103,8 @@
         </p:nvSpPr>
         <p:spPr>
           <a:xfrm>
-            <a:off x="694944" y="5568696"/>
-            <a:ext cx="10929823" cy="274320"/>
+            <a:off x="694944" y="5336159"/>
+            <a:ext cx="10929823" cy="263525"/>
           </a:xfrm>
           <a:prstGeom prst="rect">
             <a:avLst/>
@@ -7156,8 +7156,8 @@
         </p:nvSpPr>
         <p:spPr>
           <a:xfrm>
-            <a:off x="566928" y="5568696"/>
-            <a:ext cx="26000" cy="274320"/>
+            <a:off x="566928" y="5336159"/>
+            <a:ext cx="26000" cy="263525"/>
           </a:xfrm>
           <a:prstGeom prst="rect">
             <a:avLst/>
@@ -7637,7 +7637,7 @@
         </p:nvSpPr>
         <p:spPr>
           <a:xfrm>
-            <a:off x="566928" y="11841480"/>
+            <a:off x="566928" y="3606292"/>
             <a:ext cx="11057839" cy="310896"/>
           </a:xfrm>
           <a:prstGeom prst="rect">
@@ -7671,7 +7671,7 @@
         </p:nvSpPr>
         <p:spPr>
           <a:xfrm>
-            <a:off x="566928" y="12243816"/>
+            <a:off x="566928" y="4008628"/>
             <a:ext cx="11057839" cy="1463040"/>
           </a:xfrm>
           <a:prstGeom prst="rect">
@@ -7955,7 +7955,7 @@
         </p:nvGraphicFramePr>
         <p:xfrm>
           <a:off x="566928" y="1709928"/>
-          <a:ext cx="11057838" cy="1042416"/>
+          <a:ext cx="11057837" cy="965454"/>
         </p:xfrm>
         <a:graphic>
           <a:graphicData uri="http://schemas.openxmlformats.org/drawingml/2006/table">
@@ -7964,11 +7964,11 @@
                 <a:tableStyleId>{5C22544A-7EE6-4342-B048-85BDC9FD1C3A}</a:tableStyleId>
               </a:tblPr>
               <a:tblGrid>
-                <a:gridCol w="1474378"/>
-                <a:gridCol w="3685946"/>
-                <a:gridCol w="5897514"/>
+                <a:gridCol w="1386689"/>
+                <a:gridCol w="4093409"/>
+                <a:gridCol w="5577739"/>
               </a:tblGrid>
-              <a:tr h="347472">
+              <a:tr h="321818">
                 <a:tc>
                   <a:txBody>
                     <a:bodyPr wrap="square"/>
@@ -8039,7 +8039,7 @@
                   </a:tcPr>
                 </a:tc>
               </a:tr>
-              <a:tr h="347472">
+              <a:tr h="321818">
                 <a:tc>
                   <a:txBody>
                     <a:bodyPr wrap="square"/>
@@ -8169,7 +8169,7 @@
                   </a:tcPr>
                 </a:tc>
               </a:tr>
-              <a:tr h="347472">
+              <a:tr h="321818">
                 <a:tc>
                   <a:txBody>
                     <a:bodyPr wrap="square"/>
@@ -8311,8 +8311,8 @@
         </p:nvSpPr>
         <p:spPr>
           <a:xfrm>
-            <a:off x="694944" y="2971800"/>
-            <a:ext cx="10929823" cy="274320"/>
+            <a:off x="694944" y="2894838"/>
+            <a:ext cx="10929823" cy="558800"/>
           </a:xfrm>
           <a:prstGeom prst="rect">
             <a:avLst/>
@@ -8345,8 +8345,8 @@
         </p:nvSpPr>
         <p:spPr>
           <a:xfrm>
-            <a:off x="566928" y="2971800"/>
-            <a:ext cx="26000" cy="274320"/>
+            <a:off x="566928" y="2894838"/>
+            <a:ext cx="26000" cy="558800"/>
           </a:xfrm>
           <a:prstGeom prst="rect">
             <a:avLst/>
@@ -8546,7 +8546,7 @@
         </p:nvGraphicFramePr>
         <p:xfrm>
           <a:off x="566928" y="1709928"/>
-          <a:ext cx="11057838" cy="1042416"/>
+          <a:ext cx="11057838" cy="965454"/>
         </p:xfrm>
         <a:graphic>
           <a:graphicData uri="http://schemas.openxmlformats.org/drawingml/2006/table">
@@ -8555,11 +8555,11 @@
                 <a:tableStyleId>{5C22544A-7EE6-4342-B048-85BDC9FD1C3A}</a:tableStyleId>
               </a:tblPr>
               <a:tblGrid>
-                <a:gridCol w="1366699"/>
-                <a:gridCol w="5094060"/>
-                <a:gridCol w="4597079"/>
+                <a:gridCol w="1349041"/>
+                <a:gridCol w="5149682"/>
+                <a:gridCol w="4559115"/>
               </a:tblGrid>
-              <a:tr h="347472">
+              <a:tr h="321818">
                 <a:tc>
                   <a:txBody>
                     <a:bodyPr wrap="square"/>
@@ -8630,7 +8630,7 @@
                   </a:tcPr>
                 </a:tc>
               </a:tr>
-              <a:tr h="347472">
+              <a:tr h="321818">
                 <a:tc>
                   <a:txBody>
                     <a:bodyPr wrap="square"/>
@@ -8741,7 +8741,7 @@
                   </a:tcPr>
                 </a:tc>
               </a:tr>
-              <a:tr h="347472">
+              <a:tr h="321818">
                 <a:tc>
                   <a:txBody>
                     <a:bodyPr wrap="square"/>
@@ -8883,8 +8883,8 @@
         </p:nvSpPr>
         <p:spPr>
           <a:xfrm>
-            <a:off x="694944" y="2971800"/>
-            <a:ext cx="10929823" cy="274320"/>
+            <a:off x="694944" y="2894838"/>
+            <a:ext cx="10929823" cy="558800"/>
           </a:xfrm>
           <a:prstGeom prst="rect">
             <a:avLst/>
@@ -8917,8 +8917,8 @@
         </p:nvSpPr>
         <p:spPr>
           <a:xfrm>
-            <a:off x="566928" y="2971800"/>
-            <a:ext cx="26000" cy="274320"/>
+            <a:off x="566928" y="2894838"/>
+            <a:ext cx="26000" cy="558800"/>
           </a:xfrm>
           <a:prstGeom prst="rect">
             <a:avLst/>
@@ -9118,7 +9118,7 @@
         </p:nvGraphicFramePr>
         <p:xfrm>
           <a:off x="566928" y="1709928"/>
-          <a:ext cx="11057838" cy="2432304"/>
+          <a:ext cx="11057838" cy="2252726"/>
         </p:xfrm>
         <a:graphic>
           <a:graphicData uri="http://schemas.openxmlformats.org/drawingml/2006/table">
@@ -9127,10 +9127,10 @@
                 <a:tableStyleId>{5C22544A-7EE6-4342-B048-85BDC9FD1C3A}</a:tableStyleId>
               </a:tblPr>
               <a:tblGrid>
-                <a:gridCol w="1263753"/>
-                <a:gridCol w="9794085"/>
+                <a:gridCol w="1278081"/>
+                <a:gridCol w="9779757"/>
               </a:tblGrid>
-              <a:tr h="347472">
+              <a:tr h="321818">
                 <a:tc>
                   <a:txBody>
                     <a:bodyPr wrap="square"/>
@@ -9178,7 +9178,7 @@
                   </a:tcPr>
                 </a:tc>
               </a:tr>
-              <a:tr h="347472">
+              <a:tr h="321818">
                 <a:tc>
                   <a:txBody>
                     <a:bodyPr wrap="square"/>
@@ -9226,7 +9226,7 @@
                   </a:tcPr>
                 </a:tc>
               </a:tr>
-              <a:tr h="347472">
+              <a:tr h="321818">
                 <a:tc>
                   <a:txBody>
                     <a:bodyPr wrap="square"/>
@@ -9274,7 +9274,7 @@
                   </a:tcPr>
                 </a:tc>
               </a:tr>
-              <a:tr h="347472">
+              <a:tr h="321818">
                 <a:tc>
                   <a:txBody>
                     <a:bodyPr wrap="square"/>
@@ -9322,7 +9322,7 @@
                   </a:tcPr>
                 </a:tc>
               </a:tr>
-              <a:tr h="347472">
+              <a:tr h="321818">
                 <a:tc>
                   <a:txBody>
                     <a:bodyPr wrap="square"/>
@@ -9370,7 +9370,7 @@
                   </a:tcPr>
                 </a:tc>
               </a:tr>
-              <a:tr h="347472">
+              <a:tr h="321818">
                 <a:tc>
                   <a:txBody>
                     <a:bodyPr wrap="square"/>
@@ -9418,7 +9418,7 @@
                   </a:tcPr>
                 </a:tc>
               </a:tr>
-              <a:tr h="347472">
+              <a:tr h="321818">
                 <a:tc>
                   <a:txBody>
                     <a:bodyPr wrap="square"/>
@@ -9478,8 +9478,8 @@
         </p:nvSpPr>
         <p:spPr>
           <a:xfrm>
-            <a:off x="694944" y="4361688"/>
-            <a:ext cx="10929823" cy="274320"/>
+            <a:off x="694944" y="4182110"/>
+            <a:ext cx="10929823" cy="279400"/>
           </a:xfrm>
           <a:prstGeom prst="rect">
             <a:avLst/>
@@ -9512,8 +9512,8 @@
         </p:nvSpPr>
         <p:spPr>
           <a:xfrm>
-            <a:off x="566928" y="4361688"/>
-            <a:ext cx="26000" cy="274320"/>
+            <a:off x="566928" y="4182110"/>
+            <a:ext cx="26000" cy="279400"/>
           </a:xfrm>
           <a:prstGeom prst="rect">
             <a:avLst/>
@@ -9731,7 +9731,7 @@
               </a:spcAft>
             </a:pPr>
             <a:r>
-              <a:rPr sz="1700">
+              <a:rPr sz="1800">
                 <a:solidFill>
                   <a:srgbClr val="8A96A3"/>
                 </a:solidFill>
@@ -9740,7 +9740,7 @@
               <a:t>•  </a:t>
             </a:r>
             <a:r>
-              <a:rPr sz="1700" b="0">
+              <a:rPr sz="1800" b="0">
                 <a:solidFill>
                   <a:srgbClr val="22303F"/>
                 </a:solidFill>
@@ -9756,7 +9756,7 @@
               </a:spcAft>
             </a:pPr>
             <a:r>
-              <a:rPr sz="1700">
+              <a:rPr sz="1800">
                 <a:solidFill>
                   <a:srgbClr val="8A96A3"/>
                 </a:solidFill>
@@ -9765,7 +9765,7 @@
               <a:t>•  </a:t>
             </a:r>
             <a:r>
-              <a:rPr sz="1700" b="0">
+              <a:rPr sz="1800" b="0">
                 <a:solidFill>
                   <a:srgbClr val="22303F"/>
                 </a:solidFill>
@@ -9774,7 +9774,7 @@
               <a:t>目前多數效能 cell 為 </a:t>
             </a:r>
             <a:r>
-              <a:rPr sz="1700" b="0">
+              <a:rPr sz="1800" b="0">
                 <a:solidFill>
                   <a:srgbClr val="22303F"/>
                 </a:solidFill>
@@ -9783,7 +9783,7 @@
               <a:t>N=1</a:t>
             </a:r>
             <a:r>
-              <a:rPr sz="1700" b="0">
+              <a:rPr sz="1800" b="0">
                 <a:solidFill>
                   <a:srgbClr val="22303F"/>
                 </a:solidFill>
@@ -9799,7 +9799,7 @@
               </a:spcAft>
             </a:pPr>
             <a:r>
-              <a:rPr sz="1700">
+              <a:rPr sz="1800">
                 <a:solidFill>
                   <a:srgbClr val="8A96A3"/>
                 </a:solidFill>
@@ -9808,7 +9808,7 @@
               <a:t>•  </a:t>
             </a:r>
             <a:r>
-              <a:rPr sz="1700" b="0">
+              <a:rPr sz="1800" b="0">
                 <a:solidFill>
                   <a:srgbClr val="22303F"/>
                 </a:solidFill>
@@ -9817,7 +9817,7 @@
               <a:t>跨區結果屬探索性 scope（</a:t>
             </a:r>
             <a:r>
-              <a:rPr sz="1700" b="0">
+              <a:rPr sz="1800" b="0">
                 <a:solidFill>
                   <a:srgbClr val="22303F"/>
                 </a:solidFill>
@@ -9826,7 +9826,7 @@
               <a:t>baseline_eligible=false</a:t>
             </a:r>
             <a:r>
-              <a:rPr sz="1700" b="0">
+              <a:rPr sz="1800" b="0">
                 <a:solidFill>
                   <a:srgbClr val="22303F"/>
                 </a:solidFill>
@@ -9842,7 +9842,7 @@
               </a:spcAft>
             </a:pPr>
             <a:r>
-              <a:rPr sz="1700">
+              <a:rPr sz="1800">
                 <a:solidFill>
                   <a:srgbClr val="8A96A3"/>
                 </a:solidFill>
@@ -9851,7 +9851,7 @@
               <a:t>•  </a:t>
             </a:r>
             <a:r>
-              <a:rPr sz="1700" b="0">
+              <a:rPr sz="1800" b="0">
                 <a:solidFill>
                   <a:srgbClr val="22303F"/>
                 </a:solidFill>
@@ -9867,7 +9867,7 @@
               </a:spcAft>
             </a:pPr>
             <a:r>
-              <a:rPr sz="1700">
+              <a:rPr sz="1800">
                 <a:solidFill>
                   <a:srgbClr val="8A96A3"/>
                 </a:solidFill>
@@ -9876,7 +9876,7 @@
               <a:t>•  </a:t>
             </a:r>
             <a:r>
-              <a:rPr sz="1700" b="0">
+              <a:rPr sz="1800" b="0">
                 <a:solidFill>
                   <a:srgbClr val="22303F"/>
                 </a:solidFill>
@@ -9892,7 +9892,7 @@
               </a:spcAft>
             </a:pPr>
             <a:r>
-              <a:rPr sz="1700">
+              <a:rPr sz="1800">
                 <a:solidFill>
                   <a:srgbClr val="8A96A3"/>
                 </a:solidFill>
@@ -9901,7 +9901,7 @@
               <a:t>•  </a:t>
             </a:r>
             <a:r>
-              <a:rPr sz="1700" b="0">
+              <a:rPr sz="1800" b="0">
                 <a:solidFill>
                   <a:srgbClr val="22303F"/>
                 </a:solidFill>
@@ -9910,7 +9910,7 @@
               <a:t>完整限制、公式與 Fact／Inference 分層以</a:t>
             </a:r>
             <a:r>
-              <a:rPr sz="1700" b="0" u="sng">
+              <a:rPr sz="1800" b="0" u="sng">
                 <a:solidFill>
                   <a:srgbClr val="1B5EA8"/>
                 </a:solidFill>
@@ -9920,7 +9920,7 @@
               <a:t>評分 SSOT</a:t>
             </a:r>
             <a:r>
-              <a:rPr sz="1700" b="0">
+              <a:rPr sz="1800" b="0">
                 <a:solidFill>
                   <a:srgbClr val="22303F"/>
                 </a:solidFill>
@@ -10096,7 +10096,7 @@
         </p:nvGraphicFramePr>
         <p:xfrm>
           <a:off x="566928" y="1709928"/>
-          <a:ext cx="11057837" cy="2084832"/>
+          <a:ext cx="11057838" cy="1930908"/>
         </p:xfrm>
         <a:graphic>
           <a:graphicData uri="http://schemas.openxmlformats.org/drawingml/2006/table">
@@ -10105,11 +10105,11 @@
                 <a:tableStyleId>{5C22544A-7EE6-4342-B048-85BDC9FD1C3A}</a:tableStyleId>
               </a:tblPr>
               <a:tblGrid>
-                <a:gridCol w="1053127"/>
-                <a:gridCol w="2369536"/>
-                <a:gridCol w="7635174"/>
+                <a:gridCol w="986328"/>
+                <a:gridCol w="2717883"/>
+                <a:gridCol w="7353627"/>
               </a:tblGrid>
-              <a:tr h="347472">
+              <a:tr h="321818">
                 <a:tc>
                   <a:txBody>
                     <a:bodyPr wrap="square"/>
@@ -10180,7 +10180,7 @@
                   </a:tcPr>
                 </a:tc>
               </a:tr>
-              <a:tr h="347472">
+              <a:tr h="321818">
                 <a:tc>
                   <a:txBody>
                     <a:bodyPr wrap="square"/>
@@ -10252,7 +10252,7 @@
                   </a:tcPr>
                 </a:tc>
               </a:tr>
-              <a:tr h="347472">
+              <a:tr h="321818">
                 <a:tc>
                   <a:txBody>
                     <a:bodyPr wrap="square"/>
@@ -10324,7 +10324,7 @@
                   </a:tcPr>
                 </a:tc>
               </a:tr>
-              <a:tr h="347472">
+              <a:tr h="321818">
                 <a:tc>
                   <a:txBody>
                     <a:bodyPr wrap="square"/>
@@ -10396,7 +10396,7 @@
                   </a:tcPr>
                 </a:tc>
               </a:tr>
-              <a:tr h="347472">
+              <a:tr h="321818">
                 <a:tc>
                   <a:txBody>
                     <a:bodyPr wrap="square"/>
@@ -10468,7 +10468,7 @@
                   </a:tcPr>
                 </a:tc>
               </a:tr>
-              <a:tr h="347472">
+              <a:tr h="321818">
                 <a:tc>
                   <a:txBody>
                     <a:bodyPr wrap="square"/>
@@ -10552,8 +10552,8 @@
         </p:nvSpPr>
         <p:spPr>
           <a:xfrm>
-            <a:off x="694944" y="4014216"/>
-            <a:ext cx="10929823" cy="274320"/>
+            <a:off x="694944" y="3860292"/>
+            <a:ext cx="10929823" cy="279400"/>
           </a:xfrm>
           <a:prstGeom prst="rect">
             <a:avLst/>
@@ -10586,8 +10586,8 @@
         </p:nvSpPr>
         <p:spPr>
           <a:xfrm>
-            <a:off x="566928" y="4014216"/>
-            <a:ext cx="26000" cy="274320"/>
+            <a:off x="566928" y="3860292"/>
+            <a:ext cx="26000" cy="279400"/>
           </a:xfrm>
           <a:prstGeom prst="rect">
             <a:avLst/>
@@ -10910,7 +10910,7 @@
         </p:nvSpPr>
         <p:spPr>
           <a:xfrm>
-            <a:off x="566928" y="2825496"/>
+            <a:off x="566928" y="2945892"/>
             <a:ext cx="11057839" cy="310896"/>
           </a:xfrm>
           <a:prstGeom prst="rect">
@@ -10944,7 +10944,7 @@
         </p:nvSpPr>
         <p:spPr>
           <a:xfrm>
-            <a:off x="566928" y="3227832"/>
+            <a:off x="566928" y="3348228"/>
             <a:ext cx="11057839" cy="1097280"/>
           </a:xfrm>
           <a:prstGeom prst="rect">
@@ -11042,8 +11042,8 @@
         </p:nvSpPr>
         <p:spPr>
           <a:xfrm>
-            <a:off x="566928" y="4562856"/>
-            <a:ext cx="11057839" cy="585216"/>
+            <a:off x="566928" y="4543806"/>
+            <a:ext cx="11057839" cy="571500"/>
           </a:xfrm>
           <a:prstGeom prst="rect">
             <a:avLst/>
@@ -11242,7 +11242,7 @@
         </p:nvGraphicFramePr>
         <p:xfrm>
           <a:off x="566928" y="1709928"/>
-          <a:ext cx="11057839" cy="3127248"/>
+          <a:ext cx="11057834" cy="2896362"/>
         </p:xfrm>
         <a:graphic>
           <a:graphicData uri="http://schemas.openxmlformats.org/drawingml/2006/table">
@@ -11251,15 +11251,15 @@
                 <a:tableStyleId>{5C22544A-7EE6-4342-B048-85BDC9FD1C3A}</a:tableStyleId>
               </a:tblPr>
               <a:tblGrid>
-                <a:gridCol w="749684"/>
-                <a:gridCol w="3748420"/>
-                <a:gridCol w="749684"/>
-                <a:gridCol w="1874210"/>
-                <a:gridCol w="1874210"/>
-                <a:gridCol w="749684"/>
-                <a:gridCol w="1311947"/>
+                <a:gridCol w="969544"/>
+                <a:gridCol w="4041206"/>
+                <a:gridCol w="969544"/>
+                <a:gridCol w="1442826"/>
+                <a:gridCol w="1547321"/>
+                <a:gridCol w="969544"/>
+                <a:gridCol w="1117849"/>
               </a:tblGrid>
-              <a:tr h="347472">
+              <a:tr h="321818">
                 <a:tc>
                   <a:txBody>
                     <a:bodyPr wrap="square"/>
@@ -11422,7 +11422,7 @@
                   </a:tcPr>
                 </a:tc>
               </a:tr>
-              <a:tr h="347472">
+              <a:tr h="321818">
                 <a:tc>
                   <a:txBody>
                     <a:bodyPr wrap="square"/>
@@ -11586,7 +11586,7 @@
                   </a:tcPr>
                 </a:tc>
               </a:tr>
-              <a:tr h="347472">
+              <a:tr h="321818">
                 <a:tc>
                   <a:txBody>
                     <a:bodyPr wrap="square"/>
@@ -11750,7 +11750,7 @@
                   </a:tcPr>
                 </a:tc>
               </a:tr>
-              <a:tr h="347472">
+              <a:tr h="321818">
                 <a:tc>
                   <a:txBody>
                     <a:bodyPr wrap="square"/>
@@ -11914,7 +11914,7 @@
                   </a:tcPr>
                 </a:tc>
               </a:tr>
-              <a:tr h="347472">
+              <a:tr h="321818">
                 <a:tc>
                   <a:txBody>
                     <a:bodyPr wrap="square"/>
@@ -12078,7 +12078,7 @@
                   </a:tcPr>
                 </a:tc>
               </a:tr>
-              <a:tr h="347472">
+              <a:tr h="321818">
                 <a:tc>
                   <a:txBody>
                     <a:bodyPr wrap="square"/>
@@ -12242,7 +12242,7 @@
                   </a:tcPr>
                 </a:tc>
               </a:tr>
-              <a:tr h="347472">
+              <a:tr h="321818">
                 <a:tc>
                   <a:txBody>
                     <a:bodyPr wrap="square"/>
@@ -12406,7 +12406,7 @@
                   </a:tcPr>
                 </a:tc>
               </a:tr>
-              <a:tr h="347472">
+              <a:tr h="321818">
                 <a:tc>
                   <a:txBody>
                     <a:bodyPr wrap="square"/>
@@ -12570,7 +12570,7 @@
                   </a:tcPr>
                 </a:tc>
               </a:tr>
-              <a:tr h="347472">
+              <a:tr h="321818">
                 <a:tc>
                   <a:txBody>
                     <a:bodyPr wrap="square"/>
@@ -12903,7 +12903,7 @@
         </p:nvGraphicFramePr>
         <p:xfrm>
           <a:off x="566928" y="1709928"/>
-          <a:ext cx="11057836" cy="2779776"/>
+          <a:ext cx="11057834" cy="2574544"/>
         </p:xfrm>
         <a:graphic>
           <a:graphicData uri="http://schemas.openxmlformats.org/drawingml/2006/table">
@@ -12912,15 +12912,15 @@
                 <a:tableStyleId>{5C22544A-7EE6-4342-B048-85BDC9FD1C3A}</a:tableStyleId>
               </a:tblPr>
               <a:tblGrid>
-                <a:gridCol w="631876"/>
-                <a:gridCol w="3159382"/>
-                <a:gridCol w="631876"/>
-                <a:gridCol w="2527506"/>
-                <a:gridCol w="2527506"/>
-                <a:gridCol w="631876"/>
-                <a:gridCol w="947814"/>
+                <a:gridCol w="861817"/>
+                <a:gridCol w="3645488"/>
+                <a:gridCol w="861817"/>
+                <a:gridCol w="1959198"/>
+                <a:gridCol w="1967098"/>
+                <a:gridCol w="861817"/>
+                <a:gridCol w="900599"/>
               </a:tblGrid>
-              <a:tr h="347472">
+              <a:tr h="321818">
                 <a:tc>
                   <a:txBody>
                     <a:bodyPr wrap="square"/>
@@ -13083,7 +13083,7 @@
                   </a:tcPr>
                 </a:tc>
               </a:tr>
-              <a:tr h="347472">
+              <a:tr h="321818">
                 <a:tc>
                   <a:txBody>
                     <a:bodyPr wrap="square"/>
@@ -13247,7 +13247,7 @@
                   </a:tcPr>
                 </a:tc>
               </a:tr>
-              <a:tr h="347472">
+              <a:tr h="321818">
                 <a:tc>
                   <a:txBody>
                     <a:bodyPr wrap="square"/>
@@ -13411,7 +13411,7 @@
                   </a:tcPr>
                 </a:tc>
               </a:tr>
-              <a:tr h="347472">
+              <a:tr h="321818">
                 <a:tc>
                   <a:txBody>
                     <a:bodyPr wrap="square"/>
@@ -13575,7 +13575,7 @@
                   </a:tcPr>
                 </a:tc>
               </a:tr>
-              <a:tr h="347472">
+              <a:tr h="321818">
                 <a:tc>
                   <a:txBody>
                     <a:bodyPr wrap="square"/>
@@ -13739,7 +13739,7 @@
                   </a:tcPr>
                 </a:tc>
               </a:tr>
-              <a:tr h="347472">
+              <a:tr h="321818">
                 <a:tc>
                   <a:txBody>
                     <a:bodyPr wrap="square"/>
@@ -13903,7 +13903,7 @@
                   </a:tcPr>
                 </a:tc>
               </a:tr>
-              <a:tr h="347472">
+              <a:tr h="321818">
                 <a:tc>
                   <a:txBody>
                     <a:bodyPr wrap="square"/>
@@ -14067,7 +14067,7 @@
                   </a:tcPr>
                 </a:tc>
               </a:tr>
-              <a:tr h="347472">
+              <a:tr h="321818">
                 <a:tc>
                   <a:txBody>
                     <a:bodyPr wrap="square"/>
@@ -14400,7 +14400,7 @@
         </p:nvGraphicFramePr>
         <p:xfrm>
           <a:off x="566928" y="1709928"/>
-          <a:ext cx="11057837" cy="2084832"/>
+          <a:ext cx="11057837" cy="3219958"/>
         </p:xfrm>
         <a:graphic>
           <a:graphicData uri="http://schemas.openxmlformats.org/drawingml/2006/table">
@@ -14409,12 +14409,12 @@
                 <a:tableStyleId>{5C22544A-7EE6-4342-B048-85BDC9FD1C3A}</a:tableStyleId>
               </a:tblPr>
               <a:tblGrid>
-                <a:gridCol w="737189"/>
-                <a:gridCol w="4330986"/>
-                <a:gridCol w="4146689"/>
-                <a:gridCol w="1842973"/>
+                <a:gridCol w="815775"/>
+                <a:gridCol w="3947844"/>
+                <a:gridCol w="3889720"/>
+                <a:gridCol w="2404498"/>
               </a:tblGrid>
-              <a:tr h="347472">
+              <a:tr h="321818">
                 <a:tc>
                   <a:txBody>
                     <a:bodyPr wrap="square"/>
@@ -14508,7 +14508,7 @@
                   </a:tcPr>
                 </a:tc>
               </a:tr>
-              <a:tr h="347472">
+              <a:tr h="579628">
                 <a:tc>
                   <a:txBody>
                     <a:bodyPr wrap="square"/>
@@ -14611,7 +14611,7 @@
                   </a:tcPr>
                 </a:tc>
               </a:tr>
-              <a:tr h="347472">
+              <a:tr h="579628">
                 <a:tc>
                   <a:txBody>
                     <a:bodyPr wrap="square"/>
@@ -14705,7 +14705,7 @@
                   </a:tcPr>
                 </a:tc>
               </a:tr>
-              <a:tr h="347472">
+              <a:tr h="579628">
                 <a:tc>
                   <a:txBody>
                     <a:bodyPr wrap="square"/>
@@ -14799,7 +14799,7 @@
                   </a:tcPr>
                 </a:tc>
               </a:tr>
-              <a:tr h="347472">
+              <a:tr h="579628">
                 <a:tc>
                   <a:txBody>
                     <a:bodyPr wrap="square"/>
@@ -14893,7 +14893,7 @@
                   </a:tcPr>
                 </a:tc>
               </a:tr>
-              <a:tr h="347472">
+              <a:tr h="579628">
                 <a:tc>
                   <a:txBody>
                     <a:bodyPr wrap="square"/>
@@ -14999,8 +14999,8 @@
         </p:nvSpPr>
         <p:spPr>
           <a:xfrm>
-            <a:off x="694944" y="4014216"/>
-            <a:ext cx="10929823" cy="274320"/>
+            <a:off x="694944" y="5149342"/>
+            <a:ext cx="10929823" cy="279400"/>
           </a:xfrm>
           <a:prstGeom prst="rect">
             <a:avLst/>
@@ -15052,8 +15052,8 @@
         </p:nvSpPr>
         <p:spPr>
           <a:xfrm>
-            <a:off x="566928" y="4014216"/>
-            <a:ext cx="26000" cy="274320"/>
+            <a:off x="566928" y="5149342"/>
+            <a:ext cx="26000" cy="279400"/>
           </a:xfrm>
           <a:prstGeom prst="rect">
             <a:avLst/>
@@ -15287,7 +15287,7 @@
         </p:nvGraphicFramePr>
         <p:xfrm>
           <a:off x="566928" y="2112264"/>
-          <a:ext cx="11057838" cy="1389888"/>
+          <a:ext cx="11057838" cy="1287272"/>
         </p:xfrm>
         <a:graphic>
           <a:graphicData uri="http://schemas.openxmlformats.org/drawingml/2006/table">
@@ -15296,10 +15296,10 @@
                 <a:tableStyleId>{5C22544A-7EE6-4342-B048-85BDC9FD1C3A}</a:tableStyleId>
               </a:tblPr>
               <a:tblGrid>
-                <a:gridCol w="1036672"/>
-                <a:gridCol w="10021166"/>
+                <a:gridCol w="1026215"/>
+                <a:gridCol w="10031623"/>
               </a:tblGrid>
-              <a:tr h="347472">
+              <a:tr h="321818">
                 <a:tc>
                   <a:txBody>
                     <a:bodyPr wrap="square"/>
@@ -15347,7 +15347,7 @@
                   </a:tcPr>
                 </a:tc>
               </a:tr>
-              <a:tr h="347472">
+              <a:tr h="321818">
                 <a:tc>
                   <a:txBody>
                     <a:bodyPr wrap="square"/>
@@ -15395,7 +15395,7 @@
                   </a:tcPr>
                 </a:tc>
               </a:tr>
-              <a:tr h="347472">
+              <a:tr h="321818">
                 <a:tc>
                   <a:txBody>
                     <a:bodyPr wrap="square"/>
@@ -15443,7 +15443,7 @@
                   </a:tcPr>
                 </a:tc>
               </a:tr>
-              <a:tr h="347472">
+              <a:tr h="321818">
                 <a:tc>
                   <a:txBody>
                     <a:bodyPr wrap="square"/>
@@ -15503,8 +15503,8 @@
         </p:nvSpPr>
         <p:spPr>
           <a:xfrm>
-            <a:off x="566928" y="3685032"/>
-            <a:ext cx="11057839" cy="585216"/>
+            <a:off x="566928" y="3582416"/>
+            <a:ext cx="11057839" cy="603250"/>
           </a:xfrm>
           <a:prstGeom prst="rect">
             <a:avLst/>
@@ -15546,8 +15546,8 @@
         </p:nvSpPr>
         <p:spPr>
           <a:xfrm>
-            <a:off x="694944" y="4434840"/>
-            <a:ext cx="10929823" cy="274320"/>
+            <a:off x="694944" y="4350258"/>
+            <a:ext cx="10929823" cy="279400"/>
           </a:xfrm>
           <a:prstGeom prst="rect">
             <a:avLst/>
@@ -15580,8 +15580,8 @@
         </p:nvSpPr>
         <p:spPr>
           <a:xfrm>
-            <a:off x="566928" y="4434840"/>
-            <a:ext cx="26000" cy="274320"/>
+            <a:off x="566928" y="4350258"/>
+            <a:ext cx="26000" cy="279400"/>
           </a:xfrm>
           <a:prstGeom prst="rect">
             <a:avLst/>
@@ -15781,7 +15781,7 @@
         </p:nvGraphicFramePr>
         <p:xfrm>
           <a:off x="566928" y="1709928"/>
-          <a:ext cx="11057837" cy="1737360"/>
+          <a:ext cx="11057837" cy="3413760"/>
         </p:xfrm>
         <a:graphic>
           <a:graphicData uri="http://schemas.openxmlformats.org/drawingml/2006/table">
@@ -15790,12 +15790,12 @@
                 <a:tableStyleId>{5C22544A-7EE6-4342-B048-85BDC9FD1C3A}</a:tableStyleId>
               </a:tblPr>
               <a:tblGrid>
-                <a:gridCol w="769849"/>
-                <a:gridCol w="1959617"/>
-                <a:gridCol w="5948837"/>
-                <a:gridCol w="2379534"/>
+                <a:gridCol w="643282"/>
+                <a:gridCol w="1787907"/>
+                <a:gridCol w="5063540"/>
+                <a:gridCol w="3563108"/>
               </a:tblGrid>
-              <a:tr h="347472">
+              <a:tr h="579628">
                 <a:tc>
                   <a:txBody>
                     <a:bodyPr wrap="square"/>
@@ -15889,7 +15889,7 @@
                   </a:tcPr>
                 </a:tc>
               </a:tr>
-              <a:tr h="347472">
+              <a:tr h="579628">
                 <a:tc>
                   <a:txBody>
                     <a:bodyPr wrap="square"/>
@@ -15984,7 +15984,7 @@
                   </a:tcPr>
                 </a:tc>
               </a:tr>
-              <a:tr h="347472">
+              <a:tr h="837438">
                 <a:tc>
                   <a:txBody>
                     <a:bodyPr wrap="square"/>
@@ -16088,7 +16088,7 @@
                   </a:tcPr>
                 </a:tc>
               </a:tr>
-              <a:tr h="347472">
+              <a:tr h="579628">
                 <a:tc>
                   <a:txBody>
                     <a:bodyPr wrap="square"/>
@@ -16183,7 +16183,7 @@
                   </a:tcPr>
                 </a:tc>
               </a:tr>
-              <a:tr h="347472">
+              <a:tr h="837438">
                 <a:tc>
                   <a:txBody>
                     <a:bodyPr wrap="square"/>
@@ -16290,8 +16290,8 @@
         </p:nvSpPr>
         <p:spPr>
           <a:xfrm>
-            <a:off x="694944" y="3666744"/>
-            <a:ext cx="10929823" cy="274320"/>
+            <a:off x="694944" y="5343144"/>
+            <a:ext cx="10929823" cy="558800"/>
           </a:xfrm>
           <a:prstGeom prst="rect">
             <a:avLst/>
@@ -16324,8 +16324,8 @@
         </p:nvSpPr>
         <p:spPr>
           <a:xfrm>
-            <a:off x="566928" y="3666744"/>
-            <a:ext cx="26000" cy="274320"/>
+            <a:off x="566928" y="5343144"/>
+            <a:ext cx="26000" cy="558800"/>
           </a:xfrm>
           <a:prstGeom prst="rect">
             <a:avLst/>

--- a/poc/1_MeetingMinutes/0821_slide.pptx
+++ b/poc/1_MeetingMinutes/0821_slide.pptx
@@ -3478,7 +3478,7 @@
                 </a:solidFill>
                 <a:latin typeface="Microsoft JhengHei"/>
               </a:rPr>
-              <a:t>先辨識強耦合與共同故障域，再決定單叢集、多叢集、資源池或跨機房配置。</a:t>
+              <a:t>先辨識強耦合與共同故障域，再決定單叢集、多叢集、或跨機房配置。</a:t>
             </a:r>
           </a:p>
         </p:txBody>
@@ -3560,7 +3560,7 @@
                 </a:solidFill>
                 <a:latin typeface="Microsoft JhengHei"/>
               </a:rPr>
-              <a:t>MySQL 相容性、PITR／還原、Online DDL、服務層 Failover、資源與租戶隔離。</a:t>
+              <a:t>MySQL 相容性、PITR／還原、Online DDL、服務層 Failover、資源管理與多租戶隔離。</a:t>
             </a:r>
           </a:p>
         </p:txBody>
@@ -3724,7 +3724,7 @@
                 </a:solidFill>
                 <a:latin typeface="Microsoft JhengHei"/>
               </a:rPr>
-              <a:t>分開量測叢集恢復、資料可讀寫、終端服務恢復，以及交易是否遺失。</a:t>
+              <a:t>量測叢集恢復、資料可讀寫、終端服務恢復，以及交易是否遺失。還是 RTO ; 只是更換另一方式描述。</a:t>
             </a:r>
           </a:p>
         </p:txBody>
@@ -3976,7 +3976,7 @@
         </p:nvGraphicFramePr>
         <p:xfrm>
           <a:off x="566928" y="1709928"/>
-          <a:ext cx="11057838" cy="2252726"/>
+          <a:ext cx="11057839" cy="2252726"/>
         </p:xfrm>
         <a:graphic>
           <a:graphicData uri="http://schemas.openxmlformats.org/drawingml/2006/table">
@@ -3985,8 +3985,8 @@
                 <a:tableStyleId>{5C22544A-7EE6-4342-B048-85BDC9FD1C3A}</a:tableStyleId>
               </a:tblPr>
               <a:tblGrid>
-                <a:gridCol w="5364545"/>
-                <a:gridCol w="5693293"/>
+                <a:gridCol w="5358211"/>
+                <a:gridCol w="5699628"/>
               </a:tblGrid>
               <a:tr h="321818">
                 <a:tc>
@@ -4313,7 +4313,7 @@
                           </a:solidFill>
                           <a:latin typeface="Microsoft JhengHei"/>
                         </a:rPr>
-                        <a:t>由 TSD 指派 owner，先確認依賴與改造上限</a:t>
+                        <a:t>協作 TSD 其產品 Owner，確認依賴與改造上限</a:t>
                       </a:r>
                     </a:p>
                   </a:txBody>
@@ -4571,7 +4571,7 @@
         </p:nvGraphicFramePr>
         <p:xfrm>
           <a:off x="566928" y="1709928"/>
-          <a:ext cx="11057838" cy="3219958"/>
+          <a:ext cx="11057839" cy="3219958"/>
         </p:xfrm>
         <a:graphic>
           <a:graphicData uri="http://schemas.openxmlformats.org/drawingml/2006/table">
@@ -4580,10 +4580,10 @@
                 <a:tableStyleId>{5C22544A-7EE6-4342-B048-85BDC9FD1C3A}</a:tableStyleId>
               </a:tblPr>
               <a:tblGrid>
-                <a:gridCol w="2077726"/>
-                <a:gridCol w="4036483"/>
-                <a:gridCol w="2500495"/>
-                <a:gridCol w="2443134"/>
+                <a:gridCol w="2073901"/>
+                <a:gridCol w="4029054"/>
+                <a:gridCol w="2495891"/>
+                <a:gridCol w="2458993"/>
               </a:tblGrid>
               <a:tr h="321818">
                 <a:tc>
@@ -4685,7 +4685,7 @@
                     <a:bodyPr wrap="square"/>
                     <a:lstStyle/>
                     <a:p>
-                      <a:pPr algn="ctr"/>
+                      <a:pPr algn="l"/>
                       <a:r>
                         <a:rPr sz="1400" b="0">
                           <a:solidFill>
@@ -4731,7 +4731,7 @@
                     <a:bodyPr wrap="square"/>
                     <a:lstStyle/>
                     <a:p>
-                      <a:pPr algn="ctr"/>
+                      <a:pPr algn="l"/>
                       <a:r>
                         <a:rPr sz="1400" b="0">
                           <a:solidFill>
@@ -4779,7 +4779,7 @@
                     <a:bodyPr wrap="square"/>
                     <a:lstStyle/>
                     <a:p>
-                      <a:pPr algn="ctr"/>
+                      <a:pPr algn="l"/>
                       <a:r>
                         <a:rPr sz="1400" b="0">
                           <a:solidFill>
@@ -4825,7 +4825,7 @@
                     <a:bodyPr wrap="square"/>
                     <a:lstStyle/>
                     <a:p>
-                      <a:pPr algn="ctr"/>
+                      <a:pPr algn="l"/>
                       <a:r>
                         <a:rPr sz="1400" b="0">
                           <a:solidFill>
@@ -4959,7 +4959,7 @@
                           </a:solidFill>
                           <a:latin typeface="Microsoft JhengHei"/>
                         </a:rPr>
-                        <a:t>需 TSD owner、應用樣本與回復窗口</a:t>
+                        <a:t>需 SSD Infra ; TSD/產品單位 協作共識</a:t>
                       </a:r>
                     </a:p>
                   </a:txBody>
@@ -4976,7 +4976,7 @@
                     <a:bodyPr wrap="square"/>
                     <a:lstStyle/>
                     <a:p>
-                      <a:pPr algn="ctr"/>
+                      <a:pPr algn="l"/>
                       <a:r>
                         <a:rPr sz="1400" b="0">
                           <a:solidFill>
@@ -5022,7 +5022,7 @@
                     <a:bodyPr wrap="square"/>
                     <a:lstStyle/>
                     <a:p>
-                      <a:pPr algn="ctr"/>
+                      <a:pPr algn="l"/>
                       <a:r>
                         <a:rPr sz="1400" b="0">
                           <a:solidFill>
@@ -5045,7 +5045,7 @@
                     <a:bodyPr wrap="square"/>
                     <a:lstStyle/>
                     <a:p>
-                      <a:pPr algn="ctr"/>
+                      <a:pPr algn="l"/>
                       <a:r>
                         <a:rPr sz="1400" b="0">
                           <a:solidFill>
@@ -5070,7 +5070,7 @@
                     <a:bodyPr wrap="square"/>
                     <a:lstStyle/>
                     <a:p>
-                      <a:pPr algn="ctr"/>
+                      <a:pPr algn="l"/>
                       <a:r>
                         <a:rPr sz="1400" b="0">
                           <a:solidFill>
@@ -6478,7 +6478,7 @@
         </p:nvGraphicFramePr>
         <p:xfrm>
           <a:off x="566928" y="1709928"/>
-          <a:ext cx="11057838" cy="1865376"/>
+          <a:ext cx="11057839" cy="1865376"/>
         </p:xfrm>
         <a:graphic>
           <a:graphicData uri="http://schemas.openxmlformats.org/drawingml/2006/table">
@@ -6488,7 +6488,7 @@
               </a:tblPr>
               <a:tblGrid>
                 <a:gridCol w="1888311"/>
-                <a:gridCol w="6971795"/>
+                <a:gridCol w="6971796"/>
                 <a:gridCol w="2197732"/>
               </a:tblGrid>
               <a:tr h="310896">
@@ -7955,7 +7955,7 @@
         </p:nvGraphicFramePr>
         <p:xfrm>
           <a:off x="566928" y="1709928"/>
-          <a:ext cx="11057837" cy="965454"/>
+          <a:ext cx="11057839" cy="965454"/>
         </p:xfrm>
         <a:graphic>
           <a:graphicData uri="http://schemas.openxmlformats.org/drawingml/2006/table">
@@ -7966,7 +7966,7 @@
               <a:tblGrid>
                 <a:gridCol w="1386689"/>
                 <a:gridCol w="4093409"/>
-                <a:gridCol w="5577739"/>
+                <a:gridCol w="5577741"/>
               </a:tblGrid>
               <a:tr h="321818">
                 <a:tc>
@@ -8546,7 +8546,7 @@
         </p:nvGraphicFramePr>
         <p:xfrm>
           <a:off x="566928" y="1709928"/>
-          <a:ext cx="11057838" cy="965454"/>
+          <a:ext cx="11057839" cy="965454"/>
         </p:xfrm>
         <a:graphic>
           <a:graphicData uri="http://schemas.openxmlformats.org/drawingml/2006/table">
@@ -8556,7 +8556,7 @@
               </a:tblPr>
               <a:tblGrid>
                 <a:gridCol w="1349041"/>
-                <a:gridCol w="5149682"/>
+                <a:gridCol w="5149683"/>
                 <a:gridCol w="4559115"/>
               </a:tblGrid>
               <a:tr h="321818">
@@ -9118,7 +9118,7 @@
         </p:nvGraphicFramePr>
         <p:xfrm>
           <a:off x="566928" y="1709928"/>
-          <a:ext cx="11057838" cy="2252726"/>
+          <a:ext cx="11057839" cy="2252726"/>
         </p:xfrm>
         <a:graphic>
           <a:graphicData uri="http://schemas.openxmlformats.org/drawingml/2006/table">
@@ -9128,7 +9128,7 @@
               </a:tblPr>
               <a:tblGrid>
                 <a:gridCol w="1278081"/>
-                <a:gridCol w="9779757"/>
+                <a:gridCol w="9779758"/>
               </a:tblGrid>
               <a:tr h="321818">
                 <a:tc>
@@ -10096,7 +10096,7 @@
         </p:nvGraphicFramePr>
         <p:xfrm>
           <a:off x="566928" y="1709928"/>
-          <a:ext cx="11057838" cy="1930908"/>
+          <a:ext cx="11057839" cy="1930908"/>
         </p:xfrm>
         <a:graphic>
           <a:graphicData uri="http://schemas.openxmlformats.org/drawingml/2006/table">
@@ -10107,7 +10107,7 @@
               <a:tblGrid>
                 <a:gridCol w="986328"/>
                 <a:gridCol w="2717883"/>
-                <a:gridCol w="7353627"/>
+                <a:gridCol w="7353628"/>
               </a:tblGrid>
               <a:tr h="321818">
                 <a:tc>
@@ -11063,7 +11063,7 @@
                 </a:solidFill>
                 <a:latin typeface="Microsoft JhengHei"/>
               </a:rPr>
-              <a:t>Failover 欄位以實測秒數呈現</a:t>
+              <a:t>Failover 欄位一律只列實測秒數</a:t>
             </a:r>
             <a:r>
               <a:rPr sz="1800" b="0">
@@ -11072,7 +11072,7 @@
                 </a:solidFill>
                 <a:latin typeface="Microsoft JhengHei"/>
               </a:rPr>
-              <a:t>：MySQL 群組兩家的故障注入與恢復流程不等價，只列數據、不給星等；PostgreSQL 群組兩家為同一方法論，數據與星等並列。</a:t>
+              <a:t>：MySQL 群組兩家的故障注入與恢復流程不等價，不宜換算星等；PostgreSQL 群組雖為同一方法論，仍以秒數直接呈現，避免與其他項目的相對星等混淆。</a:t>
             </a:r>
           </a:p>
         </p:txBody>
@@ -11242,7 +11242,7 @@
         </p:nvGraphicFramePr>
         <p:xfrm>
           <a:off x="566928" y="1709928"/>
-          <a:ext cx="11057834" cy="2896362"/>
+          <a:ext cx="11057839" cy="2896362"/>
         </p:xfrm>
         <a:graphic>
           <a:graphicData uri="http://schemas.openxmlformats.org/drawingml/2006/table">
@@ -11252,7 +11252,7 @@
               </a:tblPr>
               <a:tblGrid>
                 <a:gridCol w="969544"/>
-                <a:gridCol w="4041206"/>
+                <a:gridCol w="4041211"/>
                 <a:gridCol w="969544"/>
                 <a:gridCol w="1442826"/>
                 <a:gridCol w="1547321"/>
@@ -11451,7 +11451,7 @@
                     <a:bodyPr wrap="square"/>
                     <a:lstStyle/>
                     <a:p>
-                      <a:pPr algn="ctr"/>
+                      <a:pPr algn="l"/>
                       <a:r>
                         <a:rPr sz="1400" b="0">
                           <a:solidFill>
@@ -11615,7 +11615,7 @@
                     <a:bodyPr wrap="square"/>
                     <a:lstStyle/>
                     <a:p>
-                      <a:pPr algn="ctr"/>
+                      <a:pPr algn="l"/>
                       <a:r>
                         <a:rPr sz="1400" b="0">
                           <a:solidFill>
@@ -11779,7 +11779,7 @@
                     <a:bodyPr wrap="square"/>
                     <a:lstStyle/>
                     <a:p>
-                      <a:pPr algn="ctr"/>
+                      <a:pPr algn="l"/>
                       <a:r>
                         <a:rPr sz="1400" b="0">
                           <a:solidFill>
@@ -11943,7 +11943,7 @@
                     <a:bodyPr wrap="square"/>
                     <a:lstStyle/>
                     <a:p>
-                      <a:pPr algn="ctr"/>
+                      <a:pPr algn="l"/>
                       <a:r>
                         <a:rPr sz="1400" b="0">
                           <a:solidFill>
@@ -12271,7 +12271,7 @@
                     <a:bodyPr wrap="square"/>
                     <a:lstStyle/>
                     <a:p>
-                      <a:pPr algn="ctr"/>
+                      <a:pPr algn="l"/>
                       <a:r>
                         <a:rPr sz="1400" b="0">
                           <a:solidFill>
@@ -12599,7 +12599,7 @@
                     <a:bodyPr wrap="square"/>
                     <a:lstStyle/>
                     <a:p>
-                      <a:pPr algn="ctr"/>
+                      <a:pPr algn="l"/>
                       <a:r>
                         <a:rPr sz="1400" b="0">
                           <a:solidFill>
@@ -12903,7 +12903,7 @@
         </p:nvGraphicFramePr>
         <p:xfrm>
           <a:off x="566928" y="1709928"/>
-          <a:ext cx="11057834" cy="2574544"/>
+          <a:ext cx="11057839" cy="2574544"/>
         </p:xfrm>
         <a:graphic>
           <a:graphicData uri="http://schemas.openxmlformats.org/drawingml/2006/table">
@@ -12912,13 +12912,13 @@
                 <a:tableStyleId>{5C22544A-7EE6-4342-B048-85BDC9FD1C3A}</a:tableStyleId>
               </a:tblPr>
               <a:tblGrid>
-                <a:gridCol w="861817"/>
-                <a:gridCol w="3645488"/>
-                <a:gridCol w="861817"/>
-                <a:gridCol w="1959198"/>
-                <a:gridCol w="1967098"/>
-                <a:gridCol w="861817"/>
-                <a:gridCol w="900599"/>
+                <a:gridCol w="960646"/>
+                <a:gridCol w="4063535"/>
+                <a:gridCol w="960646"/>
+                <a:gridCol w="1497007"/>
+                <a:gridCol w="1611484"/>
+                <a:gridCol w="960646"/>
+                <a:gridCol w="1003875"/>
               </a:tblGrid>
               <a:tr h="321818">
                 <a:tc>
@@ -13276,7 +13276,7 @@
                     <a:bodyPr wrap="square"/>
                     <a:lstStyle/>
                     <a:p>
-                      <a:pPr algn="ctr"/>
+                      <a:pPr algn="l"/>
                       <a:r>
                         <a:rPr sz="1400" b="0">
                           <a:solidFill>
@@ -13440,7 +13440,7 @@
                     <a:bodyPr wrap="square"/>
                     <a:lstStyle/>
                     <a:p>
-                      <a:pPr algn="ctr"/>
+                      <a:pPr algn="l"/>
                       <a:r>
                         <a:rPr sz="1400" b="0">
                           <a:solidFill>
@@ -13604,7 +13604,7 @@
                     <a:bodyPr wrap="square"/>
                     <a:lstStyle/>
                     <a:p>
-                      <a:pPr algn="ctr"/>
+                      <a:pPr algn="l"/>
                       <a:r>
                         <a:rPr sz="1400" b="0">
                           <a:solidFill>
@@ -13814,15 +13814,15 @@
                     <a:bodyPr wrap="square"/>
                     <a:lstStyle/>
                     <a:p>
-                      <a:pPr algn="l"/>
-                      <a:r>
-                        <a:rPr sz="1400" b="0">
-                          <a:solidFill>
-                            <a:srgbClr val="22303F"/>
-                          </a:solidFill>
-                          <a:latin typeface="Microsoft JhengHei"/>
-                        </a:rPr>
-                        <a:t>2.99–3.65s ⭐⭐⭐⭐⭐</a:t>
+                      <a:pPr algn="ctr"/>
+                      <a:r>
+                        <a:rPr sz="1400" b="0">
+                          <a:solidFill>
+                            <a:srgbClr val="22303F"/>
+                          </a:solidFill>
+                          <a:latin typeface="Microsoft JhengHei"/>
+                        </a:rPr>
+                        <a:t>2.99–3.65s</a:t>
                       </a:r>
                     </a:p>
                   </a:txBody>
@@ -13837,15 +13837,15 @@
                     <a:bodyPr wrap="square"/>
                     <a:lstStyle/>
                     <a:p>
-                      <a:pPr algn="l"/>
-                      <a:r>
-                        <a:rPr sz="1400" b="0">
-                          <a:solidFill>
-                            <a:srgbClr val="22303F"/>
-                          </a:solidFill>
-                          <a:latin typeface="Microsoft JhengHei"/>
-                        </a:rPr>
-                        <a:t>7.01–7.12s ⭐⭐⭐⭐☆</a:t>
+                      <a:pPr algn="ctr"/>
+                      <a:r>
+                        <a:rPr sz="1400" b="0">
+                          <a:solidFill>
+                            <a:srgbClr val="22303F"/>
+                          </a:solidFill>
+                          <a:latin typeface="Microsoft JhengHei"/>
+                        </a:rPr>
+                        <a:t>7.01–7.12s</a:t>
                       </a:r>
                     </a:p>
                   </a:txBody>
@@ -13932,7 +13932,7 @@
                     <a:bodyPr wrap="square"/>
                     <a:lstStyle/>
                     <a:p>
-                      <a:pPr algn="ctr"/>
+                      <a:pPr algn="l"/>
                       <a:r>
                         <a:rPr sz="1400" b="0">
                           <a:solidFill>
@@ -14400,7 +14400,7 @@
         </p:nvGraphicFramePr>
         <p:xfrm>
           <a:off x="566928" y="1709928"/>
-          <a:ext cx="11057837" cy="3219958"/>
+          <a:ext cx="11057839" cy="3219958"/>
         </p:xfrm>
         <a:graphic>
           <a:graphicData uri="http://schemas.openxmlformats.org/drawingml/2006/table">
@@ -14410,7 +14410,7 @@
               </a:tblPr>
               <a:tblGrid>
                 <a:gridCol w="815775"/>
-                <a:gridCol w="3947844"/>
+                <a:gridCol w="3947846"/>
                 <a:gridCol w="3889720"/>
                 <a:gridCol w="2404498"/>
               </a:tblGrid>
@@ -14592,7 +14592,7 @@
                     <a:bodyPr wrap="square"/>
                     <a:lstStyle/>
                     <a:p>
-                      <a:pPr algn="ctr"/>
+                      <a:pPr algn="l"/>
                       <a:r>
                         <a:rPr sz="1400" b="0">
                           <a:solidFill>
@@ -14922,7 +14922,7 @@
                     <a:bodyPr wrap="square"/>
                     <a:lstStyle/>
                     <a:p>
-                      <a:pPr algn="ctr"/>
+                      <a:pPr algn="l"/>
                       <a:r>
                         <a:rPr sz="1400" b="0">
                           <a:solidFill>
@@ -14945,7 +14945,7 @@
                     <a:bodyPr wrap="square"/>
                     <a:lstStyle/>
                     <a:p>
-                      <a:pPr algn="ctr"/>
+                      <a:pPr algn="l"/>
                       <a:r>
                         <a:rPr sz="1400" b="0">
                           <a:solidFill>
@@ -15020,26 +15020,7 @@
                 </a:solidFill>
                 <a:latin typeface="Microsoft JhengHei"/>
               </a:rPr>
-              <a:t>現況統計日期 2026/08/14；來源為 Prod 監控彙整，見</a:t>
-            </a:r>
-            <a:r>
-              <a:rPr sz="1600" b="0" u="sng">
-                <a:solidFill>
-                  <a:srgbClr val="1B5EA8"/>
-                </a:solidFill>
-                <a:latin typeface="Microsoft JhengHei"/>
-                <a:hlinkClick r:id="rId2"/>
-              </a:rPr>
-              <a:t>評分導讀</a:t>
-            </a:r>
-            <a:r>
-              <a:rPr sz="1600" b="0">
-                <a:solidFill>
-                  <a:srgbClr val="8A96A3"/>
-                </a:solidFill>
-                <a:latin typeface="Microsoft JhengHei"/>
-              </a:rPr>
-              <a:t>。</a:t>
+              <a:t>現況統計日期 2026/08/14；來源為 Prod 監控彙整。</a:t>
             </a:r>
           </a:p>
         </p:txBody>
@@ -15287,7 +15268,7 @@
         </p:nvGraphicFramePr>
         <p:xfrm>
           <a:off x="566928" y="2112264"/>
-          <a:ext cx="11057838" cy="1287272"/>
+          <a:ext cx="11057839" cy="1287272"/>
         </p:xfrm>
         <a:graphic>
           <a:graphicData uri="http://schemas.openxmlformats.org/drawingml/2006/table">
@@ -15297,7 +15278,7 @@
               </a:tblPr>
               <a:tblGrid>
                 <a:gridCol w="1026215"/>
-                <a:gridCol w="10031623"/>
+                <a:gridCol w="10031624"/>
               </a:tblGrid>
               <a:tr h="321818">
                 <a:tc>
@@ -15766,7 +15747,7 @@
                 </a:solidFill>
                 <a:latin typeface="Microsoft JhengHei"/>
               </a:rPr>
-              <a:t>比較｜原廠技術支援是 Promotion Gate，不是效能加分</a:t>
+              <a:t>比較｜原廠技術支援是 Promotion 門檻，不是效能加分</a:t>
             </a:r>
           </a:p>
         </p:txBody>
@@ -15781,7 +15762,7 @@
         </p:nvGraphicFramePr>
         <p:xfrm>
           <a:off x="566928" y="1709928"/>
-          <a:ext cx="11057837" cy="3413760"/>
+          <a:ext cx="11057839" cy="2898140"/>
         </p:xfrm>
         <a:graphic>
           <a:graphicData uri="http://schemas.openxmlformats.org/drawingml/2006/table">
@@ -15790,10 +15771,10 @@
                 <a:tableStyleId>{5C22544A-7EE6-4342-B048-85BDC9FD1C3A}</a:tableStyleId>
               </a:tblPr>
               <a:tblGrid>
-                <a:gridCol w="643282"/>
-                <a:gridCol w="1787907"/>
-                <a:gridCol w="5063540"/>
-                <a:gridCol w="3563108"/>
+                <a:gridCol w="1203706"/>
+                <a:gridCol w="1765940"/>
+                <a:gridCol w="4844494"/>
+                <a:gridCol w="3243699"/>
               </a:tblGrid>
               <a:tr h="579628">
                 <a:tc>
@@ -15984,7 +15965,7 @@
                   </a:tcPr>
                 </a:tc>
               </a:tr>
-              <a:tr h="837438">
+              <a:tr h="579628">
                 <a:tc>
                   <a:txBody>
                     <a:bodyPr wrap="square"/>
@@ -16183,7 +16164,7 @@
                   </a:tcPr>
                 </a:tc>
               </a:tr>
-              <a:tr h="837438">
+              <a:tr h="579628">
                 <a:tc>
                   <a:txBody>
                     <a:bodyPr wrap="square"/>
@@ -16267,7 +16248,7 @@
                           </a:solidFill>
                           <a:latin typeface="Microsoft JhengHei"/>
                         </a:rPr>
-                        <a:t>授權、支援時區、P1／P2 事故等級、根因分析、版本升級與自管限制</a:t>
+                        <a:t>同 YugabyteDB 困境</a:t>
                       </a:r>
                     </a:p>
                   </a:txBody>
@@ -16290,7 +16271,7 @@
         </p:nvSpPr>
         <p:spPr>
           <a:xfrm>
-            <a:off x="694944" y="5343144"/>
+            <a:off x="694944" y="4827524"/>
             <a:ext cx="10929823" cy="558800"/>
           </a:xfrm>
           <a:prstGeom prst="rect">
@@ -16324,7 +16305,7 @@
         </p:nvSpPr>
         <p:spPr>
           <a:xfrm>
-            <a:off x="566928" y="5343144"/>
+            <a:off x="566928" y="4827524"/>
             <a:ext cx="26000" cy="558800"/>
           </a:xfrm>
           <a:prstGeom prst="rect">

--- a/poc/1_MeetingMinutes/0821_slide.pptx
+++ b/poc/1_MeetingMinutes/0821_slide.pptx
@@ -3410,7 +3410,7 @@
         <p:spPr>
           <a:xfrm>
             <a:off x="566928" y="1709928"/>
-            <a:ext cx="11057839" cy="365760"/>
+            <a:ext cx="11057839" cy="1828800"/>
           </a:xfrm>
           <a:prstGeom prst="rect">
             <a:avLst/>
@@ -3435,7 +3435,7 @@
                 </a:solidFill>
                 <a:latin typeface="Microsoft JhengHei"/>
               </a:rPr>
-              <a:t>1. </a:t>
+              <a:t>•  </a:t>
             </a:r>
             <a:r>
               <a:rPr sz="1800" b="1">
@@ -3447,63 +3447,6 @@
               <a:t>以服務故障範圍決定隔離層級</a:t>
             </a:r>
           </a:p>
-        </p:txBody>
-      </p:sp>
-      <p:sp>
-        <p:nvSpPr>
-          <p:cNvPr id="7" name="TextBox 6"/>
-          <p:cNvSpPr txBox="1"/>
-          <p:nvPr/>
-        </p:nvSpPr>
-        <p:spPr>
-          <a:xfrm>
-            <a:off x="566928" y="2181606"/>
-            <a:ext cx="11057839" cy="285750"/>
-          </a:xfrm>
-          <a:prstGeom prst="rect">
-            <a:avLst/>
-          </a:prstGeom>
-          <a:noFill/>
-        </p:spPr>
-        <p:txBody>
-          <a:bodyPr wrap="square" lIns="0" rIns="0" tIns="0" bIns="0">
-            <a:spAutoFit/>
-          </a:bodyPr>
-          <a:lstStyle/>
-          <a:p>
-            <a:r>
-              <a:rPr sz="1800" b="0">
-                <a:solidFill>
-                  <a:srgbClr val="22303F"/>
-                </a:solidFill>
-                <a:latin typeface="Microsoft JhengHei"/>
-              </a:rPr>
-              <a:t>先辨識強耦合與共同故障域，再決定單叢集、多叢集、或跨機房配置。</a:t>
-            </a:r>
-          </a:p>
-        </p:txBody>
-      </p:sp>
-      <p:sp>
-        <p:nvSpPr>
-          <p:cNvPr id="8" name="TextBox 7"/>
-          <p:cNvSpPr txBox="1"/>
-          <p:nvPr/>
-        </p:nvSpPr>
-        <p:spPr>
-          <a:xfrm>
-            <a:off x="566928" y="2595372"/>
-            <a:ext cx="11057839" cy="365760"/>
-          </a:xfrm>
-          <a:prstGeom prst="rect">
-            <a:avLst/>
-          </a:prstGeom>
-          <a:noFill/>
-        </p:spPr>
-        <p:txBody>
-          <a:bodyPr wrap="square" lIns="0" rIns="0" tIns="0" bIns="0">
-            <a:spAutoFit/>
-          </a:bodyPr>
-          <a:lstStyle/>
           <a:p>
             <a:pPr>
               <a:spcAft>
@@ -3511,81 +3454,19 @@
               </a:spcAft>
             </a:pPr>
             <a:r>
-              <a:rPr sz="1800">
+              <a:rPr sz="1800"/>
+              <a:t>     </a:t>
+            </a:r>
+            <a:r>
+              <a:rPr sz="1700" b="0">
                 <a:solidFill>
                   <a:srgbClr val="8A96A3"/>
                 </a:solidFill>
                 <a:latin typeface="Microsoft JhengHei"/>
               </a:rPr>
-              <a:t>1. </a:t>
-            </a:r>
-            <a:r>
-              <a:rPr sz="1800" b="1">
-                <a:solidFill>
-                  <a:srgbClr val="C0392B"/>
-                </a:solidFill>
-                <a:latin typeface="Microsoft JhengHei"/>
-              </a:rPr>
-              <a:t>下一階段 TiDB 聚焦五項營運能力</a:t>
-            </a:r>
-          </a:p>
-        </p:txBody>
-      </p:sp>
-      <p:sp>
-        <p:nvSpPr>
-          <p:cNvPr id="9" name="TextBox 8"/>
-          <p:cNvSpPr txBox="1"/>
-          <p:nvPr/>
-        </p:nvSpPr>
-        <p:spPr>
-          <a:xfrm>
-            <a:off x="566928" y="3067050"/>
-            <a:ext cx="11057839" cy="285750"/>
-          </a:xfrm>
-          <a:prstGeom prst="rect">
-            <a:avLst/>
-          </a:prstGeom>
-          <a:noFill/>
-        </p:spPr>
-        <p:txBody>
-          <a:bodyPr wrap="square" lIns="0" rIns="0" tIns="0" bIns="0">
-            <a:spAutoFit/>
-          </a:bodyPr>
-          <a:lstStyle/>
-          <a:p>
-            <a:r>
-              <a:rPr sz="1800" b="0">
-                <a:solidFill>
-                  <a:srgbClr val="22303F"/>
-                </a:solidFill>
-                <a:latin typeface="Microsoft JhengHei"/>
-              </a:rPr>
-              <a:t>MySQL 相容性、PITR／還原、Online DDL、服務層 Failover、資源管理與多租戶隔離。</a:t>
-            </a:r>
-          </a:p>
-        </p:txBody>
-      </p:sp>
-      <p:sp>
-        <p:nvSpPr>
-          <p:cNvPr id="10" name="TextBox 9"/>
-          <p:cNvSpPr txBox="1"/>
-          <p:nvPr/>
-        </p:nvSpPr>
-        <p:spPr>
-          <a:xfrm>
-            <a:off x="566928" y="3480816"/>
-            <a:ext cx="11057839" cy="365760"/>
-          </a:xfrm>
-          <a:prstGeom prst="rect">
-            <a:avLst/>
-          </a:prstGeom>
-          <a:noFill/>
-        </p:spPr>
-        <p:txBody>
-          <a:bodyPr wrap="square" lIns="0" rIns="0" tIns="0" bIns="0">
-            <a:spAutoFit/>
-          </a:bodyPr>
-          <a:lstStyle/>
+              <a:t>先辨識強耦合與共同故障域，再決定單叢集、多叢集、或跨機房配置。</a:t>
+            </a:r>
+          </a:p>
           <a:p>
             <a:pPr>
               <a:spcAft>
@@ -3599,7 +3480,7 @@
                 </a:solidFill>
                 <a:latin typeface="Microsoft JhengHei"/>
               </a:rPr>
-              <a:t>1. </a:t>
+              <a:t>•  </a:t>
             </a:r>
             <a:r>
               <a:rPr sz="1800" b="1">
@@ -3608,66 +3489,9 @@
                 </a:solidFill>
                 <a:latin typeface="Microsoft JhengHei"/>
               </a:rPr>
-              <a:t>所有設定值都要回讀驗證</a:t>
-            </a:r>
-          </a:p>
-        </p:txBody>
-      </p:sp>
-      <p:sp>
-        <p:nvSpPr>
-          <p:cNvPr id="11" name="TextBox 10"/>
-          <p:cNvSpPr txBox="1"/>
-          <p:nvPr/>
-        </p:nvSpPr>
-        <p:spPr>
-          <a:xfrm>
-            <a:off x="566928" y="3952494"/>
-            <a:ext cx="11057839" cy="571500"/>
-          </a:xfrm>
-          <a:prstGeom prst="rect">
-            <a:avLst/>
-          </a:prstGeom>
-          <a:noFill/>
-        </p:spPr>
-        <p:txBody>
-          <a:bodyPr wrap="square" lIns="0" rIns="0" tIns="0" bIns="0">
-            <a:spAutoFit/>
-          </a:bodyPr>
-          <a:lstStyle/>
-          <a:p>
-            <a:r>
-              <a:rPr sz="1800" b="0">
-                <a:solidFill>
-                  <a:srgbClr val="22303F"/>
-                </a:solidFill>
-                <a:latin typeface="Microsoft JhengHei"/>
-              </a:rPr>
-              <a:t>指令執行成功不等於實際生效；隔離級、副本數、資料放置、就近讀取與故障注入，都要再查一次系統實際狀態。</a:t>
-            </a:r>
-          </a:p>
-        </p:txBody>
-      </p:sp>
-      <p:sp>
-        <p:nvSpPr>
-          <p:cNvPr id="12" name="TextBox 11"/>
-          <p:cNvSpPr txBox="1"/>
-          <p:nvPr/>
-        </p:nvSpPr>
-        <p:spPr>
-          <a:xfrm>
-            <a:off x="566928" y="4652010"/>
-            <a:ext cx="11057839" cy="365760"/>
-          </a:xfrm>
-          <a:prstGeom prst="rect">
-            <a:avLst/>
-          </a:prstGeom>
-          <a:noFill/>
-        </p:spPr>
-        <p:txBody>
-          <a:bodyPr wrap="square" lIns="0" rIns="0" tIns="0" bIns="0">
-            <a:spAutoFit/>
-          </a:bodyPr>
-          <a:lstStyle/>
+              <a:t>下一階段 TiDB 聚焦五項營運能力</a:t>
+            </a:r>
+          </a:p>
           <a:p>
             <a:pPr>
               <a:spcAft>
@@ -3675,81 +3499,19 @@
               </a:spcAft>
             </a:pPr>
             <a:r>
-              <a:rPr sz="1800">
+              <a:rPr sz="1800"/>
+              <a:t>     </a:t>
+            </a:r>
+            <a:r>
+              <a:rPr sz="1700" b="0">
                 <a:solidFill>
                   <a:srgbClr val="8A96A3"/>
                 </a:solidFill>
                 <a:latin typeface="Microsoft JhengHei"/>
               </a:rPr>
-              <a:t>1. </a:t>
-            </a:r>
-            <a:r>
-              <a:rPr sz="1800" b="1">
-                <a:solidFill>
-                  <a:srgbClr val="C0392B"/>
-                </a:solidFill>
-                <a:latin typeface="Microsoft JhengHei"/>
-              </a:rPr>
-              <a:t>以服務恢復時間取代單一的叢集健康燈號</a:t>
-            </a:r>
-          </a:p>
-        </p:txBody>
-      </p:sp>
-      <p:sp>
-        <p:nvSpPr>
-          <p:cNvPr id="13" name="TextBox 12"/>
-          <p:cNvSpPr txBox="1"/>
-          <p:nvPr/>
-        </p:nvSpPr>
-        <p:spPr>
-          <a:xfrm>
-            <a:off x="566928" y="5123688"/>
-            <a:ext cx="11057839" cy="285750"/>
-          </a:xfrm>
-          <a:prstGeom prst="rect">
-            <a:avLst/>
-          </a:prstGeom>
-          <a:noFill/>
-        </p:spPr>
-        <p:txBody>
-          <a:bodyPr wrap="square" lIns="0" rIns="0" tIns="0" bIns="0">
-            <a:spAutoFit/>
-          </a:bodyPr>
-          <a:lstStyle/>
-          <a:p>
-            <a:r>
-              <a:rPr sz="1800" b="0">
-                <a:solidFill>
-                  <a:srgbClr val="22303F"/>
-                </a:solidFill>
-                <a:latin typeface="Microsoft JhengHei"/>
-              </a:rPr>
-              <a:t>量測叢集恢復、資料可讀寫、終端服務恢復，以及交易是否遺失。還是 RTO ; 只是更換另一方式描述。</a:t>
-            </a:r>
-          </a:p>
-        </p:txBody>
-      </p:sp>
-      <p:sp>
-        <p:nvSpPr>
-          <p:cNvPr id="14" name="TextBox 13"/>
-          <p:cNvSpPr txBox="1"/>
-          <p:nvPr/>
-        </p:nvSpPr>
-        <p:spPr>
-          <a:xfrm>
-            <a:off x="566928" y="5537454"/>
-            <a:ext cx="11057839" cy="365760"/>
-          </a:xfrm>
-          <a:prstGeom prst="rect">
-            <a:avLst/>
-          </a:prstGeom>
-          <a:noFill/>
-        </p:spPr>
-        <p:txBody>
-          <a:bodyPr wrap="square" lIns="0" rIns="0" tIns="0" bIns="0">
-            <a:spAutoFit/>
-          </a:bodyPr>
-          <a:lstStyle/>
+              <a:t>MySQL 相容性、PITR／還原、Online DDL、服務層 Failover、資源管理與多租戶隔離。</a:t>
+            </a:r>
+          </a:p>
           <a:p>
             <a:pPr>
               <a:spcAft>
@@ -3763,7 +3525,7 @@
                 </a:solidFill>
                 <a:latin typeface="Microsoft JhengHei"/>
               </a:rPr>
-              <a:t>1. </a:t>
+              <a:t>•  </a:t>
             </a:r>
             <a:r>
               <a:rPr sz="1800" b="1">
@@ -3772,41 +3534,117 @@
                 </a:solidFill>
                 <a:latin typeface="Microsoft JhengHei"/>
               </a:rPr>
+              <a:t>所有設定值都要回讀驗證</a:t>
+            </a:r>
+          </a:p>
+          <a:p>
+            <a:pPr>
+              <a:spcAft>
+                <a:spcPts val="600"/>
+              </a:spcAft>
+            </a:pPr>
+            <a:r>
+              <a:rPr sz="1800"/>
+              <a:t>     </a:t>
+            </a:r>
+            <a:r>
+              <a:rPr sz="1700" b="0">
+                <a:solidFill>
+                  <a:srgbClr val="8A96A3"/>
+                </a:solidFill>
+                <a:latin typeface="Microsoft JhengHei"/>
+              </a:rPr>
+              <a:t>指令執行成功不等於實際生效；隔離級、副本數、資料放置、就近讀取與故障注入，都要再查一次系統實際狀態。</a:t>
+            </a:r>
+          </a:p>
+          <a:p>
+            <a:pPr>
+              <a:spcAft>
+                <a:spcPts val="600"/>
+              </a:spcAft>
+            </a:pPr>
+            <a:r>
+              <a:rPr sz="1800">
+                <a:solidFill>
+                  <a:srgbClr val="8A96A3"/>
+                </a:solidFill>
+                <a:latin typeface="Microsoft JhengHei"/>
+              </a:rPr>
+              <a:t>•  </a:t>
+            </a:r>
+            <a:r>
+              <a:rPr sz="1800" b="1">
+                <a:solidFill>
+                  <a:srgbClr val="C0392B"/>
+                </a:solidFill>
+                <a:latin typeface="Microsoft JhengHei"/>
+              </a:rPr>
+              <a:t>以服務恢復時間取代單一的叢集健康燈號</a:t>
+            </a:r>
+          </a:p>
+          <a:p>
+            <a:pPr>
+              <a:spcAft>
+                <a:spcPts val="600"/>
+              </a:spcAft>
+            </a:pPr>
+            <a:r>
+              <a:rPr sz="1800"/>
+              <a:t>     </a:t>
+            </a:r>
+            <a:r>
+              <a:rPr sz="1700" b="0">
+                <a:solidFill>
+                  <a:srgbClr val="8A96A3"/>
+                </a:solidFill>
+                <a:latin typeface="Microsoft JhengHei"/>
+              </a:rPr>
+              <a:t>量測叢集恢復、資料可讀寫、終端服務恢復，以及交易是否遺失。還是 RTO ; 只是更換另一方式描述。</a:t>
+            </a:r>
+          </a:p>
+          <a:p>
+            <a:pPr>
+              <a:spcAft>
+                <a:spcPts val="600"/>
+              </a:spcAft>
+            </a:pPr>
+            <a:r>
+              <a:rPr sz="1800">
+                <a:solidFill>
+                  <a:srgbClr val="8A96A3"/>
+                </a:solidFill>
+                <a:latin typeface="Microsoft JhengHei"/>
+              </a:rPr>
+              <a:t>•  </a:t>
+            </a:r>
+            <a:r>
+              <a:rPr sz="1800" b="1">
+                <a:solidFill>
+                  <a:srgbClr val="C0392B"/>
+                </a:solidFill>
+                <a:latin typeface="Microsoft JhengHei"/>
+              </a:rPr>
               <a:t>A/A 不作預設起點</a:t>
             </a:r>
           </a:p>
-        </p:txBody>
-      </p:sp>
-      <p:sp>
-        <p:nvSpPr>
-          <p:cNvPr id="15" name="TextBox 14"/>
-          <p:cNvSpPr txBox="1"/>
-          <p:nvPr/>
-        </p:nvSpPr>
-        <p:spPr>
-          <a:xfrm>
-            <a:off x="566928" y="6009132"/>
-            <a:ext cx="11057839" cy="285750"/>
-          </a:xfrm>
-          <a:prstGeom prst="rect">
-            <a:avLst/>
-          </a:prstGeom>
-          <a:noFill/>
-        </p:spPr>
-        <p:txBody>
-          <a:bodyPr wrap="square" lIns="0" rIns="0" tIns="0" bIns="0">
-            <a:spAutoFit/>
-          </a:bodyPr>
-          <a:lstStyle/>
-          <a:p>
-            <a:r>
-              <a:rPr sz="1800" b="0">
-                <a:solidFill>
-                  <a:srgbClr val="22303F"/>
-                </a:solidFill>
-                <a:latin typeface="Microsoft JhengHei"/>
-              </a:rPr>
-              <a:t>先完成單區主辦與災難復原就緒能力；只有業務提出雙區讀寫需求時才啟動 A/A 驗證。</a:t>
+          <a:p>
+            <a:pPr>
+              <a:spcAft>
+                <a:spcPts val="600"/>
+              </a:spcAft>
+            </a:pPr>
+            <a:r>
+              <a:rPr sz="1800"/>
+              <a:t>     </a:t>
+            </a:r>
+            <a:r>
+              <a:rPr sz="1700" b="0">
+                <a:solidFill>
+                  <a:srgbClr val="8A96A3"/>
+                </a:solidFill>
+                <a:latin typeface="Microsoft JhengHei"/>
+              </a:rPr>
+              <a:t>先完成單區營運與災難復原就緒能力；只有業務提出雙區讀寫需求時才啟動 A/A 驗證。</a:t>
             </a:r>
           </a:p>
         </p:txBody>
@@ -3976,7 +3814,7 @@
         </p:nvGraphicFramePr>
         <p:xfrm>
           <a:off x="566928" y="1709928"/>
-          <a:ext cx="11057839" cy="2252726"/>
+          <a:ext cx="11057839" cy="2768346"/>
         </p:xfrm>
         <a:graphic>
           <a:graphicData uri="http://schemas.openxmlformats.org/drawingml/2006/table">
@@ -3985,8 +3823,9 @@
                 <a:tableStyleId>{5C22544A-7EE6-4342-B048-85BDC9FD1C3A}</a:tableStyleId>
               </a:tblPr>
               <a:tblGrid>
-                <a:gridCol w="5358211"/>
-                <a:gridCol w="5699628"/>
+                <a:gridCol w="1374988"/>
+                <a:gridCol w="4723341"/>
+                <a:gridCol w="4959510"/>
               </a:tblGrid>
               <a:tr h="321818">
                 <a:tc>
@@ -4002,6 +3841,29 @@
                           </a:solidFill>
                           <a:latin typeface="Microsoft JhengHei"/>
                         </a:rPr>
+                        <a:t>分組</a:t>
+                      </a:r>
+                    </a:p>
+                  </a:txBody>
+                  <a:tcPr marL="64008" marR="64008" marT="32004" marB="32004" anchor="ctr">
+                    <a:solidFill>
+                      <a:srgbClr val="ECEFF2"/>
+                    </a:solidFill>
+                  </a:tcPr>
+                </a:tc>
+                <a:tc>
+                  <a:txBody>
+                    <a:bodyPr wrap="square"/>
+                    <a:lstStyle/>
+                    <a:p>
+                      <a:pPr algn="ctr"/>
+                      <a:r>
+                        <a:rPr sz="1400" b="1">
+                          <a:solidFill>
+                            <a:srgbClr val="1A2B3C"/>
+                          </a:solidFill>
+                          <a:latin typeface="Microsoft JhengHei"/>
+                        </a:rPr>
                         <a:t>TSD 討論觀察</a:t>
                       </a:r>
                     </a:p>
@@ -4032,6 +3894,86 @@
                   <a:tcPr marL="64008" marR="64008" marT="32004" marB="32004" anchor="ctr">
                     <a:solidFill>
                       <a:srgbClr val="ECEFF2"/>
+                    </a:solidFill>
+                  </a:tcPr>
+                </a:tc>
+              </a:tr>
+              <a:tr h="579628">
+                <a:tc>
+                  <a:txBody>
+                    <a:bodyPr wrap="square"/>
+                    <a:lstStyle/>
+                    <a:p>
+                      <a:pPr algn="ctr"/>
+                      <a:r>
+                        <a:rPr sz="1400" b="1">
+                          <a:solidFill>
+                            <a:srgbClr val="C0392B"/>
+                          </a:solidFill>
+                          <a:latin typeface="Microsoft JhengHei"/>
+                        </a:rPr>
+                        <a:t>選題</a:t>
+                      </a:r>
+                      <a:r>
+                        <a:rPr sz="1400" b="0">
+                          <a:solidFill>
+                            <a:srgbClr val="22303F"/>
+                          </a:solidFill>
+                          <a:latin typeface="Microsoft JhengHei"/>
+                        </a:rPr>
+                        <a:t>｜挑哪個服務</a:t>
+                      </a:r>
+                    </a:p>
+                  </a:txBody>
+                  <a:tcPr marL="64008" marR="64008" marT="32004" marB="32004" anchor="ctr">
+                    <a:solidFill>
+                      <a:srgbClr val="FFFFFF"/>
+                    </a:solidFill>
+                  </a:tcPr>
+                </a:tc>
+                <a:tc>
+                  <a:txBody>
+                    <a:bodyPr wrap="square"/>
+                    <a:lstStyle/>
+                    <a:p>
+                      <a:pPr algn="l"/>
+                      <a:r>
+                        <a:rPr sz="1400" b="0">
+                          <a:solidFill>
+                            <a:srgbClr val="22303F"/>
+                          </a:solidFill>
+                          <a:latin typeface="Microsoft JhengHei"/>
+                        </a:rPr>
+                        <a:t>故障影響範圍的重要性提高（AWS 下雲、地端集中）</a:t>
+                      </a:r>
+                    </a:p>
+                  </a:txBody>
+                  <a:tcPr marL="64008" marR="64008" marT="32004" marB="32004" anchor="ctr">
+                    <a:solidFill>
+                      <a:srgbClr val="FFFFFF"/>
+                    </a:solidFill>
+                  </a:tcPr>
+                </a:tc>
+                <a:tc>
+                  <a:txBody>
+                    <a:bodyPr wrap="square"/>
+                    <a:lstStyle/>
+                    <a:p>
+                      <a:pPr algn="l"/>
+                      <a:r>
+                        <a:rPr sz="1400" b="0">
+                          <a:solidFill>
+                            <a:srgbClr val="22303F"/>
+                          </a:solidFill>
+                          <a:latin typeface="Microsoft JhengHei"/>
+                        </a:rPr>
+                        <a:t>Pilot 需選可驗證隔離與恢復的代表性服務</a:t>
+                      </a:r>
+                    </a:p>
+                  </a:txBody>
+                  <a:tcPr marL="64008" marR="64008" marT="32004" marB="32004" anchor="ctr">
+                    <a:solidFill>
+                      <a:srgbClr val="FFFFFF"/>
                     </a:solidFill>
                   </a:tcPr>
                 </a:tc>
@@ -4042,15 +3984,86 @@
                     <a:bodyPr wrap="square"/>
                     <a:lstStyle/>
                     <a:p>
+                      <a:pPr algn="ctr"/>
+                    </a:p>
+                  </a:txBody>
+                  <a:tcPr marL="64008" marR="64008" marT="32004" marB="32004" anchor="ctr">
+                    <a:solidFill>
+                      <a:srgbClr val="F7F9FA"/>
+                    </a:solidFill>
+                  </a:tcPr>
+                </a:tc>
+                <a:tc>
+                  <a:txBody>
+                    <a:bodyPr wrap="square"/>
+                    <a:lstStyle/>
+                    <a:p>
                       <a:pPr algn="l"/>
                       <a:r>
-                        <a:rPr sz="1400" b="0">
-                          <a:solidFill>
-                            <a:srgbClr val="22303F"/>
-                          </a:solidFill>
-                          <a:latin typeface="Microsoft JhengHei"/>
-                        </a:rPr>
-                        <a:t>AWS 工作負載下雲、地端集中，故障影響範圍的重要性提高</a:t>
+                        <a:rPr sz="1400" b="1">
+                          <a:solidFill>
+                            <a:srgbClr val="C0392B"/>
+                          </a:solidFill>
+                          <a:latin typeface="Microsoft JhengHei"/>
+                        </a:rPr>
+                        <a:t>DR Site／EDC 具活化價值，但跨區 A/A 尚無強需求</a:t>
+                      </a:r>
+                    </a:p>
+                  </a:txBody>
+                  <a:tcPr marL="64008" marR="64008" marT="32004" marB="32004" anchor="ctr">
+                    <a:solidFill>
+                      <a:srgbClr val="F7F9FA"/>
+                    </a:solidFill>
+                  </a:tcPr>
+                </a:tc>
+                <a:tc>
+                  <a:txBody>
+                    <a:bodyPr wrap="square"/>
+                    <a:lstStyle/>
+                    <a:p>
+                      <a:pPr algn="l"/>
+                      <a:r>
+                        <a:rPr sz="1400" b="1">
+                          <a:solidFill>
+                            <a:srgbClr val="C0392B"/>
+                          </a:solidFill>
+                          <a:latin typeface="Microsoft JhengHei"/>
+                        </a:rPr>
+                        <a:t>可先挑能移至 EDC 持續運作的定期批次或低風險服務</a:t>
+                      </a:r>
+                    </a:p>
+                  </a:txBody>
+                  <a:tcPr marL="64008" marR="64008" marT="32004" marB="32004" anchor="ctr">
+                    <a:solidFill>
+                      <a:srgbClr val="F7F9FA"/>
+                    </a:solidFill>
+                  </a:tcPr>
+                </a:tc>
+              </a:tr>
+              <a:tr h="579628">
+                <a:tc>
+                  <a:txBody>
+                    <a:bodyPr wrap="square"/>
+                    <a:lstStyle/>
+                    <a:p>
+                      <a:pPr algn="ctr"/>
+                      <a:r>
+                        <a:rPr sz="1400" b="1">
+                          <a:solidFill>
+                            <a:srgbClr val="C0392B"/>
+                          </a:solidFill>
+                          <a:latin typeface="Microsoft JhengHei"/>
+                        </a:rPr>
+                        <a:t>驗收</a:t>
+                      </a:r>
+                      <a:r>
+                        <a:rPr sz="1400" b="0">
+                          <a:solidFill>
+                            <a:srgbClr val="22303F"/>
+                          </a:solidFill>
+                          <a:latin typeface="Microsoft JhengHei"/>
+                        </a:rPr>
+                        <a:t>｜怎麼算通過</a:t>
                       </a:r>
                     </a:p>
                   </a:txBody>
@@ -4073,7 +4086,30 @@
                           </a:solidFill>
                           <a:latin typeface="Microsoft JhengHei"/>
                         </a:rPr>
-                        <a:t>Pilot 需選可驗證隔離與恢復的代表性服務</a:t>
+                        <a:t>在意最快恢復服務，而非只有抽象 RTO／RPO</a:t>
+                      </a:r>
+                    </a:p>
+                  </a:txBody>
+                  <a:tcPr marL="64008" marR="64008" marT="32004" marB="32004" anchor="ctr">
+                    <a:solidFill>
+                      <a:srgbClr val="FFFFFF"/>
+                    </a:solidFill>
+                  </a:tcPr>
+                </a:tc>
+                <a:tc>
+                  <a:txBody>
+                    <a:bodyPr wrap="square"/>
+                    <a:lstStyle/>
+                    <a:p>
+                      <a:pPr algn="l"/>
+                      <a:r>
+                        <a:rPr sz="1400" b="0">
+                          <a:solidFill>
+                            <a:srgbClr val="22303F"/>
+                          </a:solidFill>
+                          <a:latin typeface="Microsoft JhengHei"/>
+                        </a:rPr>
+                        <a:t>定義使用者可感知的恢復驗收點</a:t>
                       </a:r>
                     </a:p>
                   </a:txBody>
@@ -4090,15 +4126,29 @@
                     <a:bodyPr wrap="square"/>
                     <a:lstStyle/>
                     <a:p>
+                      <a:pPr algn="ctr"/>
+                    </a:p>
+                  </a:txBody>
+                  <a:tcPr marL="64008" marR="64008" marT="32004" marB="32004" anchor="ctr">
+                    <a:solidFill>
+                      <a:srgbClr val="F7F9FA"/>
+                    </a:solidFill>
+                  </a:tcPr>
+                </a:tc>
+                <a:tc>
+                  <a:txBody>
+                    <a:bodyPr wrap="square"/>
+                    <a:lstStyle/>
+                    <a:p>
                       <a:pPr algn="l"/>
                       <a:r>
-                        <a:rPr sz="1400" b="0">
-                          <a:solidFill>
-                            <a:srgbClr val="22303F"/>
-                          </a:solidFill>
-                          <a:latin typeface="Microsoft JhengHei"/>
-                        </a:rPr>
-                        <a:t>產品更在意最快恢復服務，而非只有抽象 RTO／RPO</a:t>
+                        <a:rPr sz="1400" b="1">
+                          <a:solidFill>
+                            <a:srgbClr val="C0392B"/>
+                          </a:solidFill>
+                          <a:latin typeface="Microsoft JhengHei"/>
+                        </a:rPr>
+                        <a:t>一致性優先（C &gt; A）</a:t>
                       </a:r>
                     </a:p>
                   </a:txBody>
@@ -4115,13 +4165,13 @@
                     <a:p>
                       <a:pPr algn="l"/>
                       <a:r>
-                        <a:rPr sz="1400" b="0">
-                          <a:solidFill>
-                            <a:srgbClr val="22303F"/>
-                          </a:solidFill>
-                          <a:latin typeface="Microsoft JhengHei"/>
-                        </a:rPr>
-                        <a:t>定義使用者可感知的恢復驗收點</a:t>
+                        <a:rPr sz="1400" b="1">
+                          <a:solidFill>
+                            <a:srgbClr val="C0392B"/>
+                          </a:solidFill>
+                          <a:latin typeface="Microsoft JhengHei"/>
+                        </a:rPr>
+                        <a:t>先驗證一致性、拒寫與恢復，不以持續寫入為唯一目標</a:t>
                       </a:r>
                     </a:p>
                   </a:txBody>
@@ -4138,15 +4188,47 @@
                     <a:bodyPr wrap="square"/>
                     <a:lstStyle/>
                     <a:p>
+                      <a:pPr algn="ctr"/>
+                      <a:r>
+                        <a:rPr sz="1400" b="1">
+                          <a:solidFill>
+                            <a:srgbClr val="C0392B"/>
+                          </a:solidFill>
+                          <a:latin typeface="Microsoft JhengHei"/>
+                        </a:rPr>
+                        <a:t>協作</a:t>
+                      </a:r>
+                      <a:r>
+                        <a:rPr sz="1400" b="0">
+                          <a:solidFill>
+                            <a:srgbClr val="22303F"/>
+                          </a:solidFill>
+                          <a:latin typeface="Microsoft JhengHei"/>
+                        </a:rPr>
+                        <a:t>｜誰來做</a:t>
+                      </a:r>
+                    </a:p>
+                  </a:txBody>
+                  <a:tcPr marL="64008" marR="64008" marT="32004" marB="32004" anchor="ctr">
+                    <a:solidFill>
+                      <a:srgbClr val="FFFFFF"/>
+                    </a:solidFill>
+                  </a:tcPr>
+                </a:tc>
+                <a:tc>
+                  <a:txBody>
+                    <a:bodyPr wrap="square"/>
+                    <a:lstStyle/>
+                    <a:p>
                       <a:pPr algn="l"/>
                       <a:r>
-                        <a:rPr sz="1400" b="0">
-                          <a:solidFill>
-                            <a:srgbClr val="22303F"/>
-                          </a:solidFill>
-                          <a:latin typeface="Microsoft JhengHei"/>
-                        </a:rPr>
-                        <a:t>CAP 取捨目前傾向一致性優先（C &gt; A）</a:t>
+                        <a:rPr sz="1400" b="1">
+                          <a:solidFill>
+                            <a:srgbClr val="C0392B"/>
+                          </a:solidFill>
+                          <a:latin typeface="Microsoft JhengHei"/>
+                        </a:rPr>
+                        <a:t>產品期待 Database Self-Service</a:t>
                       </a:r>
                     </a:p>
                   </a:txBody>
@@ -4163,13 +4245,13 @@
                     <a:p>
                       <a:pPr algn="l"/>
                       <a:r>
-                        <a:rPr sz="1400" b="0">
-                          <a:solidFill>
-                            <a:srgbClr val="22303F"/>
-                          </a:solidFill>
-                          <a:latin typeface="Microsoft JhengHei"/>
-                        </a:rPr>
-                        <a:t>先驗證一致性、拒寫與恢復，不以持續寫入為唯一目標</a:t>
+                        <a:rPr sz="1400" b="1">
+                          <a:solidFill>
+                            <a:srgbClr val="C0392B"/>
+                          </a:solidFill>
+                          <a:latin typeface="Microsoft JhengHei"/>
+                        </a:rPr>
+                        <a:t>Pilot 同步驗證申請、權限、配額、備份、監控與退場</a:t>
                       </a:r>
                     </a:p>
                   </a:txBody>
@@ -4186,16 +4268,7 @@
                     <a:bodyPr wrap="square"/>
                     <a:lstStyle/>
                     <a:p>
-                      <a:pPr algn="l"/>
-                      <a:r>
-                        <a:rPr sz="1400" b="0">
-                          <a:solidFill>
-                            <a:srgbClr val="22303F"/>
-                          </a:solidFill>
-                          <a:latin typeface="Microsoft JhengHei"/>
-                        </a:rPr>
-                        <a:t>DR Site／EDC 具活化價值，但跨區 A/A 尚無強需求</a:t>
-                      </a:r>
+                      <a:pPr algn="ctr"/>
                     </a:p>
                   </a:txBody>
                   <a:tcPr marL="64008" marR="64008" marT="32004" marB="32004" anchor="ctr">
@@ -4204,79 +4277,6 @@
                     </a:solidFill>
                   </a:tcPr>
                 </a:tc>
-                <a:tc>
-                  <a:txBody>
-                    <a:bodyPr wrap="square"/>
-                    <a:lstStyle/>
-                    <a:p>
-                      <a:pPr algn="l"/>
-                      <a:r>
-                        <a:rPr sz="1400" b="0">
-                          <a:solidFill>
-                            <a:srgbClr val="22303F"/>
-                          </a:solidFill>
-                          <a:latin typeface="Microsoft JhengHei"/>
-                        </a:rPr>
-                        <a:t>可先挑選能移至 EDC 持續運作的定期批次或低風險服務</a:t>
-                      </a:r>
-                    </a:p>
-                  </a:txBody>
-                  <a:tcPr marL="64008" marR="64008" marT="32004" marB="32004" anchor="ctr">
-                    <a:solidFill>
-                      <a:srgbClr val="F7F9FA"/>
-                    </a:solidFill>
-                  </a:tcPr>
-                </a:tc>
-              </a:tr>
-              <a:tr h="321818">
-                <a:tc>
-                  <a:txBody>
-                    <a:bodyPr wrap="square"/>
-                    <a:lstStyle/>
-                    <a:p>
-                      <a:pPr algn="l"/>
-                      <a:r>
-                        <a:rPr sz="1400" b="0">
-                          <a:solidFill>
-                            <a:srgbClr val="22303F"/>
-                          </a:solidFill>
-                          <a:latin typeface="Microsoft JhengHei"/>
-                        </a:rPr>
-                        <a:t>產品期待 Database Self-Service</a:t>
-                      </a:r>
-                    </a:p>
-                  </a:txBody>
-                  <a:tcPr marL="64008" marR="64008" marT="32004" marB="32004" anchor="ctr">
-                    <a:solidFill>
-                      <a:srgbClr val="FFFFFF"/>
-                    </a:solidFill>
-                  </a:tcPr>
-                </a:tc>
-                <a:tc>
-                  <a:txBody>
-                    <a:bodyPr wrap="square"/>
-                    <a:lstStyle/>
-                    <a:p>
-                      <a:pPr algn="l"/>
-                      <a:r>
-                        <a:rPr sz="1400" b="0">
-                          <a:solidFill>
-                            <a:srgbClr val="22303F"/>
-                          </a:solidFill>
-                          <a:latin typeface="Microsoft JhengHei"/>
-                        </a:rPr>
-                        <a:t>Pilot 同步驗證申請、權限、配額、備份、監控與退場生命週期</a:t>
-                      </a:r>
-                    </a:p>
-                  </a:txBody>
-                  <a:tcPr marL="64008" marR="64008" marT="32004" marB="32004" anchor="ctr">
-                    <a:solidFill>
-                      <a:srgbClr val="FFFFFF"/>
-                    </a:solidFill>
-                  </a:tcPr>
-                </a:tc>
-              </a:tr>
-              <a:tr h="321818">
                 <a:tc>
                   <a:txBody>
                     <a:bodyPr wrap="square"/>
@@ -4336,8 +4336,8 @@
         </p:nvSpPr>
         <p:spPr>
           <a:xfrm>
-            <a:off x="694944" y="4182110"/>
-            <a:ext cx="10929823" cy="279400"/>
+            <a:off x="694944" y="4697730"/>
+            <a:ext cx="10929823" cy="558800"/>
           </a:xfrm>
           <a:prstGeom prst="rect">
             <a:avLst/>
@@ -4357,7 +4357,61 @@
                 </a:solidFill>
                 <a:latin typeface="Microsoft JhengHei"/>
               </a:rPr>
-              <a:t>Infra 改造必須同時說明產品效益、應用改造量與投資報酬；技術可行不等於推進理由。</a:t>
+              <a:t>粗體三列是本次 Pilot 最關鍵的約束：</a:t>
+            </a:r>
+            <a:r>
+              <a:rPr sz="1600" b="1">
+                <a:solidFill>
+                  <a:srgbClr val="C0392B"/>
+                </a:solidFill>
+                <a:latin typeface="Microsoft JhengHei"/>
+              </a:rPr>
+              <a:t>選題落在 EDC 定期批次</a:t>
+            </a:r>
+            <a:r>
+              <a:rPr sz="1600" b="0">
+                <a:solidFill>
+                  <a:srgbClr val="8A96A3"/>
+                </a:solidFill>
+                <a:latin typeface="Microsoft JhengHei"/>
+              </a:rPr>
+              <a:t>、</a:t>
+            </a:r>
+            <a:r>
+              <a:rPr sz="1600" b="1">
+                <a:solidFill>
+                  <a:srgbClr val="C0392B"/>
+                </a:solidFill>
+                <a:latin typeface="Microsoft JhengHei"/>
+              </a:rPr>
+              <a:t>驗收以一致性優先</a:t>
+            </a:r>
+            <a:r>
+              <a:rPr sz="1600" b="0">
+                <a:solidFill>
+                  <a:srgbClr val="8A96A3"/>
+                </a:solidFill>
+                <a:latin typeface="Microsoft JhengHei"/>
+              </a:rPr>
+              <a:t>、</a:t>
+            </a:r>
+            <a:r>
+              <a:rPr sz="1600" b="1">
+                <a:solidFill>
+                  <a:srgbClr val="C0392B"/>
+                </a:solidFill>
+                <a:latin typeface="Microsoft JhengHei"/>
+              </a:rPr>
+              <a:t>服務化（Self-Service）與效能同等重要</a:t>
+            </a:r>
+            <a:r>
+              <a:rPr sz="1600" b="0">
+                <a:solidFill>
+                  <a:srgbClr val="8A96A3"/>
+                </a:solidFill>
+                <a:latin typeface="Microsoft JhengHei"/>
+              </a:rPr>
+              <a:t>。Infra 改造必須同時說明產品效益、應用改造量與投資報酬；技術可行不等於推進理由。</a:t>
             </a:r>
           </a:p>
         </p:txBody>
@@ -4370,8 +4424,8 @@
         </p:nvSpPr>
         <p:spPr>
           <a:xfrm>
-            <a:off x="566928" y="4182110"/>
-            <a:ext cx="26000" cy="279400"/>
+            <a:off x="566928" y="4697730"/>
+            <a:ext cx="26000" cy="558800"/>
           </a:xfrm>
           <a:prstGeom prst="rect">
             <a:avLst/>
@@ -4571,7 +4625,7 @@
         </p:nvGraphicFramePr>
         <p:xfrm>
           <a:off x="566928" y="1709928"/>
-          <a:ext cx="11057839" cy="3219958"/>
+          <a:ext cx="11057839" cy="2962148"/>
         </p:xfrm>
         <a:graphic>
           <a:graphicData uri="http://schemas.openxmlformats.org/drawingml/2006/table">
@@ -4580,10 +4634,10 @@
                 <a:tableStyleId>{5C22544A-7EE6-4342-B048-85BDC9FD1C3A}</a:tableStyleId>
               </a:tblPr>
               <a:tblGrid>
-                <a:gridCol w="2073901"/>
-                <a:gridCol w="4029054"/>
-                <a:gridCol w="2495891"/>
-                <a:gridCol w="2458993"/>
+                <a:gridCol w="1163098"/>
+                <a:gridCol w="4437523"/>
+                <a:gridCol w="2748928"/>
+                <a:gridCol w="2708290"/>
               </a:tblGrid>
               <a:tr h="321818">
                 <a:tc>
@@ -4685,6 +4739,29 @@
                     <a:bodyPr wrap="square"/>
                     <a:lstStyle/>
                     <a:p>
+                      <a:pPr algn="ctr"/>
+                      <a:r>
+                        <a:rPr sz="1400" b="0">
+                          <a:solidFill>
+                            <a:srgbClr val="22303F"/>
+                          </a:solidFill>
+                          <a:latin typeface="Microsoft JhengHei"/>
+                        </a:rPr>
+                        <a:t>0｜保留現況</a:t>
+                      </a:r>
+                    </a:p>
+                  </a:txBody>
+                  <a:tcPr marL="64008" marR="64008" marT="32004" marB="32004" anchor="ctr">
+                    <a:solidFill>
+                      <a:srgbClr val="FFFFFF"/>
+                    </a:solidFill>
+                  </a:tcPr>
+                </a:tc>
+                <a:tc>
+                  <a:txBody>
+                    <a:bodyPr wrap="square"/>
+                    <a:lstStyle/>
+                    <a:p>
                       <a:pPr algn="l"/>
                       <a:r>
                         <a:rPr sz="1400" b="0">
@@ -4693,7 +4770,7 @@
                           </a:solidFill>
                           <a:latin typeface="Microsoft JhengHei"/>
                         </a:rPr>
-                        <a:t>0｜保留現況</a:t>
+                        <a:t>結束本輪 PoC、封存 framework，依既有架構營運</a:t>
                       </a:r>
                     </a:p>
                   </a:txBody>
@@ -4716,7 +4793,7 @@
                           </a:solidFill>
                           <a:latin typeface="Microsoft JhengHei"/>
                         </a:rPr>
-                        <a:t>結束本輪 PoC、封存 framework，依既有架構營運</a:t>
+                        <a:t>不增加遷移與平台成本</a:t>
                       </a:r>
                     </a:p>
                   </a:txBody>
@@ -4739,7 +4816,7 @@
                           </a:solidFill>
                           <a:latin typeface="Microsoft JhengHei"/>
                         </a:rPr>
-                        <a:t>不增加遷移與平台成本</a:t>
+                        <a:t>不解決既有故障域、擴展或服務化問題</a:t>
                       </a:r>
                     </a:p>
                   </a:txBody>
@@ -4749,6 +4826,31 @@
                     </a:solidFill>
                   </a:tcPr>
                 </a:tc>
+              </a:tr>
+              <a:tr h="321818">
+                <a:tc>
+                  <a:txBody>
+                    <a:bodyPr wrap="square"/>
+                    <a:lstStyle/>
+                    <a:p>
+                      <a:pPr algn="ctr"/>
+                      <a:r>
+                        <a:rPr sz="1400" b="0">
+                          <a:solidFill>
+                            <a:srgbClr val="22303F"/>
+                          </a:solidFill>
+                          <a:latin typeface="Microsoft JhengHei"/>
+                        </a:rPr>
+                        <a:t>A｜技術補件</a:t>
+                      </a:r>
+                    </a:p>
+                  </a:txBody>
+                  <a:tcPr marL="64008" marR="64008" marT="32004" marB="32004" anchor="ctr">
+                    <a:solidFill>
+                      <a:srgbClr val="F7F9FA"/>
+                    </a:solidFill>
+                  </a:tcPr>
+                </a:tc>
                 <a:tc>
                   <a:txBody>
                     <a:bodyPr wrap="square"/>
@@ -4762,13 +4864,59 @@
                           </a:solidFill>
                           <a:latin typeface="Microsoft JhengHei"/>
                         </a:rPr>
-                        <a:t>不解決既有故障域、擴展或服務化問題</a:t>
-                      </a:r>
-                    </a:p>
-                  </a:txBody>
-                  <a:tcPr marL="64008" marR="64008" marT="32004" marB="32004" anchor="ctr">
-                    <a:solidFill>
-                      <a:srgbClr val="FFFFFF"/>
+                        <a:t>只補 TiDB 相容性、PITR、Online DDL 與支援資料</a:t>
+                      </a:r>
+                    </a:p>
+                  </a:txBody>
+                  <a:tcPr marL="64008" marR="64008" marT="32004" marB="32004" anchor="ctr">
+                    <a:solidFill>
+                      <a:srgbClr val="F7F9FA"/>
+                    </a:solidFill>
+                  </a:tcPr>
+                </a:tc>
+                <a:tc>
+                  <a:txBody>
+                    <a:bodyPr wrap="square"/>
+                    <a:lstStyle/>
+                    <a:p>
+                      <a:pPr algn="l"/>
+                      <a:r>
+                        <a:rPr sz="1400" b="0">
+                          <a:solidFill>
+                            <a:srgbClr val="22303F"/>
+                          </a:solidFill>
+                          <a:latin typeface="Microsoft JhengHei"/>
+                        </a:rPr>
+                        <a:t>投入最低、快速補足評分缺口</a:t>
+                      </a:r>
+                    </a:p>
+                  </a:txBody>
+                  <a:tcPr marL="64008" marR="64008" marT="32004" marB="32004" anchor="ctr">
+                    <a:solidFill>
+                      <a:srgbClr val="F7F9FA"/>
+                    </a:solidFill>
+                  </a:tcPr>
+                </a:tc>
+                <a:tc>
+                  <a:txBody>
+                    <a:bodyPr wrap="square"/>
+                    <a:lstStyle/>
+                    <a:p>
+                      <a:pPr algn="l"/>
+                      <a:r>
+                        <a:rPr sz="1400" b="0">
+                          <a:solidFill>
+                            <a:srgbClr val="22303F"/>
+                          </a:solidFill>
+                          <a:latin typeface="Microsoft JhengHei"/>
+                        </a:rPr>
+                        <a:t>無真實應用與服務生命週期證據</a:t>
+                      </a:r>
+                    </a:p>
+                  </a:txBody>
+                  <a:tcPr marL="64008" marR="64008" marT="32004" marB="32004" anchor="ctr">
+                    <a:solidFill>
+                      <a:srgbClr val="F7F9FA"/>
                     </a:solidFill>
                   </a:tcPr>
                 </a:tc>
@@ -4779,21 +4927,44 @@
                     <a:bodyPr wrap="square"/>
                     <a:lstStyle/>
                     <a:p>
+                      <a:pPr algn="ctr"/>
+                      <a:r>
+                        <a:rPr sz="1400" b="1">
+                          <a:solidFill>
+                            <a:srgbClr val="C0392B"/>
+                          </a:solidFill>
+                          <a:latin typeface="Microsoft JhengHei"/>
+                        </a:rPr>
+                        <a:t>B｜快速驗證＋Pilot</a:t>
+                      </a:r>
+                    </a:p>
+                  </a:txBody>
+                  <a:tcPr marL="64008" marR="64008" marT="32004" marB="32004" anchor="ctr">
+                    <a:solidFill>
+                      <a:srgbClr val="FFFFFF"/>
+                    </a:solidFill>
+                  </a:tcPr>
+                </a:tc>
+                <a:tc>
+                  <a:txBody>
+                    <a:bodyPr wrap="square"/>
+                    <a:lstStyle/>
+                    <a:p>
                       <a:pPr algn="l"/>
                       <a:r>
-                        <a:rPr sz="1400" b="0">
-                          <a:solidFill>
-                            <a:srgbClr val="22303F"/>
-                          </a:solidFill>
-                          <a:latin typeface="Microsoft JhengHei"/>
-                        </a:rPr>
-                        <a:t>A｜技術補件</a:t>
-                      </a:r>
-                    </a:p>
-                  </a:txBody>
-                  <a:tcPr marL="64008" marR="64008" marT="32004" marB="32004" anchor="ctr">
-                    <a:solidFill>
-                      <a:srgbClr val="F7F9FA"/>
+                        <a:rPr sz="1400" b="1">
+                          <a:solidFill>
+                            <a:srgbClr val="C0392B"/>
+                          </a:solidFill>
+                          <a:latin typeface="Microsoft JhengHei"/>
+                        </a:rPr>
+                        <a:t>TiDB 完成技術 Gate，再導入一個代表性 MySQL 應用／批次</a:t>
+                      </a:r>
+                    </a:p>
+                  </a:txBody>
+                  <a:tcPr marL="64008" marR="64008" marT="32004" marB="32004" anchor="ctr">
+                    <a:solidFill>
+                      <a:srgbClr val="FFFFFF"/>
                     </a:solidFill>
                   </a:tcPr>
                 </a:tc>
@@ -4804,19 +4975,19 @@
                     <a:p>
                       <a:pPr algn="l"/>
                       <a:r>
-                        <a:rPr sz="1400" b="0">
-                          <a:solidFill>
-                            <a:srgbClr val="22303F"/>
-                          </a:solidFill>
-                          <a:latin typeface="Microsoft JhengHei"/>
-                        </a:rPr>
-                        <a:t>只補 TiDB 相容性、PITR、Online DDL 與支援資料</a:t>
-                      </a:r>
-                    </a:p>
-                  </a:txBody>
-                  <a:tcPr marL="64008" marR="64008" marT="32004" marB="32004" anchor="ctr">
-                    <a:solidFill>
-                      <a:srgbClr val="F7F9FA"/>
+                        <a:rPr sz="1400" b="1">
+                          <a:solidFill>
+                            <a:srgbClr val="C0392B"/>
+                          </a:solidFill>
+                          <a:latin typeface="Microsoft JhengHei"/>
+                        </a:rPr>
+                        <a:t>最快取得應用、維運、Self-Service 與投資報酬證據</a:t>
+                      </a:r>
+                    </a:p>
+                  </a:txBody>
+                  <a:tcPr marL="64008" marR="64008" marT="32004" marB="32004" anchor="ctr">
+                    <a:solidFill>
+                      <a:srgbClr val="FFFFFF"/>
                     </a:solidFill>
                   </a:tcPr>
                 </a:tc>
@@ -4833,36 +5004,13 @@
                           </a:solidFill>
                           <a:latin typeface="Microsoft JhengHei"/>
                         </a:rPr>
-                        <a:t>投入最低、快速補足評分缺口</a:t>
-                      </a:r>
-                    </a:p>
-                  </a:txBody>
-                  <a:tcPr marL="64008" marR="64008" marT="32004" marB="32004" anchor="ctr">
-                    <a:solidFill>
-                      <a:srgbClr val="F7F9FA"/>
-                    </a:solidFill>
-                  </a:tcPr>
-                </a:tc>
-                <a:tc>
-                  <a:txBody>
-                    <a:bodyPr wrap="square"/>
-                    <a:lstStyle/>
-                    <a:p>
-                      <a:pPr algn="l"/>
-                      <a:r>
-                        <a:rPr sz="1400" b="0">
-                          <a:solidFill>
-                            <a:srgbClr val="22303F"/>
-                          </a:solidFill>
-                          <a:latin typeface="Microsoft JhengHei"/>
-                        </a:rPr>
-                        <a:t>無真實應用與服務生命週期證據</a:t>
-                      </a:r>
-                    </a:p>
-                  </a:txBody>
-                  <a:tcPr marL="64008" marR="64008" marT="32004" marB="32004" anchor="ctr">
-                    <a:solidFill>
-                      <a:srgbClr val="F7F9FA"/>
+                        <a:t>需 SSD Infra ; TSD/產品單位 協作共識</a:t>
+                      </a:r>
+                    </a:p>
+                  </a:txBody>
+                  <a:tcPr marL="64008" marR="64008" marT="32004" marB="32004" anchor="ctr">
+                    <a:solidFill>
+                      <a:srgbClr val="FFFFFF"/>
                     </a:solidFill>
                   </a:tcPr>
                 </a:tc>
@@ -4873,30 +5021,44 @@
                     <a:bodyPr wrap="square"/>
                     <a:lstStyle/>
                     <a:p>
+                      <a:pPr algn="ctr"/>
+                      <a:r>
+                        <a:rPr sz="1400" b="0">
+                          <a:solidFill>
+                            <a:srgbClr val="22303F"/>
+                          </a:solidFill>
+                          <a:latin typeface="Microsoft JhengHei"/>
+                        </a:rPr>
+                        <a:t>C｜目標式替代驗證</a:t>
+                      </a:r>
+                    </a:p>
+                  </a:txBody>
+                  <a:tcPr marL="64008" marR="64008" marT="32004" marB="32004" anchor="ctr">
+                    <a:solidFill>
+                      <a:srgbClr val="F7F9FA"/>
+                    </a:solidFill>
+                  </a:tcPr>
+                </a:tc>
+                <a:tc>
+                  <a:txBody>
+                    <a:bodyPr wrap="square"/>
+                    <a:lstStyle/>
+                    <a:p>
                       <a:pPr algn="l"/>
                       <a:r>
-                        <a:rPr sz="1400" b="1">
-                          <a:solidFill>
-                            <a:srgbClr val="C0392B"/>
-                          </a:solidFill>
-                          <a:latin typeface="Microsoft JhengHei"/>
-                        </a:rPr>
-                        <a:t>B｜快速驗證＋Pilot</a:t>
-                      </a:r>
-                      <a:r>
-                        <a:rPr sz="1400" b="0">
-                          <a:solidFill>
-                            <a:srgbClr val="22303F"/>
-                          </a:solidFill>
-                          <a:latin typeface="Microsoft JhengHei"/>
-                        </a:rPr>
-                        <a:t>（即主張段落提出的方向）</a:t>
-                      </a:r>
-                    </a:p>
-                  </a:txBody>
-                  <a:tcPr marL="64008" marR="64008" marT="32004" marB="32004" anchor="ctr">
-                    <a:solidFill>
-                      <a:srgbClr val="FFFFFF"/>
+                        <a:rPr sz="1400" b="0">
+                          <a:solidFill>
+                            <a:srgbClr val="22303F"/>
+                          </a:solidFill>
+                          <a:latin typeface="Microsoft JhengHei"/>
+                        </a:rPr>
+                        <a:t>TiDB 不適配時驗 PXC；有 PostgreSQL 需求時再驗 YugabyteDB／CockroachDB</a:t>
+                      </a:r>
+                    </a:p>
+                  </a:txBody>
+                  <a:tcPr marL="64008" marR="64008" marT="32004" marB="32004" anchor="ctr">
+                    <a:solidFill>
+                      <a:srgbClr val="F7F9FA"/>
                     </a:solidFill>
                   </a:tcPr>
                 </a:tc>
@@ -4907,19 +5069,19 @@
                     <a:p>
                       <a:pPr algn="l"/>
                       <a:r>
-                        <a:rPr sz="1400" b="1">
-                          <a:solidFill>
-                            <a:srgbClr val="C0392B"/>
-                          </a:solidFill>
-                          <a:latin typeface="Microsoft JhengHei"/>
-                        </a:rPr>
-                        <a:t>TiDB 完成技術 Gate，再導入一個代表性 MySQL 應用／批次</a:t>
-                      </a:r>
-                    </a:p>
-                  </a:txBody>
-                  <a:tcPr marL="64008" marR="64008" marT="32004" marB="32004" anchor="ctr">
-                    <a:solidFill>
-                      <a:srgbClr val="FFFFFF"/>
+                        <a:rPr sz="1400" b="0">
+                          <a:solidFill>
+                            <a:srgbClr val="22303F"/>
+                          </a:solidFill>
+                          <a:latin typeface="Microsoft JhengHei"/>
+                        </a:rPr>
+                        <a:t>只補與需求直接相關的證據</a:t>
+                      </a:r>
+                    </a:p>
+                  </a:txBody>
+                  <a:tcPr marL="64008" marR="64008" marT="32004" marB="32004" anchor="ctr">
+                    <a:solidFill>
+                      <a:srgbClr val="F7F9FA"/>
                     </a:solidFill>
                   </a:tcPr>
                 </a:tc>
@@ -4930,42 +5092,19 @@
                     <a:p>
                       <a:pPr algn="l"/>
                       <a:r>
-                        <a:rPr sz="1400" b="1">
-                          <a:solidFill>
-                            <a:srgbClr val="C0392B"/>
-                          </a:solidFill>
-                          <a:latin typeface="Microsoft JhengHei"/>
-                        </a:rPr>
-                        <a:t>最快取得應用、維運、Self-Service 與投資報酬證據</a:t>
-                      </a:r>
-                    </a:p>
-                  </a:txBody>
-                  <a:tcPr marL="64008" marR="64008" marT="32004" marB="32004" anchor="ctr">
-                    <a:solidFill>
-                      <a:srgbClr val="FFFFFF"/>
-                    </a:solidFill>
-                  </a:tcPr>
-                </a:tc>
-                <a:tc>
-                  <a:txBody>
-                    <a:bodyPr wrap="square"/>
-                    <a:lstStyle/>
-                    <a:p>
-                      <a:pPr algn="l"/>
-                      <a:r>
-                        <a:rPr sz="1400" b="0">
-                          <a:solidFill>
-                            <a:srgbClr val="22303F"/>
-                          </a:solidFill>
-                          <a:latin typeface="Microsoft JhengHei"/>
-                        </a:rPr>
-                        <a:t>需 SSD Infra ; TSD/產品單位 協作共識</a:t>
-                      </a:r>
-                    </a:p>
-                  </a:txBody>
-                  <a:tcPr marL="64008" marR="64008" marT="32004" marB="32004" anchor="ctr">
-                    <a:solidFill>
-                      <a:srgbClr val="FFFFFF"/>
+                        <a:rPr sz="1400" b="0">
+                          <a:solidFill>
+                            <a:srgbClr val="22303F"/>
+                          </a:solidFill>
+                          <a:latin typeface="Microsoft JhengHei"/>
+                        </a:rPr>
+                        <a:t>不形成四產品完整排名</a:t>
+                      </a:r>
+                    </a:p>
+                  </a:txBody>
+                  <a:tcPr marL="64008" marR="64008" marT="32004" marB="32004" anchor="ctr">
+                    <a:solidFill>
+                      <a:srgbClr val="F7F9FA"/>
                     </a:solidFill>
                   </a:tcPr>
                 </a:tc>
@@ -4976,101 +5115,7 @@
                     <a:bodyPr wrap="square"/>
                     <a:lstStyle/>
                     <a:p>
-                      <a:pPr algn="l"/>
-                      <a:r>
-                        <a:rPr sz="1400" b="0">
-                          <a:solidFill>
-                            <a:srgbClr val="22303F"/>
-                          </a:solidFill>
-                          <a:latin typeface="Microsoft JhengHei"/>
-                        </a:rPr>
-                        <a:t>C｜目標式替代驗證</a:t>
-                      </a:r>
-                    </a:p>
-                  </a:txBody>
-                  <a:tcPr marL="64008" marR="64008" marT="32004" marB="32004" anchor="ctr">
-                    <a:solidFill>
-                      <a:srgbClr val="F7F9FA"/>
-                    </a:solidFill>
-                  </a:tcPr>
-                </a:tc>
-                <a:tc>
-                  <a:txBody>
-                    <a:bodyPr wrap="square"/>
-                    <a:lstStyle/>
-                    <a:p>
-                      <a:pPr algn="l"/>
-                      <a:r>
-                        <a:rPr sz="1400" b="0">
-                          <a:solidFill>
-                            <a:srgbClr val="22303F"/>
-                          </a:solidFill>
-                          <a:latin typeface="Microsoft JhengHei"/>
-                        </a:rPr>
-                        <a:t>TiDB 不適配時驗 PXC；有 PostgreSQL 需求時再驗 YugabyteDB／CockroachDB</a:t>
-                      </a:r>
-                    </a:p>
-                  </a:txBody>
-                  <a:tcPr marL="64008" marR="64008" marT="32004" marB="32004" anchor="ctr">
-                    <a:solidFill>
-                      <a:srgbClr val="F7F9FA"/>
-                    </a:solidFill>
-                  </a:tcPr>
-                </a:tc>
-                <a:tc>
-                  <a:txBody>
-                    <a:bodyPr wrap="square"/>
-                    <a:lstStyle/>
-                    <a:p>
-                      <a:pPr algn="l"/>
-                      <a:r>
-                        <a:rPr sz="1400" b="0">
-                          <a:solidFill>
-                            <a:srgbClr val="22303F"/>
-                          </a:solidFill>
-                          <a:latin typeface="Microsoft JhengHei"/>
-                        </a:rPr>
-                        <a:t>只補與需求直接相關的證據</a:t>
-                      </a:r>
-                    </a:p>
-                  </a:txBody>
-                  <a:tcPr marL="64008" marR="64008" marT="32004" marB="32004" anchor="ctr">
-                    <a:solidFill>
-                      <a:srgbClr val="F7F9FA"/>
-                    </a:solidFill>
-                  </a:tcPr>
-                </a:tc>
-                <a:tc>
-                  <a:txBody>
-                    <a:bodyPr wrap="square"/>
-                    <a:lstStyle/>
-                    <a:p>
-                      <a:pPr algn="l"/>
-                      <a:r>
-                        <a:rPr sz="1400" b="0">
-                          <a:solidFill>
-                            <a:srgbClr val="22303F"/>
-                          </a:solidFill>
-                          <a:latin typeface="Microsoft JhengHei"/>
-                        </a:rPr>
-                        <a:t>不形成四產品完整排名</a:t>
-                      </a:r>
-                    </a:p>
-                  </a:txBody>
-                  <a:tcPr marL="64008" marR="64008" marT="32004" marB="32004" anchor="ctr">
-                    <a:solidFill>
-                      <a:srgbClr val="F7F9FA"/>
-                    </a:solidFill>
-                  </a:tcPr>
-                </a:tc>
-              </a:tr>
-              <a:tr h="579628">
-                <a:tc>
-                  <a:txBody>
-                    <a:bodyPr wrap="square"/>
-                    <a:lstStyle/>
-                    <a:p>
-                      <a:pPr algn="l"/>
+                      <a:pPr algn="ctr"/>
                       <a:r>
                         <a:rPr sz="1400" b="0">
                           <a:solidFill>
@@ -5170,7 +5215,7 @@
         </p:nvSpPr>
         <p:spPr>
           <a:xfrm>
-            <a:off x="566928" y="5112766"/>
+            <a:off x="566928" y="4854956"/>
             <a:ext cx="11057839" cy="603250"/>
           </a:xfrm>
           <a:prstGeom prst="rect">

--- a/poc/1_MeetingMinutes/0821_slide.pptx
+++ b/poc/1_MeetingMinutes/0821_slide.pptx
@@ -4337,7 +4337,7 @@
         <p:spPr>
           <a:xfrm>
             <a:off x="694944" y="4697730"/>
-            <a:ext cx="10929823" cy="558800"/>
+            <a:ext cx="10929823" cy="279400"/>
           </a:xfrm>
           <a:prstGeom prst="rect">
             <a:avLst/>
@@ -4357,61 +4357,7 @@
                 </a:solidFill>
                 <a:latin typeface="Microsoft JhengHei"/>
               </a:rPr>
-              <a:t>粗體三列是本次 Pilot 最關鍵的約束：</a:t>
-            </a:r>
-            <a:r>
-              <a:rPr sz="1600" b="1">
-                <a:solidFill>
-                  <a:srgbClr val="C0392B"/>
-                </a:solidFill>
-                <a:latin typeface="Microsoft JhengHei"/>
-              </a:rPr>
-              <a:t>選題落在 EDC 定期批次</a:t>
-            </a:r>
-            <a:r>
-              <a:rPr sz="1600" b="0">
-                <a:solidFill>
-                  <a:srgbClr val="8A96A3"/>
-                </a:solidFill>
-                <a:latin typeface="Microsoft JhengHei"/>
-              </a:rPr>
-              <a:t>、</a:t>
-            </a:r>
-            <a:r>
-              <a:rPr sz="1600" b="1">
-                <a:solidFill>
-                  <a:srgbClr val="C0392B"/>
-                </a:solidFill>
-                <a:latin typeface="Microsoft JhengHei"/>
-              </a:rPr>
-              <a:t>驗收以一致性優先</a:t>
-            </a:r>
-            <a:r>
-              <a:rPr sz="1600" b="0">
-                <a:solidFill>
-                  <a:srgbClr val="8A96A3"/>
-                </a:solidFill>
-                <a:latin typeface="Microsoft JhengHei"/>
-              </a:rPr>
-              <a:t>、</a:t>
-            </a:r>
-            <a:r>
-              <a:rPr sz="1600" b="1">
-                <a:solidFill>
-                  <a:srgbClr val="C0392B"/>
-                </a:solidFill>
-                <a:latin typeface="Microsoft JhengHei"/>
-              </a:rPr>
-              <a:t>服務化（Self-Service）與效能同等重要</a:t>
-            </a:r>
-            <a:r>
-              <a:rPr sz="1600" b="0">
-                <a:solidFill>
-                  <a:srgbClr val="8A96A3"/>
-                </a:solidFill>
-                <a:latin typeface="Microsoft JhengHei"/>
-              </a:rPr>
-              <a:t>。Infra 改造必須同時說明產品效益、應用改造量與投資報酬；技術可行不等於推進理由。</a:t>
+              <a:t>Infra 改造必須同時說明產品效益、應用改造量與投資報酬；技術可行不等於推進理由。</a:t>
             </a:r>
           </a:p>
         </p:txBody>
@@ -4425,7 +4371,7 @@
         <p:spPr>
           <a:xfrm>
             <a:off x="566928" y="4697730"/>
-            <a:ext cx="26000" cy="558800"/>
+            <a:ext cx="26000" cy="279400"/>
           </a:xfrm>
           <a:prstGeom prst="rect">
             <a:avLst/>
@@ -4634,10 +4580,10 @@
                 <a:tableStyleId>{5C22544A-7EE6-4342-B048-85BDC9FD1C3A}</a:tableStyleId>
               </a:tblPr>
               <a:tblGrid>
-                <a:gridCol w="1163098"/>
-                <a:gridCol w="4437523"/>
-                <a:gridCol w="2748928"/>
-                <a:gridCol w="2708290"/>
+                <a:gridCol w="1163835"/>
+                <a:gridCol w="4433326"/>
+                <a:gridCol w="2750671"/>
+                <a:gridCol w="2710007"/>
               </a:tblGrid>
               <a:tr h="321818">
                 <a:tc>
@@ -4958,7 +4904,7 @@
                           </a:solidFill>
                           <a:latin typeface="Microsoft JhengHei"/>
                         </a:rPr>
-                        <a:t>TiDB 完成技術 Gate，再導入一個代表性 MySQL 應用／批次</a:t>
+                        <a:t>TiDB 完成技術門檻，再導入一個代表性 MySQL 應用／批次</a:t>
                       </a:r>
                     </a:p>
                   </a:txBody>
@@ -5400,57 +5346,678 @@
                 </a:solidFill>
                 <a:latin typeface="Microsoft JhengHei"/>
               </a:rPr>
-              <a:t>決策｜投資報酬決策樹：先確認問題，再決定投入深度</a:t>
-            </a:r>
-          </a:p>
-        </p:txBody>
-      </p:sp>
-      <p:sp>
-        <p:nvSpPr>
-          <p:cNvPr id="6" name="Rectangle 5"/>
-          <p:cNvSpPr/>
+              <a:t>決策｜投資報酬判準：先確認問題，再決定投入深度</a:t>
+            </a:r>
+          </a:p>
+        </p:txBody>
+      </p:sp>
+      <p:graphicFrame>
+        <p:nvGraphicFramePr>
+          <p:cNvPr id="6" name="Table 5"/>
+          <p:cNvGraphicFramePr>
+            <a:graphicFrameLocks noGrp="1"/>
+          </p:cNvGraphicFramePr>
           <p:nvPr/>
-        </p:nvSpPr>
-        <p:spPr>
-          <a:xfrm>
-            <a:off x="566928" y="1709928"/>
-            <a:ext cx="11057839" cy="3547872"/>
-          </a:xfrm>
-          <a:prstGeom prst="rect">
-            <a:avLst/>
-          </a:prstGeom>
-          <a:solidFill>
-            <a:srgbClr val="F7F9FA"/>
-          </a:solidFill>
-          <a:ln>
-            <a:solidFill>
-              <a:srgbClr val="D6DCE3"/>
-            </a:solidFill>
-          </a:ln>
-          <a:effectLst/>
-        </p:spPr>
-        <p:style>
-          <a:lnRef idx="1">
-            <a:schemeClr val="accent1"/>
-          </a:lnRef>
-          <a:fillRef idx="3">
-            <a:schemeClr val="accent1"/>
-          </a:fillRef>
-          <a:effectRef idx="2">
-            <a:schemeClr val="accent1"/>
-          </a:effectRef>
-          <a:fontRef idx="minor">
-            <a:schemeClr val="lt1"/>
-          </a:fontRef>
-        </p:style>
-        <p:txBody>
-          <a:bodyPr rtlCol="0" anchor="ctr"/>
-          <a:lstStyle/>
-          <a:p>
-            <a:pPr algn="ctr"/>
-          </a:p>
-        </p:txBody>
-      </p:sp>
+        </p:nvGraphicFramePr>
+        <p:xfrm>
+          <a:off x="566928" y="1709928"/>
+          <a:ext cx="11057839" cy="2574544"/>
+        </p:xfrm>
+        <a:graphic>
+          <a:graphicData uri="http://schemas.openxmlformats.org/drawingml/2006/table">
+            <a:tbl>
+              <a:tblPr firstRow="1" bandRow="1">
+                <a:tableStyleId>{5C22544A-7EE6-4342-B048-85BDC9FD1C3A}</a:tableStyleId>
+              </a:tblPr>
+              <a:tblGrid>
+                <a:gridCol w="3395785"/>
+                <a:gridCol w="2539863"/>
+                <a:gridCol w="5122191"/>
+              </a:tblGrid>
+              <a:tr h="321818">
+                <a:tc>
+                  <a:txBody>
+                    <a:bodyPr wrap="square"/>
+                    <a:lstStyle/>
+                    <a:p>
+                      <a:pPr algn="ctr"/>
+                      <a:r>
+                        <a:rPr sz="1400" b="1">
+                          <a:solidFill>
+                            <a:srgbClr val="1A2B3C"/>
+                          </a:solidFill>
+                          <a:latin typeface="Microsoft JhengHei"/>
+                        </a:rPr>
+                        <a:t>判斷情境</a:t>
+                      </a:r>
+                    </a:p>
+                  </a:txBody>
+                  <a:tcPr marL="64008" marR="64008" marT="32004" marB="32004" anchor="ctr">
+                    <a:solidFill>
+                      <a:srgbClr val="ECEFF2"/>
+                    </a:solidFill>
+                  </a:tcPr>
+                </a:tc>
+                <a:tc>
+                  <a:txBody>
+                    <a:bodyPr wrap="square"/>
+                    <a:lstStyle/>
+                    <a:p>
+                      <a:pPr algn="ctr"/>
+                      <a:r>
+                        <a:rPr sz="1400" b="1">
+                          <a:solidFill>
+                            <a:srgbClr val="1A2B3C"/>
+                          </a:solidFill>
+                          <a:latin typeface="Microsoft JhengHei"/>
+                        </a:rPr>
+                        <a:t>條件</a:t>
+                      </a:r>
+                    </a:p>
+                  </a:txBody>
+                  <a:tcPr marL="64008" marR="64008" marT="32004" marB="32004" anchor="ctr">
+                    <a:solidFill>
+                      <a:srgbClr val="ECEFF2"/>
+                    </a:solidFill>
+                  </a:tcPr>
+                </a:tc>
+                <a:tc>
+                  <a:txBody>
+                    <a:bodyPr wrap="square"/>
+                    <a:lstStyle/>
+                    <a:p>
+                      <a:pPr algn="ctr"/>
+                      <a:r>
+                        <a:rPr sz="1400" b="1">
+                          <a:solidFill>
+                            <a:srgbClr val="1A2B3C"/>
+                          </a:solidFill>
+                          <a:latin typeface="Microsoft JhengHei"/>
+                        </a:rPr>
+                        <a:t>出口</a:t>
+                      </a:r>
+                    </a:p>
+                  </a:txBody>
+                  <a:tcPr marL="64008" marR="64008" marT="32004" marB="32004" anchor="ctr">
+                    <a:solidFill>
+                      <a:srgbClr val="ECEFF2"/>
+                    </a:solidFill>
+                  </a:tcPr>
+                </a:tc>
+              </a:tr>
+              <a:tr h="321818">
+                <a:tc>
+                  <a:txBody>
+                    <a:bodyPr wrap="square"/>
+                    <a:lstStyle/>
+                    <a:p>
+                      <a:pPr algn="l"/>
+                      <a:r>
+                        <a:rPr sz="1400" b="1">
+                          <a:solidFill>
+                            <a:srgbClr val="C0392B"/>
+                          </a:solidFill>
+                          <a:latin typeface="Microsoft JhengHei"/>
+                        </a:rPr>
+                        <a:t>沒有</a:t>
+                      </a:r>
+                      <a:r>
+                        <a:rPr sz="1400" b="0">
+                          <a:solidFill>
+                            <a:srgbClr val="22303F"/>
+                          </a:solidFill>
+                          <a:latin typeface="Microsoft JhengHei"/>
+                        </a:rPr>
+                        <a:t>明確業務問題、受影響服務與 owner</a:t>
+                      </a:r>
+                    </a:p>
+                  </a:txBody>
+                  <a:tcPr marL="64008" marR="64008" marT="32004" marB="32004" anchor="ctr">
+                    <a:solidFill>
+                      <a:srgbClr val="FFFFFF"/>
+                    </a:solidFill>
+                  </a:tcPr>
+                </a:tc>
+                <a:tc>
+                  <a:txBody>
+                    <a:bodyPr wrap="square"/>
+                    <a:lstStyle/>
+                    <a:p>
+                      <a:pPr algn="l"/>
+                      <a:r>
+                        <a:rPr sz="1400" b="0">
+                          <a:solidFill>
+                            <a:srgbClr val="22303F"/>
+                          </a:solidFill>
+                          <a:latin typeface="Microsoft JhengHei"/>
+                        </a:rPr>
+                        <a:t>—</a:t>
+                      </a:r>
+                    </a:p>
+                  </a:txBody>
+                  <a:tcPr marL="64008" marR="64008" marT="32004" marB="32004" anchor="ctr">
+                    <a:solidFill>
+                      <a:srgbClr val="FFFFFF"/>
+                    </a:solidFill>
+                  </a:tcPr>
+                </a:tc>
+                <a:tc>
+                  <a:txBody>
+                    <a:bodyPr wrap="square"/>
+                    <a:lstStyle/>
+                    <a:p>
+                      <a:pPr algn="l"/>
+                      <a:r>
+                        <a:rPr sz="1400" b="1">
+                          <a:solidFill>
+                            <a:srgbClr val="C0392B"/>
+                          </a:solidFill>
+                          <a:latin typeface="Microsoft JhengHei"/>
+                        </a:rPr>
+                        <a:t>Option 0</a:t>
+                      </a:r>
+                      <a:r>
+                        <a:rPr sz="1400" b="0">
+                          <a:solidFill>
+                            <a:srgbClr val="22303F"/>
+                          </a:solidFill>
+                          <a:latin typeface="Microsoft JhengHei"/>
+                        </a:rPr>
+                        <a:t>：保留現況與 PoC framework，定期重審需求</a:t>
+                      </a:r>
+                    </a:p>
+                  </a:txBody>
+                  <a:tcPr marL="64008" marR="64008" marT="32004" marB="32004" anchor="ctr">
+                    <a:solidFill>
+                      <a:srgbClr val="FFFFFF"/>
+                    </a:solidFill>
+                  </a:tcPr>
+                </a:tc>
+              </a:tr>
+              <a:tr h="321818">
+                <a:tc>
+                  <a:txBody>
+                    <a:bodyPr wrap="square"/>
+                    <a:lstStyle/>
+                    <a:p>
+                      <a:pPr algn="l"/>
+                      <a:r>
+                        <a:rPr sz="1400" b="1">
+                          <a:solidFill>
+                            <a:srgbClr val="C0392B"/>
+                          </a:solidFill>
+                          <a:latin typeface="Microsoft JhengHei"/>
+                        </a:rPr>
+                        <a:t>MySQL 應用</a:t>
+                      </a:r>
+                      <a:r>
+                        <a:rPr sz="1400" b="0">
+                          <a:solidFill>
+                            <a:srgbClr val="22303F"/>
+                          </a:solidFill>
+                          <a:latin typeface="Microsoft JhengHei"/>
+                        </a:rPr>
+                        <a:t>為主要範圍</a:t>
+                      </a:r>
+                    </a:p>
+                  </a:txBody>
+                  <a:tcPr marL="64008" marR="64008" marT="32004" marB="32004" anchor="ctr">
+                    <a:solidFill>
+                      <a:srgbClr val="F7F9FA"/>
+                    </a:solidFill>
+                  </a:tcPr>
+                </a:tc>
+                <a:tc>
+                  <a:txBody>
+                    <a:bodyPr wrap="square"/>
+                    <a:lstStyle/>
+                    <a:p>
+                      <a:pPr algn="l"/>
+                      <a:r>
+                        <a:rPr sz="1400" b="0">
+                          <a:solidFill>
+                            <a:srgbClr val="22303F"/>
+                          </a:solidFill>
+                          <a:latin typeface="Microsoft JhengHei"/>
+                        </a:rPr>
+                        <a:t>相容性／還原／DDL 尚未知</a:t>
+                      </a:r>
+                    </a:p>
+                  </a:txBody>
+                  <a:tcPr marL="64008" marR="64008" marT="32004" marB="32004" anchor="ctr">
+                    <a:solidFill>
+                      <a:srgbClr val="F7F9FA"/>
+                    </a:solidFill>
+                  </a:tcPr>
+                </a:tc>
+                <a:tc>
+                  <a:txBody>
+                    <a:bodyPr wrap="square"/>
+                    <a:lstStyle/>
+                    <a:p>
+                      <a:pPr algn="l"/>
+                      <a:r>
+                        <a:rPr sz="1400" b="1">
+                          <a:solidFill>
+                            <a:srgbClr val="C0392B"/>
+                          </a:solidFill>
+                          <a:latin typeface="Microsoft JhengHei"/>
+                        </a:rPr>
+                        <a:t>Option A</a:t>
+                      </a:r>
+                      <a:r>
+                        <a:rPr sz="1400" b="0">
+                          <a:solidFill>
+                            <a:srgbClr val="22303F"/>
+                          </a:solidFill>
+                          <a:latin typeface="Microsoft JhengHei"/>
+                        </a:rPr>
+                        <a:t>：技術補件</a:t>
+                      </a:r>
+                    </a:p>
+                  </a:txBody>
+                  <a:tcPr marL="64008" marR="64008" marT="32004" marB="32004" anchor="ctr">
+                    <a:solidFill>
+                      <a:srgbClr val="F7F9FA"/>
+                    </a:solidFill>
+                  </a:tcPr>
+                </a:tc>
+              </a:tr>
+              <a:tr h="321818">
+                <a:tc>
+                  <a:txBody>
+                    <a:bodyPr wrap="square"/>
+                    <a:lstStyle/>
+                    <a:p>
+                      <a:pPr algn="l"/>
+                    </a:p>
+                  </a:txBody>
+                  <a:tcPr marL="64008" marR="64008" marT="32004" marB="32004" anchor="ctr">
+                    <a:solidFill>
+                      <a:srgbClr val="FFFFFF"/>
+                    </a:solidFill>
+                  </a:tcPr>
+                </a:tc>
+                <a:tc>
+                  <a:txBody>
+                    <a:bodyPr wrap="square"/>
+                    <a:lstStyle/>
+                    <a:p>
+                      <a:pPr algn="l"/>
+                      <a:r>
+                        <a:rPr sz="1400" b="0">
+                          <a:solidFill>
+                            <a:srgbClr val="22303F"/>
+                          </a:solidFill>
+                          <a:latin typeface="Microsoft JhengHei"/>
+                        </a:rPr>
+                        <a:t>技術門檻通過且效益可量化</a:t>
+                      </a:r>
+                    </a:p>
+                  </a:txBody>
+                  <a:tcPr marL="64008" marR="64008" marT="32004" marB="32004" anchor="ctr">
+                    <a:solidFill>
+                      <a:srgbClr val="FFFFFF"/>
+                    </a:solidFill>
+                  </a:tcPr>
+                </a:tc>
+                <a:tc>
+                  <a:txBody>
+                    <a:bodyPr wrap="square"/>
+                    <a:lstStyle/>
+                    <a:p>
+                      <a:pPr algn="l"/>
+                      <a:r>
+                        <a:rPr sz="1400" b="1">
+                          <a:solidFill>
+                            <a:srgbClr val="C0392B"/>
+                          </a:solidFill>
+                          <a:latin typeface="Microsoft JhengHei"/>
+                        </a:rPr>
+                        <a:t>Option B</a:t>
+                      </a:r>
+                      <a:r>
+                        <a:rPr sz="1400" b="0">
+                          <a:solidFill>
+                            <a:srgbClr val="22303F"/>
+                          </a:solidFill>
+                          <a:latin typeface="Microsoft JhengHei"/>
+                        </a:rPr>
+                        <a:t>：TiDB Pilot</a:t>
+                      </a:r>
+                    </a:p>
+                  </a:txBody>
+                  <a:tcPr marL="64008" marR="64008" marT="32004" marB="32004" anchor="ctr">
+                    <a:solidFill>
+                      <a:srgbClr val="FFFFFF"/>
+                    </a:solidFill>
+                  </a:tcPr>
+                </a:tc>
+              </a:tr>
+              <a:tr h="321818">
+                <a:tc>
+                  <a:txBody>
+                    <a:bodyPr wrap="square"/>
+                    <a:lstStyle/>
+                    <a:p>
+                      <a:pPr algn="l"/>
+                    </a:p>
+                  </a:txBody>
+                  <a:tcPr marL="64008" marR="64008" marT="32004" marB="32004" anchor="ctr">
+                    <a:solidFill>
+                      <a:srgbClr val="F7F9FA"/>
+                    </a:solidFill>
+                  </a:tcPr>
+                </a:tc>
+                <a:tc>
+                  <a:txBody>
+                    <a:bodyPr wrap="square"/>
+                    <a:lstStyle/>
+                    <a:p>
+                      <a:pPr algn="l"/>
+                      <a:r>
+                        <a:rPr sz="1400" b="0">
+                          <a:solidFill>
+                            <a:srgbClr val="22303F"/>
+                          </a:solidFill>
+                          <a:latin typeface="Microsoft JhengHei"/>
+                        </a:rPr>
+                        <a:t>TiDB 不適配或極低延遲優先</a:t>
+                      </a:r>
+                    </a:p>
+                  </a:txBody>
+                  <a:tcPr marL="64008" marR="64008" marT="32004" marB="32004" anchor="ctr">
+                    <a:solidFill>
+                      <a:srgbClr val="F7F9FA"/>
+                    </a:solidFill>
+                  </a:tcPr>
+                </a:tc>
+                <a:tc>
+                  <a:txBody>
+                    <a:bodyPr wrap="square"/>
+                    <a:lstStyle/>
+                    <a:p>
+                      <a:pPr algn="l"/>
+                      <a:r>
+                        <a:rPr sz="1400" b="1">
+                          <a:solidFill>
+                            <a:srgbClr val="C0392B"/>
+                          </a:solidFill>
+                          <a:latin typeface="Microsoft JhengHei"/>
+                        </a:rPr>
+                        <a:t>Option C</a:t>
+                      </a:r>
+                      <a:r>
+                        <a:rPr sz="1400" b="0">
+                          <a:solidFill>
+                            <a:srgbClr val="22303F"/>
+                          </a:solidFill>
+                          <a:latin typeface="Microsoft JhengHei"/>
+                        </a:rPr>
+                        <a:t>：PXC 目標式對照</a:t>
+                      </a:r>
+                    </a:p>
+                  </a:txBody>
+                  <a:tcPr marL="64008" marR="64008" marT="32004" marB="32004" anchor="ctr">
+                    <a:solidFill>
+                      <a:srgbClr val="F7F9FA"/>
+                    </a:solidFill>
+                  </a:tcPr>
+                </a:tc>
+              </a:tr>
+              <a:tr h="321818">
+                <a:tc>
+                  <a:txBody>
+                    <a:bodyPr wrap="square"/>
+                    <a:lstStyle/>
+                    <a:p>
+                      <a:pPr algn="l"/>
+                      <a:r>
+                        <a:rPr sz="1400" b="1">
+                          <a:solidFill>
+                            <a:srgbClr val="C0392B"/>
+                          </a:solidFill>
+                          <a:latin typeface="Microsoft JhengHei"/>
+                        </a:rPr>
+                        <a:t>PostgreSQL</a:t>
+                      </a:r>
+                      <a:r>
+                        <a:rPr sz="1400" b="0">
+                          <a:solidFill>
+                            <a:srgbClr val="22303F"/>
+                          </a:solidFill>
+                          <a:latin typeface="Microsoft JhengHei"/>
+                        </a:rPr>
+                        <a:t> 高關鍵度／AI 應用有需求</a:t>
+                      </a:r>
+                    </a:p>
+                  </a:txBody>
+                  <a:tcPr marL="64008" marR="64008" marT="32004" marB="32004" anchor="ctr">
+                    <a:solidFill>
+                      <a:srgbClr val="FFFFFF"/>
+                    </a:solidFill>
+                  </a:tcPr>
+                </a:tc>
+                <a:tc>
+                  <a:txBody>
+                    <a:bodyPr wrap="square"/>
+                    <a:lstStyle/>
+                    <a:p>
+                      <a:pPr algn="l"/>
+                      <a:r>
+                        <a:rPr sz="1400" b="0">
+                          <a:solidFill>
+                            <a:srgbClr val="22303F"/>
+                          </a:solidFill>
+                          <a:latin typeface="Microsoft JhengHei"/>
+                        </a:rPr>
+                        <a:t>—</a:t>
+                      </a:r>
+                    </a:p>
+                  </a:txBody>
+                  <a:tcPr marL="64008" marR="64008" marT="32004" marB="32004" anchor="ctr">
+                    <a:solidFill>
+                      <a:srgbClr val="FFFFFF"/>
+                    </a:solidFill>
+                  </a:tcPr>
+                </a:tc>
+                <a:tc>
+                  <a:txBody>
+                    <a:bodyPr wrap="square"/>
+                    <a:lstStyle/>
+                    <a:p>
+                      <a:pPr algn="l"/>
+                      <a:r>
+                        <a:rPr sz="1400" b="1">
+                          <a:solidFill>
+                            <a:srgbClr val="C0392B"/>
+                          </a:solidFill>
+                          <a:latin typeface="Microsoft JhengHei"/>
+                        </a:rPr>
+                        <a:t>Option C</a:t>
+                      </a:r>
+                      <a:r>
+                        <a:rPr sz="1400" b="0">
+                          <a:solidFill>
+                            <a:srgbClr val="22303F"/>
+                          </a:solidFill>
+                          <a:latin typeface="Microsoft JhengHei"/>
+                        </a:rPr>
+                        <a:t>：依需求驗 YugabyteDB 或 CockroachDB</a:t>
+                      </a:r>
+                    </a:p>
+                  </a:txBody>
+                  <a:tcPr marL="64008" marR="64008" marT="32004" marB="32004" anchor="ctr">
+                    <a:solidFill>
+                      <a:srgbClr val="FFFFFF"/>
+                    </a:solidFill>
+                  </a:tcPr>
+                </a:tc>
+              </a:tr>
+              <a:tr h="321818">
+                <a:tc>
+                  <a:txBody>
+                    <a:bodyPr wrap="square"/>
+                    <a:lstStyle/>
+                    <a:p>
+                      <a:pPr algn="l"/>
+                      <a:r>
+                        <a:rPr sz="1400" b="1">
+                          <a:solidFill>
+                            <a:srgbClr val="C0392B"/>
+                          </a:solidFill>
+                          <a:latin typeface="Microsoft JhengHei"/>
+                        </a:rPr>
+                        <a:t>平台化或跨區</a:t>
+                      </a:r>
+                      <a:r>
+                        <a:rPr sz="1400" b="0">
+                          <a:solidFill>
+                            <a:srgbClr val="22303F"/>
+                          </a:solidFill>
+                          <a:latin typeface="Microsoft JhengHei"/>
+                        </a:rPr>
+                        <a:t>需求成立</a:t>
+                      </a:r>
+                    </a:p>
+                  </a:txBody>
+                  <a:tcPr marL="64008" marR="64008" marT="32004" marB="32004" anchor="ctr">
+                    <a:solidFill>
+                      <a:srgbClr val="F7F9FA"/>
+                    </a:solidFill>
+                  </a:tcPr>
+                </a:tc>
+                <a:tc>
+                  <a:txBody>
+                    <a:bodyPr wrap="square"/>
+                    <a:lstStyle/>
+                    <a:p>
+                      <a:pPr algn="l"/>
+                      <a:r>
+                        <a:rPr sz="1400" b="0">
+                          <a:solidFill>
+                            <a:srgbClr val="22303F"/>
+                          </a:solidFill>
+                          <a:latin typeface="Microsoft JhengHei"/>
+                        </a:rPr>
+                        <a:t>重複申請／維運成本高</a:t>
+                      </a:r>
+                    </a:p>
+                  </a:txBody>
+                  <a:tcPr marL="64008" marR="64008" marT="32004" marB="32004" anchor="ctr">
+                    <a:solidFill>
+                      <a:srgbClr val="F7F9FA"/>
+                    </a:solidFill>
+                  </a:tcPr>
+                </a:tc>
+                <a:tc>
+                  <a:txBody>
+                    <a:bodyPr wrap="square"/>
+                    <a:lstStyle/>
+                    <a:p>
+                      <a:pPr algn="l"/>
+                      <a:r>
+                        <a:rPr sz="1400" b="1">
+                          <a:solidFill>
+                            <a:srgbClr val="C0392B"/>
+                          </a:solidFill>
+                          <a:latin typeface="Microsoft JhengHei"/>
+                        </a:rPr>
+                        <a:t>Option D</a:t>
+                      </a:r>
+                      <a:r>
+                        <a:rPr sz="1400" b="0">
+                          <a:solidFill>
+                            <a:srgbClr val="22303F"/>
+                          </a:solidFill>
+                          <a:latin typeface="Microsoft JhengHei"/>
+                        </a:rPr>
+                        <a:t>：Database Self-Service</a:t>
+                      </a:r>
+                    </a:p>
+                  </a:txBody>
+                  <a:tcPr marL="64008" marR="64008" marT="32004" marB="32004" anchor="ctr">
+                    <a:solidFill>
+                      <a:srgbClr val="F7F9FA"/>
+                    </a:solidFill>
+                  </a:tcPr>
+                </a:tc>
+              </a:tr>
+              <a:tr h="321818">
+                <a:tc>
+                  <a:txBody>
+                    <a:bodyPr wrap="square"/>
+                    <a:lstStyle/>
+                    <a:p>
+                      <a:pPr algn="l"/>
+                    </a:p>
+                  </a:txBody>
+                  <a:tcPr marL="64008" marR="64008" marT="32004" marB="32004" anchor="ctr">
+                    <a:solidFill>
+                      <a:srgbClr val="FFFFFF"/>
+                    </a:solidFill>
+                  </a:tcPr>
+                </a:tc>
+                <a:tc>
+                  <a:txBody>
+                    <a:bodyPr wrap="square"/>
+                    <a:lstStyle/>
+                    <a:p>
+                      <a:pPr algn="l"/>
+                      <a:r>
+                        <a:rPr sz="1400" b="0">
+                          <a:solidFill>
+                            <a:srgbClr val="22303F"/>
+                          </a:solidFill>
+                          <a:latin typeface="Microsoft JhengHei"/>
+                        </a:rPr>
+                        <a:t>DR／EDC 活化</a:t>
+                      </a:r>
+                    </a:p>
+                  </a:txBody>
+                  <a:tcPr marL="64008" marR="64008" marT="32004" marB="32004" anchor="ctr">
+                    <a:solidFill>
+                      <a:srgbClr val="FFFFFF"/>
+                    </a:solidFill>
+                  </a:tcPr>
+                </a:tc>
+                <a:tc>
+                  <a:txBody>
+                    <a:bodyPr wrap="square"/>
+                    <a:lstStyle/>
+                    <a:p>
+                      <a:pPr algn="l"/>
+                      <a:r>
+                        <a:rPr sz="1400" b="1">
+                          <a:solidFill>
+                            <a:srgbClr val="C0392B"/>
+                          </a:solidFill>
+                          <a:latin typeface="Microsoft JhengHei"/>
+                        </a:rPr>
+                        <a:t>Option D</a:t>
+                      </a:r>
+                      <a:r>
+                        <a:rPr sz="1400" b="0">
+                          <a:solidFill>
+                            <a:srgbClr val="22303F"/>
+                          </a:solidFill>
+                          <a:latin typeface="Microsoft JhengHei"/>
+                        </a:rPr>
+                        <a:t>：先 A/S，需異地讀再評估 A/A-RO</a:t>
+                      </a:r>
+                    </a:p>
+                  </a:txBody>
+                  <a:tcPr marL="64008" marR="64008" marT="32004" marB="32004" anchor="ctr">
+                    <a:solidFill>
+                      <a:srgbClr val="FFFFFF"/>
+                    </a:solidFill>
+                  </a:tcPr>
+                </a:tc>
+              </a:tr>
+            </a:tbl>
+          </a:graphicData>
+        </a:graphic>
+      </p:graphicFrame>
       <p:sp>
         <p:nvSpPr>
           <p:cNvPr id="7" name="TextBox 6"/>
@@ -5459,8 +6026,8 @@
         </p:nvSpPr>
         <p:spPr>
           <a:xfrm>
-            <a:off x="694944" y="1819656"/>
-            <a:ext cx="10801807" cy="3328416"/>
+            <a:off x="694944" y="4503928"/>
+            <a:ext cx="10929823" cy="279400"/>
           </a:xfrm>
           <a:prstGeom prst="rect">
             <a:avLst/>
@@ -5473,275 +6040,28 @@
           </a:bodyPr>
           <a:lstStyle/>
           <a:p>
-            <a:pPr>
-              <a:spcAft>
-                <a:spcPts val="0"/>
-              </a:spcAft>
-            </a:pPr>
-            <a:r>
-              <a:rPr sz="1400">
-                <a:solidFill>
-                  <a:srgbClr val="22303F"/>
-                </a:solidFill>
-                <a:latin typeface="Consolas"/>
-              </a:rPr>
-              <a:t>沒有明確業務問題、受影響服務與 owner</a:t>
-            </a:r>
-          </a:p>
-          <a:p>
-            <a:pPr>
-              <a:spcAft>
-                <a:spcPts val="0"/>
-              </a:spcAft>
-            </a:pPr>
-            <a:r>
-              <a:rPr sz="1400">
-                <a:solidFill>
-                  <a:srgbClr val="22303F"/>
-                </a:solidFill>
-                <a:latin typeface="Consolas"/>
-              </a:rPr>
-              <a:t>    → Option 0：保留現況與 PoC framework，定期重審需求</a:t>
-            </a:r>
-          </a:p>
-          <a:p>
-            <a:pPr>
-              <a:spcAft>
-                <a:spcPts val="0"/>
-              </a:spcAft>
-            </a:pPr>
-            <a:r>
-              <a:rPr sz="1400">
-                <a:solidFill>
-                  <a:srgbClr val="22303F"/>
-                </a:solidFill>
-                <a:latin typeface="Consolas"/>
-              </a:rPr>
-              <a:t> </a:t>
-            </a:r>
-          </a:p>
-          <a:p>
-            <a:pPr>
-              <a:spcAft>
-                <a:spcPts val="0"/>
-              </a:spcAft>
-            </a:pPr>
-            <a:r>
-              <a:rPr sz="1400">
-                <a:solidFill>
-                  <a:srgbClr val="22303F"/>
-                </a:solidFill>
-                <a:latin typeface="Consolas"/>
-              </a:rPr>
-              <a:t>MySQL 應用為主要範圍</a:t>
-            </a:r>
-          </a:p>
-          <a:p>
-            <a:pPr>
-              <a:spcAft>
-                <a:spcPts val="0"/>
-              </a:spcAft>
-            </a:pPr>
-            <a:r>
-              <a:rPr sz="1400">
-                <a:solidFill>
-                  <a:srgbClr val="22303F"/>
-                </a:solidFill>
-                <a:latin typeface="Consolas"/>
-              </a:rPr>
-              <a:t>    相容性／還原／DDL 尚未知     → Option A：技術補件</a:t>
-            </a:r>
-          </a:p>
-          <a:p>
-            <a:pPr>
-              <a:spcAft>
-                <a:spcPts val="0"/>
-              </a:spcAft>
-            </a:pPr>
-            <a:r>
-              <a:rPr sz="1400">
-                <a:solidFill>
-                  <a:srgbClr val="22303F"/>
-                </a:solidFill>
-                <a:latin typeface="Consolas"/>
-              </a:rPr>
-              <a:t>    技術 Gate 通過且效益可量化    → Option B：TiDB Pilot</a:t>
-            </a:r>
-          </a:p>
-          <a:p>
-            <a:pPr>
-              <a:spcAft>
-                <a:spcPts val="0"/>
-              </a:spcAft>
-            </a:pPr>
-            <a:r>
-              <a:rPr sz="1400">
-                <a:solidFill>
-                  <a:srgbClr val="22303F"/>
-                </a:solidFill>
-                <a:latin typeface="Consolas"/>
-              </a:rPr>
-              <a:t>    TiDB 不適配或極低延遲優先     → Option C：PXC 目標式對照</a:t>
-            </a:r>
-          </a:p>
-          <a:p>
-            <a:pPr>
-              <a:spcAft>
-                <a:spcPts val="0"/>
-              </a:spcAft>
-            </a:pPr>
-            <a:r>
-              <a:rPr sz="1400">
-                <a:solidFill>
-                  <a:srgbClr val="22303F"/>
-                </a:solidFill>
-                <a:latin typeface="Consolas"/>
-              </a:rPr>
-              <a:t> </a:t>
-            </a:r>
-          </a:p>
-          <a:p>
-            <a:pPr>
-              <a:spcAft>
-                <a:spcPts val="0"/>
-              </a:spcAft>
-            </a:pPr>
-            <a:r>
-              <a:rPr sz="1400">
-                <a:solidFill>
-                  <a:srgbClr val="22303F"/>
-                </a:solidFill>
-                <a:latin typeface="Consolas"/>
-              </a:rPr>
-              <a:t>PostgreSQL 高關鍵度／AI 應用有需求</a:t>
-            </a:r>
-          </a:p>
-          <a:p>
-            <a:pPr>
-              <a:spcAft>
-                <a:spcPts val="0"/>
-              </a:spcAft>
-            </a:pPr>
-            <a:r>
-              <a:rPr sz="1400">
-                <a:solidFill>
-                  <a:srgbClr val="22303F"/>
-                </a:solidFill>
-                <a:latin typeface="Consolas"/>
-              </a:rPr>
-              <a:t>    → Option C：依需求驗 YugabyteDB 或 CockroachDB</a:t>
-            </a:r>
-          </a:p>
-          <a:p>
-            <a:pPr>
-              <a:spcAft>
-                <a:spcPts val="0"/>
-              </a:spcAft>
-            </a:pPr>
-            <a:r>
-              <a:rPr sz="1400">
-                <a:solidFill>
-                  <a:srgbClr val="22303F"/>
-                </a:solidFill>
-                <a:latin typeface="Consolas"/>
-              </a:rPr>
-              <a:t> </a:t>
-            </a:r>
-          </a:p>
-          <a:p>
-            <a:pPr>
-              <a:spcAft>
-                <a:spcPts val="0"/>
-              </a:spcAft>
-            </a:pPr>
-            <a:r>
-              <a:rPr sz="1400">
-                <a:solidFill>
-                  <a:srgbClr val="22303F"/>
-                </a:solidFill>
-                <a:latin typeface="Consolas"/>
-              </a:rPr>
-              <a:t>平台化或跨區需求成立</a:t>
-            </a:r>
-          </a:p>
-          <a:p>
-            <a:pPr>
-              <a:spcAft>
-                <a:spcPts val="0"/>
-              </a:spcAft>
-            </a:pPr>
-            <a:r>
-              <a:rPr sz="1400">
-                <a:solidFill>
-                  <a:srgbClr val="22303F"/>
-                </a:solidFill>
-                <a:latin typeface="Consolas"/>
-              </a:rPr>
-              <a:t>    重複申請／維運成本高         → Option D：Database Self-Service</a:t>
-            </a:r>
-          </a:p>
-          <a:p>
-            <a:pPr>
-              <a:spcAft>
-                <a:spcPts val="0"/>
-              </a:spcAft>
-            </a:pPr>
-            <a:r>
-              <a:rPr sz="1400">
-                <a:solidFill>
-                  <a:srgbClr val="22303F"/>
-                </a:solidFill>
-                <a:latin typeface="Consolas"/>
-              </a:rPr>
-              <a:t>    DR／EDC 活化                → Option D：先 A/S，需異地讀再評估 A/A-RO</a:t>
-            </a:r>
-          </a:p>
-        </p:txBody>
-      </p:sp>
-      <p:sp>
-        <p:nvSpPr>
-          <p:cNvPr id="8" name="TextBox 7"/>
-          <p:cNvSpPr txBox="1"/>
+            <a:r>
+              <a:rPr sz="1600" b="0">
+                <a:solidFill>
+                  <a:srgbClr val="8A96A3"/>
+                </a:solidFill>
+                <a:latin typeface="Microsoft JhengHei"/>
+              </a:rPr>
+              <a:t>不以已投入的 PoC 工時作為繼續理由；每個出口都須回到需求、風險降低與可量化收益。</a:t>
+            </a:r>
+          </a:p>
+        </p:txBody>
+      </p:sp>
+      <p:sp>
+        <p:nvSpPr>
+          <p:cNvPr id="8" name="Rectangle 7"/>
+          <p:cNvSpPr/>
           <p:nvPr/>
         </p:nvSpPr>
         <p:spPr>
           <a:xfrm>
-            <a:off x="694944" y="5440680"/>
-            <a:ext cx="10929823" cy="263525"/>
-          </a:xfrm>
-          <a:prstGeom prst="rect">
-            <a:avLst/>
-          </a:prstGeom>
-          <a:noFill/>
-        </p:spPr>
-        <p:txBody>
-          <a:bodyPr wrap="square" lIns="0" rIns="0" tIns="0" bIns="0">
-            <a:spAutoFit/>
-          </a:bodyPr>
-          <a:lstStyle/>
-          <a:p>
-            <a:r>
-              <a:rPr sz="1500" b="0">
-                <a:solidFill>
-                  <a:srgbClr val="8A96A3"/>
-                </a:solidFill>
-                <a:latin typeface="Microsoft JhengHei"/>
-              </a:rPr>
-              <a:t>不以已投入的 PoC 工時作為繼續理由；每個出口都須回到需求、風險降低與可量化收益。</a:t>
-            </a:r>
-          </a:p>
-        </p:txBody>
-      </p:sp>
-      <p:sp>
-        <p:nvSpPr>
-          <p:cNvPr id="9" name="Rectangle 8"/>
-          <p:cNvSpPr/>
-          <p:nvPr/>
-        </p:nvSpPr>
-        <p:spPr>
-          <a:xfrm>
-            <a:off x="566928" y="5440680"/>
-            <a:ext cx="26000" cy="263525"/>
+            <a:off x="566928" y="4503928"/>
+            <a:ext cx="26000" cy="279400"/>
           </a:xfrm>
           <a:prstGeom prst="rect">
             <a:avLst/>
@@ -14454,10 +14774,10 @@
                 <a:tableStyleId>{5C22544A-7EE6-4342-B048-85BDC9FD1C3A}</a:tableStyleId>
               </a:tblPr>
               <a:tblGrid>
-                <a:gridCol w="815775"/>
-                <a:gridCol w="3947846"/>
-                <a:gridCol w="3889720"/>
-                <a:gridCol w="2404498"/>
+                <a:gridCol w="821457"/>
+                <a:gridCol w="3975340"/>
+                <a:gridCol w="3916809"/>
+                <a:gridCol w="2344233"/>
               </a:tblGrid>
               <a:tr h="321818">
                 <a:tc>
@@ -14833,7 +15153,7 @@
                           </a:solidFill>
                           <a:latin typeface="Microsoft JhengHei"/>
                         </a:rPr>
-                        <a:t>相容性是導入 Gate，不是普通效能分數</a:t>
+                        <a:t>相容性是導入門檻，不是普通效能分數</a:t>
                       </a:r>
                     </a:p>
                   </a:txBody>

--- a/poc/1_MeetingMinutes/0821_slide.pptx
+++ b/poc/1_MeetingMinutes/0821_slide.pptx
@@ -5,28 +5,28 @@
     <p:sldMasterId id="2147483648" r:id="rId1"/>
   </p:sldMasterIdLst>
   <p:sldIdLst>
-    <p:sldId id="256" r:id="rId7"/>
-    <p:sldId id="257" r:id="rId8"/>
-    <p:sldId id="258" r:id="rId9"/>
-    <p:sldId id="259" r:id="rId10"/>
-    <p:sldId id="260" r:id="rId11"/>
-    <p:sldId id="261" r:id="rId12"/>
-    <p:sldId id="262" r:id="rId13"/>
-    <p:sldId id="263" r:id="rId14"/>
-    <p:sldId id="264" r:id="rId15"/>
-    <p:sldId id="265" r:id="rId16"/>
-    <p:sldId id="266" r:id="rId17"/>
-    <p:sldId id="267" r:id="rId18"/>
-    <p:sldId id="268" r:id="rId19"/>
-    <p:sldId id="269" r:id="rId20"/>
-    <p:sldId id="270" r:id="rId21"/>
-    <p:sldId id="271" r:id="rId22"/>
-    <p:sldId id="272" r:id="rId23"/>
-    <p:sldId id="273" r:id="rId24"/>
-    <p:sldId id="274" r:id="rId25"/>
-    <p:sldId id="275" r:id="rId26"/>
+    <p:sldId id="256" r:id="rId2"/>
+    <p:sldId id="257" r:id="rId3"/>
+    <p:sldId id="258" r:id="rId4"/>
+    <p:sldId id="259" r:id="rId5"/>
+    <p:sldId id="260" r:id="rId6"/>
+    <p:sldId id="261" r:id="rId7"/>
+    <p:sldId id="262" r:id="rId8"/>
+    <p:sldId id="263" r:id="rId9"/>
+    <p:sldId id="264" r:id="rId10"/>
+    <p:sldId id="265" r:id="rId11"/>
+    <p:sldId id="266" r:id="rId12"/>
+    <p:sldId id="267" r:id="rId13"/>
+    <p:sldId id="268" r:id="rId14"/>
+    <p:sldId id="269" r:id="rId15"/>
+    <p:sldId id="270" r:id="rId16"/>
+    <p:sldId id="271" r:id="rId17"/>
+    <p:sldId id="272" r:id="rId18"/>
+    <p:sldId id="273" r:id="rId19"/>
+    <p:sldId id="274" r:id="rId20"/>
+    <p:sldId id="275" r:id="rId21"/>
   </p:sldIdLst>
-  <p:sldSz cx="12191695" cy="6858000" type="screen4x3"/>
+  <p:sldSz cx="12192000" cy="6858000"/>
   <p:notesSz cx="6858000" cy="9144000"/>
   <p:defaultTextStyle>
     <a:defPPr>
@@ -123,6 +123,22 @@
       </a:defRPr>
     </a:lvl9pPr>
   </p:defaultTextStyle>
+  <p:extLst>
+    <p:ext uri="{EFAFB233-063F-42B5-8137-9DF3F51BA10A}">
+      <p15:sldGuideLst xmlns:p15="http://schemas.microsoft.com/office/powerpoint/2012/main">
+        <p15:guide id="1" orient="horz" pos="2160">
+          <p15:clr>
+            <a:srgbClr val="A4A3A4"/>
+          </p15:clr>
+        </p15:guide>
+        <p15:guide id="2" pos="2880">
+          <p15:clr>
+            <a:srgbClr val="A4A3A4"/>
+          </p15:clr>
+        </p15:guide>
+      </p15:sldGuideLst>
+    </p:ext>
+  </p:extLst>
 </p:presentation>
 </file>
 
@@ -164,10 +180,9 @@
           <a:lstStyle/>
           <a:p>
             <a:r>
-              <a:rPr lang="en-US" smtClean="0"/>
+              <a:rPr lang="en-US"/>
               <a:t>Click to edit Master title style</a:t>
             </a:r>
-            <a:endParaRPr lang="en-US"/>
           </a:p>
         </p:txBody>
       </p:sp>
@@ -283,10 +298,9 @@
           </a:lstStyle>
           <a:p>
             <a:r>
-              <a:rPr lang="en-US" smtClean="0"/>
+              <a:rPr lang="en-US"/>
               <a:t>Click to edit Master subtitle style</a:t>
             </a:r>
-            <a:endParaRPr lang="en-US"/>
           </a:p>
         </p:txBody>
       </p:sp>
@@ -307,7 +321,7 @@
           <a:p>
             <a:fld id="{5BCAD085-E8A6-8845-BD4E-CB4CCA059FC4}" type="datetimeFigureOut">
               <a:rPr lang="en-US" smtClean="0"/>
-              <a:t>1/27/13</a:t>
+              <a:t>8/20/26</a:t>
             </a:fld>
             <a:endParaRPr lang="en-US"/>
           </a:p>
@@ -401,10 +415,9 @@
           <a:lstStyle/>
           <a:p>
             <a:r>
-              <a:rPr lang="en-US" smtClean="0"/>
+              <a:rPr lang="en-US"/>
               <a:t>Click to edit Master title style</a:t>
             </a:r>
-            <a:endParaRPr lang="en-US"/>
           </a:p>
         </p:txBody>
       </p:sp>
@@ -425,38 +438,37 @@
           <a:p>
             <a:pPr lvl="0"/>
             <a:r>
-              <a:rPr lang="en-US" smtClean="0"/>
+              <a:rPr lang="en-US"/>
               <a:t>Click to edit Master text styles</a:t>
             </a:r>
           </a:p>
           <a:p>
             <a:pPr lvl="1"/>
             <a:r>
-              <a:rPr lang="en-US" smtClean="0"/>
+              <a:rPr lang="en-US"/>
               <a:t>Second level</a:t>
             </a:r>
           </a:p>
           <a:p>
             <a:pPr lvl="2"/>
             <a:r>
-              <a:rPr lang="en-US" smtClean="0"/>
+              <a:rPr lang="en-US"/>
               <a:t>Third level</a:t>
             </a:r>
           </a:p>
           <a:p>
             <a:pPr lvl="3"/>
             <a:r>
-              <a:rPr lang="en-US" smtClean="0"/>
+              <a:rPr lang="en-US"/>
               <a:t>Fourth level</a:t>
             </a:r>
           </a:p>
           <a:p>
             <a:pPr lvl="4"/>
             <a:r>
-              <a:rPr lang="en-US" smtClean="0"/>
+              <a:rPr lang="en-US"/>
               <a:t>Fifth level</a:t>
             </a:r>
-            <a:endParaRPr lang="en-US"/>
           </a:p>
         </p:txBody>
       </p:sp>
@@ -477,7 +489,7 @@
           <a:p>
             <a:fld id="{5BCAD085-E8A6-8845-BD4E-CB4CCA059FC4}" type="datetimeFigureOut">
               <a:rPr lang="en-US" smtClean="0"/>
-              <a:t>1/27/13</a:t>
+              <a:t>8/20/26</a:t>
             </a:fld>
             <a:endParaRPr lang="en-US"/>
           </a:p>
@@ -576,10 +588,9 @@
           <a:lstStyle/>
           <a:p>
             <a:r>
-              <a:rPr lang="en-US" smtClean="0"/>
+              <a:rPr lang="en-US"/>
               <a:t>Click to edit Master title style</a:t>
             </a:r>
-            <a:endParaRPr lang="en-US"/>
           </a:p>
         </p:txBody>
       </p:sp>
@@ -605,38 +616,37 @@
           <a:p>
             <a:pPr lvl="0"/>
             <a:r>
-              <a:rPr lang="en-US" smtClean="0"/>
+              <a:rPr lang="en-US"/>
               <a:t>Click to edit Master text styles</a:t>
             </a:r>
           </a:p>
           <a:p>
             <a:pPr lvl="1"/>
             <a:r>
-              <a:rPr lang="en-US" smtClean="0"/>
+              <a:rPr lang="en-US"/>
               <a:t>Second level</a:t>
             </a:r>
           </a:p>
           <a:p>
             <a:pPr lvl="2"/>
             <a:r>
-              <a:rPr lang="en-US" smtClean="0"/>
+              <a:rPr lang="en-US"/>
               <a:t>Third level</a:t>
             </a:r>
           </a:p>
           <a:p>
             <a:pPr lvl="3"/>
             <a:r>
-              <a:rPr lang="en-US" smtClean="0"/>
+              <a:rPr lang="en-US"/>
               <a:t>Fourth level</a:t>
             </a:r>
           </a:p>
           <a:p>
             <a:pPr lvl="4"/>
             <a:r>
-              <a:rPr lang="en-US" smtClean="0"/>
+              <a:rPr lang="en-US"/>
               <a:t>Fifth level</a:t>
             </a:r>
-            <a:endParaRPr lang="en-US"/>
           </a:p>
         </p:txBody>
       </p:sp>
@@ -657,7 +667,7 @@
           <a:p>
             <a:fld id="{5BCAD085-E8A6-8845-BD4E-CB4CCA059FC4}" type="datetimeFigureOut">
               <a:rPr lang="en-US" smtClean="0"/>
-              <a:t>1/27/13</a:t>
+              <a:t>8/20/26</a:t>
             </a:fld>
             <a:endParaRPr lang="en-US"/>
           </a:p>
@@ -751,10 +761,9 @@
           <a:lstStyle/>
           <a:p>
             <a:r>
-              <a:rPr lang="en-US" smtClean="0"/>
+              <a:rPr lang="en-US"/>
               <a:t>Click to edit Master title style</a:t>
             </a:r>
-            <a:endParaRPr lang="en-US"/>
           </a:p>
         </p:txBody>
       </p:sp>
@@ -775,38 +784,37 @@
           <a:p>
             <a:pPr lvl="0"/>
             <a:r>
-              <a:rPr lang="en-US" smtClean="0"/>
+              <a:rPr lang="en-US"/>
               <a:t>Click to edit Master text styles</a:t>
             </a:r>
           </a:p>
           <a:p>
             <a:pPr lvl="1"/>
             <a:r>
-              <a:rPr lang="en-US" smtClean="0"/>
+              <a:rPr lang="en-US"/>
               <a:t>Second level</a:t>
             </a:r>
           </a:p>
           <a:p>
             <a:pPr lvl="2"/>
             <a:r>
-              <a:rPr lang="en-US" smtClean="0"/>
+              <a:rPr lang="en-US"/>
               <a:t>Third level</a:t>
             </a:r>
           </a:p>
           <a:p>
             <a:pPr lvl="3"/>
             <a:r>
-              <a:rPr lang="en-US" smtClean="0"/>
+              <a:rPr lang="en-US"/>
               <a:t>Fourth level</a:t>
             </a:r>
           </a:p>
           <a:p>
             <a:pPr lvl="4"/>
             <a:r>
-              <a:rPr lang="en-US" smtClean="0"/>
+              <a:rPr lang="en-US"/>
               <a:t>Fifth level</a:t>
             </a:r>
-            <a:endParaRPr lang="en-US"/>
           </a:p>
         </p:txBody>
       </p:sp>
@@ -827,7 +835,7 @@
           <a:p>
             <a:fld id="{5BCAD085-E8A6-8845-BD4E-CB4CCA059FC4}" type="datetimeFigureOut">
               <a:rPr lang="en-US" smtClean="0"/>
-              <a:t>1/27/13</a:t>
+              <a:t>8/20/26</a:t>
             </a:fld>
             <a:endParaRPr lang="en-US"/>
           </a:p>
@@ -930,10 +938,9 @@
           </a:lstStyle>
           <a:p>
             <a:r>
-              <a:rPr lang="en-US" smtClean="0"/>
+              <a:rPr lang="en-US"/>
               <a:t>Click to edit Master title style</a:t>
             </a:r>
-            <a:endParaRPr lang="en-US"/>
           </a:p>
         </p:txBody>
       </p:sp>
@@ -1050,7 +1057,7 @@
           <a:p>
             <a:pPr lvl="0"/>
             <a:r>
-              <a:rPr lang="en-US" smtClean="0"/>
+              <a:rPr lang="en-US"/>
               <a:t>Click to edit Master text styles</a:t>
             </a:r>
           </a:p>
@@ -1073,7 +1080,7 @@
           <a:p>
             <a:fld id="{5BCAD085-E8A6-8845-BD4E-CB4CCA059FC4}" type="datetimeFigureOut">
               <a:rPr lang="en-US" smtClean="0"/>
-              <a:t>1/27/13</a:t>
+              <a:t>8/20/26</a:t>
             </a:fld>
             <a:endParaRPr lang="en-US"/>
           </a:p>
@@ -1167,10 +1174,9 @@
           <a:lstStyle/>
           <a:p>
             <a:r>
-              <a:rPr lang="en-US" smtClean="0"/>
+              <a:rPr lang="en-US"/>
               <a:t>Click to edit Master title style</a:t>
             </a:r>
-            <a:endParaRPr lang="en-US"/>
           </a:p>
         </p:txBody>
       </p:sp>
@@ -1224,38 +1230,37 @@
           <a:p>
             <a:pPr lvl="0"/>
             <a:r>
-              <a:rPr lang="en-US" smtClean="0"/>
+              <a:rPr lang="en-US"/>
               <a:t>Click to edit Master text styles</a:t>
             </a:r>
           </a:p>
           <a:p>
             <a:pPr lvl="1"/>
             <a:r>
-              <a:rPr lang="en-US" smtClean="0"/>
+              <a:rPr lang="en-US"/>
               <a:t>Second level</a:t>
             </a:r>
           </a:p>
           <a:p>
             <a:pPr lvl="2"/>
             <a:r>
-              <a:rPr lang="en-US" smtClean="0"/>
+              <a:rPr lang="en-US"/>
               <a:t>Third level</a:t>
             </a:r>
           </a:p>
           <a:p>
             <a:pPr lvl="3"/>
             <a:r>
-              <a:rPr lang="en-US" smtClean="0"/>
+              <a:rPr lang="en-US"/>
               <a:t>Fourth level</a:t>
             </a:r>
           </a:p>
           <a:p>
             <a:pPr lvl="4"/>
             <a:r>
-              <a:rPr lang="en-US" smtClean="0"/>
+              <a:rPr lang="en-US"/>
               <a:t>Fifth level</a:t>
             </a:r>
-            <a:endParaRPr lang="en-US"/>
           </a:p>
         </p:txBody>
       </p:sp>
@@ -1309,38 +1314,37 @@
           <a:p>
             <a:pPr lvl="0"/>
             <a:r>
-              <a:rPr lang="en-US" smtClean="0"/>
+              <a:rPr lang="en-US"/>
               <a:t>Click to edit Master text styles</a:t>
             </a:r>
           </a:p>
           <a:p>
             <a:pPr lvl="1"/>
             <a:r>
-              <a:rPr lang="en-US" smtClean="0"/>
+              <a:rPr lang="en-US"/>
               <a:t>Second level</a:t>
             </a:r>
           </a:p>
           <a:p>
             <a:pPr lvl="2"/>
             <a:r>
-              <a:rPr lang="en-US" smtClean="0"/>
+              <a:rPr lang="en-US"/>
               <a:t>Third level</a:t>
             </a:r>
           </a:p>
           <a:p>
             <a:pPr lvl="3"/>
             <a:r>
-              <a:rPr lang="en-US" smtClean="0"/>
+              <a:rPr lang="en-US"/>
               <a:t>Fourth level</a:t>
             </a:r>
           </a:p>
           <a:p>
             <a:pPr lvl="4"/>
             <a:r>
-              <a:rPr lang="en-US" smtClean="0"/>
+              <a:rPr lang="en-US"/>
               <a:t>Fifth level</a:t>
             </a:r>
-            <a:endParaRPr lang="en-US"/>
           </a:p>
         </p:txBody>
       </p:sp>
@@ -1361,7 +1365,7 @@
           <a:p>
             <a:fld id="{5BCAD085-E8A6-8845-BD4E-CB4CCA059FC4}" type="datetimeFigureOut">
               <a:rPr lang="en-US" smtClean="0"/>
-              <a:t>1/27/13</a:t>
+              <a:t>8/20/26</a:t>
             </a:fld>
             <a:endParaRPr lang="en-US"/>
           </a:p>
@@ -1459,10 +1463,9 @@
           </a:lstStyle>
           <a:p>
             <a:r>
-              <a:rPr lang="en-US" smtClean="0"/>
+              <a:rPr lang="en-US"/>
               <a:t>Click to edit Master title style</a:t>
             </a:r>
-            <a:endParaRPr lang="en-US"/>
           </a:p>
         </p:txBody>
       </p:sp>
@@ -1525,7 +1528,7 @@
           <a:p>
             <a:pPr lvl="0"/>
             <a:r>
-              <a:rPr lang="en-US" smtClean="0"/>
+              <a:rPr lang="en-US"/>
               <a:t>Click to edit Master text styles</a:t>
             </a:r>
           </a:p>
@@ -1581,38 +1584,37 @@
           <a:p>
             <a:pPr lvl="0"/>
             <a:r>
-              <a:rPr lang="en-US" smtClean="0"/>
+              <a:rPr lang="en-US"/>
               <a:t>Click to edit Master text styles</a:t>
             </a:r>
           </a:p>
           <a:p>
             <a:pPr lvl="1"/>
             <a:r>
-              <a:rPr lang="en-US" smtClean="0"/>
+              <a:rPr lang="en-US"/>
               <a:t>Second level</a:t>
             </a:r>
           </a:p>
           <a:p>
             <a:pPr lvl="2"/>
             <a:r>
-              <a:rPr lang="en-US" smtClean="0"/>
+              <a:rPr lang="en-US"/>
               <a:t>Third level</a:t>
             </a:r>
           </a:p>
           <a:p>
             <a:pPr lvl="3"/>
             <a:r>
-              <a:rPr lang="en-US" smtClean="0"/>
+              <a:rPr lang="en-US"/>
               <a:t>Fourth level</a:t>
             </a:r>
           </a:p>
           <a:p>
             <a:pPr lvl="4"/>
             <a:r>
-              <a:rPr lang="en-US" smtClean="0"/>
+              <a:rPr lang="en-US"/>
               <a:t>Fifth level</a:t>
             </a:r>
-            <a:endParaRPr lang="en-US"/>
           </a:p>
         </p:txBody>
       </p:sp>
@@ -1675,7 +1677,7 @@
           <a:p>
             <a:pPr lvl="0"/>
             <a:r>
-              <a:rPr lang="en-US" smtClean="0"/>
+              <a:rPr lang="en-US"/>
               <a:t>Click to edit Master text styles</a:t>
             </a:r>
           </a:p>
@@ -1731,38 +1733,37 @@
           <a:p>
             <a:pPr lvl="0"/>
             <a:r>
-              <a:rPr lang="en-US" smtClean="0"/>
+              <a:rPr lang="en-US"/>
               <a:t>Click to edit Master text styles</a:t>
             </a:r>
           </a:p>
           <a:p>
             <a:pPr lvl="1"/>
             <a:r>
-              <a:rPr lang="en-US" smtClean="0"/>
+              <a:rPr lang="en-US"/>
               <a:t>Second level</a:t>
             </a:r>
           </a:p>
           <a:p>
             <a:pPr lvl="2"/>
             <a:r>
-              <a:rPr lang="en-US" smtClean="0"/>
+              <a:rPr lang="en-US"/>
               <a:t>Third level</a:t>
             </a:r>
           </a:p>
           <a:p>
             <a:pPr lvl="3"/>
             <a:r>
-              <a:rPr lang="en-US" smtClean="0"/>
+              <a:rPr lang="en-US"/>
               <a:t>Fourth level</a:t>
             </a:r>
           </a:p>
           <a:p>
             <a:pPr lvl="4"/>
             <a:r>
-              <a:rPr lang="en-US" smtClean="0"/>
+              <a:rPr lang="en-US"/>
               <a:t>Fifth level</a:t>
             </a:r>
-            <a:endParaRPr lang="en-US"/>
           </a:p>
         </p:txBody>
       </p:sp>
@@ -1783,7 +1784,7 @@
           <a:p>
             <a:fld id="{5BCAD085-E8A6-8845-BD4E-CB4CCA059FC4}" type="datetimeFigureOut">
               <a:rPr lang="en-US" smtClean="0"/>
-              <a:t>1/27/13</a:t>
+              <a:t>8/20/26</a:t>
             </a:fld>
             <a:endParaRPr lang="en-US"/>
           </a:p>
@@ -1877,10 +1878,9 @@
           <a:lstStyle/>
           <a:p>
             <a:r>
-              <a:rPr lang="en-US" smtClean="0"/>
+              <a:rPr lang="en-US"/>
               <a:t>Click to edit Master title style</a:t>
             </a:r>
-            <a:endParaRPr lang="en-US"/>
           </a:p>
         </p:txBody>
       </p:sp>
@@ -1901,7 +1901,7 @@
           <a:p>
             <a:fld id="{5BCAD085-E8A6-8845-BD4E-CB4CCA059FC4}" type="datetimeFigureOut">
               <a:rPr lang="en-US" smtClean="0"/>
-              <a:t>1/27/13</a:t>
+              <a:t>8/20/26</a:t>
             </a:fld>
             <a:endParaRPr lang="en-US"/>
           </a:p>
@@ -1996,7 +1996,7 @@
           <a:p>
             <a:fld id="{5BCAD085-E8A6-8845-BD4E-CB4CCA059FC4}" type="datetimeFigureOut">
               <a:rPr lang="en-US" smtClean="0"/>
-              <a:t>1/27/13</a:t>
+              <a:t>8/20/26</a:t>
             </a:fld>
             <a:endParaRPr lang="en-US"/>
           </a:p>
@@ -2099,10 +2099,9 @@
           </a:lstStyle>
           <a:p>
             <a:r>
-              <a:rPr lang="en-US" smtClean="0"/>
+              <a:rPr lang="en-US"/>
               <a:t>Click to edit Master title style</a:t>
             </a:r>
-            <a:endParaRPr lang="en-US"/>
           </a:p>
         </p:txBody>
       </p:sp>
@@ -2156,38 +2155,37 @@
           <a:p>
             <a:pPr lvl="0"/>
             <a:r>
-              <a:rPr lang="en-US" smtClean="0"/>
+              <a:rPr lang="en-US"/>
               <a:t>Click to edit Master text styles</a:t>
             </a:r>
           </a:p>
           <a:p>
             <a:pPr lvl="1"/>
             <a:r>
-              <a:rPr lang="en-US" smtClean="0"/>
+              <a:rPr lang="en-US"/>
               <a:t>Second level</a:t>
             </a:r>
           </a:p>
           <a:p>
             <a:pPr lvl="2"/>
             <a:r>
-              <a:rPr lang="en-US" smtClean="0"/>
+              <a:rPr lang="en-US"/>
               <a:t>Third level</a:t>
             </a:r>
           </a:p>
           <a:p>
             <a:pPr lvl="3"/>
             <a:r>
-              <a:rPr lang="en-US" smtClean="0"/>
+              <a:rPr lang="en-US"/>
               <a:t>Fourth level</a:t>
             </a:r>
           </a:p>
           <a:p>
             <a:pPr lvl="4"/>
             <a:r>
-              <a:rPr lang="en-US" smtClean="0"/>
+              <a:rPr lang="en-US"/>
               <a:t>Fifth level</a:t>
             </a:r>
-            <a:endParaRPr lang="en-US"/>
           </a:p>
         </p:txBody>
       </p:sp>
@@ -2250,7 +2248,7 @@
           <a:p>
             <a:pPr lvl="0"/>
             <a:r>
-              <a:rPr lang="en-US" smtClean="0"/>
+              <a:rPr lang="en-US"/>
               <a:t>Click to edit Master text styles</a:t>
             </a:r>
           </a:p>
@@ -2273,7 +2271,7 @@
           <a:p>
             <a:fld id="{5BCAD085-E8A6-8845-BD4E-CB4CCA059FC4}" type="datetimeFigureOut">
               <a:rPr lang="en-US" smtClean="0"/>
-              <a:t>1/27/13</a:t>
+              <a:t>8/20/26</a:t>
             </a:fld>
             <a:endParaRPr lang="en-US"/>
           </a:p>
@@ -2376,10 +2374,9 @@
           </a:lstStyle>
           <a:p>
             <a:r>
-              <a:rPr lang="en-US" smtClean="0"/>
+              <a:rPr lang="en-US"/>
               <a:t>Click to edit Master title style</a:t>
             </a:r>
-            <a:endParaRPr lang="en-US"/>
           </a:p>
         </p:txBody>
       </p:sp>
@@ -2503,7 +2500,7 @@
           <a:p>
             <a:pPr lvl="0"/>
             <a:r>
-              <a:rPr lang="en-US" smtClean="0"/>
+              <a:rPr lang="en-US"/>
               <a:t>Click to edit Master text styles</a:t>
             </a:r>
           </a:p>
@@ -2526,7 +2523,7 @@
           <a:p>
             <a:fld id="{5BCAD085-E8A6-8845-BD4E-CB4CCA059FC4}" type="datetimeFigureOut">
               <a:rPr lang="en-US" smtClean="0"/>
-              <a:t>1/27/13</a:t>
+              <a:t>8/20/26</a:t>
             </a:fld>
             <a:endParaRPr lang="en-US"/>
           </a:p>
@@ -2635,10 +2632,9 @@
           <a:lstStyle/>
           <a:p>
             <a:r>
-              <a:rPr lang="en-US" smtClean="0"/>
+              <a:rPr lang="en-US"/>
               <a:t>Click to edit Master title style</a:t>
             </a:r>
-            <a:endParaRPr lang="en-US"/>
           </a:p>
         </p:txBody>
       </p:sp>
@@ -2669,38 +2665,37 @@
           <a:p>
             <a:pPr lvl="0"/>
             <a:r>
-              <a:rPr lang="en-US" smtClean="0"/>
+              <a:rPr lang="en-US"/>
               <a:t>Click to edit Master text styles</a:t>
             </a:r>
           </a:p>
           <a:p>
             <a:pPr lvl="1"/>
             <a:r>
-              <a:rPr lang="en-US" smtClean="0"/>
+              <a:rPr lang="en-US"/>
               <a:t>Second level</a:t>
             </a:r>
           </a:p>
           <a:p>
             <a:pPr lvl="2"/>
             <a:r>
-              <a:rPr lang="en-US" smtClean="0"/>
+              <a:rPr lang="en-US"/>
               <a:t>Third level</a:t>
             </a:r>
           </a:p>
           <a:p>
             <a:pPr lvl="3"/>
             <a:r>
-              <a:rPr lang="en-US" smtClean="0"/>
+              <a:rPr lang="en-US"/>
               <a:t>Fourth level</a:t>
             </a:r>
           </a:p>
           <a:p>
             <a:pPr lvl="4"/>
             <a:r>
-              <a:rPr lang="en-US" smtClean="0"/>
+              <a:rPr lang="en-US"/>
               <a:t>Fifth level</a:t>
             </a:r>
-            <a:endParaRPr lang="en-US"/>
           </a:p>
         </p:txBody>
       </p:sp>
@@ -2739,7 +2734,7 @@
           <a:p>
             <a:fld id="{5BCAD085-E8A6-8845-BD4E-CB4CCA059FC4}" type="datetimeFigureOut">
               <a:rPr lang="en-US" smtClean="0"/>
-              <a:t>1/27/13</a:t>
+              <a:t>8/20/26</a:t>
             </a:fld>
             <a:endParaRPr lang="en-US"/>
           </a:p>
@@ -3098,7 +3093,7 @@
 </file>
 
 <file path=ppt/slides/slide1.xml><?xml version="1.0" encoding="utf-8"?>
-<p:sld xmlns:a="http://schemas.openxmlformats.org/drawingml/2006/main" xmlns:p="http://schemas.openxmlformats.org/presentationml/2006/main" xmlns:r="http://schemas.openxmlformats.org/officeDocument/2006/relationships">
+<p:sld xmlns:a="http://schemas.openxmlformats.org/drawingml/2006/main" xmlns:r="http://schemas.openxmlformats.org/officeDocument/2006/relationships" xmlns:p="http://schemas.openxmlformats.org/presentationml/2006/main">
   <p:cSld>
     <p:spTree>
       <p:nvGrpSpPr>
@@ -3106,7 +3101,14 @@
         <p:cNvGrpSpPr/>
         <p:nvPr/>
       </p:nvGrpSpPr>
-      <p:grpSpPr/>
+      <p:grpSpPr>
+        <a:xfrm>
+          <a:off x="0" y="0"/>
+          <a:ext cx="0" cy="0"/>
+          <a:chOff x="0" y="0"/>
+          <a:chExt cx="0" cy="0"/>
+        </a:xfrm>
+      </p:grpSpPr>
       <p:sp>
         <p:nvSpPr>
           <p:cNvPr id="2" name="TextBox 1"/>
@@ -3124,7 +3126,7 @@
           <a:noFill/>
         </p:spPr>
         <p:txBody>
-          <a:bodyPr wrap="square" lIns="0" rIns="0" tIns="0" bIns="0">
+          <a:bodyPr wrap="square" lIns="0" tIns="0" rIns="0" bIns="0">
             <a:spAutoFit/>
           </a:bodyPr>
           <a:lstStyle/>
@@ -3158,7 +3160,7 @@
           <a:noFill/>
         </p:spPr>
         <p:txBody>
-          <a:bodyPr wrap="square" lIns="0" rIns="0" tIns="0" bIns="0">
+          <a:bodyPr wrap="square" lIns="0" tIns="0" rIns="0" bIns="0">
             <a:spAutoFit/>
           </a:bodyPr>
           <a:lstStyle/>
@@ -3193,7 +3195,7 @@
           <a:noFill/>
         </p:spPr>
         <p:txBody>
-          <a:bodyPr wrap="square" lIns="0" rIns="0" tIns="0" bIns="0">
+          <a:bodyPr wrap="square" lIns="0" tIns="0" rIns="0" bIns="0">
             <a:spAutoFit/>
           </a:bodyPr>
           <a:lstStyle/>
@@ -3228,7 +3230,7 @@
           <a:noFill/>
         </p:spPr>
         <p:txBody>
-          <a:bodyPr wrap="square" lIns="0" rIns="0" tIns="0" bIns="0">
+          <a:bodyPr wrap="square" lIns="0" tIns="0" rIns="0" bIns="0">
             <a:spAutoFit/>
           </a:bodyPr>
           <a:lstStyle/>
@@ -3255,7 +3257,7 @@
 </file>
 
 <file path=ppt/slides/slide10.xml><?xml version="1.0" encoding="utf-8"?>
-<p:sld xmlns:a="http://schemas.openxmlformats.org/drawingml/2006/main" xmlns:p="http://schemas.openxmlformats.org/presentationml/2006/main" xmlns:r="http://schemas.openxmlformats.org/officeDocument/2006/relationships">
+<p:sld xmlns:a="http://schemas.openxmlformats.org/drawingml/2006/main" xmlns:r="http://schemas.openxmlformats.org/officeDocument/2006/relationships" xmlns:p="http://schemas.openxmlformats.org/presentationml/2006/main">
   <p:cSld>
     <p:spTree>
       <p:nvGrpSpPr>
@@ -3263,7 +3265,14 @@
         <p:cNvGrpSpPr/>
         <p:nvPr/>
       </p:nvGrpSpPr>
-      <p:grpSpPr/>
+      <p:grpSpPr>
+        <a:xfrm>
+          <a:off x="0" y="0"/>
+          <a:ext cx="0" cy="0"/>
+          <a:chOff x="0" y="0"/>
+          <a:chExt cx="0" cy="0"/>
+        </a:xfrm>
+      </p:grpSpPr>
       <p:sp>
         <p:nvSpPr>
           <p:cNvPr id="2" name="TextBox 1"/>
@@ -3281,7 +3290,7 @@
           <a:noFill/>
         </p:spPr>
         <p:txBody>
-          <a:bodyPr wrap="square" lIns="0" rIns="0" tIns="0" bIns="0">
+          <a:bodyPr wrap="square" lIns="0" tIns="0" rIns="0" bIns="0">
             <a:spAutoFit/>
           </a:bodyPr>
           <a:lstStyle/>
@@ -3315,7 +3324,7 @@
           <a:noFill/>
         </p:spPr>
         <p:txBody>
-          <a:bodyPr wrap="square" lIns="0" rIns="0" tIns="0" bIns="0">
+          <a:bodyPr wrap="square" lIns="0" tIns="0" rIns="0" bIns="0">
             <a:spAutoFit/>
           </a:bodyPr>
           <a:lstStyle/>
@@ -3349,7 +3358,7 @@
           <a:noFill/>
         </p:spPr>
         <p:txBody>
-          <a:bodyPr wrap="square" lIns="0" rIns="0" tIns="0" bIns="0">
+          <a:bodyPr wrap="square" lIns="0" tIns="0" rIns="0" bIns="0">
             <a:spAutoFit/>
           </a:bodyPr>
           <a:lstStyle/>
@@ -3384,7 +3393,7 @@
           <a:noFill/>
         </p:spPr>
         <p:txBody>
-          <a:bodyPr wrap="square" lIns="0" rIns="0" tIns="0" bIns="0">
+          <a:bodyPr wrap="square" lIns="0" tIns="0" rIns="0" bIns="0">
             <a:spAutoFit/>
           </a:bodyPr>
           <a:lstStyle/>
@@ -3418,7 +3427,7 @@
           <a:noFill/>
         </p:spPr>
         <p:txBody>
-          <a:bodyPr wrap="square" lIns="0" rIns="0" tIns="0" bIns="0">
+          <a:bodyPr wrap="square" lIns="0" tIns="0" rIns="0" bIns="0">
             <a:spAutoFit/>
           </a:bodyPr>
           <a:lstStyle/>
@@ -3658,7 +3667,7 @@
 </file>
 
 <file path=ppt/slides/slide11.xml><?xml version="1.0" encoding="utf-8"?>
-<p:sld xmlns:a="http://schemas.openxmlformats.org/drawingml/2006/main" xmlns:p="http://schemas.openxmlformats.org/presentationml/2006/main" xmlns:r="http://schemas.openxmlformats.org/officeDocument/2006/relationships">
+<p:sld xmlns:a="http://schemas.openxmlformats.org/drawingml/2006/main" xmlns:r="http://schemas.openxmlformats.org/officeDocument/2006/relationships" xmlns:p="http://schemas.openxmlformats.org/presentationml/2006/main">
   <p:cSld>
     <p:spTree>
       <p:nvGrpSpPr>
@@ -3666,7 +3675,14 @@
         <p:cNvGrpSpPr/>
         <p:nvPr/>
       </p:nvGrpSpPr>
-      <p:grpSpPr/>
+      <p:grpSpPr>
+        <a:xfrm>
+          <a:off x="0" y="0"/>
+          <a:ext cx="0" cy="0"/>
+          <a:chOff x="0" y="0"/>
+          <a:chExt cx="0" cy="0"/>
+        </a:xfrm>
+      </p:grpSpPr>
       <p:sp>
         <p:nvSpPr>
           <p:cNvPr id="2" name="TextBox 1"/>
@@ -3684,7 +3700,7 @@
           <a:noFill/>
         </p:spPr>
         <p:txBody>
-          <a:bodyPr wrap="square" lIns="0" rIns="0" tIns="0" bIns="0">
+          <a:bodyPr wrap="square" lIns="0" tIns="0" rIns="0" bIns="0">
             <a:spAutoFit/>
           </a:bodyPr>
           <a:lstStyle/>
@@ -3718,7 +3734,7 @@
           <a:noFill/>
         </p:spPr>
         <p:txBody>
-          <a:bodyPr wrap="square" lIns="0" rIns="0" tIns="0" bIns="0">
+          <a:bodyPr wrap="square" lIns="0" tIns="0" rIns="0" bIns="0">
             <a:spAutoFit/>
           </a:bodyPr>
           <a:lstStyle/>
@@ -3752,7 +3768,7 @@
           <a:noFill/>
         </p:spPr>
         <p:txBody>
-          <a:bodyPr wrap="square" lIns="0" rIns="0" tIns="0" bIns="0">
+          <a:bodyPr wrap="square" lIns="0" tIns="0" rIns="0" bIns="0">
             <a:spAutoFit/>
           </a:bodyPr>
           <a:lstStyle/>
@@ -3787,7 +3803,7 @@
           <a:noFill/>
         </p:spPr>
         <p:txBody>
-          <a:bodyPr wrap="square" lIns="0" rIns="0" tIns="0" bIns="0">
+          <a:bodyPr wrap="square" lIns="0" tIns="0" rIns="0" bIns="0">
             <a:spAutoFit/>
           </a:bodyPr>
           <a:lstStyle/>
@@ -3823,14 +3839,32 @@
                 <a:tableStyleId>{5C22544A-7EE6-4342-B048-85BDC9FD1C3A}</a:tableStyleId>
               </a:tblPr>
               <a:tblGrid>
-                <a:gridCol w="1374988"/>
-                <a:gridCol w="4723341"/>
-                <a:gridCol w="4959510"/>
+                <a:gridCol w="1374988">
+                  <a:extLst>
+                    <a:ext uri="{9D8B030D-6E8A-4147-A177-3AD203B41FA5}">
+                      <a16:colId xmlns:a16="http://schemas.microsoft.com/office/drawing/2014/main" val="20000"/>
+                    </a:ext>
+                  </a:extLst>
+                </a:gridCol>
+                <a:gridCol w="4723341">
+                  <a:extLst>
+                    <a:ext uri="{9D8B030D-6E8A-4147-A177-3AD203B41FA5}">
+                      <a16:colId xmlns:a16="http://schemas.microsoft.com/office/drawing/2014/main" val="20001"/>
+                    </a:ext>
+                  </a:extLst>
+                </a:gridCol>
+                <a:gridCol w="4959510">
+                  <a:extLst>
+                    <a:ext uri="{9D8B030D-6E8A-4147-A177-3AD203B41FA5}">
+                      <a16:colId xmlns:a16="http://schemas.microsoft.com/office/drawing/2014/main" val="20002"/>
+                    </a:ext>
+                  </a:extLst>
+                </a:gridCol>
               </a:tblGrid>
               <a:tr h="321818">
                 <a:tc>
                   <a:txBody>
-                    <a:bodyPr wrap="square"/>
+                    <a:bodyPr/>
                     <a:lstStyle/>
                     <a:p>
                       <a:pPr algn="ctr"/>
@@ -3853,7 +3887,7 @@
                 </a:tc>
                 <a:tc>
                   <a:txBody>
-                    <a:bodyPr wrap="square"/>
+                    <a:bodyPr/>
                     <a:lstStyle/>
                     <a:p>
                       <a:pPr algn="ctr"/>
@@ -3876,7 +3910,7 @@
                 </a:tc>
                 <a:tc>
                   <a:txBody>
-                    <a:bodyPr wrap="square"/>
+                    <a:bodyPr/>
                     <a:lstStyle/>
                     <a:p>
                       <a:pPr algn="ctr"/>
@@ -3897,11 +3931,16 @@
                     </a:solidFill>
                   </a:tcPr>
                 </a:tc>
+                <a:extLst>
+                  <a:ext uri="{0D108BD9-81ED-4DB2-BD59-A6C34878D82A}">
+                    <a16:rowId xmlns:a16="http://schemas.microsoft.com/office/drawing/2014/main" val="10000"/>
+                  </a:ext>
+                </a:extLst>
               </a:tr>
               <a:tr h="579628">
                 <a:tc>
                   <a:txBody>
-                    <a:bodyPr wrap="square"/>
+                    <a:bodyPr/>
                     <a:lstStyle/>
                     <a:p>
                       <a:pPr algn="ctr"/>
@@ -3933,7 +3972,7 @@
                 </a:tc>
                 <a:tc>
                   <a:txBody>
-                    <a:bodyPr wrap="square"/>
+                    <a:bodyPr/>
                     <a:lstStyle/>
                     <a:p>
                       <a:pPr algn="l"/>
@@ -3956,7 +3995,7 @@
                 </a:tc>
                 <a:tc>
                   <a:txBody>
-                    <a:bodyPr wrap="square"/>
+                    <a:bodyPr/>
                     <a:lstStyle/>
                     <a:p>
                       <a:pPr algn="l"/>
@@ -3977,14 +4016,20 @@
                     </a:solidFill>
                   </a:tcPr>
                 </a:tc>
+                <a:extLst>
+                  <a:ext uri="{0D108BD9-81ED-4DB2-BD59-A6C34878D82A}">
+                    <a16:rowId xmlns:a16="http://schemas.microsoft.com/office/drawing/2014/main" val="10001"/>
+                  </a:ext>
+                </a:extLst>
               </a:tr>
               <a:tr h="321818">
                 <a:tc>
                   <a:txBody>
-                    <a:bodyPr wrap="square"/>
-                    <a:lstStyle/>
-                    <a:p>
-                      <a:pPr algn="ctr"/>
+                    <a:bodyPr/>
+                    <a:lstStyle/>
+                    <a:p>
+                      <a:pPr algn="ctr"/>
+                      <a:endParaRPr/>
                     </a:p>
                   </a:txBody>
                   <a:tcPr marL="64008" marR="64008" marT="32004" marB="32004" anchor="ctr">
@@ -3995,7 +4040,7 @@
                 </a:tc>
                 <a:tc>
                   <a:txBody>
-                    <a:bodyPr wrap="square"/>
+                    <a:bodyPr/>
                     <a:lstStyle/>
                     <a:p>
                       <a:pPr algn="l"/>
@@ -4018,7 +4063,7 @@
                 </a:tc>
                 <a:tc>
                   <a:txBody>
-                    <a:bodyPr wrap="square"/>
+                    <a:bodyPr/>
                     <a:lstStyle/>
                     <a:p>
                       <a:pPr algn="l"/>
@@ -4039,11 +4084,16 @@
                     </a:solidFill>
                   </a:tcPr>
                 </a:tc>
+                <a:extLst>
+                  <a:ext uri="{0D108BD9-81ED-4DB2-BD59-A6C34878D82A}">
+                    <a16:rowId xmlns:a16="http://schemas.microsoft.com/office/drawing/2014/main" val="10002"/>
+                  </a:ext>
+                </a:extLst>
               </a:tr>
               <a:tr h="579628">
                 <a:tc>
                   <a:txBody>
-                    <a:bodyPr wrap="square"/>
+                    <a:bodyPr/>
                     <a:lstStyle/>
                     <a:p>
                       <a:pPr algn="ctr"/>
@@ -4075,7 +4125,7 @@
                 </a:tc>
                 <a:tc>
                   <a:txBody>
-                    <a:bodyPr wrap="square"/>
+                    <a:bodyPr/>
                     <a:lstStyle/>
                     <a:p>
                       <a:pPr algn="l"/>
@@ -4098,7 +4148,7 @@
                 </a:tc>
                 <a:tc>
                   <a:txBody>
-                    <a:bodyPr wrap="square"/>
+                    <a:bodyPr/>
                     <a:lstStyle/>
                     <a:p>
                       <a:pPr algn="l"/>
@@ -4119,14 +4169,20 @@
                     </a:solidFill>
                   </a:tcPr>
                 </a:tc>
+                <a:extLst>
+                  <a:ext uri="{0D108BD9-81ED-4DB2-BD59-A6C34878D82A}">
+                    <a16:rowId xmlns:a16="http://schemas.microsoft.com/office/drawing/2014/main" val="10003"/>
+                  </a:ext>
+                </a:extLst>
               </a:tr>
               <a:tr h="321818">
                 <a:tc>
                   <a:txBody>
-                    <a:bodyPr wrap="square"/>
-                    <a:lstStyle/>
-                    <a:p>
-                      <a:pPr algn="ctr"/>
+                    <a:bodyPr/>
+                    <a:lstStyle/>
+                    <a:p>
+                      <a:pPr algn="ctr"/>
+                      <a:endParaRPr/>
                     </a:p>
                   </a:txBody>
                   <a:tcPr marL="64008" marR="64008" marT="32004" marB="32004" anchor="ctr">
@@ -4137,7 +4193,7 @@
                 </a:tc>
                 <a:tc>
                   <a:txBody>
-                    <a:bodyPr wrap="square"/>
+                    <a:bodyPr/>
                     <a:lstStyle/>
                     <a:p>
                       <a:pPr algn="l"/>
@@ -4160,7 +4216,7 @@
                 </a:tc>
                 <a:tc>
                   <a:txBody>
-                    <a:bodyPr wrap="square"/>
+                    <a:bodyPr/>
                     <a:lstStyle/>
                     <a:p>
                       <a:pPr algn="l"/>
@@ -4181,11 +4237,16 @@
                     </a:solidFill>
                   </a:tcPr>
                 </a:tc>
+                <a:extLst>
+                  <a:ext uri="{0D108BD9-81ED-4DB2-BD59-A6C34878D82A}">
+                    <a16:rowId xmlns:a16="http://schemas.microsoft.com/office/drawing/2014/main" val="10004"/>
+                  </a:ext>
+                </a:extLst>
               </a:tr>
               <a:tr h="321818">
                 <a:tc>
                   <a:txBody>
-                    <a:bodyPr wrap="square"/>
+                    <a:bodyPr/>
                     <a:lstStyle/>
                     <a:p>
                       <a:pPr algn="ctr"/>
@@ -4217,7 +4278,7 @@
                 </a:tc>
                 <a:tc>
                   <a:txBody>
-                    <a:bodyPr wrap="square"/>
+                    <a:bodyPr/>
                     <a:lstStyle/>
                     <a:p>
                       <a:pPr algn="l"/>
@@ -4240,7 +4301,7 @@
                 </a:tc>
                 <a:tc>
                   <a:txBody>
-                    <a:bodyPr wrap="square"/>
+                    <a:bodyPr/>
                     <a:lstStyle/>
                     <a:p>
                       <a:pPr algn="l"/>
@@ -4261,14 +4322,20 @@
                     </a:solidFill>
                   </a:tcPr>
                 </a:tc>
+                <a:extLst>
+                  <a:ext uri="{0D108BD9-81ED-4DB2-BD59-A6C34878D82A}">
+                    <a16:rowId xmlns:a16="http://schemas.microsoft.com/office/drawing/2014/main" val="10005"/>
+                  </a:ext>
+                </a:extLst>
               </a:tr>
               <a:tr h="321818">
                 <a:tc>
                   <a:txBody>
-                    <a:bodyPr wrap="square"/>
-                    <a:lstStyle/>
-                    <a:p>
-                      <a:pPr algn="ctr"/>
+                    <a:bodyPr/>
+                    <a:lstStyle/>
+                    <a:p>
+                      <a:pPr algn="ctr"/>
+                      <a:endParaRPr/>
                     </a:p>
                   </a:txBody>
                   <a:tcPr marL="64008" marR="64008" marT="32004" marB="32004" anchor="ctr">
@@ -4279,7 +4346,7 @@
                 </a:tc>
                 <a:tc>
                   <a:txBody>
-                    <a:bodyPr wrap="square"/>
+                    <a:bodyPr/>
                     <a:lstStyle/>
                     <a:p>
                       <a:pPr algn="l"/>
@@ -4302,7 +4369,7 @@
                 </a:tc>
                 <a:tc>
                   <a:txBody>
-                    <a:bodyPr wrap="square"/>
+                    <a:bodyPr/>
                     <a:lstStyle/>
                     <a:p>
                       <a:pPr algn="l"/>
@@ -4323,6 +4390,11 @@
                     </a:solidFill>
                   </a:tcPr>
                 </a:tc>
+                <a:extLst>
+                  <a:ext uri="{0D108BD9-81ED-4DB2-BD59-A6C34878D82A}">
+                    <a16:rowId xmlns:a16="http://schemas.microsoft.com/office/drawing/2014/main" val="10006"/>
+                  </a:ext>
+                </a:extLst>
               </a:tr>
             </a:tbl>
           </a:graphicData>
@@ -4345,7 +4417,7 @@
           <a:noFill/>
         </p:spPr>
         <p:txBody>
-          <a:bodyPr wrap="square" lIns="0" rIns="0" tIns="0" bIns="0">
+          <a:bodyPr wrap="square" lIns="0" tIns="0" rIns="0" bIns="0">
             <a:spAutoFit/>
           </a:bodyPr>
           <a:lstStyle/>
@@ -4403,6 +4475,7 @@
           <a:lstStyle/>
           <a:p>
             <a:pPr algn="ctr"/>
+            <a:endParaRPr/>
           </a:p>
         </p:txBody>
       </p:sp>
@@ -4415,7 +4488,7 @@
 </file>
 
 <file path=ppt/slides/slide12.xml><?xml version="1.0" encoding="utf-8"?>
-<p:sld xmlns:a="http://schemas.openxmlformats.org/drawingml/2006/main" xmlns:p="http://schemas.openxmlformats.org/presentationml/2006/main" xmlns:r="http://schemas.openxmlformats.org/officeDocument/2006/relationships">
+<p:sld xmlns:a="http://schemas.openxmlformats.org/drawingml/2006/main" xmlns:r="http://schemas.openxmlformats.org/officeDocument/2006/relationships" xmlns:p="http://schemas.openxmlformats.org/presentationml/2006/main">
   <p:cSld>
     <p:spTree>
       <p:nvGrpSpPr>
@@ -4423,7 +4496,14 @@
         <p:cNvGrpSpPr/>
         <p:nvPr/>
       </p:nvGrpSpPr>
-      <p:grpSpPr/>
+      <p:grpSpPr>
+        <a:xfrm>
+          <a:off x="0" y="0"/>
+          <a:ext cx="0" cy="0"/>
+          <a:chOff x="0" y="0"/>
+          <a:chExt cx="0" cy="0"/>
+        </a:xfrm>
+      </p:grpSpPr>
       <p:sp>
         <p:nvSpPr>
           <p:cNvPr id="2" name="TextBox 1"/>
@@ -4441,7 +4521,7 @@
           <a:noFill/>
         </p:spPr>
         <p:txBody>
-          <a:bodyPr wrap="square" lIns="0" rIns="0" tIns="0" bIns="0">
+          <a:bodyPr wrap="square" lIns="0" tIns="0" rIns="0" bIns="0">
             <a:spAutoFit/>
           </a:bodyPr>
           <a:lstStyle/>
@@ -4475,7 +4555,7 @@
           <a:noFill/>
         </p:spPr>
         <p:txBody>
-          <a:bodyPr wrap="square" lIns="0" rIns="0" tIns="0" bIns="0">
+          <a:bodyPr wrap="square" lIns="0" tIns="0" rIns="0" bIns="0">
             <a:spAutoFit/>
           </a:bodyPr>
           <a:lstStyle/>
@@ -4509,7 +4589,7 @@
           <a:noFill/>
         </p:spPr>
         <p:txBody>
-          <a:bodyPr wrap="square" lIns="0" rIns="0" tIns="0" bIns="0">
+          <a:bodyPr wrap="square" lIns="0" tIns="0" rIns="0" bIns="0">
             <a:spAutoFit/>
           </a:bodyPr>
           <a:lstStyle/>
@@ -4544,7 +4624,7 @@
           <a:noFill/>
         </p:spPr>
         <p:txBody>
-          <a:bodyPr wrap="square" lIns="0" rIns="0" tIns="0" bIns="0">
+          <a:bodyPr wrap="square" lIns="0" tIns="0" rIns="0" bIns="0">
             <a:spAutoFit/>
           </a:bodyPr>
           <a:lstStyle/>
@@ -4580,15 +4660,39 @@
                 <a:tableStyleId>{5C22544A-7EE6-4342-B048-85BDC9FD1C3A}</a:tableStyleId>
               </a:tblPr>
               <a:tblGrid>
-                <a:gridCol w="1163835"/>
-                <a:gridCol w="4433326"/>
-                <a:gridCol w="2750671"/>
-                <a:gridCol w="2710007"/>
+                <a:gridCol w="1163835">
+                  <a:extLst>
+                    <a:ext uri="{9D8B030D-6E8A-4147-A177-3AD203B41FA5}">
+                      <a16:colId xmlns:a16="http://schemas.microsoft.com/office/drawing/2014/main" val="20000"/>
+                    </a:ext>
+                  </a:extLst>
+                </a:gridCol>
+                <a:gridCol w="4433326">
+                  <a:extLst>
+                    <a:ext uri="{9D8B030D-6E8A-4147-A177-3AD203B41FA5}">
+                      <a16:colId xmlns:a16="http://schemas.microsoft.com/office/drawing/2014/main" val="20001"/>
+                    </a:ext>
+                  </a:extLst>
+                </a:gridCol>
+                <a:gridCol w="2750671">
+                  <a:extLst>
+                    <a:ext uri="{9D8B030D-6E8A-4147-A177-3AD203B41FA5}">
+                      <a16:colId xmlns:a16="http://schemas.microsoft.com/office/drawing/2014/main" val="20002"/>
+                    </a:ext>
+                  </a:extLst>
+                </a:gridCol>
+                <a:gridCol w="2710007">
+                  <a:extLst>
+                    <a:ext uri="{9D8B030D-6E8A-4147-A177-3AD203B41FA5}">
+                      <a16:colId xmlns:a16="http://schemas.microsoft.com/office/drawing/2014/main" val="20003"/>
+                    </a:ext>
+                  </a:extLst>
+                </a:gridCol>
               </a:tblGrid>
               <a:tr h="321818">
                 <a:tc>
                   <a:txBody>
-                    <a:bodyPr wrap="square"/>
+                    <a:bodyPr/>
                     <a:lstStyle/>
                     <a:p>
                       <a:pPr algn="ctr"/>
@@ -4611,7 +4715,7 @@
                 </a:tc>
                 <a:tc>
                   <a:txBody>
-                    <a:bodyPr wrap="square"/>
+                    <a:bodyPr/>
                     <a:lstStyle/>
                     <a:p>
                       <a:pPr algn="ctr"/>
@@ -4634,7 +4738,7 @@
                 </a:tc>
                 <a:tc>
                   <a:txBody>
-                    <a:bodyPr wrap="square"/>
+                    <a:bodyPr/>
                     <a:lstStyle/>
                     <a:p>
                       <a:pPr algn="ctr"/>
@@ -4657,7 +4761,7 @@
                 </a:tc>
                 <a:tc>
                   <a:txBody>
-                    <a:bodyPr wrap="square"/>
+                    <a:bodyPr/>
                     <a:lstStyle/>
                     <a:p>
                       <a:pPr algn="ctr"/>
@@ -4678,11 +4782,16 @@
                     </a:solidFill>
                   </a:tcPr>
                 </a:tc>
+                <a:extLst>
+                  <a:ext uri="{0D108BD9-81ED-4DB2-BD59-A6C34878D82A}">
+                    <a16:rowId xmlns:a16="http://schemas.microsoft.com/office/drawing/2014/main" val="10000"/>
+                  </a:ext>
+                </a:extLst>
               </a:tr>
               <a:tr h="579628">
                 <a:tc>
                   <a:txBody>
-                    <a:bodyPr wrap="square"/>
+                    <a:bodyPr/>
                     <a:lstStyle/>
                     <a:p>
                       <a:pPr algn="ctr"/>
@@ -4705,7 +4814,7 @@
                 </a:tc>
                 <a:tc>
                   <a:txBody>
-                    <a:bodyPr wrap="square"/>
+                    <a:bodyPr/>
                     <a:lstStyle/>
                     <a:p>
                       <a:pPr algn="l"/>
@@ -4728,7 +4837,7 @@
                 </a:tc>
                 <a:tc>
                   <a:txBody>
-                    <a:bodyPr wrap="square"/>
+                    <a:bodyPr/>
                     <a:lstStyle/>
                     <a:p>
                       <a:pPr algn="l"/>
@@ -4751,7 +4860,7 @@
                 </a:tc>
                 <a:tc>
                   <a:txBody>
-                    <a:bodyPr wrap="square"/>
+                    <a:bodyPr/>
                     <a:lstStyle/>
                     <a:p>
                       <a:pPr algn="l"/>
@@ -4772,11 +4881,16 @@
                     </a:solidFill>
                   </a:tcPr>
                 </a:tc>
+                <a:extLst>
+                  <a:ext uri="{0D108BD9-81ED-4DB2-BD59-A6C34878D82A}">
+                    <a16:rowId xmlns:a16="http://schemas.microsoft.com/office/drawing/2014/main" val="10001"/>
+                  </a:ext>
+                </a:extLst>
               </a:tr>
               <a:tr h="321818">
                 <a:tc>
                   <a:txBody>
-                    <a:bodyPr wrap="square"/>
+                    <a:bodyPr/>
                     <a:lstStyle/>
                     <a:p>
                       <a:pPr algn="ctr"/>
@@ -4799,7 +4913,7 @@
                 </a:tc>
                 <a:tc>
                   <a:txBody>
-                    <a:bodyPr wrap="square"/>
+                    <a:bodyPr/>
                     <a:lstStyle/>
                     <a:p>
                       <a:pPr algn="l"/>
@@ -4822,7 +4936,7 @@
                 </a:tc>
                 <a:tc>
                   <a:txBody>
-                    <a:bodyPr wrap="square"/>
+                    <a:bodyPr/>
                     <a:lstStyle/>
                     <a:p>
                       <a:pPr algn="l"/>
@@ -4845,7 +4959,7 @@
                 </a:tc>
                 <a:tc>
                   <a:txBody>
-                    <a:bodyPr wrap="square"/>
+                    <a:bodyPr/>
                     <a:lstStyle/>
                     <a:p>
                       <a:pPr algn="l"/>
@@ -4866,11 +4980,16 @@
                     </a:solidFill>
                   </a:tcPr>
                 </a:tc>
+                <a:extLst>
+                  <a:ext uri="{0D108BD9-81ED-4DB2-BD59-A6C34878D82A}">
+                    <a16:rowId xmlns:a16="http://schemas.microsoft.com/office/drawing/2014/main" val="10002"/>
+                  </a:ext>
+                </a:extLst>
               </a:tr>
               <a:tr h="579628">
                 <a:tc>
                   <a:txBody>
-                    <a:bodyPr wrap="square"/>
+                    <a:bodyPr/>
                     <a:lstStyle/>
                     <a:p>
                       <a:pPr algn="ctr"/>
@@ -4893,7 +5012,7 @@
                 </a:tc>
                 <a:tc>
                   <a:txBody>
-                    <a:bodyPr wrap="square"/>
+                    <a:bodyPr/>
                     <a:lstStyle/>
                     <a:p>
                       <a:pPr algn="l"/>
@@ -4916,7 +5035,7 @@
                 </a:tc>
                 <a:tc>
                   <a:txBody>
-                    <a:bodyPr wrap="square"/>
+                    <a:bodyPr/>
                     <a:lstStyle/>
                     <a:p>
                       <a:pPr algn="l"/>
@@ -4939,7 +5058,7 @@
                 </a:tc>
                 <a:tc>
                   <a:txBody>
-                    <a:bodyPr wrap="square"/>
+                    <a:bodyPr/>
                     <a:lstStyle/>
                     <a:p>
                       <a:pPr algn="l"/>
@@ -4960,11 +5079,16 @@
                     </a:solidFill>
                   </a:tcPr>
                 </a:tc>
+                <a:extLst>
+                  <a:ext uri="{0D108BD9-81ED-4DB2-BD59-A6C34878D82A}">
+                    <a16:rowId xmlns:a16="http://schemas.microsoft.com/office/drawing/2014/main" val="10003"/>
+                  </a:ext>
+                </a:extLst>
               </a:tr>
               <a:tr h="579628">
                 <a:tc>
                   <a:txBody>
-                    <a:bodyPr wrap="square"/>
+                    <a:bodyPr/>
                     <a:lstStyle/>
                     <a:p>
                       <a:pPr algn="ctr"/>
@@ -4987,7 +5111,7 @@
                 </a:tc>
                 <a:tc>
                   <a:txBody>
-                    <a:bodyPr wrap="square"/>
+                    <a:bodyPr/>
                     <a:lstStyle/>
                     <a:p>
                       <a:pPr algn="l"/>
@@ -5010,7 +5134,7 @@
                 </a:tc>
                 <a:tc>
                   <a:txBody>
-                    <a:bodyPr wrap="square"/>
+                    <a:bodyPr/>
                     <a:lstStyle/>
                     <a:p>
                       <a:pPr algn="l"/>
@@ -5033,7 +5157,7 @@
                 </a:tc>
                 <a:tc>
                   <a:txBody>
-                    <a:bodyPr wrap="square"/>
+                    <a:bodyPr/>
                     <a:lstStyle/>
                     <a:p>
                       <a:pPr algn="l"/>
@@ -5054,11 +5178,16 @@
                     </a:solidFill>
                   </a:tcPr>
                 </a:tc>
+                <a:extLst>
+                  <a:ext uri="{0D108BD9-81ED-4DB2-BD59-A6C34878D82A}">
+                    <a16:rowId xmlns:a16="http://schemas.microsoft.com/office/drawing/2014/main" val="10004"/>
+                  </a:ext>
+                </a:extLst>
               </a:tr>
               <a:tr h="579628">
                 <a:tc>
                   <a:txBody>
-                    <a:bodyPr wrap="square"/>
+                    <a:bodyPr/>
                     <a:lstStyle/>
                     <a:p>
                       <a:pPr algn="ctr"/>
@@ -5081,7 +5210,7 @@
                 </a:tc>
                 <a:tc>
                   <a:txBody>
-                    <a:bodyPr wrap="square"/>
+                    <a:bodyPr/>
                     <a:lstStyle/>
                     <a:p>
                       <a:pPr algn="l"/>
@@ -5104,7 +5233,7 @@
                 </a:tc>
                 <a:tc>
                   <a:txBody>
-                    <a:bodyPr wrap="square"/>
+                    <a:bodyPr/>
                     <a:lstStyle/>
                     <a:p>
                       <a:pPr algn="l"/>
@@ -5127,7 +5256,7 @@
                 </a:tc>
                 <a:tc>
                   <a:txBody>
-                    <a:bodyPr wrap="square"/>
+                    <a:bodyPr/>
                     <a:lstStyle/>
                     <a:p>
                       <a:pPr algn="l"/>
@@ -5148,6 +5277,11 @@
                     </a:solidFill>
                   </a:tcPr>
                 </a:tc>
+                <a:extLst>
+                  <a:ext uri="{0D108BD9-81ED-4DB2-BD59-A6C34878D82A}">
+                    <a16:rowId xmlns:a16="http://schemas.microsoft.com/office/drawing/2014/main" val="10005"/>
+                  </a:ext>
+                </a:extLst>
               </a:tr>
             </a:tbl>
           </a:graphicData>
@@ -5170,7 +5304,7 @@
           <a:noFill/>
         </p:spPr>
         <p:txBody>
-          <a:bodyPr wrap="square" lIns="0" rIns="0" tIns="0" bIns="0">
+          <a:bodyPr wrap="square" lIns="0" tIns="0" rIns="0" bIns="0">
             <a:spAutoFit/>
           </a:bodyPr>
           <a:lstStyle/>
@@ -5205,7 +5339,7 @@
 </file>
 
 <file path=ppt/slides/slide13.xml><?xml version="1.0" encoding="utf-8"?>
-<p:sld xmlns:a="http://schemas.openxmlformats.org/drawingml/2006/main" xmlns:p="http://schemas.openxmlformats.org/presentationml/2006/main" xmlns:r="http://schemas.openxmlformats.org/officeDocument/2006/relationships">
+<p:sld xmlns:a="http://schemas.openxmlformats.org/drawingml/2006/main" xmlns:r="http://schemas.openxmlformats.org/officeDocument/2006/relationships" xmlns:p="http://schemas.openxmlformats.org/presentationml/2006/main">
   <p:cSld>
     <p:spTree>
       <p:nvGrpSpPr>
@@ -5213,7 +5347,14 @@
         <p:cNvGrpSpPr/>
         <p:nvPr/>
       </p:nvGrpSpPr>
-      <p:grpSpPr/>
+      <p:grpSpPr>
+        <a:xfrm>
+          <a:off x="0" y="0"/>
+          <a:ext cx="0" cy="0"/>
+          <a:chOff x="0" y="0"/>
+          <a:chExt cx="0" cy="0"/>
+        </a:xfrm>
+      </p:grpSpPr>
       <p:sp>
         <p:nvSpPr>
           <p:cNvPr id="2" name="TextBox 1"/>
@@ -5231,7 +5372,7 @@
           <a:noFill/>
         </p:spPr>
         <p:txBody>
-          <a:bodyPr wrap="square" lIns="0" rIns="0" tIns="0" bIns="0">
+          <a:bodyPr wrap="square" lIns="0" tIns="0" rIns="0" bIns="0">
             <a:spAutoFit/>
           </a:bodyPr>
           <a:lstStyle/>
@@ -5265,7 +5406,7 @@
           <a:noFill/>
         </p:spPr>
         <p:txBody>
-          <a:bodyPr wrap="square" lIns="0" rIns="0" tIns="0" bIns="0">
+          <a:bodyPr wrap="square" lIns="0" tIns="0" rIns="0" bIns="0">
             <a:spAutoFit/>
           </a:bodyPr>
           <a:lstStyle/>
@@ -5299,7 +5440,7 @@
           <a:noFill/>
         </p:spPr>
         <p:txBody>
-          <a:bodyPr wrap="square" lIns="0" rIns="0" tIns="0" bIns="0">
+          <a:bodyPr wrap="square" lIns="0" tIns="0" rIns="0" bIns="0">
             <a:spAutoFit/>
           </a:bodyPr>
           <a:lstStyle/>
@@ -5334,7 +5475,7 @@
           <a:noFill/>
         </p:spPr>
         <p:txBody>
-          <a:bodyPr wrap="square" lIns="0" rIns="0" tIns="0" bIns="0">
+          <a:bodyPr wrap="square" lIns="0" tIns="0" rIns="0" bIns="0">
             <a:spAutoFit/>
           </a:bodyPr>
           <a:lstStyle/>
@@ -5370,14 +5511,32 @@
                 <a:tableStyleId>{5C22544A-7EE6-4342-B048-85BDC9FD1C3A}</a:tableStyleId>
               </a:tblPr>
               <a:tblGrid>
-                <a:gridCol w="3395785"/>
-                <a:gridCol w="2539863"/>
-                <a:gridCol w="5122191"/>
+                <a:gridCol w="3395785">
+                  <a:extLst>
+                    <a:ext uri="{9D8B030D-6E8A-4147-A177-3AD203B41FA5}">
+                      <a16:colId xmlns:a16="http://schemas.microsoft.com/office/drawing/2014/main" val="20000"/>
+                    </a:ext>
+                  </a:extLst>
+                </a:gridCol>
+                <a:gridCol w="2539863">
+                  <a:extLst>
+                    <a:ext uri="{9D8B030D-6E8A-4147-A177-3AD203B41FA5}">
+                      <a16:colId xmlns:a16="http://schemas.microsoft.com/office/drawing/2014/main" val="20001"/>
+                    </a:ext>
+                  </a:extLst>
+                </a:gridCol>
+                <a:gridCol w="5122191">
+                  <a:extLst>
+                    <a:ext uri="{9D8B030D-6E8A-4147-A177-3AD203B41FA5}">
+                      <a16:colId xmlns:a16="http://schemas.microsoft.com/office/drawing/2014/main" val="20002"/>
+                    </a:ext>
+                  </a:extLst>
+                </a:gridCol>
               </a:tblGrid>
               <a:tr h="321818">
                 <a:tc>
                   <a:txBody>
-                    <a:bodyPr wrap="square"/>
+                    <a:bodyPr/>
                     <a:lstStyle/>
                     <a:p>
                       <a:pPr algn="ctr"/>
@@ -5400,7 +5559,7 @@
                 </a:tc>
                 <a:tc>
                   <a:txBody>
-                    <a:bodyPr wrap="square"/>
+                    <a:bodyPr/>
                     <a:lstStyle/>
                     <a:p>
                       <a:pPr algn="ctr"/>
@@ -5423,7 +5582,7 @@
                 </a:tc>
                 <a:tc>
                   <a:txBody>
-                    <a:bodyPr wrap="square"/>
+                    <a:bodyPr/>
                     <a:lstStyle/>
                     <a:p>
                       <a:pPr algn="ctr"/>
@@ -5444,11 +5603,16 @@
                     </a:solidFill>
                   </a:tcPr>
                 </a:tc>
+                <a:extLst>
+                  <a:ext uri="{0D108BD9-81ED-4DB2-BD59-A6C34878D82A}">
+                    <a16:rowId xmlns:a16="http://schemas.microsoft.com/office/drawing/2014/main" val="10000"/>
+                  </a:ext>
+                </a:extLst>
               </a:tr>
               <a:tr h="321818">
                 <a:tc>
                   <a:txBody>
-                    <a:bodyPr wrap="square"/>
+                    <a:bodyPr/>
                     <a:lstStyle/>
                     <a:p>
                       <a:pPr algn="l"/>
@@ -5480,7 +5644,7 @@
                 </a:tc>
                 <a:tc>
                   <a:txBody>
-                    <a:bodyPr wrap="square"/>
+                    <a:bodyPr/>
                     <a:lstStyle/>
                     <a:p>
                       <a:pPr algn="l"/>
@@ -5503,7 +5667,7 @@
                 </a:tc>
                 <a:tc>
                   <a:txBody>
-                    <a:bodyPr wrap="square"/>
+                    <a:bodyPr/>
                     <a:lstStyle/>
                     <a:p>
                       <a:pPr algn="l"/>
@@ -5533,11 +5697,16 @@
                     </a:solidFill>
                   </a:tcPr>
                 </a:tc>
+                <a:extLst>
+                  <a:ext uri="{0D108BD9-81ED-4DB2-BD59-A6C34878D82A}">
+                    <a16:rowId xmlns:a16="http://schemas.microsoft.com/office/drawing/2014/main" val="10001"/>
+                  </a:ext>
+                </a:extLst>
               </a:tr>
               <a:tr h="321818">
                 <a:tc>
                   <a:txBody>
-                    <a:bodyPr wrap="square"/>
+                    <a:bodyPr/>
                     <a:lstStyle/>
                     <a:p>
                       <a:pPr algn="l"/>
@@ -5569,7 +5738,7 @@
                 </a:tc>
                 <a:tc>
                   <a:txBody>
-                    <a:bodyPr wrap="square"/>
+                    <a:bodyPr/>
                     <a:lstStyle/>
                     <a:p>
                       <a:pPr algn="l"/>
@@ -5592,7 +5761,7 @@
                 </a:tc>
                 <a:tc>
                   <a:txBody>
-                    <a:bodyPr wrap="square"/>
+                    <a:bodyPr/>
                     <a:lstStyle/>
                     <a:p>
                       <a:pPr algn="l"/>
@@ -5622,14 +5791,20 @@
                     </a:solidFill>
                   </a:tcPr>
                 </a:tc>
+                <a:extLst>
+                  <a:ext uri="{0D108BD9-81ED-4DB2-BD59-A6C34878D82A}">
+                    <a16:rowId xmlns:a16="http://schemas.microsoft.com/office/drawing/2014/main" val="10002"/>
+                  </a:ext>
+                </a:extLst>
               </a:tr>
               <a:tr h="321818">
                 <a:tc>
                   <a:txBody>
-                    <a:bodyPr wrap="square"/>
+                    <a:bodyPr/>
                     <a:lstStyle/>
                     <a:p>
                       <a:pPr algn="l"/>
+                      <a:endParaRPr/>
                     </a:p>
                   </a:txBody>
                   <a:tcPr marL="64008" marR="64008" marT="32004" marB="32004" anchor="ctr">
@@ -5640,7 +5815,7 @@
                 </a:tc>
                 <a:tc>
                   <a:txBody>
-                    <a:bodyPr wrap="square"/>
+                    <a:bodyPr/>
                     <a:lstStyle/>
                     <a:p>
                       <a:pPr algn="l"/>
@@ -5663,7 +5838,7 @@
                 </a:tc>
                 <a:tc>
                   <a:txBody>
-                    <a:bodyPr wrap="square"/>
+                    <a:bodyPr/>
                     <a:lstStyle/>
                     <a:p>
                       <a:pPr algn="l"/>
@@ -5693,14 +5868,20 @@
                     </a:solidFill>
                   </a:tcPr>
                 </a:tc>
+                <a:extLst>
+                  <a:ext uri="{0D108BD9-81ED-4DB2-BD59-A6C34878D82A}">
+                    <a16:rowId xmlns:a16="http://schemas.microsoft.com/office/drawing/2014/main" val="10003"/>
+                  </a:ext>
+                </a:extLst>
               </a:tr>
               <a:tr h="321818">
                 <a:tc>
                   <a:txBody>
-                    <a:bodyPr wrap="square"/>
+                    <a:bodyPr/>
                     <a:lstStyle/>
                     <a:p>
                       <a:pPr algn="l"/>
+                      <a:endParaRPr/>
                     </a:p>
                   </a:txBody>
                   <a:tcPr marL="64008" marR="64008" marT="32004" marB="32004" anchor="ctr">
@@ -5711,7 +5892,7 @@
                 </a:tc>
                 <a:tc>
                   <a:txBody>
-                    <a:bodyPr wrap="square"/>
+                    <a:bodyPr/>
                     <a:lstStyle/>
                     <a:p>
                       <a:pPr algn="l"/>
@@ -5734,7 +5915,7 @@
                 </a:tc>
                 <a:tc>
                   <a:txBody>
-                    <a:bodyPr wrap="square"/>
+                    <a:bodyPr/>
                     <a:lstStyle/>
                     <a:p>
                       <a:pPr algn="l"/>
@@ -5764,11 +5945,16 @@
                     </a:solidFill>
                   </a:tcPr>
                 </a:tc>
+                <a:extLst>
+                  <a:ext uri="{0D108BD9-81ED-4DB2-BD59-A6C34878D82A}">
+                    <a16:rowId xmlns:a16="http://schemas.microsoft.com/office/drawing/2014/main" val="10004"/>
+                  </a:ext>
+                </a:extLst>
               </a:tr>
               <a:tr h="321818">
                 <a:tc>
                   <a:txBody>
-                    <a:bodyPr wrap="square"/>
+                    <a:bodyPr/>
                     <a:lstStyle/>
                     <a:p>
                       <a:pPr algn="l"/>
@@ -5800,7 +5986,7 @@
                 </a:tc>
                 <a:tc>
                   <a:txBody>
-                    <a:bodyPr wrap="square"/>
+                    <a:bodyPr/>
                     <a:lstStyle/>
                     <a:p>
                       <a:pPr algn="l"/>
@@ -5823,7 +6009,7 @@
                 </a:tc>
                 <a:tc>
                   <a:txBody>
-                    <a:bodyPr wrap="square"/>
+                    <a:bodyPr/>
                     <a:lstStyle/>
                     <a:p>
                       <a:pPr algn="l"/>
@@ -5853,11 +6039,16 @@
                     </a:solidFill>
                   </a:tcPr>
                 </a:tc>
+                <a:extLst>
+                  <a:ext uri="{0D108BD9-81ED-4DB2-BD59-A6C34878D82A}">
+                    <a16:rowId xmlns:a16="http://schemas.microsoft.com/office/drawing/2014/main" val="10005"/>
+                  </a:ext>
+                </a:extLst>
               </a:tr>
               <a:tr h="321818">
                 <a:tc>
                   <a:txBody>
-                    <a:bodyPr wrap="square"/>
+                    <a:bodyPr/>
                     <a:lstStyle/>
                     <a:p>
                       <a:pPr algn="l"/>
@@ -5889,7 +6080,7 @@
                 </a:tc>
                 <a:tc>
                   <a:txBody>
-                    <a:bodyPr wrap="square"/>
+                    <a:bodyPr/>
                     <a:lstStyle/>
                     <a:p>
                       <a:pPr algn="l"/>
@@ -5912,7 +6103,7 @@
                 </a:tc>
                 <a:tc>
                   <a:txBody>
-                    <a:bodyPr wrap="square"/>
+                    <a:bodyPr/>
                     <a:lstStyle/>
                     <a:p>
                       <a:pPr algn="l"/>
@@ -5942,14 +6133,20 @@
                     </a:solidFill>
                   </a:tcPr>
                 </a:tc>
+                <a:extLst>
+                  <a:ext uri="{0D108BD9-81ED-4DB2-BD59-A6C34878D82A}">
+                    <a16:rowId xmlns:a16="http://schemas.microsoft.com/office/drawing/2014/main" val="10006"/>
+                  </a:ext>
+                </a:extLst>
               </a:tr>
               <a:tr h="321818">
                 <a:tc>
                   <a:txBody>
-                    <a:bodyPr wrap="square"/>
+                    <a:bodyPr/>
                     <a:lstStyle/>
                     <a:p>
                       <a:pPr algn="l"/>
+                      <a:endParaRPr/>
                     </a:p>
                   </a:txBody>
                   <a:tcPr marL="64008" marR="64008" marT="32004" marB="32004" anchor="ctr">
@@ -5960,7 +6157,7 @@
                 </a:tc>
                 <a:tc>
                   <a:txBody>
-                    <a:bodyPr wrap="square"/>
+                    <a:bodyPr/>
                     <a:lstStyle/>
                     <a:p>
                       <a:pPr algn="l"/>
@@ -5983,7 +6180,7 @@
                 </a:tc>
                 <a:tc>
                   <a:txBody>
-                    <a:bodyPr wrap="square"/>
+                    <a:bodyPr/>
                     <a:lstStyle/>
                     <a:p>
                       <a:pPr algn="l"/>
@@ -6013,6 +6210,11 @@
                     </a:solidFill>
                   </a:tcPr>
                 </a:tc>
+                <a:extLst>
+                  <a:ext uri="{0D108BD9-81ED-4DB2-BD59-A6C34878D82A}">
+                    <a16:rowId xmlns:a16="http://schemas.microsoft.com/office/drawing/2014/main" val="10007"/>
+                  </a:ext>
+                </a:extLst>
               </a:tr>
             </a:tbl>
           </a:graphicData>
@@ -6035,7 +6237,7 @@
           <a:noFill/>
         </p:spPr>
         <p:txBody>
-          <a:bodyPr wrap="square" lIns="0" rIns="0" tIns="0" bIns="0">
+          <a:bodyPr wrap="square" lIns="0" tIns="0" rIns="0" bIns="0">
             <a:spAutoFit/>
           </a:bodyPr>
           <a:lstStyle/>
@@ -6093,6 +6295,7 @@
           <a:lstStyle/>
           <a:p>
             <a:pPr algn="ctr"/>
+            <a:endParaRPr/>
           </a:p>
         </p:txBody>
       </p:sp>
@@ -6105,7 +6308,7 @@
 </file>
 
 <file path=ppt/slides/slide14.xml><?xml version="1.0" encoding="utf-8"?>
-<p:sld xmlns:a="http://schemas.openxmlformats.org/drawingml/2006/main" xmlns:p="http://schemas.openxmlformats.org/presentationml/2006/main" xmlns:r="http://schemas.openxmlformats.org/officeDocument/2006/relationships">
+<p:sld xmlns:a="http://schemas.openxmlformats.org/drawingml/2006/main" xmlns:r="http://schemas.openxmlformats.org/officeDocument/2006/relationships" xmlns:p="http://schemas.openxmlformats.org/presentationml/2006/main">
   <p:cSld>
     <p:spTree>
       <p:nvGrpSpPr>
@@ -6113,7 +6316,14 @@
         <p:cNvGrpSpPr/>
         <p:nvPr/>
       </p:nvGrpSpPr>
-      <p:grpSpPr/>
+      <p:grpSpPr>
+        <a:xfrm>
+          <a:off x="0" y="0"/>
+          <a:ext cx="0" cy="0"/>
+          <a:chOff x="0" y="0"/>
+          <a:chExt cx="0" cy="0"/>
+        </a:xfrm>
+      </p:grpSpPr>
       <p:sp>
         <p:nvSpPr>
           <p:cNvPr id="2" name="TextBox 1"/>
@@ -6131,7 +6341,7 @@
           <a:noFill/>
         </p:spPr>
         <p:txBody>
-          <a:bodyPr wrap="square" lIns="0" rIns="0" tIns="0" bIns="0">
+          <a:bodyPr wrap="square" lIns="0" tIns="0" rIns="0" bIns="0">
             <a:spAutoFit/>
           </a:bodyPr>
           <a:lstStyle/>
@@ -6165,7 +6375,7 @@
           <a:noFill/>
         </p:spPr>
         <p:txBody>
-          <a:bodyPr wrap="square" lIns="0" rIns="0" tIns="0" bIns="0">
+          <a:bodyPr wrap="square" lIns="0" tIns="0" rIns="0" bIns="0">
             <a:spAutoFit/>
           </a:bodyPr>
           <a:lstStyle/>
@@ -6199,7 +6409,7 @@
           <a:noFill/>
         </p:spPr>
         <p:txBody>
-          <a:bodyPr wrap="square" lIns="0" rIns="0" tIns="0" bIns="0">
+          <a:bodyPr wrap="square" lIns="0" tIns="0" rIns="0" bIns="0">
             <a:spAutoFit/>
           </a:bodyPr>
           <a:lstStyle/>
@@ -6234,7 +6444,7 @@
           <a:noFill/>
         </p:spPr>
         <p:txBody>
-          <a:bodyPr wrap="square" lIns="0" rIns="0" tIns="0" bIns="0">
+          <a:bodyPr wrap="square" lIns="0" tIns="0" rIns="0" bIns="0">
             <a:spAutoFit/>
           </a:bodyPr>
           <a:lstStyle/>
@@ -6268,7 +6478,7 @@
           <a:noFill/>
         </p:spPr>
         <p:txBody>
-          <a:bodyPr wrap="square" lIns="0" rIns="0" tIns="0" bIns="0">
+          <a:bodyPr wrap="square" lIns="0" tIns="0" rIns="0" bIns="0">
             <a:spAutoFit/>
           </a:bodyPr>
           <a:lstStyle/>
@@ -6461,7 +6671,7 @@
           <a:noFill/>
         </p:spPr>
         <p:txBody>
-          <a:bodyPr wrap="square" lIns="0" rIns="0" tIns="0" bIns="0">
+          <a:bodyPr wrap="square" lIns="0" tIns="0" rIns="0" bIns="0">
             <a:spAutoFit/>
           </a:bodyPr>
           <a:lstStyle/>
@@ -6519,6 +6729,7 @@
           <a:lstStyle/>
           <a:p>
             <a:pPr algn="ctr"/>
+            <a:endParaRPr/>
           </a:p>
         </p:txBody>
       </p:sp>
@@ -6531,7 +6742,7 @@
 </file>
 
 <file path=ppt/slides/slide15.xml><?xml version="1.0" encoding="utf-8"?>
-<p:sld xmlns:a="http://schemas.openxmlformats.org/drawingml/2006/main" xmlns:p="http://schemas.openxmlformats.org/presentationml/2006/main" xmlns:r="http://schemas.openxmlformats.org/officeDocument/2006/relationships">
+<p:sld xmlns:a="http://schemas.openxmlformats.org/drawingml/2006/main" xmlns:r="http://schemas.openxmlformats.org/officeDocument/2006/relationships" xmlns:p="http://schemas.openxmlformats.org/presentationml/2006/main">
   <p:cSld>
     <p:spTree>
       <p:nvGrpSpPr>
@@ -6539,7 +6750,14 @@
         <p:cNvGrpSpPr/>
         <p:nvPr/>
       </p:nvGrpSpPr>
-      <p:grpSpPr/>
+      <p:grpSpPr>
+        <a:xfrm>
+          <a:off x="0" y="0"/>
+          <a:ext cx="0" cy="0"/>
+          <a:chOff x="0" y="0"/>
+          <a:chExt cx="0" cy="0"/>
+        </a:xfrm>
+      </p:grpSpPr>
       <p:sp>
         <p:nvSpPr>
           <p:cNvPr id="2" name="TextBox 1"/>
@@ -6557,7 +6775,7 @@
           <a:noFill/>
         </p:spPr>
         <p:txBody>
-          <a:bodyPr wrap="square" lIns="0" rIns="0" tIns="0" bIns="0">
+          <a:bodyPr wrap="square" lIns="0" tIns="0" rIns="0" bIns="0">
             <a:spAutoFit/>
           </a:bodyPr>
           <a:lstStyle/>
@@ -6591,7 +6809,7 @@
           <a:noFill/>
         </p:spPr>
         <p:txBody>
-          <a:bodyPr wrap="square" lIns="0" rIns="0" tIns="0" bIns="0">
+          <a:bodyPr wrap="square" lIns="0" tIns="0" rIns="0" bIns="0">
             <a:spAutoFit/>
           </a:bodyPr>
           <a:lstStyle/>
@@ -6625,7 +6843,7 @@
           <a:noFill/>
         </p:spPr>
         <p:txBody>
-          <a:bodyPr wrap="square" lIns="0" rIns="0" tIns="0" bIns="0">
+          <a:bodyPr wrap="square" lIns="0" tIns="0" rIns="0" bIns="0">
             <a:spAutoFit/>
           </a:bodyPr>
           <a:lstStyle/>
@@ -6660,7 +6878,7 @@
           <a:noFill/>
         </p:spPr>
         <p:txBody>
-          <a:bodyPr wrap="square" lIns="0" rIns="0" tIns="0" bIns="0">
+          <a:bodyPr wrap="square" lIns="0" tIns="0" rIns="0" bIns="0">
             <a:spAutoFit/>
           </a:bodyPr>
           <a:lstStyle/>
@@ -6687,7 +6905,7 @@
 </file>
 
 <file path=ppt/slides/slide16.xml><?xml version="1.0" encoding="utf-8"?>
-<p:sld xmlns:a="http://schemas.openxmlformats.org/drawingml/2006/main" xmlns:p="http://schemas.openxmlformats.org/presentationml/2006/main" xmlns:r="http://schemas.openxmlformats.org/officeDocument/2006/relationships">
+<p:sld xmlns:a="http://schemas.openxmlformats.org/drawingml/2006/main" xmlns:r="http://schemas.openxmlformats.org/officeDocument/2006/relationships" xmlns:p="http://schemas.openxmlformats.org/presentationml/2006/main">
   <p:cSld>
     <p:spTree>
       <p:nvGrpSpPr>
@@ -6695,7 +6913,14 @@
         <p:cNvGrpSpPr/>
         <p:nvPr/>
       </p:nvGrpSpPr>
-      <p:grpSpPr/>
+      <p:grpSpPr>
+        <a:xfrm>
+          <a:off x="0" y="0"/>
+          <a:ext cx="0" cy="0"/>
+          <a:chOff x="0" y="0"/>
+          <a:chExt cx="0" cy="0"/>
+        </a:xfrm>
+      </p:grpSpPr>
       <p:sp>
         <p:nvSpPr>
           <p:cNvPr id="2" name="TextBox 1"/>
@@ -6713,7 +6938,7 @@
           <a:noFill/>
         </p:spPr>
         <p:txBody>
-          <a:bodyPr wrap="square" lIns="0" rIns="0" tIns="0" bIns="0">
+          <a:bodyPr wrap="square" lIns="0" tIns="0" rIns="0" bIns="0">
             <a:spAutoFit/>
           </a:bodyPr>
           <a:lstStyle/>
@@ -6747,7 +6972,7 @@
           <a:noFill/>
         </p:spPr>
         <p:txBody>
-          <a:bodyPr wrap="square" lIns="0" rIns="0" tIns="0" bIns="0">
+          <a:bodyPr wrap="square" lIns="0" tIns="0" rIns="0" bIns="0">
             <a:spAutoFit/>
           </a:bodyPr>
           <a:lstStyle/>
@@ -6781,7 +7006,7 @@
           <a:noFill/>
         </p:spPr>
         <p:txBody>
-          <a:bodyPr wrap="square" lIns="0" rIns="0" tIns="0" bIns="0">
+          <a:bodyPr wrap="square" lIns="0" tIns="0" rIns="0" bIns="0">
             <a:spAutoFit/>
           </a:bodyPr>
           <a:lstStyle/>
@@ -6816,7 +7041,7 @@
           <a:noFill/>
         </p:spPr>
         <p:txBody>
-          <a:bodyPr wrap="square" lIns="0" rIns="0" tIns="0" bIns="0">
+          <a:bodyPr wrap="square" lIns="0" tIns="0" rIns="0" bIns="0">
             <a:spAutoFit/>
           </a:bodyPr>
           <a:lstStyle/>
@@ -6852,14 +7077,32 @@
                 <a:tableStyleId>{5C22544A-7EE6-4342-B048-85BDC9FD1C3A}</a:tableStyleId>
               </a:tblPr>
               <a:tblGrid>
-                <a:gridCol w="1888311"/>
-                <a:gridCol w="6971796"/>
-                <a:gridCol w="2197732"/>
+                <a:gridCol w="1888311">
+                  <a:extLst>
+                    <a:ext uri="{9D8B030D-6E8A-4147-A177-3AD203B41FA5}">
+                      <a16:colId xmlns:a16="http://schemas.microsoft.com/office/drawing/2014/main" val="20000"/>
+                    </a:ext>
+                  </a:extLst>
+                </a:gridCol>
+                <a:gridCol w="6971796">
+                  <a:extLst>
+                    <a:ext uri="{9D8B030D-6E8A-4147-A177-3AD203B41FA5}">
+                      <a16:colId xmlns:a16="http://schemas.microsoft.com/office/drawing/2014/main" val="20001"/>
+                    </a:ext>
+                  </a:extLst>
+                </a:gridCol>
+                <a:gridCol w="2197732">
+                  <a:extLst>
+                    <a:ext uri="{9D8B030D-6E8A-4147-A177-3AD203B41FA5}">
+                      <a16:colId xmlns:a16="http://schemas.microsoft.com/office/drawing/2014/main" val="20002"/>
+                    </a:ext>
+                  </a:extLst>
+                </a:gridCol>
               </a:tblGrid>
               <a:tr h="310896">
                 <a:tc>
                   <a:txBody>
-                    <a:bodyPr wrap="square"/>
+                    <a:bodyPr/>
                     <a:lstStyle/>
                     <a:p>
                       <a:pPr algn="ctr"/>
@@ -6882,7 +7125,7 @@
                 </a:tc>
                 <a:tc>
                   <a:txBody>
-                    <a:bodyPr wrap="square"/>
+                    <a:bodyPr/>
                     <a:lstStyle/>
                     <a:p>
                       <a:pPr algn="ctr"/>
@@ -6905,7 +7148,7 @@
                 </a:tc>
                 <a:tc>
                   <a:txBody>
-                    <a:bodyPr wrap="square"/>
+                    <a:bodyPr/>
                     <a:lstStyle/>
                     <a:p>
                       <a:pPr algn="ctr"/>
@@ -6926,11 +7169,16 @@
                     </a:solidFill>
                   </a:tcPr>
                 </a:tc>
+                <a:extLst>
+                  <a:ext uri="{0D108BD9-81ED-4DB2-BD59-A6C34878D82A}">
+                    <a16:rowId xmlns:a16="http://schemas.microsoft.com/office/drawing/2014/main" val="10000"/>
+                  </a:ext>
+                </a:extLst>
               </a:tr>
               <a:tr h="310896">
                 <a:tc>
                   <a:txBody>
-                    <a:bodyPr wrap="square"/>
+                    <a:bodyPr/>
                     <a:lstStyle/>
                     <a:p>
                       <a:pPr algn="ctr"/>
@@ -6953,7 +7201,7 @@
                 </a:tc>
                 <a:tc>
                   <a:txBody>
-                    <a:bodyPr wrap="square"/>
+                    <a:bodyPr/>
                     <a:lstStyle/>
                     <a:p>
                       <a:pPr algn="l"/>
@@ -6976,7 +7224,7 @@
                 </a:tc>
                 <a:tc>
                   <a:txBody>
-                    <a:bodyPr wrap="square"/>
+                    <a:bodyPr/>
                     <a:lstStyle/>
                     <a:p>
                       <a:pPr algn="ctr"/>
@@ -6997,11 +7245,16 @@
                     </a:solidFill>
                   </a:tcPr>
                 </a:tc>
+                <a:extLst>
+                  <a:ext uri="{0D108BD9-81ED-4DB2-BD59-A6C34878D82A}">
+                    <a16:rowId xmlns:a16="http://schemas.microsoft.com/office/drawing/2014/main" val="10001"/>
+                  </a:ext>
+                </a:extLst>
               </a:tr>
               <a:tr h="310896">
                 <a:tc>
                   <a:txBody>
-                    <a:bodyPr wrap="square"/>
+                    <a:bodyPr/>
                     <a:lstStyle/>
                     <a:p>
                       <a:pPr algn="ctr"/>
@@ -7024,7 +7277,7 @@
                 </a:tc>
                 <a:tc>
                   <a:txBody>
-                    <a:bodyPr wrap="square"/>
+                    <a:bodyPr/>
                     <a:lstStyle/>
                     <a:p>
                       <a:pPr algn="l"/>
@@ -7047,7 +7300,7 @@
                 </a:tc>
                 <a:tc>
                   <a:txBody>
-                    <a:bodyPr wrap="square"/>
+                    <a:bodyPr/>
                     <a:lstStyle/>
                     <a:p>
                       <a:pPr algn="ctr"/>
@@ -7068,11 +7321,16 @@
                     </a:solidFill>
                   </a:tcPr>
                 </a:tc>
+                <a:extLst>
+                  <a:ext uri="{0D108BD9-81ED-4DB2-BD59-A6C34878D82A}">
+                    <a16:rowId xmlns:a16="http://schemas.microsoft.com/office/drawing/2014/main" val="10002"/>
+                  </a:ext>
+                </a:extLst>
               </a:tr>
               <a:tr h="310896">
                 <a:tc>
                   <a:txBody>
-                    <a:bodyPr wrap="square"/>
+                    <a:bodyPr/>
                     <a:lstStyle/>
                     <a:p>
                       <a:pPr algn="ctr"/>
@@ -7095,7 +7353,7 @@
                 </a:tc>
                 <a:tc>
                   <a:txBody>
-                    <a:bodyPr wrap="square"/>
+                    <a:bodyPr/>
                     <a:lstStyle/>
                     <a:p>
                       <a:pPr algn="l"/>
@@ -7118,7 +7376,7 @@
                 </a:tc>
                 <a:tc>
                   <a:txBody>
-                    <a:bodyPr wrap="square"/>
+                    <a:bodyPr/>
                     <a:lstStyle/>
                     <a:p>
                       <a:pPr algn="ctr"/>
@@ -7139,11 +7397,16 @@
                     </a:solidFill>
                   </a:tcPr>
                 </a:tc>
+                <a:extLst>
+                  <a:ext uri="{0D108BD9-81ED-4DB2-BD59-A6C34878D82A}">
+                    <a16:rowId xmlns:a16="http://schemas.microsoft.com/office/drawing/2014/main" val="10003"/>
+                  </a:ext>
+                </a:extLst>
               </a:tr>
               <a:tr h="310896">
                 <a:tc>
                   <a:txBody>
-                    <a:bodyPr wrap="square"/>
+                    <a:bodyPr/>
                     <a:lstStyle/>
                     <a:p>
                       <a:pPr algn="ctr"/>
@@ -7166,7 +7429,7 @@
                 </a:tc>
                 <a:tc>
                   <a:txBody>
-                    <a:bodyPr wrap="square"/>
+                    <a:bodyPr/>
                     <a:lstStyle/>
                     <a:p>
                       <a:pPr algn="l"/>
@@ -7189,7 +7452,7 @@
                 </a:tc>
                 <a:tc>
                   <a:txBody>
-                    <a:bodyPr wrap="square"/>
+                    <a:bodyPr/>
                     <a:lstStyle/>
                     <a:p>
                       <a:pPr algn="ctr"/>
@@ -7210,11 +7473,16 @@
                     </a:solidFill>
                   </a:tcPr>
                 </a:tc>
+                <a:extLst>
+                  <a:ext uri="{0D108BD9-81ED-4DB2-BD59-A6C34878D82A}">
+                    <a16:rowId xmlns:a16="http://schemas.microsoft.com/office/drawing/2014/main" val="10004"/>
+                  </a:ext>
+                </a:extLst>
               </a:tr>
               <a:tr h="310896">
                 <a:tc>
                   <a:txBody>
-                    <a:bodyPr wrap="square"/>
+                    <a:bodyPr/>
                     <a:lstStyle/>
                     <a:p>
                       <a:pPr algn="ctr"/>
@@ -7237,7 +7505,7 @@
                 </a:tc>
                 <a:tc>
                   <a:txBody>
-                    <a:bodyPr wrap="square"/>
+                    <a:bodyPr/>
                     <a:lstStyle/>
                     <a:p>
                       <a:pPr algn="l"/>
@@ -7260,7 +7528,7 @@
                 </a:tc>
                 <a:tc>
                   <a:txBody>
-                    <a:bodyPr wrap="square"/>
+                    <a:bodyPr/>
                     <a:lstStyle/>
                     <a:p>
                       <a:pPr algn="ctr"/>
@@ -7281,6 +7549,11 @@
                     </a:solidFill>
                   </a:tcPr>
                 </a:tc>
+                <a:extLst>
+                  <a:ext uri="{0D108BD9-81ED-4DB2-BD59-A6C34878D82A}">
+                    <a16:rowId xmlns:a16="http://schemas.microsoft.com/office/drawing/2014/main" val="10005"/>
+                  </a:ext>
+                </a:extLst>
               </a:tr>
             </a:tbl>
           </a:graphicData>
@@ -7303,7 +7576,7 @@
           <a:noFill/>
         </p:spPr>
         <p:txBody>
-          <a:bodyPr wrap="square" lIns="0" rIns="0" tIns="0" bIns="0">
+          <a:bodyPr wrap="square" lIns="0" tIns="0" rIns="0" bIns="0">
             <a:spAutoFit/>
           </a:bodyPr>
           <a:lstStyle/>
@@ -7337,7 +7610,7 @@
           <a:noFill/>
         </p:spPr>
         <p:txBody>
-          <a:bodyPr wrap="square" lIns="0" rIns="0" tIns="0" bIns="0">
+          <a:bodyPr wrap="square" lIns="0" tIns="0" rIns="0" bIns="0">
             <a:spAutoFit/>
           </a:bodyPr>
           <a:lstStyle/>
@@ -7414,6 +7687,7 @@
           <a:lstStyle/>
           <a:p>
             <a:pPr algn="ctr"/>
+            <a:endParaRPr/>
           </a:p>
         </p:txBody>
       </p:sp>
@@ -7434,7 +7708,7 @@
           <a:noFill/>
         </p:spPr>
         <p:txBody>
-          <a:bodyPr wrap="square" lIns="0" rIns="0" tIns="0" bIns="0">
+          <a:bodyPr wrap="square" lIns="0" tIns="0" rIns="0" bIns="0">
             <a:spAutoFit/>
           </a:bodyPr>
           <a:lstStyle/>
@@ -7477,7 +7751,7 @@
           <a:noFill/>
         </p:spPr>
         <p:txBody>
-          <a:bodyPr wrap="square" lIns="0" rIns="0" tIns="0" bIns="0">
+          <a:bodyPr wrap="square" lIns="0" tIns="0" rIns="0" bIns="0">
             <a:spAutoFit/>
           </a:bodyPr>
           <a:lstStyle/>
@@ -7554,6 +7828,7 @@
           <a:lstStyle/>
           <a:p>
             <a:pPr algn="ctr"/>
+            <a:endParaRPr/>
           </a:p>
         </p:txBody>
       </p:sp>
@@ -7566,7 +7841,7 @@
 </file>
 
 <file path=ppt/slides/slide17.xml><?xml version="1.0" encoding="utf-8"?>
-<p:sld xmlns:a="http://schemas.openxmlformats.org/drawingml/2006/main" xmlns:p="http://schemas.openxmlformats.org/presentationml/2006/main" xmlns:r="http://schemas.openxmlformats.org/officeDocument/2006/relationships">
+<p:sld xmlns:a="http://schemas.openxmlformats.org/drawingml/2006/main" xmlns:r="http://schemas.openxmlformats.org/officeDocument/2006/relationships" xmlns:p="http://schemas.openxmlformats.org/presentationml/2006/main">
   <p:cSld>
     <p:spTree>
       <p:nvGrpSpPr>
@@ -7574,7 +7849,14 @@
         <p:cNvGrpSpPr/>
         <p:nvPr/>
       </p:nvGrpSpPr>
-      <p:grpSpPr/>
+      <p:grpSpPr>
+        <a:xfrm>
+          <a:off x="0" y="0"/>
+          <a:ext cx="0" cy="0"/>
+          <a:chOff x="0" y="0"/>
+          <a:chExt cx="0" cy="0"/>
+        </a:xfrm>
+      </p:grpSpPr>
       <p:sp>
         <p:nvSpPr>
           <p:cNvPr id="2" name="TextBox 1"/>
@@ -7592,7 +7874,7 @@
           <a:noFill/>
         </p:spPr>
         <p:txBody>
-          <a:bodyPr wrap="square" lIns="0" rIns="0" tIns="0" bIns="0">
+          <a:bodyPr wrap="square" lIns="0" tIns="0" rIns="0" bIns="0">
             <a:spAutoFit/>
           </a:bodyPr>
           <a:lstStyle/>
@@ -7626,7 +7908,7 @@
           <a:noFill/>
         </p:spPr>
         <p:txBody>
-          <a:bodyPr wrap="square" lIns="0" rIns="0" tIns="0" bIns="0">
+          <a:bodyPr wrap="square" lIns="0" tIns="0" rIns="0" bIns="0">
             <a:spAutoFit/>
           </a:bodyPr>
           <a:lstStyle/>
@@ -7660,7 +7942,7 @@
           <a:noFill/>
         </p:spPr>
         <p:txBody>
-          <a:bodyPr wrap="square" lIns="0" rIns="0" tIns="0" bIns="0">
+          <a:bodyPr wrap="square" lIns="0" tIns="0" rIns="0" bIns="0">
             <a:spAutoFit/>
           </a:bodyPr>
           <a:lstStyle/>
@@ -7695,7 +7977,7 @@
           <a:noFill/>
         </p:spPr>
         <p:txBody>
-          <a:bodyPr wrap="square" lIns="0" rIns="0" tIns="0" bIns="0">
+          <a:bodyPr wrap="square" lIns="0" tIns="0" rIns="0" bIns="0">
             <a:spAutoFit/>
           </a:bodyPr>
           <a:lstStyle/>
@@ -7729,7 +8011,7 @@
           <a:noFill/>
         </p:spPr>
         <p:txBody>
-          <a:bodyPr wrap="square" lIns="0" rIns="0" tIns="0" bIns="0">
+          <a:bodyPr wrap="square" lIns="0" tIns="0" rIns="0" bIns="0">
             <a:spAutoFit/>
           </a:bodyPr>
           <a:lstStyle/>
@@ -7772,7 +8054,7 @@
           <a:noFill/>
         </p:spPr>
         <p:txBody>
-          <a:bodyPr wrap="square" lIns="0" rIns="0" tIns="0" bIns="0">
+          <a:bodyPr wrap="square" lIns="0" tIns="0" rIns="0" bIns="0">
             <a:spAutoFit/>
           </a:bodyPr>
           <a:lstStyle/>
@@ -8011,7 +8293,7 @@
           <a:noFill/>
         </p:spPr>
         <p:txBody>
-          <a:bodyPr wrap="square" lIns="0" rIns="0" tIns="0" bIns="0">
+          <a:bodyPr wrap="square" lIns="0" tIns="0" rIns="0" bIns="0">
             <a:spAutoFit/>
           </a:bodyPr>
           <a:lstStyle/>
@@ -8045,7 +8327,7 @@
           <a:noFill/>
         </p:spPr>
         <p:txBody>
-          <a:bodyPr wrap="square" lIns="0" rIns="0" tIns="0" bIns="0">
+          <a:bodyPr wrap="square" lIns="0" tIns="0" rIns="0" bIns="0">
             <a:spAutoFit/>
           </a:bodyPr>
           <a:lstStyle/>
@@ -8164,7 +8446,7 @@
 </file>
 
 <file path=ppt/slides/slide18.xml><?xml version="1.0" encoding="utf-8"?>
-<p:sld xmlns:a="http://schemas.openxmlformats.org/drawingml/2006/main" xmlns:p="http://schemas.openxmlformats.org/presentationml/2006/main" xmlns:r="http://schemas.openxmlformats.org/officeDocument/2006/relationships">
+<p:sld xmlns:a="http://schemas.openxmlformats.org/drawingml/2006/main" xmlns:r="http://schemas.openxmlformats.org/officeDocument/2006/relationships" xmlns:p="http://schemas.openxmlformats.org/presentationml/2006/main">
   <p:cSld>
     <p:spTree>
       <p:nvGrpSpPr>
@@ -8172,7 +8454,14 @@
         <p:cNvGrpSpPr/>
         <p:nvPr/>
       </p:nvGrpSpPr>
-      <p:grpSpPr/>
+      <p:grpSpPr>
+        <a:xfrm>
+          <a:off x="0" y="0"/>
+          <a:ext cx="0" cy="0"/>
+          <a:chOff x="0" y="0"/>
+          <a:chExt cx="0" cy="0"/>
+        </a:xfrm>
+      </p:grpSpPr>
       <p:sp>
         <p:nvSpPr>
           <p:cNvPr id="2" name="TextBox 1"/>
@@ -8190,7 +8479,7 @@
           <a:noFill/>
         </p:spPr>
         <p:txBody>
-          <a:bodyPr wrap="square" lIns="0" rIns="0" tIns="0" bIns="0">
+          <a:bodyPr wrap="square" lIns="0" tIns="0" rIns="0" bIns="0">
             <a:spAutoFit/>
           </a:bodyPr>
           <a:lstStyle/>
@@ -8224,7 +8513,7 @@
           <a:noFill/>
         </p:spPr>
         <p:txBody>
-          <a:bodyPr wrap="square" lIns="0" rIns="0" tIns="0" bIns="0">
+          <a:bodyPr wrap="square" lIns="0" tIns="0" rIns="0" bIns="0">
             <a:spAutoFit/>
           </a:bodyPr>
           <a:lstStyle/>
@@ -8258,7 +8547,7 @@
           <a:noFill/>
         </p:spPr>
         <p:txBody>
-          <a:bodyPr wrap="square" lIns="0" rIns="0" tIns="0" bIns="0">
+          <a:bodyPr wrap="square" lIns="0" tIns="0" rIns="0" bIns="0">
             <a:spAutoFit/>
           </a:bodyPr>
           <a:lstStyle/>
@@ -8293,7 +8582,7 @@
           <a:noFill/>
         </p:spPr>
         <p:txBody>
-          <a:bodyPr wrap="square" lIns="0" rIns="0" tIns="0" bIns="0">
+          <a:bodyPr wrap="square" lIns="0" tIns="0" rIns="0" bIns="0">
             <a:spAutoFit/>
           </a:bodyPr>
           <a:lstStyle/>
@@ -8329,14 +8618,32 @@
                 <a:tableStyleId>{5C22544A-7EE6-4342-B048-85BDC9FD1C3A}</a:tableStyleId>
               </a:tblPr>
               <a:tblGrid>
-                <a:gridCol w="1386689"/>
-                <a:gridCol w="4093409"/>
-                <a:gridCol w="5577741"/>
+                <a:gridCol w="1386689">
+                  <a:extLst>
+                    <a:ext uri="{9D8B030D-6E8A-4147-A177-3AD203B41FA5}">
+                      <a16:colId xmlns:a16="http://schemas.microsoft.com/office/drawing/2014/main" val="20000"/>
+                    </a:ext>
+                  </a:extLst>
+                </a:gridCol>
+                <a:gridCol w="4093409">
+                  <a:extLst>
+                    <a:ext uri="{9D8B030D-6E8A-4147-A177-3AD203B41FA5}">
+                      <a16:colId xmlns:a16="http://schemas.microsoft.com/office/drawing/2014/main" val="20001"/>
+                    </a:ext>
+                  </a:extLst>
+                </a:gridCol>
+                <a:gridCol w="5577741">
+                  <a:extLst>
+                    <a:ext uri="{9D8B030D-6E8A-4147-A177-3AD203B41FA5}">
+                      <a16:colId xmlns:a16="http://schemas.microsoft.com/office/drawing/2014/main" val="20002"/>
+                    </a:ext>
+                  </a:extLst>
+                </a:gridCol>
               </a:tblGrid>
               <a:tr h="321818">
                 <a:tc>
                   <a:txBody>
-                    <a:bodyPr wrap="square"/>
+                    <a:bodyPr/>
                     <a:lstStyle/>
                     <a:p>
                       <a:pPr algn="ctr"/>
@@ -8359,7 +8666,7 @@
                 </a:tc>
                 <a:tc>
                   <a:txBody>
-                    <a:bodyPr wrap="square"/>
+                    <a:bodyPr/>
                     <a:lstStyle/>
                     <a:p>
                       <a:pPr algn="ctr"/>
@@ -8382,7 +8689,7 @@
                 </a:tc>
                 <a:tc>
                   <a:txBody>
-                    <a:bodyPr wrap="square"/>
+                    <a:bodyPr/>
                     <a:lstStyle/>
                     <a:p>
                       <a:pPr algn="ctr"/>
@@ -8403,11 +8710,16 @@
                     </a:solidFill>
                   </a:tcPr>
                 </a:tc>
+                <a:extLst>
+                  <a:ext uri="{0D108BD9-81ED-4DB2-BD59-A6C34878D82A}">
+                    <a16:rowId xmlns:a16="http://schemas.microsoft.com/office/drawing/2014/main" val="10000"/>
+                  </a:ext>
+                </a:extLst>
               </a:tr>
               <a:tr h="321818">
                 <a:tc>
                   <a:txBody>
-                    <a:bodyPr wrap="square"/>
+                    <a:bodyPr/>
                     <a:lstStyle/>
                     <a:p>
                       <a:pPr algn="ctr"/>
@@ -8430,7 +8742,7 @@
                 </a:tc>
                 <a:tc>
                   <a:txBody>
-                    <a:bodyPr wrap="square"/>
+                    <a:bodyPr/>
                     <a:lstStyle/>
                     <a:p>
                       <a:pPr algn="l"/>
@@ -8492,7 +8804,7 @@
                 </a:tc>
                 <a:tc>
                   <a:txBody>
-                    <a:bodyPr wrap="square"/>
+                    <a:bodyPr/>
                     <a:lstStyle/>
                     <a:p>
                       <a:pPr algn="l"/>
@@ -8533,11 +8845,16 @@
                     </a:solidFill>
                   </a:tcPr>
                 </a:tc>
+                <a:extLst>
+                  <a:ext uri="{0D108BD9-81ED-4DB2-BD59-A6C34878D82A}">
+                    <a16:rowId xmlns:a16="http://schemas.microsoft.com/office/drawing/2014/main" val="10001"/>
+                  </a:ext>
+                </a:extLst>
               </a:tr>
               <a:tr h="321818">
                 <a:tc>
                   <a:txBody>
-                    <a:bodyPr wrap="square"/>
+                    <a:bodyPr/>
                     <a:lstStyle/>
                     <a:p>
                       <a:pPr algn="ctr"/>
@@ -8560,7 +8877,7 @@
                 </a:tc>
                 <a:tc>
                   <a:txBody>
-                    <a:bodyPr wrap="square"/>
+                    <a:bodyPr/>
                     <a:lstStyle/>
                     <a:p>
                       <a:pPr algn="l"/>
@@ -8622,7 +8939,7 @@
                 </a:tc>
                 <a:tc>
                   <a:txBody>
-                    <a:bodyPr wrap="square"/>
+                    <a:bodyPr/>
                     <a:lstStyle/>
                     <a:p>
                       <a:pPr algn="l"/>
@@ -8663,6 +8980,11 @@
                     </a:solidFill>
                   </a:tcPr>
                 </a:tc>
+                <a:extLst>
+                  <a:ext uri="{0D108BD9-81ED-4DB2-BD59-A6C34878D82A}">
+                    <a16:rowId xmlns:a16="http://schemas.microsoft.com/office/drawing/2014/main" val="10002"/>
+                  </a:ext>
+                </a:extLst>
               </a:tr>
             </a:tbl>
           </a:graphicData>
@@ -8685,7 +9007,7 @@
           <a:noFill/>
         </p:spPr>
         <p:txBody>
-          <a:bodyPr wrap="square" lIns="0" rIns="0" tIns="0" bIns="0">
+          <a:bodyPr wrap="square" lIns="0" tIns="0" rIns="0" bIns="0">
             <a:spAutoFit/>
           </a:bodyPr>
           <a:lstStyle/>
@@ -8743,6 +9065,7 @@
           <a:lstStyle/>
           <a:p>
             <a:pPr algn="ctr"/>
+            <a:endParaRPr/>
           </a:p>
         </p:txBody>
       </p:sp>
@@ -8755,7 +9078,7 @@
 </file>
 
 <file path=ppt/slides/slide19.xml><?xml version="1.0" encoding="utf-8"?>
-<p:sld xmlns:a="http://schemas.openxmlformats.org/drawingml/2006/main" xmlns:p="http://schemas.openxmlformats.org/presentationml/2006/main" xmlns:r="http://schemas.openxmlformats.org/officeDocument/2006/relationships">
+<p:sld xmlns:a="http://schemas.openxmlformats.org/drawingml/2006/main" xmlns:r="http://schemas.openxmlformats.org/officeDocument/2006/relationships" xmlns:p="http://schemas.openxmlformats.org/presentationml/2006/main">
   <p:cSld>
     <p:spTree>
       <p:nvGrpSpPr>
@@ -8763,7 +9086,14 @@
         <p:cNvGrpSpPr/>
         <p:nvPr/>
       </p:nvGrpSpPr>
-      <p:grpSpPr/>
+      <p:grpSpPr>
+        <a:xfrm>
+          <a:off x="0" y="0"/>
+          <a:ext cx="0" cy="0"/>
+          <a:chOff x="0" y="0"/>
+          <a:chExt cx="0" cy="0"/>
+        </a:xfrm>
+      </p:grpSpPr>
       <p:sp>
         <p:nvSpPr>
           <p:cNvPr id="2" name="TextBox 1"/>
@@ -8781,7 +9111,7 @@
           <a:noFill/>
         </p:spPr>
         <p:txBody>
-          <a:bodyPr wrap="square" lIns="0" rIns="0" tIns="0" bIns="0">
+          <a:bodyPr wrap="square" lIns="0" tIns="0" rIns="0" bIns="0">
             <a:spAutoFit/>
           </a:bodyPr>
           <a:lstStyle/>
@@ -8815,7 +9145,7 @@
           <a:noFill/>
         </p:spPr>
         <p:txBody>
-          <a:bodyPr wrap="square" lIns="0" rIns="0" tIns="0" bIns="0">
+          <a:bodyPr wrap="square" lIns="0" tIns="0" rIns="0" bIns="0">
             <a:spAutoFit/>
           </a:bodyPr>
           <a:lstStyle/>
@@ -8849,7 +9179,7 @@
           <a:noFill/>
         </p:spPr>
         <p:txBody>
-          <a:bodyPr wrap="square" lIns="0" rIns="0" tIns="0" bIns="0">
+          <a:bodyPr wrap="square" lIns="0" tIns="0" rIns="0" bIns="0">
             <a:spAutoFit/>
           </a:bodyPr>
           <a:lstStyle/>
@@ -8884,7 +9214,7 @@
           <a:noFill/>
         </p:spPr>
         <p:txBody>
-          <a:bodyPr wrap="square" lIns="0" rIns="0" tIns="0" bIns="0">
+          <a:bodyPr wrap="square" lIns="0" tIns="0" rIns="0" bIns="0">
             <a:spAutoFit/>
           </a:bodyPr>
           <a:lstStyle/>
@@ -8920,14 +9250,32 @@
                 <a:tableStyleId>{5C22544A-7EE6-4342-B048-85BDC9FD1C3A}</a:tableStyleId>
               </a:tblPr>
               <a:tblGrid>
-                <a:gridCol w="1349041"/>
-                <a:gridCol w="5149683"/>
-                <a:gridCol w="4559115"/>
+                <a:gridCol w="1349041">
+                  <a:extLst>
+                    <a:ext uri="{9D8B030D-6E8A-4147-A177-3AD203B41FA5}">
+                      <a16:colId xmlns:a16="http://schemas.microsoft.com/office/drawing/2014/main" val="20000"/>
+                    </a:ext>
+                  </a:extLst>
+                </a:gridCol>
+                <a:gridCol w="5149683">
+                  <a:extLst>
+                    <a:ext uri="{9D8B030D-6E8A-4147-A177-3AD203B41FA5}">
+                      <a16:colId xmlns:a16="http://schemas.microsoft.com/office/drawing/2014/main" val="20001"/>
+                    </a:ext>
+                  </a:extLst>
+                </a:gridCol>
+                <a:gridCol w="4559115">
+                  <a:extLst>
+                    <a:ext uri="{9D8B030D-6E8A-4147-A177-3AD203B41FA5}">
+                      <a16:colId xmlns:a16="http://schemas.microsoft.com/office/drawing/2014/main" val="20002"/>
+                    </a:ext>
+                  </a:extLst>
+                </a:gridCol>
               </a:tblGrid>
               <a:tr h="321818">
                 <a:tc>
                   <a:txBody>
-                    <a:bodyPr wrap="square"/>
+                    <a:bodyPr/>
                     <a:lstStyle/>
                     <a:p>
                       <a:pPr algn="ctr"/>
@@ -8950,7 +9298,7 @@
                 </a:tc>
                 <a:tc>
                   <a:txBody>
-                    <a:bodyPr wrap="square"/>
+                    <a:bodyPr/>
                     <a:lstStyle/>
                     <a:p>
                       <a:pPr algn="ctr"/>
@@ -8973,7 +9321,7 @@
                 </a:tc>
                 <a:tc>
                   <a:txBody>
-                    <a:bodyPr wrap="square"/>
+                    <a:bodyPr/>
                     <a:lstStyle/>
                     <a:p>
                       <a:pPr algn="ctr"/>
@@ -8994,11 +9342,16 @@
                     </a:solidFill>
                   </a:tcPr>
                 </a:tc>
+                <a:extLst>
+                  <a:ext uri="{0D108BD9-81ED-4DB2-BD59-A6C34878D82A}">
+                    <a16:rowId xmlns:a16="http://schemas.microsoft.com/office/drawing/2014/main" val="10000"/>
+                  </a:ext>
+                </a:extLst>
               </a:tr>
               <a:tr h="321818">
                 <a:tc>
                   <a:txBody>
-                    <a:bodyPr wrap="square"/>
+                    <a:bodyPr/>
                     <a:lstStyle/>
                     <a:p>
                       <a:pPr algn="ctr"/>
@@ -9021,7 +9374,7 @@
                 </a:tc>
                 <a:tc>
                   <a:txBody>
-                    <a:bodyPr wrap="square"/>
+                    <a:bodyPr/>
                     <a:lstStyle/>
                     <a:p>
                       <a:pPr algn="l"/>
@@ -9064,7 +9417,7 @@
                 </a:tc>
                 <a:tc>
                   <a:txBody>
-                    <a:bodyPr wrap="square"/>
+                    <a:bodyPr/>
                     <a:lstStyle/>
                     <a:p>
                       <a:pPr algn="l"/>
@@ -9105,11 +9458,16 @@
                     </a:solidFill>
                   </a:tcPr>
                 </a:tc>
+                <a:extLst>
+                  <a:ext uri="{0D108BD9-81ED-4DB2-BD59-A6C34878D82A}">
+                    <a16:rowId xmlns:a16="http://schemas.microsoft.com/office/drawing/2014/main" val="10001"/>
+                  </a:ext>
+                </a:extLst>
               </a:tr>
               <a:tr h="321818">
                 <a:tc>
                   <a:txBody>
-                    <a:bodyPr wrap="square"/>
+                    <a:bodyPr/>
                     <a:lstStyle/>
                     <a:p>
                       <a:pPr algn="ctr"/>
@@ -9132,7 +9490,7 @@
                 </a:tc>
                 <a:tc>
                   <a:txBody>
-                    <a:bodyPr wrap="square"/>
+                    <a:bodyPr/>
                     <a:lstStyle/>
                     <a:p>
                       <a:pPr algn="l"/>
@@ -9194,7 +9552,7 @@
                 </a:tc>
                 <a:tc>
                   <a:txBody>
-                    <a:bodyPr wrap="square"/>
+                    <a:bodyPr/>
                     <a:lstStyle/>
                     <a:p>
                       <a:pPr algn="l"/>
@@ -9235,6 +9593,11 @@
                     </a:solidFill>
                   </a:tcPr>
                 </a:tc>
+                <a:extLst>
+                  <a:ext uri="{0D108BD9-81ED-4DB2-BD59-A6C34878D82A}">
+                    <a16:rowId xmlns:a16="http://schemas.microsoft.com/office/drawing/2014/main" val="10002"/>
+                  </a:ext>
+                </a:extLst>
               </a:tr>
             </a:tbl>
           </a:graphicData>
@@ -9257,7 +9620,7 @@
           <a:noFill/>
         </p:spPr>
         <p:txBody>
-          <a:bodyPr wrap="square" lIns="0" rIns="0" tIns="0" bIns="0">
+          <a:bodyPr wrap="square" lIns="0" tIns="0" rIns="0" bIns="0">
             <a:spAutoFit/>
           </a:bodyPr>
           <a:lstStyle/>
@@ -9315,6 +9678,7 @@
           <a:lstStyle/>
           <a:p>
             <a:pPr algn="ctr"/>
+            <a:endParaRPr/>
           </a:p>
         </p:txBody>
       </p:sp>
@@ -9327,7 +9691,7 @@
 </file>
 
 <file path=ppt/slides/slide2.xml><?xml version="1.0" encoding="utf-8"?>
-<p:sld xmlns:a="http://schemas.openxmlformats.org/drawingml/2006/main" xmlns:p="http://schemas.openxmlformats.org/presentationml/2006/main" xmlns:r="http://schemas.openxmlformats.org/officeDocument/2006/relationships">
+<p:sld xmlns:a="http://schemas.openxmlformats.org/drawingml/2006/main" xmlns:r="http://schemas.openxmlformats.org/officeDocument/2006/relationships" xmlns:p="http://schemas.openxmlformats.org/presentationml/2006/main">
   <p:cSld>
     <p:spTree>
       <p:nvGrpSpPr>
@@ -9335,7 +9699,14 @@
         <p:cNvGrpSpPr/>
         <p:nvPr/>
       </p:nvGrpSpPr>
-      <p:grpSpPr/>
+      <p:grpSpPr>
+        <a:xfrm>
+          <a:off x="0" y="0"/>
+          <a:ext cx="0" cy="0"/>
+          <a:chOff x="0" y="0"/>
+          <a:chExt cx="0" cy="0"/>
+        </a:xfrm>
+      </p:grpSpPr>
       <p:sp>
         <p:nvSpPr>
           <p:cNvPr id="2" name="TextBox 1"/>
@@ -9353,7 +9724,7 @@
           <a:noFill/>
         </p:spPr>
         <p:txBody>
-          <a:bodyPr wrap="square" lIns="0" rIns="0" tIns="0" bIns="0">
+          <a:bodyPr wrap="square" lIns="0" tIns="0" rIns="0" bIns="0">
             <a:spAutoFit/>
           </a:bodyPr>
           <a:lstStyle/>
@@ -9387,7 +9758,7 @@
           <a:noFill/>
         </p:spPr>
         <p:txBody>
-          <a:bodyPr wrap="square" lIns="0" rIns="0" tIns="0" bIns="0">
+          <a:bodyPr wrap="square" lIns="0" tIns="0" rIns="0" bIns="0">
             <a:spAutoFit/>
           </a:bodyPr>
           <a:lstStyle/>
@@ -9421,7 +9792,7 @@
           <a:noFill/>
         </p:spPr>
         <p:txBody>
-          <a:bodyPr wrap="square" lIns="0" rIns="0" tIns="0" bIns="0">
+          <a:bodyPr wrap="square" lIns="0" tIns="0" rIns="0" bIns="0">
             <a:spAutoFit/>
           </a:bodyPr>
           <a:lstStyle/>
@@ -9456,7 +9827,7 @@
           <a:noFill/>
         </p:spPr>
         <p:txBody>
-          <a:bodyPr wrap="square" lIns="0" rIns="0" tIns="0" bIns="0">
+          <a:bodyPr wrap="square" lIns="0" tIns="0" rIns="0" bIns="0">
             <a:spAutoFit/>
           </a:bodyPr>
           <a:lstStyle/>
@@ -9492,13 +9863,25 @@
                 <a:tableStyleId>{5C22544A-7EE6-4342-B048-85BDC9FD1C3A}</a:tableStyleId>
               </a:tblPr>
               <a:tblGrid>
-                <a:gridCol w="1278081"/>
-                <a:gridCol w="9779758"/>
+                <a:gridCol w="1278081">
+                  <a:extLst>
+                    <a:ext uri="{9D8B030D-6E8A-4147-A177-3AD203B41FA5}">
+                      <a16:colId xmlns:a16="http://schemas.microsoft.com/office/drawing/2014/main" val="20000"/>
+                    </a:ext>
+                  </a:extLst>
+                </a:gridCol>
+                <a:gridCol w="9779758">
+                  <a:extLst>
+                    <a:ext uri="{9D8B030D-6E8A-4147-A177-3AD203B41FA5}">
+                      <a16:colId xmlns:a16="http://schemas.microsoft.com/office/drawing/2014/main" val="20001"/>
+                    </a:ext>
+                  </a:extLst>
+                </a:gridCol>
               </a:tblGrid>
               <a:tr h="321818">
                 <a:tc>
                   <a:txBody>
-                    <a:bodyPr wrap="square"/>
+                    <a:bodyPr/>
                     <a:lstStyle/>
                     <a:p>
                       <a:pPr algn="ctr"/>
@@ -9521,7 +9904,7 @@
                 </a:tc>
                 <a:tc>
                   <a:txBody>
-                    <a:bodyPr wrap="square"/>
+                    <a:bodyPr/>
                     <a:lstStyle/>
                     <a:p>
                       <a:pPr algn="ctr"/>
@@ -9542,11 +9925,16 @@
                     </a:solidFill>
                   </a:tcPr>
                 </a:tc>
+                <a:extLst>
+                  <a:ext uri="{0D108BD9-81ED-4DB2-BD59-A6C34878D82A}">
+                    <a16:rowId xmlns:a16="http://schemas.microsoft.com/office/drawing/2014/main" val="10000"/>
+                  </a:ext>
+                </a:extLst>
               </a:tr>
               <a:tr h="321818">
                 <a:tc>
                   <a:txBody>
-                    <a:bodyPr wrap="square"/>
+                    <a:bodyPr/>
                     <a:lstStyle/>
                     <a:p>
                       <a:pPr algn="ctr"/>
@@ -9569,7 +9957,7 @@
                 </a:tc>
                 <a:tc>
                   <a:txBody>
-                    <a:bodyPr wrap="square"/>
+                    <a:bodyPr/>
                     <a:lstStyle/>
                     <a:p>
                       <a:pPr algn="l"/>
@@ -9590,11 +9978,16 @@
                     </a:solidFill>
                   </a:tcPr>
                 </a:tc>
+                <a:extLst>
+                  <a:ext uri="{0D108BD9-81ED-4DB2-BD59-A6C34878D82A}">
+                    <a16:rowId xmlns:a16="http://schemas.microsoft.com/office/drawing/2014/main" val="10001"/>
+                  </a:ext>
+                </a:extLst>
               </a:tr>
               <a:tr h="321818">
                 <a:tc>
                   <a:txBody>
-                    <a:bodyPr wrap="square"/>
+                    <a:bodyPr/>
                     <a:lstStyle/>
                     <a:p>
                       <a:pPr algn="ctr"/>
@@ -9617,7 +10010,7 @@
                 </a:tc>
                 <a:tc>
                   <a:txBody>
-                    <a:bodyPr wrap="square"/>
+                    <a:bodyPr/>
                     <a:lstStyle/>
                     <a:p>
                       <a:pPr algn="l"/>
@@ -9638,11 +10031,16 @@
                     </a:solidFill>
                   </a:tcPr>
                 </a:tc>
+                <a:extLst>
+                  <a:ext uri="{0D108BD9-81ED-4DB2-BD59-A6C34878D82A}">
+                    <a16:rowId xmlns:a16="http://schemas.microsoft.com/office/drawing/2014/main" val="10002"/>
+                  </a:ext>
+                </a:extLst>
               </a:tr>
               <a:tr h="321818">
                 <a:tc>
                   <a:txBody>
-                    <a:bodyPr wrap="square"/>
+                    <a:bodyPr/>
                     <a:lstStyle/>
                     <a:p>
                       <a:pPr algn="ctr"/>
@@ -9665,7 +10063,7 @@
                 </a:tc>
                 <a:tc>
                   <a:txBody>
-                    <a:bodyPr wrap="square"/>
+                    <a:bodyPr/>
                     <a:lstStyle/>
                     <a:p>
                       <a:pPr algn="l"/>
@@ -9686,11 +10084,16 @@
                     </a:solidFill>
                   </a:tcPr>
                 </a:tc>
+                <a:extLst>
+                  <a:ext uri="{0D108BD9-81ED-4DB2-BD59-A6C34878D82A}">
+                    <a16:rowId xmlns:a16="http://schemas.microsoft.com/office/drawing/2014/main" val="10003"/>
+                  </a:ext>
+                </a:extLst>
               </a:tr>
               <a:tr h="321818">
                 <a:tc>
                   <a:txBody>
-                    <a:bodyPr wrap="square"/>
+                    <a:bodyPr/>
                     <a:lstStyle/>
                     <a:p>
                       <a:pPr algn="ctr"/>
@@ -9713,7 +10116,7 @@
                 </a:tc>
                 <a:tc>
                   <a:txBody>
-                    <a:bodyPr wrap="square"/>
+                    <a:bodyPr/>
                     <a:lstStyle/>
                     <a:p>
                       <a:pPr algn="l"/>
@@ -9734,11 +10137,16 @@
                     </a:solidFill>
                   </a:tcPr>
                 </a:tc>
+                <a:extLst>
+                  <a:ext uri="{0D108BD9-81ED-4DB2-BD59-A6C34878D82A}">
+                    <a16:rowId xmlns:a16="http://schemas.microsoft.com/office/drawing/2014/main" val="10004"/>
+                  </a:ext>
+                </a:extLst>
               </a:tr>
               <a:tr h="321818">
                 <a:tc>
                   <a:txBody>
-                    <a:bodyPr wrap="square"/>
+                    <a:bodyPr/>
                     <a:lstStyle/>
                     <a:p>
                       <a:pPr algn="ctr"/>
@@ -9761,7 +10169,7 @@
                 </a:tc>
                 <a:tc>
                   <a:txBody>
-                    <a:bodyPr wrap="square"/>
+                    <a:bodyPr/>
                     <a:lstStyle/>
                     <a:p>
                       <a:pPr algn="l"/>
@@ -9782,11 +10190,16 @@
                     </a:solidFill>
                   </a:tcPr>
                 </a:tc>
+                <a:extLst>
+                  <a:ext uri="{0D108BD9-81ED-4DB2-BD59-A6C34878D82A}">
+                    <a16:rowId xmlns:a16="http://schemas.microsoft.com/office/drawing/2014/main" val="10005"/>
+                  </a:ext>
+                </a:extLst>
               </a:tr>
               <a:tr h="321818">
                 <a:tc>
                   <a:txBody>
-                    <a:bodyPr wrap="square"/>
+                    <a:bodyPr/>
                     <a:lstStyle/>
                     <a:p>
                       <a:pPr algn="ctr"/>
@@ -9809,7 +10222,7 @@
                 </a:tc>
                 <a:tc>
                   <a:txBody>
-                    <a:bodyPr wrap="square"/>
+                    <a:bodyPr/>
                     <a:lstStyle/>
                     <a:p>
                       <a:pPr algn="l"/>
@@ -9830,6 +10243,11 @@
                     </a:solidFill>
                   </a:tcPr>
                 </a:tc>
+                <a:extLst>
+                  <a:ext uri="{0D108BD9-81ED-4DB2-BD59-A6C34878D82A}">
+                    <a16:rowId xmlns:a16="http://schemas.microsoft.com/office/drawing/2014/main" val="10006"/>
+                  </a:ext>
+                </a:extLst>
               </a:tr>
             </a:tbl>
           </a:graphicData>
@@ -9852,7 +10270,7 @@
           <a:noFill/>
         </p:spPr>
         <p:txBody>
-          <a:bodyPr wrap="square" lIns="0" rIns="0" tIns="0" bIns="0">
+          <a:bodyPr wrap="square" lIns="0" tIns="0" rIns="0" bIns="0">
             <a:spAutoFit/>
           </a:bodyPr>
           <a:lstStyle/>
@@ -9910,6 +10328,7 @@
           <a:lstStyle/>
           <a:p>
             <a:pPr algn="ctr"/>
+            <a:endParaRPr/>
           </a:p>
         </p:txBody>
       </p:sp>
@@ -9922,7 +10341,7 @@
 </file>
 
 <file path=ppt/slides/slide20.xml><?xml version="1.0" encoding="utf-8"?>
-<p:sld xmlns:a="http://schemas.openxmlformats.org/drawingml/2006/main" xmlns:p="http://schemas.openxmlformats.org/presentationml/2006/main" xmlns:r="http://schemas.openxmlformats.org/officeDocument/2006/relationships">
+<p:sld xmlns:a="http://schemas.openxmlformats.org/drawingml/2006/main" xmlns:r="http://schemas.openxmlformats.org/officeDocument/2006/relationships" xmlns:p="http://schemas.openxmlformats.org/presentationml/2006/main">
   <p:cSld>
     <p:spTree>
       <p:nvGrpSpPr>
@@ -9930,7 +10349,14 @@
         <p:cNvGrpSpPr/>
         <p:nvPr/>
       </p:nvGrpSpPr>
-      <p:grpSpPr/>
+      <p:grpSpPr>
+        <a:xfrm>
+          <a:off x="0" y="0"/>
+          <a:ext cx="0" cy="0"/>
+          <a:chOff x="0" y="0"/>
+          <a:chExt cx="0" cy="0"/>
+        </a:xfrm>
+      </p:grpSpPr>
       <p:sp>
         <p:nvSpPr>
           <p:cNvPr id="2" name="TextBox 1"/>
@@ -9948,7 +10374,7 @@
           <a:noFill/>
         </p:spPr>
         <p:txBody>
-          <a:bodyPr wrap="square" lIns="0" rIns="0" tIns="0" bIns="0">
+          <a:bodyPr wrap="square" lIns="0" tIns="0" rIns="0" bIns="0">
             <a:spAutoFit/>
           </a:bodyPr>
           <a:lstStyle/>
@@ -9982,7 +10408,7 @@
           <a:noFill/>
         </p:spPr>
         <p:txBody>
-          <a:bodyPr wrap="square" lIns="0" rIns="0" tIns="0" bIns="0">
+          <a:bodyPr wrap="square" lIns="0" tIns="0" rIns="0" bIns="0">
             <a:spAutoFit/>
           </a:bodyPr>
           <a:lstStyle/>
@@ -10016,7 +10442,7 @@
           <a:noFill/>
         </p:spPr>
         <p:txBody>
-          <a:bodyPr wrap="square" lIns="0" rIns="0" tIns="0" bIns="0">
+          <a:bodyPr wrap="square" lIns="0" tIns="0" rIns="0" bIns="0">
             <a:spAutoFit/>
           </a:bodyPr>
           <a:lstStyle/>
@@ -10051,7 +10477,7 @@
           <a:noFill/>
         </p:spPr>
         <p:txBody>
-          <a:bodyPr wrap="square" lIns="0" rIns="0" tIns="0" bIns="0">
+          <a:bodyPr wrap="square" lIns="0" tIns="0" rIns="0" bIns="0">
             <a:spAutoFit/>
           </a:bodyPr>
           <a:lstStyle/>
@@ -10085,7 +10511,7 @@
           <a:noFill/>
         </p:spPr>
         <p:txBody>
-          <a:bodyPr wrap="square" lIns="0" rIns="0" tIns="0" bIns="0">
+          <a:bodyPr wrap="square" lIns="0" tIns="0" rIns="0" bIns="0">
             <a:spAutoFit/>
           </a:bodyPr>
           <a:lstStyle/>
@@ -10305,7 +10731,7 @@
 </file>
 
 <file path=ppt/slides/slide3.xml><?xml version="1.0" encoding="utf-8"?>
-<p:sld xmlns:a="http://schemas.openxmlformats.org/drawingml/2006/main" xmlns:p="http://schemas.openxmlformats.org/presentationml/2006/main" xmlns:r="http://schemas.openxmlformats.org/officeDocument/2006/relationships">
+<p:sld xmlns:a="http://schemas.openxmlformats.org/drawingml/2006/main" xmlns:r="http://schemas.openxmlformats.org/officeDocument/2006/relationships" xmlns:p="http://schemas.openxmlformats.org/presentationml/2006/main">
   <p:cSld>
     <p:spTree>
       <p:nvGrpSpPr>
@@ -10313,7 +10739,14 @@
         <p:cNvGrpSpPr/>
         <p:nvPr/>
       </p:nvGrpSpPr>
-      <p:grpSpPr/>
+      <p:grpSpPr>
+        <a:xfrm>
+          <a:off x="0" y="0"/>
+          <a:ext cx="0" cy="0"/>
+          <a:chOff x="0" y="0"/>
+          <a:chExt cx="0" cy="0"/>
+        </a:xfrm>
+      </p:grpSpPr>
       <p:sp>
         <p:nvSpPr>
           <p:cNvPr id="2" name="TextBox 1"/>
@@ -10331,7 +10764,7 @@
           <a:noFill/>
         </p:spPr>
         <p:txBody>
-          <a:bodyPr wrap="square" lIns="0" rIns="0" tIns="0" bIns="0">
+          <a:bodyPr wrap="square" lIns="0" tIns="0" rIns="0" bIns="0">
             <a:spAutoFit/>
           </a:bodyPr>
           <a:lstStyle/>
@@ -10365,7 +10798,7 @@
           <a:noFill/>
         </p:spPr>
         <p:txBody>
-          <a:bodyPr wrap="square" lIns="0" rIns="0" tIns="0" bIns="0">
+          <a:bodyPr wrap="square" lIns="0" tIns="0" rIns="0" bIns="0">
             <a:spAutoFit/>
           </a:bodyPr>
           <a:lstStyle/>
@@ -10399,7 +10832,7 @@
           <a:noFill/>
         </p:spPr>
         <p:txBody>
-          <a:bodyPr wrap="square" lIns="0" rIns="0" tIns="0" bIns="0">
+          <a:bodyPr wrap="square" lIns="0" tIns="0" rIns="0" bIns="0">
             <a:spAutoFit/>
           </a:bodyPr>
           <a:lstStyle/>
@@ -10434,7 +10867,7 @@
           <a:noFill/>
         </p:spPr>
         <p:txBody>
-          <a:bodyPr wrap="square" lIns="0" rIns="0" tIns="0" bIns="0">
+          <a:bodyPr wrap="square" lIns="0" tIns="0" rIns="0" bIns="0">
             <a:spAutoFit/>
           </a:bodyPr>
           <a:lstStyle/>
@@ -10470,14 +10903,32 @@
                 <a:tableStyleId>{5C22544A-7EE6-4342-B048-85BDC9FD1C3A}</a:tableStyleId>
               </a:tblPr>
               <a:tblGrid>
-                <a:gridCol w="986328"/>
-                <a:gridCol w="2717883"/>
-                <a:gridCol w="7353628"/>
+                <a:gridCol w="986328">
+                  <a:extLst>
+                    <a:ext uri="{9D8B030D-6E8A-4147-A177-3AD203B41FA5}">
+                      <a16:colId xmlns:a16="http://schemas.microsoft.com/office/drawing/2014/main" val="20000"/>
+                    </a:ext>
+                  </a:extLst>
+                </a:gridCol>
+                <a:gridCol w="2717883">
+                  <a:extLst>
+                    <a:ext uri="{9D8B030D-6E8A-4147-A177-3AD203B41FA5}">
+                      <a16:colId xmlns:a16="http://schemas.microsoft.com/office/drawing/2014/main" val="20001"/>
+                    </a:ext>
+                  </a:extLst>
+                </a:gridCol>
+                <a:gridCol w="7353628">
+                  <a:extLst>
+                    <a:ext uri="{9D8B030D-6E8A-4147-A177-3AD203B41FA5}">
+                      <a16:colId xmlns:a16="http://schemas.microsoft.com/office/drawing/2014/main" val="20002"/>
+                    </a:ext>
+                  </a:extLst>
+                </a:gridCol>
               </a:tblGrid>
               <a:tr h="321818">
                 <a:tc>
                   <a:txBody>
-                    <a:bodyPr wrap="square"/>
+                    <a:bodyPr/>
                     <a:lstStyle/>
                     <a:p>
                       <a:pPr algn="ctr"/>
@@ -10500,7 +10951,7 @@
                 </a:tc>
                 <a:tc>
                   <a:txBody>
-                    <a:bodyPr wrap="square"/>
+                    <a:bodyPr/>
                     <a:lstStyle/>
                     <a:p>
                       <a:pPr algn="ctr"/>
@@ -10523,7 +10974,7 @@
                 </a:tc>
                 <a:tc>
                   <a:txBody>
-                    <a:bodyPr wrap="square"/>
+                    <a:bodyPr/>
                     <a:lstStyle/>
                     <a:p>
                       <a:pPr algn="ctr"/>
@@ -10544,11 +10995,16 @@
                     </a:solidFill>
                   </a:tcPr>
                 </a:tc>
+                <a:extLst>
+                  <a:ext uri="{0D108BD9-81ED-4DB2-BD59-A6C34878D82A}">
+                    <a16:rowId xmlns:a16="http://schemas.microsoft.com/office/drawing/2014/main" val="10000"/>
+                  </a:ext>
+                </a:extLst>
               </a:tr>
               <a:tr h="321818">
                 <a:tc>
                   <a:txBody>
-                    <a:bodyPr wrap="square"/>
+                    <a:bodyPr/>
                     <a:lstStyle/>
                     <a:p>
                       <a:pPr algn="ctr"/>
@@ -10571,7 +11027,7 @@
                 </a:tc>
                 <a:tc>
                   <a:txBody>
-                    <a:bodyPr wrap="square"/>
+                    <a:bodyPr/>
                     <a:lstStyle/>
                     <a:p>
                       <a:pPr algn="ctr"/>
@@ -10595,7 +11051,7 @@
                 </a:tc>
                 <a:tc>
                   <a:txBody>
-                    <a:bodyPr wrap="square"/>
+                    <a:bodyPr/>
                     <a:lstStyle/>
                     <a:p>
                       <a:pPr algn="l"/>
@@ -10616,11 +11072,16 @@
                     </a:solidFill>
                   </a:tcPr>
                 </a:tc>
+                <a:extLst>
+                  <a:ext uri="{0D108BD9-81ED-4DB2-BD59-A6C34878D82A}">
+                    <a16:rowId xmlns:a16="http://schemas.microsoft.com/office/drawing/2014/main" val="10001"/>
+                  </a:ext>
+                </a:extLst>
               </a:tr>
               <a:tr h="321818">
                 <a:tc>
                   <a:txBody>
-                    <a:bodyPr wrap="square"/>
+                    <a:bodyPr/>
                     <a:lstStyle/>
                     <a:p>
                       <a:pPr algn="ctr"/>
@@ -10643,7 +11104,7 @@
                 </a:tc>
                 <a:tc>
                   <a:txBody>
-                    <a:bodyPr wrap="square"/>
+                    <a:bodyPr/>
                     <a:lstStyle/>
                     <a:p>
                       <a:pPr algn="ctr"/>
@@ -10667,7 +11128,7 @@
                 </a:tc>
                 <a:tc>
                   <a:txBody>
-                    <a:bodyPr wrap="square"/>
+                    <a:bodyPr/>
                     <a:lstStyle/>
                     <a:p>
                       <a:pPr algn="l"/>
@@ -10688,11 +11149,16 @@
                     </a:solidFill>
                   </a:tcPr>
                 </a:tc>
+                <a:extLst>
+                  <a:ext uri="{0D108BD9-81ED-4DB2-BD59-A6C34878D82A}">
+                    <a16:rowId xmlns:a16="http://schemas.microsoft.com/office/drawing/2014/main" val="10002"/>
+                  </a:ext>
+                </a:extLst>
               </a:tr>
               <a:tr h="321818">
                 <a:tc>
                   <a:txBody>
-                    <a:bodyPr wrap="square"/>
+                    <a:bodyPr/>
                     <a:lstStyle/>
                     <a:p>
                       <a:pPr algn="ctr"/>
@@ -10715,7 +11181,7 @@
                 </a:tc>
                 <a:tc>
                   <a:txBody>
-                    <a:bodyPr wrap="square"/>
+                    <a:bodyPr/>
                     <a:lstStyle/>
                     <a:p>
                       <a:pPr algn="ctr"/>
@@ -10739,7 +11205,7 @@
                 </a:tc>
                 <a:tc>
                   <a:txBody>
-                    <a:bodyPr wrap="square"/>
+                    <a:bodyPr/>
                     <a:lstStyle/>
                     <a:p>
                       <a:pPr algn="l"/>
@@ -10760,11 +11226,16 @@
                     </a:solidFill>
                   </a:tcPr>
                 </a:tc>
+                <a:extLst>
+                  <a:ext uri="{0D108BD9-81ED-4DB2-BD59-A6C34878D82A}">
+                    <a16:rowId xmlns:a16="http://schemas.microsoft.com/office/drawing/2014/main" val="10003"/>
+                  </a:ext>
+                </a:extLst>
               </a:tr>
               <a:tr h="321818">
                 <a:tc>
                   <a:txBody>
-                    <a:bodyPr wrap="square"/>
+                    <a:bodyPr/>
                     <a:lstStyle/>
                     <a:p>
                       <a:pPr algn="ctr"/>
@@ -10787,7 +11258,7 @@
                 </a:tc>
                 <a:tc>
                   <a:txBody>
-                    <a:bodyPr wrap="square"/>
+                    <a:bodyPr/>
                     <a:lstStyle/>
                     <a:p>
                       <a:pPr algn="ctr"/>
@@ -10811,7 +11282,7 @@
                 </a:tc>
                 <a:tc>
                   <a:txBody>
-                    <a:bodyPr wrap="square"/>
+                    <a:bodyPr/>
                     <a:lstStyle/>
                     <a:p>
                       <a:pPr algn="l"/>
@@ -10832,11 +11303,16 @@
                     </a:solidFill>
                   </a:tcPr>
                 </a:tc>
+                <a:extLst>
+                  <a:ext uri="{0D108BD9-81ED-4DB2-BD59-A6C34878D82A}">
+                    <a16:rowId xmlns:a16="http://schemas.microsoft.com/office/drawing/2014/main" val="10004"/>
+                  </a:ext>
+                </a:extLst>
               </a:tr>
               <a:tr h="321818">
                 <a:tc>
                   <a:txBody>
-                    <a:bodyPr wrap="square"/>
+                    <a:bodyPr/>
                     <a:lstStyle/>
                     <a:p>
                       <a:pPr algn="ctr"/>
@@ -10859,7 +11335,7 @@
                 </a:tc>
                 <a:tc>
                   <a:txBody>
-                    <a:bodyPr wrap="square"/>
+                    <a:bodyPr/>
                     <a:lstStyle/>
                     <a:p>
                       <a:pPr algn="ctr"/>
@@ -10883,7 +11359,7 @@
                 </a:tc>
                 <a:tc>
                   <a:txBody>
-                    <a:bodyPr wrap="square"/>
+                    <a:bodyPr/>
                     <a:lstStyle/>
                     <a:p>
                       <a:pPr algn="l"/>
@@ -10904,6 +11380,11 @@
                     </a:solidFill>
                   </a:tcPr>
                 </a:tc>
+                <a:extLst>
+                  <a:ext uri="{0D108BD9-81ED-4DB2-BD59-A6C34878D82A}">
+                    <a16:rowId xmlns:a16="http://schemas.microsoft.com/office/drawing/2014/main" val="10005"/>
+                  </a:ext>
+                </a:extLst>
               </a:tr>
             </a:tbl>
           </a:graphicData>
@@ -10926,7 +11407,7 @@
           <a:noFill/>
         </p:spPr>
         <p:txBody>
-          <a:bodyPr wrap="square" lIns="0" rIns="0" tIns="0" bIns="0">
+          <a:bodyPr wrap="square" lIns="0" tIns="0" rIns="0" bIns="0">
             <a:spAutoFit/>
           </a:bodyPr>
           <a:lstStyle/>
@@ -10984,6 +11465,7 @@
           <a:lstStyle/>
           <a:p>
             <a:pPr algn="ctr"/>
+            <a:endParaRPr/>
           </a:p>
         </p:txBody>
       </p:sp>
@@ -10996,7 +11478,7 @@
 </file>
 
 <file path=ppt/slides/slide4.xml><?xml version="1.0" encoding="utf-8"?>
-<p:sld xmlns:a="http://schemas.openxmlformats.org/drawingml/2006/main" xmlns:p="http://schemas.openxmlformats.org/presentationml/2006/main" xmlns:r="http://schemas.openxmlformats.org/officeDocument/2006/relationships">
+<p:sld xmlns:a="http://schemas.openxmlformats.org/drawingml/2006/main" xmlns:r="http://schemas.openxmlformats.org/officeDocument/2006/relationships" xmlns:p="http://schemas.openxmlformats.org/presentationml/2006/main">
   <p:cSld>
     <p:spTree>
       <p:nvGrpSpPr>
@@ -11004,7 +11486,14 @@
         <p:cNvGrpSpPr/>
         <p:nvPr/>
       </p:nvGrpSpPr>
-      <p:grpSpPr/>
+      <p:grpSpPr>
+        <a:xfrm>
+          <a:off x="0" y="0"/>
+          <a:ext cx="0" cy="0"/>
+          <a:chOff x="0" y="0"/>
+          <a:chExt cx="0" cy="0"/>
+        </a:xfrm>
+      </p:grpSpPr>
       <p:sp>
         <p:nvSpPr>
           <p:cNvPr id="2" name="TextBox 1"/>
@@ -11022,7 +11511,7 @@
           <a:noFill/>
         </p:spPr>
         <p:txBody>
-          <a:bodyPr wrap="square" lIns="0" rIns="0" tIns="0" bIns="0">
+          <a:bodyPr wrap="square" lIns="0" tIns="0" rIns="0" bIns="0">
             <a:spAutoFit/>
           </a:bodyPr>
           <a:lstStyle/>
@@ -11056,7 +11545,7 @@
           <a:noFill/>
         </p:spPr>
         <p:txBody>
-          <a:bodyPr wrap="square" lIns="0" rIns="0" tIns="0" bIns="0">
+          <a:bodyPr wrap="square" lIns="0" tIns="0" rIns="0" bIns="0">
             <a:spAutoFit/>
           </a:bodyPr>
           <a:lstStyle/>
@@ -11090,7 +11579,7 @@
           <a:noFill/>
         </p:spPr>
         <p:txBody>
-          <a:bodyPr wrap="square" lIns="0" rIns="0" tIns="0" bIns="0">
+          <a:bodyPr wrap="square" lIns="0" tIns="0" rIns="0" bIns="0">
             <a:spAutoFit/>
           </a:bodyPr>
           <a:lstStyle/>
@@ -11125,7 +11614,7 @@
           <a:noFill/>
         </p:spPr>
         <p:txBody>
-          <a:bodyPr wrap="square" lIns="0" rIns="0" tIns="0" bIns="0">
+          <a:bodyPr wrap="square" lIns="0" tIns="0" rIns="0" bIns="0">
             <a:spAutoFit/>
           </a:bodyPr>
           <a:lstStyle/>
@@ -11159,7 +11648,7 @@
           <a:noFill/>
         </p:spPr>
         <p:txBody>
-          <a:bodyPr wrap="square" lIns="0" rIns="0" tIns="0" bIns="0">
+          <a:bodyPr wrap="square" lIns="0" tIns="0" rIns="0" bIns="0">
             <a:spAutoFit/>
           </a:bodyPr>
           <a:lstStyle/>
@@ -11193,7 +11682,7 @@
           <a:noFill/>
         </p:spPr>
         <p:txBody>
-          <a:bodyPr wrap="square" lIns="0" rIns="0" tIns="0" bIns="0">
+          <a:bodyPr wrap="square" lIns="0" tIns="0" rIns="0" bIns="0">
             <a:spAutoFit/>
           </a:bodyPr>
           <a:lstStyle/>
@@ -11284,7 +11773,7 @@
           <a:noFill/>
         </p:spPr>
         <p:txBody>
-          <a:bodyPr wrap="square" lIns="0" rIns="0" tIns="0" bIns="0">
+          <a:bodyPr wrap="square" lIns="0" tIns="0" rIns="0" bIns="0">
             <a:spAutoFit/>
           </a:bodyPr>
           <a:lstStyle/>
@@ -11318,7 +11807,7 @@
           <a:noFill/>
         </p:spPr>
         <p:txBody>
-          <a:bodyPr wrap="square" lIns="0" rIns="0" tIns="0" bIns="0">
+          <a:bodyPr wrap="square" lIns="0" tIns="0" rIns="0" bIns="0">
             <a:spAutoFit/>
           </a:bodyPr>
           <a:lstStyle/>
@@ -11416,7 +11905,7 @@
           <a:noFill/>
         </p:spPr>
         <p:txBody>
-          <a:bodyPr wrap="square" lIns="0" rIns="0" tIns="0" bIns="0">
+          <a:bodyPr wrap="square" lIns="0" tIns="0" rIns="0" bIns="0">
             <a:spAutoFit/>
           </a:bodyPr>
           <a:lstStyle/>
@@ -11451,7 +11940,7 @@
 </file>
 
 <file path=ppt/slides/slide5.xml><?xml version="1.0" encoding="utf-8"?>
-<p:sld xmlns:a="http://schemas.openxmlformats.org/drawingml/2006/main" xmlns:p="http://schemas.openxmlformats.org/presentationml/2006/main" xmlns:r="http://schemas.openxmlformats.org/officeDocument/2006/relationships">
+<p:sld xmlns:a="http://schemas.openxmlformats.org/drawingml/2006/main" xmlns:r="http://schemas.openxmlformats.org/officeDocument/2006/relationships" xmlns:p="http://schemas.openxmlformats.org/presentationml/2006/main">
   <p:cSld>
     <p:spTree>
       <p:nvGrpSpPr>
@@ -11459,7 +11948,14 @@
         <p:cNvGrpSpPr/>
         <p:nvPr/>
       </p:nvGrpSpPr>
-      <p:grpSpPr/>
+      <p:grpSpPr>
+        <a:xfrm>
+          <a:off x="0" y="0"/>
+          <a:ext cx="0" cy="0"/>
+          <a:chOff x="0" y="0"/>
+          <a:chExt cx="0" cy="0"/>
+        </a:xfrm>
+      </p:grpSpPr>
       <p:sp>
         <p:nvSpPr>
           <p:cNvPr id="2" name="TextBox 1"/>
@@ -11477,7 +11973,7 @@
           <a:noFill/>
         </p:spPr>
         <p:txBody>
-          <a:bodyPr wrap="square" lIns="0" rIns="0" tIns="0" bIns="0">
+          <a:bodyPr wrap="square" lIns="0" tIns="0" rIns="0" bIns="0">
             <a:spAutoFit/>
           </a:bodyPr>
           <a:lstStyle/>
@@ -11511,7 +12007,7 @@
           <a:noFill/>
         </p:spPr>
         <p:txBody>
-          <a:bodyPr wrap="square" lIns="0" rIns="0" tIns="0" bIns="0">
+          <a:bodyPr wrap="square" lIns="0" tIns="0" rIns="0" bIns="0">
             <a:spAutoFit/>
           </a:bodyPr>
           <a:lstStyle/>
@@ -11545,7 +12041,7 @@
           <a:noFill/>
         </p:spPr>
         <p:txBody>
-          <a:bodyPr wrap="square" lIns="0" rIns="0" tIns="0" bIns="0">
+          <a:bodyPr wrap="square" lIns="0" tIns="0" rIns="0" bIns="0">
             <a:spAutoFit/>
           </a:bodyPr>
           <a:lstStyle/>
@@ -11580,7 +12076,7 @@
           <a:noFill/>
         </p:spPr>
         <p:txBody>
-          <a:bodyPr wrap="square" lIns="0" rIns="0" tIns="0" bIns="0">
+          <a:bodyPr wrap="square" lIns="0" tIns="0" rIns="0" bIns="0">
             <a:spAutoFit/>
           </a:bodyPr>
           <a:lstStyle/>
@@ -11616,18 +12112,60 @@
                 <a:tableStyleId>{5C22544A-7EE6-4342-B048-85BDC9FD1C3A}</a:tableStyleId>
               </a:tblPr>
               <a:tblGrid>
-                <a:gridCol w="969544"/>
-                <a:gridCol w="4041211"/>
-                <a:gridCol w="969544"/>
-                <a:gridCol w="1442826"/>
-                <a:gridCol w="1547321"/>
-                <a:gridCol w="969544"/>
-                <a:gridCol w="1117849"/>
+                <a:gridCol w="969544">
+                  <a:extLst>
+                    <a:ext uri="{9D8B030D-6E8A-4147-A177-3AD203B41FA5}">
+                      <a16:colId xmlns:a16="http://schemas.microsoft.com/office/drawing/2014/main" val="20000"/>
+                    </a:ext>
+                  </a:extLst>
+                </a:gridCol>
+                <a:gridCol w="4041211">
+                  <a:extLst>
+                    <a:ext uri="{9D8B030D-6E8A-4147-A177-3AD203B41FA5}">
+                      <a16:colId xmlns:a16="http://schemas.microsoft.com/office/drawing/2014/main" val="20001"/>
+                    </a:ext>
+                  </a:extLst>
+                </a:gridCol>
+                <a:gridCol w="969544">
+                  <a:extLst>
+                    <a:ext uri="{9D8B030D-6E8A-4147-A177-3AD203B41FA5}">
+                      <a16:colId xmlns:a16="http://schemas.microsoft.com/office/drawing/2014/main" val="20002"/>
+                    </a:ext>
+                  </a:extLst>
+                </a:gridCol>
+                <a:gridCol w="1442826">
+                  <a:extLst>
+                    <a:ext uri="{9D8B030D-6E8A-4147-A177-3AD203B41FA5}">
+                      <a16:colId xmlns:a16="http://schemas.microsoft.com/office/drawing/2014/main" val="20003"/>
+                    </a:ext>
+                  </a:extLst>
+                </a:gridCol>
+                <a:gridCol w="1547321">
+                  <a:extLst>
+                    <a:ext uri="{9D8B030D-6E8A-4147-A177-3AD203B41FA5}">
+                      <a16:colId xmlns:a16="http://schemas.microsoft.com/office/drawing/2014/main" val="20004"/>
+                    </a:ext>
+                  </a:extLst>
+                </a:gridCol>
+                <a:gridCol w="969544">
+                  <a:extLst>
+                    <a:ext uri="{9D8B030D-6E8A-4147-A177-3AD203B41FA5}">
+                      <a16:colId xmlns:a16="http://schemas.microsoft.com/office/drawing/2014/main" val="20005"/>
+                    </a:ext>
+                  </a:extLst>
+                </a:gridCol>
+                <a:gridCol w="1117849">
+                  <a:extLst>
+                    <a:ext uri="{9D8B030D-6E8A-4147-A177-3AD203B41FA5}">
+                      <a16:colId xmlns:a16="http://schemas.microsoft.com/office/drawing/2014/main" val="20006"/>
+                    </a:ext>
+                  </a:extLst>
+                </a:gridCol>
               </a:tblGrid>
               <a:tr h="321818">
                 <a:tc>
                   <a:txBody>
-                    <a:bodyPr wrap="square"/>
+                    <a:bodyPr/>
                     <a:lstStyle/>
                     <a:p>
                       <a:pPr algn="ctr"/>
@@ -11650,7 +12188,7 @@
                 </a:tc>
                 <a:tc>
                   <a:txBody>
-                    <a:bodyPr wrap="square"/>
+                    <a:bodyPr/>
                     <a:lstStyle/>
                     <a:p>
                       <a:pPr algn="ctr"/>
@@ -11673,7 +12211,7 @@
                 </a:tc>
                 <a:tc>
                   <a:txBody>
-                    <a:bodyPr wrap="square"/>
+                    <a:bodyPr/>
                     <a:lstStyle/>
                     <a:p>
                       <a:pPr algn="ctr"/>
@@ -11696,7 +12234,7 @@
                 </a:tc>
                 <a:tc>
                   <a:txBody>
-                    <a:bodyPr wrap="square"/>
+                    <a:bodyPr/>
                     <a:lstStyle/>
                     <a:p>
                       <a:pPr algn="ctr"/>
@@ -11719,7 +12257,7 @@
                 </a:tc>
                 <a:tc>
                   <a:txBody>
-                    <a:bodyPr wrap="square"/>
+                    <a:bodyPr/>
                     <a:lstStyle/>
                     <a:p>
                       <a:pPr algn="ctr"/>
@@ -11742,7 +12280,7 @@
                 </a:tc>
                 <a:tc>
                   <a:txBody>
-                    <a:bodyPr wrap="square"/>
+                    <a:bodyPr/>
                     <a:lstStyle/>
                     <a:p>
                       <a:pPr algn="ctr"/>
@@ -11765,7 +12303,7 @@
                 </a:tc>
                 <a:tc>
                   <a:txBody>
-                    <a:bodyPr wrap="square"/>
+                    <a:bodyPr/>
                     <a:lstStyle/>
                     <a:p>
                       <a:pPr algn="ctr"/>
@@ -11786,11 +12324,16 @@
                     </a:solidFill>
                   </a:tcPr>
                 </a:tc>
+                <a:extLst>
+                  <a:ext uri="{0D108BD9-81ED-4DB2-BD59-A6C34878D82A}">
+                    <a16:rowId xmlns:a16="http://schemas.microsoft.com/office/drawing/2014/main" val="10000"/>
+                  </a:ext>
+                </a:extLst>
               </a:tr>
               <a:tr h="321818">
                 <a:tc>
                   <a:txBody>
-                    <a:bodyPr wrap="square"/>
+                    <a:bodyPr/>
                     <a:lstStyle/>
                     <a:p>
                       <a:pPr algn="ctr"/>
@@ -11813,7 +12356,7 @@
                 </a:tc>
                 <a:tc>
                   <a:txBody>
-                    <a:bodyPr wrap="square"/>
+                    <a:bodyPr/>
                     <a:lstStyle/>
                     <a:p>
                       <a:pPr algn="l"/>
@@ -11836,7 +12379,7 @@
                 </a:tc>
                 <a:tc>
                   <a:txBody>
-                    <a:bodyPr wrap="square"/>
+                    <a:bodyPr/>
                     <a:lstStyle/>
                     <a:p>
                       <a:pPr algn="ctr"/>
@@ -11859,7 +12402,7 @@
                 </a:tc>
                 <a:tc>
                   <a:txBody>
-                    <a:bodyPr wrap="square"/>
+                    <a:bodyPr/>
                     <a:lstStyle/>
                     <a:p>
                       <a:pPr algn="ctr"/>
@@ -11882,7 +12425,7 @@
                 </a:tc>
                 <a:tc>
                   <a:txBody>
-                    <a:bodyPr wrap="square"/>
+                    <a:bodyPr/>
                     <a:lstStyle/>
                     <a:p>
                       <a:pPr algn="ctr"/>
@@ -11905,7 +12448,7 @@
                 </a:tc>
                 <a:tc>
                   <a:txBody>
-                    <a:bodyPr wrap="square"/>
+                    <a:bodyPr/>
                     <a:lstStyle/>
                     <a:p>
                       <a:pPr algn="ctr"/>
@@ -11928,7 +12471,7 @@
                 </a:tc>
                 <a:tc>
                   <a:txBody>
-                    <a:bodyPr wrap="square"/>
+                    <a:bodyPr/>
                     <a:lstStyle/>
                     <a:p>
                       <a:pPr algn="ctr"/>
@@ -11950,11 +12493,16 @@
                     </a:solidFill>
                   </a:tcPr>
                 </a:tc>
+                <a:extLst>
+                  <a:ext uri="{0D108BD9-81ED-4DB2-BD59-A6C34878D82A}">
+                    <a16:rowId xmlns:a16="http://schemas.microsoft.com/office/drawing/2014/main" val="10001"/>
+                  </a:ext>
+                </a:extLst>
               </a:tr>
               <a:tr h="321818">
                 <a:tc>
                   <a:txBody>
-                    <a:bodyPr wrap="square"/>
+                    <a:bodyPr/>
                     <a:lstStyle/>
                     <a:p>
                       <a:pPr algn="ctr"/>
@@ -11977,7 +12525,7 @@
                 </a:tc>
                 <a:tc>
                   <a:txBody>
-                    <a:bodyPr wrap="square"/>
+                    <a:bodyPr/>
                     <a:lstStyle/>
                     <a:p>
                       <a:pPr algn="l"/>
@@ -12000,7 +12548,7 @@
                 </a:tc>
                 <a:tc>
                   <a:txBody>
-                    <a:bodyPr wrap="square"/>
+                    <a:bodyPr/>
                     <a:lstStyle/>
                     <a:p>
                       <a:pPr algn="ctr"/>
@@ -12023,7 +12571,7 @@
                 </a:tc>
                 <a:tc>
                   <a:txBody>
-                    <a:bodyPr wrap="square"/>
+                    <a:bodyPr/>
                     <a:lstStyle/>
                     <a:p>
                       <a:pPr algn="ctr"/>
@@ -12046,7 +12594,7 @@
                 </a:tc>
                 <a:tc>
                   <a:txBody>
-                    <a:bodyPr wrap="square"/>
+                    <a:bodyPr/>
                     <a:lstStyle/>
                     <a:p>
                       <a:pPr algn="ctr"/>
@@ -12069,7 +12617,7 @@
                 </a:tc>
                 <a:tc>
                   <a:txBody>
-                    <a:bodyPr wrap="square"/>
+                    <a:bodyPr/>
                     <a:lstStyle/>
                     <a:p>
                       <a:pPr algn="ctr"/>
@@ -12092,7 +12640,7 @@
                 </a:tc>
                 <a:tc>
                   <a:txBody>
-                    <a:bodyPr wrap="square"/>
+                    <a:bodyPr/>
                     <a:lstStyle/>
                     <a:p>
                       <a:pPr algn="ctr"/>
@@ -12114,11 +12662,16 @@
                     </a:solidFill>
                   </a:tcPr>
                 </a:tc>
+                <a:extLst>
+                  <a:ext uri="{0D108BD9-81ED-4DB2-BD59-A6C34878D82A}">
+                    <a16:rowId xmlns:a16="http://schemas.microsoft.com/office/drawing/2014/main" val="10002"/>
+                  </a:ext>
+                </a:extLst>
               </a:tr>
               <a:tr h="321818">
                 <a:tc>
                   <a:txBody>
-                    <a:bodyPr wrap="square"/>
+                    <a:bodyPr/>
                     <a:lstStyle/>
                     <a:p>
                       <a:pPr algn="ctr"/>
@@ -12141,7 +12694,7 @@
                 </a:tc>
                 <a:tc>
                   <a:txBody>
-                    <a:bodyPr wrap="square"/>
+                    <a:bodyPr/>
                     <a:lstStyle/>
                     <a:p>
                       <a:pPr algn="l"/>
@@ -12164,7 +12717,7 @@
                 </a:tc>
                 <a:tc>
                   <a:txBody>
-                    <a:bodyPr wrap="square"/>
+                    <a:bodyPr/>
                     <a:lstStyle/>
                     <a:p>
                       <a:pPr algn="ctr"/>
@@ -12187,7 +12740,7 @@
                 </a:tc>
                 <a:tc>
                   <a:txBody>
-                    <a:bodyPr wrap="square"/>
+                    <a:bodyPr/>
                     <a:lstStyle/>
                     <a:p>
                       <a:pPr algn="ctr"/>
@@ -12210,7 +12763,7 @@
                 </a:tc>
                 <a:tc>
                   <a:txBody>
-                    <a:bodyPr wrap="square"/>
+                    <a:bodyPr/>
                     <a:lstStyle/>
                     <a:p>
                       <a:pPr algn="ctr"/>
@@ -12233,7 +12786,7 @@
                 </a:tc>
                 <a:tc>
                   <a:txBody>
-                    <a:bodyPr wrap="square"/>
+                    <a:bodyPr/>
                     <a:lstStyle/>
                     <a:p>
                       <a:pPr algn="ctr"/>
@@ -12256,7 +12809,7 @@
                 </a:tc>
                 <a:tc>
                   <a:txBody>
-                    <a:bodyPr wrap="square"/>
+                    <a:bodyPr/>
                     <a:lstStyle/>
                     <a:p>
                       <a:pPr algn="ctr"/>
@@ -12278,11 +12831,16 @@
                     </a:solidFill>
                   </a:tcPr>
                 </a:tc>
+                <a:extLst>
+                  <a:ext uri="{0D108BD9-81ED-4DB2-BD59-A6C34878D82A}">
+                    <a16:rowId xmlns:a16="http://schemas.microsoft.com/office/drawing/2014/main" val="10003"/>
+                  </a:ext>
+                </a:extLst>
               </a:tr>
               <a:tr h="321818">
                 <a:tc>
                   <a:txBody>
-                    <a:bodyPr wrap="square"/>
+                    <a:bodyPr/>
                     <a:lstStyle/>
                     <a:p>
                       <a:pPr algn="ctr"/>
@@ -12305,7 +12863,7 @@
                 </a:tc>
                 <a:tc>
                   <a:txBody>
-                    <a:bodyPr wrap="square"/>
+                    <a:bodyPr/>
                     <a:lstStyle/>
                     <a:p>
                       <a:pPr algn="l"/>
@@ -12328,7 +12886,7 @@
                 </a:tc>
                 <a:tc>
                   <a:txBody>
-                    <a:bodyPr wrap="square"/>
+                    <a:bodyPr/>
                     <a:lstStyle/>
                     <a:p>
                       <a:pPr algn="ctr"/>
@@ -12351,7 +12909,7 @@
                 </a:tc>
                 <a:tc>
                   <a:txBody>
-                    <a:bodyPr wrap="square"/>
+                    <a:bodyPr/>
                     <a:lstStyle/>
                     <a:p>
                       <a:pPr algn="ctr"/>
@@ -12374,7 +12932,7 @@
                 </a:tc>
                 <a:tc>
                   <a:txBody>
-                    <a:bodyPr wrap="square"/>
+                    <a:bodyPr/>
                     <a:lstStyle/>
                     <a:p>
                       <a:pPr algn="ctr"/>
@@ -12397,7 +12955,7 @@
                 </a:tc>
                 <a:tc>
                   <a:txBody>
-                    <a:bodyPr wrap="square"/>
+                    <a:bodyPr/>
                     <a:lstStyle/>
                     <a:p>
                       <a:pPr algn="ctr"/>
@@ -12420,7 +12978,7 @@
                 </a:tc>
                 <a:tc>
                   <a:txBody>
-                    <a:bodyPr wrap="square"/>
+                    <a:bodyPr/>
                     <a:lstStyle/>
                     <a:p>
                       <a:pPr algn="ctr"/>
@@ -12442,11 +13000,16 @@
                     </a:solidFill>
                   </a:tcPr>
                 </a:tc>
+                <a:extLst>
+                  <a:ext uri="{0D108BD9-81ED-4DB2-BD59-A6C34878D82A}">
+                    <a16:rowId xmlns:a16="http://schemas.microsoft.com/office/drawing/2014/main" val="10004"/>
+                  </a:ext>
+                </a:extLst>
               </a:tr>
               <a:tr h="321818">
                 <a:tc>
                   <a:txBody>
-                    <a:bodyPr wrap="square"/>
+                    <a:bodyPr/>
                     <a:lstStyle/>
                     <a:p>
                       <a:pPr algn="ctr"/>
@@ -12469,7 +13032,7 @@
                 </a:tc>
                 <a:tc>
                   <a:txBody>
-                    <a:bodyPr wrap="square"/>
+                    <a:bodyPr/>
                     <a:lstStyle/>
                     <a:p>
                       <a:pPr algn="l"/>
@@ -12492,7 +13055,7 @@
                 </a:tc>
                 <a:tc>
                   <a:txBody>
-                    <a:bodyPr wrap="square"/>
+                    <a:bodyPr/>
                     <a:lstStyle/>
                     <a:p>
                       <a:pPr algn="ctr"/>
@@ -12515,7 +13078,7 @@
                 </a:tc>
                 <a:tc>
                   <a:txBody>
-                    <a:bodyPr wrap="square"/>
+                    <a:bodyPr/>
                     <a:lstStyle/>
                     <a:p>
                       <a:pPr algn="ctr"/>
@@ -12538,7 +13101,7 @@
                 </a:tc>
                 <a:tc>
                   <a:txBody>
-                    <a:bodyPr wrap="square"/>
+                    <a:bodyPr/>
                     <a:lstStyle/>
                     <a:p>
                       <a:pPr algn="ctr"/>
@@ -12561,7 +13124,7 @@
                 </a:tc>
                 <a:tc>
                   <a:txBody>
-                    <a:bodyPr wrap="square"/>
+                    <a:bodyPr/>
                     <a:lstStyle/>
                     <a:p>
                       <a:pPr algn="ctr"/>
@@ -12584,7 +13147,7 @@
                 </a:tc>
                 <a:tc>
                   <a:txBody>
-                    <a:bodyPr wrap="square"/>
+                    <a:bodyPr/>
                     <a:lstStyle/>
                     <a:p>
                       <a:pPr algn="ctr"/>
@@ -12606,11 +13169,16 @@
                     </a:solidFill>
                   </a:tcPr>
                 </a:tc>
+                <a:extLst>
+                  <a:ext uri="{0D108BD9-81ED-4DB2-BD59-A6C34878D82A}">
+                    <a16:rowId xmlns:a16="http://schemas.microsoft.com/office/drawing/2014/main" val="10005"/>
+                  </a:ext>
+                </a:extLst>
               </a:tr>
               <a:tr h="321818">
                 <a:tc>
                   <a:txBody>
-                    <a:bodyPr wrap="square"/>
+                    <a:bodyPr/>
                     <a:lstStyle/>
                     <a:p>
                       <a:pPr algn="ctr"/>
@@ -12633,7 +13201,7 @@
                 </a:tc>
                 <a:tc>
                   <a:txBody>
-                    <a:bodyPr wrap="square"/>
+                    <a:bodyPr/>
                     <a:lstStyle/>
                     <a:p>
                       <a:pPr algn="l"/>
@@ -12656,7 +13224,7 @@
                 </a:tc>
                 <a:tc>
                   <a:txBody>
-                    <a:bodyPr wrap="square"/>
+                    <a:bodyPr/>
                     <a:lstStyle/>
                     <a:p>
                       <a:pPr algn="ctr"/>
@@ -12679,7 +13247,7 @@
                 </a:tc>
                 <a:tc>
                   <a:txBody>
-                    <a:bodyPr wrap="square"/>
+                    <a:bodyPr/>
                     <a:lstStyle/>
                     <a:p>
                       <a:pPr algn="ctr"/>
@@ -12702,7 +13270,7 @@
                 </a:tc>
                 <a:tc>
                   <a:txBody>
-                    <a:bodyPr wrap="square"/>
+                    <a:bodyPr/>
                     <a:lstStyle/>
                     <a:p>
                       <a:pPr algn="ctr"/>
@@ -12725,7 +13293,7 @@
                 </a:tc>
                 <a:tc>
                   <a:txBody>
-                    <a:bodyPr wrap="square"/>
+                    <a:bodyPr/>
                     <a:lstStyle/>
                     <a:p>
                       <a:pPr algn="ctr"/>
@@ -12748,7 +13316,7 @@
                 </a:tc>
                 <a:tc>
                   <a:txBody>
-                    <a:bodyPr wrap="square"/>
+                    <a:bodyPr/>
                     <a:lstStyle/>
                     <a:p>
                       <a:pPr algn="ctr"/>
@@ -12770,11 +13338,16 @@
                     </a:solidFill>
                   </a:tcPr>
                 </a:tc>
+                <a:extLst>
+                  <a:ext uri="{0D108BD9-81ED-4DB2-BD59-A6C34878D82A}">
+                    <a16:rowId xmlns:a16="http://schemas.microsoft.com/office/drawing/2014/main" val="10006"/>
+                  </a:ext>
+                </a:extLst>
               </a:tr>
               <a:tr h="321818">
                 <a:tc>
                   <a:txBody>
-                    <a:bodyPr wrap="square"/>
+                    <a:bodyPr/>
                     <a:lstStyle/>
                     <a:p>
                       <a:pPr algn="ctr"/>
@@ -12797,7 +13370,7 @@
                 </a:tc>
                 <a:tc>
                   <a:txBody>
-                    <a:bodyPr wrap="square"/>
+                    <a:bodyPr/>
                     <a:lstStyle/>
                     <a:p>
                       <a:pPr algn="l"/>
@@ -12820,7 +13393,7 @@
                 </a:tc>
                 <a:tc>
                   <a:txBody>
-                    <a:bodyPr wrap="square"/>
+                    <a:bodyPr/>
                     <a:lstStyle/>
                     <a:p>
                       <a:pPr algn="ctr"/>
@@ -12843,7 +13416,7 @@
                 </a:tc>
                 <a:tc>
                   <a:txBody>
-                    <a:bodyPr wrap="square"/>
+                    <a:bodyPr/>
                     <a:lstStyle/>
                     <a:p>
                       <a:pPr algn="ctr"/>
@@ -12866,7 +13439,7 @@
                 </a:tc>
                 <a:tc>
                   <a:txBody>
-                    <a:bodyPr wrap="square"/>
+                    <a:bodyPr/>
                     <a:lstStyle/>
                     <a:p>
                       <a:pPr algn="ctr"/>
@@ -12889,7 +13462,7 @@
                 </a:tc>
                 <a:tc>
                   <a:txBody>
-                    <a:bodyPr wrap="square"/>
+                    <a:bodyPr/>
                     <a:lstStyle/>
                     <a:p>
                       <a:pPr algn="ctr"/>
@@ -12912,7 +13485,7 @@
                 </a:tc>
                 <a:tc>
                   <a:txBody>
-                    <a:bodyPr wrap="square"/>
+                    <a:bodyPr/>
                     <a:lstStyle/>
                     <a:p>
                       <a:pPr algn="ctr"/>
@@ -12934,11 +13507,16 @@
                     </a:solidFill>
                   </a:tcPr>
                 </a:tc>
+                <a:extLst>
+                  <a:ext uri="{0D108BD9-81ED-4DB2-BD59-A6C34878D82A}">
+                    <a16:rowId xmlns:a16="http://schemas.microsoft.com/office/drawing/2014/main" val="10007"/>
+                  </a:ext>
+                </a:extLst>
               </a:tr>
               <a:tr h="321818">
                 <a:tc>
                   <a:txBody>
-                    <a:bodyPr wrap="square"/>
+                    <a:bodyPr/>
                     <a:lstStyle/>
                     <a:p>
                       <a:pPr algn="ctr"/>
@@ -12961,7 +13539,7 @@
                 </a:tc>
                 <a:tc>
                   <a:txBody>
-                    <a:bodyPr wrap="square"/>
+                    <a:bodyPr/>
                     <a:lstStyle/>
                     <a:p>
                       <a:pPr algn="l"/>
@@ -12984,7 +13562,7 @@
                 </a:tc>
                 <a:tc>
                   <a:txBody>
-                    <a:bodyPr wrap="square"/>
+                    <a:bodyPr/>
                     <a:lstStyle/>
                     <a:p>
                       <a:pPr algn="ctr"/>
@@ -13007,7 +13585,7 @@
                 </a:tc>
                 <a:tc>
                   <a:txBody>
-                    <a:bodyPr wrap="square"/>
+                    <a:bodyPr/>
                     <a:lstStyle/>
                     <a:p>
                       <a:pPr algn="ctr"/>
@@ -13030,7 +13608,7 @@
                 </a:tc>
                 <a:tc>
                   <a:txBody>
-                    <a:bodyPr wrap="square"/>
+                    <a:bodyPr/>
                     <a:lstStyle/>
                     <a:p>
                       <a:pPr algn="ctr"/>
@@ -13053,7 +13631,7 @@
                 </a:tc>
                 <a:tc>
                   <a:txBody>
-                    <a:bodyPr wrap="square"/>
+                    <a:bodyPr/>
                     <a:lstStyle/>
                     <a:p>
                       <a:pPr algn="ctr"/>
@@ -13076,7 +13654,7 @@
                 </a:tc>
                 <a:tc>
                   <a:txBody>
-                    <a:bodyPr wrap="square"/>
+                    <a:bodyPr/>
                     <a:lstStyle/>
                     <a:p>
                       <a:pPr algn="ctr"/>
@@ -13098,6 +13676,11 @@
                     </a:solidFill>
                   </a:tcPr>
                 </a:tc>
+                <a:extLst>
+                  <a:ext uri="{0D108BD9-81ED-4DB2-BD59-A6C34878D82A}">
+                    <a16:rowId xmlns:a16="http://schemas.microsoft.com/office/drawing/2014/main" val="10008"/>
+                  </a:ext>
+                </a:extLst>
               </a:tr>
             </a:tbl>
           </a:graphicData>
@@ -13112,7 +13695,7 @@
 </file>
 
 <file path=ppt/slides/slide6.xml><?xml version="1.0" encoding="utf-8"?>
-<p:sld xmlns:a="http://schemas.openxmlformats.org/drawingml/2006/main" xmlns:p="http://schemas.openxmlformats.org/presentationml/2006/main" xmlns:r="http://schemas.openxmlformats.org/officeDocument/2006/relationships">
+<p:sld xmlns:a="http://schemas.openxmlformats.org/drawingml/2006/main" xmlns:r="http://schemas.openxmlformats.org/officeDocument/2006/relationships" xmlns:p="http://schemas.openxmlformats.org/presentationml/2006/main">
   <p:cSld>
     <p:spTree>
       <p:nvGrpSpPr>
@@ -13120,7 +13703,14 @@
         <p:cNvGrpSpPr/>
         <p:nvPr/>
       </p:nvGrpSpPr>
-      <p:grpSpPr/>
+      <p:grpSpPr>
+        <a:xfrm>
+          <a:off x="0" y="0"/>
+          <a:ext cx="0" cy="0"/>
+          <a:chOff x="0" y="0"/>
+          <a:chExt cx="0" cy="0"/>
+        </a:xfrm>
+      </p:grpSpPr>
       <p:sp>
         <p:nvSpPr>
           <p:cNvPr id="2" name="TextBox 1"/>
@@ -13138,7 +13728,7 @@
           <a:noFill/>
         </p:spPr>
         <p:txBody>
-          <a:bodyPr wrap="square" lIns="0" rIns="0" tIns="0" bIns="0">
+          <a:bodyPr wrap="square" lIns="0" tIns="0" rIns="0" bIns="0">
             <a:spAutoFit/>
           </a:bodyPr>
           <a:lstStyle/>
@@ -13172,7 +13762,7 @@
           <a:noFill/>
         </p:spPr>
         <p:txBody>
-          <a:bodyPr wrap="square" lIns="0" rIns="0" tIns="0" bIns="0">
+          <a:bodyPr wrap="square" lIns="0" tIns="0" rIns="0" bIns="0">
             <a:spAutoFit/>
           </a:bodyPr>
           <a:lstStyle/>
@@ -13206,7 +13796,7 @@
           <a:noFill/>
         </p:spPr>
         <p:txBody>
-          <a:bodyPr wrap="square" lIns="0" rIns="0" tIns="0" bIns="0">
+          <a:bodyPr wrap="square" lIns="0" tIns="0" rIns="0" bIns="0">
             <a:spAutoFit/>
           </a:bodyPr>
           <a:lstStyle/>
@@ -13241,7 +13831,7 @@
           <a:noFill/>
         </p:spPr>
         <p:txBody>
-          <a:bodyPr wrap="square" lIns="0" rIns="0" tIns="0" bIns="0">
+          <a:bodyPr wrap="square" lIns="0" tIns="0" rIns="0" bIns="0">
             <a:spAutoFit/>
           </a:bodyPr>
           <a:lstStyle/>
@@ -13277,18 +13867,60 @@
                 <a:tableStyleId>{5C22544A-7EE6-4342-B048-85BDC9FD1C3A}</a:tableStyleId>
               </a:tblPr>
               <a:tblGrid>
-                <a:gridCol w="960646"/>
-                <a:gridCol w="4063535"/>
-                <a:gridCol w="960646"/>
-                <a:gridCol w="1497007"/>
-                <a:gridCol w="1611484"/>
-                <a:gridCol w="960646"/>
-                <a:gridCol w="1003875"/>
+                <a:gridCol w="960646">
+                  <a:extLst>
+                    <a:ext uri="{9D8B030D-6E8A-4147-A177-3AD203B41FA5}">
+                      <a16:colId xmlns:a16="http://schemas.microsoft.com/office/drawing/2014/main" val="20000"/>
+                    </a:ext>
+                  </a:extLst>
+                </a:gridCol>
+                <a:gridCol w="4063535">
+                  <a:extLst>
+                    <a:ext uri="{9D8B030D-6E8A-4147-A177-3AD203B41FA5}">
+                      <a16:colId xmlns:a16="http://schemas.microsoft.com/office/drawing/2014/main" val="20001"/>
+                    </a:ext>
+                  </a:extLst>
+                </a:gridCol>
+                <a:gridCol w="960646">
+                  <a:extLst>
+                    <a:ext uri="{9D8B030D-6E8A-4147-A177-3AD203B41FA5}">
+                      <a16:colId xmlns:a16="http://schemas.microsoft.com/office/drawing/2014/main" val="20002"/>
+                    </a:ext>
+                  </a:extLst>
+                </a:gridCol>
+                <a:gridCol w="1497007">
+                  <a:extLst>
+                    <a:ext uri="{9D8B030D-6E8A-4147-A177-3AD203B41FA5}">
+                      <a16:colId xmlns:a16="http://schemas.microsoft.com/office/drawing/2014/main" val="20003"/>
+                    </a:ext>
+                  </a:extLst>
+                </a:gridCol>
+                <a:gridCol w="1611484">
+                  <a:extLst>
+                    <a:ext uri="{9D8B030D-6E8A-4147-A177-3AD203B41FA5}">
+                      <a16:colId xmlns:a16="http://schemas.microsoft.com/office/drawing/2014/main" val="20004"/>
+                    </a:ext>
+                  </a:extLst>
+                </a:gridCol>
+                <a:gridCol w="960646">
+                  <a:extLst>
+                    <a:ext uri="{9D8B030D-6E8A-4147-A177-3AD203B41FA5}">
+                      <a16:colId xmlns:a16="http://schemas.microsoft.com/office/drawing/2014/main" val="20005"/>
+                    </a:ext>
+                  </a:extLst>
+                </a:gridCol>
+                <a:gridCol w="1003875">
+                  <a:extLst>
+                    <a:ext uri="{9D8B030D-6E8A-4147-A177-3AD203B41FA5}">
+                      <a16:colId xmlns:a16="http://schemas.microsoft.com/office/drawing/2014/main" val="20006"/>
+                    </a:ext>
+                  </a:extLst>
+                </a:gridCol>
               </a:tblGrid>
               <a:tr h="321818">
                 <a:tc>
                   <a:txBody>
-                    <a:bodyPr wrap="square"/>
+                    <a:bodyPr/>
                     <a:lstStyle/>
                     <a:p>
                       <a:pPr algn="ctr"/>
@@ -13311,7 +13943,7 @@
                 </a:tc>
                 <a:tc>
                   <a:txBody>
-                    <a:bodyPr wrap="square"/>
+                    <a:bodyPr/>
                     <a:lstStyle/>
                     <a:p>
                       <a:pPr algn="ctr"/>
@@ -13334,7 +13966,7 @@
                 </a:tc>
                 <a:tc>
                   <a:txBody>
-                    <a:bodyPr wrap="square"/>
+                    <a:bodyPr/>
                     <a:lstStyle/>
                     <a:p>
                       <a:pPr algn="ctr"/>
@@ -13357,7 +13989,7 @@
                 </a:tc>
                 <a:tc>
                   <a:txBody>
-                    <a:bodyPr wrap="square"/>
+                    <a:bodyPr/>
                     <a:lstStyle/>
                     <a:p>
                       <a:pPr algn="ctr"/>
@@ -13380,7 +14012,7 @@
                 </a:tc>
                 <a:tc>
                   <a:txBody>
-                    <a:bodyPr wrap="square"/>
+                    <a:bodyPr/>
                     <a:lstStyle/>
                     <a:p>
                       <a:pPr algn="ctr"/>
@@ -13403,7 +14035,7 @@
                 </a:tc>
                 <a:tc>
                   <a:txBody>
-                    <a:bodyPr wrap="square"/>
+                    <a:bodyPr/>
                     <a:lstStyle/>
                     <a:p>
                       <a:pPr algn="ctr"/>
@@ -13426,7 +14058,7 @@
                 </a:tc>
                 <a:tc>
                   <a:txBody>
-                    <a:bodyPr wrap="square"/>
+                    <a:bodyPr/>
                     <a:lstStyle/>
                     <a:p>
                       <a:pPr algn="ctr"/>
@@ -13447,11 +14079,16 @@
                     </a:solidFill>
                   </a:tcPr>
                 </a:tc>
+                <a:extLst>
+                  <a:ext uri="{0D108BD9-81ED-4DB2-BD59-A6C34878D82A}">
+                    <a16:rowId xmlns:a16="http://schemas.microsoft.com/office/drawing/2014/main" val="10000"/>
+                  </a:ext>
+                </a:extLst>
               </a:tr>
               <a:tr h="321818">
                 <a:tc>
                   <a:txBody>
-                    <a:bodyPr wrap="square"/>
+                    <a:bodyPr/>
                     <a:lstStyle/>
                     <a:p>
                       <a:pPr algn="ctr"/>
@@ -13474,7 +14111,7 @@
                 </a:tc>
                 <a:tc>
                   <a:txBody>
-                    <a:bodyPr wrap="square"/>
+                    <a:bodyPr/>
                     <a:lstStyle/>
                     <a:p>
                       <a:pPr algn="l"/>
@@ -13497,7 +14134,7 @@
                 </a:tc>
                 <a:tc>
                   <a:txBody>
-                    <a:bodyPr wrap="square"/>
+                    <a:bodyPr/>
                     <a:lstStyle/>
                     <a:p>
                       <a:pPr algn="ctr"/>
@@ -13520,7 +14157,7 @@
                 </a:tc>
                 <a:tc>
                   <a:txBody>
-                    <a:bodyPr wrap="square"/>
+                    <a:bodyPr/>
                     <a:lstStyle/>
                     <a:p>
                       <a:pPr algn="ctr"/>
@@ -13543,7 +14180,7 @@
                 </a:tc>
                 <a:tc>
                   <a:txBody>
-                    <a:bodyPr wrap="square"/>
+                    <a:bodyPr/>
                     <a:lstStyle/>
                     <a:p>
                       <a:pPr algn="ctr"/>
@@ -13566,7 +14203,7 @@
                 </a:tc>
                 <a:tc>
                   <a:txBody>
-                    <a:bodyPr wrap="square"/>
+                    <a:bodyPr/>
                     <a:lstStyle/>
                     <a:p>
                       <a:pPr algn="ctr"/>
@@ -13589,7 +14226,7 @@
                 </a:tc>
                 <a:tc>
                   <a:txBody>
-                    <a:bodyPr wrap="square"/>
+                    <a:bodyPr/>
                     <a:lstStyle/>
                     <a:p>
                       <a:pPr algn="ctr"/>
@@ -13611,11 +14248,16 @@
                     </a:solidFill>
                   </a:tcPr>
                 </a:tc>
+                <a:extLst>
+                  <a:ext uri="{0D108BD9-81ED-4DB2-BD59-A6C34878D82A}">
+                    <a16:rowId xmlns:a16="http://schemas.microsoft.com/office/drawing/2014/main" val="10001"/>
+                  </a:ext>
+                </a:extLst>
               </a:tr>
               <a:tr h="321818">
                 <a:tc>
                   <a:txBody>
-                    <a:bodyPr wrap="square"/>
+                    <a:bodyPr/>
                     <a:lstStyle/>
                     <a:p>
                       <a:pPr algn="ctr"/>
@@ -13638,7 +14280,7 @@
                 </a:tc>
                 <a:tc>
                   <a:txBody>
-                    <a:bodyPr wrap="square"/>
+                    <a:bodyPr/>
                     <a:lstStyle/>
                     <a:p>
                       <a:pPr algn="l"/>
@@ -13661,7 +14303,7 @@
                 </a:tc>
                 <a:tc>
                   <a:txBody>
-                    <a:bodyPr wrap="square"/>
+                    <a:bodyPr/>
                     <a:lstStyle/>
                     <a:p>
                       <a:pPr algn="ctr"/>
@@ -13684,7 +14326,7 @@
                 </a:tc>
                 <a:tc>
                   <a:txBody>
-                    <a:bodyPr wrap="square"/>
+                    <a:bodyPr/>
                     <a:lstStyle/>
                     <a:p>
                       <a:pPr algn="ctr"/>
@@ -13707,7 +14349,7 @@
                 </a:tc>
                 <a:tc>
                   <a:txBody>
-                    <a:bodyPr wrap="square"/>
+                    <a:bodyPr/>
                     <a:lstStyle/>
                     <a:p>
                       <a:pPr algn="ctr"/>
@@ -13730,7 +14372,7 @@
                 </a:tc>
                 <a:tc>
                   <a:txBody>
-                    <a:bodyPr wrap="square"/>
+                    <a:bodyPr/>
                     <a:lstStyle/>
                     <a:p>
                       <a:pPr algn="ctr"/>
@@ -13753,7 +14395,7 @@
                 </a:tc>
                 <a:tc>
                   <a:txBody>
-                    <a:bodyPr wrap="square"/>
+                    <a:bodyPr/>
                     <a:lstStyle/>
                     <a:p>
                       <a:pPr algn="ctr"/>
@@ -13775,11 +14417,16 @@
                     </a:solidFill>
                   </a:tcPr>
                 </a:tc>
+                <a:extLst>
+                  <a:ext uri="{0D108BD9-81ED-4DB2-BD59-A6C34878D82A}">
+                    <a16:rowId xmlns:a16="http://schemas.microsoft.com/office/drawing/2014/main" val="10002"/>
+                  </a:ext>
+                </a:extLst>
               </a:tr>
               <a:tr h="321818">
                 <a:tc>
                   <a:txBody>
-                    <a:bodyPr wrap="square"/>
+                    <a:bodyPr/>
                     <a:lstStyle/>
                     <a:p>
                       <a:pPr algn="ctr"/>
@@ -13802,7 +14449,7 @@
                 </a:tc>
                 <a:tc>
                   <a:txBody>
-                    <a:bodyPr wrap="square"/>
+                    <a:bodyPr/>
                     <a:lstStyle/>
                     <a:p>
                       <a:pPr algn="l"/>
@@ -13825,7 +14472,7 @@
                 </a:tc>
                 <a:tc>
                   <a:txBody>
-                    <a:bodyPr wrap="square"/>
+                    <a:bodyPr/>
                     <a:lstStyle/>
                     <a:p>
                       <a:pPr algn="ctr"/>
@@ -13848,7 +14495,7 @@
                 </a:tc>
                 <a:tc>
                   <a:txBody>
-                    <a:bodyPr wrap="square"/>
+                    <a:bodyPr/>
                     <a:lstStyle/>
                     <a:p>
                       <a:pPr algn="ctr"/>
@@ -13871,7 +14518,7 @@
                 </a:tc>
                 <a:tc>
                   <a:txBody>
-                    <a:bodyPr wrap="square"/>
+                    <a:bodyPr/>
                     <a:lstStyle/>
                     <a:p>
                       <a:pPr algn="ctr"/>
@@ -13894,7 +14541,7 @@
                 </a:tc>
                 <a:tc>
                   <a:txBody>
-                    <a:bodyPr wrap="square"/>
+                    <a:bodyPr/>
                     <a:lstStyle/>
                     <a:p>
                       <a:pPr algn="ctr"/>
@@ -13917,7 +14564,7 @@
                 </a:tc>
                 <a:tc>
                   <a:txBody>
-                    <a:bodyPr wrap="square"/>
+                    <a:bodyPr/>
                     <a:lstStyle/>
                     <a:p>
                       <a:pPr algn="ctr"/>
@@ -13939,11 +14586,16 @@
                     </a:solidFill>
                   </a:tcPr>
                 </a:tc>
+                <a:extLst>
+                  <a:ext uri="{0D108BD9-81ED-4DB2-BD59-A6C34878D82A}">
+                    <a16:rowId xmlns:a16="http://schemas.microsoft.com/office/drawing/2014/main" val="10003"/>
+                  </a:ext>
+                </a:extLst>
               </a:tr>
               <a:tr h="321818">
                 <a:tc>
                   <a:txBody>
-                    <a:bodyPr wrap="square"/>
+                    <a:bodyPr/>
                     <a:lstStyle/>
                     <a:p>
                       <a:pPr algn="ctr"/>
@@ -13966,7 +14618,7 @@
                 </a:tc>
                 <a:tc>
                   <a:txBody>
-                    <a:bodyPr wrap="square"/>
+                    <a:bodyPr/>
                     <a:lstStyle/>
                     <a:p>
                       <a:pPr algn="l"/>
@@ -13989,7 +14641,7 @@
                 </a:tc>
                 <a:tc>
                   <a:txBody>
-                    <a:bodyPr wrap="square"/>
+                    <a:bodyPr/>
                     <a:lstStyle/>
                     <a:p>
                       <a:pPr algn="ctr"/>
@@ -14012,7 +14664,7 @@
                 </a:tc>
                 <a:tc>
                   <a:txBody>
-                    <a:bodyPr wrap="square"/>
+                    <a:bodyPr/>
                     <a:lstStyle/>
                     <a:p>
                       <a:pPr algn="ctr"/>
@@ -14035,7 +14687,7 @@
                 </a:tc>
                 <a:tc>
                   <a:txBody>
-                    <a:bodyPr wrap="square"/>
+                    <a:bodyPr/>
                     <a:lstStyle/>
                     <a:p>
                       <a:pPr algn="ctr"/>
@@ -14058,7 +14710,7 @@
                 </a:tc>
                 <a:tc>
                   <a:txBody>
-                    <a:bodyPr wrap="square"/>
+                    <a:bodyPr/>
                     <a:lstStyle/>
                     <a:p>
                       <a:pPr algn="ctr"/>
@@ -14081,7 +14733,7 @@
                 </a:tc>
                 <a:tc>
                   <a:txBody>
-                    <a:bodyPr wrap="square"/>
+                    <a:bodyPr/>
                     <a:lstStyle/>
                     <a:p>
                       <a:pPr algn="ctr"/>
@@ -14103,11 +14755,16 @@
                     </a:solidFill>
                   </a:tcPr>
                 </a:tc>
+                <a:extLst>
+                  <a:ext uri="{0D108BD9-81ED-4DB2-BD59-A6C34878D82A}">
+                    <a16:rowId xmlns:a16="http://schemas.microsoft.com/office/drawing/2014/main" val="10004"/>
+                  </a:ext>
+                </a:extLst>
               </a:tr>
               <a:tr h="321818">
                 <a:tc>
                   <a:txBody>
-                    <a:bodyPr wrap="square"/>
+                    <a:bodyPr/>
                     <a:lstStyle/>
                     <a:p>
                       <a:pPr algn="ctr"/>
@@ -14130,7 +14787,7 @@
                 </a:tc>
                 <a:tc>
                   <a:txBody>
-                    <a:bodyPr wrap="square"/>
+                    <a:bodyPr/>
                     <a:lstStyle/>
                     <a:p>
                       <a:pPr algn="l"/>
@@ -14153,7 +14810,7 @@
                 </a:tc>
                 <a:tc>
                   <a:txBody>
-                    <a:bodyPr wrap="square"/>
+                    <a:bodyPr/>
                     <a:lstStyle/>
                     <a:p>
                       <a:pPr algn="ctr"/>
@@ -14176,7 +14833,7 @@
                 </a:tc>
                 <a:tc>
                   <a:txBody>
-                    <a:bodyPr wrap="square"/>
+                    <a:bodyPr/>
                     <a:lstStyle/>
                     <a:p>
                       <a:pPr algn="ctr"/>
@@ -14199,7 +14856,7 @@
                 </a:tc>
                 <a:tc>
                   <a:txBody>
-                    <a:bodyPr wrap="square"/>
+                    <a:bodyPr/>
                     <a:lstStyle/>
                     <a:p>
                       <a:pPr algn="ctr"/>
@@ -14222,7 +14879,7 @@
                 </a:tc>
                 <a:tc>
                   <a:txBody>
-                    <a:bodyPr wrap="square"/>
+                    <a:bodyPr/>
                     <a:lstStyle/>
                     <a:p>
                       <a:pPr algn="ctr"/>
@@ -14245,7 +14902,7 @@
                 </a:tc>
                 <a:tc>
                   <a:txBody>
-                    <a:bodyPr wrap="square"/>
+                    <a:bodyPr/>
                     <a:lstStyle/>
                     <a:p>
                       <a:pPr algn="ctr"/>
@@ -14267,11 +14924,16 @@
                     </a:solidFill>
                   </a:tcPr>
                 </a:tc>
+                <a:extLst>
+                  <a:ext uri="{0D108BD9-81ED-4DB2-BD59-A6C34878D82A}">
+                    <a16:rowId xmlns:a16="http://schemas.microsoft.com/office/drawing/2014/main" val="10005"/>
+                  </a:ext>
+                </a:extLst>
               </a:tr>
               <a:tr h="321818">
                 <a:tc>
                   <a:txBody>
-                    <a:bodyPr wrap="square"/>
+                    <a:bodyPr/>
                     <a:lstStyle/>
                     <a:p>
                       <a:pPr algn="ctr"/>
@@ -14294,7 +14956,7 @@
                 </a:tc>
                 <a:tc>
                   <a:txBody>
-                    <a:bodyPr wrap="square"/>
+                    <a:bodyPr/>
                     <a:lstStyle/>
                     <a:p>
                       <a:pPr algn="l"/>
@@ -14317,7 +14979,7 @@
                 </a:tc>
                 <a:tc>
                   <a:txBody>
-                    <a:bodyPr wrap="square"/>
+                    <a:bodyPr/>
                     <a:lstStyle/>
                     <a:p>
                       <a:pPr algn="ctr"/>
@@ -14340,7 +15002,7 @@
                 </a:tc>
                 <a:tc>
                   <a:txBody>
-                    <a:bodyPr wrap="square"/>
+                    <a:bodyPr/>
                     <a:lstStyle/>
                     <a:p>
                       <a:pPr algn="ctr"/>
@@ -14363,7 +15025,7 @@
                 </a:tc>
                 <a:tc>
                   <a:txBody>
-                    <a:bodyPr wrap="square"/>
+                    <a:bodyPr/>
                     <a:lstStyle/>
                     <a:p>
                       <a:pPr algn="ctr"/>
@@ -14386,7 +15048,7 @@
                 </a:tc>
                 <a:tc>
                   <a:txBody>
-                    <a:bodyPr wrap="square"/>
+                    <a:bodyPr/>
                     <a:lstStyle/>
                     <a:p>
                       <a:pPr algn="ctr"/>
@@ -14409,7 +15071,7 @@
                 </a:tc>
                 <a:tc>
                   <a:txBody>
-                    <a:bodyPr wrap="square"/>
+                    <a:bodyPr/>
                     <a:lstStyle/>
                     <a:p>
                       <a:pPr algn="ctr"/>
@@ -14431,11 +15093,16 @@
                     </a:solidFill>
                   </a:tcPr>
                 </a:tc>
+                <a:extLst>
+                  <a:ext uri="{0D108BD9-81ED-4DB2-BD59-A6C34878D82A}">
+                    <a16:rowId xmlns:a16="http://schemas.microsoft.com/office/drawing/2014/main" val="10006"/>
+                  </a:ext>
+                </a:extLst>
               </a:tr>
               <a:tr h="321818">
                 <a:tc>
                   <a:txBody>
-                    <a:bodyPr wrap="square"/>
+                    <a:bodyPr/>
                     <a:lstStyle/>
                     <a:p>
                       <a:pPr algn="ctr"/>
@@ -14458,7 +15125,7 @@
                 </a:tc>
                 <a:tc>
                   <a:txBody>
-                    <a:bodyPr wrap="square"/>
+                    <a:bodyPr/>
                     <a:lstStyle/>
                     <a:p>
                       <a:pPr algn="l"/>
@@ -14481,7 +15148,7 @@
                 </a:tc>
                 <a:tc>
                   <a:txBody>
-                    <a:bodyPr wrap="square"/>
+                    <a:bodyPr/>
                     <a:lstStyle/>
                     <a:p>
                       <a:pPr algn="ctr"/>
@@ -14504,7 +15171,7 @@
                 </a:tc>
                 <a:tc>
                   <a:txBody>
-                    <a:bodyPr wrap="square"/>
+                    <a:bodyPr/>
                     <a:lstStyle/>
                     <a:p>
                       <a:pPr algn="ctr"/>
@@ -14527,7 +15194,7 @@
                 </a:tc>
                 <a:tc>
                   <a:txBody>
-                    <a:bodyPr wrap="square"/>
+                    <a:bodyPr/>
                     <a:lstStyle/>
                     <a:p>
                       <a:pPr algn="ctr"/>
@@ -14550,7 +15217,7 @@
                 </a:tc>
                 <a:tc>
                   <a:txBody>
-                    <a:bodyPr wrap="square"/>
+                    <a:bodyPr/>
                     <a:lstStyle/>
                     <a:p>
                       <a:pPr algn="ctr"/>
@@ -14573,7 +15240,7 @@
                 </a:tc>
                 <a:tc>
                   <a:txBody>
-                    <a:bodyPr wrap="square"/>
+                    <a:bodyPr/>
                     <a:lstStyle/>
                     <a:p>
                       <a:pPr algn="ctr"/>
@@ -14595,6 +15262,11 @@
                     </a:solidFill>
                   </a:tcPr>
                 </a:tc>
+                <a:extLst>
+                  <a:ext uri="{0D108BD9-81ED-4DB2-BD59-A6C34878D82A}">
+                    <a16:rowId xmlns:a16="http://schemas.microsoft.com/office/drawing/2014/main" val="10007"/>
+                  </a:ext>
+                </a:extLst>
               </a:tr>
             </a:tbl>
           </a:graphicData>
@@ -14609,7 +15281,7 @@
 </file>
 
 <file path=ppt/slides/slide7.xml><?xml version="1.0" encoding="utf-8"?>
-<p:sld xmlns:a="http://schemas.openxmlformats.org/drawingml/2006/main" xmlns:p="http://schemas.openxmlformats.org/presentationml/2006/main" xmlns:r="http://schemas.openxmlformats.org/officeDocument/2006/relationships">
+<p:sld xmlns:a="http://schemas.openxmlformats.org/drawingml/2006/main" xmlns:r="http://schemas.openxmlformats.org/officeDocument/2006/relationships" xmlns:p="http://schemas.openxmlformats.org/presentationml/2006/main">
   <p:cSld>
     <p:spTree>
       <p:nvGrpSpPr>
@@ -14617,7 +15289,14 @@
         <p:cNvGrpSpPr/>
         <p:nvPr/>
       </p:nvGrpSpPr>
-      <p:grpSpPr/>
+      <p:grpSpPr>
+        <a:xfrm>
+          <a:off x="0" y="0"/>
+          <a:ext cx="0" cy="0"/>
+          <a:chOff x="0" y="0"/>
+          <a:chExt cx="0" cy="0"/>
+        </a:xfrm>
+      </p:grpSpPr>
       <p:sp>
         <p:nvSpPr>
           <p:cNvPr id="2" name="TextBox 1"/>
@@ -14635,7 +15314,7 @@
           <a:noFill/>
         </p:spPr>
         <p:txBody>
-          <a:bodyPr wrap="square" lIns="0" rIns="0" tIns="0" bIns="0">
+          <a:bodyPr wrap="square" lIns="0" tIns="0" rIns="0" bIns="0">
             <a:spAutoFit/>
           </a:bodyPr>
           <a:lstStyle/>
@@ -14669,7 +15348,7 @@
           <a:noFill/>
         </p:spPr>
         <p:txBody>
-          <a:bodyPr wrap="square" lIns="0" rIns="0" tIns="0" bIns="0">
+          <a:bodyPr wrap="square" lIns="0" tIns="0" rIns="0" bIns="0">
             <a:spAutoFit/>
           </a:bodyPr>
           <a:lstStyle/>
@@ -14703,7 +15382,7 @@
           <a:noFill/>
         </p:spPr>
         <p:txBody>
-          <a:bodyPr wrap="square" lIns="0" rIns="0" tIns="0" bIns="0">
+          <a:bodyPr wrap="square" lIns="0" tIns="0" rIns="0" bIns="0">
             <a:spAutoFit/>
           </a:bodyPr>
           <a:lstStyle/>
@@ -14738,7 +15417,7 @@
           <a:noFill/>
         </p:spPr>
         <p:txBody>
-          <a:bodyPr wrap="square" lIns="0" rIns="0" tIns="0" bIns="0">
+          <a:bodyPr wrap="square" lIns="0" tIns="0" rIns="0" bIns="0">
             <a:spAutoFit/>
           </a:bodyPr>
           <a:lstStyle/>
@@ -14761,7 +15440,13 @@
           <p:cNvGraphicFramePr>
             <a:graphicFrameLocks noGrp="1"/>
           </p:cNvGraphicFramePr>
-          <p:nvPr/>
+          <p:nvPr>
+            <p:extLst>
+              <p:ext uri="{D42A27DB-BD31-4B8C-83A1-F6EECF244321}">
+                <p14:modId xmlns:p14="http://schemas.microsoft.com/office/powerpoint/2010/main" val="3185543"/>
+              </p:ext>
+            </p:extLst>
+          </p:nvPr>
         </p:nvGraphicFramePr>
         <p:xfrm>
           <a:off x="566928" y="1709928"/>
@@ -14774,15 +15459,39 @@
                 <a:tableStyleId>{5C22544A-7EE6-4342-B048-85BDC9FD1C3A}</a:tableStyleId>
               </a:tblPr>
               <a:tblGrid>
-                <a:gridCol w="821457"/>
-                <a:gridCol w="3975340"/>
-                <a:gridCol w="3916809"/>
-                <a:gridCol w="2344233"/>
+                <a:gridCol w="1261872">
+                  <a:extLst>
+                    <a:ext uri="{9D8B030D-6E8A-4147-A177-3AD203B41FA5}">
+                      <a16:colId xmlns:a16="http://schemas.microsoft.com/office/drawing/2014/main" val="20000"/>
+                    </a:ext>
+                  </a:extLst>
+                </a:gridCol>
+                <a:gridCol w="3534925">
+                  <a:extLst>
+                    <a:ext uri="{9D8B030D-6E8A-4147-A177-3AD203B41FA5}">
+                      <a16:colId xmlns:a16="http://schemas.microsoft.com/office/drawing/2014/main" val="20001"/>
+                    </a:ext>
+                  </a:extLst>
+                </a:gridCol>
+                <a:gridCol w="3916809">
+                  <a:extLst>
+                    <a:ext uri="{9D8B030D-6E8A-4147-A177-3AD203B41FA5}">
+                      <a16:colId xmlns:a16="http://schemas.microsoft.com/office/drawing/2014/main" val="20002"/>
+                    </a:ext>
+                  </a:extLst>
+                </a:gridCol>
+                <a:gridCol w="2344233">
+                  <a:extLst>
+                    <a:ext uri="{9D8B030D-6E8A-4147-A177-3AD203B41FA5}">
+                      <a16:colId xmlns:a16="http://schemas.microsoft.com/office/drawing/2014/main" val="20003"/>
+                    </a:ext>
+                  </a:extLst>
+                </a:gridCol>
               </a:tblGrid>
               <a:tr h="321818">
                 <a:tc>
                   <a:txBody>
-                    <a:bodyPr wrap="square"/>
+                    <a:bodyPr/>
                     <a:lstStyle/>
                     <a:p>
                       <a:pPr algn="ctr"/>
@@ -14805,7 +15514,7 @@
                 </a:tc>
                 <a:tc>
                   <a:txBody>
-                    <a:bodyPr wrap="square"/>
+                    <a:bodyPr/>
                     <a:lstStyle/>
                     <a:p>
                       <a:pPr algn="ctr"/>
@@ -14828,7 +15537,7 @@
                 </a:tc>
                 <a:tc>
                   <a:txBody>
-                    <a:bodyPr wrap="square"/>
+                    <a:bodyPr/>
                     <a:lstStyle/>
                     <a:p>
                       <a:pPr algn="ctr"/>
@@ -14851,7 +15560,7 @@
                 </a:tc>
                 <a:tc>
                   <a:txBody>
-                    <a:bodyPr wrap="square"/>
+                    <a:bodyPr/>
                     <a:lstStyle/>
                     <a:p>
                       <a:pPr algn="ctr"/>
@@ -14872,11 +15581,16 @@
                     </a:solidFill>
                   </a:tcPr>
                 </a:tc>
+                <a:extLst>
+                  <a:ext uri="{0D108BD9-81ED-4DB2-BD59-A6C34878D82A}">
+                    <a16:rowId xmlns:a16="http://schemas.microsoft.com/office/drawing/2014/main" val="10000"/>
+                  </a:ext>
+                </a:extLst>
               </a:tr>
               <a:tr h="579628">
                 <a:tc>
                   <a:txBody>
-                    <a:bodyPr wrap="square"/>
+                    <a:bodyPr/>
                     <a:lstStyle/>
                     <a:p>
                       <a:pPr algn="ctr"/>
@@ -14899,7 +15613,7 @@
                 </a:tc>
                 <a:tc>
                   <a:txBody>
-                    <a:bodyPr wrap="square"/>
+                    <a:bodyPr/>
                     <a:lstStyle/>
                     <a:p>
                       <a:pPr algn="l"/>
@@ -14931,7 +15645,7 @@
                 </a:tc>
                 <a:tc>
                   <a:txBody>
-                    <a:bodyPr wrap="square"/>
+                    <a:bodyPr/>
                     <a:lstStyle/>
                     <a:p>
                       <a:pPr algn="l"/>
@@ -14954,7 +15668,7 @@
                 </a:tc>
                 <a:tc>
                   <a:txBody>
-                    <a:bodyPr wrap="square"/>
+                    <a:bodyPr/>
                     <a:lstStyle/>
                     <a:p>
                       <a:pPr algn="l"/>
@@ -14975,11 +15689,16 @@
                     </a:solidFill>
                   </a:tcPr>
                 </a:tc>
+                <a:extLst>
+                  <a:ext uri="{0D108BD9-81ED-4DB2-BD59-A6C34878D82A}">
+                    <a16:rowId xmlns:a16="http://schemas.microsoft.com/office/drawing/2014/main" val="10001"/>
+                  </a:ext>
+                </a:extLst>
               </a:tr>
               <a:tr h="579628">
                 <a:tc>
                   <a:txBody>
-                    <a:bodyPr wrap="square"/>
+                    <a:bodyPr/>
                     <a:lstStyle/>
                     <a:p>
                       <a:pPr algn="ctr"/>
@@ -15002,7 +15721,7 @@
                 </a:tc>
                 <a:tc>
                   <a:txBody>
-                    <a:bodyPr wrap="square"/>
+                    <a:bodyPr/>
                     <a:lstStyle/>
                     <a:p>
                       <a:pPr algn="l"/>
@@ -15025,7 +15744,7 @@
                 </a:tc>
                 <a:tc>
                   <a:txBody>
-                    <a:bodyPr wrap="square"/>
+                    <a:bodyPr/>
                     <a:lstStyle/>
                     <a:p>
                       <a:pPr algn="l"/>
@@ -15048,7 +15767,7 @@
                 </a:tc>
                 <a:tc>
                   <a:txBody>
-                    <a:bodyPr wrap="square"/>
+                    <a:bodyPr/>
                     <a:lstStyle/>
                     <a:p>
                       <a:pPr algn="l"/>
@@ -15069,11 +15788,16 @@
                     </a:solidFill>
                   </a:tcPr>
                 </a:tc>
+                <a:extLst>
+                  <a:ext uri="{0D108BD9-81ED-4DB2-BD59-A6C34878D82A}">
+                    <a16:rowId xmlns:a16="http://schemas.microsoft.com/office/drawing/2014/main" val="10002"/>
+                  </a:ext>
+                </a:extLst>
               </a:tr>
               <a:tr h="579628">
                 <a:tc>
                   <a:txBody>
-                    <a:bodyPr wrap="square"/>
+                    <a:bodyPr/>
                     <a:lstStyle/>
                     <a:p>
                       <a:pPr algn="ctr"/>
@@ -15096,7 +15820,7 @@
                 </a:tc>
                 <a:tc>
                   <a:txBody>
-                    <a:bodyPr wrap="square"/>
+                    <a:bodyPr/>
                     <a:lstStyle/>
                     <a:p>
                       <a:pPr algn="l"/>
@@ -15119,7 +15843,7 @@
                 </a:tc>
                 <a:tc>
                   <a:txBody>
-                    <a:bodyPr wrap="square"/>
+                    <a:bodyPr/>
                     <a:lstStyle/>
                     <a:p>
                       <a:pPr algn="l"/>
@@ -15142,7 +15866,7 @@
                 </a:tc>
                 <a:tc>
                   <a:txBody>
-                    <a:bodyPr wrap="square"/>
+                    <a:bodyPr/>
                     <a:lstStyle/>
                     <a:p>
                       <a:pPr algn="l"/>
@@ -15163,11 +15887,16 @@
                     </a:solidFill>
                   </a:tcPr>
                 </a:tc>
+                <a:extLst>
+                  <a:ext uri="{0D108BD9-81ED-4DB2-BD59-A6C34878D82A}">
+                    <a16:rowId xmlns:a16="http://schemas.microsoft.com/office/drawing/2014/main" val="10003"/>
+                  </a:ext>
+                </a:extLst>
               </a:tr>
               <a:tr h="579628">
                 <a:tc>
                   <a:txBody>
-                    <a:bodyPr wrap="square"/>
+                    <a:bodyPr/>
                     <a:lstStyle/>
                     <a:p>
                       <a:pPr algn="ctr"/>
@@ -15190,18 +15919,99 @@
                 </a:tc>
                 <a:tc>
                   <a:txBody>
-                    <a:bodyPr wrap="square"/>
+                    <a:bodyPr/>
                     <a:lstStyle/>
                     <a:p>
                       <a:pPr algn="l"/>
                       <a:r>
-                        <a:rPr sz="1400" b="0">
-                          <a:solidFill>
-                            <a:srgbClr val="22303F"/>
-                          </a:solidFill>
-                          <a:latin typeface="Microsoft JhengHei"/>
-                        </a:rPr>
-                        <a:t>TiDB 為計算／儲存分離；PXC 為完整副本與 writeset certification</a:t>
+                        <a:rPr sz="1400" b="0" dirty="0" err="1">
+                          <a:solidFill>
+                            <a:srgbClr val="22303F"/>
+                          </a:solidFill>
+                          <a:latin typeface="Microsoft JhengHei"/>
+                        </a:rPr>
+                        <a:t>TiDB</a:t>
+                      </a:r>
+                      <a:r>
+                        <a:rPr sz="1400" b="0" dirty="0">
+                          <a:solidFill>
+                            <a:srgbClr val="22303F"/>
+                          </a:solidFill>
+                          <a:latin typeface="Microsoft JhengHei"/>
+                        </a:rPr>
+                        <a:t> </a:t>
+                      </a:r>
+                      <a:r>
+                        <a:rPr sz="1400" b="0" dirty="0" err="1">
+                          <a:solidFill>
+                            <a:srgbClr val="22303F"/>
+                          </a:solidFill>
+                          <a:latin typeface="Microsoft JhengHei"/>
+                        </a:rPr>
+                        <a:t>為計算／儲存分離</a:t>
+                      </a:r>
+                      <a:r>
+                        <a:rPr sz="1400" b="0" dirty="0">
+                          <a:solidFill>
+                            <a:srgbClr val="22303F"/>
+                          </a:solidFill>
+                          <a:latin typeface="Microsoft JhengHei"/>
+                        </a:rPr>
+                        <a:t>；</a:t>
+                      </a:r>
+                      <a:endParaRPr lang="en-US" sz="1400" b="0" dirty="0">
+                        <a:solidFill>
+                          <a:srgbClr val="22303F"/>
+                        </a:solidFill>
+                        <a:latin typeface="Microsoft JhengHei"/>
+                      </a:endParaRPr>
+                    </a:p>
+                    <a:p>
+                      <a:pPr algn="l"/>
+                      <a:r>
+                        <a:rPr sz="1400" b="0" dirty="0">
+                          <a:solidFill>
+                            <a:srgbClr val="22303F"/>
+                          </a:solidFill>
+                          <a:latin typeface="Microsoft JhengHei"/>
+                        </a:rPr>
+                        <a:t>PXC </a:t>
+                      </a:r>
+                      <a:r>
+                        <a:rPr sz="1400" b="0" dirty="0" err="1">
+                          <a:solidFill>
+                            <a:srgbClr val="22303F"/>
+                          </a:solidFill>
+                          <a:latin typeface="Microsoft JhengHei"/>
+                        </a:rPr>
+                        <a:t>為完整副本與</a:t>
+                      </a:r>
+                      <a:r>
+                        <a:rPr sz="1400" b="0" dirty="0">
+                          <a:solidFill>
+                            <a:srgbClr val="22303F"/>
+                          </a:solidFill>
+                          <a:latin typeface="Microsoft JhengHei"/>
+                        </a:rPr>
+                        <a:t> </a:t>
+                      </a:r>
+                      <a:r>
+                        <a:rPr sz="1400" b="0" dirty="0" err="1">
+                          <a:solidFill>
+                            <a:srgbClr val="22303F"/>
+                          </a:solidFill>
+                          <a:latin typeface="Microsoft JhengHei"/>
+                        </a:rPr>
+                        <a:t>writeset</a:t>
+                      </a:r>
+                      <a:r>
+                        <a:rPr sz="1400" b="0" dirty="0">
+                          <a:solidFill>
+                            <a:srgbClr val="22303F"/>
+                          </a:solidFill>
+                          <a:latin typeface="Microsoft JhengHei"/>
+                        </a:rPr>
+                        <a:t> certification</a:t>
                       </a:r>
                     </a:p>
                   </a:txBody>
@@ -15213,7 +16023,7 @@
                 </a:tc>
                 <a:tc>
                   <a:txBody>
-                    <a:bodyPr wrap="square"/>
+                    <a:bodyPr/>
                     <a:lstStyle/>
                     <a:p>
                       <a:pPr algn="l"/>
@@ -15236,7 +16046,7 @@
                 </a:tc>
                 <a:tc>
                   <a:txBody>
-                    <a:bodyPr wrap="square"/>
+                    <a:bodyPr/>
                     <a:lstStyle/>
                     <a:p>
                       <a:pPr algn="l"/>
@@ -15257,11 +16067,16 @@
                     </a:solidFill>
                   </a:tcPr>
                 </a:tc>
+                <a:extLst>
+                  <a:ext uri="{0D108BD9-81ED-4DB2-BD59-A6C34878D82A}">
+                    <a16:rowId xmlns:a16="http://schemas.microsoft.com/office/drawing/2014/main" val="10004"/>
+                  </a:ext>
+                </a:extLst>
               </a:tr>
               <a:tr h="579628">
                 <a:tc>
                   <a:txBody>
-                    <a:bodyPr wrap="square"/>
+                    <a:bodyPr/>
                     <a:lstStyle/>
                     <a:p>
                       <a:pPr algn="ctr"/>
@@ -15284,7 +16099,7 @@
                 </a:tc>
                 <a:tc>
                   <a:txBody>
-                    <a:bodyPr wrap="square"/>
+                    <a:bodyPr/>
                     <a:lstStyle/>
                     <a:p>
                       <a:pPr algn="l"/>
@@ -15307,7 +16122,7 @@
                 </a:tc>
                 <a:tc>
                   <a:txBody>
-                    <a:bodyPr wrap="square"/>
+                    <a:bodyPr/>
                     <a:lstStyle/>
                     <a:p>
                       <a:pPr algn="l"/>
@@ -15330,19 +16145,34 @@
                 </a:tc>
                 <a:tc>
                   <a:txBody>
-                    <a:bodyPr wrap="square"/>
+                    <a:bodyPr/>
                     <a:lstStyle/>
                     <a:p>
                       <a:pPr algn="l"/>
                       <a:r>
-                        <a:rPr sz="1400" b="0">
-                          <a:solidFill>
-                            <a:srgbClr val="22303F"/>
-                          </a:solidFill>
-                          <a:latin typeface="Microsoft JhengHei"/>
-                        </a:rPr>
-                        <a:t>「數量」與「業務關鍵度」必須分開</a:t>
-                      </a:r>
+                        <a:rPr sz="1400" b="0" dirty="0">
+                          <a:solidFill>
+                            <a:srgbClr val="22303F"/>
+                          </a:solidFill>
+                          <a:latin typeface="Microsoft JhengHei"/>
+                        </a:rPr>
+                        <a:t>「</a:t>
+                      </a:r>
+                      <a:r>
+                        <a:rPr sz="1400" b="0" dirty="0" err="1">
+                          <a:solidFill>
+                            <a:srgbClr val="22303F"/>
+                          </a:solidFill>
+                          <a:latin typeface="Microsoft JhengHei"/>
+                        </a:rPr>
+                        <a:t>數量」與「業務關鍵度」必須分開</a:t>
+                      </a:r>
+                      <a:endParaRPr sz="1400" b="0" dirty="0">
+                        <a:solidFill>
+                          <a:srgbClr val="22303F"/>
+                        </a:solidFill>
+                        <a:latin typeface="Microsoft JhengHei"/>
+                      </a:endParaRPr>
                     </a:p>
                   </a:txBody>
                   <a:tcPr marL="64008" marR="64008" marT="32004" marB="32004" anchor="ctr">
@@ -15351,6 +16181,11 @@
                     </a:solidFill>
                   </a:tcPr>
                 </a:tc>
+                <a:extLst>
+                  <a:ext uri="{0D108BD9-81ED-4DB2-BD59-A6C34878D82A}">
+                    <a16:rowId xmlns:a16="http://schemas.microsoft.com/office/drawing/2014/main" val="10005"/>
+                  </a:ext>
+                </a:extLst>
               </a:tr>
             </a:tbl>
           </a:graphicData>
@@ -15373,7 +16208,7 @@
           <a:noFill/>
         </p:spPr>
         <p:txBody>
-          <a:bodyPr wrap="square" lIns="0" rIns="0" tIns="0" bIns="0">
+          <a:bodyPr wrap="square" lIns="0" tIns="0" rIns="0" bIns="0">
             <a:spAutoFit/>
           </a:bodyPr>
           <a:lstStyle/>
@@ -15431,6 +16266,7 @@
           <a:lstStyle/>
           <a:p>
             <a:pPr algn="ctr"/>
+            <a:endParaRPr/>
           </a:p>
         </p:txBody>
       </p:sp>
@@ -15443,7 +16279,7 @@
 </file>
 
 <file path=ppt/slides/slide8.xml><?xml version="1.0" encoding="utf-8"?>
-<p:sld xmlns:a="http://schemas.openxmlformats.org/drawingml/2006/main" xmlns:p="http://schemas.openxmlformats.org/presentationml/2006/main" xmlns:r="http://schemas.openxmlformats.org/officeDocument/2006/relationships">
+<p:sld xmlns:a="http://schemas.openxmlformats.org/drawingml/2006/main" xmlns:r="http://schemas.openxmlformats.org/officeDocument/2006/relationships" xmlns:p="http://schemas.openxmlformats.org/presentationml/2006/main">
   <p:cSld>
     <p:spTree>
       <p:nvGrpSpPr>
@@ -15451,7 +16287,14 @@
         <p:cNvGrpSpPr/>
         <p:nvPr/>
       </p:nvGrpSpPr>
-      <p:grpSpPr/>
+      <p:grpSpPr>
+        <a:xfrm>
+          <a:off x="0" y="0"/>
+          <a:ext cx="0" cy="0"/>
+          <a:chOff x="0" y="0"/>
+          <a:chExt cx="0" cy="0"/>
+        </a:xfrm>
+      </p:grpSpPr>
       <p:sp>
         <p:nvSpPr>
           <p:cNvPr id="2" name="TextBox 1"/>
@@ -15469,7 +16312,7 @@
           <a:noFill/>
         </p:spPr>
         <p:txBody>
-          <a:bodyPr wrap="square" lIns="0" rIns="0" tIns="0" bIns="0">
+          <a:bodyPr wrap="square" lIns="0" tIns="0" rIns="0" bIns="0">
             <a:spAutoFit/>
           </a:bodyPr>
           <a:lstStyle/>
@@ -15503,7 +16346,7 @@
           <a:noFill/>
         </p:spPr>
         <p:txBody>
-          <a:bodyPr wrap="square" lIns="0" rIns="0" tIns="0" bIns="0">
+          <a:bodyPr wrap="square" lIns="0" tIns="0" rIns="0" bIns="0">
             <a:spAutoFit/>
           </a:bodyPr>
           <a:lstStyle/>
@@ -15537,7 +16380,7 @@
           <a:noFill/>
         </p:spPr>
         <p:txBody>
-          <a:bodyPr wrap="square" lIns="0" rIns="0" tIns="0" bIns="0">
+          <a:bodyPr wrap="square" lIns="0" tIns="0" rIns="0" bIns="0">
             <a:spAutoFit/>
           </a:bodyPr>
           <a:lstStyle/>
@@ -15572,7 +16415,7 @@
           <a:noFill/>
         </p:spPr>
         <p:txBody>
-          <a:bodyPr wrap="square" lIns="0" rIns="0" tIns="0" bIns="0">
+          <a:bodyPr wrap="square" lIns="0" tIns="0" rIns="0" bIns="0">
             <a:spAutoFit/>
           </a:bodyPr>
           <a:lstStyle/>
@@ -15606,7 +16449,7 @@
           <a:noFill/>
         </p:spPr>
         <p:txBody>
-          <a:bodyPr wrap="square" lIns="0" rIns="0" tIns="0" bIns="0">
+          <a:bodyPr wrap="square" lIns="0" tIns="0" rIns="0" bIns="0">
             <a:spAutoFit/>
           </a:bodyPr>
           <a:lstStyle/>
@@ -15642,13 +16485,25 @@
                 <a:tableStyleId>{5C22544A-7EE6-4342-B048-85BDC9FD1C3A}</a:tableStyleId>
               </a:tblPr>
               <a:tblGrid>
-                <a:gridCol w="1026215"/>
-                <a:gridCol w="10031624"/>
+                <a:gridCol w="1026215">
+                  <a:extLst>
+                    <a:ext uri="{9D8B030D-6E8A-4147-A177-3AD203B41FA5}">
+                      <a16:colId xmlns:a16="http://schemas.microsoft.com/office/drawing/2014/main" val="20000"/>
+                    </a:ext>
+                  </a:extLst>
+                </a:gridCol>
+                <a:gridCol w="10031624">
+                  <a:extLst>
+                    <a:ext uri="{9D8B030D-6E8A-4147-A177-3AD203B41FA5}">
+                      <a16:colId xmlns:a16="http://schemas.microsoft.com/office/drawing/2014/main" val="20001"/>
+                    </a:ext>
+                  </a:extLst>
+                </a:gridCol>
               </a:tblGrid>
               <a:tr h="321818">
                 <a:tc>
                   <a:txBody>
-                    <a:bodyPr wrap="square"/>
+                    <a:bodyPr/>
                     <a:lstStyle/>
                     <a:p>
                       <a:pPr algn="ctr"/>
@@ -15671,7 +16526,7 @@
                 </a:tc>
                 <a:tc>
                   <a:txBody>
-                    <a:bodyPr wrap="square"/>
+                    <a:bodyPr/>
                     <a:lstStyle/>
                     <a:p>
                       <a:pPr algn="ctr"/>
@@ -15692,11 +16547,16 @@
                     </a:solidFill>
                   </a:tcPr>
                 </a:tc>
+                <a:extLst>
+                  <a:ext uri="{0D108BD9-81ED-4DB2-BD59-A6C34878D82A}">
+                    <a16:rowId xmlns:a16="http://schemas.microsoft.com/office/drawing/2014/main" val="10000"/>
+                  </a:ext>
+                </a:extLst>
               </a:tr>
               <a:tr h="321818">
                 <a:tc>
                   <a:txBody>
-                    <a:bodyPr wrap="square"/>
+                    <a:bodyPr/>
                     <a:lstStyle/>
                     <a:p>
                       <a:pPr algn="ctr"/>
@@ -15719,7 +16579,7 @@
                 </a:tc>
                 <a:tc>
                   <a:txBody>
-                    <a:bodyPr wrap="square"/>
+                    <a:bodyPr/>
                     <a:lstStyle/>
                     <a:p>
                       <a:pPr algn="l"/>
@@ -15740,11 +16600,16 @@
                     </a:solidFill>
                   </a:tcPr>
                 </a:tc>
+                <a:extLst>
+                  <a:ext uri="{0D108BD9-81ED-4DB2-BD59-A6C34878D82A}">
+                    <a16:rowId xmlns:a16="http://schemas.microsoft.com/office/drawing/2014/main" val="10001"/>
+                  </a:ext>
+                </a:extLst>
               </a:tr>
               <a:tr h="321818">
                 <a:tc>
                   <a:txBody>
-                    <a:bodyPr wrap="square"/>
+                    <a:bodyPr/>
                     <a:lstStyle/>
                     <a:p>
                       <a:pPr algn="ctr"/>
@@ -15767,7 +16632,7 @@
                 </a:tc>
                 <a:tc>
                   <a:txBody>
-                    <a:bodyPr wrap="square"/>
+                    <a:bodyPr/>
                     <a:lstStyle/>
                     <a:p>
                       <a:pPr algn="l"/>
@@ -15788,11 +16653,16 @@
                     </a:solidFill>
                   </a:tcPr>
                 </a:tc>
+                <a:extLst>
+                  <a:ext uri="{0D108BD9-81ED-4DB2-BD59-A6C34878D82A}">
+                    <a16:rowId xmlns:a16="http://schemas.microsoft.com/office/drawing/2014/main" val="10002"/>
+                  </a:ext>
+                </a:extLst>
               </a:tr>
               <a:tr h="321818">
                 <a:tc>
                   <a:txBody>
-                    <a:bodyPr wrap="square"/>
+                    <a:bodyPr/>
                     <a:lstStyle/>
                     <a:p>
                       <a:pPr algn="ctr"/>
@@ -15815,7 +16685,7 @@
                 </a:tc>
                 <a:tc>
                   <a:txBody>
-                    <a:bodyPr wrap="square"/>
+                    <a:bodyPr/>
                     <a:lstStyle/>
                     <a:p>
                       <a:pPr algn="l"/>
@@ -15836,6 +16706,11 @@
                     </a:solidFill>
                   </a:tcPr>
                 </a:tc>
+                <a:extLst>
+                  <a:ext uri="{0D108BD9-81ED-4DB2-BD59-A6C34878D82A}">
+                    <a16:rowId xmlns:a16="http://schemas.microsoft.com/office/drawing/2014/main" val="10003"/>
+                  </a:ext>
+                </a:extLst>
               </a:tr>
             </a:tbl>
           </a:graphicData>
@@ -15858,7 +16733,7 @@
           <a:noFill/>
         </p:spPr>
         <p:txBody>
-          <a:bodyPr wrap="square" lIns="0" rIns="0" tIns="0" bIns="0">
+          <a:bodyPr wrap="square" lIns="0" tIns="0" rIns="0" bIns="0">
             <a:spAutoFit/>
           </a:bodyPr>
           <a:lstStyle/>
@@ -15901,7 +16776,7 @@
           <a:noFill/>
         </p:spPr>
         <p:txBody>
-          <a:bodyPr wrap="square" lIns="0" rIns="0" tIns="0" bIns="0">
+          <a:bodyPr wrap="square" lIns="0" tIns="0" rIns="0" bIns="0">
             <a:spAutoFit/>
           </a:bodyPr>
           <a:lstStyle/>
@@ -15959,6 +16834,7 @@
           <a:lstStyle/>
           <a:p>
             <a:pPr algn="ctr"/>
+            <a:endParaRPr/>
           </a:p>
         </p:txBody>
       </p:sp>
@@ -15971,7 +16847,7 @@
 </file>
 
 <file path=ppt/slides/slide9.xml><?xml version="1.0" encoding="utf-8"?>
-<p:sld xmlns:a="http://schemas.openxmlformats.org/drawingml/2006/main" xmlns:p="http://schemas.openxmlformats.org/presentationml/2006/main" xmlns:r="http://schemas.openxmlformats.org/officeDocument/2006/relationships">
+<p:sld xmlns:a="http://schemas.openxmlformats.org/drawingml/2006/main" xmlns:r="http://schemas.openxmlformats.org/officeDocument/2006/relationships" xmlns:p="http://schemas.openxmlformats.org/presentationml/2006/main">
   <p:cSld>
     <p:spTree>
       <p:nvGrpSpPr>
@@ -15979,7 +16855,14 @@
         <p:cNvGrpSpPr/>
         <p:nvPr/>
       </p:nvGrpSpPr>
-      <p:grpSpPr/>
+      <p:grpSpPr>
+        <a:xfrm>
+          <a:off x="0" y="0"/>
+          <a:ext cx="0" cy="0"/>
+          <a:chOff x="0" y="0"/>
+          <a:chExt cx="0" cy="0"/>
+        </a:xfrm>
+      </p:grpSpPr>
       <p:sp>
         <p:nvSpPr>
           <p:cNvPr id="2" name="TextBox 1"/>
@@ -15997,7 +16880,7 @@
           <a:noFill/>
         </p:spPr>
         <p:txBody>
-          <a:bodyPr wrap="square" lIns="0" rIns="0" tIns="0" bIns="0">
+          <a:bodyPr wrap="square" lIns="0" tIns="0" rIns="0" bIns="0">
             <a:spAutoFit/>
           </a:bodyPr>
           <a:lstStyle/>
@@ -16031,7 +16914,7 @@
           <a:noFill/>
         </p:spPr>
         <p:txBody>
-          <a:bodyPr wrap="square" lIns="0" rIns="0" tIns="0" bIns="0">
+          <a:bodyPr wrap="square" lIns="0" tIns="0" rIns="0" bIns="0">
             <a:spAutoFit/>
           </a:bodyPr>
           <a:lstStyle/>
@@ -16065,7 +16948,7 @@
           <a:noFill/>
         </p:spPr>
         <p:txBody>
-          <a:bodyPr wrap="square" lIns="0" rIns="0" tIns="0" bIns="0">
+          <a:bodyPr wrap="square" lIns="0" tIns="0" rIns="0" bIns="0">
             <a:spAutoFit/>
           </a:bodyPr>
           <a:lstStyle/>
@@ -16100,7 +16983,7 @@
           <a:noFill/>
         </p:spPr>
         <p:txBody>
-          <a:bodyPr wrap="square" lIns="0" rIns="0" tIns="0" bIns="0">
+          <a:bodyPr wrap="square" lIns="0" tIns="0" rIns="0" bIns="0">
             <a:spAutoFit/>
           </a:bodyPr>
           <a:lstStyle/>
@@ -16123,11 +17006,17 @@
           <p:cNvGraphicFramePr>
             <a:graphicFrameLocks noGrp="1"/>
           </p:cNvGraphicFramePr>
-          <p:nvPr/>
+          <p:nvPr>
+            <p:extLst>
+              <p:ext uri="{D42A27DB-BD31-4B8C-83A1-F6EECF244321}">
+                <p14:modId xmlns:p14="http://schemas.microsoft.com/office/powerpoint/2010/main" val="2014197904"/>
+              </p:ext>
+            </p:extLst>
+          </p:nvPr>
         </p:nvGraphicFramePr>
         <p:xfrm>
           <a:off x="566928" y="1709928"/>
-          <a:ext cx="11057839" cy="2898140"/>
+          <a:ext cx="11057839" cy="3022600"/>
         </p:xfrm>
         <a:graphic>
           <a:graphicData uri="http://schemas.openxmlformats.org/drawingml/2006/table">
@@ -16136,15 +17025,39 @@
                 <a:tableStyleId>{5C22544A-7EE6-4342-B048-85BDC9FD1C3A}</a:tableStyleId>
               </a:tblPr>
               <a:tblGrid>
-                <a:gridCol w="1203706"/>
-                <a:gridCol w="1765940"/>
-                <a:gridCol w="4844494"/>
-                <a:gridCol w="3243699"/>
+                <a:gridCol w="1338528">
+                  <a:extLst>
+                    <a:ext uri="{9D8B030D-6E8A-4147-A177-3AD203B41FA5}">
+                      <a16:colId xmlns:a16="http://schemas.microsoft.com/office/drawing/2014/main" val="20000"/>
+                    </a:ext>
+                  </a:extLst>
+                </a:gridCol>
+                <a:gridCol w="1631118">
+                  <a:extLst>
+                    <a:ext uri="{9D8B030D-6E8A-4147-A177-3AD203B41FA5}">
+                      <a16:colId xmlns:a16="http://schemas.microsoft.com/office/drawing/2014/main" val="20001"/>
+                    </a:ext>
+                  </a:extLst>
+                </a:gridCol>
+                <a:gridCol w="4844494">
+                  <a:extLst>
+                    <a:ext uri="{9D8B030D-6E8A-4147-A177-3AD203B41FA5}">
+                      <a16:colId xmlns:a16="http://schemas.microsoft.com/office/drawing/2014/main" val="20002"/>
+                    </a:ext>
+                  </a:extLst>
+                </a:gridCol>
+                <a:gridCol w="3243699">
+                  <a:extLst>
+                    <a:ext uri="{9D8B030D-6E8A-4147-A177-3AD203B41FA5}">
+                      <a16:colId xmlns:a16="http://schemas.microsoft.com/office/drawing/2014/main" val="20003"/>
+                    </a:ext>
+                  </a:extLst>
+                </a:gridCol>
               </a:tblGrid>
               <a:tr h="579628">
                 <a:tc>
                   <a:txBody>
-                    <a:bodyPr wrap="square"/>
+                    <a:bodyPr/>
                     <a:lstStyle/>
                     <a:p>
                       <a:pPr algn="ctr"/>
@@ -16167,7 +17080,7 @@
                 </a:tc>
                 <a:tc>
                   <a:txBody>
-                    <a:bodyPr wrap="square"/>
+                    <a:bodyPr/>
                     <a:lstStyle/>
                     <a:p>
                       <a:pPr algn="ctr"/>
@@ -16190,7 +17103,7 @@
                 </a:tc>
                 <a:tc>
                   <a:txBody>
-                    <a:bodyPr wrap="square"/>
+                    <a:bodyPr/>
                     <a:lstStyle/>
                     <a:p>
                       <a:pPr algn="ctr"/>
@@ -16213,7 +17126,7 @@
                 </a:tc>
                 <a:tc>
                   <a:txBody>
-                    <a:bodyPr wrap="square"/>
+                    <a:bodyPr/>
                     <a:lstStyle/>
                     <a:p>
                       <a:pPr algn="ctr"/>
@@ -16234,11 +17147,16 @@
                     </a:solidFill>
                   </a:tcPr>
                 </a:tc>
+                <a:extLst>
+                  <a:ext uri="{0D108BD9-81ED-4DB2-BD59-A6C34878D82A}">
+                    <a16:rowId xmlns:a16="http://schemas.microsoft.com/office/drawing/2014/main" val="10000"/>
+                  </a:ext>
+                </a:extLst>
               </a:tr>
               <a:tr h="579628">
                 <a:tc>
                   <a:txBody>
-                    <a:bodyPr wrap="square"/>
+                    <a:bodyPr/>
                     <a:lstStyle/>
                     <a:p>
                       <a:pPr algn="ctr"/>
@@ -16261,7 +17179,7 @@
                 </a:tc>
                 <a:tc>
                   <a:txBody>
-                    <a:bodyPr wrap="square"/>
+                    <a:bodyPr/>
                     <a:lstStyle/>
                     <a:p>
                       <a:pPr algn="l"/>
@@ -16285,18 +17203,81 @@
                 </a:tc>
                 <a:tc>
                   <a:txBody>
-                    <a:bodyPr wrap="square"/>
+                    <a:bodyPr/>
                     <a:lstStyle/>
                     <a:p>
                       <a:pPr algn="l"/>
                       <a:r>
-                        <a:rPr sz="1400" b="0">
-                          <a:solidFill>
-                            <a:srgbClr val="22303F"/>
-                          </a:solidFill>
-                          <a:latin typeface="Microsoft JhengHei"/>
-                        </a:rPr>
-                        <a:t>v8.5 LTS；Community 維護 2027-12-19／延伸 2028-12-19，Enterprise 維護 2029-12-19／延伸 2030-12-19</a:t>
+                        <a:rPr sz="1400" b="0" dirty="0">
+                          <a:solidFill>
+                            <a:srgbClr val="22303F"/>
+                          </a:solidFill>
+                          <a:latin typeface="Microsoft JhengHei"/>
+                        </a:rPr>
+                        <a:t>v8.5 </a:t>
+                      </a:r>
+                      <a:r>
+                        <a:rPr sz="1400" b="0">
+                          <a:solidFill>
+                            <a:srgbClr val="22303F"/>
+                          </a:solidFill>
+                          <a:latin typeface="Microsoft JhengHei"/>
+                        </a:rPr>
+                        <a:t>LTS；</a:t>
+                      </a:r>
+                      <a:endParaRPr lang="en-US" sz="1400" b="0">
+                        <a:solidFill>
+                          <a:srgbClr val="22303F"/>
+                        </a:solidFill>
+                        <a:latin typeface="Microsoft JhengHei"/>
+                      </a:endParaRPr>
+                    </a:p>
+                    <a:p>
+                      <a:pPr algn="l"/>
+                      <a:r>
+                        <a:rPr sz="1400" b="0">
+                          <a:solidFill>
+                            <a:srgbClr val="22303F"/>
+                          </a:solidFill>
+                          <a:latin typeface="Microsoft JhengHei"/>
+                        </a:rPr>
+                        <a:t>Community </a:t>
+                      </a:r>
+                      <a:r>
+                        <a:rPr sz="1400" b="0" dirty="0" err="1">
+                          <a:solidFill>
+                            <a:srgbClr val="22303F"/>
+                          </a:solidFill>
+                          <a:latin typeface="Microsoft JhengHei"/>
+                        </a:rPr>
+                        <a:t>維護</a:t>
+                      </a:r>
+                      <a:r>
+                        <a:rPr sz="1400" b="0" dirty="0">
+                          <a:solidFill>
+                            <a:srgbClr val="22303F"/>
+                          </a:solidFill>
+                          <a:latin typeface="Microsoft JhengHei"/>
+                        </a:rPr>
+                        <a:t> 2027-12-19／延伸 2028-12-19，Enterprise </a:t>
+                      </a:r>
+                      <a:r>
+                        <a:rPr sz="1400" b="0" dirty="0" err="1">
+                          <a:solidFill>
+                            <a:srgbClr val="22303F"/>
+                          </a:solidFill>
+                          <a:latin typeface="Microsoft JhengHei"/>
+                        </a:rPr>
+                        <a:t>維護</a:t>
+                      </a:r>
+                      <a:r>
+                        <a:rPr sz="1400" b="0" dirty="0">
+                          <a:solidFill>
+                            <a:srgbClr val="22303F"/>
+                          </a:solidFill>
+                          <a:latin typeface="Microsoft JhengHei"/>
+                        </a:rPr>
+                        <a:t> 2029-12-19／延伸 2030-12-19</a:t>
                       </a:r>
                     </a:p>
                   </a:txBody>
@@ -16308,7 +17289,7 @@
                 </a:tc>
                 <a:tc>
                   <a:txBody>
-                    <a:bodyPr wrap="square"/>
+                    <a:bodyPr/>
                     <a:lstStyle/>
                     <a:p>
                       <a:pPr algn="l"/>
@@ -16329,11 +17310,16 @@
                     </a:solidFill>
                   </a:tcPr>
                 </a:tc>
+                <a:extLst>
+                  <a:ext uri="{0D108BD9-81ED-4DB2-BD59-A6C34878D82A}">
+                    <a16:rowId xmlns:a16="http://schemas.microsoft.com/office/drawing/2014/main" val="10001"/>
+                  </a:ext>
+                </a:extLst>
               </a:tr>
               <a:tr h="579628">
                 <a:tc>
                   <a:txBody>
-                    <a:bodyPr wrap="square"/>
+                    <a:bodyPr/>
                     <a:lstStyle/>
                     <a:p>
                       <a:pPr algn="ctr"/>
@@ -16356,7 +17342,7 @@
                 </a:tc>
                 <a:tc>
                   <a:txBody>
-                    <a:bodyPr wrap="square"/>
+                    <a:bodyPr/>
                     <a:lstStyle/>
                     <a:p>
                       <a:pPr algn="l"/>
@@ -16380,7 +17366,7 @@
                 </a:tc>
                 <a:tc>
                   <a:txBody>
-                    <a:bodyPr wrap="square"/>
+                    <a:bodyPr/>
                     <a:lstStyle/>
                     <a:p>
                       <a:pPr algn="l"/>
@@ -16403,7 +17389,7 @@
                 </a:tc>
                 <a:tc>
                   <a:txBody>
-                    <a:bodyPr wrap="square"/>
+                    <a:bodyPr/>
                     <a:lstStyle/>
                     <a:p>
                       <a:pPr algn="l"/>
@@ -16433,11 +17419,16 @@
                     </a:solidFill>
                   </a:tcPr>
                 </a:tc>
+                <a:extLst>
+                  <a:ext uri="{0D108BD9-81ED-4DB2-BD59-A6C34878D82A}">
+                    <a16:rowId xmlns:a16="http://schemas.microsoft.com/office/drawing/2014/main" val="10002"/>
+                  </a:ext>
+                </a:extLst>
               </a:tr>
               <a:tr h="579628">
                 <a:tc>
                   <a:txBody>
-                    <a:bodyPr wrap="square"/>
+                    <a:bodyPr/>
                     <a:lstStyle/>
                     <a:p>
                       <a:pPr algn="ctr"/>
@@ -16460,7 +17451,7 @@
                 </a:tc>
                 <a:tc>
                   <a:txBody>
-                    <a:bodyPr wrap="square"/>
+                    <a:bodyPr/>
                     <a:lstStyle/>
                     <a:p>
                       <a:pPr algn="l"/>
@@ -16484,7 +17475,7 @@
                 </a:tc>
                 <a:tc>
                   <a:txBody>
-                    <a:bodyPr wrap="square"/>
+                    <a:bodyPr/>
                     <a:lstStyle/>
                     <a:p>
                       <a:pPr algn="l"/>
@@ -16507,7 +17498,7 @@
                 </a:tc>
                 <a:tc>
                   <a:txBody>
-                    <a:bodyPr wrap="square"/>
+                    <a:bodyPr/>
                     <a:lstStyle/>
                     <a:p>
                       <a:pPr algn="l"/>
@@ -16528,11 +17519,16 @@
                     </a:solidFill>
                   </a:tcPr>
                 </a:tc>
+                <a:extLst>
+                  <a:ext uri="{0D108BD9-81ED-4DB2-BD59-A6C34878D82A}">
+                    <a16:rowId xmlns:a16="http://schemas.microsoft.com/office/drawing/2014/main" val="10003"/>
+                  </a:ext>
+                </a:extLst>
               </a:tr>
               <a:tr h="579628">
                 <a:tc>
                   <a:txBody>
-                    <a:bodyPr wrap="square"/>
+                    <a:bodyPr/>
                     <a:lstStyle/>
                     <a:p>
                       <a:pPr algn="ctr"/>
@@ -16555,7 +17551,7 @@
                 </a:tc>
                 <a:tc>
                   <a:txBody>
-                    <a:bodyPr wrap="square"/>
+                    <a:bodyPr/>
                     <a:lstStyle/>
                     <a:p>
                       <a:pPr algn="l"/>
@@ -16579,7 +17575,7 @@
                 </a:tc>
                 <a:tc>
                   <a:txBody>
-                    <a:bodyPr wrap="square"/>
+                    <a:bodyPr/>
                     <a:lstStyle/>
                     <a:p>
                       <a:pPr algn="l"/>
@@ -16602,19 +17598,61 @@
                 </a:tc>
                 <a:tc>
                   <a:txBody>
-                    <a:bodyPr wrap="square"/>
+                    <a:bodyPr/>
                     <a:lstStyle/>
                     <a:p>
                       <a:pPr algn="l"/>
                       <a:r>
-                        <a:rPr sz="1400" b="0">
-                          <a:solidFill>
-                            <a:srgbClr val="22303F"/>
-                          </a:solidFill>
-                          <a:latin typeface="Microsoft JhengHei"/>
-                        </a:rPr>
-                        <a:t>同 YugabyteDB 困境</a:t>
-                      </a:r>
+                        <a:rPr sz="1400" b="0" dirty="0" err="1">
+                          <a:solidFill>
+                            <a:srgbClr val="22303F"/>
+                          </a:solidFill>
+                          <a:latin typeface="Microsoft JhengHei"/>
+                        </a:rPr>
+                        <a:t>同</a:t>
+                      </a:r>
+                      <a:r>
+                        <a:rPr sz="1400" b="0" dirty="0">
+                          <a:solidFill>
+                            <a:srgbClr val="22303F"/>
+                          </a:solidFill>
+                          <a:latin typeface="Microsoft JhengHei"/>
+                        </a:rPr>
+                        <a:t> </a:t>
+                      </a:r>
+                      <a:r>
+                        <a:rPr sz="1400" b="0" dirty="0" err="1">
+                          <a:solidFill>
+                            <a:srgbClr val="22303F"/>
+                          </a:solidFill>
+                          <a:latin typeface="Microsoft JhengHei"/>
+                        </a:rPr>
+                        <a:t>YugabyteDB</a:t>
+                      </a:r>
+                      <a:r>
+                        <a:rPr sz="1400" b="0" dirty="0">
+                          <a:solidFill>
+                            <a:srgbClr val="22303F"/>
+                          </a:solidFill>
+                          <a:latin typeface="Microsoft JhengHei"/>
+                        </a:rPr>
+                        <a:t> </a:t>
+                      </a:r>
+                      <a:r>
+                        <a:rPr sz="1400" b="0" dirty="0" err="1">
+                          <a:solidFill>
+                            <a:srgbClr val="22303F"/>
+                          </a:solidFill>
+                          <a:latin typeface="Microsoft JhengHei"/>
+                        </a:rPr>
+                        <a:t>困境</a:t>
+                      </a:r>
+                      <a:endParaRPr sz="1400" b="0" dirty="0">
+                        <a:solidFill>
+                          <a:srgbClr val="22303F"/>
+                        </a:solidFill>
+                        <a:latin typeface="Microsoft JhengHei"/>
+                      </a:endParaRPr>
                     </a:p>
                   </a:txBody>
                   <a:tcPr marL="64008" marR="64008" marT="32004" marB="32004" anchor="ctr">
@@ -16623,6 +17661,11 @@
                     </a:solidFill>
                   </a:tcPr>
                 </a:tc>
+                <a:extLst>
+                  <a:ext uri="{0D108BD9-81ED-4DB2-BD59-A6C34878D82A}">
+                    <a16:rowId xmlns:a16="http://schemas.microsoft.com/office/drawing/2014/main" val="10004"/>
+                  </a:ext>
+                </a:extLst>
               </a:tr>
             </a:tbl>
           </a:graphicData>
@@ -16645,7 +17688,7 @@
           <a:noFill/>
         </p:spPr>
         <p:txBody>
-          <a:bodyPr wrap="square" lIns="0" rIns="0" tIns="0" bIns="0">
+          <a:bodyPr wrap="square" lIns="0" tIns="0" rIns="0" bIns="0">
             <a:spAutoFit/>
           </a:bodyPr>
           <a:lstStyle/>
@@ -16703,6 +17746,7 @@
           <a:lstStyle/>
           <a:p>
             <a:pPr algn="ctr"/>
+            <a:endParaRPr/>
           </a:p>
         </p:txBody>
       </p:sp>

--- a/poc/1_MeetingMinutes/0821_slide.pptx
+++ b/poc/1_MeetingMinutes/0821_slide.pptx
@@ -5,28 +5,28 @@
     <p:sldMasterId id="2147483648" r:id="rId1"/>
   </p:sldMasterIdLst>
   <p:sldIdLst>
-    <p:sldId id="256" r:id="rId2"/>
-    <p:sldId id="257" r:id="rId3"/>
-    <p:sldId id="258" r:id="rId4"/>
-    <p:sldId id="259" r:id="rId5"/>
-    <p:sldId id="260" r:id="rId6"/>
-    <p:sldId id="261" r:id="rId7"/>
-    <p:sldId id="262" r:id="rId8"/>
-    <p:sldId id="263" r:id="rId9"/>
-    <p:sldId id="264" r:id="rId10"/>
-    <p:sldId id="265" r:id="rId11"/>
-    <p:sldId id="266" r:id="rId12"/>
-    <p:sldId id="267" r:id="rId13"/>
-    <p:sldId id="268" r:id="rId14"/>
-    <p:sldId id="269" r:id="rId15"/>
-    <p:sldId id="270" r:id="rId16"/>
-    <p:sldId id="271" r:id="rId17"/>
-    <p:sldId id="272" r:id="rId18"/>
-    <p:sldId id="273" r:id="rId19"/>
-    <p:sldId id="274" r:id="rId20"/>
-    <p:sldId id="275" r:id="rId21"/>
+    <p:sldId id="256" r:id="rId7"/>
+    <p:sldId id="257" r:id="rId8"/>
+    <p:sldId id="258" r:id="rId9"/>
+    <p:sldId id="259" r:id="rId10"/>
+    <p:sldId id="260" r:id="rId11"/>
+    <p:sldId id="261" r:id="rId12"/>
+    <p:sldId id="262" r:id="rId13"/>
+    <p:sldId id="263" r:id="rId14"/>
+    <p:sldId id="264" r:id="rId15"/>
+    <p:sldId id="265" r:id="rId16"/>
+    <p:sldId id="266" r:id="rId17"/>
+    <p:sldId id="267" r:id="rId18"/>
+    <p:sldId id="268" r:id="rId19"/>
+    <p:sldId id="269" r:id="rId20"/>
+    <p:sldId id="270" r:id="rId21"/>
+    <p:sldId id="271" r:id="rId22"/>
+    <p:sldId id="272" r:id="rId23"/>
+    <p:sldId id="273" r:id="rId24"/>
+    <p:sldId id="274" r:id="rId25"/>
+    <p:sldId id="275" r:id="rId26"/>
   </p:sldIdLst>
-  <p:sldSz cx="12192000" cy="6858000"/>
+  <p:sldSz cx="12191695" cy="6858000" type="screen4x3"/>
   <p:notesSz cx="6858000" cy="9144000"/>
   <p:defaultTextStyle>
     <a:defPPr>
@@ -123,22 +123,6 @@
       </a:defRPr>
     </a:lvl9pPr>
   </p:defaultTextStyle>
-  <p:extLst>
-    <p:ext uri="{EFAFB233-063F-42B5-8137-9DF3F51BA10A}">
-      <p15:sldGuideLst xmlns:p15="http://schemas.microsoft.com/office/powerpoint/2012/main">
-        <p15:guide id="1" orient="horz" pos="2160">
-          <p15:clr>
-            <a:srgbClr val="A4A3A4"/>
-          </p15:clr>
-        </p15:guide>
-        <p15:guide id="2" pos="2880">
-          <p15:clr>
-            <a:srgbClr val="A4A3A4"/>
-          </p15:clr>
-        </p15:guide>
-      </p15:sldGuideLst>
-    </p:ext>
-  </p:extLst>
 </p:presentation>
 </file>
 
@@ -180,9 +164,10 @@
           <a:lstStyle/>
           <a:p>
             <a:r>
-              <a:rPr lang="en-US"/>
+              <a:rPr lang="en-US" smtClean="0"/>
               <a:t>Click to edit Master title style</a:t>
             </a:r>
+            <a:endParaRPr lang="en-US"/>
           </a:p>
         </p:txBody>
       </p:sp>
@@ -298,9 +283,10 @@
           </a:lstStyle>
           <a:p>
             <a:r>
-              <a:rPr lang="en-US"/>
+              <a:rPr lang="en-US" smtClean="0"/>
               <a:t>Click to edit Master subtitle style</a:t>
             </a:r>
+            <a:endParaRPr lang="en-US"/>
           </a:p>
         </p:txBody>
       </p:sp>
@@ -321,7 +307,7 @@
           <a:p>
             <a:fld id="{5BCAD085-E8A6-8845-BD4E-CB4CCA059FC4}" type="datetimeFigureOut">
               <a:rPr lang="en-US" smtClean="0"/>
-              <a:t>8/20/26</a:t>
+              <a:t>1/27/13</a:t>
             </a:fld>
             <a:endParaRPr lang="en-US"/>
           </a:p>
@@ -415,9 +401,10 @@
           <a:lstStyle/>
           <a:p>
             <a:r>
-              <a:rPr lang="en-US"/>
+              <a:rPr lang="en-US" smtClean="0"/>
               <a:t>Click to edit Master title style</a:t>
             </a:r>
+            <a:endParaRPr lang="en-US"/>
           </a:p>
         </p:txBody>
       </p:sp>
@@ -438,37 +425,38 @@
           <a:p>
             <a:pPr lvl="0"/>
             <a:r>
-              <a:rPr lang="en-US"/>
+              <a:rPr lang="en-US" smtClean="0"/>
               <a:t>Click to edit Master text styles</a:t>
             </a:r>
           </a:p>
           <a:p>
             <a:pPr lvl="1"/>
             <a:r>
-              <a:rPr lang="en-US"/>
+              <a:rPr lang="en-US" smtClean="0"/>
               <a:t>Second level</a:t>
             </a:r>
           </a:p>
           <a:p>
             <a:pPr lvl="2"/>
             <a:r>
-              <a:rPr lang="en-US"/>
+              <a:rPr lang="en-US" smtClean="0"/>
               <a:t>Third level</a:t>
             </a:r>
           </a:p>
           <a:p>
             <a:pPr lvl="3"/>
             <a:r>
-              <a:rPr lang="en-US"/>
+              <a:rPr lang="en-US" smtClean="0"/>
               <a:t>Fourth level</a:t>
             </a:r>
           </a:p>
           <a:p>
             <a:pPr lvl="4"/>
             <a:r>
-              <a:rPr lang="en-US"/>
+              <a:rPr lang="en-US" smtClean="0"/>
               <a:t>Fifth level</a:t>
             </a:r>
+            <a:endParaRPr lang="en-US"/>
           </a:p>
         </p:txBody>
       </p:sp>
@@ -489,7 +477,7 @@
           <a:p>
             <a:fld id="{5BCAD085-E8A6-8845-BD4E-CB4CCA059FC4}" type="datetimeFigureOut">
               <a:rPr lang="en-US" smtClean="0"/>
-              <a:t>8/20/26</a:t>
+              <a:t>1/27/13</a:t>
             </a:fld>
             <a:endParaRPr lang="en-US"/>
           </a:p>
@@ -588,9 +576,10 @@
           <a:lstStyle/>
           <a:p>
             <a:r>
-              <a:rPr lang="en-US"/>
+              <a:rPr lang="en-US" smtClean="0"/>
               <a:t>Click to edit Master title style</a:t>
             </a:r>
+            <a:endParaRPr lang="en-US"/>
           </a:p>
         </p:txBody>
       </p:sp>
@@ -616,37 +605,38 @@
           <a:p>
             <a:pPr lvl="0"/>
             <a:r>
-              <a:rPr lang="en-US"/>
+              <a:rPr lang="en-US" smtClean="0"/>
               <a:t>Click to edit Master text styles</a:t>
             </a:r>
           </a:p>
           <a:p>
             <a:pPr lvl="1"/>
             <a:r>
-              <a:rPr lang="en-US"/>
+              <a:rPr lang="en-US" smtClean="0"/>
               <a:t>Second level</a:t>
             </a:r>
           </a:p>
           <a:p>
             <a:pPr lvl="2"/>
             <a:r>
-              <a:rPr lang="en-US"/>
+              <a:rPr lang="en-US" smtClean="0"/>
               <a:t>Third level</a:t>
             </a:r>
           </a:p>
           <a:p>
             <a:pPr lvl="3"/>
             <a:r>
-              <a:rPr lang="en-US"/>
+              <a:rPr lang="en-US" smtClean="0"/>
               <a:t>Fourth level</a:t>
             </a:r>
           </a:p>
           <a:p>
             <a:pPr lvl="4"/>
             <a:r>
-              <a:rPr lang="en-US"/>
+              <a:rPr lang="en-US" smtClean="0"/>
               <a:t>Fifth level</a:t>
             </a:r>
+            <a:endParaRPr lang="en-US"/>
           </a:p>
         </p:txBody>
       </p:sp>
@@ -667,7 +657,7 @@
           <a:p>
             <a:fld id="{5BCAD085-E8A6-8845-BD4E-CB4CCA059FC4}" type="datetimeFigureOut">
               <a:rPr lang="en-US" smtClean="0"/>
-              <a:t>8/20/26</a:t>
+              <a:t>1/27/13</a:t>
             </a:fld>
             <a:endParaRPr lang="en-US"/>
           </a:p>
@@ -761,9 +751,10 @@
           <a:lstStyle/>
           <a:p>
             <a:r>
-              <a:rPr lang="en-US"/>
+              <a:rPr lang="en-US" smtClean="0"/>
               <a:t>Click to edit Master title style</a:t>
             </a:r>
+            <a:endParaRPr lang="en-US"/>
           </a:p>
         </p:txBody>
       </p:sp>
@@ -784,37 +775,38 @@
           <a:p>
             <a:pPr lvl="0"/>
             <a:r>
-              <a:rPr lang="en-US"/>
+              <a:rPr lang="en-US" smtClean="0"/>
               <a:t>Click to edit Master text styles</a:t>
             </a:r>
           </a:p>
           <a:p>
             <a:pPr lvl="1"/>
             <a:r>
-              <a:rPr lang="en-US"/>
+              <a:rPr lang="en-US" smtClean="0"/>
               <a:t>Second level</a:t>
             </a:r>
           </a:p>
           <a:p>
             <a:pPr lvl="2"/>
             <a:r>
-              <a:rPr lang="en-US"/>
+              <a:rPr lang="en-US" smtClean="0"/>
               <a:t>Third level</a:t>
             </a:r>
           </a:p>
           <a:p>
             <a:pPr lvl="3"/>
             <a:r>
-              <a:rPr lang="en-US"/>
+              <a:rPr lang="en-US" smtClean="0"/>
               <a:t>Fourth level</a:t>
             </a:r>
           </a:p>
           <a:p>
             <a:pPr lvl="4"/>
             <a:r>
-              <a:rPr lang="en-US"/>
+              <a:rPr lang="en-US" smtClean="0"/>
               <a:t>Fifth level</a:t>
             </a:r>
+            <a:endParaRPr lang="en-US"/>
           </a:p>
         </p:txBody>
       </p:sp>
@@ -835,7 +827,7 @@
           <a:p>
             <a:fld id="{5BCAD085-E8A6-8845-BD4E-CB4CCA059FC4}" type="datetimeFigureOut">
               <a:rPr lang="en-US" smtClean="0"/>
-              <a:t>8/20/26</a:t>
+              <a:t>1/27/13</a:t>
             </a:fld>
             <a:endParaRPr lang="en-US"/>
           </a:p>
@@ -938,9 +930,10 @@
           </a:lstStyle>
           <a:p>
             <a:r>
-              <a:rPr lang="en-US"/>
+              <a:rPr lang="en-US" smtClean="0"/>
               <a:t>Click to edit Master title style</a:t>
             </a:r>
+            <a:endParaRPr lang="en-US"/>
           </a:p>
         </p:txBody>
       </p:sp>
@@ -1057,7 +1050,7 @@
           <a:p>
             <a:pPr lvl="0"/>
             <a:r>
-              <a:rPr lang="en-US"/>
+              <a:rPr lang="en-US" smtClean="0"/>
               <a:t>Click to edit Master text styles</a:t>
             </a:r>
           </a:p>
@@ -1080,7 +1073,7 @@
           <a:p>
             <a:fld id="{5BCAD085-E8A6-8845-BD4E-CB4CCA059FC4}" type="datetimeFigureOut">
               <a:rPr lang="en-US" smtClean="0"/>
-              <a:t>8/20/26</a:t>
+              <a:t>1/27/13</a:t>
             </a:fld>
             <a:endParaRPr lang="en-US"/>
           </a:p>
@@ -1174,9 +1167,10 @@
           <a:lstStyle/>
           <a:p>
             <a:r>
-              <a:rPr lang="en-US"/>
+              <a:rPr lang="en-US" smtClean="0"/>
               <a:t>Click to edit Master title style</a:t>
             </a:r>
+            <a:endParaRPr lang="en-US"/>
           </a:p>
         </p:txBody>
       </p:sp>
@@ -1230,37 +1224,38 @@
           <a:p>
             <a:pPr lvl="0"/>
             <a:r>
-              <a:rPr lang="en-US"/>
+              <a:rPr lang="en-US" smtClean="0"/>
               <a:t>Click to edit Master text styles</a:t>
             </a:r>
           </a:p>
           <a:p>
             <a:pPr lvl="1"/>
             <a:r>
-              <a:rPr lang="en-US"/>
+              <a:rPr lang="en-US" smtClean="0"/>
               <a:t>Second level</a:t>
             </a:r>
           </a:p>
           <a:p>
             <a:pPr lvl="2"/>
             <a:r>
-              <a:rPr lang="en-US"/>
+              <a:rPr lang="en-US" smtClean="0"/>
               <a:t>Third level</a:t>
             </a:r>
           </a:p>
           <a:p>
             <a:pPr lvl="3"/>
             <a:r>
-              <a:rPr lang="en-US"/>
+              <a:rPr lang="en-US" smtClean="0"/>
               <a:t>Fourth level</a:t>
             </a:r>
           </a:p>
           <a:p>
             <a:pPr lvl="4"/>
             <a:r>
-              <a:rPr lang="en-US"/>
+              <a:rPr lang="en-US" smtClean="0"/>
               <a:t>Fifth level</a:t>
             </a:r>
+            <a:endParaRPr lang="en-US"/>
           </a:p>
         </p:txBody>
       </p:sp>
@@ -1314,37 +1309,38 @@
           <a:p>
             <a:pPr lvl="0"/>
             <a:r>
-              <a:rPr lang="en-US"/>
+              <a:rPr lang="en-US" smtClean="0"/>
               <a:t>Click to edit Master text styles</a:t>
             </a:r>
           </a:p>
           <a:p>
             <a:pPr lvl="1"/>
             <a:r>
-              <a:rPr lang="en-US"/>
+              <a:rPr lang="en-US" smtClean="0"/>
               <a:t>Second level</a:t>
             </a:r>
           </a:p>
           <a:p>
             <a:pPr lvl="2"/>
             <a:r>
-              <a:rPr lang="en-US"/>
+              <a:rPr lang="en-US" smtClean="0"/>
               <a:t>Third level</a:t>
             </a:r>
           </a:p>
           <a:p>
             <a:pPr lvl="3"/>
             <a:r>
-              <a:rPr lang="en-US"/>
+              <a:rPr lang="en-US" smtClean="0"/>
               <a:t>Fourth level</a:t>
             </a:r>
           </a:p>
           <a:p>
             <a:pPr lvl="4"/>
             <a:r>
-              <a:rPr lang="en-US"/>
+              <a:rPr lang="en-US" smtClean="0"/>
               <a:t>Fifth level</a:t>
             </a:r>
+            <a:endParaRPr lang="en-US"/>
           </a:p>
         </p:txBody>
       </p:sp>
@@ -1365,7 +1361,7 @@
           <a:p>
             <a:fld id="{5BCAD085-E8A6-8845-BD4E-CB4CCA059FC4}" type="datetimeFigureOut">
               <a:rPr lang="en-US" smtClean="0"/>
-              <a:t>8/20/26</a:t>
+              <a:t>1/27/13</a:t>
             </a:fld>
             <a:endParaRPr lang="en-US"/>
           </a:p>
@@ -1463,9 +1459,10 @@
           </a:lstStyle>
           <a:p>
             <a:r>
-              <a:rPr lang="en-US"/>
+              <a:rPr lang="en-US" smtClean="0"/>
               <a:t>Click to edit Master title style</a:t>
             </a:r>
+            <a:endParaRPr lang="en-US"/>
           </a:p>
         </p:txBody>
       </p:sp>
@@ -1528,7 +1525,7 @@
           <a:p>
             <a:pPr lvl="0"/>
             <a:r>
-              <a:rPr lang="en-US"/>
+              <a:rPr lang="en-US" smtClean="0"/>
               <a:t>Click to edit Master text styles</a:t>
             </a:r>
           </a:p>
@@ -1584,37 +1581,38 @@
           <a:p>
             <a:pPr lvl="0"/>
             <a:r>
-              <a:rPr lang="en-US"/>
+              <a:rPr lang="en-US" smtClean="0"/>
               <a:t>Click to edit Master text styles</a:t>
             </a:r>
           </a:p>
           <a:p>
             <a:pPr lvl="1"/>
             <a:r>
-              <a:rPr lang="en-US"/>
+              <a:rPr lang="en-US" smtClean="0"/>
               <a:t>Second level</a:t>
             </a:r>
           </a:p>
           <a:p>
             <a:pPr lvl="2"/>
             <a:r>
-              <a:rPr lang="en-US"/>
+              <a:rPr lang="en-US" smtClean="0"/>
               <a:t>Third level</a:t>
             </a:r>
           </a:p>
           <a:p>
             <a:pPr lvl="3"/>
             <a:r>
-              <a:rPr lang="en-US"/>
+              <a:rPr lang="en-US" smtClean="0"/>
               <a:t>Fourth level</a:t>
             </a:r>
           </a:p>
           <a:p>
             <a:pPr lvl="4"/>
             <a:r>
-              <a:rPr lang="en-US"/>
+              <a:rPr lang="en-US" smtClean="0"/>
               <a:t>Fifth level</a:t>
             </a:r>
+            <a:endParaRPr lang="en-US"/>
           </a:p>
         </p:txBody>
       </p:sp>
@@ -1677,7 +1675,7 @@
           <a:p>
             <a:pPr lvl="0"/>
             <a:r>
-              <a:rPr lang="en-US"/>
+              <a:rPr lang="en-US" smtClean="0"/>
               <a:t>Click to edit Master text styles</a:t>
             </a:r>
           </a:p>
@@ -1733,37 +1731,38 @@
           <a:p>
             <a:pPr lvl="0"/>
             <a:r>
-              <a:rPr lang="en-US"/>
+              <a:rPr lang="en-US" smtClean="0"/>
               <a:t>Click to edit Master text styles</a:t>
             </a:r>
           </a:p>
           <a:p>
             <a:pPr lvl="1"/>
             <a:r>
-              <a:rPr lang="en-US"/>
+              <a:rPr lang="en-US" smtClean="0"/>
               <a:t>Second level</a:t>
             </a:r>
           </a:p>
           <a:p>
             <a:pPr lvl="2"/>
             <a:r>
-              <a:rPr lang="en-US"/>
+              <a:rPr lang="en-US" smtClean="0"/>
               <a:t>Third level</a:t>
             </a:r>
           </a:p>
           <a:p>
             <a:pPr lvl="3"/>
             <a:r>
-              <a:rPr lang="en-US"/>
+              <a:rPr lang="en-US" smtClean="0"/>
               <a:t>Fourth level</a:t>
             </a:r>
           </a:p>
           <a:p>
             <a:pPr lvl="4"/>
             <a:r>
-              <a:rPr lang="en-US"/>
+              <a:rPr lang="en-US" smtClean="0"/>
               <a:t>Fifth level</a:t>
             </a:r>
+            <a:endParaRPr lang="en-US"/>
           </a:p>
         </p:txBody>
       </p:sp>
@@ -1784,7 +1783,7 @@
           <a:p>
             <a:fld id="{5BCAD085-E8A6-8845-BD4E-CB4CCA059FC4}" type="datetimeFigureOut">
               <a:rPr lang="en-US" smtClean="0"/>
-              <a:t>8/20/26</a:t>
+              <a:t>1/27/13</a:t>
             </a:fld>
             <a:endParaRPr lang="en-US"/>
           </a:p>
@@ -1878,9 +1877,10 @@
           <a:lstStyle/>
           <a:p>
             <a:r>
-              <a:rPr lang="en-US"/>
+              <a:rPr lang="en-US" smtClean="0"/>
               <a:t>Click to edit Master title style</a:t>
             </a:r>
+            <a:endParaRPr lang="en-US"/>
           </a:p>
         </p:txBody>
       </p:sp>
@@ -1901,7 +1901,7 @@
           <a:p>
             <a:fld id="{5BCAD085-E8A6-8845-BD4E-CB4CCA059FC4}" type="datetimeFigureOut">
               <a:rPr lang="en-US" smtClean="0"/>
-              <a:t>8/20/26</a:t>
+              <a:t>1/27/13</a:t>
             </a:fld>
             <a:endParaRPr lang="en-US"/>
           </a:p>
@@ -1996,7 +1996,7 @@
           <a:p>
             <a:fld id="{5BCAD085-E8A6-8845-BD4E-CB4CCA059FC4}" type="datetimeFigureOut">
               <a:rPr lang="en-US" smtClean="0"/>
-              <a:t>8/20/26</a:t>
+              <a:t>1/27/13</a:t>
             </a:fld>
             <a:endParaRPr lang="en-US"/>
           </a:p>
@@ -2099,9 +2099,10 @@
           </a:lstStyle>
           <a:p>
             <a:r>
-              <a:rPr lang="en-US"/>
+              <a:rPr lang="en-US" smtClean="0"/>
               <a:t>Click to edit Master title style</a:t>
             </a:r>
+            <a:endParaRPr lang="en-US"/>
           </a:p>
         </p:txBody>
       </p:sp>
@@ -2155,37 +2156,38 @@
           <a:p>
             <a:pPr lvl="0"/>
             <a:r>
-              <a:rPr lang="en-US"/>
+              <a:rPr lang="en-US" smtClean="0"/>
               <a:t>Click to edit Master text styles</a:t>
             </a:r>
           </a:p>
           <a:p>
             <a:pPr lvl="1"/>
             <a:r>
-              <a:rPr lang="en-US"/>
+              <a:rPr lang="en-US" smtClean="0"/>
               <a:t>Second level</a:t>
             </a:r>
           </a:p>
           <a:p>
             <a:pPr lvl="2"/>
             <a:r>
-              <a:rPr lang="en-US"/>
+              <a:rPr lang="en-US" smtClean="0"/>
               <a:t>Third level</a:t>
             </a:r>
           </a:p>
           <a:p>
             <a:pPr lvl="3"/>
             <a:r>
-              <a:rPr lang="en-US"/>
+              <a:rPr lang="en-US" smtClean="0"/>
               <a:t>Fourth level</a:t>
             </a:r>
           </a:p>
           <a:p>
             <a:pPr lvl="4"/>
             <a:r>
-              <a:rPr lang="en-US"/>
+              <a:rPr lang="en-US" smtClean="0"/>
               <a:t>Fifth level</a:t>
             </a:r>
+            <a:endParaRPr lang="en-US"/>
           </a:p>
         </p:txBody>
       </p:sp>
@@ -2248,7 +2250,7 @@
           <a:p>
             <a:pPr lvl="0"/>
             <a:r>
-              <a:rPr lang="en-US"/>
+              <a:rPr lang="en-US" smtClean="0"/>
               <a:t>Click to edit Master text styles</a:t>
             </a:r>
           </a:p>
@@ -2271,7 +2273,7 @@
           <a:p>
             <a:fld id="{5BCAD085-E8A6-8845-BD4E-CB4CCA059FC4}" type="datetimeFigureOut">
               <a:rPr lang="en-US" smtClean="0"/>
-              <a:t>8/20/26</a:t>
+              <a:t>1/27/13</a:t>
             </a:fld>
             <a:endParaRPr lang="en-US"/>
           </a:p>
@@ -2374,9 +2376,10 @@
           </a:lstStyle>
           <a:p>
             <a:r>
-              <a:rPr lang="en-US"/>
+              <a:rPr lang="en-US" smtClean="0"/>
               <a:t>Click to edit Master title style</a:t>
             </a:r>
+            <a:endParaRPr lang="en-US"/>
           </a:p>
         </p:txBody>
       </p:sp>
@@ -2500,7 +2503,7 @@
           <a:p>
             <a:pPr lvl="0"/>
             <a:r>
-              <a:rPr lang="en-US"/>
+              <a:rPr lang="en-US" smtClean="0"/>
               <a:t>Click to edit Master text styles</a:t>
             </a:r>
           </a:p>
@@ -2523,7 +2526,7 @@
           <a:p>
             <a:fld id="{5BCAD085-E8A6-8845-BD4E-CB4CCA059FC4}" type="datetimeFigureOut">
               <a:rPr lang="en-US" smtClean="0"/>
-              <a:t>8/20/26</a:t>
+              <a:t>1/27/13</a:t>
             </a:fld>
             <a:endParaRPr lang="en-US"/>
           </a:p>
@@ -2632,9 +2635,10 @@
           <a:lstStyle/>
           <a:p>
             <a:r>
-              <a:rPr lang="en-US"/>
+              <a:rPr lang="en-US" smtClean="0"/>
               <a:t>Click to edit Master title style</a:t>
             </a:r>
+            <a:endParaRPr lang="en-US"/>
           </a:p>
         </p:txBody>
       </p:sp>
@@ -2665,37 +2669,38 @@
           <a:p>
             <a:pPr lvl="0"/>
             <a:r>
-              <a:rPr lang="en-US"/>
+              <a:rPr lang="en-US" smtClean="0"/>
               <a:t>Click to edit Master text styles</a:t>
             </a:r>
           </a:p>
           <a:p>
             <a:pPr lvl="1"/>
             <a:r>
-              <a:rPr lang="en-US"/>
+              <a:rPr lang="en-US" smtClean="0"/>
               <a:t>Second level</a:t>
             </a:r>
           </a:p>
           <a:p>
             <a:pPr lvl="2"/>
             <a:r>
-              <a:rPr lang="en-US"/>
+              <a:rPr lang="en-US" smtClean="0"/>
               <a:t>Third level</a:t>
             </a:r>
           </a:p>
           <a:p>
             <a:pPr lvl="3"/>
             <a:r>
-              <a:rPr lang="en-US"/>
+              <a:rPr lang="en-US" smtClean="0"/>
               <a:t>Fourth level</a:t>
             </a:r>
           </a:p>
           <a:p>
             <a:pPr lvl="4"/>
             <a:r>
-              <a:rPr lang="en-US"/>
+              <a:rPr lang="en-US" smtClean="0"/>
               <a:t>Fifth level</a:t>
             </a:r>
+            <a:endParaRPr lang="en-US"/>
           </a:p>
         </p:txBody>
       </p:sp>
@@ -2734,7 +2739,7 @@
           <a:p>
             <a:fld id="{5BCAD085-E8A6-8845-BD4E-CB4CCA059FC4}" type="datetimeFigureOut">
               <a:rPr lang="en-US" smtClean="0"/>
-              <a:t>8/20/26</a:t>
+              <a:t>1/27/13</a:t>
             </a:fld>
             <a:endParaRPr lang="en-US"/>
           </a:p>
@@ -3093,7 +3098,7 @@
 </file>
 
 <file path=ppt/slides/slide1.xml><?xml version="1.0" encoding="utf-8"?>
-<p:sld xmlns:a="http://schemas.openxmlformats.org/drawingml/2006/main" xmlns:r="http://schemas.openxmlformats.org/officeDocument/2006/relationships" xmlns:p="http://schemas.openxmlformats.org/presentationml/2006/main">
+<p:sld xmlns:a="http://schemas.openxmlformats.org/drawingml/2006/main" xmlns:p="http://schemas.openxmlformats.org/presentationml/2006/main" xmlns:r="http://schemas.openxmlformats.org/officeDocument/2006/relationships">
   <p:cSld>
     <p:spTree>
       <p:nvGrpSpPr>
@@ -3101,14 +3106,7 @@
         <p:cNvGrpSpPr/>
         <p:nvPr/>
       </p:nvGrpSpPr>
-      <p:grpSpPr>
-        <a:xfrm>
-          <a:off x="0" y="0"/>
-          <a:ext cx="0" cy="0"/>
-          <a:chOff x="0" y="0"/>
-          <a:chExt cx="0" cy="0"/>
-        </a:xfrm>
-      </p:grpSpPr>
+      <p:grpSpPr/>
       <p:sp>
         <p:nvSpPr>
           <p:cNvPr id="2" name="TextBox 1"/>
@@ -3126,7 +3124,7 @@
           <a:noFill/>
         </p:spPr>
         <p:txBody>
-          <a:bodyPr wrap="square" lIns="0" tIns="0" rIns="0" bIns="0">
+          <a:bodyPr wrap="square" lIns="0" rIns="0" tIns="0" bIns="0">
             <a:spAutoFit/>
           </a:bodyPr>
           <a:lstStyle/>
@@ -3160,7 +3158,7 @@
           <a:noFill/>
         </p:spPr>
         <p:txBody>
-          <a:bodyPr wrap="square" lIns="0" tIns="0" rIns="0" bIns="0">
+          <a:bodyPr wrap="square" lIns="0" rIns="0" tIns="0" bIns="0">
             <a:spAutoFit/>
           </a:bodyPr>
           <a:lstStyle/>
@@ -3195,7 +3193,7 @@
           <a:noFill/>
         </p:spPr>
         <p:txBody>
-          <a:bodyPr wrap="square" lIns="0" tIns="0" rIns="0" bIns="0">
+          <a:bodyPr wrap="square" lIns="0" rIns="0" tIns="0" bIns="0">
             <a:spAutoFit/>
           </a:bodyPr>
           <a:lstStyle/>
@@ -3230,7 +3228,7 @@
           <a:noFill/>
         </p:spPr>
         <p:txBody>
-          <a:bodyPr wrap="square" lIns="0" tIns="0" rIns="0" bIns="0">
+          <a:bodyPr wrap="square" lIns="0" rIns="0" tIns="0" bIns="0">
             <a:spAutoFit/>
           </a:bodyPr>
           <a:lstStyle/>
@@ -3257,7 +3255,7 @@
 </file>
 
 <file path=ppt/slides/slide10.xml><?xml version="1.0" encoding="utf-8"?>
-<p:sld xmlns:a="http://schemas.openxmlformats.org/drawingml/2006/main" xmlns:r="http://schemas.openxmlformats.org/officeDocument/2006/relationships" xmlns:p="http://schemas.openxmlformats.org/presentationml/2006/main">
+<p:sld xmlns:a="http://schemas.openxmlformats.org/drawingml/2006/main" xmlns:p="http://schemas.openxmlformats.org/presentationml/2006/main" xmlns:r="http://schemas.openxmlformats.org/officeDocument/2006/relationships">
   <p:cSld>
     <p:spTree>
       <p:nvGrpSpPr>
@@ -3265,14 +3263,7 @@
         <p:cNvGrpSpPr/>
         <p:nvPr/>
       </p:nvGrpSpPr>
-      <p:grpSpPr>
-        <a:xfrm>
-          <a:off x="0" y="0"/>
-          <a:ext cx="0" cy="0"/>
-          <a:chOff x="0" y="0"/>
-          <a:chExt cx="0" cy="0"/>
-        </a:xfrm>
-      </p:grpSpPr>
+      <p:grpSpPr/>
       <p:sp>
         <p:nvSpPr>
           <p:cNvPr id="2" name="TextBox 1"/>
@@ -3290,7 +3281,7 @@
           <a:noFill/>
         </p:spPr>
         <p:txBody>
-          <a:bodyPr wrap="square" lIns="0" tIns="0" rIns="0" bIns="0">
+          <a:bodyPr wrap="square" lIns="0" rIns="0" tIns="0" bIns="0">
             <a:spAutoFit/>
           </a:bodyPr>
           <a:lstStyle/>
@@ -3324,7 +3315,7 @@
           <a:noFill/>
         </p:spPr>
         <p:txBody>
-          <a:bodyPr wrap="square" lIns="0" tIns="0" rIns="0" bIns="0">
+          <a:bodyPr wrap="square" lIns="0" rIns="0" tIns="0" bIns="0">
             <a:spAutoFit/>
           </a:bodyPr>
           <a:lstStyle/>
@@ -3358,7 +3349,7 @@
           <a:noFill/>
         </p:spPr>
         <p:txBody>
-          <a:bodyPr wrap="square" lIns="0" tIns="0" rIns="0" bIns="0">
+          <a:bodyPr wrap="square" lIns="0" rIns="0" tIns="0" bIns="0">
             <a:spAutoFit/>
           </a:bodyPr>
           <a:lstStyle/>
@@ -3393,7 +3384,7 @@
           <a:noFill/>
         </p:spPr>
         <p:txBody>
-          <a:bodyPr wrap="square" lIns="0" tIns="0" rIns="0" bIns="0">
+          <a:bodyPr wrap="square" lIns="0" rIns="0" tIns="0" bIns="0">
             <a:spAutoFit/>
           </a:bodyPr>
           <a:lstStyle/>
@@ -3427,7 +3418,7 @@
           <a:noFill/>
         </p:spPr>
         <p:txBody>
-          <a:bodyPr wrap="square" lIns="0" tIns="0" rIns="0" bIns="0">
+          <a:bodyPr wrap="square" lIns="0" rIns="0" tIns="0" bIns="0">
             <a:spAutoFit/>
           </a:bodyPr>
           <a:lstStyle/>
@@ -3667,7 +3658,7 @@
 </file>
 
 <file path=ppt/slides/slide11.xml><?xml version="1.0" encoding="utf-8"?>
-<p:sld xmlns:a="http://schemas.openxmlformats.org/drawingml/2006/main" xmlns:r="http://schemas.openxmlformats.org/officeDocument/2006/relationships" xmlns:p="http://schemas.openxmlformats.org/presentationml/2006/main">
+<p:sld xmlns:a="http://schemas.openxmlformats.org/drawingml/2006/main" xmlns:p="http://schemas.openxmlformats.org/presentationml/2006/main" xmlns:r="http://schemas.openxmlformats.org/officeDocument/2006/relationships">
   <p:cSld>
     <p:spTree>
       <p:nvGrpSpPr>
@@ -3675,14 +3666,7 @@
         <p:cNvGrpSpPr/>
         <p:nvPr/>
       </p:nvGrpSpPr>
-      <p:grpSpPr>
-        <a:xfrm>
-          <a:off x="0" y="0"/>
-          <a:ext cx="0" cy="0"/>
-          <a:chOff x="0" y="0"/>
-          <a:chExt cx="0" cy="0"/>
-        </a:xfrm>
-      </p:grpSpPr>
+      <p:grpSpPr/>
       <p:sp>
         <p:nvSpPr>
           <p:cNvPr id="2" name="TextBox 1"/>
@@ -3700,7 +3684,7 @@
           <a:noFill/>
         </p:spPr>
         <p:txBody>
-          <a:bodyPr wrap="square" lIns="0" tIns="0" rIns="0" bIns="0">
+          <a:bodyPr wrap="square" lIns="0" rIns="0" tIns="0" bIns="0">
             <a:spAutoFit/>
           </a:bodyPr>
           <a:lstStyle/>
@@ -3734,7 +3718,7 @@
           <a:noFill/>
         </p:spPr>
         <p:txBody>
-          <a:bodyPr wrap="square" lIns="0" tIns="0" rIns="0" bIns="0">
+          <a:bodyPr wrap="square" lIns="0" rIns="0" tIns="0" bIns="0">
             <a:spAutoFit/>
           </a:bodyPr>
           <a:lstStyle/>
@@ -3768,7 +3752,7 @@
           <a:noFill/>
         </p:spPr>
         <p:txBody>
-          <a:bodyPr wrap="square" lIns="0" tIns="0" rIns="0" bIns="0">
+          <a:bodyPr wrap="square" lIns="0" rIns="0" tIns="0" bIns="0">
             <a:spAutoFit/>
           </a:bodyPr>
           <a:lstStyle/>
@@ -3803,7 +3787,7 @@
           <a:noFill/>
         </p:spPr>
         <p:txBody>
-          <a:bodyPr wrap="square" lIns="0" tIns="0" rIns="0" bIns="0">
+          <a:bodyPr wrap="square" lIns="0" rIns="0" tIns="0" bIns="0">
             <a:spAutoFit/>
           </a:bodyPr>
           <a:lstStyle/>
@@ -3839,32 +3823,14 @@
                 <a:tableStyleId>{5C22544A-7EE6-4342-B048-85BDC9FD1C3A}</a:tableStyleId>
               </a:tblPr>
               <a:tblGrid>
-                <a:gridCol w="1374988">
-                  <a:extLst>
-                    <a:ext uri="{9D8B030D-6E8A-4147-A177-3AD203B41FA5}">
-                      <a16:colId xmlns:a16="http://schemas.microsoft.com/office/drawing/2014/main" val="20000"/>
-                    </a:ext>
-                  </a:extLst>
-                </a:gridCol>
-                <a:gridCol w="4723341">
-                  <a:extLst>
-                    <a:ext uri="{9D8B030D-6E8A-4147-A177-3AD203B41FA5}">
-                      <a16:colId xmlns:a16="http://schemas.microsoft.com/office/drawing/2014/main" val="20001"/>
-                    </a:ext>
-                  </a:extLst>
-                </a:gridCol>
-                <a:gridCol w="4959510">
-                  <a:extLst>
-                    <a:ext uri="{9D8B030D-6E8A-4147-A177-3AD203B41FA5}">
-                      <a16:colId xmlns:a16="http://schemas.microsoft.com/office/drawing/2014/main" val="20002"/>
-                    </a:ext>
-                  </a:extLst>
-                </a:gridCol>
+                <a:gridCol w="1374988"/>
+                <a:gridCol w="4723341"/>
+                <a:gridCol w="4959510"/>
               </a:tblGrid>
               <a:tr h="321818">
                 <a:tc>
                   <a:txBody>
-                    <a:bodyPr/>
+                    <a:bodyPr wrap="square"/>
                     <a:lstStyle/>
                     <a:p>
                       <a:pPr algn="ctr"/>
@@ -3887,7 +3853,7 @@
                 </a:tc>
                 <a:tc>
                   <a:txBody>
-                    <a:bodyPr/>
+                    <a:bodyPr wrap="square"/>
                     <a:lstStyle/>
                     <a:p>
                       <a:pPr algn="ctr"/>
@@ -3910,7 +3876,7 @@
                 </a:tc>
                 <a:tc>
                   <a:txBody>
-                    <a:bodyPr/>
+                    <a:bodyPr wrap="square"/>
                     <a:lstStyle/>
                     <a:p>
                       <a:pPr algn="ctr"/>
@@ -3931,16 +3897,11 @@
                     </a:solidFill>
                   </a:tcPr>
                 </a:tc>
-                <a:extLst>
-                  <a:ext uri="{0D108BD9-81ED-4DB2-BD59-A6C34878D82A}">
-                    <a16:rowId xmlns:a16="http://schemas.microsoft.com/office/drawing/2014/main" val="10000"/>
-                  </a:ext>
-                </a:extLst>
               </a:tr>
               <a:tr h="579628">
                 <a:tc>
                   <a:txBody>
-                    <a:bodyPr/>
+                    <a:bodyPr wrap="square"/>
                     <a:lstStyle/>
                     <a:p>
                       <a:pPr algn="ctr"/>
@@ -3972,7 +3933,7 @@
                 </a:tc>
                 <a:tc>
                   <a:txBody>
-                    <a:bodyPr/>
+                    <a:bodyPr wrap="square"/>
                     <a:lstStyle/>
                     <a:p>
                       <a:pPr algn="l"/>
@@ -3995,7 +3956,7 @@
                 </a:tc>
                 <a:tc>
                   <a:txBody>
-                    <a:bodyPr/>
+                    <a:bodyPr wrap="square"/>
                     <a:lstStyle/>
                     <a:p>
                       <a:pPr algn="l"/>
@@ -4016,20 +3977,14 @@
                     </a:solidFill>
                   </a:tcPr>
                 </a:tc>
-                <a:extLst>
-                  <a:ext uri="{0D108BD9-81ED-4DB2-BD59-A6C34878D82A}">
-                    <a16:rowId xmlns:a16="http://schemas.microsoft.com/office/drawing/2014/main" val="10001"/>
-                  </a:ext>
-                </a:extLst>
               </a:tr>
               <a:tr h="321818">
                 <a:tc>
                   <a:txBody>
-                    <a:bodyPr/>
-                    <a:lstStyle/>
-                    <a:p>
-                      <a:pPr algn="ctr"/>
-                      <a:endParaRPr/>
+                    <a:bodyPr wrap="square"/>
+                    <a:lstStyle/>
+                    <a:p>
+                      <a:pPr algn="ctr"/>
                     </a:p>
                   </a:txBody>
                   <a:tcPr marL="64008" marR="64008" marT="32004" marB="32004" anchor="ctr">
@@ -4040,7 +3995,7 @@
                 </a:tc>
                 <a:tc>
                   <a:txBody>
-                    <a:bodyPr/>
+                    <a:bodyPr wrap="square"/>
                     <a:lstStyle/>
                     <a:p>
                       <a:pPr algn="l"/>
@@ -4063,7 +4018,7 @@
                 </a:tc>
                 <a:tc>
                   <a:txBody>
-                    <a:bodyPr/>
+                    <a:bodyPr wrap="square"/>
                     <a:lstStyle/>
                     <a:p>
                       <a:pPr algn="l"/>
@@ -4084,16 +4039,11 @@
                     </a:solidFill>
                   </a:tcPr>
                 </a:tc>
-                <a:extLst>
-                  <a:ext uri="{0D108BD9-81ED-4DB2-BD59-A6C34878D82A}">
-                    <a16:rowId xmlns:a16="http://schemas.microsoft.com/office/drawing/2014/main" val="10002"/>
-                  </a:ext>
-                </a:extLst>
               </a:tr>
               <a:tr h="579628">
                 <a:tc>
                   <a:txBody>
-                    <a:bodyPr/>
+                    <a:bodyPr wrap="square"/>
                     <a:lstStyle/>
                     <a:p>
                       <a:pPr algn="ctr"/>
@@ -4125,7 +4075,7 @@
                 </a:tc>
                 <a:tc>
                   <a:txBody>
-                    <a:bodyPr/>
+                    <a:bodyPr wrap="square"/>
                     <a:lstStyle/>
                     <a:p>
                       <a:pPr algn="l"/>
@@ -4148,7 +4098,7 @@
                 </a:tc>
                 <a:tc>
                   <a:txBody>
-                    <a:bodyPr/>
+                    <a:bodyPr wrap="square"/>
                     <a:lstStyle/>
                     <a:p>
                       <a:pPr algn="l"/>
@@ -4169,20 +4119,14 @@
                     </a:solidFill>
                   </a:tcPr>
                 </a:tc>
-                <a:extLst>
-                  <a:ext uri="{0D108BD9-81ED-4DB2-BD59-A6C34878D82A}">
-                    <a16:rowId xmlns:a16="http://schemas.microsoft.com/office/drawing/2014/main" val="10003"/>
-                  </a:ext>
-                </a:extLst>
               </a:tr>
               <a:tr h="321818">
                 <a:tc>
                   <a:txBody>
-                    <a:bodyPr/>
-                    <a:lstStyle/>
-                    <a:p>
-                      <a:pPr algn="ctr"/>
-                      <a:endParaRPr/>
+                    <a:bodyPr wrap="square"/>
+                    <a:lstStyle/>
+                    <a:p>
+                      <a:pPr algn="ctr"/>
                     </a:p>
                   </a:txBody>
                   <a:tcPr marL="64008" marR="64008" marT="32004" marB="32004" anchor="ctr">
@@ -4193,7 +4137,7 @@
                 </a:tc>
                 <a:tc>
                   <a:txBody>
-                    <a:bodyPr/>
+                    <a:bodyPr wrap="square"/>
                     <a:lstStyle/>
                     <a:p>
                       <a:pPr algn="l"/>
@@ -4216,7 +4160,7 @@
                 </a:tc>
                 <a:tc>
                   <a:txBody>
-                    <a:bodyPr/>
+                    <a:bodyPr wrap="square"/>
                     <a:lstStyle/>
                     <a:p>
                       <a:pPr algn="l"/>
@@ -4237,16 +4181,11 @@
                     </a:solidFill>
                   </a:tcPr>
                 </a:tc>
-                <a:extLst>
-                  <a:ext uri="{0D108BD9-81ED-4DB2-BD59-A6C34878D82A}">
-                    <a16:rowId xmlns:a16="http://schemas.microsoft.com/office/drawing/2014/main" val="10004"/>
-                  </a:ext>
-                </a:extLst>
               </a:tr>
               <a:tr h="321818">
                 <a:tc>
                   <a:txBody>
-                    <a:bodyPr/>
+                    <a:bodyPr wrap="square"/>
                     <a:lstStyle/>
                     <a:p>
                       <a:pPr algn="ctr"/>
@@ -4278,7 +4217,7 @@
                 </a:tc>
                 <a:tc>
                   <a:txBody>
-                    <a:bodyPr/>
+                    <a:bodyPr wrap="square"/>
                     <a:lstStyle/>
                     <a:p>
                       <a:pPr algn="l"/>
@@ -4301,7 +4240,7 @@
                 </a:tc>
                 <a:tc>
                   <a:txBody>
-                    <a:bodyPr/>
+                    <a:bodyPr wrap="square"/>
                     <a:lstStyle/>
                     <a:p>
                       <a:pPr algn="l"/>
@@ -4322,20 +4261,14 @@
                     </a:solidFill>
                   </a:tcPr>
                 </a:tc>
-                <a:extLst>
-                  <a:ext uri="{0D108BD9-81ED-4DB2-BD59-A6C34878D82A}">
-                    <a16:rowId xmlns:a16="http://schemas.microsoft.com/office/drawing/2014/main" val="10005"/>
-                  </a:ext>
-                </a:extLst>
               </a:tr>
               <a:tr h="321818">
                 <a:tc>
                   <a:txBody>
-                    <a:bodyPr/>
-                    <a:lstStyle/>
-                    <a:p>
-                      <a:pPr algn="ctr"/>
-                      <a:endParaRPr/>
+                    <a:bodyPr wrap="square"/>
+                    <a:lstStyle/>
+                    <a:p>
+                      <a:pPr algn="ctr"/>
                     </a:p>
                   </a:txBody>
                   <a:tcPr marL="64008" marR="64008" marT="32004" marB="32004" anchor="ctr">
@@ -4346,7 +4279,7 @@
                 </a:tc>
                 <a:tc>
                   <a:txBody>
-                    <a:bodyPr/>
+                    <a:bodyPr wrap="square"/>
                     <a:lstStyle/>
                     <a:p>
                       <a:pPr algn="l"/>
@@ -4369,7 +4302,7 @@
                 </a:tc>
                 <a:tc>
                   <a:txBody>
-                    <a:bodyPr/>
+                    <a:bodyPr wrap="square"/>
                     <a:lstStyle/>
                     <a:p>
                       <a:pPr algn="l"/>
@@ -4390,11 +4323,6 @@
                     </a:solidFill>
                   </a:tcPr>
                 </a:tc>
-                <a:extLst>
-                  <a:ext uri="{0D108BD9-81ED-4DB2-BD59-A6C34878D82A}">
-                    <a16:rowId xmlns:a16="http://schemas.microsoft.com/office/drawing/2014/main" val="10006"/>
-                  </a:ext>
-                </a:extLst>
               </a:tr>
             </a:tbl>
           </a:graphicData>
@@ -4417,7 +4345,7 @@
           <a:noFill/>
         </p:spPr>
         <p:txBody>
-          <a:bodyPr wrap="square" lIns="0" tIns="0" rIns="0" bIns="0">
+          <a:bodyPr wrap="square" lIns="0" rIns="0" tIns="0" bIns="0">
             <a:spAutoFit/>
           </a:bodyPr>
           <a:lstStyle/>
@@ -4475,7 +4403,6 @@
           <a:lstStyle/>
           <a:p>
             <a:pPr algn="ctr"/>
-            <a:endParaRPr/>
           </a:p>
         </p:txBody>
       </p:sp>
@@ -4488,7 +4415,7 @@
 </file>
 
 <file path=ppt/slides/slide12.xml><?xml version="1.0" encoding="utf-8"?>
-<p:sld xmlns:a="http://schemas.openxmlformats.org/drawingml/2006/main" xmlns:r="http://schemas.openxmlformats.org/officeDocument/2006/relationships" xmlns:p="http://schemas.openxmlformats.org/presentationml/2006/main">
+<p:sld xmlns:a="http://schemas.openxmlformats.org/drawingml/2006/main" xmlns:p="http://schemas.openxmlformats.org/presentationml/2006/main" xmlns:r="http://schemas.openxmlformats.org/officeDocument/2006/relationships">
   <p:cSld>
     <p:spTree>
       <p:nvGrpSpPr>
@@ -4496,14 +4423,7 @@
         <p:cNvGrpSpPr/>
         <p:nvPr/>
       </p:nvGrpSpPr>
-      <p:grpSpPr>
-        <a:xfrm>
-          <a:off x="0" y="0"/>
-          <a:ext cx="0" cy="0"/>
-          <a:chOff x="0" y="0"/>
-          <a:chExt cx="0" cy="0"/>
-        </a:xfrm>
-      </p:grpSpPr>
+      <p:grpSpPr/>
       <p:sp>
         <p:nvSpPr>
           <p:cNvPr id="2" name="TextBox 1"/>
@@ -4521,7 +4441,7 @@
           <a:noFill/>
         </p:spPr>
         <p:txBody>
-          <a:bodyPr wrap="square" lIns="0" tIns="0" rIns="0" bIns="0">
+          <a:bodyPr wrap="square" lIns="0" rIns="0" tIns="0" bIns="0">
             <a:spAutoFit/>
           </a:bodyPr>
           <a:lstStyle/>
@@ -4555,7 +4475,7 @@
           <a:noFill/>
         </p:spPr>
         <p:txBody>
-          <a:bodyPr wrap="square" lIns="0" tIns="0" rIns="0" bIns="0">
+          <a:bodyPr wrap="square" lIns="0" rIns="0" tIns="0" bIns="0">
             <a:spAutoFit/>
           </a:bodyPr>
           <a:lstStyle/>
@@ -4589,7 +4509,7 @@
           <a:noFill/>
         </p:spPr>
         <p:txBody>
-          <a:bodyPr wrap="square" lIns="0" tIns="0" rIns="0" bIns="0">
+          <a:bodyPr wrap="square" lIns="0" rIns="0" tIns="0" bIns="0">
             <a:spAutoFit/>
           </a:bodyPr>
           <a:lstStyle/>
@@ -4624,7 +4544,7 @@
           <a:noFill/>
         </p:spPr>
         <p:txBody>
-          <a:bodyPr wrap="square" lIns="0" tIns="0" rIns="0" bIns="0">
+          <a:bodyPr wrap="square" lIns="0" rIns="0" tIns="0" bIns="0">
             <a:spAutoFit/>
           </a:bodyPr>
           <a:lstStyle/>
@@ -4660,39 +4580,15 @@
                 <a:tableStyleId>{5C22544A-7EE6-4342-B048-85BDC9FD1C3A}</a:tableStyleId>
               </a:tblPr>
               <a:tblGrid>
-                <a:gridCol w="1163835">
-                  <a:extLst>
-                    <a:ext uri="{9D8B030D-6E8A-4147-A177-3AD203B41FA5}">
-                      <a16:colId xmlns:a16="http://schemas.microsoft.com/office/drawing/2014/main" val="20000"/>
-                    </a:ext>
-                  </a:extLst>
-                </a:gridCol>
-                <a:gridCol w="4433326">
-                  <a:extLst>
-                    <a:ext uri="{9D8B030D-6E8A-4147-A177-3AD203B41FA5}">
-                      <a16:colId xmlns:a16="http://schemas.microsoft.com/office/drawing/2014/main" val="20001"/>
-                    </a:ext>
-                  </a:extLst>
-                </a:gridCol>
-                <a:gridCol w="2750671">
-                  <a:extLst>
-                    <a:ext uri="{9D8B030D-6E8A-4147-A177-3AD203B41FA5}">
-                      <a16:colId xmlns:a16="http://schemas.microsoft.com/office/drawing/2014/main" val="20002"/>
-                    </a:ext>
-                  </a:extLst>
-                </a:gridCol>
-                <a:gridCol w="2710007">
-                  <a:extLst>
-                    <a:ext uri="{9D8B030D-6E8A-4147-A177-3AD203B41FA5}">
-                      <a16:colId xmlns:a16="http://schemas.microsoft.com/office/drawing/2014/main" val="20003"/>
-                    </a:ext>
-                  </a:extLst>
-                </a:gridCol>
+                <a:gridCol w="1163835"/>
+                <a:gridCol w="4433326"/>
+                <a:gridCol w="2750671"/>
+                <a:gridCol w="2710007"/>
               </a:tblGrid>
               <a:tr h="321818">
                 <a:tc>
                   <a:txBody>
-                    <a:bodyPr/>
+                    <a:bodyPr wrap="square"/>
                     <a:lstStyle/>
                     <a:p>
                       <a:pPr algn="ctr"/>
@@ -4715,7 +4611,7 @@
                 </a:tc>
                 <a:tc>
                   <a:txBody>
-                    <a:bodyPr/>
+                    <a:bodyPr wrap="square"/>
                     <a:lstStyle/>
                     <a:p>
                       <a:pPr algn="ctr"/>
@@ -4738,7 +4634,7 @@
                 </a:tc>
                 <a:tc>
                   <a:txBody>
-                    <a:bodyPr/>
+                    <a:bodyPr wrap="square"/>
                     <a:lstStyle/>
                     <a:p>
                       <a:pPr algn="ctr"/>
@@ -4761,7 +4657,7 @@
                 </a:tc>
                 <a:tc>
                   <a:txBody>
-                    <a:bodyPr/>
+                    <a:bodyPr wrap="square"/>
                     <a:lstStyle/>
                     <a:p>
                       <a:pPr algn="ctr"/>
@@ -4782,16 +4678,11 @@
                     </a:solidFill>
                   </a:tcPr>
                 </a:tc>
-                <a:extLst>
-                  <a:ext uri="{0D108BD9-81ED-4DB2-BD59-A6C34878D82A}">
-                    <a16:rowId xmlns:a16="http://schemas.microsoft.com/office/drawing/2014/main" val="10000"/>
-                  </a:ext>
-                </a:extLst>
               </a:tr>
               <a:tr h="579628">
                 <a:tc>
                   <a:txBody>
-                    <a:bodyPr/>
+                    <a:bodyPr wrap="square"/>
                     <a:lstStyle/>
                     <a:p>
                       <a:pPr algn="ctr"/>
@@ -4814,7 +4705,7 @@
                 </a:tc>
                 <a:tc>
                   <a:txBody>
-                    <a:bodyPr/>
+                    <a:bodyPr wrap="square"/>
                     <a:lstStyle/>
                     <a:p>
                       <a:pPr algn="l"/>
@@ -4837,7 +4728,7 @@
                 </a:tc>
                 <a:tc>
                   <a:txBody>
-                    <a:bodyPr/>
+                    <a:bodyPr wrap="square"/>
                     <a:lstStyle/>
                     <a:p>
                       <a:pPr algn="l"/>
@@ -4860,7 +4751,7 @@
                 </a:tc>
                 <a:tc>
                   <a:txBody>
-                    <a:bodyPr/>
+                    <a:bodyPr wrap="square"/>
                     <a:lstStyle/>
                     <a:p>
                       <a:pPr algn="l"/>
@@ -4881,16 +4772,11 @@
                     </a:solidFill>
                   </a:tcPr>
                 </a:tc>
-                <a:extLst>
-                  <a:ext uri="{0D108BD9-81ED-4DB2-BD59-A6C34878D82A}">
-                    <a16:rowId xmlns:a16="http://schemas.microsoft.com/office/drawing/2014/main" val="10001"/>
-                  </a:ext>
-                </a:extLst>
               </a:tr>
               <a:tr h="321818">
                 <a:tc>
                   <a:txBody>
-                    <a:bodyPr/>
+                    <a:bodyPr wrap="square"/>
                     <a:lstStyle/>
                     <a:p>
                       <a:pPr algn="ctr"/>
@@ -4913,7 +4799,7 @@
                 </a:tc>
                 <a:tc>
                   <a:txBody>
-                    <a:bodyPr/>
+                    <a:bodyPr wrap="square"/>
                     <a:lstStyle/>
                     <a:p>
                       <a:pPr algn="l"/>
@@ -4936,7 +4822,7 @@
                 </a:tc>
                 <a:tc>
                   <a:txBody>
-                    <a:bodyPr/>
+                    <a:bodyPr wrap="square"/>
                     <a:lstStyle/>
                     <a:p>
                       <a:pPr algn="l"/>
@@ -4959,7 +4845,7 @@
                 </a:tc>
                 <a:tc>
                   <a:txBody>
-                    <a:bodyPr/>
+                    <a:bodyPr wrap="square"/>
                     <a:lstStyle/>
                     <a:p>
                       <a:pPr algn="l"/>
@@ -4980,16 +4866,11 @@
                     </a:solidFill>
                   </a:tcPr>
                 </a:tc>
-                <a:extLst>
-                  <a:ext uri="{0D108BD9-81ED-4DB2-BD59-A6C34878D82A}">
-                    <a16:rowId xmlns:a16="http://schemas.microsoft.com/office/drawing/2014/main" val="10002"/>
-                  </a:ext>
-                </a:extLst>
               </a:tr>
               <a:tr h="579628">
                 <a:tc>
                   <a:txBody>
-                    <a:bodyPr/>
+                    <a:bodyPr wrap="square"/>
                     <a:lstStyle/>
                     <a:p>
                       <a:pPr algn="ctr"/>
@@ -5012,7 +4893,7 @@
                 </a:tc>
                 <a:tc>
                   <a:txBody>
-                    <a:bodyPr/>
+                    <a:bodyPr wrap="square"/>
                     <a:lstStyle/>
                     <a:p>
                       <a:pPr algn="l"/>
@@ -5035,7 +4916,7 @@
                 </a:tc>
                 <a:tc>
                   <a:txBody>
-                    <a:bodyPr/>
+                    <a:bodyPr wrap="square"/>
                     <a:lstStyle/>
                     <a:p>
                       <a:pPr algn="l"/>
@@ -5058,7 +4939,7 @@
                 </a:tc>
                 <a:tc>
                   <a:txBody>
-                    <a:bodyPr/>
+                    <a:bodyPr wrap="square"/>
                     <a:lstStyle/>
                     <a:p>
                       <a:pPr algn="l"/>
@@ -5079,16 +4960,11 @@
                     </a:solidFill>
                   </a:tcPr>
                 </a:tc>
-                <a:extLst>
-                  <a:ext uri="{0D108BD9-81ED-4DB2-BD59-A6C34878D82A}">
-                    <a16:rowId xmlns:a16="http://schemas.microsoft.com/office/drawing/2014/main" val="10003"/>
-                  </a:ext>
-                </a:extLst>
               </a:tr>
               <a:tr h="579628">
                 <a:tc>
                   <a:txBody>
-                    <a:bodyPr/>
+                    <a:bodyPr wrap="square"/>
                     <a:lstStyle/>
                     <a:p>
                       <a:pPr algn="ctr"/>
@@ -5111,7 +4987,7 @@
                 </a:tc>
                 <a:tc>
                   <a:txBody>
-                    <a:bodyPr/>
+                    <a:bodyPr wrap="square"/>
                     <a:lstStyle/>
                     <a:p>
                       <a:pPr algn="l"/>
@@ -5134,7 +5010,7 @@
                 </a:tc>
                 <a:tc>
                   <a:txBody>
-                    <a:bodyPr/>
+                    <a:bodyPr wrap="square"/>
                     <a:lstStyle/>
                     <a:p>
                       <a:pPr algn="l"/>
@@ -5157,7 +5033,7 @@
                 </a:tc>
                 <a:tc>
                   <a:txBody>
-                    <a:bodyPr/>
+                    <a:bodyPr wrap="square"/>
                     <a:lstStyle/>
                     <a:p>
                       <a:pPr algn="l"/>
@@ -5178,16 +5054,11 @@
                     </a:solidFill>
                   </a:tcPr>
                 </a:tc>
-                <a:extLst>
-                  <a:ext uri="{0D108BD9-81ED-4DB2-BD59-A6C34878D82A}">
-                    <a16:rowId xmlns:a16="http://schemas.microsoft.com/office/drawing/2014/main" val="10004"/>
-                  </a:ext>
-                </a:extLst>
               </a:tr>
               <a:tr h="579628">
                 <a:tc>
                   <a:txBody>
-                    <a:bodyPr/>
+                    <a:bodyPr wrap="square"/>
                     <a:lstStyle/>
                     <a:p>
                       <a:pPr algn="ctr"/>
@@ -5210,7 +5081,7 @@
                 </a:tc>
                 <a:tc>
                   <a:txBody>
-                    <a:bodyPr/>
+                    <a:bodyPr wrap="square"/>
                     <a:lstStyle/>
                     <a:p>
                       <a:pPr algn="l"/>
@@ -5233,7 +5104,7 @@
                 </a:tc>
                 <a:tc>
                   <a:txBody>
-                    <a:bodyPr/>
+                    <a:bodyPr wrap="square"/>
                     <a:lstStyle/>
                     <a:p>
                       <a:pPr algn="l"/>
@@ -5256,7 +5127,7 @@
                 </a:tc>
                 <a:tc>
                   <a:txBody>
-                    <a:bodyPr/>
+                    <a:bodyPr wrap="square"/>
                     <a:lstStyle/>
                     <a:p>
                       <a:pPr algn="l"/>
@@ -5277,11 +5148,6 @@
                     </a:solidFill>
                   </a:tcPr>
                 </a:tc>
-                <a:extLst>
-                  <a:ext uri="{0D108BD9-81ED-4DB2-BD59-A6C34878D82A}">
-                    <a16:rowId xmlns:a16="http://schemas.microsoft.com/office/drawing/2014/main" val="10005"/>
-                  </a:ext>
-                </a:extLst>
               </a:tr>
             </a:tbl>
           </a:graphicData>
@@ -5304,7 +5170,7 @@
           <a:noFill/>
         </p:spPr>
         <p:txBody>
-          <a:bodyPr wrap="square" lIns="0" tIns="0" rIns="0" bIns="0">
+          <a:bodyPr wrap="square" lIns="0" rIns="0" tIns="0" bIns="0">
             <a:spAutoFit/>
           </a:bodyPr>
           <a:lstStyle/>
@@ -5339,7 +5205,7 @@
 </file>
 
 <file path=ppt/slides/slide13.xml><?xml version="1.0" encoding="utf-8"?>
-<p:sld xmlns:a="http://schemas.openxmlformats.org/drawingml/2006/main" xmlns:r="http://schemas.openxmlformats.org/officeDocument/2006/relationships" xmlns:p="http://schemas.openxmlformats.org/presentationml/2006/main">
+<p:sld xmlns:a="http://schemas.openxmlformats.org/drawingml/2006/main" xmlns:p="http://schemas.openxmlformats.org/presentationml/2006/main" xmlns:r="http://schemas.openxmlformats.org/officeDocument/2006/relationships">
   <p:cSld>
     <p:spTree>
       <p:nvGrpSpPr>
@@ -5347,14 +5213,7 @@
         <p:cNvGrpSpPr/>
         <p:nvPr/>
       </p:nvGrpSpPr>
-      <p:grpSpPr>
-        <a:xfrm>
-          <a:off x="0" y="0"/>
-          <a:ext cx="0" cy="0"/>
-          <a:chOff x="0" y="0"/>
-          <a:chExt cx="0" cy="0"/>
-        </a:xfrm>
-      </p:grpSpPr>
+      <p:grpSpPr/>
       <p:sp>
         <p:nvSpPr>
           <p:cNvPr id="2" name="TextBox 1"/>
@@ -5372,7 +5231,7 @@
           <a:noFill/>
         </p:spPr>
         <p:txBody>
-          <a:bodyPr wrap="square" lIns="0" tIns="0" rIns="0" bIns="0">
+          <a:bodyPr wrap="square" lIns="0" rIns="0" tIns="0" bIns="0">
             <a:spAutoFit/>
           </a:bodyPr>
           <a:lstStyle/>
@@ -5406,7 +5265,7 @@
           <a:noFill/>
         </p:spPr>
         <p:txBody>
-          <a:bodyPr wrap="square" lIns="0" tIns="0" rIns="0" bIns="0">
+          <a:bodyPr wrap="square" lIns="0" rIns="0" tIns="0" bIns="0">
             <a:spAutoFit/>
           </a:bodyPr>
           <a:lstStyle/>
@@ -5440,7 +5299,7 @@
           <a:noFill/>
         </p:spPr>
         <p:txBody>
-          <a:bodyPr wrap="square" lIns="0" tIns="0" rIns="0" bIns="0">
+          <a:bodyPr wrap="square" lIns="0" rIns="0" tIns="0" bIns="0">
             <a:spAutoFit/>
           </a:bodyPr>
           <a:lstStyle/>
@@ -5475,7 +5334,7 @@
           <a:noFill/>
         </p:spPr>
         <p:txBody>
-          <a:bodyPr wrap="square" lIns="0" tIns="0" rIns="0" bIns="0">
+          <a:bodyPr wrap="square" lIns="0" rIns="0" tIns="0" bIns="0">
             <a:spAutoFit/>
           </a:bodyPr>
           <a:lstStyle/>
@@ -5487,748 +5346,1527 @@
                 </a:solidFill>
                 <a:latin typeface="Microsoft JhengHei"/>
               </a:rPr>
-              <a:t>決策｜投資報酬判準：先確認問題，再決定投入深度</a:t>
-            </a:r>
-          </a:p>
-        </p:txBody>
-      </p:sp>
-      <p:graphicFrame>
-        <p:nvGraphicFramePr>
-          <p:cNvPr id="6" name="Table 5"/>
-          <p:cNvGraphicFramePr>
-            <a:graphicFrameLocks noGrp="1"/>
-          </p:cNvGraphicFramePr>
+              <a:t>決策｜如果只看 ROI：先確認問題，再決定投入深度</a:t>
+            </a:r>
+          </a:p>
+        </p:txBody>
+      </p:sp>
+      <p:sp>
+        <p:nvSpPr>
+          <p:cNvPr id="6" name="Rounded Rectangle 5"/>
+          <p:cNvSpPr/>
           <p:nvPr/>
-        </p:nvGraphicFramePr>
-        <p:xfrm>
-          <a:off x="566928" y="1709928"/>
-          <a:ext cx="11057839" cy="2574544"/>
-        </p:xfrm>
-        <a:graphic>
-          <a:graphicData uri="http://schemas.openxmlformats.org/drawingml/2006/table">
-            <a:tbl>
-              <a:tblPr firstRow="1" bandRow="1">
-                <a:tableStyleId>{5C22544A-7EE6-4342-B048-85BDC9FD1C3A}</a:tableStyleId>
-              </a:tblPr>
-              <a:tblGrid>
-                <a:gridCol w="3395785">
-                  <a:extLst>
-                    <a:ext uri="{9D8B030D-6E8A-4147-A177-3AD203B41FA5}">
-                      <a16:colId xmlns:a16="http://schemas.microsoft.com/office/drawing/2014/main" val="20000"/>
-                    </a:ext>
-                  </a:extLst>
-                </a:gridCol>
-                <a:gridCol w="2539863">
-                  <a:extLst>
-                    <a:ext uri="{9D8B030D-6E8A-4147-A177-3AD203B41FA5}">
-                      <a16:colId xmlns:a16="http://schemas.microsoft.com/office/drawing/2014/main" val="20001"/>
-                    </a:ext>
-                  </a:extLst>
-                </a:gridCol>
-                <a:gridCol w="5122191">
-                  <a:extLst>
-                    <a:ext uri="{9D8B030D-6E8A-4147-A177-3AD203B41FA5}">
-                      <a16:colId xmlns:a16="http://schemas.microsoft.com/office/drawing/2014/main" val="20002"/>
-                    </a:ext>
-                  </a:extLst>
-                </a:gridCol>
-              </a:tblGrid>
-              <a:tr h="321818">
-                <a:tc>
-                  <a:txBody>
-                    <a:bodyPr/>
-                    <a:lstStyle/>
-                    <a:p>
-                      <a:pPr algn="ctr"/>
-                      <a:r>
-                        <a:rPr sz="1400" b="1">
-                          <a:solidFill>
-                            <a:srgbClr val="1A2B3C"/>
-                          </a:solidFill>
-                          <a:latin typeface="Microsoft JhengHei"/>
-                        </a:rPr>
-                        <a:t>判斷情境</a:t>
-                      </a:r>
-                    </a:p>
-                  </a:txBody>
-                  <a:tcPr marL="64008" marR="64008" marT="32004" marB="32004" anchor="ctr">
-                    <a:solidFill>
-                      <a:srgbClr val="ECEFF2"/>
-                    </a:solidFill>
-                  </a:tcPr>
-                </a:tc>
-                <a:tc>
-                  <a:txBody>
-                    <a:bodyPr/>
-                    <a:lstStyle/>
-                    <a:p>
-                      <a:pPr algn="ctr"/>
-                      <a:r>
-                        <a:rPr sz="1400" b="1">
-                          <a:solidFill>
-                            <a:srgbClr val="1A2B3C"/>
-                          </a:solidFill>
-                          <a:latin typeface="Microsoft JhengHei"/>
-                        </a:rPr>
-                        <a:t>條件</a:t>
-                      </a:r>
-                    </a:p>
-                  </a:txBody>
-                  <a:tcPr marL="64008" marR="64008" marT="32004" marB="32004" anchor="ctr">
-                    <a:solidFill>
-                      <a:srgbClr val="ECEFF2"/>
-                    </a:solidFill>
-                  </a:tcPr>
-                </a:tc>
-                <a:tc>
-                  <a:txBody>
-                    <a:bodyPr/>
-                    <a:lstStyle/>
-                    <a:p>
-                      <a:pPr algn="ctr"/>
-                      <a:r>
-                        <a:rPr sz="1400" b="1">
-                          <a:solidFill>
-                            <a:srgbClr val="1A2B3C"/>
-                          </a:solidFill>
-                          <a:latin typeface="Microsoft JhengHei"/>
-                        </a:rPr>
-                        <a:t>出口</a:t>
-                      </a:r>
-                    </a:p>
-                  </a:txBody>
-                  <a:tcPr marL="64008" marR="64008" marT="32004" marB="32004" anchor="ctr">
-                    <a:solidFill>
-                      <a:srgbClr val="ECEFF2"/>
-                    </a:solidFill>
-                  </a:tcPr>
-                </a:tc>
-                <a:extLst>
-                  <a:ext uri="{0D108BD9-81ED-4DB2-BD59-A6C34878D82A}">
-                    <a16:rowId xmlns:a16="http://schemas.microsoft.com/office/drawing/2014/main" val="10000"/>
-                  </a:ext>
-                </a:extLst>
-              </a:tr>
-              <a:tr h="321818">
-                <a:tc>
-                  <a:txBody>
-                    <a:bodyPr/>
-                    <a:lstStyle/>
-                    <a:p>
-                      <a:pPr algn="l"/>
-                      <a:r>
-                        <a:rPr sz="1400" b="1">
-                          <a:solidFill>
-                            <a:srgbClr val="C0392B"/>
-                          </a:solidFill>
-                          <a:latin typeface="Microsoft JhengHei"/>
-                        </a:rPr>
-                        <a:t>沒有</a:t>
-                      </a:r>
-                      <a:r>
-                        <a:rPr sz="1400" b="0">
-                          <a:solidFill>
-                            <a:srgbClr val="22303F"/>
-                          </a:solidFill>
-                          <a:latin typeface="Microsoft JhengHei"/>
-                        </a:rPr>
-                        <a:t>明確業務問題、受影響服務與 owner</a:t>
-                      </a:r>
-                    </a:p>
-                  </a:txBody>
-                  <a:tcPr marL="64008" marR="64008" marT="32004" marB="32004" anchor="ctr">
-                    <a:solidFill>
-                      <a:srgbClr val="FFFFFF"/>
-                    </a:solidFill>
-                  </a:tcPr>
-                </a:tc>
-                <a:tc>
-                  <a:txBody>
-                    <a:bodyPr/>
-                    <a:lstStyle/>
-                    <a:p>
-                      <a:pPr algn="l"/>
-                      <a:r>
-                        <a:rPr sz="1400" b="0">
-                          <a:solidFill>
-                            <a:srgbClr val="22303F"/>
-                          </a:solidFill>
-                          <a:latin typeface="Microsoft JhengHei"/>
-                        </a:rPr>
-                        <a:t>—</a:t>
-                      </a:r>
-                    </a:p>
-                  </a:txBody>
-                  <a:tcPr marL="64008" marR="64008" marT="32004" marB="32004" anchor="ctr">
-                    <a:solidFill>
-                      <a:srgbClr val="FFFFFF"/>
-                    </a:solidFill>
-                  </a:tcPr>
-                </a:tc>
-                <a:tc>
-                  <a:txBody>
-                    <a:bodyPr/>
-                    <a:lstStyle/>
-                    <a:p>
-                      <a:pPr algn="l"/>
-                      <a:r>
-                        <a:rPr sz="1400" b="1">
-                          <a:solidFill>
-                            <a:srgbClr val="C0392B"/>
-                          </a:solidFill>
-                          <a:latin typeface="Microsoft JhengHei"/>
-                        </a:rPr>
-                        <a:t>Option 0</a:t>
-                      </a:r>
-                      <a:r>
-                        <a:rPr sz="1400" b="0">
-                          <a:solidFill>
-                            <a:srgbClr val="22303F"/>
-                          </a:solidFill>
-                          <a:latin typeface="Microsoft JhengHei"/>
-                        </a:rPr>
-                        <a:t>：保留現況與 PoC framework，定期重審需求</a:t>
-                      </a:r>
-                    </a:p>
-                  </a:txBody>
-                  <a:tcPr marL="64008" marR="64008" marT="32004" marB="32004" anchor="ctr">
-                    <a:solidFill>
-                      <a:srgbClr val="FFFFFF"/>
-                    </a:solidFill>
-                  </a:tcPr>
-                </a:tc>
-                <a:extLst>
-                  <a:ext uri="{0D108BD9-81ED-4DB2-BD59-A6C34878D82A}">
-                    <a16:rowId xmlns:a16="http://schemas.microsoft.com/office/drawing/2014/main" val="10001"/>
-                  </a:ext>
-                </a:extLst>
-              </a:tr>
-              <a:tr h="321818">
-                <a:tc>
-                  <a:txBody>
-                    <a:bodyPr/>
-                    <a:lstStyle/>
-                    <a:p>
-                      <a:pPr algn="l"/>
-                      <a:r>
-                        <a:rPr sz="1400" b="1">
-                          <a:solidFill>
-                            <a:srgbClr val="C0392B"/>
-                          </a:solidFill>
-                          <a:latin typeface="Microsoft JhengHei"/>
-                        </a:rPr>
-                        <a:t>MySQL 應用</a:t>
-                      </a:r>
-                      <a:r>
-                        <a:rPr sz="1400" b="0">
-                          <a:solidFill>
-                            <a:srgbClr val="22303F"/>
-                          </a:solidFill>
-                          <a:latin typeface="Microsoft JhengHei"/>
-                        </a:rPr>
-                        <a:t>為主要範圍</a:t>
-                      </a:r>
-                    </a:p>
-                  </a:txBody>
-                  <a:tcPr marL="64008" marR="64008" marT="32004" marB="32004" anchor="ctr">
-                    <a:solidFill>
-                      <a:srgbClr val="F7F9FA"/>
-                    </a:solidFill>
-                  </a:tcPr>
-                </a:tc>
-                <a:tc>
-                  <a:txBody>
-                    <a:bodyPr/>
-                    <a:lstStyle/>
-                    <a:p>
-                      <a:pPr algn="l"/>
-                      <a:r>
-                        <a:rPr sz="1400" b="0">
-                          <a:solidFill>
-                            <a:srgbClr val="22303F"/>
-                          </a:solidFill>
-                          <a:latin typeface="Microsoft JhengHei"/>
-                        </a:rPr>
-                        <a:t>相容性／還原／DDL 尚未知</a:t>
-                      </a:r>
-                    </a:p>
-                  </a:txBody>
-                  <a:tcPr marL="64008" marR="64008" marT="32004" marB="32004" anchor="ctr">
-                    <a:solidFill>
-                      <a:srgbClr val="F7F9FA"/>
-                    </a:solidFill>
-                  </a:tcPr>
-                </a:tc>
-                <a:tc>
-                  <a:txBody>
-                    <a:bodyPr/>
-                    <a:lstStyle/>
-                    <a:p>
-                      <a:pPr algn="l"/>
-                      <a:r>
-                        <a:rPr sz="1400" b="1">
-                          <a:solidFill>
-                            <a:srgbClr val="C0392B"/>
-                          </a:solidFill>
-                          <a:latin typeface="Microsoft JhengHei"/>
-                        </a:rPr>
-                        <a:t>Option A</a:t>
-                      </a:r>
-                      <a:r>
-                        <a:rPr sz="1400" b="0">
-                          <a:solidFill>
-                            <a:srgbClr val="22303F"/>
-                          </a:solidFill>
-                          <a:latin typeface="Microsoft JhengHei"/>
-                        </a:rPr>
-                        <a:t>：技術補件</a:t>
-                      </a:r>
-                    </a:p>
-                  </a:txBody>
-                  <a:tcPr marL="64008" marR="64008" marT="32004" marB="32004" anchor="ctr">
-                    <a:solidFill>
-                      <a:srgbClr val="F7F9FA"/>
-                    </a:solidFill>
-                  </a:tcPr>
-                </a:tc>
-                <a:extLst>
-                  <a:ext uri="{0D108BD9-81ED-4DB2-BD59-A6C34878D82A}">
-                    <a16:rowId xmlns:a16="http://schemas.microsoft.com/office/drawing/2014/main" val="10002"/>
-                  </a:ext>
-                </a:extLst>
-              </a:tr>
-              <a:tr h="321818">
-                <a:tc>
-                  <a:txBody>
-                    <a:bodyPr/>
-                    <a:lstStyle/>
-                    <a:p>
-                      <a:pPr algn="l"/>
-                      <a:endParaRPr/>
-                    </a:p>
-                  </a:txBody>
-                  <a:tcPr marL="64008" marR="64008" marT="32004" marB="32004" anchor="ctr">
-                    <a:solidFill>
-                      <a:srgbClr val="FFFFFF"/>
-                    </a:solidFill>
-                  </a:tcPr>
-                </a:tc>
-                <a:tc>
-                  <a:txBody>
-                    <a:bodyPr/>
-                    <a:lstStyle/>
-                    <a:p>
-                      <a:pPr algn="l"/>
-                      <a:r>
-                        <a:rPr sz="1400" b="0">
-                          <a:solidFill>
-                            <a:srgbClr val="22303F"/>
-                          </a:solidFill>
-                          <a:latin typeface="Microsoft JhengHei"/>
-                        </a:rPr>
-                        <a:t>技術門檻通過且效益可量化</a:t>
-                      </a:r>
-                    </a:p>
-                  </a:txBody>
-                  <a:tcPr marL="64008" marR="64008" marT="32004" marB="32004" anchor="ctr">
-                    <a:solidFill>
-                      <a:srgbClr val="FFFFFF"/>
-                    </a:solidFill>
-                  </a:tcPr>
-                </a:tc>
-                <a:tc>
-                  <a:txBody>
-                    <a:bodyPr/>
-                    <a:lstStyle/>
-                    <a:p>
-                      <a:pPr algn="l"/>
-                      <a:r>
-                        <a:rPr sz="1400" b="1">
-                          <a:solidFill>
-                            <a:srgbClr val="C0392B"/>
-                          </a:solidFill>
-                          <a:latin typeface="Microsoft JhengHei"/>
-                        </a:rPr>
-                        <a:t>Option B</a:t>
-                      </a:r>
-                      <a:r>
-                        <a:rPr sz="1400" b="0">
-                          <a:solidFill>
-                            <a:srgbClr val="22303F"/>
-                          </a:solidFill>
-                          <a:latin typeface="Microsoft JhengHei"/>
-                        </a:rPr>
-                        <a:t>：TiDB Pilot</a:t>
-                      </a:r>
-                    </a:p>
-                  </a:txBody>
-                  <a:tcPr marL="64008" marR="64008" marT="32004" marB="32004" anchor="ctr">
-                    <a:solidFill>
-                      <a:srgbClr val="FFFFFF"/>
-                    </a:solidFill>
-                  </a:tcPr>
-                </a:tc>
-                <a:extLst>
-                  <a:ext uri="{0D108BD9-81ED-4DB2-BD59-A6C34878D82A}">
-                    <a16:rowId xmlns:a16="http://schemas.microsoft.com/office/drawing/2014/main" val="10003"/>
-                  </a:ext>
-                </a:extLst>
-              </a:tr>
-              <a:tr h="321818">
-                <a:tc>
-                  <a:txBody>
-                    <a:bodyPr/>
-                    <a:lstStyle/>
-                    <a:p>
-                      <a:pPr algn="l"/>
-                      <a:endParaRPr/>
-                    </a:p>
-                  </a:txBody>
-                  <a:tcPr marL="64008" marR="64008" marT="32004" marB="32004" anchor="ctr">
-                    <a:solidFill>
-                      <a:srgbClr val="F7F9FA"/>
-                    </a:solidFill>
-                  </a:tcPr>
-                </a:tc>
-                <a:tc>
-                  <a:txBody>
-                    <a:bodyPr/>
-                    <a:lstStyle/>
-                    <a:p>
-                      <a:pPr algn="l"/>
-                      <a:r>
-                        <a:rPr sz="1400" b="0">
-                          <a:solidFill>
-                            <a:srgbClr val="22303F"/>
-                          </a:solidFill>
-                          <a:latin typeface="Microsoft JhengHei"/>
-                        </a:rPr>
-                        <a:t>TiDB 不適配或極低延遲優先</a:t>
-                      </a:r>
-                    </a:p>
-                  </a:txBody>
-                  <a:tcPr marL="64008" marR="64008" marT="32004" marB="32004" anchor="ctr">
-                    <a:solidFill>
-                      <a:srgbClr val="F7F9FA"/>
-                    </a:solidFill>
-                  </a:tcPr>
-                </a:tc>
-                <a:tc>
-                  <a:txBody>
-                    <a:bodyPr/>
-                    <a:lstStyle/>
-                    <a:p>
-                      <a:pPr algn="l"/>
-                      <a:r>
-                        <a:rPr sz="1400" b="1">
-                          <a:solidFill>
-                            <a:srgbClr val="C0392B"/>
-                          </a:solidFill>
-                          <a:latin typeface="Microsoft JhengHei"/>
-                        </a:rPr>
-                        <a:t>Option C</a:t>
-                      </a:r>
-                      <a:r>
-                        <a:rPr sz="1400" b="0">
-                          <a:solidFill>
-                            <a:srgbClr val="22303F"/>
-                          </a:solidFill>
-                          <a:latin typeface="Microsoft JhengHei"/>
-                        </a:rPr>
-                        <a:t>：PXC 目標式對照</a:t>
-                      </a:r>
-                    </a:p>
-                  </a:txBody>
-                  <a:tcPr marL="64008" marR="64008" marT="32004" marB="32004" anchor="ctr">
-                    <a:solidFill>
-                      <a:srgbClr val="F7F9FA"/>
-                    </a:solidFill>
-                  </a:tcPr>
-                </a:tc>
-                <a:extLst>
-                  <a:ext uri="{0D108BD9-81ED-4DB2-BD59-A6C34878D82A}">
-                    <a16:rowId xmlns:a16="http://schemas.microsoft.com/office/drawing/2014/main" val="10004"/>
-                  </a:ext>
-                </a:extLst>
-              </a:tr>
-              <a:tr h="321818">
-                <a:tc>
-                  <a:txBody>
-                    <a:bodyPr/>
-                    <a:lstStyle/>
-                    <a:p>
-                      <a:pPr algn="l"/>
-                      <a:r>
-                        <a:rPr sz="1400" b="1">
-                          <a:solidFill>
-                            <a:srgbClr val="C0392B"/>
-                          </a:solidFill>
-                          <a:latin typeface="Microsoft JhengHei"/>
-                        </a:rPr>
-                        <a:t>PostgreSQL</a:t>
-                      </a:r>
-                      <a:r>
-                        <a:rPr sz="1400" b="0">
-                          <a:solidFill>
-                            <a:srgbClr val="22303F"/>
-                          </a:solidFill>
-                          <a:latin typeface="Microsoft JhengHei"/>
-                        </a:rPr>
-                        <a:t> 高關鍵度／AI 應用有需求</a:t>
-                      </a:r>
-                    </a:p>
-                  </a:txBody>
-                  <a:tcPr marL="64008" marR="64008" marT="32004" marB="32004" anchor="ctr">
-                    <a:solidFill>
-                      <a:srgbClr val="FFFFFF"/>
-                    </a:solidFill>
-                  </a:tcPr>
-                </a:tc>
-                <a:tc>
-                  <a:txBody>
-                    <a:bodyPr/>
-                    <a:lstStyle/>
-                    <a:p>
-                      <a:pPr algn="l"/>
-                      <a:r>
-                        <a:rPr sz="1400" b="0">
-                          <a:solidFill>
-                            <a:srgbClr val="22303F"/>
-                          </a:solidFill>
-                          <a:latin typeface="Microsoft JhengHei"/>
-                        </a:rPr>
-                        <a:t>—</a:t>
-                      </a:r>
-                    </a:p>
-                  </a:txBody>
-                  <a:tcPr marL="64008" marR="64008" marT="32004" marB="32004" anchor="ctr">
-                    <a:solidFill>
-                      <a:srgbClr val="FFFFFF"/>
-                    </a:solidFill>
-                  </a:tcPr>
-                </a:tc>
-                <a:tc>
-                  <a:txBody>
-                    <a:bodyPr/>
-                    <a:lstStyle/>
-                    <a:p>
-                      <a:pPr algn="l"/>
-                      <a:r>
-                        <a:rPr sz="1400" b="1">
-                          <a:solidFill>
-                            <a:srgbClr val="C0392B"/>
-                          </a:solidFill>
-                          <a:latin typeface="Microsoft JhengHei"/>
-                        </a:rPr>
-                        <a:t>Option C</a:t>
-                      </a:r>
-                      <a:r>
-                        <a:rPr sz="1400" b="0">
-                          <a:solidFill>
-                            <a:srgbClr val="22303F"/>
-                          </a:solidFill>
-                          <a:latin typeface="Microsoft JhengHei"/>
-                        </a:rPr>
-                        <a:t>：依需求驗 YugabyteDB 或 CockroachDB</a:t>
-                      </a:r>
-                    </a:p>
-                  </a:txBody>
-                  <a:tcPr marL="64008" marR="64008" marT="32004" marB="32004" anchor="ctr">
-                    <a:solidFill>
-                      <a:srgbClr val="FFFFFF"/>
-                    </a:solidFill>
-                  </a:tcPr>
-                </a:tc>
-                <a:extLst>
-                  <a:ext uri="{0D108BD9-81ED-4DB2-BD59-A6C34878D82A}">
-                    <a16:rowId xmlns:a16="http://schemas.microsoft.com/office/drawing/2014/main" val="10005"/>
-                  </a:ext>
-                </a:extLst>
-              </a:tr>
-              <a:tr h="321818">
-                <a:tc>
-                  <a:txBody>
-                    <a:bodyPr/>
-                    <a:lstStyle/>
-                    <a:p>
-                      <a:pPr algn="l"/>
-                      <a:r>
-                        <a:rPr sz="1400" b="1">
-                          <a:solidFill>
-                            <a:srgbClr val="C0392B"/>
-                          </a:solidFill>
-                          <a:latin typeface="Microsoft JhengHei"/>
-                        </a:rPr>
-                        <a:t>平台化或跨區</a:t>
-                      </a:r>
-                      <a:r>
-                        <a:rPr sz="1400" b="0">
-                          <a:solidFill>
-                            <a:srgbClr val="22303F"/>
-                          </a:solidFill>
-                          <a:latin typeface="Microsoft JhengHei"/>
-                        </a:rPr>
-                        <a:t>需求成立</a:t>
-                      </a:r>
-                    </a:p>
-                  </a:txBody>
-                  <a:tcPr marL="64008" marR="64008" marT="32004" marB="32004" anchor="ctr">
-                    <a:solidFill>
-                      <a:srgbClr val="F7F9FA"/>
-                    </a:solidFill>
-                  </a:tcPr>
-                </a:tc>
-                <a:tc>
-                  <a:txBody>
-                    <a:bodyPr/>
-                    <a:lstStyle/>
-                    <a:p>
-                      <a:pPr algn="l"/>
-                      <a:r>
-                        <a:rPr sz="1400" b="0">
-                          <a:solidFill>
-                            <a:srgbClr val="22303F"/>
-                          </a:solidFill>
-                          <a:latin typeface="Microsoft JhengHei"/>
-                        </a:rPr>
-                        <a:t>重複申請／維運成本高</a:t>
-                      </a:r>
-                    </a:p>
-                  </a:txBody>
-                  <a:tcPr marL="64008" marR="64008" marT="32004" marB="32004" anchor="ctr">
-                    <a:solidFill>
-                      <a:srgbClr val="F7F9FA"/>
-                    </a:solidFill>
-                  </a:tcPr>
-                </a:tc>
-                <a:tc>
-                  <a:txBody>
-                    <a:bodyPr/>
-                    <a:lstStyle/>
-                    <a:p>
-                      <a:pPr algn="l"/>
-                      <a:r>
-                        <a:rPr sz="1400" b="1">
-                          <a:solidFill>
-                            <a:srgbClr val="C0392B"/>
-                          </a:solidFill>
-                          <a:latin typeface="Microsoft JhengHei"/>
-                        </a:rPr>
-                        <a:t>Option D</a:t>
-                      </a:r>
-                      <a:r>
-                        <a:rPr sz="1400" b="0">
-                          <a:solidFill>
-                            <a:srgbClr val="22303F"/>
-                          </a:solidFill>
-                          <a:latin typeface="Microsoft JhengHei"/>
-                        </a:rPr>
-                        <a:t>：Database Self-Service</a:t>
-                      </a:r>
-                    </a:p>
-                  </a:txBody>
-                  <a:tcPr marL="64008" marR="64008" marT="32004" marB="32004" anchor="ctr">
-                    <a:solidFill>
-                      <a:srgbClr val="F7F9FA"/>
-                    </a:solidFill>
-                  </a:tcPr>
-                </a:tc>
-                <a:extLst>
-                  <a:ext uri="{0D108BD9-81ED-4DB2-BD59-A6C34878D82A}">
-                    <a16:rowId xmlns:a16="http://schemas.microsoft.com/office/drawing/2014/main" val="10006"/>
-                  </a:ext>
-                </a:extLst>
-              </a:tr>
-              <a:tr h="321818">
-                <a:tc>
-                  <a:txBody>
-                    <a:bodyPr/>
-                    <a:lstStyle/>
-                    <a:p>
-                      <a:pPr algn="l"/>
-                      <a:endParaRPr/>
-                    </a:p>
-                  </a:txBody>
-                  <a:tcPr marL="64008" marR="64008" marT="32004" marB="32004" anchor="ctr">
-                    <a:solidFill>
-                      <a:srgbClr val="FFFFFF"/>
-                    </a:solidFill>
-                  </a:tcPr>
-                </a:tc>
-                <a:tc>
-                  <a:txBody>
-                    <a:bodyPr/>
-                    <a:lstStyle/>
-                    <a:p>
-                      <a:pPr algn="l"/>
-                      <a:r>
-                        <a:rPr sz="1400" b="0">
-                          <a:solidFill>
-                            <a:srgbClr val="22303F"/>
-                          </a:solidFill>
-                          <a:latin typeface="Microsoft JhengHei"/>
-                        </a:rPr>
-                        <a:t>DR／EDC 活化</a:t>
-                      </a:r>
-                    </a:p>
-                  </a:txBody>
-                  <a:tcPr marL="64008" marR="64008" marT="32004" marB="32004" anchor="ctr">
-                    <a:solidFill>
-                      <a:srgbClr val="FFFFFF"/>
-                    </a:solidFill>
-                  </a:tcPr>
-                </a:tc>
-                <a:tc>
-                  <a:txBody>
-                    <a:bodyPr/>
-                    <a:lstStyle/>
-                    <a:p>
-                      <a:pPr algn="l"/>
-                      <a:r>
-                        <a:rPr sz="1400" b="1">
-                          <a:solidFill>
-                            <a:srgbClr val="C0392B"/>
-                          </a:solidFill>
-                          <a:latin typeface="Microsoft JhengHei"/>
-                        </a:rPr>
-                        <a:t>Option D</a:t>
-                      </a:r>
-                      <a:r>
-                        <a:rPr sz="1400" b="0">
-                          <a:solidFill>
-                            <a:srgbClr val="22303F"/>
-                          </a:solidFill>
-                          <a:latin typeface="Microsoft JhengHei"/>
-                        </a:rPr>
-                        <a:t>：先 A/S，需異地讀再評估 A/A-RO</a:t>
-                      </a:r>
-                    </a:p>
-                  </a:txBody>
-                  <a:tcPr marL="64008" marR="64008" marT="32004" marB="32004" anchor="ctr">
-                    <a:solidFill>
-                      <a:srgbClr val="FFFFFF"/>
-                    </a:solidFill>
-                  </a:tcPr>
-                </a:tc>
-                <a:extLst>
-                  <a:ext uri="{0D108BD9-81ED-4DB2-BD59-A6C34878D82A}">
-                    <a16:rowId xmlns:a16="http://schemas.microsoft.com/office/drawing/2014/main" val="10007"/>
-                  </a:ext>
-                </a:extLst>
-              </a:tr>
-            </a:tbl>
-          </a:graphicData>
-        </a:graphic>
-      </p:graphicFrame>
-      <p:sp>
-        <p:nvSpPr>
-          <p:cNvPr id="7" name="TextBox 6"/>
+        </p:nvSpPr>
+        <p:spPr>
+          <a:xfrm>
+            <a:off x="566928" y="1709928"/>
+            <a:ext cx="3206773" cy="448056"/>
+          </a:xfrm>
+          <a:prstGeom prst="roundRect">
+            <a:avLst/>
+          </a:prstGeom>
+          <a:solidFill>
+            <a:srgbClr val="F2F5F8"/>
+          </a:solidFill>
+          <a:ln w="9525">
+            <a:solidFill>
+              <a:srgbClr val="B9C4CF"/>
+            </a:solidFill>
+          </a:ln>
+          <a:effectLst/>
+        </p:spPr>
+        <p:style>
+          <a:lnRef idx="1">
+            <a:schemeClr val="accent1"/>
+          </a:lnRef>
+          <a:fillRef idx="3">
+            <a:schemeClr val="accent1"/>
+          </a:fillRef>
+          <a:effectRef idx="2">
+            <a:schemeClr val="accent1"/>
+          </a:effectRef>
+          <a:fontRef idx="minor">
+            <a:schemeClr val="lt1"/>
+          </a:fontRef>
+        </p:style>
+        <p:txBody>
+          <a:bodyPr rtlCol="0" anchor="ctr" wrap="square" lIns="73152" rIns="73152" tIns="36576" bIns="36576"/>
+          <a:lstStyle/>
+          <a:p>
+            <a:pPr algn="l"/>
+            <a:r>
+              <a:rPr sz="1200" b="1">
+                <a:solidFill>
+                  <a:srgbClr val="C0392B"/>
+                </a:solidFill>
+                <a:latin typeface="Microsoft JhengHei"/>
+              </a:rPr>
+              <a:t>沒有</a:t>
+            </a:r>
+            <a:r>
+              <a:rPr sz="1200" b="1">
+                <a:solidFill>
+                  <a:srgbClr val="22303F"/>
+                </a:solidFill>
+                <a:latin typeface="Microsoft JhengHei"/>
+              </a:rPr>
+              <a:t>明確業務問題、維持現狀</a:t>
+            </a:r>
+          </a:p>
+        </p:txBody>
+      </p:sp>
+      <p:sp>
+        <p:nvSpPr>
+          <p:cNvPr id="7" name="Rounded Rectangle 6"/>
+          <p:cNvSpPr/>
+          <p:nvPr/>
+        </p:nvSpPr>
+        <p:spPr>
+          <a:xfrm>
+            <a:off x="566928" y="2249424"/>
+            <a:ext cx="3206773" cy="1527048"/>
+          </a:xfrm>
+          <a:prstGeom prst="roundRect">
+            <a:avLst/>
+          </a:prstGeom>
+          <a:solidFill>
+            <a:srgbClr val="F2F5F8"/>
+          </a:solidFill>
+          <a:ln w="9525">
+            <a:solidFill>
+              <a:srgbClr val="B9C4CF"/>
+            </a:solidFill>
+          </a:ln>
+          <a:effectLst/>
+        </p:spPr>
+        <p:style>
+          <a:lnRef idx="1">
+            <a:schemeClr val="accent1"/>
+          </a:lnRef>
+          <a:fillRef idx="3">
+            <a:schemeClr val="accent1"/>
+          </a:fillRef>
+          <a:effectRef idx="2">
+            <a:schemeClr val="accent1"/>
+          </a:effectRef>
+          <a:fontRef idx="minor">
+            <a:schemeClr val="lt1"/>
+          </a:fontRef>
+        </p:style>
+        <p:txBody>
+          <a:bodyPr rtlCol="0" anchor="ctr" wrap="square" lIns="73152" rIns="73152" tIns="36576" bIns="36576"/>
+          <a:lstStyle/>
+          <a:p>
+            <a:pPr algn="l"/>
+            <a:r>
+              <a:rPr sz="1200" b="1">
+                <a:solidFill>
+                  <a:srgbClr val="C0392B"/>
+                </a:solidFill>
+                <a:latin typeface="Microsoft JhengHei"/>
+              </a:rPr>
+              <a:t>MySQL 應用</a:t>
+            </a:r>
+            <a:r>
+              <a:rPr sz="1200" b="1">
+                <a:solidFill>
+                  <a:srgbClr val="22303F"/>
+                </a:solidFill>
+                <a:latin typeface="Microsoft JhengHei"/>
+              </a:rPr>
+              <a:t>為主要範圍</a:t>
+            </a:r>
+          </a:p>
+        </p:txBody>
+      </p:sp>
+      <p:sp>
+        <p:nvSpPr>
+          <p:cNvPr id="8" name="Rounded Rectangle 7"/>
+          <p:cNvSpPr/>
+          <p:nvPr/>
+        </p:nvSpPr>
+        <p:spPr>
+          <a:xfrm>
+            <a:off x="566928" y="3867912"/>
+            <a:ext cx="3206773" cy="448056"/>
+          </a:xfrm>
+          <a:prstGeom prst="roundRect">
+            <a:avLst/>
+          </a:prstGeom>
+          <a:solidFill>
+            <a:srgbClr val="F2F5F8"/>
+          </a:solidFill>
+          <a:ln w="9525">
+            <a:solidFill>
+              <a:srgbClr val="B9C4CF"/>
+            </a:solidFill>
+          </a:ln>
+          <a:effectLst/>
+        </p:spPr>
+        <p:style>
+          <a:lnRef idx="1">
+            <a:schemeClr val="accent1"/>
+          </a:lnRef>
+          <a:fillRef idx="3">
+            <a:schemeClr val="accent1"/>
+          </a:fillRef>
+          <a:effectRef idx="2">
+            <a:schemeClr val="accent1"/>
+          </a:effectRef>
+          <a:fontRef idx="minor">
+            <a:schemeClr val="lt1"/>
+          </a:fontRef>
+        </p:style>
+        <p:txBody>
+          <a:bodyPr rtlCol="0" anchor="ctr" wrap="square" lIns="73152" rIns="73152" tIns="36576" bIns="36576"/>
+          <a:lstStyle/>
+          <a:p>
+            <a:pPr algn="l"/>
+            <a:r>
+              <a:rPr sz="1200" b="1">
+                <a:solidFill>
+                  <a:srgbClr val="C0392B"/>
+                </a:solidFill>
+                <a:latin typeface="Microsoft JhengHei"/>
+              </a:rPr>
+              <a:t>PostgreSQL</a:t>
+            </a:r>
+            <a:r>
+              <a:rPr sz="1200" b="1">
+                <a:solidFill>
+                  <a:srgbClr val="22303F"/>
+                </a:solidFill>
+                <a:latin typeface="Microsoft JhengHei"/>
+              </a:rPr>
+              <a:t> 高關鍵度／AI 應用有需求</a:t>
+            </a:r>
+          </a:p>
+        </p:txBody>
+      </p:sp>
+      <p:sp>
+        <p:nvSpPr>
+          <p:cNvPr id="9" name="Rounded Rectangle 8"/>
+          <p:cNvSpPr/>
+          <p:nvPr/>
+        </p:nvSpPr>
+        <p:spPr>
+          <a:xfrm>
+            <a:off x="566928" y="4407408"/>
+            <a:ext cx="3206773" cy="987552"/>
+          </a:xfrm>
+          <a:prstGeom prst="roundRect">
+            <a:avLst/>
+          </a:prstGeom>
+          <a:solidFill>
+            <a:srgbClr val="F2F5F8"/>
+          </a:solidFill>
+          <a:ln w="9525">
+            <a:solidFill>
+              <a:srgbClr val="B9C4CF"/>
+            </a:solidFill>
+          </a:ln>
+          <a:effectLst/>
+        </p:spPr>
+        <p:style>
+          <a:lnRef idx="1">
+            <a:schemeClr val="accent1"/>
+          </a:lnRef>
+          <a:fillRef idx="3">
+            <a:schemeClr val="accent1"/>
+          </a:fillRef>
+          <a:effectRef idx="2">
+            <a:schemeClr val="accent1"/>
+          </a:effectRef>
+          <a:fontRef idx="minor">
+            <a:schemeClr val="lt1"/>
+          </a:fontRef>
+        </p:style>
+        <p:txBody>
+          <a:bodyPr rtlCol="0" anchor="ctr" wrap="square" lIns="73152" rIns="73152" tIns="36576" bIns="36576"/>
+          <a:lstStyle/>
+          <a:p>
+            <a:pPr algn="l"/>
+            <a:r>
+              <a:rPr sz="1200" b="1">
+                <a:solidFill>
+                  <a:srgbClr val="C0392B"/>
+                </a:solidFill>
+                <a:latin typeface="Microsoft JhengHei"/>
+              </a:rPr>
+              <a:t>平台化或跨區</a:t>
+            </a:r>
+            <a:r>
+              <a:rPr sz="1200" b="1">
+                <a:solidFill>
+                  <a:srgbClr val="22303F"/>
+                </a:solidFill>
+                <a:latin typeface="Microsoft JhengHei"/>
+              </a:rPr>
+              <a:t>需求成立</a:t>
+            </a:r>
+          </a:p>
+        </p:txBody>
+      </p:sp>
+      <p:sp>
+        <p:nvSpPr>
+          <p:cNvPr id="10" name="Right Arrow 9"/>
+          <p:cNvSpPr/>
+          <p:nvPr/>
+        </p:nvSpPr>
+        <p:spPr>
+          <a:xfrm>
+            <a:off x="3819421" y="1883664"/>
+            <a:ext cx="2983065" cy="100584"/>
+          </a:xfrm>
+          <a:prstGeom prst="rightArrow">
+            <a:avLst/>
+          </a:prstGeom>
+          <a:solidFill>
+            <a:srgbClr val="B9C4CF"/>
+          </a:solidFill>
+          <a:ln>
+            <a:noFill/>
+          </a:ln>
+          <a:effectLst/>
+        </p:spPr>
+        <p:style>
+          <a:lnRef idx="1">
+            <a:schemeClr val="accent1"/>
+          </a:lnRef>
+          <a:fillRef idx="3">
+            <a:schemeClr val="accent1"/>
+          </a:fillRef>
+          <a:effectRef idx="2">
+            <a:schemeClr val="accent1"/>
+          </a:effectRef>
+          <a:fontRef idx="minor">
+            <a:schemeClr val="lt1"/>
+          </a:fontRef>
+        </p:style>
+        <p:txBody>
+          <a:bodyPr rtlCol="0" anchor="ctr"/>
+          <a:lstStyle/>
+          <a:p>
+            <a:pPr algn="ctr"/>
+          </a:p>
+        </p:txBody>
+      </p:sp>
+      <p:sp>
+        <p:nvSpPr>
+          <p:cNvPr id="11" name="Rounded Rectangle 10"/>
+          <p:cNvSpPr/>
+          <p:nvPr/>
+        </p:nvSpPr>
+        <p:spPr>
+          <a:xfrm>
+            <a:off x="7085950" y="1709928"/>
+            <a:ext cx="4538817" cy="448056"/>
+          </a:xfrm>
+          <a:prstGeom prst="roundRect">
+            <a:avLst/>
+          </a:prstGeom>
+          <a:solidFill>
+            <a:srgbClr val="F2F5F8"/>
+          </a:solidFill>
+          <a:ln w="9525">
+            <a:solidFill>
+              <a:srgbClr val="B9C4CF"/>
+            </a:solidFill>
+          </a:ln>
+          <a:effectLst/>
+        </p:spPr>
+        <p:style>
+          <a:lnRef idx="1">
+            <a:schemeClr val="accent1"/>
+          </a:lnRef>
+          <a:fillRef idx="3">
+            <a:schemeClr val="accent1"/>
+          </a:fillRef>
+          <a:effectRef idx="2">
+            <a:schemeClr val="accent1"/>
+          </a:effectRef>
+          <a:fontRef idx="minor">
+            <a:schemeClr val="lt1"/>
+          </a:fontRef>
+        </p:style>
+        <p:txBody>
+          <a:bodyPr rtlCol="0" anchor="ctr" wrap="square" lIns="73152" rIns="73152" tIns="36576" bIns="36576"/>
+          <a:lstStyle/>
+          <a:p>
+            <a:pPr algn="l"/>
+            <a:r>
+              <a:rPr sz="1200" b="1">
+                <a:solidFill>
+                  <a:srgbClr val="C0392B"/>
+                </a:solidFill>
+                <a:latin typeface="Microsoft JhengHei"/>
+              </a:rPr>
+              <a:t>Option 0</a:t>
+            </a:r>
+            <a:r>
+              <a:rPr sz="1200" b="0">
+                <a:solidFill>
+                  <a:srgbClr val="22303F"/>
+                </a:solidFill>
+                <a:latin typeface="Microsoft JhengHei"/>
+              </a:rPr>
+              <a:t>：保留現況與 PoC framework，定期重審需求; 無明顯技術管理急迫</a:t>
+            </a:r>
+          </a:p>
+        </p:txBody>
+      </p:sp>
+      <p:sp>
+        <p:nvSpPr>
+          <p:cNvPr id="12" name="Right Arrow 11"/>
+          <p:cNvSpPr/>
+          <p:nvPr/>
+        </p:nvSpPr>
+        <p:spPr>
+          <a:xfrm>
+            <a:off x="3819421" y="2423160"/>
+            <a:ext cx="237744" cy="100584"/>
+          </a:xfrm>
+          <a:prstGeom prst="rightArrow">
+            <a:avLst/>
+          </a:prstGeom>
+          <a:solidFill>
+            <a:srgbClr val="B9C4CF"/>
+          </a:solidFill>
+          <a:ln>
+            <a:noFill/>
+          </a:ln>
+          <a:effectLst/>
+        </p:spPr>
+        <p:style>
+          <a:lnRef idx="1">
+            <a:schemeClr val="accent1"/>
+          </a:lnRef>
+          <a:fillRef idx="3">
+            <a:schemeClr val="accent1"/>
+          </a:fillRef>
+          <a:effectRef idx="2">
+            <a:schemeClr val="accent1"/>
+          </a:effectRef>
+          <a:fontRef idx="minor">
+            <a:schemeClr val="lt1"/>
+          </a:fontRef>
+        </p:style>
+        <p:txBody>
+          <a:bodyPr rtlCol="0" anchor="ctr"/>
+          <a:lstStyle/>
+          <a:p>
+            <a:pPr algn="ctr"/>
+          </a:p>
+        </p:txBody>
+      </p:sp>
+      <p:sp>
+        <p:nvSpPr>
+          <p:cNvPr id="13" name="Rounded Rectangle 12"/>
+          <p:cNvSpPr/>
+          <p:nvPr/>
+        </p:nvSpPr>
+        <p:spPr>
+          <a:xfrm>
+            <a:off x="4102885" y="2249424"/>
+            <a:ext cx="2653881" cy="448056"/>
+          </a:xfrm>
+          <a:prstGeom prst="roundRect">
+            <a:avLst/>
+          </a:prstGeom>
+          <a:solidFill>
+            <a:srgbClr val="F2F5F8"/>
+          </a:solidFill>
+          <a:ln w="9525">
+            <a:solidFill>
+              <a:srgbClr val="B9C4CF"/>
+            </a:solidFill>
+          </a:ln>
+          <a:effectLst/>
+        </p:spPr>
+        <p:style>
+          <a:lnRef idx="1">
+            <a:schemeClr val="accent1"/>
+          </a:lnRef>
+          <a:fillRef idx="3">
+            <a:schemeClr val="accent1"/>
+          </a:fillRef>
+          <a:effectRef idx="2">
+            <a:schemeClr val="accent1"/>
+          </a:effectRef>
+          <a:fontRef idx="minor">
+            <a:schemeClr val="lt1"/>
+          </a:fontRef>
+        </p:style>
+        <p:txBody>
+          <a:bodyPr rtlCol="0" anchor="ctr" wrap="square" lIns="73152" rIns="73152" tIns="36576" bIns="36576"/>
+          <a:lstStyle/>
+          <a:p>
+            <a:pPr algn="l"/>
+            <a:r>
+              <a:rPr sz="1100" b="0">
+                <a:solidFill>
+                  <a:srgbClr val="22303F"/>
+                </a:solidFill>
+                <a:latin typeface="Microsoft JhengHei"/>
+              </a:rPr>
+              <a:t>相容性／還原／DDL 尚未知</a:t>
+            </a:r>
+          </a:p>
+        </p:txBody>
+      </p:sp>
+      <p:sp>
+        <p:nvSpPr>
+          <p:cNvPr id="14" name="Right Arrow 13"/>
+          <p:cNvSpPr/>
+          <p:nvPr/>
+        </p:nvSpPr>
+        <p:spPr>
+          <a:xfrm>
+            <a:off x="6802486" y="2423160"/>
+            <a:ext cx="237744" cy="100584"/>
+          </a:xfrm>
+          <a:prstGeom prst="rightArrow">
+            <a:avLst/>
+          </a:prstGeom>
+          <a:solidFill>
+            <a:srgbClr val="B9C4CF"/>
+          </a:solidFill>
+          <a:ln>
+            <a:noFill/>
+          </a:ln>
+          <a:effectLst/>
+        </p:spPr>
+        <p:style>
+          <a:lnRef idx="1">
+            <a:schemeClr val="accent1"/>
+          </a:lnRef>
+          <a:fillRef idx="3">
+            <a:schemeClr val="accent1"/>
+          </a:fillRef>
+          <a:effectRef idx="2">
+            <a:schemeClr val="accent1"/>
+          </a:effectRef>
+          <a:fontRef idx="minor">
+            <a:schemeClr val="lt1"/>
+          </a:fontRef>
+        </p:style>
+        <p:txBody>
+          <a:bodyPr rtlCol="0" anchor="ctr"/>
+          <a:lstStyle/>
+          <a:p>
+            <a:pPr algn="ctr"/>
+          </a:p>
+        </p:txBody>
+      </p:sp>
+      <p:sp>
+        <p:nvSpPr>
+          <p:cNvPr id="15" name="Rounded Rectangle 14"/>
+          <p:cNvSpPr/>
+          <p:nvPr/>
+        </p:nvSpPr>
+        <p:spPr>
+          <a:xfrm>
+            <a:off x="7085950" y="2249424"/>
+            <a:ext cx="4538817" cy="448056"/>
+          </a:xfrm>
+          <a:prstGeom prst="roundRect">
+            <a:avLst/>
+          </a:prstGeom>
+          <a:solidFill>
+            <a:srgbClr val="F2F5F8"/>
+          </a:solidFill>
+          <a:ln w="9525">
+            <a:solidFill>
+              <a:srgbClr val="B9C4CF"/>
+            </a:solidFill>
+          </a:ln>
+          <a:effectLst/>
+        </p:spPr>
+        <p:style>
+          <a:lnRef idx="1">
+            <a:schemeClr val="accent1"/>
+          </a:lnRef>
+          <a:fillRef idx="3">
+            <a:schemeClr val="accent1"/>
+          </a:fillRef>
+          <a:effectRef idx="2">
+            <a:schemeClr val="accent1"/>
+          </a:effectRef>
+          <a:fontRef idx="minor">
+            <a:schemeClr val="lt1"/>
+          </a:fontRef>
+        </p:style>
+        <p:txBody>
+          <a:bodyPr rtlCol="0" anchor="ctr" wrap="square" lIns="73152" rIns="73152" tIns="36576" bIns="36576"/>
+          <a:lstStyle/>
+          <a:p>
+            <a:pPr algn="l"/>
+            <a:r>
+              <a:rPr sz="1200" b="1">
+                <a:solidFill>
+                  <a:srgbClr val="C0392B"/>
+                </a:solidFill>
+                <a:latin typeface="Microsoft JhengHei"/>
+              </a:rPr>
+              <a:t>Option A</a:t>
+            </a:r>
+            <a:r>
+              <a:rPr sz="1200" b="0">
+                <a:solidFill>
+                  <a:srgbClr val="22303F"/>
+                </a:solidFill>
+                <a:latin typeface="Microsoft JhengHei"/>
+              </a:rPr>
+              <a:t>：技術補件</a:t>
+            </a:r>
+          </a:p>
+        </p:txBody>
+      </p:sp>
+      <p:sp>
+        <p:nvSpPr>
+          <p:cNvPr id="16" name="Right Arrow 15"/>
+          <p:cNvSpPr/>
+          <p:nvPr/>
+        </p:nvSpPr>
+        <p:spPr>
+          <a:xfrm>
+            <a:off x="3819421" y="2962656"/>
+            <a:ext cx="237744" cy="100584"/>
+          </a:xfrm>
+          <a:prstGeom prst="rightArrow">
+            <a:avLst/>
+          </a:prstGeom>
+          <a:solidFill>
+            <a:srgbClr val="B9C4CF"/>
+          </a:solidFill>
+          <a:ln>
+            <a:noFill/>
+          </a:ln>
+          <a:effectLst/>
+        </p:spPr>
+        <p:style>
+          <a:lnRef idx="1">
+            <a:schemeClr val="accent1"/>
+          </a:lnRef>
+          <a:fillRef idx="3">
+            <a:schemeClr val="accent1"/>
+          </a:fillRef>
+          <a:effectRef idx="2">
+            <a:schemeClr val="accent1"/>
+          </a:effectRef>
+          <a:fontRef idx="minor">
+            <a:schemeClr val="lt1"/>
+          </a:fontRef>
+        </p:style>
+        <p:txBody>
+          <a:bodyPr rtlCol="0" anchor="ctr"/>
+          <a:lstStyle/>
+          <a:p>
+            <a:pPr algn="ctr"/>
+          </a:p>
+        </p:txBody>
+      </p:sp>
+      <p:sp>
+        <p:nvSpPr>
+          <p:cNvPr id="17" name="Rounded Rectangle 16"/>
+          <p:cNvSpPr/>
+          <p:nvPr/>
+        </p:nvSpPr>
+        <p:spPr>
+          <a:xfrm>
+            <a:off x="4102885" y="2788920"/>
+            <a:ext cx="2653881" cy="448056"/>
+          </a:xfrm>
+          <a:prstGeom prst="roundRect">
+            <a:avLst/>
+          </a:prstGeom>
+          <a:solidFill>
+            <a:srgbClr val="F2F5F8"/>
+          </a:solidFill>
+          <a:ln w="9525">
+            <a:solidFill>
+              <a:srgbClr val="B9C4CF"/>
+            </a:solidFill>
+          </a:ln>
+          <a:effectLst/>
+        </p:spPr>
+        <p:style>
+          <a:lnRef idx="1">
+            <a:schemeClr val="accent1"/>
+          </a:lnRef>
+          <a:fillRef idx="3">
+            <a:schemeClr val="accent1"/>
+          </a:fillRef>
+          <a:effectRef idx="2">
+            <a:schemeClr val="accent1"/>
+          </a:effectRef>
+          <a:fontRef idx="minor">
+            <a:schemeClr val="lt1"/>
+          </a:fontRef>
+        </p:style>
+        <p:txBody>
+          <a:bodyPr rtlCol="0" anchor="ctr" wrap="square" lIns="73152" rIns="73152" tIns="36576" bIns="36576"/>
+          <a:lstStyle/>
+          <a:p>
+            <a:pPr algn="l"/>
+            <a:r>
+              <a:rPr sz="1100" b="0">
+                <a:solidFill>
+                  <a:srgbClr val="22303F"/>
+                </a:solidFill>
+                <a:latin typeface="Microsoft JhengHei"/>
+              </a:rPr>
+              <a:t>技術門檻通過且效益可量化</a:t>
+            </a:r>
+          </a:p>
+        </p:txBody>
+      </p:sp>
+      <p:sp>
+        <p:nvSpPr>
+          <p:cNvPr id="18" name="Right Arrow 17"/>
+          <p:cNvSpPr/>
+          <p:nvPr/>
+        </p:nvSpPr>
+        <p:spPr>
+          <a:xfrm>
+            <a:off x="6802486" y="2962656"/>
+            <a:ext cx="237744" cy="100584"/>
+          </a:xfrm>
+          <a:prstGeom prst="rightArrow">
+            <a:avLst/>
+          </a:prstGeom>
+          <a:solidFill>
+            <a:srgbClr val="B9C4CF"/>
+          </a:solidFill>
+          <a:ln>
+            <a:noFill/>
+          </a:ln>
+          <a:effectLst/>
+        </p:spPr>
+        <p:style>
+          <a:lnRef idx="1">
+            <a:schemeClr val="accent1"/>
+          </a:lnRef>
+          <a:fillRef idx="3">
+            <a:schemeClr val="accent1"/>
+          </a:fillRef>
+          <a:effectRef idx="2">
+            <a:schemeClr val="accent1"/>
+          </a:effectRef>
+          <a:fontRef idx="minor">
+            <a:schemeClr val="lt1"/>
+          </a:fontRef>
+        </p:style>
+        <p:txBody>
+          <a:bodyPr rtlCol="0" anchor="ctr"/>
+          <a:lstStyle/>
+          <a:p>
+            <a:pPr algn="ctr"/>
+          </a:p>
+        </p:txBody>
+      </p:sp>
+      <p:sp>
+        <p:nvSpPr>
+          <p:cNvPr id="19" name="Rounded Rectangle 18"/>
+          <p:cNvSpPr/>
+          <p:nvPr/>
+        </p:nvSpPr>
+        <p:spPr>
+          <a:xfrm>
+            <a:off x="7085950" y="2788920"/>
+            <a:ext cx="4538817" cy="448056"/>
+          </a:xfrm>
+          <a:prstGeom prst="roundRect">
+            <a:avLst/>
+          </a:prstGeom>
+          <a:solidFill>
+            <a:srgbClr val="FDF1EF"/>
+          </a:solidFill>
+          <a:ln w="19050">
+            <a:solidFill>
+              <a:srgbClr val="C0392B"/>
+            </a:solidFill>
+          </a:ln>
+          <a:effectLst/>
+        </p:spPr>
+        <p:style>
+          <a:lnRef idx="1">
+            <a:schemeClr val="accent1"/>
+          </a:lnRef>
+          <a:fillRef idx="3">
+            <a:schemeClr val="accent1"/>
+          </a:fillRef>
+          <a:effectRef idx="2">
+            <a:schemeClr val="accent1"/>
+          </a:effectRef>
+          <a:fontRef idx="minor">
+            <a:schemeClr val="lt1"/>
+          </a:fontRef>
+        </p:style>
+        <p:txBody>
+          <a:bodyPr rtlCol="0" anchor="ctr" wrap="square" lIns="73152" rIns="73152" tIns="36576" bIns="36576"/>
+          <a:lstStyle/>
+          <a:p>
+            <a:pPr algn="l"/>
+            <a:r>
+              <a:rPr sz="1200" b="1">
+                <a:solidFill>
+                  <a:srgbClr val="C0392B"/>
+                </a:solidFill>
+                <a:latin typeface="Microsoft JhengHei"/>
+              </a:rPr>
+              <a:t>Option B</a:t>
+            </a:r>
+            <a:r>
+              <a:rPr sz="1200" b="0">
+                <a:solidFill>
+                  <a:srgbClr val="22303F"/>
+                </a:solidFill>
+                <a:latin typeface="Microsoft JhengHei"/>
+              </a:rPr>
+              <a:t>：TiDB Pilot</a:t>
+            </a:r>
+          </a:p>
+        </p:txBody>
+      </p:sp>
+      <p:sp>
+        <p:nvSpPr>
+          <p:cNvPr id="20" name="Right Arrow 19"/>
+          <p:cNvSpPr/>
+          <p:nvPr/>
+        </p:nvSpPr>
+        <p:spPr>
+          <a:xfrm>
+            <a:off x="3819421" y="3502152"/>
+            <a:ext cx="237744" cy="100584"/>
+          </a:xfrm>
+          <a:prstGeom prst="rightArrow">
+            <a:avLst/>
+          </a:prstGeom>
+          <a:solidFill>
+            <a:srgbClr val="B9C4CF"/>
+          </a:solidFill>
+          <a:ln>
+            <a:noFill/>
+          </a:ln>
+          <a:effectLst/>
+        </p:spPr>
+        <p:style>
+          <a:lnRef idx="1">
+            <a:schemeClr val="accent1"/>
+          </a:lnRef>
+          <a:fillRef idx="3">
+            <a:schemeClr val="accent1"/>
+          </a:fillRef>
+          <a:effectRef idx="2">
+            <a:schemeClr val="accent1"/>
+          </a:effectRef>
+          <a:fontRef idx="minor">
+            <a:schemeClr val="lt1"/>
+          </a:fontRef>
+        </p:style>
+        <p:txBody>
+          <a:bodyPr rtlCol="0" anchor="ctr"/>
+          <a:lstStyle/>
+          <a:p>
+            <a:pPr algn="ctr"/>
+          </a:p>
+        </p:txBody>
+      </p:sp>
+      <p:sp>
+        <p:nvSpPr>
+          <p:cNvPr id="21" name="Rounded Rectangle 20"/>
+          <p:cNvSpPr/>
+          <p:nvPr/>
+        </p:nvSpPr>
+        <p:spPr>
+          <a:xfrm>
+            <a:off x="4102885" y="3328416"/>
+            <a:ext cx="2653881" cy="448056"/>
+          </a:xfrm>
+          <a:prstGeom prst="roundRect">
+            <a:avLst/>
+          </a:prstGeom>
+          <a:solidFill>
+            <a:srgbClr val="F2F5F8"/>
+          </a:solidFill>
+          <a:ln w="9525">
+            <a:solidFill>
+              <a:srgbClr val="B9C4CF"/>
+            </a:solidFill>
+          </a:ln>
+          <a:effectLst/>
+        </p:spPr>
+        <p:style>
+          <a:lnRef idx="1">
+            <a:schemeClr val="accent1"/>
+          </a:lnRef>
+          <a:fillRef idx="3">
+            <a:schemeClr val="accent1"/>
+          </a:fillRef>
+          <a:effectRef idx="2">
+            <a:schemeClr val="accent1"/>
+          </a:effectRef>
+          <a:fontRef idx="minor">
+            <a:schemeClr val="lt1"/>
+          </a:fontRef>
+        </p:style>
+        <p:txBody>
+          <a:bodyPr rtlCol="0" anchor="ctr" wrap="square" lIns="73152" rIns="73152" tIns="36576" bIns="36576"/>
+          <a:lstStyle/>
+          <a:p>
+            <a:pPr algn="l"/>
+            <a:r>
+              <a:rPr sz="1100" b="0">
+                <a:solidFill>
+                  <a:srgbClr val="22303F"/>
+                </a:solidFill>
+                <a:latin typeface="Microsoft JhengHei"/>
+              </a:rPr>
+              <a:t>TiDB 不適配或極低延遲優先</a:t>
+            </a:r>
+          </a:p>
+        </p:txBody>
+      </p:sp>
+      <p:sp>
+        <p:nvSpPr>
+          <p:cNvPr id="22" name="Right Arrow 21"/>
+          <p:cNvSpPr/>
+          <p:nvPr/>
+        </p:nvSpPr>
+        <p:spPr>
+          <a:xfrm>
+            <a:off x="6802486" y="3502152"/>
+            <a:ext cx="237744" cy="100584"/>
+          </a:xfrm>
+          <a:prstGeom prst="rightArrow">
+            <a:avLst/>
+          </a:prstGeom>
+          <a:solidFill>
+            <a:srgbClr val="B9C4CF"/>
+          </a:solidFill>
+          <a:ln>
+            <a:noFill/>
+          </a:ln>
+          <a:effectLst/>
+        </p:spPr>
+        <p:style>
+          <a:lnRef idx="1">
+            <a:schemeClr val="accent1"/>
+          </a:lnRef>
+          <a:fillRef idx="3">
+            <a:schemeClr val="accent1"/>
+          </a:fillRef>
+          <a:effectRef idx="2">
+            <a:schemeClr val="accent1"/>
+          </a:effectRef>
+          <a:fontRef idx="minor">
+            <a:schemeClr val="lt1"/>
+          </a:fontRef>
+        </p:style>
+        <p:txBody>
+          <a:bodyPr rtlCol="0" anchor="ctr"/>
+          <a:lstStyle/>
+          <a:p>
+            <a:pPr algn="ctr"/>
+          </a:p>
+        </p:txBody>
+      </p:sp>
+      <p:sp>
+        <p:nvSpPr>
+          <p:cNvPr id="23" name="Rounded Rectangle 22"/>
+          <p:cNvSpPr/>
+          <p:nvPr/>
+        </p:nvSpPr>
+        <p:spPr>
+          <a:xfrm>
+            <a:off x="7085950" y="3328416"/>
+            <a:ext cx="4538817" cy="448056"/>
+          </a:xfrm>
+          <a:prstGeom prst="roundRect">
+            <a:avLst/>
+          </a:prstGeom>
+          <a:solidFill>
+            <a:srgbClr val="F2F5F8"/>
+          </a:solidFill>
+          <a:ln w="9525">
+            <a:solidFill>
+              <a:srgbClr val="B9C4CF"/>
+            </a:solidFill>
+          </a:ln>
+          <a:effectLst/>
+        </p:spPr>
+        <p:style>
+          <a:lnRef idx="1">
+            <a:schemeClr val="accent1"/>
+          </a:lnRef>
+          <a:fillRef idx="3">
+            <a:schemeClr val="accent1"/>
+          </a:fillRef>
+          <a:effectRef idx="2">
+            <a:schemeClr val="accent1"/>
+          </a:effectRef>
+          <a:fontRef idx="minor">
+            <a:schemeClr val="lt1"/>
+          </a:fontRef>
+        </p:style>
+        <p:txBody>
+          <a:bodyPr rtlCol="0" anchor="ctr" wrap="square" lIns="73152" rIns="73152" tIns="36576" bIns="36576"/>
+          <a:lstStyle/>
+          <a:p>
+            <a:pPr algn="l"/>
+            <a:r>
+              <a:rPr sz="1200" b="1">
+                <a:solidFill>
+                  <a:srgbClr val="C0392B"/>
+                </a:solidFill>
+                <a:latin typeface="Microsoft JhengHei"/>
+              </a:rPr>
+              <a:t>Option C</a:t>
+            </a:r>
+            <a:r>
+              <a:rPr sz="1200" b="0">
+                <a:solidFill>
+                  <a:srgbClr val="22303F"/>
+                </a:solidFill>
+                <a:latin typeface="Microsoft JhengHei"/>
+              </a:rPr>
+              <a:t>：PXC 目標式對照</a:t>
+            </a:r>
+          </a:p>
+        </p:txBody>
+      </p:sp>
+      <p:sp>
+        <p:nvSpPr>
+          <p:cNvPr id="24" name="Right Arrow 23"/>
+          <p:cNvSpPr/>
+          <p:nvPr/>
+        </p:nvSpPr>
+        <p:spPr>
+          <a:xfrm>
+            <a:off x="3819421" y="4041648"/>
+            <a:ext cx="2983065" cy="100584"/>
+          </a:xfrm>
+          <a:prstGeom prst="rightArrow">
+            <a:avLst/>
+          </a:prstGeom>
+          <a:solidFill>
+            <a:srgbClr val="B9C4CF"/>
+          </a:solidFill>
+          <a:ln>
+            <a:noFill/>
+          </a:ln>
+          <a:effectLst/>
+        </p:spPr>
+        <p:style>
+          <a:lnRef idx="1">
+            <a:schemeClr val="accent1"/>
+          </a:lnRef>
+          <a:fillRef idx="3">
+            <a:schemeClr val="accent1"/>
+          </a:fillRef>
+          <a:effectRef idx="2">
+            <a:schemeClr val="accent1"/>
+          </a:effectRef>
+          <a:fontRef idx="minor">
+            <a:schemeClr val="lt1"/>
+          </a:fontRef>
+        </p:style>
+        <p:txBody>
+          <a:bodyPr rtlCol="0" anchor="ctr"/>
+          <a:lstStyle/>
+          <a:p>
+            <a:pPr algn="ctr"/>
+          </a:p>
+        </p:txBody>
+      </p:sp>
+      <p:sp>
+        <p:nvSpPr>
+          <p:cNvPr id="25" name="Rounded Rectangle 24"/>
+          <p:cNvSpPr/>
+          <p:nvPr/>
+        </p:nvSpPr>
+        <p:spPr>
+          <a:xfrm>
+            <a:off x="7085950" y="3867912"/>
+            <a:ext cx="4538817" cy="448056"/>
+          </a:xfrm>
+          <a:prstGeom prst="roundRect">
+            <a:avLst/>
+          </a:prstGeom>
+          <a:solidFill>
+            <a:srgbClr val="F2F5F8"/>
+          </a:solidFill>
+          <a:ln w="9525">
+            <a:solidFill>
+              <a:srgbClr val="B9C4CF"/>
+            </a:solidFill>
+          </a:ln>
+          <a:effectLst/>
+        </p:spPr>
+        <p:style>
+          <a:lnRef idx="1">
+            <a:schemeClr val="accent1"/>
+          </a:lnRef>
+          <a:fillRef idx="3">
+            <a:schemeClr val="accent1"/>
+          </a:fillRef>
+          <a:effectRef idx="2">
+            <a:schemeClr val="accent1"/>
+          </a:effectRef>
+          <a:fontRef idx="minor">
+            <a:schemeClr val="lt1"/>
+          </a:fontRef>
+        </p:style>
+        <p:txBody>
+          <a:bodyPr rtlCol="0" anchor="ctr" wrap="square" lIns="73152" rIns="73152" tIns="36576" bIns="36576"/>
+          <a:lstStyle/>
+          <a:p>
+            <a:pPr algn="l"/>
+            <a:r>
+              <a:rPr sz="1200" b="1">
+                <a:solidFill>
+                  <a:srgbClr val="C0392B"/>
+                </a:solidFill>
+                <a:latin typeface="Microsoft JhengHei"/>
+              </a:rPr>
+              <a:t>Option C</a:t>
+            </a:r>
+            <a:r>
+              <a:rPr sz="1200" b="0">
+                <a:solidFill>
+                  <a:srgbClr val="22303F"/>
+                </a:solidFill>
+                <a:latin typeface="Microsoft JhengHei"/>
+              </a:rPr>
+              <a:t>：依需求驗 YugabyteDB 或 CockroachDB</a:t>
+            </a:r>
+          </a:p>
+        </p:txBody>
+      </p:sp>
+      <p:sp>
+        <p:nvSpPr>
+          <p:cNvPr id="26" name="Right Arrow 25"/>
+          <p:cNvSpPr/>
+          <p:nvPr/>
+        </p:nvSpPr>
+        <p:spPr>
+          <a:xfrm>
+            <a:off x="3819421" y="4581144"/>
+            <a:ext cx="237744" cy="100584"/>
+          </a:xfrm>
+          <a:prstGeom prst="rightArrow">
+            <a:avLst/>
+          </a:prstGeom>
+          <a:solidFill>
+            <a:srgbClr val="B9C4CF"/>
+          </a:solidFill>
+          <a:ln>
+            <a:noFill/>
+          </a:ln>
+          <a:effectLst/>
+        </p:spPr>
+        <p:style>
+          <a:lnRef idx="1">
+            <a:schemeClr val="accent1"/>
+          </a:lnRef>
+          <a:fillRef idx="3">
+            <a:schemeClr val="accent1"/>
+          </a:fillRef>
+          <a:effectRef idx="2">
+            <a:schemeClr val="accent1"/>
+          </a:effectRef>
+          <a:fontRef idx="minor">
+            <a:schemeClr val="lt1"/>
+          </a:fontRef>
+        </p:style>
+        <p:txBody>
+          <a:bodyPr rtlCol="0" anchor="ctr"/>
+          <a:lstStyle/>
+          <a:p>
+            <a:pPr algn="ctr"/>
+          </a:p>
+        </p:txBody>
+      </p:sp>
+      <p:sp>
+        <p:nvSpPr>
+          <p:cNvPr id="27" name="Rounded Rectangle 26"/>
+          <p:cNvSpPr/>
+          <p:nvPr/>
+        </p:nvSpPr>
+        <p:spPr>
+          <a:xfrm>
+            <a:off x="4102885" y="4407408"/>
+            <a:ext cx="2653881" cy="448056"/>
+          </a:xfrm>
+          <a:prstGeom prst="roundRect">
+            <a:avLst/>
+          </a:prstGeom>
+          <a:solidFill>
+            <a:srgbClr val="F2F5F8"/>
+          </a:solidFill>
+          <a:ln w="9525">
+            <a:solidFill>
+              <a:srgbClr val="B9C4CF"/>
+            </a:solidFill>
+          </a:ln>
+          <a:effectLst/>
+        </p:spPr>
+        <p:style>
+          <a:lnRef idx="1">
+            <a:schemeClr val="accent1"/>
+          </a:lnRef>
+          <a:fillRef idx="3">
+            <a:schemeClr val="accent1"/>
+          </a:fillRef>
+          <a:effectRef idx="2">
+            <a:schemeClr val="accent1"/>
+          </a:effectRef>
+          <a:fontRef idx="minor">
+            <a:schemeClr val="lt1"/>
+          </a:fontRef>
+        </p:style>
+        <p:txBody>
+          <a:bodyPr rtlCol="0" anchor="ctr" wrap="square" lIns="73152" rIns="73152" tIns="36576" bIns="36576"/>
+          <a:lstStyle/>
+          <a:p>
+            <a:pPr algn="l"/>
+            <a:r>
+              <a:rPr sz="1100" b="0">
+                <a:solidFill>
+                  <a:srgbClr val="22303F"/>
+                </a:solidFill>
+                <a:latin typeface="Microsoft JhengHei"/>
+              </a:rPr>
+              <a:t>重複申請／維運成本高</a:t>
+            </a:r>
+          </a:p>
+        </p:txBody>
+      </p:sp>
+      <p:sp>
+        <p:nvSpPr>
+          <p:cNvPr id="28" name="Right Arrow 27"/>
+          <p:cNvSpPr/>
+          <p:nvPr/>
+        </p:nvSpPr>
+        <p:spPr>
+          <a:xfrm>
+            <a:off x="6802486" y="4581144"/>
+            <a:ext cx="237744" cy="100584"/>
+          </a:xfrm>
+          <a:prstGeom prst="rightArrow">
+            <a:avLst/>
+          </a:prstGeom>
+          <a:solidFill>
+            <a:srgbClr val="B9C4CF"/>
+          </a:solidFill>
+          <a:ln>
+            <a:noFill/>
+          </a:ln>
+          <a:effectLst/>
+        </p:spPr>
+        <p:style>
+          <a:lnRef idx="1">
+            <a:schemeClr val="accent1"/>
+          </a:lnRef>
+          <a:fillRef idx="3">
+            <a:schemeClr val="accent1"/>
+          </a:fillRef>
+          <a:effectRef idx="2">
+            <a:schemeClr val="accent1"/>
+          </a:effectRef>
+          <a:fontRef idx="minor">
+            <a:schemeClr val="lt1"/>
+          </a:fontRef>
+        </p:style>
+        <p:txBody>
+          <a:bodyPr rtlCol="0" anchor="ctr"/>
+          <a:lstStyle/>
+          <a:p>
+            <a:pPr algn="ctr"/>
+          </a:p>
+        </p:txBody>
+      </p:sp>
+      <p:sp>
+        <p:nvSpPr>
+          <p:cNvPr id="29" name="Rounded Rectangle 28"/>
+          <p:cNvSpPr/>
+          <p:nvPr/>
+        </p:nvSpPr>
+        <p:spPr>
+          <a:xfrm>
+            <a:off x="7085950" y="4407408"/>
+            <a:ext cx="4538817" cy="448056"/>
+          </a:xfrm>
+          <a:prstGeom prst="roundRect">
+            <a:avLst/>
+          </a:prstGeom>
+          <a:solidFill>
+            <a:srgbClr val="F2F5F8"/>
+          </a:solidFill>
+          <a:ln w="9525">
+            <a:solidFill>
+              <a:srgbClr val="B9C4CF"/>
+            </a:solidFill>
+          </a:ln>
+          <a:effectLst/>
+        </p:spPr>
+        <p:style>
+          <a:lnRef idx="1">
+            <a:schemeClr val="accent1"/>
+          </a:lnRef>
+          <a:fillRef idx="3">
+            <a:schemeClr val="accent1"/>
+          </a:fillRef>
+          <a:effectRef idx="2">
+            <a:schemeClr val="accent1"/>
+          </a:effectRef>
+          <a:fontRef idx="minor">
+            <a:schemeClr val="lt1"/>
+          </a:fontRef>
+        </p:style>
+        <p:txBody>
+          <a:bodyPr rtlCol="0" anchor="ctr" wrap="square" lIns="73152" rIns="73152" tIns="36576" bIns="36576"/>
+          <a:lstStyle/>
+          <a:p>
+            <a:pPr algn="l"/>
+            <a:r>
+              <a:rPr sz="1200" b="1">
+                <a:solidFill>
+                  <a:srgbClr val="C0392B"/>
+                </a:solidFill>
+                <a:latin typeface="Microsoft JhengHei"/>
+              </a:rPr>
+              <a:t>Option D</a:t>
+            </a:r>
+            <a:r>
+              <a:rPr sz="1200" b="0">
+                <a:solidFill>
+                  <a:srgbClr val="22303F"/>
+                </a:solidFill>
+                <a:latin typeface="Microsoft JhengHei"/>
+              </a:rPr>
+              <a:t>：Database Self-Service</a:t>
+            </a:r>
+          </a:p>
+        </p:txBody>
+      </p:sp>
+      <p:sp>
+        <p:nvSpPr>
+          <p:cNvPr id="30" name="Right Arrow 29"/>
+          <p:cNvSpPr/>
+          <p:nvPr/>
+        </p:nvSpPr>
+        <p:spPr>
+          <a:xfrm>
+            <a:off x="3819421" y="5120640"/>
+            <a:ext cx="237744" cy="100584"/>
+          </a:xfrm>
+          <a:prstGeom prst="rightArrow">
+            <a:avLst/>
+          </a:prstGeom>
+          <a:solidFill>
+            <a:srgbClr val="B9C4CF"/>
+          </a:solidFill>
+          <a:ln>
+            <a:noFill/>
+          </a:ln>
+          <a:effectLst/>
+        </p:spPr>
+        <p:style>
+          <a:lnRef idx="1">
+            <a:schemeClr val="accent1"/>
+          </a:lnRef>
+          <a:fillRef idx="3">
+            <a:schemeClr val="accent1"/>
+          </a:fillRef>
+          <a:effectRef idx="2">
+            <a:schemeClr val="accent1"/>
+          </a:effectRef>
+          <a:fontRef idx="minor">
+            <a:schemeClr val="lt1"/>
+          </a:fontRef>
+        </p:style>
+        <p:txBody>
+          <a:bodyPr rtlCol="0" anchor="ctr"/>
+          <a:lstStyle/>
+          <a:p>
+            <a:pPr algn="ctr"/>
+          </a:p>
+        </p:txBody>
+      </p:sp>
+      <p:sp>
+        <p:nvSpPr>
+          <p:cNvPr id="31" name="Rounded Rectangle 30"/>
+          <p:cNvSpPr/>
+          <p:nvPr/>
+        </p:nvSpPr>
+        <p:spPr>
+          <a:xfrm>
+            <a:off x="4102885" y="4946904"/>
+            <a:ext cx="2653881" cy="448056"/>
+          </a:xfrm>
+          <a:prstGeom prst="roundRect">
+            <a:avLst/>
+          </a:prstGeom>
+          <a:solidFill>
+            <a:srgbClr val="F2F5F8"/>
+          </a:solidFill>
+          <a:ln w="9525">
+            <a:solidFill>
+              <a:srgbClr val="B9C4CF"/>
+            </a:solidFill>
+          </a:ln>
+          <a:effectLst/>
+        </p:spPr>
+        <p:style>
+          <a:lnRef idx="1">
+            <a:schemeClr val="accent1"/>
+          </a:lnRef>
+          <a:fillRef idx="3">
+            <a:schemeClr val="accent1"/>
+          </a:fillRef>
+          <a:effectRef idx="2">
+            <a:schemeClr val="accent1"/>
+          </a:effectRef>
+          <a:fontRef idx="minor">
+            <a:schemeClr val="lt1"/>
+          </a:fontRef>
+        </p:style>
+        <p:txBody>
+          <a:bodyPr rtlCol="0" anchor="ctr" wrap="square" lIns="73152" rIns="73152" tIns="36576" bIns="36576"/>
+          <a:lstStyle/>
+          <a:p>
+            <a:pPr algn="l"/>
+            <a:r>
+              <a:rPr sz="1100" b="0">
+                <a:solidFill>
+                  <a:srgbClr val="22303F"/>
+                </a:solidFill>
+                <a:latin typeface="Microsoft JhengHei"/>
+              </a:rPr>
+              <a:t>DR／EDC 活化</a:t>
+            </a:r>
+          </a:p>
+        </p:txBody>
+      </p:sp>
+      <p:sp>
+        <p:nvSpPr>
+          <p:cNvPr id="32" name="Right Arrow 31"/>
+          <p:cNvSpPr/>
+          <p:nvPr/>
+        </p:nvSpPr>
+        <p:spPr>
+          <a:xfrm>
+            <a:off x="6802486" y="5120640"/>
+            <a:ext cx="237744" cy="100584"/>
+          </a:xfrm>
+          <a:prstGeom prst="rightArrow">
+            <a:avLst/>
+          </a:prstGeom>
+          <a:solidFill>
+            <a:srgbClr val="B9C4CF"/>
+          </a:solidFill>
+          <a:ln>
+            <a:noFill/>
+          </a:ln>
+          <a:effectLst/>
+        </p:spPr>
+        <p:style>
+          <a:lnRef idx="1">
+            <a:schemeClr val="accent1"/>
+          </a:lnRef>
+          <a:fillRef idx="3">
+            <a:schemeClr val="accent1"/>
+          </a:fillRef>
+          <a:effectRef idx="2">
+            <a:schemeClr val="accent1"/>
+          </a:effectRef>
+          <a:fontRef idx="minor">
+            <a:schemeClr val="lt1"/>
+          </a:fontRef>
+        </p:style>
+        <p:txBody>
+          <a:bodyPr rtlCol="0" anchor="ctr"/>
+          <a:lstStyle/>
+          <a:p>
+            <a:pPr algn="ctr"/>
+          </a:p>
+        </p:txBody>
+      </p:sp>
+      <p:sp>
+        <p:nvSpPr>
+          <p:cNvPr id="33" name="Rounded Rectangle 32"/>
+          <p:cNvSpPr/>
+          <p:nvPr/>
+        </p:nvSpPr>
+        <p:spPr>
+          <a:xfrm>
+            <a:off x="7085950" y="4946904"/>
+            <a:ext cx="4538817" cy="448056"/>
+          </a:xfrm>
+          <a:prstGeom prst="roundRect">
+            <a:avLst/>
+          </a:prstGeom>
+          <a:solidFill>
+            <a:srgbClr val="F2F5F8"/>
+          </a:solidFill>
+          <a:ln w="9525">
+            <a:solidFill>
+              <a:srgbClr val="B9C4CF"/>
+            </a:solidFill>
+          </a:ln>
+          <a:effectLst/>
+        </p:spPr>
+        <p:style>
+          <a:lnRef idx="1">
+            <a:schemeClr val="accent1"/>
+          </a:lnRef>
+          <a:fillRef idx="3">
+            <a:schemeClr val="accent1"/>
+          </a:fillRef>
+          <a:effectRef idx="2">
+            <a:schemeClr val="accent1"/>
+          </a:effectRef>
+          <a:fontRef idx="minor">
+            <a:schemeClr val="lt1"/>
+          </a:fontRef>
+        </p:style>
+        <p:txBody>
+          <a:bodyPr rtlCol="0" anchor="ctr" wrap="square" lIns="73152" rIns="73152" tIns="36576" bIns="36576"/>
+          <a:lstStyle/>
+          <a:p>
+            <a:pPr algn="l"/>
+            <a:r>
+              <a:rPr sz="1200" b="1">
+                <a:solidFill>
+                  <a:srgbClr val="C0392B"/>
+                </a:solidFill>
+                <a:latin typeface="Microsoft JhengHei"/>
+              </a:rPr>
+              <a:t>Option D</a:t>
+            </a:r>
+            <a:r>
+              <a:rPr sz="1200" b="0">
+                <a:solidFill>
+                  <a:srgbClr val="22303F"/>
+                </a:solidFill>
+                <a:latin typeface="Microsoft JhengHei"/>
+              </a:rPr>
+              <a:t>：先 A/S，需異地讀再評估 A/A-RO</a:t>
+            </a:r>
+          </a:p>
+        </p:txBody>
+      </p:sp>
+      <p:sp>
+        <p:nvSpPr>
+          <p:cNvPr id="34" name="TextBox 33"/>
           <p:cNvSpPr txBox="1"/>
           <p:nvPr/>
         </p:nvSpPr>
         <p:spPr>
           <a:xfrm>
-            <a:off x="694944" y="4503928"/>
+            <a:off x="694944" y="5614416"/>
             <a:ext cx="10929823" cy="279400"/>
           </a:xfrm>
           <a:prstGeom prst="rect">
@@ -6237,7 +6875,7 @@
           <a:noFill/>
         </p:spPr>
         <p:txBody>
-          <a:bodyPr wrap="square" lIns="0" tIns="0" rIns="0" bIns="0">
+          <a:bodyPr wrap="square" lIns="0" rIns="0" tIns="0" bIns="0">
             <a:spAutoFit/>
           </a:bodyPr>
           <a:lstStyle/>
@@ -6249,20 +6887,20 @@
                 </a:solidFill>
                 <a:latin typeface="Microsoft JhengHei"/>
               </a:rPr>
-              <a:t>不以已投入的 PoC 工時作為繼續理由；每個出口都須回到需求、風險降低與可量化收益。</a:t>
-            </a:r>
-          </a:p>
-        </p:txBody>
-      </p:sp>
-      <p:sp>
-        <p:nvSpPr>
-          <p:cNvPr id="8" name="Rectangle 7"/>
+              <a:t>不以已投入的 PoC 工時作為繼續理由；每個出口都須回到需求、降低無謂技術研究與可量化收益。</a:t>
+            </a:r>
+          </a:p>
+        </p:txBody>
+      </p:sp>
+      <p:sp>
+        <p:nvSpPr>
+          <p:cNvPr id="35" name="Rectangle 34"/>
           <p:cNvSpPr/>
           <p:nvPr/>
         </p:nvSpPr>
         <p:spPr>
           <a:xfrm>
-            <a:off x="566928" y="4503928"/>
+            <a:off x="566928" y="5614416"/>
             <a:ext cx="26000" cy="279400"/>
           </a:xfrm>
           <a:prstGeom prst="rect">
@@ -6295,7 +6933,6 @@
           <a:lstStyle/>
           <a:p>
             <a:pPr algn="ctr"/>
-            <a:endParaRPr/>
           </a:p>
         </p:txBody>
       </p:sp>
@@ -6308,7 +6945,7 @@
 </file>
 
 <file path=ppt/slides/slide14.xml><?xml version="1.0" encoding="utf-8"?>
-<p:sld xmlns:a="http://schemas.openxmlformats.org/drawingml/2006/main" xmlns:r="http://schemas.openxmlformats.org/officeDocument/2006/relationships" xmlns:p="http://schemas.openxmlformats.org/presentationml/2006/main">
+<p:sld xmlns:a="http://schemas.openxmlformats.org/drawingml/2006/main" xmlns:p="http://schemas.openxmlformats.org/presentationml/2006/main" xmlns:r="http://schemas.openxmlformats.org/officeDocument/2006/relationships">
   <p:cSld>
     <p:spTree>
       <p:nvGrpSpPr>
@@ -6316,14 +6953,7 @@
         <p:cNvGrpSpPr/>
         <p:nvPr/>
       </p:nvGrpSpPr>
-      <p:grpSpPr>
-        <a:xfrm>
-          <a:off x="0" y="0"/>
-          <a:ext cx="0" cy="0"/>
-          <a:chOff x="0" y="0"/>
-          <a:chExt cx="0" cy="0"/>
-        </a:xfrm>
-      </p:grpSpPr>
+      <p:grpSpPr/>
       <p:sp>
         <p:nvSpPr>
           <p:cNvPr id="2" name="TextBox 1"/>
@@ -6341,7 +6971,7 @@
           <a:noFill/>
         </p:spPr>
         <p:txBody>
-          <a:bodyPr wrap="square" lIns="0" tIns="0" rIns="0" bIns="0">
+          <a:bodyPr wrap="square" lIns="0" rIns="0" tIns="0" bIns="0">
             <a:spAutoFit/>
           </a:bodyPr>
           <a:lstStyle/>
@@ -6375,7 +7005,7 @@
           <a:noFill/>
         </p:spPr>
         <p:txBody>
-          <a:bodyPr wrap="square" lIns="0" tIns="0" rIns="0" bIns="0">
+          <a:bodyPr wrap="square" lIns="0" rIns="0" tIns="0" bIns="0">
             <a:spAutoFit/>
           </a:bodyPr>
           <a:lstStyle/>
@@ -6409,7 +7039,7 @@
           <a:noFill/>
         </p:spPr>
         <p:txBody>
-          <a:bodyPr wrap="square" lIns="0" tIns="0" rIns="0" bIns="0">
+          <a:bodyPr wrap="square" lIns="0" rIns="0" tIns="0" bIns="0">
             <a:spAutoFit/>
           </a:bodyPr>
           <a:lstStyle/>
@@ -6444,7 +7074,7 @@
           <a:noFill/>
         </p:spPr>
         <p:txBody>
-          <a:bodyPr wrap="square" lIns="0" tIns="0" rIns="0" bIns="0">
+          <a:bodyPr wrap="square" lIns="0" rIns="0" tIns="0" bIns="0">
             <a:spAutoFit/>
           </a:bodyPr>
           <a:lstStyle/>
@@ -6478,7 +7108,7 @@
           <a:noFill/>
         </p:spPr>
         <p:txBody>
-          <a:bodyPr wrap="square" lIns="0" tIns="0" rIns="0" bIns="0">
+          <a:bodyPr wrap="square" lIns="0" rIns="0" tIns="0" bIns="0">
             <a:spAutoFit/>
           </a:bodyPr>
           <a:lstStyle/>
@@ -6671,7 +7301,7 @@
           <a:noFill/>
         </p:spPr>
         <p:txBody>
-          <a:bodyPr wrap="square" lIns="0" tIns="0" rIns="0" bIns="0">
+          <a:bodyPr wrap="square" lIns="0" rIns="0" tIns="0" bIns="0">
             <a:spAutoFit/>
           </a:bodyPr>
           <a:lstStyle/>
@@ -6729,7 +7359,6 @@
           <a:lstStyle/>
           <a:p>
             <a:pPr algn="ctr"/>
-            <a:endParaRPr/>
           </a:p>
         </p:txBody>
       </p:sp>
@@ -6742,7 +7371,7 @@
 </file>
 
 <file path=ppt/slides/slide15.xml><?xml version="1.0" encoding="utf-8"?>
-<p:sld xmlns:a="http://schemas.openxmlformats.org/drawingml/2006/main" xmlns:r="http://schemas.openxmlformats.org/officeDocument/2006/relationships" xmlns:p="http://schemas.openxmlformats.org/presentationml/2006/main">
+<p:sld xmlns:a="http://schemas.openxmlformats.org/drawingml/2006/main" xmlns:p="http://schemas.openxmlformats.org/presentationml/2006/main" xmlns:r="http://schemas.openxmlformats.org/officeDocument/2006/relationships">
   <p:cSld>
     <p:spTree>
       <p:nvGrpSpPr>
@@ -6750,14 +7379,7 @@
         <p:cNvGrpSpPr/>
         <p:nvPr/>
       </p:nvGrpSpPr>
-      <p:grpSpPr>
-        <a:xfrm>
-          <a:off x="0" y="0"/>
-          <a:ext cx="0" cy="0"/>
-          <a:chOff x="0" y="0"/>
-          <a:chExt cx="0" cy="0"/>
-        </a:xfrm>
-      </p:grpSpPr>
+      <p:grpSpPr/>
       <p:sp>
         <p:nvSpPr>
           <p:cNvPr id="2" name="TextBox 1"/>
@@ -6775,7 +7397,7 @@
           <a:noFill/>
         </p:spPr>
         <p:txBody>
-          <a:bodyPr wrap="square" lIns="0" tIns="0" rIns="0" bIns="0">
+          <a:bodyPr wrap="square" lIns="0" rIns="0" tIns="0" bIns="0">
             <a:spAutoFit/>
           </a:bodyPr>
           <a:lstStyle/>
@@ -6809,7 +7431,7 @@
           <a:noFill/>
         </p:spPr>
         <p:txBody>
-          <a:bodyPr wrap="square" lIns="0" tIns="0" rIns="0" bIns="0">
+          <a:bodyPr wrap="square" lIns="0" rIns="0" tIns="0" bIns="0">
             <a:spAutoFit/>
           </a:bodyPr>
           <a:lstStyle/>
@@ -6843,7 +7465,7 @@
           <a:noFill/>
         </p:spPr>
         <p:txBody>
-          <a:bodyPr wrap="square" lIns="0" tIns="0" rIns="0" bIns="0">
+          <a:bodyPr wrap="square" lIns="0" rIns="0" tIns="0" bIns="0">
             <a:spAutoFit/>
           </a:bodyPr>
           <a:lstStyle/>
@@ -6878,7 +7500,7 @@
           <a:noFill/>
         </p:spPr>
         <p:txBody>
-          <a:bodyPr wrap="square" lIns="0" tIns="0" rIns="0" bIns="0">
+          <a:bodyPr wrap="square" lIns="0" rIns="0" tIns="0" bIns="0">
             <a:spAutoFit/>
           </a:bodyPr>
           <a:lstStyle/>
@@ -6905,7 +7527,7 @@
 </file>
 
 <file path=ppt/slides/slide16.xml><?xml version="1.0" encoding="utf-8"?>
-<p:sld xmlns:a="http://schemas.openxmlformats.org/drawingml/2006/main" xmlns:r="http://schemas.openxmlformats.org/officeDocument/2006/relationships" xmlns:p="http://schemas.openxmlformats.org/presentationml/2006/main">
+<p:sld xmlns:a="http://schemas.openxmlformats.org/drawingml/2006/main" xmlns:p="http://schemas.openxmlformats.org/presentationml/2006/main" xmlns:r="http://schemas.openxmlformats.org/officeDocument/2006/relationships">
   <p:cSld>
     <p:spTree>
       <p:nvGrpSpPr>
@@ -6913,14 +7535,7 @@
         <p:cNvGrpSpPr/>
         <p:nvPr/>
       </p:nvGrpSpPr>
-      <p:grpSpPr>
-        <a:xfrm>
-          <a:off x="0" y="0"/>
-          <a:ext cx="0" cy="0"/>
-          <a:chOff x="0" y="0"/>
-          <a:chExt cx="0" cy="0"/>
-        </a:xfrm>
-      </p:grpSpPr>
+      <p:grpSpPr/>
       <p:sp>
         <p:nvSpPr>
           <p:cNvPr id="2" name="TextBox 1"/>
@@ -6938,7 +7553,7 @@
           <a:noFill/>
         </p:spPr>
         <p:txBody>
-          <a:bodyPr wrap="square" lIns="0" tIns="0" rIns="0" bIns="0">
+          <a:bodyPr wrap="square" lIns="0" rIns="0" tIns="0" bIns="0">
             <a:spAutoFit/>
           </a:bodyPr>
           <a:lstStyle/>
@@ -6972,7 +7587,7 @@
           <a:noFill/>
         </p:spPr>
         <p:txBody>
-          <a:bodyPr wrap="square" lIns="0" tIns="0" rIns="0" bIns="0">
+          <a:bodyPr wrap="square" lIns="0" rIns="0" tIns="0" bIns="0">
             <a:spAutoFit/>
           </a:bodyPr>
           <a:lstStyle/>
@@ -7006,7 +7621,7 @@
           <a:noFill/>
         </p:spPr>
         <p:txBody>
-          <a:bodyPr wrap="square" lIns="0" tIns="0" rIns="0" bIns="0">
+          <a:bodyPr wrap="square" lIns="0" rIns="0" tIns="0" bIns="0">
             <a:spAutoFit/>
           </a:bodyPr>
           <a:lstStyle/>
@@ -7041,7 +7656,7 @@
           <a:noFill/>
         </p:spPr>
         <p:txBody>
-          <a:bodyPr wrap="square" lIns="0" tIns="0" rIns="0" bIns="0">
+          <a:bodyPr wrap="square" lIns="0" rIns="0" tIns="0" bIns="0">
             <a:spAutoFit/>
           </a:bodyPr>
           <a:lstStyle/>
@@ -7077,32 +7692,14 @@
                 <a:tableStyleId>{5C22544A-7EE6-4342-B048-85BDC9FD1C3A}</a:tableStyleId>
               </a:tblPr>
               <a:tblGrid>
-                <a:gridCol w="1888311">
-                  <a:extLst>
-                    <a:ext uri="{9D8B030D-6E8A-4147-A177-3AD203B41FA5}">
-                      <a16:colId xmlns:a16="http://schemas.microsoft.com/office/drawing/2014/main" val="20000"/>
-                    </a:ext>
-                  </a:extLst>
-                </a:gridCol>
-                <a:gridCol w="6971796">
-                  <a:extLst>
-                    <a:ext uri="{9D8B030D-6E8A-4147-A177-3AD203B41FA5}">
-                      <a16:colId xmlns:a16="http://schemas.microsoft.com/office/drawing/2014/main" val="20001"/>
-                    </a:ext>
-                  </a:extLst>
-                </a:gridCol>
-                <a:gridCol w="2197732">
-                  <a:extLst>
-                    <a:ext uri="{9D8B030D-6E8A-4147-A177-3AD203B41FA5}">
-                      <a16:colId xmlns:a16="http://schemas.microsoft.com/office/drawing/2014/main" val="20002"/>
-                    </a:ext>
-                  </a:extLst>
-                </a:gridCol>
+                <a:gridCol w="1888311"/>
+                <a:gridCol w="6971796"/>
+                <a:gridCol w="2197732"/>
               </a:tblGrid>
               <a:tr h="310896">
                 <a:tc>
                   <a:txBody>
-                    <a:bodyPr/>
+                    <a:bodyPr wrap="square"/>
                     <a:lstStyle/>
                     <a:p>
                       <a:pPr algn="ctr"/>
@@ -7125,7 +7722,7 @@
                 </a:tc>
                 <a:tc>
                   <a:txBody>
-                    <a:bodyPr/>
+                    <a:bodyPr wrap="square"/>
                     <a:lstStyle/>
                     <a:p>
                       <a:pPr algn="ctr"/>
@@ -7148,7 +7745,7 @@
                 </a:tc>
                 <a:tc>
                   <a:txBody>
-                    <a:bodyPr/>
+                    <a:bodyPr wrap="square"/>
                     <a:lstStyle/>
                     <a:p>
                       <a:pPr algn="ctr"/>
@@ -7169,16 +7766,11 @@
                     </a:solidFill>
                   </a:tcPr>
                 </a:tc>
-                <a:extLst>
-                  <a:ext uri="{0D108BD9-81ED-4DB2-BD59-A6C34878D82A}">
-                    <a16:rowId xmlns:a16="http://schemas.microsoft.com/office/drawing/2014/main" val="10000"/>
-                  </a:ext>
-                </a:extLst>
               </a:tr>
               <a:tr h="310896">
                 <a:tc>
                   <a:txBody>
-                    <a:bodyPr/>
+                    <a:bodyPr wrap="square"/>
                     <a:lstStyle/>
                     <a:p>
                       <a:pPr algn="ctr"/>
@@ -7201,7 +7793,7 @@
                 </a:tc>
                 <a:tc>
                   <a:txBody>
-                    <a:bodyPr/>
+                    <a:bodyPr wrap="square"/>
                     <a:lstStyle/>
                     <a:p>
                       <a:pPr algn="l"/>
@@ -7224,7 +7816,7 @@
                 </a:tc>
                 <a:tc>
                   <a:txBody>
-                    <a:bodyPr/>
+                    <a:bodyPr wrap="square"/>
                     <a:lstStyle/>
                     <a:p>
                       <a:pPr algn="ctr"/>
@@ -7245,16 +7837,11 @@
                     </a:solidFill>
                   </a:tcPr>
                 </a:tc>
-                <a:extLst>
-                  <a:ext uri="{0D108BD9-81ED-4DB2-BD59-A6C34878D82A}">
-                    <a16:rowId xmlns:a16="http://schemas.microsoft.com/office/drawing/2014/main" val="10001"/>
-                  </a:ext>
-                </a:extLst>
               </a:tr>
               <a:tr h="310896">
                 <a:tc>
                   <a:txBody>
-                    <a:bodyPr/>
+                    <a:bodyPr wrap="square"/>
                     <a:lstStyle/>
                     <a:p>
                       <a:pPr algn="ctr"/>
@@ -7277,7 +7864,7 @@
                 </a:tc>
                 <a:tc>
                   <a:txBody>
-                    <a:bodyPr/>
+                    <a:bodyPr wrap="square"/>
                     <a:lstStyle/>
                     <a:p>
                       <a:pPr algn="l"/>
@@ -7300,7 +7887,7 @@
                 </a:tc>
                 <a:tc>
                   <a:txBody>
-                    <a:bodyPr/>
+                    <a:bodyPr wrap="square"/>
                     <a:lstStyle/>
                     <a:p>
                       <a:pPr algn="ctr"/>
@@ -7321,16 +7908,11 @@
                     </a:solidFill>
                   </a:tcPr>
                 </a:tc>
-                <a:extLst>
-                  <a:ext uri="{0D108BD9-81ED-4DB2-BD59-A6C34878D82A}">
-                    <a16:rowId xmlns:a16="http://schemas.microsoft.com/office/drawing/2014/main" val="10002"/>
-                  </a:ext>
-                </a:extLst>
               </a:tr>
               <a:tr h="310896">
                 <a:tc>
                   <a:txBody>
-                    <a:bodyPr/>
+                    <a:bodyPr wrap="square"/>
                     <a:lstStyle/>
                     <a:p>
                       <a:pPr algn="ctr"/>
@@ -7353,7 +7935,7 @@
                 </a:tc>
                 <a:tc>
                   <a:txBody>
-                    <a:bodyPr/>
+                    <a:bodyPr wrap="square"/>
                     <a:lstStyle/>
                     <a:p>
                       <a:pPr algn="l"/>
@@ -7376,7 +7958,7 @@
                 </a:tc>
                 <a:tc>
                   <a:txBody>
-                    <a:bodyPr/>
+                    <a:bodyPr wrap="square"/>
                     <a:lstStyle/>
                     <a:p>
                       <a:pPr algn="ctr"/>
@@ -7397,16 +7979,11 @@
                     </a:solidFill>
                   </a:tcPr>
                 </a:tc>
-                <a:extLst>
-                  <a:ext uri="{0D108BD9-81ED-4DB2-BD59-A6C34878D82A}">
-                    <a16:rowId xmlns:a16="http://schemas.microsoft.com/office/drawing/2014/main" val="10003"/>
-                  </a:ext>
-                </a:extLst>
               </a:tr>
               <a:tr h="310896">
                 <a:tc>
                   <a:txBody>
-                    <a:bodyPr/>
+                    <a:bodyPr wrap="square"/>
                     <a:lstStyle/>
                     <a:p>
                       <a:pPr algn="ctr"/>
@@ -7429,7 +8006,7 @@
                 </a:tc>
                 <a:tc>
                   <a:txBody>
-                    <a:bodyPr/>
+                    <a:bodyPr wrap="square"/>
                     <a:lstStyle/>
                     <a:p>
                       <a:pPr algn="l"/>
@@ -7452,7 +8029,7 @@
                 </a:tc>
                 <a:tc>
                   <a:txBody>
-                    <a:bodyPr/>
+                    <a:bodyPr wrap="square"/>
                     <a:lstStyle/>
                     <a:p>
                       <a:pPr algn="ctr"/>
@@ -7473,16 +8050,11 @@
                     </a:solidFill>
                   </a:tcPr>
                 </a:tc>
-                <a:extLst>
-                  <a:ext uri="{0D108BD9-81ED-4DB2-BD59-A6C34878D82A}">
-                    <a16:rowId xmlns:a16="http://schemas.microsoft.com/office/drawing/2014/main" val="10004"/>
-                  </a:ext>
-                </a:extLst>
               </a:tr>
               <a:tr h="310896">
                 <a:tc>
                   <a:txBody>
-                    <a:bodyPr/>
+                    <a:bodyPr wrap="square"/>
                     <a:lstStyle/>
                     <a:p>
                       <a:pPr algn="ctr"/>
@@ -7505,7 +8077,7 @@
                 </a:tc>
                 <a:tc>
                   <a:txBody>
-                    <a:bodyPr/>
+                    <a:bodyPr wrap="square"/>
                     <a:lstStyle/>
                     <a:p>
                       <a:pPr algn="l"/>
@@ -7528,7 +8100,7 @@
                 </a:tc>
                 <a:tc>
                   <a:txBody>
-                    <a:bodyPr/>
+                    <a:bodyPr wrap="square"/>
                     <a:lstStyle/>
                     <a:p>
                       <a:pPr algn="ctr"/>
@@ -7549,11 +8121,6 @@
                     </a:solidFill>
                   </a:tcPr>
                 </a:tc>
-                <a:extLst>
-                  <a:ext uri="{0D108BD9-81ED-4DB2-BD59-A6C34878D82A}">
-                    <a16:rowId xmlns:a16="http://schemas.microsoft.com/office/drawing/2014/main" val="10005"/>
-                  </a:ext>
-                </a:extLst>
               </a:tr>
             </a:tbl>
           </a:graphicData>
@@ -7576,7 +8143,7 @@
           <a:noFill/>
         </p:spPr>
         <p:txBody>
-          <a:bodyPr wrap="square" lIns="0" tIns="0" rIns="0" bIns="0">
+          <a:bodyPr wrap="square" lIns="0" rIns="0" tIns="0" bIns="0">
             <a:spAutoFit/>
           </a:bodyPr>
           <a:lstStyle/>
@@ -7610,7 +8177,7 @@
           <a:noFill/>
         </p:spPr>
         <p:txBody>
-          <a:bodyPr wrap="square" lIns="0" tIns="0" rIns="0" bIns="0">
+          <a:bodyPr wrap="square" lIns="0" rIns="0" tIns="0" bIns="0">
             <a:spAutoFit/>
           </a:bodyPr>
           <a:lstStyle/>
@@ -7687,7 +8254,6 @@
           <a:lstStyle/>
           <a:p>
             <a:pPr algn="ctr"/>
-            <a:endParaRPr/>
           </a:p>
         </p:txBody>
       </p:sp>
@@ -7708,7 +8274,7 @@
           <a:noFill/>
         </p:spPr>
         <p:txBody>
-          <a:bodyPr wrap="square" lIns="0" tIns="0" rIns="0" bIns="0">
+          <a:bodyPr wrap="square" lIns="0" rIns="0" tIns="0" bIns="0">
             <a:spAutoFit/>
           </a:bodyPr>
           <a:lstStyle/>
@@ -7751,7 +8317,7 @@
           <a:noFill/>
         </p:spPr>
         <p:txBody>
-          <a:bodyPr wrap="square" lIns="0" tIns="0" rIns="0" bIns="0">
+          <a:bodyPr wrap="square" lIns="0" rIns="0" tIns="0" bIns="0">
             <a:spAutoFit/>
           </a:bodyPr>
           <a:lstStyle/>
@@ -7828,7 +8394,6 @@
           <a:lstStyle/>
           <a:p>
             <a:pPr algn="ctr"/>
-            <a:endParaRPr/>
           </a:p>
         </p:txBody>
       </p:sp>
@@ -7841,7 +8406,7 @@
 </file>
 
 <file path=ppt/slides/slide17.xml><?xml version="1.0" encoding="utf-8"?>
-<p:sld xmlns:a="http://schemas.openxmlformats.org/drawingml/2006/main" xmlns:r="http://schemas.openxmlformats.org/officeDocument/2006/relationships" xmlns:p="http://schemas.openxmlformats.org/presentationml/2006/main">
+<p:sld xmlns:a="http://schemas.openxmlformats.org/drawingml/2006/main" xmlns:p="http://schemas.openxmlformats.org/presentationml/2006/main" xmlns:r="http://schemas.openxmlformats.org/officeDocument/2006/relationships">
   <p:cSld>
     <p:spTree>
       <p:nvGrpSpPr>
@@ -7849,14 +8414,7 @@
         <p:cNvGrpSpPr/>
         <p:nvPr/>
       </p:nvGrpSpPr>
-      <p:grpSpPr>
-        <a:xfrm>
-          <a:off x="0" y="0"/>
-          <a:ext cx="0" cy="0"/>
-          <a:chOff x="0" y="0"/>
-          <a:chExt cx="0" cy="0"/>
-        </a:xfrm>
-      </p:grpSpPr>
+      <p:grpSpPr/>
       <p:sp>
         <p:nvSpPr>
           <p:cNvPr id="2" name="TextBox 1"/>
@@ -7874,7 +8432,7 @@
           <a:noFill/>
         </p:spPr>
         <p:txBody>
-          <a:bodyPr wrap="square" lIns="0" tIns="0" rIns="0" bIns="0">
+          <a:bodyPr wrap="square" lIns="0" rIns="0" tIns="0" bIns="0">
             <a:spAutoFit/>
           </a:bodyPr>
           <a:lstStyle/>
@@ -7908,7 +8466,7 @@
           <a:noFill/>
         </p:spPr>
         <p:txBody>
-          <a:bodyPr wrap="square" lIns="0" tIns="0" rIns="0" bIns="0">
+          <a:bodyPr wrap="square" lIns="0" rIns="0" tIns="0" bIns="0">
             <a:spAutoFit/>
           </a:bodyPr>
           <a:lstStyle/>
@@ -7942,7 +8500,7 @@
           <a:noFill/>
         </p:spPr>
         <p:txBody>
-          <a:bodyPr wrap="square" lIns="0" tIns="0" rIns="0" bIns="0">
+          <a:bodyPr wrap="square" lIns="0" rIns="0" tIns="0" bIns="0">
             <a:spAutoFit/>
           </a:bodyPr>
           <a:lstStyle/>
@@ -7977,7 +8535,7 @@
           <a:noFill/>
         </p:spPr>
         <p:txBody>
-          <a:bodyPr wrap="square" lIns="0" tIns="0" rIns="0" bIns="0">
+          <a:bodyPr wrap="square" lIns="0" rIns="0" tIns="0" bIns="0">
             <a:spAutoFit/>
           </a:bodyPr>
           <a:lstStyle/>
@@ -8011,7 +8569,7 @@
           <a:noFill/>
         </p:spPr>
         <p:txBody>
-          <a:bodyPr wrap="square" lIns="0" tIns="0" rIns="0" bIns="0">
+          <a:bodyPr wrap="square" lIns="0" rIns="0" tIns="0" bIns="0">
             <a:spAutoFit/>
           </a:bodyPr>
           <a:lstStyle/>
@@ -8054,7 +8612,7 @@
           <a:noFill/>
         </p:spPr>
         <p:txBody>
-          <a:bodyPr wrap="square" lIns="0" tIns="0" rIns="0" bIns="0">
+          <a:bodyPr wrap="square" lIns="0" rIns="0" tIns="0" bIns="0">
             <a:spAutoFit/>
           </a:bodyPr>
           <a:lstStyle/>
@@ -8293,7 +8851,7 @@
           <a:noFill/>
         </p:spPr>
         <p:txBody>
-          <a:bodyPr wrap="square" lIns="0" tIns="0" rIns="0" bIns="0">
+          <a:bodyPr wrap="square" lIns="0" rIns="0" tIns="0" bIns="0">
             <a:spAutoFit/>
           </a:bodyPr>
           <a:lstStyle/>
@@ -8327,7 +8885,7 @@
           <a:noFill/>
         </p:spPr>
         <p:txBody>
-          <a:bodyPr wrap="square" lIns="0" tIns="0" rIns="0" bIns="0">
+          <a:bodyPr wrap="square" lIns="0" rIns="0" tIns="0" bIns="0">
             <a:spAutoFit/>
           </a:bodyPr>
           <a:lstStyle/>
@@ -8446,7 +9004,7 @@
 </file>
 
 <file path=ppt/slides/slide18.xml><?xml version="1.0" encoding="utf-8"?>
-<p:sld xmlns:a="http://schemas.openxmlformats.org/drawingml/2006/main" xmlns:r="http://schemas.openxmlformats.org/officeDocument/2006/relationships" xmlns:p="http://schemas.openxmlformats.org/presentationml/2006/main">
+<p:sld xmlns:a="http://schemas.openxmlformats.org/drawingml/2006/main" xmlns:p="http://schemas.openxmlformats.org/presentationml/2006/main" xmlns:r="http://schemas.openxmlformats.org/officeDocument/2006/relationships">
   <p:cSld>
     <p:spTree>
       <p:nvGrpSpPr>
@@ -8454,14 +9012,7 @@
         <p:cNvGrpSpPr/>
         <p:nvPr/>
       </p:nvGrpSpPr>
-      <p:grpSpPr>
-        <a:xfrm>
-          <a:off x="0" y="0"/>
-          <a:ext cx="0" cy="0"/>
-          <a:chOff x="0" y="0"/>
-          <a:chExt cx="0" cy="0"/>
-        </a:xfrm>
-      </p:grpSpPr>
+      <p:grpSpPr/>
       <p:sp>
         <p:nvSpPr>
           <p:cNvPr id="2" name="TextBox 1"/>
@@ -8479,7 +9030,7 @@
           <a:noFill/>
         </p:spPr>
         <p:txBody>
-          <a:bodyPr wrap="square" lIns="0" tIns="0" rIns="0" bIns="0">
+          <a:bodyPr wrap="square" lIns="0" rIns="0" tIns="0" bIns="0">
             <a:spAutoFit/>
           </a:bodyPr>
           <a:lstStyle/>
@@ -8513,7 +9064,7 @@
           <a:noFill/>
         </p:spPr>
         <p:txBody>
-          <a:bodyPr wrap="square" lIns="0" tIns="0" rIns="0" bIns="0">
+          <a:bodyPr wrap="square" lIns="0" rIns="0" tIns="0" bIns="0">
             <a:spAutoFit/>
           </a:bodyPr>
           <a:lstStyle/>
@@ -8547,7 +9098,7 @@
           <a:noFill/>
         </p:spPr>
         <p:txBody>
-          <a:bodyPr wrap="square" lIns="0" tIns="0" rIns="0" bIns="0">
+          <a:bodyPr wrap="square" lIns="0" rIns="0" tIns="0" bIns="0">
             <a:spAutoFit/>
           </a:bodyPr>
           <a:lstStyle/>
@@ -8582,7 +9133,7 @@
           <a:noFill/>
         </p:spPr>
         <p:txBody>
-          <a:bodyPr wrap="square" lIns="0" tIns="0" rIns="0" bIns="0">
+          <a:bodyPr wrap="square" lIns="0" rIns="0" tIns="0" bIns="0">
             <a:spAutoFit/>
           </a:bodyPr>
           <a:lstStyle/>
@@ -8618,32 +9169,14 @@
                 <a:tableStyleId>{5C22544A-7EE6-4342-B048-85BDC9FD1C3A}</a:tableStyleId>
               </a:tblPr>
               <a:tblGrid>
-                <a:gridCol w="1386689">
-                  <a:extLst>
-                    <a:ext uri="{9D8B030D-6E8A-4147-A177-3AD203B41FA5}">
-                      <a16:colId xmlns:a16="http://schemas.microsoft.com/office/drawing/2014/main" val="20000"/>
-                    </a:ext>
-                  </a:extLst>
-                </a:gridCol>
-                <a:gridCol w="4093409">
-                  <a:extLst>
-                    <a:ext uri="{9D8B030D-6E8A-4147-A177-3AD203B41FA5}">
-                      <a16:colId xmlns:a16="http://schemas.microsoft.com/office/drawing/2014/main" val="20001"/>
-                    </a:ext>
-                  </a:extLst>
-                </a:gridCol>
-                <a:gridCol w="5577741">
-                  <a:extLst>
-                    <a:ext uri="{9D8B030D-6E8A-4147-A177-3AD203B41FA5}">
-                      <a16:colId xmlns:a16="http://schemas.microsoft.com/office/drawing/2014/main" val="20002"/>
-                    </a:ext>
-                  </a:extLst>
-                </a:gridCol>
+                <a:gridCol w="1386689"/>
+                <a:gridCol w="4093409"/>
+                <a:gridCol w="5577741"/>
               </a:tblGrid>
               <a:tr h="321818">
                 <a:tc>
                   <a:txBody>
-                    <a:bodyPr/>
+                    <a:bodyPr wrap="square"/>
                     <a:lstStyle/>
                     <a:p>
                       <a:pPr algn="ctr"/>
@@ -8666,7 +9199,7 @@
                 </a:tc>
                 <a:tc>
                   <a:txBody>
-                    <a:bodyPr/>
+                    <a:bodyPr wrap="square"/>
                     <a:lstStyle/>
                     <a:p>
                       <a:pPr algn="ctr"/>
@@ -8689,7 +9222,7 @@
                 </a:tc>
                 <a:tc>
                   <a:txBody>
-                    <a:bodyPr/>
+                    <a:bodyPr wrap="square"/>
                     <a:lstStyle/>
                     <a:p>
                       <a:pPr algn="ctr"/>
@@ -8710,16 +9243,11 @@
                     </a:solidFill>
                   </a:tcPr>
                 </a:tc>
-                <a:extLst>
-                  <a:ext uri="{0D108BD9-81ED-4DB2-BD59-A6C34878D82A}">
-                    <a16:rowId xmlns:a16="http://schemas.microsoft.com/office/drawing/2014/main" val="10000"/>
-                  </a:ext>
-                </a:extLst>
               </a:tr>
               <a:tr h="321818">
                 <a:tc>
                   <a:txBody>
-                    <a:bodyPr/>
+                    <a:bodyPr wrap="square"/>
                     <a:lstStyle/>
                     <a:p>
                       <a:pPr algn="ctr"/>
@@ -8742,7 +9270,7 @@
                 </a:tc>
                 <a:tc>
                   <a:txBody>
-                    <a:bodyPr/>
+                    <a:bodyPr wrap="square"/>
                     <a:lstStyle/>
                     <a:p>
                       <a:pPr algn="l"/>
@@ -8804,7 +9332,7 @@
                 </a:tc>
                 <a:tc>
                   <a:txBody>
-                    <a:bodyPr/>
+                    <a:bodyPr wrap="square"/>
                     <a:lstStyle/>
                     <a:p>
                       <a:pPr algn="l"/>
@@ -8845,16 +9373,11 @@
                     </a:solidFill>
                   </a:tcPr>
                 </a:tc>
-                <a:extLst>
-                  <a:ext uri="{0D108BD9-81ED-4DB2-BD59-A6C34878D82A}">
-                    <a16:rowId xmlns:a16="http://schemas.microsoft.com/office/drawing/2014/main" val="10001"/>
-                  </a:ext>
-                </a:extLst>
               </a:tr>
               <a:tr h="321818">
                 <a:tc>
                   <a:txBody>
-                    <a:bodyPr/>
+                    <a:bodyPr wrap="square"/>
                     <a:lstStyle/>
                     <a:p>
                       <a:pPr algn="ctr"/>
@@ -8877,7 +9400,7 @@
                 </a:tc>
                 <a:tc>
                   <a:txBody>
-                    <a:bodyPr/>
+                    <a:bodyPr wrap="square"/>
                     <a:lstStyle/>
                     <a:p>
                       <a:pPr algn="l"/>
@@ -8939,7 +9462,7 @@
                 </a:tc>
                 <a:tc>
                   <a:txBody>
-                    <a:bodyPr/>
+                    <a:bodyPr wrap="square"/>
                     <a:lstStyle/>
                     <a:p>
                       <a:pPr algn="l"/>
@@ -8980,11 +9503,6 @@
                     </a:solidFill>
                   </a:tcPr>
                 </a:tc>
-                <a:extLst>
-                  <a:ext uri="{0D108BD9-81ED-4DB2-BD59-A6C34878D82A}">
-                    <a16:rowId xmlns:a16="http://schemas.microsoft.com/office/drawing/2014/main" val="10002"/>
-                  </a:ext>
-                </a:extLst>
               </a:tr>
             </a:tbl>
           </a:graphicData>
@@ -9007,7 +9525,7 @@
           <a:noFill/>
         </p:spPr>
         <p:txBody>
-          <a:bodyPr wrap="square" lIns="0" tIns="0" rIns="0" bIns="0">
+          <a:bodyPr wrap="square" lIns="0" rIns="0" tIns="0" bIns="0">
             <a:spAutoFit/>
           </a:bodyPr>
           <a:lstStyle/>
@@ -9065,7 +9583,6 @@
           <a:lstStyle/>
           <a:p>
             <a:pPr algn="ctr"/>
-            <a:endParaRPr/>
           </a:p>
         </p:txBody>
       </p:sp>
@@ -9078,7 +9595,7 @@
 </file>
 
 <file path=ppt/slides/slide19.xml><?xml version="1.0" encoding="utf-8"?>
-<p:sld xmlns:a="http://schemas.openxmlformats.org/drawingml/2006/main" xmlns:r="http://schemas.openxmlformats.org/officeDocument/2006/relationships" xmlns:p="http://schemas.openxmlformats.org/presentationml/2006/main">
+<p:sld xmlns:a="http://schemas.openxmlformats.org/drawingml/2006/main" xmlns:p="http://schemas.openxmlformats.org/presentationml/2006/main" xmlns:r="http://schemas.openxmlformats.org/officeDocument/2006/relationships">
   <p:cSld>
     <p:spTree>
       <p:nvGrpSpPr>
@@ -9086,14 +9603,7 @@
         <p:cNvGrpSpPr/>
         <p:nvPr/>
       </p:nvGrpSpPr>
-      <p:grpSpPr>
-        <a:xfrm>
-          <a:off x="0" y="0"/>
-          <a:ext cx="0" cy="0"/>
-          <a:chOff x="0" y="0"/>
-          <a:chExt cx="0" cy="0"/>
-        </a:xfrm>
-      </p:grpSpPr>
+      <p:grpSpPr/>
       <p:sp>
         <p:nvSpPr>
           <p:cNvPr id="2" name="TextBox 1"/>
@@ -9111,7 +9621,7 @@
           <a:noFill/>
         </p:spPr>
         <p:txBody>
-          <a:bodyPr wrap="square" lIns="0" tIns="0" rIns="0" bIns="0">
+          <a:bodyPr wrap="square" lIns="0" rIns="0" tIns="0" bIns="0">
             <a:spAutoFit/>
           </a:bodyPr>
           <a:lstStyle/>
@@ -9145,7 +9655,7 @@
           <a:noFill/>
         </p:spPr>
         <p:txBody>
-          <a:bodyPr wrap="square" lIns="0" tIns="0" rIns="0" bIns="0">
+          <a:bodyPr wrap="square" lIns="0" rIns="0" tIns="0" bIns="0">
             <a:spAutoFit/>
           </a:bodyPr>
           <a:lstStyle/>
@@ -9179,7 +9689,7 @@
           <a:noFill/>
         </p:spPr>
         <p:txBody>
-          <a:bodyPr wrap="square" lIns="0" tIns="0" rIns="0" bIns="0">
+          <a:bodyPr wrap="square" lIns="0" rIns="0" tIns="0" bIns="0">
             <a:spAutoFit/>
           </a:bodyPr>
           <a:lstStyle/>
@@ -9214,7 +9724,7 @@
           <a:noFill/>
         </p:spPr>
         <p:txBody>
-          <a:bodyPr wrap="square" lIns="0" tIns="0" rIns="0" bIns="0">
+          <a:bodyPr wrap="square" lIns="0" rIns="0" tIns="0" bIns="0">
             <a:spAutoFit/>
           </a:bodyPr>
           <a:lstStyle/>
@@ -9250,32 +9760,14 @@
                 <a:tableStyleId>{5C22544A-7EE6-4342-B048-85BDC9FD1C3A}</a:tableStyleId>
               </a:tblPr>
               <a:tblGrid>
-                <a:gridCol w="1349041">
-                  <a:extLst>
-                    <a:ext uri="{9D8B030D-6E8A-4147-A177-3AD203B41FA5}">
-                      <a16:colId xmlns:a16="http://schemas.microsoft.com/office/drawing/2014/main" val="20000"/>
-                    </a:ext>
-                  </a:extLst>
-                </a:gridCol>
-                <a:gridCol w="5149683">
-                  <a:extLst>
-                    <a:ext uri="{9D8B030D-6E8A-4147-A177-3AD203B41FA5}">
-                      <a16:colId xmlns:a16="http://schemas.microsoft.com/office/drawing/2014/main" val="20001"/>
-                    </a:ext>
-                  </a:extLst>
-                </a:gridCol>
-                <a:gridCol w="4559115">
-                  <a:extLst>
-                    <a:ext uri="{9D8B030D-6E8A-4147-A177-3AD203B41FA5}">
-                      <a16:colId xmlns:a16="http://schemas.microsoft.com/office/drawing/2014/main" val="20002"/>
-                    </a:ext>
-                  </a:extLst>
-                </a:gridCol>
+                <a:gridCol w="1349041"/>
+                <a:gridCol w="5149683"/>
+                <a:gridCol w="4559115"/>
               </a:tblGrid>
               <a:tr h="321818">
                 <a:tc>
                   <a:txBody>
-                    <a:bodyPr/>
+                    <a:bodyPr wrap="square"/>
                     <a:lstStyle/>
                     <a:p>
                       <a:pPr algn="ctr"/>
@@ -9298,7 +9790,7 @@
                 </a:tc>
                 <a:tc>
                   <a:txBody>
-                    <a:bodyPr/>
+                    <a:bodyPr wrap="square"/>
                     <a:lstStyle/>
                     <a:p>
                       <a:pPr algn="ctr"/>
@@ -9321,7 +9813,7 @@
                 </a:tc>
                 <a:tc>
                   <a:txBody>
-                    <a:bodyPr/>
+                    <a:bodyPr wrap="square"/>
                     <a:lstStyle/>
                     <a:p>
                       <a:pPr algn="ctr"/>
@@ -9342,16 +9834,11 @@
                     </a:solidFill>
                   </a:tcPr>
                 </a:tc>
-                <a:extLst>
-                  <a:ext uri="{0D108BD9-81ED-4DB2-BD59-A6C34878D82A}">
-                    <a16:rowId xmlns:a16="http://schemas.microsoft.com/office/drawing/2014/main" val="10000"/>
-                  </a:ext>
-                </a:extLst>
               </a:tr>
               <a:tr h="321818">
                 <a:tc>
                   <a:txBody>
-                    <a:bodyPr/>
+                    <a:bodyPr wrap="square"/>
                     <a:lstStyle/>
                     <a:p>
                       <a:pPr algn="ctr"/>
@@ -9374,7 +9861,7 @@
                 </a:tc>
                 <a:tc>
                   <a:txBody>
-                    <a:bodyPr/>
+                    <a:bodyPr wrap="square"/>
                     <a:lstStyle/>
                     <a:p>
                       <a:pPr algn="l"/>
@@ -9417,7 +9904,7 @@
                 </a:tc>
                 <a:tc>
                   <a:txBody>
-                    <a:bodyPr/>
+                    <a:bodyPr wrap="square"/>
                     <a:lstStyle/>
                     <a:p>
                       <a:pPr algn="l"/>
@@ -9458,16 +9945,11 @@
                     </a:solidFill>
                   </a:tcPr>
                 </a:tc>
-                <a:extLst>
-                  <a:ext uri="{0D108BD9-81ED-4DB2-BD59-A6C34878D82A}">
-                    <a16:rowId xmlns:a16="http://schemas.microsoft.com/office/drawing/2014/main" val="10001"/>
-                  </a:ext>
-                </a:extLst>
               </a:tr>
               <a:tr h="321818">
                 <a:tc>
                   <a:txBody>
-                    <a:bodyPr/>
+                    <a:bodyPr wrap="square"/>
                     <a:lstStyle/>
                     <a:p>
                       <a:pPr algn="ctr"/>
@@ -9490,7 +9972,7 @@
                 </a:tc>
                 <a:tc>
                   <a:txBody>
-                    <a:bodyPr/>
+                    <a:bodyPr wrap="square"/>
                     <a:lstStyle/>
                     <a:p>
                       <a:pPr algn="l"/>
@@ -9552,7 +10034,7 @@
                 </a:tc>
                 <a:tc>
                   <a:txBody>
-                    <a:bodyPr/>
+                    <a:bodyPr wrap="square"/>
                     <a:lstStyle/>
                     <a:p>
                       <a:pPr algn="l"/>
@@ -9593,11 +10075,6 @@
                     </a:solidFill>
                   </a:tcPr>
                 </a:tc>
-                <a:extLst>
-                  <a:ext uri="{0D108BD9-81ED-4DB2-BD59-A6C34878D82A}">
-                    <a16:rowId xmlns:a16="http://schemas.microsoft.com/office/drawing/2014/main" val="10002"/>
-                  </a:ext>
-                </a:extLst>
               </a:tr>
             </a:tbl>
           </a:graphicData>
@@ -9620,7 +10097,7 @@
           <a:noFill/>
         </p:spPr>
         <p:txBody>
-          <a:bodyPr wrap="square" lIns="0" tIns="0" rIns="0" bIns="0">
+          <a:bodyPr wrap="square" lIns="0" rIns="0" tIns="0" bIns="0">
             <a:spAutoFit/>
           </a:bodyPr>
           <a:lstStyle/>
@@ -9678,7 +10155,6 @@
           <a:lstStyle/>
           <a:p>
             <a:pPr algn="ctr"/>
-            <a:endParaRPr/>
           </a:p>
         </p:txBody>
       </p:sp>
@@ -9691,7 +10167,7 @@
 </file>
 
 <file path=ppt/slides/slide2.xml><?xml version="1.0" encoding="utf-8"?>
-<p:sld xmlns:a="http://schemas.openxmlformats.org/drawingml/2006/main" xmlns:r="http://schemas.openxmlformats.org/officeDocument/2006/relationships" xmlns:p="http://schemas.openxmlformats.org/presentationml/2006/main">
+<p:sld xmlns:a="http://schemas.openxmlformats.org/drawingml/2006/main" xmlns:p="http://schemas.openxmlformats.org/presentationml/2006/main" xmlns:r="http://schemas.openxmlformats.org/officeDocument/2006/relationships">
   <p:cSld>
     <p:spTree>
       <p:nvGrpSpPr>
@@ -9699,14 +10175,7 @@
         <p:cNvGrpSpPr/>
         <p:nvPr/>
       </p:nvGrpSpPr>
-      <p:grpSpPr>
-        <a:xfrm>
-          <a:off x="0" y="0"/>
-          <a:ext cx="0" cy="0"/>
-          <a:chOff x="0" y="0"/>
-          <a:chExt cx="0" cy="0"/>
-        </a:xfrm>
-      </p:grpSpPr>
+      <p:grpSpPr/>
       <p:sp>
         <p:nvSpPr>
           <p:cNvPr id="2" name="TextBox 1"/>
@@ -9724,7 +10193,7 @@
           <a:noFill/>
         </p:spPr>
         <p:txBody>
-          <a:bodyPr wrap="square" lIns="0" tIns="0" rIns="0" bIns="0">
+          <a:bodyPr wrap="square" lIns="0" rIns="0" tIns="0" bIns="0">
             <a:spAutoFit/>
           </a:bodyPr>
           <a:lstStyle/>
@@ -9758,7 +10227,7 @@
           <a:noFill/>
         </p:spPr>
         <p:txBody>
-          <a:bodyPr wrap="square" lIns="0" tIns="0" rIns="0" bIns="0">
+          <a:bodyPr wrap="square" lIns="0" rIns="0" tIns="0" bIns="0">
             <a:spAutoFit/>
           </a:bodyPr>
           <a:lstStyle/>
@@ -9792,7 +10261,7 @@
           <a:noFill/>
         </p:spPr>
         <p:txBody>
-          <a:bodyPr wrap="square" lIns="0" tIns="0" rIns="0" bIns="0">
+          <a:bodyPr wrap="square" lIns="0" rIns="0" tIns="0" bIns="0">
             <a:spAutoFit/>
           </a:bodyPr>
           <a:lstStyle/>
@@ -9827,7 +10296,7 @@
           <a:noFill/>
         </p:spPr>
         <p:txBody>
-          <a:bodyPr wrap="square" lIns="0" tIns="0" rIns="0" bIns="0">
+          <a:bodyPr wrap="square" lIns="0" rIns="0" tIns="0" bIns="0">
             <a:spAutoFit/>
           </a:bodyPr>
           <a:lstStyle/>
@@ -9863,25 +10332,13 @@
                 <a:tableStyleId>{5C22544A-7EE6-4342-B048-85BDC9FD1C3A}</a:tableStyleId>
               </a:tblPr>
               <a:tblGrid>
-                <a:gridCol w="1278081">
-                  <a:extLst>
-                    <a:ext uri="{9D8B030D-6E8A-4147-A177-3AD203B41FA5}">
-                      <a16:colId xmlns:a16="http://schemas.microsoft.com/office/drawing/2014/main" val="20000"/>
-                    </a:ext>
-                  </a:extLst>
-                </a:gridCol>
-                <a:gridCol w="9779758">
-                  <a:extLst>
-                    <a:ext uri="{9D8B030D-6E8A-4147-A177-3AD203B41FA5}">
-                      <a16:colId xmlns:a16="http://schemas.microsoft.com/office/drawing/2014/main" val="20001"/>
-                    </a:ext>
-                  </a:extLst>
-                </a:gridCol>
+                <a:gridCol w="1278081"/>
+                <a:gridCol w="9779758"/>
               </a:tblGrid>
               <a:tr h="321818">
                 <a:tc>
                   <a:txBody>
-                    <a:bodyPr/>
+                    <a:bodyPr wrap="square"/>
                     <a:lstStyle/>
                     <a:p>
                       <a:pPr algn="ctr"/>
@@ -9904,7 +10361,7 @@
                 </a:tc>
                 <a:tc>
                   <a:txBody>
-                    <a:bodyPr/>
+                    <a:bodyPr wrap="square"/>
                     <a:lstStyle/>
                     <a:p>
                       <a:pPr algn="ctr"/>
@@ -9925,16 +10382,11 @@
                     </a:solidFill>
                   </a:tcPr>
                 </a:tc>
-                <a:extLst>
-                  <a:ext uri="{0D108BD9-81ED-4DB2-BD59-A6C34878D82A}">
-                    <a16:rowId xmlns:a16="http://schemas.microsoft.com/office/drawing/2014/main" val="10000"/>
-                  </a:ext>
-                </a:extLst>
               </a:tr>
               <a:tr h="321818">
                 <a:tc>
                   <a:txBody>
-                    <a:bodyPr/>
+                    <a:bodyPr wrap="square"/>
                     <a:lstStyle/>
                     <a:p>
                       <a:pPr algn="ctr"/>
@@ -9957,7 +10409,7 @@
                 </a:tc>
                 <a:tc>
                   <a:txBody>
-                    <a:bodyPr/>
+                    <a:bodyPr wrap="square"/>
                     <a:lstStyle/>
                     <a:p>
                       <a:pPr algn="l"/>
@@ -9978,16 +10430,11 @@
                     </a:solidFill>
                   </a:tcPr>
                 </a:tc>
-                <a:extLst>
-                  <a:ext uri="{0D108BD9-81ED-4DB2-BD59-A6C34878D82A}">
-                    <a16:rowId xmlns:a16="http://schemas.microsoft.com/office/drawing/2014/main" val="10001"/>
-                  </a:ext>
-                </a:extLst>
               </a:tr>
               <a:tr h="321818">
                 <a:tc>
                   <a:txBody>
-                    <a:bodyPr/>
+                    <a:bodyPr wrap="square"/>
                     <a:lstStyle/>
                     <a:p>
                       <a:pPr algn="ctr"/>
@@ -10010,7 +10457,7 @@
                 </a:tc>
                 <a:tc>
                   <a:txBody>
-                    <a:bodyPr/>
+                    <a:bodyPr wrap="square"/>
                     <a:lstStyle/>
                     <a:p>
                       <a:pPr algn="l"/>
@@ -10031,16 +10478,11 @@
                     </a:solidFill>
                   </a:tcPr>
                 </a:tc>
-                <a:extLst>
-                  <a:ext uri="{0D108BD9-81ED-4DB2-BD59-A6C34878D82A}">
-                    <a16:rowId xmlns:a16="http://schemas.microsoft.com/office/drawing/2014/main" val="10002"/>
-                  </a:ext>
-                </a:extLst>
               </a:tr>
               <a:tr h="321818">
                 <a:tc>
                   <a:txBody>
-                    <a:bodyPr/>
+                    <a:bodyPr wrap="square"/>
                     <a:lstStyle/>
                     <a:p>
                       <a:pPr algn="ctr"/>
@@ -10063,7 +10505,7 @@
                 </a:tc>
                 <a:tc>
                   <a:txBody>
-                    <a:bodyPr/>
+                    <a:bodyPr wrap="square"/>
                     <a:lstStyle/>
                     <a:p>
                       <a:pPr algn="l"/>
@@ -10084,16 +10526,11 @@
                     </a:solidFill>
                   </a:tcPr>
                 </a:tc>
-                <a:extLst>
-                  <a:ext uri="{0D108BD9-81ED-4DB2-BD59-A6C34878D82A}">
-                    <a16:rowId xmlns:a16="http://schemas.microsoft.com/office/drawing/2014/main" val="10003"/>
-                  </a:ext>
-                </a:extLst>
               </a:tr>
               <a:tr h="321818">
                 <a:tc>
                   <a:txBody>
-                    <a:bodyPr/>
+                    <a:bodyPr wrap="square"/>
                     <a:lstStyle/>
                     <a:p>
                       <a:pPr algn="ctr"/>
@@ -10116,7 +10553,7 @@
                 </a:tc>
                 <a:tc>
                   <a:txBody>
-                    <a:bodyPr/>
+                    <a:bodyPr wrap="square"/>
                     <a:lstStyle/>
                     <a:p>
                       <a:pPr algn="l"/>
@@ -10137,16 +10574,11 @@
                     </a:solidFill>
                   </a:tcPr>
                 </a:tc>
-                <a:extLst>
-                  <a:ext uri="{0D108BD9-81ED-4DB2-BD59-A6C34878D82A}">
-                    <a16:rowId xmlns:a16="http://schemas.microsoft.com/office/drawing/2014/main" val="10004"/>
-                  </a:ext>
-                </a:extLst>
               </a:tr>
               <a:tr h="321818">
                 <a:tc>
                   <a:txBody>
-                    <a:bodyPr/>
+                    <a:bodyPr wrap="square"/>
                     <a:lstStyle/>
                     <a:p>
                       <a:pPr algn="ctr"/>
@@ -10169,7 +10601,7 @@
                 </a:tc>
                 <a:tc>
                   <a:txBody>
-                    <a:bodyPr/>
+                    <a:bodyPr wrap="square"/>
                     <a:lstStyle/>
                     <a:p>
                       <a:pPr algn="l"/>
@@ -10190,16 +10622,11 @@
                     </a:solidFill>
                   </a:tcPr>
                 </a:tc>
-                <a:extLst>
-                  <a:ext uri="{0D108BD9-81ED-4DB2-BD59-A6C34878D82A}">
-                    <a16:rowId xmlns:a16="http://schemas.microsoft.com/office/drawing/2014/main" val="10005"/>
-                  </a:ext>
-                </a:extLst>
               </a:tr>
               <a:tr h="321818">
                 <a:tc>
                   <a:txBody>
-                    <a:bodyPr/>
+                    <a:bodyPr wrap="square"/>
                     <a:lstStyle/>
                     <a:p>
                       <a:pPr algn="ctr"/>
@@ -10222,7 +10649,7 @@
                 </a:tc>
                 <a:tc>
                   <a:txBody>
-                    <a:bodyPr/>
+                    <a:bodyPr wrap="square"/>
                     <a:lstStyle/>
                     <a:p>
                       <a:pPr algn="l"/>
@@ -10243,11 +10670,6 @@
                     </a:solidFill>
                   </a:tcPr>
                 </a:tc>
-                <a:extLst>
-                  <a:ext uri="{0D108BD9-81ED-4DB2-BD59-A6C34878D82A}">
-                    <a16:rowId xmlns:a16="http://schemas.microsoft.com/office/drawing/2014/main" val="10006"/>
-                  </a:ext>
-                </a:extLst>
               </a:tr>
             </a:tbl>
           </a:graphicData>
@@ -10270,7 +10692,7 @@
           <a:noFill/>
         </p:spPr>
         <p:txBody>
-          <a:bodyPr wrap="square" lIns="0" tIns="0" rIns="0" bIns="0">
+          <a:bodyPr wrap="square" lIns="0" rIns="0" tIns="0" bIns="0">
             <a:spAutoFit/>
           </a:bodyPr>
           <a:lstStyle/>
@@ -10328,7 +10750,6 @@
           <a:lstStyle/>
           <a:p>
             <a:pPr algn="ctr"/>
-            <a:endParaRPr/>
           </a:p>
         </p:txBody>
       </p:sp>
@@ -10341,7 +10762,7 @@
 </file>
 
 <file path=ppt/slides/slide20.xml><?xml version="1.0" encoding="utf-8"?>
-<p:sld xmlns:a="http://schemas.openxmlformats.org/drawingml/2006/main" xmlns:r="http://schemas.openxmlformats.org/officeDocument/2006/relationships" xmlns:p="http://schemas.openxmlformats.org/presentationml/2006/main">
+<p:sld xmlns:a="http://schemas.openxmlformats.org/drawingml/2006/main" xmlns:p="http://schemas.openxmlformats.org/presentationml/2006/main" xmlns:r="http://schemas.openxmlformats.org/officeDocument/2006/relationships">
   <p:cSld>
     <p:spTree>
       <p:nvGrpSpPr>
@@ -10349,14 +10770,7 @@
         <p:cNvGrpSpPr/>
         <p:nvPr/>
       </p:nvGrpSpPr>
-      <p:grpSpPr>
-        <a:xfrm>
-          <a:off x="0" y="0"/>
-          <a:ext cx="0" cy="0"/>
-          <a:chOff x="0" y="0"/>
-          <a:chExt cx="0" cy="0"/>
-        </a:xfrm>
-      </p:grpSpPr>
+      <p:grpSpPr/>
       <p:sp>
         <p:nvSpPr>
           <p:cNvPr id="2" name="TextBox 1"/>
@@ -10374,7 +10788,7 @@
           <a:noFill/>
         </p:spPr>
         <p:txBody>
-          <a:bodyPr wrap="square" lIns="0" tIns="0" rIns="0" bIns="0">
+          <a:bodyPr wrap="square" lIns="0" rIns="0" tIns="0" bIns="0">
             <a:spAutoFit/>
           </a:bodyPr>
           <a:lstStyle/>
@@ -10408,7 +10822,7 @@
           <a:noFill/>
         </p:spPr>
         <p:txBody>
-          <a:bodyPr wrap="square" lIns="0" tIns="0" rIns="0" bIns="0">
+          <a:bodyPr wrap="square" lIns="0" rIns="0" tIns="0" bIns="0">
             <a:spAutoFit/>
           </a:bodyPr>
           <a:lstStyle/>
@@ -10442,7 +10856,7 @@
           <a:noFill/>
         </p:spPr>
         <p:txBody>
-          <a:bodyPr wrap="square" lIns="0" tIns="0" rIns="0" bIns="0">
+          <a:bodyPr wrap="square" lIns="0" rIns="0" tIns="0" bIns="0">
             <a:spAutoFit/>
           </a:bodyPr>
           <a:lstStyle/>
@@ -10477,7 +10891,7 @@
           <a:noFill/>
         </p:spPr>
         <p:txBody>
-          <a:bodyPr wrap="square" lIns="0" tIns="0" rIns="0" bIns="0">
+          <a:bodyPr wrap="square" lIns="0" rIns="0" tIns="0" bIns="0">
             <a:spAutoFit/>
           </a:bodyPr>
           <a:lstStyle/>
@@ -10511,7 +10925,7 @@
           <a:noFill/>
         </p:spPr>
         <p:txBody>
-          <a:bodyPr wrap="square" lIns="0" tIns="0" rIns="0" bIns="0">
+          <a:bodyPr wrap="square" lIns="0" rIns="0" tIns="0" bIns="0">
             <a:spAutoFit/>
           </a:bodyPr>
           <a:lstStyle/>
@@ -10731,7 +11145,7 @@
 </file>
 
 <file path=ppt/slides/slide3.xml><?xml version="1.0" encoding="utf-8"?>
-<p:sld xmlns:a="http://schemas.openxmlformats.org/drawingml/2006/main" xmlns:r="http://schemas.openxmlformats.org/officeDocument/2006/relationships" xmlns:p="http://schemas.openxmlformats.org/presentationml/2006/main">
+<p:sld xmlns:a="http://schemas.openxmlformats.org/drawingml/2006/main" xmlns:p="http://schemas.openxmlformats.org/presentationml/2006/main" xmlns:r="http://schemas.openxmlformats.org/officeDocument/2006/relationships">
   <p:cSld>
     <p:spTree>
       <p:nvGrpSpPr>
@@ -10739,14 +11153,7 @@
         <p:cNvGrpSpPr/>
         <p:nvPr/>
       </p:nvGrpSpPr>
-      <p:grpSpPr>
-        <a:xfrm>
-          <a:off x="0" y="0"/>
-          <a:ext cx="0" cy="0"/>
-          <a:chOff x="0" y="0"/>
-          <a:chExt cx="0" cy="0"/>
-        </a:xfrm>
-      </p:grpSpPr>
+      <p:grpSpPr/>
       <p:sp>
         <p:nvSpPr>
           <p:cNvPr id="2" name="TextBox 1"/>
@@ -10764,7 +11171,7 @@
           <a:noFill/>
         </p:spPr>
         <p:txBody>
-          <a:bodyPr wrap="square" lIns="0" tIns="0" rIns="0" bIns="0">
+          <a:bodyPr wrap="square" lIns="0" rIns="0" tIns="0" bIns="0">
             <a:spAutoFit/>
           </a:bodyPr>
           <a:lstStyle/>
@@ -10798,7 +11205,7 @@
           <a:noFill/>
         </p:spPr>
         <p:txBody>
-          <a:bodyPr wrap="square" lIns="0" tIns="0" rIns="0" bIns="0">
+          <a:bodyPr wrap="square" lIns="0" rIns="0" tIns="0" bIns="0">
             <a:spAutoFit/>
           </a:bodyPr>
           <a:lstStyle/>
@@ -10832,7 +11239,7 @@
           <a:noFill/>
         </p:spPr>
         <p:txBody>
-          <a:bodyPr wrap="square" lIns="0" tIns="0" rIns="0" bIns="0">
+          <a:bodyPr wrap="square" lIns="0" rIns="0" tIns="0" bIns="0">
             <a:spAutoFit/>
           </a:bodyPr>
           <a:lstStyle/>
@@ -10867,7 +11274,7 @@
           <a:noFill/>
         </p:spPr>
         <p:txBody>
-          <a:bodyPr wrap="square" lIns="0" tIns="0" rIns="0" bIns="0">
+          <a:bodyPr wrap="square" lIns="0" rIns="0" tIns="0" bIns="0">
             <a:spAutoFit/>
           </a:bodyPr>
           <a:lstStyle/>
@@ -10903,32 +11310,14 @@
                 <a:tableStyleId>{5C22544A-7EE6-4342-B048-85BDC9FD1C3A}</a:tableStyleId>
               </a:tblPr>
               <a:tblGrid>
-                <a:gridCol w="986328">
-                  <a:extLst>
-                    <a:ext uri="{9D8B030D-6E8A-4147-A177-3AD203B41FA5}">
-                      <a16:colId xmlns:a16="http://schemas.microsoft.com/office/drawing/2014/main" val="20000"/>
-                    </a:ext>
-                  </a:extLst>
-                </a:gridCol>
-                <a:gridCol w="2717883">
-                  <a:extLst>
-                    <a:ext uri="{9D8B030D-6E8A-4147-A177-3AD203B41FA5}">
-                      <a16:colId xmlns:a16="http://schemas.microsoft.com/office/drawing/2014/main" val="20001"/>
-                    </a:ext>
-                  </a:extLst>
-                </a:gridCol>
-                <a:gridCol w="7353628">
-                  <a:extLst>
-                    <a:ext uri="{9D8B030D-6E8A-4147-A177-3AD203B41FA5}">
-                      <a16:colId xmlns:a16="http://schemas.microsoft.com/office/drawing/2014/main" val="20002"/>
-                    </a:ext>
-                  </a:extLst>
-                </a:gridCol>
+                <a:gridCol w="986328"/>
+                <a:gridCol w="2717883"/>
+                <a:gridCol w="7353628"/>
               </a:tblGrid>
               <a:tr h="321818">
                 <a:tc>
                   <a:txBody>
-                    <a:bodyPr/>
+                    <a:bodyPr wrap="square"/>
                     <a:lstStyle/>
                     <a:p>
                       <a:pPr algn="ctr"/>
@@ -10951,7 +11340,7 @@
                 </a:tc>
                 <a:tc>
                   <a:txBody>
-                    <a:bodyPr/>
+                    <a:bodyPr wrap="square"/>
                     <a:lstStyle/>
                     <a:p>
                       <a:pPr algn="ctr"/>
@@ -10974,7 +11363,7 @@
                 </a:tc>
                 <a:tc>
                   <a:txBody>
-                    <a:bodyPr/>
+                    <a:bodyPr wrap="square"/>
                     <a:lstStyle/>
                     <a:p>
                       <a:pPr algn="ctr"/>
@@ -10995,16 +11384,11 @@
                     </a:solidFill>
                   </a:tcPr>
                 </a:tc>
-                <a:extLst>
-                  <a:ext uri="{0D108BD9-81ED-4DB2-BD59-A6C34878D82A}">
-                    <a16:rowId xmlns:a16="http://schemas.microsoft.com/office/drawing/2014/main" val="10000"/>
-                  </a:ext>
-                </a:extLst>
               </a:tr>
               <a:tr h="321818">
                 <a:tc>
                   <a:txBody>
-                    <a:bodyPr/>
+                    <a:bodyPr wrap="square"/>
                     <a:lstStyle/>
                     <a:p>
                       <a:pPr algn="ctr"/>
@@ -11027,7 +11411,7 @@
                 </a:tc>
                 <a:tc>
                   <a:txBody>
-                    <a:bodyPr/>
+                    <a:bodyPr wrap="square"/>
                     <a:lstStyle/>
                     <a:p>
                       <a:pPr algn="ctr"/>
@@ -11051,7 +11435,7 @@
                 </a:tc>
                 <a:tc>
                   <a:txBody>
-                    <a:bodyPr/>
+                    <a:bodyPr wrap="square"/>
                     <a:lstStyle/>
                     <a:p>
                       <a:pPr algn="l"/>
@@ -11072,16 +11456,11 @@
                     </a:solidFill>
                   </a:tcPr>
                 </a:tc>
-                <a:extLst>
-                  <a:ext uri="{0D108BD9-81ED-4DB2-BD59-A6C34878D82A}">
-                    <a16:rowId xmlns:a16="http://schemas.microsoft.com/office/drawing/2014/main" val="10001"/>
-                  </a:ext>
-                </a:extLst>
               </a:tr>
               <a:tr h="321818">
                 <a:tc>
                   <a:txBody>
-                    <a:bodyPr/>
+                    <a:bodyPr wrap="square"/>
                     <a:lstStyle/>
                     <a:p>
                       <a:pPr algn="ctr"/>
@@ -11104,7 +11483,7 @@
                 </a:tc>
                 <a:tc>
                   <a:txBody>
-                    <a:bodyPr/>
+                    <a:bodyPr wrap="square"/>
                     <a:lstStyle/>
                     <a:p>
                       <a:pPr algn="ctr"/>
@@ -11128,7 +11507,7 @@
                 </a:tc>
                 <a:tc>
                   <a:txBody>
-                    <a:bodyPr/>
+                    <a:bodyPr wrap="square"/>
                     <a:lstStyle/>
                     <a:p>
                       <a:pPr algn="l"/>
@@ -11149,16 +11528,11 @@
                     </a:solidFill>
                   </a:tcPr>
                 </a:tc>
-                <a:extLst>
-                  <a:ext uri="{0D108BD9-81ED-4DB2-BD59-A6C34878D82A}">
-                    <a16:rowId xmlns:a16="http://schemas.microsoft.com/office/drawing/2014/main" val="10002"/>
-                  </a:ext>
-                </a:extLst>
               </a:tr>
               <a:tr h="321818">
                 <a:tc>
                   <a:txBody>
-                    <a:bodyPr/>
+                    <a:bodyPr wrap="square"/>
                     <a:lstStyle/>
                     <a:p>
                       <a:pPr algn="ctr"/>
@@ -11181,7 +11555,7 @@
                 </a:tc>
                 <a:tc>
                   <a:txBody>
-                    <a:bodyPr/>
+                    <a:bodyPr wrap="square"/>
                     <a:lstStyle/>
                     <a:p>
                       <a:pPr algn="ctr"/>
@@ -11205,7 +11579,7 @@
                 </a:tc>
                 <a:tc>
                   <a:txBody>
-                    <a:bodyPr/>
+                    <a:bodyPr wrap="square"/>
                     <a:lstStyle/>
                     <a:p>
                       <a:pPr algn="l"/>
@@ -11226,16 +11600,11 @@
                     </a:solidFill>
                   </a:tcPr>
                 </a:tc>
-                <a:extLst>
-                  <a:ext uri="{0D108BD9-81ED-4DB2-BD59-A6C34878D82A}">
-                    <a16:rowId xmlns:a16="http://schemas.microsoft.com/office/drawing/2014/main" val="10003"/>
-                  </a:ext>
-                </a:extLst>
               </a:tr>
               <a:tr h="321818">
                 <a:tc>
                   <a:txBody>
-                    <a:bodyPr/>
+                    <a:bodyPr wrap="square"/>
                     <a:lstStyle/>
                     <a:p>
                       <a:pPr algn="ctr"/>
@@ -11258,7 +11627,7 @@
                 </a:tc>
                 <a:tc>
                   <a:txBody>
-                    <a:bodyPr/>
+                    <a:bodyPr wrap="square"/>
                     <a:lstStyle/>
                     <a:p>
                       <a:pPr algn="ctr"/>
@@ -11282,7 +11651,7 @@
                 </a:tc>
                 <a:tc>
                   <a:txBody>
-                    <a:bodyPr/>
+                    <a:bodyPr wrap="square"/>
                     <a:lstStyle/>
                     <a:p>
                       <a:pPr algn="l"/>
@@ -11303,16 +11672,11 @@
                     </a:solidFill>
                   </a:tcPr>
                 </a:tc>
-                <a:extLst>
-                  <a:ext uri="{0D108BD9-81ED-4DB2-BD59-A6C34878D82A}">
-                    <a16:rowId xmlns:a16="http://schemas.microsoft.com/office/drawing/2014/main" val="10004"/>
-                  </a:ext>
-                </a:extLst>
               </a:tr>
               <a:tr h="321818">
                 <a:tc>
                   <a:txBody>
-                    <a:bodyPr/>
+                    <a:bodyPr wrap="square"/>
                     <a:lstStyle/>
                     <a:p>
                       <a:pPr algn="ctr"/>
@@ -11335,7 +11699,7 @@
                 </a:tc>
                 <a:tc>
                   <a:txBody>
-                    <a:bodyPr/>
+                    <a:bodyPr wrap="square"/>
                     <a:lstStyle/>
                     <a:p>
                       <a:pPr algn="ctr"/>
@@ -11359,7 +11723,7 @@
                 </a:tc>
                 <a:tc>
                   <a:txBody>
-                    <a:bodyPr/>
+                    <a:bodyPr wrap="square"/>
                     <a:lstStyle/>
                     <a:p>
                       <a:pPr algn="l"/>
@@ -11380,11 +11744,6 @@
                     </a:solidFill>
                   </a:tcPr>
                 </a:tc>
-                <a:extLst>
-                  <a:ext uri="{0D108BD9-81ED-4DB2-BD59-A6C34878D82A}">
-                    <a16:rowId xmlns:a16="http://schemas.microsoft.com/office/drawing/2014/main" val="10005"/>
-                  </a:ext>
-                </a:extLst>
               </a:tr>
             </a:tbl>
           </a:graphicData>
@@ -11407,7 +11766,7 @@
           <a:noFill/>
         </p:spPr>
         <p:txBody>
-          <a:bodyPr wrap="square" lIns="0" tIns="0" rIns="0" bIns="0">
+          <a:bodyPr wrap="square" lIns="0" rIns="0" tIns="0" bIns="0">
             <a:spAutoFit/>
           </a:bodyPr>
           <a:lstStyle/>
@@ -11465,7 +11824,6 @@
           <a:lstStyle/>
           <a:p>
             <a:pPr algn="ctr"/>
-            <a:endParaRPr/>
           </a:p>
         </p:txBody>
       </p:sp>
@@ -11478,7 +11836,7 @@
 </file>
 
 <file path=ppt/slides/slide4.xml><?xml version="1.0" encoding="utf-8"?>
-<p:sld xmlns:a="http://schemas.openxmlformats.org/drawingml/2006/main" xmlns:r="http://schemas.openxmlformats.org/officeDocument/2006/relationships" xmlns:p="http://schemas.openxmlformats.org/presentationml/2006/main">
+<p:sld xmlns:a="http://schemas.openxmlformats.org/drawingml/2006/main" xmlns:p="http://schemas.openxmlformats.org/presentationml/2006/main" xmlns:r="http://schemas.openxmlformats.org/officeDocument/2006/relationships">
   <p:cSld>
     <p:spTree>
       <p:nvGrpSpPr>
@@ -11486,14 +11844,7 @@
         <p:cNvGrpSpPr/>
         <p:nvPr/>
       </p:nvGrpSpPr>
-      <p:grpSpPr>
-        <a:xfrm>
-          <a:off x="0" y="0"/>
-          <a:ext cx="0" cy="0"/>
-          <a:chOff x="0" y="0"/>
-          <a:chExt cx="0" cy="0"/>
-        </a:xfrm>
-      </p:grpSpPr>
+      <p:grpSpPr/>
       <p:sp>
         <p:nvSpPr>
           <p:cNvPr id="2" name="TextBox 1"/>
@@ -11511,7 +11862,7 @@
           <a:noFill/>
         </p:spPr>
         <p:txBody>
-          <a:bodyPr wrap="square" lIns="0" tIns="0" rIns="0" bIns="0">
+          <a:bodyPr wrap="square" lIns="0" rIns="0" tIns="0" bIns="0">
             <a:spAutoFit/>
           </a:bodyPr>
           <a:lstStyle/>
@@ -11545,7 +11896,7 @@
           <a:noFill/>
         </p:spPr>
         <p:txBody>
-          <a:bodyPr wrap="square" lIns="0" tIns="0" rIns="0" bIns="0">
+          <a:bodyPr wrap="square" lIns="0" rIns="0" tIns="0" bIns="0">
             <a:spAutoFit/>
           </a:bodyPr>
           <a:lstStyle/>
@@ -11579,7 +11930,7 @@
           <a:noFill/>
         </p:spPr>
         <p:txBody>
-          <a:bodyPr wrap="square" lIns="0" tIns="0" rIns="0" bIns="0">
+          <a:bodyPr wrap="square" lIns="0" rIns="0" tIns="0" bIns="0">
             <a:spAutoFit/>
           </a:bodyPr>
           <a:lstStyle/>
@@ -11614,7 +11965,7 @@
           <a:noFill/>
         </p:spPr>
         <p:txBody>
-          <a:bodyPr wrap="square" lIns="0" tIns="0" rIns="0" bIns="0">
+          <a:bodyPr wrap="square" lIns="0" rIns="0" tIns="0" bIns="0">
             <a:spAutoFit/>
           </a:bodyPr>
           <a:lstStyle/>
@@ -11648,7 +11999,7 @@
           <a:noFill/>
         </p:spPr>
         <p:txBody>
-          <a:bodyPr wrap="square" lIns="0" tIns="0" rIns="0" bIns="0">
+          <a:bodyPr wrap="square" lIns="0" rIns="0" tIns="0" bIns="0">
             <a:spAutoFit/>
           </a:bodyPr>
           <a:lstStyle/>
@@ -11682,7 +12033,7 @@
           <a:noFill/>
         </p:spPr>
         <p:txBody>
-          <a:bodyPr wrap="square" lIns="0" tIns="0" rIns="0" bIns="0">
+          <a:bodyPr wrap="square" lIns="0" rIns="0" tIns="0" bIns="0">
             <a:spAutoFit/>
           </a:bodyPr>
           <a:lstStyle/>
@@ -11773,7 +12124,7 @@
           <a:noFill/>
         </p:spPr>
         <p:txBody>
-          <a:bodyPr wrap="square" lIns="0" tIns="0" rIns="0" bIns="0">
+          <a:bodyPr wrap="square" lIns="0" rIns="0" tIns="0" bIns="0">
             <a:spAutoFit/>
           </a:bodyPr>
           <a:lstStyle/>
@@ -11807,7 +12158,7 @@
           <a:noFill/>
         </p:spPr>
         <p:txBody>
-          <a:bodyPr wrap="square" lIns="0" tIns="0" rIns="0" bIns="0">
+          <a:bodyPr wrap="square" lIns="0" rIns="0" tIns="0" bIns="0">
             <a:spAutoFit/>
           </a:bodyPr>
           <a:lstStyle/>
@@ -11905,7 +12256,7 @@
           <a:noFill/>
         </p:spPr>
         <p:txBody>
-          <a:bodyPr wrap="square" lIns="0" tIns="0" rIns="0" bIns="0">
+          <a:bodyPr wrap="square" lIns="0" rIns="0" tIns="0" bIns="0">
             <a:spAutoFit/>
           </a:bodyPr>
           <a:lstStyle/>
@@ -11940,7 +12291,7 @@
 </file>
 
 <file path=ppt/slides/slide5.xml><?xml version="1.0" encoding="utf-8"?>
-<p:sld xmlns:a="http://schemas.openxmlformats.org/drawingml/2006/main" xmlns:r="http://schemas.openxmlformats.org/officeDocument/2006/relationships" xmlns:p="http://schemas.openxmlformats.org/presentationml/2006/main">
+<p:sld xmlns:a="http://schemas.openxmlformats.org/drawingml/2006/main" xmlns:p="http://schemas.openxmlformats.org/presentationml/2006/main" xmlns:r="http://schemas.openxmlformats.org/officeDocument/2006/relationships">
   <p:cSld>
     <p:spTree>
       <p:nvGrpSpPr>
@@ -11948,14 +12299,7 @@
         <p:cNvGrpSpPr/>
         <p:nvPr/>
       </p:nvGrpSpPr>
-      <p:grpSpPr>
-        <a:xfrm>
-          <a:off x="0" y="0"/>
-          <a:ext cx="0" cy="0"/>
-          <a:chOff x="0" y="0"/>
-          <a:chExt cx="0" cy="0"/>
-        </a:xfrm>
-      </p:grpSpPr>
+      <p:grpSpPr/>
       <p:sp>
         <p:nvSpPr>
           <p:cNvPr id="2" name="TextBox 1"/>
@@ -11973,7 +12317,7 @@
           <a:noFill/>
         </p:spPr>
         <p:txBody>
-          <a:bodyPr wrap="square" lIns="0" tIns="0" rIns="0" bIns="0">
+          <a:bodyPr wrap="square" lIns="0" rIns="0" tIns="0" bIns="0">
             <a:spAutoFit/>
           </a:bodyPr>
           <a:lstStyle/>
@@ -12007,7 +12351,7 @@
           <a:noFill/>
         </p:spPr>
         <p:txBody>
-          <a:bodyPr wrap="square" lIns="0" tIns="0" rIns="0" bIns="0">
+          <a:bodyPr wrap="square" lIns="0" rIns="0" tIns="0" bIns="0">
             <a:spAutoFit/>
           </a:bodyPr>
           <a:lstStyle/>
@@ -12041,7 +12385,7 @@
           <a:noFill/>
         </p:spPr>
         <p:txBody>
-          <a:bodyPr wrap="square" lIns="0" tIns="0" rIns="0" bIns="0">
+          <a:bodyPr wrap="square" lIns="0" rIns="0" tIns="0" bIns="0">
             <a:spAutoFit/>
           </a:bodyPr>
           <a:lstStyle/>
@@ -12076,7 +12420,7 @@
           <a:noFill/>
         </p:spPr>
         <p:txBody>
-          <a:bodyPr wrap="square" lIns="0" tIns="0" rIns="0" bIns="0">
+          <a:bodyPr wrap="square" lIns="0" rIns="0" tIns="0" bIns="0">
             <a:spAutoFit/>
           </a:bodyPr>
           <a:lstStyle/>
@@ -12112,60 +12456,18 @@
                 <a:tableStyleId>{5C22544A-7EE6-4342-B048-85BDC9FD1C3A}</a:tableStyleId>
               </a:tblPr>
               <a:tblGrid>
-                <a:gridCol w="969544">
-                  <a:extLst>
-                    <a:ext uri="{9D8B030D-6E8A-4147-A177-3AD203B41FA5}">
-                      <a16:colId xmlns:a16="http://schemas.microsoft.com/office/drawing/2014/main" val="20000"/>
-                    </a:ext>
-                  </a:extLst>
-                </a:gridCol>
-                <a:gridCol w="4041211">
-                  <a:extLst>
-                    <a:ext uri="{9D8B030D-6E8A-4147-A177-3AD203B41FA5}">
-                      <a16:colId xmlns:a16="http://schemas.microsoft.com/office/drawing/2014/main" val="20001"/>
-                    </a:ext>
-                  </a:extLst>
-                </a:gridCol>
-                <a:gridCol w="969544">
-                  <a:extLst>
-                    <a:ext uri="{9D8B030D-6E8A-4147-A177-3AD203B41FA5}">
-                      <a16:colId xmlns:a16="http://schemas.microsoft.com/office/drawing/2014/main" val="20002"/>
-                    </a:ext>
-                  </a:extLst>
-                </a:gridCol>
-                <a:gridCol w="1442826">
-                  <a:extLst>
-                    <a:ext uri="{9D8B030D-6E8A-4147-A177-3AD203B41FA5}">
-                      <a16:colId xmlns:a16="http://schemas.microsoft.com/office/drawing/2014/main" val="20003"/>
-                    </a:ext>
-                  </a:extLst>
-                </a:gridCol>
-                <a:gridCol w="1547321">
-                  <a:extLst>
-                    <a:ext uri="{9D8B030D-6E8A-4147-A177-3AD203B41FA5}">
-                      <a16:colId xmlns:a16="http://schemas.microsoft.com/office/drawing/2014/main" val="20004"/>
-                    </a:ext>
-                  </a:extLst>
-                </a:gridCol>
-                <a:gridCol w="969544">
-                  <a:extLst>
-                    <a:ext uri="{9D8B030D-6E8A-4147-A177-3AD203B41FA5}">
-                      <a16:colId xmlns:a16="http://schemas.microsoft.com/office/drawing/2014/main" val="20005"/>
-                    </a:ext>
-                  </a:extLst>
-                </a:gridCol>
-                <a:gridCol w="1117849">
-                  <a:extLst>
-                    <a:ext uri="{9D8B030D-6E8A-4147-A177-3AD203B41FA5}">
-                      <a16:colId xmlns:a16="http://schemas.microsoft.com/office/drawing/2014/main" val="20006"/>
-                    </a:ext>
-                  </a:extLst>
-                </a:gridCol>
+                <a:gridCol w="969544"/>
+                <a:gridCol w="4041211"/>
+                <a:gridCol w="969544"/>
+                <a:gridCol w="1442826"/>
+                <a:gridCol w="1547321"/>
+                <a:gridCol w="969544"/>
+                <a:gridCol w="1117849"/>
               </a:tblGrid>
               <a:tr h="321818">
                 <a:tc>
                   <a:txBody>
-                    <a:bodyPr/>
+                    <a:bodyPr wrap="square"/>
                     <a:lstStyle/>
                     <a:p>
                       <a:pPr algn="ctr"/>
@@ -12188,7 +12490,7 @@
                 </a:tc>
                 <a:tc>
                   <a:txBody>
-                    <a:bodyPr/>
+                    <a:bodyPr wrap="square"/>
                     <a:lstStyle/>
                     <a:p>
                       <a:pPr algn="ctr"/>
@@ -12211,7 +12513,7 @@
                 </a:tc>
                 <a:tc>
                   <a:txBody>
-                    <a:bodyPr/>
+                    <a:bodyPr wrap="square"/>
                     <a:lstStyle/>
                     <a:p>
                       <a:pPr algn="ctr"/>
@@ -12234,7 +12536,7 @@
                 </a:tc>
                 <a:tc>
                   <a:txBody>
-                    <a:bodyPr/>
+                    <a:bodyPr wrap="square"/>
                     <a:lstStyle/>
                     <a:p>
                       <a:pPr algn="ctr"/>
@@ -12257,7 +12559,7 @@
                 </a:tc>
                 <a:tc>
                   <a:txBody>
-                    <a:bodyPr/>
+                    <a:bodyPr wrap="square"/>
                     <a:lstStyle/>
                     <a:p>
                       <a:pPr algn="ctr"/>
@@ -12280,7 +12582,7 @@
                 </a:tc>
                 <a:tc>
                   <a:txBody>
-                    <a:bodyPr/>
+                    <a:bodyPr wrap="square"/>
                     <a:lstStyle/>
                     <a:p>
                       <a:pPr algn="ctr"/>
@@ -12303,7 +12605,7 @@
                 </a:tc>
                 <a:tc>
                   <a:txBody>
-                    <a:bodyPr/>
+                    <a:bodyPr wrap="square"/>
                     <a:lstStyle/>
                     <a:p>
                       <a:pPr algn="ctr"/>
@@ -12324,16 +12626,11 @@
                     </a:solidFill>
                   </a:tcPr>
                 </a:tc>
-                <a:extLst>
-                  <a:ext uri="{0D108BD9-81ED-4DB2-BD59-A6C34878D82A}">
-                    <a16:rowId xmlns:a16="http://schemas.microsoft.com/office/drawing/2014/main" val="10000"/>
-                  </a:ext>
-                </a:extLst>
               </a:tr>
               <a:tr h="321818">
                 <a:tc>
                   <a:txBody>
-                    <a:bodyPr/>
+                    <a:bodyPr wrap="square"/>
                     <a:lstStyle/>
                     <a:p>
                       <a:pPr algn="ctr"/>
@@ -12356,7 +12653,7 @@
                 </a:tc>
                 <a:tc>
                   <a:txBody>
-                    <a:bodyPr/>
+                    <a:bodyPr wrap="square"/>
                     <a:lstStyle/>
                     <a:p>
                       <a:pPr algn="l"/>
@@ -12379,7 +12676,7 @@
                 </a:tc>
                 <a:tc>
                   <a:txBody>
-                    <a:bodyPr/>
+                    <a:bodyPr wrap="square"/>
                     <a:lstStyle/>
                     <a:p>
                       <a:pPr algn="ctr"/>
@@ -12402,7 +12699,7 @@
                 </a:tc>
                 <a:tc>
                   <a:txBody>
-                    <a:bodyPr/>
+                    <a:bodyPr wrap="square"/>
                     <a:lstStyle/>
                     <a:p>
                       <a:pPr algn="ctr"/>
@@ -12425,7 +12722,7 @@
                 </a:tc>
                 <a:tc>
                   <a:txBody>
-                    <a:bodyPr/>
+                    <a:bodyPr wrap="square"/>
                     <a:lstStyle/>
                     <a:p>
                       <a:pPr algn="ctr"/>
@@ -12448,7 +12745,7 @@
                 </a:tc>
                 <a:tc>
                   <a:txBody>
-                    <a:bodyPr/>
+                    <a:bodyPr wrap="square"/>
                     <a:lstStyle/>
                     <a:p>
                       <a:pPr algn="ctr"/>
@@ -12471,7 +12768,7 @@
                 </a:tc>
                 <a:tc>
                   <a:txBody>
-                    <a:bodyPr/>
+                    <a:bodyPr wrap="square"/>
                     <a:lstStyle/>
                     <a:p>
                       <a:pPr algn="ctr"/>
@@ -12493,16 +12790,11 @@
                     </a:solidFill>
                   </a:tcPr>
                 </a:tc>
-                <a:extLst>
-                  <a:ext uri="{0D108BD9-81ED-4DB2-BD59-A6C34878D82A}">
-                    <a16:rowId xmlns:a16="http://schemas.microsoft.com/office/drawing/2014/main" val="10001"/>
-                  </a:ext>
-                </a:extLst>
               </a:tr>
               <a:tr h="321818">
                 <a:tc>
                   <a:txBody>
-                    <a:bodyPr/>
+                    <a:bodyPr wrap="square"/>
                     <a:lstStyle/>
                     <a:p>
                       <a:pPr algn="ctr"/>
@@ -12525,7 +12817,7 @@
                 </a:tc>
                 <a:tc>
                   <a:txBody>
-                    <a:bodyPr/>
+                    <a:bodyPr wrap="square"/>
                     <a:lstStyle/>
                     <a:p>
                       <a:pPr algn="l"/>
@@ -12548,7 +12840,7 @@
                 </a:tc>
                 <a:tc>
                   <a:txBody>
-                    <a:bodyPr/>
+                    <a:bodyPr wrap="square"/>
                     <a:lstStyle/>
                     <a:p>
                       <a:pPr algn="ctr"/>
@@ -12571,7 +12863,7 @@
                 </a:tc>
                 <a:tc>
                   <a:txBody>
-                    <a:bodyPr/>
+                    <a:bodyPr wrap="square"/>
                     <a:lstStyle/>
                     <a:p>
                       <a:pPr algn="ctr"/>
@@ -12594,7 +12886,7 @@
                 </a:tc>
                 <a:tc>
                   <a:txBody>
-                    <a:bodyPr/>
+                    <a:bodyPr wrap="square"/>
                     <a:lstStyle/>
                     <a:p>
                       <a:pPr algn="ctr"/>
@@ -12617,7 +12909,7 @@
                 </a:tc>
                 <a:tc>
                   <a:txBody>
-                    <a:bodyPr/>
+                    <a:bodyPr wrap="square"/>
                     <a:lstStyle/>
                     <a:p>
                       <a:pPr algn="ctr"/>
@@ -12640,7 +12932,7 @@
                 </a:tc>
                 <a:tc>
                   <a:txBody>
-                    <a:bodyPr/>
+                    <a:bodyPr wrap="square"/>
                     <a:lstStyle/>
                     <a:p>
                       <a:pPr algn="ctr"/>
@@ -12662,16 +12954,11 @@
                     </a:solidFill>
                   </a:tcPr>
                 </a:tc>
-                <a:extLst>
-                  <a:ext uri="{0D108BD9-81ED-4DB2-BD59-A6C34878D82A}">
-                    <a16:rowId xmlns:a16="http://schemas.microsoft.com/office/drawing/2014/main" val="10002"/>
-                  </a:ext>
-                </a:extLst>
               </a:tr>
               <a:tr h="321818">
                 <a:tc>
                   <a:txBody>
-                    <a:bodyPr/>
+                    <a:bodyPr wrap="square"/>
                     <a:lstStyle/>
                     <a:p>
                       <a:pPr algn="ctr"/>
@@ -12694,7 +12981,7 @@
                 </a:tc>
                 <a:tc>
                   <a:txBody>
-                    <a:bodyPr/>
+                    <a:bodyPr wrap="square"/>
                     <a:lstStyle/>
                     <a:p>
                       <a:pPr algn="l"/>
@@ -12717,7 +13004,7 @@
                 </a:tc>
                 <a:tc>
                   <a:txBody>
-                    <a:bodyPr/>
+                    <a:bodyPr wrap="square"/>
                     <a:lstStyle/>
                     <a:p>
                       <a:pPr algn="ctr"/>
@@ -12740,7 +13027,7 @@
                 </a:tc>
                 <a:tc>
                   <a:txBody>
-                    <a:bodyPr/>
+                    <a:bodyPr wrap="square"/>
                     <a:lstStyle/>
                     <a:p>
                       <a:pPr algn="ctr"/>
@@ -12763,7 +13050,7 @@
                 </a:tc>
                 <a:tc>
                   <a:txBody>
-                    <a:bodyPr/>
+                    <a:bodyPr wrap="square"/>
                     <a:lstStyle/>
                     <a:p>
                       <a:pPr algn="ctr"/>
@@ -12786,7 +13073,7 @@
                 </a:tc>
                 <a:tc>
                   <a:txBody>
-                    <a:bodyPr/>
+                    <a:bodyPr wrap="square"/>
                     <a:lstStyle/>
                     <a:p>
                       <a:pPr algn="ctr"/>
@@ -12809,7 +13096,7 @@
                 </a:tc>
                 <a:tc>
                   <a:txBody>
-                    <a:bodyPr/>
+                    <a:bodyPr wrap="square"/>
                     <a:lstStyle/>
                     <a:p>
                       <a:pPr algn="ctr"/>
@@ -12831,16 +13118,11 @@
                     </a:solidFill>
                   </a:tcPr>
                 </a:tc>
-                <a:extLst>
-                  <a:ext uri="{0D108BD9-81ED-4DB2-BD59-A6C34878D82A}">
-                    <a16:rowId xmlns:a16="http://schemas.microsoft.com/office/drawing/2014/main" val="10003"/>
-                  </a:ext>
-                </a:extLst>
               </a:tr>
               <a:tr h="321818">
                 <a:tc>
                   <a:txBody>
-                    <a:bodyPr/>
+                    <a:bodyPr wrap="square"/>
                     <a:lstStyle/>
                     <a:p>
                       <a:pPr algn="ctr"/>
@@ -12863,7 +13145,7 @@
                 </a:tc>
                 <a:tc>
                   <a:txBody>
-                    <a:bodyPr/>
+                    <a:bodyPr wrap="square"/>
                     <a:lstStyle/>
                     <a:p>
                       <a:pPr algn="l"/>
@@ -12886,7 +13168,7 @@
                 </a:tc>
                 <a:tc>
                   <a:txBody>
-                    <a:bodyPr/>
+                    <a:bodyPr wrap="square"/>
                     <a:lstStyle/>
                     <a:p>
                       <a:pPr algn="ctr"/>
@@ -12909,7 +13191,7 @@
                 </a:tc>
                 <a:tc>
                   <a:txBody>
-                    <a:bodyPr/>
+                    <a:bodyPr wrap="square"/>
                     <a:lstStyle/>
                     <a:p>
                       <a:pPr algn="ctr"/>
@@ -12932,7 +13214,7 @@
                 </a:tc>
                 <a:tc>
                   <a:txBody>
-                    <a:bodyPr/>
+                    <a:bodyPr wrap="square"/>
                     <a:lstStyle/>
                     <a:p>
                       <a:pPr algn="ctr"/>
@@ -12955,7 +13237,7 @@
                 </a:tc>
                 <a:tc>
                   <a:txBody>
-                    <a:bodyPr/>
+                    <a:bodyPr wrap="square"/>
                     <a:lstStyle/>
                     <a:p>
                       <a:pPr algn="ctr"/>
@@ -12978,7 +13260,7 @@
                 </a:tc>
                 <a:tc>
                   <a:txBody>
-                    <a:bodyPr/>
+                    <a:bodyPr wrap="square"/>
                     <a:lstStyle/>
                     <a:p>
                       <a:pPr algn="ctr"/>
@@ -13000,16 +13282,11 @@
                     </a:solidFill>
                   </a:tcPr>
                 </a:tc>
-                <a:extLst>
-                  <a:ext uri="{0D108BD9-81ED-4DB2-BD59-A6C34878D82A}">
-                    <a16:rowId xmlns:a16="http://schemas.microsoft.com/office/drawing/2014/main" val="10004"/>
-                  </a:ext>
-                </a:extLst>
               </a:tr>
               <a:tr h="321818">
                 <a:tc>
                   <a:txBody>
-                    <a:bodyPr/>
+                    <a:bodyPr wrap="square"/>
                     <a:lstStyle/>
                     <a:p>
                       <a:pPr algn="ctr"/>
@@ -13032,7 +13309,7 @@
                 </a:tc>
                 <a:tc>
                   <a:txBody>
-                    <a:bodyPr/>
+                    <a:bodyPr wrap="square"/>
                     <a:lstStyle/>
                     <a:p>
                       <a:pPr algn="l"/>
@@ -13055,7 +13332,7 @@
                 </a:tc>
                 <a:tc>
                   <a:txBody>
-                    <a:bodyPr/>
+                    <a:bodyPr wrap="square"/>
                     <a:lstStyle/>
                     <a:p>
                       <a:pPr algn="ctr"/>
@@ -13078,7 +13355,7 @@
                 </a:tc>
                 <a:tc>
                   <a:txBody>
-                    <a:bodyPr/>
+                    <a:bodyPr wrap="square"/>
                     <a:lstStyle/>
                     <a:p>
                       <a:pPr algn="ctr"/>
@@ -13101,7 +13378,7 @@
                 </a:tc>
                 <a:tc>
                   <a:txBody>
-                    <a:bodyPr/>
+                    <a:bodyPr wrap="square"/>
                     <a:lstStyle/>
                     <a:p>
                       <a:pPr algn="ctr"/>
@@ -13124,7 +13401,7 @@
                 </a:tc>
                 <a:tc>
                   <a:txBody>
-                    <a:bodyPr/>
+                    <a:bodyPr wrap="square"/>
                     <a:lstStyle/>
                     <a:p>
                       <a:pPr algn="ctr"/>
@@ -13147,7 +13424,7 @@
                 </a:tc>
                 <a:tc>
                   <a:txBody>
-                    <a:bodyPr/>
+                    <a:bodyPr wrap="square"/>
                     <a:lstStyle/>
                     <a:p>
                       <a:pPr algn="ctr"/>
@@ -13169,16 +13446,11 @@
                     </a:solidFill>
                   </a:tcPr>
                 </a:tc>
-                <a:extLst>
-                  <a:ext uri="{0D108BD9-81ED-4DB2-BD59-A6C34878D82A}">
-                    <a16:rowId xmlns:a16="http://schemas.microsoft.com/office/drawing/2014/main" val="10005"/>
-                  </a:ext>
-                </a:extLst>
               </a:tr>
               <a:tr h="321818">
                 <a:tc>
                   <a:txBody>
-                    <a:bodyPr/>
+                    <a:bodyPr wrap="square"/>
                     <a:lstStyle/>
                     <a:p>
                       <a:pPr algn="ctr"/>
@@ -13201,7 +13473,7 @@
                 </a:tc>
                 <a:tc>
                   <a:txBody>
-                    <a:bodyPr/>
+                    <a:bodyPr wrap="square"/>
                     <a:lstStyle/>
                     <a:p>
                       <a:pPr algn="l"/>
@@ -13224,7 +13496,7 @@
                 </a:tc>
                 <a:tc>
                   <a:txBody>
-                    <a:bodyPr/>
+                    <a:bodyPr wrap="square"/>
                     <a:lstStyle/>
                     <a:p>
                       <a:pPr algn="ctr"/>
@@ -13247,7 +13519,7 @@
                 </a:tc>
                 <a:tc>
                   <a:txBody>
-                    <a:bodyPr/>
+                    <a:bodyPr wrap="square"/>
                     <a:lstStyle/>
                     <a:p>
                       <a:pPr algn="ctr"/>
@@ -13270,7 +13542,7 @@
                 </a:tc>
                 <a:tc>
                   <a:txBody>
-                    <a:bodyPr/>
+                    <a:bodyPr wrap="square"/>
                     <a:lstStyle/>
                     <a:p>
                       <a:pPr algn="ctr"/>
@@ -13293,7 +13565,7 @@
                 </a:tc>
                 <a:tc>
                   <a:txBody>
-                    <a:bodyPr/>
+                    <a:bodyPr wrap="square"/>
                     <a:lstStyle/>
                     <a:p>
                       <a:pPr algn="ctr"/>
@@ -13316,7 +13588,7 @@
                 </a:tc>
                 <a:tc>
                   <a:txBody>
-                    <a:bodyPr/>
+                    <a:bodyPr wrap="square"/>
                     <a:lstStyle/>
                     <a:p>
                       <a:pPr algn="ctr"/>
@@ -13338,16 +13610,11 @@
                     </a:solidFill>
                   </a:tcPr>
                 </a:tc>
-                <a:extLst>
-                  <a:ext uri="{0D108BD9-81ED-4DB2-BD59-A6C34878D82A}">
-                    <a16:rowId xmlns:a16="http://schemas.microsoft.com/office/drawing/2014/main" val="10006"/>
-                  </a:ext>
-                </a:extLst>
               </a:tr>
               <a:tr h="321818">
                 <a:tc>
                   <a:txBody>
-                    <a:bodyPr/>
+                    <a:bodyPr wrap="square"/>
                     <a:lstStyle/>
                     <a:p>
                       <a:pPr algn="ctr"/>
@@ -13370,7 +13637,7 @@
                 </a:tc>
                 <a:tc>
                   <a:txBody>
-                    <a:bodyPr/>
+                    <a:bodyPr wrap="square"/>
                     <a:lstStyle/>
                     <a:p>
                       <a:pPr algn="l"/>
@@ -13393,7 +13660,7 @@
                 </a:tc>
                 <a:tc>
                   <a:txBody>
-                    <a:bodyPr/>
+                    <a:bodyPr wrap="square"/>
                     <a:lstStyle/>
                     <a:p>
                       <a:pPr algn="ctr"/>
@@ -13416,7 +13683,7 @@
                 </a:tc>
                 <a:tc>
                   <a:txBody>
-                    <a:bodyPr/>
+                    <a:bodyPr wrap="square"/>
                     <a:lstStyle/>
                     <a:p>
                       <a:pPr algn="ctr"/>
@@ -13439,7 +13706,7 @@
                 </a:tc>
                 <a:tc>
                   <a:txBody>
-                    <a:bodyPr/>
+                    <a:bodyPr wrap="square"/>
                     <a:lstStyle/>
                     <a:p>
                       <a:pPr algn="ctr"/>
@@ -13462,7 +13729,7 @@
                 </a:tc>
                 <a:tc>
                   <a:txBody>
-                    <a:bodyPr/>
+                    <a:bodyPr wrap="square"/>
                     <a:lstStyle/>
                     <a:p>
                       <a:pPr algn="ctr"/>
@@ -13485,7 +13752,7 @@
                 </a:tc>
                 <a:tc>
                   <a:txBody>
-                    <a:bodyPr/>
+                    <a:bodyPr wrap="square"/>
                     <a:lstStyle/>
                     <a:p>
                       <a:pPr algn="ctr"/>
@@ -13507,16 +13774,11 @@
                     </a:solidFill>
                   </a:tcPr>
                 </a:tc>
-                <a:extLst>
-                  <a:ext uri="{0D108BD9-81ED-4DB2-BD59-A6C34878D82A}">
-                    <a16:rowId xmlns:a16="http://schemas.microsoft.com/office/drawing/2014/main" val="10007"/>
-                  </a:ext>
-                </a:extLst>
               </a:tr>
               <a:tr h="321818">
                 <a:tc>
                   <a:txBody>
-                    <a:bodyPr/>
+                    <a:bodyPr wrap="square"/>
                     <a:lstStyle/>
                     <a:p>
                       <a:pPr algn="ctr"/>
@@ -13539,7 +13801,7 @@
                 </a:tc>
                 <a:tc>
                   <a:txBody>
-                    <a:bodyPr/>
+                    <a:bodyPr wrap="square"/>
                     <a:lstStyle/>
                     <a:p>
                       <a:pPr algn="l"/>
@@ -13562,7 +13824,7 @@
                 </a:tc>
                 <a:tc>
                   <a:txBody>
-                    <a:bodyPr/>
+                    <a:bodyPr wrap="square"/>
                     <a:lstStyle/>
                     <a:p>
                       <a:pPr algn="ctr"/>
@@ -13585,7 +13847,7 @@
                 </a:tc>
                 <a:tc>
                   <a:txBody>
-                    <a:bodyPr/>
+                    <a:bodyPr wrap="square"/>
                     <a:lstStyle/>
                     <a:p>
                       <a:pPr algn="ctr"/>
@@ -13608,7 +13870,7 @@
                 </a:tc>
                 <a:tc>
                   <a:txBody>
-                    <a:bodyPr/>
+                    <a:bodyPr wrap="square"/>
                     <a:lstStyle/>
                     <a:p>
                       <a:pPr algn="ctr"/>
@@ -13631,7 +13893,7 @@
                 </a:tc>
                 <a:tc>
                   <a:txBody>
-                    <a:bodyPr/>
+                    <a:bodyPr wrap="square"/>
                     <a:lstStyle/>
                     <a:p>
                       <a:pPr algn="ctr"/>
@@ -13654,7 +13916,7 @@
                 </a:tc>
                 <a:tc>
                   <a:txBody>
-                    <a:bodyPr/>
+                    <a:bodyPr wrap="square"/>
                     <a:lstStyle/>
                     <a:p>
                       <a:pPr algn="ctr"/>
@@ -13676,11 +13938,6 @@
                     </a:solidFill>
                   </a:tcPr>
                 </a:tc>
-                <a:extLst>
-                  <a:ext uri="{0D108BD9-81ED-4DB2-BD59-A6C34878D82A}">
-                    <a16:rowId xmlns:a16="http://schemas.microsoft.com/office/drawing/2014/main" val="10008"/>
-                  </a:ext>
-                </a:extLst>
               </a:tr>
             </a:tbl>
           </a:graphicData>
@@ -13695,7 +13952,7 @@
 </file>
 
 <file path=ppt/slides/slide6.xml><?xml version="1.0" encoding="utf-8"?>
-<p:sld xmlns:a="http://schemas.openxmlformats.org/drawingml/2006/main" xmlns:r="http://schemas.openxmlformats.org/officeDocument/2006/relationships" xmlns:p="http://schemas.openxmlformats.org/presentationml/2006/main">
+<p:sld xmlns:a="http://schemas.openxmlformats.org/drawingml/2006/main" xmlns:p="http://schemas.openxmlformats.org/presentationml/2006/main" xmlns:r="http://schemas.openxmlformats.org/officeDocument/2006/relationships">
   <p:cSld>
     <p:spTree>
       <p:nvGrpSpPr>
@@ -13703,14 +13960,7 @@
         <p:cNvGrpSpPr/>
         <p:nvPr/>
       </p:nvGrpSpPr>
-      <p:grpSpPr>
-        <a:xfrm>
-          <a:off x="0" y="0"/>
-          <a:ext cx="0" cy="0"/>
-          <a:chOff x="0" y="0"/>
-          <a:chExt cx="0" cy="0"/>
-        </a:xfrm>
-      </p:grpSpPr>
+      <p:grpSpPr/>
       <p:sp>
         <p:nvSpPr>
           <p:cNvPr id="2" name="TextBox 1"/>
@@ -13728,7 +13978,7 @@
           <a:noFill/>
         </p:spPr>
         <p:txBody>
-          <a:bodyPr wrap="square" lIns="0" tIns="0" rIns="0" bIns="0">
+          <a:bodyPr wrap="square" lIns="0" rIns="0" tIns="0" bIns="0">
             <a:spAutoFit/>
           </a:bodyPr>
           <a:lstStyle/>
@@ -13762,7 +14012,7 @@
           <a:noFill/>
         </p:spPr>
         <p:txBody>
-          <a:bodyPr wrap="square" lIns="0" tIns="0" rIns="0" bIns="0">
+          <a:bodyPr wrap="square" lIns="0" rIns="0" tIns="0" bIns="0">
             <a:spAutoFit/>
           </a:bodyPr>
           <a:lstStyle/>
@@ -13796,7 +14046,7 @@
           <a:noFill/>
         </p:spPr>
         <p:txBody>
-          <a:bodyPr wrap="square" lIns="0" tIns="0" rIns="0" bIns="0">
+          <a:bodyPr wrap="square" lIns="0" rIns="0" tIns="0" bIns="0">
             <a:spAutoFit/>
           </a:bodyPr>
           <a:lstStyle/>
@@ -13831,7 +14081,7 @@
           <a:noFill/>
         </p:spPr>
         <p:txBody>
-          <a:bodyPr wrap="square" lIns="0" tIns="0" rIns="0" bIns="0">
+          <a:bodyPr wrap="square" lIns="0" rIns="0" tIns="0" bIns="0">
             <a:spAutoFit/>
           </a:bodyPr>
           <a:lstStyle/>
@@ -13867,60 +14117,18 @@
                 <a:tableStyleId>{5C22544A-7EE6-4342-B048-85BDC9FD1C3A}</a:tableStyleId>
               </a:tblPr>
               <a:tblGrid>
-                <a:gridCol w="960646">
-                  <a:extLst>
-                    <a:ext uri="{9D8B030D-6E8A-4147-A177-3AD203B41FA5}">
-                      <a16:colId xmlns:a16="http://schemas.microsoft.com/office/drawing/2014/main" val="20000"/>
-                    </a:ext>
-                  </a:extLst>
-                </a:gridCol>
-                <a:gridCol w="4063535">
-                  <a:extLst>
-                    <a:ext uri="{9D8B030D-6E8A-4147-A177-3AD203B41FA5}">
-                      <a16:colId xmlns:a16="http://schemas.microsoft.com/office/drawing/2014/main" val="20001"/>
-                    </a:ext>
-                  </a:extLst>
-                </a:gridCol>
-                <a:gridCol w="960646">
-                  <a:extLst>
-                    <a:ext uri="{9D8B030D-6E8A-4147-A177-3AD203B41FA5}">
-                      <a16:colId xmlns:a16="http://schemas.microsoft.com/office/drawing/2014/main" val="20002"/>
-                    </a:ext>
-                  </a:extLst>
-                </a:gridCol>
-                <a:gridCol w="1497007">
-                  <a:extLst>
-                    <a:ext uri="{9D8B030D-6E8A-4147-A177-3AD203B41FA5}">
-                      <a16:colId xmlns:a16="http://schemas.microsoft.com/office/drawing/2014/main" val="20003"/>
-                    </a:ext>
-                  </a:extLst>
-                </a:gridCol>
-                <a:gridCol w="1611484">
-                  <a:extLst>
-                    <a:ext uri="{9D8B030D-6E8A-4147-A177-3AD203B41FA5}">
-                      <a16:colId xmlns:a16="http://schemas.microsoft.com/office/drawing/2014/main" val="20004"/>
-                    </a:ext>
-                  </a:extLst>
-                </a:gridCol>
-                <a:gridCol w="960646">
-                  <a:extLst>
-                    <a:ext uri="{9D8B030D-6E8A-4147-A177-3AD203B41FA5}">
-                      <a16:colId xmlns:a16="http://schemas.microsoft.com/office/drawing/2014/main" val="20005"/>
-                    </a:ext>
-                  </a:extLst>
-                </a:gridCol>
-                <a:gridCol w="1003875">
-                  <a:extLst>
-                    <a:ext uri="{9D8B030D-6E8A-4147-A177-3AD203B41FA5}">
-                      <a16:colId xmlns:a16="http://schemas.microsoft.com/office/drawing/2014/main" val="20006"/>
-                    </a:ext>
-                  </a:extLst>
-                </a:gridCol>
+                <a:gridCol w="960646"/>
+                <a:gridCol w="4063535"/>
+                <a:gridCol w="960646"/>
+                <a:gridCol w="1497007"/>
+                <a:gridCol w="1611484"/>
+                <a:gridCol w="960646"/>
+                <a:gridCol w="1003875"/>
               </a:tblGrid>
               <a:tr h="321818">
                 <a:tc>
                   <a:txBody>
-                    <a:bodyPr/>
+                    <a:bodyPr wrap="square"/>
                     <a:lstStyle/>
                     <a:p>
                       <a:pPr algn="ctr"/>
@@ -13943,7 +14151,7 @@
                 </a:tc>
                 <a:tc>
                   <a:txBody>
-                    <a:bodyPr/>
+                    <a:bodyPr wrap="square"/>
                     <a:lstStyle/>
                     <a:p>
                       <a:pPr algn="ctr"/>
@@ -13966,7 +14174,7 @@
                 </a:tc>
                 <a:tc>
                   <a:txBody>
-                    <a:bodyPr/>
+                    <a:bodyPr wrap="square"/>
                     <a:lstStyle/>
                     <a:p>
                       <a:pPr algn="ctr"/>
@@ -13989,7 +14197,7 @@
                 </a:tc>
                 <a:tc>
                   <a:txBody>
-                    <a:bodyPr/>
+                    <a:bodyPr wrap="square"/>
                     <a:lstStyle/>
                     <a:p>
                       <a:pPr algn="ctr"/>
@@ -14012,7 +14220,7 @@
                 </a:tc>
                 <a:tc>
                   <a:txBody>
-                    <a:bodyPr/>
+                    <a:bodyPr wrap="square"/>
                     <a:lstStyle/>
                     <a:p>
                       <a:pPr algn="ctr"/>
@@ -14035,7 +14243,7 @@
                 </a:tc>
                 <a:tc>
                   <a:txBody>
-                    <a:bodyPr/>
+                    <a:bodyPr wrap="square"/>
                     <a:lstStyle/>
                     <a:p>
                       <a:pPr algn="ctr"/>
@@ -14058,7 +14266,7 @@
                 </a:tc>
                 <a:tc>
                   <a:txBody>
-                    <a:bodyPr/>
+                    <a:bodyPr wrap="square"/>
                     <a:lstStyle/>
                     <a:p>
                       <a:pPr algn="ctr"/>
@@ -14079,16 +14287,11 @@
                     </a:solidFill>
                   </a:tcPr>
                 </a:tc>
-                <a:extLst>
-                  <a:ext uri="{0D108BD9-81ED-4DB2-BD59-A6C34878D82A}">
-                    <a16:rowId xmlns:a16="http://schemas.microsoft.com/office/drawing/2014/main" val="10000"/>
-                  </a:ext>
-                </a:extLst>
               </a:tr>
               <a:tr h="321818">
                 <a:tc>
                   <a:txBody>
-                    <a:bodyPr/>
+                    <a:bodyPr wrap="square"/>
                     <a:lstStyle/>
                     <a:p>
                       <a:pPr algn="ctr"/>
@@ -14111,7 +14314,7 @@
                 </a:tc>
                 <a:tc>
                   <a:txBody>
-                    <a:bodyPr/>
+                    <a:bodyPr wrap="square"/>
                     <a:lstStyle/>
                     <a:p>
                       <a:pPr algn="l"/>
@@ -14134,7 +14337,7 @@
                 </a:tc>
                 <a:tc>
                   <a:txBody>
-                    <a:bodyPr/>
+                    <a:bodyPr wrap="square"/>
                     <a:lstStyle/>
                     <a:p>
                       <a:pPr algn="ctr"/>
@@ -14157,7 +14360,7 @@
                 </a:tc>
                 <a:tc>
                   <a:txBody>
-                    <a:bodyPr/>
+                    <a:bodyPr wrap="square"/>
                     <a:lstStyle/>
                     <a:p>
                       <a:pPr algn="ctr"/>
@@ -14180,7 +14383,7 @@
                 </a:tc>
                 <a:tc>
                   <a:txBody>
-                    <a:bodyPr/>
+                    <a:bodyPr wrap="square"/>
                     <a:lstStyle/>
                     <a:p>
                       <a:pPr algn="ctr"/>
@@ -14203,7 +14406,7 @@
                 </a:tc>
                 <a:tc>
                   <a:txBody>
-                    <a:bodyPr/>
+                    <a:bodyPr wrap="square"/>
                     <a:lstStyle/>
                     <a:p>
                       <a:pPr algn="ctr"/>
@@ -14226,7 +14429,7 @@
                 </a:tc>
                 <a:tc>
                   <a:txBody>
-                    <a:bodyPr/>
+                    <a:bodyPr wrap="square"/>
                     <a:lstStyle/>
                     <a:p>
                       <a:pPr algn="ctr"/>
@@ -14248,16 +14451,11 @@
                     </a:solidFill>
                   </a:tcPr>
                 </a:tc>
-                <a:extLst>
-                  <a:ext uri="{0D108BD9-81ED-4DB2-BD59-A6C34878D82A}">
-                    <a16:rowId xmlns:a16="http://schemas.microsoft.com/office/drawing/2014/main" val="10001"/>
-                  </a:ext>
-                </a:extLst>
               </a:tr>
               <a:tr h="321818">
                 <a:tc>
                   <a:txBody>
-                    <a:bodyPr/>
+                    <a:bodyPr wrap="square"/>
                     <a:lstStyle/>
                     <a:p>
                       <a:pPr algn="ctr"/>
@@ -14280,7 +14478,7 @@
                 </a:tc>
                 <a:tc>
                   <a:txBody>
-                    <a:bodyPr/>
+                    <a:bodyPr wrap="square"/>
                     <a:lstStyle/>
                     <a:p>
                       <a:pPr algn="l"/>
@@ -14303,7 +14501,7 @@
                 </a:tc>
                 <a:tc>
                   <a:txBody>
-                    <a:bodyPr/>
+                    <a:bodyPr wrap="square"/>
                     <a:lstStyle/>
                     <a:p>
                       <a:pPr algn="ctr"/>
@@ -14326,7 +14524,7 @@
                 </a:tc>
                 <a:tc>
                   <a:txBody>
-                    <a:bodyPr/>
+                    <a:bodyPr wrap="square"/>
                     <a:lstStyle/>
                     <a:p>
                       <a:pPr algn="ctr"/>
@@ -14349,7 +14547,7 @@
                 </a:tc>
                 <a:tc>
                   <a:txBody>
-                    <a:bodyPr/>
+                    <a:bodyPr wrap="square"/>
                     <a:lstStyle/>
                     <a:p>
                       <a:pPr algn="ctr"/>
@@ -14372,7 +14570,7 @@
                 </a:tc>
                 <a:tc>
                   <a:txBody>
-                    <a:bodyPr/>
+                    <a:bodyPr wrap="square"/>
                     <a:lstStyle/>
                     <a:p>
                       <a:pPr algn="ctr"/>
@@ -14395,7 +14593,7 @@
                 </a:tc>
                 <a:tc>
                   <a:txBody>
-                    <a:bodyPr/>
+                    <a:bodyPr wrap="square"/>
                     <a:lstStyle/>
                     <a:p>
                       <a:pPr algn="ctr"/>
@@ -14417,16 +14615,11 @@
                     </a:solidFill>
                   </a:tcPr>
                 </a:tc>
-                <a:extLst>
-                  <a:ext uri="{0D108BD9-81ED-4DB2-BD59-A6C34878D82A}">
-                    <a16:rowId xmlns:a16="http://schemas.microsoft.com/office/drawing/2014/main" val="10002"/>
-                  </a:ext>
-                </a:extLst>
               </a:tr>
               <a:tr h="321818">
                 <a:tc>
                   <a:txBody>
-                    <a:bodyPr/>
+                    <a:bodyPr wrap="square"/>
                     <a:lstStyle/>
                     <a:p>
                       <a:pPr algn="ctr"/>
@@ -14449,7 +14642,7 @@
                 </a:tc>
                 <a:tc>
                   <a:txBody>
-                    <a:bodyPr/>
+                    <a:bodyPr wrap="square"/>
                     <a:lstStyle/>
                     <a:p>
                       <a:pPr algn="l"/>
@@ -14472,7 +14665,7 @@
                 </a:tc>
                 <a:tc>
                   <a:txBody>
-                    <a:bodyPr/>
+                    <a:bodyPr wrap="square"/>
                     <a:lstStyle/>
                     <a:p>
                       <a:pPr algn="ctr"/>
@@ -14495,7 +14688,7 @@
                 </a:tc>
                 <a:tc>
                   <a:txBody>
-                    <a:bodyPr/>
+                    <a:bodyPr wrap="square"/>
                     <a:lstStyle/>
                     <a:p>
                       <a:pPr algn="ctr"/>
@@ -14518,7 +14711,7 @@
                 </a:tc>
                 <a:tc>
                   <a:txBody>
-                    <a:bodyPr/>
+                    <a:bodyPr wrap="square"/>
                     <a:lstStyle/>
                     <a:p>
                       <a:pPr algn="ctr"/>
@@ -14541,7 +14734,7 @@
                 </a:tc>
                 <a:tc>
                   <a:txBody>
-                    <a:bodyPr/>
+                    <a:bodyPr wrap="square"/>
                     <a:lstStyle/>
                     <a:p>
                       <a:pPr algn="ctr"/>
@@ -14564,7 +14757,7 @@
                 </a:tc>
                 <a:tc>
                   <a:txBody>
-                    <a:bodyPr/>
+                    <a:bodyPr wrap="square"/>
                     <a:lstStyle/>
                     <a:p>
                       <a:pPr algn="ctr"/>
@@ -14586,16 +14779,11 @@
                     </a:solidFill>
                   </a:tcPr>
                 </a:tc>
-                <a:extLst>
-                  <a:ext uri="{0D108BD9-81ED-4DB2-BD59-A6C34878D82A}">
-                    <a16:rowId xmlns:a16="http://schemas.microsoft.com/office/drawing/2014/main" val="10003"/>
-                  </a:ext>
-                </a:extLst>
               </a:tr>
               <a:tr h="321818">
                 <a:tc>
                   <a:txBody>
-                    <a:bodyPr/>
+                    <a:bodyPr wrap="square"/>
                     <a:lstStyle/>
                     <a:p>
                       <a:pPr algn="ctr"/>
@@ -14618,7 +14806,7 @@
                 </a:tc>
                 <a:tc>
                   <a:txBody>
-                    <a:bodyPr/>
+                    <a:bodyPr wrap="square"/>
                     <a:lstStyle/>
                     <a:p>
                       <a:pPr algn="l"/>
@@ -14641,7 +14829,7 @@
                 </a:tc>
                 <a:tc>
                   <a:txBody>
-                    <a:bodyPr/>
+                    <a:bodyPr wrap="square"/>
                     <a:lstStyle/>
                     <a:p>
                       <a:pPr algn="ctr"/>
@@ -14664,7 +14852,7 @@
                 </a:tc>
                 <a:tc>
                   <a:txBody>
-                    <a:bodyPr/>
+                    <a:bodyPr wrap="square"/>
                     <a:lstStyle/>
                     <a:p>
                       <a:pPr algn="ctr"/>
@@ -14687,7 +14875,7 @@
                 </a:tc>
                 <a:tc>
                   <a:txBody>
-                    <a:bodyPr/>
+                    <a:bodyPr wrap="square"/>
                     <a:lstStyle/>
                     <a:p>
                       <a:pPr algn="ctr"/>
@@ -14710,7 +14898,7 @@
                 </a:tc>
                 <a:tc>
                   <a:txBody>
-                    <a:bodyPr/>
+                    <a:bodyPr wrap="square"/>
                     <a:lstStyle/>
                     <a:p>
                       <a:pPr algn="ctr"/>
@@ -14733,7 +14921,7 @@
                 </a:tc>
                 <a:tc>
                   <a:txBody>
-                    <a:bodyPr/>
+                    <a:bodyPr wrap="square"/>
                     <a:lstStyle/>
                     <a:p>
                       <a:pPr algn="ctr"/>
@@ -14755,16 +14943,11 @@
                     </a:solidFill>
                   </a:tcPr>
                 </a:tc>
-                <a:extLst>
-                  <a:ext uri="{0D108BD9-81ED-4DB2-BD59-A6C34878D82A}">
-                    <a16:rowId xmlns:a16="http://schemas.microsoft.com/office/drawing/2014/main" val="10004"/>
-                  </a:ext>
-                </a:extLst>
               </a:tr>
               <a:tr h="321818">
                 <a:tc>
                   <a:txBody>
-                    <a:bodyPr/>
+                    <a:bodyPr wrap="square"/>
                     <a:lstStyle/>
                     <a:p>
                       <a:pPr algn="ctr"/>
@@ -14787,7 +14970,7 @@
                 </a:tc>
                 <a:tc>
                   <a:txBody>
-                    <a:bodyPr/>
+                    <a:bodyPr wrap="square"/>
                     <a:lstStyle/>
                     <a:p>
                       <a:pPr algn="l"/>
@@ -14810,7 +14993,7 @@
                 </a:tc>
                 <a:tc>
                   <a:txBody>
-                    <a:bodyPr/>
+                    <a:bodyPr wrap="square"/>
                     <a:lstStyle/>
                     <a:p>
                       <a:pPr algn="ctr"/>
@@ -14833,7 +15016,7 @@
                 </a:tc>
                 <a:tc>
                   <a:txBody>
-                    <a:bodyPr/>
+                    <a:bodyPr wrap="square"/>
                     <a:lstStyle/>
                     <a:p>
                       <a:pPr algn="ctr"/>
@@ -14856,7 +15039,7 @@
                 </a:tc>
                 <a:tc>
                   <a:txBody>
-                    <a:bodyPr/>
+                    <a:bodyPr wrap="square"/>
                     <a:lstStyle/>
                     <a:p>
                       <a:pPr algn="ctr"/>
@@ -14879,7 +15062,7 @@
                 </a:tc>
                 <a:tc>
                   <a:txBody>
-                    <a:bodyPr/>
+                    <a:bodyPr wrap="square"/>
                     <a:lstStyle/>
                     <a:p>
                       <a:pPr algn="ctr"/>
@@ -14902,7 +15085,7 @@
                 </a:tc>
                 <a:tc>
                   <a:txBody>
-                    <a:bodyPr/>
+                    <a:bodyPr wrap="square"/>
                     <a:lstStyle/>
                     <a:p>
                       <a:pPr algn="ctr"/>
@@ -14924,16 +15107,11 @@
                     </a:solidFill>
                   </a:tcPr>
                 </a:tc>
-                <a:extLst>
-                  <a:ext uri="{0D108BD9-81ED-4DB2-BD59-A6C34878D82A}">
-                    <a16:rowId xmlns:a16="http://schemas.microsoft.com/office/drawing/2014/main" val="10005"/>
-                  </a:ext>
-                </a:extLst>
               </a:tr>
               <a:tr h="321818">
                 <a:tc>
                   <a:txBody>
-                    <a:bodyPr/>
+                    <a:bodyPr wrap="square"/>
                     <a:lstStyle/>
                     <a:p>
                       <a:pPr algn="ctr"/>
@@ -14956,7 +15134,7 @@
                 </a:tc>
                 <a:tc>
                   <a:txBody>
-                    <a:bodyPr/>
+                    <a:bodyPr wrap="square"/>
                     <a:lstStyle/>
                     <a:p>
                       <a:pPr algn="l"/>
@@ -14979,7 +15157,7 @@
                 </a:tc>
                 <a:tc>
                   <a:txBody>
-                    <a:bodyPr/>
+                    <a:bodyPr wrap="square"/>
                     <a:lstStyle/>
                     <a:p>
                       <a:pPr algn="ctr"/>
@@ -15002,7 +15180,7 @@
                 </a:tc>
                 <a:tc>
                   <a:txBody>
-                    <a:bodyPr/>
+                    <a:bodyPr wrap="square"/>
                     <a:lstStyle/>
                     <a:p>
                       <a:pPr algn="ctr"/>
@@ -15025,7 +15203,7 @@
                 </a:tc>
                 <a:tc>
                   <a:txBody>
-                    <a:bodyPr/>
+                    <a:bodyPr wrap="square"/>
                     <a:lstStyle/>
                     <a:p>
                       <a:pPr algn="ctr"/>
@@ -15048,7 +15226,7 @@
                 </a:tc>
                 <a:tc>
                   <a:txBody>
-                    <a:bodyPr/>
+                    <a:bodyPr wrap="square"/>
                     <a:lstStyle/>
                     <a:p>
                       <a:pPr algn="ctr"/>
@@ -15071,7 +15249,7 @@
                 </a:tc>
                 <a:tc>
                   <a:txBody>
-                    <a:bodyPr/>
+                    <a:bodyPr wrap="square"/>
                     <a:lstStyle/>
                     <a:p>
                       <a:pPr algn="ctr"/>
@@ -15093,16 +15271,11 @@
                     </a:solidFill>
                   </a:tcPr>
                 </a:tc>
-                <a:extLst>
-                  <a:ext uri="{0D108BD9-81ED-4DB2-BD59-A6C34878D82A}">
-                    <a16:rowId xmlns:a16="http://schemas.microsoft.com/office/drawing/2014/main" val="10006"/>
-                  </a:ext>
-                </a:extLst>
               </a:tr>
               <a:tr h="321818">
                 <a:tc>
                   <a:txBody>
-                    <a:bodyPr/>
+                    <a:bodyPr wrap="square"/>
                     <a:lstStyle/>
                     <a:p>
                       <a:pPr algn="ctr"/>
@@ -15125,7 +15298,7 @@
                 </a:tc>
                 <a:tc>
                   <a:txBody>
-                    <a:bodyPr/>
+                    <a:bodyPr wrap="square"/>
                     <a:lstStyle/>
                     <a:p>
                       <a:pPr algn="l"/>
@@ -15148,7 +15321,7 @@
                 </a:tc>
                 <a:tc>
                   <a:txBody>
-                    <a:bodyPr/>
+                    <a:bodyPr wrap="square"/>
                     <a:lstStyle/>
                     <a:p>
                       <a:pPr algn="ctr"/>
@@ -15171,7 +15344,7 @@
                 </a:tc>
                 <a:tc>
                   <a:txBody>
-                    <a:bodyPr/>
+                    <a:bodyPr wrap="square"/>
                     <a:lstStyle/>
                     <a:p>
                       <a:pPr algn="ctr"/>
@@ -15194,7 +15367,7 @@
                 </a:tc>
                 <a:tc>
                   <a:txBody>
-                    <a:bodyPr/>
+                    <a:bodyPr wrap="square"/>
                     <a:lstStyle/>
                     <a:p>
                       <a:pPr algn="ctr"/>
@@ -15217,7 +15390,7 @@
                 </a:tc>
                 <a:tc>
                   <a:txBody>
-                    <a:bodyPr/>
+                    <a:bodyPr wrap="square"/>
                     <a:lstStyle/>
                     <a:p>
                       <a:pPr algn="ctr"/>
@@ -15240,7 +15413,7 @@
                 </a:tc>
                 <a:tc>
                   <a:txBody>
-                    <a:bodyPr/>
+                    <a:bodyPr wrap="square"/>
                     <a:lstStyle/>
                     <a:p>
                       <a:pPr algn="ctr"/>
@@ -15262,11 +15435,6 @@
                     </a:solidFill>
                   </a:tcPr>
                 </a:tc>
-                <a:extLst>
-                  <a:ext uri="{0D108BD9-81ED-4DB2-BD59-A6C34878D82A}">
-                    <a16:rowId xmlns:a16="http://schemas.microsoft.com/office/drawing/2014/main" val="10007"/>
-                  </a:ext>
-                </a:extLst>
               </a:tr>
             </a:tbl>
           </a:graphicData>
@@ -15281,7 +15449,7 @@
 </file>
 
 <file path=ppt/slides/slide7.xml><?xml version="1.0" encoding="utf-8"?>
-<p:sld xmlns:a="http://schemas.openxmlformats.org/drawingml/2006/main" xmlns:r="http://schemas.openxmlformats.org/officeDocument/2006/relationships" xmlns:p="http://schemas.openxmlformats.org/presentationml/2006/main">
+<p:sld xmlns:a="http://schemas.openxmlformats.org/drawingml/2006/main" xmlns:p="http://schemas.openxmlformats.org/presentationml/2006/main" xmlns:r="http://schemas.openxmlformats.org/officeDocument/2006/relationships">
   <p:cSld>
     <p:spTree>
       <p:nvGrpSpPr>
@@ -15289,14 +15457,7 @@
         <p:cNvGrpSpPr/>
         <p:nvPr/>
       </p:nvGrpSpPr>
-      <p:grpSpPr>
-        <a:xfrm>
-          <a:off x="0" y="0"/>
-          <a:ext cx="0" cy="0"/>
-          <a:chOff x="0" y="0"/>
-          <a:chExt cx="0" cy="0"/>
-        </a:xfrm>
-      </p:grpSpPr>
+      <p:grpSpPr/>
       <p:sp>
         <p:nvSpPr>
           <p:cNvPr id="2" name="TextBox 1"/>
@@ -15314,7 +15475,7 @@
           <a:noFill/>
         </p:spPr>
         <p:txBody>
-          <a:bodyPr wrap="square" lIns="0" tIns="0" rIns="0" bIns="0">
+          <a:bodyPr wrap="square" lIns="0" rIns="0" tIns="0" bIns="0">
             <a:spAutoFit/>
           </a:bodyPr>
           <a:lstStyle/>
@@ -15348,7 +15509,7 @@
           <a:noFill/>
         </p:spPr>
         <p:txBody>
-          <a:bodyPr wrap="square" lIns="0" tIns="0" rIns="0" bIns="0">
+          <a:bodyPr wrap="square" lIns="0" rIns="0" tIns="0" bIns="0">
             <a:spAutoFit/>
           </a:bodyPr>
           <a:lstStyle/>
@@ -15382,7 +15543,7 @@
           <a:noFill/>
         </p:spPr>
         <p:txBody>
-          <a:bodyPr wrap="square" lIns="0" tIns="0" rIns="0" bIns="0">
+          <a:bodyPr wrap="square" lIns="0" rIns="0" tIns="0" bIns="0">
             <a:spAutoFit/>
           </a:bodyPr>
           <a:lstStyle/>
@@ -15417,7 +15578,7 @@
           <a:noFill/>
         </p:spPr>
         <p:txBody>
-          <a:bodyPr wrap="square" lIns="0" tIns="0" rIns="0" bIns="0">
+          <a:bodyPr wrap="square" lIns="0" rIns="0" tIns="0" bIns="0">
             <a:spAutoFit/>
           </a:bodyPr>
           <a:lstStyle/>
@@ -15440,13 +15601,7 @@
           <p:cNvGraphicFramePr>
             <a:graphicFrameLocks noGrp="1"/>
           </p:cNvGraphicFramePr>
-          <p:nvPr>
-            <p:extLst>
-              <p:ext uri="{D42A27DB-BD31-4B8C-83A1-F6EECF244321}">
-                <p14:modId xmlns:p14="http://schemas.microsoft.com/office/powerpoint/2010/main" val="3185543"/>
-              </p:ext>
-            </p:extLst>
-          </p:nvPr>
+          <p:nvPr/>
         </p:nvGraphicFramePr>
         <p:xfrm>
           <a:off x="566928" y="1709928"/>
@@ -15459,39 +15614,15 @@
                 <a:tableStyleId>{5C22544A-7EE6-4342-B048-85BDC9FD1C3A}</a:tableStyleId>
               </a:tblPr>
               <a:tblGrid>
-                <a:gridCol w="1261872">
-                  <a:extLst>
-                    <a:ext uri="{9D8B030D-6E8A-4147-A177-3AD203B41FA5}">
-                      <a16:colId xmlns:a16="http://schemas.microsoft.com/office/drawing/2014/main" val="20000"/>
-                    </a:ext>
-                  </a:extLst>
-                </a:gridCol>
-                <a:gridCol w="3534925">
-                  <a:extLst>
-                    <a:ext uri="{9D8B030D-6E8A-4147-A177-3AD203B41FA5}">
-                      <a16:colId xmlns:a16="http://schemas.microsoft.com/office/drawing/2014/main" val="20001"/>
-                    </a:ext>
-                  </a:extLst>
-                </a:gridCol>
-                <a:gridCol w="3916809">
-                  <a:extLst>
-                    <a:ext uri="{9D8B030D-6E8A-4147-A177-3AD203B41FA5}">
-                      <a16:colId xmlns:a16="http://schemas.microsoft.com/office/drawing/2014/main" val="20002"/>
-                    </a:ext>
-                  </a:extLst>
-                </a:gridCol>
-                <a:gridCol w="2344233">
-                  <a:extLst>
-                    <a:ext uri="{9D8B030D-6E8A-4147-A177-3AD203B41FA5}">
-                      <a16:colId xmlns:a16="http://schemas.microsoft.com/office/drawing/2014/main" val="20003"/>
-                    </a:ext>
-                  </a:extLst>
-                </a:gridCol>
+                <a:gridCol w="821457"/>
+                <a:gridCol w="3975340"/>
+                <a:gridCol w="3916809"/>
+                <a:gridCol w="2344233"/>
               </a:tblGrid>
               <a:tr h="321818">
                 <a:tc>
                   <a:txBody>
-                    <a:bodyPr/>
+                    <a:bodyPr wrap="square"/>
                     <a:lstStyle/>
                     <a:p>
                       <a:pPr algn="ctr"/>
@@ -15514,7 +15645,7 @@
                 </a:tc>
                 <a:tc>
                   <a:txBody>
-                    <a:bodyPr/>
+                    <a:bodyPr wrap="square"/>
                     <a:lstStyle/>
                     <a:p>
                       <a:pPr algn="ctr"/>
@@ -15537,7 +15668,7 @@
                 </a:tc>
                 <a:tc>
                   <a:txBody>
-                    <a:bodyPr/>
+                    <a:bodyPr wrap="square"/>
                     <a:lstStyle/>
                     <a:p>
                       <a:pPr algn="ctr"/>
@@ -15560,7 +15691,7 @@
                 </a:tc>
                 <a:tc>
                   <a:txBody>
-                    <a:bodyPr/>
+                    <a:bodyPr wrap="square"/>
                     <a:lstStyle/>
                     <a:p>
                       <a:pPr algn="ctr"/>
@@ -15581,16 +15712,11 @@
                     </a:solidFill>
                   </a:tcPr>
                 </a:tc>
-                <a:extLst>
-                  <a:ext uri="{0D108BD9-81ED-4DB2-BD59-A6C34878D82A}">
-                    <a16:rowId xmlns:a16="http://schemas.microsoft.com/office/drawing/2014/main" val="10000"/>
-                  </a:ext>
-                </a:extLst>
               </a:tr>
               <a:tr h="579628">
                 <a:tc>
                   <a:txBody>
-                    <a:bodyPr/>
+                    <a:bodyPr wrap="square"/>
                     <a:lstStyle/>
                     <a:p>
                       <a:pPr algn="ctr"/>
@@ -15613,7 +15739,7 @@
                 </a:tc>
                 <a:tc>
                   <a:txBody>
-                    <a:bodyPr/>
+                    <a:bodyPr wrap="square"/>
                     <a:lstStyle/>
                     <a:p>
                       <a:pPr algn="l"/>
@@ -15645,7 +15771,7 @@
                 </a:tc>
                 <a:tc>
                   <a:txBody>
-                    <a:bodyPr/>
+                    <a:bodyPr wrap="square"/>
                     <a:lstStyle/>
                     <a:p>
                       <a:pPr algn="l"/>
@@ -15668,7 +15794,7 @@
                 </a:tc>
                 <a:tc>
                   <a:txBody>
-                    <a:bodyPr/>
+                    <a:bodyPr wrap="square"/>
                     <a:lstStyle/>
                     <a:p>
                       <a:pPr algn="l"/>
@@ -15689,16 +15815,11 @@
                     </a:solidFill>
                   </a:tcPr>
                 </a:tc>
-                <a:extLst>
-                  <a:ext uri="{0D108BD9-81ED-4DB2-BD59-A6C34878D82A}">
-                    <a16:rowId xmlns:a16="http://schemas.microsoft.com/office/drawing/2014/main" val="10001"/>
-                  </a:ext>
-                </a:extLst>
               </a:tr>
               <a:tr h="579628">
                 <a:tc>
                   <a:txBody>
-                    <a:bodyPr/>
+                    <a:bodyPr wrap="square"/>
                     <a:lstStyle/>
                     <a:p>
                       <a:pPr algn="ctr"/>
@@ -15721,7 +15842,7 @@
                 </a:tc>
                 <a:tc>
                   <a:txBody>
-                    <a:bodyPr/>
+                    <a:bodyPr wrap="square"/>
                     <a:lstStyle/>
                     <a:p>
                       <a:pPr algn="l"/>
@@ -15744,7 +15865,7 @@
                 </a:tc>
                 <a:tc>
                   <a:txBody>
-                    <a:bodyPr/>
+                    <a:bodyPr wrap="square"/>
                     <a:lstStyle/>
                     <a:p>
                       <a:pPr algn="l"/>
@@ -15767,7 +15888,7 @@
                 </a:tc>
                 <a:tc>
                   <a:txBody>
-                    <a:bodyPr/>
+                    <a:bodyPr wrap="square"/>
                     <a:lstStyle/>
                     <a:p>
                       <a:pPr algn="l"/>
@@ -15788,16 +15909,11 @@
                     </a:solidFill>
                   </a:tcPr>
                 </a:tc>
-                <a:extLst>
-                  <a:ext uri="{0D108BD9-81ED-4DB2-BD59-A6C34878D82A}">
-                    <a16:rowId xmlns:a16="http://schemas.microsoft.com/office/drawing/2014/main" val="10002"/>
-                  </a:ext>
-                </a:extLst>
               </a:tr>
               <a:tr h="579628">
                 <a:tc>
                   <a:txBody>
-                    <a:bodyPr/>
+                    <a:bodyPr wrap="square"/>
                     <a:lstStyle/>
                     <a:p>
                       <a:pPr algn="ctr"/>
@@ -15820,7 +15936,7 @@
                 </a:tc>
                 <a:tc>
                   <a:txBody>
-                    <a:bodyPr/>
+                    <a:bodyPr wrap="square"/>
                     <a:lstStyle/>
                     <a:p>
                       <a:pPr algn="l"/>
@@ -15843,7 +15959,7 @@
                 </a:tc>
                 <a:tc>
                   <a:txBody>
-                    <a:bodyPr/>
+                    <a:bodyPr wrap="square"/>
                     <a:lstStyle/>
                     <a:p>
                       <a:pPr algn="l"/>
@@ -15866,7 +15982,7 @@
                 </a:tc>
                 <a:tc>
                   <a:txBody>
-                    <a:bodyPr/>
+                    <a:bodyPr wrap="square"/>
                     <a:lstStyle/>
                     <a:p>
                       <a:pPr algn="l"/>
@@ -15887,16 +16003,11 @@
                     </a:solidFill>
                   </a:tcPr>
                 </a:tc>
-                <a:extLst>
-                  <a:ext uri="{0D108BD9-81ED-4DB2-BD59-A6C34878D82A}">
-                    <a16:rowId xmlns:a16="http://schemas.microsoft.com/office/drawing/2014/main" val="10003"/>
-                  </a:ext>
-                </a:extLst>
               </a:tr>
               <a:tr h="579628">
                 <a:tc>
                   <a:txBody>
-                    <a:bodyPr/>
+                    <a:bodyPr wrap="square"/>
                     <a:lstStyle/>
                     <a:p>
                       <a:pPr algn="ctr"/>
@@ -15919,99 +16030,41 @@
                 </a:tc>
                 <a:tc>
                   <a:txBody>
-                    <a:bodyPr/>
+                    <a:bodyPr wrap="square"/>
                     <a:lstStyle/>
                     <a:p>
                       <a:pPr algn="l"/>
                       <a:r>
-                        <a:rPr sz="1400" b="0" dirty="0" err="1">
-                          <a:solidFill>
-                            <a:srgbClr val="22303F"/>
-                          </a:solidFill>
-                          <a:latin typeface="Microsoft JhengHei"/>
-                        </a:rPr>
-                        <a:t>TiDB</a:t>
-                      </a:r>
-                      <a:r>
-                        <a:rPr sz="1400" b="0" dirty="0">
-                          <a:solidFill>
-                            <a:srgbClr val="22303F"/>
-                          </a:solidFill>
-                          <a:latin typeface="Microsoft JhengHei"/>
-                        </a:rPr>
-                        <a:t> </a:t>
-                      </a:r>
-                      <a:r>
-                        <a:rPr sz="1400" b="0" dirty="0" err="1">
-                          <a:solidFill>
-                            <a:srgbClr val="22303F"/>
-                          </a:solidFill>
-                          <a:latin typeface="Microsoft JhengHei"/>
-                        </a:rPr>
-                        <a:t>為計算／儲存分離</a:t>
-                      </a:r>
-                      <a:r>
-                        <a:rPr sz="1400" b="0" dirty="0">
-                          <a:solidFill>
-                            <a:srgbClr val="22303F"/>
-                          </a:solidFill>
-                          <a:latin typeface="Microsoft JhengHei"/>
-                        </a:rPr>
-                        <a:t>；</a:t>
-                      </a:r>
-                      <a:endParaRPr lang="en-US" sz="1400" b="0" dirty="0">
-                        <a:solidFill>
-                          <a:srgbClr val="22303F"/>
-                        </a:solidFill>
-                        <a:latin typeface="Microsoft JhengHei"/>
-                      </a:endParaRPr>
-                    </a:p>
+                        <a:rPr sz="1400" b="0">
+                          <a:solidFill>
+                            <a:srgbClr val="22303F"/>
+                          </a:solidFill>
+                          <a:latin typeface="Microsoft JhengHei"/>
+                        </a:rPr>
+                        <a:t>TiDB 為計算／儲存分離；PXC 為完整副本與 writeset certification</a:t>
+                      </a:r>
+                    </a:p>
+                  </a:txBody>
+                  <a:tcPr marL="64008" marR="64008" marT="32004" marB="32004" anchor="ctr">
+                    <a:solidFill>
+                      <a:srgbClr val="F7F9FA"/>
+                    </a:solidFill>
+                  </a:tcPr>
+                </a:tc>
+                <a:tc>
+                  <a:txBody>
+                    <a:bodyPr wrap="square"/>
+                    <a:lstStyle/>
                     <a:p>
                       <a:pPr algn="l"/>
                       <a:r>
-                        <a:rPr sz="1400" b="0" dirty="0">
-                          <a:solidFill>
-                            <a:srgbClr val="22303F"/>
-                          </a:solidFill>
-                          <a:latin typeface="Microsoft JhengHei"/>
-                        </a:rPr>
-                        <a:t>PXC </a:t>
-                      </a:r>
-                      <a:r>
-                        <a:rPr sz="1400" b="0" dirty="0" err="1">
-                          <a:solidFill>
-                            <a:srgbClr val="22303F"/>
-                          </a:solidFill>
-                          <a:latin typeface="Microsoft JhengHei"/>
-                        </a:rPr>
-                        <a:t>為完整副本與</a:t>
-                      </a:r>
-                      <a:r>
-                        <a:rPr sz="1400" b="0" dirty="0">
-                          <a:solidFill>
-                            <a:srgbClr val="22303F"/>
-                          </a:solidFill>
-                          <a:latin typeface="Microsoft JhengHei"/>
-                        </a:rPr>
-                        <a:t> </a:t>
-                      </a:r>
-                      <a:r>
-                        <a:rPr sz="1400" b="0" dirty="0" err="1">
-                          <a:solidFill>
-                            <a:srgbClr val="22303F"/>
-                          </a:solidFill>
-                          <a:latin typeface="Microsoft JhengHei"/>
-                        </a:rPr>
-                        <a:t>writeset</a:t>
-                      </a:r>
-                      <a:r>
-                        <a:rPr sz="1400" b="0" dirty="0">
-                          <a:solidFill>
-                            <a:srgbClr val="22303F"/>
-                          </a:solidFill>
-                          <a:latin typeface="Microsoft JhengHei"/>
-                        </a:rPr>
-                        <a:t> certification</a:t>
+                        <a:rPr sz="1400" b="0">
+                          <a:solidFill>
+                            <a:srgbClr val="22303F"/>
+                          </a:solidFill>
+                          <a:latin typeface="Microsoft JhengHei"/>
+                        </a:rPr>
+                        <a:t>兩家皆為 PostgreSQL wire protocol，但 SQL 引擎與相容程度不同</a:t>
                       </a:r>
                     </a:p>
                   </a:txBody>
@@ -16023,7 +16076,7 @@
                 </a:tc>
                 <a:tc>
                   <a:txBody>
-                    <a:bodyPr/>
+                    <a:bodyPr wrap="square"/>
                     <a:lstStyle/>
                     <a:p>
                       <a:pPr algn="l"/>
@@ -16034,7 +16087,7 @@
                           </a:solidFill>
                           <a:latin typeface="Microsoft JhengHei"/>
                         </a:rPr>
-                        <a:t>兩家皆為 PostgreSQL wire protocol，但 SQL 引擎與相容程度不同</a:t>
+                        <a:t>同名功能不能直接視為同一機制</a:t>
                       </a:r>
                     </a:p>
                   </a:txBody>
@@ -16044,39 +16097,11 @@
                     </a:solidFill>
                   </a:tcPr>
                 </a:tc>
-                <a:tc>
-                  <a:txBody>
-                    <a:bodyPr/>
-                    <a:lstStyle/>
-                    <a:p>
-                      <a:pPr algn="l"/>
-                      <a:r>
-                        <a:rPr sz="1400" b="0">
-                          <a:solidFill>
-                            <a:srgbClr val="22303F"/>
-                          </a:solidFill>
-                          <a:latin typeface="Microsoft JhengHei"/>
-                        </a:rPr>
-                        <a:t>同名功能不能直接視為同一機制</a:t>
-                      </a:r>
-                    </a:p>
-                  </a:txBody>
-                  <a:tcPr marL="64008" marR="64008" marT="32004" marB="32004" anchor="ctr">
-                    <a:solidFill>
-                      <a:srgbClr val="F7F9FA"/>
-                    </a:solidFill>
-                  </a:tcPr>
-                </a:tc>
-                <a:extLst>
-                  <a:ext uri="{0D108BD9-81ED-4DB2-BD59-A6C34878D82A}">
-                    <a16:rowId xmlns:a16="http://schemas.microsoft.com/office/drawing/2014/main" val="10004"/>
-                  </a:ext>
-                </a:extLst>
               </a:tr>
               <a:tr h="579628">
                 <a:tc>
                   <a:txBody>
-                    <a:bodyPr/>
+                    <a:bodyPr wrap="square"/>
                     <a:lstStyle/>
                     <a:p>
                       <a:pPr algn="ctr"/>
@@ -16099,7 +16124,7 @@
                 </a:tc>
                 <a:tc>
                   <a:txBody>
-                    <a:bodyPr/>
+                    <a:bodyPr wrap="square"/>
                     <a:lstStyle/>
                     <a:p>
                       <a:pPr algn="l"/>
@@ -16122,7 +16147,7 @@
                 </a:tc>
                 <a:tc>
                   <a:txBody>
-                    <a:bodyPr/>
+                    <a:bodyPr wrap="square"/>
                     <a:lstStyle/>
                     <a:p>
                       <a:pPr algn="l"/>
@@ -16145,34 +16170,19 @@
                 </a:tc>
                 <a:tc>
                   <a:txBody>
-                    <a:bodyPr/>
+                    <a:bodyPr wrap="square"/>
                     <a:lstStyle/>
                     <a:p>
                       <a:pPr algn="l"/>
                       <a:r>
-                        <a:rPr sz="1400" b="0" dirty="0">
-                          <a:solidFill>
-                            <a:srgbClr val="22303F"/>
-                          </a:solidFill>
-                          <a:latin typeface="Microsoft JhengHei"/>
-                        </a:rPr>
-                        <a:t>「</a:t>
-                      </a:r>
-                      <a:r>
-                        <a:rPr sz="1400" b="0" dirty="0" err="1">
-                          <a:solidFill>
-                            <a:srgbClr val="22303F"/>
-                          </a:solidFill>
-                          <a:latin typeface="Microsoft JhengHei"/>
-                        </a:rPr>
-                        <a:t>數量」與「業務關鍵度」必須分開</a:t>
-                      </a:r>
-                      <a:endParaRPr sz="1400" b="0" dirty="0">
-                        <a:solidFill>
-                          <a:srgbClr val="22303F"/>
-                        </a:solidFill>
-                        <a:latin typeface="Microsoft JhengHei"/>
-                      </a:endParaRPr>
+                        <a:rPr sz="1400" b="0">
+                          <a:solidFill>
+                            <a:srgbClr val="22303F"/>
+                          </a:solidFill>
+                          <a:latin typeface="Microsoft JhengHei"/>
+                        </a:rPr>
+                        <a:t>「數量」與「業務關鍵度」必須分開</a:t>
+                      </a:r>
                     </a:p>
                   </a:txBody>
                   <a:tcPr marL="64008" marR="64008" marT="32004" marB="32004" anchor="ctr">
@@ -16181,11 +16191,6 @@
                     </a:solidFill>
                   </a:tcPr>
                 </a:tc>
-                <a:extLst>
-                  <a:ext uri="{0D108BD9-81ED-4DB2-BD59-A6C34878D82A}">
-                    <a16:rowId xmlns:a16="http://schemas.microsoft.com/office/drawing/2014/main" val="10005"/>
-                  </a:ext>
-                </a:extLst>
               </a:tr>
             </a:tbl>
           </a:graphicData>
@@ -16208,7 +16213,7 @@
           <a:noFill/>
         </p:spPr>
         <p:txBody>
-          <a:bodyPr wrap="square" lIns="0" tIns="0" rIns="0" bIns="0">
+          <a:bodyPr wrap="square" lIns="0" rIns="0" tIns="0" bIns="0">
             <a:spAutoFit/>
           </a:bodyPr>
           <a:lstStyle/>
@@ -16266,7 +16271,6 @@
           <a:lstStyle/>
           <a:p>
             <a:pPr algn="ctr"/>
-            <a:endParaRPr/>
           </a:p>
         </p:txBody>
       </p:sp>
@@ -16279,7 +16283,7 @@
 </file>
 
 <file path=ppt/slides/slide8.xml><?xml version="1.0" encoding="utf-8"?>
-<p:sld xmlns:a="http://schemas.openxmlformats.org/drawingml/2006/main" xmlns:r="http://schemas.openxmlformats.org/officeDocument/2006/relationships" xmlns:p="http://schemas.openxmlformats.org/presentationml/2006/main">
+<p:sld xmlns:a="http://schemas.openxmlformats.org/drawingml/2006/main" xmlns:p="http://schemas.openxmlformats.org/presentationml/2006/main" xmlns:r="http://schemas.openxmlformats.org/officeDocument/2006/relationships">
   <p:cSld>
     <p:spTree>
       <p:nvGrpSpPr>
@@ -16287,14 +16291,7 @@
         <p:cNvGrpSpPr/>
         <p:nvPr/>
       </p:nvGrpSpPr>
-      <p:grpSpPr>
-        <a:xfrm>
-          <a:off x="0" y="0"/>
-          <a:ext cx="0" cy="0"/>
-          <a:chOff x="0" y="0"/>
-          <a:chExt cx="0" cy="0"/>
-        </a:xfrm>
-      </p:grpSpPr>
+      <p:grpSpPr/>
       <p:sp>
         <p:nvSpPr>
           <p:cNvPr id="2" name="TextBox 1"/>
@@ -16312,7 +16309,7 @@
           <a:noFill/>
         </p:spPr>
         <p:txBody>
-          <a:bodyPr wrap="square" lIns="0" tIns="0" rIns="0" bIns="0">
+          <a:bodyPr wrap="square" lIns="0" rIns="0" tIns="0" bIns="0">
             <a:spAutoFit/>
           </a:bodyPr>
           <a:lstStyle/>
@@ -16346,7 +16343,7 @@
           <a:noFill/>
         </p:spPr>
         <p:txBody>
-          <a:bodyPr wrap="square" lIns="0" tIns="0" rIns="0" bIns="0">
+          <a:bodyPr wrap="square" lIns="0" rIns="0" tIns="0" bIns="0">
             <a:spAutoFit/>
           </a:bodyPr>
           <a:lstStyle/>
@@ -16380,7 +16377,7 @@
           <a:noFill/>
         </p:spPr>
         <p:txBody>
-          <a:bodyPr wrap="square" lIns="0" tIns="0" rIns="0" bIns="0">
+          <a:bodyPr wrap="square" lIns="0" rIns="0" tIns="0" bIns="0">
             <a:spAutoFit/>
           </a:bodyPr>
           <a:lstStyle/>
@@ -16415,7 +16412,7 @@
           <a:noFill/>
         </p:spPr>
         <p:txBody>
-          <a:bodyPr wrap="square" lIns="0" tIns="0" rIns="0" bIns="0">
+          <a:bodyPr wrap="square" lIns="0" rIns="0" tIns="0" bIns="0">
             <a:spAutoFit/>
           </a:bodyPr>
           <a:lstStyle/>
@@ -16449,7 +16446,7 @@
           <a:noFill/>
         </p:spPr>
         <p:txBody>
-          <a:bodyPr wrap="square" lIns="0" tIns="0" rIns="0" bIns="0">
+          <a:bodyPr wrap="square" lIns="0" rIns="0" tIns="0" bIns="0">
             <a:spAutoFit/>
           </a:bodyPr>
           <a:lstStyle/>
@@ -16485,25 +16482,13 @@
                 <a:tableStyleId>{5C22544A-7EE6-4342-B048-85BDC9FD1C3A}</a:tableStyleId>
               </a:tblPr>
               <a:tblGrid>
-                <a:gridCol w="1026215">
-                  <a:extLst>
-                    <a:ext uri="{9D8B030D-6E8A-4147-A177-3AD203B41FA5}">
-                      <a16:colId xmlns:a16="http://schemas.microsoft.com/office/drawing/2014/main" val="20000"/>
-                    </a:ext>
-                  </a:extLst>
-                </a:gridCol>
-                <a:gridCol w="10031624">
-                  <a:extLst>
-                    <a:ext uri="{9D8B030D-6E8A-4147-A177-3AD203B41FA5}">
-                      <a16:colId xmlns:a16="http://schemas.microsoft.com/office/drawing/2014/main" val="20001"/>
-                    </a:ext>
-                  </a:extLst>
-                </a:gridCol>
+                <a:gridCol w="1026215"/>
+                <a:gridCol w="10031624"/>
               </a:tblGrid>
               <a:tr h="321818">
                 <a:tc>
                   <a:txBody>
-                    <a:bodyPr/>
+                    <a:bodyPr wrap="square"/>
                     <a:lstStyle/>
                     <a:p>
                       <a:pPr algn="ctr"/>
@@ -16526,7 +16511,7 @@
                 </a:tc>
                 <a:tc>
                   <a:txBody>
-                    <a:bodyPr/>
+                    <a:bodyPr wrap="square"/>
                     <a:lstStyle/>
                     <a:p>
                       <a:pPr algn="ctr"/>
@@ -16547,16 +16532,11 @@
                     </a:solidFill>
                   </a:tcPr>
                 </a:tc>
-                <a:extLst>
-                  <a:ext uri="{0D108BD9-81ED-4DB2-BD59-A6C34878D82A}">
-                    <a16:rowId xmlns:a16="http://schemas.microsoft.com/office/drawing/2014/main" val="10000"/>
-                  </a:ext>
-                </a:extLst>
               </a:tr>
               <a:tr h="321818">
                 <a:tc>
                   <a:txBody>
-                    <a:bodyPr/>
+                    <a:bodyPr wrap="square"/>
                     <a:lstStyle/>
                     <a:p>
                       <a:pPr algn="ctr"/>
@@ -16579,7 +16559,7 @@
                 </a:tc>
                 <a:tc>
                   <a:txBody>
-                    <a:bodyPr/>
+                    <a:bodyPr wrap="square"/>
                     <a:lstStyle/>
                     <a:p>
                       <a:pPr algn="l"/>
@@ -16600,16 +16580,11 @@
                     </a:solidFill>
                   </a:tcPr>
                 </a:tc>
-                <a:extLst>
-                  <a:ext uri="{0D108BD9-81ED-4DB2-BD59-A6C34878D82A}">
-                    <a16:rowId xmlns:a16="http://schemas.microsoft.com/office/drawing/2014/main" val="10001"/>
-                  </a:ext>
-                </a:extLst>
               </a:tr>
               <a:tr h="321818">
                 <a:tc>
                   <a:txBody>
-                    <a:bodyPr/>
+                    <a:bodyPr wrap="square"/>
                     <a:lstStyle/>
                     <a:p>
                       <a:pPr algn="ctr"/>
@@ -16632,7 +16607,7 @@
                 </a:tc>
                 <a:tc>
                   <a:txBody>
-                    <a:bodyPr/>
+                    <a:bodyPr wrap="square"/>
                     <a:lstStyle/>
                     <a:p>
                       <a:pPr algn="l"/>
@@ -16653,16 +16628,11 @@
                     </a:solidFill>
                   </a:tcPr>
                 </a:tc>
-                <a:extLst>
-                  <a:ext uri="{0D108BD9-81ED-4DB2-BD59-A6C34878D82A}">
-                    <a16:rowId xmlns:a16="http://schemas.microsoft.com/office/drawing/2014/main" val="10002"/>
-                  </a:ext>
-                </a:extLst>
               </a:tr>
               <a:tr h="321818">
                 <a:tc>
                   <a:txBody>
-                    <a:bodyPr/>
+                    <a:bodyPr wrap="square"/>
                     <a:lstStyle/>
                     <a:p>
                       <a:pPr algn="ctr"/>
@@ -16685,7 +16655,7 @@
                 </a:tc>
                 <a:tc>
                   <a:txBody>
-                    <a:bodyPr/>
+                    <a:bodyPr wrap="square"/>
                     <a:lstStyle/>
                     <a:p>
                       <a:pPr algn="l"/>
@@ -16706,11 +16676,6 @@
                     </a:solidFill>
                   </a:tcPr>
                 </a:tc>
-                <a:extLst>
-                  <a:ext uri="{0D108BD9-81ED-4DB2-BD59-A6C34878D82A}">
-                    <a16:rowId xmlns:a16="http://schemas.microsoft.com/office/drawing/2014/main" val="10003"/>
-                  </a:ext>
-                </a:extLst>
               </a:tr>
             </a:tbl>
           </a:graphicData>
@@ -16733,7 +16698,7 @@
           <a:noFill/>
         </p:spPr>
         <p:txBody>
-          <a:bodyPr wrap="square" lIns="0" tIns="0" rIns="0" bIns="0">
+          <a:bodyPr wrap="square" lIns="0" rIns="0" tIns="0" bIns="0">
             <a:spAutoFit/>
           </a:bodyPr>
           <a:lstStyle/>
@@ -16776,7 +16741,7 @@
           <a:noFill/>
         </p:spPr>
         <p:txBody>
-          <a:bodyPr wrap="square" lIns="0" tIns="0" rIns="0" bIns="0">
+          <a:bodyPr wrap="square" lIns="0" rIns="0" tIns="0" bIns="0">
             <a:spAutoFit/>
           </a:bodyPr>
           <a:lstStyle/>
@@ -16834,7 +16799,6 @@
           <a:lstStyle/>
           <a:p>
             <a:pPr algn="ctr"/>
-            <a:endParaRPr/>
           </a:p>
         </p:txBody>
       </p:sp>
@@ -16847,7 +16811,7 @@
 </file>
 
 <file path=ppt/slides/slide9.xml><?xml version="1.0" encoding="utf-8"?>
-<p:sld xmlns:a="http://schemas.openxmlformats.org/drawingml/2006/main" xmlns:r="http://schemas.openxmlformats.org/officeDocument/2006/relationships" xmlns:p="http://schemas.openxmlformats.org/presentationml/2006/main">
+<p:sld xmlns:a="http://schemas.openxmlformats.org/drawingml/2006/main" xmlns:p="http://schemas.openxmlformats.org/presentationml/2006/main" xmlns:r="http://schemas.openxmlformats.org/officeDocument/2006/relationships">
   <p:cSld>
     <p:spTree>
       <p:nvGrpSpPr>
@@ -16855,14 +16819,7 @@
         <p:cNvGrpSpPr/>
         <p:nvPr/>
       </p:nvGrpSpPr>
-      <p:grpSpPr>
-        <a:xfrm>
-          <a:off x="0" y="0"/>
-          <a:ext cx="0" cy="0"/>
-          <a:chOff x="0" y="0"/>
-          <a:chExt cx="0" cy="0"/>
-        </a:xfrm>
-      </p:grpSpPr>
+      <p:grpSpPr/>
       <p:sp>
         <p:nvSpPr>
           <p:cNvPr id="2" name="TextBox 1"/>
@@ -16880,7 +16837,7 @@
           <a:noFill/>
         </p:spPr>
         <p:txBody>
-          <a:bodyPr wrap="square" lIns="0" tIns="0" rIns="0" bIns="0">
+          <a:bodyPr wrap="square" lIns="0" rIns="0" tIns="0" bIns="0">
             <a:spAutoFit/>
           </a:bodyPr>
           <a:lstStyle/>
@@ -16914,7 +16871,7 @@
           <a:noFill/>
         </p:spPr>
         <p:txBody>
-          <a:bodyPr wrap="square" lIns="0" tIns="0" rIns="0" bIns="0">
+          <a:bodyPr wrap="square" lIns="0" rIns="0" tIns="0" bIns="0">
             <a:spAutoFit/>
           </a:bodyPr>
           <a:lstStyle/>
@@ -16948,7 +16905,7 @@
           <a:noFill/>
         </p:spPr>
         <p:txBody>
-          <a:bodyPr wrap="square" lIns="0" tIns="0" rIns="0" bIns="0">
+          <a:bodyPr wrap="square" lIns="0" rIns="0" tIns="0" bIns="0">
             <a:spAutoFit/>
           </a:bodyPr>
           <a:lstStyle/>
@@ -16983,7 +16940,7 @@
           <a:noFill/>
         </p:spPr>
         <p:txBody>
-          <a:bodyPr wrap="square" lIns="0" tIns="0" rIns="0" bIns="0">
+          <a:bodyPr wrap="square" lIns="0" rIns="0" tIns="0" bIns="0">
             <a:spAutoFit/>
           </a:bodyPr>
           <a:lstStyle/>
@@ -17006,17 +16963,11 @@
           <p:cNvGraphicFramePr>
             <a:graphicFrameLocks noGrp="1"/>
           </p:cNvGraphicFramePr>
-          <p:nvPr>
-            <p:extLst>
-              <p:ext uri="{D42A27DB-BD31-4B8C-83A1-F6EECF244321}">
-                <p14:modId xmlns:p14="http://schemas.microsoft.com/office/powerpoint/2010/main" val="2014197904"/>
-              </p:ext>
-            </p:extLst>
-          </p:nvPr>
+          <p:nvPr/>
         </p:nvGraphicFramePr>
         <p:xfrm>
           <a:off x="566928" y="1709928"/>
-          <a:ext cx="11057839" cy="3022600"/>
+          <a:ext cx="11057839" cy="2898140"/>
         </p:xfrm>
         <a:graphic>
           <a:graphicData uri="http://schemas.openxmlformats.org/drawingml/2006/table">
@@ -17025,39 +16976,15 @@
                 <a:tableStyleId>{5C22544A-7EE6-4342-B048-85BDC9FD1C3A}</a:tableStyleId>
               </a:tblPr>
               <a:tblGrid>
-                <a:gridCol w="1338528">
-                  <a:extLst>
-                    <a:ext uri="{9D8B030D-6E8A-4147-A177-3AD203B41FA5}">
-                      <a16:colId xmlns:a16="http://schemas.microsoft.com/office/drawing/2014/main" val="20000"/>
-                    </a:ext>
-                  </a:extLst>
-                </a:gridCol>
-                <a:gridCol w="1631118">
-                  <a:extLst>
-                    <a:ext uri="{9D8B030D-6E8A-4147-A177-3AD203B41FA5}">
-                      <a16:colId xmlns:a16="http://schemas.microsoft.com/office/drawing/2014/main" val="20001"/>
-                    </a:ext>
-                  </a:extLst>
-                </a:gridCol>
-                <a:gridCol w="4844494">
-                  <a:extLst>
-                    <a:ext uri="{9D8B030D-6E8A-4147-A177-3AD203B41FA5}">
-                      <a16:colId xmlns:a16="http://schemas.microsoft.com/office/drawing/2014/main" val="20002"/>
-                    </a:ext>
-                  </a:extLst>
-                </a:gridCol>
-                <a:gridCol w="3243699">
-                  <a:extLst>
-                    <a:ext uri="{9D8B030D-6E8A-4147-A177-3AD203B41FA5}">
-                      <a16:colId xmlns:a16="http://schemas.microsoft.com/office/drawing/2014/main" val="20003"/>
-                    </a:ext>
-                  </a:extLst>
-                </a:gridCol>
+                <a:gridCol w="1203706"/>
+                <a:gridCol w="1765940"/>
+                <a:gridCol w="4844494"/>
+                <a:gridCol w="3243699"/>
               </a:tblGrid>
               <a:tr h="579628">
                 <a:tc>
                   <a:txBody>
-                    <a:bodyPr/>
+                    <a:bodyPr wrap="square"/>
                     <a:lstStyle/>
                     <a:p>
                       <a:pPr algn="ctr"/>
@@ -17080,7 +17007,7 @@
                 </a:tc>
                 <a:tc>
                   <a:txBody>
-                    <a:bodyPr/>
+                    <a:bodyPr wrap="square"/>
                     <a:lstStyle/>
                     <a:p>
                       <a:pPr algn="ctr"/>
@@ -17103,7 +17030,7 @@
                 </a:tc>
                 <a:tc>
                   <a:txBody>
-                    <a:bodyPr/>
+                    <a:bodyPr wrap="square"/>
                     <a:lstStyle/>
                     <a:p>
                       <a:pPr algn="ctr"/>
@@ -17126,7 +17053,7 @@
                 </a:tc>
                 <a:tc>
                   <a:txBody>
-                    <a:bodyPr/>
+                    <a:bodyPr wrap="square"/>
                     <a:lstStyle/>
                     <a:p>
                       <a:pPr algn="ctr"/>
@@ -17147,16 +17074,11 @@
                     </a:solidFill>
                   </a:tcPr>
                 </a:tc>
-                <a:extLst>
-                  <a:ext uri="{0D108BD9-81ED-4DB2-BD59-A6C34878D82A}">
-                    <a16:rowId xmlns:a16="http://schemas.microsoft.com/office/drawing/2014/main" val="10000"/>
-                  </a:ext>
-                </a:extLst>
               </a:tr>
               <a:tr h="579628">
                 <a:tc>
                   <a:txBody>
-                    <a:bodyPr/>
+                    <a:bodyPr wrap="square"/>
                     <a:lstStyle/>
                     <a:p>
                       <a:pPr algn="ctr"/>
@@ -17179,7 +17101,7 @@
                 </a:tc>
                 <a:tc>
                   <a:txBody>
-                    <a:bodyPr/>
+                    <a:bodyPr wrap="square"/>
                     <a:lstStyle/>
                     <a:p>
                       <a:pPr algn="l"/>
@@ -17203,35 +17125,31 @@
                 </a:tc>
                 <a:tc>
                   <a:txBody>
-                    <a:bodyPr/>
+                    <a:bodyPr wrap="square"/>
                     <a:lstStyle/>
                     <a:p>
                       <a:pPr algn="l"/>
                       <a:r>
-                        <a:rPr sz="1400" b="0" dirty="0">
-                          <a:solidFill>
-                            <a:srgbClr val="22303F"/>
-                          </a:solidFill>
-                          <a:latin typeface="Microsoft JhengHei"/>
-                        </a:rPr>
-                        <a:t>v8.5 </a:t>
-                      </a:r>
-                      <a:r>
-                        <a:rPr sz="1400" b="0">
-                          <a:solidFill>
-                            <a:srgbClr val="22303F"/>
-                          </a:solidFill>
-                          <a:latin typeface="Microsoft JhengHei"/>
-                        </a:rPr>
-                        <a:t>LTS；</a:t>
-                      </a:r>
-                      <a:endParaRPr lang="en-US" sz="1400" b="0">
-                        <a:solidFill>
-                          <a:srgbClr val="22303F"/>
-                        </a:solidFill>
-                        <a:latin typeface="Microsoft JhengHei"/>
-                      </a:endParaRPr>
-                    </a:p>
+                        <a:rPr sz="1400" b="0">
+                          <a:solidFill>
+                            <a:srgbClr val="22303F"/>
+                          </a:solidFill>
+                          <a:latin typeface="Microsoft JhengHei"/>
+                        </a:rPr>
+                        <a:t>v8.5 LTS；Community 維護 2027-12-19／延伸 2028-12-19，Enterprise 維護 2029-12-19／延伸 2030-12-19</a:t>
+                      </a:r>
+                    </a:p>
+                  </a:txBody>
+                  <a:tcPr marL="64008" marR="64008" marT="32004" marB="32004" anchor="ctr">
+                    <a:solidFill>
+                      <a:srgbClr val="FFFFFF"/>
+                    </a:solidFill>
+                  </a:tcPr>
+                </a:tc>
+                <a:tc>
+                  <a:txBody>
+                    <a:bodyPr wrap="square"/>
+                    <a:lstStyle/>
                     <a:p>
                       <a:pPr algn="l"/>
                       <a:r>
@@ -17241,43 +17159,7 @@
                           </a:solidFill>
                           <a:latin typeface="Microsoft JhengHei"/>
                         </a:rPr>
-                        <a:t>Community </a:t>
-                      </a:r>
-                      <a:r>
-                        <a:rPr sz="1400" b="0" dirty="0" err="1">
-                          <a:solidFill>
-                            <a:srgbClr val="22303F"/>
-                          </a:solidFill>
-                          <a:latin typeface="Microsoft JhengHei"/>
-                        </a:rPr>
-                        <a:t>維護</a:t>
-                      </a:r>
-                      <a:r>
-                        <a:rPr sz="1400" b="0" dirty="0">
-                          <a:solidFill>
-                            <a:srgbClr val="22303F"/>
-                          </a:solidFill>
-                          <a:latin typeface="Microsoft JhengHei"/>
-                        </a:rPr>
-                        <a:t> 2027-12-19／延伸 2028-12-19，Enterprise </a:t>
-                      </a:r>
-                      <a:r>
-                        <a:rPr sz="1400" b="0" dirty="0" err="1">
-                          <a:solidFill>
-                            <a:srgbClr val="22303F"/>
-                          </a:solidFill>
-                          <a:latin typeface="Microsoft JhengHei"/>
-                        </a:rPr>
-                        <a:t>維護</a:t>
-                      </a:r>
-                      <a:r>
-                        <a:rPr sz="1400" b="0" dirty="0">
-                          <a:solidFill>
-                            <a:srgbClr val="22303F"/>
-                          </a:solidFill>
-                          <a:latin typeface="Microsoft JhengHei"/>
-                        </a:rPr>
-                        <a:t> 2029-12-19／延伸 2030-12-19</a:t>
+                        <a:t>台灣時區／語言、P1 事故的回應與解決時限、根因分析、升級及現場協作</a:t>
                       </a:r>
                     </a:p>
                   </a:txBody>
@@ -17287,39 +17169,11 @@
                     </a:solidFill>
                   </a:tcPr>
                 </a:tc>
-                <a:tc>
-                  <a:txBody>
-                    <a:bodyPr/>
-                    <a:lstStyle/>
-                    <a:p>
-                      <a:pPr algn="l"/>
-                      <a:r>
-                        <a:rPr sz="1400" b="0">
-                          <a:solidFill>
-                            <a:srgbClr val="22303F"/>
-                          </a:solidFill>
-                          <a:latin typeface="Microsoft JhengHei"/>
-                        </a:rPr>
-                        <a:t>台灣時區／語言、P1 事故的回應與解決時限、根因分析、升級及現場協作</a:t>
-                      </a:r>
-                    </a:p>
-                  </a:txBody>
-                  <a:tcPr marL="64008" marR="64008" marT="32004" marB="32004" anchor="ctr">
-                    <a:solidFill>
-                      <a:srgbClr val="FFFFFF"/>
-                    </a:solidFill>
-                  </a:tcPr>
-                </a:tc>
-                <a:extLst>
-                  <a:ext uri="{0D108BD9-81ED-4DB2-BD59-A6C34878D82A}">
-                    <a16:rowId xmlns:a16="http://schemas.microsoft.com/office/drawing/2014/main" val="10001"/>
-                  </a:ext>
-                </a:extLst>
               </a:tr>
               <a:tr h="579628">
                 <a:tc>
                   <a:txBody>
-                    <a:bodyPr/>
+                    <a:bodyPr wrap="square"/>
                     <a:lstStyle/>
                     <a:p>
                       <a:pPr algn="ctr"/>
@@ -17342,7 +17196,7 @@
                 </a:tc>
                 <a:tc>
                   <a:txBody>
-                    <a:bodyPr/>
+                    <a:bodyPr wrap="square"/>
                     <a:lstStyle/>
                     <a:p>
                       <a:pPr algn="l"/>
@@ -17366,7 +17220,7 @@
                 </a:tc>
                 <a:tc>
                   <a:txBody>
-                    <a:bodyPr/>
+                    <a:bodyPr wrap="square"/>
                     <a:lstStyle/>
                     <a:p>
                       <a:pPr algn="l"/>
@@ -17389,7 +17243,7 @@
                 </a:tc>
                 <a:tc>
                   <a:txBody>
-                    <a:bodyPr/>
+                    <a:bodyPr wrap="square"/>
                     <a:lstStyle/>
                     <a:p>
                       <a:pPr algn="l"/>
@@ -17419,16 +17273,11 @@
                     </a:solidFill>
                   </a:tcPr>
                 </a:tc>
-                <a:extLst>
-                  <a:ext uri="{0D108BD9-81ED-4DB2-BD59-A6C34878D82A}">
-                    <a16:rowId xmlns:a16="http://schemas.microsoft.com/office/drawing/2014/main" val="10002"/>
-                  </a:ext>
-                </a:extLst>
               </a:tr>
               <a:tr h="579628">
                 <a:tc>
                   <a:txBody>
-                    <a:bodyPr/>
+                    <a:bodyPr wrap="square"/>
                     <a:lstStyle/>
                     <a:p>
                       <a:pPr algn="ctr"/>
@@ -17451,7 +17300,7 @@
                 </a:tc>
                 <a:tc>
                   <a:txBody>
-                    <a:bodyPr/>
+                    <a:bodyPr wrap="square"/>
                     <a:lstStyle/>
                     <a:p>
                       <a:pPr algn="l"/>
@@ -17475,7 +17324,7 @@
                 </a:tc>
                 <a:tc>
                   <a:txBody>
-                    <a:bodyPr/>
+                    <a:bodyPr wrap="square"/>
                     <a:lstStyle/>
                     <a:p>
                       <a:pPr algn="l"/>
@@ -17498,7 +17347,7 @@
                 </a:tc>
                 <a:tc>
                   <a:txBody>
-                    <a:bodyPr/>
+                    <a:bodyPr wrap="square"/>
                     <a:lstStyle/>
                     <a:p>
                       <a:pPr algn="l"/>
@@ -17519,16 +17368,11 @@
                     </a:solidFill>
                   </a:tcPr>
                 </a:tc>
-                <a:extLst>
-                  <a:ext uri="{0D108BD9-81ED-4DB2-BD59-A6C34878D82A}">
-                    <a16:rowId xmlns:a16="http://schemas.microsoft.com/office/drawing/2014/main" val="10003"/>
-                  </a:ext>
-                </a:extLst>
               </a:tr>
               <a:tr h="579628">
                 <a:tc>
                   <a:txBody>
-                    <a:bodyPr/>
+                    <a:bodyPr wrap="square"/>
                     <a:lstStyle/>
                     <a:p>
                       <a:pPr algn="ctr"/>
@@ -17551,7 +17395,7 @@
                 </a:tc>
                 <a:tc>
                   <a:txBody>
-                    <a:bodyPr/>
+                    <a:bodyPr wrap="square"/>
                     <a:lstStyle/>
                     <a:p>
                       <a:pPr algn="l"/>
@@ -17575,7 +17419,7 @@
                 </a:tc>
                 <a:tc>
                   <a:txBody>
-                    <a:bodyPr/>
+                    <a:bodyPr wrap="square"/>
                     <a:lstStyle/>
                     <a:p>
                       <a:pPr algn="l"/>
@@ -17598,61 +17442,19 @@
                 </a:tc>
                 <a:tc>
                   <a:txBody>
-                    <a:bodyPr/>
+                    <a:bodyPr wrap="square"/>
                     <a:lstStyle/>
                     <a:p>
                       <a:pPr algn="l"/>
                       <a:r>
-                        <a:rPr sz="1400" b="0" dirty="0" err="1">
-                          <a:solidFill>
-                            <a:srgbClr val="22303F"/>
-                          </a:solidFill>
-                          <a:latin typeface="Microsoft JhengHei"/>
-                        </a:rPr>
-                        <a:t>同</a:t>
-                      </a:r>
-                      <a:r>
-                        <a:rPr sz="1400" b="0" dirty="0">
-                          <a:solidFill>
-                            <a:srgbClr val="22303F"/>
-                          </a:solidFill>
-                          <a:latin typeface="Microsoft JhengHei"/>
-                        </a:rPr>
-                        <a:t> </a:t>
-                      </a:r>
-                      <a:r>
-                        <a:rPr sz="1400" b="0" dirty="0" err="1">
-                          <a:solidFill>
-                            <a:srgbClr val="22303F"/>
-                          </a:solidFill>
-                          <a:latin typeface="Microsoft JhengHei"/>
-                        </a:rPr>
-                        <a:t>YugabyteDB</a:t>
-                      </a:r>
-                      <a:r>
-                        <a:rPr sz="1400" b="0" dirty="0">
-                          <a:solidFill>
-                            <a:srgbClr val="22303F"/>
-                          </a:solidFill>
-                          <a:latin typeface="Microsoft JhengHei"/>
-                        </a:rPr>
-                        <a:t> </a:t>
-                      </a:r>
-                      <a:r>
-                        <a:rPr sz="1400" b="0" dirty="0" err="1">
-                          <a:solidFill>
-                            <a:srgbClr val="22303F"/>
-                          </a:solidFill>
-                          <a:latin typeface="Microsoft JhengHei"/>
-                        </a:rPr>
-                        <a:t>困境</a:t>
-                      </a:r>
-                      <a:endParaRPr sz="1400" b="0" dirty="0">
-                        <a:solidFill>
-                          <a:srgbClr val="22303F"/>
-                        </a:solidFill>
-                        <a:latin typeface="Microsoft JhengHei"/>
-                      </a:endParaRPr>
+                        <a:rPr sz="1400" b="0">
+                          <a:solidFill>
+                            <a:srgbClr val="22303F"/>
+                          </a:solidFill>
+                          <a:latin typeface="Microsoft JhengHei"/>
+                        </a:rPr>
+                        <a:t>同 YugabyteDB 困境</a:t>
+                      </a:r>
                     </a:p>
                   </a:txBody>
                   <a:tcPr marL="64008" marR="64008" marT="32004" marB="32004" anchor="ctr">
@@ -17661,11 +17463,6 @@
                     </a:solidFill>
                   </a:tcPr>
                 </a:tc>
-                <a:extLst>
-                  <a:ext uri="{0D108BD9-81ED-4DB2-BD59-A6C34878D82A}">
-                    <a16:rowId xmlns:a16="http://schemas.microsoft.com/office/drawing/2014/main" val="10004"/>
-                  </a:ext>
-                </a:extLst>
               </a:tr>
             </a:tbl>
           </a:graphicData>
@@ -17688,7 +17485,7 @@
           <a:noFill/>
         </p:spPr>
         <p:txBody>
-          <a:bodyPr wrap="square" lIns="0" tIns="0" rIns="0" bIns="0">
+          <a:bodyPr wrap="square" lIns="0" rIns="0" tIns="0" bIns="0">
             <a:spAutoFit/>
           </a:bodyPr>
           <a:lstStyle/>
@@ -17746,7 +17543,6 @@
           <a:lstStyle/>
           <a:p>
             <a:pPr algn="ctr"/>
-            <a:endParaRPr/>
           </a:p>
         </p:txBody>
       </p:sp>

--- a/poc/1_MeetingMinutes/0821_slide.pptx
+++ b/poc/1_MeetingMinutes/0821_slide.pptx
@@ -5360,7 +5360,7 @@
         <p:spPr>
           <a:xfrm>
             <a:off x="566928" y="1709928"/>
-            <a:ext cx="3206773" cy="448056"/>
+            <a:ext cx="3206773" cy="526796"/>
           </a:xfrm>
           <a:prstGeom prst="roundRect">
             <a:avLst/>
@@ -5395,7 +5395,7 @@
           <a:p>
             <a:pPr algn="l"/>
             <a:r>
-              <a:rPr sz="1200" b="1">
+              <a:rPr sz="1400" b="1">
                 <a:solidFill>
                   <a:srgbClr val="C0392B"/>
                 </a:solidFill>
@@ -5404,7 +5404,7 @@
               <a:t>沒有</a:t>
             </a:r>
             <a:r>
-              <a:rPr sz="1200" b="1">
+              <a:rPr sz="1400" b="1">
                 <a:solidFill>
                   <a:srgbClr val="22303F"/>
                 </a:solidFill>
@@ -5423,8 +5423,8 @@
         </p:nvSpPr>
         <p:spPr>
           <a:xfrm>
-            <a:off x="566928" y="2249424"/>
-            <a:ext cx="3206773" cy="1527048"/>
+            <a:off x="566928" y="2328164"/>
+            <a:ext cx="3206773" cy="1335024"/>
           </a:xfrm>
           <a:prstGeom prst="roundRect">
             <a:avLst/>
@@ -5459,7 +5459,7 @@
           <a:p>
             <a:pPr algn="l"/>
             <a:r>
-              <a:rPr sz="1200" b="1">
+              <a:rPr sz="1400" b="1">
                 <a:solidFill>
                   <a:srgbClr val="C0392B"/>
                 </a:solidFill>
@@ -5468,7 +5468,7 @@
               <a:t>MySQL 應用</a:t>
             </a:r>
             <a:r>
-              <a:rPr sz="1200" b="1">
+              <a:rPr sz="1400" b="1">
                 <a:solidFill>
                   <a:srgbClr val="22303F"/>
                 </a:solidFill>
@@ -5487,8 +5487,8 @@
         </p:nvSpPr>
         <p:spPr>
           <a:xfrm>
-            <a:off x="566928" y="3867912"/>
-            <a:ext cx="3206773" cy="448056"/>
+            <a:off x="566928" y="3754628"/>
+            <a:ext cx="3206773" cy="526796"/>
           </a:xfrm>
           <a:prstGeom prst="roundRect">
             <a:avLst/>
@@ -5523,7 +5523,7 @@
           <a:p>
             <a:pPr algn="l"/>
             <a:r>
-              <a:rPr sz="1200" b="1">
+              <a:rPr sz="1400" b="1">
                 <a:solidFill>
                   <a:srgbClr val="C0392B"/>
                 </a:solidFill>
@@ -5532,7 +5532,7 @@
               <a:t>PostgreSQL</a:t>
             </a:r>
             <a:r>
-              <a:rPr sz="1200" b="1">
+              <a:rPr sz="1400" b="1">
                 <a:solidFill>
                   <a:srgbClr val="22303F"/>
                 </a:solidFill>
@@ -5551,8 +5551,8 @@
         </p:nvSpPr>
         <p:spPr>
           <a:xfrm>
-            <a:off x="566928" y="4407408"/>
-            <a:ext cx="3206773" cy="987552"/>
+            <a:off x="566928" y="4372864"/>
+            <a:ext cx="3206773" cy="859536"/>
           </a:xfrm>
           <a:prstGeom prst="roundRect">
             <a:avLst/>
@@ -5587,7 +5587,7 @@
           <a:p>
             <a:pPr algn="l"/>
             <a:r>
-              <a:rPr sz="1200" b="1">
+              <a:rPr sz="1400" b="1">
                 <a:solidFill>
                   <a:srgbClr val="C0392B"/>
                 </a:solidFill>
@@ -5596,7 +5596,7 @@
               <a:t>平台化或跨區</a:t>
             </a:r>
             <a:r>
-              <a:rPr sz="1200" b="1">
+              <a:rPr sz="1400" b="1">
                 <a:solidFill>
                   <a:srgbClr val="22303F"/>
                 </a:solidFill>
@@ -5615,7 +5615,7 @@
         </p:nvSpPr>
         <p:spPr>
           <a:xfrm>
-            <a:off x="3819421" y="1883664"/>
+            <a:off x="3819421" y="1923034"/>
             <a:ext cx="2983065" cy="100584"/>
           </a:xfrm>
           <a:prstGeom prst="rightArrow">
@@ -5660,7 +5660,7 @@
         <p:spPr>
           <a:xfrm>
             <a:off x="7085950" y="1709928"/>
-            <a:ext cx="4538817" cy="448056"/>
+            <a:ext cx="4538817" cy="526796"/>
           </a:xfrm>
           <a:prstGeom prst="roundRect">
             <a:avLst/>
@@ -5695,7 +5695,7 @@
           <a:p>
             <a:pPr algn="l"/>
             <a:r>
-              <a:rPr sz="1200" b="1">
+              <a:rPr sz="1400" b="1">
                 <a:solidFill>
                   <a:srgbClr val="C0392B"/>
                 </a:solidFill>
@@ -5704,7 +5704,7 @@
               <a:t>Option 0</a:t>
             </a:r>
             <a:r>
-              <a:rPr sz="1200" b="0">
+              <a:rPr sz="1400" b="0">
                 <a:solidFill>
                   <a:srgbClr val="22303F"/>
                 </a:solidFill>
@@ -5723,7 +5723,7 @@
         </p:nvSpPr>
         <p:spPr>
           <a:xfrm>
-            <a:off x="3819421" y="2423160"/>
+            <a:off x="3819421" y="2469896"/>
             <a:ext cx="237744" cy="100584"/>
           </a:xfrm>
           <a:prstGeom prst="rightArrow">
@@ -5767,8 +5767,8 @@
         </p:nvSpPr>
         <p:spPr>
           <a:xfrm>
-            <a:off x="4102885" y="2249424"/>
-            <a:ext cx="2653881" cy="448056"/>
+            <a:off x="4102885" y="2328164"/>
+            <a:ext cx="2653881" cy="384048"/>
           </a:xfrm>
           <a:prstGeom prst="roundRect">
             <a:avLst/>
@@ -5803,7 +5803,7 @@
           <a:p>
             <a:pPr algn="l"/>
             <a:r>
-              <a:rPr sz="1100" b="0">
+              <a:rPr sz="1300" b="0">
                 <a:solidFill>
                   <a:srgbClr val="22303F"/>
                 </a:solidFill>
@@ -5822,7 +5822,7 @@
         </p:nvSpPr>
         <p:spPr>
           <a:xfrm>
-            <a:off x="6802486" y="2423160"/>
+            <a:off x="6802486" y="2469896"/>
             <a:ext cx="237744" cy="100584"/>
           </a:xfrm>
           <a:prstGeom prst="rightArrow">
@@ -5866,8 +5866,8 @@
         </p:nvSpPr>
         <p:spPr>
           <a:xfrm>
-            <a:off x="7085950" y="2249424"/>
-            <a:ext cx="4538817" cy="448056"/>
+            <a:off x="7085950" y="2328164"/>
+            <a:ext cx="4538817" cy="384048"/>
           </a:xfrm>
           <a:prstGeom prst="roundRect">
             <a:avLst/>
@@ -5902,7 +5902,7 @@
           <a:p>
             <a:pPr algn="l"/>
             <a:r>
-              <a:rPr sz="1200" b="1">
+              <a:rPr sz="1400" b="1">
                 <a:solidFill>
                   <a:srgbClr val="C0392B"/>
                 </a:solidFill>
@@ -5911,7 +5911,7 @@
               <a:t>Option A</a:t>
             </a:r>
             <a:r>
-              <a:rPr sz="1200" b="0">
+              <a:rPr sz="1400" b="0">
                 <a:solidFill>
                   <a:srgbClr val="22303F"/>
                 </a:solidFill>
@@ -5930,7 +5930,7 @@
         </p:nvSpPr>
         <p:spPr>
           <a:xfrm>
-            <a:off x="3819421" y="2962656"/>
+            <a:off x="3819421" y="2945384"/>
             <a:ext cx="237744" cy="100584"/>
           </a:xfrm>
           <a:prstGeom prst="rightArrow">
@@ -5974,8 +5974,8 @@
         </p:nvSpPr>
         <p:spPr>
           <a:xfrm>
-            <a:off x="4102885" y="2788920"/>
-            <a:ext cx="2653881" cy="448056"/>
+            <a:off x="4102885" y="2803652"/>
+            <a:ext cx="2653881" cy="384048"/>
           </a:xfrm>
           <a:prstGeom prst="roundRect">
             <a:avLst/>
@@ -6010,7 +6010,7 @@
           <a:p>
             <a:pPr algn="l"/>
             <a:r>
-              <a:rPr sz="1100" b="0">
+              <a:rPr sz="1300" b="0">
                 <a:solidFill>
                   <a:srgbClr val="22303F"/>
                 </a:solidFill>
@@ -6029,7 +6029,7 @@
         </p:nvSpPr>
         <p:spPr>
           <a:xfrm>
-            <a:off x="6802486" y="2962656"/>
+            <a:off x="6802486" y="2945384"/>
             <a:ext cx="237744" cy="100584"/>
           </a:xfrm>
           <a:prstGeom prst="rightArrow">
@@ -6073,8 +6073,8 @@
         </p:nvSpPr>
         <p:spPr>
           <a:xfrm>
-            <a:off x="7085950" y="2788920"/>
-            <a:ext cx="4538817" cy="448056"/>
+            <a:off x="7085950" y="2803652"/>
+            <a:ext cx="4538817" cy="384048"/>
           </a:xfrm>
           <a:prstGeom prst="roundRect">
             <a:avLst/>
@@ -6109,7 +6109,7 @@
           <a:p>
             <a:pPr algn="l"/>
             <a:r>
-              <a:rPr sz="1200" b="1">
+              <a:rPr sz="1400" b="1">
                 <a:solidFill>
                   <a:srgbClr val="C0392B"/>
                 </a:solidFill>
@@ -6118,7 +6118,7 @@
               <a:t>Option B</a:t>
             </a:r>
             <a:r>
-              <a:rPr sz="1200" b="0">
+              <a:rPr sz="1400" b="0">
                 <a:solidFill>
                   <a:srgbClr val="22303F"/>
                 </a:solidFill>
@@ -6137,7 +6137,7 @@
         </p:nvSpPr>
         <p:spPr>
           <a:xfrm>
-            <a:off x="3819421" y="3502152"/>
+            <a:off x="3819421" y="3420872"/>
             <a:ext cx="237744" cy="100584"/>
           </a:xfrm>
           <a:prstGeom prst="rightArrow">
@@ -6181,8 +6181,8 @@
         </p:nvSpPr>
         <p:spPr>
           <a:xfrm>
-            <a:off x="4102885" y="3328416"/>
-            <a:ext cx="2653881" cy="448056"/>
+            <a:off x="4102885" y="3279140"/>
+            <a:ext cx="2653881" cy="384048"/>
           </a:xfrm>
           <a:prstGeom prst="roundRect">
             <a:avLst/>
@@ -6217,7 +6217,7 @@
           <a:p>
             <a:pPr algn="l"/>
             <a:r>
-              <a:rPr sz="1100" b="0">
+              <a:rPr sz="1300" b="0">
                 <a:solidFill>
                   <a:srgbClr val="22303F"/>
                 </a:solidFill>
@@ -6236,7 +6236,7 @@
         </p:nvSpPr>
         <p:spPr>
           <a:xfrm>
-            <a:off x="6802486" y="3502152"/>
+            <a:off x="6802486" y="3420872"/>
             <a:ext cx="237744" cy="100584"/>
           </a:xfrm>
           <a:prstGeom prst="rightArrow">
@@ -6280,8 +6280,8 @@
         </p:nvSpPr>
         <p:spPr>
           <a:xfrm>
-            <a:off x="7085950" y="3328416"/>
-            <a:ext cx="4538817" cy="448056"/>
+            <a:off x="7085950" y="3279140"/>
+            <a:ext cx="4538817" cy="384048"/>
           </a:xfrm>
           <a:prstGeom prst="roundRect">
             <a:avLst/>
@@ -6316,7 +6316,7 @@
           <a:p>
             <a:pPr algn="l"/>
             <a:r>
-              <a:rPr sz="1200" b="1">
+              <a:rPr sz="1400" b="1">
                 <a:solidFill>
                   <a:srgbClr val="C0392B"/>
                 </a:solidFill>
@@ -6325,7 +6325,7 @@
               <a:t>Option C</a:t>
             </a:r>
             <a:r>
-              <a:rPr sz="1200" b="0">
+              <a:rPr sz="1400" b="0">
                 <a:solidFill>
                   <a:srgbClr val="22303F"/>
                 </a:solidFill>
@@ -6344,7 +6344,7 @@
         </p:nvSpPr>
         <p:spPr>
           <a:xfrm>
-            <a:off x="3819421" y="4041648"/>
+            <a:off x="3819421" y="3967734"/>
             <a:ext cx="2983065" cy="100584"/>
           </a:xfrm>
           <a:prstGeom prst="rightArrow">
@@ -6388,8 +6388,8 @@
         </p:nvSpPr>
         <p:spPr>
           <a:xfrm>
-            <a:off x="7085950" y="3867912"/>
-            <a:ext cx="4538817" cy="448056"/>
+            <a:off x="7085950" y="3754628"/>
+            <a:ext cx="4538817" cy="526796"/>
           </a:xfrm>
           <a:prstGeom prst="roundRect">
             <a:avLst/>
@@ -6424,7 +6424,7 @@
           <a:p>
             <a:pPr algn="l"/>
             <a:r>
-              <a:rPr sz="1200" b="1">
+              <a:rPr sz="1400" b="1">
                 <a:solidFill>
                   <a:srgbClr val="C0392B"/>
                 </a:solidFill>
@@ -6433,13 +6433,13 @@
               <a:t>Option C</a:t>
             </a:r>
             <a:r>
-              <a:rPr sz="1200" b="0">
+              <a:rPr sz="1400" b="0">
                 <a:solidFill>
                   <a:srgbClr val="22303F"/>
                 </a:solidFill>
                 <a:latin typeface="Microsoft JhengHei"/>
               </a:rPr>
-              <a:t>：依需求驗 YugabyteDB 或 CockroachDB</a:t>
+              <a:t>：依需求驗 YugabyteDB 或 CockroachDB ; 或延用現有 PostgreSQL 架構</a:t>
             </a:r>
           </a:p>
         </p:txBody>
@@ -6452,7 +6452,7 @@
         </p:nvSpPr>
         <p:spPr>
           <a:xfrm>
-            <a:off x="3819421" y="4581144"/>
+            <a:off x="3819421" y="4514596"/>
             <a:ext cx="237744" cy="100584"/>
           </a:xfrm>
           <a:prstGeom prst="rightArrow">
@@ -6496,8 +6496,8 @@
         </p:nvSpPr>
         <p:spPr>
           <a:xfrm>
-            <a:off x="4102885" y="4407408"/>
-            <a:ext cx="2653881" cy="448056"/>
+            <a:off x="4102885" y="4372864"/>
+            <a:ext cx="2653881" cy="384048"/>
           </a:xfrm>
           <a:prstGeom prst="roundRect">
             <a:avLst/>
@@ -6532,7 +6532,7 @@
           <a:p>
             <a:pPr algn="l"/>
             <a:r>
-              <a:rPr sz="1100" b="0">
+              <a:rPr sz="1300" b="0">
                 <a:solidFill>
                   <a:srgbClr val="22303F"/>
                 </a:solidFill>
@@ -6551,7 +6551,7 @@
         </p:nvSpPr>
         <p:spPr>
           <a:xfrm>
-            <a:off x="6802486" y="4581144"/>
+            <a:off x="6802486" y="4514596"/>
             <a:ext cx="237744" cy="100584"/>
           </a:xfrm>
           <a:prstGeom prst="rightArrow">
@@ -6595,8 +6595,8 @@
         </p:nvSpPr>
         <p:spPr>
           <a:xfrm>
-            <a:off x="7085950" y="4407408"/>
-            <a:ext cx="4538817" cy="448056"/>
+            <a:off x="7085950" y="4372864"/>
+            <a:ext cx="4538817" cy="384048"/>
           </a:xfrm>
           <a:prstGeom prst="roundRect">
             <a:avLst/>
@@ -6631,7 +6631,7 @@
           <a:p>
             <a:pPr algn="l"/>
             <a:r>
-              <a:rPr sz="1200" b="1">
+              <a:rPr sz="1400" b="1">
                 <a:solidFill>
                   <a:srgbClr val="C0392B"/>
                 </a:solidFill>
@@ -6640,7 +6640,7 @@
               <a:t>Option D</a:t>
             </a:r>
             <a:r>
-              <a:rPr sz="1200" b="0">
+              <a:rPr sz="1400" b="0">
                 <a:solidFill>
                   <a:srgbClr val="22303F"/>
                 </a:solidFill>
@@ -6659,7 +6659,7 @@
         </p:nvSpPr>
         <p:spPr>
           <a:xfrm>
-            <a:off x="3819421" y="5120640"/>
+            <a:off x="3819421" y="4990084"/>
             <a:ext cx="237744" cy="100584"/>
           </a:xfrm>
           <a:prstGeom prst="rightArrow">
@@ -6703,8 +6703,8 @@
         </p:nvSpPr>
         <p:spPr>
           <a:xfrm>
-            <a:off x="4102885" y="4946904"/>
-            <a:ext cx="2653881" cy="448056"/>
+            <a:off x="4102885" y="4848352"/>
+            <a:ext cx="2653881" cy="384048"/>
           </a:xfrm>
           <a:prstGeom prst="roundRect">
             <a:avLst/>
@@ -6739,7 +6739,7 @@
           <a:p>
             <a:pPr algn="l"/>
             <a:r>
-              <a:rPr sz="1100" b="0">
+              <a:rPr sz="1300" b="0">
                 <a:solidFill>
                   <a:srgbClr val="22303F"/>
                 </a:solidFill>
@@ -6758,7 +6758,7 @@
         </p:nvSpPr>
         <p:spPr>
           <a:xfrm>
-            <a:off x="6802486" y="5120640"/>
+            <a:off x="6802486" y="4990084"/>
             <a:ext cx="237744" cy="100584"/>
           </a:xfrm>
           <a:prstGeom prst="rightArrow">
@@ -6802,8 +6802,8 @@
         </p:nvSpPr>
         <p:spPr>
           <a:xfrm>
-            <a:off x="7085950" y="4946904"/>
-            <a:ext cx="4538817" cy="448056"/>
+            <a:off x="7085950" y="4848352"/>
+            <a:ext cx="4538817" cy="384048"/>
           </a:xfrm>
           <a:prstGeom prst="roundRect">
             <a:avLst/>
@@ -6838,7 +6838,7 @@
           <a:p>
             <a:pPr algn="l"/>
             <a:r>
-              <a:rPr sz="1200" b="1">
+              <a:rPr sz="1400" b="1">
                 <a:solidFill>
                   <a:srgbClr val="C0392B"/>
                 </a:solidFill>
@@ -6847,7 +6847,7 @@
               <a:t>Option D</a:t>
             </a:r>
             <a:r>
-              <a:rPr sz="1200" b="0">
+              <a:rPr sz="1400" b="0">
                 <a:solidFill>
                   <a:srgbClr val="22303F"/>
                 </a:solidFill>
@@ -6866,7 +6866,7 @@
         </p:nvSpPr>
         <p:spPr>
           <a:xfrm>
-            <a:off x="694944" y="5614416"/>
+            <a:off x="694944" y="5451856"/>
             <a:ext cx="10929823" cy="279400"/>
           </a:xfrm>
           <a:prstGeom prst="rect">
@@ -6900,7 +6900,7 @@
         </p:nvSpPr>
         <p:spPr>
           <a:xfrm>
-            <a:off x="566928" y="5614416"/>
+            <a:off x="566928" y="5451856"/>
             <a:ext cx="26000" cy="279400"/>
           </a:xfrm>
           <a:prstGeom prst="rect">

--- a/poc/1_MeetingMinutes/0821_slide.pptx
+++ b/poc/1_MeetingMinutes/0821_slide.pptx
@@ -5,28 +5,28 @@
     <p:sldMasterId id="2147483648" r:id="rId1"/>
   </p:sldMasterIdLst>
   <p:sldIdLst>
-    <p:sldId id="256" r:id="rId7"/>
-    <p:sldId id="257" r:id="rId8"/>
-    <p:sldId id="258" r:id="rId9"/>
-    <p:sldId id="259" r:id="rId10"/>
-    <p:sldId id="260" r:id="rId11"/>
-    <p:sldId id="261" r:id="rId12"/>
-    <p:sldId id="262" r:id="rId13"/>
-    <p:sldId id="263" r:id="rId14"/>
-    <p:sldId id="264" r:id="rId15"/>
-    <p:sldId id="265" r:id="rId16"/>
-    <p:sldId id="266" r:id="rId17"/>
-    <p:sldId id="267" r:id="rId18"/>
-    <p:sldId id="268" r:id="rId19"/>
-    <p:sldId id="269" r:id="rId20"/>
-    <p:sldId id="270" r:id="rId21"/>
-    <p:sldId id="271" r:id="rId22"/>
-    <p:sldId id="272" r:id="rId23"/>
-    <p:sldId id="273" r:id="rId24"/>
-    <p:sldId id="274" r:id="rId25"/>
-    <p:sldId id="275" r:id="rId26"/>
+    <p:sldId id="256" r:id="rId2"/>
+    <p:sldId id="257" r:id="rId3"/>
+    <p:sldId id="258" r:id="rId4"/>
+    <p:sldId id="259" r:id="rId5"/>
+    <p:sldId id="260" r:id="rId6"/>
+    <p:sldId id="261" r:id="rId7"/>
+    <p:sldId id="262" r:id="rId8"/>
+    <p:sldId id="263" r:id="rId9"/>
+    <p:sldId id="264" r:id="rId10"/>
+    <p:sldId id="265" r:id="rId11"/>
+    <p:sldId id="266" r:id="rId12"/>
+    <p:sldId id="267" r:id="rId13"/>
+    <p:sldId id="268" r:id="rId14"/>
+    <p:sldId id="269" r:id="rId15"/>
+    <p:sldId id="270" r:id="rId16"/>
+    <p:sldId id="271" r:id="rId17"/>
+    <p:sldId id="272" r:id="rId18"/>
+    <p:sldId id="273" r:id="rId19"/>
+    <p:sldId id="274" r:id="rId20"/>
+    <p:sldId id="275" r:id="rId21"/>
   </p:sldIdLst>
-  <p:sldSz cx="12191695" cy="6858000" type="screen4x3"/>
+  <p:sldSz cx="12192000" cy="6858000"/>
   <p:notesSz cx="6858000" cy="9144000"/>
   <p:defaultTextStyle>
     <a:defPPr>
@@ -123,6 +123,22 @@
       </a:defRPr>
     </a:lvl9pPr>
   </p:defaultTextStyle>
+  <p:extLst>
+    <p:ext uri="{EFAFB233-063F-42B5-8137-9DF3F51BA10A}">
+      <p15:sldGuideLst xmlns:p15="http://schemas.microsoft.com/office/powerpoint/2012/main">
+        <p15:guide id="1" orient="horz" pos="2160">
+          <p15:clr>
+            <a:srgbClr val="A4A3A4"/>
+          </p15:clr>
+        </p15:guide>
+        <p15:guide id="2" pos="2880">
+          <p15:clr>
+            <a:srgbClr val="A4A3A4"/>
+          </p15:clr>
+        </p15:guide>
+      </p15:sldGuideLst>
+    </p:ext>
+  </p:extLst>
 </p:presentation>
 </file>
 
@@ -164,10 +180,9 @@
           <a:lstStyle/>
           <a:p>
             <a:r>
-              <a:rPr lang="en-US" smtClean="0"/>
+              <a:rPr lang="en-US"/>
               <a:t>Click to edit Master title style</a:t>
             </a:r>
-            <a:endParaRPr lang="en-US"/>
           </a:p>
         </p:txBody>
       </p:sp>
@@ -283,10 +298,9 @@
           </a:lstStyle>
           <a:p>
             <a:r>
-              <a:rPr lang="en-US" smtClean="0"/>
+              <a:rPr lang="en-US"/>
               <a:t>Click to edit Master subtitle style</a:t>
             </a:r>
-            <a:endParaRPr lang="en-US"/>
           </a:p>
         </p:txBody>
       </p:sp>
@@ -307,7 +321,7 @@
           <a:p>
             <a:fld id="{5BCAD085-E8A6-8845-BD4E-CB4CCA059FC4}" type="datetimeFigureOut">
               <a:rPr lang="en-US" smtClean="0"/>
-              <a:t>1/27/13</a:t>
+              <a:t>8/20/26</a:t>
             </a:fld>
             <a:endParaRPr lang="en-US"/>
           </a:p>
@@ -401,10 +415,9 @@
           <a:lstStyle/>
           <a:p>
             <a:r>
-              <a:rPr lang="en-US" smtClean="0"/>
+              <a:rPr lang="en-US"/>
               <a:t>Click to edit Master title style</a:t>
             </a:r>
-            <a:endParaRPr lang="en-US"/>
           </a:p>
         </p:txBody>
       </p:sp>
@@ -425,38 +438,37 @@
           <a:p>
             <a:pPr lvl="0"/>
             <a:r>
-              <a:rPr lang="en-US" smtClean="0"/>
+              <a:rPr lang="en-US"/>
               <a:t>Click to edit Master text styles</a:t>
             </a:r>
           </a:p>
           <a:p>
             <a:pPr lvl="1"/>
             <a:r>
-              <a:rPr lang="en-US" smtClean="0"/>
+              <a:rPr lang="en-US"/>
               <a:t>Second level</a:t>
             </a:r>
           </a:p>
           <a:p>
             <a:pPr lvl="2"/>
             <a:r>
-              <a:rPr lang="en-US" smtClean="0"/>
+              <a:rPr lang="en-US"/>
               <a:t>Third level</a:t>
             </a:r>
           </a:p>
           <a:p>
             <a:pPr lvl="3"/>
             <a:r>
-              <a:rPr lang="en-US" smtClean="0"/>
+              <a:rPr lang="en-US"/>
               <a:t>Fourth level</a:t>
             </a:r>
           </a:p>
           <a:p>
             <a:pPr lvl="4"/>
             <a:r>
-              <a:rPr lang="en-US" smtClean="0"/>
+              <a:rPr lang="en-US"/>
               <a:t>Fifth level</a:t>
             </a:r>
-            <a:endParaRPr lang="en-US"/>
           </a:p>
         </p:txBody>
       </p:sp>
@@ -477,7 +489,7 @@
           <a:p>
             <a:fld id="{5BCAD085-E8A6-8845-BD4E-CB4CCA059FC4}" type="datetimeFigureOut">
               <a:rPr lang="en-US" smtClean="0"/>
-              <a:t>1/27/13</a:t>
+              <a:t>8/20/26</a:t>
             </a:fld>
             <a:endParaRPr lang="en-US"/>
           </a:p>
@@ -576,10 +588,9 @@
           <a:lstStyle/>
           <a:p>
             <a:r>
-              <a:rPr lang="en-US" smtClean="0"/>
+              <a:rPr lang="en-US"/>
               <a:t>Click to edit Master title style</a:t>
             </a:r>
-            <a:endParaRPr lang="en-US"/>
           </a:p>
         </p:txBody>
       </p:sp>
@@ -605,38 +616,37 @@
           <a:p>
             <a:pPr lvl="0"/>
             <a:r>
-              <a:rPr lang="en-US" smtClean="0"/>
+              <a:rPr lang="en-US"/>
               <a:t>Click to edit Master text styles</a:t>
             </a:r>
           </a:p>
           <a:p>
             <a:pPr lvl="1"/>
             <a:r>
-              <a:rPr lang="en-US" smtClean="0"/>
+              <a:rPr lang="en-US"/>
               <a:t>Second level</a:t>
             </a:r>
           </a:p>
           <a:p>
             <a:pPr lvl="2"/>
             <a:r>
-              <a:rPr lang="en-US" smtClean="0"/>
+              <a:rPr lang="en-US"/>
               <a:t>Third level</a:t>
             </a:r>
           </a:p>
           <a:p>
             <a:pPr lvl="3"/>
             <a:r>
-              <a:rPr lang="en-US" smtClean="0"/>
+              <a:rPr lang="en-US"/>
               <a:t>Fourth level</a:t>
             </a:r>
           </a:p>
           <a:p>
             <a:pPr lvl="4"/>
             <a:r>
-              <a:rPr lang="en-US" smtClean="0"/>
+              <a:rPr lang="en-US"/>
               <a:t>Fifth level</a:t>
             </a:r>
-            <a:endParaRPr lang="en-US"/>
           </a:p>
         </p:txBody>
       </p:sp>
@@ -657,7 +667,7 @@
           <a:p>
             <a:fld id="{5BCAD085-E8A6-8845-BD4E-CB4CCA059FC4}" type="datetimeFigureOut">
               <a:rPr lang="en-US" smtClean="0"/>
-              <a:t>1/27/13</a:t>
+              <a:t>8/20/26</a:t>
             </a:fld>
             <a:endParaRPr lang="en-US"/>
           </a:p>
@@ -751,10 +761,9 @@
           <a:lstStyle/>
           <a:p>
             <a:r>
-              <a:rPr lang="en-US" smtClean="0"/>
+              <a:rPr lang="en-US"/>
               <a:t>Click to edit Master title style</a:t>
             </a:r>
-            <a:endParaRPr lang="en-US"/>
           </a:p>
         </p:txBody>
       </p:sp>
@@ -775,38 +784,37 @@
           <a:p>
             <a:pPr lvl="0"/>
             <a:r>
-              <a:rPr lang="en-US" smtClean="0"/>
+              <a:rPr lang="en-US"/>
               <a:t>Click to edit Master text styles</a:t>
             </a:r>
           </a:p>
           <a:p>
             <a:pPr lvl="1"/>
             <a:r>
-              <a:rPr lang="en-US" smtClean="0"/>
+              <a:rPr lang="en-US"/>
               <a:t>Second level</a:t>
             </a:r>
           </a:p>
           <a:p>
             <a:pPr lvl="2"/>
             <a:r>
-              <a:rPr lang="en-US" smtClean="0"/>
+              <a:rPr lang="en-US"/>
               <a:t>Third level</a:t>
             </a:r>
           </a:p>
           <a:p>
             <a:pPr lvl="3"/>
             <a:r>
-              <a:rPr lang="en-US" smtClean="0"/>
+              <a:rPr lang="en-US"/>
               <a:t>Fourth level</a:t>
             </a:r>
           </a:p>
           <a:p>
             <a:pPr lvl="4"/>
             <a:r>
-              <a:rPr lang="en-US" smtClean="0"/>
+              <a:rPr lang="en-US"/>
               <a:t>Fifth level</a:t>
             </a:r>
-            <a:endParaRPr lang="en-US"/>
           </a:p>
         </p:txBody>
       </p:sp>
@@ -827,7 +835,7 @@
           <a:p>
             <a:fld id="{5BCAD085-E8A6-8845-BD4E-CB4CCA059FC4}" type="datetimeFigureOut">
               <a:rPr lang="en-US" smtClean="0"/>
-              <a:t>1/27/13</a:t>
+              <a:t>8/20/26</a:t>
             </a:fld>
             <a:endParaRPr lang="en-US"/>
           </a:p>
@@ -930,10 +938,9 @@
           </a:lstStyle>
           <a:p>
             <a:r>
-              <a:rPr lang="en-US" smtClean="0"/>
+              <a:rPr lang="en-US"/>
               <a:t>Click to edit Master title style</a:t>
             </a:r>
-            <a:endParaRPr lang="en-US"/>
           </a:p>
         </p:txBody>
       </p:sp>
@@ -1050,7 +1057,7 @@
           <a:p>
             <a:pPr lvl="0"/>
             <a:r>
-              <a:rPr lang="en-US" smtClean="0"/>
+              <a:rPr lang="en-US"/>
               <a:t>Click to edit Master text styles</a:t>
             </a:r>
           </a:p>
@@ -1073,7 +1080,7 @@
           <a:p>
             <a:fld id="{5BCAD085-E8A6-8845-BD4E-CB4CCA059FC4}" type="datetimeFigureOut">
               <a:rPr lang="en-US" smtClean="0"/>
-              <a:t>1/27/13</a:t>
+              <a:t>8/20/26</a:t>
             </a:fld>
             <a:endParaRPr lang="en-US"/>
           </a:p>
@@ -1167,10 +1174,9 @@
           <a:lstStyle/>
           <a:p>
             <a:r>
-              <a:rPr lang="en-US" smtClean="0"/>
+              <a:rPr lang="en-US"/>
               <a:t>Click to edit Master title style</a:t>
             </a:r>
-            <a:endParaRPr lang="en-US"/>
           </a:p>
         </p:txBody>
       </p:sp>
@@ -1224,38 +1230,37 @@
           <a:p>
             <a:pPr lvl="0"/>
             <a:r>
-              <a:rPr lang="en-US" smtClean="0"/>
+              <a:rPr lang="en-US"/>
               <a:t>Click to edit Master text styles</a:t>
             </a:r>
           </a:p>
           <a:p>
             <a:pPr lvl="1"/>
             <a:r>
-              <a:rPr lang="en-US" smtClean="0"/>
+              <a:rPr lang="en-US"/>
               <a:t>Second level</a:t>
             </a:r>
           </a:p>
           <a:p>
             <a:pPr lvl="2"/>
             <a:r>
-              <a:rPr lang="en-US" smtClean="0"/>
+              <a:rPr lang="en-US"/>
               <a:t>Third level</a:t>
             </a:r>
           </a:p>
           <a:p>
             <a:pPr lvl="3"/>
             <a:r>
-              <a:rPr lang="en-US" smtClean="0"/>
+              <a:rPr lang="en-US"/>
               <a:t>Fourth level</a:t>
             </a:r>
           </a:p>
           <a:p>
             <a:pPr lvl="4"/>
             <a:r>
-              <a:rPr lang="en-US" smtClean="0"/>
+              <a:rPr lang="en-US"/>
               <a:t>Fifth level</a:t>
             </a:r>
-            <a:endParaRPr lang="en-US"/>
           </a:p>
         </p:txBody>
       </p:sp>
@@ -1309,38 +1314,37 @@
           <a:p>
             <a:pPr lvl="0"/>
             <a:r>
-              <a:rPr lang="en-US" smtClean="0"/>
+              <a:rPr lang="en-US"/>
               <a:t>Click to edit Master text styles</a:t>
             </a:r>
           </a:p>
           <a:p>
             <a:pPr lvl="1"/>
             <a:r>
-              <a:rPr lang="en-US" smtClean="0"/>
+              <a:rPr lang="en-US"/>
               <a:t>Second level</a:t>
             </a:r>
           </a:p>
           <a:p>
             <a:pPr lvl="2"/>
             <a:r>
-              <a:rPr lang="en-US" smtClean="0"/>
+              <a:rPr lang="en-US"/>
               <a:t>Third level</a:t>
             </a:r>
           </a:p>
           <a:p>
             <a:pPr lvl="3"/>
             <a:r>
-              <a:rPr lang="en-US" smtClean="0"/>
+              <a:rPr lang="en-US"/>
               <a:t>Fourth level</a:t>
             </a:r>
           </a:p>
           <a:p>
             <a:pPr lvl="4"/>
             <a:r>
-              <a:rPr lang="en-US" smtClean="0"/>
+              <a:rPr lang="en-US"/>
               <a:t>Fifth level</a:t>
             </a:r>
-            <a:endParaRPr lang="en-US"/>
           </a:p>
         </p:txBody>
       </p:sp>
@@ -1361,7 +1365,7 @@
           <a:p>
             <a:fld id="{5BCAD085-E8A6-8845-BD4E-CB4CCA059FC4}" type="datetimeFigureOut">
               <a:rPr lang="en-US" smtClean="0"/>
-              <a:t>1/27/13</a:t>
+              <a:t>8/20/26</a:t>
             </a:fld>
             <a:endParaRPr lang="en-US"/>
           </a:p>
@@ -1459,10 +1463,9 @@
           </a:lstStyle>
           <a:p>
             <a:r>
-              <a:rPr lang="en-US" smtClean="0"/>
+              <a:rPr lang="en-US"/>
               <a:t>Click to edit Master title style</a:t>
             </a:r>
-            <a:endParaRPr lang="en-US"/>
           </a:p>
         </p:txBody>
       </p:sp>
@@ -1525,7 +1528,7 @@
           <a:p>
             <a:pPr lvl="0"/>
             <a:r>
-              <a:rPr lang="en-US" smtClean="0"/>
+              <a:rPr lang="en-US"/>
               <a:t>Click to edit Master text styles</a:t>
             </a:r>
           </a:p>
@@ -1581,38 +1584,37 @@
           <a:p>
             <a:pPr lvl="0"/>
             <a:r>
-              <a:rPr lang="en-US" smtClean="0"/>
+              <a:rPr lang="en-US"/>
               <a:t>Click to edit Master text styles</a:t>
             </a:r>
           </a:p>
           <a:p>
             <a:pPr lvl="1"/>
             <a:r>
-              <a:rPr lang="en-US" smtClean="0"/>
+              <a:rPr lang="en-US"/>
               <a:t>Second level</a:t>
             </a:r>
           </a:p>
           <a:p>
             <a:pPr lvl="2"/>
             <a:r>
-              <a:rPr lang="en-US" smtClean="0"/>
+              <a:rPr lang="en-US"/>
               <a:t>Third level</a:t>
             </a:r>
           </a:p>
           <a:p>
             <a:pPr lvl="3"/>
             <a:r>
-              <a:rPr lang="en-US" smtClean="0"/>
+              <a:rPr lang="en-US"/>
               <a:t>Fourth level</a:t>
             </a:r>
           </a:p>
           <a:p>
             <a:pPr lvl="4"/>
             <a:r>
-              <a:rPr lang="en-US" smtClean="0"/>
+              <a:rPr lang="en-US"/>
               <a:t>Fifth level</a:t>
             </a:r>
-            <a:endParaRPr lang="en-US"/>
           </a:p>
         </p:txBody>
       </p:sp>
@@ -1675,7 +1677,7 @@
           <a:p>
             <a:pPr lvl="0"/>
             <a:r>
-              <a:rPr lang="en-US" smtClean="0"/>
+              <a:rPr lang="en-US"/>
               <a:t>Click to edit Master text styles</a:t>
             </a:r>
           </a:p>
@@ -1731,38 +1733,37 @@
           <a:p>
             <a:pPr lvl="0"/>
             <a:r>
-              <a:rPr lang="en-US" smtClean="0"/>
+              <a:rPr lang="en-US"/>
               <a:t>Click to edit Master text styles</a:t>
             </a:r>
           </a:p>
           <a:p>
             <a:pPr lvl="1"/>
             <a:r>
-              <a:rPr lang="en-US" smtClean="0"/>
+              <a:rPr lang="en-US"/>
               <a:t>Second level</a:t>
             </a:r>
           </a:p>
           <a:p>
             <a:pPr lvl="2"/>
             <a:r>
-              <a:rPr lang="en-US" smtClean="0"/>
+              <a:rPr lang="en-US"/>
               <a:t>Third level</a:t>
             </a:r>
           </a:p>
           <a:p>
             <a:pPr lvl="3"/>
             <a:r>
-              <a:rPr lang="en-US" smtClean="0"/>
+              <a:rPr lang="en-US"/>
               <a:t>Fourth level</a:t>
             </a:r>
           </a:p>
           <a:p>
             <a:pPr lvl="4"/>
             <a:r>
-              <a:rPr lang="en-US" smtClean="0"/>
+              <a:rPr lang="en-US"/>
               <a:t>Fifth level</a:t>
             </a:r>
-            <a:endParaRPr lang="en-US"/>
           </a:p>
         </p:txBody>
       </p:sp>
@@ -1783,7 +1784,7 @@
           <a:p>
             <a:fld id="{5BCAD085-E8A6-8845-BD4E-CB4CCA059FC4}" type="datetimeFigureOut">
               <a:rPr lang="en-US" smtClean="0"/>
-              <a:t>1/27/13</a:t>
+              <a:t>8/20/26</a:t>
             </a:fld>
             <a:endParaRPr lang="en-US"/>
           </a:p>
@@ -1877,10 +1878,9 @@
           <a:lstStyle/>
           <a:p>
             <a:r>
-              <a:rPr lang="en-US" smtClean="0"/>
+              <a:rPr lang="en-US"/>
               <a:t>Click to edit Master title style</a:t>
             </a:r>
-            <a:endParaRPr lang="en-US"/>
           </a:p>
         </p:txBody>
       </p:sp>
@@ -1901,7 +1901,7 @@
           <a:p>
             <a:fld id="{5BCAD085-E8A6-8845-BD4E-CB4CCA059FC4}" type="datetimeFigureOut">
               <a:rPr lang="en-US" smtClean="0"/>
-              <a:t>1/27/13</a:t>
+              <a:t>8/20/26</a:t>
             </a:fld>
             <a:endParaRPr lang="en-US"/>
           </a:p>
@@ -1996,7 +1996,7 @@
           <a:p>
             <a:fld id="{5BCAD085-E8A6-8845-BD4E-CB4CCA059FC4}" type="datetimeFigureOut">
               <a:rPr lang="en-US" smtClean="0"/>
-              <a:t>1/27/13</a:t>
+              <a:t>8/20/26</a:t>
             </a:fld>
             <a:endParaRPr lang="en-US"/>
           </a:p>
@@ -2099,10 +2099,9 @@
           </a:lstStyle>
           <a:p>
             <a:r>
-              <a:rPr lang="en-US" smtClean="0"/>
+              <a:rPr lang="en-US"/>
               <a:t>Click to edit Master title style</a:t>
             </a:r>
-            <a:endParaRPr lang="en-US"/>
           </a:p>
         </p:txBody>
       </p:sp>
@@ -2156,38 +2155,37 @@
           <a:p>
             <a:pPr lvl="0"/>
             <a:r>
-              <a:rPr lang="en-US" smtClean="0"/>
+              <a:rPr lang="en-US"/>
               <a:t>Click to edit Master text styles</a:t>
             </a:r>
           </a:p>
           <a:p>
             <a:pPr lvl="1"/>
             <a:r>
-              <a:rPr lang="en-US" smtClean="0"/>
+              <a:rPr lang="en-US"/>
               <a:t>Second level</a:t>
             </a:r>
           </a:p>
           <a:p>
             <a:pPr lvl="2"/>
             <a:r>
-              <a:rPr lang="en-US" smtClean="0"/>
+              <a:rPr lang="en-US"/>
               <a:t>Third level</a:t>
             </a:r>
           </a:p>
           <a:p>
             <a:pPr lvl="3"/>
             <a:r>
-              <a:rPr lang="en-US" smtClean="0"/>
+              <a:rPr lang="en-US"/>
               <a:t>Fourth level</a:t>
             </a:r>
           </a:p>
           <a:p>
             <a:pPr lvl="4"/>
             <a:r>
-              <a:rPr lang="en-US" smtClean="0"/>
+              <a:rPr lang="en-US"/>
               <a:t>Fifth level</a:t>
             </a:r>
-            <a:endParaRPr lang="en-US"/>
           </a:p>
         </p:txBody>
       </p:sp>
@@ -2250,7 +2248,7 @@
           <a:p>
             <a:pPr lvl="0"/>
             <a:r>
-              <a:rPr lang="en-US" smtClean="0"/>
+              <a:rPr lang="en-US"/>
               <a:t>Click to edit Master text styles</a:t>
             </a:r>
           </a:p>
@@ -2273,7 +2271,7 @@
           <a:p>
             <a:fld id="{5BCAD085-E8A6-8845-BD4E-CB4CCA059FC4}" type="datetimeFigureOut">
               <a:rPr lang="en-US" smtClean="0"/>
-              <a:t>1/27/13</a:t>
+              <a:t>8/20/26</a:t>
             </a:fld>
             <a:endParaRPr lang="en-US"/>
           </a:p>
@@ -2376,10 +2374,9 @@
           </a:lstStyle>
           <a:p>
             <a:r>
-              <a:rPr lang="en-US" smtClean="0"/>
+              <a:rPr lang="en-US"/>
               <a:t>Click to edit Master title style</a:t>
             </a:r>
-            <a:endParaRPr lang="en-US"/>
           </a:p>
         </p:txBody>
       </p:sp>
@@ -2503,7 +2500,7 @@
           <a:p>
             <a:pPr lvl="0"/>
             <a:r>
-              <a:rPr lang="en-US" smtClean="0"/>
+              <a:rPr lang="en-US"/>
               <a:t>Click to edit Master text styles</a:t>
             </a:r>
           </a:p>
@@ -2526,7 +2523,7 @@
           <a:p>
             <a:fld id="{5BCAD085-E8A6-8845-BD4E-CB4CCA059FC4}" type="datetimeFigureOut">
               <a:rPr lang="en-US" smtClean="0"/>
-              <a:t>1/27/13</a:t>
+              <a:t>8/20/26</a:t>
             </a:fld>
             <a:endParaRPr lang="en-US"/>
           </a:p>
@@ -2635,10 +2632,9 @@
           <a:lstStyle/>
           <a:p>
             <a:r>
-              <a:rPr lang="en-US" smtClean="0"/>
+              <a:rPr lang="en-US"/>
               <a:t>Click to edit Master title style</a:t>
             </a:r>
-            <a:endParaRPr lang="en-US"/>
           </a:p>
         </p:txBody>
       </p:sp>
@@ -2669,38 +2665,37 @@
           <a:p>
             <a:pPr lvl="0"/>
             <a:r>
-              <a:rPr lang="en-US" smtClean="0"/>
+              <a:rPr lang="en-US"/>
               <a:t>Click to edit Master text styles</a:t>
             </a:r>
           </a:p>
           <a:p>
             <a:pPr lvl="1"/>
             <a:r>
-              <a:rPr lang="en-US" smtClean="0"/>
+              <a:rPr lang="en-US"/>
               <a:t>Second level</a:t>
             </a:r>
           </a:p>
           <a:p>
             <a:pPr lvl="2"/>
             <a:r>
-              <a:rPr lang="en-US" smtClean="0"/>
+              <a:rPr lang="en-US"/>
               <a:t>Third level</a:t>
             </a:r>
           </a:p>
           <a:p>
             <a:pPr lvl="3"/>
             <a:r>
-              <a:rPr lang="en-US" smtClean="0"/>
+              <a:rPr lang="en-US"/>
               <a:t>Fourth level</a:t>
             </a:r>
           </a:p>
           <a:p>
             <a:pPr lvl="4"/>
             <a:r>
-              <a:rPr lang="en-US" smtClean="0"/>
+              <a:rPr lang="en-US"/>
               <a:t>Fifth level</a:t>
             </a:r>
-            <a:endParaRPr lang="en-US"/>
           </a:p>
         </p:txBody>
       </p:sp>
@@ -2739,7 +2734,7 @@
           <a:p>
             <a:fld id="{5BCAD085-E8A6-8845-BD4E-CB4CCA059FC4}" type="datetimeFigureOut">
               <a:rPr lang="en-US" smtClean="0"/>
-              <a:t>1/27/13</a:t>
+              <a:t>8/20/26</a:t>
             </a:fld>
             <a:endParaRPr lang="en-US"/>
           </a:p>
@@ -3098,7 +3093,7 @@
 </file>
 
 <file path=ppt/slides/slide1.xml><?xml version="1.0" encoding="utf-8"?>
-<p:sld xmlns:a="http://schemas.openxmlformats.org/drawingml/2006/main" xmlns:p="http://schemas.openxmlformats.org/presentationml/2006/main" xmlns:r="http://schemas.openxmlformats.org/officeDocument/2006/relationships">
+<p:sld xmlns:a="http://schemas.openxmlformats.org/drawingml/2006/main" xmlns:r="http://schemas.openxmlformats.org/officeDocument/2006/relationships" xmlns:p="http://schemas.openxmlformats.org/presentationml/2006/main">
   <p:cSld>
     <p:spTree>
       <p:nvGrpSpPr>
@@ -3106,7 +3101,14 @@
         <p:cNvGrpSpPr/>
         <p:nvPr/>
       </p:nvGrpSpPr>
-      <p:grpSpPr/>
+      <p:grpSpPr>
+        <a:xfrm>
+          <a:off x="0" y="0"/>
+          <a:ext cx="0" cy="0"/>
+          <a:chOff x="0" y="0"/>
+          <a:chExt cx="0" cy="0"/>
+        </a:xfrm>
+      </p:grpSpPr>
       <p:sp>
         <p:nvSpPr>
           <p:cNvPr id="2" name="TextBox 1"/>
@@ -3124,7 +3126,7 @@
           <a:noFill/>
         </p:spPr>
         <p:txBody>
-          <a:bodyPr wrap="square" lIns="0" rIns="0" tIns="0" bIns="0">
+          <a:bodyPr wrap="square" lIns="0" tIns="0" rIns="0" bIns="0">
             <a:spAutoFit/>
           </a:bodyPr>
           <a:lstStyle/>
@@ -3158,7 +3160,7 @@
           <a:noFill/>
         </p:spPr>
         <p:txBody>
-          <a:bodyPr wrap="square" lIns="0" rIns="0" tIns="0" bIns="0">
+          <a:bodyPr wrap="square" lIns="0" tIns="0" rIns="0" bIns="0">
             <a:spAutoFit/>
           </a:bodyPr>
           <a:lstStyle/>
@@ -3193,7 +3195,7 @@
           <a:noFill/>
         </p:spPr>
         <p:txBody>
-          <a:bodyPr wrap="square" lIns="0" rIns="0" tIns="0" bIns="0">
+          <a:bodyPr wrap="square" lIns="0" tIns="0" rIns="0" bIns="0">
             <a:spAutoFit/>
           </a:bodyPr>
           <a:lstStyle/>
@@ -3228,7 +3230,7 @@
           <a:noFill/>
         </p:spPr>
         <p:txBody>
-          <a:bodyPr wrap="square" lIns="0" rIns="0" tIns="0" bIns="0">
+          <a:bodyPr wrap="square" lIns="0" tIns="0" rIns="0" bIns="0">
             <a:spAutoFit/>
           </a:bodyPr>
           <a:lstStyle/>
@@ -3255,7 +3257,7 @@
 </file>
 
 <file path=ppt/slides/slide10.xml><?xml version="1.0" encoding="utf-8"?>
-<p:sld xmlns:a="http://schemas.openxmlformats.org/drawingml/2006/main" xmlns:p="http://schemas.openxmlformats.org/presentationml/2006/main" xmlns:r="http://schemas.openxmlformats.org/officeDocument/2006/relationships">
+<p:sld xmlns:a="http://schemas.openxmlformats.org/drawingml/2006/main" xmlns:r="http://schemas.openxmlformats.org/officeDocument/2006/relationships" xmlns:p="http://schemas.openxmlformats.org/presentationml/2006/main">
   <p:cSld>
     <p:spTree>
       <p:nvGrpSpPr>
@@ -3263,7 +3265,14 @@
         <p:cNvGrpSpPr/>
         <p:nvPr/>
       </p:nvGrpSpPr>
-      <p:grpSpPr/>
+      <p:grpSpPr>
+        <a:xfrm>
+          <a:off x="0" y="0"/>
+          <a:ext cx="0" cy="0"/>
+          <a:chOff x="0" y="0"/>
+          <a:chExt cx="0" cy="0"/>
+        </a:xfrm>
+      </p:grpSpPr>
       <p:sp>
         <p:nvSpPr>
           <p:cNvPr id="2" name="TextBox 1"/>
@@ -3281,7 +3290,7 @@
           <a:noFill/>
         </p:spPr>
         <p:txBody>
-          <a:bodyPr wrap="square" lIns="0" rIns="0" tIns="0" bIns="0">
+          <a:bodyPr wrap="square" lIns="0" tIns="0" rIns="0" bIns="0">
             <a:spAutoFit/>
           </a:bodyPr>
           <a:lstStyle/>
@@ -3315,7 +3324,7 @@
           <a:noFill/>
         </p:spPr>
         <p:txBody>
-          <a:bodyPr wrap="square" lIns="0" rIns="0" tIns="0" bIns="0">
+          <a:bodyPr wrap="square" lIns="0" tIns="0" rIns="0" bIns="0">
             <a:spAutoFit/>
           </a:bodyPr>
           <a:lstStyle/>
@@ -3349,7 +3358,7 @@
           <a:noFill/>
         </p:spPr>
         <p:txBody>
-          <a:bodyPr wrap="square" lIns="0" rIns="0" tIns="0" bIns="0">
+          <a:bodyPr wrap="square" lIns="0" tIns="0" rIns="0" bIns="0">
             <a:spAutoFit/>
           </a:bodyPr>
           <a:lstStyle/>
@@ -3384,7 +3393,7 @@
           <a:noFill/>
         </p:spPr>
         <p:txBody>
-          <a:bodyPr wrap="square" lIns="0" rIns="0" tIns="0" bIns="0">
+          <a:bodyPr wrap="square" lIns="0" tIns="0" rIns="0" bIns="0">
             <a:spAutoFit/>
           </a:bodyPr>
           <a:lstStyle/>
@@ -3418,7 +3427,7 @@
           <a:noFill/>
         </p:spPr>
         <p:txBody>
-          <a:bodyPr wrap="square" lIns="0" rIns="0" tIns="0" bIns="0">
+          <a:bodyPr wrap="square" lIns="0" tIns="0" rIns="0" bIns="0">
             <a:spAutoFit/>
           </a:bodyPr>
           <a:lstStyle/>
@@ -3658,7 +3667,7 @@
 </file>
 
 <file path=ppt/slides/slide11.xml><?xml version="1.0" encoding="utf-8"?>
-<p:sld xmlns:a="http://schemas.openxmlformats.org/drawingml/2006/main" xmlns:p="http://schemas.openxmlformats.org/presentationml/2006/main" xmlns:r="http://schemas.openxmlformats.org/officeDocument/2006/relationships">
+<p:sld xmlns:a="http://schemas.openxmlformats.org/drawingml/2006/main" xmlns:r="http://schemas.openxmlformats.org/officeDocument/2006/relationships" xmlns:p="http://schemas.openxmlformats.org/presentationml/2006/main">
   <p:cSld>
     <p:spTree>
       <p:nvGrpSpPr>
@@ -3666,7 +3675,14 @@
         <p:cNvGrpSpPr/>
         <p:nvPr/>
       </p:nvGrpSpPr>
-      <p:grpSpPr/>
+      <p:grpSpPr>
+        <a:xfrm>
+          <a:off x="0" y="0"/>
+          <a:ext cx="0" cy="0"/>
+          <a:chOff x="0" y="0"/>
+          <a:chExt cx="0" cy="0"/>
+        </a:xfrm>
+      </p:grpSpPr>
       <p:sp>
         <p:nvSpPr>
           <p:cNvPr id="2" name="TextBox 1"/>
@@ -3684,7 +3700,7 @@
           <a:noFill/>
         </p:spPr>
         <p:txBody>
-          <a:bodyPr wrap="square" lIns="0" rIns="0" tIns="0" bIns="0">
+          <a:bodyPr wrap="square" lIns="0" tIns="0" rIns="0" bIns="0">
             <a:spAutoFit/>
           </a:bodyPr>
           <a:lstStyle/>
@@ -3718,7 +3734,7 @@
           <a:noFill/>
         </p:spPr>
         <p:txBody>
-          <a:bodyPr wrap="square" lIns="0" rIns="0" tIns="0" bIns="0">
+          <a:bodyPr wrap="square" lIns="0" tIns="0" rIns="0" bIns="0">
             <a:spAutoFit/>
           </a:bodyPr>
           <a:lstStyle/>
@@ -3752,7 +3768,7 @@
           <a:noFill/>
         </p:spPr>
         <p:txBody>
-          <a:bodyPr wrap="square" lIns="0" rIns="0" tIns="0" bIns="0">
+          <a:bodyPr wrap="square" lIns="0" tIns="0" rIns="0" bIns="0">
             <a:spAutoFit/>
           </a:bodyPr>
           <a:lstStyle/>
@@ -3787,7 +3803,7 @@
           <a:noFill/>
         </p:spPr>
         <p:txBody>
-          <a:bodyPr wrap="square" lIns="0" rIns="0" tIns="0" bIns="0">
+          <a:bodyPr wrap="square" lIns="0" tIns="0" rIns="0" bIns="0">
             <a:spAutoFit/>
           </a:bodyPr>
           <a:lstStyle/>
@@ -3814,7 +3830,7 @@
         </p:nvGraphicFramePr>
         <p:xfrm>
           <a:off x="566928" y="1709928"/>
-          <a:ext cx="11057839" cy="2768346"/>
+          <a:ext cx="11057839" cy="2817876"/>
         </p:xfrm>
         <a:graphic>
           <a:graphicData uri="http://schemas.openxmlformats.org/drawingml/2006/table">
@@ -3823,14 +3839,32 @@
                 <a:tableStyleId>{5C22544A-7EE6-4342-B048-85BDC9FD1C3A}</a:tableStyleId>
               </a:tblPr>
               <a:tblGrid>
-                <a:gridCol w="1374988"/>
-                <a:gridCol w="4723341"/>
-                <a:gridCol w="4959510"/>
+                <a:gridCol w="1374988">
+                  <a:extLst>
+                    <a:ext uri="{9D8B030D-6E8A-4147-A177-3AD203B41FA5}">
+                      <a16:colId xmlns:a16="http://schemas.microsoft.com/office/drawing/2014/main" val="20000"/>
+                    </a:ext>
+                  </a:extLst>
+                </a:gridCol>
+                <a:gridCol w="4723341">
+                  <a:extLst>
+                    <a:ext uri="{9D8B030D-6E8A-4147-A177-3AD203B41FA5}">
+                      <a16:colId xmlns:a16="http://schemas.microsoft.com/office/drawing/2014/main" val="20001"/>
+                    </a:ext>
+                  </a:extLst>
+                </a:gridCol>
+                <a:gridCol w="4959510">
+                  <a:extLst>
+                    <a:ext uri="{9D8B030D-6E8A-4147-A177-3AD203B41FA5}">
+                      <a16:colId xmlns:a16="http://schemas.microsoft.com/office/drawing/2014/main" val="20002"/>
+                    </a:ext>
+                  </a:extLst>
+                </a:gridCol>
               </a:tblGrid>
               <a:tr h="321818">
                 <a:tc>
                   <a:txBody>
-                    <a:bodyPr wrap="square"/>
+                    <a:bodyPr/>
                     <a:lstStyle/>
                     <a:p>
                       <a:pPr algn="ctr"/>
@@ -3853,7 +3887,7 @@
                 </a:tc>
                 <a:tc>
                   <a:txBody>
-                    <a:bodyPr wrap="square"/>
+                    <a:bodyPr/>
                     <a:lstStyle/>
                     <a:p>
                       <a:pPr algn="ctr"/>
@@ -3876,7 +3910,7 @@
                 </a:tc>
                 <a:tc>
                   <a:txBody>
-                    <a:bodyPr wrap="square"/>
+                    <a:bodyPr/>
                     <a:lstStyle/>
                     <a:p>
                       <a:pPr algn="ctr"/>
@@ -3897,11 +3931,16 @@
                     </a:solidFill>
                   </a:tcPr>
                 </a:tc>
+                <a:extLst>
+                  <a:ext uri="{0D108BD9-81ED-4DB2-BD59-A6C34878D82A}">
+                    <a16:rowId xmlns:a16="http://schemas.microsoft.com/office/drawing/2014/main" val="10000"/>
+                  </a:ext>
+                </a:extLst>
               </a:tr>
               <a:tr h="579628">
                 <a:tc>
                   <a:txBody>
-                    <a:bodyPr wrap="square"/>
+                    <a:bodyPr/>
                     <a:lstStyle/>
                     <a:p>
                       <a:pPr algn="ctr"/>
@@ -3933,7 +3972,7 @@
                 </a:tc>
                 <a:tc>
                   <a:txBody>
-                    <a:bodyPr wrap="square"/>
+                    <a:bodyPr/>
                     <a:lstStyle/>
                     <a:p>
                       <a:pPr algn="l"/>
@@ -3956,7 +3995,7 @@
                 </a:tc>
                 <a:tc>
                   <a:txBody>
-                    <a:bodyPr wrap="square"/>
+                    <a:bodyPr/>
                     <a:lstStyle/>
                     <a:p>
                       <a:pPr algn="l"/>
@@ -3977,14 +4016,20 @@
                     </a:solidFill>
                   </a:tcPr>
                 </a:tc>
+                <a:extLst>
+                  <a:ext uri="{0D108BD9-81ED-4DB2-BD59-A6C34878D82A}">
+                    <a16:rowId xmlns:a16="http://schemas.microsoft.com/office/drawing/2014/main" val="10001"/>
+                  </a:ext>
+                </a:extLst>
               </a:tr>
               <a:tr h="321818">
                 <a:tc>
                   <a:txBody>
-                    <a:bodyPr wrap="square"/>
+                    <a:bodyPr/>
                     <a:lstStyle/>
                     <a:p>
                       <a:pPr algn="ctr"/>
+                      <a:endParaRPr/>
                     </a:p>
                   </a:txBody>
                   <a:tcPr marL="64008" marR="64008" marT="32004" marB="32004" anchor="ctr">
@@ -3995,7 +4040,7 @@
                 </a:tc>
                 <a:tc>
                   <a:txBody>
-                    <a:bodyPr wrap="square"/>
+                    <a:bodyPr/>
                     <a:lstStyle/>
                     <a:p>
                       <a:pPr algn="l"/>
@@ -4018,7 +4063,7 @@
                 </a:tc>
                 <a:tc>
                   <a:txBody>
-                    <a:bodyPr wrap="square"/>
+                    <a:bodyPr/>
                     <a:lstStyle/>
                     <a:p>
                       <a:pPr algn="l"/>
@@ -4039,11 +4084,16 @@
                     </a:solidFill>
                   </a:tcPr>
                 </a:tc>
+                <a:extLst>
+                  <a:ext uri="{0D108BD9-81ED-4DB2-BD59-A6C34878D82A}">
+                    <a16:rowId xmlns:a16="http://schemas.microsoft.com/office/drawing/2014/main" val="10002"/>
+                  </a:ext>
+                </a:extLst>
               </a:tr>
               <a:tr h="579628">
                 <a:tc>
                   <a:txBody>
-                    <a:bodyPr wrap="square"/>
+                    <a:bodyPr/>
                     <a:lstStyle/>
                     <a:p>
                       <a:pPr algn="ctr"/>
@@ -4075,7 +4125,7 @@
                 </a:tc>
                 <a:tc>
                   <a:txBody>
-                    <a:bodyPr wrap="square"/>
+                    <a:bodyPr/>
                     <a:lstStyle/>
                     <a:p>
                       <a:pPr algn="l"/>
@@ -4098,7 +4148,7 @@
                 </a:tc>
                 <a:tc>
                   <a:txBody>
-                    <a:bodyPr wrap="square"/>
+                    <a:bodyPr/>
                     <a:lstStyle/>
                     <a:p>
                       <a:pPr algn="l"/>
@@ -4119,14 +4169,20 @@
                     </a:solidFill>
                   </a:tcPr>
                 </a:tc>
+                <a:extLst>
+                  <a:ext uri="{0D108BD9-81ED-4DB2-BD59-A6C34878D82A}">
+                    <a16:rowId xmlns:a16="http://schemas.microsoft.com/office/drawing/2014/main" val="10003"/>
+                  </a:ext>
+                </a:extLst>
               </a:tr>
               <a:tr h="321818">
                 <a:tc>
                   <a:txBody>
-                    <a:bodyPr wrap="square"/>
+                    <a:bodyPr/>
                     <a:lstStyle/>
                     <a:p>
                       <a:pPr algn="ctr"/>
+                      <a:endParaRPr/>
                     </a:p>
                   </a:txBody>
                   <a:tcPr marL="64008" marR="64008" marT="32004" marB="32004" anchor="ctr">
@@ -4137,7 +4193,7 @@
                 </a:tc>
                 <a:tc>
                   <a:txBody>
-                    <a:bodyPr wrap="square"/>
+                    <a:bodyPr/>
                     <a:lstStyle/>
                     <a:p>
                       <a:pPr algn="l"/>
@@ -4160,7 +4216,7 @@
                 </a:tc>
                 <a:tc>
                   <a:txBody>
-                    <a:bodyPr wrap="square"/>
+                    <a:bodyPr/>
                     <a:lstStyle/>
                     <a:p>
                       <a:pPr algn="l"/>
@@ -4181,11 +4237,16 @@
                     </a:solidFill>
                   </a:tcPr>
                 </a:tc>
+                <a:extLst>
+                  <a:ext uri="{0D108BD9-81ED-4DB2-BD59-A6C34878D82A}">
+                    <a16:rowId xmlns:a16="http://schemas.microsoft.com/office/drawing/2014/main" val="10004"/>
+                  </a:ext>
+                </a:extLst>
               </a:tr>
               <a:tr h="321818">
                 <a:tc>
                   <a:txBody>
-                    <a:bodyPr wrap="square"/>
+                    <a:bodyPr/>
                     <a:lstStyle/>
                     <a:p>
                       <a:pPr algn="ctr"/>
@@ -4217,7 +4278,7 @@
                 </a:tc>
                 <a:tc>
                   <a:txBody>
-                    <a:bodyPr wrap="square"/>
+                    <a:bodyPr/>
                     <a:lstStyle/>
                     <a:p>
                       <a:pPr algn="l"/>
@@ -4240,7 +4301,7 @@
                 </a:tc>
                 <a:tc>
                   <a:txBody>
-                    <a:bodyPr wrap="square"/>
+                    <a:bodyPr/>
                     <a:lstStyle/>
                     <a:p>
                       <a:pPr algn="l"/>
@@ -4261,14 +4322,20 @@
                     </a:solidFill>
                   </a:tcPr>
                 </a:tc>
+                <a:extLst>
+                  <a:ext uri="{0D108BD9-81ED-4DB2-BD59-A6C34878D82A}">
+                    <a16:rowId xmlns:a16="http://schemas.microsoft.com/office/drawing/2014/main" val="10005"/>
+                  </a:ext>
+                </a:extLst>
               </a:tr>
               <a:tr h="321818">
                 <a:tc>
                   <a:txBody>
-                    <a:bodyPr wrap="square"/>
+                    <a:bodyPr/>
                     <a:lstStyle/>
                     <a:p>
                       <a:pPr algn="ctr"/>
+                      <a:endParaRPr/>
                     </a:p>
                   </a:txBody>
                   <a:tcPr marL="64008" marR="64008" marT="32004" marB="32004" anchor="ctr">
@@ -4279,19 +4346,43 @@
                 </a:tc>
                 <a:tc>
                   <a:txBody>
-                    <a:bodyPr wrap="square"/>
+                    <a:bodyPr/>
                     <a:lstStyle/>
                     <a:p>
                       <a:pPr algn="l"/>
                       <a:r>
-                        <a:rPr sz="1400" b="0">
-                          <a:solidFill>
-                            <a:srgbClr val="22303F"/>
-                          </a:solidFill>
-                          <a:latin typeface="Microsoft JhengHei"/>
-                        </a:rPr>
-                        <a:t>應用端協作可行，但需清楚 R&amp;R、效益與回復程序</a:t>
-                      </a:r>
+                        <a:rPr sz="1400" b="0" dirty="0" err="1">
+                          <a:solidFill>
+                            <a:srgbClr val="22303F"/>
+                          </a:solidFill>
+                          <a:latin typeface="Microsoft JhengHei"/>
+                        </a:rPr>
+                        <a:t>應用端協作可行，但需清楚</a:t>
+                      </a:r>
+                      <a:r>
+                        <a:rPr sz="1400" b="0" dirty="0">
+                          <a:solidFill>
+                            <a:srgbClr val="22303F"/>
+                          </a:solidFill>
+                          <a:latin typeface="Microsoft JhengHei"/>
+                        </a:rPr>
+                        <a:t> </a:t>
+                      </a:r>
+                      <a:r>
+                        <a:rPr sz="1400" b="0" dirty="0" err="1">
+                          <a:solidFill>
+                            <a:srgbClr val="22303F"/>
+                          </a:solidFill>
+                          <a:latin typeface="Microsoft JhengHei"/>
+                        </a:rPr>
+                        <a:t>R&amp;R、效益與回復程序</a:t>
+                      </a:r>
+                      <a:endParaRPr sz="1400" b="0" dirty="0">
+                        <a:solidFill>
+                          <a:srgbClr val="22303F"/>
+                        </a:solidFill>
+                        <a:latin typeface="Microsoft JhengHei"/>
+                      </a:endParaRPr>
                     </a:p>
                   </a:txBody>
                   <a:tcPr marL="64008" marR="64008" marT="32004" marB="32004" anchor="ctr">
@@ -4302,19 +4393,61 @@
                 </a:tc>
                 <a:tc>
                   <a:txBody>
-                    <a:bodyPr wrap="square"/>
+                    <a:bodyPr/>
                     <a:lstStyle/>
                     <a:p>
                       <a:pPr algn="l"/>
                       <a:r>
-                        <a:rPr sz="1400" b="0">
-                          <a:solidFill>
-                            <a:srgbClr val="22303F"/>
-                          </a:solidFill>
-                          <a:latin typeface="Microsoft JhengHei"/>
-                        </a:rPr>
-                        <a:t>協作 TSD 其產品 Owner，確認依賴與改造上限</a:t>
-                      </a:r>
+                        <a:rPr sz="1400" b="0" dirty="0" err="1">
+                          <a:solidFill>
+                            <a:srgbClr val="22303F"/>
+                          </a:solidFill>
+                          <a:latin typeface="Microsoft JhengHei"/>
+                        </a:rPr>
+                        <a:t>協作</a:t>
+                      </a:r>
+                      <a:r>
+                        <a:rPr sz="1400" b="0" dirty="0">
+                          <a:solidFill>
+                            <a:srgbClr val="22303F"/>
+                          </a:solidFill>
+                          <a:latin typeface="Microsoft JhengHei"/>
+                        </a:rPr>
+                        <a:t> TSD </a:t>
+                      </a:r>
+                      <a:r>
+                        <a:rPr sz="1400" b="0" dirty="0" err="1">
+                          <a:solidFill>
+                            <a:srgbClr val="22303F"/>
+                          </a:solidFill>
+                          <a:latin typeface="Microsoft JhengHei"/>
+                        </a:rPr>
+                        <a:t>其產品</a:t>
+                      </a:r>
+                      <a:r>
+                        <a:rPr sz="1400" b="0" dirty="0">
+                          <a:solidFill>
+                            <a:srgbClr val="22303F"/>
+                          </a:solidFill>
+                          <a:latin typeface="Microsoft JhengHei"/>
+                        </a:rPr>
+                        <a:t> </a:t>
+                      </a:r>
+                      <a:r>
+                        <a:rPr sz="1400" b="0" dirty="0" err="1">
+                          <a:solidFill>
+                            <a:srgbClr val="22303F"/>
+                          </a:solidFill>
+                          <a:latin typeface="Microsoft JhengHei"/>
+                        </a:rPr>
+                        <a:t>Owner，確認依賴與改造上限</a:t>
+                      </a:r>
+                      <a:endParaRPr sz="1400" b="0" dirty="0">
+                        <a:solidFill>
+                          <a:srgbClr val="22303F"/>
+                        </a:solidFill>
+                        <a:latin typeface="Microsoft JhengHei"/>
+                      </a:endParaRPr>
                     </a:p>
                   </a:txBody>
                   <a:tcPr marL="64008" marR="64008" marT="32004" marB="32004" anchor="ctr">
@@ -4323,6 +4456,11 @@
                     </a:solidFill>
                   </a:tcPr>
                 </a:tc>
+                <a:extLst>
+                  <a:ext uri="{0D108BD9-81ED-4DB2-BD59-A6C34878D82A}">
+                    <a16:rowId xmlns:a16="http://schemas.microsoft.com/office/drawing/2014/main" val="10006"/>
+                  </a:ext>
+                </a:extLst>
               </a:tr>
             </a:tbl>
           </a:graphicData>
@@ -4345,7 +4483,7 @@
           <a:noFill/>
         </p:spPr>
         <p:txBody>
-          <a:bodyPr wrap="square" lIns="0" rIns="0" tIns="0" bIns="0">
+          <a:bodyPr wrap="square" lIns="0" tIns="0" rIns="0" bIns="0">
             <a:spAutoFit/>
           </a:bodyPr>
           <a:lstStyle/>
@@ -4403,6 +4541,7 @@
           <a:lstStyle/>
           <a:p>
             <a:pPr algn="ctr"/>
+            <a:endParaRPr/>
           </a:p>
         </p:txBody>
       </p:sp>
@@ -4415,7 +4554,7 @@
 </file>
 
 <file path=ppt/slides/slide12.xml><?xml version="1.0" encoding="utf-8"?>
-<p:sld xmlns:a="http://schemas.openxmlformats.org/drawingml/2006/main" xmlns:p="http://schemas.openxmlformats.org/presentationml/2006/main" xmlns:r="http://schemas.openxmlformats.org/officeDocument/2006/relationships">
+<p:sld xmlns:a="http://schemas.openxmlformats.org/drawingml/2006/main" xmlns:r="http://schemas.openxmlformats.org/officeDocument/2006/relationships" xmlns:p="http://schemas.openxmlformats.org/presentationml/2006/main">
   <p:cSld>
     <p:spTree>
       <p:nvGrpSpPr>
@@ -4423,7 +4562,14 @@
         <p:cNvGrpSpPr/>
         <p:nvPr/>
       </p:nvGrpSpPr>
-      <p:grpSpPr/>
+      <p:grpSpPr>
+        <a:xfrm>
+          <a:off x="0" y="0"/>
+          <a:ext cx="0" cy="0"/>
+          <a:chOff x="0" y="0"/>
+          <a:chExt cx="0" cy="0"/>
+        </a:xfrm>
+      </p:grpSpPr>
       <p:sp>
         <p:nvSpPr>
           <p:cNvPr id="2" name="TextBox 1"/>
@@ -4441,7 +4587,7 @@
           <a:noFill/>
         </p:spPr>
         <p:txBody>
-          <a:bodyPr wrap="square" lIns="0" rIns="0" tIns="0" bIns="0">
+          <a:bodyPr wrap="square" lIns="0" tIns="0" rIns="0" bIns="0">
             <a:spAutoFit/>
           </a:bodyPr>
           <a:lstStyle/>
@@ -4475,7 +4621,7 @@
           <a:noFill/>
         </p:spPr>
         <p:txBody>
-          <a:bodyPr wrap="square" lIns="0" rIns="0" tIns="0" bIns="0">
+          <a:bodyPr wrap="square" lIns="0" tIns="0" rIns="0" bIns="0">
             <a:spAutoFit/>
           </a:bodyPr>
           <a:lstStyle/>
@@ -4509,7 +4655,7 @@
           <a:noFill/>
         </p:spPr>
         <p:txBody>
-          <a:bodyPr wrap="square" lIns="0" rIns="0" tIns="0" bIns="0">
+          <a:bodyPr wrap="square" lIns="0" tIns="0" rIns="0" bIns="0">
             <a:spAutoFit/>
           </a:bodyPr>
           <a:lstStyle/>
@@ -4544,7 +4690,7 @@
           <a:noFill/>
         </p:spPr>
         <p:txBody>
-          <a:bodyPr wrap="square" lIns="0" rIns="0" tIns="0" bIns="0">
+          <a:bodyPr wrap="square" lIns="0" tIns="0" rIns="0" bIns="0">
             <a:spAutoFit/>
           </a:bodyPr>
           <a:lstStyle/>
@@ -4580,15 +4726,39 @@
                 <a:tableStyleId>{5C22544A-7EE6-4342-B048-85BDC9FD1C3A}</a:tableStyleId>
               </a:tblPr>
               <a:tblGrid>
-                <a:gridCol w="1163835"/>
-                <a:gridCol w="4433326"/>
-                <a:gridCol w="2750671"/>
-                <a:gridCol w="2710007"/>
+                <a:gridCol w="1163835">
+                  <a:extLst>
+                    <a:ext uri="{9D8B030D-6E8A-4147-A177-3AD203B41FA5}">
+                      <a16:colId xmlns:a16="http://schemas.microsoft.com/office/drawing/2014/main" val="20000"/>
+                    </a:ext>
+                  </a:extLst>
+                </a:gridCol>
+                <a:gridCol w="4433326">
+                  <a:extLst>
+                    <a:ext uri="{9D8B030D-6E8A-4147-A177-3AD203B41FA5}">
+                      <a16:colId xmlns:a16="http://schemas.microsoft.com/office/drawing/2014/main" val="20001"/>
+                    </a:ext>
+                  </a:extLst>
+                </a:gridCol>
+                <a:gridCol w="2750671">
+                  <a:extLst>
+                    <a:ext uri="{9D8B030D-6E8A-4147-A177-3AD203B41FA5}">
+                      <a16:colId xmlns:a16="http://schemas.microsoft.com/office/drawing/2014/main" val="20002"/>
+                    </a:ext>
+                  </a:extLst>
+                </a:gridCol>
+                <a:gridCol w="2710007">
+                  <a:extLst>
+                    <a:ext uri="{9D8B030D-6E8A-4147-A177-3AD203B41FA5}">
+                      <a16:colId xmlns:a16="http://schemas.microsoft.com/office/drawing/2014/main" val="20003"/>
+                    </a:ext>
+                  </a:extLst>
+                </a:gridCol>
               </a:tblGrid>
               <a:tr h="321818">
                 <a:tc>
                   <a:txBody>
-                    <a:bodyPr wrap="square"/>
+                    <a:bodyPr/>
                     <a:lstStyle/>
                     <a:p>
                       <a:pPr algn="ctr"/>
@@ -4611,7 +4781,7 @@
                 </a:tc>
                 <a:tc>
                   <a:txBody>
-                    <a:bodyPr wrap="square"/>
+                    <a:bodyPr/>
                     <a:lstStyle/>
                     <a:p>
                       <a:pPr algn="ctr"/>
@@ -4634,7 +4804,7 @@
                 </a:tc>
                 <a:tc>
                   <a:txBody>
-                    <a:bodyPr wrap="square"/>
+                    <a:bodyPr/>
                     <a:lstStyle/>
                     <a:p>
                       <a:pPr algn="ctr"/>
@@ -4657,7 +4827,7 @@
                 </a:tc>
                 <a:tc>
                   <a:txBody>
-                    <a:bodyPr wrap="square"/>
+                    <a:bodyPr/>
                     <a:lstStyle/>
                     <a:p>
                       <a:pPr algn="ctr"/>
@@ -4678,11 +4848,16 @@
                     </a:solidFill>
                   </a:tcPr>
                 </a:tc>
+                <a:extLst>
+                  <a:ext uri="{0D108BD9-81ED-4DB2-BD59-A6C34878D82A}">
+                    <a16:rowId xmlns:a16="http://schemas.microsoft.com/office/drawing/2014/main" val="10000"/>
+                  </a:ext>
+                </a:extLst>
               </a:tr>
               <a:tr h="579628">
                 <a:tc>
                   <a:txBody>
-                    <a:bodyPr wrap="square"/>
+                    <a:bodyPr/>
                     <a:lstStyle/>
                     <a:p>
                       <a:pPr algn="ctr"/>
@@ -4705,7 +4880,7 @@
                 </a:tc>
                 <a:tc>
                   <a:txBody>
-                    <a:bodyPr wrap="square"/>
+                    <a:bodyPr/>
                     <a:lstStyle/>
                     <a:p>
                       <a:pPr algn="l"/>
@@ -4728,7 +4903,7 @@
                 </a:tc>
                 <a:tc>
                   <a:txBody>
-                    <a:bodyPr wrap="square"/>
+                    <a:bodyPr/>
                     <a:lstStyle/>
                     <a:p>
                       <a:pPr algn="l"/>
@@ -4751,7 +4926,7 @@
                 </a:tc>
                 <a:tc>
                   <a:txBody>
-                    <a:bodyPr wrap="square"/>
+                    <a:bodyPr/>
                     <a:lstStyle/>
                     <a:p>
                       <a:pPr algn="l"/>
@@ -4772,11 +4947,16 @@
                     </a:solidFill>
                   </a:tcPr>
                 </a:tc>
+                <a:extLst>
+                  <a:ext uri="{0D108BD9-81ED-4DB2-BD59-A6C34878D82A}">
+                    <a16:rowId xmlns:a16="http://schemas.microsoft.com/office/drawing/2014/main" val="10001"/>
+                  </a:ext>
+                </a:extLst>
               </a:tr>
               <a:tr h="321818">
                 <a:tc>
                   <a:txBody>
-                    <a:bodyPr wrap="square"/>
+                    <a:bodyPr/>
                     <a:lstStyle/>
                     <a:p>
                       <a:pPr algn="ctr"/>
@@ -4799,7 +4979,7 @@
                 </a:tc>
                 <a:tc>
                   <a:txBody>
-                    <a:bodyPr wrap="square"/>
+                    <a:bodyPr/>
                     <a:lstStyle/>
                     <a:p>
                       <a:pPr algn="l"/>
@@ -4822,7 +5002,7 @@
                 </a:tc>
                 <a:tc>
                   <a:txBody>
-                    <a:bodyPr wrap="square"/>
+                    <a:bodyPr/>
                     <a:lstStyle/>
                     <a:p>
                       <a:pPr algn="l"/>
@@ -4845,7 +5025,7 @@
                 </a:tc>
                 <a:tc>
                   <a:txBody>
-                    <a:bodyPr wrap="square"/>
+                    <a:bodyPr/>
                     <a:lstStyle/>
                     <a:p>
                       <a:pPr algn="l"/>
@@ -4866,11 +5046,16 @@
                     </a:solidFill>
                   </a:tcPr>
                 </a:tc>
+                <a:extLst>
+                  <a:ext uri="{0D108BD9-81ED-4DB2-BD59-A6C34878D82A}">
+                    <a16:rowId xmlns:a16="http://schemas.microsoft.com/office/drawing/2014/main" val="10002"/>
+                  </a:ext>
+                </a:extLst>
               </a:tr>
               <a:tr h="579628">
                 <a:tc>
                   <a:txBody>
-                    <a:bodyPr wrap="square"/>
+                    <a:bodyPr/>
                     <a:lstStyle/>
                     <a:p>
                       <a:pPr algn="ctr"/>
@@ -4893,7 +5078,7 @@
                 </a:tc>
                 <a:tc>
                   <a:txBody>
-                    <a:bodyPr wrap="square"/>
+                    <a:bodyPr/>
                     <a:lstStyle/>
                     <a:p>
                       <a:pPr algn="l"/>
@@ -4916,19 +5101,43 @@
                 </a:tc>
                 <a:tc>
                   <a:txBody>
-                    <a:bodyPr wrap="square"/>
+                    <a:bodyPr/>
                     <a:lstStyle/>
                     <a:p>
                       <a:pPr algn="l"/>
                       <a:r>
-                        <a:rPr sz="1400" b="1">
+                        <a:rPr sz="1400" b="1" dirty="0" err="1">
                           <a:solidFill>
                             <a:srgbClr val="C0392B"/>
                           </a:solidFill>
                           <a:latin typeface="Microsoft JhengHei"/>
                         </a:rPr>
-                        <a:t>最快取得應用、維運、Self-Service 與投資報酬證據</a:t>
-                      </a:r>
+                        <a:t>最快取得應用、維運、Self-Service</a:t>
+                      </a:r>
+                      <a:r>
+                        <a:rPr sz="1400" b="1" dirty="0">
+                          <a:solidFill>
+                            <a:srgbClr val="C0392B"/>
+                          </a:solidFill>
+                          <a:latin typeface="Microsoft JhengHei"/>
+                        </a:rPr>
+                        <a:t> </a:t>
+                      </a:r>
+                      <a:r>
+                        <a:rPr sz="1400" b="1" dirty="0" err="1">
+                          <a:solidFill>
+                            <a:srgbClr val="C0392B"/>
+                          </a:solidFill>
+                          <a:latin typeface="Microsoft JhengHei"/>
+                        </a:rPr>
+                        <a:t>與投資報酬證據</a:t>
+                      </a:r>
+                      <a:endParaRPr sz="1400" b="1" dirty="0">
+                        <a:solidFill>
+                          <a:srgbClr val="C0392B"/>
+                        </a:solidFill>
+                        <a:latin typeface="Microsoft JhengHei"/>
+                      </a:endParaRPr>
                     </a:p>
                   </a:txBody>
                   <a:tcPr marL="64008" marR="64008" marT="32004" marB="32004" anchor="ctr">
@@ -4939,19 +5148,61 @@
                 </a:tc>
                 <a:tc>
                   <a:txBody>
-                    <a:bodyPr wrap="square"/>
+                    <a:bodyPr/>
                     <a:lstStyle/>
                     <a:p>
                       <a:pPr algn="l"/>
                       <a:r>
-                        <a:rPr sz="1400" b="0">
-                          <a:solidFill>
-                            <a:srgbClr val="22303F"/>
-                          </a:solidFill>
-                          <a:latin typeface="Microsoft JhengHei"/>
-                        </a:rPr>
-                        <a:t>需 SSD Infra ; TSD/產品單位 協作共識</a:t>
-                      </a:r>
+                        <a:rPr sz="1400" b="0" dirty="0" err="1">
+                          <a:solidFill>
+                            <a:srgbClr val="22303F"/>
+                          </a:solidFill>
+                          <a:latin typeface="Microsoft JhengHei"/>
+                        </a:rPr>
+                        <a:t>需</a:t>
+                      </a:r>
+                      <a:r>
+                        <a:rPr sz="1400" b="0" dirty="0">
+                          <a:solidFill>
+                            <a:srgbClr val="22303F"/>
+                          </a:solidFill>
+                          <a:latin typeface="Microsoft JhengHei"/>
+                        </a:rPr>
+                        <a:t> SSD Infra ; TSD/</a:t>
+                      </a:r>
+                      <a:r>
+                        <a:rPr sz="1400" b="0" dirty="0" err="1">
+                          <a:solidFill>
+                            <a:srgbClr val="22303F"/>
+                          </a:solidFill>
+                          <a:latin typeface="Microsoft JhengHei"/>
+                        </a:rPr>
+                        <a:t>產品單位</a:t>
+                      </a:r>
+                      <a:r>
+                        <a:rPr sz="1400" b="0" dirty="0">
+                          <a:solidFill>
+                            <a:srgbClr val="22303F"/>
+                          </a:solidFill>
+                          <a:latin typeface="Microsoft JhengHei"/>
+                        </a:rPr>
+                        <a:t> </a:t>
+                      </a:r>
+                      <a:r>
+                        <a:rPr sz="1400" b="0" dirty="0" err="1">
+                          <a:solidFill>
+                            <a:srgbClr val="22303F"/>
+                          </a:solidFill>
+                          <a:latin typeface="Microsoft JhengHei"/>
+                        </a:rPr>
+                        <a:t>協作共識</a:t>
+                      </a:r>
+                      <a:endParaRPr sz="1400" b="0" dirty="0">
+                        <a:solidFill>
+                          <a:srgbClr val="22303F"/>
+                        </a:solidFill>
+                        <a:latin typeface="Microsoft JhengHei"/>
+                      </a:endParaRPr>
                     </a:p>
                   </a:txBody>
                   <a:tcPr marL="64008" marR="64008" marT="32004" marB="32004" anchor="ctr">
@@ -4960,11 +5211,16 @@
                     </a:solidFill>
                   </a:tcPr>
                 </a:tc>
+                <a:extLst>
+                  <a:ext uri="{0D108BD9-81ED-4DB2-BD59-A6C34878D82A}">
+                    <a16:rowId xmlns:a16="http://schemas.microsoft.com/office/drawing/2014/main" val="10003"/>
+                  </a:ext>
+                </a:extLst>
               </a:tr>
               <a:tr h="579628">
                 <a:tc>
                   <a:txBody>
-                    <a:bodyPr wrap="square"/>
+                    <a:bodyPr/>
                     <a:lstStyle/>
                     <a:p>
                       <a:pPr algn="ctr"/>
@@ -4987,7 +5243,7 @@
                 </a:tc>
                 <a:tc>
                   <a:txBody>
-                    <a:bodyPr wrap="square"/>
+                    <a:bodyPr/>
                     <a:lstStyle/>
                     <a:p>
                       <a:pPr algn="l"/>
@@ -5010,7 +5266,7 @@
                 </a:tc>
                 <a:tc>
                   <a:txBody>
-                    <a:bodyPr wrap="square"/>
+                    <a:bodyPr/>
                     <a:lstStyle/>
                     <a:p>
                       <a:pPr algn="l"/>
@@ -5033,7 +5289,7 @@
                 </a:tc>
                 <a:tc>
                   <a:txBody>
-                    <a:bodyPr wrap="square"/>
+                    <a:bodyPr/>
                     <a:lstStyle/>
                     <a:p>
                       <a:pPr algn="l"/>
@@ -5054,11 +5310,16 @@
                     </a:solidFill>
                   </a:tcPr>
                 </a:tc>
+                <a:extLst>
+                  <a:ext uri="{0D108BD9-81ED-4DB2-BD59-A6C34878D82A}">
+                    <a16:rowId xmlns:a16="http://schemas.microsoft.com/office/drawing/2014/main" val="10004"/>
+                  </a:ext>
+                </a:extLst>
               </a:tr>
               <a:tr h="579628">
                 <a:tc>
                   <a:txBody>
-                    <a:bodyPr wrap="square"/>
+                    <a:bodyPr/>
                     <a:lstStyle/>
                     <a:p>
                       <a:pPr algn="ctr"/>
@@ -5081,7 +5342,7 @@
                 </a:tc>
                 <a:tc>
                   <a:txBody>
-                    <a:bodyPr wrap="square"/>
+                    <a:bodyPr/>
                     <a:lstStyle/>
                     <a:p>
                       <a:pPr algn="l"/>
@@ -5104,7 +5365,7 @@
                 </a:tc>
                 <a:tc>
                   <a:txBody>
-                    <a:bodyPr wrap="square"/>
+                    <a:bodyPr/>
                     <a:lstStyle/>
                     <a:p>
                       <a:pPr algn="l"/>
@@ -5127,19 +5388,61 @@
                 </a:tc>
                 <a:tc>
                   <a:txBody>
-                    <a:bodyPr wrap="square"/>
+                    <a:bodyPr/>
                     <a:lstStyle/>
                     <a:p>
                       <a:pPr algn="l"/>
                       <a:r>
-                        <a:rPr sz="1400" b="0">
-                          <a:solidFill>
-                            <a:srgbClr val="22303F"/>
-                          </a:solidFill>
-                          <a:latin typeface="Microsoft JhengHei"/>
-                        </a:rPr>
-                        <a:t>需多團隊 owner、治理與持續成本；A/A 不作預設</a:t>
-                      </a:r>
+                        <a:rPr sz="1400" b="0" dirty="0" err="1">
+                          <a:solidFill>
+                            <a:srgbClr val="22303F"/>
+                          </a:solidFill>
+                          <a:latin typeface="Microsoft JhengHei"/>
+                        </a:rPr>
+                        <a:t>需多團隊</a:t>
+                      </a:r>
+                      <a:r>
+                        <a:rPr sz="1400" b="0" dirty="0">
+                          <a:solidFill>
+                            <a:srgbClr val="22303F"/>
+                          </a:solidFill>
+                          <a:latin typeface="Microsoft JhengHei"/>
+                        </a:rPr>
+                        <a:t> </a:t>
+                      </a:r>
+                      <a:r>
+                        <a:rPr sz="1400" b="0" dirty="0" err="1">
+                          <a:solidFill>
+                            <a:srgbClr val="22303F"/>
+                          </a:solidFill>
+                          <a:latin typeface="Microsoft JhengHei"/>
+                        </a:rPr>
+                        <a:t>owner、治理與持續成本；A</a:t>
+                      </a:r>
+                      <a:r>
+                        <a:rPr sz="1400" b="0" dirty="0">
+                          <a:solidFill>
+                            <a:srgbClr val="22303F"/>
+                          </a:solidFill>
+                          <a:latin typeface="Microsoft JhengHei"/>
+                        </a:rPr>
+                        <a:t>/A </a:t>
+                      </a:r>
+                      <a:r>
+                        <a:rPr sz="1400" b="0" dirty="0" err="1">
+                          <a:solidFill>
+                            <a:srgbClr val="22303F"/>
+                          </a:solidFill>
+                          <a:latin typeface="Microsoft JhengHei"/>
+                        </a:rPr>
+                        <a:t>不作預設</a:t>
+                      </a:r>
+                      <a:endParaRPr sz="1400" b="0" dirty="0">
+                        <a:solidFill>
+                          <a:srgbClr val="22303F"/>
+                        </a:solidFill>
+                        <a:latin typeface="Microsoft JhengHei"/>
+                      </a:endParaRPr>
                     </a:p>
                   </a:txBody>
                   <a:tcPr marL="64008" marR="64008" marT="32004" marB="32004" anchor="ctr">
@@ -5148,6 +5451,11 @@
                     </a:solidFill>
                   </a:tcPr>
                 </a:tc>
+                <a:extLst>
+                  <a:ext uri="{0D108BD9-81ED-4DB2-BD59-A6C34878D82A}">
+                    <a16:rowId xmlns:a16="http://schemas.microsoft.com/office/drawing/2014/main" val="10005"/>
+                  </a:ext>
+                </a:extLst>
               </a:tr>
             </a:tbl>
           </a:graphicData>
@@ -5170,7 +5478,7 @@
           <a:noFill/>
         </p:spPr>
         <p:txBody>
-          <a:bodyPr wrap="square" lIns="0" rIns="0" tIns="0" bIns="0">
+          <a:bodyPr wrap="square" lIns="0" tIns="0" rIns="0" bIns="0">
             <a:spAutoFit/>
           </a:bodyPr>
           <a:lstStyle/>
@@ -5205,7 +5513,7 @@
 </file>
 
 <file path=ppt/slides/slide13.xml><?xml version="1.0" encoding="utf-8"?>
-<p:sld xmlns:a="http://schemas.openxmlformats.org/drawingml/2006/main" xmlns:p="http://schemas.openxmlformats.org/presentationml/2006/main" xmlns:r="http://schemas.openxmlformats.org/officeDocument/2006/relationships">
+<p:sld xmlns:a="http://schemas.openxmlformats.org/drawingml/2006/main" xmlns:r="http://schemas.openxmlformats.org/officeDocument/2006/relationships" xmlns:p="http://schemas.openxmlformats.org/presentationml/2006/main">
   <p:cSld>
     <p:spTree>
       <p:nvGrpSpPr>
@@ -5213,7 +5521,14 @@
         <p:cNvGrpSpPr/>
         <p:nvPr/>
       </p:nvGrpSpPr>
-      <p:grpSpPr/>
+      <p:grpSpPr>
+        <a:xfrm>
+          <a:off x="0" y="0"/>
+          <a:ext cx="0" cy="0"/>
+          <a:chOff x="0" y="0"/>
+          <a:chExt cx="0" cy="0"/>
+        </a:xfrm>
+      </p:grpSpPr>
       <p:sp>
         <p:nvSpPr>
           <p:cNvPr id="2" name="TextBox 1"/>
@@ -5231,7 +5546,7 @@
           <a:noFill/>
         </p:spPr>
         <p:txBody>
-          <a:bodyPr wrap="square" lIns="0" rIns="0" tIns="0" bIns="0">
+          <a:bodyPr wrap="square" lIns="0" tIns="0" rIns="0" bIns="0">
             <a:spAutoFit/>
           </a:bodyPr>
           <a:lstStyle/>
@@ -5265,7 +5580,7 @@
           <a:noFill/>
         </p:spPr>
         <p:txBody>
-          <a:bodyPr wrap="square" lIns="0" rIns="0" tIns="0" bIns="0">
+          <a:bodyPr wrap="square" lIns="0" tIns="0" rIns="0" bIns="0">
             <a:spAutoFit/>
           </a:bodyPr>
           <a:lstStyle/>
@@ -5299,7 +5614,7 @@
           <a:noFill/>
         </p:spPr>
         <p:txBody>
-          <a:bodyPr wrap="square" lIns="0" rIns="0" tIns="0" bIns="0">
+          <a:bodyPr wrap="square" lIns="0" tIns="0" rIns="0" bIns="0">
             <a:spAutoFit/>
           </a:bodyPr>
           <a:lstStyle/>
@@ -5334,7 +5649,7 @@
           <a:noFill/>
         </p:spPr>
         <p:txBody>
-          <a:bodyPr wrap="square" lIns="0" rIns="0" tIns="0" bIns="0">
+          <a:bodyPr wrap="square" lIns="0" tIns="0" rIns="0" bIns="0">
             <a:spAutoFit/>
           </a:bodyPr>
           <a:lstStyle/>
@@ -5390,7 +5705,7 @@
           </a:fontRef>
         </p:style>
         <p:txBody>
-          <a:bodyPr rtlCol="0" anchor="ctr" wrap="square" lIns="73152" rIns="73152" tIns="36576" bIns="36576"/>
+          <a:bodyPr wrap="square" lIns="73152" tIns="36576" rIns="73152" bIns="36576" rtlCol="0" anchor="ctr"/>
           <a:lstStyle/>
           <a:p>
             <a:pPr algn="l"/>
@@ -5454,7 +5769,7 @@
           </a:fontRef>
         </p:style>
         <p:txBody>
-          <a:bodyPr rtlCol="0" anchor="ctr" wrap="square" lIns="73152" rIns="73152" tIns="36576" bIns="36576"/>
+          <a:bodyPr wrap="square" lIns="73152" tIns="36576" rIns="73152" bIns="36576" rtlCol="0" anchor="ctr"/>
           <a:lstStyle/>
           <a:p>
             <a:pPr algn="l"/>
@@ -5518,7 +5833,7 @@
           </a:fontRef>
         </p:style>
         <p:txBody>
-          <a:bodyPr rtlCol="0" anchor="ctr" wrap="square" lIns="73152" rIns="73152" tIns="36576" bIns="36576"/>
+          <a:bodyPr wrap="square" lIns="73152" tIns="36576" rIns="73152" bIns="36576" rtlCol="0" anchor="ctr"/>
           <a:lstStyle/>
           <a:p>
             <a:pPr algn="l"/>
@@ -5582,7 +5897,7 @@
           </a:fontRef>
         </p:style>
         <p:txBody>
-          <a:bodyPr rtlCol="0" anchor="ctr" wrap="square" lIns="73152" rIns="73152" tIns="36576" bIns="36576"/>
+          <a:bodyPr wrap="square" lIns="73152" tIns="36576" rIns="73152" bIns="36576" rtlCol="0" anchor="ctr"/>
           <a:lstStyle/>
           <a:p>
             <a:pPr algn="l"/>
@@ -5648,6 +5963,7 @@
           <a:lstStyle/>
           <a:p>
             <a:pPr algn="ctr"/>
+            <a:endParaRPr/>
           </a:p>
         </p:txBody>
       </p:sp>
@@ -5690,7 +6006,7 @@
           </a:fontRef>
         </p:style>
         <p:txBody>
-          <a:bodyPr rtlCol="0" anchor="ctr" wrap="square" lIns="73152" rIns="73152" tIns="36576" bIns="36576"/>
+          <a:bodyPr wrap="square" lIns="73152" tIns="36576" rIns="73152" bIns="36576" rtlCol="0" anchor="ctr"/>
           <a:lstStyle/>
           <a:p>
             <a:pPr algn="l"/>
@@ -5756,6 +6072,7 @@
           <a:lstStyle/>
           <a:p>
             <a:pPr algn="ctr"/>
+            <a:endParaRPr/>
           </a:p>
         </p:txBody>
       </p:sp>
@@ -5798,7 +6115,7 @@
           </a:fontRef>
         </p:style>
         <p:txBody>
-          <a:bodyPr rtlCol="0" anchor="ctr" wrap="square" lIns="73152" rIns="73152" tIns="36576" bIns="36576"/>
+          <a:bodyPr wrap="square" lIns="73152" tIns="36576" rIns="73152" bIns="36576" rtlCol="0" anchor="ctr"/>
           <a:lstStyle/>
           <a:p>
             <a:pPr algn="l"/>
@@ -5855,6 +6172,7 @@
           <a:lstStyle/>
           <a:p>
             <a:pPr algn="ctr"/>
+            <a:endParaRPr/>
           </a:p>
         </p:txBody>
       </p:sp>
@@ -5897,7 +6215,7 @@
           </a:fontRef>
         </p:style>
         <p:txBody>
-          <a:bodyPr rtlCol="0" anchor="ctr" wrap="square" lIns="73152" rIns="73152" tIns="36576" bIns="36576"/>
+          <a:bodyPr wrap="square" lIns="73152" tIns="36576" rIns="73152" bIns="36576" rtlCol="0" anchor="ctr"/>
           <a:lstStyle/>
           <a:p>
             <a:pPr algn="l"/>
@@ -5963,6 +6281,7 @@
           <a:lstStyle/>
           <a:p>
             <a:pPr algn="ctr"/>
+            <a:endParaRPr/>
           </a:p>
         </p:txBody>
       </p:sp>
@@ -6005,7 +6324,7 @@
           </a:fontRef>
         </p:style>
         <p:txBody>
-          <a:bodyPr rtlCol="0" anchor="ctr" wrap="square" lIns="73152" rIns="73152" tIns="36576" bIns="36576"/>
+          <a:bodyPr wrap="square" lIns="73152" tIns="36576" rIns="73152" bIns="36576" rtlCol="0" anchor="ctr"/>
           <a:lstStyle/>
           <a:p>
             <a:pPr algn="l"/>
@@ -6062,6 +6381,7 @@
           <a:lstStyle/>
           <a:p>
             <a:pPr algn="ctr"/>
+            <a:endParaRPr/>
           </a:p>
         </p:txBody>
       </p:sp>
@@ -6104,7 +6424,7 @@
           </a:fontRef>
         </p:style>
         <p:txBody>
-          <a:bodyPr rtlCol="0" anchor="ctr" wrap="square" lIns="73152" rIns="73152" tIns="36576" bIns="36576"/>
+          <a:bodyPr wrap="square" lIns="73152" tIns="36576" rIns="73152" bIns="36576" rtlCol="0" anchor="ctr"/>
           <a:lstStyle/>
           <a:p>
             <a:pPr algn="l"/>
@@ -6170,6 +6490,7 @@
           <a:lstStyle/>
           <a:p>
             <a:pPr algn="ctr"/>
+            <a:endParaRPr/>
           </a:p>
         </p:txBody>
       </p:sp>
@@ -6212,7 +6533,7 @@
           </a:fontRef>
         </p:style>
         <p:txBody>
-          <a:bodyPr rtlCol="0" anchor="ctr" wrap="square" lIns="73152" rIns="73152" tIns="36576" bIns="36576"/>
+          <a:bodyPr wrap="square" lIns="73152" tIns="36576" rIns="73152" bIns="36576" rtlCol="0" anchor="ctr"/>
           <a:lstStyle/>
           <a:p>
             <a:pPr algn="l"/>
@@ -6269,6 +6590,7 @@
           <a:lstStyle/>
           <a:p>
             <a:pPr algn="ctr"/>
+            <a:endParaRPr/>
           </a:p>
         </p:txBody>
       </p:sp>
@@ -6311,12 +6633,12 @@
           </a:fontRef>
         </p:style>
         <p:txBody>
-          <a:bodyPr rtlCol="0" anchor="ctr" wrap="square" lIns="73152" rIns="73152" tIns="36576" bIns="36576"/>
+          <a:bodyPr wrap="square" lIns="73152" tIns="36576" rIns="73152" bIns="36576" rtlCol="0" anchor="ctr"/>
           <a:lstStyle/>
           <a:p>
             <a:pPr algn="l"/>
             <a:r>
-              <a:rPr sz="1400" b="1">
+              <a:rPr sz="1400" b="1" dirty="0">
                 <a:solidFill>
                   <a:srgbClr val="C0392B"/>
                 </a:solidFill>
@@ -6325,14 +6647,29 @@
               <a:t>Option C</a:t>
             </a:r>
             <a:r>
-              <a:rPr sz="1400" b="0">
+              <a:rPr sz="1400" b="0" dirty="0">
                 <a:solidFill>
                   <a:srgbClr val="22303F"/>
                 </a:solidFill>
                 <a:latin typeface="Microsoft JhengHei"/>
               </a:rPr>
-              <a:t>：PXC 目標式對照</a:t>
-            </a:r>
+              <a:t>：PXC </a:t>
+            </a:r>
+            <a:r>
+              <a:rPr sz="1400" b="0" dirty="0" err="1">
+                <a:solidFill>
+                  <a:srgbClr val="22303F"/>
+                </a:solidFill>
+                <a:latin typeface="Microsoft JhengHei"/>
+              </a:rPr>
+              <a:t>目標式對照</a:t>
+            </a:r>
+            <a:endParaRPr sz="1400" b="0" dirty="0">
+              <a:solidFill>
+                <a:srgbClr val="22303F"/>
+              </a:solidFill>
+              <a:latin typeface="Microsoft JhengHei"/>
+            </a:endParaRPr>
           </a:p>
         </p:txBody>
       </p:sp>
@@ -6377,6 +6714,7 @@
           <a:lstStyle/>
           <a:p>
             <a:pPr algn="ctr"/>
+            <a:endParaRPr/>
           </a:p>
         </p:txBody>
       </p:sp>
@@ -6419,28 +6757,133 @@
           </a:fontRef>
         </p:style>
         <p:txBody>
-          <a:bodyPr rtlCol="0" anchor="ctr" wrap="square" lIns="73152" rIns="73152" tIns="36576" bIns="36576"/>
+          <a:bodyPr wrap="square" lIns="73152" tIns="36576" rIns="73152" bIns="36576" rtlCol="0" anchor="ctr"/>
           <a:lstStyle/>
           <a:p>
             <a:pPr algn="l"/>
             <a:r>
-              <a:rPr sz="1400" b="1">
+              <a:rPr sz="1400" b="1" dirty="0">
                 <a:solidFill>
                   <a:srgbClr val="C0392B"/>
                 </a:solidFill>
                 <a:latin typeface="Microsoft JhengHei"/>
               </a:rPr>
-              <a:t>Option C</a:t>
-            </a:r>
-            <a:r>
-              <a:rPr sz="1400" b="0">
+              <a:t>Option </a:t>
+            </a:r>
+            <a:r>
+              <a:rPr sz="1400" b="1" dirty="0" err="1">
+                <a:solidFill>
+                  <a:srgbClr val="C0392B"/>
+                </a:solidFill>
+                <a:latin typeface="Microsoft JhengHei"/>
+              </a:rPr>
+              <a:t>C</a:t>
+            </a:r>
+            <a:r>
+              <a:rPr sz="1400" b="0" dirty="0" err="1">
                 <a:solidFill>
                   <a:srgbClr val="22303F"/>
                 </a:solidFill>
                 <a:latin typeface="Microsoft JhengHei"/>
               </a:rPr>
-              <a:t>：依需求驗 YugabyteDB 或 CockroachDB ; 或延用現有 PostgreSQL 架構</a:t>
-            </a:r>
+              <a:t>：依需求驗</a:t>
+            </a:r>
+            <a:r>
+              <a:rPr sz="1400" b="0" dirty="0">
+                <a:solidFill>
+                  <a:srgbClr val="22303F"/>
+                </a:solidFill>
+                <a:latin typeface="Microsoft JhengHei"/>
+              </a:rPr>
+              <a:t> </a:t>
+            </a:r>
+            <a:r>
+              <a:rPr sz="1400" b="0" dirty="0" err="1">
+                <a:solidFill>
+                  <a:srgbClr val="22303F"/>
+                </a:solidFill>
+                <a:latin typeface="Microsoft JhengHei"/>
+              </a:rPr>
+              <a:t>YugabyteDB</a:t>
+            </a:r>
+            <a:r>
+              <a:rPr sz="1400" b="0" dirty="0">
+                <a:solidFill>
+                  <a:srgbClr val="22303F"/>
+                </a:solidFill>
+                <a:latin typeface="Microsoft JhengHei"/>
+              </a:rPr>
+              <a:t> </a:t>
+            </a:r>
+            <a:r>
+              <a:rPr sz="1400" b="0" dirty="0" err="1">
+                <a:solidFill>
+                  <a:srgbClr val="22303F"/>
+                </a:solidFill>
+                <a:latin typeface="Microsoft JhengHei"/>
+              </a:rPr>
+              <a:t>或</a:t>
+            </a:r>
+            <a:r>
+              <a:rPr sz="1400" b="0" dirty="0">
+                <a:solidFill>
+                  <a:srgbClr val="22303F"/>
+                </a:solidFill>
+                <a:latin typeface="Microsoft JhengHei"/>
+              </a:rPr>
+              <a:t> </a:t>
+            </a:r>
+            <a:r>
+              <a:rPr sz="1400" b="0" dirty="0" err="1">
+                <a:solidFill>
+                  <a:srgbClr val="22303F"/>
+                </a:solidFill>
+                <a:latin typeface="Microsoft JhengHei"/>
+              </a:rPr>
+              <a:t>CockroachDB</a:t>
+            </a:r>
+            <a:r>
+              <a:rPr sz="1400" b="0" dirty="0">
+                <a:solidFill>
+                  <a:srgbClr val="22303F"/>
+                </a:solidFill>
+                <a:latin typeface="Microsoft JhengHei"/>
+              </a:rPr>
+              <a:t> ; </a:t>
+            </a:r>
+            <a:r>
+              <a:rPr sz="1400" b="0" dirty="0" err="1">
+                <a:solidFill>
+                  <a:srgbClr val="22303F"/>
+                </a:solidFill>
+                <a:latin typeface="Microsoft JhengHei"/>
+              </a:rPr>
+              <a:t>或延用現有</a:t>
+            </a:r>
+            <a:r>
+              <a:rPr sz="1400" b="0" dirty="0">
+                <a:solidFill>
+                  <a:srgbClr val="22303F"/>
+                </a:solidFill>
+                <a:latin typeface="Microsoft JhengHei"/>
+              </a:rPr>
+              <a:t> PostgreSQL </a:t>
+            </a:r>
+            <a:r>
+              <a:rPr sz="1400" b="0" dirty="0" err="1">
+                <a:solidFill>
+                  <a:srgbClr val="22303F"/>
+                </a:solidFill>
+                <a:latin typeface="Microsoft JhengHei"/>
+              </a:rPr>
+              <a:t>架構</a:t>
+            </a:r>
+            <a:endParaRPr sz="1400" b="0" dirty="0">
+              <a:solidFill>
+                <a:srgbClr val="22303F"/>
+              </a:solidFill>
+              <a:latin typeface="Microsoft JhengHei"/>
+            </a:endParaRPr>
           </a:p>
         </p:txBody>
       </p:sp>
@@ -6485,6 +6928,7 @@
           <a:lstStyle/>
           <a:p>
             <a:pPr algn="ctr"/>
+            <a:endParaRPr/>
           </a:p>
         </p:txBody>
       </p:sp>
@@ -6527,12 +6971,12 @@
           </a:fontRef>
         </p:style>
         <p:txBody>
-          <a:bodyPr rtlCol="0" anchor="ctr" wrap="square" lIns="73152" rIns="73152" tIns="36576" bIns="36576"/>
+          <a:bodyPr wrap="square" lIns="73152" tIns="36576" rIns="73152" bIns="36576" rtlCol="0" anchor="ctr"/>
           <a:lstStyle/>
           <a:p>
             <a:pPr algn="l"/>
             <a:r>
-              <a:rPr sz="1300" b="0">
+              <a:rPr sz="1300" b="0" dirty="0" err="1">
                 <a:solidFill>
                   <a:srgbClr val="22303F"/>
                 </a:solidFill>
@@ -6540,6 +6984,12 @@
               </a:rPr>
               <a:t>重複申請／維運成本高</a:t>
             </a:r>
+            <a:endParaRPr sz="1300" b="0" dirty="0">
+              <a:solidFill>
+                <a:srgbClr val="22303F"/>
+              </a:solidFill>
+              <a:latin typeface="Microsoft JhengHei"/>
+            </a:endParaRPr>
           </a:p>
         </p:txBody>
       </p:sp>
@@ -6584,6 +7034,7 @@
           <a:lstStyle/>
           <a:p>
             <a:pPr algn="ctr"/>
+            <a:endParaRPr/>
           </a:p>
         </p:txBody>
       </p:sp>
@@ -6626,7 +7077,7 @@
           </a:fontRef>
         </p:style>
         <p:txBody>
-          <a:bodyPr rtlCol="0" anchor="ctr" wrap="square" lIns="73152" rIns="73152" tIns="36576" bIns="36576"/>
+          <a:bodyPr wrap="square" lIns="73152" tIns="36576" rIns="73152" bIns="36576" rtlCol="0" anchor="ctr"/>
           <a:lstStyle/>
           <a:p>
             <a:pPr algn="l"/>
@@ -6692,6 +7143,7 @@
           <a:lstStyle/>
           <a:p>
             <a:pPr algn="ctr"/>
+            <a:endParaRPr/>
           </a:p>
         </p:txBody>
       </p:sp>
@@ -6734,7 +7186,7 @@
           </a:fontRef>
         </p:style>
         <p:txBody>
-          <a:bodyPr rtlCol="0" anchor="ctr" wrap="square" lIns="73152" rIns="73152" tIns="36576" bIns="36576"/>
+          <a:bodyPr wrap="square" lIns="73152" tIns="36576" rIns="73152" bIns="36576" rtlCol="0" anchor="ctr"/>
           <a:lstStyle/>
           <a:p>
             <a:pPr algn="l"/>
@@ -6791,6 +7243,7 @@
           <a:lstStyle/>
           <a:p>
             <a:pPr algn="ctr"/>
+            <a:endParaRPr/>
           </a:p>
         </p:txBody>
       </p:sp>
@@ -6833,7 +7286,7 @@
           </a:fontRef>
         </p:style>
         <p:txBody>
-          <a:bodyPr rtlCol="0" anchor="ctr" wrap="square" lIns="73152" rIns="73152" tIns="36576" bIns="36576"/>
+          <a:bodyPr wrap="square" lIns="73152" tIns="36576" rIns="73152" bIns="36576" rtlCol="0" anchor="ctr"/>
           <a:lstStyle/>
           <a:p>
             <a:pPr algn="l"/>
@@ -6875,19 +7328,46 @@
           <a:noFill/>
         </p:spPr>
         <p:txBody>
-          <a:bodyPr wrap="square" lIns="0" rIns="0" tIns="0" bIns="0">
+          <a:bodyPr wrap="square" lIns="0" tIns="0" rIns="0" bIns="0">
             <a:spAutoFit/>
           </a:bodyPr>
           <a:lstStyle/>
           <a:p>
             <a:r>
-              <a:rPr sz="1600" b="0">
+              <a:rPr sz="1600" b="0" dirty="0" err="1">
                 <a:solidFill>
                   <a:srgbClr val="8A96A3"/>
                 </a:solidFill>
                 <a:latin typeface="Microsoft JhengHei"/>
               </a:rPr>
-              <a:t>不以已投入的 PoC 工時作為繼續理由；每個出口都須回到需求、降低無謂技術研究與可量化收益。</a:t>
+              <a:t>不以已投入的</a:t>
+            </a:r>
+            <a:r>
+              <a:rPr sz="1600" b="0" dirty="0">
+                <a:solidFill>
+                  <a:srgbClr val="8A96A3"/>
+                </a:solidFill>
+                <a:latin typeface="Microsoft JhengHei"/>
+              </a:rPr>
+              <a:t> PoC </a:t>
+            </a:r>
+            <a:r>
+              <a:rPr sz="1600" b="0" dirty="0" err="1">
+                <a:solidFill>
+                  <a:srgbClr val="8A96A3"/>
+                </a:solidFill>
+                <a:latin typeface="Microsoft JhengHei"/>
+              </a:rPr>
+              <a:t>工時作為繼續理由；每個出口都須回到需求、降低無謂技術研究與可量化收益</a:t>
+            </a:r>
+            <a:r>
+              <a:rPr sz="1600" b="0" dirty="0">
+                <a:solidFill>
+                  <a:srgbClr val="8A96A3"/>
+                </a:solidFill>
+                <a:latin typeface="Microsoft JhengHei"/>
+              </a:rPr>
+              <a:t>。</a:t>
             </a:r>
           </a:p>
         </p:txBody>
@@ -6933,6 +7413,7 @@
           <a:lstStyle/>
           <a:p>
             <a:pPr algn="ctr"/>
+            <a:endParaRPr/>
           </a:p>
         </p:txBody>
       </p:sp>
@@ -6945,7 +7426,7 @@
 </file>
 
 <file path=ppt/slides/slide14.xml><?xml version="1.0" encoding="utf-8"?>
-<p:sld xmlns:a="http://schemas.openxmlformats.org/drawingml/2006/main" xmlns:p="http://schemas.openxmlformats.org/presentationml/2006/main" xmlns:r="http://schemas.openxmlformats.org/officeDocument/2006/relationships">
+<p:sld xmlns:a="http://schemas.openxmlformats.org/drawingml/2006/main" xmlns:r="http://schemas.openxmlformats.org/officeDocument/2006/relationships" xmlns:p="http://schemas.openxmlformats.org/presentationml/2006/main">
   <p:cSld>
     <p:spTree>
       <p:nvGrpSpPr>
@@ -6953,7 +7434,14 @@
         <p:cNvGrpSpPr/>
         <p:nvPr/>
       </p:nvGrpSpPr>
-      <p:grpSpPr/>
+      <p:grpSpPr>
+        <a:xfrm>
+          <a:off x="0" y="0"/>
+          <a:ext cx="0" cy="0"/>
+          <a:chOff x="0" y="0"/>
+          <a:chExt cx="0" cy="0"/>
+        </a:xfrm>
+      </p:grpSpPr>
       <p:sp>
         <p:nvSpPr>
           <p:cNvPr id="2" name="TextBox 1"/>
@@ -6971,7 +7459,7 @@
           <a:noFill/>
         </p:spPr>
         <p:txBody>
-          <a:bodyPr wrap="square" lIns="0" rIns="0" tIns="0" bIns="0">
+          <a:bodyPr wrap="square" lIns="0" tIns="0" rIns="0" bIns="0">
             <a:spAutoFit/>
           </a:bodyPr>
           <a:lstStyle/>
@@ -7005,7 +7493,7 @@
           <a:noFill/>
         </p:spPr>
         <p:txBody>
-          <a:bodyPr wrap="square" lIns="0" rIns="0" tIns="0" bIns="0">
+          <a:bodyPr wrap="square" lIns="0" tIns="0" rIns="0" bIns="0">
             <a:spAutoFit/>
           </a:bodyPr>
           <a:lstStyle/>
@@ -7039,7 +7527,7 @@
           <a:noFill/>
         </p:spPr>
         <p:txBody>
-          <a:bodyPr wrap="square" lIns="0" rIns="0" tIns="0" bIns="0">
+          <a:bodyPr wrap="square" lIns="0" tIns="0" rIns="0" bIns="0">
             <a:spAutoFit/>
           </a:bodyPr>
           <a:lstStyle/>
@@ -7074,7 +7562,7 @@
           <a:noFill/>
         </p:spPr>
         <p:txBody>
-          <a:bodyPr wrap="square" lIns="0" rIns="0" tIns="0" bIns="0">
+          <a:bodyPr wrap="square" lIns="0" tIns="0" rIns="0" bIns="0">
             <a:spAutoFit/>
           </a:bodyPr>
           <a:lstStyle/>
@@ -7108,7 +7596,7 @@
           <a:noFill/>
         </p:spPr>
         <p:txBody>
-          <a:bodyPr wrap="square" lIns="0" rIns="0" tIns="0" bIns="0">
+          <a:bodyPr wrap="square" lIns="0" tIns="0" rIns="0" bIns="0">
             <a:spAutoFit/>
           </a:bodyPr>
           <a:lstStyle/>
@@ -7119,7 +7607,7 @@
               </a:spcAft>
             </a:pPr>
             <a:r>
-              <a:rPr sz="1900">
+              <a:rPr sz="1900" dirty="0">
                 <a:solidFill>
                   <a:srgbClr val="8A96A3"/>
                 </a:solidFill>
@@ -7128,22 +7616,67 @@
               <a:t>1. </a:t>
             </a:r>
             <a:r>
-              <a:rPr sz="1900" b="1">
+              <a:rPr sz="1900" b="1" dirty="0" err="1">
                 <a:solidFill>
                   <a:srgbClr val="C0392B"/>
                 </a:solidFill>
                 <a:latin typeface="Microsoft JhengHei"/>
               </a:rPr>
-              <a:t>是否採 Option B</a:t>
-            </a:r>
-            <a:r>
-              <a:rPr sz="1900" b="0">
+              <a:t>是否採</a:t>
+            </a:r>
+            <a:r>
+              <a:rPr sz="1900" b="1" dirty="0">
+                <a:solidFill>
+                  <a:srgbClr val="C0392B"/>
+                </a:solidFill>
+                <a:latin typeface="Microsoft JhengHei"/>
+              </a:rPr>
+              <a:t> Option </a:t>
+            </a:r>
+            <a:r>
+              <a:rPr sz="1900" b="1" dirty="0" err="1">
+                <a:solidFill>
+                  <a:srgbClr val="C0392B"/>
+                </a:solidFill>
+                <a:latin typeface="Microsoft JhengHei"/>
+              </a:rPr>
+              <a:t>B</a:t>
+            </a:r>
+            <a:r>
+              <a:rPr sz="1900" b="0" dirty="0" err="1">
                 <a:solidFill>
                   <a:srgbClr val="22303F"/>
                 </a:solidFill>
                 <a:latin typeface="Microsoft JhengHei"/>
               </a:rPr>
-              <a:t>：TiDB 快速驗證＋代表性應用 Pilot。</a:t>
+              <a:t>：TiDB</a:t>
+            </a:r>
+            <a:r>
+              <a:rPr sz="1900" b="0" dirty="0">
+                <a:solidFill>
+                  <a:srgbClr val="22303F"/>
+                </a:solidFill>
+                <a:latin typeface="Microsoft JhengHei"/>
+              </a:rPr>
+              <a:t> </a:t>
+            </a:r>
+            <a:r>
+              <a:rPr sz="1900" b="0" dirty="0" err="1">
+                <a:solidFill>
+                  <a:srgbClr val="22303F"/>
+                </a:solidFill>
+                <a:latin typeface="Microsoft JhengHei"/>
+              </a:rPr>
+              <a:t>快速驗證＋代表性應用</a:t>
+            </a:r>
+            <a:r>
+              <a:rPr sz="1900" b="0" dirty="0">
+                <a:solidFill>
+                  <a:srgbClr val="22303F"/>
+                </a:solidFill>
+                <a:latin typeface="Microsoft JhengHei"/>
+              </a:rPr>
+              <a:t> Pilot。</a:t>
             </a:r>
           </a:p>
           <a:p>
@@ -7153,7 +7686,7 @@
               </a:spcAft>
             </a:pPr>
             <a:r>
-              <a:rPr sz="1900">
+              <a:rPr sz="1900" dirty="0">
                 <a:solidFill>
                   <a:srgbClr val="8A96A3"/>
                 </a:solidFill>
@@ -7162,22 +7695,103 @@
               <a:t>2. </a:t>
             </a:r>
             <a:r>
-              <a:rPr sz="1900" b="1">
+              <a:rPr sz="1900" b="1" dirty="0" err="1">
                 <a:solidFill>
                   <a:srgbClr val="C0392B"/>
                 </a:solidFill>
                 <a:latin typeface="Microsoft JhengHei"/>
               </a:rPr>
-              <a:t>由 TSD 指派應用 owner</a:t>
-            </a:r>
-            <a:r>
-              <a:rPr sz="1900" b="0">
+              <a:t>由</a:t>
+            </a:r>
+            <a:r>
+              <a:rPr sz="1900" b="1" dirty="0">
+                <a:solidFill>
+                  <a:srgbClr val="C0392B"/>
+                </a:solidFill>
+                <a:latin typeface="Microsoft JhengHei"/>
+              </a:rPr>
+              <a:t> TSD </a:t>
+            </a:r>
+            <a:r>
+              <a:rPr sz="1900" b="1" dirty="0" err="1">
+                <a:solidFill>
+                  <a:srgbClr val="C0392B"/>
+                </a:solidFill>
+                <a:latin typeface="Microsoft JhengHei"/>
+              </a:rPr>
+              <a:t>指派應用</a:t>
+            </a:r>
+            <a:r>
+              <a:rPr sz="1900" b="1" dirty="0">
+                <a:solidFill>
+                  <a:srgbClr val="C0392B"/>
+                </a:solidFill>
+                <a:latin typeface="Microsoft JhengHei"/>
+              </a:rPr>
+              <a:t> </a:t>
+            </a:r>
+            <a:r>
+              <a:rPr sz="1900" b="1" dirty="0" err="1">
+                <a:solidFill>
+                  <a:srgbClr val="C0392B"/>
+                </a:solidFill>
+                <a:latin typeface="Microsoft JhengHei"/>
+              </a:rPr>
+              <a:t>owner</a:t>
+            </a:r>
+            <a:r>
+              <a:rPr sz="1900" b="0" dirty="0" err="1">
                 <a:solidFill>
                   <a:srgbClr val="22303F"/>
                 </a:solidFill>
                 <a:latin typeface="Microsoft JhengHei"/>
               </a:rPr>
-              <a:t>，提供真實 SQL／ORM／Driver／Transaction 與改造限制。</a:t>
+              <a:t>，提供真實</a:t>
+            </a:r>
+            <a:r>
+              <a:rPr sz="1900" b="0" dirty="0">
+                <a:solidFill>
+                  <a:srgbClr val="22303F"/>
+                </a:solidFill>
+                <a:latin typeface="Microsoft JhengHei"/>
+              </a:rPr>
+              <a:t> </a:t>
+            </a:r>
+            <a:r>
+              <a:rPr sz="1900" b="0" dirty="0" err="1">
+                <a:solidFill>
+                  <a:srgbClr val="22303F"/>
+                </a:solidFill>
+                <a:latin typeface="Microsoft JhengHei"/>
+              </a:rPr>
+              <a:t>SQL／ORM／Driver／Transaction</a:t>
+            </a:r>
+            <a:r>
+              <a:rPr sz="1900" b="0" dirty="0">
+                <a:solidFill>
+                  <a:srgbClr val="22303F"/>
+                </a:solidFill>
+                <a:latin typeface="Microsoft JhengHei"/>
+              </a:rPr>
+              <a:t> </a:t>
+            </a:r>
+            <a:r>
+              <a:rPr sz="1900" b="0" dirty="0" err="1">
+                <a:solidFill>
+                  <a:srgbClr val="22303F"/>
+                </a:solidFill>
+                <a:latin typeface="Microsoft JhengHei"/>
+              </a:rPr>
+              <a:t>與改造限制</a:t>
+            </a:r>
+            <a:r>
+              <a:rPr sz="1900" b="0" dirty="0">
+                <a:solidFill>
+                  <a:srgbClr val="22303F"/>
+                </a:solidFill>
+                <a:latin typeface="Microsoft JhengHei"/>
+              </a:rPr>
+              <a:t>。</a:t>
             </a:r>
           </a:p>
           <a:p>
@@ -7187,7 +7801,7 @@
               </a:spcAft>
             </a:pPr>
             <a:r>
-              <a:rPr sz="1900">
+              <a:rPr sz="1900" dirty="0">
                 <a:solidFill>
                   <a:srgbClr val="8A96A3"/>
                 </a:solidFill>
@@ -7196,22 +7810,85 @@
               <a:t>3. </a:t>
             </a:r>
             <a:r>
-              <a:rPr sz="1900" b="1">
+              <a:rPr sz="1900" b="1" dirty="0" err="1">
                 <a:solidFill>
                   <a:srgbClr val="C0392B"/>
                 </a:solidFill>
                 <a:latin typeface="Microsoft JhengHei"/>
               </a:rPr>
-              <a:t>確認 Pilot 情境</a:t>
-            </a:r>
-            <a:r>
-              <a:rPr sz="1900" b="0">
+              <a:t>確認</a:t>
+            </a:r>
+            <a:r>
+              <a:rPr sz="1900" b="1" dirty="0">
+                <a:solidFill>
+                  <a:srgbClr val="C0392B"/>
+                </a:solidFill>
+                <a:latin typeface="Microsoft JhengHei"/>
+              </a:rPr>
+              <a:t> Pilot </a:t>
+            </a:r>
+            <a:r>
+              <a:rPr sz="1900" b="1" dirty="0" err="1">
+                <a:solidFill>
+                  <a:srgbClr val="C0392B"/>
+                </a:solidFill>
+                <a:latin typeface="Microsoft JhengHei"/>
+              </a:rPr>
+              <a:t>情境</a:t>
+            </a:r>
+            <a:r>
+              <a:rPr sz="1900" b="0" dirty="0" err="1">
                 <a:solidFill>
                   <a:srgbClr val="22303F"/>
                 </a:solidFill>
                 <a:latin typeface="Microsoft JhengHei"/>
               </a:rPr>
-              <a:t>：一般 MySQL 應用、可移至 EDC 的定期批次，或故障影響範圍較明確的服務。</a:t>
+              <a:t>：一般</a:t>
+            </a:r>
+            <a:r>
+              <a:rPr sz="1900" b="0" dirty="0">
+                <a:solidFill>
+                  <a:srgbClr val="22303F"/>
+                </a:solidFill>
+                <a:latin typeface="Microsoft JhengHei"/>
+              </a:rPr>
+              <a:t> MySQL </a:t>
+            </a:r>
+            <a:r>
+              <a:rPr sz="1900" b="0" dirty="0" err="1">
+                <a:solidFill>
+                  <a:srgbClr val="22303F"/>
+                </a:solidFill>
+                <a:latin typeface="Microsoft JhengHei"/>
+              </a:rPr>
+              <a:t>應用、可移至</a:t>
+            </a:r>
+            <a:r>
+              <a:rPr sz="1900" b="0" dirty="0">
+                <a:solidFill>
+                  <a:srgbClr val="22303F"/>
+                </a:solidFill>
+                <a:latin typeface="Microsoft JhengHei"/>
+              </a:rPr>
+              <a:t> EDC </a:t>
+            </a:r>
+            <a:r>
+              <a:rPr sz="1900" b="0" dirty="0" err="1">
+                <a:solidFill>
+                  <a:srgbClr val="22303F"/>
+                </a:solidFill>
+                <a:latin typeface="Microsoft JhengHei"/>
+              </a:rPr>
+              <a:t>的定期批次，或故障影響範圍較明確的服務</a:t>
+            </a:r>
+            <a:r>
+              <a:rPr sz="1900" b="0" dirty="0">
+                <a:solidFill>
+                  <a:srgbClr val="22303F"/>
+                </a:solidFill>
+                <a:latin typeface="Microsoft JhengHei"/>
+              </a:rPr>
+              <a:t>。</a:t>
             </a:r>
           </a:p>
           <a:p>
@@ -7221,7 +7898,7 @@
               </a:spcAft>
             </a:pPr>
             <a:r>
-              <a:rPr sz="1900">
+              <a:rPr sz="1900" dirty="0">
                 <a:solidFill>
                   <a:srgbClr val="8A96A3"/>
                 </a:solidFill>
@@ -7230,7 +7907,7 @@
               <a:t>4. </a:t>
             </a:r>
             <a:r>
-              <a:rPr sz="1900" b="1">
+              <a:rPr sz="1900" b="1" dirty="0" err="1">
                 <a:solidFill>
                   <a:srgbClr val="C0392B"/>
                 </a:solidFill>
@@ -7239,13 +7916,22 @@
               <a:t>定義服務驗收</a:t>
             </a:r>
             <a:r>
-              <a:rPr sz="1900" b="0">
+              <a:rPr sz="1900" b="0" dirty="0" err="1">
                 <a:solidFill>
                   <a:srgbClr val="22303F"/>
                 </a:solidFill>
                 <a:latin typeface="Microsoft JhengHei"/>
               </a:rPr>
-              <a:t>：一致性優先條件、可接受中斷、資料延遲、降級與回復方式。</a:t>
+              <a:t>：一致性優先條件、可接受中斷、資料延遲、降級與回復方式</a:t>
+            </a:r>
+            <a:r>
+              <a:rPr sz="1900" b="0" dirty="0">
+                <a:solidFill>
+                  <a:srgbClr val="22303F"/>
+                </a:solidFill>
+                <a:latin typeface="Microsoft JhengHei"/>
+              </a:rPr>
+              <a:t>。</a:t>
             </a:r>
           </a:p>
           <a:p>
@@ -7255,7 +7941,7 @@
               </a:spcAft>
             </a:pPr>
             <a:r>
-              <a:rPr sz="1900">
+              <a:rPr sz="1900" dirty="0">
                 <a:solidFill>
                   <a:srgbClr val="8A96A3"/>
                 </a:solidFill>
@@ -7264,7 +7950,7 @@
               <a:t>5. </a:t>
             </a:r>
             <a:r>
-              <a:rPr sz="1900" b="1">
+              <a:rPr sz="1900" b="1" dirty="0" err="1">
                 <a:solidFill>
                   <a:srgbClr val="C0392B"/>
                 </a:solidFill>
@@ -7273,13 +7959,22 @@
               <a:t>啟動原廠正式詢價與成本資料蒐集</a:t>
             </a:r>
             <a:r>
-              <a:rPr sz="1900" b="0">
+              <a:rPr sz="1900" b="0" dirty="0" err="1">
                 <a:solidFill>
                   <a:srgbClr val="22303F"/>
                 </a:solidFill>
                 <a:latin typeface="Microsoft JhengHei"/>
               </a:rPr>
-              <a:t>：支援、授權、維運人力及基礎設施。</a:t>
+              <a:t>：支援、授權、維運人力及基礎設施</a:t>
+            </a:r>
+            <a:r>
+              <a:rPr sz="1900" b="0" dirty="0">
+                <a:solidFill>
+                  <a:srgbClr val="22303F"/>
+                </a:solidFill>
+                <a:latin typeface="Microsoft JhengHei"/>
+              </a:rPr>
+              <a:t>。</a:t>
             </a:r>
           </a:p>
         </p:txBody>
@@ -7301,7 +7996,7 @@
           <a:noFill/>
         </p:spPr>
         <p:txBody>
-          <a:bodyPr wrap="square" lIns="0" rIns="0" tIns="0" bIns="0">
+          <a:bodyPr wrap="square" lIns="0" tIns="0" rIns="0" bIns="0">
             <a:spAutoFit/>
           </a:bodyPr>
           <a:lstStyle/>
@@ -7359,6 +8054,7 @@
           <a:lstStyle/>
           <a:p>
             <a:pPr algn="ctr"/>
+            <a:endParaRPr/>
           </a:p>
         </p:txBody>
       </p:sp>
@@ -7371,7 +8067,7 @@
 </file>
 
 <file path=ppt/slides/slide15.xml><?xml version="1.0" encoding="utf-8"?>
-<p:sld xmlns:a="http://schemas.openxmlformats.org/drawingml/2006/main" xmlns:p="http://schemas.openxmlformats.org/presentationml/2006/main" xmlns:r="http://schemas.openxmlformats.org/officeDocument/2006/relationships">
+<p:sld xmlns:a="http://schemas.openxmlformats.org/drawingml/2006/main" xmlns:r="http://schemas.openxmlformats.org/officeDocument/2006/relationships" xmlns:p="http://schemas.openxmlformats.org/presentationml/2006/main">
   <p:cSld>
     <p:spTree>
       <p:nvGrpSpPr>
@@ -7379,7 +8075,14 @@
         <p:cNvGrpSpPr/>
         <p:nvPr/>
       </p:nvGrpSpPr>
-      <p:grpSpPr/>
+      <p:grpSpPr>
+        <a:xfrm>
+          <a:off x="0" y="0"/>
+          <a:ext cx="0" cy="0"/>
+          <a:chOff x="0" y="0"/>
+          <a:chExt cx="0" cy="0"/>
+        </a:xfrm>
+      </p:grpSpPr>
       <p:sp>
         <p:nvSpPr>
           <p:cNvPr id="2" name="TextBox 1"/>
@@ -7397,7 +8100,7 @@
           <a:noFill/>
         </p:spPr>
         <p:txBody>
-          <a:bodyPr wrap="square" lIns="0" rIns="0" tIns="0" bIns="0">
+          <a:bodyPr wrap="square" lIns="0" tIns="0" rIns="0" bIns="0">
             <a:spAutoFit/>
           </a:bodyPr>
           <a:lstStyle/>
@@ -7431,7 +8134,7 @@
           <a:noFill/>
         </p:spPr>
         <p:txBody>
-          <a:bodyPr wrap="square" lIns="0" rIns="0" tIns="0" bIns="0">
+          <a:bodyPr wrap="square" lIns="0" tIns="0" rIns="0" bIns="0">
             <a:spAutoFit/>
           </a:bodyPr>
           <a:lstStyle/>
@@ -7465,7 +8168,7 @@
           <a:noFill/>
         </p:spPr>
         <p:txBody>
-          <a:bodyPr wrap="square" lIns="0" rIns="0" tIns="0" bIns="0">
+          <a:bodyPr wrap="square" lIns="0" tIns="0" rIns="0" bIns="0">
             <a:spAutoFit/>
           </a:bodyPr>
           <a:lstStyle/>
@@ -7500,7 +8203,7 @@
           <a:noFill/>
         </p:spPr>
         <p:txBody>
-          <a:bodyPr wrap="square" lIns="0" rIns="0" tIns="0" bIns="0">
+          <a:bodyPr wrap="square" lIns="0" tIns="0" rIns="0" bIns="0">
             <a:spAutoFit/>
           </a:bodyPr>
           <a:lstStyle/>
@@ -7527,7 +8230,7 @@
 </file>
 
 <file path=ppt/slides/slide16.xml><?xml version="1.0" encoding="utf-8"?>
-<p:sld xmlns:a="http://schemas.openxmlformats.org/drawingml/2006/main" xmlns:p="http://schemas.openxmlformats.org/presentationml/2006/main" xmlns:r="http://schemas.openxmlformats.org/officeDocument/2006/relationships">
+<p:sld xmlns:a="http://schemas.openxmlformats.org/drawingml/2006/main" xmlns:r="http://schemas.openxmlformats.org/officeDocument/2006/relationships" xmlns:p="http://schemas.openxmlformats.org/presentationml/2006/main">
   <p:cSld>
     <p:spTree>
       <p:nvGrpSpPr>
@@ -7535,7 +8238,14 @@
         <p:cNvGrpSpPr/>
         <p:nvPr/>
       </p:nvGrpSpPr>
-      <p:grpSpPr/>
+      <p:grpSpPr>
+        <a:xfrm>
+          <a:off x="0" y="0"/>
+          <a:ext cx="0" cy="0"/>
+          <a:chOff x="0" y="0"/>
+          <a:chExt cx="0" cy="0"/>
+        </a:xfrm>
+      </p:grpSpPr>
       <p:sp>
         <p:nvSpPr>
           <p:cNvPr id="2" name="TextBox 1"/>
@@ -7553,7 +8263,7 @@
           <a:noFill/>
         </p:spPr>
         <p:txBody>
-          <a:bodyPr wrap="square" lIns="0" rIns="0" tIns="0" bIns="0">
+          <a:bodyPr wrap="square" lIns="0" tIns="0" rIns="0" bIns="0">
             <a:spAutoFit/>
           </a:bodyPr>
           <a:lstStyle/>
@@ -7587,7 +8297,7 @@
           <a:noFill/>
         </p:spPr>
         <p:txBody>
-          <a:bodyPr wrap="square" lIns="0" rIns="0" tIns="0" bIns="0">
+          <a:bodyPr wrap="square" lIns="0" tIns="0" rIns="0" bIns="0">
             <a:spAutoFit/>
           </a:bodyPr>
           <a:lstStyle/>
@@ -7621,7 +8331,7 @@
           <a:noFill/>
         </p:spPr>
         <p:txBody>
-          <a:bodyPr wrap="square" lIns="0" rIns="0" tIns="0" bIns="0">
+          <a:bodyPr wrap="square" lIns="0" tIns="0" rIns="0" bIns="0">
             <a:spAutoFit/>
           </a:bodyPr>
           <a:lstStyle/>
@@ -7656,7 +8366,7 @@
           <a:noFill/>
         </p:spPr>
         <p:txBody>
-          <a:bodyPr wrap="square" lIns="0" rIns="0" tIns="0" bIns="0">
+          <a:bodyPr wrap="square" lIns="0" tIns="0" rIns="0" bIns="0">
             <a:spAutoFit/>
           </a:bodyPr>
           <a:lstStyle/>
@@ -7692,14 +8402,32 @@
                 <a:tableStyleId>{5C22544A-7EE6-4342-B048-85BDC9FD1C3A}</a:tableStyleId>
               </a:tblPr>
               <a:tblGrid>
-                <a:gridCol w="1888311"/>
-                <a:gridCol w="6971796"/>
-                <a:gridCol w="2197732"/>
+                <a:gridCol w="1888311">
+                  <a:extLst>
+                    <a:ext uri="{9D8B030D-6E8A-4147-A177-3AD203B41FA5}">
+                      <a16:colId xmlns:a16="http://schemas.microsoft.com/office/drawing/2014/main" val="20000"/>
+                    </a:ext>
+                  </a:extLst>
+                </a:gridCol>
+                <a:gridCol w="6971796">
+                  <a:extLst>
+                    <a:ext uri="{9D8B030D-6E8A-4147-A177-3AD203B41FA5}">
+                      <a16:colId xmlns:a16="http://schemas.microsoft.com/office/drawing/2014/main" val="20001"/>
+                    </a:ext>
+                  </a:extLst>
+                </a:gridCol>
+                <a:gridCol w="2197732">
+                  <a:extLst>
+                    <a:ext uri="{9D8B030D-6E8A-4147-A177-3AD203B41FA5}">
+                      <a16:colId xmlns:a16="http://schemas.microsoft.com/office/drawing/2014/main" val="20002"/>
+                    </a:ext>
+                  </a:extLst>
+                </a:gridCol>
               </a:tblGrid>
               <a:tr h="310896">
                 <a:tc>
                   <a:txBody>
-                    <a:bodyPr wrap="square"/>
+                    <a:bodyPr/>
                     <a:lstStyle/>
                     <a:p>
                       <a:pPr algn="ctr"/>
@@ -7722,7 +8450,7 @@
                 </a:tc>
                 <a:tc>
                   <a:txBody>
-                    <a:bodyPr wrap="square"/>
+                    <a:bodyPr/>
                     <a:lstStyle/>
                     <a:p>
                       <a:pPr algn="ctr"/>
@@ -7745,7 +8473,7 @@
                 </a:tc>
                 <a:tc>
                   <a:txBody>
-                    <a:bodyPr wrap="square"/>
+                    <a:bodyPr/>
                     <a:lstStyle/>
                     <a:p>
                       <a:pPr algn="ctr"/>
@@ -7766,11 +8494,16 @@
                     </a:solidFill>
                   </a:tcPr>
                 </a:tc>
+                <a:extLst>
+                  <a:ext uri="{0D108BD9-81ED-4DB2-BD59-A6C34878D82A}">
+                    <a16:rowId xmlns:a16="http://schemas.microsoft.com/office/drawing/2014/main" val="10000"/>
+                  </a:ext>
+                </a:extLst>
               </a:tr>
               <a:tr h="310896">
                 <a:tc>
                   <a:txBody>
-                    <a:bodyPr wrap="square"/>
+                    <a:bodyPr/>
                     <a:lstStyle/>
                     <a:p>
                       <a:pPr algn="ctr"/>
@@ -7793,7 +8526,7 @@
                 </a:tc>
                 <a:tc>
                   <a:txBody>
-                    <a:bodyPr wrap="square"/>
+                    <a:bodyPr/>
                     <a:lstStyle/>
                     <a:p>
                       <a:pPr algn="l"/>
@@ -7816,7 +8549,7 @@
                 </a:tc>
                 <a:tc>
                   <a:txBody>
-                    <a:bodyPr wrap="square"/>
+                    <a:bodyPr/>
                     <a:lstStyle/>
                     <a:p>
                       <a:pPr algn="ctr"/>
@@ -7837,11 +8570,16 @@
                     </a:solidFill>
                   </a:tcPr>
                 </a:tc>
+                <a:extLst>
+                  <a:ext uri="{0D108BD9-81ED-4DB2-BD59-A6C34878D82A}">
+                    <a16:rowId xmlns:a16="http://schemas.microsoft.com/office/drawing/2014/main" val="10001"/>
+                  </a:ext>
+                </a:extLst>
               </a:tr>
               <a:tr h="310896">
                 <a:tc>
                   <a:txBody>
-                    <a:bodyPr wrap="square"/>
+                    <a:bodyPr/>
                     <a:lstStyle/>
                     <a:p>
                       <a:pPr algn="ctr"/>
@@ -7864,7 +8602,7 @@
                 </a:tc>
                 <a:tc>
                   <a:txBody>
-                    <a:bodyPr wrap="square"/>
+                    <a:bodyPr/>
                     <a:lstStyle/>
                     <a:p>
                       <a:pPr algn="l"/>
@@ -7887,7 +8625,7 @@
                 </a:tc>
                 <a:tc>
                   <a:txBody>
-                    <a:bodyPr wrap="square"/>
+                    <a:bodyPr/>
                     <a:lstStyle/>
                     <a:p>
                       <a:pPr algn="ctr"/>
@@ -7908,11 +8646,16 @@
                     </a:solidFill>
                   </a:tcPr>
                 </a:tc>
+                <a:extLst>
+                  <a:ext uri="{0D108BD9-81ED-4DB2-BD59-A6C34878D82A}">
+                    <a16:rowId xmlns:a16="http://schemas.microsoft.com/office/drawing/2014/main" val="10002"/>
+                  </a:ext>
+                </a:extLst>
               </a:tr>
               <a:tr h="310896">
                 <a:tc>
                   <a:txBody>
-                    <a:bodyPr wrap="square"/>
+                    <a:bodyPr/>
                     <a:lstStyle/>
                     <a:p>
                       <a:pPr algn="ctr"/>
@@ -7935,7 +8678,7 @@
                 </a:tc>
                 <a:tc>
                   <a:txBody>
-                    <a:bodyPr wrap="square"/>
+                    <a:bodyPr/>
                     <a:lstStyle/>
                     <a:p>
                       <a:pPr algn="l"/>
@@ -7958,7 +8701,7 @@
                 </a:tc>
                 <a:tc>
                   <a:txBody>
-                    <a:bodyPr wrap="square"/>
+                    <a:bodyPr/>
                     <a:lstStyle/>
                     <a:p>
                       <a:pPr algn="ctr"/>
@@ -7979,11 +8722,16 @@
                     </a:solidFill>
                   </a:tcPr>
                 </a:tc>
+                <a:extLst>
+                  <a:ext uri="{0D108BD9-81ED-4DB2-BD59-A6C34878D82A}">
+                    <a16:rowId xmlns:a16="http://schemas.microsoft.com/office/drawing/2014/main" val="10003"/>
+                  </a:ext>
+                </a:extLst>
               </a:tr>
               <a:tr h="310896">
                 <a:tc>
                   <a:txBody>
-                    <a:bodyPr wrap="square"/>
+                    <a:bodyPr/>
                     <a:lstStyle/>
                     <a:p>
                       <a:pPr algn="ctr"/>
@@ -8006,7 +8754,7 @@
                 </a:tc>
                 <a:tc>
                   <a:txBody>
-                    <a:bodyPr wrap="square"/>
+                    <a:bodyPr/>
                     <a:lstStyle/>
                     <a:p>
                       <a:pPr algn="l"/>
@@ -8029,7 +8777,7 @@
                 </a:tc>
                 <a:tc>
                   <a:txBody>
-                    <a:bodyPr wrap="square"/>
+                    <a:bodyPr/>
                     <a:lstStyle/>
                     <a:p>
                       <a:pPr algn="ctr"/>
@@ -8050,11 +8798,16 @@
                     </a:solidFill>
                   </a:tcPr>
                 </a:tc>
+                <a:extLst>
+                  <a:ext uri="{0D108BD9-81ED-4DB2-BD59-A6C34878D82A}">
+                    <a16:rowId xmlns:a16="http://schemas.microsoft.com/office/drawing/2014/main" val="10004"/>
+                  </a:ext>
+                </a:extLst>
               </a:tr>
               <a:tr h="310896">
                 <a:tc>
                   <a:txBody>
-                    <a:bodyPr wrap="square"/>
+                    <a:bodyPr/>
                     <a:lstStyle/>
                     <a:p>
                       <a:pPr algn="ctr"/>
@@ -8077,7 +8830,7 @@
                 </a:tc>
                 <a:tc>
                   <a:txBody>
-                    <a:bodyPr wrap="square"/>
+                    <a:bodyPr/>
                     <a:lstStyle/>
                     <a:p>
                       <a:pPr algn="l"/>
@@ -8100,7 +8853,7 @@
                 </a:tc>
                 <a:tc>
                   <a:txBody>
-                    <a:bodyPr wrap="square"/>
+                    <a:bodyPr/>
                     <a:lstStyle/>
                     <a:p>
                       <a:pPr algn="ctr"/>
@@ -8121,6 +8874,11 @@
                     </a:solidFill>
                   </a:tcPr>
                 </a:tc>
+                <a:extLst>
+                  <a:ext uri="{0D108BD9-81ED-4DB2-BD59-A6C34878D82A}">
+                    <a16:rowId xmlns:a16="http://schemas.microsoft.com/office/drawing/2014/main" val="10005"/>
+                  </a:ext>
+                </a:extLst>
               </a:tr>
             </a:tbl>
           </a:graphicData>
@@ -8143,7 +8901,7 @@
           <a:noFill/>
         </p:spPr>
         <p:txBody>
-          <a:bodyPr wrap="square" lIns="0" rIns="0" tIns="0" bIns="0">
+          <a:bodyPr wrap="square" lIns="0" tIns="0" rIns="0" bIns="0">
             <a:spAutoFit/>
           </a:bodyPr>
           <a:lstStyle/>
@@ -8177,7 +8935,7 @@
           <a:noFill/>
         </p:spPr>
         <p:txBody>
-          <a:bodyPr wrap="square" lIns="0" rIns="0" tIns="0" bIns="0">
+          <a:bodyPr wrap="square" lIns="0" tIns="0" rIns="0" bIns="0">
             <a:spAutoFit/>
           </a:bodyPr>
           <a:lstStyle/>
@@ -8254,6 +9012,7 @@
           <a:lstStyle/>
           <a:p>
             <a:pPr algn="ctr"/>
+            <a:endParaRPr/>
           </a:p>
         </p:txBody>
       </p:sp>
@@ -8274,7 +9033,7 @@
           <a:noFill/>
         </p:spPr>
         <p:txBody>
-          <a:bodyPr wrap="square" lIns="0" rIns="0" tIns="0" bIns="0">
+          <a:bodyPr wrap="square" lIns="0" tIns="0" rIns="0" bIns="0">
             <a:spAutoFit/>
           </a:bodyPr>
           <a:lstStyle/>
@@ -8317,7 +9076,7 @@
           <a:noFill/>
         </p:spPr>
         <p:txBody>
-          <a:bodyPr wrap="square" lIns="0" rIns="0" tIns="0" bIns="0">
+          <a:bodyPr wrap="square" lIns="0" tIns="0" rIns="0" bIns="0">
             <a:spAutoFit/>
           </a:bodyPr>
           <a:lstStyle/>
@@ -8394,6 +9153,7 @@
           <a:lstStyle/>
           <a:p>
             <a:pPr algn="ctr"/>
+            <a:endParaRPr/>
           </a:p>
         </p:txBody>
       </p:sp>
@@ -8406,7 +9166,7 @@
 </file>
 
 <file path=ppt/slides/slide17.xml><?xml version="1.0" encoding="utf-8"?>
-<p:sld xmlns:a="http://schemas.openxmlformats.org/drawingml/2006/main" xmlns:p="http://schemas.openxmlformats.org/presentationml/2006/main" xmlns:r="http://schemas.openxmlformats.org/officeDocument/2006/relationships">
+<p:sld xmlns:a="http://schemas.openxmlformats.org/drawingml/2006/main" xmlns:r="http://schemas.openxmlformats.org/officeDocument/2006/relationships" xmlns:p="http://schemas.openxmlformats.org/presentationml/2006/main">
   <p:cSld>
     <p:spTree>
       <p:nvGrpSpPr>
@@ -8414,7 +9174,14 @@
         <p:cNvGrpSpPr/>
         <p:nvPr/>
       </p:nvGrpSpPr>
-      <p:grpSpPr/>
+      <p:grpSpPr>
+        <a:xfrm>
+          <a:off x="0" y="0"/>
+          <a:ext cx="0" cy="0"/>
+          <a:chOff x="0" y="0"/>
+          <a:chExt cx="0" cy="0"/>
+        </a:xfrm>
+      </p:grpSpPr>
       <p:sp>
         <p:nvSpPr>
           <p:cNvPr id="2" name="TextBox 1"/>
@@ -8432,7 +9199,7 @@
           <a:noFill/>
         </p:spPr>
         <p:txBody>
-          <a:bodyPr wrap="square" lIns="0" rIns="0" tIns="0" bIns="0">
+          <a:bodyPr wrap="square" lIns="0" tIns="0" rIns="0" bIns="0">
             <a:spAutoFit/>
           </a:bodyPr>
           <a:lstStyle/>
@@ -8466,7 +9233,7 @@
           <a:noFill/>
         </p:spPr>
         <p:txBody>
-          <a:bodyPr wrap="square" lIns="0" rIns="0" tIns="0" bIns="0">
+          <a:bodyPr wrap="square" lIns="0" tIns="0" rIns="0" bIns="0">
             <a:spAutoFit/>
           </a:bodyPr>
           <a:lstStyle/>
@@ -8500,7 +9267,7 @@
           <a:noFill/>
         </p:spPr>
         <p:txBody>
-          <a:bodyPr wrap="square" lIns="0" rIns="0" tIns="0" bIns="0">
+          <a:bodyPr wrap="square" lIns="0" tIns="0" rIns="0" bIns="0">
             <a:spAutoFit/>
           </a:bodyPr>
           <a:lstStyle/>
@@ -8535,7 +9302,7 @@
           <a:noFill/>
         </p:spPr>
         <p:txBody>
-          <a:bodyPr wrap="square" lIns="0" rIns="0" tIns="0" bIns="0">
+          <a:bodyPr wrap="square" lIns="0" tIns="0" rIns="0" bIns="0">
             <a:spAutoFit/>
           </a:bodyPr>
           <a:lstStyle/>
@@ -8569,7 +9336,7 @@
           <a:noFill/>
         </p:spPr>
         <p:txBody>
-          <a:bodyPr wrap="square" lIns="0" rIns="0" tIns="0" bIns="0">
+          <a:bodyPr wrap="square" lIns="0" tIns="0" rIns="0" bIns="0">
             <a:spAutoFit/>
           </a:bodyPr>
           <a:lstStyle/>
@@ -8612,7 +9379,7 @@
           <a:noFill/>
         </p:spPr>
         <p:txBody>
-          <a:bodyPr wrap="square" lIns="0" rIns="0" tIns="0" bIns="0">
+          <a:bodyPr wrap="square" lIns="0" tIns="0" rIns="0" bIns="0">
             <a:spAutoFit/>
           </a:bodyPr>
           <a:lstStyle/>
@@ -8851,7 +9618,7 @@
           <a:noFill/>
         </p:spPr>
         <p:txBody>
-          <a:bodyPr wrap="square" lIns="0" rIns="0" tIns="0" bIns="0">
+          <a:bodyPr wrap="square" lIns="0" tIns="0" rIns="0" bIns="0">
             <a:spAutoFit/>
           </a:bodyPr>
           <a:lstStyle/>
@@ -8885,7 +9652,7 @@
           <a:noFill/>
         </p:spPr>
         <p:txBody>
-          <a:bodyPr wrap="square" lIns="0" rIns="0" tIns="0" bIns="0">
+          <a:bodyPr wrap="square" lIns="0" tIns="0" rIns="0" bIns="0">
             <a:spAutoFit/>
           </a:bodyPr>
           <a:lstStyle/>
@@ -9004,7 +9771,7 @@
 </file>
 
 <file path=ppt/slides/slide18.xml><?xml version="1.0" encoding="utf-8"?>
-<p:sld xmlns:a="http://schemas.openxmlformats.org/drawingml/2006/main" xmlns:p="http://schemas.openxmlformats.org/presentationml/2006/main" xmlns:r="http://schemas.openxmlformats.org/officeDocument/2006/relationships">
+<p:sld xmlns:a="http://schemas.openxmlformats.org/drawingml/2006/main" xmlns:r="http://schemas.openxmlformats.org/officeDocument/2006/relationships" xmlns:p="http://schemas.openxmlformats.org/presentationml/2006/main">
   <p:cSld>
     <p:spTree>
       <p:nvGrpSpPr>
@@ -9012,7 +9779,14 @@
         <p:cNvGrpSpPr/>
         <p:nvPr/>
       </p:nvGrpSpPr>
-      <p:grpSpPr/>
+      <p:grpSpPr>
+        <a:xfrm>
+          <a:off x="0" y="0"/>
+          <a:ext cx="0" cy="0"/>
+          <a:chOff x="0" y="0"/>
+          <a:chExt cx="0" cy="0"/>
+        </a:xfrm>
+      </p:grpSpPr>
       <p:sp>
         <p:nvSpPr>
           <p:cNvPr id="2" name="TextBox 1"/>
@@ -9030,7 +9804,7 @@
           <a:noFill/>
         </p:spPr>
         <p:txBody>
-          <a:bodyPr wrap="square" lIns="0" rIns="0" tIns="0" bIns="0">
+          <a:bodyPr wrap="square" lIns="0" tIns="0" rIns="0" bIns="0">
             <a:spAutoFit/>
           </a:bodyPr>
           <a:lstStyle/>
@@ -9064,7 +9838,7 @@
           <a:noFill/>
         </p:spPr>
         <p:txBody>
-          <a:bodyPr wrap="square" lIns="0" rIns="0" tIns="0" bIns="0">
+          <a:bodyPr wrap="square" lIns="0" tIns="0" rIns="0" bIns="0">
             <a:spAutoFit/>
           </a:bodyPr>
           <a:lstStyle/>
@@ -9098,7 +9872,7 @@
           <a:noFill/>
         </p:spPr>
         <p:txBody>
-          <a:bodyPr wrap="square" lIns="0" rIns="0" tIns="0" bIns="0">
+          <a:bodyPr wrap="square" lIns="0" tIns="0" rIns="0" bIns="0">
             <a:spAutoFit/>
           </a:bodyPr>
           <a:lstStyle/>
@@ -9133,7 +9907,7 @@
           <a:noFill/>
         </p:spPr>
         <p:txBody>
-          <a:bodyPr wrap="square" lIns="0" rIns="0" tIns="0" bIns="0">
+          <a:bodyPr wrap="square" lIns="0" tIns="0" rIns="0" bIns="0">
             <a:spAutoFit/>
           </a:bodyPr>
           <a:lstStyle/>
@@ -9169,14 +9943,32 @@
                 <a:tableStyleId>{5C22544A-7EE6-4342-B048-85BDC9FD1C3A}</a:tableStyleId>
               </a:tblPr>
               <a:tblGrid>
-                <a:gridCol w="1386689"/>
-                <a:gridCol w="4093409"/>
-                <a:gridCol w="5577741"/>
+                <a:gridCol w="1386689">
+                  <a:extLst>
+                    <a:ext uri="{9D8B030D-6E8A-4147-A177-3AD203B41FA5}">
+                      <a16:colId xmlns:a16="http://schemas.microsoft.com/office/drawing/2014/main" val="20000"/>
+                    </a:ext>
+                  </a:extLst>
+                </a:gridCol>
+                <a:gridCol w="4093409">
+                  <a:extLst>
+                    <a:ext uri="{9D8B030D-6E8A-4147-A177-3AD203B41FA5}">
+                      <a16:colId xmlns:a16="http://schemas.microsoft.com/office/drawing/2014/main" val="20001"/>
+                    </a:ext>
+                  </a:extLst>
+                </a:gridCol>
+                <a:gridCol w="5577741">
+                  <a:extLst>
+                    <a:ext uri="{9D8B030D-6E8A-4147-A177-3AD203B41FA5}">
+                      <a16:colId xmlns:a16="http://schemas.microsoft.com/office/drawing/2014/main" val="20002"/>
+                    </a:ext>
+                  </a:extLst>
+                </a:gridCol>
               </a:tblGrid>
               <a:tr h="321818">
                 <a:tc>
                   <a:txBody>
-                    <a:bodyPr wrap="square"/>
+                    <a:bodyPr/>
                     <a:lstStyle/>
                     <a:p>
                       <a:pPr algn="ctr"/>
@@ -9199,7 +9991,7 @@
                 </a:tc>
                 <a:tc>
                   <a:txBody>
-                    <a:bodyPr wrap="square"/>
+                    <a:bodyPr/>
                     <a:lstStyle/>
                     <a:p>
                       <a:pPr algn="ctr"/>
@@ -9222,7 +10014,7 @@
                 </a:tc>
                 <a:tc>
                   <a:txBody>
-                    <a:bodyPr wrap="square"/>
+                    <a:bodyPr/>
                     <a:lstStyle/>
                     <a:p>
                       <a:pPr algn="ctr"/>
@@ -9243,11 +10035,16 @@
                     </a:solidFill>
                   </a:tcPr>
                 </a:tc>
+                <a:extLst>
+                  <a:ext uri="{0D108BD9-81ED-4DB2-BD59-A6C34878D82A}">
+                    <a16:rowId xmlns:a16="http://schemas.microsoft.com/office/drawing/2014/main" val="10000"/>
+                  </a:ext>
+                </a:extLst>
               </a:tr>
               <a:tr h="321818">
                 <a:tc>
                   <a:txBody>
-                    <a:bodyPr wrap="square"/>
+                    <a:bodyPr/>
                     <a:lstStyle/>
                     <a:p>
                       <a:pPr algn="ctr"/>
@@ -9270,7 +10067,7 @@
                 </a:tc>
                 <a:tc>
                   <a:txBody>
-                    <a:bodyPr wrap="square"/>
+                    <a:bodyPr/>
                     <a:lstStyle/>
                     <a:p>
                       <a:pPr algn="l"/>
@@ -9332,7 +10129,7 @@
                 </a:tc>
                 <a:tc>
                   <a:txBody>
-                    <a:bodyPr wrap="square"/>
+                    <a:bodyPr/>
                     <a:lstStyle/>
                     <a:p>
                       <a:pPr algn="l"/>
@@ -9373,11 +10170,16 @@
                     </a:solidFill>
                   </a:tcPr>
                 </a:tc>
+                <a:extLst>
+                  <a:ext uri="{0D108BD9-81ED-4DB2-BD59-A6C34878D82A}">
+                    <a16:rowId xmlns:a16="http://schemas.microsoft.com/office/drawing/2014/main" val="10001"/>
+                  </a:ext>
+                </a:extLst>
               </a:tr>
               <a:tr h="321818">
                 <a:tc>
                   <a:txBody>
-                    <a:bodyPr wrap="square"/>
+                    <a:bodyPr/>
                     <a:lstStyle/>
                     <a:p>
                       <a:pPr algn="ctr"/>
@@ -9400,7 +10202,7 @@
                 </a:tc>
                 <a:tc>
                   <a:txBody>
-                    <a:bodyPr wrap="square"/>
+                    <a:bodyPr/>
                     <a:lstStyle/>
                     <a:p>
                       <a:pPr algn="l"/>
@@ -9462,7 +10264,7 @@
                 </a:tc>
                 <a:tc>
                   <a:txBody>
-                    <a:bodyPr wrap="square"/>
+                    <a:bodyPr/>
                     <a:lstStyle/>
                     <a:p>
                       <a:pPr algn="l"/>
@@ -9503,6 +10305,11 @@
                     </a:solidFill>
                   </a:tcPr>
                 </a:tc>
+                <a:extLst>
+                  <a:ext uri="{0D108BD9-81ED-4DB2-BD59-A6C34878D82A}">
+                    <a16:rowId xmlns:a16="http://schemas.microsoft.com/office/drawing/2014/main" val="10002"/>
+                  </a:ext>
+                </a:extLst>
               </a:tr>
             </a:tbl>
           </a:graphicData>
@@ -9525,7 +10332,7 @@
           <a:noFill/>
         </p:spPr>
         <p:txBody>
-          <a:bodyPr wrap="square" lIns="0" rIns="0" tIns="0" bIns="0">
+          <a:bodyPr wrap="square" lIns="0" tIns="0" rIns="0" bIns="0">
             <a:spAutoFit/>
           </a:bodyPr>
           <a:lstStyle/>
@@ -9583,6 +10390,7 @@
           <a:lstStyle/>
           <a:p>
             <a:pPr algn="ctr"/>
+            <a:endParaRPr/>
           </a:p>
         </p:txBody>
       </p:sp>
@@ -9595,7 +10403,7 @@
 </file>
 
 <file path=ppt/slides/slide19.xml><?xml version="1.0" encoding="utf-8"?>
-<p:sld xmlns:a="http://schemas.openxmlformats.org/drawingml/2006/main" xmlns:p="http://schemas.openxmlformats.org/presentationml/2006/main" xmlns:r="http://schemas.openxmlformats.org/officeDocument/2006/relationships">
+<p:sld xmlns:a="http://schemas.openxmlformats.org/drawingml/2006/main" xmlns:r="http://schemas.openxmlformats.org/officeDocument/2006/relationships" xmlns:p="http://schemas.openxmlformats.org/presentationml/2006/main">
   <p:cSld>
     <p:spTree>
       <p:nvGrpSpPr>
@@ -9603,7 +10411,14 @@
         <p:cNvGrpSpPr/>
         <p:nvPr/>
       </p:nvGrpSpPr>
-      <p:grpSpPr/>
+      <p:grpSpPr>
+        <a:xfrm>
+          <a:off x="0" y="0"/>
+          <a:ext cx="0" cy="0"/>
+          <a:chOff x="0" y="0"/>
+          <a:chExt cx="0" cy="0"/>
+        </a:xfrm>
+      </p:grpSpPr>
       <p:sp>
         <p:nvSpPr>
           <p:cNvPr id="2" name="TextBox 1"/>
@@ -9621,7 +10436,7 @@
           <a:noFill/>
         </p:spPr>
         <p:txBody>
-          <a:bodyPr wrap="square" lIns="0" rIns="0" tIns="0" bIns="0">
+          <a:bodyPr wrap="square" lIns="0" tIns="0" rIns="0" bIns="0">
             <a:spAutoFit/>
           </a:bodyPr>
           <a:lstStyle/>
@@ -9655,7 +10470,7 @@
           <a:noFill/>
         </p:spPr>
         <p:txBody>
-          <a:bodyPr wrap="square" lIns="0" rIns="0" tIns="0" bIns="0">
+          <a:bodyPr wrap="square" lIns="0" tIns="0" rIns="0" bIns="0">
             <a:spAutoFit/>
           </a:bodyPr>
           <a:lstStyle/>
@@ -9689,7 +10504,7 @@
           <a:noFill/>
         </p:spPr>
         <p:txBody>
-          <a:bodyPr wrap="square" lIns="0" rIns="0" tIns="0" bIns="0">
+          <a:bodyPr wrap="square" lIns="0" tIns="0" rIns="0" bIns="0">
             <a:spAutoFit/>
           </a:bodyPr>
           <a:lstStyle/>
@@ -9724,7 +10539,7 @@
           <a:noFill/>
         </p:spPr>
         <p:txBody>
-          <a:bodyPr wrap="square" lIns="0" rIns="0" tIns="0" bIns="0">
+          <a:bodyPr wrap="square" lIns="0" tIns="0" rIns="0" bIns="0">
             <a:spAutoFit/>
           </a:bodyPr>
           <a:lstStyle/>
@@ -9760,14 +10575,32 @@
                 <a:tableStyleId>{5C22544A-7EE6-4342-B048-85BDC9FD1C3A}</a:tableStyleId>
               </a:tblPr>
               <a:tblGrid>
-                <a:gridCol w="1349041"/>
-                <a:gridCol w="5149683"/>
-                <a:gridCol w="4559115"/>
+                <a:gridCol w="1349041">
+                  <a:extLst>
+                    <a:ext uri="{9D8B030D-6E8A-4147-A177-3AD203B41FA5}">
+                      <a16:colId xmlns:a16="http://schemas.microsoft.com/office/drawing/2014/main" val="20000"/>
+                    </a:ext>
+                  </a:extLst>
+                </a:gridCol>
+                <a:gridCol w="5149683">
+                  <a:extLst>
+                    <a:ext uri="{9D8B030D-6E8A-4147-A177-3AD203B41FA5}">
+                      <a16:colId xmlns:a16="http://schemas.microsoft.com/office/drawing/2014/main" val="20001"/>
+                    </a:ext>
+                  </a:extLst>
+                </a:gridCol>
+                <a:gridCol w="4559115">
+                  <a:extLst>
+                    <a:ext uri="{9D8B030D-6E8A-4147-A177-3AD203B41FA5}">
+                      <a16:colId xmlns:a16="http://schemas.microsoft.com/office/drawing/2014/main" val="20002"/>
+                    </a:ext>
+                  </a:extLst>
+                </a:gridCol>
               </a:tblGrid>
               <a:tr h="321818">
                 <a:tc>
                   <a:txBody>
-                    <a:bodyPr wrap="square"/>
+                    <a:bodyPr/>
                     <a:lstStyle/>
                     <a:p>
                       <a:pPr algn="ctr"/>
@@ -9790,7 +10623,7 @@
                 </a:tc>
                 <a:tc>
                   <a:txBody>
-                    <a:bodyPr wrap="square"/>
+                    <a:bodyPr/>
                     <a:lstStyle/>
                     <a:p>
                       <a:pPr algn="ctr"/>
@@ -9813,7 +10646,7 @@
                 </a:tc>
                 <a:tc>
                   <a:txBody>
-                    <a:bodyPr wrap="square"/>
+                    <a:bodyPr/>
                     <a:lstStyle/>
                     <a:p>
                       <a:pPr algn="ctr"/>
@@ -9834,11 +10667,16 @@
                     </a:solidFill>
                   </a:tcPr>
                 </a:tc>
+                <a:extLst>
+                  <a:ext uri="{0D108BD9-81ED-4DB2-BD59-A6C34878D82A}">
+                    <a16:rowId xmlns:a16="http://schemas.microsoft.com/office/drawing/2014/main" val="10000"/>
+                  </a:ext>
+                </a:extLst>
               </a:tr>
               <a:tr h="321818">
                 <a:tc>
                   <a:txBody>
-                    <a:bodyPr wrap="square"/>
+                    <a:bodyPr/>
                     <a:lstStyle/>
                     <a:p>
                       <a:pPr algn="ctr"/>
@@ -9861,7 +10699,7 @@
                 </a:tc>
                 <a:tc>
                   <a:txBody>
-                    <a:bodyPr wrap="square"/>
+                    <a:bodyPr/>
                     <a:lstStyle/>
                     <a:p>
                       <a:pPr algn="l"/>
@@ -9904,7 +10742,7 @@
                 </a:tc>
                 <a:tc>
                   <a:txBody>
-                    <a:bodyPr wrap="square"/>
+                    <a:bodyPr/>
                     <a:lstStyle/>
                     <a:p>
                       <a:pPr algn="l"/>
@@ -9945,11 +10783,16 @@
                     </a:solidFill>
                   </a:tcPr>
                 </a:tc>
+                <a:extLst>
+                  <a:ext uri="{0D108BD9-81ED-4DB2-BD59-A6C34878D82A}">
+                    <a16:rowId xmlns:a16="http://schemas.microsoft.com/office/drawing/2014/main" val="10001"/>
+                  </a:ext>
+                </a:extLst>
               </a:tr>
               <a:tr h="321818">
                 <a:tc>
                   <a:txBody>
-                    <a:bodyPr wrap="square"/>
+                    <a:bodyPr/>
                     <a:lstStyle/>
                     <a:p>
                       <a:pPr algn="ctr"/>
@@ -9972,7 +10815,7 @@
                 </a:tc>
                 <a:tc>
                   <a:txBody>
-                    <a:bodyPr wrap="square"/>
+                    <a:bodyPr/>
                     <a:lstStyle/>
                     <a:p>
                       <a:pPr algn="l"/>
@@ -10034,7 +10877,7 @@
                 </a:tc>
                 <a:tc>
                   <a:txBody>
-                    <a:bodyPr wrap="square"/>
+                    <a:bodyPr/>
                     <a:lstStyle/>
                     <a:p>
                       <a:pPr algn="l"/>
@@ -10075,6 +10918,11 @@
                     </a:solidFill>
                   </a:tcPr>
                 </a:tc>
+                <a:extLst>
+                  <a:ext uri="{0D108BD9-81ED-4DB2-BD59-A6C34878D82A}">
+                    <a16:rowId xmlns:a16="http://schemas.microsoft.com/office/drawing/2014/main" val="10002"/>
+                  </a:ext>
+                </a:extLst>
               </a:tr>
             </a:tbl>
           </a:graphicData>
@@ -10097,7 +10945,7 @@
           <a:noFill/>
         </p:spPr>
         <p:txBody>
-          <a:bodyPr wrap="square" lIns="0" rIns="0" tIns="0" bIns="0">
+          <a:bodyPr wrap="square" lIns="0" tIns="0" rIns="0" bIns="0">
             <a:spAutoFit/>
           </a:bodyPr>
           <a:lstStyle/>
@@ -10155,6 +11003,7 @@
           <a:lstStyle/>
           <a:p>
             <a:pPr algn="ctr"/>
+            <a:endParaRPr/>
           </a:p>
         </p:txBody>
       </p:sp>
@@ -10167,7 +11016,7 @@
 </file>
 
 <file path=ppt/slides/slide2.xml><?xml version="1.0" encoding="utf-8"?>
-<p:sld xmlns:a="http://schemas.openxmlformats.org/drawingml/2006/main" xmlns:p="http://schemas.openxmlformats.org/presentationml/2006/main" xmlns:r="http://schemas.openxmlformats.org/officeDocument/2006/relationships">
+<p:sld xmlns:a="http://schemas.openxmlformats.org/drawingml/2006/main" xmlns:r="http://schemas.openxmlformats.org/officeDocument/2006/relationships" xmlns:p="http://schemas.openxmlformats.org/presentationml/2006/main">
   <p:cSld>
     <p:spTree>
       <p:nvGrpSpPr>
@@ -10175,7 +11024,14 @@
         <p:cNvGrpSpPr/>
         <p:nvPr/>
       </p:nvGrpSpPr>
-      <p:grpSpPr/>
+      <p:grpSpPr>
+        <a:xfrm>
+          <a:off x="0" y="0"/>
+          <a:ext cx="0" cy="0"/>
+          <a:chOff x="0" y="0"/>
+          <a:chExt cx="0" cy="0"/>
+        </a:xfrm>
+      </p:grpSpPr>
       <p:sp>
         <p:nvSpPr>
           <p:cNvPr id="2" name="TextBox 1"/>
@@ -10193,7 +11049,7 @@
           <a:noFill/>
         </p:spPr>
         <p:txBody>
-          <a:bodyPr wrap="square" lIns="0" rIns="0" tIns="0" bIns="0">
+          <a:bodyPr wrap="square" lIns="0" tIns="0" rIns="0" bIns="0">
             <a:spAutoFit/>
           </a:bodyPr>
           <a:lstStyle/>
@@ -10227,7 +11083,7 @@
           <a:noFill/>
         </p:spPr>
         <p:txBody>
-          <a:bodyPr wrap="square" lIns="0" rIns="0" tIns="0" bIns="0">
+          <a:bodyPr wrap="square" lIns="0" tIns="0" rIns="0" bIns="0">
             <a:spAutoFit/>
           </a:bodyPr>
           <a:lstStyle/>
@@ -10261,7 +11117,7 @@
           <a:noFill/>
         </p:spPr>
         <p:txBody>
-          <a:bodyPr wrap="square" lIns="0" rIns="0" tIns="0" bIns="0">
+          <a:bodyPr wrap="square" lIns="0" tIns="0" rIns="0" bIns="0">
             <a:spAutoFit/>
           </a:bodyPr>
           <a:lstStyle/>
@@ -10296,7 +11152,7 @@
           <a:noFill/>
         </p:spPr>
         <p:txBody>
-          <a:bodyPr wrap="square" lIns="0" rIns="0" tIns="0" bIns="0">
+          <a:bodyPr wrap="square" lIns="0" tIns="0" rIns="0" bIns="0">
             <a:spAutoFit/>
           </a:bodyPr>
           <a:lstStyle/>
@@ -10332,13 +11188,25 @@
                 <a:tableStyleId>{5C22544A-7EE6-4342-B048-85BDC9FD1C3A}</a:tableStyleId>
               </a:tblPr>
               <a:tblGrid>
-                <a:gridCol w="1278081"/>
-                <a:gridCol w="9779758"/>
+                <a:gridCol w="1278081">
+                  <a:extLst>
+                    <a:ext uri="{9D8B030D-6E8A-4147-A177-3AD203B41FA5}">
+                      <a16:colId xmlns:a16="http://schemas.microsoft.com/office/drawing/2014/main" val="20000"/>
+                    </a:ext>
+                  </a:extLst>
+                </a:gridCol>
+                <a:gridCol w="9779758">
+                  <a:extLst>
+                    <a:ext uri="{9D8B030D-6E8A-4147-A177-3AD203B41FA5}">
+                      <a16:colId xmlns:a16="http://schemas.microsoft.com/office/drawing/2014/main" val="20001"/>
+                    </a:ext>
+                  </a:extLst>
+                </a:gridCol>
               </a:tblGrid>
               <a:tr h="321818">
                 <a:tc>
                   <a:txBody>
-                    <a:bodyPr wrap="square"/>
+                    <a:bodyPr/>
                     <a:lstStyle/>
                     <a:p>
                       <a:pPr algn="ctr"/>
@@ -10361,7 +11229,7 @@
                 </a:tc>
                 <a:tc>
                   <a:txBody>
-                    <a:bodyPr wrap="square"/>
+                    <a:bodyPr/>
                     <a:lstStyle/>
                     <a:p>
                       <a:pPr algn="ctr"/>
@@ -10382,11 +11250,16 @@
                     </a:solidFill>
                   </a:tcPr>
                 </a:tc>
+                <a:extLst>
+                  <a:ext uri="{0D108BD9-81ED-4DB2-BD59-A6C34878D82A}">
+                    <a16:rowId xmlns:a16="http://schemas.microsoft.com/office/drawing/2014/main" val="10000"/>
+                  </a:ext>
+                </a:extLst>
               </a:tr>
               <a:tr h="321818">
                 <a:tc>
                   <a:txBody>
-                    <a:bodyPr wrap="square"/>
+                    <a:bodyPr/>
                     <a:lstStyle/>
                     <a:p>
                       <a:pPr algn="ctr"/>
@@ -10409,7 +11282,7 @@
                 </a:tc>
                 <a:tc>
                   <a:txBody>
-                    <a:bodyPr wrap="square"/>
+                    <a:bodyPr/>
                     <a:lstStyle/>
                     <a:p>
                       <a:pPr algn="l"/>
@@ -10430,11 +11303,16 @@
                     </a:solidFill>
                   </a:tcPr>
                 </a:tc>
+                <a:extLst>
+                  <a:ext uri="{0D108BD9-81ED-4DB2-BD59-A6C34878D82A}">
+                    <a16:rowId xmlns:a16="http://schemas.microsoft.com/office/drawing/2014/main" val="10001"/>
+                  </a:ext>
+                </a:extLst>
               </a:tr>
               <a:tr h="321818">
                 <a:tc>
                   <a:txBody>
-                    <a:bodyPr wrap="square"/>
+                    <a:bodyPr/>
                     <a:lstStyle/>
                     <a:p>
                       <a:pPr algn="ctr"/>
@@ -10457,7 +11335,7 @@
                 </a:tc>
                 <a:tc>
                   <a:txBody>
-                    <a:bodyPr wrap="square"/>
+                    <a:bodyPr/>
                     <a:lstStyle/>
                     <a:p>
                       <a:pPr algn="l"/>
@@ -10478,11 +11356,16 @@
                     </a:solidFill>
                   </a:tcPr>
                 </a:tc>
+                <a:extLst>
+                  <a:ext uri="{0D108BD9-81ED-4DB2-BD59-A6C34878D82A}">
+                    <a16:rowId xmlns:a16="http://schemas.microsoft.com/office/drawing/2014/main" val="10002"/>
+                  </a:ext>
+                </a:extLst>
               </a:tr>
               <a:tr h="321818">
                 <a:tc>
                   <a:txBody>
-                    <a:bodyPr wrap="square"/>
+                    <a:bodyPr/>
                     <a:lstStyle/>
                     <a:p>
                       <a:pPr algn="ctr"/>
@@ -10505,7 +11388,7 @@
                 </a:tc>
                 <a:tc>
                   <a:txBody>
-                    <a:bodyPr wrap="square"/>
+                    <a:bodyPr/>
                     <a:lstStyle/>
                     <a:p>
                       <a:pPr algn="l"/>
@@ -10526,11 +11409,16 @@
                     </a:solidFill>
                   </a:tcPr>
                 </a:tc>
+                <a:extLst>
+                  <a:ext uri="{0D108BD9-81ED-4DB2-BD59-A6C34878D82A}">
+                    <a16:rowId xmlns:a16="http://schemas.microsoft.com/office/drawing/2014/main" val="10003"/>
+                  </a:ext>
+                </a:extLst>
               </a:tr>
               <a:tr h="321818">
                 <a:tc>
                   <a:txBody>
-                    <a:bodyPr wrap="square"/>
+                    <a:bodyPr/>
                     <a:lstStyle/>
                     <a:p>
                       <a:pPr algn="ctr"/>
@@ -10553,7 +11441,7 @@
                 </a:tc>
                 <a:tc>
                   <a:txBody>
-                    <a:bodyPr wrap="square"/>
+                    <a:bodyPr/>
                     <a:lstStyle/>
                     <a:p>
                       <a:pPr algn="l"/>
@@ -10574,11 +11462,16 @@
                     </a:solidFill>
                   </a:tcPr>
                 </a:tc>
+                <a:extLst>
+                  <a:ext uri="{0D108BD9-81ED-4DB2-BD59-A6C34878D82A}">
+                    <a16:rowId xmlns:a16="http://schemas.microsoft.com/office/drawing/2014/main" val="10004"/>
+                  </a:ext>
+                </a:extLst>
               </a:tr>
               <a:tr h="321818">
                 <a:tc>
                   <a:txBody>
-                    <a:bodyPr wrap="square"/>
+                    <a:bodyPr/>
                     <a:lstStyle/>
                     <a:p>
                       <a:pPr algn="ctr"/>
@@ -10601,7 +11494,7 @@
                 </a:tc>
                 <a:tc>
                   <a:txBody>
-                    <a:bodyPr wrap="square"/>
+                    <a:bodyPr/>
                     <a:lstStyle/>
                     <a:p>
                       <a:pPr algn="l"/>
@@ -10622,11 +11515,16 @@
                     </a:solidFill>
                   </a:tcPr>
                 </a:tc>
+                <a:extLst>
+                  <a:ext uri="{0D108BD9-81ED-4DB2-BD59-A6C34878D82A}">
+                    <a16:rowId xmlns:a16="http://schemas.microsoft.com/office/drawing/2014/main" val="10005"/>
+                  </a:ext>
+                </a:extLst>
               </a:tr>
               <a:tr h="321818">
                 <a:tc>
                   <a:txBody>
-                    <a:bodyPr wrap="square"/>
+                    <a:bodyPr/>
                     <a:lstStyle/>
                     <a:p>
                       <a:pPr algn="ctr"/>
@@ -10649,7 +11547,7 @@
                 </a:tc>
                 <a:tc>
                   <a:txBody>
-                    <a:bodyPr wrap="square"/>
+                    <a:bodyPr/>
                     <a:lstStyle/>
                     <a:p>
                       <a:pPr algn="l"/>
@@ -10670,6 +11568,11 @@
                     </a:solidFill>
                   </a:tcPr>
                 </a:tc>
+                <a:extLst>
+                  <a:ext uri="{0D108BD9-81ED-4DB2-BD59-A6C34878D82A}">
+                    <a16:rowId xmlns:a16="http://schemas.microsoft.com/office/drawing/2014/main" val="10006"/>
+                  </a:ext>
+                </a:extLst>
               </a:tr>
             </a:tbl>
           </a:graphicData>
@@ -10692,7 +11595,7 @@
           <a:noFill/>
         </p:spPr>
         <p:txBody>
-          <a:bodyPr wrap="square" lIns="0" rIns="0" tIns="0" bIns="0">
+          <a:bodyPr wrap="square" lIns="0" tIns="0" rIns="0" bIns="0">
             <a:spAutoFit/>
           </a:bodyPr>
           <a:lstStyle/>
@@ -10750,6 +11653,7 @@
           <a:lstStyle/>
           <a:p>
             <a:pPr algn="ctr"/>
+            <a:endParaRPr/>
           </a:p>
         </p:txBody>
       </p:sp>
@@ -10762,7 +11666,7 @@
 </file>
 
 <file path=ppt/slides/slide20.xml><?xml version="1.0" encoding="utf-8"?>
-<p:sld xmlns:a="http://schemas.openxmlformats.org/drawingml/2006/main" xmlns:p="http://schemas.openxmlformats.org/presentationml/2006/main" xmlns:r="http://schemas.openxmlformats.org/officeDocument/2006/relationships">
+<p:sld xmlns:a="http://schemas.openxmlformats.org/drawingml/2006/main" xmlns:r="http://schemas.openxmlformats.org/officeDocument/2006/relationships" xmlns:p="http://schemas.openxmlformats.org/presentationml/2006/main">
   <p:cSld>
     <p:spTree>
       <p:nvGrpSpPr>
@@ -10770,7 +11674,14 @@
         <p:cNvGrpSpPr/>
         <p:nvPr/>
       </p:nvGrpSpPr>
-      <p:grpSpPr/>
+      <p:grpSpPr>
+        <a:xfrm>
+          <a:off x="0" y="0"/>
+          <a:ext cx="0" cy="0"/>
+          <a:chOff x="0" y="0"/>
+          <a:chExt cx="0" cy="0"/>
+        </a:xfrm>
+      </p:grpSpPr>
       <p:sp>
         <p:nvSpPr>
           <p:cNvPr id="2" name="TextBox 1"/>
@@ -10788,7 +11699,7 @@
           <a:noFill/>
         </p:spPr>
         <p:txBody>
-          <a:bodyPr wrap="square" lIns="0" rIns="0" tIns="0" bIns="0">
+          <a:bodyPr wrap="square" lIns="0" tIns="0" rIns="0" bIns="0">
             <a:spAutoFit/>
           </a:bodyPr>
           <a:lstStyle/>
@@ -10822,7 +11733,7 @@
           <a:noFill/>
         </p:spPr>
         <p:txBody>
-          <a:bodyPr wrap="square" lIns="0" rIns="0" tIns="0" bIns="0">
+          <a:bodyPr wrap="square" lIns="0" tIns="0" rIns="0" bIns="0">
             <a:spAutoFit/>
           </a:bodyPr>
           <a:lstStyle/>
@@ -10856,7 +11767,7 @@
           <a:noFill/>
         </p:spPr>
         <p:txBody>
-          <a:bodyPr wrap="square" lIns="0" rIns="0" tIns="0" bIns="0">
+          <a:bodyPr wrap="square" lIns="0" tIns="0" rIns="0" bIns="0">
             <a:spAutoFit/>
           </a:bodyPr>
           <a:lstStyle/>
@@ -10891,7 +11802,7 @@
           <a:noFill/>
         </p:spPr>
         <p:txBody>
-          <a:bodyPr wrap="square" lIns="0" rIns="0" tIns="0" bIns="0">
+          <a:bodyPr wrap="square" lIns="0" tIns="0" rIns="0" bIns="0">
             <a:spAutoFit/>
           </a:bodyPr>
           <a:lstStyle/>
@@ -10925,7 +11836,7 @@
           <a:noFill/>
         </p:spPr>
         <p:txBody>
-          <a:bodyPr wrap="square" lIns="0" rIns="0" tIns="0" bIns="0">
+          <a:bodyPr wrap="square" lIns="0" tIns="0" rIns="0" bIns="0">
             <a:spAutoFit/>
           </a:bodyPr>
           <a:lstStyle/>
@@ -11145,7 +12056,7 @@
 </file>
 
 <file path=ppt/slides/slide3.xml><?xml version="1.0" encoding="utf-8"?>
-<p:sld xmlns:a="http://schemas.openxmlformats.org/drawingml/2006/main" xmlns:p="http://schemas.openxmlformats.org/presentationml/2006/main" xmlns:r="http://schemas.openxmlformats.org/officeDocument/2006/relationships">
+<p:sld xmlns:a="http://schemas.openxmlformats.org/drawingml/2006/main" xmlns:r="http://schemas.openxmlformats.org/officeDocument/2006/relationships" xmlns:p="http://schemas.openxmlformats.org/presentationml/2006/main">
   <p:cSld>
     <p:spTree>
       <p:nvGrpSpPr>
@@ -11153,7 +12064,14 @@
         <p:cNvGrpSpPr/>
         <p:nvPr/>
       </p:nvGrpSpPr>
-      <p:grpSpPr/>
+      <p:grpSpPr>
+        <a:xfrm>
+          <a:off x="0" y="0"/>
+          <a:ext cx="0" cy="0"/>
+          <a:chOff x="0" y="0"/>
+          <a:chExt cx="0" cy="0"/>
+        </a:xfrm>
+      </p:grpSpPr>
       <p:sp>
         <p:nvSpPr>
           <p:cNvPr id="2" name="TextBox 1"/>
@@ -11171,7 +12089,7 @@
           <a:noFill/>
         </p:spPr>
         <p:txBody>
-          <a:bodyPr wrap="square" lIns="0" rIns="0" tIns="0" bIns="0">
+          <a:bodyPr wrap="square" lIns="0" tIns="0" rIns="0" bIns="0">
             <a:spAutoFit/>
           </a:bodyPr>
           <a:lstStyle/>
@@ -11205,7 +12123,7 @@
           <a:noFill/>
         </p:spPr>
         <p:txBody>
-          <a:bodyPr wrap="square" lIns="0" rIns="0" tIns="0" bIns="0">
+          <a:bodyPr wrap="square" lIns="0" tIns="0" rIns="0" bIns="0">
             <a:spAutoFit/>
           </a:bodyPr>
           <a:lstStyle/>
@@ -11239,7 +12157,7 @@
           <a:noFill/>
         </p:spPr>
         <p:txBody>
-          <a:bodyPr wrap="square" lIns="0" rIns="0" tIns="0" bIns="0">
+          <a:bodyPr wrap="square" lIns="0" tIns="0" rIns="0" bIns="0">
             <a:spAutoFit/>
           </a:bodyPr>
           <a:lstStyle/>
@@ -11274,7 +12192,7 @@
           <a:noFill/>
         </p:spPr>
         <p:txBody>
-          <a:bodyPr wrap="square" lIns="0" rIns="0" tIns="0" bIns="0">
+          <a:bodyPr wrap="square" lIns="0" tIns="0" rIns="0" bIns="0">
             <a:spAutoFit/>
           </a:bodyPr>
           <a:lstStyle/>
@@ -11310,14 +12228,32 @@
                 <a:tableStyleId>{5C22544A-7EE6-4342-B048-85BDC9FD1C3A}</a:tableStyleId>
               </a:tblPr>
               <a:tblGrid>
-                <a:gridCol w="986328"/>
-                <a:gridCol w="2717883"/>
-                <a:gridCol w="7353628"/>
+                <a:gridCol w="986328">
+                  <a:extLst>
+                    <a:ext uri="{9D8B030D-6E8A-4147-A177-3AD203B41FA5}">
+                      <a16:colId xmlns:a16="http://schemas.microsoft.com/office/drawing/2014/main" val="20000"/>
+                    </a:ext>
+                  </a:extLst>
+                </a:gridCol>
+                <a:gridCol w="2717883">
+                  <a:extLst>
+                    <a:ext uri="{9D8B030D-6E8A-4147-A177-3AD203B41FA5}">
+                      <a16:colId xmlns:a16="http://schemas.microsoft.com/office/drawing/2014/main" val="20001"/>
+                    </a:ext>
+                  </a:extLst>
+                </a:gridCol>
+                <a:gridCol w="7353628">
+                  <a:extLst>
+                    <a:ext uri="{9D8B030D-6E8A-4147-A177-3AD203B41FA5}">
+                      <a16:colId xmlns:a16="http://schemas.microsoft.com/office/drawing/2014/main" val="20002"/>
+                    </a:ext>
+                  </a:extLst>
+                </a:gridCol>
               </a:tblGrid>
               <a:tr h="321818">
                 <a:tc>
                   <a:txBody>
-                    <a:bodyPr wrap="square"/>
+                    <a:bodyPr/>
                     <a:lstStyle/>
                     <a:p>
                       <a:pPr algn="ctr"/>
@@ -11340,7 +12276,7 @@
                 </a:tc>
                 <a:tc>
                   <a:txBody>
-                    <a:bodyPr wrap="square"/>
+                    <a:bodyPr/>
                     <a:lstStyle/>
                     <a:p>
                       <a:pPr algn="ctr"/>
@@ -11363,7 +12299,7 @@
                 </a:tc>
                 <a:tc>
                   <a:txBody>
-                    <a:bodyPr wrap="square"/>
+                    <a:bodyPr/>
                     <a:lstStyle/>
                     <a:p>
                       <a:pPr algn="ctr"/>
@@ -11384,11 +12320,16 @@
                     </a:solidFill>
                   </a:tcPr>
                 </a:tc>
+                <a:extLst>
+                  <a:ext uri="{0D108BD9-81ED-4DB2-BD59-A6C34878D82A}">
+                    <a16:rowId xmlns:a16="http://schemas.microsoft.com/office/drawing/2014/main" val="10000"/>
+                  </a:ext>
+                </a:extLst>
               </a:tr>
               <a:tr h="321818">
                 <a:tc>
                   <a:txBody>
-                    <a:bodyPr wrap="square"/>
+                    <a:bodyPr/>
                     <a:lstStyle/>
                     <a:p>
                       <a:pPr algn="ctr"/>
@@ -11411,7 +12352,7 @@
                 </a:tc>
                 <a:tc>
                   <a:txBody>
-                    <a:bodyPr wrap="square"/>
+                    <a:bodyPr/>
                     <a:lstStyle/>
                     <a:p>
                       <a:pPr algn="ctr"/>
@@ -11435,7 +12376,7 @@
                 </a:tc>
                 <a:tc>
                   <a:txBody>
-                    <a:bodyPr wrap="square"/>
+                    <a:bodyPr/>
                     <a:lstStyle/>
                     <a:p>
                       <a:pPr algn="l"/>
@@ -11456,11 +12397,16 @@
                     </a:solidFill>
                   </a:tcPr>
                 </a:tc>
+                <a:extLst>
+                  <a:ext uri="{0D108BD9-81ED-4DB2-BD59-A6C34878D82A}">
+                    <a16:rowId xmlns:a16="http://schemas.microsoft.com/office/drawing/2014/main" val="10001"/>
+                  </a:ext>
+                </a:extLst>
               </a:tr>
               <a:tr h="321818">
                 <a:tc>
                   <a:txBody>
-                    <a:bodyPr wrap="square"/>
+                    <a:bodyPr/>
                     <a:lstStyle/>
                     <a:p>
                       <a:pPr algn="ctr"/>
@@ -11483,7 +12429,7 @@
                 </a:tc>
                 <a:tc>
                   <a:txBody>
-                    <a:bodyPr wrap="square"/>
+                    <a:bodyPr/>
                     <a:lstStyle/>
                     <a:p>
                       <a:pPr algn="ctr"/>
@@ -11507,7 +12453,7 @@
                 </a:tc>
                 <a:tc>
                   <a:txBody>
-                    <a:bodyPr wrap="square"/>
+                    <a:bodyPr/>
                     <a:lstStyle/>
                     <a:p>
                       <a:pPr algn="l"/>
@@ -11528,11 +12474,16 @@
                     </a:solidFill>
                   </a:tcPr>
                 </a:tc>
+                <a:extLst>
+                  <a:ext uri="{0D108BD9-81ED-4DB2-BD59-A6C34878D82A}">
+                    <a16:rowId xmlns:a16="http://schemas.microsoft.com/office/drawing/2014/main" val="10002"/>
+                  </a:ext>
+                </a:extLst>
               </a:tr>
               <a:tr h="321818">
                 <a:tc>
                   <a:txBody>
-                    <a:bodyPr wrap="square"/>
+                    <a:bodyPr/>
                     <a:lstStyle/>
                     <a:p>
                       <a:pPr algn="ctr"/>
@@ -11555,7 +12506,7 @@
                 </a:tc>
                 <a:tc>
                   <a:txBody>
-                    <a:bodyPr wrap="square"/>
+                    <a:bodyPr/>
                     <a:lstStyle/>
                     <a:p>
                       <a:pPr algn="ctr"/>
@@ -11579,7 +12530,7 @@
                 </a:tc>
                 <a:tc>
                   <a:txBody>
-                    <a:bodyPr wrap="square"/>
+                    <a:bodyPr/>
                     <a:lstStyle/>
                     <a:p>
                       <a:pPr algn="l"/>
@@ -11600,11 +12551,16 @@
                     </a:solidFill>
                   </a:tcPr>
                 </a:tc>
+                <a:extLst>
+                  <a:ext uri="{0D108BD9-81ED-4DB2-BD59-A6C34878D82A}">
+                    <a16:rowId xmlns:a16="http://schemas.microsoft.com/office/drawing/2014/main" val="10003"/>
+                  </a:ext>
+                </a:extLst>
               </a:tr>
               <a:tr h="321818">
                 <a:tc>
                   <a:txBody>
-                    <a:bodyPr wrap="square"/>
+                    <a:bodyPr/>
                     <a:lstStyle/>
                     <a:p>
                       <a:pPr algn="ctr"/>
@@ -11627,7 +12583,7 @@
                 </a:tc>
                 <a:tc>
                   <a:txBody>
-                    <a:bodyPr wrap="square"/>
+                    <a:bodyPr/>
                     <a:lstStyle/>
                     <a:p>
                       <a:pPr algn="ctr"/>
@@ -11651,7 +12607,7 @@
                 </a:tc>
                 <a:tc>
                   <a:txBody>
-                    <a:bodyPr wrap="square"/>
+                    <a:bodyPr/>
                     <a:lstStyle/>
                     <a:p>
                       <a:pPr algn="l"/>
@@ -11672,11 +12628,16 @@
                     </a:solidFill>
                   </a:tcPr>
                 </a:tc>
+                <a:extLst>
+                  <a:ext uri="{0D108BD9-81ED-4DB2-BD59-A6C34878D82A}">
+                    <a16:rowId xmlns:a16="http://schemas.microsoft.com/office/drawing/2014/main" val="10004"/>
+                  </a:ext>
+                </a:extLst>
               </a:tr>
               <a:tr h="321818">
                 <a:tc>
                   <a:txBody>
-                    <a:bodyPr wrap="square"/>
+                    <a:bodyPr/>
                     <a:lstStyle/>
                     <a:p>
                       <a:pPr algn="ctr"/>
@@ -11699,7 +12660,7 @@
                 </a:tc>
                 <a:tc>
                   <a:txBody>
-                    <a:bodyPr wrap="square"/>
+                    <a:bodyPr/>
                     <a:lstStyle/>
                     <a:p>
                       <a:pPr algn="ctr"/>
@@ -11723,7 +12684,7 @@
                 </a:tc>
                 <a:tc>
                   <a:txBody>
-                    <a:bodyPr wrap="square"/>
+                    <a:bodyPr/>
                     <a:lstStyle/>
                     <a:p>
                       <a:pPr algn="l"/>
@@ -11744,6 +12705,11 @@
                     </a:solidFill>
                   </a:tcPr>
                 </a:tc>
+                <a:extLst>
+                  <a:ext uri="{0D108BD9-81ED-4DB2-BD59-A6C34878D82A}">
+                    <a16:rowId xmlns:a16="http://schemas.microsoft.com/office/drawing/2014/main" val="10005"/>
+                  </a:ext>
+                </a:extLst>
               </a:tr>
             </a:tbl>
           </a:graphicData>
@@ -11766,7 +12732,7 @@
           <a:noFill/>
         </p:spPr>
         <p:txBody>
-          <a:bodyPr wrap="square" lIns="0" rIns="0" tIns="0" bIns="0">
+          <a:bodyPr wrap="square" lIns="0" tIns="0" rIns="0" bIns="0">
             <a:spAutoFit/>
           </a:bodyPr>
           <a:lstStyle/>
@@ -11824,6 +12790,7 @@
           <a:lstStyle/>
           <a:p>
             <a:pPr algn="ctr"/>
+            <a:endParaRPr/>
           </a:p>
         </p:txBody>
       </p:sp>
@@ -11836,7 +12803,7 @@
 </file>
 
 <file path=ppt/slides/slide4.xml><?xml version="1.0" encoding="utf-8"?>
-<p:sld xmlns:a="http://schemas.openxmlformats.org/drawingml/2006/main" xmlns:p="http://schemas.openxmlformats.org/presentationml/2006/main" xmlns:r="http://schemas.openxmlformats.org/officeDocument/2006/relationships">
+<p:sld xmlns:a="http://schemas.openxmlformats.org/drawingml/2006/main" xmlns:r="http://schemas.openxmlformats.org/officeDocument/2006/relationships" xmlns:p="http://schemas.openxmlformats.org/presentationml/2006/main">
   <p:cSld>
     <p:spTree>
       <p:nvGrpSpPr>
@@ -11844,7 +12811,14 @@
         <p:cNvGrpSpPr/>
         <p:nvPr/>
       </p:nvGrpSpPr>
-      <p:grpSpPr/>
+      <p:grpSpPr>
+        <a:xfrm>
+          <a:off x="0" y="0"/>
+          <a:ext cx="0" cy="0"/>
+          <a:chOff x="0" y="0"/>
+          <a:chExt cx="0" cy="0"/>
+        </a:xfrm>
+      </p:grpSpPr>
       <p:sp>
         <p:nvSpPr>
           <p:cNvPr id="2" name="TextBox 1"/>
@@ -11862,7 +12836,7 @@
           <a:noFill/>
         </p:spPr>
         <p:txBody>
-          <a:bodyPr wrap="square" lIns="0" rIns="0" tIns="0" bIns="0">
+          <a:bodyPr wrap="square" lIns="0" tIns="0" rIns="0" bIns="0">
             <a:spAutoFit/>
           </a:bodyPr>
           <a:lstStyle/>
@@ -11896,7 +12870,7 @@
           <a:noFill/>
         </p:spPr>
         <p:txBody>
-          <a:bodyPr wrap="square" lIns="0" rIns="0" tIns="0" bIns="0">
+          <a:bodyPr wrap="square" lIns="0" tIns="0" rIns="0" bIns="0">
             <a:spAutoFit/>
           </a:bodyPr>
           <a:lstStyle/>
@@ -11930,7 +12904,7 @@
           <a:noFill/>
         </p:spPr>
         <p:txBody>
-          <a:bodyPr wrap="square" lIns="0" rIns="0" tIns="0" bIns="0">
+          <a:bodyPr wrap="square" lIns="0" tIns="0" rIns="0" bIns="0">
             <a:spAutoFit/>
           </a:bodyPr>
           <a:lstStyle/>
@@ -11965,7 +12939,7 @@
           <a:noFill/>
         </p:spPr>
         <p:txBody>
-          <a:bodyPr wrap="square" lIns="0" rIns="0" tIns="0" bIns="0">
+          <a:bodyPr wrap="square" lIns="0" tIns="0" rIns="0" bIns="0">
             <a:spAutoFit/>
           </a:bodyPr>
           <a:lstStyle/>
@@ -11999,7 +12973,7 @@
           <a:noFill/>
         </p:spPr>
         <p:txBody>
-          <a:bodyPr wrap="square" lIns="0" rIns="0" tIns="0" bIns="0">
+          <a:bodyPr wrap="square" lIns="0" tIns="0" rIns="0" bIns="0">
             <a:spAutoFit/>
           </a:bodyPr>
           <a:lstStyle/>
@@ -12033,7 +13007,7 @@
           <a:noFill/>
         </p:spPr>
         <p:txBody>
-          <a:bodyPr wrap="square" lIns="0" rIns="0" tIns="0" bIns="0">
+          <a:bodyPr wrap="square" lIns="0" tIns="0" rIns="0" bIns="0">
             <a:spAutoFit/>
           </a:bodyPr>
           <a:lstStyle/>
@@ -12124,7 +13098,7 @@
           <a:noFill/>
         </p:spPr>
         <p:txBody>
-          <a:bodyPr wrap="square" lIns="0" rIns="0" tIns="0" bIns="0">
+          <a:bodyPr wrap="square" lIns="0" tIns="0" rIns="0" bIns="0">
             <a:spAutoFit/>
           </a:bodyPr>
           <a:lstStyle/>
@@ -12158,7 +13132,7 @@
           <a:noFill/>
         </p:spPr>
         <p:txBody>
-          <a:bodyPr wrap="square" lIns="0" rIns="0" tIns="0" bIns="0">
+          <a:bodyPr wrap="square" lIns="0" tIns="0" rIns="0" bIns="0">
             <a:spAutoFit/>
           </a:bodyPr>
           <a:lstStyle/>
@@ -12256,7 +13230,7 @@
           <a:noFill/>
         </p:spPr>
         <p:txBody>
-          <a:bodyPr wrap="square" lIns="0" rIns="0" tIns="0" bIns="0">
+          <a:bodyPr wrap="square" lIns="0" tIns="0" rIns="0" bIns="0">
             <a:spAutoFit/>
           </a:bodyPr>
           <a:lstStyle/>
@@ -12291,7 +13265,7 @@
 </file>
 
 <file path=ppt/slides/slide5.xml><?xml version="1.0" encoding="utf-8"?>
-<p:sld xmlns:a="http://schemas.openxmlformats.org/drawingml/2006/main" xmlns:p="http://schemas.openxmlformats.org/presentationml/2006/main" xmlns:r="http://schemas.openxmlformats.org/officeDocument/2006/relationships">
+<p:sld xmlns:a="http://schemas.openxmlformats.org/drawingml/2006/main" xmlns:r="http://schemas.openxmlformats.org/officeDocument/2006/relationships" xmlns:p="http://schemas.openxmlformats.org/presentationml/2006/main">
   <p:cSld>
     <p:spTree>
       <p:nvGrpSpPr>
@@ -12299,7 +13273,14 @@
         <p:cNvGrpSpPr/>
         <p:nvPr/>
       </p:nvGrpSpPr>
-      <p:grpSpPr/>
+      <p:grpSpPr>
+        <a:xfrm>
+          <a:off x="0" y="0"/>
+          <a:ext cx="0" cy="0"/>
+          <a:chOff x="0" y="0"/>
+          <a:chExt cx="0" cy="0"/>
+        </a:xfrm>
+      </p:grpSpPr>
       <p:sp>
         <p:nvSpPr>
           <p:cNvPr id="2" name="TextBox 1"/>
@@ -12317,7 +13298,7 @@
           <a:noFill/>
         </p:spPr>
         <p:txBody>
-          <a:bodyPr wrap="square" lIns="0" rIns="0" tIns="0" bIns="0">
+          <a:bodyPr wrap="square" lIns="0" tIns="0" rIns="0" bIns="0">
             <a:spAutoFit/>
           </a:bodyPr>
           <a:lstStyle/>
@@ -12351,7 +13332,7 @@
           <a:noFill/>
         </p:spPr>
         <p:txBody>
-          <a:bodyPr wrap="square" lIns="0" rIns="0" tIns="0" bIns="0">
+          <a:bodyPr wrap="square" lIns="0" tIns="0" rIns="0" bIns="0">
             <a:spAutoFit/>
           </a:bodyPr>
           <a:lstStyle/>
@@ -12385,7 +13366,7 @@
           <a:noFill/>
         </p:spPr>
         <p:txBody>
-          <a:bodyPr wrap="square" lIns="0" rIns="0" tIns="0" bIns="0">
+          <a:bodyPr wrap="square" lIns="0" tIns="0" rIns="0" bIns="0">
             <a:spAutoFit/>
           </a:bodyPr>
           <a:lstStyle/>
@@ -12420,7 +13401,7 @@
           <a:noFill/>
         </p:spPr>
         <p:txBody>
-          <a:bodyPr wrap="square" lIns="0" rIns="0" tIns="0" bIns="0">
+          <a:bodyPr wrap="square" lIns="0" tIns="0" rIns="0" bIns="0">
             <a:spAutoFit/>
           </a:bodyPr>
           <a:lstStyle/>
@@ -12456,18 +13437,60 @@
                 <a:tableStyleId>{5C22544A-7EE6-4342-B048-85BDC9FD1C3A}</a:tableStyleId>
               </a:tblPr>
               <a:tblGrid>
-                <a:gridCol w="969544"/>
-                <a:gridCol w="4041211"/>
-                <a:gridCol w="969544"/>
-                <a:gridCol w="1442826"/>
-                <a:gridCol w="1547321"/>
-                <a:gridCol w="969544"/>
-                <a:gridCol w="1117849"/>
+                <a:gridCol w="969544">
+                  <a:extLst>
+                    <a:ext uri="{9D8B030D-6E8A-4147-A177-3AD203B41FA5}">
+                      <a16:colId xmlns:a16="http://schemas.microsoft.com/office/drawing/2014/main" val="20000"/>
+                    </a:ext>
+                  </a:extLst>
+                </a:gridCol>
+                <a:gridCol w="4041211">
+                  <a:extLst>
+                    <a:ext uri="{9D8B030D-6E8A-4147-A177-3AD203B41FA5}">
+                      <a16:colId xmlns:a16="http://schemas.microsoft.com/office/drawing/2014/main" val="20001"/>
+                    </a:ext>
+                  </a:extLst>
+                </a:gridCol>
+                <a:gridCol w="969544">
+                  <a:extLst>
+                    <a:ext uri="{9D8B030D-6E8A-4147-A177-3AD203B41FA5}">
+                      <a16:colId xmlns:a16="http://schemas.microsoft.com/office/drawing/2014/main" val="20002"/>
+                    </a:ext>
+                  </a:extLst>
+                </a:gridCol>
+                <a:gridCol w="1442826">
+                  <a:extLst>
+                    <a:ext uri="{9D8B030D-6E8A-4147-A177-3AD203B41FA5}">
+                      <a16:colId xmlns:a16="http://schemas.microsoft.com/office/drawing/2014/main" val="20003"/>
+                    </a:ext>
+                  </a:extLst>
+                </a:gridCol>
+                <a:gridCol w="1547321">
+                  <a:extLst>
+                    <a:ext uri="{9D8B030D-6E8A-4147-A177-3AD203B41FA5}">
+                      <a16:colId xmlns:a16="http://schemas.microsoft.com/office/drawing/2014/main" val="20004"/>
+                    </a:ext>
+                  </a:extLst>
+                </a:gridCol>
+                <a:gridCol w="969544">
+                  <a:extLst>
+                    <a:ext uri="{9D8B030D-6E8A-4147-A177-3AD203B41FA5}">
+                      <a16:colId xmlns:a16="http://schemas.microsoft.com/office/drawing/2014/main" val="20005"/>
+                    </a:ext>
+                  </a:extLst>
+                </a:gridCol>
+                <a:gridCol w="1117849">
+                  <a:extLst>
+                    <a:ext uri="{9D8B030D-6E8A-4147-A177-3AD203B41FA5}">
+                      <a16:colId xmlns:a16="http://schemas.microsoft.com/office/drawing/2014/main" val="20006"/>
+                    </a:ext>
+                  </a:extLst>
+                </a:gridCol>
               </a:tblGrid>
               <a:tr h="321818">
                 <a:tc>
                   <a:txBody>
-                    <a:bodyPr wrap="square"/>
+                    <a:bodyPr/>
                     <a:lstStyle/>
                     <a:p>
                       <a:pPr algn="ctr"/>
@@ -12490,7 +13513,7 @@
                 </a:tc>
                 <a:tc>
                   <a:txBody>
-                    <a:bodyPr wrap="square"/>
+                    <a:bodyPr/>
                     <a:lstStyle/>
                     <a:p>
                       <a:pPr algn="ctr"/>
@@ -12513,7 +13536,7 @@
                 </a:tc>
                 <a:tc>
                   <a:txBody>
-                    <a:bodyPr wrap="square"/>
+                    <a:bodyPr/>
                     <a:lstStyle/>
                     <a:p>
                       <a:pPr algn="ctr"/>
@@ -12536,7 +13559,7 @@
                 </a:tc>
                 <a:tc>
                   <a:txBody>
-                    <a:bodyPr wrap="square"/>
+                    <a:bodyPr/>
                     <a:lstStyle/>
                     <a:p>
                       <a:pPr algn="ctr"/>
@@ -12559,7 +13582,7 @@
                 </a:tc>
                 <a:tc>
                   <a:txBody>
-                    <a:bodyPr wrap="square"/>
+                    <a:bodyPr/>
                     <a:lstStyle/>
                     <a:p>
                       <a:pPr algn="ctr"/>
@@ -12582,7 +13605,7 @@
                 </a:tc>
                 <a:tc>
                   <a:txBody>
-                    <a:bodyPr wrap="square"/>
+                    <a:bodyPr/>
                     <a:lstStyle/>
                     <a:p>
                       <a:pPr algn="ctr"/>
@@ -12605,7 +13628,7 @@
                 </a:tc>
                 <a:tc>
                   <a:txBody>
-                    <a:bodyPr wrap="square"/>
+                    <a:bodyPr/>
                     <a:lstStyle/>
                     <a:p>
                       <a:pPr algn="ctr"/>
@@ -12626,11 +13649,16 @@
                     </a:solidFill>
                   </a:tcPr>
                 </a:tc>
+                <a:extLst>
+                  <a:ext uri="{0D108BD9-81ED-4DB2-BD59-A6C34878D82A}">
+                    <a16:rowId xmlns:a16="http://schemas.microsoft.com/office/drawing/2014/main" val="10000"/>
+                  </a:ext>
+                </a:extLst>
               </a:tr>
               <a:tr h="321818">
                 <a:tc>
                   <a:txBody>
-                    <a:bodyPr wrap="square"/>
+                    <a:bodyPr/>
                     <a:lstStyle/>
                     <a:p>
                       <a:pPr algn="ctr"/>
@@ -12653,7 +13681,7 @@
                 </a:tc>
                 <a:tc>
                   <a:txBody>
-                    <a:bodyPr wrap="square"/>
+                    <a:bodyPr/>
                     <a:lstStyle/>
                     <a:p>
                       <a:pPr algn="l"/>
@@ -12676,7 +13704,7 @@
                 </a:tc>
                 <a:tc>
                   <a:txBody>
-                    <a:bodyPr wrap="square"/>
+                    <a:bodyPr/>
                     <a:lstStyle/>
                     <a:p>
                       <a:pPr algn="ctr"/>
@@ -12699,7 +13727,7 @@
                 </a:tc>
                 <a:tc>
                   <a:txBody>
-                    <a:bodyPr wrap="square"/>
+                    <a:bodyPr/>
                     <a:lstStyle/>
                     <a:p>
                       <a:pPr algn="ctr"/>
@@ -12722,7 +13750,7 @@
                 </a:tc>
                 <a:tc>
                   <a:txBody>
-                    <a:bodyPr wrap="square"/>
+                    <a:bodyPr/>
                     <a:lstStyle/>
                     <a:p>
                       <a:pPr algn="ctr"/>
@@ -12745,7 +13773,7 @@
                 </a:tc>
                 <a:tc>
                   <a:txBody>
-                    <a:bodyPr wrap="square"/>
+                    <a:bodyPr/>
                     <a:lstStyle/>
                     <a:p>
                       <a:pPr algn="ctr"/>
@@ -12768,7 +13796,7 @@
                 </a:tc>
                 <a:tc>
                   <a:txBody>
-                    <a:bodyPr wrap="square"/>
+                    <a:bodyPr/>
                     <a:lstStyle/>
                     <a:p>
                       <a:pPr algn="ctr"/>
@@ -12790,11 +13818,16 @@
                     </a:solidFill>
                   </a:tcPr>
                 </a:tc>
+                <a:extLst>
+                  <a:ext uri="{0D108BD9-81ED-4DB2-BD59-A6C34878D82A}">
+                    <a16:rowId xmlns:a16="http://schemas.microsoft.com/office/drawing/2014/main" val="10001"/>
+                  </a:ext>
+                </a:extLst>
               </a:tr>
               <a:tr h="321818">
                 <a:tc>
                   <a:txBody>
-                    <a:bodyPr wrap="square"/>
+                    <a:bodyPr/>
                     <a:lstStyle/>
                     <a:p>
                       <a:pPr algn="ctr"/>
@@ -12817,7 +13850,7 @@
                 </a:tc>
                 <a:tc>
                   <a:txBody>
-                    <a:bodyPr wrap="square"/>
+                    <a:bodyPr/>
                     <a:lstStyle/>
                     <a:p>
                       <a:pPr algn="l"/>
@@ -12840,7 +13873,7 @@
                 </a:tc>
                 <a:tc>
                   <a:txBody>
-                    <a:bodyPr wrap="square"/>
+                    <a:bodyPr/>
                     <a:lstStyle/>
                     <a:p>
                       <a:pPr algn="ctr"/>
@@ -12863,7 +13896,7 @@
                 </a:tc>
                 <a:tc>
                   <a:txBody>
-                    <a:bodyPr wrap="square"/>
+                    <a:bodyPr/>
                     <a:lstStyle/>
                     <a:p>
                       <a:pPr algn="ctr"/>
@@ -12886,7 +13919,7 @@
                 </a:tc>
                 <a:tc>
                   <a:txBody>
-                    <a:bodyPr wrap="square"/>
+                    <a:bodyPr/>
                     <a:lstStyle/>
                     <a:p>
                       <a:pPr algn="ctr"/>
@@ -12909,7 +13942,7 @@
                 </a:tc>
                 <a:tc>
                   <a:txBody>
-                    <a:bodyPr wrap="square"/>
+                    <a:bodyPr/>
                     <a:lstStyle/>
                     <a:p>
                       <a:pPr algn="ctr"/>
@@ -12932,7 +13965,7 @@
                 </a:tc>
                 <a:tc>
                   <a:txBody>
-                    <a:bodyPr wrap="square"/>
+                    <a:bodyPr/>
                     <a:lstStyle/>
                     <a:p>
                       <a:pPr algn="ctr"/>
@@ -12954,11 +13987,16 @@
                     </a:solidFill>
                   </a:tcPr>
                 </a:tc>
+                <a:extLst>
+                  <a:ext uri="{0D108BD9-81ED-4DB2-BD59-A6C34878D82A}">
+                    <a16:rowId xmlns:a16="http://schemas.microsoft.com/office/drawing/2014/main" val="10002"/>
+                  </a:ext>
+                </a:extLst>
               </a:tr>
               <a:tr h="321818">
                 <a:tc>
                   <a:txBody>
-                    <a:bodyPr wrap="square"/>
+                    <a:bodyPr/>
                     <a:lstStyle/>
                     <a:p>
                       <a:pPr algn="ctr"/>
@@ -12981,7 +14019,7 @@
                 </a:tc>
                 <a:tc>
                   <a:txBody>
-                    <a:bodyPr wrap="square"/>
+                    <a:bodyPr/>
                     <a:lstStyle/>
                     <a:p>
                       <a:pPr algn="l"/>
@@ -13004,7 +14042,7 @@
                 </a:tc>
                 <a:tc>
                   <a:txBody>
-                    <a:bodyPr wrap="square"/>
+                    <a:bodyPr/>
                     <a:lstStyle/>
                     <a:p>
                       <a:pPr algn="ctr"/>
@@ -13027,7 +14065,7 @@
                 </a:tc>
                 <a:tc>
                   <a:txBody>
-                    <a:bodyPr wrap="square"/>
+                    <a:bodyPr/>
                     <a:lstStyle/>
                     <a:p>
                       <a:pPr algn="ctr"/>
@@ -13050,7 +14088,7 @@
                 </a:tc>
                 <a:tc>
                   <a:txBody>
-                    <a:bodyPr wrap="square"/>
+                    <a:bodyPr/>
                     <a:lstStyle/>
                     <a:p>
                       <a:pPr algn="ctr"/>
@@ -13073,7 +14111,7 @@
                 </a:tc>
                 <a:tc>
                   <a:txBody>
-                    <a:bodyPr wrap="square"/>
+                    <a:bodyPr/>
                     <a:lstStyle/>
                     <a:p>
                       <a:pPr algn="ctr"/>
@@ -13096,7 +14134,7 @@
                 </a:tc>
                 <a:tc>
                   <a:txBody>
-                    <a:bodyPr wrap="square"/>
+                    <a:bodyPr/>
                     <a:lstStyle/>
                     <a:p>
                       <a:pPr algn="ctr"/>
@@ -13118,11 +14156,16 @@
                     </a:solidFill>
                   </a:tcPr>
                 </a:tc>
+                <a:extLst>
+                  <a:ext uri="{0D108BD9-81ED-4DB2-BD59-A6C34878D82A}">
+                    <a16:rowId xmlns:a16="http://schemas.microsoft.com/office/drawing/2014/main" val="10003"/>
+                  </a:ext>
+                </a:extLst>
               </a:tr>
               <a:tr h="321818">
                 <a:tc>
                   <a:txBody>
-                    <a:bodyPr wrap="square"/>
+                    <a:bodyPr/>
                     <a:lstStyle/>
                     <a:p>
                       <a:pPr algn="ctr"/>
@@ -13145,7 +14188,7 @@
                 </a:tc>
                 <a:tc>
                   <a:txBody>
-                    <a:bodyPr wrap="square"/>
+                    <a:bodyPr/>
                     <a:lstStyle/>
                     <a:p>
                       <a:pPr algn="l"/>
@@ -13168,7 +14211,7 @@
                 </a:tc>
                 <a:tc>
                   <a:txBody>
-                    <a:bodyPr wrap="square"/>
+                    <a:bodyPr/>
                     <a:lstStyle/>
                     <a:p>
                       <a:pPr algn="ctr"/>
@@ -13191,7 +14234,7 @@
                 </a:tc>
                 <a:tc>
                   <a:txBody>
-                    <a:bodyPr wrap="square"/>
+                    <a:bodyPr/>
                     <a:lstStyle/>
                     <a:p>
                       <a:pPr algn="ctr"/>
@@ -13214,7 +14257,7 @@
                 </a:tc>
                 <a:tc>
                   <a:txBody>
-                    <a:bodyPr wrap="square"/>
+                    <a:bodyPr/>
                     <a:lstStyle/>
                     <a:p>
                       <a:pPr algn="ctr"/>
@@ -13237,7 +14280,7 @@
                 </a:tc>
                 <a:tc>
                   <a:txBody>
-                    <a:bodyPr wrap="square"/>
+                    <a:bodyPr/>
                     <a:lstStyle/>
                     <a:p>
                       <a:pPr algn="ctr"/>
@@ -13260,7 +14303,7 @@
                 </a:tc>
                 <a:tc>
                   <a:txBody>
-                    <a:bodyPr wrap="square"/>
+                    <a:bodyPr/>
                     <a:lstStyle/>
                     <a:p>
                       <a:pPr algn="ctr"/>
@@ -13282,11 +14325,16 @@
                     </a:solidFill>
                   </a:tcPr>
                 </a:tc>
+                <a:extLst>
+                  <a:ext uri="{0D108BD9-81ED-4DB2-BD59-A6C34878D82A}">
+                    <a16:rowId xmlns:a16="http://schemas.microsoft.com/office/drawing/2014/main" val="10004"/>
+                  </a:ext>
+                </a:extLst>
               </a:tr>
               <a:tr h="321818">
                 <a:tc>
                   <a:txBody>
-                    <a:bodyPr wrap="square"/>
+                    <a:bodyPr/>
                     <a:lstStyle/>
                     <a:p>
                       <a:pPr algn="ctr"/>
@@ -13309,7 +14357,7 @@
                 </a:tc>
                 <a:tc>
                   <a:txBody>
-                    <a:bodyPr wrap="square"/>
+                    <a:bodyPr/>
                     <a:lstStyle/>
                     <a:p>
                       <a:pPr algn="l"/>
@@ -13332,7 +14380,7 @@
                 </a:tc>
                 <a:tc>
                   <a:txBody>
-                    <a:bodyPr wrap="square"/>
+                    <a:bodyPr/>
                     <a:lstStyle/>
                     <a:p>
                       <a:pPr algn="ctr"/>
@@ -13355,7 +14403,7 @@
                 </a:tc>
                 <a:tc>
                   <a:txBody>
-                    <a:bodyPr wrap="square"/>
+                    <a:bodyPr/>
                     <a:lstStyle/>
                     <a:p>
                       <a:pPr algn="ctr"/>
@@ -13378,7 +14426,7 @@
                 </a:tc>
                 <a:tc>
                   <a:txBody>
-                    <a:bodyPr wrap="square"/>
+                    <a:bodyPr/>
                     <a:lstStyle/>
                     <a:p>
                       <a:pPr algn="ctr"/>
@@ -13401,7 +14449,7 @@
                 </a:tc>
                 <a:tc>
                   <a:txBody>
-                    <a:bodyPr wrap="square"/>
+                    <a:bodyPr/>
                     <a:lstStyle/>
                     <a:p>
                       <a:pPr algn="ctr"/>
@@ -13424,7 +14472,7 @@
                 </a:tc>
                 <a:tc>
                   <a:txBody>
-                    <a:bodyPr wrap="square"/>
+                    <a:bodyPr/>
                     <a:lstStyle/>
                     <a:p>
                       <a:pPr algn="ctr"/>
@@ -13446,11 +14494,16 @@
                     </a:solidFill>
                   </a:tcPr>
                 </a:tc>
+                <a:extLst>
+                  <a:ext uri="{0D108BD9-81ED-4DB2-BD59-A6C34878D82A}">
+                    <a16:rowId xmlns:a16="http://schemas.microsoft.com/office/drawing/2014/main" val="10005"/>
+                  </a:ext>
+                </a:extLst>
               </a:tr>
               <a:tr h="321818">
                 <a:tc>
                   <a:txBody>
-                    <a:bodyPr wrap="square"/>
+                    <a:bodyPr/>
                     <a:lstStyle/>
                     <a:p>
                       <a:pPr algn="ctr"/>
@@ -13473,7 +14526,7 @@
                 </a:tc>
                 <a:tc>
                   <a:txBody>
-                    <a:bodyPr wrap="square"/>
+                    <a:bodyPr/>
                     <a:lstStyle/>
                     <a:p>
                       <a:pPr algn="l"/>
@@ -13496,7 +14549,7 @@
                 </a:tc>
                 <a:tc>
                   <a:txBody>
-                    <a:bodyPr wrap="square"/>
+                    <a:bodyPr/>
                     <a:lstStyle/>
                     <a:p>
                       <a:pPr algn="ctr"/>
@@ -13519,7 +14572,7 @@
                 </a:tc>
                 <a:tc>
                   <a:txBody>
-                    <a:bodyPr wrap="square"/>
+                    <a:bodyPr/>
                     <a:lstStyle/>
                     <a:p>
                       <a:pPr algn="ctr"/>
@@ -13542,7 +14595,7 @@
                 </a:tc>
                 <a:tc>
                   <a:txBody>
-                    <a:bodyPr wrap="square"/>
+                    <a:bodyPr/>
                     <a:lstStyle/>
                     <a:p>
                       <a:pPr algn="ctr"/>
@@ -13565,7 +14618,7 @@
                 </a:tc>
                 <a:tc>
                   <a:txBody>
-                    <a:bodyPr wrap="square"/>
+                    <a:bodyPr/>
                     <a:lstStyle/>
                     <a:p>
                       <a:pPr algn="ctr"/>
@@ -13588,7 +14641,7 @@
                 </a:tc>
                 <a:tc>
                   <a:txBody>
-                    <a:bodyPr wrap="square"/>
+                    <a:bodyPr/>
                     <a:lstStyle/>
                     <a:p>
                       <a:pPr algn="ctr"/>
@@ -13610,11 +14663,16 @@
                     </a:solidFill>
                   </a:tcPr>
                 </a:tc>
+                <a:extLst>
+                  <a:ext uri="{0D108BD9-81ED-4DB2-BD59-A6C34878D82A}">
+                    <a16:rowId xmlns:a16="http://schemas.microsoft.com/office/drawing/2014/main" val="10006"/>
+                  </a:ext>
+                </a:extLst>
               </a:tr>
               <a:tr h="321818">
                 <a:tc>
                   <a:txBody>
-                    <a:bodyPr wrap="square"/>
+                    <a:bodyPr/>
                     <a:lstStyle/>
                     <a:p>
                       <a:pPr algn="ctr"/>
@@ -13637,7 +14695,7 @@
                 </a:tc>
                 <a:tc>
                   <a:txBody>
-                    <a:bodyPr wrap="square"/>
+                    <a:bodyPr/>
                     <a:lstStyle/>
                     <a:p>
                       <a:pPr algn="l"/>
@@ -13660,7 +14718,7 @@
                 </a:tc>
                 <a:tc>
                   <a:txBody>
-                    <a:bodyPr wrap="square"/>
+                    <a:bodyPr/>
                     <a:lstStyle/>
                     <a:p>
                       <a:pPr algn="ctr"/>
@@ -13683,7 +14741,7 @@
                 </a:tc>
                 <a:tc>
                   <a:txBody>
-                    <a:bodyPr wrap="square"/>
+                    <a:bodyPr/>
                     <a:lstStyle/>
                     <a:p>
                       <a:pPr algn="ctr"/>
@@ -13706,7 +14764,7 @@
                 </a:tc>
                 <a:tc>
                   <a:txBody>
-                    <a:bodyPr wrap="square"/>
+                    <a:bodyPr/>
                     <a:lstStyle/>
                     <a:p>
                       <a:pPr algn="ctr"/>
@@ -13729,7 +14787,7 @@
                 </a:tc>
                 <a:tc>
                   <a:txBody>
-                    <a:bodyPr wrap="square"/>
+                    <a:bodyPr/>
                     <a:lstStyle/>
                     <a:p>
                       <a:pPr algn="ctr"/>
@@ -13752,7 +14810,7 @@
                 </a:tc>
                 <a:tc>
                   <a:txBody>
-                    <a:bodyPr wrap="square"/>
+                    <a:bodyPr/>
                     <a:lstStyle/>
                     <a:p>
                       <a:pPr algn="ctr"/>
@@ -13774,11 +14832,16 @@
                     </a:solidFill>
                   </a:tcPr>
                 </a:tc>
+                <a:extLst>
+                  <a:ext uri="{0D108BD9-81ED-4DB2-BD59-A6C34878D82A}">
+                    <a16:rowId xmlns:a16="http://schemas.microsoft.com/office/drawing/2014/main" val="10007"/>
+                  </a:ext>
+                </a:extLst>
               </a:tr>
               <a:tr h="321818">
                 <a:tc>
                   <a:txBody>
-                    <a:bodyPr wrap="square"/>
+                    <a:bodyPr/>
                     <a:lstStyle/>
                     <a:p>
                       <a:pPr algn="ctr"/>
@@ -13801,7 +14864,7 @@
                 </a:tc>
                 <a:tc>
                   <a:txBody>
-                    <a:bodyPr wrap="square"/>
+                    <a:bodyPr/>
                     <a:lstStyle/>
                     <a:p>
                       <a:pPr algn="l"/>
@@ -13824,7 +14887,7 @@
                 </a:tc>
                 <a:tc>
                   <a:txBody>
-                    <a:bodyPr wrap="square"/>
+                    <a:bodyPr/>
                     <a:lstStyle/>
                     <a:p>
                       <a:pPr algn="ctr"/>
@@ -13847,7 +14910,7 @@
                 </a:tc>
                 <a:tc>
                   <a:txBody>
-                    <a:bodyPr wrap="square"/>
+                    <a:bodyPr/>
                     <a:lstStyle/>
                     <a:p>
                       <a:pPr algn="ctr"/>
@@ -13870,7 +14933,7 @@
                 </a:tc>
                 <a:tc>
                   <a:txBody>
-                    <a:bodyPr wrap="square"/>
+                    <a:bodyPr/>
                     <a:lstStyle/>
                     <a:p>
                       <a:pPr algn="ctr"/>
@@ -13893,7 +14956,7 @@
                 </a:tc>
                 <a:tc>
                   <a:txBody>
-                    <a:bodyPr wrap="square"/>
+                    <a:bodyPr/>
                     <a:lstStyle/>
                     <a:p>
                       <a:pPr algn="ctr"/>
@@ -13916,7 +14979,7 @@
                 </a:tc>
                 <a:tc>
                   <a:txBody>
-                    <a:bodyPr wrap="square"/>
+                    <a:bodyPr/>
                     <a:lstStyle/>
                     <a:p>
                       <a:pPr algn="ctr"/>
@@ -13938,6 +15001,11 @@
                     </a:solidFill>
                   </a:tcPr>
                 </a:tc>
+                <a:extLst>
+                  <a:ext uri="{0D108BD9-81ED-4DB2-BD59-A6C34878D82A}">
+                    <a16:rowId xmlns:a16="http://schemas.microsoft.com/office/drawing/2014/main" val="10008"/>
+                  </a:ext>
+                </a:extLst>
               </a:tr>
             </a:tbl>
           </a:graphicData>
@@ -13952,7 +15020,7 @@
 </file>
 
 <file path=ppt/slides/slide6.xml><?xml version="1.0" encoding="utf-8"?>
-<p:sld xmlns:a="http://schemas.openxmlformats.org/drawingml/2006/main" xmlns:p="http://schemas.openxmlformats.org/presentationml/2006/main" xmlns:r="http://schemas.openxmlformats.org/officeDocument/2006/relationships">
+<p:sld xmlns:a="http://schemas.openxmlformats.org/drawingml/2006/main" xmlns:r="http://schemas.openxmlformats.org/officeDocument/2006/relationships" xmlns:p="http://schemas.openxmlformats.org/presentationml/2006/main">
   <p:cSld>
     <p:spTree>
       <p:nvGrpSpPr>
@@ -13960,7 +15028,14 @@
         <p:cNvGrpSpPr/>
         <p:nvPr/>
       </p:nvGrpSpPr>
-      <p:grpSpPr/>
+      <p:grpSpPr>
+        <a:xfrm>
+          <a:off x="0" y="0"/>
+          <a:ext cx="0" cy="0"/>
+          <a:chOff x="0" y="0"/>
+          <a:chExt cx="0" cy="0"/>
+        </a:xfrm>
+      </p:grpSpPr>
       <p:sp>
         <p:nvSpPr>
           <p:cNvPr id="2" name="TextBox 1"/>
@@ -13978,7 +15053,7 @@
           <a:noFill/>
         </p:spPr>
         <p:txBody>
-          <a:bodyPr wrap="square" lIns="0" rIns="0" tIns="0" bIns="0">
+          <a:bodyPr wrap="square" lIns="0" tIns="0" rIns="0" bIns="0">
             <a:spAutoFit/>
           </a:bodyPr>
           <a:lstStyle/>
@@ -14012,7 +15087,7 @@
           <a:noFill/>
         </p:spPr>
         <p:txBody>
-          <a:bodyPr wrap="square" lIns="0" rIns="0" tIns="0" bIns="0">
+          <a:bodyPr wrap="square" lIns="0" tIns="0" rIns="0" bIns="0">
             <a:spAutoFit/>
           </a:bodyPr>
           <a:lstStyle/>
@@ -14046,7 +15121,7 @@
           <a:noFill/>
         </p:spPr>
         <p:txBody>
-          <a:bodyPr wrap="square" lIns="0" rIns="0" tIns="0" bIns="0">
+          <a:bodyPr wrap="square" lIns="0" tIns="0" rIns="0" bIns="0">
             <a:spAutoFit/>
           </a:bodyPr>
           <a:lstStyle/>
@@ -14081,7 +15156,7 @@
           <a:noFill/>
         </p:spPr>
         <p:txBody>
-          <a:bodyPr wrap="square" lIns="0" rIns="0" tIns="0" bIns="0">
+          <a:bodyPr wrap="square" lIns="0" tIns="0" rIns="0" bIns="0">
             <a:spAutoFit/>
           </a:bodyPr>
           <a:lstStyle/>
@@ -14117,18 +15192,60 @@
                 <a:tableStyleId>{5C22544A-7EE6-4342-B048-85BDC9FD1C3A}</a:tableStyleId>
               </a:tblPr>
               <a:tblGrid>
-                <a:gridCol w="960646"/>
-                <a:gridCol w="4063535"/>
-                <a:gridCol w="960646"/>
-                <a:gridCol w="1497007"/>
-                <a:gridCol w="1611484"/>
-                <a:gridCol w="960646"/>
-                <a:gridCol w="1003875"/>
+                <a:gridCol w="960646">
+                  <a:extLst>
+                    <a:ext uri="{9D8B030D-6E8A-4147-A177-3AD203B41FA5}">
+                      <a16:colId xmlns:a16="http://schemas.microsoft.com/office/drawing/2014/main" val="20000"/>
+                    </a:ext>
+                  </a:extLst>
+                </a:gridCol>
+                <a:gridCol w="4063535">
+                  <a:extLst>
+                    <a:ext uri="{9D8B030D-6E8A-4147-A177-3AD203B41FA5}">
+                      <a16:colId xmlns:a16="http://schemas.microsoft.com/office/drawing/2014/main" val="20001"/>
+                    </a:ext>
+                  </a:extLst>
+                </a:gridCol>
+                <a:gridCol w="960646">
+                  <a:extLst>
+                    <a:ext uri="{9D8B030D-6E8A-4147-A177-3AD203B41FA5}">
+                      <a16:colId xmlns:a16="http://schemas.microsoft.com/office/drawing/2014/main" val="20002"/>
+                    </a:ext>
+                  </a:extLst>
+                </a:gridCol>
+                <a:gridCol w="1497007">
+                  <a:extLst>
+                    <a:ext uri="{9D8B030D-6E8A-4147-A177-3AD203B41FA5}">
+                      <a16:colId xmlns:a16="http://schemas.microsoft.com/office/drawing/2014/main" val="20003"/>
+                    </a:ext>
+                  </a:extLst>
+                </a:gridCol>
+                <a:gridCol w="1611484">
+                  <a:extLst>
+                    <a:ext uri="{9D8B030D-6E8A-4147-A177-3AD203B41FA5}">
+                      <a16:colId xmlns:a16="http://schemas.microsoft.com/office/drawing/2014/main" val="20004"/>
+                    </a:ext>
+                  </a:extLst>
+                </a:gridCol>
+                <a:gridCol w="960646">
+                  <a:extLst>
+                    <a:ext uri="{9D8B030D-6E8A-4147-A177-3AD203B41FA5}">
+                      <a16:colId xmlns:a16="http://schemas.microsoft.com/office/drawing/2014/main" val="20005"/>
+                    </a:ext>
+                  </a:extLst>
+                </a:gridCol>
+                <a:gridCol w="1003875">
+                  <a:extLst>
+                    <a:ext uri="{9D8B030D-6E8A-4147-A177-3AD203B41FA5}">
+                      <a16:colId xmlns:a16="http://schemas.microsoft.com/office/drawing/2014/main" val="20006"/>
+                    </a:ext>
+                  </a:extLst>
+                </a:gridCol>
               </a:tblGrid>
               <a:tr h="321818">
                 <a:tc>
                   <a:txBody>
-                    <a:bodyPr wrap="square"/>
+                    <a:bodyPr/>
                     <a:lstStyle/>
                     <a:p>
                       <a:pPr algn="ctr"/>
@@ -14151,7 +15268,7 @@
                 </a:tc>
                 <a:tc>
                   <a:txBody>
-                    <a:bodyPr wrap="square"/>
+                    <a:bodyPr/>
                     <a:lstStyle/>
                     <a:p>
                       <a:pPr algn="ctr"/>
@@ -14174,7 +15291,7 @@
                 </a:tc>
                 <a:tc>
                   <a:txBody>
-                    <a:bodyPr wrap="square"/>
+                    <a:bodyPr/>
                     <a:lstStyle/>
                     <a:p>
                       <a:pPr algn="ctr"/>
@@ -14197,7 +15314,7 @@
                 </a:tc>
                 <a:tc>
                   <a:txBody>
-                    <a:bodyPr wrap="square"/>
+                    <a:bodyPr/>
                     <a:lstStyle/>
                     <a:p>
                       <a:pPr algn="ctr"/>
@@ -14220,7 +15337,7 @@
                 </a:tc>
                 <a:tc>
                   <a:txBody>
-                    <a:bodyPr wrap="square"/>
+                    <a:bodyPr/>
                     <a:lstStyle/>
                     <a:p>
                       <a:pPr algn="ctr"/>
@@ -14243,7 +15360,7 @@
                 </a:tc>
                 <a:tc>
                   <a:txBody>
-                    <a:bodyPr wrap="square"/>
+                    <a:bodyPr/>
                     <a:lstStyle/>
                     <a:p>
                       <a:pPr algn="ctr"/>
@@ -14266,7 +15383,7 @@
                 </a:tc>
                 <a:tc>
                   <a:txBody>
-                    <a:bodyPr wrap="square"/>
+                    <a:bodyPr/>
                     <a:lstStyle/>
                     <a:p>
                       <a:pPr algn="ctr"/>
@@ -14287,11 +15404,16 @@
                     </a:solidFill>
                   </a:tcPr>
                 </a:tc>
+                <a:extLst>
+                  <a:ext uri="{0D108BD9-81ED-4DB2-BD59-A6C34878D82A}">
+                    <a16:rowId xmlns:a16="http://schemas.microsoft.com/office/drawing/2014/main" val="10000"/>
+                  </a:ext>
+                </a:extLst>
               </a:tr>
               <a:tr h="321818">
                 <a:tc>
                   <a:txBody>
-                    <a:bodyPr wrap="square"/>
+                    <a:bodyPr/>
                     <a:lstStyle/>
                     <a:p>
                       <a:pPr algn="ctr"/>
@@ -14314,7 +15436,7 @@
                 </a:tc>
                 <a:tc>
                   <a:txBody>
-                    <a:bodyPr wrap="square"/>
+                    <a:bodyPr/>
                     <a:lstStyle/>
                     <a:p>
                       <a:pPr algn="l"/>
@@ -14337,7 +15459,7 @@
                 </a:tc>
                 <a:tc>
                   <a:txBody>
-                    <a:bodyPr wrap="square"/>
+                    <a:bodyPr/>
                     <a:lstStyle/>
                     <a:p>
                       <a:pPr algn="ctr"/>
@@ -14360,7 +15482,7 @@
                 </a:tc>
                 <a:tc>
                   <a:txBody>
-                    <a:bodyPr wrap="square"/>
+                    <a:bodyPr/>
                     <a:lstStyle/>
                     <a:p>
                       <a:pPr algn="ctr"/>
@@ -14383,7 +15505,7 @@
                 </a:tc>
                 <a:tc>
                   <a:txBody>
-                    <a:bodyPr wrap="square"/>
+                    <a:bodyPr/>
                     <a:lstStyle/>
                     <a:p>
                       <a:pPr algn="ctr"/>
@@ -14406,7 +15528,7 @@
                 </a:tc>
                 <a:tc>
                   <a:txBody>
-                    <a:bodyPr wrap="square"/>
+                    <a:bodyPr/>
                     <a:lstStyle/>
                     <a:p>
                       <a:pPr algn="ctr"/>
@@ -14429,7 +15551,7 @@
                 </a:tc>
                 <a:tc>
                   <a:txBody>
-                    <a:bodyPr wrap="square"/>
+                    <a:bodyPr/>
                     <a:lstStyle/>
                     <a:p>
                       <a:pPr algn="ctr"/>
@@ -14451,11 +15573,16 @@
                     </a:solidFill>
                   </a:tcPr>
                 </a:tc>
+                <a:extLst>
+                  <a:ext uri="{0D108BD9-81ED-4DB2-BD59-A6C34878D82A}">
+                    <a16:rowId xmlns:a16="http://schemas.microsoft.com/office/drawing/2014/main" val="10001"/>
+                  </a:ext>
+                </a:extLst>
               </a:tr>
               <a:tr h="321818">
                 <a:tc>
                   <a:txBody>
-                    <a:bodyPr wrap="square"/>
+                    <a:bodyPr/>
                     <a:lstStyle/>
                     <a:p>
                       <a:pPr algn="ctr"/>
@@ -14478,7 +15605,7 @@
                 </a:tc>
                 <a:tc>
                   <a:txBody>
-                    <a:bodyPr wrap="square"/>
+                    <a:bodyPr/>
                     <a:lstStyle/>
                     <a:p>
                       <a:pPr algn="l"/>
@@ -14501,7 +15628,7 @@
                 </a:tc>
                 <a:tc>
                   <a:txBody>
-                    <a:bodyPr wrap="square"/>
+                    <a:bodyPr/>
                     <a:lstStyle/>
                     <a:p>
                       <a:pPr algn="ctr"/>
@@ -14524,7 +15651,7 @@
                 </a:tc>
                 <a:tc>
                   <a:txBody>
-                    <a:bodyPr wrap="square"/>
+                    <a:bodyPr/>
                     <a:lstStyle/>
                     <a:p>
                       <a:pPr algn="ctr"/>
@@ -14547,7 +15674,7 @@
                 </a:tc>
                 <a:tc>
                   <a:txBody>
-                    <a:bodyPr wrap="square"/>
+                    <a:bodyPr/>
                     <a:lstStyle/>
                     <a:p>
                       <a:pPr algn="ctr"/>
@@ -14570,7 +15697,7 @@
                 </a:tc>
                 <a:tc>
                   <a:txBody>
-                    <a:bodyPr wrap="square"/>
+                    <a:bodyPr/>
                     <a:lstStyle/>
                     <a:p>
                       <a:pPr algn="ctr"/>
@@ -14593,7 +15720,7 @@
                 </a:tc>
                 <a:tc>
                   <a:txBody>
-                    <a:bodyPr wrap="square"/>
+                    <a:bodyPr/>
                     <a:lstStyle/>
                     <a:p>
                       <a:pPr algn="ctr"/>
@@ -14615,11 +15742,16 @@
                     </a:solidFill>
                   </a:tcPr>
                 </a:tc>
+                <a:extLst>
+                  <a:ext uri="{0D108BD9-81ED-4DB2-BD59-A6C34878D82A}">
+                    <a16:rowId xmlns:a16="http://schemas.microsoft.com/office/drawing/2014/main" val="10002"/>
+                  </a:ext>
+                </a:extLst>
               </a:tr>
               <a:tr h="321818">
                 <a:tc>
                   <a:txBody>
-                    <a:bodyPr wrap="square"/>
+                    <a:bodyPr/>
                     <a:lstStyle/>
                     <a:p>
                       <a:pPr algn="ctr"/>
@@ -14642,7 +15774,7 @@
                 </a:tc>
                 <a:tc>
                   <a:txBody>
-                    <a:bodyPr wrap="square"/>
+                    <a:bodyPr/>
                     <a:lstStyle/>
                     <a:p>
                       <a:pPr algn="l"/>
@@ -14665,7 +15797,7 @@
                 </a:tc>
                 <a:tc>
                   <a:txBody>
-                    <a:bodyPr wrap="square"/>
+                    <a:bodyPr/>
                     <a:lstStyle/>
                     <a:p>
                       <a:pPr algn="ctr"/>
@@ -14688,7 +15820,7 @@
                 </a:tc>
                 <a:tc>
                   <a:txBody>
-                    <a:bodyPr wrap="square"/>
+                    <a:bodyPr/>
                     <a:lstStyle/>
                     <a:p>
                       <a:pPr algn="ctr"/>
@@ -14711,7 +15843,7 @@
                 </a:tc>
                 <a:tc>
                   <a:txBody>
-                    <a:bodyPr wrap="square"/>
+                    <a:bodyPr/>
                     <a:lstStyle/>
                     <a:p>
                       <a:pPr algn="ctr"/>
@@ -14734,7 +15866,7 @@
                 </a:tc>
                 <a:tc>
                   <a:txBody>
-                    <a:bodyPr wrap="square"/>
+                    <a:bodyPr/>
                     <a:lstStyle/>
                     <a:p>
                       <a:pPr algn="ctr"/>
@@ -14757,7 +15889,7 @@
                 </a:tc>
                 <a:tc>
                   <a:txBody>
-                    <a:bodyPr wrap="square"/>
+                    <a:bodyPr/>
                     <a:lstStyle/>
                     <a:p>
                       <a:pPr algn="ctr"/>
@@ -14779,11 +15911,16 @@
                     </a:solidFill>
                   </a:tcPr>
                 </a:tc>
+                <a:extLst>
+                  <a:ext uri="{0D108BD9-81ED-4DB2-BD59-A6C34878D82A}">
+                    <a16:rowId xmlns:a16="http://schemas.microsoft.com/office/drawing/2014/main" val="10003"/>
+                  </a:ext>
+                </a:extLst>
               </a:tr>
               <a:tr h="321818">
                 <a:tc>
                   <a:txBody>
-                    <a:bodyPr wrap="square"/>
+                    <a:bodyPr/>
                     <a:lstStyle/>
                     <a:p>
                       <a:pPr algn="ctr"/>
@@ -14806,7 +15943,7 @@
                 </a:tc>
                 <a:tc>
                   <a:txBody>
-                    <a:bodyPr wrap="square"/>
+                    <a:bodyPr/>
                     <a:lstStyle/>
                     <a:p>
                       <a:pPr algn="l"/>
@@ -14829,7 +15966,7 @@
                 </a:tc>
                 <a:tc>
                   <a:txBody>
-                    <a:bodyPr wrap="square"/>
+                    <a:bodyPr/>
                     <a:lstStyle/>
                     <a:p>
                       <a:pPr algn="ctr"/>
@@ -14852,7 +15989,7 @@
                 </a:tc>
                 <a:tc>
                   <a:txBody>
-                    <a:bodyPr wrap="square"/>
+                    <a:bodyPr/>
                     <a:lstStyle/>
                     <a:p>
                       <a:pPr algn="ctr"/>
@@ -14875,7 +16012,7 @@
                 </a:tc>
                 <a:tc>
                   <a:txBody>
-                    <a:bodyPr wrap="square"/>
+                    <a:bodyPr/>
                     <a:lstStyle/>
                     <a:p>
                       <a:pPr algn="ctr"/>
@@ -14898,7 +16035,7 @@
                 </a:tc>
                 <a:tc>
                   <a:txBody>
-                    <a:bodyPr wrap="square"/>
+                    <a:bodyPr/>
                     <a:lstStyle/>
                     <a:p>
                       <a:pPr algn="ctr"/>
@@ -14921,7 +16058,7 @@
                 </a:tc>
                 <a:tc>
                   <a:txBody>
-                    <a:bodyPr wrap="square"/>
+                    <a:bodyPr/>
                     <a:lstStyle/>
                     <a:p>
                       <a:pPr algn="ctr"/>
@@ -14943,11 +16080,16 @@
                     </a:solidFill>
                   </a:tcPr>
                 </a:tc>
+                <a:extLst>
+                  <a:ext uri="{0D108BD9-81ED-4DB2-BD59-A6C34878D82A}">
+                    <a16:rowId xmlns:a16="http://schemas.microsoft.com/office/drawing/2014/main" val="10004"/>
+                  </a:ext>
+                </a:extLst>
               </a:tr>
               <a:tr h="321818">
                 <a:tc>
                   <a:txBody>
-                    <a:bodyPr wrap="square"/>
+                    <a:bodyPr/>
                     <a:lstStyle/>
                     <a:p>
                       <a:pPr algn="ctr"/>
@@ -14970,7 +16112,7 @@
                 </a:tc>
                 <a:tc>
                   <a:txBody>
-                    <a:bodyPr wrap="square"/>
+                    <a:bodyPr/>
                     <a:lstStyle/>
                     <a:p>
                       <a:pPr algn="l"/>
@@ -14993,7 +16135,7 @@
                 </a:tc>
                 <a:tc>
                   <a:txBody>
-                    <a:bodyPr wrap="square"/>
+                    <a:bodyPr/>
                     <a:lstStyle/>
                     <a:p>
                       <a:pPr algn="ctr"/>
@@ -15016,7 +16158,7 @@
                 </a:tc>
                 <a:tc>
                   <a:txBody>
-                    <a:bodyPr wrap="square"/>
+                    <a:bodyPr/>
                     <a:lstStyle/>
                     <a:p>
                       <a:pPr algn="ctr"/>
@@ -15039,7 +16181,7 @@
                 </a:tc>
                 <a:tc>
                   <a:txBody>
-                    <a:bodyPr wrap="square"/>
+                    <a:bodyPr/>
                     <a:lstStyle/>
                     <a:p>
                       <a:pPr algn="ctr"/>
@@ -15062,7 +16204,7 @@
                 </a:tc>
                 <a:tc>
                   <a:txBody>
-                    <a:bodyPr wrap="square"/>
+                    <a:bodyPr/>
                     <a:lstStyle/>
                     <a:p>
                       <a:pPr algn="ctr"/>
@@ -15085,7 +16227,7 @@
                 </a:tc>
                 <a:tc>
                   <a:txBody>
-                    <a:bodyPr wrap="square"/>
+                    <a:bodyPr/>
                     <a:lstStyle/>
                     <a:p>
                       <a:pPr algn="ctr"/>
@@ -15107,11 +16249,16 @@
                     </a:solidFill>
                   </a:tcPr>
                 </a:tc>
+                <a:extLst>
+                  <a:ext uri="{0D108BD9-81ED-4DB2-BD59-A6C34878D82A}">
+                    <a16:rowId xmlns:a16="http://schemas.microsoft.com/office/drawing/2014/main" val="10005"/>
+                  </a:ext>
+                </a:extLst>
               </a:tr>
               <a:tr h="321818">
                 <a:tc>
                   <a:txBody>
-                    <a:bodyPr wrap="square"/>
+                    <a:bodyPr/>
                     <a:lstStyle/>
                     <a:p>
                       <a:pPr algn="ctr"/>
@@ -15134,7 +16281,7 @@
                 </a:tc>
                 <a:tc>
                   <a:txBody>
-                    <a:bodyPr wrap="square"/>
+                    <a:bodyPr/>
                     <a:lstStyle/>
                     <a:p>
                       <a:pPr algn="l"/>
@@ -15157,7 +16304,7 @@
                 </a:tc>
                 <a:tc>
                   <a:txBody>
-                    <a:bodyPr wrap="square"/>
+                    <a:bodyPr/>
                     <a:lstStyle/>
                     <a:p>
                       <a:pPr algn="ctr"/>
@@ -15180,7 +16327,7 @@
                 </a:tc>
                 <a:tc>
                   <a:txBody>
-                    <a:bodyPr wrap="square"/>
+                    <a:bodyPr/>
                     <a:lstStyle/>
                     <a:p>
                       <a:pPr algn="ctr"/>
@@ -15203,7 +16350,7 @@
                 </a:tc>
                 <a:tc>
                   <a:txBody>
-                    <a:bodyPr wrap="square"/>
+                    <a:bodyPr/>
                     <a:lstStyle/>
                     <a:p>
                       <a:pPr algn="ctr"/>
@@ -15226,7 +16373,7 @@
                 </a:tc>
                 <a:tc>
                   <a:txBody>
-                    <a:bodyPr wrap="square"/>
+                    <a:bodyPr/>
                     <a:lstStyle/>
                     <a:p>
                       <a:pPr algn="ctr"/>
@@ -15249,7 +16396,7 @@
                 </a:tc>
                 <a:tc>
                   <a:txBody>
-                    <a:bodyPr wrap="square"/>
+                    <a:bodyPr/>
                     <a:lstStyle/>
                     <a:p>
                       <a:pPr algn="ctr"/>
@@ -15271,11 +16418,16 @@
                     </a:solidFill>
                   </a:tcPr>
                 </a:tc>
+                <a:extLst>
+                  <a:ext uri="{0D108BD9-81ED-4DB2-BD59-A6C34878D82A}">
+                    <a16:rowId xmlns:a16="http://schemas.microsoft.com/office/drawing/2014/main" val="10006"/>
+                  </a:ext>
+                </a:extLst>
               </a:tr>
               <a:tr h="321818">
                 <a:tc>
                   <a:txBody>
-                    <a:bodyPr wrap="square"/>
+                    <a:bodyPr/>
                     <a:lstStyle/>
                     <a:p>
                       <a:pPr algn="ctr"/>
@@ -15298,7 +16450,7 @@
                 </a:tc>
                 <a:tc>
                   <a:txBody>
-                    <a:bodyPr wrap="square"/>
+                    <a:bodyPr/>
                     <a:lstStyle/>
                     <a:p>
                       <a:pPr algn="l"/>
@@ -15321,7 +16473,7 @@
                 </a:tc>
                 <a:tc>
                   <a:txBody>
-                    <a:bodyPr wrap="square"/>
+                    <a:bodyPr/>
                     <a:lstStyle/>
                     <a:p>
                       <a:pPr algn="ctr"/>
@@ -15344,7 +16496,7 @@
                 </a:tc>
                 <a:tc>
                   <a:txBody>
-                    <a:bodyPr wrap="square"/>
+                    <a:bodyPr/>
                     <a:lstStyle/>
                     <a:p>
                       <a:pPr algn="ctr"/>
@@ -15367,7 +16519,7 @@
                 </a:tc>
                 <a:tc>
                   <a:txBody>
-                    <a:bodyPr wrap="square"/>
+                    <a:bodyPr/>
                     <a:lstStyle/>
                     <a:p>
                       <a:pPr algn="ctr"/>
@@ -15390,7 +16542,7 @@
                 </a:tc>
                 <a:tc>
                   <a:txBody>
-                    <a:bodyPr wrap="square"/>
+                    <a:bodyPr/>
                     <a:lstStyle/>
                     <a:p>
                       <a:pPr algn="ctr"/>
@@ -15413,7 +16565,7 @@
                 </a:tc>
                 <a:tc>
                   <a:txBody>
-                    <a:bodyPr wrap="square"/>
+                    <a:bodyPr/>
                     <a:lstStyle/>
                     <a:p>
                       <a:pPr algn="ctr"/>
@@ -15435,6 +16587,11 @@
                     </a:solidFill>
                   </a:tcPr>
                 </a:tc>
+                <a:extLst>
+                  <a:ext uri="{0D108BD9-81ED-4DB2-BD59-A6C34878D82A}">
+                    <a16:rowId xmlns:a16="http://schemas.microsoft.com/office/drawing/2014/main" val="10007"/>
+                  </a:ext>
+                </a:extLst>
               </a:tr>
             </a:tbl>
           </a:graphicData>
@@ -15449,7 +16606,7 @@
 </file>
 
 <file path=ppt/slides/slide7.xml><?xml version="1.0" encoding="utf-8"?>
-<p:sld xmlns:a="http://schemas.openxmlformats.org/drawingml/2006/main" xmlns:p="http://schemas.openxmlformats.org/presentationml/2006/main" xmlns:r="http://schemas.openxmlformats.org/officeDocument/2006/relationships">
+<p:sld xmlns:a="http://schemas.openxmlformats.org/drawingml/2006/main" xmlns:r="http://schemas.openxmlformats.org/officeDocument/2006/relationships" xmlns:p="http://schemas.openxmlformats.org/presentationml/2006/main">
   <p:cSld>
     <p:spTree>
       <p:nvGrpSpPr>
@@ -15457,7 +16614,14 @@
         <p:cNvGrpSpPr/>
         <p:nvPr/>
       </p:nvGrpSpPr>
-      <p:grpSpPr/>
+      <p:grpSpPr>
+        <a:xfrm>
+          <a:off x="0" y="0"/>
+          <a:ext cx="0" cy="0"/>
+          <a:chOff x="0" y="0"/>
+          <a:chExt cx="0" cy="0"/>
+        </a:xfrm>
+      </p:grpSpPr>
       <p:sp>
         <p:nvSpPr>
           <p:cNvPr id="2" name="TextBox 1"/>
@@ -15475,7 +16639,7 @@
           <a:noFill/>
         </p:spPr>
         <p:txBody>
-          <a:bodyPr wrap="square" lIns="0" rIns="0" tIns="0" bIns="0">
+          <a:bodyPr wrap="square" lIns="0" tIns="0" rIns="0" bIns="0">
             <a:spAutoFit/>
           </a:bodyPr>
           <a:lstStyle/>
@@ -15509,7 +16673,7 @@
           <a:noFill/>
         </p:spPr>
         <p:txBody>
-          <a:bodyPr wrap="square" lIns="0" rIns="0" tIns="0" bIns="0">
+          <a:bodyPr wrap="square" lIns="0" tIns="0" rIns="0" bIns="0">
             <a:spAutoFit/>
           </a:bodyPr>
           <a:lstStyle/>
@@ -15543,7 +16707,7 @@
           <a:noFill/>
         </p:spPr>
         <p:txBody>
-          <a:bodyPr wrap="square" lIns="0" rIns="0" tIns="0" bIns="0">
+          <a:bodyPr wrap="square" lIns="0" tIns="0" rIns="0" bIns="0">
             <a:spAutoFit/>
           </a:bodyPr>
           <a:lstStyle/>
@@ -15578,7 +16742,7 @@
           <a:noFill/>
         </p:spPr>
         <p:txBody>
-          <a:bodyPr wrap="square" lIns="0" rIns="0" tIns="0" bIns="0">
+          <a:bodyPr wrap="square" lIns="0" tIns="0" rIns="0" bIns="0">
             <a:spAutoFit/>
           </a:bodyPr>
           <a:lstStyle/>
@@ -15601,7 +16765,13 @@
           <p:cNvGraphicFramePr>
             <a:graphicFrameLocks noGrp="1"/>
           </p:cNvGraphicFramePr>
-          <p:nvPr/>
+          <p:nvPr>
+            <p:extLst>
+              <p:ext uri="{D42A27DB-BD31-4B8C-83A1-F6EECF244321}">
+                <p14:modId xmlns:p14="http://schemas.microsoft.com/office/powerpoint/2010/main" val="2619181161"/>
+              </p:ext>
+            </p:extLst>
+          </p:nvPr>
         </p:nvGraphicFramePr>
         <p:xfrm>
           <a:off x="566928" y="1709928"/>
@@ -15614,15 +16784,39 @@
                 <a:tableStyleId>{5C22544A-7EE6-4342-B048-85BDC9FD1C3A}</a:tableStyleId>
               </a:tblPr>
               <a:tblGrid>
-                <a:gridCol w="821457"/>
-                <a:gridCol w="3975340"/>
-                <a:gridCol w="3916809"/>
-                <a:gridCol w="2344233"/>
+                <a:gridCol w="1344004">
+                  <a:extLst>
+                    <a:ext uri="{9D8B030D-6E8A-4147-A177-3AD203B41FA5}">
+                      <a16:colId xmlns:a16="http://schemas.microsoft.com/office/drawing/2014/main" val="20000"/>
+                    </a:ext>
+                  </a:extLst>
+                </a:gridCol>
+                <a:gridCol w="3452793">
+                  <a:extLst>
+                    <a:ext uri="{9D8B030D-6E8A-4147-A177-3AD203B41FA5}">
+                      <a16:colId xmlns:a16="http://schemas.microsoft.com/office/drawing/2014/main" val="20001"/>
+                    </a:ext>
+                  </a:extLst>
+                </a:gridCol>
+                <a:gridCol w="3916809">
+                  <a:extLst>
+                    <a:ext uri="{9D8B030D-6E8A-4147-A177-3AD203B41FA5}">
+                      <a16:colId xmlns:a16="http://schemas.microsoft.com/office/drawing/2014/main" val="20002"/>
+                    </a:ext>
+                  </a:extLst>
+                </a:gridCol>
+                <a:gridCol w="2344233">
+                  <a:extLst>
+                    <a:ext uri="{9D8B030D-6E8A-4147-A177-3AD203B41FA5}">
+                      <a16:colId xmlns:a16="http://schemas.microsoft.com/office/drawing/2014/main" val="20003"/>
+                    </a:ext>
+                  </a:extLst>
+                </a:gridCol>
               </a:tblGrid>
               <a:tr h="321818">
                 <a:tc>
                   <a:txBody>
-                    <a:bodyPr wrap="square"/>
+                    <a:bodyPr/>
                     <a:lstStyle/>
                     <a:p>
                       <a:pPr algn="ctr"/>
@@ -15645,7 +16839,7 @@
                 </a:tc>
                 <a:tc>
                   <a:txBody>
-                    <a:bodyPr wrap="square"/>
+                    <a:bodyPr/>
                     <a:lstStyle/>
                     <a:p>
                       <a:pPr algn="ctr"/>
@@ -15668,7 +16862,7 @@
                 </a:tc>
                 <a:tc>
                   <a:txBody>
-                    <a:bodyPr wrap="square"/>
+                    <a:bodyPr/>
                     <a:lstStyle/>
                     <a:p>
                       <a:pPr algn="ctr"/>
@@ -15691,7 +16885,7 @@
                 </a:tc>
                 <a:tc>
                   <a:txBody>
-                    <a:bodyPr wrap="square"/>
+                    <a:bodyPr/>
                     <a:lstStyle/>
                     <a:p>
                       <a:pPr algn="ctr"/>
@@ -15712,11 +16906,16 @@
                     </a:solidFill>
                   </a:tcPr>
                 </a:tc>
+                <a:extLst>
+                  <a:ext uri="{0D108BD9-81ED-4DB2-BD59-A6C34878D82A}">
+                    <a16:rowId xmlns:a16="http://schemas.microsoft.com/office/drawing/2014/main" val="10000"/>
+                  </a:ext>
+                </a:extLst>
               </a:tr>
               <a:tr h="579628">
                 <a:tc>
                   <a:txBody>
-                    <a:bodyPr wrap="square"/>
+                    <a:bodyPr/>
                     <a:lstStyle/>
                     <a:p>
                       <a:pPr algn="ctr"/>
@@ -15739,7 +16938,7 @@
                 </a:tc>
                 <a:tc>
                   <a:txBody>
-                    <a:bodyPr wrap="square"/>
+                    <a:bodyPr/>
                     <a:lstStyle/>
                     <a:p>
                       <a:pPr algn="l"/>
@@ -15771,7 +16970,7 @@
                 </a:tc>
                 <a:tc>
                   <a:txBody>
-                    <a:bodyPr wrap="square"/>
+                    <a:bodyPr/>
                     <a:lstStyle/>
                     <a:p>
                       <a:pPr algn="l"/>
@@ -15794,7 +16993,7 @@
                 </a:tc>
                 <a:tc>
                   <a:txBody>
-                    <a:bodyPr wrap="square"/>
+                    <a:bodyPr/>
                     <a:lstStyle/>
                     <a:p>
                       <a:pPr algn="l"/>
@@ -15815,11 +17014,16 @@
                     </a:solidFill>
                   </a:tcPr>
                 </a:tc>
+                <a:extLst>
+                  <a:ext uri="{0D108BD9-81ED-4DB2-BD59-A6C34878D82A}">
+                    <a16:rowId xmlns:a16="http://schemas.microsoft.com/office/drawing/2014/main" val="10001"/>
+                  </a:ext>
+                </a:extLst>
               </a:tr>
               <a:tr h="579628">
                 <a:tc>
                   <a:txBody>
-                    <a:bodyPr wrap="square"/>
+                    <a:bodyPr/>
                     <a:lstStyle/>
                     <a:p>
                       <a:pPr algn="ctr"/>
@@ -15842,7 +17046,7 @@
                 </a:tc>
                 <a:tc>
                   <a:txBody>
-                    <a:bodyPr wrap="square"/>
+                    <a:bodyPr/>
                     <a:lstStyle/>
                     <a:p>
                       <a:pPr algn="l"/>
@@ -15865,7 +17069,7 @@
                 </a:tc>
                 <a:tc>
                   <a:txBody>
-                    <a:bodyPr wrap="square"/>
+                    <a:bodyPr/>
                     <a:lstStyle/>
                     <a:p>
                       <a:pPr algn="l"/>
@@ -15888,7 +17092,7 @@
                 </a:tc>
                 <a:tc>
                   <a:txBody>
-                    <a:bodyPr wrap="square"/>
+                    <a:bodyPr/>
                     <a:lstStyle/>
                     <a:p>
                       <a:pPr algn="l"/>
@@ -15909,11 +17113,16 @@
                     </a:solidFill>
                   </a:tcPr>
                 </a:tc>
+                <a:extLst>
+                  <a:ext uri="{0D108BD9-81ED-4DB2-BD59-A6C34878D82A}">
+                    <a16:rowId xmlns:a16="http://schemas.microsoft.com/office/drawing/2014/main" val="10002"/>
+                  </a:ext>
+                </a:extLst>
               </a:tr>
               <a:tr h="579628">
                 <a:tc>
                   <a:txBody>
-                    <a:bodyPr wrap="square"/>
+                    <a:bodyPr/>
                     <a:lstStyle/>
                     <a:p>
                       <a:pPr algn="ctr"/>
@@ -15936,7 +17145,7 @@
                 </a:tc>
                 <a:tc>
                   <a:txBody>
-                    <a:bodyPr wrap="square"/>
+                    <a:bodyPr/>
                     <a:lstStyle/>
                     <a:p>
                       <a:pPr algn="l"/>
@@ -15959,7 +17168,7 @@
                 </a:tc>
                 <a:tc>
                   <a:txBody>
-                    <a:bodyPr wrap="square"/>
+                    <a:bodyPr/>
                     <a:lstStyle/>
                     <a:p>
                       <a:pPr algn="l"/>
@@ -15982,7 +17191,7 @@
                 </a:tc>
                 <a:tc>
                   <a:txBody>
-                    <a:bodyPr wrap="square"/>
+                    <a:bodyPr/>
                     <a:lstStyle/>
                     <a:p>
                       <a:pPr algn="l"/>
@@ -16003,11 +17212,16 @@
                     </a:solidFill>
                   </a:tcPr>
                 </a:tc>
+                <a:extLst>
+                  <a:ext uri="{0D108BD9-81ED-4DB2-BD59-A6C34878D82A}">
+                    <a16:rowId xmlns:a16="http://schemas.microsoft.com/office/drawing/2014/main" val="10003"/>
+                  </a:ext>
+                </a:extLst>
               </a:tr>
               <a:tr h="579628">
                 <a:tc>
                   <a:txBody>
-                    <a:bodyPr wrap="square"/>
+                    <a:bodyPr/>
                     <a:lstStyle/>
                     <a:p>
                       <a:pPr algn="ctr"/>
@@ -16030,18 +17244,122 @@
                 </a:tc>
                 <a:tc>
                   <a:txBody>
-                    <a:bodyPr wrap="square"/>
+                    <a:bodyPr/>
                     <a:lstStyle/>
                     <a:p>
                       <a:pPr algn="l"/>
                       <a:r>
+                        <a:rPr sz="1400" b="0" dirty="0" err="1">
+                          <a:solidFill>
+                            <a:srgbClr val="22303F"/>
+                          </a:solidFill>
+                          <a:latin typeface="Microsoft JhengHei"/>
+                        </a:rPr>
+                        <a:t>TiDB</a:t>
+                      </a:r>
+                      <a:r>
+                        <a:rPr sz="1400" b="0" dirty="0">
+                          <a:solidFill>
+                            <a:srgbClr val="22303F"/>
+                          </a:solidFill>
+                          <a:latin typeface="Microsoft JhengHei"/>
+                        </a:rPr>
+                        <a:t> </a:t>
+                      </a:r>
+                      <a:r>
+                        <a:rPr sz="1400" b="0" dirty="0" err="1">
+                          <a:solidFill>
+                            <a:srgbClr val="22303F"/>
+                          </a:solidFill>
+                          <a:latin typeface="Microsoft JhengHei"/>
+                        </a:rPr>
+                        <a:t>為計算／儲存分離</a:t>
+                      </a:r>
+                      <a:r>
+                        <a:rPr sz="1400" b="0" dirty="0">
+                          <a:solidFill>
+                            <a:srgbClr val="22303F"/>
+                          </a:solidFill>
+                          <a:latin typeface="Microsoft JhengHei"/>
+                        </a:rPr>
+                        <a:t>；</a:t>
+                      </a:r>
+                      <a:endParaRPr lang="en-US" sz="1400" b="0" dirty="0">
+                        <a:solidFill>
+                          <a:srgbClr val="22303F"/>
+                        </a:solidFill>
+                        <a:latin typeface="Microsoft JhengHei"/>
+                      </a:endParaRPr>
+                    </a:p>
+                    <a:p>
+                      <a:pPr algn="l"/>
+                      <a:r>
+                        <a:rPr sz="1400" b="0" dirty="0">
+                          <a:solidFill>
+                            <a:srgbClr val="22303F"/>
+                          </a:solidFill>
+                          <a:latin typeface="Microsoft JhengHei"/>
+                        </a:rPr>
+                        <a:t>PXC </a:t>
+                      </a:r>
+                      <a:r>
+                        <a:rPr sz="1400" b="0" dirty="0" err="1">
+                          <a:solidFill>
+                            <a:srgbClr val="22303F"/>
+                          </a:solidFill>
+                          <a:latin typeface="Microsoft JhengHei"/>
+                        </a:rPr>
+                        <a:t>為完整副本與</a:t>
+                      </a:r>
+                      <a:r>
+                        <a:rPr sz="1400" b="0" dirty="0">
+                          <a:solidFill>
+                            <a:srgbClr val="22303F"/>
+                          </a:solidFill>
+                          <a:latin typeface="Microsoft JhengHei"/>
+                        </a:rPr>
+                        <a:t> </a:t>
+                      </a:r>
+                      <a:r>
+                        <a:rPr sz="1400" b="0" dirty="0" err="1">
+                          <a:solidFill>
+                            <a:srgbClr val="22303F"/>
+                          </a:solidFill>
+                          <a:latin typeface="Microsoft JhengHei"/>
+                        </a:rPr>
+                        <a:t>writeset</a:t>
+                      </a:r>
+                      <a:r>
+                        <a:rPr sz="1400" b="0" dirty="0">
+                          <a:solidFill>
+                            <a:srgbClr val="22303F"/>
+                          </a:solidFill>
+                          <a:latin typeface="Microsoft JhengHei"/>
+                        </a:rPr>
+                        <a:t> certification</a:t>
+                      </a:r>
+                    </a:p>
+                  </a:txBody>
+                  <a:tcPr marL="64008" marR="64008" marT="32004" marB="32004" anchor="ctr">
+                    <a:solidFill>
+                      <a:srgbClr val="F7F9FA"/>
+                    </a:solidFill>
+                  </a:tcPr>
+                </a:tc>
+                <a:tc>
+                  <a:txBody>
+                    <a:bodyPr/>
+                    <a:lstStyle/>
+                    <a:p>
+                      <a:pPr algn="l"/>
+                      <a:r>
                         <a:rPr sz="1400" b="0">
                           <a:solidFill>
                             <a:srgbClr val="22303F"/>
                           </a:solidFill>
                           <a:latin typeface="Microsoft JhengHei"/>
                         </a:rPr>
-                        <a:t>TiDB 為計算／儲存分離；PXC 為完整副本與 writeset certification</a:t>
+                        <a:t>兩家皆為 PostgreSQL wire protocol，但 SQL 引擎與相容程度不同</a:t>
                       </a:r>
                     </a:p>
                   </a:txBody>
@@ -16053,7 +17371,7 @@
                 </a:tc>
                 <a:tc>
                   <a:txBody>
-                    <a:bodyPr wrap="square"/>
+                    <a:bodyPr/>
                     <a:lstStyle/>
                     <a:p>
                       <a:pPr algn="l"/>
@@ -16064,7 +17382,7 @@
                           </a:solidFill>
                           <a:latin typeface="Microsoft JhengHei"/>
                         </a:rPr>
-                        <a:t>兩家皆為 PostgreSQL wire protocol，但 SQL 引擎與相容程度不同</a:t>
+                        <a:t>同名功能不能直接視為同一機制</a:t>
                       </a:r>
                     </a:p>
                   </a:txBody>
@@ -16074,34 +17392,16 @@
                     </a:solidFill>
                   </a:tcPr>
                 </a:tc>
-                <a:tc>
-                  <a:txBody>
-                    <a:bodyPr wrap="square"/>
-                    <a:lstStyle/>
-                    <a:p>
-                      <a:pPr algn="l"/>
-                      <a:r>
-                        <a:rPr sz="1400" b="0">
-                          <a:solidFill>
-                            <a:srgbClr val="22303F"/>
-                          </a:solidFill>
-                          <a:latin typeface="Microsoft JhengHei"/>
-                        </a:rPr>
-                        <a:t>同名功能不能直接視為同一機制</a:t>
-                      </a:r>
-                    </a:p>
-                  </a:txBody>
-                  <a:tcPr marL="64008" marR="64008" marT="32004" marB="32004" anchor="ctr">
-                    <a:solidFill>
-                      <a:srgbClr val="F7F9FA"/>
-                    </a:solidFill>
-                  </a:tcPr>
-                </a:tc>
+                <a:extLst>
+                  <a:ext uri="{0D108BD9-81ED-4DB2-BD59-A6C34878D82A}">
+                    <a16:rowId xmlns:a16="http://schemas.microsoft.com/office/drawing/2014/main" val="10004"/>
+                  </a:ext>
+                </a:extLst>
               </a:tr>
               <a:tr h="579628">
                 <a:tc>
                   <a:txBody>
-                    <a:bodyPr wrap="square"/>
+                    <a:bodyPr/>
                     <a:lstStyle/>
                     <a:p>
                       <a:pPr algn="ctr"/>
@@ -16124,7 +17424,7 @@
                 </a:tc>
                 <a:tc>
                   <a:txBody>
-                    <a:bodyPr wrap="square"/>
+                    <a:bodyPr/>
                     <a:lstStyle/>
                     <a:p>
                       <a:pPr algn="l"/>
@@ -16147,7 +17447,7 @@
                 </a:tc>
                 <a:tc>
                   <a:txBody>
-                    <a:bodyPr wrap="square"/>
+                    <a:bodyPr/>
                     <a:lstStyle/>
                     <a:p>
                       <a:pPr algn="l"/>
@@ -16170,19 +17470,34 @@
                 </a:tc>
                 <a:tc>
                   <a:txBody>
-                    <a:bodyPr wrap="square"/>
+                    <a:bodyPr/>
                     <a:lstStyle/>
                     <a:p>
                       <a:pPr algn="l"/>
                       <a:r>
-                        <a:rPr sz="1400" b="0">
-                          <a:solidFill>
-                            <a:srgbClr val="22303F"/>
-                          </a:solidFill>
-                          <a:latin typeface="Microsoft JhengHei"/>
-                        </a:rPr>
-                        <a:t>「數量」與「業務關鍵度」必須分開</a:t>
-                      </a:r>
+                        <a:rPr sz="1400" b="0" dirty="0">
+                          <a:solidFill>
+                            <a:srgbClr val="22303F"/>
+                          </a:solidFill>
+                          <a:latin typeface="Microsoft JhengHei"/>
+                        </a:rPr>
+                        <a:t>「</a:t>
+                      </a:r>
+                      <a:r>
+                        <a:rPr sz="1400" b="0" dirty="0" err="1">
+                          <a:solidFill>
+                            <a:srgbClr val="22303F"/>
+                          </a:solidFill>
+                          <a:latin typeface="Microsoft JhengHei"/>
+                        </a:rPr>
+                        <a:t>數量」與「業務關鍵度」必須分開</a:t>
+                      </a:r>
+                      <a:endParaRPr sz="1400" b="0" dirty="0">
+                        <a:solidFill>
+                          <a:srgbClr val="22303F"/>
+                        </a:solidFill>
+                        <a:latin typeface="Microsoft JhengHei"/>
+                      </a:endParaRPr>
                     </a:p>
                   </a:txBody>
                   <a:tcPr marL="64008" marR="64008" marT="32004" marB="32004" anchor="ctr">
@@ -16191,6 +17506,11 @@
                     </a:solidFill>
                   </a:tcPr>
                 </a:tc>
+                <a:extLst>
+                  <a:ext uri="{0D108BD9-81ED-4DB2-BD59-A6C34878D82A}">
+                    <a16:rowId xmlns:a16="http://schemas.microsoft.com/office/drawing/2014/main" val="10005"/>
+                  </a:ext>
+                </a:extLst>
               </a:tr>
             </a:tbl>
           </a:graphicData>
@@ -16213,7 +17533,7 @@
           <a:noFill/>
         </p:spPr>
         <p:txBody>
-          <a:bodyPr wrap="square" lIns="0" rIns="0" tIns="0" bIns="0">
+          <a:bodyPr wrap="square" lIns="0" tIns="0" rIns="0" bIns="0">
             <a:spAutoFit/>
           </a:bodyPr>
           <a:lstStyle/>
@@ -16271,6 +17591,7 @@
           <a:lstStyle/>
           <a:p>
             <a:pPr algn="ctr"/>
+            <a:endParaRPr/>
           </a:p>
         </p:txBody>
       </p:sp>
@@ -16283,7 +17604,7 @@
 </file>
 
 <file path=ppt/slides/slide8.xml><?xml version="1.0" encoding="utf-8"?>
-<p:sld xmlns:a="http://schemas.openxmlformats.org/drawingml/2006/main" xmlns:p="http://schemas.openxmlformats.org/presentationml/2006/main" xmlns:r="http://schemas.openxmlformats.org/officeDocument/2006/relationships">
+<p:sld xmlns:a="http://schemas.openxmlformats.org/drawingml/2006/main" xmlns:r="http://schemas.openxmlformats.org/officeDocument/2006/relationships" xmlns:p="http://schemas.openxmlformats.org/presentationml/2006/main">
   <p:cSld>
     <p:spTree>
       <p:nvGrpSpPr>
@@ -16291,7 +17612,14 @@
         <p:cNvGrpSpPr/>
         <p:nvPr/>
       </p:nvGrpSpPr>
-      <p:grpSpPr/>
+      <p:grpSpPr>
+        <a:xfrm>
+          <a:off x="0" y="0"/>
+          <a:ext cx="0" cy="0"/>
+          <a:chOff x="0" y="0"/>
+          <a:chExt cx="0" cy="0"/>
+        </a:xfrm>
+      </p:grpSpPr>
       <p:sp>
         <p:nvSpPr>
           <p:cNvPr id="2" name="TextBox 1"/>
@@ -16309,7 +17637,7 @@
           <a:noFill/>
         </p:spPr>
         <p:txBody>
-          <a:bodyPr wrap="square" lIns="0" rIns="0" tIns="0" bIns="0">
+          <a:bodyPr wrap="square" lIns="0" tIns="0" rIns="0" bIns="0">
             <a:spAutoFit/>
           </a:bodyPr>
           <a:lstStyle/>
@@ -16343,7 +17671,7 @@
           <a:noFill/>
         </p:spPr>
         <p:txBody>
-          <a:bodyPr wrap="square" lIns="0" rIns="0" tIns="0" bIns="0">
+          <a:bodyPr wrap="square" lIns="0" tIns="0" rIns="0" bIns="0">
             <a:spAutoFit/>
           </a:bodyPr>
           <a:lstStyle/>
@@ -16377,7 +17705,7 @@
           <a:noFill/>
         </p:spPr>
         <p:txBody>
-          <a:bodyPr wrap="square" lIns="0" rIns="0" tIns="0" bIns="0">
+          <a:bodyPr wrap="square" lIns="0" tIns="0" rIns="0" bIns="0">
             <a:spAutoFit/>
           </a:bodyPr>
           <a:lstStyle/>
@@ -16412,7 +17740,7 @@
           <a:noFill/>
         </p:spPr>
         <p:txBody>
-          <a:bodyPr wrap="square" lIns="0" rIns="0" tIns="0" bIns="0">
+          <a:bodyPr wrap="square" lIns="0" tIns="0" rIns="0" bIns="0">
             <a:spAutoFit/>
           </a:bodyPr>
           <a:lstStyle/>
@@ -16446,7 +17774,7 @@
           <a:noFill/>
         </p:spPr>
         <p:txBody>
-          <a:bodyPr wrap="square" lIns="0" rIns="0" tIns="0" bIns="0">
+          <a:bodyPr wrap="square" lIns="0" tIns="0" rIns="0" bIns="0">
             <a:spAutoFit/>
           </a:bodyPr>
           <a:lstStyle/>
@@ -16482,13 +17810,25 @@
                 <a:tableStyleId>{5C22544A-7EE6-4342-B048-85BDC9FD1C3A}</a:tableStyleId>
               </a:tblPr>
               <a:tblGrid>
-                <a:gridCol w="1026215"/>
-                <a:gridCol w="10031624"/>
+                <a:gridCol w="1026215">
+                  <a:extLst>
+                    <a:ext uri="{9D8B030D-6E8A-4147-A177-3AD203B41FA5}">
+                      <a16:colId xmlns:a16="http://schemas.microsoft.com/office/drawing/2014/main" val="20000"/>
+                    </a:ext>
+                  </a:extLst>
+                </a:gridCol>
+                <a:gridCol w="10031624">
+                  <a:extLst>
+                    <a:ext uri="{9D8B030D-6E8A-4147-A177-3AD203B41FA5}">
+                      <a16:colId xmlns:a16="http://schemas.microsoft.com/office/drawing/2014/main" val="20001"/>
+                    </a:ext>
+                  </a:extLst>
+                </a:gridCol>
               </a:tblGrid>
               <a:tr h="321818">
                 <a:tc>
                   <a:txBody>
-                    <a:bodyPr wrap="square"/>
+                    <a:bodyPr/>
                     <a:lstStyle/>
                     <a:p>
                       <a:pPr algn="ctr"/>
@@ -16511,7 +17851,7 @@
                 </a:tc>
                 <a:tc>
                   <a:txBody>
-                    <a:bodyPr wrap="square"/>
+                    <a:bodyPr/>
                     <a:lstStyle/>
                     <a:p>
                       <a:pPr algn="ctr"/>
@@ -16532,11 +17872,16 @@
                     </a:solidFill>
                   </a:tcPr>
                 </a:tc>
+                <a:extLst>
+                  <a:ext uri="{0D108BD9-81ED-4DB2-BD59-A6C34878D82A}">
+                    <a16:rowId xmlns:a16="http://schemas.microsoft.com/office/drawing/2014/main" val="10000"/>
+                  </a:ext>
+                </a:extLst>
               </a:tr>
               <a:tr h="321818">
                 <a:tc>
                   <a:txBody>
-                    <a:bodyPr wrap="square"/>
+                    <a:bodyPr/>
                     <a:lstStyle/>
                     <a:p>
                       <a:pPr algn="ctr"/>
@@ -16559,7 +17904,7 @@
                 </a:tc>
                 <a:tc>
                   <a:txBody>
-                    <a:bodyPr wrap="square"/>
+                    <a:bodyPr/>
                     <a:lstStyle/>
                     <a:p>
                       <a:pPr algn="l"/>
@@ -16580,11 +17925,16 @@
                     </a:solidFill>
                   </a:tcPr>
                 </a:tc>
+                <a:extLst>
+                  <a:ext uri="{0D108BD9-81ED-4DB2-BD59-A6C34878D82A}">
+                    <a16:rowId xmlns:a16="http://schemas.microsoft.com/office/drawing/2014/main" val="10001"/>
+                  </a:ext>
+                </a:extLst>
               </a:tr>
               <a:tr h="321818">
                 <a:tc>
                   <a:txBody>
-                    <a:bodyPr wrap="square"/>
+                    <a:bodyPr/>
                     <a:lstStyle/>
                     <a:p>
                       <a:pPr algn="ctr"/>
@@ -16607,19 +17957,79 @@
                 </a:tc>
                 <a:tc>
                   <a:txBody>
-                    <a:bodyPr wrap="square"/>
+                    <a:bodyPr/>
                     <a:lstStyle/>
                     <a:p>
                       <a:pPr algn="l"/>
                       <a:r>
-                        <a:rPr sz="1400" b="0">
-                          <a:solidFill>
-                            <a:srgbClr val="22303F"/>
-                          </a:solidFill>
-                          <a:latin typeface="Microsoft JhengHei"/>
-                        </a:rPr>
-                        <a:t>TiDB 在本 PoC 的水平擴展與高併發穩定性較有利；PXC／Galera 保留原生相容與低延遲對照</a:t>
-                      </a:r>
+                        <a:rPr sz="1400" b="0" dirty="0" err="1">
+                          <a:solidFill>
+                            <a:srgbClr val="22303F"/>
+                          </a:solidFill>
+                          <a:latin typeface="Microsoft JhengHei"/>
+                        </a:rPr>
+                        <a:t>TiDB</a:t>
+                      </a:r>
+                      <a:r>
+                        <a:rPr sz="1400" b="0" dirty="0">
+                          <a:solidFill>
+                            <a:srgbClr val="22303F"/>
+                          </a:solidFill>
+                          <a:latin typeface="Microsoft JhengHei"/>
+                        </a:rPr>
+                        <a:t> </a:t>
+                      </a:r>
+                      <a:r>
+                        <a:rPr sz="1400" b="0" dirty="0" err="1">
+                          <a:solidFill>
+                            <a:srgbClr val="22303F"/>
+                          </a:solidFill>
+                          <a:latin typeface="Microsoft JhengHei"/>
+                        </a:rPr>
+                        <a:t>在本</a:t>
+                      </a:r>
+                      <a:r>
+                        <a:rPr sz="1400" b="0" dirty="0">
+                          <a:solidFill>
+                            <a:srgbClr val="22303F"/>
+                          </a:solidFill>
+                          <a:latin typeface="Microsoft JhengHei"/>
+                        </a:rPr>
+                        <a:t> PoC </a:t>
+                      </a:r>
+                      <a:r>
+                        <a:rPr sz="1400" b="0" dirty="0" err="1">
+                          <a:solidFill>
+                            <a:srgbClr val="22303F"/>
+                          </a:solidFill>
+                          <a:latin typeface="Microsoft JhengHei"/>
+                        </a:rPr>
+                        <a:t>的水平擴展與高併發穩定性較有利；PXC／Galera</a:t>
+                      </a:r>
+                      <a:r>
+                        <a:rPr sz="1400" b="0" dirty="0">
+                          <a:solidFill>
+                            <a:srgbClr val="22303F"/>
+                          </a:solidFill>
+                          <a:latin typeface="Microsoft JhengHei"/>
+                        </a:rPr>
+                        <a:t> </a:t>
+                      </a:r>
+                      <a:r>
+                        <a:rPr sz="1400" b="0" dirty="0" err="1">
+                          <a:solidFill>
+                            <a:srgbClr val="22303F"/>
+                          </a:solidFill>
+                          <a:latin typeface="Microsoft JhengHei"/>
+                        </a:rPr>
+                        <a:t>保留原生相容與低延遲對照</a:t>
+                      </a:r>
+                      <a:endParaRPr sz="1400" b="0" dirty="0">
+                        <a:solidFill>
+                          <a:srgbClr val="22303F"/>
+                        </a:solidFill>
+                        <a:latin typeface="Microsoft JhengHei"/>
+                      </a:endParaRPr>
                     </a:p>
                   </a:txBody>
                   <a:tcPr marL="64008" marR="64008" marT="32004" marB="32004" anchor="ctr">
@@ -16628,11 +18038,16 @@
                     </a:solidFill>
                   </a:tcPr>
                 </a:tc>
+                <a:extLst>
+                  <a:ext uri="{0D108BD9-81ED-4DB2-BD59-A6C34878D82A}">
+                    <a16:rowId xmlns:a16="http://schemas.microsoft.com/office/drawing/2014/main" val="10002"/>
+                  </a:ext>
+                </a:extLst>
               </a:tr>
               <a:tr h="321818">
                 <a:tc>
                   <a:txBody>
-                    <a:bodyPr wrap="square"/>
+                    <a:bodyPr/>
                     <a:lstStyle/>
                     <a:p>
                       <a:pPr algn="ctr"/>
@@ -16655,18 +18070,45 @@
                 </a:tc>
                 <a:tc>
                   <a:txBody>
-                    <a:bodyPr wrap="square"/>
+                    <a:bodyPr/>
                     <a:lstStyle/>
                     <a:p>
                       <a:pPr algn="l"/>
                       <a:r>
-                        <a:rPr sz="1400" b="0">
-                          <a:solidFill>
-                            <a:srgbClr val="22303F"/>
-                          </a:solidFill>
-                          <a:latin typeface="Microsoft JhengHei"/>
-                        </a:rPr>
-                        <a:t>目前重視一致性、服務恢復速度、故障範圍隔離及 Database Self-Service，未要求直接推進跨區 A/A</a:t>
+                        <a:rPr sz="1400" b="0" dirty="0" err="1">
+                          <a:solidFill>
+                            <a:srgbClr val="22303F"/>
+                          </a:solidFill>
+                          <a:latin typeface="Microsoft JhengHei"/>
+                        </a:rPr>
+                        <a:t>目前重視一致性、服務恢復速度、故障範圍隔離及</a:t>
+                      </a:r>
+                      <a:r>
+                        <a:rPr sz="1400" b="0" dirty="0">
+                          <a:solidFill>
+                            <a:srgbClr val="22303F"/>
+                          </a:solidFill>
+                          <a:latin typeface="Microsoft JhengHei"/>
+                        </a:rPr>
+                        <a:t> Database </a:t>
+                      </a:r>
+                      <a:r>
+                        <a:rPr sz="1400" b="0" dirty="0" err="1">
+                          <a:solidFill>
+                            <a:srgbClr val="22303F"/>
+                          </a:solidFill>
+                          <a:latin typeface="Microsoft JhengHei"/>
+                        </a:rPr>
+                        <a:t>Self-Service，未要求直接推進跨區</a:t>
+                      </a:r>
+                      <a:r>
+                        <a:rPr sz="1400" b="0" dirty="0">
+                          <a:solidFill>
+                            <a:srgbClr val="22303F"/>
+                          </a:solidFill>
+                          <a:latin typeface="Microsoft JhengHei"/>
+                        </a:rPr>
+                        <a:t> A/A</a:t>
                       </a:r>
                     </a:p>
                   </a:txBody>
@@ -16676,6 +18118,11 @@
                     </a:solidFill>
                   </a:tcPr>
                 </a:tc>
+                <a:extLst>
+                  <a:ext uri="{0D108BD9-81ED-4DB2-BD59-A6C34878D82A}">
+                    <a16:rowId xmlns:a16="http://schemas.microsoft.com/office/drawing/2014/main" val="10003"/>
+                  </a:ext>
+                </a:extLst>
               </a:tr>
             </a:tbl>
           </a:graphicData>
@@ -16698,13 +18145,13 @@
           <a:noFill/>
         </p:spPr>
         <p:txBody>
-          <a:bodyPr wrap="square" lIns="0" rIns="0" tIns="0" bIns="0">
+          <a:bodyPr wrap="square" lIns="0" tIns="0" rIns="0" bIns="0">
             <a:spAutoFit/>
           </a:bodyPr>
           <a:lstStyle/>
           <a:p>
             <a:r>
-              <a:rPr sz="1900" b="1">
+              <a:rPr sz="1900" b="1" dirty="0" err="1">
                 <a:solidFill>
                   <a:srgbClr val="C0392B"/>
                 </a:solidFill>
@@ -16713,13 +18160,40 @@
               <a:t>本階段輸出</a:t>
             </a:r>
             <a:r>
-              <a:rPr sz="1900" b="0">
+              <a:rPr sz="1900" b="0" dirty="0" err="1">
                 <a:solidFill>
                   <a:srgbClr val="22303F"/>
                 </a:solidFill>
                 <a:latin typeface="Microsoft JhengHei"/>
               </a:rPr>
-              <a:t>：應用相容性、PITR／還原、Online DDL、服務恢復、資源隔離、原廠支援與成本效益的可驗收結果。</a:t>
+              <a:t>：應用相容性、PITR／還原、Online</a:t>
+            </a:r>
+            <a:r>
+              <a:rPr sz="1900" b="0" dirty="0">
+                <a:solidFill>
+                  <a:srgbClr val="22303F"/>
+                </a:solidFill>
+                <a:latin typeface="Microsoft JhengHei"/>
+              </a:rPr>
+              <a:t> </a:t>
+            </a:r>
+            <a:r>
+              <a:rPr sz="1900" b="0" dirty="0" err="1">
+                <a:solidFill>
+                  <a:srgbClr val="22303F"/>
+                </a:solidFill>
+                <a:latin typeface="Microsoft JhengHei"/>
+              </a:rPr>
+              <a:t>DDL、服務恢復、資源隔離、原廠支援與成本效益的可驗收結果</a:t>
+            </a:r>
+            <a:r>
+              <a:rPr sz="1900" b="0" dirty="0">
+                <a:solidFill>
+                  <a:srgbClr val="22303F"/>
+                </a:solidFill>
+                <a:latin typeface="Microsoft JhengHei"/>
+              </a:rPr>
+              <a:t>。</a:t>
             </a:r>
           </a:p>
         </p:txBody>
@@ -16741,7 +18215,7 @@
           <a:noFill/>
         </p:spPr>
         <p:txBody>
-          <a:bodyPr wrap="square" lIns="0" rIns="0" tIns="0" bIns="0">
+          <a:bodyPr wrap="square" lIns="0" tIns="0" rIns="0" bIns="0">
             <a:spAutoFit/>
           </a:bodyPr>
           <a:lstStyle/>
@@ -16799,6 +18273,7 @@
           <a:lstStyle/>
           <a:p>
             <a:pPr algn="ctr"/>
+            <a:endParaRPr/>
           </a:p>
         </p:txBody>
       </p:sp>
@@ -16811,7 +18286,7 @@
 </file>
 
 <file path=ppt/slides/slide9.xml><?xml version="1.0" encoding="utf-8"?>
-<p:sld xmlns:a="http://schemas.openxmlformats.org/drawingml/2006/main" xmlns:p="http://schemas.openxmlformats.org/presentationml/2006/main" xmlns:r="http://schemas.openxmlformats.org/officeDocument/2006/relationships">
+<p:sld xmlns:a="http://schemas.openxmlformats.org/drawingml/2006/main" xmlns:r="http://schemas.openxmlformats.org/officeDocument/2006/relationships" xmlns:p="http://schemas.openxmlformats.org/presentationml/2006/main">
   <p:cSld>
     <p:spTree>
       <p:nvGrpSpPr>
@@ -16819,7 +18294,14 @@
         <p:cNvGrpSpPr/>
         <p:nvPr/>
       </p:nvGrpSpPr>
-      <p:grpSpPr/>
+      <p:grpSpPr>
+        <a:xfrm>
+          <a:off x="0" y="0"/>
+          <a:ext cx="0" cy="0"/>
+          <a:chOff x="0" y="0"/>
+          <a:chExt cx="0" cy="0"/>
+        </a:xfrm>
+      </p:grpSpPr>
       <p:sp>
         <p:nvSpPr>
           <p:cNvPr id="2" name="TextBox 1"/>
@@ -16837,7 +18319,7 @@
           <a:noFill/>
         </p:spPr>
         <p:txBody>
-          <a:bodyPr wrap="square" lIns="0" rIns="0" tIns="0" bIns="0">
+          <a:bodyPr wrap="square" lIns="0" tIns="0" rIns="0" bIns="0">
             <a:spAutoFit/>
           </a:bodyPr>
           <a:lstStyle/>
@@ -16871,7 +18353,7 @@
           <a:noFill/>
         </p:spPr>
         <p:txBody>
-          <a:bodyPr wrap="square" lIns="0" rIns="0" tIns="0" bIns="0">
+          <a:bodyPr wrap="square" lIns="0" tIns="0" rIns="0" bIns="0">
             <a:spAutoFit/>
           </a:bodyPr>
           <a:lstStyle/>
@@ -16905,7 +18387,7 @@
           <a:noFill/>
         </p:spPr>
         <p:txBody>
-          <a:bodyPr wrap="square" lIns="0" rIns="0" tIns="0" bIns="0">
+          <a:bodyPr wrap="square" lIns="0" tIns="0" rIns="0" bIns="0">
             <a:spAutoFit/>
           </a:bodyPr>
           <a:lstStyle/>
@@ -16940,7 +18422,7 @@
           <a:noFill/>
         </p:spPr>
         <p:txBody>
-          <a:bodyPr wrap="square" lIns="0" rIns="0" tIns="0" bIns="0">
+          <a:bodyPr wrap="square" lIns="0" tIns="0" rIns="0" bIns="0">
             <a:spAutoFit/>
           </a:bodyPr>
           <a:lstStyle/>
@@ -16963,11 +18445,17 @@
           <p:cNvGraphicFramePr>
             <a:graphicFrameLocks noGrp="1"/>
           </p:cNvGraphicFramePr>
-          <p:nvPr/>
+          <p:nvPr>
+            <p:extLst>
+              <p:ext uri="{D42A27DB-BD31-4B8C-83A1-F6EECF244321}">
+                <p14:modId xmlns:p14="http://schemas.microsoft.com/office/powerpoint/2010/main" val="307827877"/>
+              </p:ext>
+            </p:extLst>
+          </p:nvPr>
         </p:nvGraphicFramePr>
         <p:xfrm>
           <a:off x="566928" y="1709928"/>
-          <a:ext cx="11057839" cy="2898140"/>
+          <a:ext cx="11057839" cy="3147060"/>
         </p:xfrm>
         <a:graphic>
           <a:graphicData uri="http://schemas.openxmlformats.org/drawingml/2006/table">
@@ -16976,26 +18464,108 @@
                 <a:tableStyleId>{5C22544A-7EE6-4342-B048-85BDC9FD1C3A}</a:tableStyleId>
               </a:tblPr>
               <a:tblGrid>
-                <a:gridCol w="1203706"/>
-                <a:gridCol w="1765940"/>
-                <a:gridCol w="4844494"/>
-                <a:gridCol w="3243699"/>
+                <a:gridCol w="1376856">
+                  <a:extLst>
+                    <a:ext uri="{9D8B030D-6E8A-4147-A177-3AD203B41FA5}">
+                      <a16:colId xmlns:a16="http://schemas.microsoft.com/office/drawing/2014/main" val="20000"/>
+                    </a:ext>
+                  </a:extLst>
+                </a:gridCol>
+                <a:gridCol w="1592790">
+                  <a:extLst>
+                    <a:ext uri="{9D8B030D-6E8A-4147-A177-3AD203B41FA5}">
+                      <a16:colId xmlns:a16="http://schemas.microsoft.com/office/drawing/2014/main" val="20001"/>
+                    </a:ext>
+                  </a:extLst>
+                </a:gridCol>
+                <a:gridCol w="4844494">
+                  <a:extLst>
+                    <a:ext uri="{9D8B030D-6E8A-4147-A177-3AD203B41FA5}">
+                      <a16:colId xmlns:a16="http://schemas.microsoft.com/office/drawing/2014/main" val="20002"/>
+                    </a:ext>
+                  </a:extLst>
+                </a:gridCol>
+                <a:gridCol w="3243699">
+                  <a:extLst>
+                    <a:ext uri="{9D8B030D-6E8A-4147-A177-3AD203B41FA5}">
+                      <a16:colId xmlns:a16="http://schemas.microsoft.com/office/drawing/2014/main" val="20003"/>
+                    </a:ext>
+                  </a:extLst>
+                </a:gridCol>
               </a:tblGrid>
               <a:tr h="579628">
                 <a:tc>
                   <a:txBody>
-                    <a:bodyPr wrap="square"/>
+                    <a:bodyPr/>
                     <a:lstStyle/>
                     <a:p>
                       <a:pPr algn="ctr"/>
                       <a:r>
+                        <a:rPr sz="1400" b="1" dirty="0" err="1">
+                          <a:solidFill>
+                            <a:srgbClr val="1A2B3C"/>
+                          </a:solidFill>
+                          <a:latin typeface="Microsoft JhengHei"/>
+                        </a:rPr>
+                        <a:t>產品</a:t>
+                      </a:r>
+                      <a:endParaRPr sz="1400" b="1" dirty="0">
+                        <a:solidFill>
+                          <a:srgbClr val="1A2B3C"/>
+                        </a:solidFill>
+                        <a:latin typeface="Microsoft JhengHei"/>
+                      </a:endParaRPr>
+                    </a:p>
+                  </a:txBody>
+                  <a:tcPr marL="64008" marR="64008" marT="32004" marB="32004" anchor="ctr">
+                    <a:solidFill>
+                      <a:srgbClr val="ECEFF2"/>
+                    </a:solidFill>
+                  </a:tcPr>
+                </a:tc>
+                <a:tc>
+                  <a:txBody>
+                    <a:bodyPr/>
+                    <a:lstStyle/>
+                    <a:p>
+                      <a:pPr algn="ctr"/>
+                      <a:r>
+                        <a:rPr sz="1400" b="1" dirty="0" err="1">
+                          <a:solidFill>
+                            <a:srgbClr val="1A2B3C"/>
+                          </a:solidFill>
+                          <a:latin typeface="Microsoft JhengHei"/>
+                        </a:rPr>
+                        <a:t>官方可追溯的支援入口</a:t>
+                      </a:r>
+                      <a:endParaRPr sz="1400" b="1" dirty="0">
+                        <a:solidFill>
+                          <a:srgbClr val="1A2B3C"/>
+                        </a:solidFill>
+                        <a:latin typeface="Microsoft JhengHei"/>
+                      </a:endParaRPr>
+                    </a:p>
+                  </a:txBody>
+                  <a:tcPr marL="64008" marR="64008" marT="32004" marB="32004" anchor="ctr">
+                    <a:solidFill>
+                      <a:srgbClr val="ECEFF2"/>
+                    </a:solidFill>
+                  </a:tcPr>
+                </a:tc>
+                <a:tc>
+                  <a:txBody>
+                    <a:bodyPr/>
+                    <a:lstStyle/>
+                    <a:p>
+                      <a:pPr algn="ctr"/>
+                      <a:r>
                         <a:rPr sz="1400" b="1">
                           <a:solidFill>
                             <a:srgbClr val="1A2B3C"/>
                           </a:solidFill>
                           <a:latin typeface="Microsoft JhengHei"/>
                         </a:rPr>
-                        <a:t>產品</a:t>
+                        <a:t>PoC 版本維護狀態</a:t>
                       </a:r>
                     </a:p>
                   </a:txBody>
@@ -17007,7 +18577,7 @@
                 </a:tc>
                 <a:tc>
                   <a:txBody>
-                    <a:bodyPr wrap="square"/>
+                    <a:bodyPr/>
                     <a:lstStyle/>
                     <a:p>
                       <a:pPr algn="ctr"/>
@@ -17018,7 +18588,7 @@
                           </a:solidFill>
                           <a:latin typeface="Microsoft JhengHei"/>
                         </a:rPr>
-                        <a:t>官方可追溯的支援入口</a:t>
+                        <a:t>Pilot 前需向原廠確認</a:t>
                       </a:r>
                     </a:p>
                   </a:txBody>
@@ -17028,57 +18598,16 @@
                     </a:solidFill>
                   </a:tcPr>
                 </a:tc>
-                <a:tc>
-                  <a:txBody>
-                    <a:bodyPr wrap="square"/>
-                    <a:lstStyle/>
-                    <a:p>
-                      <a:pPr algn="ctr"/>
-                      <a:r>
-                        <a:rPr sz="1400" b="1">
-                          <a:solidFill>
-                            <a:srgbClr val="1A2B3C"/>
-                          </a:solidFill>
-                          <a:latin typeface="Microsoft JhengHei"/>
-                        </a:rPr>
-                        <a:t>PoC 版本維護狀態</a:t>
-                      </a:r>
-                    </a:p>
-                  </a:txBody>
-                  <a:tcPr marL="64008" marR="64008" marT="32004" marB="32004" anchor="ctr">
-                    <a:solidFill>
-                      <a:srgbClr val="ECEFF2"/>
-                    </a:solidFill>
-                  </a:tcPr>
-                </a:tc>
-                <a:tc>
-                  <a:txBody>
-                    <a:bodyPr wrap="square"/>
-                    <a:lstStyle/>
-                    <a:p>
-                      <a:pPr algn="ctr"/>
-                      <a:r>
-                        <a:rPr sz="1400" b="1">
-                          <a:solidFill>
-                            <a:srgbClr val="1A2B3C"/>
-                          </a:solidFill>
-                          <a:latin typeface="Microsoft JhengHei"/>
-                        </a:rPr>
-                        <a:t>Pilot 前需向原廠確認</a:t>
-                      </a:r>
-                    </a:p>
-                  </a:txBody>
-                  <a:tcPr marL="64008" marR="64008" marT="32004" marB="32004" anchor="ctr">
-                    <a:solidFill>
-                      <a:srgbClr val="ECEFF2"/>
-                    </a:solidFill>
-                  </a:tcPr>
-                </a:tc>
+                <a:extLst>
+                  <a:ext uri="{0D108BD9-81ED-4DB2-BD59-A6C34878D82A}">
+                    <a16:rowId xmlns:a16="http://schemas.microsoft.com/office/drawing/2014/main" val="10000"/>
+                  </a:ext>
+                </a:extLst>
               </a:tr>
               <a:tr h="579628">
                 <a:tc>
                   <a:txBody>
-                    <a:bodyPr wrap="square"/>
+                    <a:bodyPr/>
                     <a:lstStyle/>
                     <a:p>
                       <a:pPr algn="ctr"/>
@@ -17101,7 +18630,7 @@
                 </a:tc>
                 <a:tc>
                   <a:txBody>
-                    <a:bodyPr wrap="square"/>
+                    <a:bodyPr/>
                     <a:lstStyle/>
                     <a:p>
                       <a:pPr algn="l"/>
@@ -17125,18 +18654,95 @@
                 </a:tc>
                 <a:tc>
                   <a:txBody>
-                    <a:bodyPr wrap="square"/>
+                    <a:bodyPr/>
                     <a:lstStyle/>
                     <a:p>
                       <a:pPr algn="l"/>
                       <a:r>
+                        <a:rPr sz="1400" b="0" dirty="0">
+                          <a:solidFill>
+                            <a:srgbClr val="22303F"/>
+                          </a:solidFill>
+                          <a:latin typeface="Microsoft JhengHei"/>
+                        </a:rPr>
+                        <a:t>v8.5 LTS；</a:t>
+                      </a:r>
+                      <a:endParaRPr lang="en-US" sz="1400" b="0" dirty="0">
+                        <a:solidFill>
+                          <a:srgbClr val="22303F"/>
+                        </a:solidFill>
+                        <a:latin typeface="Microsoft JhengHei"/>
+                      </a:endParaRPr>
+                    </a:p>
+                    <a:p>
+                      <a:pPr algn="l"/>
+                      <a:r>
+                        <a:rPr sz="1400" b="0" dirty="0">
+                          <a:solidFill>
+                            <a:srgbClr val="22303F"/>
+                          </a:solidFill>
+                          <a:latin typeface="Microsoft JhengHei"/>
+                        </a:rPr>
+                        <a:t>Community </a:t>
+                      </a:r>
+                      <a:r>
+                        <a:rPr sz="1400" b="0" dirty="0" err="1">
+                          <a:solidFill>
+                            <a:srgbClr val="22303F"/>
+                          </a:solidFill>
+                          <a:latin typeface="Microsoft JhengHei"/>
+                        </a:rPr>
+                        <a:t>維護</a:t>
+                      </a:r>
+                      <a:r>
+                        <a:rPr sz="1400" b="0" dirty="0">
+                          <a:solidFill>
+                            <a:srgbClr val="22303F"/>
+                          </a:solidFill>
+                          <a:latin typeface="Microsoft JhengHei"/>
+                        </a:rPr>
+                        <a:t> 2027-12-19／延伸 2028-12-19，Enterprise </a:t>
+                      </a:r>
+                      <a:r>
+                        <a:rPr sz="1400" b="0" dirty="0" err="1">
+                          <a:solidFill>
+                            <a:srgbClr val="22303F"/>
+                          </a:solidFill>
+                          <a:latin typeface="Microsoft JhengHei"/>
+                        </a:rPr>
+                        <a:t>維護</a:t>
+                      </a:r>
+                      <a:r>
+                        <a:rPr sz="1400" b="0" dirty="0">
+                          <a:solidFill>
+                            <a:srgbClr val="22303F"/>
+                          </a:solidFill>
+                          <a:latin typeface="Microsoft JhengHei"/>
+                        </a:rPr>
+                        <a:t> 2029-12-19／延伸 2030-12-19</a:t>
+                      </a:r>
+                    </a:p>
+                  </a:txBody>
+                  <a:tcPr marL="64008" marR="64008" marT="32004" marB="32004" anchor="ctr">
+                    <a:solidFill>
+                      <a:srgbClr val="FFFFFF"/>
+                    </a:solidFill>
+                  </a:tcPr>
+                </a:tc>
+                <a:tc>
+                  <a:txBody>
+                    <a:bodyPr/>
+                    <a:lstStyle/>
+                    <a:p>
+                      <a:pPr algn="l"/>
+                      <a:r>
                         <a:rPr sz="1400" b="0">
                           <a:solidFill>
                             <a:srgbClr val="22303F"/>
                           </a:solidFill>
                           <a:latin typeface="Microsoft JhengHei"/>
                         </a:rPr>
-                        <a:t>v8.5 LTS；Community 維護 2027-12-19／延伸 2028-12-19，Enterprise 維護 2029-12-19／延伸 2030-12-19</a:t>
+                        <a:t>台灣時區／語言、P1 事故的回應與解決時限、根因分析、升級及現場協作</a:t>
                       </a:r>
                     </a:p>
                   </a:txBody>
@@ -17146,34 +18752,16 @@
                     </a:solidFill>
                   </a:tcPr>
                 </a:tc>
-                <a:tc>
-                  <a:txBody>
-                    <a:bodyPr wrap="square"/>
-                    <a:lstStyle/>
-                    <a:p>
-                      <a:pPr algn="l"/>
-                      <a:r>
-                        <a:rPr sz="1400" b="0">
-                          <a:solidFill>
-                            <a:srgbClr val="22303F"/>
-                          </a:solidFill>
-                          <a:latin typeface="Microsoft JhengHei"/>
-                        </a:rPr>
-                        <a:t>台灣時區／語言、P1 事故的回應與解決時限、根因分析、升級及現場協作</a:t>
-                      </a:r>
-                    </a:p>
-                  </a:txBody>
-                  <a:tcPr marL="64008" marR="64008" marT="32004" marB="32004" anchor="ctr">
-                    <a:solidFill>
-                      <a:srgbClr val="FFFFFF"/>
-                    </a:solidFill>
-                  </a:tcPr>
-                </a:tc>
+                <a:extLst>
+                  <a:ext uri="{0D108BD9-81ED-4DB2-BD59-A6C34878D82A}">
+                    <a16:rowId xmlns:a16="http://schemas.microsoft.com/office/drawing/2014/main" val="10001"/>
+                  </a:ext>
+                </a:extLst>
               </a:tr>
               <a:tr h="579628">
                 <a:tc>
                   <a:txBody>
-                    <a:bodyPr wrap="square"/>
+                    <a:bodyPr/>
                     <a:lstStyle/>
                     <a:p>
                       <a:pPr algn="ctr"/>
@@ -17196,7 +18784,7 @@
                 </a:tc>
                 <a:tc>
                   <a:txBody>
-                    <a:bodyPr wrap="square"/>
+                    <a:bodyPr/>
                     <a:lstStyle/>
                     <a:p>
                       <a:pPr algn="l"/>
@@ -17220,7 +18808,7 @@
                 </a:tc>
                 <a:tc>
                   <a:txBody>
-                    <a:bodyPr wrap="square"/>
+                    <a:bodyPr/>
                     <a:lstStyle/>
                     <a:p>
                       <a:pPr algn="l"/>
@@ -17243,7 +18831,7 @@
                 </a:tc>
                 <a:tc>
                   <a:txBody>
-                    <a:bodyPr wrap="square"/>
+                    <a:bodyPr/>
                     <a:lstStyle/>
                     <a:p>
                       <a:pPr algn="l"/>
@@ -17273,11 +18861,16 @@
                     </a:solidFill>
                   </a:tcPr>
                 </a:tc>
+                <a:extLst>
+                  <a:ext uri="{0D108BD9-81ED-4DB2-BD59-A6C34878D82A}">
+                    <a16:rowId xmlns:a16="http://schemas.microsoft.com/office/drawing/2014/main" val="10002"/>
+                  </a:ext>
+                </a:extLst>
               </a:tr>
               <a:tr h="579628">
                 <a:tc>
                   <a:txBody>
-                    <a:bodyPr wrap="square"/>
+                    <a:bodyPr/>
                     <a:lstStyle/>
                     <a:p>
                       <a:pPr algn="ctr"/>
@@ -17300,7 +18893,7 @@
                 </a:tc>
                 <a:tc>
                   <a:txBody>
-                    <a:bodyPr wrap="square"/>
+                    <a:bodyPr/>
                     <a:lstStyle/>
                     <a:p>
                       <a:pPr algn="l"/>
@@ -17324,7 +18917,7 @@
                 </a:tc>
                 <a:tc>
                   <a:txBody>
-                    <a:bodyPr wrap="square"/>
+                    <a:bodyPr/>
                     <a:lstStyle/>
                     <a:p>
                       <a:pPr algn="l"/>
@@ -17347,7 +18940,7 @@
                 </a:tc>
                 <a:tc>
                   <a:txBody>
-                    <a:bodyPr wrap="square"/>
+                    <a:bodyPr/>
                     <a:lstStyle/>
                     <a:p>
                       <a:pPr algn="l"/>
@@ -17368,11 +18961,16 @@
                     </a:solidFill>
                   </a:tcPr>
                 </a:tc>
+                <a:extLst>
+                  <a:ext uri="{0D108BD9-81ED-4DB2-BD59-A6C34878D82A}">
+                    <a16:rowId xmlns:a16="http://schemas.microsoft.com/office/drawing/2014/main" val="10003"/>
+                  </a:ext>
+                </a:extLst>
               </a:tr>
               <a:tr h="579628">
                 <a:tc>
                   <a:txBody>
-                    <a:bodyPr wrap="square"/>
+                    <a:bodyPr/>
                     <a:lstStyle/>
                     <a:p>
                       <a:pPr algn="ctr"/>
@@ -17395,12 +18993,12 @@
                 </a:tc>
                 <a:tc>
                   <a:txBody>
-                    <a:bodyPr wrap="square"/>
+                    <a:bodyPr/>
                     <a:lstStyle/>
                     <a:p>
                       <a:pPr algn="l"/>
                       <a:r>
-                        <a:rPr sz="1400" b="0" u="sng">
+                        <a:rPr sz="1400" b="0" u="sng" dirty="0">
                           <a:solidFill>
                             <a:srgbClr val="1B5EA8"/>
                           </a:solidFill>
@@ -17419,7 +19017,7 @@
                 </a:tc>
                 <a:tc>
                   <a:txBody>
-                    <a:bodyPr wrap="square"/>
+                    <a:bodyPr/>
                     <a:lstStyle/>
                     <a:p>
                       <a:pPr algn="l"/>
@@ -17442,19 +19040,61 @@
                 </a:tc>
                 <a:tc>
                   <a:txBody>
-                    <a:bodyPr wrap="square"/>
+                    <a:bodyPr/>
                     <a:lstStyle/>
                     <a:p>
                       <a:pPr algn="l"/>
                       <a:r>
-                        <a:rPr sz="1400" b="0">
-                          <a:solidFill>
-                            <a:srgbClr val="22303F"/>
-                          </a:solidFill>
-                          <a:latin typeface="Microsoft JhengHei"/>
-                        </a:rPr>
-                        <a:t>同 YugabyteDB 困境</a:t>
-                      </a:r>
+                        <a:rPr sz="1400" b="0" dirty="0" err="1">
+                          <a:solidFill>
+                            <a:srgbClr val="22303F"/>
+                          </a:solidFill>
+                          <a:latin typeface="Microsoft JhengHei"/>
+                        </a:rPr>
+                        <a:t>同</a:t>
+                      </a:r>
+                      <a:r>
+                        <a:rPr sz="1400" b="0" dirty="0">
+                          <a:solidFill>
+                            <a:srgbClr val="22303F"/>
+                          </a:solidFill>
+                          <a:latin typeface="Microsoft JhengHei"/>
+                        </a:rPr>
+                        <a:t> </a:t>
+                      </a:r>
+                      <a:r>
+                        <a:rPr sz="1400" b="0" dirty="0" err="1">
+                          <a:solidFill>
+                            <a:srgbClr val="22303F"/>
+                          </a:solidFill>
+                          <a:latin typeface="Microsoft JhengHei"/>
+                        </a:rPr>
+                        <a:t>YugabyteDB</a:t>
+                      </a:r>
+                      <a:r>
+                        <a:rPr sz="1400" b="0" dirty="0">
+                          <a:solidFill>
+                            <a:srgbClr val="22303F"/>
+                          </a:solidFill>
+                          <a:latin typeface="Microsoft JhengHei"/>
+                        </a:rPr>
+                        <a:t> </a:t>
+                      </a:r>
+                      <a:r>
+                        <a:rPr sz="1400" b="0" dirty="0" err="1">
+                          <a:solidFill>
+                            <a:srgbClr val="22303F"/>
+                          </a:solidFill>
+                          <a:latin typeface="Microsoft JhengHei"/>
+                        </a:rPr>
+                        <a:t>困境</a:t>
+                      </a:r>
+                      <a:endParaRPr sz="1400" b="0" dirty="0">
+                        <a:solidFill>
+                          <a:srgbClr val="22303F"/>
+                        </a:solidFill>
+                        <a:latin typeface="Microsoft JhengHei"/>
+                      </a:endParaRPr>
                     </a:p>
                   </a:txBody>
                   <a:tcPr marL="64008" marR="64008" marT="32004" marB="32004" anchor="ctr">
@@ -17463,6 +19103,11 @@
                     </a:solidFill>
                   </a:tcPr>
                 </a:tc>
+                <a:extLst>
+                  <a:ext uri="{0D108BD9-81ED-4DB2-BD59-A6C34878D82A}">
+                    <a16:rowId xmlns:a16="http://schemas.microsoft.com/office/drawing/2014/main" val="10004"/>
+                  </a:ext>
+                </a:extLst>
               </a:tr>
             </a:tbl>
           </a:graphicData>
@@ -17476,7 +19121,7 @@
         </p:nvSpPr>
         <p:spPr>
           <a:xfrm>
-            <a:off x="694944" y="4827524"/>
+            <a:off x="694944" y="4915124"/>
             <a:ext cx="10929823" cy="558800"/>
           </a:xfrm>
           <a:prstGeom prst="rect">
@@ -17485,7 +19130,7 @@
           <a:noFill/>
         </p:spPr>
         <p:txBody>
-          <a:bodyPr wrap="square" lIns="0" rIns="0" tIns="0" bIns="0">
+          <a:bodyPr wrap="square" lIns="0" tIns="0" rIns="0" bIns="0">
             <a:spAutoFit/>
           </a:bodyPr>
           <a:lstStyle/>
@@ -17510,7 +19155,7 @@
         </p:nvSpPr>
         <p:spPr>
           <a:xfrm>
-            <a:off x="566928" y="4827524"/>
+            <a:off x="566928" y="4915124"/>
             <a:ext cx="26000" cy="558800"/>
           </a:xfrm>
           <a:prstGeom prst="rect">
@@ -17543,6 +19188,7 @@
           <a:lstStyle/>
           <a:p>
             <a:pPr algn="ctr"/>
+            <a:endParaRPr/>
           </a:p>
         </p:txBody>
       </p:sp>

--- a/poc/1_MeetingMinutes/0821_slide.pptx
+++ b/poc/1_MeetingMinutes/0821_slide.pptx
@@ -5,28 +5,28 @@
     <p:sldMasterId id="2147483648" r:id="rId1"/>
   </p:sldMasterIdLst>
   <p:sldIdLst>
-    <p:sldId id="256" r:id="rId2"/>
-    <p:sldId id="257" r:id="rId3"/>
-    <p:sldId id="258" r:id="rId4"/>
-    <p:sldId id="259" r:id="rId5"/>
-    <p:sldId id="260" r:id="rId6"/>
-    <p:sldId id="261" r:id="rId7"/>
-    <p:sldId id="262" r:id="rId8"/>
-    <p:sldId id="263" r:id="rId9"/>
-    <p:sldId id="264" r:id="rId10"/>
-    <p:sldId id="265" r:id="rId11"/>
-    <p:sldId id="266" r:id="rId12"/>
-    <p:sldId id="267" r:id="rId13"/>
-    <p:sldId id="268" r:id="rId14"/>
-    <p:sldId id="269" r:id="rId15"/>
-    <p:sldId id="270" r:id="rId16"/>
-    <p:sldId id="271" r:id="rId17"/>
-    <p:sldId id="272" r:id="rId18"/>
-    <p:sldId id="273" r:id="rId19"/>
-    <p:sldId id="274" r:id="rId20"/>
-    <p:sldId id="275" r:id="rId21"/>
+    <p:sldId id="256" r:id="rId7"/>
+    <p:sldId id="257" r:id="rId8"/>
+    <p:sldId id="258" r:id="rId9"/>
+    <p:sldId id="259" r:id="rId10"/>
+    <p:sldId id="260" r:id="rId11"/>
+    <p:sldId id="261" r:id="rId12"/>
+    <p:sldId id="262" r:id="rId13"/>
+    <p:sldId id="263" r:id="rId14"/>
+    <p:sldId id="264" r:id="rId15"/>
+    <p:sldId id="265" r:id="rId16"/>
+    <p:sldId id="266" r:id="rId17"/>
+    <p:sldId id="267" r:id="rId18"/>
+    <p:sldId id="268" r:id="rId19"/>
+    <p:sldId id="269" r:id="rId20"/>
+    <p:sldId id="270" r:id="rId21"/>
+    <p:sldId id="271" r:id="rId22"/>
+    <p:sldId id="272" r:id="rId23"/>
+    <p:sldId id="273" r:id="rId24"/>
+    <p:sldId id="274" r:id="rId25"/>
+    <p:sldId id="275" r:id="rId26"/>
   </p:sldIdLst>
-  <p:sldSz cx="12192000" cy="6858000"/>
+  <p:sldSz cx="12191695" cy="6858000" type="screen4x3"/>
   <p:notesSz cx="6858000" cy="9144000"/>
   <p:defaultTextStyle>
     <a:defPPr>
@@ -123,22 +123,6 @@
       </a:defRPr>
     </a:lvl9pPr>
   </p:defaultTextStyle>
-  <p:extLst>
-    <p:ext uri="{EFAFB233-063F-42B5-8137-9DF3F51BA10A}">
-      <p15:sldGuideLst xmlns:p15="http://schemas.microsoft.com/office/powerpoint/2012/main">
-        <p15:guide id="1" orient="horz" pos="2160">
-          <p15:clr>
-            <a:srgbClr val="A4A3A4"/>
-          </p15:clr>
-        </p15:guide>
-        <p15:guide id="2" pos="2880">
-          <p15:clr>
-            <a:srgbClr val="A4A3A4"/>
-          </p15:clr>
-        </p15:guide>
-      </p15:sldGuideLst>
-    </p:ext>
-  </p:extLst>
 </p:presentation>
 </file>
 
@@ -180,9 +164,10 @@
           <a:lstStyle/>
           <a:p>
             <a:r>
-              <a:rPr lang="en-US"/>
+              <a:rPr lang="en-US" smtClean="0"/>
               <a:t>Click to edit Master title style</a:t>
             </a:r>
+            <a:endParaRPr lang="en-US"/>
           </a:p>
         </p:txBody>
       </p:sp>
@@ -298,9 +283,10 @@
           </a:lstStyle>
           <a:p>
             <a:r>
-              <a:rPr lang="en-US"/>
+              <a:rPr lang="en-US" smtClean="0"/>
               <a:t>Click to edit Master subtitle style</a:t>
             </a:r>
+            <a:endParaRPr lang="en-US"/>
           </a:p>
         </p:txBody>
       </p:sp>
@@ -321,7 +307,7 @@
           <a:p>
             <a:fld id="{5BCAD085-E8A6-8845-BD4E-CB4CCA059FC4}" type="datetimeFigureOut">
               <a:rPr lang="en-US" smtClean="0"/>
-              <a:t>8/20/26</a:t>
+              <a:t>1/27/13</a:t>
             </a:fld>
             <a:endParaRPr lang="en-US"/>
           </a:p>
@@ -415,9 +401,10 @@
           <a:lstStyle/>
           <a:p>
             <a:r>
-              <a:rPr lang="en-US"/>
+              <a:rPr lang="en-US" smtClean="0"/>
               <a:t>Click to edit Master title style</a:t>
             </a:r>
+            <a:endParaRPr lang="en-US"/>
           </a:p>
         </p:txBody>
       </p:sp>
@@ -438,37 +425,38 @@
           <a:p>
             <a:pPr lvl="0"/>
             <a:r>
-              <a:rPr lang="en-US"/>
+              <a:rPr lang="en-US" smtClean="0"/>
               <a:t>Click to edit Master text styles</a:t>
             </a:r>
           </a:p>
           <a:p>
             <a:pPr lvl="1"/>
             <a:r>
-              <a:rPr lang="en-US"/>
+              <a:rPr lang="en-US" smtClean="0"/>
               <a:t>Second level</a:t>
             </a:r>
           </a:p>
           <a:p>
             <a:pPr lvl="2"/>
             <a:r>
-              <a:rPr lang="en-US"/>
+              <a:rPr lang="en-US" smtClean="0"/>
               <a:t>Third level</a:t>
             </a:r>
           </a:p>
           <a:p>
             <a:pPr lvl="3"/>
             <a:r>
-              <a:rPr lang="en-US"/>
+              <a:rPr lang="en-US" smtClean="0"/>
               <a:t>Fourth level</a:t>
             </a:r>
           </a:p>
           <a:p>
             <a:pPr lvl="4"/>
             <a:r>
-              <a:rPr lang="en-US"/>
+              <a:rPr lang="en-US" smtClean="0"/>
               <a:t>Fifth level</a:t>
             </a:r>
+            <a:endParaRPr lang="en-US"/>
           </a:p>
         </p:txBody>
       </p:sp>
@@ -489,7 +477,7 @@
           <a:p>
             <a:fld id="{5BCAD085-E8A6-8845-BD4E-CB4CCA059FC4}" type="datetimeFigureOut">
               <a:rPr lang="en-US" smtClean="0"/>
-              <a:t>8/20/26</a:t>
+              <a:t>1/27/13</a:t>
             </a:fld>
             <a:endParaRPr lang="en-US"/>
           </a:p>
@@ -588,9 +576,10 @@
           <a:lstStyle/>
           <a:p>
             <a:r>
-              <a:rPr lang="en-US"/>
+              <a:rPr lang="en-US" smtClean="0"/>
               <a:t>Click to edit Master title style</a:t>
             </a:r>
+            <a:endParaRPr lang="en-US"/>
           </a:p>
         </p:txBody>
       </p:sp>
@@ -616,37 +605,38 @@
           <a:p>
             <a:pPr lvl="0"/>
             <a:r>
-              <a:rPr lang="en-US"/>
+              <a:rPr lang="en-US" smtClean="0"/>
               <a:t>Click to edit Master text styles</a:t>
             </a:r>
           </a:p>
           <a:p>
             <a:pPr lvl="1"/>
             <a:r>
-              <a:rPr lang="en-US"/>
+              <a:rPr lang="en-US" smtClean="0"/>
               <a:t>Second level</a:t>
             </a:r>
           </a:p>
           <a:p>
             <a:pPr lvl="2"/>
             <a:r>
-              <a:rPr lang="en-US"/>
+              <a:rPr lang="en-US" smtClean="0"/>
               <a:t>Third level</a:t>
             </a:r>
           </a:p>
           <a:p>
             <a:pPr lvl="3"/>
             <a:r>
-              <a:rPr lang="en-US"/>
+              <a:rPr lang="en-US" smtClean="0"/>
               <a:t>Fourth level</a:t>
             </a:r>
           </a:p>
           <a:p>
             <a:pPr lvl="4"/>
             <a:r>
-              <a:rPr lang="en-US"/>
+              <a:rPr lang="en-US" smtClean="0"/>
               <a:t>Fifth level</a:t>
             </a:r>
+            <a:endParaRPr lang="en-US"/>
           </a:p>
         </p:txBody>
       </p:sp>
@@ -667,7 +657,7 @@
           <a:p>
             <a:fld id="{5BCAD085-E8A6-8845-BD4E-CB4CCA059FC4}" type="datetimeFigureOut">
               <a:rPr lang="en-US" smtClean="0"/>
-              <a:t>8/20/26</a:t>
+              <a:t>1/27/13</a:t>
             </a:fld>
             <a:endParaRPr lang="en-US"/>
           </a:p>
@@ -761,9 +751,10 @@
           <a:lstStyle/>
           <a:p>
             <a:r>
-              <a:rPr lang="en-US"/>
+              <a:rPr lang="en-US" smtClean="0"/>
               <a:t>Click to edit Master title style</a:t>
             </a:r>
+            <a:endParaRPr lang="en-US"/>
           </a:p>
         </p:txBody>
       </p:sp>
@@ -784,37 +775,38 @@
           <a:p>
             <a:pPr lvl="0"/>
             <a:r>
-              <a:rPr lang="en-US"/>
+              <a:rPr lang="en-US" smtClean="0"/>
               <a:t>Click to edit Master text styles</a:t>
             </a:r>
           </a:p>
           <a:p>
             <a:pPr lvl="1"/>
             <a:r>
-              <a:rPr lang="en-US"/>
+              <a:rPr lang="en-US" smtClean="0"/>
               <a:t>Second level</a:t>
             </a:r>
           </a:p>
           <a:p>
             <a:pPr lvl="2"/>
             <a:r>
-              <a:rPr lang="en-US"/>
+              <a:rPr lang="en-US" smtClean="0"/>
               <a:t>Third level</a:t>
             </a:r>
           </a:p>
           <a:p>
             <a:pPr lvl="3"/>
             <a:r>
-              <a:rPr lang="en-US"/>
+              <a:rPr lang="en-US" smtClean="0"/>
               <a:t>Fourth level</a:t>
             </a:r>
           </a:p>
           <a:p>
             <a:pPr lvl="4"/>
             <a:r>
-              <a:rPr lang="en-US"/>
+              <a:rPr lang="en-US" smtClean="0"/>
               <a:t>Fifth level</a:t>
             </a:r>
+            <a:endParaRPr lang="en-US"/>
           </a:p>
         </p:txBody>
       </p:sp>
@@ -835,7 +827,7 @@
           <a:p>
             <a:fld id="{5BCAD085-E8A6-8845-BD4E-CB4CCA059FC4}" type="datetimeFigureOut">
               <a:rPr lang="en-US" smtClean="0"/>
-              <a:t>8/20/26</a:t>
+              <a:t>1/27/13</a:t>
             </a:fld>
             <a:endParaRPr lang="en-US"/>
           </a:p>
@@ -938,9 +930,10 @@
           </a:lstStyle>
           <a:p>
             <a:r>
-              <a:rPr lang="en-US"/>
+              <a:rPr lang="en-US" smtClean="0"/>
               <a:t>Click to edit Master title style</a:t>
             </a:r>
+            <a:endParaRPr lang="en-US"/>
           </a:p>
         </p:txBody>
       </p:sp>
@@ -1057,7 +1050,7 @@
           <a:p>
             <a:pPr lvl="0"/>
             <a:r>
-              <a:rPr lang="en-US"/>
+              <a:rPr lang="en-US" smtClean="0"/>
               <a:t>Click to edit Master text styles</a:t>
             </a:r>
           </a:p>
@@ -1080,7 +1073,7 @@
           <a:p>
             <a:fld id="{5BCAD085-E8A6-8845-BD4E-CB4CCA059FC4}" type="datetimeFigureOut">
               <a:rPr lang="en-US" smtClean="0"/>
-              <a:t>8/20/26</a:t>
+              <a:t>1/27/13</a:t>
             </a:fld>
             <a:endParaRPr lang="en-US"/>
           </a:p>
@@ -1174,9 +1167,10 @@
           <a:lstStyle/>
           <a:p>
             <a:r>
-              <a:rPr lang="en-US"/>
+              <a:rPr lang="en-US" smtClean="0"/>
               <a:t>Click to edit Master title style</a:t>
             </a:r>
+            <a:endParaRPr lang="en-US"/>
           </a:p>
         </p:txBody>
       </p:sp>
@@ -1230,37 +1224,38 @@
           <a:p>
             <a:pPr lvl="0"/>
             <a:r>
-              <a:rPr lang="en-US"/>
+              <a:rPr lang="en-US" smtClean="0"/>
               <a:t>Click to edit Master text styles</a:t>
             </a:r>
           </a:p>
           <a:p>
             <a:pPr lvl="1"/>
             <a:r>
-              <a:rPr lang="en-US"/>
+              <a:rPr lang="en-US" smtClean="0"/>
               <a:t>Second level</a:t>
             </a:r>
           </a:p>
           <a:p>
             <a:pPr lvl="2"/>
             <a:r>
-              <a:rPr lang="en-US"/>
+              <a:rPr lang="en-US" smtClean="0"/>
               <a:t>Third level</a:t>
             </a:r>
           </a:p>
           <a:p>
             <a:pPr lvl="3"/>
             <a:r>
-              <a:rPr lang="en-US"/>
+              <a:rPr lang="en-US" smtClean="0"/>
               <a:t>Fourth level</a:t>
             </a:r>
           </a:p>
           <a:p>
             <a:pPr lvl="4"/>
             <a:r>
-              <a:rPr lang="en-US"/>
+              <a:rPr lang="en-US" smtClean="0"/>
               <a:t>Fifth level</a:t>
             </a:r>
+            <a:endParaRPr lang="en-US"/>
           </a:p>
         </p:txBody>
       </p:sp>
@@ -1314,37 +1309,38 @@
           <a:p>
             <a:pPr lvl="0"/>
             <a:r>
-              <a:rPr lang="en-US"/>
+              <a:rPr lang="en-US" smtClean="0"/>
               <a:t>Click to edit Master text styles</a:t>
             </a:r>
           </a:p>
           <a:p>
             <a:pPr lvl="1"/>
             <a:r>
-              <a:rPr lang="en-US"/>
+              <a:rPr lang="en-US" smtClean="0"/>
               <a:t>Second level</a:t>
             </a:r>
           </a:p>
           <a:p>
             <a:pPr lvl="2"/>
             <a:r>
-              <a:rPr lang="en-US"/>
+              <a:rPr lang="en-US" smtClean="0"/>
               <a:t>Third level</a:t>
             </a:r>
           </a:p>
           <a:p>
             <a:pPr lvl="3"/>
             <a:r>
-              <a:rPr lang="en-US"/>
+              <a:rPr lang="en-US" smtClean="0"/>
               <a:t>Fourth level</a:t>
             </a:r>
           </a:p>
           <a:p>
             <a:pPr lvl="4"/>
             <a:r>
-              <a:rPr lang="en-US"/>
+              <a:rPr lang="en-US" smtClean="0"/>
               <a:t>Fifth level</a:t>
             </a:r>
+            <a:endParaRPr lang="en-US"/>
           </a:p>
         </p:txBody>
       </p:sp>
@@ -1365,7 +1361,7 @@
           <a:p>
             <a:fld id="{5BCAD085-E8A6-8845-BD4E-CB4CCA059FC4}" type="datetimeFigureOut">
               <a:rPr lang="en-US" smtClean="0"/>
-              <a:t>8/20/26</a:t>
+              <a:t>1/27/13</a:t>
             </a:fld>
             <a:endParaRPr lang="en-US"/>
           </a:p>
@@ -1463,9 +1459,10 @@
           </a:lstStyle>
           <a:p>
             <a:r>
-              <a:rPr lang="en-US"/>
+              <a:rPr lang="en-US" smtClean="0"/>
               <a:t>Click to edit Master title style</a:t>
             </a:r>
+            <a:endParaRPr lang="en-US"/>
           </a:p>
         </p:txBody>
       </p:sp>
@@ -1528,7 +1525,7 @@
           <a:p>
             <a:pPr lvl="0"/>
             <a:r>
-              <a:rPr lang="en-US"/>
+              <a:rPr lang="en-US" smtClean="0"/>
               <a:t>Click to edit Master text styles</a:t>
             </a:r>
           </a:p>
@@ -1584,37 +1581,38 @@
           <a:p>
             <a:pPr lvl="0"/>
             <a:r>
-              <a:rPr lang="en-US"/>
+              <a:rPr lang="en-US" smtClean="0"/>
               <a:t>Click to edit Master text styles</a:t>
             </a:r>
           </a:p>
           <a:p>
             <a:pPr lvl="1"/>
             <a:r>
-              <a:rPr lang="en-US"/>
+              <a:rPr lang="en-US" smtClean="0"/>
               <a:t>Second level</a:t>
             </a:r>
           </a:p>
           <a:p>
             <a:pPr lvl="2"/>
             <a:r>
-              <a:rPr lang="en-US"/>
+              <a:rPr lang="en-US" smtClean="0"/>
               <a:t>Third level</a:t>
             </a:r>
           </a:p>
           <a:p>
             <a:pPr lvl="3"/>
             <a:r>
-              <a:rPr lang="en-US"/>
+              <a:rPr lang="en-US" smtClean="0"/>
               <a:t>Fourth level</a:t>
             </a:r>
           </a:p>
           <a:p>
             <a:pPr lvl="4"/>
             <a:r>
-              <a:rPr lang="en-US"/>
+              <a:rPr lang="en-US" smtClean="0"/>
               <a:t>Fifth level</a:t>
             </a:r>
+            <a:endParaRPr lang="en-US"/>
           </a:p>
         </p:txBody>
       </p:sp>
@@ -1677,7 +1675,7 @@
           <a:p>
             <a:pPr lvl="0"/>
             <a:r>
-              <a:rPr lang="en-US"/>
+              <a:rPr lang="en-US" smtClean="0"/>
               <a:t>Click to edit Master text styles</a:t>
             </a:r>
           </a:p>
@@ -1733,37 +1731,38 @@
           <a:p>
             <a:pPr lvl="0"/>
             <a:r>
-              <a:rPr lang="en-US"/>
+              <a:rPr lang="en-US" smtClean="0"/>
               <a:t>Click to edit Master text styles</a:t>
             </a:r>
           </a:p>
           <a:p>
             <a:pPr lvl="1"/>
             <a:r>
-              <a:rPr lang="en-US"/>
+              <a:rPr lang="en-US" smtClean="0"/>
               <a:t>Second level</a:t>
             </a:r>
           </a:p>
           <a:p>
             <a:pPr lvl="2"/>
             <a:r>
-              <a:rPr lang="en-US"/>
+              <a:rPr lang="en-US" smtClean="0"/>
               <a:t>Third level</a:t>
             </a:r>
           </a:p>
           <a:p>
             <a:pPr lvl="3"/>
             <a:r>
-              <a:rPr lang="en-US"/>
+              <a:rPr lang="en-US" smtClean="0"/>
               <a:t>Fourth level</a:t>
             </a:r>
           </a:p>
           <a:p>
             <a:pPr lvl="4"/>
             <a:r>
-              <a:rPr lang="en-US"/>
+              <a:rPr lang="en-US" smtClean="0"/>
               <a:t>Fifth level</a:t>
             </a:r>
+            <a:endParaRPr lang="en-US"/>
           </a:p>
         </p:txBody>
       </p:sp>
@@ -1784,7 +1783,7 @@
           <a:p>
             <a:fld id="{5BCAD085-E8A6-8845-BD4E-CB4CCA059FC4}" type="datetimeFigureOut">
               <a:rPr lang="en-US" smtClean="0"/>
-              <a:t>8/20/26</a:t>
+              <a:t>1/27/13</a:t>
             </a:fld>
             <a:endParaRPr lang="en-US"/>
           </a:p>
@@ -1878,9 +1877,10 @@
           <a:lstStyle/>
           <a:p>
             <a:r>
-              <a:rPr lang="en-US"/>
+              <a:rPr lang="en-US" smtClean="0"/>
               <a:t>Click to edit Master title style</a:t>
             </a:r>
+            <a:endParaRPr lang="en-US"/>
           </a:p>
         </p:txBody>
       </p:sp>
@@ -1901,7 +1901,7 @@
           <a:p>
             <a:fld id="{5BCAD085-E8A6-8845-BD4E-CB4CCA059FC4}" type="datetimeFigureOut">
               <a:rPr lang="en-US" smtClean="0"/>
-              <a:t>8/20/26</a:t>
+              <a:t>1/27/13</a:t>
             </a:fld>
             <a:endParaRPr lang="en-US"/>
           </a:p>
@@ -1996,7 +1996,7 @@
           <a:p>
             <a:fld id="{5BCAD085-E8A6-8845-BD4E-CB4CCA059FC4}" type="datetimeFigureOut">
               <a:rPr lang="en-US" smtClean="0"/>
-              <a:t>8/20/26</a:t>
+              <a:t>1/27/13</a:t>
             </a:fld>
             <a:endParaRPr lang="en-US"/>
           </a:p>
@@ -2099,9 +2099,10 @@
           </a:lstStyle>
           <a:p>
             <a:r>
-              <a:rPr lang="en-US"/>
+              <a:rPr lang="en-US" smtClean="0"/>
               <a:t>Click to edit Master title style</a:t>
             </a:r>
+            <a:endParaRPr lang="en-US"/>
           </a:p>
         </p:txBody>
       </p:sp>
@@ -2155,37 +2156,38 @@
           <a:p>
             <a:pPr lvl="0"/>
             <a:r>
-              <a:rPr lang="en-US"/>
+              <a:rPr lang="en-US" smtClean="0"/>
               <a:t>Click to edit Master text styles</a:t>
             </a:r>
           </a:p>
           <a:p>
             <a:pPr lvl="1"/>
             <a:r>
-              <a:rPr lang="en-US"/>
+              <a:rPr lang="en-US" smtClean="0"/>
               <a:t>Second level</a:t>
             </a:r>
           </a:p>
           <a:p>
             <a:pPr lvl="2"/>
             <a:r>
-              <a:rPr lang="en-US"/>
+              <a:rPr lang="en-US" smtClean="0"/>
               <a:t>Third level</a:t>
             </a:r>
           </a:p>
           <a:p>
             <a:pPr lvl="3"/>
             <a:r>
-              <a:rPr lang="en-US"/>
+              <a:rPr lang="en-US" smtClean="0"/>
               <a:t>Fourth level</a:t>
             </a:r>
           </a:p>
           <a:p>
             <a:pPr lvl="4"/>
             <a:r>
-              <a:rPr lang="en-US"/>
+              <a:rPr lang="en-US" smtClean="0"/>
               <a:t>Fifth level</a:t>
             </a:r>
+            <a:endParaRPr lang="en-US"/>
           </a:p>
         </p:txBody>
       </p:sp>
@@ -2248,7 +2250,7 @@
           <a:p>
             <a:pPr lvl="0"/>
             <a:r>
-              <a:rPr lang="en-US"/>
+              <a:rPr lang="en-US" smtClean="0"/>
               <a:t>Click to edit Master text styles</a:t>
             </a:r>
           </a:p>
@@ -2271,7 +2273,7 @@
           <a:p>
             <a:fld id="{5BCAD085-E8A6-8845-BD4E-CB4CCA059FC4}" type="datetimeFigureOut">
               <a:rPr lang="en-US" smtClean="0"/>
-              <a:t>8/20/26</a:t>
+              <a:t>1/27/13</a:t>
             </a:fld>
             <a:endParaRPr lang="en-US"/>
           </a:p>
@@ -2374,9 +2376,10 @@
           </a:lstStyle>
           <a:p>
             <a:r>
-              <a:rPr lang="en-US"/>
+              <a:rPr lang="en-US" smtClean="0"/>
               <a:t>Click to edit Master title style</a:t>
             </a:r>
+            <a:endParaRPr lang="en-US"/>
           </a:p>
         </p:txBody>
       </p:sp>
@@ -2500,7 +2503,7 @@
           <a:p>
             <a:pPr lvl="0"/>
             <a:r>
-              <a:rPr lang="en-US"/>
+              <a:rPr lang="en-US" smtClean="0"/>
               <a:t>Click to edit Master text styles</a:t>
             </a:r>
           </a:p>
@@ -2523,7 +2526,7 @@
           <a:p>
             <a:fld id="{5BCAD085-E8A6-8845-BD4E-CB4CCA059FC4}" type="datetimeFigureOut">
               <a:rPr lang="en-US" smtClean="0"/>
-              <a:t>8/20/26</a:t>
+              <a:t>1/27/13</a:t>
             </a:fld>
             <a:endParaRPr lang="en-US"/>
           </a:p>
@@ -2632,9 +2635,10 @@
           <a:lstStyle/>
           <a:p>
             <a:r>
-              <a:rPr lang="en-US"/>
+              <a:rPr lang="en-US" smtClean="0"/>
               <a:t>Click to edit Master title style</a:t>
             </a:r>
+            <a:endParaRPr lang="en-US"/>
           </a:p>
         </p:txBody>
       </p:sp>
@@ -2665,37 +2669,38 @@
           <a:p>
             <a:pPr lvl="0"/>
             <a:r>
-              <a:rPr lang="en-US"/>
+              <a:rPr lang="en-US" smtClean="0"/>
               <a:t>Click to edit Master text styles</a:t>
             </a:r>
           </a:p>
           <a:p>
             <a:pPr lvl="1"/>
             <a:r>
-              <a:rPr lang="en-US"/>
+              <a:rPr lang="en-US" smtClean="0"/>
               <a:t>Second level</a:t>
             </a:r>
           </a:p>
           <a:p>
             <a:pPr lvl="2"/>
             <a:r>
-              <a:rPr lang="en-US"/>
+              <a:rPr lang="en-US" smtClean="0"/>
               <a:t>Third level</a:t>
             </a:r>
           </a:p>
           <a:p>
             <a:pPr lvl="3"/>
             <a:r>
-              <a:rPr lang="en-US"/>
+              <a:rPr lang="en-US" smtClean="0"/>
               <a:t>Fourth level</a:t>
             </a:r>
           </a:p>
           <a:p>
             <a:pPr lvl="4"/>
             <a:r>
-              <a:rPr lang="en-US"/>
+              <a:rPr lang="en-US" smtClean="0"/>
               <a:t>Fifth level</a:t>
             </a:r>
+            <a:endParaRPr lang="en-US"/>
           </a:p>
         </p:txBody>
       </p:sp>
@@ -2734,7 +2739,7 @@
           <a:p>
             <a:fld id="{5BCAD085-E8A6-8845-BD4E-CB4CCA059FC4}" type="datetimeFigureOut">
               <a:rPr lang="en-US" smtClean="0"/>
-              <a:t>8/20/26</a:t>
+              <a:t>1/27/13</a:t>
             </a:fld>
             <a:endParaRPr lang="en-US"/>
           </a:p>
@@ -3093,7 +3098,7 @@
 </file>
 
 <file path=ppt/slides/slide1.xml><?xml version="1.0" encoding="utf-8"?>
-<p:sld xmlns:a="http://schemas.openxmlformats.org/drawingml/2006/main" xmlns:r="http://schemas.openxmlformats.org/officeDocument/2006/relationships" xmlns:p="http://schemas.openxmlformats.org/presentationml/2006/main">
+<p:sld xmlns:a="http://schemas.openxmlformats.org/drawingml/2006/main" xmlns:p="http://schemas.openxmlformats.org/presentationml/2006/main" xmlns:r="http://schemas.openxmlformats.org/officeDocument/2006/relationships">
   <p:cSld>
     <p:spTree>
       <p:nvGrpSpPr>
@@ -3101,14 +3106,7 @@
         <p:cNvGrpSpPr/>
         <p:nvPr/>
       </p:nvGrpSpPr>
-      <p:grpSpPr>
-        <a:xfrm>
-          <a:off x="0" y="0"/>
-          <a:ext cx="0" cy="0"/>
-          <a:chOff x="0" y="0"/>
-          <a:chExt cx="0" cy="0"/>
-        </a:xfrm>
-      </p:grpSpPr>
+      <p:grpSpPr/>
       <p:sp>
         <p:nvSpPr>
           <p:cNvPr id="2" name="TextBox 1"/>
@@ -3126,7 +3124,7 @@
           <a:noFill/>
         </p:spPr>
         <p:txBody>
-          <a:bodyPr wrap="square" lIns="0" tIns="0" rIns="0" bIns="0">
+          <a:bodyPr wrap="square" lIns="0" rIns="0" tIns="0" bIns="0">
             <a:spAutoFit/>
           </a:bodyPr>
           <a:lstStyle/>
@@ -3160,7 +3158,7 @@
           <a:noFill/>
         </p:spPr>
         <p:txBody>
-          <a:bodyPr wrap="square" lIns="0" tIns="0" rIns="0" bIns="0">
+          <a:bodyPr wrap="square" lIns="0" rIns="0" tIns="0" bIns="0">
             <a:spAutoFit/>
           </a:bodyPr>
           <a:lstStyle/>
@@ -3195,7 +3193,7 @@
           <a:noFill/>
         </p:spPr>
         <p:txBody>
-          <a:bodyPr wrap="square" lIns="0" tIns="0" rIns="0" bIns="0">
+          <a:bodyPr wrap="square" lIns="0" rIns="0" tIns="0" bIns="0">
             <a:spAutoFit/>
           </a:bodyPr>
           <a:lstStyle/>
@@ -3230,7 +3228,7 @@
           <a:noFill/>
         </p:spPr>
         <p:txBody>
-          <a:bodyPr wrap="square" lIns="0" tIns="0" rIns="0" bIns="0">
+          <a:bodyPr wrap="square" lIns="0" rIns="0" tIns="0" bIns="0">
             <a:spAutoFit/>
           </a:bodyPr>
           <a:lstStyle/>
@@ -3257,7 +3255,7 @@
 </file>
 
 <file path=ppt/slides/slide10.xml><?xml version="1.0" encoding="utf-8"?>
-<p:sld xmlns:a="http://schemas.openxmlformats.org/drawingml/2006/main" xmlns:r="http://schemas.openxmlformats.org/officeDocument/2006/relationships" xmlns:p="http://schemas.openxmlformats.org/presentationml/2006/main">
+<p:sld xmlns:a="http://schemas.openxmlformats.org/drawingml/2006/main" xmlns:p="http://schemas.openxmlformats.org/presentationml/2006/main" xmlns:r="http://schemas.openxmlformats.org/officeDocument/2006/relationships">
   <p:cSld>
     <p:spTree>
       <p:nvGrpSpPr>
@@ -3265,14 +3263,7 @@
         <p:cNvGrpSpPr/>
         <p:nvPr/>
       </p:nvGrpSpPr>
-      <p:grpSpPr>
-        <a:xfrm>
-          <a:off x="0" y="0"/>
-          <a:ext cx="0" cy="0"/>
-          <a:chOff x="0" y="0"/>
-          <a:chExt cx="0" cy="0"/>
-        </a:xfrm>
-      </p:grpSpPr>
+      <p:grpSpPr/>
       <p:sp>
         <p:nvSpPr>
           <p:cNvPr id="2" name="TextBox 1"/>
@@ -3290,7 +3281,7 @@
           <a:noFill/>
         </p:spPr>
         <p:txBody>
-          <a:bodyPr wrap="square" lIns="0" tIns="0" rIns="0" bIns="0">
+          <a:bodyPr wrap="square" lIns="0" rIns="0" tIns="0" bIns="0">
             <a:spAutoFit/>
           </a:bodyPr>
           <a:lstStyle/>
@@ -3324,7 +3315,7 @@
           <a:noFill/>
         </p:spPr>
         <p:txBody>
-          <a:bodyPr wrap="square" lIns="0" tIns="0" rIns="0" bIns="0">
+          <a:bodyPr wrap="square" lIns="0" rIns="0" tIns="0" bIns="0">
             <a:spAutoFit/>
           </a:bodyPr>
           <a:lstStyle/>
@@ -3358,7 +3349,7 @@
           <a:noFill/>
         </p:spPr>
         <p:txBody>
-          <a:bodyPr wrap="square" lIns="0" tIns="0" rIns="0" bIns="0">
+          <a:bodyPr wrap="square" lIns="0" rIns="0" tIns="0" bIns="0">
             <a:spAutoFit/>
           </a:bodyPr>
           <a:lstStyle/>
@@ -3393,7 +3384,7 @@
           <a:noFill/>
         </p:spPr>
         <p:txBody>
-          <a:bodyPr wrap="square" lIns="0" tIns="0" rIns="0" bIns="0">
+          <a:bodyPr wrap="square" lIns="0" rIns="0" tIns="0" bIns="0">
             <a:spAutoFit/>
           </a:bodyPr>
           <a:lstStyle/>
@@ -3427,7 +3418,7 @@
           <a:noFill/>
         </p:spPr>
         <p:txBody>
-          <a:bodyPr wrap="square" lIns="0" tIns="0" rIns="0" bIns="0">
+          <a:bodyPr wrap="square" lIns="0" rIns="0" tIns="0" bIns="0">
             <a:spAutoFit/>
           </a:bodyPr>
           <a:lstStyle/>
@@ -3667,7 +3658,7 @@
 </file>
 
 <file path=ppt/slides/slide11.xml><?xml version="1.0" encoding="utf-8"?>
-<p:sld xmlns:a="http://schemas.openxmlformats.org/drawingml/2006/main" xmlns:r="http://schemas.openxmlformats.org/officeDocument/2006/relationships" xmlns:p="http://schemas.openxmlformats.org/presentationml/2006/main">
+<p:sld xmlns:a="http://schemas.openxmlformats.org/drawingml/2006/main" xmlns:p="http://schemas.openxmlformats.org/presentationml/2006/main" xmlns:r="http://schemas.openxmlformats.org/officeDocument/2006/relationships">
   <p:cSld>
     <p:spTree>
       <p:nvGrpSpPr>
@@ -3675,14 +3666,7 @@
         <p:cNvGrpSpPr/>
         <p:nvPr/>
       </p:nvGrpSpPr>
-      <p:grpSpPr>
-        <a:xfrm>
-          <a:off x="0" y="0"/>
-          <a:ext cx="0" cy="0"/>
-          <a:chOff x="0" y="0"/>
-          <a:chExt cx="0" cy="0"/>
-        </a:xfrm>
-      </p:grpSpPr>
+      <p:grpSpPr/>
       <p:sp>
         <p:nvSpPr>
           <p:cNvPr id="2" name="TextBox 1"/>
@@ -3700,7 +3684,7 @@
           <a:noFill/>
         </p:spPr>
         <p:txBody>
-          <a:bodyPr wrap="square" lIns="0" tIns="0" rIns="0" bIns="0">
+          <a:bodyPr wrap="square" lIns="0" rIns="0" tIns="0" bIns="0">
             <a:spAutoFit/>
           </a:bodyPr>
           <a:lstStyle/>
@@ -3734,7 +3718,7 @@
           <a:noFill/>
         </p:spPr>
         <p:txBody>
-          <a:bodyPr wrap="square" lIns="0" tIns="0" rIns="0" bIns="0">
+          <a:bodyPr wrap="square" lIns="0" rIns="0" tIns="0" bIns="0">
             <a:spAutoFit/>
           </a:bodyPr>
           <a:lstStyle/>
@@ -3768,7 +3752,7 @@
           <a:noFill/>
         </p:spPr>
         <p:txBody>
-          <a:bodyPr wrap="square" lIns="0" tIns="0" rIns="0" bIns="0">
+          <a:bodyPr wrap="square" lIns="0" rIns="0" tIns="0" bIns="0">
             <a:spAutoFit/>
           </a:bodyPr>
           <a:lstStyle/>
@@ -3803,7 +3787,7 @@
           <a:noFill/>
         </p:spPr>
         <p:txBody>
-          <a:bodyPr wrap="square" lIns="0" tIns="0" rIns="0" bIns="0">
+          <a:bodyPr wrap="square" lIns="0" rIns="0" tIns="0" bIns="0">
             <a:spAutoFit/>
           </a:bodyPr>
           <a:lstStyle/>
@@ -3830,7 +3814,7 @@
         </p:nvGraphicFramePr>
         <p:xfrm>
           <a:off x="566928" y="1709928"/>
-          <a:ext cx="11057839" cy="2817876"/>
+          <a:ext cx="11057839" cy="2768346"/>
         </p:xfrm>
         <a:graphic>
           <a:graphicData uri="http://schemas.openxmlformats.org/drawingml/2006/table">
@@ -3839,32 +3823,14 @@
                 <a:tableStyleId>{5C22544A-7EE6-4342-B048-85BDC9FD1C3A}</a:tableStyleId>
               </a:tblPr>
               <a:tblGrid>
-                <a:gridCol w="1374988">
-                  <a:extLst>
-                    <a:ext uri="{9D8B030D-6E8A-4147-A177-3AD203B41FA5}">
-                      <a16:colId xmlns:a16="http://schemas.microsoft.com/office/drawing/2014/main" val="20000"/>
-                    </a:ext>
-                  </a:extLst>
-                </a:gridCol>
-                <a:gridCol w="4723341">
-                  <a:extLst>
-                    <a:ext uri="{9D8B030D-6E8A-4147-A177-3AD203B41FA5}">
-                      <a16:colId xmlns:a16="http://schemas.microsoft.com/office/drawing/2014/main" val="20001"/>
-                    </a:ext>
-                  </a:extLst>
-                </a:gridCol>
-                <a:gridCol w="4959510">
-                  <a:extLst>
-                    <a:ext uri="{9D8B030D-6E8A-4147-A177-3AD203B41FA5}">
-                      <a16:colId xmlns:a16="http://schemas.microsoft.com/office/drawing/2014/main" val="20002"/>
-                    </a:ext>
-                  </a:extLst>
-                </a:gridCol>
+                <a:gridCol w="1374988"/>
+                <a:gridCol w="4723341"/>
+                <a:gridCol w="4959510"/>
               </a:tblGrid>
               <a:tr h="321818">
                 <a:tc>
                   <a:txBody>
-                    <a:bodyPr/>
+                    <a:bodyPr wrap="square"/>
                     <a:lstStyle/>
                     <a:p>
                       <a:pPr algn="ctr"/>
@@ -3887,7 +3853,7 @@
                 </a:tc>
                 <a:tc>
                   <a:txBody>
-                    <a:bodyPr/>
+                    <a:bodyPr wrap="square"/>
                     <a:lstStyle/>
                     <a:p>
                       <a:pPr algn="ctr"/>
@@ -3910,7 +3876,7 @@
                 </a:tc>
                 <a:tc>
                   <a:txBody>
-                    <a:bodyPr/>
+                    <a:bodyPr wrap="square"/>
                     <a:lstStyle/>
                     <a:p>
                       <a:pPr algn="ctr"/>
@@ -3931,16 +3897,11 @@
                     </a:solidFill>
                   </a:tcPr>
                 </a:tc>
-                <a:extLst>
-                  <a:ext uri="{0D108BD9-81ED-4DB2-BD59-A6C34878D82A}">
-                    <a16:rowId xmlns:a16="http://schemas.microsoft.com/office/drawing/2014/main" val="10000"/>
-                  </a:ext>
-                </a:extLst>
               </a:tr>
               <a:tr h="579628">
                 <a:tc>
                   <a:txBody>
-                    <a:bodyPr/>
+                    <a:bodyPr wrap="square"/>
                     <a:lstStyle/>
                     <a:p>
                       <a:pPr algn="ctr"/>
@@ -3972,7 +3933,7 @@
                 </a:tc>
                 <a:tc>
                   <a:txBody>
-                    <a:bodyPr/>
+                    <a:bodyPr wrap="square"/>
                     <a:lstStyle/>
                     <a:p>
                       <a:pPr algn="l"/>
@@ -3995,7 +3956,7 @@
                 </a:tc>
                 <a:tc>
                   <a:txBody>
-                    <a:bodyPr/>
+                    <a:bodyPr wrap="square"/>
                     <a:lstStyle/>
                     <a:p>
                       <a:pPr algn="l"/>
@@ -4016,20 +3977,14 @@
                     </a:solidFill>
                   </a:tcPr>
                 </a:tc>
-                <a:extLst>
-                  <a:ext uri="{0D108BD9-81ED-4DB2-BD59-A6C34878D82A}">
-                    <a16:rowId xmlns:a16="http://schemas.microsoft.com/office/drawing/2014/main" val="10001"/>
-                  </a:ext>
-                </a:extLst>
               </a:tr>
               <a:tr h="321818">
                 <a:tc>
                   <a:txBody>
-                    <a:bodyPr/>
-                    <a:lstStyle/>
-                    <a:p>
-                      <a:pPr algn="ctr"/>
-                      <a:endParaRPr/>
+                    <a:bodyPr wrap="square"/>
+                    <a:lstStyle/>
+                    <a:p>
+                      <a:pPr algn="ctr"/>
                     </a:p>
                   </a:txBody>
                   <a:tcPr marL="64008" marR="64008" marT="32004" marB="32004" anchor="ctr">
@@ -4040,7 +3995,7 @@
                 </a:tc>
                 <a:tc>
                   <a:txBody>
-                    <a:bodyPr/>
+                    <a:bodyPr wrap="square"/>
                     <a:lstStyle/>
                     <a:p>
                       <a:pPr algn="l"/>
@@ -4063,7 +4018,7 @@
                 </a:tc>
                 <a:tc>
                   <a:txBody>
-                    <a:bodyPr/>
+                    <a:bodyPr wrap="square"/>
                     <a:lstStyle/>
                     <a:p>
                       <a:pPr algn="l"/>
@@ -4084,16 +4039,11 @@
                     </a:solidFill>
                   </a:tcPr>
                 </a:tc>
-                <a:extLst>
-                  <a:ext uri="{0D108BD9-81ED-4DB2-BD59-A6C34878D82A}">
-                    <a16:rowId xmlns:a16="http://schemas.microsoft.com/office/drawing/2014/main" val="10002"/>
-                  </a:ext>
-                </a:extLst>
               </a:tr>
               <a:tr h="579628">
                 <a:tc>
                   <a:txBody>
-                    <a:bodyPr/>
+                    <a:bodyPr wrap="square"/>
                     <a:lstStyle/>
                     <a:p>
                       <a:pPr algn="ctr"/>
@@ -4125,7 +4075,7 @@
                 </a:tc>
                 <a:tc>
                   <a:txBody>
-                    <a:bodyPr/>
+                    <a:bodyPr wrap="square"/>
                     <a:lstStyle/>
                     <a:p>
                       <a:pPr algn="l"/>
@@ -4148,7 +4098,7 @@
                 </a:tc>
                 <a:tc>
                   <a:txBody>
-                    <a:bodyPr/>
+                    <a:bodyPr wrap="square"/>
                     <a:lstStyle/>
                     <a:p>
                       <a:pPr algn="l"/>
@@ -4169,20 +4119,14 @@
                     </a:solidFill>
                   </a:tcPr>
                 </a:tc>
-                <a:extLst>
-                  <a:ext uri="{0D108BD9-81ED-4DB2-BD59-A6C34878D82A}">
-                    <a16:rowId xmlns:a16="http://schemas.microsoft.com/office/drawing/2014/main" val="10003"/>
-                  </a:ext>
-                </a:extLst>
               </a:tr>
               <a:tr h="321818">
                 <a:tc>
                   <a:txBody>
-                    <a:bodyPr/>
-                    <a:lstStyle/>
-                    <a:p>
-                      <a:pPr algn="ctr"/>
-                      <a:endParaRPr/>
+                    <a:bodyPr wrap="square"/>
+                    <a:lstStyle/>
+                    <a:p>
+                      <a:pPr algn="ctr"/>
                     </a:p>
                   </a:txBody>
                   <a:tcPr marL="64008" marR="64008" marT="32004" marB="32004" anchor="ctr">
@@ -4193,7 +4137,7 @@
                 </a:tc>
                 <a:tc>
                   <a:txBody>
-                    <a:bodyPr/>
+                    <a:bodyPr wrap="square"/>
                     <a:lstStyle/>
                     <a:p>
                       <a:pPr algn="l"/>
@@ -4216,7 +4160,7 @@
                 </a:tc>
                 <a:tc>
                   <a:txBody>
-                    <a:bodyPr/>
+                    <a:bodyPr wrap="square"/>
                     <a:lstStyle/>
                     <a:p>
                       <a:pPr algn="l"/>
@@ -4237,16 +4181,11 @@
                     </a:solidFill>
                   </a:tcPr>
                 </a:tc>
-                <a:extLst>
-                  <a:ext uri="{0D108BD9-81ED-4DB2-BD59-A6C34878D82A}">
-                    <a16:rowId xmlns:a16="http://schemas.microsoft.com/office/drawing/2014/main" val="10004"/>
-                  </a:ext>
-                </a:extLst>
               </a:tr>
               <a:tr h="321818">
                 <a:tc>
                   <a:txBody>
-                    <a:bodyPr/>
+                    <a:bodyPr wrap="square"/>
                     <a:lstStyle/>
                     <a:p>
                       <a:pPr algn="ctr"/>
@@ -4278,7 +4217,7 @@
                 </a:tc>
                 <a:tc>
                   <a:txBody>
-                    <a:bodyPr/>
+                    <a:bodyPr wrap="square"/>
                     <a:lstStyle/>
                     <a:p>
                       <a:pPr algn="l"/>
@@ -4301,7 +4240,7 @@
                 </a:tc>
                 <a:tc>
                   <a:txBody>
-                    <a:bodyPr/>
+                    <a:bodyPr wrap="square"/>
                     <a:lstStyle/>
                     <a:p>
                       <a:pPr algn="l"/>
@@ -4322,20 +4261,14 @@
                     </a:solidFill>
                   </a:tcPr>
                 </a:tc>
-                <a:extLst>
-                  <a:ext uri="{0D108BD9-81ED-4DB2-BD59-A6C34878D82A}">
-                    <a16:rowId xmlns:a16="http://schemas.microsoft.com/office/drawing/2014/main" val="10005"/>
-                  </a:ext>
-                </a:extLst>
               </a:tr>
               <a:tr h="321818">
                 <a:tc>
                   <a:txBody>
-                    <a:bodyPr/>
-                    <a:lstStyle/>
-                    <a:p>
-                      <a:pPr algn="ctr"/>
-                      <a:endParaRPr/>
+                    <a:bodyPr wrap="square"/>
+                    <a:lstStyle/>
+                    <a:p>
+                      <a:pPr algn="ctr"/>
                     </a:p>
                   </a:txBody>
                   <a:tcPr marL="64008" marR="64008" marT="32004" marB="32004" anchor="ctr">
@@ -4346,43 +4279,19 @@
                 </a:tc>
                 <a:tc>
                   <a:txBody>
-                    <a:bodyPr/>
+                    <a:bodyPr wrap="square"/>
                     <a:lstStyle/>
                     <a:p>
                       <a:pPr algn="l"/>
                       <a:r>
-                        <a:rPr sz="1400" b="0" dirty="0" err="1">
-                          <a:solidFill>
-                            <a:srgbClr val="22303F"/>
-                          </a:solidFill>
-                          <a:latin typeface="Microsoft JhengHei"/>
-                        </a:rPr>
-                        <a:t>應用端協作可行，但需清楚</a:t>
-                      </a:r>
-                      <a:r>
-                        <a:rPr sz="1400" b="0" dirty="0">
-                          <a:solidFill>
-                            <a:srgbClr val="22303F"/>
-                          </a:solidFill>
-                          <a:latin typeface="Microsoft JhengHei"/>
-                        </a:rPr>
-                        <a:t> </a:t>
-                      </a:r>
-                      <a:r>
-                        <a:rPr sz="1400" b="0" dirty="0" err="1">
-                          <a:solidFill>
-                            <a:srgbClr val="22303F"/>
-                          </a:solidFill>
-                          <a:latin typeface="Microsoft JhengHei"/>
-                        </a:rPr>
-                        <a:t>R&amp;R、效益與回復程序</a:t>
-                      </a:r>
-                      <a:endParaRPr sz="1400" b="0" dirty="0">
-                        <a:solidFill>
-                          <a:srgbClr val="22303F"/>
-                        </a:solidFill>
-                        <a:latin typeface="Microsoft JhengHei"/>
-                      </a:endParaRPr>
+                        <a:rPr sz="1400" b="0">
+                          <a:solidFill>
+                            <a:srgbClr val="22303F"/>
+                          </a:solidFill>
+                          <a:latin typeface="Microsoft JhengHei"/>
+                        </a:rPr>
+                        <a:t>應用端協作可行，但需清楚 R&amp;R、效益與回復程序</a:t>
+                      </a:r>
                     </a:p>
                   </a:txBody>
                   <a:tcPr marL="64008" marR="64008" marT="32004" marB="32004" anchor="ctr">
@@ -4393,61 +4302,19 @@
                 </a:tc>
                 <a:tc>
                   <a:txBody>
-                    <a:bodyPr/>
+                    <a:bodyPr wrap="square"/>
                     <a:lstStyle/>
                     <a:p>
                       <a:pPr algn="l"/>
                       <a:r>
-                        <a:rPr sz="1400" b="0" dirty="0" err="1">
-                          <a:solidFill>
-                            <a:srgbClr val="22303F"/>
-                          </a:solidFill>
-                          <a:latin typeface="Microsoft JhengHei"/>
-                        </a:rPr>
-                        <a:t>協作</a:t>
-                      </a:r>
-                      <a:r>
-                        <a:rPr sz="1400" b="0" dirty="0">
-                          <a:solidFill>
-                            <a:srgbClr val="22303F"/>
-                          </a:solidFill>
-                          <a:latin typeface="Microsoft JhengHei"/>
-                        </a:rPr>
-                        <a:t> TSD </a:t>
-                      </a:r>
-                      <a:r>
-                        <a:rPr sz="1400" b="0" dirty="0" err="1">
-                          <a:solidFill>
-                            <a:srgbClr val="22303F"/>
-                          </a:solidFill>
-                          <a:latin typeface="Microsoft JhengHei"/>
-                        </a:rPr>
-                        <a:t>其產品</a:t>
-                      </a:r>
-                      <a:r>
-                        <a:rPr sz="1400" b="0" dirty="0">
-                          <a:solidFill>
-                            <a:srgbClr val="22303F"/>
-                          </a:solidFill>
-                          <a:latin typeface="Microsoft JhengHei"/>
-                        </a:rPr>
-                        <a:t> </a:t>
-                      </a:r>
-                      <a:r>
-                        <a:rPr sz="1400" b="0" dirty="0" err="1">
-                          <a:solidFill>
-                            <a:srgbClr val="22303F"/>
-                          </a:solidFill>
-                          <a:latin typeface="Microsoft JhengHei"/>
-                        </a:rPr>
-                        <a:t>Owner，確認依賴與改造上限</a:t>
-                      </a:r>
-                      <a:endParaRPr sz="1400" b="0" dirty="0">
-                        <a:solidFill>
-                          <a:srgbClr val="22303F"/>
-                        </a:solidFill>
-                        <a:latin typeface="Microsoft JhengHei"/>
-                      </a:endParaRPr>
+                        <a:rPr sz="1400" b="0">
+                          <a:solidFill>
+                            <a:srgbClr val="22303F"/>
+                          </a:solidFill>
+                          <a:latin typeface="Microsoft JhengHei"/>
+                        </a:rPr>
+                        <a:t>協作 TSD 其產品 Owner，確認依賴與改造上限</a:t>
+                      </a:r>
                     </a:p>
                   </a:txBody>
                   <a:tcPr marL="64008" marR="64008" marT="32004" marB="32004" anchor="ctr">
@@ -4456,11 +4323,6 @@
                     </a:solidFill>
                   </a:tcPr>
                 </a:tc>
-                <a:extLst>
-                  <a:ext uri="{0D108BD9-81ED-4DB2-BD59-A6C34878D82A}">
-                    <a16:rowId xmlns:a16="http://schemas.microsoft.com/office/drawing/2014/main" val="10006"/>
-                  </a:ext>
-                </a:extLst>
               </a:tr>
             </a:tbl>
           </a:graphicData>
@@ -4483,7 +4345,7 @@
           <a:noFill/>
         </p:spPr>
         <p:txBody>
-          <a:bodyPr wrap="square" lIns="0" tIns="0" rIns="0" bIns="0">
+          <a:bodyPr wrap="square" lIns="0" rIns="0" tIns="0" bIns="0">
             <a:spAutoFit/>
           </a:bodyPr>
           <a:lstStyle/>
@@ -4541,7 +4403,6 @@
           <a:lstStyle/>
           <a:p>
             <a:pPr algn="ctr"/>
-            <a:endParaRPr/>
           </a:p>
         </p:txBody>
       </p:sp>
@@ -4554,7 +4415,7 @@
 </file>
 
 <file path=ppt/slides/slide12.xml><?xml version="1.0" encoding="utf-8"?>
-<p:sld xmlns:a="http://schemas.openxmlformats.org/drawingml/2006/main" xmlns:r="http://schemas.openxmlformats.org/officeDocument/2006/relationships" xmlns:p="http://schemas.openxmlformats.org/presentationml/2006/main">
+<p:sld xmlns:a="http://schemas.openxmlformats.org/drawingml/2006/main" xmlns:p="http://schemas.openxmlformats.org/presentationml/2006/main" xmlns:r="http://schemas.openxmlformats.org/officeDocument/2006/relationships">
   <p:cSld>
     <p:spTree>
       <p:nvGrpSpPr>
@@ -4562,14 +4423,7 @@
         <p:cNvGrpSpPr/>
         <p:nvPr/>
       </p:nvGrpSpPr>
-      <p:grpSpPr>
-        <a:xfrm>
-          <a:off x="0" y="0"/>
-          <a:ext cx="0" cy="0"/>
-          <a:chOff x="0" y="0"/>
-          <a:chExt cx="0" cy="0"/>
-        </a:xfrm>
-      </p:grpSpPr>
+      <p:grpSpPr/>
       <p:sp>
         <p:nvSpPr>
           <p:cNvPr id="2" name="TextBox 1"/>
@@ -4587,7 +4441,7 @@
           <a:noFill/>
         </p:spPr>
         <p:txBody>
-          <a:bodyPr wrap="square" lIns="0" tIns="0" rIns="0" bIns="0">
+          <a:bodyPr wrap="square" lIns="0" rIns="0" tIns="0" bIns="0">
             <a:spAutoFit/>
           </a:bodyPr>
           <a:lstStyle/>
@@ -4621,7 +4475,7 @@
           <a:noFill/>
         </p:spPr>
         <p:txBody>
-          <a:bodyPr wrap="square" lIns="0" tIns="0" rIns="0" bIns="0">
+          <a:bodyPr wrap="square" lIns="0" rIns="0" tIns="0" bIns="0">
             <a:spAutoFit/>
           </a:bodyPr>
           <a:lstStyle/>
@@ -4655,7 +4509,7 @@
           <a:noFill/>
         </p:spPr>
         <p:txBody>
-          <a:bodyPr wrap="square" lIns="0" tIns="0" rIns="0" bIns="0">
+          <a:bodyPr wrap="square" lIns="0" rIns="0" tIns="0" bIns="0">
             <a:spAutoFit/>
           </a:bodyPr>
           <a:lstStyle/>
@@ -4690,7 +4544,7 @@
           <a:noFill/>
         </p:spPr>
         <p:txBody>
-          <a:bodyPr wrap="square" lIns="0" tIns="0" rIns="0" bIns="0">
+          <a:bodyPr wrap="square" lIns="0" rIns="0" tIns="0" bIns="0">
             <a:spAutoFit/>
           </a:bodyPr>
           <a:lstStyle/>
@@ -4707,16 +4561,59 @@
           </a:p>
         </p:txBody>
       </p:sp>
+      <p:sp>
+        <p:nvSpPr>
+          <p:cNvPr id="6" name="TextBox 5"/>
+          <p:cNvSpPr txBox="1"/>
+          <p:nvPr/>
+        </p:nvSpPr>
+        <p:spPr>
+          <a:xfrm>
+            <a:off x="566928" y="1709928"/>
+            <a:ext cx="11057839" cy="603250"/>
+          </a:xfrm>
+          <a:prstGeom prst="rect">
+            <a:avLst/>
+          </a:prstGeom>
+          <a:noFill/>
+        </p:spPr>
+        <p:txBody>
+          <a:bodyPr wrap="square" lIns="0" rIns="0" tIns="0" bIns="0">
+            <a:spAutoFit/>
+          </a:bodyPr>
+          <a:lstStyle/>
+          <a:p>
+            <a:r>
+              <a:rPr sz="1900" b="1">
+                <a:solidFill>
+                  <a:srgbClr val="C0392B"/>
+                </a:solidFill>
+                <a:latin typeface="Microsoft JhengHei"/>
+              </a:rPr>
+              <a:t>建議採 Option B。</a:t>
+            </a:r>
+            <a:r>
+              <a:rPr sz="1900" b="0">
+                <a:solidFill>
+                  <a:srgbClr val="22303F"/>
+                </a:solidFill>
+                <a:latin typeface="Microsoft JhengHei"/>
+              </a:rPr>
+              <a:t> PXC／Galera 保留相容與低延遲對照；PostgreSQL 路線等待 TSD 提供高關鍵度／AI 應用需求後再做目標式驗證。</a:t>
+            </a:r>
+          </a:p>
+        </p:txBody>
+      </p:sp>
       <p:graphicFrame>
         <p:nvGraphicFramePr>
-          <p:cNvPr id="6" name="Table 5"/>
+          <p:cNvPr id="7" name="Table 6"/>
           <p:cNvGraphicFramePr>
             <a:graphicFrameLocks noGrp="1"/>
           </p:cNvGraphicFramePr>
           <p:nvPr/>
         </p:nvGraphicFramePr>
         <p:xfrm>
-          <a:off x="566928" y="1709928"/>
+          <a:off x="566928" y="2441194"/>
           <a:ext cx="11057839" cy="2962148"/>
         </p:xfrm>
         <a:graphic>
@@ -4726,39 +4623,15 @@
                 <a:tableStyleId>{5C22544A-7EE6-4342-B048-85BDC9FD1C3A}</a:tableStyleId>
               </a:tblPr>
               <a:tblGrid>
-                <a:gridCol w="1163835">
-                  <a:extLst>
-                    <a:ext uri="{9D8B030D-6E8A-4147-A177-3AD203B41FA5}">
-                      <a16:colId xmlns:a16="http://schemas.microsoft.com/office/drawing/2014/main" val="20000"/>
-                    </a:ext>
-                  </a:extLst>
-                </a:gridCol>
-                <a:gridCol w="4433326">
-                  <a:extLst>
-                    <a:ext uri="{9D8B030D-6E8A-4147-A177-3AD203B41FA5}">
-                      <a16:colId xmlns:a16="http://schemas.microsoft.com/office/drawing/2014/main" val="20001"/>
-                    </a:ext>
-                  </a:extLst>
-                </a:gridCol>
-                <a:gridCol w="2750671">
-                  <a:extLst>
-                    <a:ext uri="{9D8B030D-6E8A-4147-A177-3AD203B41FA5}">
-                      <a16:colId xmlns:a16="http://schemas.microsoft.com/office/drawing/2014/main" val="20002"/>
-                    </a:ext>
-                  </a:extLst>
-                </a:gridCol>
-                <a:gridCol w="2710007">
-                  <a:extLst>
-                    <a:ext uri="{9D8B030D-6E8A-4147-A177-3AD203B41FA5}">
-                      <a16:colId xmlns:a16="http://schemas.microsoft.com/office/drawing/2014/main" val="20003"/>
-                    </a:ext>
-                  </a:extLst>
-                </a:gridCol>
+                <a:gridCol w="1163835"/>
+                <a:gridCol w="4433326"/>
+                <a:gridCol w="2750671"/>
+                <a:gridCol w="2710007"/>
               </a:tblGrid>
               <a:tr h="321818">
                 <a:tc>
                   <a:txBody>
-                    <a:bodyPr/>
+                    <a:bodyPr wrap="square"/>
                     <a:lstStyle/>
                     <a:p>
                       <a:pPr algn="ctr"/>
@@ -4781,7 +4654,7 @@
                 </a:tc>
                 <a:tc>
                   <a:txBody>
-                    <a:bodyPr/>
+                    <a:bodyPr wrap="square"/>
                     <a:lstStyle/>
                     <a:p>
                       <a:pPr algn="ctr"/>
@@ -4804,7 +4677,7 @@
                 </a:tc>
                 <a:tc>
                   <a:txBody>
-                    <a:bodyPr/>
+                    <a:bodyPr wrap="square"/>
                     <a:lstStyle/>
                     <a:p>
                       <a:pPr algn="ctr"/>
@@ -4827,7 +4700,7 @@
                 </a:tc>
                 <a:tc>
                   <a:txBody>
-                    <a:bodyPr/>
+                    <a:bodyPr wrap="square"/>
                     <a:lstStyle/>
                     <a:p>
                       <a:pPr algn="ctr"/>
@@ -4848,16 +4721,11 @@
                     </a:solidFill>
                   </a:tcPr>
                 </a:tc>
-                <a:extLst>
-                  <a:ext uri="{0D108BD9-81ED-4DB2-BD59-A6C34878D82A}">
-                    <a16:rowId xmlns:a16="http://schemas.microsoft.com/office/drawing/2014/main" val="10000"/>
-                  </a:ext>
-                </a:extLst>
               </a:tr>
               <a:tr h="579628">
                 <a:tc>
                   <a:txBody>
-                    <a:bodyPr/>
+                    <a:bodyPr wrap="square"/>
                     <a:lstStyle/>
                     <a:p>
                       <a:pPr algn="ctr"/>
@@ -4880,7 +4748,7 @@
                 </a:tc>
                 <a:tc>
                   <a:txBody>
-                    <a:bodyPr/>
+                    <a:bodyPr wrap="square"/>
                     <a:lstStyle/>
                     <a:p>
                       <a:pPr algn="l"/>
@@ -4903,7 +4771,7 @@
                 </a:tc>
                 <a:tc>
                   <a:txBody>
-                    <a:bodyPr/>
+                    <a:bodyPr wrap="square"/>
                     <a:lstStyle/>
                     <a:p>
                       <a:pPr algn="l"/>
@@ -4926,7 +4794,7 @@
                 </a:tc>
                 <a:tc>
                   <a:txBody>
-                    <a:bodyPr/>
+                    <a:bodyPr wrap="square"/>
                     <a:lstStyle/>
                     <a:p>
                       <a:pPr algn="l"/>
@@ -4947,16 +4815,11 @@
                     </a:solidFill>
                   </a:tcPr>
                 </a:tc>
-                <a:extLst>
-                  <a:ext uri="{0D108BD9-81ED-4DB2-BD59-A6C34878D82A}">
-                    <a16:rowId xmlns:a16="http://schemas.microsoft.com/office/drawing/2014/main" val="10001"/>
-                  </a:ext>
-                </a:extLst>
               </a:tr>
               <a:tr h="321818">
                 <a:tc>
                   <a:txBody>
-                    <a:bodyPr/>
+                    <a:bodyPr wrap="square"/>
                     <a:lstStyle/>
                     <a:p>
                       <a:pPr algn="ctr"/>
@@ -4979,7 +4842,7 @@
                 </a:tc>
                 <a:tc>
                   <a:txBody>
-                    <a:bodyPr/>
+                    <a:bodyPr wrap="square"/>
                     <a:lstStyle/>
                     <a:p>
                       <a:pPr algn="l"/>
@@ -5002,7 +4865,7 @@
                 </a:tc>
                 <a:tc>
                   <a:txBody>
-                    <a:bodyPr/>
+                    <a:bodyPr wrap="square"/>
                     <a:lstStyle/>
                     <a:p>
                       <a:pPr algn="l"/>
@@ -5025,7 +4888,7 @@
                 </a:tc>
                 <a:tc>
                   <a:txBody>
-                    <a:bodyPr/>
+                    <a:bodyPr wrap="square"/>
                     <a:lstStyle/>
                     <a:p>
                       <a:pPr algn="l"/>
@@ -5046,16 +4909,11 @@
                     </a:solidFill>
                   </a:tcPr>
                 </a:tc>
-                <a:extLst>
-                  <a:ext uri="{0D108BD9-81ED-4DB2-BD59-A6C34878D82A}">
-                    <a16:rowId xmlns:a16="http://schemas.microsoft.com/office/drawing/2014/main" val="10002"/>
-                  </a:ext>
-                </a:extLst>
               </a:tr>
               <a:tr h="579628">
                 <a:tc>
                   <a:txBody>
-                    <a:bodyPr/>
+                    <a:bodyPr wrap="square"/>
                     <a:lstStyle/>
                     <a:p>
                       <a:pPr algn="ctr"/>
@@ -5078,7 +4936,7 @@
                 </a:tc>
                 <a:tc>
                   <a:txBody>
-                    <a:bodyPr/>
+                    <a:bodyPr wrap="square"/>
                     <a:lstStyle/>
                     <a:p>
                       <a:pPr algn="l"/>
@@ -5101,43 +4959,19 @@
                 </a:tc>
                 <a:tc>
                   <a:txBody>
-                    <a:bodyPr/>
+                    <a:bodyPr wrap="square"/>
                     <a:lstStyle/>
                     <a:p>
                       <a:pPr algn="l"/>
                       <a:r>
-                        <a:rPr sz="1400" b="1" dirty="0" err="1">
+                        <a:rPr sz="1400" b="1">
                           <a:solidFill>
                             <a:srgbClr val="C0392B"/>
                           </a:solidFill>
                           <a:latin typeface="Microsoft JhengHei"/>
                         </a:rPr>
-                        <a:t>最快取得應用、維運、Self-Service</a:t>
-                      </a:r>
-                      <a:r>
-                        <a:rPr sz="1400" b="1" dirty="0">
-                          <a:solidFill>
-                            <a:srgbClr val="C0392B"/>
-                          </a:solidFill>
-                          <a:latin typeface="Microsoft JhengHei"/>
-                        </a:rPr>
-                        <a:t> </a:t>
-                      </a:r>
-                      <a:r>
-                        <a:rPr sz="1400" b="1" dirty="0" err="1">
-                          <a:solidFill>
-                            <a:srgbClr val="C0392B"/>
-                          </a:solidFill>
-                          <a:latin typeface="Microsoft JhengHei"/>
-                        </a:rPr>
-                        <a:t>與投資報酬證據</a:t>
-                      </a:r>
-                      <a:endParaRPr sz="1400" b="1" dirty="0">
-                        <a:solidFill>
-                          <a:srgbClr val="C0392B"/>
-                        </a:solidFill>
-                        <a:latin typeface="Microsoft JhengHei"/>
-                      </a:endParaRPr>
+                        <a:t>最快取得應用、維運、Self-Service 與投資報酬證據</a:t>
+                      </a:r>
                     </a:p>
                   </a:txBody>
                   <a:tcPr marL="64008" marR="64008" marT="32004" marB="32004" anchor="ctr">
@@ -5148,61 +4982,19 @@
                 </a:tc>
                 <a:tc>
                   <a:txBody>
-                    <a:bodyPr/>
+                    <a:bodyPr wrap="square"/>
                     <a:lstStyle/>
                     <a:p>
                       <a:pPr algn="l"/>
                       <a:r>
-                        <a:rPr sz="1400" b="0" dirty="0" err="1">
-                          <a:solidFill>
-                            <a:srgbClr val="22303F"/>
-                          </a:solidFill>
-                          <a:latin typeface="Microsoft JhengHei"/>
-                        </a:rPr>
-                        <a:t>需</a:t>
-                      </a:r>
-                      <a:r>
-                        <a:rPr sz="1400" b="0" dirty="0">
-                          <a:solidFill>
-                            <a:srgbClr val="22303F"/>
-                          </a:solidFill>
-                          <a:latin typeface="Microsoft JhengHei"/>
-                        </a:rPr>
-                        <a:t> SSD Infra ; TSD/</a:t>
-                      </a:r>
-                      <a:r>
-                        <a:rPr sz="1400" b="0" dirty="0" err="1">
-                          <a:solidFill>
-                            <a:srgbClr val="22303F"/>
-                          </a:solidFill>
-                          <a:latin typeface="Microsoft JhengHei"/>
-                        </a:rPr>
-                        <a:t>產品單位</a:t>
-                      </a:r>
-                      <a:r>
-                        <a:rPr sz="1400" b="0" dirty="0">
-                          <a:solidFill>
-                            <a:srgbClr val="22303F"/>
-                          </a:solidFill>
-                          <a:latin typeface="Microsoft JhengHei"/>
-                        </a:rPr>
-                        <a:t> </a:t>
-                      </a:r>
-                      <a:r>
-                        <a:rPr sz="1400" b="0" dirty="0" err="1">
-                          <a:solidFill>
-                            <a:srgbClr val="22303F"/>
-                          </a:solidFill>
-                          <a:latin typeface="Microsoft JhengHei"/>
-                        </a:rPr>
-                        <a:t>協作共識</a:t>
-                      </a:r>
-                      <a:endParaRPr sz="1400" b="0" dirty="0">
-                        <a:solidFill>
-                          <a:srgbClr val="22303F"/>
-                        </a:solidFill>
-                        <a:latin typeface="Microsoft JhengHei"/>
-                      </a:endParaRPr>
+                        <a:rPr sz="1400" b="0">
+                          <a:solidFill>
+                            <a:srgbClr val="22303F"/>
+                          </a:solidFill>
+                          <a:latin typeface="Microsoft JhengHei"/>
+                        </a:rPr>
+                        <a:t>需 SSD Infra ; TSD/產品單位 協作共識</a:t>
+                      </a:r>
                     </a:p>
                   </a:txBody>
                   <a:tcPr marL="64008" marR="64008" marT="32004" marB="32004" anchor="ctr">
@@ -5211,16 +5003,11 @@
                     </a:solidFill>
                   </a:tcPr>
                 </a:tc>
-                <a:extLst>
-                  <a:ext uri="{0D108BD9-81ED-4DB2-BD59-A6C34878D82A}">
-                    <a16:rowId xmlns:a16="http://schemas.microsoft.com/office/drawing/2014/main" val="10003"/>
-                  </a:ext>
-                </a:extLst>
               </a:tr>
               <a:tr h="579628">
                 <a:tc>
                   <a:txBody>
-                    <a:bodyPr/>
+                    <a:bodyPr wrap="square"/>
                     <a:lstStyle/>
                     <a:p>
                       <a:pPr algn="ctr"/>
@@ -5243,7 +5030,7 @@
                 </a:tc>
                 <a:tc>
                   <a:txBody>
-                    <a:bodyPr/>
+                    <a:bodyPr wrap="square"/>
                     <a:lstStyle/>
                     <a:p>
                       <a:pPr algn="l"/>
@@ -5266,7 +5053,7 @@
                 </a:tc>
                 <a:tc>
                   <a:txBody>
-                    <a:bodyPr/>
+                    <a:bodyPr wrap="square"/>
                     <a:lstStyle/>
                     <a:p>
                       <a:pPr algn="l"/>
@@ -5289,7 +5076,7 @@
                 </a:tc>
                 <a:tc>
                   <a:txBody>
-                    <a:bodyPr/>
+                    <a:bodyPr wrap="square"/>
                     <a:lstStyle/>
                     <a:p>
                       <a:pPr algn="l"/>
@@ -5310,16 +5097,11 @@
                     </a:solidFill>
                   </a:tcPr>
                 </a:tc>
-                <a:extLst>
-                  <a:ext uri="{0D108BD9-81ED-4DB2-BD59-A6C34878D82A}">
-                    <a16:rowId xmlns:a16="http://schemas.microsoft.com/office/drawing/2014/main" val="10004"/>
-                  </a:ext>
-                </a:extLst>
               </a:tr>
               <a:tr h="579628">
                 <a:tc>
                   <a:txBody>
-                    <a:bodyPr/>
+                    <a:bodyPr wrap="square"/>
                     <a:lstStyle/>
                     <a:p>
                       <a:pPr algn="ctr"/>
@@ -5342,7 +5124,7 @@
                 </a:tc>
                 <a:tc>
                   <a:txBody>
-                    <a:bodyPr/>
+                    <a:bodyPr wrap="square"/>
                     <a:lstStyle/>
                     <a:p>
                       <a:pPr algn="l"/>
@@ -5365,7 +5147,7 @@
                 </a:tc>
                 <a:tc>
                   <a:txBody>
-                    <a:bodyPr/>
+                    <a:bodyPr wrap="square"/>
                     <a:lstStyle/>
                     <a:p>
                       <a:pPr algn="l"/>
@@ -5388,61 +5170,19 @@
                 </a:tc>
                 <a:tc>
                   <a:txBody>
-                    <a:bodyPr/>
+                    <a:bodyPr wrap="square"/>
                     <a:lstStyle/>
                     <a:p>
                       <a:pPr algn="l"/>
                       <a:r>
-                        <a:rPr sz="1400" b="0" dirty="0" err="1">
-                          <a:solidFill>
-                            <a:srgbClr val="22303F"/>
-                          </a:solidFill>
-                          <a:latin typeface="Microsoft JhengHei"/>
-                        </a:rPr>
-                        <a:t>需多團隊</a:t>
-                      </a:r>
-                      <a:r>
-                        <a:rPr sz="1400" b="0" dirty="0">
-                          <a:solidFill>
-                            <a:srgbClr val="22303F"/>
-                          </a:solidFill>
-                          <a:latin typeface="Microsoft JhengHei"/>
-                        </a:rPr>
-                        <a:t> </a:t>
-                      </a:r>
-                      <a:r>
-                        <a:rPr sz="1400" b="0" dirty="0" err="1">
-                          <a:solidFill>
-                            <a:srgbClr val="22303F"/>
-                          </a:solidFill>
-                          <a:latin typeface="Microsoft JhengHei"/>
-                        </a:rPr>
-                        <a:t>owner、治理與持續成本；A</a:t>
-                      </a:r>
-                      <a:r>
-                        <a:rPr sz="1400" b="0" dirty="0">
-                          <a:solidFill>
-                            <a:srgbClr val="22303F"/>
-                          </a:solidFill>
-                          <a:latin typeface="Microsoft JhengHei"/>
-                        </a:rPr>
-                        <a:t>/A </a:t>
-                      </a:r>
-                      <a:r>
-                        <a:rPr sz="1400" b="0" dirty="0" err="1">
-                          <a:solidFill>
-                            <a:srgbClr val="22303F"/>
-                          </a:solidFill>
-                          <a:latin typeface="Microsoft JhengHei"/>
-                        </a:rPr>
-                        <a:t>不作預設</a:t>
-                      </a:r>
-                      <a:endParaRPr sz="1400" b="0" dirty="0">
-                        <a:solidFill>
-                          <a:srgbClr val="22303F"/>
-                        </a:solidFill>
-                        <a:latin typeface="Microsoft JhengHei"/>
-                      </a:endParaRPr>
+                        <a:rPr sz="1400" b="0">
+                          <a:solidFill>
+                            <a:srgbClr val="22303F"/>
+                          </a:solidFill>
+                          <a:latin typeface="Microsoft JhengHei"/>
+                        </a:rPr>
+                        <a:t>需多團隊 owner、治理與持續成本；A/A 不作預設</a:t>
+                      </a:r>
                     </a:p>
                   </a:txBody>
                   <a:tcPr marL="64008" marR="64008" marT="32004" marB="32004" anchor="ctr">
@@ -5451,59 +5191,11 @@
                     </a:solidFill>
                   </a:tcPr>
                 </a:tc>
-                <a:extLst>
-                  <a:ext uri="{0D108BD9-81ED-4DB2-BD59-A6C34878D82A}">
-                    <a16:rowId xmlns:a16="http://schemas.microsoft.com/office/drawing/2014/main" val="10005"/>
-                  </a:ext>
-                </a:extLst>
               </a:tr>
             </a:tbl>
           </a:graphicData>
         </a:graphic>
       </p:graphicFrame>
-      <p:sp>
-        <p:nvSpPr>
-          <p:cNvPr id="7" name="TextBox 6"/>
-          <p:cNvSpPr txBox="1"/>
-          <p:nvPr/>
-        </p:nvSpPr>
-        <p:spPr>
-          <a:xfrm>
-            <a:off x="566928" y="4854956"/>
-            <a:ext cx="11057839" cy="603250"/>
-          </a:xfrm>
-          <a:prstGeom prst="rect">
-            <a:avLst/>
-          </a:prstGeom>
-          <a:noFill/>
-        </p:spPr>
-        <p:txBody>
-          <a:bodyPr wrap="square" lIns="0" tIns="0" rIns="0" bIns="0">
-            <a:spAutoFit/>
-          </a:bodyPr>
-          <a:lstStyle/>
-          <a:p>
-            <a:r>
-              <a:rPr sz="1900" b="1">
-                <a:solidFill>
-                  <a:srgbClr val="C0392B"/>
-                </a:solidFill>
-                <a:latin typeface="Microsoft JhengHei"/>
-              </a:rPr>
-              <a:t>建議採 Option B。</a:t>
-            </a:r>
-            <a:r>
-              <a:rPr sz="1900" b="0">
-                <a:solidFill>
-                  <a:srgbClr val="22303F"/>
-                </a:solidFill>
-                <a:latin typeface="Microsoft JhengHei"/>
-              </a:rPr>
-              <a:t> PXC／Galera 保留相容與低延遲對照；PostgreSQL 路線等待 TSD 提供高關鍵度／AI 應用需求後再做目標式驗證。</a:t>
-            </a:r>
-          </a:p>
-        </p:txBody>
-      </p:sp>
     </p:spTree>
   </p:cSld>
   <p:clrMapOvr>
@@ -5513,7 +5205,7 @@
 </file>
 
 <file path=ppt/slides/slide13.xml><?xml version="1.0" encoding="utf-8"?>
-<p:sld xmlns:a="http://schemas.openxmlformats.org/drawingml/2006/main" xmlns:r="http://schemas.openxmlformats.org/officeDocument/2006/relationships" xmlns:p="http://schemas.openxmlformats.org/presentationml/2006/main">
+<p:sld xmlns:a="http://schemas.openxmlformats.org/drawingml/2006/main" xmlns:p="http://schemas.openxmlformats.org/presentationml/2006/main" xmlns:r="http://schemas.openxmlformats.org/officeDocument/2006/relationships">
   <p:cSld>
     <p:spTree>
       <p:nvGrpSpPr>
@@ -5521,14 +5213,7 @@
         <p:cNvGrpSpPr/>
         <p:nvPr/>
       </p:nvGrpSpPr>
-      <p:grpSpPr>
-        <a:xfrm>
-          <a:off x="0" y="0"/>
-          <a:ext cx="0" cy="0"/>
-          <a:chOff x="0" y="0"/>
-          <a:chExt cx="0" cy="0"/>
-        </a:xfrm>
-      </p:grpSpPr>
+      <p:grpSpPr/>
       <p:sp>
         <p:nvSpPr>
           <p:cNvPr id="2" name="TextBox 1"/>
@@ -5546,7 +5231,7 @@
           <a:noFill/>
         </p:spPr>
         <p:txBody>
-          <a:bodyPr wrap="square" lIns="0" tIns="0" rIns="0" bIns="0">
+          <a:bodyPr wrap="square" lIns="0" rIns="0" tIns="0" bIns="0">
             <a:spAutoFit/>
           </a:bodyPr>
           <a:lstStyle/>
@@ -5580,7 +5265,7 @@
           <a:noFill/>
         </p:spPr>
         <p:txBody>
-          <a:bodyPr wrap="square" lIns="0" tIns="0" rIns="0" bIns="0">
+          <a:bodyPr wrap="square" lIns="0" rIns="0" tIns="0" bIns="0">
             <a:spAutoFit/>
           </a:bodyPr>
           <a:lstStyle/>
@@ -5614,7 +5299,7 @@
           <a:noFill/>
         </p:spPr>
         <p:txBody>
-          <a:bodyPr wrap="square" lIns="0" tIns="0" rIns="0" bIns="0">
+          <a:bodyPr wrap="square" lIns="0" rIns="0" tIns="0" bIns="0">
             <a:spAutoFit/>
           </a:bodyPr>
           <a:lstStyle/>
@@ -5649,7 +5334,7 @@
           <a:noFill/>
         </p:spPr>
         <p:txBody>
-          <a:bodyPr wrap="square" lIns="0" tIns="0" rIns="0" bIns="0">
+          <a:bodyPr wrap="square" lIns="0" rIns="0" tIns="0" bIns="0">
             <a:spAutoFit/>
           </a:bodyPr>
           <a:lstStyle/>
@@ -5705,7 +5390,7 @@
           </a:fontRef>
         </p:style>
         <p:txBody>
-          <a:bodyPr wrap="square" lIns="73152" tIns="36576" rIns="73152" bIns="36576" rtlCol="0" anchor="ctr"/>
+          <a:bodyPr rtlCol="0" anchor="ctr" wrap="square" lIns="73152" rIns="73152" tIns="36576" bIns="36576"/>
           <a:lstStyle/>
           <a:p>
             <a:pPr algn="l"/>
@@ -5769,7 +5454,7 @@
           </a:fontRef>
         </p:style>
         <p:txBody>
-          <a:bodyPr wrap="square" lIns="73152" tIns="36576" rIns="73152" bIns="36576" rtlCol="0" anchor="ctr"/>
+          <a:bodyPr rtlCol="0" anchor="ctr" wrap="square" lIns="73152" rIns="73152" tIns="36576" bIns="36576"/>
           <a:lstStyle/>
           <a:p>
             <a:pPr algn="l"/>
@@ -5833,7 +5518,7 @@
           </a:fontRef>
         </p:style>
         <p:txBody>
-          <a:bodyPr wrap="square" lIns="73152" tIns="36576" rIns="73152" bIns="36576" rtlCol="0" anchor="ctr"/>
+          <a:bodyPr rtlCol="0" anchor="ctr" wrap="square" lIns="73152" rIns="73152" tIns="36576" bIns="36576"/>
           <a:lstStyle/>
           <a:p>
             <a:pPr algn="l"/>
@@ -5897,7 +5582,7 @@
           </a:fontRef>
         </p:style>
         <p:txBody>
-          <a:bodyPr wrap="square" lIns="73152" tIns="36576" rIns="73152" bIns="36576" rtlCol="0" anchor="ctr"/>
+          <a:bodyPr rtlCol="0" anchor="ctr" wrap="square" lIns="73152" rIns="73152" tIns="36576" bIns="36576"/>
           <a:lstStyle/>
           <a:p>
             <a:pPr algn="l"/>
@@ -5963,7 +5648,6 @@
           <a:lstStyle/>
           <a:p>
             <a:pPr algn="ctr"/>
-            <a:endParaRPr/>
           </a:p>
         </p:txBody>
       </p:sp>
@@ -6006,7 +5690,7 @@
           </a:fontRef>
         </p:style>
         <p:txBody>
-          <a:bodyPr wrap="square" lIns="73152" tIns="36576" rIns="73152" bIns="36576" rtlCol="0" anchor="ctr"/>
+          <a:bodyPr rtlCol="0" anchor="ctr" wrap="square" lIns="73152" rIns="73152" tIns="36576" bIns="36576"/>
           <a:lstStyle/>
           <a:p>
             <a:pPr algn="l"/>
@@ -6072,7 +5756,6 @@
           <a:lstStyle/>
           <a:p>
             <a:pPr algn="ctr"/>
-            <a:endParaRPr/>
           </a:p>
         </p:txBody>
       </p:sp>
@@ -6115,7 +5798,7 @@
           </a:fontRef>
         </p:style>
         <p:txBody>
-          <a:bodyPr wrap="square" lIns="73152" tIns="36576" rIns="73152" bIns="36576" rtlCol="0" anchor="ctr"/>
+          <a:bodyPr rtlCol="0" anchor="ctr" wrap="square" lIns="73152" rIns="73152" tIns="36576" bIns="36576"/>
           <a:lstStyle/>
           <a:p>
             <a:pPr algn="l"/>
@@ -6172,7 +5855,6 @@
           <a:lstStyle/>
           <a:p>
             <a:pPr algn="ctr"/>
-            <a:endParaRPr/>
           </a:p>
         </p:txBody>
       </p:sp>
@@ -6215,7 +5897,7 @@
           </a:fontRef>
         </p:style>
         <p:txBody>
-          <a:bodyPr wrap="square" lIns="73152" tIns="36576" rIns="73152" bIns="36576" rtlCol="0" anchor="ctr"/>
+          <a:bodyPr rtlCol="0" anchor="ctr" wrap="square" lIns="73152" rIns="73152" tIns="36576" bIns="36576"/>
           <a:lstStyle/>
           <a:p>
             <a:pPr algn="l"/>
@@ -6281,7 +5963,6 @@
           <a:lstStyle/>
           <a:p>
             <a:pPr algn="ctr"/>
-            <a:endParaRPr/>
           </a:p>
         </p:txBody>
       </p:sp>
@@ -6324,7 +6005,7 @@
           </a:fontRef>
         </p:style>
         <p:txBody>
-          <a:bodyPr wrap="square" lIns="73152" tIns="36576" rIns="73152" bIns="36576" rtlCol="0" anchor="ctr"/>
+          <a:bodyPr rtlCol="0" anchor="ctr" wrap="square" lIns="73152" rIns="73152" tIns="36576" bIns="36576"/>
           <a:lstStyle/>
           <a:p>
             <a:pPr algn="l"/>
@@ -6381,7 +6062,6 @@
           <a:lstStyle/>
           <a:p>
             <a:pPr algn="ctr"/>
-            <a:endParaRPr/>
           </a:p>
         </p:txBody>
       </p:sp>
@@ -6424,7 +6104,7 @@
           </a:fontRef>
         </p:style>
         <p:txBody>
-          <a:bodyPr wrap="square" lIns="73152" tIns="36576" rIns="73152" bIns="36576" rtlCol="0" anchor="ctr"/>
+          <a:bodyPr rtlCol="0" anchor="ctr" wrap="square" lIns="73152" rIns="73152" tIns="36576" bIns="36576"/>
           <a:lstStyle/>
           <a:p>
             <a:pPr algn="l"/>
@@ -6490,7 +6170,6 @@
           <a:lstStyle/>
           <a:p>
             <a:pPr algn="ctr"/>
-            <a:endParaRPr/>
           </a:p>
         </p:txBody>
       </p:sp>
@@ -6533,7 +6212,7 @@
           </a:fontRef>
         </p:style>
         <p:txBody>
-          <a:bodyPr wrap="square" lIns="73152" tIns="36576" rIns="73152" bIns="36576" rtlCol="0" anchor="ctr"/>
+          <a:bodyPr rtlCol="0" anchor="ctr" wrap="square" lIns="73152" rIns="73152" tIns="36576" bIns="36576"/>
           <a:lstStyle/>
           <a:p>
             <a:pPr algn="l"/>
@@ -6590,7 +6269,6 @@
           <a:lstStyle/>
           <a:p>
             <a:pPr algn="ctr"/>
-            <a:endParaRPr/>
           </a:p>
         </p:txBody>
       </p:sp>
@@ -6633,12 +6311,12 @@
           </a:fontRef>
         </p:style>
         <p:txBody>
-          <a:bodyPr wrap="square" lIns="73152" tIns="36576" rIns="73152" bIns="36576" rtlCol="0" anchor="ctr"/>
+          <a:bodyPr rtlCol="0" anchor="ctr" wrap="square" lIns="73152" rIns="73152" tIns="36576" bIns="36576"/>
           <a:lstStyle/>
           <a:p>
             <a:pPr algn="l"/>
             <a:r>
-              <a:rPr sz="1400" b="1" dirty="0">
+              <a:rPr sz="1400" b="1">
                 <a:solidFill>
                   <a:srgbClr val="C0392B"/>
                 </a:solidFill>
@@ -6647,29 +6325,14 @@
               <a:t>Option C</a:t>
             </a:r>
             <a:r>
-              <a:rPr sz="1400" b="0" dirty="0">
+              <a:rPr sz="1400" b="0">
                 <a:solidFill>
                   <a:srgbClr val="22303F"/>
                 </a:solidFill>
                 <a:latin typeface="Microsoft JhengHei"/>
               </a:rPr>
-              <a:t>：PXC </a:t>
-            </a:r>
-            <a:r>
-              <a:rPr sz="1400" b="0" dirty="0" err="1">
-                <a:solidFill>
-                  <a:srgbClr val="22303F"/>
-                </a:solidFill>
-                <a:latin typeface="Microsoft JhengHei"/>
-              </a:rPr>
-              <a:t>目標式對照</a:t>
-            </a:r>
-            <a:endParaRPr sz="1400" b="0" dirty="0">
-              <a:solidFill>
-                <a:srgbClr val="22303F"/>
-              </a:solidFill>
-              <a:latin typeface="Microsoft JhengHei"/>
-            </a:endParaRPr>
+              <a:t>：PXC 目標式對照</a:t>
+            </a:r>
           </a:p>
         </p:txBody>
       </p:sp>
@@ -6714,7 +6377,6 @@
           <a:lstStyle/>
           <a:p>
             <a:pPr algn="ctr"/>
-            <a:endParaRPr/>
           </a:p>
         </p:txBody>
       </p:sp>
@@ -6757,133 +6419,28 @@
           </a:fontRef>
         </p:style>
         <p:txBody>
-          <a:bodyPr wrap="square" lIns="73152" tIns="36576" rIns="73152" bIns="36576" rtlCol="0" anchor="ctr"/>
+          <a:bodyPr rtlCol="0" anchor="ctr" wrap="square" lIns="73152" rIns="73152" tIns="36576" bIns="36576"/>
           <a:lstStyle/>
           <a:p>
             <a:pPr algn="l"/>
             <a:r>
-              <a:rPr sz="1400" b="1" dirty="0">
+              <a:rPr sz="1400" b="1">
                 <a:solidFill>
                   <a:srgbClr val="C0392B"/>
                 </a:solidFill>
                 <a:latin typeface="Microsoft JhengHei"/>
               </a:rPr>
-              <a:t>Option </a:t>
-            </a:r>
-            <a:r>
-              <a:rPr sz="1400" b="1" dirty="0" err="1">
-                <a:solidFill>
-                  <a:srgbClr val="C0392B"/>
-                </a:solidFill>
-                <a:latin typeface="Microsoft JhengHei"/>
-              </a:rPr>
-              <a:t>C</a:t>
-            </a:r>
-            <a:r>
-              <a:rPr sz="1400" b="0" dirty="0" err="1">
+              <a:t>Option C</a:t>
+            </a:r>
+            <a:r>
+              <a:rPr sz="1400" b="0">
                 <a:solidFill>
                   <a:srgbClr val="22303F"/>
                 </a:solidFill>
                 <a:latin typeface="Microsoft JhengHei"/>
               </a:rPr>
-              <a:t>：依需求驗</a:t>
-            </a:r>
-            <a:r>
-              <a:rPr sz="1400" b="0" dirty="0">
-                <a:solidFill>
-                  <a:srgbClr val="22303F"/>
-                </a:solidFill>
-                <a:latin typeface="Microsoft JhengHei"/>
-              </a:rPr>
-              <a:t> </a:t>
-            </a:r>
-            <a:r>
-              <a:rPr sz="1400" b="0" dirty="0" err="1">
-                <a:solidFill>
-                  <a:srgbClr val="22303F"/>
-                </a:solidFill>
-                <a:latin typeface="Microsoft JhengHei"/>
-              </a:rPr>
-              <a:t>YugabyteDB</a:t>
-            </a:r>
-            <a:r>
-              <a:rPr sz="1400" b="0" dirty="0">
-                <a:solidFill>
-                  <a:srgbClr val="22303F"/>
-                </a:solidFill>
-                <a:latin typeface="Microsoft JhengHei"/>
-              </a:rPr>
-              <a:t> </a:t>
-            </a:r>
-            <a:r>
-              <a:rPr sz="1400" b="0" dirty="0" err="1">
-                <a:solidFill>
-                  <a:srgbClr val="22303F"/>
-                </a:solidFill>
-                <a:latin typeface="Microsoft JhengHei"/>
-              </a:rPr>
-              <a:t>或</a:t>
-            </a:r>
-            <a:r>
-              <a:rPr sz="1400" b="0" dirty="0">
-                <a:solidFill>
-                  <a:srgbClr val="22303F"/>
-                </a:solidFill>
-                <a:latin typeface="Microsoft JhengHei"/>
-              </a:rPr>
-              <a:t> </a:t>
-            </a:r>
-            <a:r>
-              <a:rPr sz="1400" b="0" dirty="0" err="1">
-                <a:solidFill>
-                  <a:srgbClr val="22303F"/>
-                </a:solidFill>
-                <a:latin typeface="Microsoft JhengHei"/>
-              </a:rPr>
-              <a:t>CockroachDB</a:t>
-            </a:r>
-            <a:r>
-              <a:rPr sz="1400" b="0" dirty="0">
-                <a:solidFill>
-                  <a:srgbClr val="22303F"/>
-                </a:solidFill>
-                <a:latin typeface="Microsoft JhengHei"/>
-              </a:rPr>
-              <a:t> ; </a:t>
-            </a:r>
-            <a:r>
-              <a:rPr sz="1400" b="0" dirty="0" err="1">
-                <a:solidFill>
-                  <a:srgbClr val="22303F"/>
-                </a:solidFill>
-                <a:latin typeface="Microsoft JhengHei"/>
-              </a:rPr>
-              <a:t>或延用現有</a:t>
-            </a:r>
-            <a:r>
-              <a:rPr sz="1400" b="0" dirty="0">
-                <a:solidFill>
-                  <a:srgbClr val="22303F"/>
-                </a:solidFill>
-                <a:latin typeface="Microsoft JhengHei"/>
-              </a:rPr>
-              <a:t> PostgreSQL </a:t>
-            </a:r>
-            <a:r>
-              <a:rPr sz="1400" b="0" dirty="0" err="1">
-                <a:solidFill>
-                  <a:srgbClr val="22303F"/>
-                </a:solidFill>
-                <a:latin typeface="Microsoft JhengHei"/>
-              </a:rPr>
-              <a:t>架構</a:t>
-            </a:r>
-            <a:endParaRPr sz="1400" b="0" dirty="0">
-              <a:solidFill>
-                <a:srgbClr val="22303F"/>
-              </a:solidFill>
-              <a:latin typeface="Microsoft JhengHei"/>
-            </a:endParaRPr>
+              <a:t>：依需求驗 YugabyteDB 或 CockroachDB ; 或延用現有 PostgreSQL 架構</a:t>
+            </a:r>
           </a:p>
         </p:txBody>
       </p:sp>
@@ -6928,7 +6485,6 @@
           <a:lstStyle/>
           <a:p>
             <a:pPr algn="ctr"/>
-            <a:endParaRPr/>
           </a:p>
         </p:txBody>
       </p:sp>
@@ -6971,12 +6527,12 @@
           </a:fontRef>
         </p:style>
         <p:txBody>
-          <a:bodyPr wrap="square" lIns="73152" tIns="36576" rIns="73152" bIns="36576" rtlCol="0" anchor="ctr"/>
+          <a:bodyPr rtlCol="0" anchor="ctr" wrap="square" lIns="73152" rIns="73152" tIns="36576" bIns="36576"/>
           <a:lstStyle/>
           <a:p>
             <a:pPr algn="l"/>
             <a:r>
-              <a:rPr sz="1300" b="0" dirty="0" err="1">
+              <a:rPr sz="1300" b="0">
                 <a:solidFill>
                   <a:srgbClr val="22303F"/>
                 </a:solidFill>
@@ -6984,12 +6540,6 @@
               </a:rPr>
               <a:t>重複申請／維運成本高</a:t>
             </a:r>
-            <a:endParaRPr sz="1300" b="0" dirty="0">
-              <a:solidFill>
-                <a:srgbClr val="22303F"/>
-              </a:solidFill>
-              <a:latin typeface="Microsoft JhengHei"/>
-            </a:endParaRPr>
           </a:p>
         </p:txBody>
       </p:sp>
@@ -7034,7 +6584,6 @@
           <a:lstStyle/>
           <a:p>
             <a:pPr algn="ctr"/>
-            <a:endParaRPr/>
           </a:p>
         </p:txBody>
       </p:sp>
@@ -7077,7 +6626,7 @@
           </a:fontRef>
         </p:style>
         <p:txBody>
-          <a:bodyPr wrap="square" lIns="73152" tIns="36576" rIns="73152" bIns="36576" rtlCol="0" anchor="ctr"/>
+          <a:bodyPr rtlCol="0" anchor="ctr" wrap="square" lIns="73152" rIns="73152" tIns="36576" bIns="36576"/>
           <a:lstStyle/>
           <a:p>
             <a:pPr algn="l"/>
@@ -7143,7 +6692,6 @@
           <a:lstStyle/>
           <a:p>
             <a:pPr algn="ctr"/>
-            <a:endParaRPr/>
           </a:p>
         </p:txBody>
       </p:sp>
@@ -7186,7 +6734,7 @@
           </a:fontRef>
         </p:style>
         <p:txBody>
-          <a:bodyPr wrap="square" lIns="73152" tIns="36576" rIns="73152" bIns="36576" rtlCol="0" anchor="ctr"/>
+          <a:bodyPr rtlCol="0" anchor="ctr" wrap="square" lIns="73152" rIns="73152" tIns="36576" bIns="36576"/>
           <a:lstStyle/>
           <a:p>
             <a:pPr algn="l"/>
@@ -7243,7 +6791,6 @@
           <a:lstStyle/>
           <a:p>
             <a:pPr algn="ctr"/>
-            <a:endParaRPr/>
           </a:p>
         </p:txBody>
       </p:sp>
@@ -7286,7 +6833,7 @@
           </a:fontRef>
         </p:style>
         <p:txBody>
-          <a:bodyPr wrap="square" lIns="73152" tIns="36576" rIns="73152" bIns="36576" rtlCol="0" anchor="ctr"/>
+          <a:bodyPr rtlCol="0" anchor="ctr" wrap="square" lIns="73152" rIns="73152" tIns="36576" bIns="36576"/>
           <a:lstStyle/>
           <a:p>
             <a:pPr algn="l"/>
@@ -7328,46 +6875,19 @@
           <a:noFill/>
         </p:spPr>
         <p:txBody>
-          <a:bodyPr wrap="square" lIns="0" tIns="0" rIns="0" bIns="0">
+          <a:bodyPr wrap="square" lIns="0" rIns="0" tIns="0" bIns="0">
             <a:spAutoFit/>
           </a:bodyPr>
           <a:lstStyle/>
           <a:p>
             <a:r>
-              <a:rPr sz="1600" b="0" dirty="0" err="1">
+              <a:rPr sz="1600" b="0">
                 <a:solidFill>
                   <a:srgbClr val="8A96A3"/>
                 </a:solidFill>
                 <a:latin typeface="Microsoft JhengHei"/>
               </a:rPr>
-              <a:t>不以已投入的</a:t>
-            </a:r>
-            <a:r>
-              <a:rPr sz="1600" b="0" dirty="0">
-                <a:solidFill>
-                  <a:srgbClr val="8A96A3"/>
-                </a:solidFill>
-                <a:latin typeface="Microsoft JhengHei"/>
-              </a:rPr>
-              <a:t> PoC </a:t>
-            </a:r>
-            <a:r>
-              <a:rPr sz="1600" b="0" dirty="0" err="1">
-                <a:solidFill>
-                  <a:srgbClr val="8A96A3"/>
-                </a:solidFill>
-                <a:latin typeface="Microsoft JhengHei"/>
-              </a:rPr>
-              <a:t>工時作為繼續理由；每個出口都須回到需求、降低無謂技術研究與可量化收益</a:t>
-            </a:r>
-            <a:r>
-              <a:rPr sz="1600" b="0" dirty="0">
-                <a:solidFill>
-                  <a:srgbClr val="8A96A3"/>
-                </a:solidFill>
-                <a:latin typeface="Microsoft JhengHei"/>
-              </a:rPr>
-              <a:t>。</a:t>
+              <a:t>不以已投入的 PoC 工時作為繼續理由；每個出口都須回到需求、降低無謂技術研究與可量化收益。</a:t>
             </a:r>
           </a:p>
         </p:txBody>
@@ -7413,7 +6933,6 @@
           <a:lstStyle/>
           <a:p>
             <a:pPr algn="ctr"/>
-            <a:endParaRPr/>
           </a:p>
         </p:txBody>
       </p:sp>
@@ -7426,7 +6945,7 @@
 </file>
 
 <file path=ppt/slides/slide14.xml><?xml version="1.0" encoding="utf-8"?>
-<p:sld xmlns:a="http://schemas.openxmlformats.org/drawingml/2006/main" xmlns:r="http://schemas.openxmlformats.org/officeDocument/2006/relationships" xmlns:p="http://schemas.openxmlformats.org/presentationml/2006/main">
+<p:sld xmlns:a="http://schemas.openxmlformats.org/drawingml/2006/main" xmlns:p="http://schemas.openxmlformats.org/presentationml/2006/main" xmlns:r="http://schemas.openxmlformats.org/officeDocument/2006/relationships">
   <p:cSld>
     <p:spTree>
       <p:nvGrpSpPr>
@@ -7434,14 +6953,7 @@
         <p:cNvGrpSpPr/>
         <p:nvPr/>
       </p:nvGrpSpPr>
-      <p:grpSpPr>
-        <a:xfrm>
-          <a:off x="0" y="0"/>
-          <a:ext cx="0" cy="0"/>
-          <a:chOff x="0" y="0"/>
-          <a:chExt cx="0" cy="0"/>
-        </a:xfrm>
-      </p:grpSpPr>
+      <p:grpSpPr/>
       <p:sp>
         <p:nvSpPr>
           <p:cNvPr id="2" name="TextBox 1"/>
@@ -7459,7 +6971,7 @@
           <a:noFill/>
         </p:spPr>
         <p:txBody>
-          <a:bodyPr wrap="square" lIns="0" tIns="0" rIns="0" bIns="0">
+          <a:bodyPr wrap="square" lIns="0" rIns="0" tIns="0" bIns="0">
             <a:spAutoFit/>
           </a:bodyPr>
           <a:lstStyle/>
@@ -7493,7 +7005,7 @@
           <a:noFill/>
         </p:spPr>
         <p:txBody>
-          <a:bodyPr wrap="square" lIns="0" tIns="0" rIns="0" bIns="0">
+          <a:bodyPr wrap="square" lIns="0" rIns="0" tIns="0" bIns="0">
             <a:spAutoFit/>
           </a:bodyPr>
           <a:lstStyle/>
@@ -7527,7 +7039,7 @@
           <a:noFill/>
         </p:spPr>
         <p:txBody>
-          <a:bodyPr wrap="square" lIns="0" tIns="0" rIns="0" bIns="0">
+          <a:bodyPr wrap="square" lIns="0" rIns="0" tIns="0" bIns="0">
             <a:spAutoFit/>
           </a:bodyPr>
           <a:lstStyle/>
@@ -7562,7 +7074,7 @@
           <a:noFill/>
         </p:spPr>
         <p:txBody>
-          <a:bodyPr wrap="square" lIns="0" tIns="0" rIns="0" bIns="0">
+          <a:bodyPr wrap="square" lIns="0" rIns="0" tIns="0" bIns="0">
             <a:spAutoFit/>
           </a:bodyPr>
           <a:lstStyle/>
@@ -7588,7 +7100,7 @@
         <p:spPr>
           <a:xfrm>
             <a:off x="566928" y="1709928"/>
-            <a:ext cx="11057839" cy="1828800"/>
+            <a:ext cx="11057839" cy="731520"/>
           </a:xfrm>
           <a:prstGeom prst="rect">
             <a:avLst/>
@@ -7596,7 +7108,7 @@
           <a:noFill/>
         </p:spPr>
         <p:txBody>
-          <a:bodyPr wrap="square" lIns="0" tIns="0" rIns="0" bIns="0">
+          <a:bodyPr wrap="square" lIns="0" rIns="0" tIns="0" bIns="0">
             <a:spAutoFit/>
           </a:bodyPr>
           <a:lstStyle/>
@@ -7607,7 +7119,7 @@
               </a:spcAft>
             </a:pPr>
             <a:r>
-              <a:rPr sz="1900" dirty="0">
+              <a:rPr sz="1900">
                 <a:solidFill>
                   <a:srgbClr val="8A96A3"/>
                 </a:solidFill>
@@ -7616,67 +7128,22 @@
               <a:t>1. </a:t>
             </a:r>
             <a:r>
-              <a:rPr sz="1900" b="1" dirty="0" err="1">
+              <a:rPr sz="1900" b="1">
                 <a:solidFill>
                   <a:srgbClr val="C0392B"/>
                 </a:solidFill>
                 <a:latin typeface="Microsoft JhengHei"/>
               </a:rPr>
-              <a:t>是否採</a:t>
-            </a:r>
-            <a:r>
-              <a:rPr sz="1900" b="1" dirty="0">
-                <a:solidFill>
-                  <a:srgbClr val="C0392B"/>
-                </a:solidFill>
-                <a:latin typeface="Microsoft JhengHei"/>
-              </a:rPr>
-              <a:t> Option </a:t>
-            </a:r>
-            <a:r>
-              <a:rPr sz="1900" b="1" dirty="0" err="1">
-                <a:solidFill>
-                  <a:srgbClr val="C0392B"/>
-                </a:solidFill>
-                <a:latin typeface="Microsoft JhengHei"/>
-              </a:rPr>
-              <a:t>B</a:t>
-            </a:r>
-            <a:r>
-              <a:rPr sz="1900" b="0" dirty="0" err="1">
+              <a:t>是否採 Option B</a:t>
+            </a:r>
+            <a:r>
+              <a:rPr sz="1900" b="0">
                 <a:solidFill>
                   <a:srgbClr val="22303F"/>
                 </a:solidFill>
                 <a:latin typeface="Microsoft JhengHei"/>
               </a:rPr>
-              <a:t>：TiDB</a:t>
-            </a:r>
-            <a:r>
-              <a:rPr sz="1900" b="0" dirty="0">
-                <a:solidFill>
-                  <a:srgbClr val="22303F"/>
-                </a:solidFill>
-                <a:latin typeface="Microsoft JhengHei"/>
-              </a:rPr>
-              <a:t> </a:t>
-            </a:r>
-            <a:r>
-              <a:rPr sz="1900" b="0" dirty="0" err="1">
-                <a:solidFill>
-                  <a:srgbClr val="22303F"/>
-                </a:solidFill>
-                <a:latin typeface="Microsoft JhengHei"/>
-              </a:rPr>
-              <a:t>快速驗證＋代表性應用</a:t>
-            </a:r>
-            <a:r>
-              <a:rPr sz="1900" b="0" dirty="0">
-                <a:solidFill>
-                  <a:srgbClr val="22303F"/>
-                </a:solidFill>
-                <a:latin typeface="Microsoft JhengHei"/>
-              </a:rPr>
-              <a:t> Pilot。</a:t>
+              <a:t>：TiDB 快速驗證＋代表性應用 Pilot。</a:t>
             </a:r>
           </a:p>
           <a:p>
@@ -7686,7 +7153,7 @@
               </a:spcAft>
             </a:pPr>
             <a:r>
-              <a:rPr sz="1900" dirty="0">
+              <a:rPr sz="1900">
                 <a:solidFill>
                   <a:srgbClr val="8A96A3"/>
                 </a:solidFill>
@@ -7695,103 +7162,13 @@
               <a:t>2. </a:t>
             </a:r>
             <a:r>
-              <a:rPr sz="1900" b="1" dirty="0" err="1">
+              <a:rPr sz="1900" b="1">
                 <a:solidFill>
                   <a:srgbClr val="C0392B"/>
                 </a:solidFill>
                 <a:latin typeface="Microsoft JhengHei"/>
               </a:rPr>
-              <a:t>由</a:t>
-            </a:r>
-            <a:r>
-              <a:rPr sz="1900" b="1" dirty="0">
-                <a:solidFill>
-                  <a:srgbClr val="C0392B"/>
-                </a:solidFill>
-                <a:latin typeface="Microsoft JhengHei"/>
-              </a:rPr>
-              <a:t> TSD </a:t>
-            </a:r>
-            <a:r>
-              <a:rPr sz="1900" b="1" dirty="0" err="1">
-                <a:solidFill>
-                  <a:srgbClr val="C0392B"/>
-                </a:solidFill>
-                <a:latin typeface="Microsoft JhengHei"/>
-              </a:rPr>
-              <a:t>指派應用</a:t>
-            </a:r>
-            <a:r>
-              <a:rPr sz="1900" b="1" dirty="0">
-                <a:solidFill>
-                  <a:srgbClr val="C0392B"/>
-                </a:solidFill>
-                <a:latin typeface="Microsoft JhengHei"/>
-              </a:rPr>
-              <a:t> </a:t>
-            </a:r>
-            <a:r>
-              <a:rPr sz="1900" b="1" dirty="0" err="1">
-                <a:solidFill>
-                  <a:srgbClr val="C0392B"/>
-                </a:solidFill>
-                <a:latin typeface="Microsoft JhengHei"/>
-              </a:rPr>
-              <a:t>owner</a:t>
-            </a:r>
-            <a:r>
-              <a:rPr sz="1900" b="0" dirty="0" err="1">
-                <a:solidFill>
-                  <a:srgbClr val="22303F"/>
-                </a:solidFill>
-                <a:latin typeface="Microsoft JhengHei"/>
-              </a:rPr>
-              <a:t>，提供真實</a:t>
-            </a:r>
-            <a:r>
-              <a:rPr sz="1900" b="0" dirty="0">
-                <a:solidFill>
-                  <a:srgbClr val="22303F"/>
-                </a:solidFill>
-                <a:latin typeface="Microsoft JhengHei"/>
-              </a:rPr>
-              <a:t> </a:t>
-            </a:r>
-            <a:r>
-              <a:rPr sz="1900" b="0" dirty="0" err="1">
-                <a:solidFill>
-                  <a:srgbClr val="22303F"/>
-                </a:solidFill>
-                <a:latin typeface="Microsoft JhengHei"/>
-              </a:rPr>
-              <a:t>SQL／ORM／Driver／Transaction</a:t>
-            </a:r>
-            <a:r>
-              <a:rPr sz="1900" b="0" dirty="0">
-                <a:solidFill>
-                  <a:srgbClr val="22303F"/>
-                </a:solidFill>
-                <a:latin typeface="Microsoft JhengHei"/>
-              </a:rPr>
-              <a:t> </a:t>
-            </a:r>
-            <a:r>
-              <a:rPr sz="1900" b="0" dirty="0" err="1">
-                <a:solidFill>
-                  <a:srgbClr val="22303F"/>
-                </a:solidFill>
-                <a:latin typeface="Microsoft JhengHei"/>
-              </a:rPr>
-              <a:t>與改造限制</a:t>
-            </a:r>
-            <a:r>
-              <a:rPr sz="1900" b="0" dirty="0">
-                <a:solidFill>
-                  <a:srgbClr val="22303F"/>
-                </a:solidFill>
-                <a:latin typeface="Microsoft JhengHei"/>
-              </a:rPr>
-              <a:t>。</a:t>
+              <a:t>其他待討論事項</a:t>
             </a:r>
           </a:p>
           <a:p>
@@ -7801,94 +7178,17 @@
               </a:spcAft>
             </a:pPr>
             <a:r>
-              <a:rPr sz="1900" dirty="0">
+              <a:rPr sz="1900"/>
+              <a:t>     </a:t>
+            </a:r>
+            <a:r>
+              <a:rPr sz="1800" b="0">
                 <a:solidFill>
                   <a:srgbClr val="8A96A3"/>
                 </a:solidFill>
                 <a:latin typeface="Microsoft JhengHei"/>
               </a:rPr>
-              <a:t>3. </a:t>
-            </a:r>
-            <a:r>
-              <a:rPr sz="1900" b="1" dirty="0" err="1">
-                <a:solidFill>
-                  <a:srgbClr val="C0392B"/>
-                </a:solidFill>
-                <a:latin typeface="Microsoft JhengHei"/>
-              </a:rPr>
-              <a:t>確認</a:t>
-            </a:r>
-            <a:r>
-              <a:rPr sz="1900" b="1" dirty="0">
-                <a:solidFill>
-                  <a:srgbClr val="C0392B"/>
-                </a:solidFill>
-                <a:latin typeface="Microsoft JhengHei"/>
-              </a:rPr>
-              <a:t> Pilot </a:t>
-            </a:r>
-            <a:r>
-              <a:rPr sz="1900" b="1" dirty="0" err="1">
-                <a:solidFill>
-                  <a:srgbClr val="C0392B"/>
-                </a:solidFill>
-                <a:latin typeface="Microsoft JhengHei"/>
-              </a:rPr>
-              <a:t>情境</a:t>
-            </a:r>
-            <a:r>
-              <a:rPr sz="1900" b="0" dirty="0" err="1">
-                <a:solidFill>
-                  <a:srgbClr val="22303F"/>
-                </a:solidFill>
-                <a:latin typeface="Microsoft JhengHei"/>
-              </a:rPr>
-              <a:t>：一般</a:t>
-            </a:r>
-            <a:r>
-              <a:rPr sz="1900" b="0" dirty="0">
-                <a:solidFill>
-                  <a:srgbClr val="22303F"/>
-                </a:solidFill>
-                <a:latin typeface="Microsoft JhengHei"/>
-              </a:rPr>
-              <a:t> MySQL </a:t>
-            </a:r>
-            <a:r>
-              <a:rPr sz="1900" b="0" dirty="0" err="1">
-                <a:solidFill>
-                  <a:srgbClr val="22303F"/>
-                </a:solidFill>
-                <a:latin typeface="Microsoft JhengHei"/>
-              </a:rPr>
-              <a:t>應用、可移至</a:t>
-            </a:r>
-            <a:r>
-              <a:rPr sz="1900" b="0" dirty="0">
-                <a:solidFill>
-                  <a:srgbClr val="22303F"/>
-                </a:solidFill>
-                <a:latin typeface="Microsoft JhengHei"/>
-              </a:rPr>
-              <a:t> EDC </a:t>
-            </a:r>
-            <a:r>
-              <a:rPr sz="1900" b="0" dirty="0" err="1">
-                <a:solidFill>
-                  <a:srgbClr val="22303F"/>
-                </a:solidFill>
-                <a:latin typeface="Microsoft JhengHei"/>
-              </a:rPr>
-              <a:t>的定期批次，或故障影響範圍較明確的服務</a:t>
-            </a:r>
-            <a:r>
-              <a:rPr sz="1900" b="0" dirty="0">
-                <a:solidFill>
-                  <a:srgbClr val="22303F"/>
-                </a:solidFill>
-                <a:latin typeface="Microsoft JhengHei"/>
-              </a:rPr>
-              <a:t>。</a:t>
+              <a:t>- 由 TSD 指派應用 owner，提供真實 SQL／ORM／Driver／Transaction 與改造限制。</a:t>
             </a:r>
           </a:p>
           <a:p>
@@ -7898,40 +7198,17 @@
               </a:spcAft>
             </a:pPr>
             <a:r>
-              <a:rPr sz="1900" dirty="0">
+              <a:rPr sz="1900"/>
+              <a:t>     </a:t>
+            </a:r>
+            <a:r>
+              <a:rPr sz="1800" b="0">
                 <a:solidFill>
                   <a:srgbClr val="8A96A3"/>
                 </a:solidFill>
                 <a:latin typeface="Microsoft JhengHei"/>
               </a:rPr>
-              <a:t>4. </a:t>
-            </a:r>
-            <a:r>
-              <a:rPr sz="1900" b="1" dirty="0" err="1">
-                <a:solidFill>
-                  <a:srgbClr val="C0392B"/>
-                </a:solidFill>
-                <a:latin typeface="Microsoft JhengHei"/>
-              </a:rPr>
-              <a:t>定義服務驗收</a:t>
-            </a:r>
-            <a:r>
-              <a:rPr sz="1900" b="0" dirty="0" err="1">
-                <a:solidFill>
-                  <a:srgbClr val="22303F"/>
-                </a:solidFill>
-                <a:latin typeface="Microsoft JhengHei"/>
-              </a:rPr>
-              <a:t>：一致性優先條件、可接受中斷、資料延遲、降級與回復方式</a:t>
-            </a:r>
-            <a:r>
-              <a:rPr sz="1900" b="0" dirty="0">
-                <a:solidFill>
-                  <a:srgbClr val="22303F"/>
-                </a:solidFill>
-                <a:latin typeface="Microsoft JhengHei"/>
-              </a:rPr>
-              <a:t>。</a:t>
+              <a:t>- 確認 Pilot 情境：一般 MySQL 應用、可移至 EDC 的定期批次，或故障影響範圍較明確的服務。</a:t>
             </a:r>
           </a:p>
           <a:p>
@@ -7941,120 +7218,38 @@
               </a:spcAft>
             </a:pPr>
             <a:r>
-              <a:rPr sz="1900" dirty="0">
+              <a:rPr sz="1900"/>
+              <a:t>     </a:t>
+            </a:r>
+            <a:r>
+              <a:rPr sz="1800" b="0">
                 <a:solidFill>
                   <a:srgbClr val="8A96A3"/>
                 </a:solidFill>
                 <a:latin typeface="Microsoft JhengHei"/>
               </a:rPr>
-              <a:t>5. </a:t>
-            </a:r>
-            <a:r>
-              <a:rPr sz="1900" b="1" dirty="0" err="1">
-                <a:solidFill>
-                  <a:srgbClr val="C0392B"/>
-                </a:solidFill>
-                <a:latin typeface="Microsoft JhengHei"/>
-              </a:rPr>
-              <a:t>啟動原廠正式詢價與成本資料蒐集</a:t>
-            </a:r>
-            <a:r>
-              <a:rPr sz="1900" b="0" dirty="0" err="1">
-                <a:solidFill>
-                  <a:srgbClr val="22303F"/>
-                </a:solidFill>
-                <a:latin typeface="Microsoft JhengHei"/>
-              </a:rPr>
-              <a:t>：支援、授權、維運人力及基礎設施</a:t>
-            </a:r>
-            <a:r>
-              <a:rPr sz="1900" b="0" dirty="0">
-                <a:solidFill>
-                  <a:srgbClr val="22303F"/>
-                </a:solidFill>
-                <a:latin typeface="Microsoft JhengHei"/>
-              </a:rPr>
-              <a:t>。</a:t>
-            </a:r>
-          </a:p>
-        </p:txBody>
-      </p:sp>
-      <p:sp>
-        <p:nvSpPr>
-          <p:cNvPr id="7" name="TextBox 6"/>
-          <p:cNvSpPr txBox="1"/>
-          <p:nvPr/>
-        </p:nvSpPr>
-        <p:spPr>
-          <a:xfrm>
-            <a:off x="694944" y="3745357"/>
-            <a:ext cx="10929823" cy="279400"/>
-          </a:xfrm>
-          <a:prstGeom prst="rect">
-            <a:avLst/>
-          </a:prstGeom>
-          <a:noFill/>
-        </p:spPr>
-        <p:txBody>
-          <a:bodyPr wrap="square" lIns="0" tIns="0" rIns="0" bIns="0">
-            <a:spAutoFit/>
-          </a:bodyPr>
-          <a:lstStyle/>
-          <a:p>
-            <a:r>
-              <a:rPr sz="1600" b="0">
+              <a:t>- 定義服務驗收：一致性優先條件、可接受中斷、資料延遲、降級與回復方式。</a:t>
+            </a:r>
+          </a:p>
+          <a:p>
+            <a:pPr>
+              <a:spcAft>
+                <a:spcPts val="600"/>
+              </a:spcAft>
+            </a:pPr>
+            <a:r>
+              <a:rPr sz="1900"/>
+              <a:t>     </a:t>
+            </a:r>
+            <a:r>
+              <a:rPr sz="1800" b="0">
                 <a:solidFill>
                   <a:srgbClr val="8A96A3"/>
                 </a:solidFill>
                 <a:latin typeface="Microsoft JhengHei"/>
               </a:rPr>
-              <a:t>Pilot 驗收完成後，再決定擴大 TiDB、轉向 PXC 對照，或啟動 PostgreSQL 路線的目標式 Pilot。</a:t>
-            </a:r>
-          </a:p>
-        </p:txBody>
-      </p:sp>
-      <p:sp>
-        <p:nvSpPr>
-          <p:cNvPr id="8" name="Rectangle 7"/>
-          <p:cNvSpPr/>
-          <p:nvPr/>
-        </p:nvSpPr>
-        <p:spPr>
-          <a:xfrm>
-            <a:off x="566928" y="3745357"/>
-            <a:ext cx="26000" cy="279400"/>
-          </a:xfrm>
-          <a:prstGeom prst="rect">
-            <a:avLst/>
-          </a:prstGeom>
-          <a:solidFill>
-            <a:srgbClr val="D6DCE3"/>
-          </a:solidFill>
-          <a:ln>
-            <a:noFill/>
-          </a:ln>
-          <a:effectLst/>
-        </p:spPr>
-        <p:style>
-          <a:lnRef idx="1">
-            <a:schemeClr val="accent1"/>
-          </a:lnRef>
-          <a:fillRef idx="3">
-            <a:schemeClr val="accent1"/>
-          </a:fillRef>
-          <a:effectRef idx="2">
-            <a:schemeClr val="accent1"/>
-          </a:effectRef>
-          <a:fontRef idx="minor">
-            <a:schemeClr val="lt1"/>
-          </a:fontRef>
-        </p:style>
-        <p:txBody>
-          <a:bodyPr rtlCol="0" anchor="ctr"/>
-          <a:lstStyle/>
-          <a:p>
-            <a:pPr algn="ctr"/>
-            <a:endParaRPr/>
+              <a:t>- 啟動原廠正式詢價與成本資料蒐集：支援、授權、維運人力及基礎設施。</a:t>
+            </a:r>
           </a:p>
         </p:txBody>
       </p:sp>
@@ -8067,7 +7262,7 @@
 </file>
 
 <file path=ppt/slides/slide15.xml><?xml version="1.0" encoding="utf-8"?>
-<p:sld xmlns:a="http://schemas.openxmlformats.org/drawingml/2006/main" xmlns:r="http://schemas.openxmlformats.org/officeDocument/2006/relationships" xmlns:p="http://schemas.openxmlformats.org/presentationml/2006/main">
+<p:sld xmlns:a="http://schemas.openxmlformats.org/drawingml/2006/main" xmlns:p="http://schemas.openxmlformats.org/presentationml/2006/main" xmlns:r="http://schemas.openxmlformats.org/officeDocument/2006/relationships">
   <p:cSld>
     <p:spTree>
       <p:nvGrpSpPr>
@@ -8075,14 +7270,7 @@
         <p:cNvGrpSpPr/>
         <p:nvPr/>
       </p:nvGrpSpPr>
-      <p:grpSpPr>
-        <a:xfrm>
-          <a:off x="0" y="0"/>
-          <a:ext cx="0" cy="0"/>
-          <a:chOff x="0" y="0"/>
-          <a:chExt cx="0" cy="0"/>
-        </a:xfrm>
-      </p:grpSpPr>
+      <p:grpSpPr/>
       <p:sp>
         <p:nvSpPr>
           <p:cNvPr id="2" name="TextBox 1"/>
@@ -8100,7 +7288,7 @@
           <a:noFill/>
         </p:spPr>
         <p:txBody>
-          <a:bodyPr wrap="square" lIns="0" tIns="0" rIns="0" bIns="0">
+          <a:bodyPr wrap="square" lIns="0" rIns="0" tIns="0" bIns="0">
             <a:spAutoFit/>
           </a:bodyPr>
           <a:lstStyle/>
@@ -8134,7 +7322,7 @@
           <a:noFill/>
         </p:spPr>
         <p:txBody>
-          <a:bodyPr wrap="square" lIns="0" tIns="0" rIns="0" bIns="0">
+          <a:bodyPr wrap="square" lIns="0" rIns="0" tIns="0" bIns="0">
             <a:spAutoFit/>
           </a:bodyPr>
           <a:lstStyle/>
@@ -8168,7 +7356,7 @@
           <a:noFill/>
         </p:spPr>
         <p:txBody>
-          <a:bodyPr wrap="square" lIns="0" tIns="0" rIns="0" bIns="0">
+          <a:bodyPr wrap="square" lIns="0" rIns="0" tIns="0" bIns="0">
             <a:spAutoFit/>
           </a:bodyPr>
           <a:lstStyle/>
@@ -8203,7 +7391,7 @@
           <a:noFill/>
         </p:spPr>
         <p:txBody>
-          <a:bodyPr wrap="square" lIns="0" tIns="0" rIns="0" bIns="0">
+          <a:bodyPr wrap="square" lIns="0" rIns="0" tIns="0" bIns="0">
             <a:spAutoFit/>
           </a:bodyPr>
           <a:lstStyle/>
@@ -8230,7 +7418,7 @@
 </file>
 
 <file path=ppt/slides/slide16.xml><?xml version="1.0" encoding="utf-8"?>
-<p:sld xmlns:a="http://schemas.openxmlformats.org/drawingml/2006/main" xmlns:r="http://schemas.openxmlformats.org/officeDocument/2006/relationships" xmlns:p="http://schemas.openxmlformats.org/presentationml/2006/main">
+<p:sld xmlns:a="http://schemas.openxmlformats.org/drawingml/2006/main" xmlns:p="http://schemas.openxmlformats.org/presentationml/2006/main" xmlns:r="http://schemas.openxmlformats.org/officeDocument/2006/relationships">
   <p:cSld>
     <p:spTree>
       <p:nvGrpSpPr>
@@ -8238,14 +7426,7 @@
         <p:cNvGrpSpPr/>
         <p:nvPr/>
       </p:nvGrpSpPr>
-      <p:grpSpPr>
-        <a:xfrm>
-          <a:off x="0" y="0"/>
-          <a:ext cx="0" cy="0"/>
-          <a:chOff x="0" y="0"/>
-          <a:chExt cx="0" cy="0"/>
-        </a:xfrm>
-      </p:grpSpPr>
+      <p:grpSpPr/>
       <p:sp>
         <p:nvSpPr>
           <p:cNvPr id="2" name="TextBox 1"/>
@@ -8263,7 +7444,7 @@
           <a:noFill/>
         </p:spPr>
         <p:txBody>
-          <a:bodyPr wrap="square" lIns="0" tIns="0" rIns="0" bIns="0">
+          <a:bodyPr wrap="square" lIns="0" rIns="0" tIns="0" bIns="0">
             <a:spAutoFit/>
           </a:bodyPr>
           <a:lstStyle/>
@@ -8297,7 +7478,7 @@
           <a:noFill/>
         </p:spPr>
         <p:txBody>
-          <a:bodyPr wrap="square" lIns="0" tIns="0" rIns="0" bIns="0">
+          <a:bodyPr wrap="square" lIns="0" rIns="0" tIns="0" bIns="0">
             <a:spAutoFit/>
           </a:bodyPr>
           <a:lstStyle/>
@@ -8331,7 +7512,7 @@
           <a:noFill/>
         </p:spPr>
         <p:txBody>
-          <a:bodyPr wrap="square" lIns="0" tIns="0" rIns="0" bIns="0">
+          <a:bodyPr wrap="square" lIns="0" rIns="0" tIns="0" bIns="0">
             <a:spAutoFit/>
           </a:bodyPr>
           <a:lstStyle/>
@@ -8366,7 +7547,7 @@
           <a:noFill/>
         </p:spPr>
         <p:txBody>
-          <a:bodyPr wrap="square" lIns="0" tIns="0" rIns="0" bIns="0">
+          <a:bodyPr wrap="square" lIns="0" rIns="0" tIns="0" bIns="0">
             <a:spAutoFit/>
           </a:bodyPr>
           <a:lstStyle/>
@@ -8402,32 +7583,14 @@
                 <a:tableStyleId>{5C22544A-7EE6-4342-B048-85BDC9FD1C3A}</a:tableStyleId>
               </a:tblPr>
               <a:tblGrid>
-                <a:gridCol w="1888311">
-                  <a:extLst>
-                    <a:ext uri="{9D8B030D-6E8A-4147-A177-3AD203B41FA5}">
-                      <a16:colId xmlns:a16="http://schemas.microsoft.com/office/drawing/2014/main" val="20000"/>
-                    </a:ext>
-                  </a:extLst>
-                </a:gridCol>
-                <a:gridCol w="6971796">
-                  <a:extLst>
-                    <a:ext uri="{9D8B030D-6E8A-4147-A177-3AD203B41FA5}">
-                      <a16:colId xmlns:a16="http://schemas.microsoft.com/office/drawing/2014/main" val="20001"/>
-                    </a:ext>
-                  </a:extLst>
-                </a:gridCol>
-                <a:gridCol w="2197732">
-                  <a:extLst>
-                    <a:ext uri="{9D8B030D-6E8A-4147-A177-3AD203B41FA5}">
-                      <a16:colId xmlns:a16="http://schemas.microsoft.com/office/drawing/2014/main" val="20002"/>
-                    </a:ext>
-                  </a:extLst>
-                </a:gridCol>
+                <a:gridCol w="1888311"/>
+                <a:gridCol w="6971796"/>
+                <a:gridCol w="2197732"/>
               </a:tblGrid>
               <a:tr h="310896">
                 <a:tc>
                   <a:txBody>
-                    <a:bodyPr/>
+                    <a:bodyPr wrap="square"/>
                     <a:lstStyle/>
                     <a:p>
                       <a:pPr algn="ctr"/>
@@ -8450,7 +7613,7 @@
                 </a:tc>
                 <a:tc>
                   <a:txBody>
-                    <a:bodyPr/>
+                    <a:bodyPr wrap="square"/>
                     <a:lstStyle/>
                     <a:p>
                       <a:pPr algn="ctr"/>
@@ -8473,7 +7636,7 @@
                 </a:tc>
                 <a:tc>
                   <a:txBody>
-                    <a:bodyPr/>
+                    <a:bodyPr wrap="square"/>
                     <a:lstStyle/>
                     <a:p>
                       <a:pPr algn="ctr"/>
@@ -8494,16 +7657,11 @@
                     </a:solidFill>
                   </a:tcPr>
                 </a:tc>
-                <a:extLst>
-                  <a:ext uri="{0D108BD9-81ED-4DB2-BD59-A6C34878D82A}">
-                    <a16:rowId xmlns:a16="http://schemas.microsoft.com/office/drawing/2014/main" val="10000"/>
-                  </a:ext>
-                </a:extLst>
               </a:tr>
               <a:tr h="310896">
                 <a:tc>
                   <a:txBody>
-                    <a:bodyPr/>
+                    <a:bodyPr wrap="square"/>
                     <a:lstStyle/>
                     <a:p>
                       <a:pPr algn="ctr"/>
@@ -8526,7 +7684,7 @@
                 </a:tc>
                 <a:tc>
                   <a:txBody>
-                    <a:bodyPr/>
+                    <a:bodyPr wrap="square"/>
                     <a:lstStyle/>
                     <a:p>
                       <a:pPr algn="l"/>
@@ -8549,7 +7707,7 @@
                 </a:tc>
                 <a:tc>
                   <a:txBody>
-                    <a:bodyPr/>
+                    <a:bodyPr wrap="square"/>
                     <a:lstStyle/>
                     <a:p>
                       <a:pPr algn="ctr"/>
@@ -8570,16 +7728,11 @@
                     </a:solidFill>
                   </a:tcPr>
                 </a:tc>
-                <a:extLst>
-                  <a:ext uri="{0D108BD9-81ED-4DB2-BD59-A6C34878D82A}">
-                    <a16:rowId xmlns:a16="http://schemas.microsoft.com/office/drawing/2014/main" val="10001"/>
-                  </a:ext>
-                </a:extLst>
               </a:tr>
               <a:tr h="310896">
                 <a:tc>
                   <a:txBody>
-                    <a:bodyPr/>
+                    <a:bodyPr wrap="square"/>
                     <a:lstStyle/>
                     <a:p>
                       <a:pPr algn="ctr"/>
@@ -8602,7 +7755,7 @@
                 </a:tc>
                 <a:tc>
                   <a:txBody>
-                    <a:bodyPr/>
+                    <a:bodyPr wrap="square"/>
                     <a:lstStyle/>
                     <a:p>
                       <a:pPr algn="l"/>
@@ -8625,7 +7778,7 @@
                 </a:tc>
                 <a:tc>
                   <a:txBody>
-                    <a:bodyPr/>
+                    <a:bodyPr wrap="square"/>
                     <a:lstStyle/>
                     <a:p>
                       <a:pPr algn="ctr"/>
@@ -8646,16 +7799,11 @@
                     </a:solidFill>
                   </a:tcPr>
                 </a:tc>
-                <a:extLst>
-                  <a:ext uri="{0D108BD9-81ED-4DB2-BD59-A6C34878D82A}">
-                    <a16:rowId xmlns:a16="http://schemas.microsoft.com/office/drawing/2014/main" val="10002"/>
-                  </a:ext>
-                </a:extLst>
               </a:tr>
               <a:tr h="310896">
                 <a:tc>
                   <a:txBody>
-                    <a:bodyPr/>
+                    <a:bodyPr wrap="square"/>
                     <a:lstStyle/>
                     <a:p>
                       <a:pPr algn="ctr"/>
@@ -8678,7 +7826,7 @@
                 </a:tc>
                 <a:tc>
                   <a:txBody>
-                    <a:bodyPr/>
+                    <a:bodyPr wrap="square"/>
                     <a:lstStyle/>
                     <a:p>
                       <a:pPr algn="l"/>
@@ -8701,7 +7849,7 @@
                 </a:tc>
                 <a:tc>
                   <a:txBody>
-                    <a:bodyPr/>
+                    <a:bodyPr wrap="square"/>
                     <a:lstStyle/>
                     <a:p>
                       <a:pPr algn="ctr"/>
@@ -8722,16 +7870,11 @@
                     </a:solidFill>
                   </a:tcPr>
                 </a:tc>
-                <a:extLst>
-                  <a:ext uri="{0D108BD9-81ED-4DB2-BD59-A6C34878D82A}">
-                    <a16:rowId xmlns:a16="http://schemas.microsoft.com/office/drawing/2014/main" val="10003"/>
-                  </a:ext>
-                </a:extLst>
               </a:tr>
               <a:tr h="310896">
                 <a:tc>
                   <a:txBody>
-                    <a:bodyPr/>
+                    <a:bodyPr wrap="square"/>
                     <a:lstStyle/>
                     <a:p>
                       <a:pPr algn="ctr"/>
@@ -8754,7 +7897,7 @@
                 </a:tc>
                 <a:tc>
                   <a:txBody>
-                    <a:bodyPr/>
+                    <a:bodyPr wrap="square"/>
                     <a:lstStyle/>
                     <a:p>
                       <a:pPr algn="l"/>
@@ -8777,7 +7920,7 @@
                 </a:tc>
                 <a:tc>
                   <a:txBody>
-                    <a:bodyPr/>
+                    <a:bodyPr wrap="square"/>
                     <a:lstStyle/>
                     <a:p>
                       <a:pPr algn="ctr"/>
@@ -8798,16 +7941,11 @@
                     </a:solidFill>
                   </a:tcPr>
                 </a:tc>
-                <a:extLst>
-                  <a:ext uri="{0D108BD9-81ED-4DB2-BD59-A6C34878D82A}">
-                    <a16:rowId xmlns:a16="http://schemas.microsoft.com/office/drawing/2014/main" val="10004"/>
-                  </a:ext>
-                </a:extLst>
               </a:tr>
               <a:tr h="310896">
                 <a:tc>
                   <a:txBody>
-                    <a:bodyPr/>
+                    <a:bodyPr wrap="square"/>
                     <a:lstStyle/>
                     <a:p>
                       <a:pPr algn="ctr"/>
@@ -8830,7 +7968,7 @@
                 </a:tc>
                 <a:tc>
                   <a:txBody>
-                    <a:bodyPr/>
+                    <a:bodyPr wrap="square"/>
                     <a:lstStyle/>
                     <a:p>
                       <a:pPr algn="l"/>
@@ -8853,7 +7991,7 @@
                 </a:tc>
                 <a:tc>
                   <a:txBody>
-                    <a:bodyPr/>
+                    <a:bodyPr wrap="square"/>
                     <a:lstStyle/>
                     <a:p>
                       <a:pPr algn="ctr"/>
@@ -8874,11 +8012,6 @@
                     </a:solidFill>
                   </a:tcPr>
                 </a:tc>
-                <a:extLst>
-                  <a:ext uri="{0D108BD9-81ED-4DB2-BD59-A6C34878D82A}">
-                    <a16:rowId xmlns:a16="http://schemas.microsoft.com/office/drawing/2014/main" val="10005"/>
-                  </a:ext>
-                </a:extLst>
               </a:tr>
             </a:tbl>
           </a:graphicData>
@@ -8901,7 +8034,7 @@
           <a:noFill/>
         </p:spPr>
         <p:txBody>
-          <a:bodyPr wrap="square" lIns="0" tIns="0" rIns="0" bIns="0">
+          <a:bodyPr wrap="square" lIns="0" rIns="0" tIns="0" bIns="0">
             <a:spAutoFit/>
           </a:bodyPr>
           <a:lstStyle/>
@@ -8935,7 +8068,7 @@
           <a:noFill/>
         </p:spPr>
         <p:txBody>
-          <a:bodyPr wrap="square" lIns="0" tIns="0" rIns="0" bIns="0">
+          <a:bodyPr wrap="square" lIns="0" rIns="0" tIns="0" bIns="0">
             <a:spAutoFit/>
           </a:bodyPr>
           <a:lstStyle/>
@@ -9012,7 +8145,6 @@
           <a:lstStyle/>
           <a:p>
             <a:pPr algn="ctr"/>
-            <a:endParaRPr/>
           </a:p>
         </p:txBody>
       </p:sp>
@@ -9033,7 +8165,7 @@
           <a:noFill/>
         </p:spPr>
         <p:txBody>
-          <a:bodyPr wrap="square" lIns="0" tIns="0" rIns="0" bIns="0">
+          <a:bodyPr wrap="square" lIns="0" rIns="0" tIns="0" bIns="0">
             <a:spAutoFit/>
           </a:bodyPr>
           <a:lstStyle/>
@@ -9076,7 +8208,7 @@
           <a:noFill/>
         </p:spPr>
         <p:txBody>
-          <a:bodyPr wrap="square" lIns="0" tIns="0" rIns="0" bIns="0">
+          <a:bodyPr wrap="square" lIns="0" rIns="0" tIns="0" bIns="0">
             <a:spAutoFit/>
           </a:bodyPr>
           <a:lstStyle/>
@@ -9153,7 +8285,6 @@
           <a:lstStyle/>
           <a:p>
             <a:pPr algn="ctr"/>
-            <a:endParaRPr/>
           </a:p>
         </p:txBody>
       </p:sp>
@@ -9166,7 +8297,7 @@
 </file>
 
 <file path=ppt/slides/slide17.xml><?xml version="1.0" encoding="utf-8"?>
-<p:sld xmlns:a="http://schemas.openxmlformats.org/drawingml/2006/main" xmlns:r="http://schemas.openxmlformats.org/officeDocument/2006/relationships" xmlns:p="http://schemas.openxmlformats.org/presentationml/2006/main">
+<p:sld xmlns:a="http://schemas.openxmlformats.org/drawingml/2006/main" xmlns:p="http://schemas.openxmlformats.org/presentationml/2006/main" xmlns:r="http://schemas.openxmlformats.org/officeDocument/2006/relationships">
   <p:cSld>
     <p:spTree>
       <p:nvGrpSpPr>
@@ -9174,14 +8305,7 @@
         <p:cNvGrpSpPr/>
         <p:nvPr/>
       </p:nvGrpSpPr>
-      <p:grpSpPr>
-        <a:xfrm>
-          <a:off x="0" y="0"/>
-          <a:ext cx="0" cy="0"/>
-          <a:chOff x="0" y="0"/>
-          <a:chExt cx="0" cy="0"/>
-        </a:xfrm>
-      </p:grpSpPr>
+      <p:grpSpPr/>
       <p:sp>
         <p:nvSpPr>
           <p:cNvPr id="2" name="TextBox 1"/>
@@ -9199,7 +8323,7 @@
           <a:noFill/>
         </p:spPr>
         <p:txBody>
-          <a:bodyPr wrap="square" lIns="0" tIns="0" rIns="0" bIns="0">
+          <a:bodyPr wrap="square" lIns="0" rIns="0" tIns="0" bIns="0">
             <a:spAutoFit/>
           </a:bodyPr>
           <a:lstStyle/>
@@ -9233,7 +8357,7 @@
           <a:noFill/>
         </p:spPr>
         <p:txBody>
-          <a:bodyPr wrap="square" lIns="0" tIns="0" rIns="0" bIns="0">
+          <a:bodyPr wrap="square" lIns="0" rIns="0" tIns="0" bIns="0">
             <a:spAutoFit/>
           </a:bodyPr>
           <a:lstStyle/>
@@ -9267,7 +8391,7 @@
           <a:noFill/>
         </p:spPr>
         <p:txBody>
-          <a:bodyPr wrap="square" lIns="0" tIns="0" rIns="0" bIns="0">
+          <a:bodyPr wrap="square" lIns="0" rIns="0" tIns="0" bIns="0">
             <a:spAutoFit/>
           </a:bodyPr>
           <a:lstStyle/>
@@ -9302,7 +8426,7 @@
           <a:noFill/>
         </p:spPr>
         <p:txBody>
-          <a:bodyPr wrap="square" lIns="0" tIns="0" rIns="0" bIns="0">
+          <a:bodyPr wrap="square" lIns="0" rIns="0" tIns="0" bIns="0">
             <a:spAutoFit/>
           </a:bodyPr>
           <a:lstStyle/>
@@ -9336,7 +8460,7 @@
           <a:noFill/>
         </p:spPr>
         <p:txBody>
-          <a:bodyPr wrap="square" lIns="0" tIns="0" rIns="0" bIns="0">
+          <a:bodyPr wrap="square" lIns="0" rIns="0" tIns="0" bIns="0">
             <a:spAutoFit/>
           </a:bodyPr>
           <a:lstStyle/>
@@ -9379,7 +8503,7 @@
           <a:noFill/>
         </p:spPr>
         <p:txBody>
-          <a:bodyPr wrap="square" lIns="0" tIns="0" rIns="0" bIns="0">
+          <a:bodyPr wrap="square" lIns="0" rIns="0" tIns="0" bIns="0">
             <a:spAutoFit/>
           </a:bodyPr>
           <a:lstStyle/>
@@ -9618,7 +8742,7 @@
           <a:noFill/>
         </p:spPr>
         <p:txBody>
-          <a:bodyPr wrap="square" lIns="0" tIns="0" rIns="0" bIns="0">
+          <a:bodyPr wrap="square" lIns="0" rIns="0" tIns="0" bIns="0">
             <a:spAutoFit/>
           </a:bodyPr>
           <a:lstStyle/>
@@ -9652,7 +8776,7 @@
           <a:noFill/>
         </p:spPr>
         <p:txBody>
-          <a:bodyPr wrap="square" lIns="0" tIns="0" rIns="0" bIns="0">
+          <a:bodyPr wrap="square" lIns="0" rIns="0" tIns="0" bIns="0">
             <a:spAutoFit/>
           </a:bodyPr>
           <a:lstStyle/>
@@ -9771,7 +8895,7 @@
 </file>
 
 <file path=ppt/slides/slide18.xml><?xml version="1.0" encoding="utf-8"?>
-<p:sld xmlns:a="http://schemas.openxmlformats.org/drawingml/2006/main" xmlns:r="http://schemas.openxmlformats.org/officeDocument/2006/relationships" xmlns:p="http://schemas.openxmlformats.org/presentationml/2006/main">
+<p:sld xmlns:a="http://schemas.openxmlformats.org/drawingml/2006/main" xmlns:p="http://schemas.openxmlformats.org/presentationml/2006/main" xmlns:r="http://schemas.openxmlformats.org/officeDocument/2006/relationships">
   <p:cSld>
     <p:spTree>
       <p:nvGrpSpPr>
@@ -9779,14 +8903,7 @@
         <p:cNvGrpSpPr/>
         <p:nvPr/>
       </p:nvGrpSpPr>
-      <p:grpSpPr>
-        <a:xfrm>
-          <a:off x="0" y="0"/>
-          <a:ext cx="0" cy="0"/>
-          <a:chOff x="0" y="0"/>
-          <a:chExt cx="0" cy="0"/>
-        </a:xfrm>
-      </p:grpSpPr>
+      <p:grpSpPr/>
       <p:sp>
         <p:nvSpPr>
           <p:cNvPr id="2" name="TextBox 1"/>
@@ -9804,7 +8921,7 @@
           <a:noFill/>
         </p:spPr>
         <p:txBody>
-          <a:bodyPr wrap="square" lIns="0" tIns="0" rIns="0" bIns="0">
+          <a:bodyPr wrap="square" lIns="0" rIns="0" tIns="0" bIns="0">
             <a:spAutoFit/>
           </a:bodyPr>
           <a:lstStyle/>
@@ -9838,7 +8955,7 @@
           <a:noFill/>
         </p:spPr>
         <p:txBody>
-          <a:bodyPr wrap="square" lIns="0" tIns="0" rIns="0" bIns="0">
+          <a:bodyPr wrap="square" lIns="0" rIns="0" tIns="0" bIns="0">
             <a:spAutoFit/>
           </a:bodyPr>
           <a:lstStyle/>
@@ -9872,7 +8989,7 @@
           <a:noFill/>
         </p:spPr>
         <p:txBody>
-          <a:bodyPr wrap="square" lIns="0" tIns="0" rIns="0" bIns="0">
+          <a:bodyPr wrap="square" lIns="0" rIns="0" tIns="0" bIns="0">
             <a:spAutoFit/>
           </a:bodyPr>
           <a:lstStyle/>
@@ -9907,7 +9024,7 @@
           <a:noFill/>
         </p:spPr>
         <p:txBody>
-          <a:bodyPr wrap="square" lIns="0" tIns="0" rIns="0" bIns="0">
+          <a:bodyPr wrap="square" lIns="0" rIns="0" tIns="0" bIns="0">
             <a:spAutoFit/>
           </a:bodyPr>
           <a:lstStyle/>
@@ -9943,32 +9060,14 @@
                 <a:tableStyleId>{5C22544A-7EE6-4342-B048-85BDC9FD1C3A}</a:tableStyleId>
               </a:tblPr>
               <a:tblGrid>
-                <a:gridCol w="1386689">
-                  <a:extLst>
-                    <a:ext uri="{9D8B030D-6E8A-4147-A177-3AD203B41FA5}">
-                      <a16:colId xmlns:a16="http://schemas.microsoft.com/office/drawing/2014/main" val="20000"/>
-                    </a:ext>
-                  </a:extLst>
-                </a:gridCol>
-                <a:gridCol w="4093409">
-                  <a:extLst>
-                    <a:ext uri="{9D8B030D-6E8A-4147-A177-3AD203B41FA5}">
-                      <a16:colId xmlns:a16="http://schemas.microsoft.com/office/drawing/2014/main" val="20001"/>
-                    </a:ext>
-                  </a:extLst>
-                </a:gridCol>
-                <a:gridCol w="5577741">
-                  <a:extLst>
-                    <a:ext uri="{9D8B030D-6E8A-4147-A177-3AD203B41FA5}">
-                      <a16:colId xmlns:a16="http://schemas.microsoft.com/office/drawing/2014/main" val="20002"/>
-                    </a:ext>
-                  </a:extLst>
-                </a:gridCol>
+                <a:gridCol w="1386689"/>
+                <a:gridCol w="4093409"/>
+                <a:gridCol w="5577741"/>
               </a:tblGrid>
               <a:tr h="321818">
                 <a:tc>
                   <a:txBody>
-                    <a:bodyPr/>
+                    <a:bodyPr wrap="square"/>
                     <a:lstStyle/>
                     <a:p>
                       <a:pPr algn="ctr"/>
@@ -9991,7 +9090,7 @@
                 </a:tc>
                 <a:tc>
                   <a:txBody>
-                    <a:bodyPr/>
+                    <a:bodyPr wrap="square"/>
                     <a:lstStyle/>
                     <a:p>
                       <a:pPr algn="ctr"/>
@@ -10014,7 +9113,7 @@
                 </a:tc>
                 <a:tc>
                   <a:txBody>
-                    <a:bodyPr/>
+                    <a:bodyPr wrap="square"/>
                     <a:lstStyle/>
                     <a:p>
                       <a:pPr algn="ctr"/>
@@ -10035,16 +9134,11 @@
                     </a:solidFill>
                   </a:tcPr>
                 </a:tc>
-                <a:extLst>
-                  <a:ext uri="{0D108BD9-81ED-4DB2-BD59-A6C34878D82A}">
-                    <a16:rowId xmlns:a16="http://schemas.microsoft.com/office/drawing/2014/main" val="10000"/>
-                  </a:ext>
-                </a:extLst>
               </a:tr>
               <a:tr h="321818">
                 <a:tc>
                   <a:txBody>
-                    <a:bodyPr/>
+                    <a:bodyPr wrap="square"/>
                     <a:lstStyle/>
                     <a:p>
                       <a:pPr algn="ctr"/>
@@ -10067,7 +9161,7 @@
                 </a:tc>
                 <a:tc>
                   <a:txBody>
-                    <a:bodyPr/>
+                    <a:bodyPr wrap="square"/>
                     <a:lstStyle/>
                     <a:p>
                       <a:pPr algn="l"/>
@@ -10129,7 +9223,7 @@
                 </a:tc>
                 <a:tc>
                   <a:txBody>
-                    <a:bodyPr/>
+                    <a:bodyPr wrap="square"/>
                     <a:lstStyle/>
                     <a:p>
                       <a:pPr algn="l"/>
@@ -10170,16 +9264,11 @@
                     </a:solidFill>
                   </a:tcPr>
                 </a:tc>
-                <a:extLst>
-                  <a:ext uri="{0D108BD9-81ED-4DB2-BD59-A6C34878D82A}">
-                    <a16:rowId xmlns:a16="http://schemas.microsoft.com/office/drawing/2014/main" val="10001"/>
-                  </a:ext>
-                </a:extLst>
               </a:tr>
               <a:tr h="321818">
                 <a:tc>
                   <a:txBody>
-                    <a:bodyPr/>
+                    <a:bodyPr wrap="square"/>
                     <a:lstStyle/>
                     <a:p>
                       <a:pPr algn="ctr"/>
@@ -10202,7 +9291,7 @@
                 </a:tc>
                 <a:tc>
                   <a:txBody>
-                    <a:bodyPr/>
+                    <a:bodyPr wrap="square"/>
                     <a:lstStyle/>
                     <a:p>
                       <a:pPr algn="l"/>
@@ -10264,7 +9353,7 @@
                 </a:tc>
                 <a:tc>
                   <a:txBody>
-                    <a:bodyPr/>
+                    <a:bodyPr wrap="square"/>
                     <a:lstStyle/>
                     <a:p>
                       <a:pPr algn="l"/>
@@ -10305,11 +9394,6 @@
                     </a:solidFill>
                   </a:tcPr>
                 </a:tc>
-                <a:extLst>
-                  <a:ext uri="{0D108BD9-81ED-4DB2-BD59-A6C34878D82A}">
-                    <a16:rowId xmlns:a16="http://schemas.microsoft.com/office/drawing/2014/main" val="10002"/>
-                  </a:ext>
-                </a:extLst>
               </a:tr>
             </a:tbl>
           </a:graphicData>
@@ -10332,7 +9416,7 @@
           <a:noFill/>
         </p:spPr>
         <p:txBody>
-          <a:bodyPr wrap="square" lIns="0" tIns="0" rIns="0" bIns="0">
+          <a:bodyPr wrap="square" lIns="0" rIns="0" tIns="0" bIns="0">
             <a:spAutoFit/>
           </a:bodyPr>
           <a:lstStyle/>
@@ -10390,7 +9474,6 @@
           <a:lstStyle/>
           <a:p>
             <a:pPr algn="ctr"/>
-            <a:endParaRPr/>
           </a:p>
         </p:txBody>
       </p:sp>
@@ -10403,7 +9486,7 @@
 </file>
 
 <file path=ppt/slides/slide19.xml><?xml version="1.0" encoding="utf-8"?>
-<p:sld xmlns:a="http://schemas.openxmlformats.org/drawingml/2006/main" xmlns:r="http://schemas.openxmlformats.org/officeDocument/2006/relationships" xmlns:p="http://schemas.openxmlformats.org/presentationml/2006/main">
+<p:sld xmlns:a="http://schemas.openxmlformats.org/drawingml/2006/main" xmlns:p="http://schemas.openxmlformats.org/presentationml/2006/main" xmlns:r="http://schemas.openxmlformats.org/officeDocument/2006/relationships">
   <p:cSld>
     <p:spTree>
       <p:nvGrpSpPr>
@@ -10411,14 +9494,7 @@
         <p:cNvGrpSpPr/>
         <p:nvPr/>
       </p:nvGrpSpPr>
-      <p:grpSpPr>
-        <a:xfrm>
-          <a:off x="0" y="0"/>
-          <a:ext cx="0" cy="0"/>
-          <a:chOff x="0" y="0"/>
-          <a:chExt cx="0" cy="0"/>
-        </a:xfrm>
-      </p:grpSpPr>
+      <p:grpSpPr/>
       <p:sp>
         <p:nvSpPr>
           <p:cNvPr id="2" name="TextBox 1"/>
@@ -10436,7 +9512,7 @@
           <a:noFill/>
         </p:spPr>
         <p:txBody>
-          <a:bodyPr wrap="square" lIns="0" tIns="0" rIns="0" bIns="0">
+          <a:bodyPr wrap="square" lIns="0" rIns="0" tIns="0" bIns="0">
             <a:spAutoFit/>
           </a:bodyPr>
           <a:lstStyle/>
@@ -10470,7 +9546,7 @@
           <a:noFill/>
         </p:spPr>
         <p:txBody>
-          <a:bodyPr wrap="square" lIns="0" tIns="0" rIns="0" bIns="0">
+          <a:bodyPr wrap="square" lIns="0" rIns="0" tIns="0" bIns="0">
             <a:spAutoFit/>
           </a:bodyPr>
           <a:lstStyle/>
@@ -10504,7 +9580,7 @@
           <a:noFill/>
         </p:spPr>
         <p:txBody>
-          <a:bodyPr wrap="square" lIns="0" tIns="0" rIns="0" bIns="0">
+          <a:bodyPr wrap="square" lIns="0" rIns="0" tIns="0" bIns="0">
             <a:spAutoFit/>
           </a:bodyPr>
           <a:lstStyle/>
@@ -10539,7 +9615,7 @@
           <a:noFill/>
         </p:spPr>
         <p:txBody>
-          <a:bodyPr wrap="square" lIns="0" tIns="0" rIns="0" bIns="0">
+          <a:bodyPr wrap="square" lIns="0" rIns="0" tIns="0" bIns="0">
             <a:spAutoFit/>
           </a:bodyPr>
           <a:lstStyle/>
@@ -10575,32 +9651,14 @@
                 <a:tableStyleId>{5C22544A-7EE6-4342-B048-85BDC9FD1C3A}</a:tableStyleId>
               </a:tblPr>
               <a:tblGrid>
-                <a:gridCol w="1349041">
-                  <a:extLst>
-                    <a:ext uri="{9D8B030D-6E8A-4147-A177-3AD203B41FA5}">
-                      <a16:colId xmlns:a16="http://schemas.microsoft.com/office/drawing/2014/main" val="20000"/>
-                    </a:ext>
-                  </a:extLst>
-                </a:gridCol>
-                <a:gridCol w="5149683">
-                  <a:extLst>
-                    <a:ext uri="{9D8B030D-6E8A-4147-A177-3AD203B41FA5}">
-                      <a16:colId xmlns:a16="http://schemas.microsoft.com/office/drawing/2014/main" val="20001"/>
-                    </a:ext>
-                  </a:extLst>
-                </a:gridCol>
-                <a:gridCol w="4559115">
-                  <a:extLst>
-                    <a:ext uri="{9D8B030D-6E8A-4147-A177-3AD203B41FA5}">
-                      <a16:colId xmlns:a16="http://schemas.microsoft.com/office/drawing/2014/main" val="20002"/>
-                    </a:ext>
-                  </a:extLst>
-                </a:gridCol>
+                <a:gridCol w="1349041"/>
+                <a:gridCol w="5149683"/>
+                <a:gridCol w="4559115"/>
               </a:tblGrid>
               <a:tr h="321818">
                 <a:tc>
                   <a:txBody>
-                    <a:bodyPr/>
+                    <a:bodyPr wrap="square"/>
                     <a:lstStyle/>
                     <a:p>
                       <a:pPr algn="ctr"/>
@@ -10623,7 +9681,7 @@
                 </a:tc>
                 <a:tc>
                   <a:txBody>
-                    <a:bodyPr/>
+                    <a:bodyPr wrap="square"/>
                     <a:lstStyle/>
                     <a:p>
                       <a:pPr algn="ctr"/>
@@ -10646,7 +9704,7 @@
                 </a:tc>
                 <a:tc>
                   <a:txBody>
-                    <a:bodyPr/>
+                    <a:bodyPr wrap="square"/>
                     <a:lstStyle/>
                     <a:p>
                       <a:pPr algn="ctr"/>
@@ -10667,16 +9725,11 @@
                     </a:solidFill>
                   </a:tcPr>
                 </a:tc>
-                <a:extLst>
-                  <a:ext uri="{0D108BD9-81ED-4DB2-BD59-A6C34878D82A}">
-                    <a16:rowId xmlns:a16="http://schemas.microsoft.com/office/drawing/2014/main" val="10000"/>
-                  </a:ext>
-                </a:extLst>
               </a:tr>
               <a:tr h="321818">
                 <a:tc>
                   <a:txBody>
-                    <a:bodyPr/>
+                    <a:bodyPr wrap="square"/>
                     <a:lstStyle/>
                     <a:p>
                       <a:pPr algn="ctr"/>
@@ -10699,7 +9752,7 @@
                 </a:tc>
                 <a:tc>
                   <a:txBody>
-                    <a:bodyPr/>
+                    <a:bodyPr wrap="square"/>
                     <a:lstStyle/>
                     <a:p>
                       <a:pPr algn="l"/>
@@ -10742,7 +9795,7 @@
                 </a:tc>
                 <a:tc>
                   <a:txBody>
-                    <a:bodyPr/>
+                    <a:bodyPr wrap="square"/>
                     <a:lstStyle/>
                     <a:p>
                       <a:pPr algn="l"/>
@@ -10783,16 +9836,11 @@
                     </a:solidFill>
                   </a:tcPr>
                 </a:tc>
-                <a:extLst>
-                  <a:ext uri="{0D108BD9-81ED-4DB2-BD59-A6C34878D82A}">
-                    <a16:rowId xmlns:a16="http://schemas.microsoft.com/office/drawing/2014/main" val="10001"/>
-                  </a:ext>
-                </a:extLst>
               </a:tr>
               <a:tr h="321818">
                 <a:tc>
                   <a:txBody>
-                    <a:bodyPr/>
+                    <a:bodyPr wrap="square"/>
                     <a:lstStyle/>
                     <a:p>
                       <a:pPr algn="ctr"/>
@@ -10815,7 +9863,7 @@
                 </a:tc>
                 <a:tc>
                   <a:txBody>
-                    <a:bodyPr/>
+                    <a:bodyPr wrap="square"/>
                     <a:lstStyle/>
                     <a:p>
                       <a:pPr algn="l"/>
@@ -10877,7 +9925,7 @@
                 </a:tc>
                 <a:tc>
                   <a:txBody>
-                    <a:bodyPr/>
+                    <a:bodyPr wrap="square"/>
                     <a:lstStyle/>
                     <a:p>
                       <a:pPr algn="l"/>
@@ -10918,11 +9966,6 @@
                     </a:solidFill>
                   </a:tcPr>
                 </a:tc>
-                <a:extLst>
-                  <a:ext uri="{0D108BD9-81ED-4DB2-BD59-A6C34878D82A}">
-                    <a16:rowId xmlns:a16="http://schemas.microsoft.com/office/drawing/2014/main" val="10002"/>
-                  </a:ext>
-                </a:extLst>
               </a:tr>
             </a:tbl>
           </a:graphicData>
@@ -10945,7 +9988,7 @@
           <a:noFill/>
         </p:spPr>
         <p:txBody>
-          <a:bodyPr wrap="square" lIns="0" tIns="0" rIns="0" bIns="0">
+          <a:bodyPr wrap="square" lIns="0" rIns="0" tIns="0" bIns="0">
             <a:spAutoFit/>
           </a:bodyPr>
           <a:lstStyle/>
@@ -11003,7 +10046,6 @@
           <a:lstStyle/>
           <a:p>
             <a:pPr algn="ctr"/>
-            <a:endParaRPr/>
           </a:p>
         </p:txBody>
       </p:sp>
@@ -11016,7 +10058,7 @@
 </file>
 
 <file path=ppt/slides/slide2.xml><?xml version="1.0" encoding="utf-8"?>
-<p:sld xmlns:a="http://schemas.openxmlformats.org/drawingml/2006/main" xmlns:r="http://schemas.openxmlformats.org/officeDocument/2006/relationships" xmlns:p="http://schemas.openxmlformats.org/presentationml/2006/main">
+<p:sld xmlns:a="http://schemas.openxmlformats.org/drawingml/2006/main" xmlns:p="http://schemas.openxmlformats.org/presentationml/2006/main" xmlns:r="http://schemas.openxmlformats.org/officeDocument/2006/relationships">
   <p:cSld>
     <p:spTree>
       <p:nvGrpSpPr>
@@ -11024,14 +10066,7 @@
         <p:cNvGrpSpPr/>
         <p:nvPr/>
       </p:nvGrpSpPr>
-      <p:grpSpPr>
-        <a:xfrm>
-          <a:off x="0" y="0"/>
-          <a:ext cx="0" cy="0"/>
-          <a:chOff x="0" y="0"/>
-          <a:chExt cx="0" cy="0"/>
-        </a:xfrm>
-      </p:grpSpPr>
+      <p:grpSpPr/>
       <p:sp>
         <p:nvSpPr>
           <p:cNvPr id="2" name="TextBox 1"/>
@@ -11049,7 +10084,7 @@
           <a:noFill/>
         </p:spPr>
         <p:txBody>
-          <a:bodyPr wrap="square" lIns="0" tIns="0" rIns="0" bIns="0">
+          <a:bodyPr wrap="square" lIns="0" rIns="0" tIns="0" bIns="0">
             <a:spAutoFit/>
           </a:bodyPr>
           <a:lstStyle/>
@@ -11083,7 +10118,7 @@
           <a:noFill/>
         </p:spPr>
         <p:txBody>
-          <a:bodyPr wrap="square" lIns="0" tIns="0" rIns="0" bIns="0">
+          <a:bodyPr wrap="square" lIns="0" rIns="0" tIns="0" bIns="0">
             <a:spAutoFit/>
           </a:bodyPr>
           <a:lstStyle/>
@@ -11117,7 +10152,7 @@
           <a:noFill/>
         </p:spPr>
         <p:txBody>
-          <a:bodyPr wrap="square" lIns="0" tIns="0" rIns="0" bIns="0">
+          <a:bodyPr wrap="square" lIns="0" rIns="0" tIns="0" bIns="0">
             <a:spAutoFit/>
           </a:bodyPr>
           <a:lstStyle/>
@@ -11152,7 +10187,7 @@
           <a:noFill/>
         </p:spPr>
         <p:txBody>
-          <a:bodyPr wrap="square" lIns="0" tIns="0" rIns="0" bIns="0">
+          <a:bodyPr wrap="square" lIns="0" rIns="0" tIns="0" bIns="0">
             <a:spAutoFit/>
           </a:bodyPr>
           <a:lstStyle/>
@@ -11188,25 +10223,13 @@
                 <a:tableStyleId>{5C22544A-7EE6-4342-B048-85BDC9FD1C3A}</a:tableStyleId>
               </a:tblPr>
               <a:tblGrid>
-                <a:gridCol w="1278081">
-                  <a:extLst>
-                    <a:ext uri="{9D8B030D-6E8A-4147-A177-3AD203B41FA5}">
-                      <a16:colId xmlns:a16="http://schemas.microsoft.com/office/drawing/2014/main" val="20000"/>
-                    </a:ext>
-                  </a:extLst>
-                </a:gridCol>
-                <a:gridCol w="9779758">
-                  <a:extLst>
-                    <a:ext uri="{9D8B030D-6E8A-4147-A177-3AD203B41FA5}">
-                      <a16:colId xmlns:a16="http://schemas.microsoft.com/office/drawing/2014/main" val="20001"/>
-                    </a:ext>
-                  </a:extLst>
-                </a:gridCol>
+                <a:gridCol w="1278081"/>
+                <a:gridCol w="9779758"/>
               </a:tblGrid>
               <a:tr h="321818">
                 <a:tc>
                   <a:txBody>
-                    <a:bodyPr/>
+                    <a:bodyPr wrap="square"/>
                     <a:lstStyle/>
                     <a:p>
                       <a:pPr algn="ctr"/>
@@ -11229,7 +10252,7 @@
                 </a:tc>
                 <a:tc>
                   <a:txBody>
-                    <a:bodyPr/>
+                    <a:bodyPr wrap="square"/>
                     <a:lstStyle/>
                     <a:p>
                       <a:pPr algn="ctr"/>
@@ -11250,16 +10273,11 @@
                     </a:solidFill>
                   </a:tcPr>
                 </a:tc>
-                <a:extLst>
-                  <a:ext uri="{0D108BD9-81ED-4DB2-BD59-A6C34878D82A}">
-                    <a16:rowId xmlns:a16="http://schemas.microsoft.com/office/drawing/2014/main" val="10000"/>
-                  </a:ext>
-                </a:extLst>
               </a:tr>
               <a:tr h="321818">
                 <a:tc>
                   <a:txBody>
-                    <a:bodyPr/>
+                    <a:bodyPr wrap="square"/>
                     <a:lstStyle/>
                     <a:p>
                       <a:pPr algn="ctr"/>
@@ -11282,7 +10300,7 @@
                 </a:tc>
                 <a:tc>
                   <a:txBody>
-                    <a:bodyPr/>
+                    <a:bodyPr wrap="square"/>
                     <a:lstStyle/>
                     <a:p>
                       <a:pPr algn="l"/>
@@ -11303,16 +10321,11 @@
                     </a:solidFill>
                   </a:tcPr>
                 </a:tc>
-                <a:extLst>
-                  <a:ext uri="{0D108BD9-81ED-4DB2-BD59-A6C34878D82A}">
-                    <a16:rowId xmlns:a16="http://schemas.microsoft.com/office/drawing/2014/main" val="10001"/>
-                  </a:ext>
-                </a:extLst>
               </a:tr>
               <a:tr h="321818">
                 <a:tc>
                   <a:txBody>
-                    <a:bodyPr/>
+                    <a:bodyPr wrap="square"/>
                     <a:lstStyle/>
                     <a:p>
                       <a:pPr algn="ctr"/>
@@ -11335,7 +10348,7 @@
                 </a:tc>
                 <a:tc>
                   <a:txBody>
-                    <a:bodyPr/>
+                    <a:bodyPr wrap="square"/>
                     <a:lstStyle/>
                     <a:p>
                       <a:pPr algn="l"/>
@@ -11356,16 +10369,11 @@
                     </a:solidFill>
                   </a:tcPr>
                 </a:tc>
-                <a:extLst>
-                  <a:ext uri="{0D108BD9-81ED-4DB2-BD59-A6C34878D82A}">
-                    <a16:rowId xmlns:a16="http://schemas.microsoft.com/office/drawing/2014/main" val="10002"/>
-                  </a:ext>
-                </a:extLst>
               </a:tr>
               <a:tr h="321818">
                 <a:tc>
                   <a:txBody>
-                    <a:bodyPr/>
+                    <a:bodyPr wrap="square"/>
                     <a:lstStyle/>
                     <a:p>
                       <a:pPr algn="ctr"/>
@@ -11388,7 +10396,7 @@
                 </a:tc>
                 <a:tc>
                   <a:txBody>
-                    <a:bodyPr/>
+                    <a:bodyPr wrap="square"/>
                     <a:lstStyle/>
                     <a:p>
                       <a:pPr algn="l"/>
@@ -11409,16 +10417,11 @@
                     </a:solidFill>
                   </a:tcPr>
                 </a:tc>
-                <a:extLst>
-                  <a:ext uri="{0D108BD9-81ED-4DB2-BD59-A6C34878D82A}">
-                    <a16:rowId xmlns:a16="http://schemas.microsoft.com/office/drawing/2014/main" val="10003"/>
-                  </a:ext>
-                </a:extLst>
               </a:tr>
               <a:tr h="321818">
                 <a:tc>
                   <a:txBody>
-                    <a:bodyPr/>
+                    <a:bodyPr wrap="square"/>
                     <a:lstStyle/>
                     <a:p>
                       <a:pPr algn="ctr"/>
@@ -11441,7 +10444,7 @@
                 </a:tc>
                 <a:tc>
                   <a:txBody>
-                    <a:bodyPr/>
+                    <a:bodyPr wrap="square"/>
                     <a:lstStyle/>
                     <a:p>
                       <a:pPr algn="l"/>
@@ -11462,16 +10465,11 @@
                     </a:solidFill>
                   </a:tcPr>
                 </a:tc>
-                <a:extLst>
-                  <a:ext uri="{0D108BD9-81ED-4DB2-BD59-A6C34878D82A}">
-                    <a16:rowId xmlns:a16="http://schemas.microsoft.com/office/drawing/2014/main" val="10004"/>
-                  </a:ext>
-                </a:extLst>
               </a:tr>
               <a:tr h="321818">
                 <a:tc>
                   <a:txBody>
-                    <a:bodyPr/>
+                    <a:bodyPr wrap="square"/>
                     <a:lstStyle/>
                     <a:p>
                       <a:pPr algn="ctr"/>
@@ -11494,7 +10492,7 @@
                 </a:tc>
                 <a:tc>
                   <a:txBody>
-                    <a:bodyPr/>
+                    <a:bodyPr wrap="square"/>
                     <a:lstStyle/>
                     <a:p>
                       <a:pPr algn="l"/>
@@ -11515,16 +10513,11 @@
                     </a:solidFill>
                   </a:tcPr>
                 </a:tc>
-                <a:extLst>
-                  <a:ext uri="{0D108BD9-81ED-4DB2-BD59-A6C34878D82A}">
-                    <a16:rowId xmlns:a16="http://schemas.microsoft.com/office/drawing/2014/main" val="10005"/>
-                  </a:ext>
-                </a:extLst>
               </a:tr>
               <a:tr h="321818">
                 <a:tc>
                   <a:txBody>
-                    <a:bodyPr/>
+                    <a:bodyPr wrap="square"/>
                     <a:lstStyle/>
                     <a:p>
                       <a:pPr algn="ctr"/>
@@ -11547,7 +10540,7 @@
                 </a:tc>
                 <a:tc>
                   <a:txBody>
-                    <a:bodyPr/>
+                    <a:bodyPr wrap="square"/>
                     <a:lstStyle/>
                     <a:p>
                       <a:pPr algn="l"/>
@@ -11568,11 +10561,6 @@
                     </a:solidFill>
                   </a:tcPr>
                 </a:tc>
-                <a:extLst>
-                  <a:ext uri="{0D108BD9-81ED-4DB2-BD59-A6C34878D82A}">
-                    <a16:rowId xmlns:a16="http://schemas.microsoft.com/office/drawing/2014/main" val="10006"/>
-                  </a:ext>
-                </a:extLst>
               </a:tr>
             </a:tbl>
           </a:graphicData>
@@ -11595,7 +10583,7 @@
           <a:noFill/>
         </p:spPr>
         <p:txBody>
-          <a:bodyPr wrap="square" lIns="0" tIns="0" rIns="0" bIns="0">
+          <a:bodyPr wrap="square" lIns="0" rIns="0" tIns="0" bIns="0">
             <a:spAutoFit/>
           </a:bodyPr>
           <a:lstStyle/>
@@ -11653,7 +10641,6 @@
           <a:lstStyle/>
           <a:p>
             <a:pPr algn="ctr"/>
-            <a:endParaRPr/>
           </a:p>
         </p:txBody>
       </p:sp>
@@ -11666,7 +10653,7 @@
 </file>
 
 <file path=ppt/slides/slide20.xml><?xml version="1.0" encoding="utf-8"?>
-<p:sld xmlns:a="http://schemas.openxmlformats.org/drawingml/2006/main" xmlns:r="http://schemas.openxmlformats.org/officeDocument/2006/relationships" xmlns:p="http://schemas.openxmlformats.org/presentationml/2006/main">
+<p:sld xmlns:a="http://schemas.openxmlformats.org/drawingml/2006/main" xmlns:p="http://schemas.openxmlformats.org/presentationml/2006/main" xmlns:r="http://schemas.openxmlformats.org/officeDocument/2006/relationships">
   <p:cSld>
     <p:spTree>
       <p:nvGrpSpPr>
@@ -11674,14 +10661,7 @@
         <p:cNvGrpSpPr/>
         <p:nvPr/>
       </p:nvGrpSpPr>
-      <p:grpSpPr>
-        <a:xfrm>
-          <a:off x="0" y="0"/>
-          <a:ext cx="0" cy="0"/>
-          <a:chOff x="0" y="0"/>
-          <a:chExt cx="0" cy="0"/>
-        </a:xfrm>
-      </p:grpSpPr>
+      <p:grpSpPr/>
       <p:sp>
         <p:nvSpPr>
           <p:cNvPr id="2" name="TextBox 1"/>
@@ -11699,7 +10679,7 @@
           <a:noFill/>
         </p:spPr>
         <p:txBody>
-          <a:bodyPr wrap="square" lIns="0" tIns="0" rIns="0" bIns="0">
+          <a:bodyPr wrap="square" lIns="0" rIns="0" tIns="0" bIns="0">
             <a:spAutoFit/>
           </a:bodyPr>
           <a:lstStyle/>
@@ -11733,7 +10713,7 @@
           <a:noFill/>
         </p:spPr>
         <p:txBody>
-          <a:bodyPr wrap="square" lIns="0" tIns="0" rIns="0" bIns="0">
+          <a:bodyPr wrap="square" lIns="0" rIns="0" tIns="0" bIns="0">
             <a:spAutoFit/>
           </a:bodyPr>
           <a:lstStyle/>
@@ -11767,7 +10747,7 @@
           <a:noFill/>
         </p:spPr>
         <p:txBody>
-          <a:bodyPr wrap="square" lIns="0" tIns="0" rIns="0" bIns="0">
+          <a:bodyPr wrap="square" lIns="0" rIns="0" tIns="0" bIns="0">
             <a:spAutoFit/>
           </a:bodyPr>
           <a:lstStyle/>
@@ -11802,7 +10782,7 @@
           <a:noFill/>
         </p:spPr>
         <p:txBody>
-          <a:bodyPr wrap="square" lIns="0" tIns="0" rIns="0" bIns="0">
+          <a:bodyPr wrap="square" lIns="0" rIns="0" tIns="0" bIns="0">
             <a:spAutoFit/>
           </a:bodyPr>
           <a:lstStyle/>
@@ -11836,7 +10816,7 @@
           <a:noFill/>
         </p:spPr>
         <p:txBody>
-          <a:bodyPr wrap="square" lIns="0" tIns="0" rIns="0" bIns="0">
+          <a:bodyPr wrap="square" lIns="0" rIns="0" tIns="0" bIns="0">
             <a:spAutoFit/>
           </a:bodyPr>
           <a:lstStyle/>
@@ -12056,7 +11036,7 @@
 </file>
 
 <file path=ppt/slides/slide3.xml><?xml version="1.0" encoding="utf-8"?>
-<p:sld xmlns:a="http://schemas.openxmlformats.org/drawingml/2006/main" xmlns:r="http://schemas.openxmlformats.org/officeDocument/2006/relationships" xmlns:p="http://schemas.openxmlformats.org/presentationml/2006/main">
+<p:sld xmlns:a="http://schemas.openxmlformats.org/drawingml/2006/main" xmlns:p="http://schemas.openxmlformats.org/presentationml/2006/main" xmlns:r="http://schemas.openxmlformats.org/officeDocument/2006/relationships">
   <p:cSld>
     <p:spTree>
       <p:nvGrpSpPr>
@@ -12064,14 +11044,7 @@
         <p:cNvGrpSpPr/>
         <p:nvPr/>
       </p:nvGrpSpPr>
-      <p:grpSpPr>
-        <a:xfrm>
-          <a:off x="0" y="0"/>
-          <a:ext cx="0" cy="0"/>
-          <a:chOff x="0" y="0"/>
-          <a:chExt cx="0" cy="0"/>
-        </a:xfrm>
-      </p:grpSpPr>
+      <p:grpSpPr/>
       <p:sp>
         <p:nvSpPr>
           <p:cNvPr id="2" name="TextBox 1"/>
@@ -12089,7 +11062,7 @@
           <a:noFill/>
         </p:spPr>
         <p:txBody>
-          <a:bodyPr wrap="square" lIns="0" tIns="0" rIns="0" bIns="0">
+          <a:bodyPr wrap="square" lIns="0" rIns="0" tIns="0" bIns="0">
             <a:spAutoFit/>
           </a:bodyPr>
           <a:lstStyle/>
@@ -12123,7 +11096,7 @@
           <a:noFill/>
         </p:spPr>
         <p:txBody>
-          <a:bodyPr wrap="square" lIns="0" tIns="0" rIns="0" bIns="0">
+          <a:bodyPr wrap="square" lIns="0" rIns="0" tIns="0" bIns="0">
             <a:spAutoFit/>
           </a:bodyPr>
           <a:lstStyle/>
@@ -12157,7 +11130,7 @@
           <a:noFill/>
         </p:spPr>
         <p:txBody>
-          <a:bodyPr wrap="square" lIns="0" tIns="0" rIns="0" bIns="0">
+          <a:bodyPr wrap="square" lIns="0" rIns="0" tIns="0" bIns="0">
             <a:spAutoFit/>
           </a:bodyPr>
           <a:lstStyle/>
@@ -12192,7 +11165,7 @@
           <a:noFill/>
         </p:spPr>
         <p:txBody>
-          <a:bodyPr wrap="square" lIns="0" tIns="0" rIns="0" bIns="0">
+          <a:bodyPr wrap="square" lIns="0" rIns="0" tIns="0" bIns="0">
             <a:spAutoFit/>
           </a:bodyPr>
           <a:lstStyle/>
@@ -12228,32 +11201,14 @@
                 <a:tableStyleId>{5C22544A-7EE6-4342-B048-85BDC9FD1C3A}</a:tableStyleId>
               </a:tblPr>
               <a:tblGrid>
-                <a:gridCol w="986328">
-                  <a:extLst>
-                    <a:ext uri="{9D8B030D-6E8A-4147-A177-3AD203B41FA5}">
-                      <a16:colId xmlns:a16="http://schemas.microsoft.com/office/drawing/2014/main" val="20000"/>
-                    </a:ext>
-                  </a:extLst>
-                </a:gridCol>
-                <a:gridCol w="2717883">
-                  <a:extLst>
-                    <a:ext uri="{9D8B030D-6E8A-4147-A177-3AD203B41FA5}">
-                      <a16:colId xmlns:a16="http://schemas.microsoft.com/office/drawing/2014/main" val="20001"/>
-                    </a:ext>
-                  </a:extLst>
-                </a:gridCol>
-                <a:gridCol w="7353628">
-                  <a:extLst>
-                    <a:ext uri="{9D8B030D-6E8A-4147-A177-3AD203B41FA5}">
-                      <a16:colId xmlns:a16="http://schemas.microsoft.com/office/drawing/2014/main" val="20002"/>
-                    </a:ext>
-                  </a:extLst>
-                </a:gridCol>
+                <a:gridCol w="986328"/>
+                <a:gridCol w="2717883"/>
+                <a:gridCol w="7353628"/>
               </a:tblGrid>
               <a:tr h="321818">
                 <a:tc>
                   <a:txBody>
-                    <a:bodyPr/>
+                    <a:bodyPr wrap="square"/>
                     <a:lstStyle/>
                     <a:p>
                       <a:pPr algn="ctr"/>
@@ -12276,7 +11231,7 @@
                 </a:tc>
                 <a:tc>
                   <a:txBody>
-                    <a:bodyPr/>
+                    <a:bodyPr wrap="square"/>
                     <a:lstStyle/>
                     <a:p>
                       <a:pPr algn="ctr"/>
@@ -12299,7 +11254,7 @@
                 </a:tc>
                 <a:tc>
                   <a:txBody>
-                    <a:bodyPr/>
+                    <a:bodyPr wrap="square"/>
                     <a:lstStyle/>
                     <a:p>
                       <a:pPr algn="ctr"/>
@@ -12320,16 +11275,11 @@
                     </a:solidFill>
                   </a:tcPr>
                 </a:tc>
-                <a:extLst>
-                  <a:ext uri="{0D108BD9-81ED-4DB2-BD59-A6C34878D82A}">
-                    <a16:rowId xmlns:a16="http://schemas.microsoft.com/office/drawing/2014/main" val="10000"/>
-                  </a:ext>
-                </a:extLst>
               </a:tr>
               <a:tr h="321818">
                 <a:tc>
                   <a:txBody>
-                    <a:bodyPr/>
+                    <a:bodyPr wrap="square"/>
                     <a:lstStyle/>
                     <a:p>
                       <a:pPr algn="ctr"/>
@@ -12352,7 +11302,7 @@
                 </a:tc>
                 <a:tc>
                   <a:txBody>
-                    <a:bodyPr/>
+                    <a:bodyPr wrap="square"/>
                     <a:lstStyle/>
                     <a:p>
                       <a:pPr algn="ctr"/>
@@ -12376,7 +11326,7 @@
                 </a:tc>
                 <a:tc>
                   <a:txBody>
-                    <a:bodyPr/>
+                    <a:bodyPr wrap="square"/>
                     <a:lstStyle/>
                     <a:p>
                       <a:pPr algn="l"/>
@@ -12397,16 +11347,11 @@
                     </a:solidFill>
                   </a:tcPr>
                 </a:tc>
-                <a:extLst>
-                  <a:ext uri="{0D108BD9-81ED-4DB2-BD59-A6C34878D82A}">
-                    <a16:rowId xmlns:a16="http://schemas.microsoft.com/office/drawing/2014/main" val="10001"/>
-                  </a:ext>
-                </a:extLst>
               </a:tr>
               <a:tr h="321818">
                 <a:tc>
                   <a:txBody>
-                    <a:bodyPr/>
+                    <a:bodyPr wrap="square"/>
                     <a:lstStyle/>
                     <a:p>
                       <a:pPr algn="ctr"/>
@@ -12429,7 +11374,7 @@
                 </a:tc>
                 <a:tc>
                   <a:txBody>
-                    <a:bodyPr/>
+                    <a:bodyPr wrap="square"/>
                     <a:lstStyle/>
                     <a:p>
                       <a:pPr algn="ctr"/>
@@ -12453,7 +11398,7 @@
                 </a:tc>
                 <a:tc>
                   <a:txBody>
-                    <a:bodyPr/>
+                    <a:bodyPr wrap="square"/>
                     <a:lstStyle/>
                     <a:p>
                       <a:pPr algn="l"/>
@@ -12474,16 +11419,11 @@
                     </a:solidFill>
                   </a:tcPr>
                 </a:tc>
-                <a:extLst>
-                  <a:ext uri="{0D108BD9-81ED-4DB2-BD59-A6C34878D82A}">
-                    <a16:rowId xmlns:a16="http://schemas.microsoft.com/office/drawing/2014/main" val="10002"/>
-                  </a:ext>
-                </a:extLst>
               </a:tr>
               <a:tr h="321818">
                 <a:tc>
                   <a:txBody>
-                    <a:bodyPr/>
+                    <a:bodyPr wrap="square"/>
                     <a:lstStyle/>
                     <a:p>
                       <a:pPr algn="ctr"/>
@@ -12506,7 +11446,7 @@
                 </a:tc>
                 <a:tc>
                   <a:txBody>
-                    <a:bodyPr/>
+                    <a:bodyPr wrap="square"/>
                     <a:lstStyle/>
                     <a:p>
                       <a:pPr algn="ctr"/>
@@ -12530,7 +11470,7 @@
                 </a:tc>
                 <a:tc>
                   <a:txBody>
-                    <a:bodyPr/>
+                    <a:bodyPr wrap="square"/>
                     <a:lstStyle/>
                     <a:p>
                       <a:pPr algn="l"/>
@@ -12551,16 +11491,11 @@
                     </a:solidFill>
                   </a:tcPr>
                 </a:tc>
-                <a:extLst>
-                  <a:ext uri="{0D108BD9-81ED-4DB2-BD59-A6C34878D82A}">
-                    <a16:rowId xmlns:a16="http://schemas.microsoft.com/office/drawing/2014/main" val="10003"/>
-                  </a:ext>
-                </a:extLst>
               </a:tr>
               <a:tr h="321818">
                 <a:tc>
                   <a:txBody>
-                    <a:bodyPr/>
+                    <a:bodyPr wrap="square"/>
                     <a:lstStyle/>
                     <a:p>
                       <a:pPr algn="ctr"/>
@@ -12583,7 +11518,7 @@
                 </a:tc>
                 <a:tc>
                   <a:txBody>
-                    <a:bodyPr/>
+                    <a:bodyPr wrap="square"/>
                     <a:lstStyle/>
                     <a:p>
                       <a:pPr algn="ctr"/>
@@ -12607,7 +11542,7 @@
                 </a:tc>
                 <a:tc>
                   <a:txBody>
-                    <a:bodyPr/>
+                    <a:bodyPr wrap="square"/>
                     <a:lstStyle/>
                     <a:p>
                       <a:pPr algn="l"/>
@@ -12628,16 +11563,11 @@
                     </a:solidFill>
                   </a:tcPr>
                 </a:tc>
-                <a:extLst>
-                  <a:ext uri="{0D108BD9-81ED-4DB2-BD59-A6C34878D82A}">
-                    <a16:rowId xmlns:a16="http://schemas.microsoft.com/office/drawing/2014/main" val="10004"/>
-                  </a:ext>
-                </a:extLst>
               </a:tr>
               <a:tr h="321818">
                 <a:tc>
                   <a:txBody>
-                    <a:bodyPr/>
+                    <a:bodyPr wrap="square"/>
                     <a:lstStyle/>
                     <a:p>
                       <a:pPr algn="ctr"/>
@@ -12660,7 +11590,7 @@
                 </a:tc>
                 <a:tc>
                   <a:txBody>
-                    <a:bodyPr/>
+                    <a:bodyPr wrap="square"/>
                     <a:lstStyle/>
                     <a:p>
                       <a:pPr algn="ctr"/>
@@ -12684,7 +11614,7 @@
                 </a:tc>
                 <a:tc>
                   <a:txBody>
-                    <a:bodyPr/>
+                    <a:bodyPr wrap="square"/>
                     <a:lstStyle/>
                     <a:p>
                       <a:pPr algn="l"/>
@@ -12705,11 +11635,6 @@
                     </a:solidFill>
                   </a:tcPr>
                 </a:tc>
-                <a:extLst>
-                  <a:ext uri="{0D108BD9-81ED-4DB2-BD59-A6C34878D82A}">
-                    <a16:rowId xmlns:a16="http://schemas.microsoft.com/office/drawing/2014/main" val="10005"/>
-                  </a:ext>
-                </a:extLst>
               </a:tr>
             </a:tbl>
           </a:graphicData>
@@ -12732,7 +11657,7 @@
           <a:noFill/>
         </p:spPr>
         <p:txBody>
-          <a:bodyPr wrap="square" lIns="0" tIns="0" rIns="0" bIns="0">
+          <a:bodyPr wrap="square" lIns="0" rIns="0" tIns="0" bIns="0">
             <a:spAutoFit/>
           </a:bodyPr>
           <a:lstStyle/>
@@ -12790,7 +11715,6 @@
           <a:lstStyle/>
           <a:p>
             <a:pPr algn="ctr"/>
-            <a:endParaRPr/>
           </a:p>
         </p:txBody>
       </p:sp>
@@ -12803,7 +11727,7 @@
 </file>
 
 <file path=ppt/slides/slide4.xml><?xml version="1.0" encoding="utf-8"?>
-<p:sld xmlns:a="http://schemas.openxmlformats.org/drawingml/2006/main" xmlns:r="http://schemas.openxmlformats.org/officeDocument/2006/relationships" xmlns:p="http://schemas.openxmlformats.org/presentationml/2006/main">
+<p:sld xmlns:a="http://schemas.openxmlformats.org/drawingml/2006/main" xmlns:p="http://schemas.openxmlformats.org/presentationml/2006/main" xmlns:r="http://schemas.openxmlformats.org/officeDocument/2006/relationships">
   <p:cSld>
     <p:spTree>
       <p:nvGrpSpPr>
@@ -12811,14 +11735,7 @@
         <p:cNvGrpSpPr/>
         <p:nvPr/>
       </p:nvGrpSpPr>
-      <p:grpSpPr>
-        <a:xfrm>
-          <a:off x="0" y="0"/>
-          <a:ext cx="0" cy="0"/>
-          <a:chOff x="0" y="0"/>
-          <a:chExt cx="0" cy="0"/>
-        </a:xfrm>
-      </p:grpSpPr>
+      <p:grpSpPr/>
       <p:sp>
         <p:nvSpPr>
           <p:cNvPr id="2" name="TextBox 1"/>
@@ -12836,7 +11753,7 @@
           <a:noFill/>
         </p:spPr>
         <p:txBody>
-          <a:bodyPr wrap="square" lIns="0" tIns="0" rIns="0" bIns="0">
+          <a:bodyPr wrap="square" lIns="0" rIns="0" tIns="0" bIns="0">
             <a:spAutoFit/>
           </a:bodyPr>
           <a:lstStyle/>
@@ -12870,7 +11787,7 @@
           <a:noFill/>
         </p:spPr>
         <p:txBody>
-          <a:bodyPr wrap="square" lIns="0" tIns="0" rIns="0" bIns="0">
+          <a:bodyPr wrap="square" lIns="0" rIns="0" tIns="0" bIns="0">
             <a:spAutoFit/>
           </a:bodyPr>
           <a:lstStyle/>
@@ -12904,7 +11821,7 @@
           <a:noFill/>
         </p:spPr>
         <p:txBody>
-          <a:bodyPr wrap="square" lIns="0" tIns="0" rIns="0" bIns="0">
+          <a:bodyPr wrap="square" lIns="0" rIns="0" tIns="0" bIns="0">
             <a:spAutoFit/>
           </a:bodyPr>
           <a:lstStyle/>
@@ -12939,7 +11856,7 @@
           <a:noFill/>
         </p:spPr>
         <p:txBody>
-          <a:bodyPr wrap="square" lIns="0" tIns="0" rIns="0" bIns="0">
+          <a:bodyPr wrap="square" lIns="0" rIns="0" tIns="0" bIns="0">
             <a:spAutoFit/>
           </a:bodyPr>
           <a:lstStyle/>
@@ -12973,7 +11890,7 @@
           <a:noFill/>
         </p:spPr>
         <p:txBody>
-          <a:bodyPr wrap="square" lIns="0" tIns="0" rIns="0" bIns="0">
+          <a:bodyPr wrap="square" lIns="0" rIns="0" tIns="0" bIns="0">
             <a:spAutoFit/>
           </a:bodyPr>
           <a:lstStyle/>
@@ -13007,7 +11924,7 @@
           <a:noFill/>
         </p:spPr>
         <p:txBody>
-          <a:bodyPr wrap="square" lIns="0" tIns="0" rIns="0" bIns="0">
+          <a:bodyPr wrap="square" lIns="0" rIns="0" tIns="0" bIns="0">
             <a:spAutoFit/>
           </a:bodyPr>
           <a:lstStyle/>
@@ -13098,7 +12015,7 @@
           <a:noFill/>
         </p:spPr>
         <p:txBody>
-          <a:bodyPr wrap="square" lIns="0" tIns="0" rIns="0" bIns="0">
+          <a:bodyPr wrap="square" lIns="0" rIns="0" tIns="0" bIns="0">
             <a:spAutoFit/>
           </a:bodyPr>
           <a:lstStyle/>
@@ -13132,7 +12049,7 @@
           <a:noFill/>
         </p:spPr>
         <p:txBody>
-          <a:bodyPr wrap="square" lIns="0" tIns="0" rIns="0" bIns="0">
+          <a:bodyPr wrap="square" lIns="0" rIns="0" tIns="0" bIns="0">
             <a:spAutoFit/>
           </a:bodyPr>
           <a:lstStyle/>
@@ -13230,7 +12147,7 @@
           <a:noFill/>
         </p:spPr>
         <p:txBody>
-          <a:bodyPr wrap="square" lIns="0" tIns="0" rIns="0" bIns="0">
+          <a:bodyPr wrap="square" lIns="0" rIns="0" tIns="0" bIns="0">
             <a:spAutoFit/>
           </a:bodyPr>
           <a:lstStyle/>
@@ -13265,7 +12182,7 @@
 </file>
 
 <file path=ppt/slides/slide5.xml><?xml version="1.0" encoding="utf-8"?>
-<p:sld xmlns:a="http://schemas.openxmlformats.org/drawingml/2006/main" xmlns:r="http://schemas.openxmlformats.org/officeDocument/2006/relationships" xmlns:p="http://schemas.openxmlformats.org/presentationml/2006/main">
+<p:sld xmlns:a="http://schemas.openxmlformats.org/drawingml/2006/main" xmlns:p="http://schemas.openxmlformats.org/presentationml/2006/main" xmlns:r="http://schemas.openxmlformats.org/officeDocument/2006/relationships">
   <p:cSld>
     <p:spTree>
       <p:nvGrpSpPr>
@@ -13273,14 +12190,7 @@
         <p:cNvGrpSpPr/>
         <p:nvPr/>
       </p:nvGrpSpPr>
-      <p:grpSpPr>
-        <a:xfrm>
-          <a:off x="0" y="0"/>
-          <a:ext cx="0" cy="0"/>
-          <a:chOff x="0" y="0"/>
-          <a:chExt cx="0" cy="0"/>
-        </a:xfrm>
-      </p:grpSpPr>
+      <p:grpSpPr/>
       <p:sp>
         <p:nvSpPr>
           <p:cNvPr id="2" name="TextBox 1"/>
@@ -13298,7 +12208,7 @@
           <a:noFill/>
         </p:spPr>
         <p:txBody>
-          <a:bodyPr wrap="square" lIns="0" tIns="0" rIns="0" bIns="0">
+          <a:bodyPr wrap="square" lIns="0" rIns="0" tIns="0" bIns="0">
             <a:spAutoFit/>
           </a:bodyPr>
           <a:lstStyle/>
@@ -13332,7 +12242,7 @@
           <a:noFill/>
         </p:spPr>
         <p:txBody>
-          <a:bodyPr wrap="square" lIns="0" tIns="0" rIns="0" bIns="0">
+          <a:bodyPr wrap="square" lIns="0" rIns="0" tIns="0" bIns="0">
             <a:spAutoFit/>
           </a:bodyPr>
           <a:lstStyle/>
@@ -13366,7 +12276,7 @@
           <a:noFill/>
         </p:spPr>
         <p:txBody>
-          <a:bodyPr wrap="square" lIns="0" tIns="0" rIns="0" bIns="0">
+          <a:bodyPr wrap="square" lIns="0" rIns="0" tIns="0" bIns="0">
             <a:spAutoFit/>
           </a:bodyPr>
           <a:lstStyle/>
@@ -13401,7 +12311,7 @@
           <a:noFill/>
         </p:spPr>
         <p:txBody>
-          <a:bodyPr wrap="square" lIns="0" tIns="0" rIns="0" bIns="0">
+          <a:bodyPr wrap="square" lIns="0" rIns="0" tIns="0" bIns="0">
             <a:spAutoFit/>
           </a:bodyPr>
           <a:lstStyle/>
@@ -13437,60 +12347,18 @@
                 <a:tableStyleId>{5C22544A-7EE6-4342-B048-85BDC9FD1C3A}</a:tableStyleId>
               </a:tblPr>
               <a:tblGrid>
-                <a:gridCol w="969544">
-                  <a:extLst>
-                    <a:ext uri="{9D8B030D-6E8A-4147-A177-3AD203B41FA5}">
-                      <a16:colId xmlns:a16="http://schemas.microsoft.com/office/drawing/2014/main" val="20000"/>
-                    </a:ext>
-                  </a:extLst>
-                </a:gridCol>
-                <a:gridCol w="4041211">
-                  <a:extLst>
-                    <a:ext uri="{9D8B030D-6E8A-4147-A177-3AD203B41FA5}">
-                      <a16:colId xmlns:a16="http://schemas.microsoft.com/office/drawing/2014/main" val="20001"/>
-                    </a:ext>
-                  </a:extLst>
-                </a:gridCol>
-                <a:gridCol w="969544">
-                  <a:extLst>
-                    <a:ext uri="{9D8B030D-6E8A-4147-A177-3AD203B41FA5}">
-                      <a16:colId xmlns:a16="http://schemas.microsoft.com/office/drawing/2014/main" val="20002"/>
-                    </a:ext>
-                  </a:extLst>
-                </a:gridCol>
-                <a:gridCol w="1442826">
-                  <a:extLst>
-                    <a:ext uri="{9D8B030D-6E8A-4147-A177-3AD203B41FA5}">
-                      <a16:colId xmlns:a16="http://schemas.microsoft.com/office/drawing/2014/main" val="20003"/>
-                    </a:ext>
-                  </a:extLst>
-                </a:gridCol>
-                <a:gridCol w="1547321">
-                  <a:extLst>
-                    <a:ext uri="{9D8B030D-6E8A-4147-A177-3AD203B41FA5}">
-                      <a16:colId xmlns:a16="http://schemas.microsoft.com/office/drawing/2014/main" val="20004"/>
-                    </a:ext>
-                  </a:extLst>
-                </a:gridCol>
-                <a:gridCol w="969544">
-                  <a:extLst>
-                    <a:ext uri="{9D8B030D-6E8A-4147-A177-3AD203B41FA5}">
-                      <a16:colId xmlns:a16="http://schemas.microsoft.com/office/drawing/2014/main" val="20005"/>
-                    </a:ext>
-                  </a:extLst>
-                </a:gridCol>
-                <a:gridCol w="1117849">
-                  <a:extLst>
-                    <a:ext uri="{9D8B030D-6E8A-4147-A177-3AD203B41FA5}">
-                      <a16:colId xmlns:a16="http://schemas.microsoft.com/office/drawing/2014/main" val="20006"/>
-                    </a:ext>
-                  </a:extLst>
-                </a:gridCol>
+                <a:gridCol w="969544"/>
+                <a:gridCol w="4041211"/>
+                <a:gridCol w="969544"/>
+                <a:gridCol w="1442826"/>
+                <a:gridCol w="1547321"/>
+                <a:gridCol w="969544"/>
+                <a:gridCol w="1117849"/>
               </a:tblGrid>
               <a:tr h="321818">
                 <a:tc>
                   <a:txBody>
-                    <a:bodyPr/>
+                    <a:bodyPr wrap="square"/>
                     <a:lstStyle/>
                     <a:p>
                       <a:pPr algn="ctr"/>
@@ -13513,7 +12381,7 @@
                 </a:tc>
                 <a:tc>
                   <a:txBody>
-                    <a:bodyPr/>
+                    <a:bodyPr wrap="square"/>
                     <a:lstStyle/>
                     <a:p>
                       <a:pPr algn="ctr"/>
@@ -13536,7 +12404,7 @@
                 </a:tc>
                 <a:tc>
                   <a:txBody>
-                    <a:bodyPr/>
+                    <a:bodyPr wrap="square"/>
                     <a:lstStyle/>
                     <a:p>
                       <a:pPr algn="ctr"/>
@@ -13559,7 +12427,7 @@
                 </a:tc>
                 <a:tc>
                   <a:txBody>
-                    <a:bodyPr/>
+                    <a:bodyPr wrap="square"/>
                     <a:lstStyle/>
                     <a:p>
                       <a:pPr algn="ctr"/>
@@ -13582,7 +12450,7 @@
                 </a:tc>
                 <a:tc>
                   <a:txBody>
-                    <a:bodyPr/>
+                    <a:bodyPr wrap="square"/>
                     <a:lstStyle/>
                     <a:p>
                       <a:pPr algn="ctr"/>
@@ -13605,7 +12473,7 @@
                 </a:tc>
                 <a:tc>
                   <a:txBody>
-                    <a:bodyPr/>
+                    <a:bodyPr wrap="square"/>
                     <a:lstStyle/>
                     <a:p>
                       <a:pPr algn="ctr"/>
@@ -13628,7 +12496,7 @@
                 </a:tc>
                 <a:tc>
                   <a:txBody>
-                    <a:bodyPr/>
+                    <a:bodyPr wrap="square"/>
                     <a:lstStyle/>
                     <a:p>
                       <a:pPr algn="ctr"/>
@@ -13649,16 +12517,11 @@
                     </a:solidFill>
                   </a:tcPr>
                 </a:tc>
-                <a:extLst>
-                  <a:ext uri="{0D108BD9-81ED-4DB2-BD59-A6C34878D82A}">
-                    <a16:rowId xmlns:a16="http://schemas.microsoft.com/office/drawing/2014/main" val="10000"/>
-                  </a:ext>
-                </a:extLst>
               </a:tr>
               <a:tr h="321818">
                 <a:tc>
                   <a:txBody>
-                    <a:bodyPr/>
+                    <a:bodyPr wrap="square"/>
                     <a:lstStyle/>
                     <a:p>
                       <a:pPr algn="ctr"/>
@@ -13681,7 +12544,7 @@
                 </a:tc>
                 <a:tc>
                   <a:txBody>
-                    <a:bodyPr/>
+                    <a:bodyPr wrap="square"/>
                     <a:lstStyle/>
                     <a:p>
                       <a:pPr algn="l"/>
@@ -13704,7 +12567,7 @@
                 </a:tc>
                 <a:tc>
                   <a:txBody>
-                    <a:bodyPr/>
+                    <a:bodyPr wrap="square"/>
                     <a:lstStyle/>
                     <a:p>
                       <a:pPr algn="ctr"/>
@@ -13727,7 +12590,7 @@
                 </a:tc>
                 <a:tc>
                   <a:txBody>
-                    <a:bodyPr/>
+                    <a:bodyPr wrap="square"/>
                     <a:lstStyle/>
                     <a:p>
                       <a:pPr algn="ctr"/>
@@ -13750,7 +12613,7 @@
                 </a:tc>
                 <a:tc>
                   <a:txBody>
-                    <a:bodyPr/>
+                    <a:bodyPr wrap="square"/>
                     <a:lstStyle/>
                     <a:p>
                       <a:pPr algn="ctr"/>
@@ -13773,7 +12636,7 @@
                 </a:tc>
                 <a:tc>
                   <a:txBody>
-                    <a:bodyPr/>
+                    <a:bodyPr wrap="square"/>
                     <a:lstStyle/>
                     <a:p>
                       <a:pPr algn="ctr"/>
@@ -13796,7 +12659,7 @@
                 </a:tc>
                 <a:tc>
                   <a:txBody>
-                    <a:bodyPr/>
+                    <a:bodyPr wrap="square"/>
                     <a:lstStyle/>
                     <a:p>
                       <a:pPr algn="ctr"/>
@@ -13818,16 +12681,11 @@
                     </a:solidFill>
                   </a:tcPr>
                 </a:tc>
-                <a:extLst>
-                  <a:ext uri="{0D108BD9-81ED-4DB2-BD59-A6C34878D82A}">
-                    <a16:rowId xmlns:a16="http://schemas.microsoft.com/office/drawing/2014/main" val="10001"/>
-                  </a:ext>
-                </a:extLst>
               </a:tr>
               <a:tr h="321818">
                 <a:tc>
                   <a:txBody>
-                    <a:bodyPr/>
+                    <a:bodyPr wrap="square"/>
                     <a:lstStyle/>
                     <a:p>
                       <a:pPr algn="ctr"/>
@@ -13850,7 +12708,7 @@
                 </a:tc>
                 <a:tc>
                   <a:txBody>
-                    <a:bodyPr/>
+                    <a:bodyPr wrap="square"/>
                     <a:lstStyle/>
                     <a:p>
                       <a:pPr algn="l"/>
@@ -13873,7 +12731,7 @@
                 </a:tc>
                 <a:tc>
                   <a:txBody>
-                    <a:bodyPr/>
+                    <a:bodyPr wrap="square"/>
                     <a:lstStyle/>
                     <a:p>
                       <a:pPr algn="ctr"/>
@@ -13896,7 +12754,7 @@
                 </a:tc>
                 <a:tc>
                   <a:txBody>
-                    <a:bodyPr/>
+                    <a:bodyPr wrap="square"/>
                     <a:lstStyle/>
                     <a:p>
                       <a:pPr algn="ctr"/>
@@ -13919,7 +12777,7 @@
                 </a:tc>
                 <a:tc>
                   <a:txBody>
-                    <a:bodyPr/>
+                    <a:bodyPr wrap="square"/>
                     <a:lstStyle/>
                     <a:p>
                       <a:pPr algn="ctr"/>
@@ -13942,7 +12800,7 @@
                 </a:tc>
                 <a:tc>
                   <a:txBody>
-                    <a:bodyPr/>
+                    <a:bodyPr wrap="square"/>
                     <a:lstStyle/>
                     <a:p>
                       <a:pPr algn="ctr"/>
@@ -13965,7 +12823,7 @@
                 </a:tc>
                 <a:tc>
                   <a:txBody>
-                    <a:bodyPr/>
+                    <a:bodyPr wrap="square"/>
                     <a:lstStyle/>
                     <a:p>
                       <a:pPr algn="ctr"/>
@@ -13987,16 +12845,11 @@
                     </a:solidFill>
                   </a:tcPr>
                 </a:tc>
-                <a:extLst>
-                  <a:ext uri="{0D108BD9-81ED-4DB2-BD59-A6C34878D82A}">
-                    <a16:rowId xmlns:a16="http://schemas.microsoft.com/office/drawing/2014/main" val="10002"/>
-                  </a:ext>
-                </a:extLst>
               </a:tr>
               <a:tr h="321818">
                 <a:tc>
                   <a:txBody>
-                    <a:bodyPr/>
+                    <a:bodyPr wrap="square"/>
                     <a:lstStyle/>
                     <a:p>
                       <a:pPr algn="ctr"/>
@@ -14019,7 +12872,7 @@
                 </a:tc>
                 <a:tc>
                   <a:txBody>
-                    <a:bodyPr/>
+                    <a:bodyPr wrap="square"/>
                     <a:lstStyle/>
                     <a:p>
                       <a:pPr algn="l"/>
@@ -14042,7 +12895,7 @@
                 </a:tc>
                 <a:tc>
                   <a:txBody>
-                    <a:bodyPr/>
+                    <a:bodyPr wrap="square"/>
                     <a:lstStyle/>
                     <a:p>
                       <a:pPr algn="ctr"/>
@@ -14065,7 +12918,7 @@
                 </a:tc>
                 <a:tc>
                   <a:txBody>
-                    <a:bodyPr/>
+                    <a:bodyPr wrap="square"/>
                     <a:lstStyle/>
                     <a:p>
                       <a:pPr algn="ctr"/>
@@ -14088,7 +12941,7 @@
                 </a:tc>
                 <a:tc>
                   <a:txBody>
-                    <a:bodyPr/>
+                    <a:bodyPr wrap="square"/>
                     <a:lstStyle/>
                     <a:p>
                       <a:pPr algn="ctr"/>
@@ -14111,7 +12964,7 @@
                 </a:tc>
                 <a:tc>
                   <a:txBody>
-                    <a:bodyPr/>
+                    <a:bodyPr wrap="square"/>
                     <a:lstStyle/>
                     <a:p>
                       <a:pPr algn="ctr"/>
@@ -14134,7 +12987,7 @@
                 </a:tc>
                 <a:tc>
                   <a:txBody>
-                    <a:bodyPr/>
+                    <a:bodyPr wrap="square"/>
                     <a:lstStyle/>
                     <a:p>
                       <a:pPr algn="ctr"/>
@@ -14156,16 +13009,11 @@
                     </a:solidFill>
                   </a:tcPr>
                 </a:tc>
-                <a:extLst>
-                  <a:ext uri="{0D108BD9-81ED-4DB2-BD59-A6C34878D82A}">
-                    <a16:rowId xmlns:a16="http://schemas.microsoft.com/office/drawing/2014/main" val="10003"/>
-                  </a:ext>
-                </a:extLst>
               </a:tr>
               <a:tr h="321818">
                 <a:tc>
                   <a:txBody>
-                    <a:bodyPr/>
+                    <a:bodyPr wrap="square"/>
                     <a:lstStyle/>
                     <a:p>
                       <a:pPr algn="ctr"/>
@@ -14188,7 +13036,7 @@
                 </a:tc>
                 <a:tc>
                   <a:txBody>
-                    <a:bodyPr/>
+                    <a:bodyPr wrap="square"/>
                     <a:lstStyle/>
                     <a:p>
                       <a:pPr algn="l"/>
@@ -14211,7 +13059,7 @@
                 </a:tc>
                 <a:tc>
                   <a:txBody>
-                    <a:bodyPr/>
+                    <a:bodyPr wrap="square"/>
                     <a:lstStyle/>
                     <a:p>
                       <a:pPr algn="ctr"/>
@@ -14234,7 +13082,7 @@
                 </a:tc>
                 <a:tc>
                   <a:txBody>
-                    <a:bodyPr/>
+                    <a:bodyPr wrap="square"/>
                     <a:lstStyle/>
                     <a:p>
                       <a:pPr algn="ctr"/>
@@ -14257,7 +13105,7 @@
                 </a:tc>
                 <a:tc>
                   <a:txBody>
-                    <a:bodyPr/>
+                    <a:bodyPr wrap="square"/>
                     <a:lstStyle/>
                     <a:p>
                       <a:pPr algn="ctr"/>
@@ -14280,7 +13128,7 @@
                 </a:tc>
                 <a:tc>
                   <a:txBody>
-                    <a:bodyPr/>
+                    <a:bodyPr wrap="square"/>
                     <a:lstStyle/>
                     <a:p>
                       <a:pPr algn="ctr"/>
@@ -14303,7 +13151,7 @@
                 </a:tc>
                 <a:tc>
                   <a:txBody>
-                    <a:bodyPr/>
+                    <a:bodyPr wrap="square"/>
                     <a:lstStyle/>
                     <a:p>
                       <a:pPr algn="ctr"/>
@@ -14325,16 +13173,11 @@
                     </a:solidFill>
                   </a:tcPr>
                 </a:tc>
-                <a:extLst>
-                  <a:ext uri="{0D108BD9-81ED-4DB2-BD59-A6C34878D82A}">
-                    <a16:rowId xmlns:a16="http://schemas.microsoft.com/office/drawing/2014/main" val="10004"/>
-                  </a:ext>
-                </a:extLst>
               </a:tr>
               <a:tr h="321818">
                 <a:tc>
                   <a:txBody>
-                    <a:bodyPr/>
+                    <a:bodyPr wrap="square"/>
                     <a:lstStyle/>
                     <a:p>
                       <a:pPr algn="ctr"/>
@@ -14357,7 +13200,7 @@
                 </a:tc>
                 <a:tc>
                   <a:txBody>
-                    <a:bodyPr/>
+                    <a:bodyPr wrap="square"/>
                     <a:lstStyle/>
                     <a:p>
                       <a:pPr algn="l"/>
@@ -14380,7 +13223,7 @@
                 </a:tc>
                 <a:tc>
                   <a:txBody>
-                    <a:bodyPr/>
+                    <a:bodyPr wrap="square"/>
                     <a:lstStyle/>
                     <a:p>
                       <a:pPr algn="ctr"/>
@@ -14403,7 +13246,7 @@
                 </a:tc>
                 <a:tc>
                   <a:txBody>
-                    <a:bodyPr/>
+                    <a:bodyPr wrap="square"/>
                     <a:lstStyle/>
                     <a:p>
                       <a:pPr algn="ctr"/>
@@ -14426,7 +13269,7 @@
                 </a:tc>
                 <a:tc>
                   <a:txBody>
-                    <a:bodyPr/>
+                    <a:bodyPr wrap="square"/>
                     <a:lstStyle/>
                     <a:p>
                       <a:pPr algn="ctr"/>
@@ -14449,7 +13292,7 @@
                 </a:tc>
                 <a:tc>
                   <a:txBody>
-                    <a:bodyPr/>
+                    <a:bodyPr wrap="square"/>
                     <a:lstStyle/>
                     <a:p>
                       <a:pPr algn="ctr"/>
@@ -14472,7 +13315,7 @@
                 </a:tc>
                 <a:tc>
                   <a:txBody>
-                    <a:bodyPr/>
+                    <a:bodyPr wrap="square"/>
                     <a:lstStyle/>
                     <a:p>
                       <a:pPr algn="ctr"/>
@@ -14494,16 +13337,11 @@
                     </a:solidFill>
                   </a:tcPr>
                 </a:tc>
-                <a:extLst>
-                  <a:ext uri="{0D108BD9-81ED-4DB2-BD59-A6C34878D82A}">
-                    <a16:rowId xmlns:a16="http://schemas.microsoft.com/office/drawing/2014/main" val="10005"/>
-                  </a:ext>
-                </a:extLst>
               </a:tr>
               <a:tr h="321818">
                 <a:tc>
                   <a:txBody>
-                    <a:bodyPr/>
+                    <a:bodyPr wrap="square"/>
                     <a:lstStyle/>
                     <a:p>
                       <a:pPr algn="ctr"/>
@@ -14526,7 +13364,7 @@
                 </a:tc>
                 <a:tc>
                   <a:txBody>
-                    <a:bodyPr/>
+                    <a:bodyPr wrap="square"/>
                     <a:lstStyle/>
                     <a:p>
                       <a:pPr algn="l"/>
@@ -14549,7 +13387,7 @@
                 </a:tc>
                 <a:tc>
                   <a:txBody>
-                    <a:bodyPr/>
+                    <a:bodyPr wrap="square"/>
                     <a:lstStyle/>
                     <a:p>
                       <a:pPr algn="ctr"/>
@@ -14572,7 +13410,7 @@
                 </a:tc>
                 <a:tc>
                   <a:txBody>
-                    <a:bodyPr/>
+                    <a:bodyPr wrap="square"/>
                     <a:lstStyle/>
                     <a:p>
                       <a:pPr algn="ctr"/>
@@ -14595,7 +13433,7 @@
                 </a:tc>
                 <a:tc>
                   <a:txBody>
-                    <a:bodyPr/>
+                    <a:bodyPr wrap="square"/>
                     <a:lstStyle/>
                     <a:p>
                       <a:pPr algn="ctr"/>
@@ -14618,7 +13456,7 @@
                 </a:tc>
                 <a:tc>
                   <a:txBody>
-                    <a:bodyPr/>
+                    <a:bodyPr wrap="square"/>
                     <a:lstStyle/>
                     <a:p>
                       <a:pPr algn="ctr"/>
@@ -14641,7 +13479,7 @@
                 </a:tc>
                 <a:tc>
                   <a:txBody>
-                    <a:bodyPr/>
+                    <a:bodyPr wrap="square"/>
                     <a:lstStyle/>
                     <a:p>
                       <a:pPr algn="ctr"/>
@@ -14663,16 +13501,11 @@
                     </a:solidFill>
                   </a:tcPr>
                 </a:tc>
-                <a:extLst>
-                  <a:ext uri="{0D108BD9-81ED-4DB2-BD59-A6C34878D82A}">
-                    <a16:rowId xmlns:a16="http://schemas.microsoft.com/office/drawing/2014/main" val="10006"/>
-                  </a:ext>
-                </a:extLst>
               </a:tr>
               <a:tr h="321818">
                 <a:tc>
                   <a:txBody>
-                    <a:bodyPr/>
+                    <a:bodyPr wrap="square"/>
                     <a:lstStyle/>
                     <a:p>
                       <a:pPr algn="ctr"/>
@@ -14695,7 +13528,7 @@
                 </a:tc>
                 <a:tc>
                   <a:txBody>
-                    <a:bodyPr/>
+                    <a:bodyPr wrap="square"/>
                     <a:lstStyle/>
                     <a:p>
                       <a:pPr algn="l"/>
@@ -14718,7 +13551,7 @@
                 </a:tc>
                 <a:tc>
                   <a:txBody>
-                    <a:bodyPr/>
+                    <a:bodyPr wrap="square"/>
                     <a:lstStyle/>
                     <a:p>
                       <a:pPr algn="ctr"/>
@@ -14741,7 +13574,7 @@
                 </a:tc>
                 <a:tc>
                   <a:txBody>
-                    <a:bodyPr/>
+                    <a:bodyPr wrap="square"/>
                     <a:lstStyle/>
                     <a:p>
                       <a:pPr algn="ctr"/>
@@ -14764,7 +13597,7 @@
                 </a:tc>
                 <a:tc>
                   <a:txBody>
-                    <a:bodyPr/>
+                    <a:bodyPr wrap="square"/>
                     <a:lstStyle/>
                     <a:p>
                       <a:pPr algn="ctr"/>
@@ -14787,7 +13620,7 @@
                 </a:tc>
                 <a:tc>
                   <a:txBody>
-                    <a:bodyPr/>
+                    <a:bodyPr wrap="square"/>
                     <a:lstStyle/>
                     <a:p>
                       <a:pPr algn="ctr"/>
@@ -14810,7 +13643,7 @@
                 </a:tc>
                 <a:tc>
                   <a:txBody>
-                    <a:bodyPr/>
+                    <a:bodyPr wrap="square"/>
                     <a:lstStyle/>
                     <a:p>
                       <a:pPr algn="ctr"/>
@@ -14832,16 +13665,11 @@
                     </a:solidFill>
                   </a:tcPr>
                 </a:tc>
-                <a:extLst>
-                  <a:ext uri="{0D108BD9-81ED-4DB2-BD59-A6C34878D82A}">
-                    <a16:rowId xmlns:a16="http://schemas.microsoft.com/office/drawing/2014/main" val="10007"/>
-                  </a:ext>
-                </a:extLst>
               </a:tr>
               <a:tr h="321818">
                 <a:tc>
                   <a:txBody>
-                    <a:bodyPr/>
+                    <a:bodyPr wrap="square"/>
                     <a:lstStyle/>
                     <a:p>
                       <a:pPr algn="ctr"/>
@@ -14864,7 +13692,7 @@
                 </a:tc>
                 <a:tc>
                   <a:txBody>
-                    <a:bodyPr/>
+                    <a:bodyPr wrap="square"/>
                     <a:lstStyle/>
                     <a:p>
                       <a:pPr algn="l"/>
@@ -14887,7 +13715,7 @@
                 </a:tc>
                 <a:tc>
                   <a:txBody>
-                    <a:bodyPr/>
+                    <a:bodyPr wrap="square"/>
                     <a:lstStyle/>
                     <a:p>
                       <a:pPr algn="ctr"/>
@@ -14910,7 +13738,7 @@
                 </a:tc>
                 <a:tc>
                   <a:txBody>
-                    <a:bodyPr/>
+                    <a:bodyPr wrap="square"/>
                     <a:lstStyle/>
                     <a:p>
                       <a:pPr algn="ctr"/>
@@ -14933,7 +13761,7 @@
                 </a:tc>
                 <a:tc>
                   <a:txBody>
-                    <a:bodyPr/>
+                    <a:bodyPr wrap="square"/>
                     <a:lstStyle/>
                     <a:p>
                       <a:pPr algn="ctr"/>
@@ -14956,7 +13784,7 @@
                 </a:tc>
                 <a:tc>
                   <a:txBody>
-                    <a:bodyPr/>
+                    <a:bodyPr wrap="square"/>
                     <a:lstStyle/>
                     <a:p>
                       <a:pPr algn="ctr"/>
@@ -14979,7 +13807,7 @@
                 </a:tc>
                 <a:tc>
                   <a:txBody>
-                    <a:bodyPr/>
+                    <a:bodyPr wrap="square"/>
                     <a:lstStyle/>
                     <a:p>
                       <a:pPr algn="ctr"/>
@@ -15001,11 +13829,6 @@
                     </a:solidFill>
                   </a:tcPr>
                 </a:tc>
-                <a:extLst>
-                  <a:ext uri="{0D108BD9-81ED-4DB2-BD59-A6C34878D82A}">
-                    <a16:rowId xmlns:a16="http://schemas.microsoft.com/office/drawing/2014/main" val="10008"/>
-                  </a:ext>
-                </a:extLst>
               </a:tr>
             </a:tbl>
           </a:graphicData>
@@ -15020,7 +13843,7 @@
 </file>
 
 <file path=ppt/slides/slide6.xml><?xml version="1.0" encoding="utf-8"?>
-<p:sld xmlns:a="http://schemas.openxmlformats.org/drawingml/2006/main" xmlns:r="http://schemas.openxmlformats.org/officeDocument/2006/relationships" xmlns:p="http://schemas.openxmlformats.org/presentationml/2006/main">
+<p:sld xmlns:a="http://schemas.openxmlformats.org/drawingml/2006/main" xmlns:p="http://schemas.openxmlformats.org/presentationml/2006/main" xmlns:r="http://schemas.openxmlformats.org/officeDocument/2006/relationships">
   <p:cSld>
     <p:spTree>
       <p:nvGrpSpPr>
@@ -15028,14 +13851,7 @@
         <p:cNvGrpSpPr/>
         <p:nvPr/>
       </p:nvGrpSpPr>
-      <p:grpSpPr>
-        <a:xfrm>
-          <a:off x="0" y="0"/>
-          <a:ext cx="0" cy="0"/>
-          <a:chOff x="0" y="0"/>
-          <a:chExt cx="0" cy="0"/>
-        </a:xfrm>
-      </p:grpSpPr>
+      <p:grpSpPr/>
       <p:sp>
         <p:nvSpPr>
           <p:cNvPr id="2" name="TextBox 1"/>
@@ -15053,7 +13869,7 @@
           <a:noFill/>
         </p:spPr>
         <p:txBody>
-          <a:bodyPr wrap="square" lIns="0" tIns="0" rIns="0" bIns="0">
+          <a:bodyPr wrap="square" lIns="0" rIns="0" tIns="0" bIns="0">
             <a:spAutoFit/>
           </a:bodyPr>
           <a:lstStyle/>
@@ -15087,7 +13903,7 @@
           <a:noFill/>
         </p:spPr>
         <p:txBody>
-          <a:bodyPr wrap="square" lIns="0" tIns="0" rIns="0" bIns="0">
+          <a:bodyPr wrap="square" lIns="0" rIns="0" tIns="0" bIns="0">
             <a:spAutoFit/>
           </a:bodyPr>
           <a:lstStyle/>
@@ -15121,7 +13937,7 @@
           <a:noFill/>
         </p:spPr>
         <p:txBody>
-          <a:bodyPr wrap="square" lIns="0" tIns="0" rIns="0" bIns="0">
+          <a:bodyPr wrap="square" lIns="0" rIns="0" tIns="0" bIns="0">
             <a:spAutoFit/>
           </a:bodyPr>
           <a:lstStyle/>
@@ -15156,7 +13972,7 @@
           <a:noFill/>
         </p:spPr>
         <p:txBody>
-          <a:bodyPr wrap="square" lIns="0" tIns="0" rIns="0" bIns="0">
+          <a:bodyPr wrap="square" lIns="0" rIns="0" tIns="0" bIns="0">
             <a:spAutoFit/>
           </a:bodyPr>
           <a:lstStyle/>
@@ -15192,60 +14008,18 @@
                 <a:tableStyleId>{5C22544A-7EE6-4342-B048-85BDC9FD1C3A}</a:tableStyleId>
               </a:tblPr>
               <a:tblGrid>
-                <a:gridCol w="960646">
-                  <a:extLst>
-                    <a:ext uri="{9D8B030D-6E8A-4147-A177-3AD203B41FA5}">
-                      <a16:colId xmlns:a16="http://schemas.microsoft.com/office/drawing/2014/main" val="20000"/>
-                    </a:ext>
-                  </a:extLst>
-                </a:gridCol>
-                <a:gridCol w="4063535">
-                  <a:extLst>
-                    <a:ext uri="{9D8B030D-6E8A-4147-A177-3AD203B41FA5}">
-                      <a16:colId xmlns:a16="http://schemas.microsoft.com/office/drawing/2014/main" val="20001"/>
-                    </a:ext>
-                  </a:extLst>
-                </a:gridCol>
-                <a:gridCol w="960646">
-                  <a:extLst>
-                    <a:ext uri="{9D8B030D-6E8A-4147-A177-3AD203B41FA5}">
-                      <a16:colId xmlns:a16="http://schemas.microsoft.com/office/drawing/2014/main" val="20002"/>
-                    </a:ext>
-                  </a:extLst>
-                </a:gridCol>
-                <a:gridCol w="1497007">
-                  <a:extLst>
-                    <a:ext uri="{9D8B030D-6E8A-4147-A177-3AD203B41FA5}">
-                      <a16:colId xmlns:a16="http://schemas.microsoft.com/office/drawing/2014/main" val="20003"/>
-                    </a:ext>
-                  </a:extLst>
-                </a:gridCol>
-                <a:gridCol w="1611484">
-                  <a:extLst>
-                    <a:ext uri="{9D8B030D-6E8A-4147-A177-3AD203B41FA5}">
-                      <a16:colId xmlns:a16="http://schemas.microsoft.com/office/drawing/2014/main" val="20004"/>
-                    </a:ext>
-                  </a:extLst>
-                </a:gridCol>
-                <a:gridCol w="960646">
-                  <a:extLst>
-                    <a:ext uri="{9D8B030D-6E8A-4147-A177-3AD203B41FA5}">
-                      <a16:colId xmlns:a16="http://schemas.microsoft.com/office/drawing/2014/main" val="20005"/>
-                    </a:ext>
-                  </a:extLst>
-                </a:gridCol>
-                <a:gridCol w="1003875">
-                  <a:extLst>
-                    <a:ext uri="{9D8B030D-6E8A-4147-A177-3AD203B41FA5}">
-                      <a16:colId xmlns:a16="http://schemas.microsoft.com/office/drawing/2014/main" val="20006"/>
-                    </a:ext>
-                  </a:extLst>
-                </a:gridCol>
+                <a:gridCol w="960646"/>
+                <a:gridCol w="4063535"/>
+                <a:gridCol w="960646"/>
+                <a:gridCol w="1497007"/>
+                <a:gridCol w="1611484"/>
+                <a:gridCol w="960646"/>
+                <a:gridCol w="1003875"/>
               </a:tblGrid>
               <a:tr h="321818">
                 <a:tc>
                   <a:txBody>
-                    <a:bodyPr/>
+                    <a:bodyPr wrap="square"/>
                     <a:lstStyle/>
                     <a:p>
                       <a:pPr algn="ctr"/>
@@ -15268,7 +14042,7 @@
                 </a:tc>
                 <a:tc>
                   <a:txBody>
-                    <a:bodyPr/>
+                    <a:bodyPr wrap="square"/>
                     <a:lstStyle/>
                     <a:p>
                       <a:pPr algn="ctr"/>
@@ -15291,7 +14065,7 @@
                 </a:tc>
                 <a:tc>
                   <a:txBody>
-                    <a:bodyPr/>
+                    <a:bodyPr wrap="square"/>
                     <a:lstStyle/>
                     <a:p>
                       <a:pPr algn="ctr"/>
@@ -15314,7 +14088,7 @@
                 </a:tc>
                 <a:tc>
                   <a:txBody>
-                    <a:bodyPr/>
+                    <a:bodyPr wrap="square"/>
                     <a:lstStyle/>
                     <a:p>
                       <a:pPr algn="ctr"/>
@@ -15337,7 +14111,7 @@
                 </a:tc>
                 <a:tc>
                   <a:txBody>
-                    <a:bodyPr/>
+                    <a:bodyPr wrap="square"/>
                     <a:lstStyle/>
                     <a:p>
                       <a:pPr algn="ctr"/>
@@ -15360,7 +14134,7 @@
                 </a:tc>
                 <a:tc>
                   <a:txBody>
-                    <a:bodyPr/>
+                    <a:bodyPr wrap="square"/>
                     <a:lstStyle/>
                     <a:p>
                       <a:pPr algn="ctr"/>
@@ -15383,7 +14157,7 @@
                 </a:tc>
                 <a:tc>
                   <a:txBody>
-                    <a:bodyPr/>
+                    <a:bodyPr wrap="square"/>
                     <a:lstStyle/>
                     <a:p>
                       <a:pPr algn="ctr"/>
@@ -15404,16 +14178,11 @@
                     </a:solidFill>
                   </a:tcPr>
                 </a:tc>
-                <a:extLst>
-                  <a:ext uri="{0D108BD9-81ED-4DB2-BD59-A6C34878D82A}">
-                    <a16:rowId xmlns:a16="http://schemas.microsoft.com/office/drawing/2014/main" val="10000"/>
-                  </a:ext>
-                </a:extLst>
               </a:tr>
               <a:tr h="321818">
                 <a:tc>
                   <a:txBody>
-                    <a:bodyPr/>
+                    <a:bodyPr wrap="square"/>
                     <a:lstStyle/>
                     <a:p>
                       <a:pPr algn="ctr"/>
@@ -15436,7 +14205,7 @@
                 </a:tc>
                 <a:tc>
                   <a:txBody>
-                    <a:bodyPr/>
+                    <a:bodyPr wrap="square"/>
                     <a:lstStyle/>
                     <a:p>
                       <a:pPr algn="l"/>
@@ -15459,7 +14228,7 @@
                 </a:tc>
                 <a:tc>
                   <a:txBody>
-                    <a:bodyPr/>
+                    <a:bodyPr wrap="square"/>
                     <a:lstStyle/>
                     <a:p>
                       <a:pPr algn="ctr"/>
@@ -15482,7 +14251,7 @@
                 </a:tc>
                 <a:tc>
                   <a:txBody>
-                    <a:bodyPr/>
+                    <a:bodyPr wrap="square"/>
                     <a:lstStyle/>
                     <a:p>
                       <a:pPr algn="ctr"/>
@@ -15505,7 +14274,7 @@
                 </a:tc>
                 <a:tc>
                   <a:txBody>
-                    <a:bodyPr/>
+                    <a:bodyPr wrap="square"/>
                     <a:lstStyle/>
                     <a:p>
                       <a:pPr algn="ctr"/>
@@ -15528,7 +14297,7 @@
                 </a:tc>
                 <a:tc>
                   <a:txBody>
-                    <a:bodyPr/>
+                    <a:bodyPr wrap="square"/>
                     <a:lstStyle/>
                     <a:p>
                       <a:pPr algn="ctr"/>
@@ -15551,7 +14320,7 @@
                 </a:tc>
                 <a:tc>
                   <a:txBody>
-                    <a:bodyPr/>
+                    <a:bodyPr wrap="square"/>
                     <a:lstStyle/>
                     <a:p>
                       <a:pPr algn="ctr"/>
@@ -15573,16 +14342,11 @@
                     </a:solidFill>
                   </a:tcPr>
                 </a:tc>
-                <a:extLst>
-                  <a:ext uri="{0D108BD9-81ED-4DB2-BD59-A6C34878D82A}">
-                    <a16:rowId xmlns:a16="http://schemas.microsoft.com/office/drawing/2014/main" val="10001"/>
-                  </a:ext>
-                </a:extLst>
               </a:tr>
               <a:tr h="321818">
                 <a:tc>
                   <a:txBody>
-                    <a:bodyPr/>
+                    <a:bodyPr wrap="square"/>
                     <a:lstStyle/>
                     <a:p>
                       <a:pPr algn="ctr"/>
@@ -15605,7 +14369,7 @@
                 </a:tc>
                 <a:tc>
                   <a:txBody>
-                    <a:bodyPr/>
+                    <a:bodyPr wrap="square"/>
                     <a:lstStyle/>
                     <a:p>
                       <a:pPr algn="l"/>
@@ -15628,7 +14392,7 @@
                 </a:tc>
                 <a:tc>
                   <a:txBody>
-                    <a:bodyPr/>
+                    <a:bodyPr wrap="square"/>
                     <a:lstStyle/>
                     <a:p>
                       <a:pPr algn="ctr"/>
@@ -15651,7 +14415,7 @@
                 </a:tc>
                 <a:tc>
                   <a:txBody>
-                    <a:bodyPr/>
+                    <a:bodyPr wrap="square"/>
                     <a:lstStyle/>
                     <a:p>
                       <a:pPr algn="ctr"/>
@@ -15674,7 +14438,7 @@
                 </a:tc>
                 <a:tc>
                   <a:txBody>
-                    <a:bodyPr/>
+                    <a:bodyPr wrap="square"/>
                     <a:lstStyle/>
                     <a:p>
                       <a:pPr algn="ctr"/>
@@ -15697,7 +14461,7 @@
                 </a:tc>
                 <a:tc>
                   <a:txBody>
-                    <a:bodyPr/>
+                    <a:bodyPr wrap="square"/>
                     <a:lstStyle/>
                     <a:p>
                       <a:pPr algn="ctr"/>
@@ -15720,7 +14484,7 @@
                 </a:tc>
                 <a:tc>
                   <a:txBody>
-                    <a:bodyPr/>
+                    <a:bodyPr wrap="square"/>
                     <a:lstStyle/>
                     <a:p>
                       <a:pPr algn="ctr"/>
@@ -15742,16 +14506,11 @@
                     </a:solidFill>
                   </a:tcPr>
                 </a:tc>
-                <a:extLst>
-                  <a:ext uri="{0D108BD9-81ED-4DB2-BD59-A6C34878D82A}">
-                    <a16:rowId xmlns:a16="http://schemas.microsoft.com/office/drawing/2014/main" val="10002"/>
-                  </a:ext>
-                </a:extLst>
               </a:tr>
               <a:tr h="321818">
                 <a:tc>
                   <a:txBody>
-                    <a:bodyPr/>
+                    <a:bodyPr wrap="square"/>
                     <a:lstStyle/>
                     <a:p>
                       <a:pPr algn="ctr"/>
@@ -15774,7 +14533,7 @@
                 </a:tc>
                 <a:tc>
                   <a:txBody>
-                    <a:bodyPr/>
+                    <a:bodyPr wrap="square"/>
                     <a:lstStyle/>
                     <a:p>
                       <a:pPr algn="l"/>
@@ -15797,7 +14556,7 @@
                 </a:tc>
                 <a:tc>
                   <a:txBody>
-                    <a:bodyPr/>
+                    <a:bodyPr wrap="square"/>
                     <a:lstStyle/>
                     <a:p>
                       <a:pPr algn="ctr"/>
@@ -15820,7 +14579,7 @@
                 </a:tc>
                 <a:tc>
                   <a:txBody>
-                    <a:bodyPr/>
+                    <a:bodyPr wrap="square"/>
                     <a:lstStyle/>
                     <a:p>
                       <a:pPr algn="ctr"/>
@@ -15843,7 +14602,7 @@
                 </a:tc>
                 <a:tc>
                   <a:txBody>
-                    <a:bodyPr/>
+                    <a:bodyPr wrap="square"/>
                     <a:lstStyle/>
                     <a:p>
                       <a:pPr algn="ctr"/>
@@ -15866,7 +14625,7 @@
                 </a:tc>
                 <a:tc>
                   <a:txBody>
-                    <a:bodyPr/>
+                    <a:bodyPr wrap="square"/>
                     <a:lstStyle/>
                     <a:p>
                       <a:pPr algn="ctr"/>
@@ -15889,7 +14648,7 @@
                 </a:tc>
                 <a:tc>
                   <a:txBody>
-                    <a:bodyPr/>
+                    <a:bodyPr wrap="square"/>
                     <a:lstStyle/>
                     <a:p>
                       <a:pPr algn="ctr"/>
@@ -15911,16 +14670,11 @@
                     </a:solidFill>
                   </a:tcPr>
                 </a:tc>
-                <a:extLst>
-                  <a:ext uri="{0D108BD9-81ED-4DB2-BD59-A6C34878D82A}">
-                    <a16:rowId xmlns:a16="http://schemas.microsoft.com/office/drawing/2014/main" val="10003"/>
-                  </a:ext>
-                </a:extLst>
               </a:tr>
               <a:tr h="321818">
                 <a:tc>
                   <a:txBody>
-                    <a:bodyPr/>
+                    <a:bodyPr wrap="square"/>
                     <a:lstStyle/>
                     <a:p>
                       <a:pPr algn="ctr"/>
@@ -15943,7 +14697,7 @@
                 </a:tc>
                 <a:tc>
                   <a:txBody>
-                    <a:bodyPr/>
+                    <a:bodyPr wrap="square"/>
                     <a:lstStyle/>
                     <a:p>
                       <a:pPr algn="l"/>
@@ -15966,7 +14720,7 @@
                 </a:tc>
                 <a:tc>
                   <a:txBody>
-                    <a:bodyPr/>
+                    <a:bodyPr wrap="square"/>
                     <a:lstStyle/>
                     <a:p>
                       <a:pPr algn="ctr"/>
@@ -15989,7 +14743,7 @@
                 </a:tc>
                 <a:tc>
                   <a:txBody>
-                    <a:bodyPr/>
+                    <a:bodyPr wrap="square"/>
                     <a:lstStyle/>
                     <a:p>
                       <a:pPr algn="ctr"/>
@@ -16012,7 +14766,7 @@
                 </a:tc>
                 <a:tc>
                   <a:txBody>
-                    <a:bodyPr/>
+                    <a:bodyPr wrap="square"/>
                     <a:lstStyle/>
                     <a:p>
                       <a:pPr algn="ctr"/>
@@ -16035,7 +14789,7 @@
                 </a:tc>
                 <a:tc>
                   <a:txBody>
-                    <a:bodyPr/>
+                    <a:bodyPr wrap="square"/>
                     <a:lstStyle/>
                     <a:p>
                       <a:pPr algn="ctr"/>
@@ -16058,7 +14812,7 @@
                 </a:tc>
                 <a:tc>
                   <a:txBody>
-                    <a:bodyPr/>
+                    <a:bodyPr wrap="square"/>
                     <a:lstStyle/>
                     <a:p>
                       <a:pPr algn="ctr"/>
@@ -16080,16 +14834,11 @@
                     </a:solidFill>
                   </a:tcPr>
                 </a:tc>
-                <a:extLst>
-                  <a:ext uri="{0D108BD9-81ED-4DB2-BD59-A6C34878D82A}">
-                    <a16:rowId xmlns:a16="http://schemas.microsoft.com/office/drawing/2014/main" val="10004"/>
-                  </a:ext>
-                </a:extLst>
               </a:tr>
               <a:tr h="321818">
                 <a:tc>
                   <a:txBody>
-                    <a:bodyPr/>
+                    <a:bodyPr wrap="square"/>
                     <a:lstStyle/>
                     <a:p>
                       <a:pPr algn="ctr"/>
@@ -16112,7 +14861,7 @@
                 </a:tc>
                 <a:tc>
                   <a:txBody>
-                    <a:bodyPr/>
+                    <a:bodyPr wrap="square"/>
                     <a:lstStyle/>
                     <a:p>
                       <a:pPr algn="l"/>
@@ -16135,7 +14884,7 @@
                 </a:tc>
                 <a:tc>
                   <a:txBody>
-                    <a:bodyPr/>
+                    <a:bodyPr wrap="square"/>
                     <a:lstStyle/>
                     <a:p>
                       <a:pPr algn="ctr"/>
@@ -16158,7 +14907,7 @@
                 </a:tc>
                 <a:tc>
                   <a:txBody>
-                    <a:bodyPr/>
+                    <a:bodyPr wrap="square"/>
                     <a:lstStyle/>
                     <a:p>
                       <a:pPr algn="ctr"/>
@@ -16181,7 +14930,7 @@
                 </a:tc>
                 <a:tc>
                   <a:txBody>
-                    <a:bodyPr/>
+                    <a:bodyPr wrap="square"/>
                     <a:lstStyle/>
                     <a:p>
                       <a:pPr algn="ctr"/>
@@ -16204,7 +14953,7 @@
                 </a:tc>
                 <a:tc>
                   <a:txBody>
-                    <a:bodyPr/>
+                    <a:bodyPr wrap="square"/>
                     <a:lstStyle/>
                     <a:p>
                       <a:pPr algn="ctr"/>
@@ -16227,7 +14976,7 @@
                 </a:tc>
                 <a:tc>
                   <a:txBody>
-                    <a:bodyPr/>
+                    <a:bodyPr wrap="square"/>
                     <a:lstStyle/>
                     <a:p>
                       <a:pPr algn="ctr"/>
@@ -16249,16 +14998,11 @@
                     </a:solidFill>
                   </a:tcPr>
                 </a:tc>
-                <a:extLst>
-                  <a:ext uri="{0D108BD9-81ED-4DB2-BD59-A6C34878D82A}">
-                    <a16:rowId xmlns:a16="http://schemas.microsoft.com/office/drawing/2014/main" val="10005"/>
-                  </a:ext>
-                </a:extLst>
               </a:tr>
               <a:tr h="321818">
                 <a:tc>
                   <a:txBody>
-                    <a:bodyPr/>
+                    <a:bodyPr wrap="square"/>
                     <a:lstStyle/>
                     <a:p>
                       <a:pPr algn="ctr"/>
@@ -16281,7 +15025,7 @@
                 </a:tc>
                 <a:tc>
                   <a:txBody>
-                    <a:bodyPr/>
+                    <a:bodyPr wrap="square"/>
                     <a:lstStyle/>
                     <a:p>
                       <a:pPr algn="l"/>
@@ -16304,7 +15048,7 @@
                 </a:tc>
                 <a:tc>
                   <a:txBody>
-                    <a:bodyPr/>
+                    <a:bodyPr wrap="square"/>
                     <a:lstStyle/>
                     <a:p>
                       <a:pPr algn="ctr"/>
@@ -16327,7 +15071,7 @@
                 </a:tc>
                 <a:tc>
                   <a:txBody>
-                    <a:bodyPr/>
+                    <a:bodyPr wrap="square"/>
                     <a:lstStyle/>
                     <a:p>
                       <a:pPr algn="ctr"/>
@@ -16350,7 +15094,7 @@
                 </a:tc>
                 <a:tc>
                   <a:txBody>
-                    <a:bodyPr/>
+                    <a:bodyPr wrap="square"/>
                     <a:lstStyle/>
                     <a:p>
                       <a:pPr algn="ctr"/>
@@ -16373,7 +15117,7 @@
                 </a:tc>
                 <a:tc>
                   <a:txBody>
-                    <a:bodyPr/>
+                    <a:bodyPr wrap="square"/>
                     <a:lstStyle/>
                     <a:p>
                       <a:pPr algn="ctr"/>
@@ -16396,7 +15140,7 @@
                 </a:tc>
                 <a:tc>
                   <a:txBody>
-                    <a:bodyPr/>
+                    <a:bodyPr wrap="square"/>
                     <a:lstStyle/>
                     <a:p>
                       <a:pPr algn="ctr"/>
@@ -16418,16 +15162,11 @@
                     </a:solidFill>
                   </a:tcPr>
                 </a:tc>
-                <a:extLst>
-                  <a:ext uri="{0D108BD9-81ED-4DB2-BD59-A6C34878D82A}">
-                    <a16:rowId xmlns:a16="http://schemas.microsoft.com/office/drawing/2014/main" val="10006"/>
-                  </a:ext>
-                </a:extLst>
               </a:tr>
               <a:tr h="321818">
                 <a:tc>
                   <a:txBody>
-                    <a:bodyPr/>
+                    <a:bodyPr wrap="square"/>
                     <a:lstStyle/>
                     <a:p>
                       <a:pPr algn="ctr"/>
@@ -16450,7 +15189,7 @@
                 </a:tc>
                 <a:tc>
                   <a:txBody>
-                    <a:bodyPr/>
+                    <a:bodyPr wrap="square"/>
                     <a:lstStyle/>
                     <a:p>
                       <a:pPr algn="l"/>
@@ -16473,7 +15212,7 @@
                 </a:tc>
                 <a:tc>
                   <a:txBody>
-                    <a:bodyPr/>
+                    <a:bodyPr wrap="square"/>
                     <a:lstStyle/>
                     <a:p>
                       <a:pPr algn="ctr"/>
@@ -16496,7 +15235,7 @@
                 </a:tc>
                 <a:tc>
                   <a:txBody>
-                    <a:bodyPr/>
+                    <a:bodyPr wrap="square"/>
                     <a:lstStyle/>
                     <a:p>
                       <a:pPr algn="ctr"/>
@@ -16519,7 +15258,7 @@
                 </a:tc>
                 <a:tc>
                   <a:txBody>
-                    <a:bodyPr/>
+                    <a:bodyPr wrap="square"/>
                     <a:lstStyle/>
                     <a:p>
                       <a:pPr algn="ctr"/>
@@ -16542,7 +15281,7 @@
                 </a:tc>
                 <a:tc>
                   <a:txBody>
-                    <a:bodyPr/>
+                    <a:bodyPr wrap="square"/>
                     <a:lstStyle/>
                     <a:p>
                       <a:pPr algn="ctr"/>
@@ -16565,7 +15304,7 @@
                 </a:tc>
                 <a:tc>
                   <a:txBody>
-                    <a:bodyPr/>
+                    <a:bodyPr wrap="square"/>
                     <a:lstStyle/>
                     <a:p>
                       <a:pPr algn="ctr"/>
@@ -16587,11 +15326,6 @@
                     </a:solidFill>
                   </a:tcPr>
                 </a:tc>
-                <a:extLst>
-                  <a:ext uri="{0D108BD9-81ED-4DB2-BD59-A6C34878D82A}">
-                    <a16:rowId xmlns:a16="http://schemas.microsoft.com/office/drawing/2014/main" val="10007"/>
-                  </a:ext>
-                </a:extLst>
               </a:tr>
             </a:tbl>
           </a:graphicData>
@@ -16606,7 +15340,7 @@
 </file>
 
 <file path=ppt/slides/slide7.xml><?xml version="1.0" encoding="utf-8"?>
-<p:sld xmlns:a="http://schemas.openxmlformats.org/drawingml/2006/main" xmlns:r="http://schemas.openxmlformats.org/officeDocument/2006/relationships" xmlns:p="http://schemas.openxmlformats.org/presentationml/2006/main">
+<p:sld xmlns:a="http://schemas.openxmlformats.org/drawingml/2006/main" xmlns:p="http://schemas.openxmlformats.org/presentationml/2006/main" xmlns:r="http://schemas.openxmlformats.org/officeDocument/2006/relationships">
   <p:cSld>
     <p:spTree>
       <p:nvGrpSpPr>
@@ -16614,14 +15348,7 @@
         <p:cNvGrpSpPr/>
         <p:nvPr/>
       </p:nvGrpSpPr>
-      <p:grpSpPr>
-        <a:xfrm>
-          <a:off x="0" y="0"/>
-          <a:ext cx="0" cy="0"/>
-          <a:chOff x="0" y="0"/>
-          <a:chExt cx="0" cy="0"/>
-        </a:xfrm>
-      </p:grpSpPr>
+      <p:grpSpPr/>
       <p:sp>
         <p:nvSpPr>
           <p:cNvPr id="2" name="TextBox 1"/>
@@ -16639,7 +15366,7 @@
           <a:noFill/>
         </p:spPr>
         <p:txBody>
-          <a:bodyPr wrap="square" lIns="0" tIns="0" rIns="0" bIns="0">
+          <a:bodyPr wrap="square" lIns="0" rIns="0" tIns="0" bIns="0">
             <a:spAutoFit/>
           </a:bodyPr>
           <a:lstStyle/>
@@ -16673,7 +15400,7 @@
           <a:noFill/>
         </p:spPr>
         <p:txBody>
-          <a:bodyPr wrap="square" lIns="0" tIns="0" rIns="0" bIns="0">
+          <a:bodyPr wrap="square" lIns="0" rIns="0" tIns="0" bIns="0">
             <a:spAutoFit/>
           </a:bodyPr>
           <a:lstStyle/>
@@ -16707,7 +15434,7 @@
           <a:noFill/>
         </p:spPr>
         <p:txBody>
-          <a:bodyPr wrap="square" lIns="0" tIns="0" rIns="0" bIns="0">
+          <a:bodyPr wrap="square" lIns="0" rIns="0" tIns="0" bIns="0">
             <a:spAutoFit/>
           </a:bodyPr>
           <a:lstStyle/>
@@ -16742,7 +15469,7 @@
           <a:noFill/>
         </p:spPr>
         <p:txBody>
-          <a:bodyPr wrap="square" lIns="0" tIns="0" rIns="0" bIns="0">
+          <a:bodyPr wrap="square" lIns="0" rIns="0" tIns="0" bIns="0">
             <a:spAutoFit/>
           </a:bodyPr>
           <a:lstStyle/>
@@ -16765,13 +15492,7 @@
           <p:cNvGraphicFramePr>
             <a:graphicFrameLocks noGrp="1"/>
           </p:cNvGraphicFramePr>
-          <p:nvPr>
-            <p:extLst>
-              <p:ext uri="{D42A27DB-BD31-4B8C-83A1-F6EECF244321}">
-                <p14:modId xmlns:p14="http://schemas.microsoft.com/office/powerpoint/2010/main" val="2619181161"/>
-              </p:ext>
-            </p:extLst>
-          </p:nvPr>
+          <p:nvPr/>
         </p:nvGraphicFramePr>
         <p:xfrm>
           <a:off x="566928" y="1709928"/>
@@ -16784,39 +15505,15 @@
                 <a:tableStyleId>{5C22544A-7EE6-4342-B048-85BDC9FD1C3A}</a:tableStyleId>
               </a:tblPr>
               <a:tblGrid>
-                <a:gridCol w="1344004">
-                  <a:extLst>
-                    <a:ext uri="{9D8B030D-6E8A-4147-A177-3AD203B41FA5}">
-                      <a16:colId xmlns:a16="http://schemas.microsoft.com/office/drawing/2014/main" val="20000"/>
-                    </a:ext>
-                  </a:extLst>
-                </a:gridCol>
-                <a:gridCol w="3452793">
-                  <a:extLst>
-                    <a:ext uri="{9D8B030D-6E8A-4147-A177-3AD203B41FA5}">
-                      <a16:colId xmlns:a16="http://schemas.microsoft.com/office/drawing/2014/main" val="20001"/>
-                    </a:ext>
-                  </a:extLst>
-                </a:gridCol>
-                <a:gridCol w="3916809">
-                  <a:extLst>
-                    <a:ext uri="{9D8B030D-6E8A-4147-A177-3AD203B41FA5}">
-                      <a16:colId xmlns:a16="http://schemas.microsoft.com/office/drawing/2014/main" val="20002"/>
-                    </a:ext>
-                  </a:extLst>
-                </a:gridCol>
-                <a:gridCol w="2344233">
-                  <a:extLst>
-                    <a:ext uri="{9D8B030D-6E8A-4147-A177-3AD203B41FA5}">
-                      <a16:colId xmlns:a16="http://schemas.microsoft.com/office/drawing/2014/main" val="20003"/>
-                    </a:ext>
-                  </a:extLst>
-                </a:gridCol>
+                <a:gridCol w="821457"/>
+                <a:gridCol w="3975340"/>
+                <a:gridCol w="3916809"/>
+                <a:gridCol w="2344233"/>
               </a:tblGrid>
               <a:tr h="321818">
                 <a:tc>
                   <a:txBody>
-                    <a:bodyPr/>
+                    <a:bodyPr wrap="square"/>
                     <a:lstStyle/>
                     <a:p>
                       <a:pPr algn="ctr"/>
@@ -16839,7 +15536,7 @@
                 </a:tc>
                 <a:tc>
                   <a:txBody>
-                    <a:bodyPr/>
+                    <a:bodyPr wrap="square"/>
                     <a:lstStyle/>
                     <a:p>
                       <a:pPr algn="ctr"/>
@@ -16862,7 +15559,7 @@
                 </a:tc>
                 <a:tc>
                   <a:txBody>
-                    <a:bodyPr/>
+                    <a:bodyPr wrap="square"/>
                     <a:lstStyle/>
                     <a:p>
                       <a:pPr algn="ctr"/>
@@ -16885,7 +15582,7 @@
                 </a:tc>
                 <a:tc>
                   <a:txBody>
-                    <a:bodyPr/>
+                    <a:bodyPr wrap="square"/>
                     <a:lstStyle/>
                     <a:p>
                       <a:pPr algn="ctr"/>
@@ -16906,16 +15603,11 @@
                     </a:solidFill>
                   </a:tcPr>
                 </a:tc>
-                <a:extLst>
-                  <a:ext uri="{0D108BD9-81ED-4DB2-BD59-A6C34878D82A}">
-                    <a16:rowId xmlns:a16="http://schemas.microsoft.com/office/drawing/2014/main" val="10000"/>
-                  </a:ext>
-                </a:extLst>
               </a:tr>
               <a:tr h="579628">
                 <a:tc>
                   <a:txBody>
-                    <a:bodyPr/>
+                    <a:bodyPr wrap="square"/>
                     <a:lstStyle/>
                     <a:p>
                       <a:pPr algn="ctr"/>
@@ -16938,7 +15630,7 @@
                 </a:tc>
                 <a:tc>
                   <a:txBody>
-                    <a:bodyPr/>
+                    <a:bodyPr wrap="square"/>
                     <a:lstStyle/>
                     <a:p>
                       <a:pPr algn="l"/>
@@ -16970,7 +15662,7 @@
                 </a:tc>
                 <a:tc>
                   <a:txBody>
-                    <a:bodyPr/>
+                    <a:bodyPr wrap="square"/>
                     <a:lstStyle/>
                     <a:p>
                       <a:pPr algn="l"/>
@@ -16993,7 +15685,7 @@
                 </a:tc>
                 <a:tc>
                   <a:txBody>
-                    <a:bodyPr/>
+                    <a:bodyPr wrap="square"/>
                     <a:lstStyle/>
                     <a:p>
                       <a:pPr algn="l"/>
@@ -17014,16 +15706,11 @@
                     </a:solidFill>
                   </a:tcPr>
                 </a:tc>
-                <a:extLst>
-                  <a:ext uri="{0D108BD9-81ED-4DB2-BD59-A6C34878D82A}">
-                    <a16:rowId xmlns:a16="http://schemas.microsoft.com/office/drawing/2014/main" val="10001"/>
-                  </a:ext>
-                </a:extLst>
               </a:tr>
               <a:tr h="579628">
                 <a:tc>
                   <a:txBody>
-                    <a:bodyPr/>
+                    <a:bodyPr wrap="square"/>
                     <a:lstStyle/>
                     <a:p>
                       <a:pPr algn="ctr"/>
@@ -17046,14 +15733,14 @@
                 </a:tc>
                 <a:tc>
                   <a:txBody>
-                    <a:bodyPr/>
+                    <a:bodyPr wrap="square"/>
                     <a:lstStyle/>
                     <a:p>
                       <a:pPr algn="l"/>
                       <a:r>
-                        <a:rPr sz="1400" b="0">
-                          <a:solidFill>
-                            <a:srgbClr val="22303F"/>
+                        <a:rPr sz="1400" b="1">
+                          <a:solidFill>
+                            <a:srgbClr val="C0392B"/>
                           </a:solidFill>
                           <a:latin typeface="Microsoft JhengHei"/>
                         </a:rPr>
@@ -17069,7 +15756,7 @@
                 </a:tc>
                 <a:tc>
                   <a:txBody>
-                    <a:bodyPr/>
+                    <a:bodyPr wrap="square"/>
                     <a:lstStyle/>
                     <a:p>
                       <a:pPr algn="l"/>
@@ -17092,14 +15779,14 @@
                 </a:tc>
                 <a:tc>
                   <a:txBody>
-                    <a:bodyPr/>
+                    <a:bodyPr wrap="square"/>
                     <a:lstStyle/>
                     <a:p>
                       <a:pPr algn="l"/>
                       <a:r>
-                        <a:rPr sz="1400" b="0">
-                          <a:solidFill>
-                            <a:srgbClr val="22303F"/>
+                        <a:rPr sz="1400" b="1">
+                          <a:solidFill>
+                            <a:srgbClr val="C0392B"/>
                           </a:solidFill>
                           <a:latin typeface="Microsoft JhengHei"/>
                         </a:rPr>
@@ -17113,16 +15800,11 @@
                     </a:solidFill>
                   </a:tcPr>
                 </a:tc>
-                <a:extLst>
-                  <a:ext uri="{0D108BD9-81ED-4DB2-BD59-A6C34878D82A}">
-                    <a16:rowId xmlns:a16="http://schemas.microsoft.com/office/drawing/2014/main" val="10002"/>
-                  </a:ext>
-                </a:extLst>
               </a:tr>
               <a:tr h="579628">
                 <a:tc>
                   <a:txBody>
-                    <a:bodyPr/>
+                    <a:bodyPr wrap="square"/>
                     <a:lstStyle/>
                     <a:p>
                       <a:pPr algn="ctr"/>
@@ -17145,7 +15827,7 @@
                 </a:tc>
                 <a:tc>
                   <a:txBody>
-                    <a:bodyPr/>
+                    <a:bodyPr wrap="square"/>
                     <a:lstStyle/>
                     <a:p>
                       <a:pPr algn="l"/>
@@ -17168,7 +15850,7 @@
                 </a:tc>
                 <a:tc>
                   <a:txBody>
-                    <a:bodyPr/>
+                    <a:bodyPr wrap="square"/>
                     <a:lstStyle/>
                     <a:p>
                       <a:pPr algn="l"/>
@@ -17191,14 +15873,14 @@
                 </a:tc>
                 <a:tc>
                   <a:txBody>
-                    <a:bodyPr/>
+                    <a:bodyPr wrap="square"/>
                     <a:lstStyle/>
                     <a:p>
                       <a:pPr algn="l"/>
                       <a:r>
-                        <a:rPr sz="1400" b="0">
-                          <a:solidFill>
-                            <a:srgbClr val="22303F"/>
+                        <a:rPr sz="1400" b="1">
+                          <a:solidFill>
+                            <a:srgbClr val="C0392B"/>
                           </a:solidFill>
                           <a:latin typeface="Microsoft JhengHei"/>
                         </a:rPr>
@@ -17212,16 +15894,11 @@
                     </a:solidFill>
                   </a:tcPr>
                 </a:tc>
-                <a:extLst>
-                  <a:ext uri="{0D108BD9-81ED-4DB2-BD59-A6C34878D82A}">
-                    <a16:rowId xmlns:a16="http://schemas.microsoft.com/office/drawing/2014/main" val="10003"/>
-                  </a:ext>
-                </a:extLst>
               </a:tr>
               <a:tr h="579628">
                 <a:tc>
                   <a:txBody>
-                    <a:bodyPr/>
+                    <a:bodyPr wrap="square"/>
                     <a:lstStyle/>
                     <a:p>
                       <a:pPr algn="ctr"/>
@@ -17244,99 +15921,41 @@
                 </a:tc>
                 <a:tc>
                   <a:txBody>
-                    <a:bodyPr/>
+                    <a:bodyPr wrap="square"/>
                     <a:lstStyle/>
                     <a:p>
                       <a:pPr algn="l"/>
                       <a:r>
-                        <a:rPr sz="1400" b="0" dirty="0" err="1">
-                          <a:solidFill>
-                            <a:srgbClr val="22303F"/>
-                          </a:solidFill>
-                          <a:latin typeface="Microsoft JhengHei"/>
-                        </a:rPr>
-                        <a:t>TiDB</a:t>
-                      </a:r>
-                      <a:r>
-                        <a:rPr sz="1400" b="0" dirty="0">
-                          <a:solidFill>
-                            <a:srgbClr val="22303F"/>
-                          </a:solidFill>
-                          <a:latin typeface="Microsoft JhengHei"/>
-                        </a:rPr>
-                        <a:t> </a:t>
-                      </a:r>
-                      <a:r>
-                        <a:rPr sz="1400" b="0" dirty="0" err="1">
-                          <a:solidFill>
-                            <a:srgbClr val="22303F"/>
-                          </a:solidFill>
-                          <a:latin typeface="Microsoft JhengHei"/>
-                        </a:rPr>
-                        <a:t>為計算／儲存分離</a:t>
-                      </a:r>
-                      <a:r>
-                        <a:rPr sz="1400" b="0" dirty="0">
-                          <a:solidFill>
-                            <a:srgbClr val="22303F"/>
-                          </a:solidFill>
-                          <a:latin typeface="Microsoft JhengHei"/>
-                        </a:rPr>
-                        <a:t>；</a:t>
-                      </a:r>
-                      <a:endParaRPr lang="en-US" sz="1400" b="0" dirty="0">
-                        <a:solidFill>
-                          <a:srgbClr val="22303F"/>
-                        </a:solidFill>
-                        <a:latin typeface="Microsoft JhengHei"/>
-                      </a:endParaRPr>
-                    </a:p>
+                        <a:rPr sz="1400" b="0">
+                          <a:solidFill>
+                            <a:srgbClr val="22303F"/>
+                          </a:solidFill>
+                          <a:latin typeface="Microsoft JhengHei"/>
+                        </a:rPr>
+                        <a:t>TiDB 為計算／儲存分離；PXC 為完整副本與 writeset certification</a:t>
+                      </a:r>
+                    </a:p>
+                  </a:txBody>
+                  <a:tcPr marL="64008" marR="64008" marT="32004" marB="32004" anchor="ctr">
+                    <a:solidFill>
+                      <a:srgbClr val="F7F9FA"/>
+                    </a:solidFill>
+                  </a:tcPr>
+                </a:tc>
+                <a:tc>
+                  <a:txBody>
+                    <a:bodyPr wrap="square"/>
+                    <a:lstStyle/>
                     <a:p>
                       <a:pPr algn="l"/>
                       <a:r>
-                        <a:rPr sz="1400" b="0" dirty="0">
-                          <a:solidFill>
-                            <a:srgbClr val="22303F"/>
-                          </a:solidFill>
-                          <a:latin typeface="Microsoft JhengHei"/>
-                        </a:rPr>
-                        <a:t>PXC </a:t>
-                      </a:r>
-                      <a:r>
-                        <a:rPr sz="1400" b="0" dirty="0" err="1">
-                          <a:solidFill>
-                            <a:srgbClr val="22303F"/>
-                          </a:solidFill>
-                          <a:latin typeface="Microsoft JhengHei"/>
-                        </a:rPr>
-                        <a:t>為完整副本與</a:t>
-                      </a:r>
-                      <a:r>
-                        <a:rPr sz="1400" b="0" dirty="0">
-                          <a:solidFill>
-                            <a:srgbClr val="22303F"/>
-                          </a:solidFill>
-                          <a:latin typeface="Microsoft JhengHei"/>
-                        </a:rPr>
-                        <a:t> </a:t>
-                      </a:r>
-                      <a:r>
-                        <a:rPr sz="1400" b="0" dirty="0" err="1">
-                          <a:solidFill>
-                            <a:srgbClr val="22303F"/>
-                          </a:solidFill>
-                          <a:latin typeface="Microsoft JhengHei"/>
-                        </a:rPr>
-                        <a:t>writeset</a:t>
-                      </a:r>
-                      <a:r>
-                        <a:rPr sz="1400" b="0" dirty="0">
-                          <a:solidFill>
-                            <a:srgbClr val="22303F"/>
-                          </a:solidFill>
-                          <a:latin typeface="Microsoft JhengHei"/>
-                        </a:rPr>
-                        <a:t> certification</a:t>
+                        <a:rPr sz="1400" b="0">
+                          <a:solidFill>
+                            <a:srgbClr val="22303F"/>
+                          </a:solidFill>
+                          <a:latin typeface="Microsoft JhengHei"/>
+                        </a:rPr>
+                        <a:t>兩家皆為 PostgreSQL wire protocol，但 SQL 引擎與相容程度不同</a:t>
                       </a:r>
                     </a:p>
                   </a:txBody>
@@ -17348,7 +15967,7 @@
                 </a:tc>
                 <a:tc>
                   <a:txBody>
-                    <a:bodyPr/>
+                    <a:bodyPr wrap="square"/>
                     <a:lstStyle/>
                     <a:p>
                       <a:pPr algn="l"/>
@@ -17359,7 +15978,7 @@
                           </a:solidFill>
                           <a:latin typeface="Microsoft JhengHei"/>
                         </a:rPr>
-                        <a:t>兩家皆為 PostgreSQL wire protocol，但 SQL 引擎與相容程度不同</a:t>
+                        <a:t>同名功能不能直接視為同一機制</a:t>
                       </a:r>
                     </a:p>
                   </a:txBody>
@@ -17369,39 +15988,11 @@
                     </a:solidFill>
                   </a:tcPr>
                 </a:tc>
-                <a:tc>
-                  <a:txBody>
-                    <a:bodyPr/>
-                    <a:lstStyle/>
-                    <a:p>
-                      <a:pPr algn="l"/>
-                      <a:r>
-                        <a:rPr sz="1400" b="0">
-                          <a:solidFill>
-                            <a:srgbClr val="22303F"/>
-                          </a:solidFill>
-                          <a:latin typeface="Microsoft JhengHei"/>
-                        </a:rPr>
-                        <a:t>同名功能不能直接視為同一機制</a:t>
-                      </a:r>
-                    </a:p>
-                  </a:txBody>
-                  <a:tcPr marL="64008" marR="64008" marT="32004" marB="32004" anchor="ctr">
-                    <a:solidFill>
-                      <a:srgbClr val="F7F9FA"/>
-                    </a:solidFill>
-                  </a:tcPr>
-                </a:tc>
-                <a:extLst>
-                  <a:ext uri="{0D108BD9-81ED-4DB2-BD59-A6C34878D82A}">
-                    <a16:rowId xmlns:a16="http://schemas.microsoft.com/office/drawing/2014/main" val="10004"/>
-                  </a:ext>
-                </a:extLst>
               </a:tr>
               <a:tr h="579628">
                 <a:tc>
                   <a:txBody>
-                    <a:bodyPr/>
+                    <a:bodyPr wrap="square"/>
                     <a:lstStyle/>
                     <a:p>
                       <a:pPr algn="ctr"/>
@@ -17424,7 +16015,7 @@
                 </a:tc>
                 <a:tc>
                   <a:txBody>
-                    <a:bodyPr/>
+                    <a:bodyPr wrap="square"/>
                     <a:lstStyle/>
                     <a:p>
                       <a:pPr algn="l"/>
@@ -17447,7 +16038,7 @@
                 </a:tc>
                 <a:tc>
                   <a:txBody>
-                    <a:bodyPr/>
+                    <a:bodyPr wrap="square"/>
                     <a:lstStyle/>
                     <a:p>
                       <a:pPr algn="l"/>
@@ -17470,34 +16061,19 @@
                 </a:tc>
                 <a:tc>
                   <a:txBody>
-                    <a:bodyPr/>
+                    <a:bodyPr wrap="square"/>
                     <a:lstStyle/>
                     <a:p>
                       <a:pPr algn="l"/>
                       <a:r>
-                        <a:rPr sz="1400" b="0" dirty="0">
-                          <a:solidFill>
-                            <a:srgbClr val="22303F"/>
-                          </a:solidFill>
-                          <a:latin typeface="Microsoft JhengHei"/>
-                        </a:rPr>
-                        <a:t>「</a:t>
-                      </a:r>
-                      <a:r>
-                        <a:rPr sz="1400" b="0" dirty="0" err="1">
-                          <a:solidFill>
-                            <a:srgbClr val="22303F"/>
-                          </a:solidFill>
-                          <a:latin typeface="Microsoft JhengHei"/>
-                        </a:rPr>
-                        <a:t>數量」與「業務關鍵度」必須分開</a:t>
-                      </a:r>
-                      <a:endParaRPr sz="1400" b="0" dirty="0">
-                        <a:solidFill>
-                          <a:srgbClr val="22303F"/>
-                        </a:solidFill>
-                        <a:latin typeface="Microsoft JhengHei"/>
-                      </a:endParaRPr>
+                        <a:rPr sz="1400" b="0">
+                          <a:solidFill>
+                            <a:srgbClr val="22303F"/>
+                          </a:solidFill>
+                          <a:latin typeface="Microsoft JhengHei"/>
+                        </a:rPr>
+                        <a:t>「數量」與「業務關鍵度」必須分開</a:t>
+                      </a:r>
                     </a:p>
                   </a:txBody>
                   <a:tcPr marL="64008" marR="64008" marT="32004" marB="32004" anchor="ctr">
@@ -17506,11 +16082,6 @@
                     </a:solidFill>
                   </a:tcPr>
                 </a:tc>
-                <a:extLst>
-                  <a:ext uri="{0D108BD9-81ED-4DB2-BD59-A6C34878D82A}">
-                    <a16:rowId xmlns:a16="http://schemas.microsoft.com/office/drawing/2014/main" val="10005"/>
-                  </a:ext>
-                </a:extLst>
               </a:tr>
             </a:tbl>
           </a:graphicData>
@@ -17533,7 +16104,7 @@
           <a:noFill/>
         </p:spPr>
         <p:txBody>
-          <a:bodyPr wrap="square" lIns="0" tIns="0" rIns="0" bIns="0">
+          <a:bodyPr wrap="square" lIns="0" rIns="0" tIns="0" bIns="0">
             <a:spAutoFit/>
           </a:bodyPr>
           <a:lstStyle/>
@@ -17591,7 +16162,6 @@
           <a:lstStyle/>
           <a:p>
             <a:pPr algn="ctr"/>
-            <a:endParaRPr/>
           </a:p>
         </p:txBody>
       </p:sp>
@@ -17604,7 +16174,7 @@
 </file>
 
 <file path=ppt/slides/slide8.xml><?xml version="1.0" encoding="utf-8"?>
-<p:sld xmlns:a="http://schemas.openxmlformats.org/drawingml/2006/main" xmlns:r="http://schemas.openxmlformats.org/officeDocument/2006/relationships" xmlns:p="http://schemas.openxmlformats.org/presentationml/2006/main">
+<p:sld xmlns:a="http://schemas.openxmlformats.org/drawingml/2006/main" xmlns:p="http://schemas.openxmlformats.org/presentationml/2006/main" xmlns:r="http://schemas.openxmlformats.org/officeDocument/2006/relationships">
   <p:cSld>
     <p:spTree>
       <p:nvGrpSpPr>
@@ -17612,14 +16182,7 @@
         <p:cNvGrpSpPr/>
         <p:nvPr/>
       </p:nvGrpSpPr>
-      <p:grpSpPr>
-        <a:xfrm>
-          <a:off x="0" y="0"/>
-          <a:ext cx="0" cy="0"/>
-          <a:chOff x="0" y="0"/>
-          <a:chExt cx="0" cy="0"/>
-        </a:xfrm>
-      </p:grpSpPr>
+      <p:grpSpPr/>
       <p:sp>
         <p:nvSpPr>
           <p:cNvPr id="2" name="TextBox 1"/>
@@ -17637,7 +16200,7 @@
           <a:noFill/>
         </p:spPr>
         <p:txBody>
-          <a:bodyPr wrap="square" lIns="0" tIns="0" rIns="0" bIns="0">
+          <a:bodyPr wrap="square" lIns="0" rIns="0" tIns="0" bIns="0">
             <a:spAutoFit/>
           </a:bodyPr>
           <a:lstStyle/>
@@ -17671,7 +16234,7 @@
           <a:noFill/>
         </p:spPr>
         <p:txBody>
-          <a:bodyPr wrap="square" lIns="0" tIns="0" rIns="0" bIns="0">
+          <a:bodyPr wrap="square" lIns="0" rIns="0" tIns="0" bIns="0">
             <a:spAutoFit/>
           </a:bodyPr>
           <a:lstStyle/>
@@ -17705,7 +16268,7 @@
           <a:noFill/>
         </p:spPr>
         <p:txBody>
-          <a:bodyPr wrap="square" lIns="0" tIns="0" rIns="0" bIns="0">
+          <a:bodyPr wrap="square" lIns="0" rIns="0" tIns="0" bIns="0">
             <a:spAutoFit/>
           </a:bodyPr>
           <a:lstStyle/>
@@ -17740,7 +16303,7 @@
           <a:noFill/>
         </p:spPr>
         <p:txBody>
-          <a:bodyPr wrap="square" lIns="0" tIns="0" rIns="0" bIns="0">
+          <a:bodyPr wrap="square" lIns="0" rIns="0" tIns="0" bIns="0">
             <a:spAutoFit/>
           </a:bodyPr>
           <a:lstStyle/>
@@ -17774,7 +16337,7 @@
           <a:noFill/>
         </p:spPr>
         <p:txBody>
-          <a:bodyPr wrap="square" lIns="0" tIns="0" rIns="0" bIns="0">
+          <a:bodyPr wrap="square" lIns="0" rIns="0" tIns="0" bIns="0">
             <a:spAutoFit/>
           </a:bodyPr>
           <a:lstStyle/>
@@ -17810,25 +16373,13 @@
                 <a:tableStyleId>{5C22544A-7EE6-4342-B048-85BDC9FD1C3A}</a:tableStyleId>
               </a:tblPr>
               <a:tblGrid>
-                <a:gridCol w="1026215">
-                  <a:extLst>
-                    <a:ext uri="{9D8B030D-6E8A-4147-A177-3AD203B41FA5}">
-                      <a16:colId xmlns:a16="http://schemas.microsoft.com/office/drawing/2014/main" val="20000"/>
-                    </a:ext>
-                  </a:extLst>
-                </a:gridCol>
-                <a:gridCol w="10031624">
-                  <a:extLst>
-                    <a:ext uri="{9D8B030D-6E8A-4147-A177-3AD203B41FA5}">
-                      <a16:colId xmlns:a16="http://schemas.microsoft.com/office/drawing/2014/main" val="20001"/>
-                    </a:ext>
-                  </a:extLst>
-                </a:gridCol>
+                <a:gridCol w="1026215"/>
+                <a:gridCol w="10031624"/>
               </a:tblGrid>
               <a:tr h="321818">
                 <a:tc>
                   <a:txBody>
-                    <a:bodyPr/>
+                    <a:bodyPr wrap="square"/>
                     <a:lstStyle/>
                     <a:p>
                       <a:pPr algn="ctr"/>
@@ -17851,7 +16402,7 @@
                 </a:tc>
                 <a:tc>
                   <a:txBody>
-                    <a:bodyPr/>
+                    <a:bodyPr wrap="square"/>
                     <a:lstStyle/>
                     <a:p>
                       <a:pPr algn="ctr"/>
@@ -17872,16 +16423,11 @@
                     </a:solidFill>
                   </a:tcPr>
                 </a:tc>
-                <a:extLst>
-                  <a:ext uri="{0D108BD9-81ED-4DB2-BD59-A6C34878D82A}">
-                    <a16:rowId xmlns:a16="http://schemas.microsoft.com/office/drawing/2014/main" val="10000"/>
-                  </a:ext>
-                </a:extLst>
               </a:tr>
               <a:tr h="321818">
                 <a:tc>
                   <a:txBody>
-                    <a:bodyPr/>
+                    <a:bodyPr wrap="square"/>
                     <a:lstStyle/>
                     <a:p>
                       <a:pPr algn="ctr"/>
@@ -17904,7 +16450,7 @@
                 </a:tc>
                 <a:tc>
                   <a:txBody>
-                    <a:bodyPr/>
+                    <a:bodyPr wrap="square"/>
                     <a:lstStyle/>
                     <a:p>
                       <a:pPr algn="l"/>
@@ -17925,16 +16471,11 @@
                     </a:solidFill>
                   </a:tcPr>
                 </a:tc>
-                <a:extLst>
-                  <a:ext uri="{0D108BD9-81ED-4DB2-BD59-A6C34878D82A}">
-                    <a16:rowId xmlns:a16="http://schemas.microsoft.com/office/drawing/2014/main" val="10001"/>
-                  </a:ext>
-                </a:extLst>
               </a:tr>
               <a:tr h="321818">
                 <a:tc>
                   <a:txBody>
-                    <a:bodyPr/>
+                    <a:bodyPr wrap="square"/>
                     <a:lstStyle/>
                     <a:p>
                       <a:pPr algn="ctr"/>
@@ -17957,79 +16498,19 @@
                 </a:tc>
                 <a:tc>
                   <a:txBody>
-                    <a:bodyPr/>
+                    <a:bodyPr wrap="square"/>
                     <a:lstStyle/>
                     <a:p>
                       <a:pPr algn="l"/>
                       <a:r>
-                        <a:rPr sz="1400" b="0" dirty="0" err="1">
-                          <a:solidFill>
-                            <a:srgbClr val="22303F"/>
-                          </a:solidFill>
-                          <a:latin typeface="Microsoft JhengHei"/>
-                        </a:rPr>
-                        <a:t>TiDB</a:t>
-                      </a:r>
-                      <a:r>
-                        <a:rPr sz="1400" b="0" dirty="0">
-                          <a:solidFill>
-                            <a:srgbClr val="22303F"/>
-                          </a:solidFill>
-                          <a:latin typeface="Microsoft JhengHei"/>
-                        </a:rPr>
-                        <a:t> </a:t>
-                      </a:r>
-                      <a:r>
-                        <a:rPr sz="1400" b="0" dirty="0" err="1">
-                          <a:solidFill>
-                            <a:srgbClr val="22303F"/>
-                          </a:solidFill>
-                          <a:latin typeface="Microsoft JhengHei"/>
-                        </a:rPr>
-                        <a:t>在本</a:t>
-                      </a:r>
-                      <a:r>
-                        <a:rPr sz="1400" b="0" dirty="0">
-                          <a:solidFill>
-                            <a:srgbClr val="22303F"/>
-                          </a:solidFill>
-                          <a:latin typeface="Microsoft JhengHei"/>
-                        </a:rPr>
-                        <a:t> PoC </a:t>
-                      </a:r>
-                      <a:r>
-                        <a:rPr sz="1400" b="0" dirty="0" err="1">
-                          <a:solidFill>
-                            <a:srgbClr val="22303F"/>
-                          </a:solidFill>
-                          <a:latin typeface="Microsoft JhengHei"/>
-                        </a:rPr>
-                        <a:t>的水平擴展與高併發穩定性較有利；PXC／Galera</a:t>
-                      </a:r>
-                      <a:r>
-                        <a:rPr sz="1400" b="0" dirty="0">
-                          <a:solidFill>
-                            <a:srgbClr val="22303F"/>
-                          </a:solidFill>
-                          <a:latin typeface="Microsoft JhengHei"/>
-                        </a:rPr>
-                        <a:t> </a:t>
-                      </a:r>
-                      <a:r>
-                        <a:rPr sz="1400" b="0" dirty="0" err="1">
-                          <a:solidFill>
-                            <a:srgbClr val="22303F"/>
-                          </a:solidFill>
-                          <a:latin typeface="Microsoft JhengHei"/>
-                        </a:rPr>
-                        <a:t>保留原生相容與低延遲對照</a:t>
-                      </a:r>
-                      <a:endParaRPr sz="1400" b="0" dirty="0">
-                        <a:solidFill>
-                          <a:srgbClr val="22303F"/>
-                        </a:solidFill>
-                        <a:latin typeface="Microsoft JhengHei"/>
-                      </a:endParaRPr>
+                        <a:rPr sz="1400" b="0">
+                          <a:solidFill>
+                            <a:srgbClr val="22303F"/>
+                          </a:solidFill>
+                          <a:latin typeface="Microsoft JhengHei"/>
+                        </a:rPr>
+                        <a:t>TiDB 在本 PoC 的水平擴展與高併發穩定性較有利；PXC／Galera 保留原生相容與低延遲對照</a:t>
+                      </a:r>
                     </a:p>
                   </a:txBody>
                   <a:tcPr marL="64008" marR="64008" marT="32004" marB="32004" anchor="ctr">
@@ -18038,16 +16519,11 @@
                     </a:solidFill>
                   </a:tcPr>
                 </a:tc>
-                <a:extLst>
-                  <a:ext uri="{0D108BD9-81ED-4DB2-BD59-A6C34878D82A}">
-                    <a16:rowId xmlns:a16="http://schemas.microsoft.com/office/drawing/2014/main" val="10002"/>
-                  </a:ext>
-                </a:extLst>
               </a:tr>
               <a:tr h="321818">
                 <a:tc>
                   <a:txBody>
-                    <a:bodyPr/>
+                    <a:bodyPr wrap="square"/>
                     <a:lstStyle/>
                     <a:p>
                       <a:pPr algn="ctr"/>
@@ -18070,45 +16546,18 @@
                 </a:tc>
                 <a:tc>
                   <a:txBody>
-                    <a:bodyPr/>
+                    <a:bodyPr wrap="square"/>
                     <a:lstStyle/>
                     <a:p>
                       <a:pPr algn="l"/>
                       <a:r>
-                        <a:rPr sz="1400" b="0" dirty="0" err="1">
-                          <a:solidFill>
-                            <a:srgbClr val="22303F"/>
-                          </a:solidFill>
-                          <a:latin typeface="Microsoft JhengHei"/>
-                        </a:rPr>
-                        <a:t>目前重視一致性、服務恢復速度、故障範圍隔離及</a:t>
-                      </a:r>
-                      <a:r>
-                        <a:rPr sz="1400" b="0" dirty="0">
-                          <a:solidFill>
-                            <a:srgbClr val="22303F"/>
-                          </a:solidFill>
-                          <a:latin typeface="Microsoft JhengHei"/>
-                        </a:rPr>
-                        <a:t> Database </a:t>
-                      </a:r>
-                      <a:r>
-                        <a:rPr sz="1400" b="0" dirty="0" err="1">
-                          <a:solidFill>
-                            <a:srgbClr val="22303F"/>
-                          </a:solidFill>
-                          <a:latin typeface="Microsoft JhengHei"/>
-                        </a:rPr>
-                        <a:t>Self-Service，未要求直接推進跨區</a:t>
-                      </a:r>
-                      <a:r>
-                        <a:rPr sz="1400" b="0" dirty="0">
-                          <a:solidFill>
-                            <a:srgbClr val="22303F"/>
-                          </a:solidFill>
-                          <a:latin typeface="Microsoft JhengHei"/>
-                        </a:rPr>
-                        <a:t> A/A</a:t>
+                        <a:rPr sz="1400" b="0">
+                          <a:solidFill>
+                            <a:srgbClr val="22303F"/>
+                          </a:solidFill>
+                          <a:latin typeface="Microsoft JhengHei"/>
+                        </a:rPr>
+                        <a:t>目前重視一致性、服務恢復速度、故障範圍隔離及 Database Self-Service，未要求直接推進跨區 A/A</a:t>
                       </a:r>
                     </a:p>
                   </a:txBody>
@@ -18118,11 +16567,6 @@
                     </a:solidFill>
                   </a:tcPr>
                 </a:tc>
-                <a:extLst>
-                  <a:ext uri="{0D108BD9-81ED-4DB2-BD59-A6C34878D82A}">
-                    <a16:rowId xmlns:a16="http://schemas.microsoft.com/office/drawing/2014/main" val="10003"/>
-                  </a:ext>
-                </a:extLst>
               </a:tr>
             </a:tbl>
           </a:graphicData>
@@ -18136,77 +16580,7 @@
         </p:nvSpPr>
         <p:spPr>
           <a:xfrm>
-            <a:off x="566928" y="3582416"/>
-            <a:ext cx="11057839" cy="603250"/>
-          </a:xfrm>
-          <a:prstGeom prst="rect">
-            <a:avLst/>
-          </a:prstGeom>
-          <a:noFill/>
-        </p:spPr>
-        <p:txBody>
-          <a:bodyPr wrap="square" lIns="0" tIns="0" rIns="0" bIns="0">
-            <a:spAutoFit/>
-          </a:bodyPr>
-          <a:lstStyle/>
-          <a:p>
-            <a:r>
-              <a:rPr sz="1900" b="1" dirty="0" err="1">
-                <a:solidFill>
-                  <a:srgbClr val="C0392B"/>
-                </a:solidFill>
-                <a:latin typeface="Microsoft JhengHei"/>
-              </a:rPr>
-              <a:t>本階段輸出</a:t>
-            </a:r>
-            <a:r>
-              <a:rPr sz="1900" b="0" dirty="0" err="1">
-                <a:solidFill>
-                  <a:srgbClr val="22303F"/>
-                </a:solidFill>
-                <a:latin typeface="Microsoft JhengHei"/>
-              </a:rPr>
-              <a:t>：應用相容性、PITR／還原、Online</a:t>
-            </a:r>
-            <a:r>
-              <a:rPr sz="1900" b="0" dirty="0">
-                <a:solidFill>
-                  <a:srgbClr val="22303F"/>
-                </a:solidFill>
-                <a:latin typeface="Microsoft JhengHei"/>
-              </a:rPr>
-              <a:t> </a:t>
-            </a:r>
-            <a:r>
-              <a:rPr sz="1900" b="0" dirty="0" err="1">
-                <a:solidFill>
-                  <a:srgbClr val="22303F"/>
-                </a:solidFill>
-                <a:latin typeface="Microsoft JhengHei"/>
-              </a:rPr>
-              <a:t>DDL、服務恢復、資源隔離、原廠支援與成本效益的可驗收結果</a:t>
-            </a:r>
-            <a:r>
-              <a:rPr sz="1900" b="0" dirty="0">
-                <a:solidFill>
-                  <a:srgbClr val="22303F"/>
-                </a:solidFill>
-                <a:latin typeface="Microsoft JhengHei"/>
-              </a:rPr>
-              <a:t>。</a:t>
-            </a:r>
-          </a:p>
-        </p:txBody>
-      </p:sp>
-      <p:sp>
-        <p:nvSpPr>
-          <p:cNvPr id="9" name="TextBox 8"/>
-          <p:cNvSpPr txBox="1"/>
-          <p:nvPr/>
-        </p:nvSpPr>
-        <p:spPr>
-          <a:xfrm>
-            <a:off x="694944" y="4350258"/>
+            <a:off x="694944" y="3618992"/>
             <a:ext cx="10929823" cy="279400"/>
           </a:xfrm>
           <a:prstGeom prst="rect">
@@ -18215,7 +16589,7 @@
           <a:noFill/>
         </p:spPr>
         <p:txBody>
-          <a:bodyPr wrap="square" lIns="0" tIns="0" rIns="0" bIns="0">
+          <a:bodyPr wrap="square" lIns="0" rIns="0" tIns="0" bIns="0">
             <a:spAutoFit/>
           </a:bodyPr>
           <a:lstStyle/>
@@ -18234,13 +16608,13 @@
       </p:sp>
       <p:sp>
         <p:nvSpPr>
-          <p:cNvPr id="10" name="Rectangle 9"/>
+          <p:cNvPr id="9" name="Rectangle 8"/>
           <p:cNvSpPr/>
           <p:nvPr/>
         </p:nvSpPr>
         <p:spPr>
           <a:xfrm>
-            <a:off x="566928" y="4350258"/>
+            <a:off x="566928" y="3618992"/>
             <a:ext cx="26000" cy="279400"/>
           </a:xfrm>
           <a:prstGeom prst="rect">
@@ -18273,7 +16647,6 @@
           <a:lstStyle/>
           <a:p>
             <a:pPr algn="ctr"/>
-            <a:endParaRPr/>
           </a:p>
         </p:txBody>
       </p:sp>
@@ -18286,7 +16659,7 @@
 </file>
 
 <file path=ppt/slides/slide9.xml><?xml version="1.0" encoding="utf-8"?>
-<p:sld xmlns:a="http://schemas.openxmlformats.org/drawingml/2006/main" xmlns:r="http://schemas.openxmlformats.org/officeDocument/2006/relationships" xmlns:p="http://schemas.openxmlformats.org/presentationml/2006/main">
+<p:sld xmlns:a="http://schemas.openxmlformats.org/drawingml/2006/main" xmlns:p="http://schemas.openxmlformats.org/presentationml/2006/main" xmlns:r="http://schemas.openxmlformats.org/officeDocument/2006/relationships">
   <p:cSld>
     <p:spTree>
       <p:nvGrpSpPr>
@@ -18294,14 +16667,7 @@
         <p:cNvGrpSpPr/>
         <p:nvPr/>
       </p:nvGrpSpPr>
-      <p:grpSpPr>
-        <a:xfrm>
-          <a:off x="0" y="0"/>
-          <a:ext cx="0" cy="0"/>
-          <a:chOff x="0" y="0"/>
-          <a:chExt cx="0" cy="0"/>
-        </a:xfrm>
-      </p:grpSpPr>
+      <p:grpSpPr/>
       <p:sp>
         <p:nvSpPr>
           <p:cNvPr id="2" name="TextBox 1"/>
@@ -18319,7 +16685,7 @@
           <a:noFill/>
         </p:spPr>
         <p:txBody>
-          <a:bodyPr wrap="square" lIns="0" tIns="0" rIns="0" bIns="0">
+          <a:bodyPr wrap="square" lIns="0" rIns="0" tIns="0" bIns="0">
             <a:spAutoFit/>
           </a:bodyPr>
           <a:lstStyle/>
@@ -18353,7 +16719,7 @@
           <a:noFill/>
         </p:spPr>
         <p:txBody>
-          <a:bodyPr wrap="square" lIns="0" tIns="0" rIns="0" bIns="0">
+          <a:bodyPr wrap="square" lIns="0" rIns="0" tIns="0" bIns="0">
             <a:spAutoFit/>
           </a:bodyPr>
           <a:lstStyle/>
@@ -18387,7 +16753,7 @@
           <a:noFill/>
         </p:spPr>
         <p:txBody>
-          <a:bodyPr wrap="square" lIns="0" tIns="0" rIns="0" bIns="0">
+          <a:bodyPr wrap="square" lIns="0" rIns="0" tIns="0" bIns="0">
             <a:spAutoFit/>
           </a:bodyPr>
           <a:lstStyle/>
@@ -18422,7 +16788,7 @@
           <a:noFill/>
         </p:spPr>
         <p:txBody>
-          <a:bodyPr wrap="square" lIns="0" tIns="0" rIns="0" bIns="0">
+          <a:bodyPr wrap="square" lIns="0" rIns="0" tIns="0" bIns="0">
             <a:spAutoFit/>
           </a:bodyPr>
           <a:lstStyle/>
@@ -18445,17 +16811,11 @@
           <p:cNvGraphicFramePr>
             <a:graphicFrameLocks noGrp="1"/>
           </p:cNvGraphicFramePr>
-          <p:nvPr>
-            <p:extLst>
-              <p:ext uri="{D42A27DB-BD31-4B8C-83A1-F6EECF244321}">
-                <p14:modId xmlns:p14="http://schemas.microsoft.com/office/powerpoint/2010/main" val="307827877"/>
-              </p:ext>
-            </p:extLst>
-          </p:nvPr>
+          <p:nvPr/>
         </p:nvGraphicFramePr>
         <p:xfrm>
           <a:off x="566928" y="1709928"/>
-          <a:ext cx="11057839" cy="3147060"/>
+          <a:ext cx="11057839" cy="3155950"/>
         </p:xfrm>
         <a:graphic>
           <a:graphicData uri="http://schemas.openxmlformats.org/drawingml/2006/table">
@@ -18464,44 +16824,20 @@
                 <a:tableStyleId>{5C22544A-7EE6-4342-B048-85BDC9FD1C3A}</a:tableStyleId>
               </a:tblPr>
               <a:tblGrid>
-                <a:gridCol w="1376856">
-                  <a:extLst>
-                    <a:ext uri="{9D8B030D-6E8A-4147-A177-3AD203B41FA5}">
-                      <a16:colId xmlns:a16="http://schemas.microsoft.com/office/drawing/2014/main" val="20000"/>
-                    </a:ext>
-                  </a:extLst>
-                </a:gridCol>
-                <a:gridCol w="1592790">
-                  <a:extLst>
-                    <a:ext uri="{9D8B030D-6E8A-4147-A177-3AD203B41FA5}">
-                      <a16:colId xmlns:a16="http://schemas.microsoft.com/office/drawing/2014/main" val="20001"/>
-                    </a:ext>
-                  </a:extLst>
-                </a:gridCol>
-                <a:gridCol w="4844494">
-                  <a:extLst>
-                    <a:ext uri="{9D8B030D-6E8A-4147-A177-3AD203B41FA5}">
-                      <a16:colId xmlns:a16="http://schemas.microsoft.com/office/drawing/2014/main" val="20002"/>
-                    </a:ext>
-                  </a:extLst>
-                </a:gridCol>
-                <a:gridCol w="3243699">
-                  <a:extLst>
-                    <a:ext uri="{9D8B030D-6E8A-4147-A177-3AD203B41FA5}">
-                      <a16:colId xmlns:a16="http://schemas.microsoft.com/office/drawing/2014/main" val="20003"/>
-                    </a:ext>
-                  </a:extLst>
-                </a:gridCol>
+                <a:gridCol w="1203706"/>
+                <a:gridCol w="1652378"/>
+                <a:gridCol w="5176903"/>
+                <a:gridCol w="3024852"/>
               </a:tblGrid>
               <a:tr h="579628">
                 <a:tc>
                   <a:txBody>
-                    <a:bodyPr/>
-                    <a:lstStyle/>
-                    <a:p>
-                      <a:pPr algn="ctr"/>
-                      <a:r>
-                        <a:rPr sz="1400" b="1" dirty="0" err="1">
+                    <a:bodyPr wrap="square"/>
+                    <a:lstStyle/>
+                    <a:p>
+                      <a:pPr algn="ctr"/>
+                      <a:r>
+                        <a:rPr sz="1400" b="1">
                           <a:solidFill>
                             <a:srgbClr val="1A2B3C"/>
                           </a:solidFill>
@@ -18509,12 +16845,6 @@
                         </a:rPr>
                         <a:t>產品</a:t>
                       </a:r>
-                      <a:endParaRPr sz="1400" b="1" dirty="0">
-                        <a:solidFill>
-                          <a:srgbClr val="1A2B3C"/>
-                        </a:solidFill>
-                        <a:latin typeface="Microsoft JhengHei"/>
-                      </a:endParaRPr>
                     </a:p>
                   </a:txBody>
                   <a:tcPr marL="64008" marR="64008" marT="32004" marB="32004" anchor="ctr">
@@ -18525,12 +16855,12 @@
                 </a:tc>
                 <a:tc>
                   <a:txBody>
-                    <a:bodyPr/>
-                    <a:lstStyle/>
-                    <a:p>
-                      <a:pPr algn="ctr"/>
-                      <a:r>
-                        <a:rPr sz="1400" b="1" dirty="0" err="1">
+                    <a:bodyPr wrap="square"/>
+                    <a:lstStyle/>
+                    <a:p>
+                      <a:pPr algn="ctr"/>
+                      <a:r>
+                        <a:rPr sz="1400" b="1">
                           <a:solidFill>
                             <a:srgbClr val="1A2B3C"/>
                           </a:solidFill>
@@ -18538,12 +16868,6 @@
                         </a:rPr>
                         <a:t>官方可追溯的支援入口</a:t>
                       </a:r>
-                      <a:endParaRPr sz="1400" b="1" dirty="0">
-                        <a:solidFill>
-                          <a:srgbClr val="1A2B3C"/>
-                        </a:solidFill>
-                        <a:latin typeface="Microsoft JhengHei"/>
-                      </a:endParaRPr>
                     </a:p>
                   </a:txBody>
                   <a:tcPr marL="64008" marR="64008" marT="32004" marB="32004" anchor="ctr">
@@ -18554,7 +16878,7 @@
                 </a:tc>
                 <a:tc>
                   <a:txBody>
-                    <a:bodyPr/>
+                    <a:bodyPr wrap="square"/>
                     <a:lstStyle/>
                     <a:p>
                       <a:pPr algn="ctr"/>
@@ -18577,7 +16901,7 @@
                 </a:tc>
                 <a:tc>
                   <a:txBody>
-                    <a:bodyPr/>
+                    <a:bodyPr wrap="square"/>
                     <a:lstStyle/>
                     <a:p>
                       <a:pPr algn="ctr"/>
@@ -18598,39 +16922,129 @@
                     </a:solidFill>
                   </a:tcPr>
                 </a:tc>
-                <a:extLst>
-                  <a:ext uri="{0D108BD9-81ED-4DB2-BD59-A6C34878D82A}">
-                    <a16:rowId xmlns:a16="http://schemas.microsoft.com/office/drawing/2014/main" val="10000"/>
-                  </a:ext>
-                </a:extLst>
+              </a:tr>
+              <a:tr h="837438">
+                <a:tc>
+                  <a:txBody>
+                    <a:bodyPr wrap="square"/>
+                    <a:lstStyle/>
+                    <a:p>
+                      <a:pPr algn="ctr"/>
+                      <a:r>
+                        <a:rPr sz="1400" b="0">
+                          <a:solidFill>
+                            <a:srgbClr val="22303F"/>
+                          </a:solidFill>
+                          <a:latin typeface="Microsoft JhengHei"/>
+                        </a:rPr>
+                        <a:t>TiDB</a:t>
+                      </a:r>
+                    </a:p>
+                  </a:txBody>
+                  <a:tcPr marL="64008" marR="64008" marT="32004" marB="32004" anchor="ctr">
+                    <a:solidFill>
+                      <a:srgbClr val="FFFFFF"/>
+                    </a:solidFill>
+                  </a:tcPr>
+                </a:tc>
+                <a:tc>
+                  <a:txBody>
+                    <a:bodyPr wrap="square"/>
+                    <a:lstStyle/>
+                    <a:p>
+                      <a:pPr algn="l"/>
+                      <a:r>
+                        <a:rPr sz="1400" b="0" u="sng">
+                          <a:solidFill>
+                            <a:srgbClr val="1B5EA8"/>
+                          </a:solidFill>
+                          <a:latin typeface="Microsoft JhengHei"/>
+                          <a:hlinkClick r:id="rId2"/>
+                        </a:rPr>
+                        <a:t>Enterprise ticket／Community</a:t>
+                      </a:r>
+                    </a:p>
+                  </a:txBody>
+                  <a:tcPr marL="64008" marR="64008" marT="32004" marB="32004" anchor="ctr">
+                    <a:solidFill>
+                      <a:srgbClr val="FFFFFF"/>
+                    </a:solidFill>
+                  </a:tcPr>
+                </a:tc>
+                <a:tc>
+                  <a:txBody>
+                    <a:bodyPr wrap="square"/>
+                    <a:lstStyle/>
+                    <a:p>
+                      <a:pPr algn="l"/>
+                      <a:r>
+                        <a:rPr sz="1400" b="0">
+                          <a:solidFill>
+                            <a:srgbClr val="22303F"/>
+                          </a:solidFill>
+                          <a:latin typeface="Microsoft JhengHei"/>
+                        </a:rPr>
+                        <a:t>v8.5 LTS Launch @ 2024-12；Community 維護 2027-12-19／延伸 2028-12-19，Enterprise 維護 2029-12-19／延伸 2030-12-19</a:t>
+                      </a:r>
+                    </a:p>
+                  </a:txBody>
+                  <a:tcPr marL="64008" marR="64008" marT="32004" marB="32004" anchor="ctr">
+                    <a:solidFill>
+                      <a:srgbClr val="FFFFFF"/>
+                    </a:solidFill>
+                  </a:tcPr>
+                </a:tc>
+                <a:tc>
+                  <a:txBody>
+                    <a:bodyPr wrap="square"/>
+                    <a:lstStyle/>
+                    <a:p>
+                      <a:pPr algn="l"/>
+                      <a:r>
+                        <a:rPr sz="1400" b="0">
+                          <a:solidFill>
+                            <a:srgbClr val="22303F"/>
+                          </a:solidFill>
+                          <a:latin typeface="Microsoft JhengHei"/>
+                        </a:rPr>
+                        <a:t>台灣時區／語言、P1 事故的回應與解決時限、根因分析、升級及現場協作</a:t>
+                      </a:r>
+                    </a:p>
+                  </a:txBody>
+                  <a:tcPr marL="64008" marR="64008" marT="32004" marB="32004" anchor="ctr">
+                    <a:solidFill>
+                      <a:srgbClr val="FFFFFF"/>
+                    </a:solidFill>
+                  </a:tcPr>
+                </a:tc>
               </a:tr>
               <a:tr h="579628">
                 <a:tc>
                   <a:txBody>
-                    <a:bodyPr/>
-                    <a:lstStyle/>
-                    <a:p>
-                      <a:pPr algn="ctr"/>
-                      <a:r>
-                        <a:rPr sz="1400" b="0">
-                          <a:solidFill>
-                            <a:srgbClr val="22303F"/>
-                          </a:solidFill>
-                          <a:latin typeface="Microsoft JhengHei"/>
-                        </a:rPr>
-                        <a:t>TiDB</a:t>
-                      </a:r>
-                    </a:p>
-                  </a:txBody>
-                  <a:tcPr marL="64008" marR="64008" marT="32004" marB="32004" anchor="ctr">
-                    <a:solidFill>
-                      <a:srgbClr val="FFFFFF"/>
-                    </a:solidFill>
-                  </a:tcPr>
-                </a:tc>
-                <a:tc>
-                  <a:txBody>
-                    <a:bodyPr/>
+                    <a:bodyPr wrap="square"/>
+                    <a:lstStyle/>
+                    <a:p>
+                      <a:pPr algn="ctr"/>
+                      <a:r>
+                        <a:rPr sz="1400" b="0">
+                          <a:solidFill>
+                            <a:srgbClr val="22303F"/>
+                          </a:solidFill>
+                          <a:latin typeface="Microsoft JhengHei"/>
+                        </a:rPr>
+                        <a:t>PXC／Galera</a:t>
+                      </a:r>
+                    </a:p>
+                  </a:txBody>
+                  <a:tcPr marL="64008" marR="64008" marT="32004" marB="32004" anchor="ctr">
+                    <a:solidFill>
+                      <a:srgbClr val="F7F9FA"/>
+                    </a:solidFill>
+                  </a:tcPr>
+                </a:tc>
+                <a:tc>
+                  <a:txBody>
+                    <a:bodyPr wrap="square"/>
                     <a:lstStyle/>
                     <a:p>
                       <a:pPr algn="l"/>
@@ -18640,151 +17054,101 @@
                             <a:srgbClr val="1B5EA8"/>
                           </a:solidFill>
                           <a:latin typeface="Microsoft JhengHei"/>
-                          <a:hlinkClick r:id="rId2"/>
-                        </a:rPr>
-                        <a:t>Enterprise ticket／Community</a:t>
-                      </a:r>
-                    </a:p>
-                  </a:txBody>
-                  <a:tcPr marL="64008" marR="64008" marT="32004" marB="32004" anchor="ctr">
-                    <a:solidFill>
-                      <a:srgbClr val="FFFFFF"/>
-                    </a:solidFill>
-                  </a:tcPr>
-                </a:tc>
-                <a:tc>
-                  <a:txBody>
-                    <a:bodyPr/>
+                          <a:hlinkClick r:id="rId3"/>
+                        </a:rPr>
+                        <a:t>Percona Support Policy</a:t>
+                      </a:r>
+                    </a:p>
+                  </a:txBody>
+                  <a:tcPr marL="64008" marR="64008" marT="32004" marB="32004" anchor="ctr">
+                    <a:solidFill>
+                      <a:srgbClr val="F7F9FA"/>
+                    </a:solidFill>
+                  </a:tcPr>
+                </a:tc>
+                <a:tc>
+                  <a:txBody>
+                    <a:bodyPr wrap="square"/>
                     <a:lstStyle/>
                     <a:p>
                       <a:pPr algn="l"/>
                       <a:r>
-                        <a:rPr sz="1400" b="0" dirty="0">
-                          <a:solidFill>
-                            <a:srgbClr val="22303F"/>
-                          </a:solidFill>
-                          <a:latin typeface="Microsoft JhengHei"/>
-                        </a:rPr>
-                        <a:t>v8.5 LTS；</a:t>
-                      </a:r>
-                      <a:endParaRPr lang="en-US" sz="1400" b="0" dirty="0">
-                        <a:solidFill>
-                          <a:srgbClr val="22303F"/>
-                        </a:solidFill>
-                        <a:latin typeface="Microsoft JhengHei"/>
-                      </a:endParaRPr>
-                    </a:p>
+                        <a:rPr sz="1400" b="0">
+                          <a:solidFill>
+                            <a:srgbClr val="22303F"/>
+                          </a:solidFill>
+                          <a:latin typeface="Microsoft JhengHei"/>
+                        </a:rPr>
+                        <a:t>8.4 持續發版中（最新 8.4.10-10，2026-07-27）；官方尚未公布 8.4 的 EOL 日期</a:t>
+                      </a:r>
+                    </a:p>
+                  </a:txBody>
+                  <a:tcPr marL="64008" marR="64008" marT="32004" marB="32004" anchor="ctr">
+                    <a:solidFill>
+                      <a:srgbClr val="F7F9FA"/>
+                    </a:solidFill>
+                  </a:tcPr>
+                </a:tc>
+                <a:tc>
+                  <a:txBody>
+                    <a:bodyPr wrap="square"/>
+                    <a:lstStyle/>
                     <a:p>
                       <a:pPr algn="l"/>
                       <a:r>
-                        <a:rPr sz="1400" b="0" dirty="0">
-                          <a:solidFill>
-                            <a:srgbClr val="22303F"/>
-                          </a:solidFill>
-                          <a:latin typeface="Microsoft JhengHei"/>
-                        </a:rPr>
-                        <a:t>Community </a:t>
-                      </a:r>
-                      <a:r>
-                        <a:rPr sz="1400" b="0" dirty="0" err="1">
-                          <a:solidFill>
-                            <a:srgbClr val="22303F"/>
-                          </a:solidFill>
-                          <a:latin typeface="Microsoft JhengHei"/>
-                        </a:rPr>
-                        <a:t>維護</a:t>
-                      </a:r>
-                      <a:r>
-                        <a:rPr sz="1400" b="0" dirty="0">
-                          <a:solidFill>
-                            <a:srgbClr val="22303F"/>
-                          </a:solidFill>
-                          <a:latin typeface="Microsoft JhengHei"/>
-                        </a:rPr>
-                        <a:t> 2027-12-19／延伸 2028-12-19，Enterprise </a:t>
-                      </a:r>
-                      <a:r>
-                        <a:rPr sz="1400" b="0" dirty="0" err="1">
-                          <a:solidFill>
-                            <a:srgbClr val="22303F"/>
-                          </a:solidFill>
-                          <a:latin typeface="Microsoft JhengHei"/>
-                        </a:rPr>
-                        <a:t>維護</a:t>
-                      </a:r>
-                      <a:r>
-                        <a:rPr sz="1400" b="0" dirty="0">
-                          <a:solidFill>
-                            <a:srgbClr val="22303F"/>
-                          </a:solidFill>
-                          <a:latin typeface="Microsoft JhengHei"/>
-                        </a:rPr>
-                        <a:t> 2029-12-19／延伸 2030-12-19</a:t>
-                      </a:r>
-                    </a:p>
-                  </a:txBody>
-                  <a:tcPr marL="64008" marR="64008" marT="32004" marB="32004" anchor="ctr">
-                    <a:solidFill>
-                      <a:srgbClr val="FFFFFF"/>
-                    </a:solidFill>
-                  </a:tcPr>
-                </a:tc>
-                <a:tc>
-                  <a:txBody>
-                    <a:bodyPr/>
-                    <a:lstStyle/>
-                    <a:p>
-                      <a:pPr algn="l"/>
-                      <a:r>
-                        <a:rPr sz="1400" b="0">
-                          <a:solidFill>
-                            <a:srgbClr val="22303F"/>
-                          </a:solidFill>
-                          <a:latin typeface="Microsoft JhengHei"/>
-                        </a:rPr>
-                        <a:t>台灣時區／語言、P1 事故的回應與解決時限、根因分析、升級及現場協作</a:t>
-                      </a:r>
-                    </a:p>
-                  </a:txBody>
-                  <a:tcPr marL="64008" marR="64008" marT="32004" marB="32004" anchor="ctr">
-                    <a:solidFill>
-                      <a:srgbClr val="FFFFFF"/>
-                    </a:solidFill>
-                  </a:tcPr>
-                </a:tc>
-                <a:extLst>
-                  <a:ext uri="{0D108BD9-81ED-4DB2-BD59-A6C34878D82A}">
-                    <a16:rowId xmlns:a16="http://schemas.microsoft.com/office/drawing/2014/main" val="10001"/>
-                  </a:ext>
-                </a:extLst>
+                        <a:rPr sz="1400" b="1">
+                          <a:solidFill>
+                            <a:srgbClr val="C0392B"/>
+                          </a:solidFill>
+                          <a:latin typeface="Microsoft JhengHei"/>
+                        </a:rPr>
+                        <a:t>現有維運人力已可覆蓋，不需原廠協助</a:t>
+                      </a:r>
+                      <a:r>
+                        <a:rPr sz="1400" b="0">
+                          <a:solidFill>
+                            <a:srgbClr val="22303F"/>
+                          </a:solidFill>
+                          <a:latin typeface="Microsoft JhengHei"/>
+                        </a:rPr>
+                        <a:t>；僅需追蹤 8.4 EOL 公告</a:t>
+                      </a:r>
+                    </a:p>
+                  </a:txBody>
+                  <a:tcPr marL="64008" marR="64008" marT="32004" marB="32004" anchor="ctr">
+                    <a:solidFill>
+                      <a:srgbClr val="F7F9FA"/>
+                    </a:solidFill>
+                  </a:tcPr>
+                </a:tc>
               </a:tr>
               <a:tr h="579628">
                 <a:tc>
                   <a:txBody>
-                    <a:bodyPr/>
-                    <a:lstStyle/>
-                    <a:p>
-                      <a:pPr algn="ctr"/>
-                      <a:r>
-                        <a:rPr sz="1400" b="0">
-                          <a:solidFill>
-                            <a:srgbClr val="22303F"/>
-                          </a:solidFill>
-                          <a:latin typeface="Microsoft JhengHei"/>
-                        </a:rPr>
-                        <a:t>PXC／Galera</a:t>
-                      </a:r>
-                    </a:p>
-                  </a:txBody>
-                  <a:tcPr marL="64008" marR="64008" marT="32004" marB="32004" anchor="ctr">
-                    <a:solidFill>
-                      <a:srgbClr val="F7F9FA"/>
-                    </a:solidFill>
-                  </a:tcPr>
-                </a:tc>
-                <a:tc>
-                  <a:txBody>
-                    <a:bodyPr/>
+                    <a:bodyPr wrap="square"/>
+                    <a:lstStyle/>
+                    <a:p>
+                      <a:pPr algn="ctr"/>
+                      <a:r>
+                        <a:rPr sz="1400" b="0">
+                          <a:solidFill>
+                            <a:srgbClr val="22303F"/>
+                          </a:solidFill>
+                          <a:latin typeface="Microsoft JhengHei"/>
+                        </a:rPr>
+                        <a:t>YugabyteDB</a:t>
+                      </a:r>
+                    </a:p>
+                  </a:txBody>
+                  <a:tcPr marL="64008" marR="64008" marT="32004" marB="32004" anchor="ctr">
+                    <a:solidFill>
+                      <a:srgbClr val="FFFFFF"/>
+                    </a:solidFill>
+                  </a:tcPr>
+                </a:tc>
+                <a:tc>
+                  <a:txBody>
+                    <a:bodyPr wrap="square"/>
                     <a:lstStyle/>
                     <a:p>
                       <a:pPr algn="l"/>
@@ -18794,21 +17158,21 @@
                             <a:srgbClr val="1B5EA8"/>
                           </a:solidFill>
                           <a:latin typeface="Microsoft JhengHei"/>
-                          <a:hlinkClick r:id="rId3"/>
-                        </a:rPr>
-                        <a:t>Percona Support Policy</a:t>
-                      </a:r>
-                    </a:p>
-                  </a:txBody>
-                  <a:tcPr marL="64008" marR="64008" marT="32004" marB="32004" anchor="ctr">
-                    <a:solidFill>
-                      <a:srgbClr val="F7F9FA"/>
-                    </a:solidFill>
-                  </a:tcPr>
-                </a:tc>
-                <a:tc>
-                  <a:txBody>
-                    <a:bodyPr/>
+                          <a:hlinkClick r:id="rId4"/>
+                        </a:rPr>
+                        <a:t>Software Support Agreement</a:t>
+                      </a:r>
+                    </a:p>
+                  </a:txBody>
+                  <a:tcPr marL="64008" marR="64008" marT="32004" marB="32004" anchor="ctr">
+                    <a:solidFill>
+                      <a:srgbClr val="FFFFFF"/>
+                    </a:solidFill>
+                  </a:tcPr>
+                </a:tc>
+                <a:tc>
+                  <a:txBody>
+                    <a:bodyPr wrap="square"/>
                     <a:lstStyle/>
                     <a:p>
                       <a:pPr algn="l"/>
@@ -18819,81 +17183,67 @@
                           </a:solidFill>
                           <a:latin typeface="Microsoft JhengHei"/>
                         </a:rPr>
-                        <a:t>8.4 持續發版中（最新 8.4.10-10，2026-07-27）；官方尚未公布 8.4 的 EOL 日期</a:t>
-                      </a:r>
-                    </a:p>
-                  </a:txBody>
-                  <a:tcPr marL="64008" marR="64008" marT="32004" marB="32004" anchor="ctr">
-                    <a:solidFill>
-                      <a:srgbClr val="F7F9FA"/>
-                    </a:solidFill>
-                  </a:tcPr>
-                </a:tc>
-                <a:tc>
-                  <a:txBody>
-                    <a:bodyPr/>
+                        <a:t>2025.2 LTS 維護至 2027-12-11、EOL 2028-06-11</a:t>
+                      </a:r>
+                    </a:p>
+                  </a:txBody>
+                  <a:tcPr marL="64008" marR="64008" marT="32004" marB="32004" anchor="ctr">
+                    <a:solidFill>
+                      <a:srgbClr val="FFFFFF"/>
+                    </a:solidFill>
+                  </a:tcPr>
+                </a:tc>
+                <a:tc>
+                  <a:txBody>
+                    <a:bodyPr wrap="square"/>
                     <a:lstStyle/>
                     <a:p>
                       <a:pPr algn="l"/>
                       <a:r>
-                        <a:rPr sz="1400" b="1">
-                          <a:solidFill>
-                            <a:srgbClr val="C0392B"/>
-                          </a:solidFill>
-                          <a:latin typeface="Microsoft JhengHei"/>
-                        </a:rPr>
-                        <a:t>現有維運人力已可覆蓋，不需原廠協助</a:t>
-                      </a:r>
-                      <a:r>
-                        <a:rPr sz="1400" b="0">
-                          <a:solidFill>
-                            <a:srgbClr val="22303F"/>
-                          </a:solidFill>
-                          <a:latin typeface="Microsoft JhengHei"/>
-                        </a:rPr>
-                        <a:t>；僅需追蹤 8.4 EOL 公告</a:t>
-                      </a:r>
-                    </a:p>
-                  </a:txBody>
-                  <a:tcPr marL="64008" marR="64008" marT="32004" marB="32004" anchor="ctr">
-                    <a:solidFill>
-                      <a:srgbClr val="F7F9FA"/>
-                    </a:solidFill>
-                  </a:tcPr>
-                </a:tc>
-                <a:extLst>
-                  <a:ext uri="{0D108BD9-81ED-4DB2-BD59-A6C34878D82A}">
-                    <a16:rowId xmlns:a16="http://schemas.microsoft.com/office/drawing/2014/main" val="10002"/>
-                  </a:ext>
-                </a:extLst>
+                        <a:rPr sz="1400" b="0">
+                          <a:solidFill>
+                            <a:srgbClr val="22303F"/>
+                          </a:solidFill>
+                          <a:latin typeface="Microsoft JhengHei"/>
+                        </a:rPr>
+                        <a:t>自管環境的支援範圍、回應窗口、根因分析與升級協作</a:t>
+                      </a:r>
+                    </a:p>
+                  </a:txBody>
+                  <a:tcPr marL="64008" marR="64008" marT="32004" marB="32004" anchor="ctr">
+                    <a:solidFill>
+                      <a:srgbClr val="FFFFFF"/>
+                    </a:solidFill>
+                  </a:tcPr>
+                </a:tc>
               </a:tr>
               <a:tr h="579628">
                 <a:tc>
                   <a:txBody>
-                    <a:bodyPr/>
-                    <a:lstStyle/>
-                    <a:p>
-                      <a:pPr algn="ctr"/>
-                      <a:r>
-                        <a:rPr sz="1400" b="0">
-                          <a:solidFill>
-                            <a:srgbClr val="22303F"/>
-                          </a:solidFill>
-                          <a:latin typeface="Microsoft JhengHei"/>
-                        </a:rPr>
-                        <a:t>YugabyteDB</a:t>
-                      </a:r>
-                    </a:p>
-                  </a:txBody>
-                  <a:tcPr marL="64008" marR="64008" marT="32004" marB="32004" anchor="ctr">
-                    <a:solidFill>
-                      <a:srgbClr val="FFFFFF"/>
-                    </a:solidFill>
-                  </a:tcPr>
-                </a:tc>
-                <a:tc>
-                  <a:txBody>
-                    <a:bodyPr/>
+                    <a:bodyPr wrap="square"/>
+                    <a:lstStyle/>
+                    <a:p>
+                      <a:pPr algn="ctr"/>
+                      <a:r>
+                        <a:rPr sz="1400" b="0">
+                          <a:solidFill>
+                            <a:srgbClr val="22303F"/>
+                          </a:solidFill>
+                          <a:latin typeface="Microsoft JhengHei"/>
+                        </a:rPr>
+                        <a:t>CockroachDB</a:t>
+                      </a:r>
+                    </a:p>
+                  </a:txBody>
+                  <a:tcPr marL="64008" marR="64008" marT="32004" marB="32004" anchor="ctr">
+                    <a:solidFill>
+                      <a:srgbClr val="F7F9FA"/>
+                    </a:solidFill>
+                  </a:tcPr>
+                </a:tc>
+                <a:tc>
+                  <a:txBody>
+                    <a:bodyPr wrap="square"/>
                     <a:lstStyle/>
                     <a:p>
                       <a:pPr algn="l"/>
@@ -18903,21 +17253,21 @@
                             <a:srgbClr val="1B5EA8"/>
                           </a:solidFill>
                           <a:latin typeface="Microsoft JhengHei"/>
-                          <a:hlinkClick r:id="rId4"/>
-                        </a:rPr>
-                        <a:t>Software Support Agreement</a:t>
-                      </a:r>
-                    </a:p>
-                  </a:txBody>
-                  <a:tcPr marL="64008" marR="64008" marT="32004" marB="32004" anchor="ctr">
-                    <a:solidFill>
-                      <a:srgbClr val="FFFFFF"/>
-                    </a:solidFill>
-                  </a:tcPr>
-                </a:tc>
-                <a:tc>
-                  <a:txBody>
-                    <a:bodyPr/>
+                          <a:hlinkClick r:id="rId5"/>
+                        </a:rPr>
+                        <a:t>Essentials／Enterprise Policy</a:t>
+                      </a:r>
+                    </a:p>
+                  </a:txBody>
+                  <a:tcPr marL="64008" marR="64008" marT="32004" marB="32004" anchor="ctr">
+                    <a:solidFill>
+                      <a:srgbClr val="F7F9FA"/>
+                    </a:solidFill>
+                  </a:tcPr>
+                </a:tc>
+                <a:tc>
+                  <a:txBody>
+                    <a:bodyPr wrap="square"/>
                     <a:lstStyle/>
                     <a:p>
                       <a:pPr algn="l"/>
@@ -18928,19 +17278,19 @@
                           </a:solidFill>
                           <a:latin typeface="Microsoft JhengHei"/>
                         </a:rPr>
-                        <a:t>2025.2 LTS 維護至 2027-12-11、EOL 2028-06-11</a:t>
-                      </a:r>
-                    </a:p>
-                  </a:txBody>
-                  <a:tcPr marL="64008" marR="64008" marT="32004" marB="32004" anchor="ctr">
-                    <a:solidFill>
-                      <a:srgbClr val="FFFFFF"/>
-                    </a:solidFill>
-                  </a:tcPr>
-                </a:tc>
-                <a:tc>
-                  <a:txBody>
-                    <a:bodyPr/>
+                        <a:t>v26.2 GA 維護至 2027-04-27</a:t>
+                      </a:r>
+                    </a:p>
+                  </a:txBody>
+                  <a:tcPr marL="64008" marR="64008" marT="32004" marB="32004" anchor="ctr">
+                    <a:solidFill>
+                      <a:srgbClr val="F7F9FA"/>
+                    </a:solidFill>
+                  </a:tcPr>
+                </a:tc>
+                <a:tc>
+                  <a:txBody>
+                    <a:bodyPr wrap="square"/>
                     <a:lstStyle/>
                     <a:p>
                       <a:pPr algn="l"/>
@@ -18951,37 +17301,7 @@
                           </a:solidFill>
                           <a:latin typeface="Microsoft JhengHei"/>
                         </a:rPr>
-                        <a:t>自管環境的支援範圍、回應窗口、根因分析與升級協作</a:t>
-                      </a:r>
-                    </a:p>
-                  </a:txBody>
-                  <a:tcPr marL="64008" marR="64008" marT="32004" marB="32004" anchor="ctr">
-                    <a:solidFill>
-                      <a:srgbClr val="FFFFFF"/>
-                    </a:solidFill>
-                  </a:tcPr>
-                </a:tc>
-                <a:extLst>
-                  <a:ext uri="{0D108BD9-81ED-4DB2-BD59-A6C34878D82A}">
-                    <a16:rowId xmlns:a16="http://schemas.microsoft.com/office/drawing/2014/main" val="10003"/>
-                  </a:ext>
-                </a:extLst>
-              </a:tr>
-              <a:tr h="579628">
-                <a:tc>
-                  <a:txBody>
-                    <a:bodyPr/>
-                    <a:lstStyle/>
-                    <a:p>
-                      <a:pPr algn="ctr"/>
-                      <a:r>
-                        <a:rPr sz="1400" b="0">
-                          <a:solidFill>
-                            <a:srgbClr val="22303F"/>
-                          </a:solidFill>
-                          <a:latin typeface="Microsoft JhengHei"/>
-                        </a:rPr>
-                        <a:t>CockroachDB</a:t>
+                        <a:t>同 YugabyteDB 困境</a:t>
                       </a:r>
                     </a:p>
                   </a:txBody>
@@ -18991,123 +17311,6 @@
                     </a:solidFill>
                   </a:tcPr>
                 </a:tc>
-                <a:tc>
-                  <a:txBody>
-                    <a:bodyPr/>
-                    <a:lstStyle/>
-                    <a:p>
-                      <a:pPr algn="l"/>
-                      <a:r>
-                        <a:rPr sz="1400" b="0" u="sng" dirty="0">
-                          <a:solidFill>
-                            <a:srgbClr val="1B5EA8"/>
-                          </a:solidFill>
-                          <a:latin typeface="Microsoft JhengHei"/>
-                          <a:hlinkClick r:id="rId5"/>
-                        </a:rPr>
-                        <a:t>Essentials／Enterprise Policy</a:t>
-                      </a:r>
-                    </a:p>
-                  </a:txBody>
-                  <a:tcPr marL="64008" marR="64008" marT="32004" marB="32004" anchor="ctr">
-                    <a:solidFill>
-                      <a:srgbClr val="F7F9FA"/>
-                    </a:solidFill>
-                  </a:tcPr>
-                </a:tc>
-                <a:tc>
-                  <a:txBody>
-                    <a:bodyPr/>
-                    <a:lstStyle/>
-                    <a:p>
-                      <a:pPr algn="l"/>
-                      <a:r>
-                        <a:rPr sz="1400" b="0">
-                          <a:solidFill>
-                            <a:srgbClr val="22303F"/>
-                          </a:solidFill>
-                          <a:latin typeface="Microsoft JhengHei"/>
-                        </a:rPr>
-                        <a:t>v26.2 GA 維護至 2027-04-27</a:t>
-                      </a:r>
-                    </a:p>
-                  </a:txBody>
-                  <a:tcPr marL="64008" marR="64008" marT="32004" marB="32004" anchor="ctr">
-                    <a:solidFill>
-                      <a:srgbClr val="F7F9FA"/>
-                    </a:solidFill>
-                  </a:tcPr>
-                </a:tc>
-                <a:tc>
-                  <a:txBody>
-                    <a:bodyPr/>
-                    <a:lstStyle/>
-                    <a:p>
-                      <a:pPr algn="l"/>
-                      <a:r>
-                        <a:rPr sz="1400" b="0" dirty="0" err="1">
-                          <a:solidFill>
-                            <a:srgbClr val="22303F"/>
-                          </a:solidFill>
-                          <a:latin typeface="Microsoft JhengHei"/>
-                        </a:rPr>
-                        <a:t>同</a:t>
-                      </a:r>
-                      <a:r>
-                        <a:rPr sz="1400" b="0" dirty="0">
-                          <a:solidFill>
-                            <a:srgbClr val="22303F"/>
-                          </a:solidFill>
-                          <a:latin typeface="Microsoft JhengHei"/>
-                        </a:rPr>
-                        <a:t> </a:t>
-                      </a:r>
-                      <a:r>
-                        <a:rPr sz="1400" b="0" dirty="0" err="1">
-                          <a:solidFill>
-                            <a:srgbClr val="22303F"/>
-                          </a:solidFill>
-                          <a:latin typeface="Microsoft JhengHei"/>
-                        </a:rPr>
-                        <a:t>YugabyteDB</a:t>
-                      </a:r>
-                      <a:r>
-                        <a:rPr sz="1400" b="0" dirty="0">
-                          <a:solidFill>
-                            <a:srgbClr val="22303F"/>
-                          </a:solidFill>
-                          <a:latin typeface="Microsoft JhengHei"/>
-                        </a:rPr>
-                        <a:t> </a:t>
-                      </a:r>
-                      <a:r>
-                        <a:rPr sz="1400" b="0" dirty="0" err="1">
-                          <a:solidFill>
-                            <a:srgbClr val="22303F"/>
-                          </a:solidFill>
-                          <a:latin typeface="Microsoft JhengHei"/>
-                        </a:rPr>
-                        <a:t>困境</a:t>
-                      </a:r>
-                      <a:endParaRPr sz="1400" b="0" dirty="0">
-                        <a:solidFill>
-                          <a:srgbClr val="22303F"/>
-                        </a:solidFill>
-                        <a:latin typeface="Microsoft JhengHei"/>
-                      </a:endParaRPr>
-                    </a:p>
-                  </a:txBody>
-                  <a:tcPr marL="64008" marR="64008" marT="32004" marB="32004" anchor="ctr">
-                    <a:solidFill>
-                      <a:srgbClr val="F7F9FA"/>
-                    </a:solidFill>
-                  </a:tcPr>
-                </a:tc>
-                <a:extLst>
-                  <a:ext uri="{0D108BD9-81ED-4DB2-BD59-A6C34878D82A}">
-                    <a16:rowId xmlns:a16="http://schemas.microsoft.com/office/drawing/2014/main" val="10004"/>
-                  </a:ext>
-                </a:extLst>
               </a:tr>
             </a:tbl>
           </a:graphicData>
@@ -19121,7 +17324,7 @@
         </p:nvSpPr>
         <p:spPr>
           <a:xfrm>
-            <a:off x="694944" y="4915124"/>
+            <a:off x="694944" y="5085334"/>
             <a:ext cx="10929823" cy="558800"/>
           </a:xfrm>
           <a:prstGeom prst="rect">
@@ -19130,7 +17333,7 @@
           <a:noFill/>
         </p:spPr>
         <p:txBody>
-          <a:bodyPr wrap="square" lIns="0" tIns="0" rIns="0" bIns="0">
+          <a:bodyPr wrap="square" lIns="0" rIns="0" tIns="0" bIns="0">
             <a:spAutoFit/>
           </a:bodyPr>
           <a:lstStyle/>
@@ -19155,7 +17358,7 @@
         </p:nvSpPr>
         <p:spPr>
           <a:xfrm>
-            <a:off x="566928" y="4915124"/>
+            <a:off x="566928" y="5085334"/>
             <a:ext cx="26000" cy="558800"/>
           </a:xfrm>
           <a:prstGeom prst="rect">
@@ -19188,7 +17391,6 @@
           <a:lstStyle/>
           <a:p>
             <a:pPr algn="ctr"/>
-            <a:endParaRPr/>
           </a:p>
         </p:txBody>
       </p:sp>

--- a/poc/1_MeetingMinutes/0821_slide.pptx
+++ b/poc/1_MeetingMinutes/0821_slide.pptx
@@ -5,28 +5,28 @@
     <p:sldMasterId id="2147483648" r:id="rId1"/>
   </p:sldMasterIdLst>
   <p:sldIdLst>
-    <p:sldId id="256" r:id="rId7"/>
-    <p:sldId id="257" r:id="rId8"/>
-    <p:sldId id="258" r:id="rId9"/>
-    <p:sldId id="259" r:id="rId10"/>
-    <p:sldId id="260" r:id="rId11"/>
-    <p:sldId id="261" r:id="rId12"/>
-    <p:sldId id="262" r:id="rId13"/>
-    <p:sldId id="263" r:id="rId14"/>
-    <p:sldId id="264" r:id="rId15"/>
-    <p:sldId id="265" r:id="rId16"/>
-    <p:sldId id="266" r:id="rId17"/>
-    <p:sldId id="267" r:id="rId18"/>
-    <p:sldId id="268" r:id="rId19"/>
-    <p:sldId id="269" r:id="rId20"/>
-    <p:sldId id="270" r:id="rId21"/>
-    <p:sldId id="271" r:id="rId22"/>
-    <p:sldId id="272" r:id="rId23"/>
-    <p:sldId id="273" r:id="rId24"/>
-    <p:sldId id="274" r:id="rId25"/>
-    <p:sldId id="275" r:id="rId26"/>
+    <p:sldId id="256" r:id="rId2"/>
+    <p:sldId id="257" r:id="rId3"/>
+    <p:sldId id="258" r:id="rId4"/>
+    <p:sldId id="259" r:id="rId5"/>
+    <p:sldId id="260" r:id="rId6"/>
+    <p:sldId id="261" r:id="rId7"/>
+    <p:sldId id="262" r:id="rId8"/>
+    <p:sldId id="263" r:id="rId9"/>
+    <p:sldId id="264" r:id="rId10"/>
+    <p:sldId id="265" r:id="rId11"/>
+    <p:sldId id="266" r:id="rId12"/>
+    <p:sldId id="267" r:id="rId13"/>
+    <p:sldId id="268" r:id="rId14"/>
+    <p:sldId id="269" r:id="rId15"/>
+    <p:sldId id="270" r:id="rId16"/>
+    <p:sldId id="271" r:id="rId17"/>
+    <p:sldId id="272" r:id="rId18"/>
+    <p:sldId id="273" r:id="rId19"/>
+    <p:sldId id="274" r:id="rId20"/>
+    <p:sldId id="275" r:id="rId21"/>
   </p:sldIdLst>
-  <p:sldSz cx="12191695" cy="6858000" type="screen4x3"/>
+  <p:sldSz cx="12192000" cy="6858000"/>
   <p:notesSz cx="6858000" cy="9144000"/>
   <p:defaultTextStyle>
     <a:defPPr>
@@ -123,6 +123,22 @@
       </a:defRPr>
     </a:lvl9pPr>
   </p:defaultTextStyle>
+  <p:extLst>
+    <p:ext uri="{EFAFB233-063F-42B5-8137-9DF3F51BA10A}">
+      <p15:sldGuideLst xmlns:p15="http://schemas.microsoft.com/office/powerpoint/2012/main">
+        <p15:guide id="1" orient="horz" pos="2160">
+          <p15:clr>
+            <a:srgbClr val="A4A3A4"/>
+          </p15:clr>
+        </p15:guide>
+        <p15:guide id="2" pos="2880">
+          <p15:clr>
+            <a:srgbClr val="A4A3A4"/>
+          </p15:clr>
+        </p15:guide>
+      </p15:sldGuideLst>
+    </p:ext>
+  </p:extLst>
 </p:presentation>
 </file>
 
@@ -164,10 +180,9 @@
           <a:lstStyle/>
           <a:p>
             <a:r>
-              <a:rPr lang="en-US" smtClean="0"/>
+              <a:rPr lang="en-US"/>
               <a:t>Click to edit Master title style</a:t>
             </a:r>
-            <a:endParaRPr lang="en-US"/>
           </a:p>
         </p:txBody>
       </p:sp>
@@ -283,10 +298,9 @@
           </a:lstStyle>
           <a:p>
             <a:r>
-              <a:rPr lang="en-US" smtClean="0"/>
+              <a:rPr lang="en-US"/>
               <a:t>Click to edit Master subtitle style</a:t>
             </a:r>
-            <a:endParaRPr lang="en-US"/>
           </a:p>
         </p:txBody>
       </p:sp>
@@ -307,7 +321,7 @@
           <a:p>
             <a:fld id="{5BCAD085-E8A6-8845-BD4E-CB4CCA059FC4}" type="datetimeFigureOut">
               <a:rPr lang="en-US" smtClean="0"/>
-              <a:t>1/27/13</a:t>
+              <a:t>8/20/26</a:t>
             </a:fld>
             <a:endParaRPr lang="en-US"/>
           </a:p>
@@ -401,10 +415,9 @@
           <a:lstStyle/>
           <a:p>
             <a:r>
-              <a:rPr lang="en-US" smtClean="0"/>
+              <a:rPr lang="en-US"/>
               <a:t>Click to edit Master title style</a:t>
             </a:r>
-            <a:endParaRPr lang="en-US"/>
           </a:p>
         </p:txBody>
       </p:sp>
@@ -425,38 +438,37 @@
           <a:p>
             <a:pPr lvl="0"/>
             <a:r>
-              <a:rPr lang="en-US" smtClean="0"/>
+              <a:rPr lang="en-US"/>
               <a:t>Click to edit Master text styles</a:t>
             </a:r>
           </a:p>
           <a:p>
             <a:pPr lvl="1"/>
             <a:r>
-              <a:rPr lang="en-US" smtClean="0"/>
+              <a:rPr lang="en-US"/>
               <a:t>Second level</a:t>
             </a:r>
           </a:p>
           <a:p>
             <a:pPr lvl="2"/>
             <a:r>
-              <a:rPr lang="en-US" smtClean="0"/>
+              <a:rPr lang="en-US"/>
               <a:t>Third level</a:t>
             </a:r>
           </a:p>
           <a:p>
             <a:pPr lvl="3"/>
             <a:r>
-              <a:rPr lang="en-US" smtClean="0"/>
+              <a:rPr lang="en-US"/>
               <a:t>Fourth level</a:t>
             </a:r>
           </a:p>
           <a:p>
             <a:pPr lvl="4"/>
             <a:r>
-              <a:rPr lang="en-US" smtClean="0"/>
+              <a:rPr lang="en-US"/>
               <a:t>Fifth level</a:t>
             </a:r>
-            <a:endParaRPr lang="en-US"/>
           </a:p>
         </p:txBody>
       </p:sp>
@@ -477,7 +489,7 @@
           <a:p>
             <a:fld id="{5BCAD085-E8A6-8845-BD4E-CB4CCA059FC4}" type="datetimeFigureOut">
               <a:rPr lang="en-US" smtClean="0"/>
-              <a:t>1/27/13</a:t>
+              <a:t>8/20/26</a:t>
             </a:fld>
             <a:endParaRPr lang="en-US"/>
           </a:p>
@@ -576,10 +588,9 @@
           <a:lstStyle/>
           <a:p>
             <a:r>
-              <a:rPr lang="en-US" smtClean="0"/>
+              <a:rPr lang="en-US"/>
               <a:t>Click to edit Master title style</a:t>
             </a:r>
-            <a:endParaRPr lang="en-US"/>
           </a:p>
         </p:txBody>
       </p:sp>
@@ -605,38 +616,37 @@
           <a:p>
             <a:pPr lvl="0"/>
             <a:r>
-              <a:rPr lang="en-US" smtClean="0"/>
+              <a:rPr lang="en-US"/>
               <a:t>Click to edit Master text styles</a:t>
             </a:r>
           </a:p>
           <a:p>
             <a:pPr lvl="1"/>
             <a:r>
-              <a:rPr lang="en-US" smtClean="0"/>
+              <a:rPr lang="en-US"/>
               <a:t>Second level</a:t>
             </a:r>
           </a:p>
           <a:p>
             <a:pPr lvl="2"/>
             <a:r>
-              <a:rPr lang="en-US" smtClean="0"/>
+              <a:rPr lang="en-US"/>
               <a:t>Third level</a:t>
             </a:r>
           </a:p>
           <a:p>
             <a:pPr lvl="3"/>
             <a:r>
-              <a:rPr lang="en-US" smtClean="0"/>
+              <a:rPr lang="en-US"/>
               <a:t>Fourth level</a:t>
             </a:r>
           </a:p>
           <a:p>
             <a:pPr lvl="4"/>
             <a:r>
-              <a:rPr lang="en-US" smtClean="0"/>
+              <a:rPr lang="en-US"/>
               <a:t>Fifth level</a:t>
             </a:r>
-            <a:endParaRPr lang="en-US"/>
           </a:p>
         </p:txBody>
       </p:sp>
@@ -657,7 +667,7 @@
           <a:p>
             <a:fld id="{5BCAD085-E8A6-8845-BD4E-CB4CCA059FC4}" type="datetimeFigureOut">
               <a:rPr lang="en-US" smtClean="0"/>
-              <a:t>1/27/13</a:t>
+              <a:t>8/20/26</a:t>
             </a:fld>
             <a:endParaRPr lang="en-US"/>
           </a:p>
@@ -751,10 +761,9 @@
           <a:lstStyle/>
           <a:p>
             <a:r>
-              <a:rPr lang="en-US" smtClean="0"/>
+              <a:rPr lang="en-US"/>
               <a:t>Click to edit Master title style</a:t>
             </a:r>
-            <a:endParaRPr lang="en-US"/>
           </a:p>
         </p:txBody>
       </p:sp>
@@ -775,38 +784,37 @@
           <a:p>
             <a:pPr lvl="0"/>
             <a:r>
-              <a:rPr lang="en-US" smtClean="0"/>
+              <a:rPr lang="en-US"/>
               <a:t>Click to edit Master text styles</a:t>
             </a:r>
           </a:p>
           <a:p>
             <a:pPr lvl="1"/>
             <a:r>
-              <a:rPr lang="en-US" smtClean="0"/>
+              <a:rPr lang="en-US"/>
               <a:t>Second level</a:t>
             </a:r>
           </a:p>
           <a:p>
             <a:pPr lvl="2"/>
             <a:r>
-              <a:rPr lang="en-US" smtClean="0"/>
+              <a:rPr lang="en-US"/>
               <a:t>Third level</a:t>
             </a:r>
           </a:p>
           <a:p>
             <a:pPr lvl="3"/>
             <a:r>
-              <a:rPr lang="en-US" smtClean="0"/>
+              <a:rPr lang="en-US"/>
               <a:t>Fourth level</a:t>
             </a:r>
           </a:p>
           <a:p>
             <a:pPr lvl="4"/>
             <a:r>
-              <a:rPr lang="en-US" smtClean="0"/>
+              <a:rPr lang="en-US"/>
               <a:t>Fifth level</a:t>
             </a:r>
-            <a:endParaRPr lang="en-US"/>
           </a:p>
         </p:txBody>
       </p:sp>
@@ -827,7 +835,7 @@
           <a:p>
             <a:fld id="{5BCAD085-E8A6-8845-BD4E-CB4CCA059FC4}" type="datetimeFigureOut">
               <a:rPr lang="en-US" smtClean="0"/>
-              <a:t>1/27/13</a:t>
+              <a:t>8/20/26</a:t>
             </a:fld>
             <a:endParaRPr lang="en-US"/>
           </a:p>
@@ -930,10 +938,9 @@
           </a:lstStyle>
           <a:p>
             <a:r>
-              <a:rPr lang="en-US" smtClean="0"/>
+              <a:rPr lang="en-US"/>
               <a:t>Click to edit Master title style</a:t>
             </a:r>
-            <a:endParaRPr lang="en-US"/>
           </a:p>
         </p:txBody>
       </p:sp>
@@ -1050,7 +1057,7 @@
           <a:p>
             <a:pPr lvl="0"/>
             <a:r>
-              <a:rPr lang="en-US" smtClean="0"/>
+              <a:rPr lang="en-US"/>
               <a:t>Click to edit Master text styles</a:t>
             </a:r>
           </a:p>
@@ -1073,7 +1080,7 @@
           <a:p>
             <a:fld id="{5BCAD085-E8A6-8845-BD4E-CB4CCA059FC4}" type="datetimeFigureOut">
               <a:rPr lang="en-US" smtClean="0"/>
-              <a:t>1/27/13</a:t>
+              <a:t>8/20/26</a:t>
             </a:fld>
             <a:endParaRPr lang="en-US"/>
           </a:p>
@@ -1167,10 +1174,9 @@
           <a:lstStyle/>
           <a:p>
             <a:r>
-              <a:rPr lang="en-US" smtClean="0"/>
+              <a:rPr lang="en-US"/>
               <a:t>Click to edit Master title style</a:t>
             </a:r>
-            <a:endParaRPr lang="en-US"/>
           </a:p>
         </p:txBody>
       </p:sp>
@@ -1224,38 +1230,37 @@
           <a:p>
             <a:pPr lvl="0"/>
             <a:r>
-              <a:rPr lang="en-US" smtClean="0"/>
+              <a:rPr lang="en-US"/>
               <a:t>Click to edit Master text styles</a:t>
             </a:r>
           </a:p>
           <a:p>
             <a:pPr lvl="1"/>
             <a:r>
-              <a:rPr lang="en-US" smtClean="0"/>
+              <a:rPr lang="en-US"/>
               <a:t>Second level</a:t>
             </a:r>
           </a:p>
           <a:p>
             <a:pPr lvl="2"/>
             <a:r>
-              <a:rPr lang="en-US" smtClean="0"/>
+              <a:rPr lang="en-US"/>
               <a:t>Third level</a:t>
             </a:r>
           </a:p>
           <a:p>
             <a:pPr lvl="3"/>
             <a:r>
-              <a:rPr lang="en-US" smtClean="0"/>
+              <a:rPr lang="en-US"/>
               <a:t>Fourth level</a:t>
             </a:r>
           </a:p>
           <a:p>
             <a:pPr lvl="4"/>
             <a:r>
-              <a:rPr lang="en-US" smtClean="0"/>
+              <a:rPr lang="en-US"/>
               <a:t>Fifth level</a:t>
             </a:r>
-            <a:endParaRPr lang="en-US"/>
           </a:p>
         </p:txBody>
       </p:sp>
@@ -1309,38 +1314,37 @@
           <a:p>
             <a:pPr lvl="0"/>
             <a:r>
-              <a:rPr lang="en-US" smtClean="0"/>
+              <a:rPr lang="en-US"/>
               <a:t>Click to edit Master text styles</a:t>
             </a:r>
           </a:p>
           <a:p>
             <a:pPr lvl="1"/>
             <a:r>
-              <a:rPr lang="en-US" smtClean="0"/>
+              <a:rPr lang="en-US"/>
               <a:t>Second level</a:t>
             </a:r>
           </a:p>
           <a:p>
             <a:pPr lvl="2"/>
             <a:r>
-              <a:rPr lang="en-US" smtClean="0"/>
+              <a:rPr lang="en-US"/>
               <a:t>Third level</a:t>
             </a:r>
           </a:p>
           <a:p>
             <a:pPr lvl="3"/>
             <a:r>
-              <a:rPr lang="en-US" smtClean="0"/>
+              <a:rPr lang="en-US"/>
               <a:t>Fourth level</a:t>
             </a:r>
           </a:p>
           <a:p>
             <a:pPr lvl="4"/>
             <a:r>
-              <a:rPr lang="en-US" smtClean="0"/>
+              <a:rPr lang="en-US"/>
               <a:t>Fifth level</a:t>
             </a:r>
-            <a:endParaRPr lang="en-US"/>
           </a:p>
         </p:txBody>
       </p:sp>
@@ -1361,7 +1365,7 @@
           <a:p>
             <a:fld id="{5BCAD085-E8A6-8845-BD4E-CB4CCA059FC4}" type="datetimeFigureOut">
               <a:rPr lang="en-US" smtClean="0"/>
-              <a:t>1/27/13</a:t>
+              <a:t>8/20/26</a:t>
             </a:fld>
             <a:endParaRPr lang="en-US"/>
           </a:p>
@@ -1459,10 +1463,9 @@
           </a:lstStyle>
           <a:p>
             <a:r>
-              <a:rPr lang="en-US" smtClean="0"/>
+              <a:rPr lang="en-US"/>
               <a:t>Click to edit Master title style</a:t>
             </a:r>
-            <a:endParaRPr lang="en-US"/>
           </a:p>
         </p:txBody>
       </p:sp>
@@ -1525,7 +1528,7 @@
           <a:p>
             <a:pPr lvl="0"/>
             <a:r>
-              <a:rPr lang="en-US" smtClean="0"/>
+              <a:rPr lang="en-US"/>
               <a:t>Click to edit Master text styles</a:t>
             </a:r>
           </a:p>
@@ -1581,38 +1584,37 @@
           <a:p>
             <a:pPr lvl="0"/>
             <a:r>
-              <a:rPr lang="en-US" smtClean="0"/>
+              <a:rPr lang="en-US"/>
               <a:t>Click to edit Master text styles</a:t>
             </a:r>
           </a:p>
           <a:p>
             <a:pPr lvl="1"/>
             <a:r>
-              <a:rPr lang="en-US" smtClean="0"/>
+              <a:rPr lang="en-US"/>
               <a:t>Second level</a:t>
             </a:r>
           </a:p>
           <a:p>
             <a:pPr lvl="2"/>
             <a:r>
-              <a:rPr lang="en-US" smtClean="0"/>
+              <a:rPr lang="en-US"/>
               <a:t>Third level</a:t>
             </a:r>
           </a:p>
           <a:p>
             <a:pPr lvl="3"/>
             <a:r>
-              <a:rPr lang="en-US" smtClean="0"/>
+              <a:rPr lang="en-US"/>
               <a:t>Fourth level</a:t>
             </a:r>
           </a:p>
           <a:p>
             <a:pPr lvl="4"/>
             <a:r>
-              <a:rPr lang="en-US" smtClean="0"/>
+              <a:rPr lang="en-US"/>
               <a:t>Fifth level</a:t>
             </a:r>
-            <a:endParaRPr lang="en-US"/>
           </a:p>
         </p:txBody>
       </p:sp>
@@ -1675,7 +1677,7 @@
           <a:p>
             <a:pPr lvl="0"/>
             <a:r>
-              <a:rPr lang="en-US" smtClean="0"/>
+              <a:rPr lang="en-US"/>
               <a:t>Click to edit Master text styles</a:t>
             </a:r>
           </a:p>
@@ -1731,38 +1733,37 @@
           <a:p>
             <a:pPr lvl="0"/>
             <a:r>
-              <a:rPr lang="en-US" smtClean="0"/>
+              <a:rPr lang="en-US"/>
               <a:t>Click to edit Master text styles</a:t>
             </a:r>
           </a:p>
           <a:p>
             <a:pPr lvl="1"/>
             <a:r>
-              <a:rPr lang="en-US" smtClean="0"/>
+              <a:rPr lang="en-US"/>
               <a:t>Second level</a:t>
             </a:r>
           </a:p>
           <a:p>
             <a:pPr lvl="2"/>
             <a:r>
-              <a:rPr lang="en-US" smtClean="0"/>
+              <a:rPr lang="en-US"/>
               <a:t>Third level</a:t>
             </a:r>
           </a:p>
           <a:p>
             <a:pPr lvl="3"/>
             <a:r>
-              <a:rPr lang="en-US" smtClean="0"/>
+              <a:rPr lang="en-US"/>
               <a:t>Fourth level</a:t>
             </a:r>
           </a:p>
           <a:p>
             <a:pPr lvl="4"/>
             <a:r>
-              <a:rPr lang="en-US" smtClean="0"/>
+              <a:rPr lang="en-US"/>
               <a:t>Fifth level</a:t>
             </a:r>
-            <a:endParaRPr lang="en-US"/>
           </a:p>
         </p:txBody>
       </p:sp>
@@ -1783,7 +1784,7 @@
           <a:p>
             <a:fld id="{5BCAD085-E8A6-8845-BD4E-CB4CCA059FC4}" type="datetimeFigureOut">
               <a:rPr lang="en-US" smtClean="0"/>
-              <a:t>1/27/13</a:t>
+              <a:t>8/20/26</a:t>
             </a:fld>
             <a:endParaRPr lang="en-US"/>
           </a:p>
@@ -1877,10 +1878,9 @@
           <a:lstStyle/>
           <a:p>
             <a:r>
-              <a:rPr lang="en-US" smtClean="0"/>
+              <a:rPr lang="en-US"/>
               <a:t>Click to edit Master title style</a:t>
             </a:r>
-            <a:endParaRPr lang="en-US"/>
           </a:p>
         </p:txBody>
       </p:sp>
@@ -1901,7 +1901,7 @@
           <a:p>
             <a:fld id="{5BCAD085-E8A6-8845-BD4E-CB4CCA059FC4}" type="datetimeFigureOut">
               <a:rPr lang="en-US" smtClean="0"/>
-              <a:t>1/27/13</a:t>
+              <a:t>8/20/26</a:t>
             </a:fld>
             <a:endParaRPr lang="en-US"/>
           </a:p>
@@ -1996,7 +1996,7 @@
           <a:p>
             <a:fld id="{5BCAD085-E8A6-8845-BD4E-CB4CCA059FC4}" type="datetimeFigureOut">
               <a:rPr lang="en-US" smtClean="0"/>
-              <a:t>1/27/13</a:t>
+              <a:t>8/20/26</a:t>
             </a:fld>
             <a:endParaRPr lang="en-US"/>
           </a:p>
@@ -2099,10 +2099,9 @@
           </a:lstStyle>
           <a:p>
             <a:r>
-              <a:rPr lang="en-US" smtClean="0"/>
+              <a:rPr lang="en-US"/>
               <a:t>Click to edit Master title style</a:t>
             </a:r>
-            <a:endParaRPr lang="en-US"/>
           </a:p>
         </p:txBody>
       </p:sp>
@@ -2156,38 +2155,37 @@
           <a:p>
             <a:pPr lvl="0"/>
             <a:r>
-              <a:rPr lang="en-US" smtClean="0"/>
+              <a:rPr lang="en-US"/>
               <a:t>Click to edit Master text styles</a:t>
             </a:r>
           </a:p>
           <a:p>
             <a:pPr lvl="1"/>
             <a:r>
-              <a:rPr lang="en-US" smtClean="0"/>
+              <a:rPr lang="en-US"/>
               <a:t>Second level</a:t>
             </a:r>
           </a:p>
           <a:p>
             <a:pPr lvl="2"/>
             <a:r>
-              <a:rPr lang="en-US" smtClean="0"/>
+              <a:rPr lang="en-US"/>
               <a:t>Third level</a:t>
             </a:r>
           </a:p>
           <a:p>
             <a:pPr lvl="3"/>
             <a:r>
-              <a:rPr lang="en-US" smtClean="0"/>
+              <a:rPr lang="en-US"/>
               <a:t>Fourth level</a:t>
             </a:r>
           </a:p>
           <a:p>
             <a:pPr lvl="4"/>
             <a:r>
-              <a:rPr lang="en-US" smtClean="0"/>
+              <a:rPr lang="en-US"/>
               <a:t>Fifth level</a:t>
             </a:r>
-            <a:endParaRPr lang="en-US"/>
           </a:p>
         </p:txBody>
       </p:sp>
@@ -2250,7 +2248,7 @@
           <a:p>
             <a:pPr lvl="0"/>
             <a:r>
-              <a:rPr lang="en-US" smtClean="0"/>
+              <a:rPr lang="en-US"/>
               <a:t>Click to edit Master text styles</a:t>
             </a:r>
           </a:p>
@@ -2273,7 +2271,7 @@
           <a:p>
             <a:fld id="{5BCAD085-E8A6-8845-BD4E-CB4CCA059FC4}" type="datetimeFigureOut">
               <a:rPr lang="en-US" smtClean="0"/>
-              <a:t>1/27/13</a:t>
+              <a:t>8/20/26</a:t>
             </a:fld>
             <a:endParaRPr lang="en-US"/>
           </a:p>
@@ -2376,10 +2374,9 @@
           </a:lstStyle>
           <a:p>
             <a:r>
-              <a:rPr lang="en-US" smtClean="0"/>
+              <a:rPr lang="en-US"/>
               <a:t>Click to edit Master title style</a:t>
             </a:r>
-            <a:endParaRPr lang="en-US"/>
           </a:p>
         </p:txBody>
       </p:sp>
@@ -2503,7 +2500,7 @@
           <a:p>
             <a:pPr lvl="0"/>
             <a:r>
-              <a:rPr lang="en-US" smtClean="0"/>
+              <a:rPr lang="en-US"/>
               <a:t>Click to edit Master text styles</a:t>
             </a:r>
           </a:p>
@@ -2526,7 +2523,7 @@
           <a:p>
             <a:fld id="{5BCAD085-E8A6-8845-BD4E-CB4CCA059FC4}" type="datetimeFigureOut">
               <a:rPr lang="en-US" smtClean="0"/>
-              <a:t>1/27/13</a:t>
+              <a:t>8/20/26</a:t>
             </a:fld>
             <a:endParaRPr lang="en-US"/>
           </a:p>
@@ -2635,10 +2632,9 @@
           <a:lstStyle/>
           <a:p>
             <a:r>
-              <a:rPr lang="en-US" smtClean="0"/>
+              <a:rPr lang="en-US"/>
               <a:t>Click to edit Master title style</a:t>
             </a:r>
-            <a:endParaRPr lang="en-US"/>
           </a:p>
         </p:txBody>
       </p:sp>
@@ -2669,38 +2665,37 @@
           <a:p>
             <a:pPr lvl="0"/>
             <a:r>
-              <a:rPr lang="en-US" smtClean="0"/>
+              <a:rPr lang="en-US"/>
               <a:t>Click to edit Master text styles</a:t>
             </a:r>
           </a:p>
           <a:p>
             <a:pPr lvl="1"/>
             <a:r>
-              <a:rPr lang="en-US" smtClean="0"/>
+              <a:rPr lang="en-US"/>
               <a:t>Second level</a:t>
             </a:r>
           </a:p>
           <a:p>
             <a:pPr lvl="2"/>
             <a:r>
-              <a:rPr lang="en-US" smtClean="0"/>
+              <a:rPr lang="en-US"/>
               <a:t>Third level</a:t>
             </a:r>
           </a:p>
           <a:p>
             <a:pPr lvl="3"/>
             <a:r>
-              <a:rPr lang="en-US" smtClean="0"/>
+              <a:rPr lang="en-US"/>
               <a:t>Fourth level</a:t>
             </a:r>
           </a:p>
           <a:p>
             <a:pPr lvl="4"/>
             <a:r>
-              <a:rPr lang="en-US" smtClean="0"/>
+              <a:rPr lang="en-US"/>
               <a:t>Fifth level</a:t>
             </a:r>
-            <a:endParaRPr lang="en-US"/>
           </a:p>
         </p:txBody>
       </p:sp>
@@ -2739,7 +2734,7 @@
           <a:p>
             <a:fld id="{5BCAD085-E8A6-8845-BD4E-CB4CCA059FC4}" type="datetimeFigureOut">
               <a:rPr lang="en-US" smtClean="0"/>
-              <a:t>1/27/13</a:t>
+              <a:t>8/20/26</a:t>
             </a:fld>
             <a:endParaRPr lang="en-US"/>
           </a:p>
@@ -3098,7 +3093,7 @@
 </file>
 
 <file path=ppt/slides/slide1.xml><?xml version="1.0" encoding="utf-8"?>
-<p:sld xmlns:a="http://schemas.openxmlformats.org/drawingml/2006/main" xmlns:p="http://schemas.openxmlformats.org/presentationml/2006/main" xmlns:r="http://schemas.openxmlformats.org/officeDocument/2006/relationships">
+<p:sld xmlns:a="http://schemas.openxmlformats.org/drawingml/2006/main" xmlns:r="http://schemas.openxmlformats.org/officeDocument/2006/relationships" xmlns:p="http://schemas.openxmlformats.org/presentationml/2006/main">
   <p:cSld>
     <p:spTree>
       <p:nvGrpSpPr>
@@ -3106,7 +3101,14 @@
         <p:cNvGrpSpPr/>
         <p:nvPr/>
       </p:nvGrpSpPr>
-      <p:grpSpPr/>
+      <p:grpSpPr>
+        <a:xfrm>
+          <a:off x="0" y="0"/>
+          <a:ext cx="0" cy="0"/>
+          <a:chOff x="0" y="0"/>
+          <a:chExt cx="0" cy="0"/>
+        </a:xfrm>
+      </p:grpSpPr>
       <p:sp>
         <p:nvSpPr>
           <p:cNvPr id="2" name="TextBox 1"/>
@@ -3124,7 +3126,7 @@
           <a:noFill/>
         </p:spPr>
         <p:txBody>
-          <a:bodyPr wrap="square" lIns="0" rIns="0" tIns="0" bIns="0">
+          <a:bodyPr wrap="square" lIns="0" tIns="0" rIns="0" bIns="0">
             <a:spAutoFit/>
           </a:bodyPr>
           <a:lstStyle/>
@@ -3158,7 +3160,7 @@
           <a:noFill/>
         </p:spPr>
         <p:txBody>
-          <a:bodyPr wrap="square" lIns="0" rIns="0" tIns="0" bIns="0">
+          <a:bodyPr wrap="square" lIns="0" tIns="0" rIns="0" bIns="0">
             <a:spAutoFit/>
           </a:bodyPr>
           <a:lstStyle/>
@@ -3193,7 +3195,7 @@
           <a:noFill/>
         </p:spPr>
         <p:txBody>
-          <a:bodyPr wrap="square" lIns="0" rIns="0" tIns="0" bIns="0">
+          <a:bodyPr wrap="square" lIns="0" tIns="0" rIns="0" bIns="0">
             <a:spAutoFit/>
           </a:bodyPr>
           <a:lstStyle/>
@@ -3228,7 +3230,7 @@
           <a:noFill/>
         </p:spPr>
         <p:txBody>
-          <a:bodyPr wrap="square" lIns="0" rIns="0" tIns="0" bIns="0">
+          <a:bodyPr wrap="square" lIns="0" tIns="0" rIns="0" bIns="0">
             <a:spAutoFit/>
           </a:bodyPr>
           <a:lstStyle/>
@@ -3255,7 +3257,7 @@
 </file>
 
 <file path=ppt/slides/slide10.xml><?xml version="1.0" encoding="utf-8"?>
-<p:sld xmlns:a="http://schemas.openxmlformats.org/drawingml/2006/main" xmlns:p="http://schemas.openxmlformats.org/presentationml/2006/main" xmlns:r="http://schemas.openxmlformats.org/officeDocument/2006/relationships">
+<p:sld xmlns:a="http://schemas.openxmlformats.org/drawingml/2006/main" xmlns:r="http://schemas.openxmlformats.org/officeDocument/2006/relationships" xmlns:p="http://schemas.openxmlformats.org/presentationml/2006/main">
   <p:cSld>
     <p:spTree>
       <p:nvGrpSpPr>
@@ -3263,7 +3265,14 @@
         <p:cNvGrpSpPr/>
         <p:nvPr/>
       </p:nvGrpSpPr>
-      <p:grpSpPr/>
+      <p:grpSpPr>
+        <a:xfrm>
+          <a:off x="0" y="0"/>
+          <a:ext cx="0" cy="0"/>
+          <a:chOff x="0" y="0"/>
+          <a:chExt cx="0" cy="0"/>
+        </a:xfrm>
+      </p:grpSpPr>
       <p:sp>
         <p:nvSpPr>
           <p:cNvPr id="2" name="TextBox 1"/>
@@ -3281,7 +3290,7 @@
           <a:noFill/>
         </p:spPr>
         <p:txBody>
-          <a:bodyPr wrap="square" lIns="0" rIns="0" tIns="0" bIns="0">
+          <a:bodyPr wrap="square" lIns="0" tIns="0" rIns="0" bIns="0">
             <a:spAutoFit/>
           </a:bodyPr>
           <a:lstStyle/>
@@ -3315,7 +3324,7 @@
           <a:noFill/>
         </p:spPr>
         <p:txBody>
-          <a:bodyPr wrap="square" lIns="0" rIns="0" tIns="0" bIns="0">
+          <a:bodyPr wrap="square" lIns="0" tIns="0" rIns="0" bIns="0">
             <a:spAutoFit/>
           </a:bodyPr>
           <a:lstStyle/>
@@ -3349,7 +3358,7 @@
           <a:noFill/>
         </p:spPr>
         <p:txBody>
-          <a:bodyPr wrap="square" lIns="0" rIns="0" tIns="0" bIns="0">
+          <a:bodyPr wrap="square" lIns="0" tIns="0" rIns="0" bIns="0">
             <a:spAutoFit/>
           </a:bodyPr>
           <a:lstStyle/>
@@ -3384,7 +3393,7 @@
           <a:noFill/>
         </p:spPr>
         <p:txBody>
-          <a:bodyPr wrap="square" lIns="0" rIns="0" tIns="0" bIns="0">
+          <a:bodyPr wrap="square" lIns="0" tIns="0" rIns="0" bIns="0">
             <a:spAutoFit/>
           </a:bodyPr>
           <a:lstStyle/>
@@ -3418,7 +3427,7 @@
           <a:noFill/>
         </p:spPr>
         <p:txBody>
-          <a:bodyPr wrap="square" lIns="0" rIns="0" tIns="0" bIns="0">
+          <a:bodyPr wrap="square" lIns="0" tIns="0" rIns="0" bIns="0">
             <a:spAutoFit/>
           </a:bodyPr>
           <a:lstStyle/>
@@ -3658,7 +3667,7 @@
 </file>
 
 <file path=ppt/slides/slide11.xml><?xml version="1.0" encoding="utf-8"?>
-<p:sld xmlns:a="http://schemas.openxmlformats.org/drawingml/2006/main" xmlns:p="http://schemas.openxmlformats.org/presentationml/2006/main" xmlns:r="http://schemas.openxmlformats.org/officeDocument/2006/relationships">
+<p:sld xmlns:a="http://schemas.openxmlformats.org/drawingml/2006/main" xmlns:r="http://schemas.openxmlformats.org/officeDocument/2006/relationships" xmlns:p="http://schemas.openxmlformats.org/presentationml/2006/main">
   <p:cSld>
     <p:spTree>
       <p:nvGrpSpPr>
@@ -3666,7 +3675,14 @@
         <p:cNvGrpSpPr/>
         <p:nvPr/>
       </p:nvGrpSpPr>
-      <p:grpSpPr/>
+      <p:grpSpPr>
+        <a:xfrm>
+          <a:off x="0" y="0"/>
+          <a:ext cx="0" cy="0"/>
+          <a:chOff x="0" y="0"/>
+          <a:chExt cx="0" cy="0"/>
+        </a:xfrm>
+      </p:grpSpPr>
       <p:sp>
         <p:nvSpPr>
           <p:cNvPr id="2" name="TextBox 1"/>
@@ -3684,7 +3700,7 @@
           <a:noFill/>
         </p:spPr>
         <p:txBody>
-          <a:bodyPr wrap="square" lIns="0" rIns="0" tIns="0" bIns="0">
+          <a:bodyPr wrap="square" lIns="0" tIns="0" rIns="0" bIns="0">
             <a:spAutoFit/>
           </a:bodyPr>
           <a:lstStyle/>
@@ -3718,7 +3734,7 @@
           <a:noFill/>
         </p:spPr>
         <p:txBody>
-          <a:bodyPr wrap="square" lIns="0" rIns="0" tIns="0" bIns="0">
+          <a:bodyPr wrap="square" lIns="0" tIns="0" rIns="0" bIns="0">
             <a:spAutoFit/>
           </a:bodyPr>
           <a:lstStyle/>
@@ -3752,7 +3768,7 @@
           <a:noFill/>
         </p:spPr>
         <p:txBody>
-          <a:bodyPr wrap="square" lIns="0" rIns="0" tIns="0" bIns="0">
+          <a:bodyPr wrap="square" lIns="0" tIns="0" rIns="0" bIns="0">
             <a:spAutoFit/>
           </a:bodyPr>
           <a:lstStyle/>
@@ -3787,7 +3803,7 @@
           <a:noFill/>
         </p:spPr>
         <p:txBody>
-          <a:bodyPr wrap="square" lIns="0" rIns="0" tIns="0" bIns="0">
+          <a:bodyPr wrap="square" lIns="0" tIns="0" rIns="0" bIns="0">
             <a:spAutoFit/>
           </a:bodyPr>
           <a:lstStyle/>
@@ -3814,7 +3830,7 @@
         </p:nvGraphicFramePr>
         <p:xfrm>
           <a:off x="566928" y="1709928"/>
-          <a:ext cx="11057839" cy="2768346"/>
+          <a:ext cx="11057839" cy="2817876"/>
         </p:xfrm>
         <a:graphic>
           <a:graphicData uri="http://schemas.openxmlformats.org/drawingml/2006/table">
@@ -3823,14 +3839,32 @@
                 <a:tableStyleId>{5C22544A-7EE6-4342-B048-85BDC9FD1C3A}</a:tableStyleId>
               </a:tblPr>
               <a:tblGrid>
-                <a:gridCol w="1374988"/>
-                <a:gridCol w="4723341"/>
-                <a:gridCol w="4959510"/>
+                <a:gridCol w="1374988">
+                  <a:extLst>
+                    <a:ext uri="{9D8B030D-6E8A-4147-A177-3AD203B41FA5}">
+                      <a16:colId xmlns:a16="http://schemas.microsoft.com/office/drawing/2014/main" val="20000"/>
+                    </a:ext>
+                  </a:extLst>
+                </a:gridCol>
+                <a:gridCol w="4723341">
+                  <a:extLst>
+                    <a:ext uri="{9D8B030D-6E8A-4147-A177-3AD203B41FA5}">
+                      <a16:colId xmlns:a16="http://schemas.microsoft.com/office/drawing/2014/main" val="20001"/>
+                    </a:ext>
+                  </a:extLst>
+                </a:gridCol>
+                <a:gridCol w="4959510">
+                  <a:extLst>
+                    <a:ext uri="{9D8B030D-6E8A-4147-A177-3AD203B41FA5}">
+                      <a16:colId xmlns:a16="http://schemas.microsoft.com/office/drawing/2014/main" val="20002"/>
+                    </a:ext>
+                  </a:extLst>
+                </a:gridCol>
               </a:tblGrid>
               <a:tr h="321818">
                 <a:tc>
                   <a:txBody>
-                    <a:bodyPr wrap="square"/>
+                    <a:bodyPr/>
                     <a:lstStyle/>
                     <a:p>
                       <a:pPr algn="ctr"/>
@@ -3853,7 +3887,7 @@
                 </a:tc>
                 <a:tc>
                   <a:txBody>
-                    <a:bodyPr wrap="square"/>
+                    <a:bodyPr/>
                     <a:lstStyle/>
                     <a:p>
                       <a:pPr algn="ctr"/>
@@ -3876,7 +3910,7 @@
                 </a:tc>
                 <a:tc>
                   <a:txBody>
-                    <a:bodyPr wrap="square"/>
+                    <a:bodyPr/>
                     <a:lstStyle/>
                     <a:p>
                       <a:pPr algn="ctr"/>
@@ -3897,11 +3931,16 @@
                     </a:solidFill>
                   </a:tcPr>
                 </a:tc>
+                <a:extLst>
+                  <a:ext uri="{0D108BD9-81ED-4DB2-BD59-A6C34878D82A}">
+                    <a16:rowId xmlns:a16="http://schemas.microsoft.com/office/drawing/2014/main" val="10000"/>
+                  </a:ext>
+                </a:extLst>
               </a:tr>
               <a:tr h="579628">
                 <a:tc>
                   <a:txBody>
-                    <a:bodyPr wrap="square"/>
+                    <a:bodyPr/>
                     <a:lstStyle/>
                     <a:p>
                       <a:pPr algn="ctr"/>
@@ -3933,7 +3972,7 @@
                 </a:tc>
                 <a:tc>
                   <a:txBody>
-                    <a:bodyPr wrap="square"/>
+                    <a:bodyPr/>
                     <a:lstStyle/>
                     <a:p>
                       <a:pPr algn="l"/>
@@ -3956,7 +3995,7 @@
                 </a:tc>
                 <a:tc>
                   <a:txBody>
-                    <a:bodyPr wrap="square"/>
+                    <a:bodyPr/>
                     <a:lstStyle/>
                     <a:p>
                       <a:pPr algn="l"/>
@@ -3977,14 +4016,20 @@
                     </a:solidFill>
                   </a:tcPr>
                 </a:tc>
+                <a:extLst>
+                  <a:ext uri="{0D108BD9-81ED-4DB2-BD59-A6C34878D82A}">
+                    <a16:rowId xmlns:a16="http://schemas.microsoft.com/office/drawing/2014/main" val="10001"/>
+                  </a:ext>
+                </a:extLst>
               </a:tr>
               <a:tr h="321818">
                 <a:tc>
                   <a:txBody>
-                    <a:bodyPr wrap="square"/>
+                    <a:bodyPr/>
                     <a:lstStyle/>
                     <a:p>
                       <a:pPr algn="ctr"/>
+                      <a:endParaRPr/>
                     </a:p>
                   </a:txBody>
                   <a:tcPr marL="64008" marR="64008" marT="32004" marB="32004" anchor="ctr">
@@ -3995,7 +4040,7 @@
                 </a:tc>
                 <a:tc>
                   <a:txBody>
-                    <a:bodyPr wrap="square"/>
+                    <a:bodyPr/>
                     <a:lstStyle/>
                     <a:p>
                       <a:pPr algn="l"/>
@@ -4018,7 +4063,7 @@
                 </a:tc>
                 <a:tc>
                   <a:txBody>
-                    <a:bodyPr wrap="square"/>
+                    <a:bodyPr/>
                     <a:lstStyle/>
                     <a:p>
                       <a:pPr algn="l"/>
@@ -4039,11 +4084,16 @@
                     </a:solidFill>
                   </a:tcPr>
                 </a:tc>
+                <a:extLst>
+                  <a:ext uri="{0D108BD9-81ED-4DB2-BD59-A6C34878D82A}">
+                    <a16:rowId xmlns:a16="http://schemas.microsoft.com/office/drawing/2014/main" val="10002"/>
+                  </a:ext>
+                </a:extLst>
               </a:tr>
               <a:tr h="579628">
                 <a:tc>
                   <a:txBody>
-                    <a:bodyPr wrap="square"/>
+                    <a:bodyPr/>
                     <a:lstStyle/>
                     <a:p>
                       <a:pPr algn="ctr"/>
@@ -4075,7 +4125,7 @@
                 </a:tc>
                 <a:tc>
                   <a:txBody>
-                    <a:bodyPr wrap="square"/>
+                    <a:bodyPr/>
                     <a:lstStyle/>
                     <a:p>
                       <a:pPr algn="l"/>
@@ -4098,7 +4148,7 @@
                 </a:tc>
                 <a:tc>
                   <a:txBody>
-                    <a:bodyPr wrap="square"/>
+                    <a:bodyPr/>
                     <a:lstStyle/>
                     <a:p>
                       <a:pPr algn="l"/>
@@ -4119,14 +4169,20 @@
                     </a:solidFill>
                   </a:tcPr>
                 </a:tc>
+                <a:extLst>
+                  <a:ext uri="{0D108BD9-81ED-4DB2-BD59-A6C34878D82A}">
+                    <a16:rowId xmlns:a16="http://schemas.microsoft.com/office/drawing/2014/main" val="10003"/>
+                  </a:ext>
+                </a:extLst>
               </a:tr>
               <a:tr h="321818">
                 <a:tc>
                   <a:txBody>
-                    <a:bodyPr wrap="square"/>
+                    <a:bodyPr/>
                     <a:lstStyle/>
                     <a:p>
                       <a:pPr algn="ctr"/>
+                      <a:endParaRPr/>
                     </a:p>
                   </a:txBody>
                   <a:tcPr marL="64008" marR="64008" marT="32004" marB="32004" anchor="ctr">
@@ -4137,7 +4193,7 @@
                 </a:tc>
                 <a:tc>
                   <a:txBody>
-                    <a:bodyPr wrap="square"/>
+                    <a:bodyPr/>
                     <a:lstStyle/>
                     <a:p>
                       <a:pPr algn="l"/>
@@ -4160,7 +4216,7 @@
                 </a:tc>
                 <a:tc>
                   <a:txBody>
-                    <a:bodyPr wrap="square"/>
+                    <a:bodyPr/>
                     <a:lstStyle/>
                     <a:p>
                       <a:pPr algn="l"/>
@@ -4181,11 +4237,16 @@
                     </a:solidFill>
                   </a:tcPr>
                 </a:tc>
+                <a:extLst>
+                  <a:ext uri="{0D108BD9-81ED-4DB2-BD59-A6C34878D82A}">
+                    <a16:rowId xmlns:a16="http://schemas.microsoft.com/office/drawing/2014/main" val="10004"/>
+                  </a:ext>
+                </a:extLst>
               </a:tr>
               <a:tr h="321818">
                 <a:tc>
                   <a:txBody>
-                    <a:bodyPr wrap="square"/>
+                    <a:bodyPr/>
                     <a:lstStyle/>
                     <a:p>
                       <a:pPr algn="ctr"/>
@@ -4217,7 +4278,7 @@
                 </a:tc>
                 <a:tc>
                   <a:txBody>
-                    <a:bodyPr wrap="square"/>
+                    <a:bodyPr/>
                     <a:lstStyle/>
                     <a:p>
                       <a:pPr algn="l"/>
@@ -4240,7 +4301,7 @@
                 </a:tc>
                 <a:tc>
                   <a:txBody>
-                    <a:bodyPr wrap="square"/>
+                    <a:bodyPr/>
                     <a:lstStyle/>
                     <a:p>
                       <a:pPr algn="l"/>
@@ -4261,14 +4322,20 @@
                     </a:solidFill>
                   </a:tcPr>
                 </a:tc>
+                <a:extLst>
+                  <a:ext uri="{0D108BD9-81ED-4DB2-BD59-A6C34878D82A}">
+                    <a16:rowId xmlns:a16="http://schemas.microsoft.com/office/drawing/2014/main" val="10005"/>
+                  </a:ext>
+                </a:extLst>
               </a:tr>
               <a:tr h="321818">
                 <a:tc>
                   <a:txBody>
-                    <a:bodyPr wrap="square"/>
+                    <a:bodyPr/>
                     <a:lstStyle/>
                     <a:p>
                       <a:pPr algn="ctr"/>
+                      <a:endParaRPr/>
                     </a:p>
                   </a:txBody>
                   <a:tcPr marL="64008" marR="64008" marT="32004" marB="32004" anchor="ctr">
@@ -4279,7 +4346,7 @@
                 </a:tc>
                 <a:tc>
                   <a:txBody>
-                    <a:bodyPr wrap="square"/>
+                    <a:bodyPr/>
                     <a:lstStyle/>
                     <a:p>
                       <a:pPr algn="l"/>
@@ -4302,7 +4369,7 @@
                 </a:tc>
                 <a:tc>
                   <a:txBody>
-                    <a:bodyPr wrap="square"/>
+                    <a:bodyPr/>
                     <a:lstStyle/>
                     <a:p>
                       <a:pPr algn="l"/>
@@ -4323,6 +4390,11 @@
                     </a:solidFill>
                   </a:tcPr>
                 </a:tc>
+                <a:extLst>
+                  <a:ext uri="{0D108BD9-81ED-4DB2-BD59-A6C34878D82A}">
+                    <a16:rowId xmlns:a16="http://schemas.microsoft.com/office/drawing/2014/main" val="10006"/>
+                  </a:ext>
+                </a:extLst>
               </a:tr>
             </a:tbl>
           </a:graphicData>
@@ -4345,7 +4417,7 @@
           <a:noFill/>
         </p:spPr>
         <p:txBody>
-          <a:bodyPr wrap="square" lIns="0" rIns="0" tIns="0" bIns="0">
+          <a:bodyPr wrap="square" lIns="0" tIns="0" rIns="0" bIns="0">
             <a:spAutoFit/>
           </a:bodyPr>
           <a:lstStyle/>
@@ -4403,6 +4475,7 @@
           <a:lstStyle/>
           <a:p>
             <a:pPr algn="ctr"/>
+            <a:endParaRPr/>
           </a:p>
         </p:txBody>
       </p:sp>
@@ -4415,7 +4488,7 @@
 </file>
 
 <file path=ppt/slides/slide12.xml><?xml version="1.0" encoding="utf-8"?>
-<p:sld xmlns:a="http://schemas.openxmlformats.org/drawingml/2006/main" xmlns:p="http://schemas.openxmlformats.org/presentationml/2006/main" xmlns:r="http://schemas.openxmlformats.org/officeDocument/2006/relationships">
+<p:sld xmlns:a="http://schemas.openxmlformats.org/drawingml/2006/main" xmlns:r="http://schemas.openxmlformats.org/officeDocument/2006/relationships" xmlns:p="http://schemas.openxmlformats.org/presentationml/2006/main">
   <p:cSld>
     <p:spTree>
       <p:nvGrpSpPr>
@@ -4423,7 +4496,14 @@
         <p:cNvGrpSpPr/>
         <p:nvPr/>
       </p:nvGrpSpPr>
-      <p:grpSpPr/>
+      <p:grpSpPr>
+        <a:xfrm>
+          <a:off x="0" y="0"/>
+          <a:ext cx="0" cy="0"/>
+          <a:chOff x="0" y="0"/>
+          <a:chExt cx="0" cy="0"/>
+        </a:xfrm>
+      </p:grpSpPr>
       <p:sp>
         <p:nvSpPr>
           <p:cNvPr id="2" name="TextBox 1"/>
@@ -4441,7 +4521,7 @@
           <a:noFill/>
         </p:spPr>
         <p:txBody>
-          <a:bodyPr wrap="square" lIns="0" rIns="0" tIns="0" bIns="0">
+          <a:bodyPr wrap="square" lIns="0" tIns="0" rIns="0" bIns="0">
             <a:spAutoFit/>
           </a:bodyPr>
           <a:lstStyle/>
@@ -4475,7 +4555,7 @@
           <a:noFill/>
         </p:spPr>
         <p:txBody>
-          <a:bodyPr wrap="square" lIns="0" rIns="0" tIns="0" bIns="0">
+          <a:bodyPr wrap="square" lIns="0" tIns="0" rIns="0" bIns="0">
             <a:spAutoFit/>
           </a:bodyPr>
           <a:lstStyle/>
@@ -4509,7 +4589,7 @@
           <a:noFill/>
         </p:spPr>
         <p:txBody>
-          <a:bodyPr wrap="square" lIns="0" rIns="0" tIns="0" bIns="0">
+          <a:bodyPr wrap="square" lIns="0" tIns="0" rIns="0" bIns="0">
             <a:spAutoFit/>
           </a:bodyPr>
           <a:lstStyle/>
@@ -4544,7 +4624,7 @@
           <a:noFill/>
         </p:spPr>
         <p:txBody>
-          <a:bodyPr wrap="square" lIns="0" rIns="0" tIns="0" bIns="0">
+          <a:bodyPr wrap="square" lIns="0" tIns="0" rIns="0" bIns="0">
             <a:spAutoFit/>
           </a:bodyPr>
           <a:lstStyle/>
@@ -4578,7 +4658,7 @@
           <a:noFill/>
         </p:spPr>
         <p:txBody>
-          <a:bodyPr wrap="square" lIns="0" rIns="0" tIns="0" bIns="0">
+          <a:bodyPr wrap="square" lIns="0" tIns="0" rIns="0" bIns="0">
             <a:spAutoFit/>
           </a:bodyPr>
           <a:lstStyle/>
@@ -4623,15 +4703,39 @@
                 <a:tableStyleId>{5C22544A-7EE6-4342-B048-85BDC9FD1C3A}</a:tableStyleId>
               </a:tblPr>
               <a:tblGrid>
-                <a:gridCol w="1163835"/>
-                <a:gridCol w="4433326"/>
-                <a:gridCol w="2750671"/>
-                <a:gridCol w="2710007"/>
+                <a:gridCol w="1163835">
+                  <a:extLst>
+                    <a:ext uri="{9D8B030D-6E8A-4147-A177-3AD203B41FA5}">
+                      <a16:colId xmlns:a16="http://schemas.microsoft.com/office/drawing/2014/main" val="20000"/>
+                    </a:ext>
+                  </a:extLst>
+                </a:gridCol>
+                <a:gridCol w="4433326">
+                  <a:extLst>
+                    <a:ext uri="{9D8B030D-6E8A-4147-A177-3AD203B41FA5}">
+                      <a16:colId xmlns:a16="http://schemas.microsoft.com/office/drawing/2014/main" val="20001"/>
+                    </a:ext>
+                  </a:extLst>
+                </a:gridCol>
+                <a:gridCol w="2750671">
+                  <a:extLst>
+                    <a:ext uri="{9D8B030D-6E8A-4147-A177-3AD203B41FA5}">
+                      <a16:colId xmlns:a16="http://schemas.microsoft.com/office/drawing/2014/main" val="20002"/>
+                    </a:ext>
+                  </a:extLst>
+                </a:gridCol>
+                <a:gridCol w="2710007">
+                  <a:extLst>
+                    <a:ext uri="{9D8B030D-6E8A-4147-A177-3AD203B41FA5}">
+                      <a16:colId xmlns:a16="http://schemas.microsoft.com/office/drawing/2014/main" val="20003"/>
+                    </a:ext>
+                  </a:extLst>
+                </a:gridCol>
               </a:tblGrid>
               <a:tr h="321818">
                 <a:tc>
                   <a:txBody>
-                    <a:bodyPr wrap="square"/>
+                    <a:bodyPr/>
                     <a:lstStyle/>
                     <a:p>
                       <a:pPr algn="ctr"/>
@@ -4654,7 +4758,7 @@
                 </a:tc>
                 <a:tc>
                   <a:txBody>
-                    <a:bodyPr wrap="square"/>
+                    <a:bodyPr/>
                     <a:lstStyle/>
                     <a:p>
                       <a:pPr algn="ctr"/>
@@ -4677,7 +4781,7 @@
                 </a:tc>
                 <a:tc>
                   <a:txBody>
-                    <a:bodyPr wrap="square"/>
+                    <a:bodyPr/>
                     <a:lstStyle/>
                     <a:p>
                       <a:pPr algn="ctr"/>
@@ -4700,7 +4804,7 @@
                 </a:tc>
                 <a:tc>
                   <a:txBody>
-                    <a:bodyPr wrap="square"/>
+                    <a:bodyPr/>
                     <a:lstStyle/>
                     <a:p>
                       <a:pPr algn="ctr"/>
@@ -4721,11 +4825,16 @@
                     </a:solidFill>
                   </a:tcPr>
                 </a:tc>
+                <a:extLst>
+                  <a:ext uri="{0D108BD9-81ED-4DB2-BD59-A6C34878D82A}">
+                    <a16:rowId xmlns:a16="http://schemas.microsoft.com/office/drawing/2014/main" val="10000"/>
+                  </a:ext>
+                </a:extLst>
               </a:tr>
               <a:tr h="579628">
                 <a:tc>
                   <a:txBody>
-                    <a:bodyPr wrap="square"/>
+                    <a:bodyPr/>
                     <a:lstStyle/>
                     <a:p>
                       <a:pPr algn="ctr"/>
@@ -4748,7 +4857,7 @@
                 </a:tc>
                 <a:tc>
                   <a:txBody>
-                    <a:bodyPr wrap="square"/>
+                    <a:bodyPr/>
                     <a:lstStyle/>
                     <a:p>
                       <a:pPr algn="l"/>
@@ -4771,7 +4880,7 @@
                 </a:tc>
                 <a:tc>
                   <a:txBody>
-                    <a:bodyPr wrap="square"/>
+                    <a:bodyPr/>
                     <a:lstStyle/>
                     <a:p>
                       <a:pPr algn="l"/>
@@ -4794,7 +4903,7 @@
                 </a:tc>
                 <a:tc>
                   <a:txBody>
-                    <a:bodyPr wrap="square"/>
+                    <a:bodyPr/>
                     <a:lstStyle/>
                     <a:p>
                       <a:pPr algn="l"/>
@@ -4815,11 +4924,16 @@
                     </a:solidFill>
                   </a:tcPr>
                 </a:tc>
+                <a:extLst>
+                  <a:ext uri="{0D108BD9-81ED-4DB2-BD59-A6C34878D82A}">
+                    <a16:rowId xmlns:a16="http://schemas.microsoft.com/office/drawing/2014/main" val="10001"/>
+                  </a:ext>
+                </a:extLst>
               </a:tr>
               <a:tr h="321818">
                 <a:tc>
                   <a:txBody>
-                    <a:bodyPr wrap="square"/>
+                    <a:bodyPr/>
                     <a:lstStyle/>
                     <a:p>
                       <a:pPr algn="ctr"/>
@@ -4842,7 +4956,7 @@
                 </a:tc>
                 <a:tc>
                   <a:txBody>
-                    <a:bodyPr wrap="square"/>
+                    <a:bodyPr/>
                     <a:lstStyle/>
                     <a:p>
                       <a:pPr algn="l"/>
@@ -4865,7 +4979,7 @@
                 </a:tc>
                 <a:tc>
                   <a:txBody>
-                    <a:bodyPr wrap="square"/>
+                    <a:bodyPr/>
                     <a:lstStyle/>
                     <a:p>
                       <a:pPr algn="l"/>
@@ -4888,7 +5002,7 @@
                 </a:tc>
                 <a:tc>
                   <a:txBody>
-                    <a:bodyPr wrap="square"/>
+                    <a:bodyPr/>
                     <a:lstStyle/>
                     <a:p>
                       <a:pPr algn="l"/>
@@ -4909,11 +5023,16 @@
                     </a:solidFill>
                   </a:tcPr>
                 </a:tc>
+                <a:extLst>
+                  <a:ext uri="{0D108BD9-81ED-4DB2-BD59-A6C34878D82A}">
+                    <a16:rowId xmlns:a16="http://schemas.microsoft.com/office/drawing/2014/main" val="10002"/>
+                  </a:ext>
+                </a:extLst>
               </a:tr>
               <a:tr h="579628">
                 <a:tc>
                   <a:txBody>
-                    <a:bodyPr wrap="square"/>
+                    <a:bodyPr/>
                     <a:lstStyle/>
                     <a:p>
                       <a:pPr algn="ctr"/>
@@ -4936,7 +5055,7 @@
                 </a:tc>
                 <a:tc>
                   <a:txBody>
-                    <a:bodyPr wrap="square"/>
+                    <a:bodyPr/>
                     <a:lstStyle/>
                     <a:p>
                       <a:pPr algn="l"/>
@@ -4959,7 +5078,7 @@
                 </a:tc>
                 <a:tc>
                   <a:txBody>
-                    <a:bodyPr wrap="square"/>
+                    <a:bodyPr/>
                     <a:lstStyle/>
                     <a:p>
                       <a:pPr algn="l"/>
@@ -4982,7 +5101,7 @@
                 </a:tc>
                 <a:tc>
                   <a:txBody>
-                    <a:bodyPr wrap="square"/>
+                    <a:bodyPr/>
                     <a:lstStyle/>
                     <a:p>
                       <a:pPr algn="l"/>
@@ -5003,11 +5122,16 @@
                     </a:solidFill>
                   </a:tcPr>
                 </a:tc>
+                <a:extLst>
+                  <a:ext uri="{0D108BD9-81ED-4DB2-BD59-A6C34878D82A}">
+                    <a16:rowId xmlns:a16="http://schemas.microsoft.com/office/drawing/2014/main" val="10003"/>
+                  </a:ext>
+                </a:extLst>
               </a:tr>
               <a:tr h="579628">
                 <a:tc>
                   <a:txBody>
-                    <a:bodyPr wrap="square"/>
+                    <a:bodyPr/>
                     <a:lstStyle/>
                     <a:p>
                       <a:pPr algn="ctr"/>
@@ -5030,7 +5154,7 @@
                 </a:tc>
                 <a:tc>
                   <a:txBody>
-                    <a:bodyPr wrap="square"/>
+                    <a:bodyPr/>
                     <a:lstStyle/>
                     <a:p>
                       <a:pPr algn="l"/>
@@ -5053,7 +5177,7 @@
                 </a:tc>
                 <a:tc>
                   <a:txBody>
-                    <a:bodyPr wrap="square"/>
+                    <a:bodyPr/>
                     <a:lstStyle/>
                     <a:p>
                       <a:pPr algn="l"/>
@@ -5076,7 +5200,7 @@
                 </a:tc>
                 <a:tc>
                   <a:txBody>
-                    <a:bodyPr wrap="square"/>
+                    <a:bodyPr/>
                     <a:lstStyle/>
                     <a:p>
                       <a:pPr algn="l"/>
@@ -5097,11 +5221,16 @@
                     </a:solidFill>
                   </a:tcPr>
                 </a:tc>
+                <a:extLst>
+                  <a:ext uri="{0D108BD9-81ED-4DB2-BD59-A6C34878D82A}">
+                    <a16:rowId xmlns:a16="http://schemas.microsoft.com/office/drawing/2014/main" val="10004"/>
+                  </a:ext>
+                </a:extLst>
               </a:tr>
               <a:tr h="579628">
                 <a:tc>
                   <a:txBody>
-                    <a:bodyPr wrap="square"/>
+                    <a:bodyPr/>
                     <a:lstStyle/>
                     <a:p>
                       <a:pPr algn="ctr"/>
@@ -5124,7 +5253,7 @@
                 </a:tc>
                 <a:tc>
                   <a:txBody>
-                    <a:bodyPr wrap="square"/>
+                    <a:bodyPr/>
                     <a:lstStyle/>
                     <a:p>
                       <a:pPr algn="l"/>
@@ -5147,7 +5276,7 @@
                 </a:tc>
                 <a:tc>
                   <a:txBody>
-                    <a:bodyPr wrap="square"/>
+                    <a:bodyPr/>
                     <a:lstStyle/>
                     <a:p>
                       <a:pPr algn="l"/>
@@ -5170,7 +5299,7 @@
                 </a:tc>
                 <a:tc>
                   <a:txBody>
-                    <a:bodyPr wrap="square"/>
+                    <a:bodyPr/>
                     <a:lstStyle/>
                     <a:p>
                       <a:pPr algn="l"/>
@@ -5191,6 +5320,11 @@
                     </a:solidFill>
                   </a:tcPr>
                 </a:tc>
+                <a:extLst>
+                  <a:ext uri="{0D108BD9-81ED-4DB2-BD59-A6C34878D82A}">
+                    <a16:rowId xmlns:a16="http://schemas.microsoft.com/office/drawing/2014/main" val="10005"/>
+                  </a:ext>
+                </a:extLst>
               </a:tr>
             </a:tbl>
           </a:graphicData>
@@ -5205,7 +5339,7 @@
 </file>
 
 <file path=ppt/slides/slide13.xml><?xml version="1.0" encoding="utf-8"?>
-<p:sld xmlns:a="http://schemas.openxmlformats.org/drawingml/2006/main" xmlns:p="http://schemas.openxmlformats.org/presentationml/2006/main" xmlns:r="http://schemas.openxmlformats.org/officeDocument/2006/relationships">
+<p:sld xmlns:a="http://schemas.openxmlformats.org/drawingml/2006/main" xmlns:r="http://schemas.openxmlformats.org/officeDocument/2006/relationships" xmlns:p="http://schemas.openxmlformats.org/presentationml/2006/main">
   <p:cSld>
     <p:spTree>
       <p:nvGrpSpPr>
@@ -5213,7 +5347,14 @@
         <p:cNvGrpSpPr/>
         <p:nvPr/>
       </p:nvGrpSpPr>
-      <p:grpSpPr/>
+      <p:grpSpPr>
+        <a:xfrm>
+          <a:off x="0" y="0"/>
+          <a:ext cx="0" cy="0"/>
+          <a:chOff x="0" y="0"/>
+          <a:chExt cx="0" cy="0"/>
+        </a:xfrm>
+      </p:grpSpPr>
       <p:sp>
         <p:nvSpPr>
           <p:cNvPr id="2" name="TextBox 1"/>
@@ -5231,7 +5372,7 @@
           <a:noFill/>
         </p:spPr>
         <p:txBody>
-          <a:bodyPr wrap="square" lIns="0" rIns="0" tIns="0" bIns="0">
+          <a:bodyPr wrap="square" lIns="0" tIns="0" rIns="0" bIns="0">
             <a:spAutoFit/>
           </a:bodyPr>
           <a:lstStyle/>
@@ -5265,7 +5406,7 @@
           <a:noFill/>
         </p:spPr>
         <p:txBody>
-          <a:bodyPr wrap="square" lIns="0" rIns="0" tIns="0" bIns="0">
+          <a:bodyPr wrap="square" lIns="0" tIns="0" rIns="0" bIns="0">
             <a:spAutoFit/>
           </a:bodyPr>
           <a:lstStyle/>
@@ -5299,7 +5440,7 @@
           <a:noFill/>
         </p:spPr>
         <p:txBody>
-          <a:bodyPr wrap="square" lIns="0" rIns="0" tIns="0" bIns="0">
+          <a:bodyPr wrap="square" lIns="0" tIns="0" rIns="0" bIns="0">
             <a:spAutoFit/>
           </a:bodyPr>
           <a:lstStyle/>
@@ -5334,7 +5475,7 @@
           <a:noFill/>
         </p:spPr>
         <p:txBody>
-          <a:bodyPr wrap="square" lIns="0" rIns="0" tIns="0" bIns="0">
+          <a:bodyPr wrap="square" lIns="0" tIns="0" rIns="0" bIns="0">
             <a:spAutoFit/>
           </a:bodyPr>
           <a:lstStyle/>
@@ -5390,7 +5531,7 @@
           </a:fontRef>
         </p:style>
         <p:txBody>
-          <a:bodyPr rtlCol="0" anchor="ctr" wrap="square" lIns="73152" rIns="73152" tIns="36576" bIns="36576"/>
+          <a:bodyPr wrap="square" lIns="73152" tIns="36576" rIns="73152" bIns="36576" rtlCol="0" anchor="ctr"/>
           <a:lstStyle/>
           <a:p>
             <a:pPr algn="l"/>
@@ -5454,7 +5595,7 @@
           </a:fontRef>
         </p:style>
         <p:txBody>
-          <a:bodyPr rtlCol="0" anchor="ctr" wrap="square" lIns="73152" rIns="73152" tIns="36576" bIns="36576"/>
+          <a:bodyPr wrap="square" lIns="73152" tIns="36576" rIns="73152" bIns="36576" rtlCol="0" anchor="ctr"/>
           <a:lstStyle/>
           <a:p>
             <a:pPr algn="l"/>
@@ -5518,7 +5659,7 @@
           </a:fontRef>
         </p:style>
         <p:txBody>
-          <a:bodyPr rtlCol="0" anchor="ctr" wrap="square" lIns="73152" rIns="73152" tIns="36576" bIns="36576"/>
+          <a:bodyPr wrap="square" lIns="73152" tIns="36576" rIns="73152" bIns="36576" rtlCol="0" anchor="ctr"/>
           <a:lstStyle/>
           <a:p>
             <a:pPr algn="l"/>
@@ -5582,7 +5723,7 @@
           </a:fontRef>
         </p:style>
         <p:txBody>
-          <a:bodyPr rtlCol="0" anchor="ctr" wrap="square" lIns="73152" rIns="73152" tIns="36576" bIns="36576"/>
+          <a:bodyPr wrap="square" lIns="73152" tIns="36576" rIns="73152" bIns="36576" rtlCol="0" anchor="ctr"/>
           <a:lstStyle/>
           <a:p>
             <a:pPr algn="l"/>
@@ -5648,6 +5789,7 @@
           <a:lstStyle/>
           <a:p>
             <a:pPr algn="ctr"/>
+            <a:endParaRPr/>
           </a:p>
         </p:txBody>
       </p:sp>
@@ -5690,7 +5832,7 @@
           </a:fontRef>
         </p:style>
         <p:txBody>
-          <a:bodyPr rtlCol="0" anchor="ctr" wrap="square" lIns="73152" rIns="73152" tIns="36576" bIns="36576"/>
+          <a:bodyPr wrap="square" lIns="73152" tIns="36576" rIns="73152" bIns="36576" rtlCol="0" anchor="ctr"/>
           <a:lstStyle/>
           <a:p>
             <a:pPr algn="l"/>
@@ -5756,6 +5898,7 @@
           <a:lstStyle/>
           <a:p>
             <a:pPr algn="ctr"/>
+            <a:endParaRPr/>
           </a:p>
         </p:txBody>
       </p:sp>
@@ -5798,7 +5941,7 @@
           </a:fontRef>
         </p:style>
         <p:txBody>
-          <a:bodyPr rtlCol="0" anchor="ctr" wrap="square" lIns="73152" rIns="73152" tIns="36576" bIns="36576"/>
+          <a:bodyPr wrap="square" lIns="73152" tIns="36576" rIns="73152" bIns="36576" rtlCol="0" anchor="ctr"/>
           <a:lstStyle/>
           <a:p>
             <a:pPr algn="l"/>
@@ -5855,6 +5998,7 @@
           <a:lstStyle/>
           <a:p>
             <a:pPr algn="ctr"/>
+            <a:endParaRPr/>
           </a:p>
         </p:txBody>
       </p:sp>
@@ -5897,7 +6041,7 @@
           </a:fontRef>
         </p:style>
         <p:txBody>
-          <a:bodyPr rtlCol="0" anchor="ctr" wrap="square" lIns="73152" rIns="73152" tIns="36576" bIns="36576"/>
+          <a:bodyPr wrap="square" lIns="73152" tIns="36576" rIns="73152" bIns="36576" rtlCol="0" anchor="ctr"/>
           <a:lstStyle/>
           <a:p>
             <a:pPr algn="l"/>
@@ -5963,6 +6107,7 @@
           <a:lstStyle/>
           <a:p>
             <a:pPr algn="ctr"/>
+            <a:endParaRPr/>
           </a:p>
         </p:txBody>
       </p:sp>
@@ -6005,7 +6150,7 @@
           </a:fontRef>
         </p:style>
         <p:txBody>
-          <a:bodyPr rtlCol="0" anchor="ctr" wrap="square" lIns="73152" rIns="73152" tIns="36576" bIns="36576"/>
+          <a:bodyPr wrap="square" lIns="73152" tIns="36576" rIns="73152" bIns="36576" rtlCol="0" anchor="ctr"/>
           <a:lstStyle/>
           <a:p>
             <a:pPr algn="l"/>
@@ -6062,6 +6207,7 @@
           <a:lstStyle/>
           <a:p>
             <a:pPr algn="ctr"/>
+            <a:endParaRPr/>
           </a:p>
         </p:txBody>
       </p:sp>
@@ -6104,7 +6250,7 @@
           </a:fontRef>
         </p:style>
         <p:txBody>
-          <a:bodyPr rtlCol="0" anchor="ctr" wrap="square" lIns="73152" rIns="73152" tIns="36576" bIns="36576"/>
+          <a:bodyPr wrap="square" lIns="73152" tIns="36576" rIns="73152" bIns="36576" rtlCol="0" anchor="ctr"/>
           <a:lstStyle/>
           <a:p>
             <a:pPr algn="l"/>
@@ -6170,6 +6316,7 @@
           <a:lstStyle/>
           <a:p>
             <a:pPr algn="ctr"/>
+            <a:endParaRPr/>
           </a:p>
         </p:txBody>
       </p:sp>
@@ -6212,7 +6359,7 @@
           </a:fontRef>
         </p:style>
         <p:txBody>
-          <a:bodyPr rtlCol="0" anchor="ctr" wrap="square" lIns="73152" rIns="73152" tIns="36576" bIns="36576"/>
+          <a:bodyPr wrap="square" lIns="73152" tIns="36576" rIns="73152" bIns="36576" rtlCol="0" anchor="ctr"/>
           <a:lstStyle/>
           <a:p>
             <a:pPr algn="l"/>
@@ -6269,6 +6416,7 @@
           <a:lstStyle/>
           <a:p>
             <a:pPr algn="ctr"/>
+            <a:endParaRPr/>
           </a:p>
         </p:txBody>
       </p:sp>
@@ -6311,7 +6459,7 @@
           </a:fontRef>
         </p:style>
         <p:txBody>
-          <a:bodyPr rtlCol="0" anchor="ctr" wrap="square" lIns="73152" rIns="73152" tIns="36576" bIns="36576"/>
+          <a:bodyPr wrap="square" lIns="73152" tIns="36576" rIns="73152" bIns="36576" rtlCol="0" anchor="ctr"/>
           <a:lstStyle/>
           <a:p>
             <a:pPr algn="l"/>
@@ -6377,6 +6525,7 @@
           <a:lstStyle/>
           <a:p>
             <a:pPr algn="ctr"/>
+            <a:endParaRPr/>
           </a:p>
         </p:txBody>
       </p:sp>
@@ -6419,7 +6568,7 @@
           </a:fontRef>
         </p:style>
         <p:txBody>
-          <a:bodyPr rtlCol="0" anchor="ctr" wrap="square" lIns="73152" rIns="73152" tIns="36576" bIns="36576"/>
+          <a:bodyPr wrap="square" lIns="73152" tIns="36576" rIns="73152" bIns="36576" rtlCol="0" anchor="ctr"/>
           <a:lstStyle/>
           <a:p>
             <a:pPr algn="l"/>
@@ -6485,6 +6634,7 @@
           <a:lstStyle/>
           <a:p>
             <a:pPr algn="ctr"/>
+            <a:endParaRPr/>
           </a:p>
         </p:txBody>
       </p:sp>
@@ -6527,7 +6677,7 @@
           </a:fontRef>
         </p:style>
         <p:txBody>
-          <a:bodyPr rtlCol="0" anchor="ctr" wrap="square" lIns="73152" rIns="73152" tIns="36576" bIns="36576"/>
+          <a:bodyPr wrap="square" lIns="73152" tIns="36576" rIns="73152" bIns="36576" rtlCol="0" anchor="ctr"/>
           <a:lstStyle/>
           <a:p>
             <a:pPr algn="l"/>
@@ -6584,6 +6734,7 @@
           <a:lstStyle/>
           <a:p>
             <a:pPr algn="ctr"/>
+            <a:endParaRPr/>
           </a:p>
         </p:txBody>
       </p:sp>
@@ -6626,7 +6777,7 @@
           </a:fontRef>
         </p:style>
         <p:txBody>
-          <a:bodyPr rtlCol="0" anchor="ctr" wrap="square" lIns="73152" rIns="73152" tIns="36576" bIns="36576"/>
+          <a:bodyPr wrap="square" lIns="73152" tIns="36576" rIns="73152" bIns="36576" rtlCol="0" anchor="ctr"/>
           <a:lstStyle/>
           <a:p>
             <a:pPr algn="l"/>
@@ -6692,6 +6843,7 @@
           <a:lstStyle/>
           <a:p>
             <a:pPr algn="ctr"/>
+            <a:endParaRPr/>
           </a:p>
         </p:txBody>
       </p:sp>
@@ -6734,7 +6886,7 @@
           </a:fontRef>
         </p:style>
         <p:txBody>
-          <a:bodyPr rtlCol="0" anchor="ctr" wrap="square" lIns="73152" rIns="73152" tIns="36576" bIns="36576"/>
+          <a:bodyPr wrap="square" lIns="73152" tIns="36576" rIns="73152" bIns="36576" rtlCol="0" anchor="ctr"/>
           <a:lstStyle/>
           <a:p>
             <a:pPr algn="l"/>
@@ -6791,6 +6943,7 @@
           <a:lstStyle/>
           <a:p>
             <a:pPr algn="ctr"/>
+            <a:endParaRPr/>
           </a:p>
         </p:txBody>
       </p:sp>
@@ -6833,7 +6986,7 @@
           </a:fontRef>
         </p:style>
         <p:txBody>
-          <a:bodyPr rtlCol="0" anchor="ctr" wrap="square" lIns="73152" rIns="73152" tIns="36576" bIns="36576"/>
+          <a:bodyPr wrap="square" lIns="73152" tIns="36576" rIns="73152" bIns="36576" rtlCol="0" anchor="ctr"/>
           <a:lstStyle/>
           <a:p>
             <a:pPr algn="l"/>
@@ -6875,7 +7028,7 @@
           <a:noFill/>
         </p:spPr>
         <p:txBody>
-          <a:bodyPr wrap="square" lIns="0" rIns="0" tIns="0" bIns="0">
+          <a:bodyPr wrap="square" lIns="0" tIns="0" rIns="0" bIns="0">
             <a:spAutoFit/>
           </a:bodyPr>
           <a:lstStyle/>
@@ -6933,6 +7086,7 @@
           <a:lstStyle/>
           <a:p>
             <a:pPr algn="ctr"/>
+            <a:endParaRPr/>
           </a:p>
         </p:txBody>
       </p:sp>
@@ -6945,7 +7099,7 @@
 </file>
 
 <file path=ppt/slides/slide14.xml><?xml version="1.0" encoding="utf-8"?>
-<p:sld xmlns:a="http://schemas.openxmlformats.org/drawingml/2006/main" xmlns:p="http://schemas.openxmlformats.org/presentationml/2006/main" xmlns:r="http://schemas.openxmlformats.org/officeDocument/2006/relationships">
+<p:sld xmlns:a="http://schemas.openxmlformats.org/drawingml/2006/main" xmlns:r="http://schemas.openxmlformats.org/officeDocument/2006/relationships" xmlns:p="http://schemas.openxmlformats.org/presentationml/2006/main">
   <p:cSld>
     <p:spTree>
       <p:nvGrpSpPr>
@@ -6953,7 +7107,14 @@
         <p:cNvGrpSpPr/>
         <p:nvPr/>
       </p:nvGrpSpPr>
-      <p:grpSpPr/>
+      <p:grpSpPr>
+        <a:xfrm>
+          <a:off x="0" y="0"/>
+          <a:ext cx="0" cy="0"/>
+          <a:chOff x="0" y="0"/>
+          <a:chExt cx="0" cy="0"/>
+        </a:xfrm>
+      </p:grpSpPr>
       <p:sp>
         <p:nvSpPr>
           <p:cNvPr id="2" name="TextBox 1"/>
@@ -6971,7 +7132,7 @@
           <a:noFill/>
         </p:spPr>
         <p:txBody>
-          <a:bodyPr wrap="square" lIns="0" rIns="0" tIns="0" bIns="0">
+          <a:bodyPr wrap="square" lIns="0" tIns="0" rIns="0" bIns="0">
             <a:spAutoFit/>
           </a:bodyPr>
           <a:lstStyle/>
@@ -7005,7 +7166,7 @@
           <a:noFill/>
         </p:spPr>
         <p:txBody>
-          <a:bodyPr wrap="square" lIns="0" rIns="0" tIns="0" bIns="0">
+          <a:bodyPr wrap="square" lIns="0" tIns="0" rIns="0" bIns="0">
             <a:spAutoFit/>
           </a:bodyPr>
           <a:lstStyle/>
@@ -7039,7 +7200,7 @@
           <a:noFill/>
         </p:spPr>
         <p:txBody>
-          <a:bodyPr wrap="square" lIns="0" rIns="0" tIns="0" bIns="0">
+          <a:bodyPr wrap="square" lIns="0" tIns="0" rIns="0" bIns="0">
             <a:spAutoFit/>
           </a:bodyPr>
           <a:lstStyle/>
@@ -7074,7 +7235,7 @@
           <a:noFill/>
         </p:spPr>
         <p:txBody>
-          <a:bodyPr wrap="square" lIns="0" rIns="0" tIns="0" bIns="0">
+          <a:bodyPr wrap="square" lIns="0" tIns="0" rIns="0" bIns="0">
             <a:spAutoFit/>
           </a:bodyPr>
           <a:lstStyle/>
@@ -7108,7 +7269,7 @@
           <a:noFill/>
         </p:spPr>
         <p:txBody>
-          <a:bodyPr wrap="square" lIns="0" rIns="0" tIns="0" bIns="0">
+          <a:bodyPr wrap="square" lIns="0" tIns="0" rIns="0" bIns="0">
             <a:spAutoFit/>
           </a:bodyPr>
           <a:lstStyle/>
@@ -7119,7 +7280,7 @@
               </a:spcAft>
             </a:pPr>
             <a:r>
-              <a:rPr sz="1900">
+              <a:rPr sz="1900" dirty="0">
                 <a:solidFill>
                   <a:srgbClr val="8A96A3"/>
                 </a:solidFill>
@@ -7128,22 +7289,67 @@
               <a:t>1. </a:t>
             </a:r>
             <a:r>
-              <a:rPr sz="1900" b="1">
+              <a:rPr sz="1900" b="1" dirty="0" err="1">
                 <a:solidFill>
                   <a:srgbClr val="C0392B"/>
                 </a:solidFill>
                 <a:latin typeface="Microsoft JhengHei"/>
               </a:rPr>
-              <a:t>是否採 Option B</a:t>
-            </a:r>
-            <a:r>
-              <a:rPr sz="1900" b="0">
+              <a:t>是否採</a:t>
+            </a:r>
+            <a:r>
+              <a:rPr sz="1900" b="1" dirty="0">
+                <a:solidFill>
+                  <a:srgbClr val="C0392B"/>
+                </a:solidFill>
+                <a:latin typeface="Microsoft JhengHei"/>
+              </a:rPr>
+              <a:t> Option </a:t>
+            </a:r>
+            <a:r>
+              <a:rPr sz="1900" b="1" dirty="0" err="1">
+                <a:solidFill>
+                  <a:srgbClr val="C0392B"/>
+                </a:solidFill>
+                <a:latin typeface="Microsoft JhengHei"/>
+              </a:rPr>
+              <a:t>B</a:t>
+            </a:r>
+            <a:r>
+              <a:rPr sz="1900" b="0" dirty="0" err="1">
                 <a:solidFill>
                   <a:srgbClr val="22303F"/>
                 </a:solidFill>
                 <a:latin typeface="Microsoft JhengHei"/>
               </a:rPr>
-              <a:t>：TiDB 快速驗證＋代表性應用 Pilot。</a:t>
+              <a:t>：TiDB</a:t>
+            </a:r>
+            <a:r>
+              <a:rPr sz="1900" b="0" dirty="0">
+                <a:solidFill>
+                  <a:srgbClr val="22303F"/>
+                </a:solidFill>
+                <a:latin typeface="Microsoft JhengHei"/>
+              </a:rPr>
+              <a:t> </a:t>
+            </a:r>
+            <a:r>
+              <a:rPr sz="1900" b="0" dirty="0" err="1">
+                <a:solidFill>
+                  <a:srgbClr val="22303F"/>
+                </a:solidFill>
+                <a:latin typeface="Microsoft JhengHei"/>
+              </a:rPr>
+              <a:t>快速驗證＋代表性應用</a:t>
+            </a:r>
+            <a:r>
+              <a:rPr sz="1900" b="0" dirty="0">
+                <a:solidFill>
+                  <a:srgbClr val="22303F"/>
+                </a:solidFill>
+                <a:latin typeface="Microsoft JhengHei"/>
+              </a:rPr>
+              <a:t> Pilot。</a:t>
             </a:r>
           </a:p>
           <a:p>
@@ -7153,7 +7359,7 @@
               </a:spcAft>
             </a:pPr>
             <a:r>
-              <a:rPr sz="1900">
+              <a:rPr sz="1900" dirty="0">
                 <a:solidFill>
                   <a:srgbClr val="8A96A3"/>
                 </a:solidFill>
@@ -7162,7 +7368,7 @@
               <a:t>2. </a:t>
             </a:r>
             <a:r>
-              <a:rPr sz="1900" b="1">
+              <a:rPr sz="1900" b="1" dirty="0" err="1">
                 <a:solidFill>
                   <a:srgbClr val="C0392B"/>
                 </a:solidFill>
@@ -7170,6 +7376,12 @@
               </a:rPr>
               <a:t>其他待討論事項</a:t>
             </a:r>
+            <a:endParaRPr sz="1900" b="1" dirty="0">
+              <a:solidFill>
+                <a:srgbClr val="C0392B"/>
+              </a:solidFill>
+              <a:latin typeface="Microsoft JhengHei"/>
+            </a:endParaRPr>
           </a:p>
           <a:p>
             <a:pPr>
@@ -7178,17 +7390,107 @@
               </a:spcAft>
             </a:pPr>
             <a:r>
-              <a:rPr sz="1900"/>
+              <a:rPr sz="1900" dirty="0"/>
               <a:t>     </a:t>
             </a:r>
             <a:r>
-              <a:rPr sz="1800" b="0">
+              <a:rPr sz="1800" b="0" dirty="0">
                 <a:solidFill>
                   <a:srgbClr val="8A96A3"/>
                 </a:solidFill>
                 <a:latin typeface="Microsoft JhengHei"/>
               </a:rPr>
-              <a:t>- 由 TSD 指派應用 owner，提供真實 SQL／ORM／Driver／Transaction 與改造限制。</a:t>
+              <a:t>- </a:t>
+            </a:r>
+            <a:r>
+              <a:rPr sz="1800" b="0" dirty="0" err="1">
+                <a:solidFill>
+                  <a:srgbClr val="8A96A3"/>
+                </a:solidFill>
+                <a:latin typeface="Microsoft JhengHei"/>
+              </a:rPr>
+              <a:t>由</a:t>
+            </a:r>
+            <a:r>
+              <a:rPr sz="1800" b="0" dirty="0">
+                <a:solidFill>
+                  <a:srgbClr val="8A96A3"/>
+                </a:solidFill>
+                <a:latin typeface="Microsoft JhengHei"/>
+              </a:rPr>
+              <a:t> TSD </a:t>
+            </a:r>
+            <a:r>
+              <a:rPr sz="1800" b="0" dirty="0" err="1">
+                <a:solidFill>
+                  <a:srgbClr val="8A96A3"/>
+                </a:solidFill>
+                <a:latin typeface="Microsoft JhengHei"/>
+              </a:rPr>
+              <a:t>指派應用</a:t>
+            </a:r>
+            <a:r>
+              <a:rPr sz="1800" b="0" dirty="0">
+                <a:solidFill>
+                  <a:srgbClr val="8A96A3"/>
+                </a:solidFill>
+                <a:latin typeface="Microsoft JhengHei"/>
+              </a:rPr>
+              <a:t> </a:t>
+            </a:r>
+            <a:r>
+              <a:rPr sz="1800" b="0" dirty="0" err="1">
+                <a:solidFill>
+                  <a:srgbClr val="8A96A3"/>
+                </a:solidFill>
+                <a:latin typeface="Microsoft JhengHei"/>
+              </a:rPr>
+              <a:t>owner，提供真實</a:t>
+            </a:r>
+            <a:r>
+              <a:rPr sz="1800" b="0" dirty="0">
+                <a:solidFill>
+                  <a:srgbClr val="8A96A3"/>
+                </a:solidFill>
+                <a:latin typeface="Microsoft JhengHei"/>
+              </a:rPr>
+              <a:t> </a:t>
+            </a:r>
+            <a:r>
+              <a:rPr sz="1800" b="0" dirty="0" err="1">
+                <a:solidFill>
+                  <a:srgbClr val="8A96A3"/>
+                </a:solidFill>
+                <a:latin typeface="Microsoft JhengHei"/>
+              </a:rPr>
+              <a:t>SQL／ORM／Driver／Transaction</a:t>
+            </a:r>
+            <a:r>
+              <a:rPr sz="1800" b="0" dirty="0">
+                <a:solidFill>
+                  <a:srgbClr val="8A96A3"/>
+                </a:solidFill>
+                <a:latin typeface="Microsoft JhengHei"/>
+              </a:rPr>
+              <a:t> </a:t>
+            </a:r>
+            <a:r>
+              <a:rPr sz="1800" b="0" dirty="0" err="1">
+                <a:solidFill>
+                  <a:srgbClr val="8A96A3"/>
+                </a:solidFill>
+                <a:latin typeface="Microsoft JhengHei"/>
+              </a:rPr>
+              <a:t>與改造限制</a:t>
+            </a:r>
+            <a:r>
+              <a:rPr sz="1800" b="0" dirty="0">
+                <a:solidFill>
+                  <a:srgbClr val="8A96A3"/>
+                </a:solidFill>
+                <a:latin typeface="Microsoft JhengHei"/>
+              </a:rPr>
+              <a:t>。</a:t>
             </a:r>
           </a:p>
           <a:p>
@@ -7198,17 +7500,89 @@
               </a:spcAft>
             </a:pPr>
             <a:r>
-              <a:rPr sz="1900"/>
+              <a:rPr sz="1900" dirty="0"/>
               <a:t>     </a:t>
             </a:r>
             <a:r>
-              <a:rPr sz="1800" b="0">
+              <a:rPr sz="1800" b="0" dirty="0">
                 <a:solidFill>
                   <a:srgbClr val="8A96A3"/>
                 </a:solidFill>
                 <a:latin typeface="Microsoft JhengHei"/>
               </a:rPr>
-              <a:t>- 確認 Pilot 情境：一般 MySQL 應用、可移至 EDC 的定期批次，或故障影響範圍較明確的服務。</a:t>
+              <a:t>- </a:t>
+            </a:r>
+            <a:r>
+              <a:rPr sz="1800" b="0" dirty="0" err="1">
+                <a:solidFill>
+                  <a:srgbClr val="8A96A3"/>
+                </a:solidFill>
+                <a:latin typeface="Microsoft JhengHei"/>
+              </a:rPr>
+              <a:t>確認</a:t>
+            </a:r>
+            <a:r>
+              <a:rPr sz="1800" b="0" dirty="0">
+                <a:solidFill>
+                  <a:srgbClr val="8A96A3"/>
+                </a:solidFill>
+                <a:latin typeface="Microsoft JhengHei"/>
+              </a:rPr>
+              <a:t> Pilot </a:t>
+            </a:r>
+            <a:r>
+              <a:rPr sz="1800" b="0" dirty="0" err="1">
+                <a:solidFill>
+                  <a:srgbClr val="8A96A3"/>
+                </a:solidFill>
+                <a:latin typeface="Microsoft JhengHei"/>
+              </a:rPr>
+              <a:t>情境：一般</a:t>
+            </a:r>
+            <a:r>
+              <a:rPr sz="1800" b="0" dirty="0">
+                <a:solidFill>
+                  <a:srgbClr val="8A96A3"/>
+                </a:solidFill>
+                <a:latin typeface="Microsoft JhengHei"/>
+              </a:rPr>
+              <a:t> MySQL </a:t>
+            </a:r>
+            <a:r>
+              <a:rPr sz="1800" b="0" dirty="0" err="1">
+                <a:solidFill>
+                  <a:srgbClr val="8A96A3"/>
+                </a:solidFill>
+                <a:latin typeface="Microsoft JhengHei"/>
+              </a:rPr>
+              <a:t>應用、可移至</a:t>
+            </a:r>
+            <a:r>
+              <a:rPr sz="1800" b="0" dirty="0">
+                <a:solidFill>
+                  <a:srgbClr val="8A96A3"/>
+                </a:solidFill>
+                <a:latin typeface="Microsoft JhengHei"/>
+              </a:rPr>
+              <a:t> EDC </a:t>
+            </a:r>
+            <a:r>
+              <a:rPr sz="1800" b="0" dirty="0" err="1">
+                <a:solidFill>
+                  <a:srgbClr val="8A96A3"/>
+                </a:solidFill>
+                <a:latin typeface="Microsoft JhengHei"/>
+              </a:rPr>
+              <a:t>的定期批次，或故障影響範圍較明確的服務</a:t>
+            </a:r>
+            <a:r>
+              <a:rPr sz="1800" b="0" dirty="0">
+                <a:solidFill>
+                  <a:srgbClr val="8A96A3"/>
+                </a:solidFill>
+                <a:latin typeface="Microsoft JhengHei"/>
+              </a:rPr>
+              <a:t>。</a:t>
             </a:r>
           </a:p>
           <a:p>
@@ -7218,17 +7592,35 @@
               </a:spcAft>
             </a:pPr>
             <a:r>
-              <a:rPr sz="1900"/>
+              <a:rPr sz="1900" dirty="0"/>
               <a:t>     </a:t>
             </a:r>
             <a:r>
-              <a:rPr sz="1800" b="0">
+              <a:rPr sz="1800" b="0" dirty="0">
                 <a:solidFill>
                   <a:srgbClr val="8A96A3"/>
                 </a:solidFill>
                 <a:latin typeface="Microsoft JhengHei"/>
               </a:rPr>
-              <a:t>- 定義服務驗收：一致性優先條件、可接受中斷、資料延遲、降級與回復方式。</a:t>
+              <a:t>- </a:t>
+            </a:r>
+            <a:r>
+              <a:rPr sz="1800" b="0" dirty="0" err="1">
+                <a:solidFill>
+                  <a:srgbClr val="8A96A3"/>
+                </a:solidFill>
+                <a:latin typeface="Microsoft JhengHei"/>
+              </a:rPr>
+              <a:t>定義服務驗收：一致性優先條件、可接受中斷、資料延遲、降級與回復方式</a:t>
+            </a:r>
+            <a:r>
+              <a:rPr sz="1800" b="0" dirty="0">
+                <a:solidFill>
+                  <a:srgbClr val="8A96A3"/>
+                </a:solidFill>
+                <a:latin typeface="Microsoft JhengHei"/>
+              </a:rPr>
+              <a:t>。</a:t>
             </a:r>
           </a:p>
           <a:p>
@@ -7238,17 +7630,35 @@
               </a:spcAft>
             </a:pPr>
             <a:r>
-              <a:rPr sz="1900"/>
+              <a:rPr sz="1900" dirty="0"/>
               <a:t>     </a:t>
             </a:r>
             <a:r>
-              <a:rPr sz="1800" b="0">
+              <a:rPr sz="1800" b="0" dirty="0">
                 <a:solidFill>
                   <a:srgbClr val="8A96A3"/>
                 </a:solidFill>
                 <a:latin typeface="Microsoft JhengHei"/>
               </a:rPr>
-              <a:t>- 啟動原廠正式詢價與成本資料蒐集：支援、授權、維運人力及基礎設施。</a:t>
+              <a:t>- </a:t>
+            </a:r>
+            <a:r>
+              <a:rPr sz="1800" b="0" dirty="0" err="1">
+                <a:solidFill>
+                  <a:srgbClr val="8A96A3"/>
+                </a:solidFill>
+                <a:latin typeface="Microsoft JhengHei"/>
+              </a:rPr>
+              <a:t>啟動原廠正式詢價與成本資料蒐集：支援、授權、維運人力及基礎設施</a:t>
+            </a:r>
+            <a:r>
+              <a:rPr sz="1800" b="0" dirty="0">
+                <a:solidFill>
+                  <a:srgbClr val="8A96A3"/>
+                </a:solidFill>
+                <a:latin typeface="Microsoft JhengHei"/>
+              </a:rPr>
+              <a:t>。</a:t>
             </a:r>
           </a:p>
         </p:txBody>
@@ -7262,7 +7672,7 @@
 </file>
 
 <file path=ppt/slides/slide15.xml><?xml version="1.0" encoding="utf-8"?>
-<p:sld xmlns:a="http://schemas.openxmlformats.org/drawingml/2006/main" xmlns:p="http://schemas.openxmlformats.org/presentationml/2006/main" xmlns:r="http://schemas.openxmlformats.org/officeDocument/2006/relationships">
+<p:sld xmlns:a="http://schemas.openxmlformats.org/drawingml/2006/main" xmlns:r="http://schemas.openxmlformats.org/officeDocument/2006/relationships" xmlns:p="http://schemas.openxmlformats.org/presentationml/2006/main">
   <p:cSld>
     <p:spTree>
       <p:nvGrpSpPr>
@@ -7270,7 +7680,14 @@
         <p:cNvGrpSpPr/>
         <p:nvPr/>
       </p:nvGrpSpPr>
-      <p:grpSpPr/>
+      <p:grpSpPr>
+        <a:xfrm>
+          <a:off x="0" y="0"/>
+          <a:ext cx="0" cy="0"/>
+          <a:chOff x="0" y="0"/>
+          <a:chExt cx="0" cy="0"/>
+        </a:xfrm>
+      </p:grpSpPr>
       <p:sp>
         <p:nvSpPr>
           <p:cNvPr id="2" name="TextBox 1"/>
@@ -7288,7 +7705,7 @@
           <a:noFill/>
         </p:spPr>
         <p:txBody>
-          <a:bodyPr wrap="square" lIns="0" rIns="0" tIns="0" bIns="0">
+          <a:bodyPr wrap="square" lIns="0" tIns="0" rIns="0" bIns="0">
             <a:spAutoFit/>
           </a:bodyPr>
           <a:lstStyle/>
@@ -7322,7 +7739,7 @@
           <a:noFill/>
         </p:spPr>
         <p:txBody>
-          <a:bodyPr wrap="square" lIns="0" rIns="0" tIns="0" bIns="0">
+          <a:bodyPr wrap="square" lIns="0" tIns="0" rIns="0" bIns="0">
             <a:spAutoFit/>
           </a:bodyPr>
           <a:lstStyle/>
@@ -7356,7 +7773,7 @@
           <a:noFill/>
         </p:spPr>
         <p:txBody>
-          <a:bodyPr wrap="square" lIns="0" rIns="0" tIns="0" bIns="0">
+          <a:bodyPr wrap="square" lIns="0" tIns="0" rIns="0" bIns="0">
             <a:spAutoFit/>
           </a:bodyPr>
           <a:lstStyle/>
@@ -7391,7 +7808,7 @@
           <a:noFill/>
         </p:spPr>
         <p:txBody>
-          <a:bodyPr wrap="square" lIns="0" rIns="0" tIns="0" bIns="0">
+          <a:bodyPr wrap="square" lIns="0" tIns="0" rIns="0" bIns="0">
             <a:spAutoFit/>
           </a:bodyPr>
           <a:lstStyle/>
@@ -7418,7 +7835,7 @@
 </file>
 
 <file path=ppt/slides/slide16.xml><?xml version="1.0" encoding="utf-8"?>
-<p:sld xmlns:a="http://schemas.openxmlformats.org/drawingml/2006/main" xmlns:p="http://schemas.openxmlformats.org/presentationml/2006/main" xmlns:r="http://schemas.openxmlformats.org/officeDocument/2006/relationships">
+<p:sld xmlns:a="http://schemas.openxmlformats.org/drawingml/2006/main" xmlns:r="http://schemas.openxmlformats.org/officeDocument/2006/relationships" xmlns:p="http://schemas.openxmlformats.org/presentationml/2006/main">
   <p:cSld>
     <p:spTree>
       <p:nvGrpSpPr>
@@ -7426,7 +7843,14 @@
         <p:cNvGrpSpPr/>
         <p:nvPr/>
       </p:nvGrpSpPr>
-      <p:grpSpPr/>
+      <p:grpSpPr>
+        <a:xfrm>
+          <a:off x="0" y="0"/>
+          <a:ext cx="0" cy="0"/>
+          <a:chOff x="0" y="0"/>
+          <a:chExt cx="0" cy="0"/>
+        </a:xfrm>
+      </p:grpSpPr>
       <p:sp>
         <p:nvSpPr>
           <p:cNvPr id="2" name="TextBox 1"/>
@@ -7444,7 +7868,7 @@
           <a:noFill/>
         </p:spPr>
         <p:txBody>
-          <a:bodyPr wrap="square" lIns="0" rIns="0" tIns="0" bIns="0">
+          <a:bodyPr wrap="square" lIns="0" tIns="0" rIns="0" bIns="0">
             <a:spAutoFit/>
           </a:bodyPr>
           <a:lstStyle/>
@@ -7478,7 +7902,7 @@
           <a:noFill/>
         </p:spPr>
         <p:txBody>
-          <a:bodyPr wrap="square" lIns="0" rIns="0" tIns="0" bIns="0">
+          <a:bodyPr wrap="square" lIns="0" tIns="0" rIns="0" bIns="0">
             <a:spAutoFit/>
           </a:bodyPr>
           <a:lstStyle/>
@@ -7512,7 +7936,7 @@
           <a:noFill/>
         </p:spPr>
         <p:txBody>
-          <a:bodyPr wrap="square" lIns="0" rIns="0" tIns="0" bIns="0">
+          <a:bodyPr wrap="square" lIns="0" tIns="0" rIns="0" bIns="0">
             <a:spAutoFit/>
           </a:bodyPr>
           <a:lstStyle/>
@@ -7547,7 +7971,7 @@
           <a:noFill/>
         </p:spPr>
         <p:txBody>
-          <a:bodyPr wrap="square" lIns="0" rIns="0" tIns="0" bIns="0">
+          <a:bodyPr wrap="square" lIns="0" tIns="0" rIns="0" bIns="0">
             <a:spAutoFit/>
           </a:bodyPr>
           <a:lstStyle/>
@@ -7583,14 +8007,32 @@
                 <a:tableStyleId>{5C22544A-7EE6-4342-B048-85BDC9FD1C3A}</a:tableStyleId>
               </a:tblPr>
               <a:tblGrid>
-                <a:gridCol w="1888311"/>
-                <a:gridCol w="6971796"/>
-                <a:gridCol w="2197732"/>
+                <a:gridCol w="1888311">
+                  <a:extLst>
+                    <a:ext uri="{9D8B030D-6E8A-4147-A177-3AD203B41FA5}">
+                      <a16:colId xmlns:a16="http://schemas.microsoft.com/office/drawing/2014/main" val="20000"/>
+                    </a:ext>
+                  </a:extLst>
+                </a:gridCol>
+                <a:gridCol w="6971796">
+                  <a:extLst>
+                    <a:ext uri="{9D8B030D-6E8A-4147-A177-3AD203B41FA5}">
+                      <a16:colId xmlns:a16="http://schemas.microsoft.com/office/drawing/2014/main" val="20001"/>
+                    </a:ext>
+                  </a:extLst>
+                </a:gridCol>
+                <a:gridCol w="2197732">
+                  <a:extLst>
+                    <a:ext uri="{9D8B030D-6E8A-4147-A177-3AD203B41FA5}">
+                      <a16:colId xmlns:a16="http://schemas.microsoft.com/office/drawing/2014/main" val="20002"/>
+                    </a:ext>
+                  </a:extLst>
+                </a:gridCol>
               </a:tblGrid>
               <a:tr h="310896">
                 <a:tc>
                   <a:txBody>
-                    <a:bodyPr wrap="square"/>
+                    <a:bodyPr/>
                     <a:lstStyle/>
                     <a:p>
                       <a:pPr algn="ctr"/>
@@ -7613,7 +8055,7 @@
                 </a:tc>
                 <a:tc>
                   <a:txBody>
-                    <a:bodyPr wrap="square"/>
+                    <a:bodyPr/>
                     <a:lstStyle/>
                     <a:p>
                       <a:pPr algn="ctr"/>
@@ -7636,7 +8078,7 @@
                 </a:tc>
                 <a:tc>
                   <a:txBody>
-                    <a:bodyPr wrap="square"/>
+                    <a:bodyPr/>
                     <a:lstStyle/>
                     <a:p>
                       <a:pPr algn="ctr"/>
@@ -7657,11 +8099,16 @@
                     </a:solidFill>
                   </a:tcPr>
                 </a:tc>
+                <a:extLst>
+                  <a:ext uri="{0D108BD9-81ED-4DB2-BD59-A6C34878D82A}">
+                    <a16:rowId xmlns:a16="http://schemas.microsoft.com/office/drawing/2014/main" val="10000"/>
+                  </a:ext>
+                </a:extLst>
               </a:tr>
               <a:tr h="310896">
                 <a:tc>
                   <a:txBody>
-                    <a:bodyPr wrap="square"/>
+                    <a:bodyPr/>
                     <a:lstStyle/>
                     <a:p>
                       <a:pPr algn="ctr"/>
@@ -7684,7 +8131,7 @@
                 </a:tc>
                 <a:tc>
                   <a:txBody>
-                    <a:bodyPr wrap="square"/>
+                    <a:bodyPr/>
                     <a:lstStyle/>
                     <a:p>
                       <a:pPr algn="l"/>
@@ -7707,7 +8154,7 @@
                 </a:tc>
                 <a:tc>
                   <a:txBody>
-                    <a:bodyPr wrap="square"/>
+                    <a:bodyPr/>
                     <a:lstStyle/>
                     <a:p>
                       <a:pPr algn="ctr"/>
@@ -7728,11 +8175,16 @@
                     </a:solidFill>
                   </a:tcPr>
                 </a:tc>
+                <a:extLst>
+                  <a:ext uri="{0D108BD9-81ED-4DB2-BD59-A6C34878D82A}">
+                    <a16:rowId xmlns:a16="http://schemas.microsoft.com/office/drawing/2014/main" val="10001"/>
+                  </a:ext>
+                </a:extLst>
               </a:tr>
               <a:tr h="310896">
                 <a:tc>
                   <a:txBody>
-                    <a:bodyPr wrap="square"/>
+                    <a:bodyPr/>
                     <a:lstStyle/>
                     <a:p>
                       <a:pPr algn="ctr"/>
@@ -7755,7 +8207,7 @@
                 </a:tc>
                 <a:tc>
                   <a:txBody>
-                    <a:bodyPr wrap="square"/>
+                    <a:bodyPr/>
                     <a:lstStyle/>
                     <a:p>
                       <a:pPr algn="l"/>
@@ -7778,7 +8230,7 @@
                 </a:tc>
                 <a:tc>
                   <a:txBody>
-                    <a:bodyPr wrap="square"/>
+                    <a:bodyPr/>
                     <a:lstStyle/>
                     <a:p>
                       <a:pPr algn="ctr"/>
@@ -7799,11 +8251,16 @@
                     </a:solidFill>
                   </a:tcPr>
                 </a:tc>
+                <a:extLst>
+                  <a:ext uri="{0D108BD9-81ED-4DB2-BD59-A6C34878D82A}">
+                    <a16:rowId xmlns:a16="http://schemas.microsoft.com/office/drawing/2014/main" val="10002"/>
+                  </a:ext>
+                </a:extLst>
               </a:tr>
               <a:tr h="310896">
                 <a:tc>
                   <a:txBody>
-                    <a:bodyPr wrap="square"/>
+                    <a:bodyPr/>
                     <a:lstStyle/>
                     <a:p>
                       <a:pPr algn="ctr"/>
@@ -7826,7 +8283,7 @@
                 </a:tc>
                 <a:tc>
                   <a:txBody>
-                    <a:bodyPr wrap="square"/>
+                    <a:bodyPr/>
                     <a:lstStyle/>
                     <a:p>
                       <a:pPr algn="l"/>
@@ -7849,7 +8306,7 @@
                 </a:tc>
                 <a:tc>
                   <a:txBody>
-                    <a:bodyPr wrap="square"/>
+                    <a:bodyPr/>
                     <a:lstStyle/>
                     <a:p>
                       <a:pPr algn="ctr"/>
@@ -7870,11 +8327,16 @@
                     </a:solidFill>
                   </a:tcPr>
                 </a:tc>
+                <a:extLst>
+                  <a:ext uri="{0D108BD9-81ED-4DB2-BD59-A6C34878D82A}">
+                    <a16:rowId xmlns:a16="http://schemas.microsoft.com/office/drawing/2014/main" val="10003"/>
+                  </a:ext>
+                </a:extLst>
               </a:tr>
               <a:tr h="310896">
                 <a:tc>
                   <a:txBody>
-                    <a:bodyPr wrap="square"/>
+                    <a:bodyPr/>
                     <a:lstStyle/>
                     <a:p>
                       <a:pPr algn="ctr"/>
@@ -7897,7 +8359,7 @@
                 </a:tc>
                 <a:tc>
                   <a:txBody>
-                    <a:bodyPr wrap="square"/>
+                    <a:bodyPr/>
                     <a:lstStyle/>
                     <a:p>
                       <a:pPr algn="l"/>
@@ -7920,7 +8382,7 @@
                 </a:tc>
                 <a:tc>
                   <a:txBody>
-                    <a:bodyPr wrap="square"/>
+                    <a:bodyPr/>
                     <a:lstStyle/>
                     <a:p>
                       <a:pPr algn="ctr"/>
@@ -7941,11 +8403,16 @@
                     </a:solidFill>
                   </a:tcPr>
                 </a:tc>
+                <a:extLst>
+                  <a:ext uri="{0D108BD9-81ED-4DB2-BD59-A6C34878D82A}">
+                    <a16:rowId xmlns:a16="http://schemas.microsoft.com/office/drawing/2014/main" val="10004"/>
+                  </a:ext>
+                </a:extLst>
               </a:tr>
               <a:tr h="310896">
                 <a:tc>
                   <a:txBody>
-                    <a:bodyPr wrap="square"/>
+                    <a:bodyPr/>
                     <a:lstStyle/>
                     <a:p>
                       <a:pPr algn="ctr"/>
@@ -7968,7 +8435,7 @@
                 </a:tc>
                 <a:tc>
                   <a:txBody>
-                    <a:bodyPr wrap="square"/>
+                    <a:bodyPr/>
                     <a:lstStyle/>
                     <a:p>
                       <a:pPr algn="l"/>
@@ -7991,7 +8458,7 @@
                 </a:tc>
                 <a:tc>
                   <a:txBody>
-                    <a:bodyPr wrap="square"/>
+                    <a:bodyPr/>
                     <a:lstStyle/>
                     <a:p>
                       <a:pPr algn="ctr"/>
@@ -8012,6 +8479,11 @@
                     </a:solidFill>
                   </a:tcPr>
                 </a:tc>
+                <a:extLst>
+                  <a:ext uri="{0D108BD9-81ED-4DB2-BD59-A6C34878D82A}">
+                    <a16:rowId xmlns:a16="http://schemas.microsoft.com/office/drawing/2014/main" val="10005"/>
+                  </a:ext>
+                </a:extLst>
               </a:tr>
             </a:tbl>
           </a:graphicData>
@@ -8034,7 +8506,7 @@
           <a:noFill/>
         </p:spPr>
         <p:txBody>
-          <a:bodyPr wrap="square" lIns="0" rIns="0" tIns="0" bIns="0">
+          <a:bodyPr wrap="square" lIns="0" tIns="0" rIns="0" bIns="0">
             <a:spAutoFit/>
           </a:bodyPr>
           <a:lstStyle/>
@@ -8068,7 +8540,7 @@
           <a:noFill/>
         </p:spPr>
         <p:txBody>
-          <a:bodyPr wrap="square" lIns="0" rIns="0" tIns="0" bIns="0">
+          <a:bodyPr wrap="square" lIns="0" tIns="0" rIns="0" bIns="0">
             <a:spAutoFit/>
           </a:bodyPr>
           <a:lstStyle/>
@@ -8145,6 +8617,7 @@
           <a:lstStyle/>
           <a:p>
             <a:pPr algn="ctr"/>
+            <a:endParaRPr/>
           </a:p>
         </p:txBody>
       </p:sp>
@@ -8165,7 +8638,7 @@
           <a:noFill/>
         </p:spPr>
         <p:txBody>
-          <a:bodyPr wrap="square" lIns="0" rIns="0" tIns="0" bIns="0">
+          <a:bodyPr wrap="square" lIns="0" tIns="0" rIns="0" bIns="0">
             <a:spAutoFit/>
           </a:bodyPr>
           <a:lstStyle/>
@@ -8208,7 +8681,7 @@
           <a:noFill/>
         </p:spPr>
         <p:txBody>
-          <a:bodyPr wrap="square" lIns="0" rIns="0" tIns="0" bIns="0">
+          <a:bodyPr wrap="square" lIns="0" tIns="0" rIns="0" bIns="0">
             <a:spAutoFit/>
           </a:bodyPr>
           <a:lstStyle/>
@@ -8285,6 +8758,7 @@
           <a:lstStyle/>
           <a:p>
             <a:pPr algn="ctr"/>
+            <a:endParaRPr/>
           </a:p>
         </p:txBody>
       </p:sp>
@@ -8297,7 +8771,7 @@
 </file>
 
 <file path=ppt/slides/slide17.xml><?xml version="1.0" encoding="utf-8"?>
-<p:sld xmlns:a="http://schemas.openxmlformats.org/drawingml/2006/main" xmlns:p="http://schemas.openxmlformats.org/presentationml/2006/main" xmlns:r="http://schemas.openxmlformats.org/officeDocument/2006/relationships">
+<p:sld xmlns:a="http://schemas.openxmlformats.org/drawingml/2006/main" xmlns:r="http://schemas.openxmlformats.org/officeDocument/2006/relationships" xmlns:p="http://schemas.openxmlformats.org/presentationml/2006/main">
   <p:cSld>
     <p:spTree>
       <p:nvGrpSpPr>
@@ -8305,7 +8779,14 @@
         <p:cNvGrpSpPr/>
         <p:nvPr/>
       </p:nvGrpSpPr>
-      <p:grpSpPr/>
+      <p:grpSpPr>
+        <a:xfrm>
+          <a:off x="0" y="0"/>
+          <a:ext cx="0" cy="0"/>
+          <a:chOff x="0" y="0"/>
+          <a:chExt cx="0" cy="0"/>
+        </a:xfrm>
+      </p:grpSpPr>
       <p:sp>
         <p:nvSpPr>
           <p:cNvPr id="2" name="TextBox 1"/>
@@ -8323,7 +8804,7 @@
           <a:noFill/>
         </p:spPr>
         <p:txBody>
-          <a:bodyPr wrap="square" lIns="0" rIns="0" tIns="0" bIns="0">
+          <a:bodyPr wrap="square" lIns="0" tIns="0" rIns="0" bIns="0">
             <a:spAutoFit/>
           </a:bodyPr>
           <a:lstStyle/>
@@ -8357,7 +8838,7 @@
           <a:noFill/>
         </p:spPr>
         <p:txBody>
-          <a:bodyPr wrap="square" lIns="0" rIns="0" tIns="0" bIns="0">
+          <a:bodyPr wrap="square" lIns="0" tIns="0" rIns="0" bIns="0">
             <a:spAutoFit/>
           </a:bodyPr>
           <a:lstStyle/>
@@ -8391,7 +8872,7 @@
           <a:noFill/>
         </p:spPr>
         <p:txBody>
-          <a:bodyPr wrap="square" lIns="0" rIns="0" tIns="0" bIns="0">
+          <a:bodyPr wrap="square" lIns="0" tIns="0" rIns="0" bIns="0">
             <a:spAutoFit/>
           </a:bodyPr>
           <a:lstStyle/>
@@ -8426,7 +8907,7 @@
           <a:noFill/>
         </p:spPr>
         <p:txBody>
-          <a:bodyPr wrap="square" lIns="0" rIns="0" tIns="0" bIns="0">
+          <a:bodyPr wrap="square" lIns="0" tIns="0" rIns="0" bIns="0">
             <a:spAutoFit/>
           </a:bodyPr>
           <a:lstStyle/>
@@ -8460,7 +8941,7 @@
           <a:noFill/>
         </p:spPr>
         <p:txBody>
-          <a:bodyPr wrap="square" lIns="0" rIns="0" tIns="0" bIns="0">
+          <a:bodyPr wrap="square" lIns="0" tIns="0" rIns="0" bIns="0">
             <a:spAutoFit/>
           </a:bodyPr>
           <a:lstStyle/>
@@ -8503,7 +8984,7 @@
           <a:noFill/>
         </p:spPr>
         <p:txBody>
-          <a:bodyPr wrap="square" lIns="0" rIns="0" tIns="0" bIns="0">
+          <a:bodyPr wrap="square" lIns="0" tIns="0" rIns="0" bIns="0">
             <a:spAutoFit/>
           </a:bodyPr>
           <a:lstStyle/>
@@ -8742,7 +9223,7 @@
           <a:noFill/>
         </p:spPr>
         <p:txBody>
-          <a:bodyPr wrap="square" lIns="0" rIns="0" tIns="0" bIns="0">
+          <a:bodyPr wrap="square" lIns="0" tIns="0" rIns="0" bIns="0">
             <a:spAutoFit/>
           </a:bodyPr>
           <a:lstStyle/>
@@ -8776,7 +9257,7 @@
           <a:noFill/>
         </p:spPr>
         <p:txBody>
-          <a:bodyPr wrap="square" lIns="0" rIns="0" tIns="0" bIns="0">
+          <a:bodyPr wrap="square" lIns="0" tIns="0" rIns="0" bIns="0">
             <a:spAutoFit/>
           </a:bodyPr>
           <a:lstStyle/>
@@ -8895,7 +9376,7 @@
 </file>
 
 <file path=ppt/slides/slide18.xml><?xml version="1.0" encoding="utf-8"?>
-<p:sld xmlns:a="http://schemas.openxmlformats.org/drawingml/2006/main" xmlns:p="http://schemas.openxmlformats.org/presentationml/2006/main" xmlns:r="http://schemas.openxmlformats.org/officeDocument/2006/relationships">
+<p:sld xmlns:a="http://schemas.openxmlformats.org/drawingml/2006/main" xmlns:r="http://schemas.openxmlformats.org/officeDocument/2006/relationships" xmlns:p="http://schemas.openxmlformats.org/presentationml/2006/main">
   <p:cSld>
     <p:spTree>
       <p:nvGrpSpPr>
@@ -8903,7 +9384,14 @@
         <p:cNvGrpSpPr/>
         <p:nvPr/>
       </p:nvGrpSpPr>
-      <p:grpSpPr/>
+      <p:grpSpPr>
+        <a:xfrm>
+          <a:off x="0" y="0"/>
+          <a:ext cx="0" cy="0"/>
+          <a:chOff x="0" y="0"/>
+          <a:chExt cx="0" cy="0"/>
+        </a:xfrm>
+      </p:grpSpPr>
       <p:sp>
         <p:nvSpPr>
           <p:cNvPr id="2" name="TextBox 1"/>
@@ -8921,7 +9409,7 @@
           <a:noFill/>
         </p:spPr>
         <p:txBody>
-          <a:bodyPr wrap="square" lIns="0" rIns="0" tIns="0" bIns="0">
+          <a:bodyPr wrap="square" lIns="0" tIns="0" rIns="0" bIns="0">
             <a:spAutoFit/>
           </a:bodyPr>
           <a:lstStyle/>
@@ -8955,7 +9443,7 @@
           <a:noFill/>
         </p:spPr>
         <p:txBody>
-          <a:bodyPr wrap="square" lIns="0" rIns="0" tIns="0" bIns="0">
+          <a:bodyPr wrap="square" lIns="0" tIns="0" rIns="0" bIns="0">
             <a:spAutoFit/>
           </a:bodyPr>
           <a:lstStyle/>
@@ -8989,7 +9477,7 @@
           <a:noFill/>
         </p:spPr>
         <p:txBody>
-          <a:bodyPr wrap="square" lIns="0" rIns="0" tIns="0" bIns="0">
+          <a:bodyPr wrap="square" lIns="0" tIns="0" rIns="0" bIns="0">
             <a:spAutoFit/>
           </a:bodyPr>
           <a:lstStyle/>
@@ -9024,7 +9512,7 @@
           <a:noFill/>
         </p:spPr>
         <p:txBody>
-          <a:bodyPr wrap="square" lIns="0" rIns="0" tIns="0" bIns="0">
+          <a:bodyPr wrap="square" lIns="0" tIns="0" rIns="0" bIns="0">
             <a:spAutoFit/>
           </a:bodyPr>
           <a:lstStyle/>
@@ -9060,14 +9548,32 @@
                 <a:tableStyleId>{5C22544A-7EE6-4342-B048-85BDC9FD1C3A}</a:tableStyleId>
               </a:tblPr>
               <a:tblGrid>
-                <a:gridCol w="1386689"/>
-                <a:gridCol w="4093409"/>
-                <a:gridCol w="5577741"/>
+                <a:gridCol w="1386689">
+                  <a:extLst>
+                    <a:ext uri="{9D8B030D-6E8A-4147-A177-3AD203B41FA5}">
+                      <a16:colId xmlns:a16="http://schemas.microsoft.com/office/drawing/2014/main" val="20000"/>
+                    </a:ext>
+                  </a:extLst>
+                </a:gridCol>
+                <a:gridCol w="4093409">
+                  <a:extLst>
+                    <a:ext uri="{9D8B030D-6E8A-4147-A177-3AD203B41FA5}">
+                      <a16:colId xmlns:a16="http://schemas.microsoft.com/office/drawing/2014/main" val="20001"/>
+                    </a:ext>
+                  </a:extLst>
+                </a:gridCol>
+                <a:gridCol w="5577741">
+                  <a:extLst>
+                    <a:ext uri="{9D8B030D-6E8A-4147-A177-3AD203B41FA5}">
+                      <a16:colId xmlns:a16="http://schemas.microsoft.com/office/drawing/2014/main" val="20002"/>
+                    </a:ext>
+                  </a:extLst>
+                </a:gridCol>
               </a:tblGrid>
               <a:tr h="321818">
                 <a:tc>
                   <a:txBody>
-                    <a:bodyPr wrap="square"/>
+                    <a:bodyPr/>
                     <a:lstStyle/>
                     <a:p>
                       <a:pPr algn="ctr"/>
@@ -9090,7 +9596,7 @@
                 </a:tc>
                 <a:tc>
                   <a:txBody>
-                    <a:bodyPr wrap="square"/>
+                    <a:bodyPr/>
                     <a:lstStyle/>
                     <a:p>
                       <a:pPr algn="ctr"/>
@@ -9113,7 +9619,7 @@
                 </a:tc>
                 <a:tc>
                   <a:txBody>
-                    <a:bodyPr wrap="square"/>
+                    <a:bodyPr/>
                     <a:lstStyle/>
                     <a:p>
                       <a:pPr algn="ctr"/>
@@ -9134,11 +9640,16 @@
                     </a:solidFill>
                   </a:tcPr>
                 </a:tc>
+                <a:extLst>
+                  <a:ext uri="{0D108BD9-81ED-4DB2-BD59-A6C34878D82A}">
+                    <a16:rowId xmlns:a16="http://schemas.microsoft.com/office/drawing/2014/main" val="10000"/>
+                  </a:ext>
+                </a:extLst>
               </a:tr>
               <a:tr h="321818">
                 <a:tc>
                   <a:txBody>
-                    <a:bodyPr wrap="square"/>
+                    <a:bodyPr/>
                     <a:lstStyle/>
                     <a:p>
                       <a:pPr algn="ctr"/>
@@ -9161,7 +9672,7 @@
                 </a:tc>
                 <a:tc>
                   <a:txBody>
-                    <a:bodyPr wrap="square"/>
+                    <a:bodyPr/>
                     <a:lstStyle/>
                     <a:p>
                       <a:pPr algn="l"/>
@@ -9223,7 +9734,7 @@
                 </a:tc>
                 <a:tc>
                   <a:txBody>
-                    <a:bodyPr wrap="square"/>
+                    <a:bodyPr/>
                     <a:lstStyle/>
                     <a:p>
                       <a:pPr algn="l"/>
@@ -9264,11 +9775,16 @@
                     </a:solidFill>
                   </a:tcPr>
                 </a:tc>
+                <a:extLst>
+                  <a:ext uri="{0D108BD9-81ED-4DB2-BD59-A6C34878D82A}">
+                    <a16:rowId xmlns:a16="http://schemas.microsoft.com/office/drawing/2014/main" val="10001"/>
+                  </a:ext>
+                </a:extLst>
               </a:tr>
               <a:tr h="321818">
                 <a:tc>
                   <a:txBody>
-                    <a:bodyPr wrap="square"/>
+                    <a:bodyPr/>
                     <a:lstStyle/>
                     <a:p>
                       <a:pPr algn="ctr"/>
@@ -9291,7 +9807,7 @@
                 </a:tc>
                 <a:tc>
                   <a:txBody>
-                    <a:bodyPr wrap="square"/>
+                    <a:bodyPr/>
                     <a:lstStyle/>
                     <a:p>
                       <a:pPr algn="l"/>
@@ -9353,7 +9869,7 @@
                 </a:tc>
                 <a:tc>
                   <a:txBody>
-                    <a:bodyPr wrap="square"/>
+                    <a:bodyPr/>
                     <a:lstStyle/>
                     <a:p>
                       <a:pPr algn="l"/>
@@ -9394,6 +9910,11 @@
                     </a:solidFill>
                   </a:tcPr>
                 </a:tc>
+                <a:extLst>
+                  <a:ext uri="{0D108BD9-81ED-4DB2-BD59-A6C34878D82A}">
+                    <a16:rowId xmlns:a16="http://schemas.microsoft.com/office/drawing/2014/main" val="10002"/>
+                  </a:ext>
+                </a:extLst>
               </a:tr>
             </a:tbl>
           </a:graphicData>
@@ -9416,7 +9937,7 @@
           <a:noFill/>
         </p:spPr>
         <p:txBody>
-          <a:bodyPr wrap="square" lIns="0" rIns="0" tIns="0" bIns="0">
+          <a:bodyPr wrap="square" lIns="0" tIns="0" rIns="0" bIns="0">
             <a:spAutoFit/>
           </a:bodyPr>
           <a:lstStyle/>
@@ -9474,6 +9995,7 @@
           <a:lstStyle/>
           <a:p>
             <a:pPr algn="ctr"/>
+            <a:endParaRPr/>
           </a:p>
         </p:txBody>
       </p:sp>
@@ -9486,7 +10008,7 @@
 </file>
 
 <file path=ppt/slides/slide19.xml><?xml version="1.0" encoding="utf-8"?>
-<p:sld xmlns:a="http://schemas.openxmlformats.org/drawingml/2006/main" xmlns:p="http://schemas.openxmlformats.org/presentationml/2006/main" xmlns:r="http://schemas.openxmlformats.org/officeDocument/2006/relationships">
+<p:sld xmlns:a="http://schemas.openxmlformats.org/drawingml/2006/main" xmlns:r="http://schemas.openxmlformats.org/officeDocument/2006/relationships" xmlns:p="http://schemas.openxmlformats.org/presentationml/2006/main">
   <p:cSld>
     <p:spTree>
       <p:nvGrpSpPr>
@@ -9494,7 +10016,14 @@
         <p:cNvGrpSpPr/>
         <p:nvPr/>
       </p:nvGrpSpPr>
-      <p:grpSpPr/>
+      <p:grpSpPr>
+        <a:xfrm>
+          <a:off x="0" y="0"/>
+          <a:ext cx="0" cy="0"/>
+          <a:chOff x="0" y="0"/>
+          <a:chExt cx="0" cy="0"/>
+        </a:xfrm>
+      </p:grpSpPr>
       <p:sp>
         <p:nvSpPr>
           <p:cNvPr id="2" name="TextBox 1"/>
@@ -9512,7 +10041,7 @@
           <a:noFill/>
         </p:spPr>
         <p:txBody>
-          <a:bodyPr wrap="square" lIns="0" rIns="0" tIns="0" bIns="0">
+          <a:bodyPr wrap="square" lIns="0" tIns="0" rIns="0" bIns="0">
             <a:spAutoFit/>
           </a:bodyPr>
           <a:lstStyle/>
@@ -9546,7 +10075,7 @@
           <a:noFill/>
         </p:spPr>
         <p:txBody>
-          <a:bodyPr wrap="square" lIns="0" rIns="0" tIns="0" bIns="0">
+          <a:bodyPr wrap="square" lIns="0" tIns="0" rIns="0" bIns="0">
             <a:spAutoFit/>
           </a:bodyPr>
           <a:lstStyle/>
@@ -9580,7 +10109,7 @@
           <a:noFill/>
         </p:spPr>
         <p:txBody>
-          <a:bodyPr wrap="square" lIns="0" rIns="0" tIns="0" bIns="0">
+          <a:bodyPr wrap="square" lIns="0" tIns="0" rIns="0" bIns="0">
             <a:spAutoFit/>
           </a:bodyPr>
           <a:lstStyle/>
@@ -9615,7 +10144,7 @@
           <a:noFill/>
         </p:spPr>
         <p:txBody>
-          <a:bodyPr wrap="square" lIns="0" rIns="0" tIns="0" bIns="0">
+          <a:bodyPr wrap="square" lIns="0" tIns="0" rIns="0" bIns="0">
             <a:spAutoFit/>
           </a:bodyPr>
           <a:lstStyle/>
@@ -9651,14 +10180,32 @@
                 <a:tableStyleId>{5C22544A-7EE6-4342-B048-85BDC9FD1C3A}</a:tableStyleId>
               </a:tblPr>
               <a:tblGrid>
-                <a:gridCol w="1349041"/>
-                <a:gridCol w="5149683"/>
-                <a:gridCol w="4559115"/>
+                <a:gridCol w="1349041">
+                  <a:extLst>
+                    <a:ext uri="{9D8B030D-6E8A-4147-A177-3AD203B41FA5}">
+                      <a16:colId xmlns:a16="http://schemas.microsoft.com/office/drawing/2014/main" val="20000"/>
+                    </a:ext>
+                  </a:extLst>
+                </a:gridCol>
+                <a:gridCol w="5149683">
+                  <a:extLst>
+                    <a:ext uri="{9D8B030D-6E8A-4147-A177-3AD203B41FA5}">
+                      <a16:colId xmlns:a16="http://schemas.microsoft.com/office/drawing/2014/main" val="20001"/>
+                    </a:ext>
+                  </a:extLst>
+                </a:gridCol>
+                <a:gridCol w="4559115">
+                  <a:extLst>
+                    <a:ext uri="{9D8B030D-6E8A-4147-A177-3AD203B41FA5}">
+                      <a16:colId xmlns:a16="http://schemas.microsoft.com/office/drawing/2014/main" val="20002"/>
+                    </a:ext>
+                  </a:extLst>
+                </a:gridCol>
               </a:tblGrid>
               <a:tr h="321818">
                 <a:tc>
                   <a:txBody>
-                    <a:bodyPr wrap="square"/>
+                    <a:bodyPr/>
                     <a:lstStyle/>
                     <a:p>
                       <a:pPr algn="ctr"/>
@@ -9681,7 +10228,7 @@
                 </a:tc>
                 <a:tc>
                   <a:txBody>
-                    <a:bodyPr wrap="square"/>
+                    <a:bodyPr/>
                     <a:lstStyle/>
                     <a:p>
                       <a:pPr algn="ctr"/>
@@ -9704,7 +10251,7 @@
                 </a:tc>
                 <a:tc>
                   <a:txBody>
-                    <a:bodyPr wrap="square"/>
+                    <a:bodyPr/>
                     <a:lstStyle/>
                     <a:p>
                       <a:pPr algn="ctr"/>
@@ -9725,11 +10272,16 @@
                     </a:solidFill>
                   </a:tcPr>
                 </a:tc>
+                <a:extLst>
+                  <a:ext uri="{0D108BD9-81ED-4DB2-BD59-A6C34878D82A}">
+                    <a16:rowId xmlns:a16="http://schemas.microsoft.com/office/drawing/2014/main" val="10000"/>
+                  </a:ext>
+                </a:extLst>
               </a:tr>
               <a:tr h="321818">
                 <a:tc>
                   <a:txBody>
-                    <a:bodyPr wrap="square"/>
+                    <a:bodyPr/>
                     <a:lstStyle/>
                     <a:p>
                       <a:pPr algn="ctr"/>
@@ -9752,7 +10304,7 @@
                 </a:tc>
                 <a:tc>
                   <a:txBody>
-                    <a:bodyPr wrap="square"/>
+                    <a:bodyPr/>
                     <a:lstStyle/>
                     <a:p>
                       <a:pPr algn="l"/>
@@ -9795,7 +10347,7 @@
                 </a:tc>
                 <a:tc>
                   <a:txBody>
-                    <a:bodyPr wrap="square"/>
+                    <a:bodyPr/>
                     <a:lstStyle/>
                     <a:p>
                       <a:pPr algn="l"/>
@@ -9836,11 +10388,16 @@
                     </a:solidFill>
                   </a:tcPr>
                 </a:tc>
+                <a:extLst>
+                  <a:ext uri="{0D108BD9-81ED-4DB2-BD59-A6C34878D82A}">
+                    <a16:rowId xmlns:a16="http://schemas.microsoft.com/office/drawing/2014/main" val="10001"/>
+                  </a:ext>
+                </a:extLst>
               </a:tr>
               <a:tr h="321818">
                 <a:tc>
                   <a:txBody>
-                    <a:bodyPr wrap="square"/>
+                    <a:bodyPr/>
                     <a:lstStyle/>
                     <a:p>
                       <a:pPr algn="ctr"/>
@@ -9863,7 +10420,7 @@
                 </a:tc>
                 <a:tc>
                   <a:txBody>
-                    <a:bodyPr wrap="square"/>
+                    <a:bodyPr/>
                     <a:lstStyle/>
                     <a:p>
                       <a:pPr algn="l"/>
@@ -9925,7 +10482,7 @@
                 </a:tc>
                 <a:tc>
                   <a:txBody>
-                    <a:bodyPr wrap="square"/>
+                    <a:bodyPr/>
                     <a:lstStyle/>
                     <a:p>
                       <a:pPr algn="l"/>
@@ -9966,6 +10523,11 @@
                     </a:solidFill>
                   </a:tcPr>
                 </a:tc>
+                <a:extLst>
+                  <a:ext uri="{0D108BD9-81ED-4DB2-BD59-A6C34878D82A}">
+                    <a16:rowId xmlns:a16="http://schemas.microsoft.com/office/drawing/2014/main" val="10002"/>
+                  </a:ext>
+                </a:extLst>
               </a:tr>
             </a:tbl>
           </a:graphicData>
@@ -9988,7 +10550,7 @@
           <a:noFill/>
         </p:spPr>
         <p:txBody>
-          <a:bodyPr wrap="square" lIns="0" rIns="0" tIns="0" bIns="0">
+          <a:bodyPr wrap="square" lIns="0" tIns="0" rIns="0" bIns="0">
             <a:spAutoFit/>
           </a:bodyPr>
           <a:lstStyle/>
@@ -10046,6 +10608,7 @@
           <a:lstStyle/>
           <a:p>
             <a:pPr algn="ctr"/>
+            <a:endParaRPr/>
           </a:p>
         </p:txBody>
       </p:sp>
@@ -10058,7 +10621,7 @@
 </file>
 
 <file path=ppt/slides/slide2.xml><?xml version="1.0" encoding="utf-8"?>
-<p:sld xmlns:a="http://schemas.openxmlformats.org/drawingml/2006/main" xmlns:p="http://schemas.openxmlformats.org/presentationml/2006/main" xmlns:r="http://schemas.openxmlformats.org/officeDocument/2006/relationships">
+<p:sld xmlns:a="http://schemas.openxmlformats.org/drawingml/2006/main" xmlns:r="http://schemas.openxmlformats.org/officeDocument/2006/relationships" xmlns:p="http://schemas.openxmlformats.org/presentationml/2006/main">
   <p:cSld>
     <p:spTree>
       <p:nvGrpSpPr>
@@ -10066,7 +10629,14 @@
         <p:cNvGrpSpPr/>
         <p:nvPr/>
       </p:nvGrpSpPr>
-      <p:grpSpPr/>
+      <p:grpSpPr>
+        <a:xfrm>
+          <a:off x="0" y="0"/>
+          <a:ext cx="0" cy="0"/>
+          <a:chOff x="0" y="0"/>
+          <a:chExt cx="0" cy="0"/>
+        </a:xfrm>
+      </p:grpSpPr>
       <p:sp>
         <p:nvSpPr>
           <p:cNvPr id="2" name="TextBox 1"/>
@@ -10084,7 +10654,7 @@
           <a:noFill/>
         </p:spPr>
         <p:txBody>
-          <a:bodyPr wrap="square" lIns="0" rIns="0" tIns="0" bIns="0">
+          <a:bodyPr wrap="square" lIns="0" tIns="0" rIns="0" bIns="0">
             <a:spAutoFit/>
           </a:bodyPr>
           <a:lstStyle/>
@@ -10118,7 +10688,7 @@
           <a:noFill/>
         </p:spPr>
         <p:txBody>
-          <a:bodyPr wrap="square" lIns="0" rIns="0" tIns="0" bIns="0">
+          <a:bodyPr wrap="square" lIns="0" tIns="0" rIns="0" bIns="0">
             <a:spAutoFit/>
           </a:bodyPr>
           <a:lstStyle/>
@@ -10152,7 +10722,7 @@
           <a:noFill/>
         </p:spPr>
         <p:txBody>
-          <a:bodyPr wrap="square" lIns="0" rIns="0" tIns="0" bIns="0">
+          <a:bodyPr wrap="square" lIns="0" tIns="0" rIns="0" bIns="0">
             <a:spAutoFit/>
           </a:bodyPr>
           <a:lstStyle/>
@@ -10187,7 +10757,7 @@
           <a:noFill/>
         </p:spPr>
         <p:txBody>
-          <a:bodyPr wrap="square" lIns="0" rIns="0" tIns="0" bIns="0">
+          <a:bodyPr wrap="square" lIns="0" tIns="0" rIns="0" bIns="0">
             <a:spAutoFit/>
           </a:bodyPr>
           <a:lstStyle/>
@@ -10223,13 +10793,25 @@
                 <a:tableStyleId>{5C22544A-7EE6-4342-B048-85BDC9FD1C3A}</a:tableStyleId>
               </a:tblPr>
               <a:tblGrid>
-                <a:gridCol w="1278081"/>
-                <a:gridCol w="9779758"/>
+                <a:gridCol w="1278081">
+                  <a:extLst>
+                    <a:ext uri="{9D8B030D-6E8A-4147-A177-3AD203B41FA5}">
+                      <a16:colId xmlns:a16="http://schemas.microsoft.com/office/drawing/2014/main" val="20000"/>
+                    </a:ext>
+                  </a:extLst>
+                </a:gridCol>
+                <a:gridCol w="9779758">
+                  <a:extLst>
+                    <a:ext uri="{9D8B030D-6E8A-4147-A177-3AD203B41FA5}">
+                      <a16:colId xmlns:a16="http://schemas.microsoft.com/office/drawing/2014/main" val="20001"/>
+                    </a:ext>
+                  </a:extLst>
+                </a:gridCol>
               </a:tblGrid>
               <a:tr h="321818">
                 <a:tc>
                   <a:txBody>
-                    <a:bodyPr wrap="square"/>
+                    <a:bodyPr/>
                     <a:lstStyle/>
                     <a:p>
                       <a:pPr algn="ctr"/>
@@ -10252,7 +10834,7 @@
                 </a:tc>
                 <a:tc>
                   <a:txBody>
-                    <a:bodyPr wrap="square"/>
+                    <a:bodyPr/>
                     <a:lstStyle/>
                     <a:p>
                       <a:pPr algn="ctr"/>
@@ -10273,11 +10855,16 @@
                     </a:solidFill>
                   </a:tcPr>
                 </a:tc>
+                <a:extLst>
+                  <a:ext uri="{0D108BD9-81ED-4DB2-BD59-A6C34878D82A}">
+                    <a16:rowId xmlns:a16="http://schemas.microsoft.com/office/drawing/2014/main" val="10000"/>
+                  </a:ext>
+                </a:extLst>
               </a:tr>
               <a:tr h="321818">
                 <a:tc>
                   <a:txBody>
-                    <a:bodyPr wrap="square"/>
+                    <a:bodyPr/>
                     <a:lstStyle/>
                     <a:p>
                       <a:pPr algn="ctr"/>
@@ -10300,7 +10887,7 @@
                 </a:tc>
                 <a:tc>
                   <a:txBody>
-                    <a:bodyPr wrap="square"/>
+                    <a:bodyPr/>
                     <a:lstStyle/>
                     <a:p>
                       <a:pPr algn="l"/>
@@ -10321,11 +10908,16 @@
                     </a:solidFill>
                   </a:tcPr>
                 </a:tc>
+                <a:extLst>
+                  <a:ext uri="{0D108BD9-81ED-4DB2-BD59-A6C34878D82A}">
+                    <a16:rowId xmlns:a16="http://schemas.microsoft.com/office/drawing/2014/main" val="10001"/>
+                  </a:ext>
+                </a:extLst>
               </a:tr>
               <a:tr h="321818">
                 <a:tc>
                   <a:txBody>
-                    <a:bodyPr wrap="square"/>
+                    <a:bodyPr/>
                     <a:lstStyle/>
                     <a:p>
                       <a:pPr algn="ctr"/>
@@ -10348,7 +10940,7 @@
                 </a:tc>
                 <a:tc>
                   <a:txBody>
-                    <a:bodyPr wrap="square"/>
+                    <a:bodyPr/>
                     <a:lstStyle/>
                     <a:p>
                       <a:pPr algn="l"/>
@@ -10369,11 +10961,16 @@
                     </a:solidFill>
                   </a:tcPr>
                 </a:tc>
+                <a:extLst>
+                  <a:ext uri="{0D108BD9-81ED-4DB2-BD59-A6C34878D82A}">
+                    <a16:rowId xmlns:a16="http://schemas.microsoft.com/office/drawing/2014/main" val="10002"/>
+                  </a:ext>
+                </a:extLst>
               </a:tr>
               <a:tr h="321818">
                 <a:tc>
                   <a:txBody>
-                    <a:bodyPr wrap="square"/>
+                    <a:bodyPr/>
                     <a:lstStyle/>
                     <a:p>
                       <a:pPr algn="ctr"/>
@@ -10396,7 +10993,7 @@
                 </a:tc>
                 <a:tc>
                   <a:txBody>
-                    <a:bodyPr wrap="square"/>
+                    <a:bodyPr/>
                     <a:lstStyle/>
                     <a:p>
                       <a:pPr algn="l"/>
@@ -10417,11 +11014,16 @@
                     </a:solidFill>
                   </a:tcPr>
                 </a:tc>
+                <a:extLst>
+                  <a:ext uri="{0D108BD9-81ED-4DB2-BD59-A6C34878D82A}">
+                    <a16:rowId xmlns:a16="http://schemas.microsoft.com/office/drawing/2014/main" val="10003"/>
+                  </a:ext>
+                </a:extLst>
               </a:tr>
               <a:tr h="321818">
                 <a:tc>
                   <a:txBody>
-                    <a:bodyPr wrap="square"/>
+                    <a:bodyPr/>
                     <a:lstStyle/>
                     <a:p>
                       <a:pPr algn="ctr"/>
@@ -10444,7 +11046,7 @@
                 </a:tc>
                 <a:tc>
                   <a:txBody>
-                    <a:bodyPr wrap="square"/>
+                    <a:bodyPr/>
                     <a:lstStyle/>
                     <a:p>
                       <a:pPr algn="l"/>
@@ -10465,11 +11067,16 @@
                     </a:solidFill>
                   </a:tcPr>
                 </a:tc>
+                <a:extLst>
+                  <a:ext uri="{0D108BD9-81ED-4DB2-BD59-A6C34878D82A}">
+                    <a16:rowId xmlns:a16="http://schemas.microsoft.com/office/drawing/2014/main" val="10004"/>
+                  </a:ext>
+                </a:extLst>
               </a:tr>
               <a:tr h="321818">
                 <a:tc>
                   <a:txBody>
-                    <a:bodyPr wrap="square"/>
+                    <a:bodyPr/>
                     <a:lstStyle/>
                     <a:p>
                       <a:pPr algn="ctr"/>
@@ -10492,7 +11099,7 @@
                 </a:tc>
                 <a:tc>
                   <a:txBody>
-                    <a:bodyPr wrap="square"/>
+                    <a:bodyPr/>
                     <a:lstStyle/>
                     <a:p>
                       <a:pPr algn="l"/>
@@ -10513,11 +11120,16 @@
                     </a:solidFill>
                   </a:tcPr>
                 </a:tc>
+                <a:extLst>
+                  <a:ext uri="{0D108BD9-81ED-4DB2-BD59-A6C34878D82A}">
+                    <a16:rowId xmlns:a16="http://schemas.microsoft.com/office/drawing/2014/main" val="10005"/>
+                  </a:ext>
+                </a:extLst>
               </a:tr>
               <a:tr h="321818">
                 <a:tc>
                   <a:txBody>
-                    <a:bodyPr wrap="square"/>
+                    <a:bodyPr/>
                     <a:lstStyle/>
                     <a:p>
                       <a:pPr algn="ctr"/>
@@ -10540,7 +11152,7 @@
                 </a:tc>
                 <a:tc>
                   <a:txBody>
-                    <a:bodyPr wrap="square"/>
+                    <a:bodyPr/>
                     <a:lstStyle/>
                     <a:p>
                       <a:pPr algn="l"/>
@@ -10561,6 +11173,11 @@
                     </a:solidFill>
                   </a:tcPr>
                 </a:tc>
+                <a:extLst>
+                  <a:ext uri="{0D108BD9-81ED-4DB2-BD59-A6C34878D82A}">
+                    <a16:rowId xmlns:a16="http://schemas.microsoft.com/office/drawing/2014/main" val="10006"/>
+                  </a:ext>
+                </a:extLst>
               </a:tr>
             </a:tbl>
           </a:graphicData>
@@ -10583,7 +11200,7 @@
           <a:noFill/>
         </p:spPr>
         <p:txBody>
-          <a:bodyPr wrap="square" lIns="0" rIns="0" tIns="0" bIns="0">
+          <a:bodyPr wrap="square" lIns="0" tIns="0" rIns="0" bIns="0">
             <a:spAutoFit/>
           </a:bodyPr>
           <a:lstStyle/>
@@ -10641,6 +11258,7 @@
           <a:lstStyle/>
           <a:p>
             <a:pPr algn="ctr"/>
+            <a:endParaRPr/>
           </a:p>
         </p:txBody>
       </p:sp>
@@ -10653,7 +11271,7 @@
 </file>
 
 <file path=ppt/slides/slide20.xml><?xml version="1.0" encoding="utf-8"?>
-<p:sld xmlns:a="http://schemas.openxmlformats.org/drawingml/2006/main" xmlns:p="http://schemas.openxmlformats.org/presentationml/2006/main" xmlns:r="http://schemas.openxmlformats.org/officeDocument/2006/relationships">
+<p:sld xmlns:a="http://schemas.openxmlformats.org/drawingml/2006/main" xmlns:r="http://schemas.openxmlformats.org/officeDocument/2006/relationships" xmlns:p="http://schemas.openxmlformats.org/presentationml/2006/main">
   <p:cSld>
     <p:spTree>
       <p:nvGrpSpPr>
@@ -10661,7 +11279,14 @@
         <p:cNvGrpSpPr/>
         <p:nvPr/>
       </p:nvGrpSpPr>
-      <p:grpSpPr/>
+      <p:grpSpPr>
+        <a:xfrm>
+          <a:off x="0" y="0"/>
+          <a:ext cx="0" cy="0"/>
+          <a:chOff x="0" y="0"/>
+          <a:chExt cx="0" cy="0"/>
+        </a:xfrm>
+      </p:grpSpPr>
       <p:sp>
         <p:nvSpPr>
           <p:cNvPr id="2" name="TextBox 1"/>
@@ -10679,7 +11304,7 @@
           <a:noFill/>
         </p:spPr>
         <p:txBody>
-          <a:bodyPr wrap="square" lIns="0" rIns="0" tIns="0" bIns="0">
+          <a:bodyPr wrap="square" lIns="0" tIns="0" rIns="0" bIns="0">
             <a:spAutoFit/>
           </a:bodyPr>
           <a:lstStyle/>
@@ -10713,7 +11338,7 @@
           <a:noFill/>
         </p:spPr>
         <p:txBody>
-          <a:bodyPr wrap="square" lIns="0" rIns="0" tIns="0" bIns="0">
+          <a:bodyPr wrap="square" lIns="0" tIns="0" rIns="0" bIns="0">
             <a:spAutoFit/>
           </a:bodyPr>
           <a:lstStyle/>
@@ -10747,7 +11372,7 @@
           <a:noFill/>
         </p:spPr>
         <p:txBody>
-          <a:bodyPr wrap="square" lIns="0" rIns="0" tIns="0" bIns="0">
+          <a:bodyPr wrap="square" lIns="0" tIns="0" rIns="0" bIns="0">
             <a:spAutoFit/>
           </a:bodyPr>
           <a:lstStyle/>
@@ -10782,7 +11407,7 @@
           <a:noFill/>
         </p:spPr>
         <p:txBody>
-          <a:bodyPr wrap="square" lIns="0" rIns="0" tIns="0" bIns="0">
+          <a:bodyPr wrap="square" lIns="0" tIns="0" rIns="0" bIns="0">
             <a:spAutoFit/>
           </a:bodyPr>
           <a:lstStyle/>
@@ -10816,7 +11441,7 @@
           <a:noFill/>
         </p:spPr>
         <p:txBody>
-          <a:bodyPr wrap="square" lIns="0" rIns="0" tIns="0" bIns="0">
+          <a:bodyPr wrap="square" lIns="0" tIns="0" rIns="0" bIns="0">
             <a:spAutoFit/>
           </a:bodyPr>
           <a:lstStyle/>
@@ -11036,7 +11661,7 @@
 </file>
 
 <file path=ppt/slides/slide3.xml><?xml version="1.0" encoding="utf-8"?>
-<p:sld xmlns:a="http://schemas.openxmlformats.org/drawingml/2006/main" xmlns:p="http://schemas.openxmlformats.org/presentationml/2006/main" xmlns:r="http://schemas.openxmlformats.org/officeDocument/2006/relationships">
+<p:sld xmlns:a="http://schemas.openxmlformats.org/drawingml/2006/main" xmlns:r="http://schemas.openxmlformats.org/officeDocument/2006/relationships" xmlns:p="http://schemas.openxmlformats.org/presentationml/2006/main">
   <p:cSld>
     <p:spTree>
       <p:nvGrpSpPr>
@@ -11044,7 +11669,14 @@
         <p:cNvGrpSpPr/>
         <p:nvPr/>
       </p:nvGrpSpPr>
-      <p:grpSpPr/>
+      <p:grpSpPr>
+        <a:xfrm>
+          <a:off x="0" y="0"/>
+          <a:ext cx="0" cy="0"/>
+          <a:chOff x="0" y="0"/>
+          <a:chExt cx="0" cy="0"/>
+        </a:xfrm>
+      </p:grpSpPr>
       <p:sp>
         <p:nvSpPr>
           <p:cNvPr id="2" name="TextBox 1"/>
@@ -11062,7 +11694,7 @@
           <a:noFill/>
         </p:spPr>
         <p:txBody>
-          <a:bodyPr wrap="square" lIns="0" rIns="0" tIns="0" bIns="0">
+          <a:bodyPr wrap="square" lIns="0" tIns="0" rIns="0" bIns="0">
             <a:spAutoFit/>
           </a:bodyPr>
           <a:lstStyle/>
@@ -11096,7 +11728,7 @@
           <a:noFill/>
         </p:spPr>
         <p:txBody>
-          <a:bodyPr wrap="square" lIns="0" rIns="0" tIns="0" bIns="0">
+          <a:bodyPr wrap="square" lIns="0" tIns="0" rIns="0" bIns="0">
             <a:spAutoFit/>
           </a:bodyPr>
           <a:lstStyle/>
@@ -11130,7 +11762,7 @@
           <a:noFill/>
         </p:spPr>
         <p:txBody>
-          <a:bodyPr wrap="square" lIns="0" rIns="0" tIns="0" bIns="0">
+          <a:bodyPr wrap="square" lIns="0" tIns="0" rIns="0" bIns="0">
             <a:spAutoFit/>
           </a:bodyPr>
           <a:lstStyle/>
@@ -11165,7 +11797,7 @@
           <a:noFill/>
         </p:spPr>
         <p:txBody>
-          <a:bodyPr wrap="square" lIns="0" rIns="0" tIns="0" bIns="0">
+          <a:bodyPr wrap="square" lIns="0" tIns="0" rIns="0" bIns="0">
             <a:spAutoFit/>
           </a:bodyPr>
           <a:lstStyle/>
@@ -11201,14 +11833,32 @@
                 <a:tableStyleId>{5C22544A-7EE6-4342-B048-85BDC9FD1C3A}</a:tableStyleId>
               </a:tblPr>
               <a:tblGrid>
-                <a:gridCol w="986328"/>
-                <a:gridCol w="2717883"/>
-                <a:gridCol w="7353628"/>
+                <a:gridCol w="986328">
+                  <a:extLst>
+                    <a:ext uri="{9D8B030D-6E8A-4147-A177-3AD203B41FA5}">
+                      <a16:colId xmlns:a16="http://schemas.microsoft.com/office/drawing/2014/main" val="20000"/>
+                    </a:ext>
+                  </a:extLst>
+                </a:gridCol>
+                <a:gridCol w="2717883">
+                  <a:extLst>
+                    <a:ext uri="{9D8B030D-6E8A-4147-A177-3AD203B41FA5}">
+                      <a16:colId xmlns:a16="http://schemas.microsoft.com/office/drawing/2014/main" val="20001"/>
+                    </a:ext>
+                  </a:extLst>
+                </a:gridCol>
+                <a:gridCol w="7353628">
+                  <a:extLst>
+                    <a:ext uri="{9D8B030D-6E8A-4147-A177-3AD203B41FA5}">
+                      <a16:colId xmlns:a16="http://schemas.microsoft.com/office/drawing/2014/main" val="20002"/>
+                    </a:ext>
+                  </a:extLst>
+                </a:gridCol>
               </a:tblGrid>
               <a:tr h="321818">
                 <a:tc>
                   <a:txBody>
-                    <a:bodyPr wrap="square"/>
+                    <a:bodyPr/>
                     <a:lstStyle/>
                     <a:p>
                       <a:pPr algn="ctr"/>
@@ -11231,7 +11881,7 @@
                 </a:tc>
                 <a:tc>
                   <a:txBody>
-                    <a:bodyPr wrap="square"/>
+                    <a:bodyPr/>
                     <a:lstStyle/>
                     <a:p>
                       <a:pPr algn="ctr"/>
@@ -11254,7 +11904,7 @@
                 </a:tc>
                 <a:tc>
                   <a:txBody>
-                    <a:bodyPr wrap="square"/>
+                    <a:bodyPr/>
                     <a:lstStyle/>
                     <a:p>
                       <a:pPr algn="ctr"/>
@@ -11275,11 +11925,16 @@
                     </a:solidFill>
                   </a:tcPr>
                 </a:tc>
+                <a:extLst>
+                  <a:ext uri="{0D108BD9-81ED-4DB2-BD59-A6C34878D82A}">
+                    <a16:rowId xmlns:a16="http://schemas.microsoft.com/office/drawing/2014/main" val="10000"/>
+                  </a:ext>
+                </a:extLst>
               </a:tr>
               <a:tr h="321818">
                 <a:tc>
                   <a:txBody>
-                    <a:bodyPr wrap="square"/>
+                    <a:bodyPr/>
                     <a:lstStyle/>
                     <a:p>
                       <a:pPr algn="ctr"/>
@@ -11302,7 +11957,7 @@
                 </a:tc>
                 <a:tc>
                   <a:txBody>
-                    <a:bodyPr wrap="square"/>
+                    <a:bodyPr/>
                     <a:lstStyle/>
                     <a:p>
                       <a:pPr algn="ctr"/>
@@ -11326,7 +11981,7 @@
                 </a:tc>
                 <a:tc>
                   <a:txBody>
-                    <a:bodyPr wrap="square"/>
+                    <a:bodyPr/>
                     <a:lstStyle/>
                     <a:p>
                       <a:pPr algn="l"/>
@@ -11347,11 +12002,16 @@
                     </a:solidFill>
                   </a:tcPr>
                 </a:tc>
+                <a:extLst>
+                  <a:ext uri="{0D108BD9-81ED-4DB2-BD59-A6C34878D82A}">
+                    <a16:rowId xmlns:a16="http://schemas.microsoft.com/office/drawing/2014/main" val="10001"/>
+                  </a:ext>
+                </a:extLst>
               </a:tr>
               <a:tr h="321818">
                 <a:tc>
                   <a:txBody>
-                    <a:bodyPr wrap="square"/>
+                    <a:bodyPr/>
                     <a:lstStyle/>
                     <a:p>
                       <a:pPr algn="ctr"/>
@@ -11374,7 +12034,7 @@
                 </a:tc>
                 <a:tc>
                   <a:txBody>
-                    <a:bodyPr wrap="square"/>
+                    <a:bodyPr/>
                     <a:lstStyle/>
                     <a:p>
                       <a:pPr algn="ctr"/>
@@ -11398,7 +12058,7 @@
                 </a:tc>
                 <a:tc>
                   <a:txBody>
-                    <a:bodyPr wrap="square"/>
+                    <a:bodyPr/>
                     <a:lstStyle/>
                     <a:p>
                       <a:pPr algn="l"/>
@@ -11419,11 +12079,16 @@
                     </a:solidFill>
                   </a:tcPr>
                 </a:tc>
+                <a:extLst>
+                  <a:ext uri="{0D108BD9-81ED-4DB2-BD59-A6C34878D82A}">
+                    <a16:rowId xmlns:a16="http://schemas.microsoft.com/office/drawing/2014/main" val="10002"/>
+                  </a:ext>
+                </a:extLst>
               </a:tr>
               <a:tr h="321818">
                 <a:tc>
                   <a:txBody>
-                    <a:bodyPr wrap="square"/>
+                    <a:bodyPr/>
                     <a:lstStyle/>
                     <a:p>
                       <a:pPr algn="ctr"/>
@@ -11446,7 +12111,7 @@
                 </a:tc>
                 <a:tc>
                   <a:txBody>
-                    <a:bodyPr wrap="square"/>
+                    <a:bodyPr/>
                     <a:lstStyle/>
                     <a:p>
                       <a:pPr algn="ctr"/>
@@ -11470,7 +12135,7 @@
                 </a:tc>
                 <a:tc>
                   <a:txBody>
-                    <a:bodyPr wrap="square"/>
+                    <a:bodyPr/>
                     <a:lstStyle/>
                     <a:p>
                       <a:pPr algn="l"/>
@@ -11491,11 +12156,16 @@
                     </a:solidFill>
                   </a:tcPr>
                 </a:tc>
+                <a:extLst>
+                  <a:ext uri="{0D108BD9-81ED-4DB2-BD59-A6C34878D82A}">
+                    <a16:rowId xmlns:a16="http://schemas.microsoft.com/office/drawing/2014/main" val="10003"/>
+                  </a:ext>
+                </a:extLst>
               </a:tr>
               <a:tr h="321818">
                 <a:tc>
                   <a:txBody>
-                    <a:bodyPr wrap="square"/>
+                    <a:bodyPr/>
                     <a:lstStyle/>
                     <a:p>
                       <a:pPr algn="ctr"/>
@@ -11518,7 +12188,7 @@
                 </a:tc>
                 <a:tc>
                   <a:txBody>
-                    <a:bodyPr wrap="square"/>
+                    <a:bodyPr/>
                     <a:lstStyle/>
                     <a:p>
                       <a:pPr algn="ctr"/>
@@ -11542,7 +12212,7 @@
                 </a:tc>
                 <a:tc>
                   <a:txBody>
-                    <a:bodyPr wrap="square"/>
+                    <a:bodyPr/>
                     <a:lstStyle/>
                     <a:p>
                       <a:pPr algn="l"/>
@@ -11563,11 +12233,16 @@
                     </a:solidFill>
                   </a:tcPr>
                 </a:tc>
+                <a:extLst>
+                  <a:ext uri="{0D108BD9-81ED-4DB2-BD59-A6C34878D82A}">
+                    <a16:rowId xmlns:a16="http://schemas.microsoft.com/office/drawing/2014/main" val="10004"/>
+                  </a:ext>
+                </a:extLst>
               </a:tr>
               <a:tr h="321818">
                 <a:tc>
                   <a:txBody>
-                    <a:bodyPr wrap="square"/>
+                    <a:bodyPr/>
                     <a:lstStyle/>
                     <a:p>
                       <a:pPr algn="ctr"/>
@@ -11590,7 +12265,7 @@
                 </a:tc>
                 <a:tc>
                   <a:txBody>
-                    <a:bodyPr wrap="square"/>
+                    <a:bodyPr/>
                     <a:lstStyle/>
                     <a:p>
                       <a:pPr algn="ctr"/>
@@ -11614,7 +12289,7 @@
                 </a:tc>
                 <a:tc>
                   <a:txBody>
-                    <a:bodyPr wrap="square"/>
+                    <a:bodyPr/>
                     <a:lstStyle/>
                     <a:p>
                       <a:pPr algn="l"/>
@@ -11635,6 +12310,11 @@
                     </a:solidFill>
                   </a:tcPr>
                 </a:tc>
+                <a:extLst>
+                  <a:ext uri="{0D108BD9-81ED-4DB2-BD59-A6C34878D82A}">
+                    <a16:rowId xmlns:a16="http://schemas.microsoft.com/office/drawing/2014/main" val="10005"/>
+                  </a:ext>
+                </a:extLst>
               </a:tr>
             </a:tbl>
           </a:graphicData>
@@ -11657,7 +12337,7 @@
           <a:noFill/>
         </p:spPr>
         <p:txBody>
-          <a:bodyPr wrap="square" lIns="0" rIns="0" tIns="0" bIns="0">
+          <a:bodyPr wrap="square" lIns="0" tIns="0" rIns="0" bIns="0">
             <a:spAutoFit/>
           </a:bodyPr>
           <a:lstStyle/>
@@ -11715,6 +12395,7 @@
           <a:lstStyle/>
           <a:p>
             <a:pPr algn="ctr"/>
+            <a:endParaRPr/>
           </a:p>
         </p:txBody>
       </p:sp>
@@ -11727,7 +12408,7 @@
 </file>
 
 <file path=ppt/slides/slide4.xml><?xml version="1.0" encoding="utf-8"?>
-<p:sld xmlns:a="http://schemas.openxmlformats.org/drawingml/2006/main" xmlns:p="http://schemas.openxmlformats.org/presentationml/2006/main" xmlns:r="http://schemas.openxmlformats.org/officeDocument/2006/relationships">
+<p:sld xmlns:a="http://schemas.openxmlformats.org/drawingml/2006/main" xmlns:r="http://schemas.openxmlformats.org/officeDocument/2006/relationships" xmlns:p="http://schemas.openxmlformats.org/presentationml/2006/main">
   <p:cSld>
     <p:spTree>
       <p:nvGrpSpPr>
@@ -11735,7 +12416,14 @@
         <p:cNvGrpSpPr/>
         <p:nvPr/>
       </p:nvGrpSpPr>
-      <p:grpSpPr/>
+      <p:grpSpPr>
+        <a:xfrm>
+          <a:off x="0" y="0"/>
+          <a:ext cx="0" cy="0"/>
+          <a:chOff x="0" y="0"/>
+          <a:chExt cx="0" cy="0"/>
+        </a:xfrm>
+      </p:grpSpPr>
       <p:sp>
         <p:nvSpPr>
           <p:cNvPr id="2" name="TextBox 1"/>
@@ -11753,7 +12441,7 @@
           <a:noFill/>
         </p:spPr>
         <p:txBody>
-          <a:bodyPr wrap="square" lIns="0" rIns="0" tIns="0" bIns="0">
+          <a:bodyPr wrap="square" lIns="0" tIns="0" rIns="0" bIns="0">
             <a:spAutoFit/>
           </a:bodyPr>
           <a:lstStyle/>
@@ -11787,7 +12475,7 @@
           <a:noFill/>
         </p:spPr>
         <p:txBody>
-          <a:bodyPr wrap="square" lIns="0" rIns="0" tIns="0" bIns="0">
+          <a:bodyPr wrap="square" lIns="0" tIns="0" rIns="0" bIns="0">
             <a:spAutoFit/>
           </a:bodyPr>
           <a:lstStyle/>
@@ -11821,7 +12509,7 @@
           <a:noFill/>
         </p:spPr>
         <p:txBody>
-          <a:bodyPr wrap="square" lIns="0" rIns="0" tIns="0" bIns="0">
+          <a:bodyPr wrap="square" lIns="0" tIns="0" rIns="0" bIns="0">
             <a:spAutoFit/>
           </a:bodyPr>
           <a:lstStyle/>
@@ -11856,7 +12544,7 @@
           <a:noFill/>
         </p:spPr>
         <p:txBody>
-          <a:bodyPr wrap="square" lIns="0" rIns="0" tIns="0" bIns="0">
+          <a:bodyPr wrap="square" lIns="0" tIns="0" rIns="0" bIns="0">
             <a:spAutoFit/>
           </a:bodyPr>
           <a:lstStyle/>
@@ -11890,7 +12578,7 @@
           <a:noFill/>
         </p:spPr>
         <p:txBody>
-          <a:bodyPr wrap="square" lIns="0" rIns="0" tIns="0" bIns="0">
+          <a:bodyPr wrap="square" lIns="0" tIns="0" rIns="0" bIns="0">
             <a:spAutoFit/>
           </a:bodyPr>
           <a:lstStyle/>
@@ -11924,7 +12612,7 @@
           <a:noFill/>
         </p:spPr>
         <p:txBody>
-          <a:bodyPr wrap="square" lIns="0" rIns="0" tIns="0" bIns="0">
+          <a:bodyPr wrap="square" lIns="0" tIns="0" rIns="0" bIns="0">
             <a:spAutoFit/>
           </a:bodyPr>
           <a:lstStyle/>
@@ -12015,7 +12703,7 @@
           <a:noFill/>
         </p:spPr>
         <p:txBody>
-          <a:bodyPr wrap="square" lIns="0" rIns="0" tIns="0" bIns="0">
+          <a:bodyPr wrap="square" lIns="0" tIns="0" rIns="0" bIns="0">
             <a:spAutoFit/>
           </a:bodyPr>
           <a:lstStyle/>
@@ -12049,7 +12737,7 @@
           <a:noFill/>
         </p:spPr>
         <p:txBody>
-          <a:bodyPr wrap="square" lIns="0" rIns="0" tIns="0" bIns="0">
+          <a:bodyPr wrap="square" lIns="0" tIns="0" rIns="0" bIns="0">
             <a:spAutoFit/>
           </a:bodyPr>
           <a:lstStyle/>
@@ -12147,7 +12835,7 @@
           <a:noFill/>
         </p:spPr>
         <p:txBody>
-          <a:bodyPr wrap="square" lIns="0" rIns="0" tIns="0" bIns="0">
+          <a:bodyPr wrap="square" lIns="0" tIns="0" rIns="0" bIns="0">
             <a:spAutoFit/>
           </a:bodyPr>
           <a:lstStyle/>
@@ -12182,7 +12870,7 @@
 </file>
 
 <file path=ppt/slides/slide5.xml><?xml version="1.0" encoding="utf-8"?>
-<p:sld xmlns:a="http://schemas.openxmlformats.org/drawingml/2006/main" xmlns:p="http://schemas.openxmlformats.org/presentationml/2006/main" xmlns:r="http://schemas.openxmlformats.org/officeDocument/2006/relationships">
+<p:sld xmlns:a="http://schemas.openxmlformats.org/drawingml/2006/main" xmlns:r="http://schemas.openxmlformats.org/officeDocument/2006/relationships" xmlns:p="http://schemas.openxmlformats.org/presentationml/2006/main">
   <p:cSld>
     <p:spTree>
       <p:nvGrpSpPr>
@@ -12190,7 +12878,14 @@
         <p:cNvGrpSpPr/>
         <p:nvPr/>
       </p:nvGrpSpPr>
-      <p:grpSpPr/>
+      <p:grpSpPr>
+        <a:xfrm>
+          <a:off x="0" y="0"/>
+          <a:ext cx="0" cy="0"/>
+          <a:chOff x="0" y="0"/>
+          <a:chExt cx="0" cy="0"/>
+        </a:xfrm>
+      </p:grpSpPr>
       <p:sp>
         <p:nvSpPr>
           <p:cNvPr id="2" name="TextBox 1"/>
@@ -12208,7 +12903,7 @@
           <a:noFill/>
         </p:spPr>
         <p:txBody>
-          <a:bodyPr wrap="square" lIns="0" rIns="0" tIns="0" bIns="0">
+          <a:bodyPr wrap="square" lIns="0" tIns="0" rIns="0" bIns="0">
             <a:spAutoFit/>
           </a:bodyPr>
           <a:lstStyle/>
@@ -12242,7 +12937,7 @@
           <a:noFill/>
         </p:spPr>
         <p:txBody>
-          <a:bodyPr wrap="square" lIns="0" rIns="0" tIns="0" bIns="0">
+          <a:bodyPr wrap="square" lIns="0" tIns="0" rIns="0" bIns="0">
             <a:spAutoFit/>
           </a:bodyPr>
           <a:lstStyle/>
@@ -12276,7 +12971,7 @@
           <a:noFill/>
         </p:spPr>
         <p:txBody>
-          <a:bodyPr wrap="square" lIns="0" rIns="0" tIns="0" bIns="0">
+          <a:bodyPr wrap="square" lIns="0" tIns="0" rIns="0" bIns="0">
             <a:spAutoFit/>
           </a:bodyPr>
           <a:lstStyle/>
@@ -12311,7 +13006,7 @@
           <a:noFill/>
         </p:spPr>
         <p:txBody>
-          <a:bodyPr wrap="square" lIns="0" rIns="0" tIns="0" bIns="0">
+          <a:bodyPr wrap="square" lIns="0" tIns="0" rIns="0" bIns="0">
             <a:spAutoFit/>
           </a:bodyPr>
           <a:lstStyle/>
@@ -12347,18 +13042,60 @@
                 <a:tableStyleId>{5C22544A-7EE6-4342-B048-85BDC9FD1C3A}</a:tableStyleId>
               </a:tblPr>
               <a:tblGrid>
-                <a:gridCol w="969544"/>
-                <a:gridCol w="4041211"/>
-                <a:gridCol w="969544"/>
-                <a:gridCol w="1442826"/>
-                <a:gridCol w="1547321"/>
-                <a:gridCol w="969544"/>
-                <a:gridCol w="1117849"/>
+                <a:gridCol w="969544">
+                  <a:extLst>
+                    <a:ext uri="{9D8B030D-6E8A-4147-A177-3AD203B41FA5}">
+                      <a16:colId xmlns:a16="http://schemas.microsoft.com/office/drawing/2014/main" val="20000"/>
+                    </a:ext>
+                  </a:extLst>
+                </a:gridCol>
+                <a:gridCol w="4041211">
+                  <a:extLst>
+                    <a:ext uri="{9D8B030D-6E8A-4147-A177-3AD203B41FA5}">
+                      <a16:colId xmlns:a16="http://schemas.microsoft.com/office/drawing/2014/main" val="20001"/>
+                    </a:ext>
+                  </a:extLst>
+                </a:gridCol>
+                <a:gridCol w="969544">
+                  <a:extLst>
+                    <a:ext uri="{9D8B030D-6E8A-4147-A177-3AD203B41FA5}">
+                      <a16:colId xmlns:a16="http://schemas.microsoft.com/office/drawing/2014/main" val="20002"/>
+                    </a:ext>
+                  </a:extLst>
+                </a:gridCol>
+                <a:gridCol w="1442826">
+                  <a:extLst>
+                    <a:ext uri="{9D8B030D-6E8A-4147-A177-3AD203B41FA5}">
+                      <a16:colId xmlns:a16="http://schemas.microsoft.com/office/drawing/2014/main" val="20003"/>
+                    </a:ext>
+                  </a:extLst>
+                </a:gridCol>
+                <a:gridCol w="1547321">
+                  <a:extLst>
+                    <a:ext uri="{9D8B030D-6E8A-4147-A177-3AD203B41FA5}">
+                      <a16:colId xmlns:a16="http://schemas.microsoft.com/office/drawing/2014/main" val="20004"/>
+                    </a:ext>
+                  </a:extLst>
+                </a:gridCol>
+                <a:gridCol w="969544">
+                  <a:extLst>
+                    <a:ext uri="{9D8B030D-6E8A-4147-A177-3AD203B41FA5}">
+                      <a16:colId xmlns:a16="http://schemas.microsoft.com/office/drawing/2014/main" val="20005"/>
+                    </a:ext>
+                  </a:extLst>
+                </a:gridCol>
+                <a:gridCol w="1117849">
+                  <a:extLst>
+                    <a:ext uri="{9D8B030D-6E8A-4147-A177-3AD203B41FA5}">
+                      <a16:colId xmlns:a16="http://schemas.microsoft.com/office/drawing/2014/main" val="20006"/>
+                    </a:ext>
+                  </a:extLst>
+                </a:gridCol>
               </a:tblGrid>
               <a:tr h="321818">
                 <a:tc>
                   <a:txBody>
-                    <a:bodyPr wrap="square"/>
+                    <a:bodyPr/>
                     <a:lstStyle/>
                     <a:p>
                       <a:pPr algn="ctr"/>
@@ -12381,7 +13118,7 @@
                 </a:tc>
                 <a:tc>
                   <a:txBody>
-                    <a:bodyPr wrap="square"/>
+                    <a:bodyPr/>
                     <a:lstStyle/>
                     <a:p>
                       <a:pPr algn="ctr"/>
@@ -12404,7 +13141,7 @@
                 </a:tc>
                 <a:tc>
                   <a:txBody>
-                    <a:bodyPr wrap="square"/>
+                    <a:bodyPr/>
                     <a:lstStyle/>
                     <a:p>
                       <a:pPr algn="ctr"/>
@@ -12427,7 +13164,7 @@
                 </a:tc>
                 <a:tc>
                   <a:txBody>
-                    <a:bodyPr wrap="square"/>
+                    <a:bodyPr/>
                     <a:lstStyle/>
                     <a:p>
                       <a:pPr algn="ctr"/>
@@ -12450,7 +13187,7 @@
                 </a:tc>
                 <a:tc>
                   <a:txBody>
-                    <a:bodyPr wrap="square"/>
+                    <a:bodyPr/>
                     <a:lstStyle/>
                     <a:p>
                       <a:pPr algn="ctr"/>
@@ -12473,7 +13210,7 @@
                 </a:tc>
                 <a:tc>
                   <a:txBody>
-                    <a:bodyPr wrap="square"/>
+                    <a:bodyPr/>
                     <a:lstStyle/>
                     <a:p>
                       <a:pPr algn="ctr"/>
@@ -12496,7 +13233,7 @@
                 </a:tc>
                 <a:tc>
                   <a:txBody>
-                    <a:bodyPr wrap="square"/>
+                    <a:bodyPr/>
                     <a:lstStyle/>
                     <a:p>
                       <a:pPr algn="ctr"/>
@@ -12517,11 +13254,16 @@
                     </a:solidFill>
                   </a:tcPr>
                 </a:tc>
+                <a:extLst>
+                  <a:ext uri="{0D108BD9-81ED-4DB2-BD59-A6C34878D82A}">
+                    <a16:rowId xmlns:a16="http://schemas.microsoft.com/office/drawing/2014/main" val="10000"/>
+                  </a:ext>
+                </a:extLst>
               </a:tr>
               <a:tr h="321818">
                 <a:tc>
                   <a:txBody>
-                    <a:bodyPr wrap="square"/>
+                    <a:bodyPr/>
                     <a:lstStyle/>
                     <a:p>
                       <a:pPr algn="ctr"/>
@@ -12544,7 +13286,7 @@
                 </a:tc>
                 <a:tc>
                   <a:txBody>
-                    <a:bodyPr wrap="square"/>
+                    <a:bodyPr/>
                     <a:lstStyle/>
                     <a:p>
                       <a:pPr algn="l"/>
@@ -12567,7 +13309,7 @@
                 </a:tc>
                 <a:tc>
                   <a:txBody>
-                    <a:bodyPr wrap="square"/>
+                    <a:bodyPr/>
                     <a:lstStyle/>
                     <a:p>
                       <a:pPr algn="ctr"/>
@@ -12590,7 +13332,7 @@
                 </a:tc>
                 <a:tc>
                   <a:txBody>
-                    <a:bodyPr wrap="square"/>
+                    <a:bodyPr/>
                     <a:lstStyle/>
                     <a:p>
                       <a:pPr algn="ctr"/>
@@ -12613,7 +13355,7 @@
                 </a:tc>
                 <a:tc>
                   <a:txBody>
-                    <a:bodyPr wrap="square"/>
+                    <a:bodyPr/>
                     <a:lstStyle/>
                     <a:p>
                       <a:pPr algn="ctr"/>
@@ -12636,7 +13378,7 @@
                 </a:tc>
                 <a:tc>
                   <a:txBody>
-                    <a:bodyPr wrap="square"/>
+                    <a:bodyPr/>
                     <a:lstStyle/>
                     <a:p>
                       <a:pPr algn="ctr"/>
@@ -12659,7 +13401,7 @@
                 </a:tc>
                 <a:tc>
                   <a:txBody>
-                    <a:bodyPr wrap="square"/>
+                    <a:bodyPr/>
                     <a:lstStyle/>
                     <a:p>
                       <a:pPr algn="ctr"/>
@@ -12681,11 +13423,16 @@
                     </a:solidFill>
                   </a:tcPr>
                 </a:tc>
+                <a:extLst>
+                  <a:ext uri="{0D108BD9-81ED-4DB2-BD59-A6C34878D82A}">
+                    <a16:rowId xmlns:a16="http://schemas.microsoft.com/office/drawing/2014/main" val="10001"/>
+                  </a:ext>
+                </a:extLst>
               </a:tr>
               <a:tr h="321818">
                 <a:tc>
                   <a:txBody>
-                    <a:bodyPr wrap="square"/>
+                    <a:bodyPr/>
                     <a:lstStyle/>
                     <a:p>
                       <a:pPr algn="ctr"/>
@@ -12708,7 +13455,7 @@
                 </a:tc>
                 <a:tc>
                   <a:txBody>
-                    <a:bodyPr wrap="square"/>
+                    <a:bodyPr/>
                     <a:lstStyle/>
                     <a:p>
                       <a:pPr algn="l"/>
@@ -12731,7 +13478,7 @@
                 </a:tc>
                 <a:tc>
                   <a:txBody>
-                    <a:bodyPr wrap="square"/>
+                    <a:bodyPr/>
                     <a:lstStyle/>
                     <a:p>
                       <a:pPr algn="ctr"/>
@@ -12754,7 +13501,7 @@
                 </a:tc>
                 <a:tc>
                   <a:txBody>
-                    <a:bodyPr wrap="square"/>
+                    <a:bodyPr/>
                     <a:lstStyle/>
                     <a:p>
                       <a:pPr algn="ctr"/>
@@ -12777,7 +13524,7 @@
                 </a:tc>
                 <a:tc>
                   <a:txBody>
-                    <a:bodyPr wrap="square"/>
+                    <a:bodyPr/>
                     <a:lstStyle/>
                     <a:p>
                       <a:pPr algn="ctr"/>
@@ -12800,7 +13547,7 @@
                 </a:tc>
                 <a:tc>
                   <a:txBody>
-                    <a:bodyPr wrap="square"/>
+                    <a:bodyPr/>
                     <a:lstStyle/>
                     <a:p>
                       <a:pPr algn="ctr"/>
@@ -12823,7 +13570,7 @@
                 </a:tc>
                 <a:tc>
                   <a:txBody>
-                    <a:bodyPr wrap="square"/>
+                    <a:bodyPr/>
                     <a:lstStyle/>
                     <a:p>
                       <a:pPr algn="ctr"/>
@@ -12845,11 +13592,16 @@
                     </a:solidFill>
                   </a:tcPr>
                 </a:tc>
+                <a:extLst>
+                  <a:ext uri="{0D108BD9-81ED-4DB2-BD59-A6C34878D82A}">
+                    <a16:rowId xmlns:a16="http://schemas.microsoft.com/office/drawing/2014/main" val="10002"/>
+                  </a:ext>
+                </a:extLst>
               </a:tr>
               <a:tr h="321818">
                 <a:tc>
                   <a:txBody>
-                    <a:bodyPr wrap="square"/>
+                    <a:bodyPr/>
                     <a:lstStyle/>
                     <a:p>
                       <a:pPr algn="ctr"/>
@@ -12872,7 +13624,7 @@
                 </a:tc>
                 <a:tc>
                   <a:txBody>
-                    <a:bodyPr wrap="square"/>
+                    <a:bodyPr/>
                     <a:lstStyle/>
                     <a:p>
                       <a:pPr algn="l"/>
@@ -12895,7 +13647,7 @@
                 </a:tc>
                 <a:tc>
                   <a:txBody>
-                    <a:bodyPr wrap="square"/>
+                    <a:bodyPr/>
                     <a:lstStyle/>
                     <a:p>
                       <a:pPr algn="ctr"/>
@@ -12918,7 +13670,7 @@
                 </a:tc>
                 <a:tc>
                   <a:txBody>
-                    <a:bodyPr wrap="square"/>
+                    <a:bodyPr/>
                     <a:lstStyle/>
                     <a:p>
                       <a:pPr algn="ctr"/>
@@ -12941,7 +13693,7 @@
                 </a:tc>
                 <a:tc>
                   <a:txBody>
-                    <a:bodyPr wrap="square"/>
+                    <a:bodyPr/>
                     <a:lstStyle/>
                     <a:p>
                       <a:pPr algn="ctr"/>
@@ -12964,7 +13716,7 @@
                 </a:tc>
                 <a:tc>
                   <a:txBody>
-                    <a:bodyPr wrap="square"/>
+                    <a:bodyPr/>
                     <a:lstStyle/>
                     <a:p>
                       <a:pPr algn="ctr"/>
@@ -12987,7 +13739,7 @@
                 </a:tc>
                 <a:tc>
                   <a:txBody>
-                    <a:bodyPr wrap="square"/>
+                    <a:bodyPr/>
                     <a:lstStyle/>
                     <a:p>
                       <a:pPr algn="ctr"/>
@@ -13009,11 +13761,16 @@
                     </a:solidFill>
                   </a:tcPr>
                 </a:tc>
+                <a:extLst>
+                  <a:ext uri="{0D108BD9-81ED-4DB2-BD59-A6C34878D82A}">
+                    <a16:rowId xmlns:a16="http://schemas.microsoft.com/office/drawing/2014/main" val="10003"/>
+                  </a:ext>
+                </a:extLst>
               </a:tr>
               <a:tr h="321818">
                 <a:tc>
                   <a:txBody>
-                    <a:bodyPr wrap="square"/>
+                    <a:bodyPr/>
                     <a:lstStyle/>
                     <a:p>
                       <a:pPr algn="ctr"/>
@@ -13036,7 +13793,7 @@
                 </a:tc>
                 <a:tc>
                   <a:txBody>
-                    <a:bodyPr wrap="square"/>
+                    <a:bodyPr/>
                     <a:lstStyle/>
                     <a:p>
                       <a:pPr algn="l"/>
@@ -13059,7 +13816,7 @@
                 </a:tc>
                 <a:tc>
                   <a:txBody>
-                    <a:bodyPr wrap="square"/>
+                    <a:bodyPr/>
                     <a:lstStyle/>
                     <a:p>
                       <a:pPr algn="ctr"/>
@@ -13082,7 +13839,7 @@
                 </a:tc>
                 <a:tc>
                   <a:txBody>
-                    <a:bodyPr wrap="square"/>
+                    <a:bodyPr/>
                     <a:lstStyle/>
                     <a:p>
                       <a:pPr algn="ctr"/>
@@ -13105,7 +13862,7 @@
                 </a:tc>
                 <a:tc>
                   <a:txBody>
-                    <a:bodyPr wrap="square"/>
+                    <a:bodyPr/>
                     <a:lstStyle/>
                     <a:p>
                       <a:pPr algn="ctr"/>
@@ -13128,7 +13885,7 @@
                 </a:tc>
                 <a:tc>
                   <a:txBody>
-                    <a:bodyPr wrap="square"/>
+                    <a:bodyPr/>
                     <a:lstStyle/>
                     <a:p>
                       <a:pPr algn="ctr"/>
@@ -13151,7 +13908,7 @@
                 </a:tc>
                 <a:tc>
                   <a:txBody>
-                    <a:bodyPr wrap="square"/>
+                    <a:bodyPr/>
                     <a:lstStyle/>
                     <a:p>
                       <a:pPr algn="ctr"/>
@@ -13173,11 +13930,16 @@
                     </a:solidFill>
                   </a:tcPr>
                 </a:tc>
+                <a:extLst>
+                  <a:ext uri="{0D108BD9-81ED-4DB2-BD59-A6C34878D82A}">
+                    <a16:rowId xmlns:a16="http://schemas.microsoft.com/office/drawing/2014/main" val="10004"/>
+                  </a:ext>
+                </a:extLst>
               </a:tr>
               <a:tr h="321818">
                 <a:tc>
                   <a:txBody>
-                    <a:bodyPr wrap="square"/>
+                    <a:bodyPr/>
                     <a:lstStyle/>
                     <a:p>
                       <a:pPr algn="ctr"/>
@@ -13200,7 +13962,7 @@
                 </a:tc>
                 <a:tc>
                   <a:txBody>
-                    <a:bodyPr wrap="square"/>
+                    <a:bodyPr/>
                     <a:lstStyle/>
                     <a:p>
                       <a:pPr algn="l"/>
@@ -13223,7 +13985,7 @@
                 </a:tc>
                 <a:tc>
                   <a:txBody>
-                    <a:bodyPr wrap="square"/>
+                    <a:bodyPr/>
                     <a:lstStyle/>
                     <a:p>
                       <a:pPr algn="ctr"/>
@@ -13246,7 +14008,7 @@
                 </a:tc>
                 <a:tc>
                   <a:txBody>
-                    <a:bodyPr wrap="square"/>
+                    <a:bodyPr/>
                     <a:lstStyle/>
                     <a:p>
                       <a:pPr algn="ctr"/>
@@ -13269,7 +14031,7 @@
                 </a:tc>
                 <a:tc>
                   <a:txBody>
-                    <a:bodyPr wrap="square"/>
+                    <a:bodyPr/>
                     <a:lstStyle/>
                     <a:p>
                       <a:pPr algn="ctr"/>
@@ -13292,7 +14054,7 @@
                 </a:tc>
                 <a:tc>
                   <a:txBody>
-                    <a:bodyPr wrap="square"/>
+                    <a:bodyPr/>
                     <a:lstStyle/>
                     <a:p>
                       <a:pPr algn="ctr"/>
@@ -13315,7 +14077,7 @@
                 </a:tc>
                 <a:tc>
                   <a:txBody>
-                    <a:bodyPr wrap="square"/>
+                    <a:bodyPr/>
                     <a:lstStyle/>
                     <a:p>
                       <a:pPr algn="ctr"/>
@@ -13337,11 +14099,16 @@
                     </a:solidFill>
                   </a:tcPr>
                 </a:tc>
+                <a:extLst>
+                  <a:ext uri="{0D108BD9-81ED-4DB2-BD59-A6C34878D82A}">
+                    <a16:rowId xmlns:a16="http://schemas.microsoft.com/office/drawing/2014/main" val="10005"/>
+                  </a:ext>
+                </a:extLst>
               </a:tr>
               <a:tr h="321818">
                 <a:tc>
                   <a:txBody>
-                    <a:bodyPr wrap="square"/>
+                    <a:bodyPr/>
                     <a:lstStyle/>
                     <a:p>
                       <a:pPr algn="ctr"/>
@@ -13364,7 +14131,7 @@
                 </a:tc>
                 <a:tc>
                   <a:txBody>
-                    <a:bodyPr wrap="square"/>
+                    <a:bodyPr/>
                     <a:lstStyle/>
                     <a:p>
                       <a:pPr algn="l"/>
@@ -13387,7 +14154,7 @@
                 </a:tc>
                 <a:tc>
                   <a:txBody>
-                    <a:bodyPr wrap="square"/>
+                    <a:bodyPr/>
                     <a:lstStyle/>
                     <a:p>
                       <a:pPr algn="ctr"/>
@@ -13410,7 +14177,7 @@
                 </a:tc>
                 <a:tc>
                   <a:txBody>
-                    <a:bodyPr wrap="square"/>
+                    <a:bodyPr/>
                     <a:lstStyle/>
                     <a:p>
                       <a:pPr algn="ctr"/>
@@ -13433,7 +14200,7 @@
                 </a:tc>
                 <a:tc>
                   <a:txBody>
-                    <a:bodyPr wrap="square"/>
+                    <a:bodyPr/>
                     <a:lstStyle/>
                     <a:p>
                       <a:pPr algn="ctr"/>
@@ -13456,7 +14223,7 @@
                 </a:tc>
                 <a:tc>
                   <a:txBody>
-                    <a:bodyPr wrap="square"/>
+                    <a:bodyPr/>
                     <a:lstStyle/>
                     <a:p>
                       <a:pPr algn="ctr"/>
@@ -13479,7 +14246,7 @@
                 </a:tc>
                 <a:tc>
                   <a:txBody>
-                    <a:bodyPr wrap="square"/>
+                    <a:bodyPr/>
                     <a:lstStyle/>
                     <a:p>
                       <a:pPr algn="ctr"/>
@@ -13501,11 +14268,16 @@
                     </a:solidFill>
                   </a:tcPr>
                 </a:tc>
+                <a:extLst>
+                  <a:ext uri="{0D108BD9-81ED-4DB2-BD59-A6C34878D82A}">
+                    <a16:rowId xmlns:a16="http://schemas.microsoft.com/office/drawing/2014/main" val="10006"/>
+                  </a:ext>
+                </a:extLst>
               </a:tr>
               <a:tr h="321818">
                 <a:tc>
                   <a:txBody>
-                    <a:bodyPr wrap="square"/>
+                    <a:bodyPr/>
                     <a:lstStyle/>
                     <a:p>
                       <a:pPr algn="ctr"/>
@@ -13528,7 +14300,7 @@
                 </a:tc>
                 <a:tc>
                   <a:txBody>
-                    <a:bodyPr wrap="square"/>
+                    <a:bodyPr/>
                     <a:lstStyle/>
                     <a:p>
                       <a:pPr algn="l"/>
@@ -13551,7 +14323,7 @@
                 </a:tc>
                 <a:tc>
                   <a:txBody>
-                    <a:bodyPr wrap="square"/>
+                    <a:bodyPr/>
                     <a:lstStyle/>
                     <a:p>
                       <a:pPr algn="ctr"/>
@@ -13574,7 +14346,7 @@
                 </a:tc>
                 <a:tc>
                   <a:txBody>
-                    <a:bodyPr wrap="square"/>
+                    <a:bodyPr/>
                     <a:lstStyle/>
                     <a:p>
                       <a:pPr algn="ctr"/>
@@ -13597,7 +14369,7 @@
                 </a:tc>
                 <a:tc>
                   <a:txBody>
-                    <a:bodyPr wrap="square"/>
+                    <a:bodyPr/>
                     <a:lstStyle/>
                     <a:p>
                       <a:pPr algn="ctr"/>
@@ -13620,7 +14392,7 @@
                 </a:tc>
                 <a:tc>
                   <a:txBody>
-                    <a:bodyPr wrap="square"/>
+                    <a:bodyPr/>
                     <a:lstStyle/>
                     <a:p>
                       <a:pPr algn="ctr"/>
@@ -13643,7 +14415,7 @@
                 </a:tc>
                 <a:tc>
                   <a:txBody>
-                    <a:bodyPr wrap="square"/>
+                    <a:bodyPr/>
                     <a:lstStyle/>
                     <a:p>
                       <a:pPr algn="ctr"/>
@@ -13665,11 +14437,16 @@
                     </a:solidFill>
                   </a:tcPr>
                 </a:tc>
+                <a:extLst>
+                  <a:ext uri="{0D108BD9-81ED-4DB2-BD59-A6C34878D82A}">
+                    <a16:rowId xmlns:a16="http://schemas.microsoft.com/office/drawing/2014/main" val="10007"/>
+                  </a:ext>
+                </a:extLst>
               </a:tr>
               <a:tr h="321818">
                 <a:tc>
                   <a:txBody>
-                    <a:bodyPr wrap="square"/>
+                    <a:bodyPr/>
                     <a:lstStyle/>
                     <a:p>
                       <a:pPr algn="ctr"/>
@@ -13692,7 +14469,7 @@
                 </a:tc>
                 <a:tc>
                   <a:txBody>
-                    <a:bodyPr wrap="square"/>
+                    <a:bodyPr/>
                     <a:lstStyle/>
                     <a:p>
                       <a:pPr algn="l"/>
@@ -13715,7 +14492,7 @@
                 </a:tc>
                 <a:tc>
                   <a:txBody>
-                    <a:bodyPr wrap="square"/>
+                    <a:bodyPr/>
                     <a:lstStyle/>
                     <a:p>
                       <a:pPr algn="ctr"/>
@@ -13738,7 +14515,7 @@
                 </a:tc>
                 <a:tc>
                   <a:txBody>
-                    <a:bodyPr wrap="square"/>
+                    <a:bodyPr/>
                     <a:lstStyle/>
                     <a:p>
                       <a:pPr algn="ctr"/>
@@ -13761,7 +14538,7 @@
                 </a:tc>
                 <a:tc>
                   <a:txBody>
-                    <a:bodyPr wrap="square"/>
+                    <a:bodyPr/>
                     <a:lstStyle/>
                     <a:p>
                       <a:pPr algn="ctr"/>
@@ -13784,7 +14561,7 @@
                 </a:tc>
                 <a:tc>
                   <a:txBody>
-                    <a:bodyPr wrap="square"/>
+                    <a:bodyPr/>
                     <a:lstStyle/>
                     <a:p>
                       <a:pPr algn="ctr"/>
@@ -13807,7 +14584,7 @@
                 </a:tc>
                 <a:tc>
                   <a:txBody>
-                    <a:bodyPr wrap="square"/>
+                    <a:bodyPr/>
                     <a:lstStyle/>
                     <a:p>
                       <a:pPr algn="ctr"/>
@@ -13829,6 +14606,11 @@
                     </a:solidFill>
                   </a:tcPr>
                 </a:tc>
+                <a:extLst>
+                  <a:ext uri="{0D108BD9-81ED-4DB2-BD59-A6C34878D82A}">
+                    <a16:rowId xmlns:a16="http://schemas.microsoft.com/office/drawing/2014/main" val="10008"/>
+                  </a:ext>
+                </a:extLst>
               </a:tr>
             </a:tbl>
           </a:graphicData>
@@ -13843,7 +14625,7 @@
 </file>
 
 <file path=ppt/slides/slide6.xml><?xml version="1.0" encoding="utf-8"?>
-<p:sld xmlns:a="http://schemas.openxmlformats.org/drawingml/2006/main" xmlns:p="http://schemas.openxmlformats.org/presentationml/2006/main" xmlns:r="http://schemas.openxmlformats.org/officeDocument/2006/relationships">
+<p:sld xmlns:a="http://schemas.openxmlformats.org/drawingml/2006/main" xmlns:r="http://schemas.openxmlformats.org/officeDocument/2006/relationships" xmlns:p="http://schemas.openxmlformats.org/presentationml/2006/main">
   <p:cSld>
     <p:spTree>
       <p:nvGrpSpPr>
@@ -13851,7 +14633,14 @@
         <p:cNvGrpSpPr/>
         <p:nvPr/>
       </p:nvGrpSpPr>
-      <p:grpSpPr/>
+      <p:grpSpPr>
+        <a:xfrm>
+          <a:off x="0" y="0"/>
+          <a:ext cx="0" cy="0"/>
+          <a:chOff x="0" y="0"/>
+          <a:chExt cx="0" cy="0"/>
+        </a:xfrm>
+      </p:grpSpPr>
       <p:sp>
         <p:nvSpPr>
           <p:cNvPr id="2" name="TextBox 1"/>
@@ -13869,7 +14658,7 @@
           <a:noFill/>
         </p:spPr>
         <p:txBody>
-          <a:bodyPr wrap="square" lIns="0" rIns="0" tIns="0" bIns="0">
+          <a:bodyPr wrap="square" lIns="0" tIns="0" rIns="0" bIns="0">
             <a:spAutoFit/>
           </a:bodyPr>
           <a:lstStyle/>
@@ -13903,7 +14692,7 @@
           <a:noFill/>
         </p:spPr>
         <p:txBody>
-          <a:bodyPr wrap="square" lIns="0" rIns="0" tIns="0" bIns="0">
+          <a:bodyPr wrap="square" lIns="0" tIns="0" rIns="0" bIns="0">
             <a:spAutoFit/>
           </a:bodyPr>
           <a:lstStyle/>
@@ -13937,7 +14726,7 @@
           <a:noFill/>
         </p:spPr>
         <p:txBody>
-          <a:bodyPr wrap="square" lIns="0" rIns="0" tIns="0" bIns="0">
+          <a:bodyPr wrap="square" lIns="0" tIns="0" rIns="0" bIns="0">
             <a:spAutoFit/>
           </a:bodyPr>
           <a:lstStyle/>
@@ -13972,7 +14761,7 @@
           <a:noFill/>
         </p:spPr>
         <p:txBody>
-          <a:bodyPr wrap="square" lIns="0" rIns="0" tIns="0" bIns="0">
+          <a:bodyPr wrap="square" lIns="0" tIns="0" rIns="0" bIns="0">
             <a:spAutoFit/>
           </a:bodyPr>
           <a:lstStyle/>
@@ -14008,18 +14797,60 @@
                 <a:tableStyleId>{5C22544A-7EE6-4342-B048-85BDC9FD1C3A}</a:tableStyleId>
               </a:tblPr>
               <a:tblGrid>
-                <a:gridCol w="960646"/>
-                <a:gridCol w="4063535"/>
-                <a:gridCol w="960646"/>
-                <a:gridCol w="1497007"/>
-                <a:gridCol w="1611484"/>
-                <a:gridCol w="960646"/>
-                <a:gridCol w="1003875"/>
+                <a:gridCol w="960646">
+                  <a:extLst>
+                    <a:ext uri="{9D8B030D-6E8A-4147-A177-3AD203B41FA5}">
+                      <a16:colId xmlns:a16="http://schemas.microsoft.com/office/drawing/2014/main" val="20000"/>
+                    </a:ext>
+                  </a:extLst>
+                </a:gridCol>
+                <a:gridCol w="4063535">
+                  <a:extLst>
+                    <a:ext uri="{9D8B030D-6E8A-4147-A177-3AD203B41FA5}">
+                      <a16:colId xmlns:a16="http://schemas.microsoft.com/office/drawing/2014/main" val="20001"/>
+                    </a:ext>
+                  </a:extLst>
+                </a:gridCol>
+                <a:gridCol w="960646">
+                  <a:extLst>
+                    <a:ext uri="{9D8B030D-6E8A-4147-A177-3AD203B41FA5}">
+                      <a16:colId xmlns:a16="http://schemas.microsoft.com/office/drawing/2014/main" val="20002"/>
+                    </a:ext>
+                  </a:extLst>
+                </a:gridCol>
+                <a:gridCol w="1497007">
+                  <a:extLst>
+                    <a:ext uri="{9D8B030D-6E8A-4147-A177-3AD203B41FA5}">
+                      <a16:colId xmlns:a16="http://schemas.microsoft.com/office/drawing/2014/main" val="20003"/>
+                    </a:ext>
+                  </a:extLst>
+                </a:gridCol>
+                <a:gridCol w="1611484">
+                  <a:extLst>
+                    <a:ext uri="{9D8B030D-6E8A-4147-A177-3AD203B41FA5}">
+                      <a16:colId xmlns:a16="http://schemas.microsoft.com/office/drawing/2014/main" val="20004"/>
+                    </a:ext>
+                  </a:extLst>
+                </a:gridCol>
+                <a:gridCol w="960646">
+                  <a:extLst>
+                    <a:ext uri="{9D8B030D-6E8A-4147-A177-3AD203B41FA5}">
+                      <a16:colId xmlns:a16="http://schemas.microsoft.com/office/drawing/2014/main" val="20005"/>
+                    </a:ext>
+                  </a:extLst>
+                </a:gridCol>
+                <a:gridCol w="1003875">
+                  <a:extLst>
+                    <a:ext uri="{9D8B030D-6E8A-4147-A177-3AD203B41FA5}">
+                      <a16:colId xmlns:a16="http://schemas.microsoft.com/office/drawing/2014/main" val="20006"/>
+                    </a:ext>
+                  </a:extLst>
+                </a:gridCol>
               </a:tblGrid>
               <a:tr h="321818">
                 <a:tc>
                   <a:txBody>
-                    <a:bodyPr wrap="square"/>
+                    <a:bodyPr/>
                     <a:lstStyle/>
                     <a:p>
                       <a:pPr algn="ctr"/>
@@ -14042,7 +14873,7 @@
                 </a:tc>
                 <a:tc>
                   <a:txBody>
-                    <a:bodyPr wrap="square"/>
+                    <a:bodyPr/>
                     <a:lstStyle/>
                     <a:p>
                       <a:pPr algn="ctr"/>
@@ -14065,7 +14896,7 @@
                 </a:tc>
                 <a:tc>
                   <a:txBody>
-                    <a:bodyPr wrap="square"/>
+                    <a:bodyPr/>
                     <a:lstStyle/>
                     <a:p>
                       <a:pPr algn="ctr"/>
@@ -14088,7 +14919,7 @@
                 </a:tc>
                 <a:tc>
                   <a:txBody>
-                    <a:bodyPr wrap="square"/>
+                    <a:bodyPr/>
                     <a:lstStyle/>
                     <a:p>
                       <a:pPr algn="ctr"/>
@@ -14111,7 +14942,7 @@
                 </a:tc>
                 <a:tc>
                   <a:txBody>
-                    <a:bodyPr wrap="square"/>
+                    <a:bodyPr/>
                     <a:lstStyle/>
                     <a:p>
                       <a:pPr algn="ctr"/>
@@ -14134,7 +14965,7 @@
                 </a:tc>
                 <a:tc>
                   <a:txBody>
-                    <a:bodyPr wrap="square"/>
+                    <a:bodyPr/>
                     <a:lstStyle/>
                     <a:p>
                       <a:pPr algn="ctr"/>
@@ -14157,7 +14988,7 @@
                 </a:tc>
                 <a:tc>
                   <a:txBody>
-                    <a:bodyPr wrap="square"/>
+                    <a:bodyPr/>
                     <a:lstStyle/>
                     <a:p>
                       <a:pPr algn="ctr"/>
@@ -14178,11 +15009,16 @@
                     </a:solidFill>
                   </a:tcPr>
                 </a:tc>
+                <a:extLst>
+                  <a:ext uri="{0D108BD9-81ED-4DB2-BD59-A6C34878D82A}">
+                    <a16:rowId xmlns:a16="http://schemas.microsoft.com/office/drawing/2014/main" val="10000"/>
+                  </a:ext>
+                </a:extLst>
               </a:tr>
               <a:tr h="321818">
                 <a:tc>
                   <a:txBody>
-                    <a:bodyPr wrap="square"/>
+                    <a:bodyPr/>
                     <a:lstStyle/>
                     <a:p>
                       <a:pPr algn="ctr"/>
@@ -14205,7 +15041,7 @@
                 </a:tc>
                 <a:tc>
                   <a:txBody>
-                    <a:bodyPr wrap="square"/>
+                    <a:bodyPr/>
                     <a:lstStyle/>
                     <a:p>
                       <a:pPr algn="l"/>
@@ -14228,7 +15064,7 @@
                 </a:tc>
                 <a:tc>
                   <a:txBody>
-                    <a:bodyPr wrap="square"/>
+                    <a:bodyPr/>
                     <a:lstStyle/>
                     <a:p>
                       <a:pPr algn="ctr"/>
@@ -14251,7 +15087,7 @@
                 </a:tc>
                 <a:tc>
                   <a:txBody>
-                    <a:bodyPr wrap="square"/>
+                    <a:bodyPr/>
                     <a:lstStyle/>
                     <a:p>
                       <a:pPr algn="ctr"/>
@@ -14274,7 +15110,7 @@
                 </a:tc>
                 <a:tc>
                   <a:txBody>
-                    <a:bodyPr wrap="square"/>
+                    <a:bodyPr/>
                     <a:lstStyle/>
                     <a:p>
                       <a:pPr algn="ctr"/>
@@ -14297,7 +15133,7 @@
                 </a:tc>
                 <a:tc>
                   <a:txBody>
-                    <a:bodyPr wrap="square"/>
+                    <a:bodyPr/>
                     <a:lstStyle/>
                     <a:p>
                       <a:pPr algn="ctr"/>
@@ -14320,7 +15156,7 @@
                 </a:tc>
                 <a:tc>
                   <a:txBody>
-                    <a:bodyPr wrap="square"/>
+                    <a:bodyPr/>
                     <a:lstStyle/>
                     <a:p>
                       <a:pPr algn="ctr"/>
@@ -14342,11 +15178,16 @@
                     </a:solidFill>
                   </a:tcPr>
                 </a:tc>
+                <a:extLst>
+                  <a:ext uri="{0D108BD9-81ED-4DB2-BD59-A6C34878D82A}">
+                    <a16:rowId xmlns:a16="http://schemas.microsoft.com/office/drawing/2014/main" val="10001"/>
+                  </a:ext>
+                </a:extLst>
               </a:tr>
               <a:tr h="321818">
                 <a:tc>
                   <a:txBody>
-                    <a:bodyPr wrap="square"/>
+                    <a:bodyPr/>
                     <a:lstStyle/>
                     <a:p>
                       <a:pPr algn="ctr"/>
@@ -14369,7 +15210,7 @@
                 </a:tc>
                 <a:tc>
                   <a:txBody>
-                    <a:bodyPr wrap="square"/>
+                    <a:bodyPr/>
                     <a:lstStyle/>
                     <a:p>
                       <a:pPr algn="l"/>
@@ -14392,7 +15233,7 @@
                 </a:tc>
                 <a:tc>
                   <a:txBody>
-                    <a:bodyPr wrap="square"/>
+                    <a:bodyPr/>
                     <a:lstStyle/>
                     <a:p>
                       <a:pPr algn="ctr"/>
@@ -14415,7 +15256,7 @@
                 </a:tc>
                 <a:tc>
                   <a:txBody>
-                    <a:bodyPr wrap="square"/>
+                    <a:bodyPr/>
                     <a:lstStyle/>
                     <a:p>
                       <a:pPr algn="ctr"/>
@@ -14438,7 +15279,7 @@
                 </a:tc>
                 <a:tc>
                   <a:txBody>
-                    <a:bodyPr wrap="square"/>
+                    <a:bodyPr/>
                     <a:lstStyle/>
                     <a:p>
                       <a:pPr algn="ctr"/>
@@ -14461,7 +15302,7 @@
                 </a:tc>
                 <a:tc>
                   <a:txBody>
-                    <a:bodyPr wrap="square"/>
+                    <a:bodyPr/>
                     <a:lstStyle/>
                     <a:p>
                       <a:pPr algn="ctr"/>
@@ -14484,7 +15325,7 @@
                 </a:tc>
                 <a:tc>
                   <a:txBody>
-                    <a:bodyPr wrap="square"/>
+                    <a:bodyPr/>
                     <a:lstStyle/>
                     <a:p>
                       <a:pPr algn="ctr"/>
@@ -14506,11 +15347,16 @@
                     </a:solidFill>
                   </a:tcPr>
                 </a:tc>
+                <a:extLst>
+                  <a:ext uri="{0D108BD9-81ED-4DB2-BD59-A6C34878D82A}">
+                    <a16:rowId xmlns:a16="http://schemas.microsoft.com/office/drawing/2014/main" val="10002"/>
+                  </a:ext>
+                </a:extLst>
               </a:tr>
               <a:tr h="321818">
                 <a:tc>
                   <a:txBody>
-                    <a:bodyPr wrap="square"/>
+                    <a:bodyPr/>
                     <a:lstStyle/>
                     <a:p>
                       <a:pPr algn="ctr"/>
@@ -14533,7 +15379,7 @@
                 </a:tc>
                 <a:tc>
                   <a:txBody>
-                    <a:bodyPr wrap="square"/>
+                    <a:bodyPr/>
                     <a:lstStyle/>
                     <a:p>
                       <a:pPr algn="l"/>
@@ -14556,7 +15402,7 @@
                 </a:tc>
                 <a:tc>
                   <a:txBody>
-                    <a:bodyPr wrap="square"/>
+                    <a:bodyPr/>
                     <a:lstStyle/>
                     <a:p>
                       <a:pPr algn="ctr"/>
@@ -14579,7 +15425,7 @@
                 </a:tc>
                 <a:tc>
                   <a:txBody>
-                    <a:bodyPr wrap="square"/>
+                    <a:bodyPr/>
                     <a:lstStyle/>
                     <a:p>
                       <a:pPr algn="ctr"/>
@@ -14602,7 +15448,7 @@
                 </a:tc>
                 <a:tc>
                   <a:txBody>
-                    <a:bodyPr wrap="square"/>
+                    <a:bodyPr/>
                     <a:lstStyle/>
                     <a:p>
                       <a:pPr algn="ctr"/>
@@ -14625,7 +15471,7 @@
                 </a:tc>
                 <a:tc>
                   <a:txBody>
-                    <a:bodyPr wrap="square"/>
+                    <a:bodyPr/>
                     <a:lstStyle/>
                     <a:p>
                       <a:pPr algn="ctr"/>
@@ -14648,7 +15494,7 @@
                 </a:tc>
                 <a:tc>
                   <a:txBody>
-                    <a:bodyPr wrap="square"/>
+                    <a:bodyPr/>
                     <a:lstStyle/>
                     <a:p>
                       <a:pPr algn="ctr"/>
@@ -14670,11 +15516,16 @@
                     </a:solidFill>
                   </a:tcPr>
                 </a:tc>
+                <a:extLst>
+                  <a:ext uri="{0D108BD9-81ED-4DB2-BD59-A6C34878D82A}">
+                    <a16:rowId xmlns:a16="http://schemas.microsoft.com/office/drawing/2014/main" val="10003"/>
+                  </a:ext>
+                </a:extLst>
               </a:tr>
               <a:tr h="321818">
                 <a:tc>
                   <a:txBody>
-                    <a:bodyPr wrap="square"/>
+                    <a:bodyPr/>
                     <a:lstStyle/>
                     <a:p>
                       <a:pPr algn="ctr"/>
@@ -14697,7 +15548,7 @@
                 </a:tc>
                 <a:tc>
                   <a:txBody>
-                    <a:bodyPr wrap="square"/>
+                    <a:bodyPr/>
                     <a:lstStyle/>
                     <a:p>
                       <a:pPr algn="l"/>
@@ -14720,7 +15571,7 @@
                 </a:tc>
                 <a:tc>
                   <a:txBody>
-                    <a:bodyPr wrap="square"/>
+                    <a:bodyPr/>
                     <a:lstStyle/>
                     <a:p>
                       <a:pPr algn="ctr"/>
@@ -14743,7 +15594,7 @@
                 </a:tc>
                 <a:tc>
                   <a:txBody>
-                    <a:bodyPr wrap="square"/>
+                    <a:bodyPr/>
                     <a:lstStyle/>
                     <a:p>
                       <a:pPr algn="ctr"/>
@@ -14766,7 +15617,7 @@
                 </a:tc>
                 <a:tc>
                   <a:txBody>
-                    <a:bodyPr wrap="square"/>
+                    <a:bodyPr/>
                     <a:lstStyle/>
                     <a:p>
                       <a:pPr algn="ctr"/>
@@ -14789,7 +15640,7 @@
                 </a:tc>
                 <a:tc>
                   <a:txBody>
-                    <a:bodyPr wrap="square"/>
+                    <a:bodyPr/>
                     <a:lstStyle/>
                     <a:p>
                       <a:pPr algn="ctr"/>
@@ -14812,7 +15663,7 @@
                 </a:tc>
                 <a:tc>
                   <a:txBody>
-                    <a:bodyPr wrap="square"/>
+                    <a:bodyPr/>
                     <a:lstStyle/>
                     <a:p>
                       <a:pPr algn="ctr"/>
@@ -14834,11 +15685,16 @@
                     </a:solidFill>
                   </a:tcPr>
                 </a:tc>
+                <a:extLst>
+                  <a:ext uri="{0D108BD9-81ED-4DB2-BD59-A6C34878D82A}">
+                    <a16:rowId xmlns:a16="http://schemas.microsoft.com/office/drawing/2014/main" val="10004"/>
+                  </a:ext>
+                </a:extLst>
               </a:tr>
               <a:tr h="321818">
                 <a:tc>
                   <a:txBody>
-                    <a:bodyPr wrap="square"/>
+                    <a:bodyPr/>
                     <a:lstStyle/>
                     <a:p>
                       <a:pPr algn="ctr"/>
@@ -14861,7 +15717,7 @@
                 </a:tc>
                 <a:tc>
                   <a:txBody>
-                    <a:bodyPr wrap="square"/>
+                    <a:bodyPr/>
                     <a:lstStyle/>
                     <a:p>
                       <a:pPr algn="l"/>
@@ -14884,7 +15740,7 @@
                 </a:tc>
                 <a:tc>
                   <a:txBody>
-                    <a:bodyPr wrap="square"/>
+                    <a:bodyPr/>
                     <a:lstStyle/>
                     <a:p>
                       <a:pPr algn="ctr"/>
@@ -14907,7 +15763,7 @@
                 </a:tc>
                 <a:tc>
                   <a:txBody>
-                    <a:bodyPr wrap="square"/>
+                    <a:bodyPr/>
                     <a:lstStyle/>
                     <a:p>
                       <a:pPr algn="ctr"/>
@@ -14930,7 +15786,7 @@
                 </a:tc>
                 <a:tc>
                   <a:txBody>
-                    <a:bodyPr wrap="square"/>
+                    <a:bodyPr/>
                     <a:lstStyle/>
                     <a:p>
                       <a:pPr algn="ctr"/>
@@ -14953,7 +15809,7 @@
                 </a:tc>
                 <a:tc>
                   <a:txBody>
-                    <a:bodyPr wrap="square"/>
+                    <a:bodyPr/>
                     <a:lstStyle/>
                     <a:p>
                       <a:pPr algn="ctr"/>
@@ -14976,7 +15832,7 @@
                 </a:tc>
                 <a:tc>
                   <a:txBody>
-                    <a:bodyPr wrap="square"/>
+                    <a:bodyPr/>
                     <a:lstStyle/>
                     <a:p>
                       <a:pPr algn="ctr"/>
@@ -14998,11 +15854,16 @@
                     </a:solidFill>
                   </a:tcPr>
                 </a:tc>
+                <a:extLst>
+                  <a:ext uri="{0D108BD9-81ED-4DB2-BD59-A6C34878D82A}">
+                    <a16:rowId xmlns:a16="http://schemas.microsoft.com/office/drawing/2014/main" val="10005"/>
+                  </a:ext>
+                </a:extLst>
               </a:tr>
               <a:tr h="321818">
                 <a:tc>
                   <a:txBody>
-                    <a:bodyPr wrap="square"/>
+                    <a:bodyPr/>
                     <a:lstStyle/>
                     <a:p>
                       <a:pPr algn="ctr"/>
@@ -15025,7 +15886,7 @@
                 </a:tc>
                 <a:tc>
                   <a:txBody>
-                    <a:bodyPr wrap="square"/>
+                    <a:bodyPr/>
                     <a:lstStyle/>
                     <a:p>
                       <a:pPr algn="l"/>
@@ -15048,7 +15909,7 @@
                 </a:tc>
                 <a:tc>
                   <a:txBody>
-                    <a:bodyPr wrap="square"/>
+                    <a:bodyPr/>
                     <a:lstStyle/>
                     <a:p>
                       <a:pPr algn="ctr"/>
@@ -15071,7 +15932,7 @@
                 </a:tc>
                 <a:tc>
                   <a:txBody>
-                    <a:bodyPr wrap="square"/>
+                    <a:bodyPr/>
                     <a:lstStyle/>
                     <a:p>
                       <a:pPr algn="ctr"/>
@@ -15094,7 +15955,7 @@
                 </a:tc>
                 <a:tc>
                   <a:txBody>
-                    <a:bodyPr wrap="square"/>
+                    <a:bodyPr/>
                     <a:lstStyle/>
                     <a:p>
                       <a:pPr algn="ctr"/>
@@ -15117,7 +15978,7 @@
                 </a:tc>
                 <a:tc>
                   <a:txBody>
-                    <a:bodyPr wrap="square"/>
+                    <a:bodyPr/>
                     <a:lstStyle/>
                     <a:p>
                       <a:pPr algn="ctr"/>
@@ -15140,7 +16001,7 @@
                 </a:tc>
                 <a:tc>
                   <a:txBody>
-                    <a:bodyPr wrap="square"/>
+                    <a:bodyPr/>
                     <a:lstStyle/>
                     <a:p>
                       <a:pPr algn="ctr"/>
@@ -15162,11 +16023,16 @@
                     </a:solidFill>
                   </a:tcPr>
                 </a:tc>
+                <a:extLst>
+                  <a:ext uri="{0D108BD9-81ED-4DB2-BD59-A6C34878D82A}">
+                    <a16:rowId xmlns:a16="http://schemas.microsoft.com/office/drawing/2014/main" val="10006"/>
+                  </a:ext>
+                </a:extLst>
               </a:tr>
               <a:tr h="321818">
                 <a:tc>
                   <a:txBody>
-                    <a:bodyPr wrap="square"/>
+                    <a:bodyPr/>
                     <a:lstStyle/>
                     <a:p>
                       <a:pPr algn="ctr"/>
@@ -15189,7 +16055,7 @@
                 </a:tc>
                 <a:tc>
                   <a:txBody>
-                    <a:bodyPr wrap="square"/>
+                    <a:bodyPr/>
                     <a:lstStyle/>
                     <a:p>
                       <a:pPr algn="l"/>
@@ -15212,7 +16078,7 @@
                 </a:tc>
                 <a:tc>
                   <a:txBody>
-                    <a:bodyPr wrap="square"/>
+                    <a:bodyPr/>
                     <a:lstStyle/>
                     <a:p>
                       <a:pPr algn="ctr"/>
@@ -15235,7 +16101,7 @@
                 </a:tc>
                 <a:tc>
                   <a:txBody>
-                    <a:bodyPr wrap="square"/>
+                    <a:bodyPr/>
                     <a:lstStyle/>
                     <a:p>
                       <a:pPr algn="ctr"/>
@@ -15258,7 +16124,7 @@
                 </a:tc>
                 <a:tc>
                   <a:txBody>
-                    <a:bodyPr wrap="square"/>
+                    <a:bodyPr/>
                     <a:lstStyle/>
                     <a:p>
                       <a:pPr algn="ctr"/>
@@ -15281,7 +16147,7 @@
                 </a:tc>
                 <a:tc>
                   <a:txBody>
-                    <a:bodyPr wrap="square"/>
+                    <a:bodyPr/>
                     <a:lstStyle/>
                     <a:p>
                       <a:pPr algn="ctr"/>
@@ -15304,7 +16170,7 @@
                 </a:tc>
                 <a:tc>
                   <a:txBody>
-                    <a:bodyPr wrap="square"/>
+                    <a:bodyPr/>
                     <a:lstStyle/>
                     <a:p>
                       <a:pPr algn="ctr"/>
@@ -15326,6 +16192,11 @@
                     </a:solidFill>
                   </a:tcPr>
                 </a:tc>
+                <a:extLst>
+                  <a:ext uri="{0D108BD9-81ED-4DB2-BD59-A6C34878D82A}">
+                    <a16:rowId xmlns:a16="http://schemas.microsoft.com/office/drawing/2014/main" val="10007"/>
+                  </a:ext>
+                </a:extLst>
               </a:tr>
             </a:tbl>
           </a:graphicData>
@@ -15340,7 +16211,7 @@
 </file>
 
 <file path=ppt/slides/slide7.xml><?xml version="1.0" encoding="utf-8"?>
-<p:sld xmlns:a="http://schemas.openxmlformats.org/drawingml/2006/main" xmlns:p="http://schemas.openxmlformats.org/presentationml/2006/main" xmlns:r="http://schemas.openxmlformats.org/officeDocument/2006/relationships">
+<p:sld xmlns:a="http://schemas.openxmlformats.org/drawingml/2006/main" xmlns:r="http://schemas.openxmlformats.org/officeDocument/2006/relationships" xmlns:p="http://schemas.openxmlformats.org/presentationml/2006/main">
   <p:cSld>
     <p:spTree>
       <p:nvGrpSpPr>
@@ -15348,7 +16219,14 @@
         <p:cNvGrpSpPr/>
         <p:nvPr/>
       </p:nvGrpSpPr>
-      <p:grpSpPr/>
+      <p:grpSpPr>
+        <a:xfrm>
+          <a:off x="0" y="0"/>
+          <a:ext cx="0" cy="0"/>
+          <a:chOff x="0" y="0"/>
+          <a:chExt cx="0" cy="0"/>
+        </a:xfrm>
+      </p:grpSpPr>
       <p:sp>
         <p:nvSpPr>
           <p:cNvPr id="2" name="TextBox 1"/>
@@ -15366,7 +16244,7 @@
           <a:noFill/>
         </p:spPr>
         <p:txBody>
-          <a:bodyPr wrap="square" lIns="0" rIns="0" tIns="0" bIns="0">
+          <a:bodyPr wrap="square" lIns="0" tIns="0" rIns="0" bIns="0">
             <a:spAutoFit/>
           </a:bodyPr>
           <a:lstStyle/>
@@ -15400,7 +16278,7 @@
           <a:noFill/>
         </p:spPr>
         <p:txBody>
-          <a:bodyPr wrap="square" lIns="0" rIns="0" tIns="0" bIns="0">
+          <a:bodyPr wrap="square" lIns="0" tIns="0" rIns="0" bIns="0">
             <a:spAutoFit/>
           </a:bodyPr>
           <a:lstStyle/>
@@ -15434,7 +16312,7 @@
           <a:noFill/>
         </p:spPr>
         <p:txBody>
-          <a:bodyPr wrap="square" lIns="0" rIns="0" tIns="0" bIns="0">
+          <a:bodyPr wrap="square" lIns="0" tIns="0" rIns="0" bIns="0">
             <a:spAutoFit/>
           </a:bodyPr>
           <a:lstStyle/>
@@ -15469,7 +16347,7 @@
           <a:noFill/>
         </p:spPr>
         <p:txBody>
-          <a:bodyPr wrap="square" lIns="0" rIns="0" tIns="0" bIns="0">
+          <a:bodyPr wrap="square" lIns="0" tIns="0" rIns="0" bIns="0">
             <a:spAutoFit/>
           </a:bodyPr>
           <a:lstStyle/>
@@ -15505,15 +16383,39 @@
                 <a:tableStyleId>{5C22544A-7EE6-4342-B048-85BDC9FD1C3A}</a:tableStyleId>
               </a:tblPr>
               <a:tblGrid>
-                <a:gridCol w="821457"/>
-                <a:gridCol w="3975340"/>
-                <a:gridCol w="3916809"/>
-                <a:gridCol w="2344233"/>
+                <a:gridCol w="821457">
+                  <a:extLst>
+                    <a:ext uri="{9D8B030D-6E8A-4147-A177-3AD203B41FA5}">
+                      <a16:colId xmlns:a16="http://schemas.microsoft.com/office/drawing/2014/main" val="20000"/>
+                    </a:ext>
+                  </a:extLst>
+                </a:gridCol>
+                <a:gridCol w="3975340">
+                  <a:extLst>
+                    <a:ext uri="{9D8B030D-6E8A-4147-A177-3AD203B41FA5}">
+                      <a16:colId xmlns:a16="http://schemas.microsoft.com/office/drawing/2014/main" val="20001"/>
+                    </a:ext>
+                  </a:extLst>
+                </a:gridCol>
+                <a:gridCol w="3916809">
+                  <a:extLst>
+                    <a:ext uri="{9D8B030D-6E8A-4147-A177-3AD203B41FA5}">
+                      <a16:colId xmlns:a16="http://schemas.microsoft.com/office/drawing/2014/main" val="20002"/>
+                    </a:ext>
+                  </a:extLst>
+                </a:gridCol>
+                <a:gridCol w="2344233">
+                  <a:extLst>
+                    <a:ext uri="{9D8B030D-6E8A-4147-A177-3AD203B41FA5}">
+                      <a16:colId xmlns:a16="http://schemas.microsoft.com/office/drawing/2014/main" val="20003"/>
+                    </a:ext>
+                  </a:extLst>
+                </a:gridCol>
               </a:tblGrid>
               <a:tr h="321818">
                 <a:tc>
                   <a:txBody>
-                    <a:bodyPr wrap="square"/>
+                    <a:bodyPr/>
                     <a:lstStyle/>
                     <a:p>
                       <a:pPr algn="ctr"/>
@@ -15536,7 +16438,7 @@
                 </a:tc>
                 <a:tc>
                   <a:txBody>
-                    <a:bodyPr wrap="square"/>
+                    <a:bodyPr/>
                     <a:lstStyle/>
                     <a:p>
                       <a:pPr algn="ctr"/>
@@ -15559,7 +16461,7 @@
                 </a:tc>
                 <a:tc>
                   <a:txBody>
-                    <a:bodyPr wrap="square"/>
+                    <a:bodyPr/>
                     <a:lstStyle/>
                     <a:p>
                       <a:pPr algn="ctr"/>
@@ -15582,7 +16484,7 @@
                 </a:tc>
                 <a:tc>
                   <a:txBody>
-                    <a:bodyPr wrap="square"/>
+                    <a:bodyPr/>
                     <a:lstStyle/>
                     <a:p>
                       <a:pPr algn="ctr"/>
@@ -15603,11 +16505,16 @@
                     </a:solidFill>
                   </a:tcPr>
                 </a:tc>
+                <a:extLst>
+                  <a:ext uri="{0D108BD9-81ED-4DB2-BD59-A6C34878D82A}">
+                    <a16:rowId xmlns:a16="http://schemas.microsoft.com/office/drawing/2014/main" val="10000"/>
+                  </a:ext>
+                </a:extLst>
               </a:tr>
               <a:tr h="579628">
                 <a:tc>
                   <a:txBody>
-                    <a:bodyPr wrap="square"/>
+                    <a:bodyPr/>
                     <a:lstStyle/>
                     <a:p>
                       <a:pPr algn="ctr"/>
@@ -15630,7 +16537,7 @@
                 </a:tc>
                 <a:tc>
                   <a:txBody>
-                    <a:bodyPr wrap="square"/>
+                    <a:bodyPr/>
                     <a:lstStyle/>
                     <a:p>
                       <a:pPr algn="l"/>
@@ -15662,7 +16569,7 @@
                 </a:tc>
                 <a:tc>
                   <a:txBody>
-                    <a:bodyPr wrap="square"/>
+                    <a:bodyPr/>
                     <a:lstStyle/>
                     <a:p>
                       <a:pPr algn="l"/>
@@ -15685,7 +16592,7 @@
                 </a:tc>
                 <a:tc>
                   <a:txBody>
-                    <a:bodyPr wrap="square"/>
+                    <a:bodyPr/>
                     <a:lstStyle/>
                     <a:p>
                       <a:pPr algn="l"/>
@@ -15706,11 +16613,16 @@
                     </a:solidFill>
                   </a:tcPr>
                 </a:tc>
+                <a:extLst>
+                  <a:ext uri="{0D108BD9-81ED-4DB2-BD59-A6C34878D82A}">
+                    <a16:rowId xmlns:a16="http://schemas.microsoft.com/office/drawing/2014/main" val="10001"/>
+                  </a:ext>
+                </a:extLst>
               </a:tr>
               <a:tr h="579628">
                 <a:tc>
                   <a:txBody>
-                    <a:bodyPr wrap="square"/>
+                    <a:bodyPr/>
                     <a:lstStyle/>
                     <a:p>
                       <a:pPr algn="ctr"/>
@@ -15733,7 +16645,7 @@
                 </a:tc>
                 <a:tc>
                   <a:txBody>
-                    <a:bodyPr wrap="square"/>
+                    <a:bodyPr/>
                     <a:lstStyle/>
                     <a:p>
                       <a:pPr algn="l"/>
@@ -15756,7 +16668,7 @@
                 </a:tc>
                 <a:tc>
                   <a:txBody>
-                    <a:bodyPr wrap="square"/>
+                    <a:bodyPr/>
                     <a:lstStyle/>
                     <a:p>
                       <a:pPr algn="l"/>
@@ -15779,7 +16691,7 @@
                 </a:tc>
                 <a:tc>
                   <a:txBody>
-                    <a:bodyPr wrap="square"/>
+                    <a:bodyPr/>
                     <a:lstStyle/>
                     <a:p>
                       <a:pPr algn="l"/>
@@ -15800,11 +16712,16 @@
                     </a:solidFill>
                   </a:tcPr>
                 </a:tc>
+                <a:extLst>
+                  <a:ext uri="{0D108BD9-81ED-4DB2-BD59-A6C34878D82A}">
+                    <a16:rowId xmlns:a16="http://schemas.microsoft.com/office/drawing/2014/main" val="10002"/>
+                  </a:ext>
+                </a:extLst>
               </a:tr>
               <a:tr h="579628">
                 <a:tc>
                   <a:txBody>
-                    <a:bodyPr wrap="square"/>
+                    <a:bodyPr/>
                     <a:lstStyle/>
                     <a:p>
                       <a:pPr algn="ctr"/>
@@ -15827,7 +16744,7 @@
                 </a:tc>
                 <a:tc>
                   <a:txBody>
-                    <a:bodyPr wrap="square"/>
+                    <a:bodyPr/>
                     <a:lstStyle/>
                     <a:p>
                       <a:pPr algn="l"/>
@@ -15850,7 +16767,7 @@
                 </a:tc>
                 <a:tc>
                   <a:txBody>
-                    <a:bodyPr wrap="square"/>
+                    <a:bodyPr/>
                     <a:lstStyle/>
                     <a:p>
                       <a:pPr algn="l"/>
@@ -15873,7 +16790,7 @@
                 </a:tc>
                 <a:tc>
                   <a:txBody>
-                    <a:bodyPr wrap="square"/>
+                    <a:bodyPr/>
                     <a:lstStyle/>
                     <a:p>
                       <a:pPr algn="l"/>
@@ -15894,11 +16811,16 @@
                     </a:solidFill>
                   </a:tcPr>
                 </a:tc>
+                <a:extLst>
+                  <a:ext uri="{0D108BD9-81ED-4DB2-BD59-A6C34878D82A}">
+                    <a16:rowId xmlns:a16="http://schemas.microsoft.com/office/drawing/2014/main" val="10003"/>
+                  </a:ext>
+                </a:extLst>
               </a:tr>
               <a:tr h="579628">
                 <a:tc>
                   <a:txBody>
-                    <a:bodyPr wrap="square"/>
+                    <a:bodyPr/>
                     <a:lstStyle/>
                     <a:p>
                       <a:pPr algn="ctr"/>
@@ -15921,7 +16843,7 @@
                 </a:tc>
                 <a:tc>
                   <a:txBody>
-                    <a:bodyPr wrap="square"/>
+                    <a:bodyPr/>
                     <a:lstStyle/>
                     <a:p>
                       <a:pPr algn="l"/>
@@ -15944,7 +16866,7 @@
                 </a:tc>
                 <a:tc>
                   <a:txBody>
-                    <a:bodyPr wrap="square"/>
+                    <a:bodyPr/>
                     <a:lstStyle/>
                     <a:p>
                       <a:pPr algn="l"/>
@@ -15967,7 +16889,7 @@
                 </a:tc>
                 <a:tc>
                   <a:txBody>
-                    <a:bodyPr wrap="square"/>
+                    <a:bodyPr/>
                     <a:lstStyle/>
                     <a:p>
                       <a:pPr algn="l"/>
@@ -15988,11 +16910,16 @@
                     </a:solidFill>
                   </a:tcPr>
                 </a:tc>
+                <a:extLst>
+                  <a:ext uri="{0D108BD9-81ED-4DB2-BD59-A6C34878D82A}">
+                    <a16:rowId xmlns:a16="http://schemas.microsoft.com/office/drawing/2014/main" val="10004"/>
+                  </a:ext>
+                </a:extLst>
               </a:tr>
               <a:tr h="579628">
                 <a:tc>
                   <a:txBody>
-                    <a:bodyPr wrap="square"/>
+                    <a:bodyPr/>
                     <a:lstStyle/>
                     <a:p>
                       <a:pPr algn="ctr"/>
@@ -16015,7 +16942,7 @@
                 </a:tc>
                 <a:tc>
                   <a:txBody>
-                    <a:bodyPr wrap="square"/>
+                    <a:bodyPr/>
                     <a:lstStyle/>
                     <a:p>
                       <a:pPr algn="l"/>
@@ -16038,7 +16965,7 @@
                 </a:tc>
                 <a:tc>
                   <a:txBody>
-                    <a:bodyPr wrap="square"/>
+                    <a:bodyPr/>
                     <a:lstStyle/>
                     <a:p>
                       <a:pPr algn="l"/>
@@ -16061,7 +16988,7 @@
                 </a:tc>
                 <a:tc>
                   <a:txBody>
-                    <a:bodyPr wrap="square"/>
+                    <a:bodyPr/>
                     <a:lstStyle/>
                     <a:p>
                       <a:pPr algn="l"/>
@@ -16082,6 +17009,11 @@
                     </a:solidFill>
                   </a:tcPr>
                 </a:tc>
+                <a:extLst>
+                  <a:ext uri="{0D108BD9-81ED-4DB2-BD59-A6C34878D82A}">
+                    <a16:rowId xmlns:a16="http://schemas.microsoft.com/office/drawing/2014/main" val="10005"/>
+                  </a:ext>
+                </a:extLst>
               </a:tr>
             </a:tbl>
           </a:graphicData>
@@ -16104,7 +17036,7 @@
           <a:noFill/>
         </p:spPr>
         <p:txBody>
-          <a:bodyPr wrap="square" lIns="0" rIns="0" tIns="0" bIns="0">
+          <a:bodyPr wrap="square" lIns="0" tIns="0" rIns="0" bIns="0">
             <a:spAutoFit/>
           </a:bodyPr>
           <a:lstStyle/>
@@ -16162,6 +17094,7 @@
           <a:lstStyle/>
           <a:p>
             <a:pPr algn="ctr"/>
+            <a:endParaRPr/>
           </a:p>
         </p:txBody>
       </p:sp>
@@ -16174,7 +17107,7 @@
 </file>
 
 <file path=ppt/slides/slide8.xml><?xml version="1.0" encoding="utf-8"?>
-<p:sld xmlns:a="http://schemas.openxmlformats.org/drawingml/2006/main" xmlns:p="http://schemas.openxmlformats.org/presentationml/2006/main" xmlns:r="http://schemas.openxmlformats.org/officeDocument/2006/relationships">
+<p:sld xmlns:a="http://schemas.openxmlformats.org/drawingml/2006/main" xmlns:r="http://schemas.openxmlformats.org/officeDocument/2006/relationships" xmlns:p="http://schemas.openxmlformats.org/presentationml/2006/main">
   <p:cSld>
     <p:spTree>
       <p:nvGrpSpPr>
@@ -16182,7 +17115,14 @@
         <p:cNvGrpSpPr/>
         <p:nvPr/>
       </p:nvGrpSpPr>
-      <p:grpSpPr/>
+      <p:grpSpPr>
+        <a:xfrm>
+          <a:off x="0" y="0"/>
+          <a:ext cx="0" cy="0"/>
+          <a:chOff x="0" y="0"/>
+          <a:chExt cx="0" cy="0"/>
+        </a:xfrm>
+      </p:grpSpPr>
       <p:sp>
         <p:nvSpPr>
           <p:cNvPr id="2" name="TextBox 1"/>
@@ -16200,7 +17140,7 @@
           <a:noFill/>
         </p:spPr>
         <p:txBody>
-          <a:bodyPr wrap="square" lIns="0" rIns="0" tIns="0" bIns="0">
+          <a:bodyPr wrap="square" lIns="0" tIns="0" rIns="0" bIns="0">
             <a:spAutoFit/>
           </a:bodyPr>
           <a:lstStyle/>
@@ -16234,7 +17174,7 @@
           <a:noFill/>
         </p:spPr>
         <p:txBody>
-          <a:bodyPr wrap="square" lIns="0" rIns="0" tIns="0" bIns="0">
+          <a:bodyPr wrap="square" lIns="0" tIns="0" rIns="0" bIns="0">
             <a:spAutoFit/>
           </a:bodyPr>
           <a:lstStyle/>
@@ -16268,7 +17208,7 @@
           <a:noFill/>
         </p:spPr>
         <p:txBody>
-          <a:bodyPr wrap="square" lIns="0" rIns="0" tIns="0" bIns="0">
+          <a:bodyPr wrap="square" lIns="0" tIns="0" rIns="0" bIns="0">
             <a:spAutoFit/>
           </a:bodyPr>
           <a:lstStyle/>
@@ -16303,7 +17243,7 @@
           <a:noFill/>
         </p:spPr>
         <p:txBody>
-          <a:bodyPr wrap="square" lIns="0" rIns="0" tIns="0" bIns="0">
+          <a:bodyPr wrap="square" lIns="0" tIns="0" rIns="0" bIns="0">
             <a:spAutoFit/>
           </a:bodyPr>
           <a:lstStyle/>
@@ -16337,7 +17277,7 @@
           <a:noFill/>
         </p:spPr>
         <p:txBody>
-          <a:bodyPr wrap="square" lIns="0" rIns="0" tIns="0" bIns="0">
+          <a:bodyPr wrap="square" lIns="0" tIns="0" rIns="0" bIns="0">
             <a:spAutoFit/>
           </a:bodyPr>
           <a:lstStyle/>
@@ -16373,13 +17313,25 @@
                 <a:tableStyleId>{5C22544A-7EE6-4342-B048-85BDC9FD1C3A}</a:tableStyleId>
               </a:tblPr>
               <a:tblGrid>
-                <a:gridCol w="1026215"/>
-                <a:gridCol w="10031624"/>
+                <a:gridCol w="1026215">
+                  <a:extLst>
+                    <a:ext uri="{9D8B030D-6E8A-4147-A177-3AD203B41FA5}">
+                      <a16:colId xmlns:a16="http://schemas.microsoft.com/office/drawing/2014/main" val="20000"/>
+                    </a:ext>
+                  </a:extLst>
+                </a:gridCol>
+                <a:gridCol w="10031624">
+                  <a:extLst>
+                    <a:ext uri="{9D8B030D-6E8A-4147-A177-3AD203B41FA5}">
+                      <a16:colId xmlns:a16="http://schemas.microsoft.com/office/drawing/2014/main" val="20001"/>
+                    </a:ext>
+                  </a:extLst>
+                </a:gridCol>
               </a:tblGrid>
               <a:tr h="321818">
                 <a:tc>
                   <a:txBody>
-                    <a:bodyPr wrap="square"/>
+                    <a:bodyPr/>
                     <a:lstStyle/>
                     <a:p>
                       <a:pPr algn="ctr"/>
@@ -16402,7 +17354,7 @@
                 </a:tc>
                 <a:tc>
                   <a:txBody>
-                    <a:bodyPr wrap="square"/>
+                    <a:bodyPr/>
                     <a:lstStyle/>
                     <a:p>
                       <a:pPr algn="ctr"/>
@@ -16423,11 +17375,16 @@
                     </a:solidFill>
                   </a:tcPr>
                 </a:tc>
+                <a:extLst>
+                  <a:ext uri="{0D108BD9-81ED-4DB2-BD59-A6C34878D82A}">
+                    <a16:rowId xmlns:a16="http://schemas.microsoft.com/office/drawing/2014/main" val="10000"/>
+                  </a:ext>
+                </a:extLst>
               </a:tr>
               <a:tr h="321818">
                 <a:tc>
                   <a:txBody>
-                    <a:bodyPr wrap="square"/>
+                    <a:bodyPr/>
                     <a:lstStyle/>
                     <a:p>
                       <a:pPr algn="ctr"/>
@@ -16450,7 +17407,7 @@
                 </a:tc>
                 <a:tc>
                   <a:txBody>
-                    <a:bodyPr wrap="square"/>
+                    <a:bodyPr/>
                     <a:lstStyle/>
                     <a:p>
                       <a:pPr algn="l"/>
@@ -16471,11 +17428,16 @@
                     </a:solidFill>
                   </a:tcPr>
                 </a:tc>
+                <a:extLst>
+                  <a:ext uri="{0D108BD9-81ED-4DB2-BD59-A6C34878D82A}">
+                    <a16:rowId xmlns:a16="http://schemas.microsoft.com/office/drawing/2014/main" val="10001"/>
+                  </a:ext>
+                </a:extLst>
               </a:tr>
               <a:tr h="321818">
                 <a:tc>
                   <a:txBody>
-                    <a:bodyPr wrap="square"/>
+                    <a:bodyPr/>
                     <a:lstStyle/>
                     <a:p>
                       <a:pPr algn="ctr"/>
@@ -16498,7 +17460,7 @@
                 </a:tc>
                 <a:tc>
                   <a:txBody>
-                    <a:bodyPr wrap="square"/>
+                    <a:bodyPr/>
                     <a:lstStyle/>
                     <a:p>
                       <a:pPr algn="l"/>
@@ -16519,11 +17481,16 @@
                     </a:solidFill>
                   </a:tcPr>
                 </a:tc>
+                <a:extLst>
+                  <a:ext uri="{0D108BD9-81ED-4DB2-BD59-A6C34878D82A}">
+                    <a16:rowId xmlns:a16="http://schemas.microsoft.com/office/drawing/2014/main" val="10002"/>
+                  </a:ext>
+                </a:extLst>
               </a:tr>
               <a:tr h="321818">
                 <a:tc>
                   <a:txBody>
-                    <a:bodyPr wrap="square"/>
+                    <a:bodyPr/>
                     <a:lstStyle/>
                     <a:p>
                       <a:pPr algn="ctr"/>
@@ -16546,7 +17513,7 @@
                 </a:tc>
                 <a:tc>
                   <a:txBody>
-                    <a:bodyPr wrap="square"/>
+                    <a:bodyPr/>
                     <a:lstStyle/>
                     <a:p>
                       <a:pPr algn="l"/>
@@ -16567,6 +17534,11 @@
                     </a:solidFill>
                   </a:tcPr>
                 </a:tc>
+                <a:extLst>
+                  <a:ext uri="{0D108BD9-81ED-4DB2-BD59-A6C34878D82A}">
+                    <a16:rowId xmlns:a16="http://schemas.microsoft.com/office/drawing/2014/main" val="10003"/>
+                  </a:ext>
+                </a:extLst>
               </a:tr>
             </a:tbl>
           </a:graphicData>
@@ -16589,7 +17561,7 @@
           <a:noFill/>
         </p:spPr>
         <p:txBody>
-          <a:bodyPr wrap="square" lIns="0" rIns="0" tIns="0" bIns="0">
+          <a:bodyPr wrap="square" lIns="0" tIns="0" rIns="0" bIns="0">
             <a:spAutoFit/>
           </a:bodyPr>
           <a:lstStyle/>
@@ -16647,6 +17619,7 @@
           <a:lstStyle/>
           <a:p>
             <a:pPr algn="ctr"/>
+            <a:endParaRPr/>
           </a:p>
         </p:txBody>
       </p:sp>
@@ -16659,7 +17632,7 @@
 </file>
 
 <file path=ppt/slides/slide9.xml><?xml version="1.0" encoding="utf-8"?>
-<p:sld xmlns:a="http://schemas.openxmlformats.org/drawingml/2006/main" xmlns:p="http://schemas.openxmlformats.org/presentationml/2006/main" xmlns:r="http://schemas.openxmlformats.org/officeDocument/2006/relationships">
+<p:sld xmlns:a="http://schemas.openxmlformats.org/drawingml/2006/main" xmlns:r="http://schemas.openxmlformats.org/officeDocument/2006/relationships" xmlns:p="http://schemas.openxmlformats.org/presentationml/2006/main">
   <p:cSld>
     <p:spTree>
       <p:nvGrpSpPr>
@@ -16667,7 +17640,14 @@
         <p:cNvGrpSpPr/>
         <p:nvPr/>
       </p:nvGrpSpPr>
-      <p:grpSpPr/>
+      <p:grpSpPr>
+        <a:xfrm>
+          <a:off x="0" y="0"/>
+          <a:ext cx="0" cy="0"/>
+          <a:chOff x="0" y="0"/>
+          <a:chExt cx="0" cy="0"/>
+        </a:xfrm>
+      </p:grpSpPr>
       <p:sp>
         <p:nvSpPr>
           <p:cNvPr id="2" name="TextBox 1"/>
@@ -16685,7 +17665,7 @@
           <a:noFill/>
         </p:spPr>
         <p:txBody>
-          <a:bodyPr wrap="square" lIns="0" rIns="0" tIns="0" bIns="0">
+          <a:bodyPr wrap="square" lIns="0" tIns="0" rIns="0" bIns="0">
             <a:spAutoFit/>
           </a:bodyPr>
           <a:lstStyle/>
@@ -16719,7 +17699,7 @@
           <a:noFill/>
         </p:spPr>
         <p:txBody>
-          <a:bodyPr wrap="square" lIns="0" rIns="0" tIns="0" bIns="0">
+          <a:bodyPr wrap="square" lIns="0" tIns="0" rIns="0" bIns="0">
             <a:spAutoFit/>
           </a:bodyPr>
           <a:lstStyle/>
@@ -16753,7 +17733,7 @@
           <a:noFill/>
         </p:spPr>
         <p:txBody>
-          <a:bodyPr wrap="square" lIns="0" rIns="0" tIns="0" bIns="0">
+          <a:bodyPr wrap="square" lIns="0" tIns="0" rIns="0" bIns="0">
             <a:spAutoFit/>
           </a:bodyPr>
           <a:lstStyle/>
@@ -16788,7 +17768,7 @@
           <a:noFill/>
         </p:spPr>
         <p:txBody>
-          <a:bodyPr wrap="square" lIns="0" rIns="0" tIns="0" bIns="0">
+          <a:bodyPr wrap="square" lIns="0" tIns="0" rIns="0" bIns="0">
             <a:spAutoFit/>
           </a:bodyPr>
           <a:lstStyle/>
@@ -16811,11 +17791,17 @@
           <p:cNvGraphicFramePr>
             <a:graphicFrameLocks noGrp="1"/>
           </p:cNvGraphicFramePr>
-          <p:nvPr/>
+          <p:nvPr>
+            <p:extLst>
+              <p:ext uri="{D42A27DB-BD31-4B8C-83A1-F6EECF244321}">
+                <p14:modId xmlns:p14="http://schemas.microsoft.com/office/powerpoint/2010/main" val="4240261816"/>
+              </p:ext>
+            </p:extLst>
+          </p:nvPr>
         </p:nvGraphicFramePr>
         <p:xfrm>
           <a:off x="566928" y="1709928"/>
-          <a:ext cx="11057839" cy="3155950"/>
+          <a:ext cx="11057839" cy="3280410"/>
         </p:xfrm>
         <a:graphic>
           <a:graphicData uri="http://schemas.openxmlformats.org/drawingml/2006/table">
@@ -16824,15 +17810,39 @@
                 <a:tableStyleId>{5C22544A-7EE6-4342-B048-85BDC9FD1C3A}</a:tableStyleId>
               </a:tblPr>
               <a:tblGrid>
-                <a:gridCol w="1203706"/>
-                <a:gridCol w="1652378"/>
-                <a:gridCol w="5176903"/>
-                <a:gridCol w="3024852"/>
+                <a:gridCol w="1333053">
+                  <a:extLst>
+                    <a:ext uri="{9D8B030D-6E8A-4147-A177-3AD203B41FA5}">
+                      <a16:colId xmlns:a16="http://schemas.microsoft.com/office/drawing/2014/main" val="20000"/>
+                    </a:ext>
+                  </a:extLst>
+                </a:gridCol>
+                <a:gridCol w="1523031">
+                  <a:extLst>
+                    <a:ext uri="{9D8B030D-6E8A-4147-A177-3AD203B41FA5}">
+                      <a16:colId xmlns:a16="http://schemas.microsoft.com/office/drawing/2014/main" val="20001"/>
+                    </a:ext>
+                  </a:extLst>
+                </a:gridCol>
+                <a:gridCol w="5176903">
+                  <a:extLst>
+                    <a:ext uri="{9D8B030D-6E8A-4147-A177-3AD203B41FA5}">
+                      <a16:colId xmlns:a16="http://schemas.microsoft.com/office/drawing/2014/main" val="20002"/>
+                    </a:ext>
+                  </a:extLst>
+                </a:gridCol>
+                <a:gridCol w="3024852">
+                  <a:extLst>
+                    <a:ext uri="{9D8B030D-6E8A-4147-A177-3AD203B41FA5}">
+                      <a16:colId xmlns:a16="http://schemas.microsoft.com/office/drawing/2014/main" val="20003"/>
+                    </a:ext>
+                  </a:extLst>
+                </a:gridCol>
               </a:tblGrid>
               <a:tr h="579628">
                 <a:tc>
                   <a:txBody>
-                    <a:bodyPr wrap="square"/>
+                    <a:bodyPr/>
                     <a:lstStyle/>
                     <a:p>
                       <a:pPr algn="ctr"/>
@@ -16855,7 +17865,7 @@
                 </a:tc>
                 <a:tc>
                   <a:txBody>
-                    <a:bodyPr wrap="square"/>
+                    <a:bodyPr/>
                     <a:lstStyle/>
                     <a:p>
                       <a:pPr algn="ctr"/>
@@ -16878,7 +17888,7 @@
                 </a:tc>
                 <a:tc>
                   <a:txBody>
-                    <a:bodyPr wrap="square"/>
+                    <a:bodyPr/>
                     <a:lstStyle/>
                     <a:p>
                       <a:pPr algn="ctr"/>
@@ -16901,7 +17911,7 @@
                 </a:tc>
                 <a:tc>
                   <a:txBody>
-                    <a:bodyPr wrap="square"/>
+                    <a:bodyPr/>
                     <a:lstStyle/>
                     <a:p>
                       <a:pPr algn="ctr"/>
@@ -16922,11 +17932,16 @@
                     </a:solidFill>
                   </a:tcPr>
                 </a:tc>
+                <a:extLst>
+                  <a:ext uri="{0D108BD9-81ED-4DB2-BD59-A6C34878D82A}">
+                    <a16:rowId xmlns:a16="http://schemas.microsoft.com/office/drawing/2014/main" val="10000"/>
+                  </a:ext>
+                </a:extLst>
               </a:tr>
               <a:tr h="837438">
                 <a:tc>
                   <a:txBody>
-                    <a:bodyPr wrap="square"/>
+                    <a:bodyPr/>
                     <a:lstStyle/>
                     <a:p>
                       <a:pPr algn="ctr"/>
@@ -16949,7 +17964,7 @@
                 </a:tc>
                 <a:tc>
                   <a:txBody>
-                    <a:bodyPr wrap="square"/>
+                    <a:bodyPr/>
                     <a:lstStyle/>
                     <a:p>
                       <a:pPr algn="l"/>
@@ -16973,18 +17988,90 @@
                 </a:tc>
                 <a:tc>
                   <a:txBody>
-                    <a:bodyPr wrap="square"/>
+                    <a:bodyPr/>
                     <a:lstStyle/>
                     <a:p>
                       <a:pPr algn="l"/>
                       <a:r>
-                        <a:rPr sz="1400" b="0">
-                          <a:solidFill>
-                            <a:srgbClr val="22303F"/>
-                          </a:solidFill>
-                          <a:latin typeface="Microsoft JhengHei"/>
-                        </a:rPr>
-                        <a:t>v8.5 LTS Launch @ 2024-12；Community 維護 2027-12-19／延伸 2028-12-19，Enterprise 維護 2029-12-19／延伸 2030-12-19</a:t>
+                        <a:rPr sz="1400" b="0" dirty="0">
+                          <a:solidFill>
+                            <a:srgbClr val="22303F"/>
+                          </a:solidFill>
+                          <a:latin typeface="Microsoft JhengHei"/>
+                        </a:rPr>
+                        <a:t>v8.5 LTS Launch @ 2024-12；</a:t>
+                      </a:r>
+                      <a:endParaRPr lang="en-US" sz="1400" b="0" dirty="0">
+                        <a:solidFill>
+                          <a:srgbClr val="22303F"/>
+                        </a:solidFill>
+                        <a:latin typeface="Microsoft JhengHei"/>
+                      </a:endParaRPr>
+                    </a:p>
+                    <a:p>
+                      <a:pPr algn="l"/>
+                      <a:r>
+                        <a:rPr sz="1400" b="0" dirty="0">
+                          <a:solidFill>
+                            <a:srgbClr val="22303F"/>
+                          </a:solidFill>
+                          <a:latin typeface="Microsoft JhengHei"/>
+                        </a:rPr>
+                        <a:t>Community </a:t>
+                      </a:r>
+                      <a:r>
+                        <a:rPr sz="1400" b="0" dirty="0" err="1">
+                          <a:solidFill>
+                            <a:srgbClr val="22303F"/>
+                          </a:solidFill>
+                          <a:latin typeface="Microsoft JhengHei"/>
+                        </a:rPr>
+                        <a:t>維護</a:t>
+                      </a:r>
+                      <a:r>
+                        <a:rPr sz="1400" b="0" dirty="0">
+                          <a:solidFill>
+                            <a:srgbClr val="22303F"/>
+                          </a:solidFill>
+                          <a:latin typeface="Microsoft JhengHei"/>
+                        </a:rPr>
+                        <a:t> 2027-12-19／延伸 2028-12-19，</a:t>
+                      </a:r>
+                      <a:endParaRPr lang="en-US" sz="1400" b="0" dirty="0">
+                        <a:solidFill>
+                          <a:srgbClr val="22303F"/>
+                        </a:solidFill>
+                        <a:latin typeface="Microsoft JhengHei"/>
+                      </a:endParaRPr>
+                    </a:p>
+                    <a:p>
+                      <a:pPr algn="l"/>
+                      <a:r>
+                        <a:rPr sz="1400" b="0" dirty="0">
+                          <a:solidFill>
+                            <a:srgbClr val="22303F"/>
+                          </a:solidFill>
+                          <a:latin typeface="Microsoft JhengHei"/>
+                        </a:rPr>
+                        <a:t>Enterprise </a:t>
+                      </a:r>
+                      <a:r>
+                        <a:rPr sz="1400" b="0" dirty="0" err="1">
+                          <a:solidFill>
+                            <a:srgbClr val="22303F"/>
+                          </a:solidFill>
+                          <a:latin typeface="Microsoft JhengHei"/>
+                        </a:rPr>
+                        <a:t>維護</a:t>
+                      </a:r>
+                      <a:r>
+                        <a:rPr sz="1400" b="0" dirty="0">
+                          <a:solidFill>
+                            <a:srgbClr val="22303F"/>
+                          </a:solidFill>
+                          <a:latin typeface="Microsoft JhengHei"/>
+                        </a:rPr>
+                        <a:t> 2029-12-19／延伸 2030-12-19</a:t>
                       </a:r>
                     </a:p>
                   </a:txBody>
@@ -16996,19 +18083,25 @@
                 </a:tc>
                 <a:tc>
                   <a:txBody>
-                    <a:bodyPr wrap="square"/>
+                    <a:bodyPr/>
                     <a:lstStyle/>
                     <a:p>
                       <a:pPr algn="l"/>
                       <a:r>
-                        <a:rPr sz="1400" b="0">
-                          <a:solidFill>
-                            <a:srgbClr val="22303F"/>
-                          </a:solidFill>
-                          <a:latin typeface="Microsoft JhengHei"/>
-                        </a:rPr>
-                        <a:t>台灣時區／語言、P1 事故的回應與解決時限、根因分析、升級及現場協作</a:t>
-                      </a:r>
+                        <a:rPr sz="1400" b="0" dirty="0" err="1">
+                          <a:solidFill>
+                            <a:srgbClr val="22303F"/>
+                          </a:solidFill>
+                          <a:latin typeface="Microsoft JhengHei"/>
+                        </a:rPr>
+                        <a:t>台灣時區／語言、事故的回應與解決時限、根因分析、升級及現場協作</a:t>
+                      </a:r>
+                      <a:endParaRPr sz="1400" b="0" dirty="0">
+                        <a:solidFill>
+                          <a:srgbClr val="22303F"/>
+                        </a:solidFill>
+                        <a:latin typeface="Microsoft JhengHei"/>
+                      </a:endParaRPr>
                     </a:p>
                   </a:txBody>
                   <a:tcPr marL="64008" marR="64008" marT="32004" marB="32004" anchor="ctr">
@@ -17017,11 +18110,16 @@
                     </a:solidFill>
                   </a:tcPr>
                 </a:tc>
+                <a:extLst>
+                  <a:ext uri="{0D108BD9-81ED-4DB2-BD59-A6C34878D82A}">
+                    <a16:rowId xmlns:a16="http://schemas.microsoft.com/office/drawing/2014/main" val="10001"/>
+                  </a:ext>
+                </a:extLst>
               </a:tr>
               <a:tr h="579628">
                 <a:tc>
                   <a:txBody>
-                    <a:bodyPr wrap="square"/>
+                    <a:bodyPr/>
                     <a:lstStyle/>
                     <a:p>
                       <a:pPr algn="ctr"/>
@@ -17044,7 +18142,7 @@
                 </a:tc>
                 <a:tc>
                   <a:txBody>
-                    <a:bodyPr wrap="square"/>
+                    <a:bodyPr/>
                     <a:lstStyle/>
                     <a:p>
                       <a:pPr algn="l"/>
@@ -17068,7 +18166,7 @@
                 </a:tc>
                 <a:tc>
                   <a:txBody>
-                    <a:bodyPr wrap="square"/>
+                    <a:bodyPr/>
                     <a:lstStyle/>
                     <a:p>
                       <a:pPr algn="l"/>
@@ -17091,7 +18189,7 @@
                 </a:tc>
                 <a:tc>
                   <a:txBody>
-                    <a:bodyPr wrap="square"/>
+                    <a:bodyPr/>
                     <a:lstStyle/>
                     <a:p>
                       <a:pPr algn="l"/>
@@ -17121,11 +18219,16 @@
                     </a:solidFill>
                   </a:tcPr>
                 </a:tc>
+                <a:extLst>
+                  <a:ext uri="{0D108BD9-81ED-4DB2-BD59-A6C34878D82A}">
+                    <a16:rowId xmlns:a16="http://schemas.microsoft.com/office/drawing/2014/main" val="10002"/>
+                  </a:ext>
+                </a:extLst>
               </a:tr>
               <a:tr h="579628">
                 <a:tc>
                   <a:txBody>
-                    <a:bodyPr wrap="square"/>
+                    <a:bodyPr/>
                     <a:lstStyle/>
                     <a:p>
                       <a:pPr algn="ctr"/>
@@ -17148,7 +18251,7 @@
                 </a:tc>
                 <a:tc>
                   <a:txBody>
-                    <a:bodyPr wrap="square"/>
+                    <a:bodyPr/>
                     <a:lstStyle/>
                     <a:p>
                       <a:pPr algn="l"/>
@@ -17172,7 +18275,7 @@
                 </a:tc>
                 <a:tc>
                   <a:txBody>
-                    <a:bodyPr wrap="square"/>
+                    <a:bodyPr/>
                     <a:lstStyle/>
                     <a:p>
                       <a:pPr algn="l"/>
@@ -17195,7 +18298,7 @@
                 </a:tc>
                 <a:tc>
                   <a:txBody>
-                    <a:bodyPr wrap="square"/>
+                    <a:bodyPr/>
                     <a:lstStyle/>
                     <a:p>
                       <a:pPr algn="l"/>
@@ -17216,11 +18319,16 @@
                     </a:solidFill>
                   </a:tcPr>
                 </a:tc>
+                <a:extLst>
+                  <a:ext uri="{0D108BD9-81ED-4DB2-BD59-A6C34878D82A}">
+                    <a16:rowId xmlns:a16="http://schemas.microsoft.com/office/drawing/2014/main" val="10003"/>
+                  </a:ext>
+                </a:extLst>
               </a:tr>
               <a:tr h="579628">
                 <a:tc>
                   <a:txBody>
-                    <a:bodyPr wrap="square"/>
+                    <a:bodyPr/>
                     <a:lstStyle/>
                     <a:p>
                       <a:pPr algn="ctr"/>
@@ -17243,7 +18351,7 @@
                 </a:tc>
                 <a:tc>
                   <a:txBody>
-                    <a:bodyPr wrap="square"/>
+                    <a:bodyPr/>
                     <a:lstStyle/>
                     <a:p>
                       <a:pPr algn="l"/>
@@ -17267,7 +18375,7 @@
                 </a:tc>
                 <a:tc>
                   <a:txBody>
-                    <a:bodyPr wrap="square"/>
+                    <a:bodyPr/>
                     <a:lstStyle/>
                     <a:p>
                       <a:pPr algn="l"/>
@@ -17290,19 +18398,61 @@
                 </a:tc>
                 <a:tc>
                   <a:txBody>
-                    <a:bodyPr wrap="square"/>
+                    <a:bodyPr/>
                     <a:lstStyle/>
                     <a:p>
                       <a:pPr algn="l"/>
                       <a:r>
-                        <a:rPr sz="1400" b="0">
-                          <a:solidFill>
-                            <a:srgbClr val="22303F"/>
-                          </a:solidFill>
-                          <a:latin typeface="Microsoft JhengHei"/>
-                        </a:rPr>
-                        <a:t>同 YugabyteDB 困境</a:t>
-                      </a:r>
+                        <a:rPr sz="1400" b="0" dirty="0" err="1">
+                          <a:solidFill>
+                            <a:srgbClr val="22303F"/>
+                          </a:solidFill>
+                          <a:latin typeface="Microsoft JhengHei"/>
+                        </a:rPr>
+                        <a:t>同</a:t>
+                      </a:r>
+                      <a:r>
+                        <a:rPr sz="1400" b="0" dirty="0">
+                          <a:solidFill>
+                            <a:srgbClr val="22303F"/>
+                          </a:solidFill>
+                          <a:latin typeface="Microsoft JhengHei"/>
+                        </a:rPr>
+                        <a:t> </a:t>
+                      </a:r>
+                      <a:r>
+                        <a:rPr sz="1400" b="0" dirty="0" err="1">
+                          <a:solidFill>
+                            <a:srgbClr val="22303F"/>
+                          </a:solidFill>
+                          <a:latin typeface="Microsoft JhengHei"/>
+                        </a:rPr>
+                        <a:t>YugabyteDB</a:t>
+                      </a:r>
+                      <a:r>
+                        <a:rPr sz="1400" b="0" dirty="0">
+                          <a:solidFill>
+                            <a:srgbClr val="22303F"/>
+                          </a:solidFill>
+                          <a:latin typeface="Microsoft JhengHei"/>
+                        </a:rPr>
+                        <a:t> </a:t>
+                      </a:r>
+                      <a:r>
+                        <a:rPr sz="1400" b="0" dirty="0" err="1">
+                          <a:solidFill>
+                            <a:srgbClr val="22303F"/>
+                          </a:solidFill>
+                          <a:latin typeface="Microsoft JhengHei"/>
+                        </a:rPr>
+                        <a:t>困境</a:t>
+                      </a:r>
+                      <a:endParaRPr sz="1400" b="0" dirty="0">
+                        <a:solidFill>
+                          <a:srgbClr val="22303F"/>
+                        </a:solidFill>
+                        <a:latin typeface="Microsoft JhengHei"/>
+                      </a:endParaRPr>
                     </a:p>
                   </a:txBody>
                   <a:tcPr marL="64008" marR="64008" marT="32004" marB="32004" anchor="ctr">
@@ -17311,6 +18461,11 @@
                     </a:solidFill>
                   </a:tcPr>
                 </a:tc>
+                <a:extLst>
+                  <a:ext uri="{0D108BD9-81ED-4DB2-BD59-A6C34878D82A}">
+                    <a16:rowId xmlns:a16="http://schemas.microsoft.com/office/drawing/2014/main" val="10004"/>
+                  </a:ext>
+                </a:extLst>
               </a:tr>
             </a:tbl>
           </a:graphicData>
@@ -17333,7 +18488,7 @@
           <a:noFill/>
         </p:spPr>
         <p:txBody>
-          <a:bodyPr wrap="square" lIns="0" rIns="0" tIns="0" bIns="0">
+          <a:bodyPr wrap="square" lIns="0" tIns="0" rIns="0" bIns="0">
             <a:spAutoFit/>
           </a:bodyPr>
           <a:lstStyle/>
@@ -17391,6 +18546,7 @@
           <a:lstStyle/>
           <a:p>
             <a:pPr algn="ctr"/>
+            <a:endParaRPr/>
           </a:p>
         </p:txBody>
       </p:sp>

--- a/poc/1_MeetingMinutes/0821_slide.pptx
+++ b/poc/1_MeetingMinutes/0821_slide.pptx
@@ -4,6 +4,9 @@
   <p:sldMasterIdLst>
     <p:sldMasterId id="2147483648" r:id="rId1"/>
   </p:sldMasterIdLst>
+  <p:notesMasterIdLst>
+    <p:notesMasterId r:id="rId22"/>
+  </p:notesMasterIdLst>
   <p:sldIdLst>
     <p:sldId id="256" r:id="rId2"/>
     <p:sldId id="257" r:id="rId3"/>
@@ -142,6 +145,651 @@
 </p:presentation>
 </file>
 
+<file path=ppt/notesMasters/notesMaster1.xml><?xml version="1.0" encoding="utf-8"?>
+<p:notesMaster xmlns:a="http://schemas.openxmlformats.org/drawingml/2006/main" xmlns:r="http://schemas.openxmlformats.org/officeDocument/2006/relationships" xmlns:p="http://schemas.openxmlformats.org/presentationml/2006/main">
+  <p:cSld>
+    <p:bg>
+      <p:bgRef idx="1001">
+        <a:schemeClr val="bg1"/>
+      </p:bgRef>
+    </p:bg>
+    <p:spTree>
+      <p:nvGrpSpPr>
+        <p:cNvPr id="1" name=""/>
+        <p:cNvGrpSpPr/>
+        <p:nvPr/>
+      </p:nvGrpSpPr>
+      <p:grpSpPr>
+        <a:xfrm>
+          <a:off x="0" y="0"/>
+          <a:ext cx="0" cy="0"/>
+          <a:chOff x="0" y="0"/>
+          <a:chExt cx="0" cy="0"/>
+        </a:xfrm>
+      </p:grpSpPr>
+      <p:sp>
+        <p:nvSpPr>
+          <p:cNvPr id="2" name="頁首版面配置區 1"/>
+          <p:cNvSpPr>
+            <a:spLocks noGrp="1"/>
+          </p:cNvSpPr>
+          <p:nvPr>
+            <p:ph type="hdr" sz="quarter"/>
+          </p:nvPr>
+        </p:nvSpPr>
+        <p:spPr>
+          <a:xfrm>
+            <a:off x="0" y="0"/>
+            <a:ext cx="2971800" cy="458788"/>
+          </a:xfrm>
+          <a:prstGeom prst="rect">
+            <a:avLst/>
+          </a:prstGeom>
+        </p:spPr>
+        <p:txBody>
+          <a:bodyPr vert="horz" lIns="91440" tIns="45720" rIns="91440" bIns="45720" rtlCol="0"/>
+          <a:lstStyle>
+            <a:lvl1pPr algn="l">
+              <a:defRPr sz="1200"/>
+            </a:lvl1pPr>
+          </a:lstStyle>
+          <a:p>
+            <a:endParaRPr kumimoji="1" lang="zh-TW" altLang="en-US"/>
+          </a:p>
+        </p:txBody>
+      </p:sp>
+      <p:sp>
+        <p:nvSpPr>
+          <p:cNvPr id="3" name="日期版面配置區 2"/>
+          <p:cNvSpPr>
+            <a:spLocks noGrp="1"/>
+          </p:cNvSpPr>
+          <p:nvPr>
+            <p:ph type="dt" idx="1"/>
+          </p:nvPr>
+        </p:nvSpPr>
+        <p:spPr>
+          <a:xfrm>
+            <a:off x="3884613" y="0"/>
+            <a:ext cx="2971800" cy="458788"/>
+          </a:xfrm>
+          <a:prstGeom prst="rect">
+            <a:avLst/>
+          </a:prstGeom>
+        </p:spPr>
+        <p:txBody>
+          <a:bodyPr vert="horz" lIns="91440" tIns="45720" rIns="91440" bIns="45720" rtlCol="0"/>
+          <a:lstStyle>
+            <a:lvl1pPr algn="r">
+              <a:defRPr sz="1200"/>
+            </a:lvl1pPr>
+          </a:lstStyle>
+          <a:p>
+            <a:fld id="{0447DE87-9D03-8F49-85F2-F0D36C2C3E61}" type="datetimeFigureOut">
+              <a:rPr kumimoji="1" lang="zh-TW" altLang="en-US" smtClean="0"/>
+              <a:t>2026/8/21</a:t>
+            </a:fld>
+            <a:endParaRPr kumimoji="1" lang="zh-TW" altLang="en-US"/>
+          </a:p>
+        </p:txBody>
+      </p:sp>
+      <p:sp>
+        <p:nvSpPr>
+          <p:cNvPr id="4" name="投影片影像版面配置區 3"/>
+          <p:cNvSpPr>
+            <a:spLocks noGrp="1" noRot="1" noChangeAspect="1"/>
+          </p:cNvSpPr>
+          <p:nvPr>
+            <p:ph type="sldImg" idx="2"/>
+          </p:nvPr>
+        </p:nvSpPr>
+        <p:spPr>
+          <a:xfrm>
+            <a:off x="685800" y="1143000"/>
+            <a:ext cx="5486400" cy="3086100"/>
+          </a:xfrm>
+          <a:prstGeom prst="rect">
+            <a:avLst/>
+          </a:prstGeom>
+          <a:noFill/>
+          <a:ln w="12700">
+            <a:solidFill>
+              <a:prstClr val="black"/>
+            </a:solidFill>
+          </a:ln>
+        </p:spPr>
+        <p:txBody>
+          <a:bodyPr vert="horz" lIns="91440" tIns="45720" rIns="91440" bIns="45720" rtlCol="0" anchor="ctr"/>
+          <a:lstStyle/>
+          <a:p>
+            <a:endParaRPr lang="zh-TW" altLang="en-US"/>
+          </a:p>
+        </p:txBody>
+      </p:sp>
+      <p:sp>
+        <p:nvSpPr>
+          <p:cNvPr id="5" name="備忘稿版面配置區 4"/>
+          <p:cNvSpPr>
+            <a:spLocks noGrp="1"/>
+          </p:cNvSpPr>
+          <p:nvPr>
+            <p:ph type="body" sz="quarter" idx="3"/>
+          </p:nvPr>
+        </p:nvSpPr>
+        <p:spPr>
+          <a:xfrm>
+            <a:off x="685800" y="4400550"/>
+            <a:ext cx="5486400" cy="3600450"/>
+          </a:xfrm>
+          <a:prstGeom prst="rect">
+            <a:avLst/>
+          </a:prstGeom>
+        </p:spPr>
+        <p:txBody>
+          <a:bodyPr vert="horz" lIns="91440" tIns="45720" rIns="91440" bIns="45720" rtlCol="0"/>
+          <a:lstStyle/>
+          <a:p>
+            <a:pPr lvl="0"/>
+            <a:r>
+              <a:rPr kumimoji="1" lang="zh-TW" altLang="en-US"/>
+              <a:t>按一下以編輯母片文字樣式</a:t>
+            </a:r>
+          </a:p>
+          <a:p>
+            <a:pPr lvl="1"/>
+            <a:r>
+              <a:rPr kumimoji="1" lang="zh-TW" altLang="en-US"/>
+              <a:t>第二層</a:t>
+            </a:r>
+          </a:p>
+          <a:p>
+            <a:pPr lvl="2"/>
+            <a:r>
+              <a:rPr kumimoji="1" lang="zh-TW" altLang="en-US"/>
+              <a:t>第三層</a:t>
+            </a:r>
+          </a:p>
+          <a:p>
+            <a:pPr lvl="3"/>
+            <a:r>
+              <a:rPr kumimoji="1" lang="zh-TW" altLang="en-US"/>
+              <a:t>第四層</a:t>
+            </a:r>
+          </a:p>
+          <a:p>
+            <a:pPr lvl="4"/>
+            <a:r>
+              <a:rPr kumimoji="1" lang="zh-TW" altLang="en-US"/>
+              <a:t>第五層</a:t>
+            </a:r>
+          </a:p>
+        </p:txBody>
+      </p:sp>
+      <p:sp>
+        <p:nvSpPr>
+          <p:cNvPr id="6" name="頁尾版面配置區 5"/>
+          <p:cNvSpPr>
+            <a:spLocks noGrp="1"/>
+          </p:cNvSpPr>
+          <p:nvPr>
+            <p:ph type="ftr" sz="quarter" idx="4"/>
+          </p:nvPr>
+        </p:nvSpPr>
+        <p:spPr>
+          <a:xfrm>
+            <a:off x="0" y="8685213"/>
+            <a:ext cx="2971800" cy="458787"/>
+          </a:xfrm>
+          <a:prstGeom prst="rect">
+            <a:avLst/>
+          </a:prstGeom>
+        </p:spPr>
+        <p:txBody>
+          <a:bodyPr vert="horz" lIns="91440" tIns="45720" rIns="91440" bIns="45720" rtlCol="0" anchor="b"/>
+          <a:lstStyle>
+            <a:lvl1pPr algn="l">
+              <a:defRPr sz="1200"/>
+            </a:lvl1pPr>
+          </a:lstStyle>
+          <a:p>
+            <a:endParaRPr kumimoji="1" lang="zh-TW" altLang="en-US"/>
+          </a:p>
+        </p:txBody>
+      </p:sp>
+      <p:sp>
+        <p:nvSpPr>
+          <p:cNvPr id="7" name="投影片編號版面配置區 6"/>
+          <p:cNvSpPr>
+            <a:spLocks noGrp="1"/>
+          </p:cNvSpPr>
+          <p:nvPr>
+            <p:ph type="sldNum" sz="quarter" idx="5"/>
+          </p:nvPr>
+        </p:nvSpPr>
+        <p:spPr>
+          <a:xfrm>
+            <a:off x="3884613" y="8685213"/>
+            <a:ext cx="2971800" cy="458787"/>
+          </a:xfrm>
+          <a:prstGeom prst="rect">
+            <a:avLst/>
+          </a:prstGeom>
+        </p:spPr>
+        <p:txBody>
+          <a:bodyPr vert="horz" lIns="91440" tIns="45720" rIns="91440" bIns="45720" rtlCol="0" anchor="b"/>
+          <a:lstStyle>
+            <a:lvl1pPr algn="r">
+              <a:defRPr sz="1200"/>
+            </a:lvl1pPr>
+          </a:lstStyle>
+          <a:p>
+            <a:fld id="{87555F2A-F49A-4B47-8680-2E923866E792}" type="slidenum">
+              <a:rPr kumimoji="1" lang="zh-TW" altLang="en-US" smtClean="0"/>
+              <a:t>‹#›</a:t>
+            </a:fld>
+            <a:endParaRPr kumimoji="1" lang="zh-TW" altLang="en-US"/>
+          </a:p>
+        </p:txBody>
+      </p:sp>
+    </p:spTree>
+    <p:extLst>
+      <p:ext uri="{BB962C8B-B14F-4D97-AF65-F5344CB8AC3E}">
+        <p14:creationId xmlns:p14="http://schemas.microsoft.com/office/powerpoint/2010/main" val="2902387896"/>
+      </p:ext>
+    </p:extLst>
+  </p:cSld>
+  <p:clrMap bg1="lt1" tx1="dk1" bg2="lt2" tx2="dk2" accent1="accent1" accent2="accent2" accent3="accent3" accent4="accent4" accent5="accent5" accent6="accent6" hlink="hlink" folHlink="folHlink"/>
+  <p:notesStyle>
+    <a:lvl1pPr marL="0" algn="l" defTabSz="914400" rtl="0" eaLnBrk="1" latinLnBrk="0" hangingPunct="1">
+      <a:defRPr sz="1200" kern="1200">
+        <a:solidFill>
+          <a:schemeClr val="tx1"/>
+        </a:solidFill>
+        <a:latin typeface="+mn-lt"/>
+        <a:ea typeface="+mn-ea"/>
+        <a:cs typeface="+mn-cs"/>
+      </a:defRPr>
+    </a:lvl1pPr>
+    <a:lvl2pPr marL="457200" algn="l" defTabSz="914400" rtl="0" eaLnBrk="1" latinLnBrk="0" hangingPunct="1">
+      <a:defRPr sz="1200" kern="1200">
+        <a:solidFill>
+          <a:schemeClr val="tx1"/>
+        </a:solidFill>
+        <a:latin typeface="+mn-lt"/>
+        <a:ea typeface="+mn-ea"/>
+        <a:cs typeface="+mn-cs"/>
+      </a:defRPr>
+    </a:lvl2pPr>
+    <a:lvl3pPr marL="914400" algn="l" defTabSz="914400" rtl="0" eaLnBrk="1" latinLnBrk="0" hangingPunct="1">
+      <a:defRPr sz="1200" kern="1200">
+        <a:solidFill>
+          <a:schemeClr val="tx1"/>
+        </a:solidFill>
+        <a:latin typeface="+mn-lt"/>
+        <a:ea typeface="+mn-ea"/>
+        <a:cs typeface="+mn-cs"/>
+      </a:defRPr>
+    </a:lvl3pPr>
+    <a:lvl4pPr marL="1371600" algn="l" defTabSz="914400" rtl="0" eaLnBrk="1" latinLnBrk="0" hangingPunct="1">
+      <a:defRPr sz="1200" kern="1200">
+        <a:solidFill>
+          <a:schemeClr val="tx1"/>
+        </a:solidFill>
+        <a:latin typeface="+mn-lt"/>
+        <a:ea typeface="+mn-ea"/>
+        <a:cs typeface="+mn-cs"/>
+      </a:defRPr>
+    </a:lvl4pPr>
+    <a:lvl5pPr marL="1828800" algn="l" defTabSz="914400" rtl="0" eaLnBrk="1" latinLnBrk="0" hangingPunct="1">
+      <a:defRPr sz="1200" kern="1200">
+        <a:solidFill>
+          <a:schemeClr val="tx1"/>
+        </a:solidFill>
+        <a:latin typeface="+mn-lt"/>
+        <a:ea typeface="+mn-ea"/>
+        <a:cs typeface="+mn-cs"/>
+      </a:defRPr>
+    </a:lvl5pPr>
+    <a:lvl6pPr marL="2286000" algn="l" defTabSz="914400" rtl="0" eaLnBrk="1" latinLnBrk="0" hangingPunct="1">
+      <a:defRPr sz="1200" kern="1200">
+        <a:solidFill>
+          <a:schemeClr val="tx1"/>
+        </a:solidFill>
+        <a:latin typeface="+mn-lt"/>
+        <a:ea typeface="+mn-ea"/>
+        <a:cs typeface="+mn-cs"/>
+      </a:defRPr>
+    </a:lvl6pPr>
+    <a:lvl7pPr marL="2743200" algn="l" defTabSz="914400" rtl="0" eaLnBrk="1" latinLnBrk="0" hangingPunct="1">
+      <a:defRPr sz="1200" kern="1200">
+        <a:solidFill>
+          <a:schemeClr val="tx1"/>
+        </a:solidFill>
+        <a:latin typeface="+mn-lt"/>
+        <a:ea typeface="+mn-ea"/>
+        <a:cs typeface="+mn-cs"/>
+      </a:defRPr>
+    </a:lvl7pPr>
+    <a:lvl8pPr marL="3200400" algn="l" defTabSz="914400" rtl="0" eaLnBrk="1" latinLnBrk="0" hangingPunct="1">
+      <a:defRPr sz="1200" kern="1200">
+        <a:solidFill>
+          <a:schemeClr val="tx1"/>
+        </a:solidFill>
+        <a:latin typeface="+mn-lt"/>
+        <a:ea typeface="+mn-ea"/>
+        <a:cs typeface="+mn-cs"/>
+      </a:defRPr>
+    </a:lvl8pPr>
+    <a:lvl9pPr marL="3657600" algn="l" defTabSz="914400" rtl="0" eaLnBrk="1" latinLnBrk="0" hangingPunct="1">
+      <a:defRPr sz="1200" kern="1200">
+        <a:solidFill>
+          <a:schemeClr val="tx1"/>
+        </a:solidFill>
+        <a:latin typeface="+mn-lt"/>
+        <a:ea typeface="+mn-ea"/>
+        <a:cs typeface="+mn-cs"/>
+      </a:defRPr>
+    </a:lvl9pPr>
+  </p:notesStyle>
+</p:notesMaster>
+</file>
+
+<file path=ppt/notesSlides/notesSlide1.xml><?xml version="1.0" encoding="utf-8"?>
+<p:notes xmlns:a="http://schemas.openxmlformats.org/drawingml/2006/main" xmlns:r="http://schemas.openxmlformats.org/officeDocument/2006/relationships" xmlns:p="http://schemas.openxmlformats.org/presentationml/2006/main">
+  <p:cSld>
+    <p:spTree>
+      <p:nvGrpSpPr>
+        <p:cNvPr id="1" name=""/>
+        <p:cNvGrpSpPr/>
+        <p:nvPr/>
+      </p:nvGrpSpPr>
+      <p:grpSpPr>
+        <a:xfrm>
+          <a:off x="0" y="0"/>
+          <a:ext cx="0" cy="0"/>
+          <a:chOff x="0" y="0"/>
+          <a:chExt cx="0" cy="0"/>
+        </a:xfrm>
+      </p:grpSpPr>
+      <p:sp>
+        <p:nvSpPr>
+          <p:cNvPr id="2" name="投影片影像版面配置區 1"/>
+          <p:cNvSpPr>
+            <a:spLocks noGrp="1" noRot="1" noChangeAspect="1"/>
+          </p:cNvSpPr>
+          <p:nvPr>
+            <p:ph type="sldImg"/>
+          </p:nvPr>
+        </p:nvSpPr>
+        <p:spPr/>
+      </p:sp>
+      <p:sp>
+        <p:nvSpPr>
+          <p:cNvPr id="3" name="備忘稿版面配置區 2"/>
+          <p:cNvSpPr>
+            <a:spLocks noGrp="1"/>
+          </p:cNvSpPr>
+          <p:nvPr>
+            <p:ph type="body" idx="1"/>
+          </p:nvPr>
+        </p:nvSpPr>
+        <p:spPr/>
+        <p:txBody>
+          <a:bodyPr/>
+          <a:lstStyle/>
+          <a:p>
+            <a:pPr marL="0" marR="0" lvl="0" indent="0" algn="l" defTabSz="914400" rtl="0" eaLnBrk="1" fontAlgn="auto" latinLnBrk="0" hangingPunct="1">
+              <a:lnSpc>
+                <a:spcPct val="100000"/>
+              </a:lnSpc>
+              <a:spcBef>
+                <a:spcPts val="0"/>
+              </a:spcBef>
+              <a:spcAft>
+                <a:spcPts val="0"/>
+              </a:spcAft>
+              <a:buClrTx/>
+              <a:buSzTx/>
+              <a:buFontTx/>
+              <a:buNone/>
+              <a:tabLst/>
+              <a:defRPr/>
+            </a:pPr>
+            <a:r>
+              <a:rPr kumimoji="1" lang="en-US" altLang="zh-TW" dirty="0"/>
+              <a:t>8/E DBA </a:t>
+            </a:r>
+            <a:r>
+              <a:rPr kumimoji="1" lang="zh-TW" altLang="en-US" dirty="0"/>
+              <a:t>同步比較表對照</a:t>
+            </a:r>
+            <a:endParaRPr kumimoji="1" lang="en-US" altLang="zh-TW" dirty="0"/>
+          </a:p>
+          <a:p>
+            <a:pPr marL="0" marR="0" lvl="0" indent="0" algn="l" defTabSz="914400" rtl="0" eaLnBrk="1" fontAlgn="auto" latinLnBrk="0" hangingPunct="1">
+              <a:lnSpc>
+                <a:spcPct val="100000"/>
+              </a:lnSpc>
+              <a:spcBef>
+                <a:spcPts val="0"/>
+              </a:spcBef>
+              <a:spcAft>
+                <a:spcPts val="0"/>
+              </a:spcAft>
+              <a:buClrTx/>
+              <a:buSzTx/>
+              <a:buFontTx/>
+              <a:buNone/>
+              <a:tabLst/>
+              <a:defRPr/>
+            </a:pPr>
+            <a:r>
+              <a:rPr kumimoji="1" lang="en-US" altLang="zh-TW" dirty="0"/>
+              <a:t>9/M SSD </a:t>
+            </a:r>
+            <a:r>
+              <a:rPr kumimoji="1" lang="zh-TW" altLang="en-US" dirty="0"/>
+              <a:t>主管會議同步</a:t>
+            </a:r>
+            <a:r>
+              <a:rPr kumimoji="1" lang="en-US" altLang="zh-TW" dirty="0"/>
+              <a:t> ; recap </a:t>
+            </a:r>
+            <a:r>
+              <a:rPr kumimoji="1" lang="zh-TW" altLang="en-US" dirty="0"/>
+              <a:t>先前驗證結果</a:t>
+            </a:r>
+            <a:endParaRPr kumimoji="1" lang="en-US" altLang="zh-TW" dirty="0"/>
+          </a:p>
+          <a:p>
+            <a:pPr marL="0" marR="0" lvl="0" indent="0" algn="l" defTabSz="914400" rtl="0" eaLnBrk="1" fontAlgn="auto" latinLnBrk="0" hangingPunct="1">
+              <a:lnSpc>
+                <a:spcPct val="100000"/>
+              </a:lnSpc>
+              <a:spcBef>
+                <a:spcPts val="0"/>
+              </a:spcBef>
+              <a:spcAft>
+                <a:spcPts val="0"/>
+              </a:spcAft>
+              <a:buClrTx/>
+              <a:buSzTx/>
+              <a:buFontTx/>
+              <a:buNone/>
+              <a:tabLst/>
+              <a:defRPr/>
+            </a:pPr>
+            <a:r>
+              <a:rPr kumimoji="1" lang="en-US" altLang="zh-TW" dirty="0"/>
+              <a:t>ITPM Ellen </a:t>
+            </a:r>
+            <a:r>
+              <a:rPr kumimoji="1" lang="zh-TW" altLang="en-US" dirty="0"/>
+              <a:t>取得歷史紀錄</a:t>
+            </a:r>
+            <a:endParaRPr kumimoji="1" lang="en-US" altLang="zh-TW" dirty="0"/>
+          </a:p>
+          <a:p>
+            <a:pPr marL="0" marR="0" lvl="0" indent="0" algn="l" defTabSz="914400" rtl="0" eaLnBrk="1" fontAlgn="auto" latinLnBrk="0" hangingPunct="1">
+              <a:lnSpc>
+                <a:spcPct val="100000"/>
+              </a:lnSpc>
+              <a:spcBef>
+                <a:spcPts val="0"/>
+              </a:spcBef>
+              <a:spcAft>
+                <a:spcPts val="0"/>
+              </a:spcAft>
+              <a:buClrTx/>
+              <a:buSzTx/>
+              <a:buFontTx/>
+              <a:buNone/>
+              <a:tabLst/>
+              <a:defRPr/>
+            </a:pPr>
+            <a:endParaRPr kumimoji="1" lang="en-US" altLang="zh-TW" dirty="0"/>
+          </a:p>
+          <a:p>
+            <a:pPr marL="0" marR="0" lvl="0" indent="0" algn="l" defTabSz="914400" rtl="0" eaLnBrk="1" fontAlgn="auto" latinLnBrk="0" hangingPunct="1">
+              <a:lnSpc>
+                <a:spcPct val="100000"/>
+              </a:lnSpc>
+              <a:spcBef>
+                <a:spcPts val="0"/>
+              </a:spcBef>
+              <a:spcAft>
+                <a:spcPts val="0"/>
+              </a:spcAft>
+              <a:buClrTx/>
+              <a:buSzTx/>
+              <a:buFontTx/>
+              <a:buNone/>
+              <a:tabLst/>
+              <a:defRPr/>
+            </a:pPr>
+            <a:r>
+              <a:rPr kumimoji="1" lang="zh-TW" altLang="en-US" dirty="0"/>
+              <a:t>各團隊主管</a:t>
+            </a:r>
+            <a:r>
+              <a:rPr kumimoji="1" lang="en-US" altLang="zh-TW" dirty="0"/>
+              <a:t> 9 </a:t>
+            </a:r>
+            <a:r>
+              <a:rPr kumimoji="1" lang="zh-TW" altLang="en-US" dirty="0"/>
+              <a:t>月初提前</a:t>
+            </a:r>
+            <a:r>
+              <a:rPr kumimoji="1" lang="en-US" altLang="zh-TW" dirty="0"/>
+              <a:t> pre-view</a:t>
+            </a:r>
+          </a:p>
+          <a:p>
+            <a:pPr marL="0" marR="0" lvl="0" indent="0" algn="l" defTabSz="914400" rtl="0" eaLnBrk="1" fontAlgn="auto" latinLnBrk="0" hangingPunct="1">
+              <a:lnSpc>
+                <a:spcPct val="100000"/>
+              </a:lnSpc>
+              <a:spcBef>
+                <a:spcPts val="0"/>
+              </a:spcBef>
+              <a:spcAft>
+                <a:spcPts val="0"/>
+              </a:spcAft>
+              <a:buClrTx/>
+              <a:buSzTx/>
+              <a:buFontTx/>
+              <a:buNone/>
+              <a:tabLst/>
+              <a:defRPr/>
+            </a:pPr>
+            <a:r>
+              <a:rPr kumimoji="1" lang="en-US" altLang="zh-TW" dirty="0"/>
+              <a:t>Ellen / Tom / Ed / Adam / </a:t>
+            </a:r>
+            <a:r>
+              <a:rPr kumimoji="1" lang="zh-TW" altLang="en-US" dirty="0"/>
+              <a:t>仁智</a:t>
+            </a:r>
+            <a:endParaRPr kumimoji="1" lang="en-US" altLang="zh-TW" dirty="0"/>
+          </a:p>
+          <a:p>
+            <a:pPr marL="0" marR="0" lvl="0" indent="0" algn="l" defTabSz="914400" rtl="0" eaLnBrk="1" fontAlgn="auto" latinLnBrk="0" hangingPunct="1">
+              <a:lnSpc>
+                <a:spcPct val="100000"/>
+              </a:lnSpc>
+              <a:spcBef>
+                <a:spcPts val="0"/>
+              </a:spcBef>
+              <a:spcAft>
+                <a:spcPts val="0"/>
+              </a:spcAft>
+              <a:buClrTx/>
+              <a:buSzTx/>
+              <a:buFontTx/>
+              <a:buNone/>
+              <a:tabLst/>
+              <a:defRPr/>
+            </a:pPr>
+            <a:endParaRPr kumimoji="1" lang="en-US" altLang="zh-TW" dirty="0"/>
+          </a:p>
+          <a:p>
+            <a:pPr marL="0" marR="0" lvl="0" indent="0" algn="l" defTabSz="914400" rtl="0" eaLnBrk="1" fontAlgn="auto" latinLnBrk="0" hangingPunct="1">
+              <a:lnSpc>
+                <a:spcPct val="100000"/>
+              </a:lnSpc>
+              <a:spcBef>
+                <a:spcPts val="0"/>
+              </a:spcBef>
+              <a:spcAft>
+                <a:spcPts val="0"/>
+              </a:spcAft>
+              <a:buClrTx/>
+              <a:buSzTx/>
+              <a:buFontTx/>
+              <a:buNone/>
+              <a:tabLst/>
+              <a:defRPr/>
+            </a:pPr>
+            <a:endParaRPr kumimoji="1" lang="en-US" altLang="zh-TW" dirty="0"/>
+          </a:p>
+        </p:txBody>
+      </p:sp>
+      <p:sp>
+        <p:nvSpPr>
+          <p:cNvPr id="4" name="投影片編號版面配置區 3"/>
+          <p:cNvSpPr>
+            <a:spLocks noGrp="1"/>
+          </p:cNvSpPr>
+          <p:nvPr>
+            <p:ph type="sldNum" sz="quarter" idx="5"/>
+          </p:nvPr>
+        </p:nvSpPr>
+        <p:spPr/>
+        <p:txBody>
+          <a:bodyPr/>
+          <a:lstStyle/>
+          <a:p>
+            <a:fld id="{87555F2A-F49A-4B47-8680-2E923866E792}" type="slidenum">
+              <a:rPr kumimoji="1" lang="zh-TW" altLang="en-US" smtClean="0"/>
+              <a:t>11</a:t>
+            </a:fld>
+            <a:endParaRPr kumimoji="1" lang="zh-TW" altLang="en-US"/>
+          </a:p>
+        </p:txBody>
+      </p:sp>
+    </p:spTree>
+    <p:extLst>
+      <p:ext uri="{BB962C8B-B14F-4D97-AF65-F5344CB8AC3E}">
+        <p14:creationId xmlns:p14="http://schemas.microsoft.com/office/powerpoint/2010/main" val="1821893061"/>
+      </p:ext>
+    </p:extLst>
+  </p:cSld>
+  <p:clrMapOvr>
+    <a:masterClrMapping/>
+  </p:clrMapOvr>
+</p:notes>
+</file>
+
 <file path=ppt/slideLayouts/slideLayout1.xml><?xml version="1.0" encoding="utf-8"?>
 <p:sldLayout xmlns:a="http://schemas.openxmlformats.org/drawingml/2006/main" xmlns:r="http://schemas.openxmlformats.org/officeDocument/2006/relationships" xmlns:p="http://schemas.openxmlformats.org/presentationml/2006/main" type="title" preserve="1">
   <p:cSld name="Title Slide">
@@ -321,7 +969,7 @@
           <a:p>
             <a:fld id="{5BCAD085-E8A6-8845-BD4E-CB4CCA059FC4}" type="datetimeFigureOut">
               <a:rPr lang="en-US" smtClean="0"/>
-              <a:t>8/20/26</a:t>
+              <a:t>8/21/26</a:t>
             </a:fld>
             <a:endParaRPr lang="en-US"/>
           </a:p>
@@ -489,7 +1137,7 @@
           <a:p>
             <a:fld id="{5BCAD085-E8A6-8845-BD4E-CB4CCA059FC4}" type="datetimeFigureOut">
               <a:rPr lang="en-US" smtClean="0"/>
-              <a:t>8/20/26</a:t>
+              <a:t>8/21/26</a:t>
             </a:fld>
             <a:endParaRPr lang="en-US"/>
           </a:p>
@@ -667,7 +1315,7 @@
           <a:p>
             <a:fld id="{5BCAD085-E8A6-8845-BD4E-CB4CCA059FC4}" type="datetimeFigureOut">
               <a:rPr lang="en-US" smtClean="0"/>
-              <a:t>8/20/26</a:t>
+              <a:t>8/21/26</a:t>
             </a:fld>
             <a:endParaRPr lang="en-US"/>
           </a:p>
@@ -835,7 +1483,7 @@
           <a:p>
             <a:fld id="{5BCAD085-E8A6-8845-BD4E-CB4CCA059FC4}" type="datetimeFigureOut">
               <a:rPr lang="en-US" smtClean="0"/>
-              <a:t>8/20/26</a:t>
+              <a:t>8/21/26</a:t>
             </a:fld>
             <a:endParaRPr lang="en-US"/>
           </a:p>
@@ -1080,7 +1728,7 @@
           <a:p>
             <a:fld id="{5BCAD085-E8A6-8845-BD4E-CB4CCA059FC4}" type="datetimeFigureOut">
               <a:rPr lang="en-US" smtClean="0"/>
-              <a:t>8/20/26</a:t>
+              <a:t>8/21/26</a:t>
             </a:fld>
             <a:endParaRPr lang="en-US"/>
           </a:p>
@@ -1365,7 +2013,7 @@
           <a:p>
             <a:fld id="{5BCAD085-E8A6-8845-BD4E-CB4CCA059FC4}" type="datetimeFigureOut">
               <a:rPr lang="en-US" smtClean="0"/>
-              <a:t>8/20/26</a:t>
+              <a:t>8/21/26</a:t>
             </a:fld>
             <a:endParaRPr lang="en-US"/>
           </a:p>
@@ -1784,7 +2432,7 @@
           <a:p>
             <a:fld id="{5BCAD085-E8A6-8845-BD4E-CB4CCA059FC4}" type="datetimeFigureOut">
               <a:rPr lang="en-US" smtClean="0"/>
-              <a:t>8/20/26</a:t>
+              <a:t>8/21/26</a:t>
             </a:fld>
             <a:endParaRPr lang="en-US"/>
           </a:p>
@@ -1901,7 +2549,7 @@
           <a:p>
             <a:fld id="{5BCAD085-E8A6-8845-BD4E-CB4CCA059FC4}" type="datetimeFigureOut">
               <a:rPr lang="en-US" smtClean="0"/>
-              <a:t>8/20/26</a:t>
+              <a:t>8/21/26</a:t>
             </a:fld>
             <a:endParaRPr lang="en-US"/>
           </a:p>
@@ -1996,7 +2644,7 @@
           <a:p>
             <a:fld id="{5BCAD085-E8A6-8845-BD4E-CB4CCA059FC4}" type="datetimeFigureOut">
               <a:rPr lang="en-US" smtClean="0"/>
-              <a:t>8/20/26</a:t>
+              <a:t>8/21/26</a:t>
             </a:fld>
             <a:endParaRPr lang="en-US"/>
           </a:p>
@@ -2271,7 +2919,7 @@
           <a:p>
             <a:fld id="{5BCAD085-E8A6-8845-BD4E-CB4CCA059FC4}" type="datetimeFigureOut">
               <a:rPr lang="en-US" smtClean="0"/>
-              <a:t>8/20/26</a:t>
+              <a:t>8/21/26</a:t>
             </a:fld>
             <a:endParaRPr lang="en-US"/>
           </a:p>
@@ -2523,7 +3171,7 @@
           <a:p>
             <a:fld id="{5BCAD085-E8A6-8845-BD4E-CB4CCA059FC4}" type="datetimeFigureOut">
               <a:rPr lang="en-US" smtClean="0"/>
-              <a:t>8/20/26</a:t>
+              <a:t>8/21/26</a:t>
             </a:fld>
             <a:endParaRPr lang="en-US"/>
           </a:p>
@@ -2734,7 +3382,7 @@
           <a:p>
             <a:fld id="{5BCAD085-E8A6-8845-BD4E-CB4CCA059FC4}" type="datetimeFigureOut">
               <a:rPr lang="en-US" smtClean="0"/>
-              <a:t>8/20/26</a:t>
+              <a:t>8/21/26</a:t>
             </a:fld>
             <a:endParaRPr lang="en-US"/>
           </a:p>
@@ -16749,14 +17397,38 @@
                     <a:p>
                       <a:pPr algn="l"/>
                       <a:r>
-                        <a:rPr sz="1400" b="0">
-                          <a:solidFill>
-                            <a:srgbClr val="22303F"/>
-                          </a:solidFill>
-                          <a:latin typeface="Microsoft JhengHei"/>
-                        </a:rPr>
-                        <a:t>仍須驗 MySQL 語法差異，但協定遷移較小</a:t>
-                      </a:r>
+                        <a:rPr sz="1400" b="0" dirty="0" err="1">
+                          <a:solidFill>
+                            <a:srgbClr val="22303F"/>
+                          </a:solidFill>
+                          <a:latin typeface="Microsoft JhengHei"/>
+                        </a:rPr>
+                        <a:t>仍須驗</a:t>
+                      </a:r>
+                      <a:r>
+                        <a:rPr sz="1400" b="0" dirty="0">
+                          <a:solidFill>
+                            <a:srgbClr val="22303F"/>
+                          </a:solidFill>
+                          <a:latin typeface="Microsoft JhengHei"/>
+                        </a:rPr>
+                        <a:t> MySQL </a:t>
+                      </a:r>
+                      <a:r>
+                        <a:rPr sz="1400" b="0" dirty="0" err="1">
+                          <a:solidFill>
+                            <a:srgbClr val="22303F"/>
+                          </a:solidFill>
+                          <a:latin typeface="Microsoft JhengHei"/>
+                        </a:rPr>
+                        <a:t>語法差異，但協定遷移較小</a:t>
+                      </a:r>
+                      <a:endParaRPr sz="1400" b="0" dirty="0">
+                        <a:solidFill>
+                          <a:srgbClr val="22303F"/>
+                        </a:solidFill>
+                        <a:latin typeface="Microsoft JhengHei"/>
+                      </a:endParaRPr>
                     </a:p>
                   </a:txBody>
                   <a:tcPr marL="64008" marR="64008" marT="32004" marB="32004" anchor="ctr">
@@ -16848,13 +17520,76 @@
                     <a:p>
                       <a:pPr algn="l"/>
                       <a:r>
-                        <a:rPr sz="1400" b="0">
-                          <a:solidFill>
-                            <a:srgbClr val="22303F"/>
-                          </a:solidFill>
-                          <a:latin typeface="Microsoft JhengHei"/>
-                        </a:rPr>
-                        <a:t>TiDB 為計算／儲存分離；PXC 為完整副本與 writeset certification</a:t>
+                        <a:rPr sz="1400" b="0" dirty="0" err="1">
+                          <a:solidFill>
+                            <a:srgbClr val="22303F"/>
+                          </a:solidFill>
+                          <a:latin typeface="Microsoft JhengHei"/>
+                        </a:rPr>
+                        <a:t>TiDB</a:t>
+                      </a:r>
+                      <a:r>
+                        <a:rPr sz="1400" b="0" dirty="0">
+                          <a:solidFill>
+                            <a:srgbClr val="22303F"/>
+                          </a:solidFill>
+                          <a:latin typeface="Microsoft JhengHei"/>
+                        </a:rPr>
+                        <a:t> </a:t>
+                      </a:r>
+                      <a:r>
+                        <a:rPr sz="1400" b="0" dirty="0" err="1">
+                          <a:solidFill>
+                            <a:srgbClr val="22303F"/>
+                          </a:solidFill>
+                          <a:latin typeface="Microsoft JhengHei"/>
+                        </a:rPr>
+                        <a:t>為計算／儲存分離；PXC</a:t>
+                      </a:r>
+                      <a:r>
+                        <a:rPr sz="1400" b="0" dirty="0">
+                          <a:solidFill>
+                            <a:srgbClr val="22303F"/>
+                          </a:solidFill>
+                          <a:latin typeface="Microsoft JhengHei"/>
+                        </a:rPr>
+                        <a:t> </a:t>
+                      </a:r>
+                      <a:r>
+                        <a:rPr sz="1400" b="0" dirty="0" err="1">
+                          <a:solidFill>
+                            <a:srgbClr val="22303F"/>
+                          </a:solidFill>
+                          <a:latin typeface="Microsoft JhengHei"/>
+                        </a:rPr>
+                        <a:t>為完整副本與</a:t>
+                      </a:r>
+                      <a:r>
+                        <a:rPr sz="1400" b="0" dirty="0">
+                          <a:solidFill>
+                            <a:srgbClr val="22303F"/>
+                          </a:solidFill>
+                          <a:latin typeface="Microsoft JhengHei"/>
+                        </a:rPr>
+                        <a:t> </a:t>
+                      </a:r>
+                      <a:r>
+                        <a:rPr sz="1400" b="0" dirty="0" err="1">
+                          <a:solidFill>
+                            <a:srgbClr val="22303F"/>
+                          </a:solidFill>
+                          <a:latin typeface="Microsoft JhengHei"/>
+                        </a:rPr>
+                        <a:t>writeset</a:t>
+                      </a:r>
+                      <a:r>
+                        <a:rPr sz="1400" b="0" dirty="0">
+                          <a:solidFill>
+                            <a:srgbClr val="22303F"/>
+                          </a:solidFill>
+                          <a:latin typeface="Microsoft JhengHei"/>
+                        </a:rPr>
+                        <a:t> certification</a:t>
                       </a:r>
                     </a:p>
                   </a:txBody>
@@ -16993,14 +17728,29 @@
                     <a:p>
                       <a:pPr algn="l"/>
                       <a:r>
-                        <a:rPr sz="1400" b="0">
-                          <a:solidFill>
-                            <a:srgbClr val="22303F"/>
-                          </a:solidFill>
-                          <a:latin typeface="Microsoft JhengHei"/>
-                        </a:rPr>
-                        <a:t>「數量」與「業務關鍵度」必須分開</a:t>
-                      </a:r>
+                        <a:rPr sz="1400" b="0" dirty="0">
+                          <a:solidFill>
+                            <a:srgbClr val="22303F"/>
+                          </a:solidFill>
+                          <a:latin typeface="Microsoft JhengHei"/>
+                        </a:rPr>
+                        <a:t>「</a:t>
+                      </a:r>
+                      <a:r>
+                        <a:rPr sz="1400" b="0" dirty="0" err="1">
+                          <a:solidFill>
+                            <a:srgbClr val="22303F"/>
+                          </a:solidFill>
+                          <a:latin typeface="Microsoft JhengHei"/>
+                        </a:rPr>
+                        <a:t>數量」與「業務關鍵度」必須分開</a:t>
+                      </a:r>
+                      <a:endParaRPr sz="1400" b="0" dirty="0">
+                        <a:solidFill>
+                          <a:srgbClr val="22303F"/>
+                        </a:solidFill>
+                        <a:latin typeface="Microsoft JhengHei"/>
+                      </a:endParaRPr>
                     </a:p>
                   </a:txBody>
                   <a:tcPr marL="64008" marR="64008" marT="32004" marB="32004" anchor="ctr">
@@ -18876,4 +19626,319 @@
   </a:objectDefaults>
   <a:extraClrSchemeLst/>
 </a:theme>
+</file>
+
+<file path=ppt/theme/theme2.xml><?xml version="1.0" encoding="utf-8"?>
+<a:theme xmlns:a="http://schemas.openxmlformats.org/drawingml/2006/main" name="Office 佈景主題">
+  <a:themeElements>
+    <a:clrScheme name="Office">
+      <a:dk1>
+        <a:sysClr val="windowText" lastClr="000000"/>
+      </a:dk1>
+      <a:lt1>
+        <a:sysClr val="window" lastClr="FFFFFF"/>
+      </a:lt1>
+      <a:dk2>
+        <a:srgbClr val="0E2841"/>
+      </a:dk2>
+      <a:lt2>
+        <a:srgbClr val="E8E8E8"/>
+      </a:lt2>
+      <a:accent1>
+        <a:srgbClr val="156082"/>
+      </a:accent1>
+      <a:accent2>
+        <a:srgbClr val="E97132"/>
+      </a:accent2>
+      <a:accent3>
+        <a:srgbClr val="196B24"/>
+      </a:accent3>
+      <a:accent4>
+        <a:srgbClr val="0F9ED5"/>
+      </a:accent4>
+      <a:accent5>
+        <a:srgbClr val="A02B93"/>
+      </a:accent5>
+      <a:accent6>
+        <a:srgbClr val="4EA72E"/>
+      </a:accent6>
+      <a:hlink>
+        <a:srgbClr val="467886"/>
+      </a:hlink>
+      <a:folHlink>
+        <a:srgbClr val="96607D"/>
+      </a:folHlink>
+    </a:clrScheme>
+    <a:fontScheme name="Office">
+      <a:majorFont>
+        <a:latin typeface="Aptos Display" panose="02110004020202020204"/>
+        <a:ea typeface=""/>
+        <a:cs typeface=""/>
+        <a:font script="Jpan" typeface="游ゴシック Light"/>
+        <a:font script="Hang" typeface="맑은 고딕"/>
+        <a:font script="Hans" typeface="等线 Light"/>
+        <a:font script="Hant" typeface="新細明體"/>
+        <a:font script="Arab" typeface="Times New Roman"/>
+        <a:font script="Hebr" typeface="Times New Roman"/>
+        <a:font script="Thai" typeface="Angsana New"/>
+        <a:font script="Ethi" typeface="Nyala"/>
+        <a:font script="Beng" typeface="Vrinda"/>
+        <a:font script="Gujr" typeface="Shruti"/>
+        <a:font script="Khmr" typeface="MoolBoran"/>
+        <a:font script="Knda" typeface="Tunga"/>
+        <a:font script="Guru" typeface="Raavi"/>
+        <a:font script="Cans" typeface="Euphemia"/>
+        <a:font script="Cher" typeface="Plantagenet Cherokee"/>
+        <a:font script="Yiii" typeface="Microsoft Yi Baiti"/>
+        <a:font script="Tibt" typeface="Microsoft Himalaya"/>
+        <a:font script="Thaa" typeface="MV Boli"/>
+        <a:font script="Deva" typeface="Mangal"/>
+        <a:font script="Telu" typeface="Gautami"/>
+        <a:font script="Taml" typeface="Latha"/>
+        <a:font script="Syrc" typeface="Estrangelo Edessa"/>
+        <a:font script="Orya" typeface="Kalinga"/>
+        <a:font script="Mlym" typeface="Kartika"/>
+        <a:font script="Laoo" typeface="DokChampa"/>
+        <a:font script="Sinh" typeface="Iskoola Pota"/>
+        <a:font script="Mong" typeface="Mongolian Baiti"/>
+        <a:font script="Viet" typeface="Times New Roman"/>
+        <a:font script="Uigh" typeface="Microsoft Uighur"/>
+        <a:font script="Geor" typeface="Sylfaen"/>
+        <a:font script="Armn" typeface="Arial"/>
+        <a:font script="Bugi" typeface="Leelawadee UI"/>
+        <a:font script="Bopo" typeface="Microsoft JhengHei"/>
+        <a:font script="Java" typeface="Javanese Text"/>
+        <a:font script="Lisu" typeface="Segoe UI"/>
+        <a:font script="Mymr" typeface="Myanmar Text"/>
+        <a:font script="Nkoo" typeface="Ebrima"/>
+        <a:font script="Olck" typeface="Nirmala UI"/>
+        <a:font script="Osma" typeface="Ebrima"/>
+        <a:font script="Phag" typeface="Phagspa"/>
+        <a:font script="Syrn" typeface="Estrangelo Edessa"/>
+        <a:font script="Syrj" typeface="Estrangelo Edessa"/>
+        <a:font script="Syre" typeface="Estrangelo Edessa"/>
+        <a:font script="Sora" typeface="Nirmala UI"/>
+        <a:font script="Tale" typeface="Microsoft Tai Le"/>
+        <a:font script="Talu" typeface="Microsoft New Tai Lue"/>
+        <a:font script="Tfng" typeface="Ebrima"/>
+      </a:majorFont>
+      <a:minorFont>
+        <a:latin typeface="Aptos" panose="02110004020202020204"/>
+        <a:ea typeface=""/>
+        <a:cs typeface=""/>
+        <a:font script="Jpan" typeface="游ゴシック"/>
+        <a:font script="Hang" typeface="맑은 고딕"/>
+        <a:font script="Hans" typeface="等线"/>
+        <a:font script="Hant" typeface="新細明體"/>
+        <a:font script="Arab" typeface="Arial"/>
+        <a:font script="Hebr" typeface="Arial"/>
+        <a:font script="Thai" typeface="Cordia New"/>
+        <a:font script="Ethi" typeface="Nyala"/>
+        <a:font script="Beng" typeface="Vrinda"/>
+        <a:font script="Gujr" typeface="Shruti"/>
+        <a:font script="Khmr" typeface="DaunPenh"/>
+        <a:font script="Knda" typeface="Tunga"/>
+        <a:font script="Guru" typeface="Raavi"/>
+        <a:font script="Cans" typeface="Euphemia"/>
+        <a:font script="Cher" typeface="Plantagenet Cherokee"/>
+        <a:font script="Yiii" typeface="Microsoft Yi Baiti"/>
+        <a:font script="Tibt" typeface="Microsoft Himalaya"/>
+        <a:font script="Thaa" typeface="MV Boli"/>
+        <a:font script="Deva" typeface="Mangal"/>
+        <a:font script="Telu" typeface="Gautami"/>
+        <a:font script="Taml" typeface="Latha"/>
+        <a:font script="Syrc" typeface="Estrangelo Edessa"/>
+        <a:font script="Orya" typeface="Kalinga"/>
+        <a:font script="Mlym" typeface="Kartika"/>
+        <a:font script="Laoo" typeface="DokChampa"/>
+        <a:font script="Sinh" typeface="Iskoola Pota"/>
+        <a:font script="Mong" typeface="Mongolian Baiti"/>
+        <a:font script="Viet" typeface="Arial"/>
+        <a:font script="Uigh" typeface="Microsoft Uighur"/>
+        <a:font script="Geor" typeface="Sylfaen"/>
+        <a:font script="Armn" typeface="Arial"/>
+        <a:font script="Bugi" typeface="Leelawadee UI"/>
+        <a:font script="Bopo" typeface="Microsoft JhengHei"/>
+        <a:font script="Java" typeface="Javanese Text"/>
+        <a:font script="Lisu" typeface="Segoe UI"/>
+        <a:font script="Mymr" typeface="Myanmar Text"/>
+        <a:font script="Nkoo" typeface="Ebrima"/>
+        <a:font script="Olck" typeface="Nirmala UI"/>
+        <a:font script="Osma" typeface="Ebrima"/>
+        <a:font script="Phag" typeface="Phagspa"/>
+        <a:font script="Syrn" typeface="Estrangelo Edessa"/>
+        <a:font script="Syrj" typeface="Estrangelo Edessa"/>
+        <a:font script="Syre" typeface="Estrangelo Edessa"/>
+        <a:font script="Sora" typeface="Nirmala UI"/>
+        <a:font script="Tale" typeface="Microsoft Tai Le"/>
+        <a:font script="Talu" typeface="Microsoft New Tai Lue"/>
+        <a:font script="Tfng" typeface="Ebrima"/>
+      </a:minorFont>
+    </a:fontScheme>
+    <a:fmtScheme name="Office">
+      <a:fillStyleLst>
+        <a:solidFill>
+          <a:schemeClr val="phClr"/>
+        </a:solidFill>
+        <a:gradFill rotWithShape="1">
+          <a:gsLst>
+            <a:gs pos="0">
+              <a:schemeClr val="phClr">
+                <a:lumMod val="110000"/>
+                <a:satMod val="105000"/>
+                <a:tint val="67000"/>
+              </a:schemeClr>
+            </a:gs>
+            <a:gs pos="50000">
+              <a:schemeClr val="phClr">
+                <a:lumMod val="105000"/>
+                <a:satMod val="103000"/>
+                <a:tint val="73000"/>
+              </a:schemeClr>
+            </a:gs>
+            <a:gs pos="100000">
+              <a:schemeClr val="phClr">
+                <a:lumMod val="105000"/>
+                <a:satMod val="109000"/>
+                <a:tint val="81000"/>
+              </a:schemeClr>
+            </a:gs>
+          </a:gsLst>
+          <a:lin ang="5400000" scaled="0"/>
+        </a:gradFill>
+        <a:gradFill rotWithShape="1">
+          <a:gsLst>
+            <a:gs pos="0">
+              <a:schemeClr val="phClr">
+                <a:satMod val="103000"/>
+                <a:lumMod val="102000"/>
+                <a:tint val="94000"/>
+              </a:schemeClr>
+            </a:gs>
+            <a:gs pos="50000">
+              <a:schemeClr val="phClr">
+                <a:satMod val="110000"/>
+                <a:lumMod val="100000"/>
+                <a:shade val="100000"/>
+              </a:schemeClr>
+            </a:gs>
+            <a:gs pos="100000">
+              <a:schemeClr val="phClr">
+                <a:lumMod val="99000"/>
+                <a:satMod val="120000"/>
+                <a:shade val="78000"/>
+              </a:schemeClr>
+            </a:gs>
+          </a:gsLst>
+          <a:lin ang="5400000" scaled="0"/>
+        </a:gradFill>
+      </a:fillStyleLst>
+      <a:lnStyleLst>
+        <a:ln w="12700" cap="flat" cmpd="sng" algn="ctr">
+          <a:solidFill>
+            <a:schemeClr val="phClr"/>
+          </a:solidFill>
+          <a:prstDash val="solid"/>
+          <a:miter lim="800000"/>
+        </a:ln>
+        <a:ln w="19050" cap="flat" cmpd="sng" algn="ctr">
+          <a:solidFill>
+            <a:schemeClr val="phClr"/>
+          </a:solidFill>
+          <a:prstDash val="solid"/>
+          <a:miter lim="800000"/>
+        </a:ln>
+        <a:ln w="25400" cap="flat" cmpd="sng" algn="ctr">
+          <a:solidFill>
+            <a:schemeClr val="phClr"/>
+          </a:solidFill>
+          <a:prstDash val="solid"/>
+          <a:miter lim="800000"/>
+        </a:ln>
+      </a:lnStyleLst>
+      <a:effectStyleLst>
+        <a:effectStyle>
+          <a:effectLst/>
+        </a:effectStyle>
+        <a:effectStyle>
+          <a:effectLst/>
+        </a:effectStyle>
+        <a:effectStyle>
+          <a:effectLst>
+            <a:outerShdw blurRad="57150" dist="19050" dir="5400000" algn="ctr" rotWithShape="0">
+              <a:srgbClr val="000000">
+                <a:alpha val="63000"/>
+              </a:srgbClr>
+            </a:outerShdw>
+          </a:effectLst>
+        </a:effectStyle>
+      </a:effectStyleLst>
+      <a:bgFillStyleLst>
+        <a:solidFill>
+          <a:schemeClr val="phClr"/>
+        </a:solidFill>
+        <a:solidFill>
+          <a:schemeClr val="phClr">
+            <a:tint val="95000"/>
+            <a:satMod val="170000"/>
+          </a:schemeClr>
+        </a:solidFill>
+        <a:gradFill rotWithShape="1">
+          <a:gsLst>
+            <a:gs pos="0">
+              <a:schemeClr val="phClr">
+                <a:tint val="93000"/>
+                <a:satMod val="150000"/>
+                <a:shade val="98000"/>
+                <a:lumMod val="102000"/>
+              </a:schemeClr>
+            </a:gs>
+            <a:gs pos="50000">
+              <a:schemeClr val="phClr">
+                <a:tint val="98000"/>
+                <a:satMod val="130000"/>
+                <a:shade val="90000"/>
+                <a:lumMod val="103000"/>
+              </a:schemeClr>
+            </a:gs>
+            <a:gs pos="100000">
+              <a:schemeClr val="phClr">
+                <a:shade val="63000"/>
+                <a:satMod val="120000"/>
+              </a:schemeClr>
+            </a:gs>
+          </a:gsLst>
+          <a:lin ang="5400000" scaled="0"/>
+        </a:gradFill>
+      </a:bgFillStyleLst>
+    </a:fmtScheme>
+  </a:themeElements>
+  <a:objectDefaults>
+    <a:lnDef>
+      <a:spPr/>
+      <a:bodyPr/>
+      <a:lstStyle/>
+      <a:style>
+        <a:lnRef idx="2">
+          <a:schemeClr val="accent1"/>
+        </a:lnRef>
+        <a:fillRef idx="0">
+          <a:schemeClr val="accent1"/>
+        </a:fillRef>
+        <a:effectRef idx="1">
+          <a:schemeClr val="accent1"/>
+        </a:effectRef>
+        <a:fontRef idx="minor">
+          <a:schemeClr val="tx1"/>
+        </a:fontRef>
+      </a:style>
+    </a:lnDef>
+  </a:objectDefaults>
+  <a:extraClrSchemeLst/>
+  <a:extLst>
+    <a:ext uri="{05A4C25C-085E-4340-85A3-A5531E510DB2}">
+      <thm15:themeFamily xmlns:thm15="http://schemas.microsoft.com/office/thememl/2012/main" name="Office Theme" id="{2E142A2C-CD16-42D6-873A-C26D2A0506FA}" vid="{1BDDFF52-6CD6-40A5-AB3C-68EB2F1E4D0A}"/>
+    </a:ext>
+  </a:extLst>
+</a:theme>
 </file>